--- a/reports/FSG_월간서비스보고_202607/FSG_월간서비스보고_202607.pptx
+++ b/reports/FSG_월간서비스보고_202607/FSG_월간서비스보고_202607.pptx
@@ -1661,7 +1661,7 @@
         </p:nvSpPr>
         <p:spPr>
           <a:xfrm>
-            <a:off x="978408" y="2514600"/>
+            <a:off x="978408" y="2377440"/>
             <a:ext cx="10241280" cy="1188720"/>
           </a:xfrm>
           <a:prstGeom prst="rect">
@@ -1700,8 +1700,8 @@
         </p:nvSpPr>
         <p:spPr>
           <a:xfrm>
-            <a:off x="978408" y="3611880"/>
-            <a:ext cx="10241280" cy="640080"/>
+            <a:off x="978408" y="3401568"/>
+            <a:ext cx="10241280" cy="457200"/>
           </a:xfrm>
           <a:prstGeom prst="rect">
             <a:avLst/>
@@ -1717,7 +1717,7 @@
               <a:buNone/>
             </a:pPr>
             <a:r>
-              <a:rPr lang="en-US" sz="2000" dirty="0">
+              <a:rPr lang="en-US" sz="1600" dirty="0">
                 <a:solidFill>
                   <a:srgbClr val="00B8EE"/>
                 </a:solidFill>
@@ -1725,15 +1725,54 @@
                 <a:ea typeface="Malgun Gothic" pitchFamily="34" charset="-122"/>
                 <a:cs typeface="Malgun Gothic" pitchFamily="34" charset="-120"/>
               </a:rPr>
+              <a:t>고객 중심(Customer-Centric) 서비스 운영 보고</a:t>
+            </a:r>
+            <a:endParaRPr lang="en-US" sz="1600" dirty="0"/>
+          </a:p>
+        </p:txBody>
+      </p:sp>
+      <p:sp>
+        <p:nvSpPr>
+          <p:cNvPr id="7" name="Text 4"/>
+          <p:cNvSpPr/>
+          <p:nvPr/>
+        </p:nvSpPr>
+        <p:spPr>
+          <a:xfrm>
+            <a:off x="978408" y="3886200"/>
+            <a:ext cx="10241280" cy="502920"/>
+          </a:xfrm>
+          <a:prstGeom prst="rect">
+            <a:avLst/>
+          </a:prstGeom>
+          <a:noFill/>
+          <a:ln/>
+        </p:spPr>
+        <p:txBody>
+          <a:bodyPr wrap="square" lIns="0" tIns="0" rIns="0" bIns="0" rtlCol="0" anchor="ctr"/>
+          <a:lstStyle/>
+          <a:p>
+            <a:pPr indent="0" marL="0">
+              <a:buNone/>
+            </a:pPr>
+            <a:r>
+              <a:rPr lang="en-US" sz="1800" dirty="0">
+                <a:solidFill>
+                  <a:srgbClr val="CFE0F0"/>
+                </a:solidFill>
+                <a:latin typeface="Malgun Gothic" pitchFamily="34" charset="0"/>
+                <a:ea typeface="Malgun Gothic" pitchFamily="34" charset="-122"/>
+                <a:cs typeface="Malgun Gothic" pitchFamily="34" charset="-120"/>
+              </a:rPr>
               <a:t>2026년 7월 · FS Group / FSS Team</a:t>
             </a:r>
-            <a:endParaRPr lang="en-US" sz="2000" dirty="0"/>
-          </a:p>
-        </p:txBody>
-      </p:sp>
-      <p:sp>
-        <p:nvSpPr>
-          <p:cNvPr id="7" name="Text 4"/>
+            <a:endParaRPr lang="en-US" sz="1800" dirty="0"/>
+          </a:p>
+        </p:txBody>
+      </p:sp>
+      <p:sp>
+        <p:nvSpPr>
+          <p:cNvPr id="8" name="Text 5"/>
           <p:cNvSpPr/>
           <p:nvPr/>
         </p:nvSpPr>
@@ -1772,7 +1811,7 @@
       </p:sp>
       <p:sp>
         <p:nvSpPr>
-          <p:cNvPr id="8" name="Text 5"/>
+          <p:cNvPr id="9" name="Text 6"/>
           <p:cNvSpPr/>
           <p:nvPr/>
         </p:nvSpPr>
@@ -2055,7 +2094,7 @@
                 <a:ea typeface="Malgun Gothic" pitchFamily="34" charset="-122"/>
                 <a:cs typeface="Malgun Gothic" pitchFamily="34" charset="-120"/>
               </a:rPr>
-              <a:t>고객 VOC 서베이 현황</a:t>
+              <a:t>서비스 활동 보고</a:t>
             </a:r>
             <a:endParaRPr lang="en-US" sz="1600" dirty="0"/>
           </a:p>
@@ -2094,7 +2133,7 @@
                 <a:ea typeface="Malgun Gothic" pitchFamily="34" charset="-122"/>
                 <a:cs typeface="Malgun Gothic" pitchFamily="34" charset="-120"/>
               </a:rPr>
-              <a:t>자료 미제공 – 추후 업데이트</a:t>
+              <a:t>설치·PM·A/S 실적 및 KPI 요약</a:t>
             </a:r>
             <a:endParaRPr lang="en-US" sz="1200" dirty="0"/>
           </a:p>
@@ -2192,7 +2231,7 @@
                 <a:ea typeface="Malgun Gothic" pitchFamily="34" charset="-122"/>
                 <a:cs typeface="Malgun Gothic" pitchFamily="34" charset="-120"/>
               </a:rPr>
-              <a:t>특이사항 조치/해결 현황</a:t>
+              <a:t>VOC 수집 정보 및 처리현황</a:t>
             </a:r>
             <a:endParaRPr lang="en-US" sz="1600" dirty="0"/>
           </a:p>
@@ -2231,7 +2270,7 @@
                 <a:ea typeface="Malgun Gothic" pitchFamily="34" charset="-122"/>
                 <a:cs typeface="Malgun Gothic" pitchFamily="34" charset="-120"/>
               </a:rPr>
-              <a:t>자료 미제공 – 추후 업데이트</a:t>
+              <a:t>고객 만족도 서베이 응답·유형별 처리 현황</a:t>
             </a:r>
             <a:endParaRPr lang="en-US" sz="1200" dirty="0"/>
           </a:p>
@@ -2329,7 +2368,7 @@
                 <a:ea typeface="Malgun Gothic" pitchFamily="34" charset="-122"/>
                 <a:cs typeface="Malgun Gothic" pitchFamily="34" charset="-120"/>
               </a:rPr>
-              <a:t>서비스 활동 실적</a:t>
+              <a:t>중대 이슈 처리</a:t>
             </a:r>
             <a:endParaRPr lang="en-US" sz="1600" dirty="0"/>
           </a:p>
@@ -2368,7 +2407,7 @@
                 <a:ea typeface="Malgun Gothic" pitchFamily="34" charset="-122"/>
                 <a:cs typeface="Malgun Gothic" pitchFamily="34" charset="-120"/>
               </a:rPr>
-              <a:t>자료 미제공 – 추후 업데이트</a:t>
+              <a:t>긴급/중대 VOC 접수·조치·종결 현황</a:t>
             </a:r>
             <a:endParaRPr lang="en-US" sz="1200" dirty="0"/>
           </a:p>
@@ -2466,7 +2505,7 @@
                 <a:ea typeface="Malgun Gothic" pitchFamily="34" charset="-122"/>
                 <a:cs typeface="Malgun Gothic" pitchFamily="34" charset="-120"/>
               </a:rPr>
-              <a:t>KPI 현황</a:t>
+              <a:t>대리점 교육 등 처리</a:t>
             </a:r>
             <a:endParaRPr lang="en-US" sz="1600" dirty="0"/>
           </a:p>
@@ -2505,7 +2544,7 @@
                 <a:ea typeface="Malgun Gothic" pitchFamily="34" charset="-122"/>
                 <a:cs typeface="Malgun Gothic" pitchFamily="34" charset="-120"/>
               </a:rPr>
-              <a:t>자료 미제공 – 추후 업데이트</a:t>
+              <a:t>대리점(에이전시) 대상 기술·서비스 교육 현황</a:t>
             </a:r>
             <a:endParaRPr lang="en-US" sz="1200" dirty="0"/>
           </a:p>
@@ -2603,7 +2642,7 @@
                 <a:ea typeface="Malgun Gothic" pitchFamily="34" charset="-122"/>
                 <a:cs typeface="Malgun Gothic" pitchFamily="34" charset="-120"/>
               </a:rPr>
-              <a:t>교육 및 그룹 진행사항 · Deep Care Service 진행</a:t>
+              <a:t>직원교육</a:t>
             </a:r>
             <a:endParaRPr lang="en-US" sz="1600" dirty="0"/>
           </a:p>
@@ -2642,7 +2681,7 @@
                 <a:ea typeface="Malgun Gothic" pitchFamily="34" charset="-122"/>
                 <a:cs typeface="Malgun Gothic" pitchFamily="34" charset="-120"/>
               </a:rPr>
-              <a:t>자료 미제공 – 추후 업데이트</a:t>
+              <a:t>Technical Academy 및 사내 그룹 활동</a:t>
             </a:r>
             <a:endParaRPr lang="en-US" sz="1200" dirty="0"/>
           </a:p>
@@ -2850,7 +2889,7 @@
                 <a:ea typeface="Malgun Gothic" pitchFamily="34" charset="-122"/>
                 <a:cs typeface="Malgun Gothic" pitchFamily="34" charset="-120"/>
               </a:rPr>
-              <a:t>고객 VOC 서베이 현황</a:t>
+              <a:t>서비스 활동 보고</a:t>
             </a:r>
             <a:endParaRPr lang="en-US" sz="2600" dirty="0"/>
           </a:p>
@@ -2888,8 +2927,8 @@
         </p:nvSpPr>
         <p:spPr>
           <a:xfrm>
-            <a:off x="530352" y="1188720"/>
-            <a:ext cx="5486400" cy="365760"/>
+            <a:off x="530352" y="1143000"/>
+            <a:ext cx="7315200" cy="320040"/>
           </a:xfrm>
           <a:prstGeom prst="rect">
             <a:avLst/>
@@ -2905,7 +2944,7 @@
               <a:buNone/>
             </a:pPr>
             <a:r>
-              <a:rPr lang="en-US" sz="1500" b="1" dirty="0">
+              <a:rPr lang="en-US" sz="1400" b="1" dirty="0">
                 <a:solidFill>
                   <a:srgbClr val="005BAC"/>
                 </a:solidFill>
@@ -2913,49 +2952,2329 @@
                 <a:ea typeface="Malgun Gothic" pitchFamily="34" charset="-122"/>
                 <a:cs typeface="Malgun Gothic" pitchFamily="34" charset="-120"/>
               </a:rPr>
-              <a:t>VOC 유형별 분포</a:t>
-            </a:r>
-            <a:endParaRPr lang="en-US" sz="1500" dirty="0"/>
-          </a:p>
-        </p:txBody>
-      </p:sp>
-      <p:sp>
-        <p:nvSpPr>
-          <p:cNvPr id="7" name="Shape 4"/>
-          <p:cNvSpPr/>
-          <p:nvPr/>
-        </p:nvSpPr>
-        <p:spPr>
-          <a:xfrm>
-            <a:off x="530352" y="1600200"/>
-            <a:ext cx="5486400" cy="3931920"/>
-          </a:xfrm>
-          <a:prstGeom prst="roundRect">
-            <a:avLst>
-              <a:gd name="adj" fmla="val 1860"/>
-            </a:avLst>
-          </a:prstGeom>
-          <a:solidFill>
-            <a:srgbClr val="E6EEF7"/>
-          </a:solidFill>
-          <a:ln w="9525">
-            <a:solidFill>
-              <a:srgbClr val="005BAC"/>
-            </a:solidFill>
-            <a:prstDash val="dash"/>
-          </a:ln>
-        </p:spPr>
-      </p:sp>
-      <p:sp>
-        <p:nvSpPr>
-          <p:cNvPr id="8" name="Text 5"/>
-          <p:cNvSpPr/>
-          <p:nvPr/>
-        </p:nvSpPr>
-        <p:spPr>
-          <a:xfrm>
-            <a:off x="530352" y="1600200"/>
-            <a:ext cx="5486400" cy="3931920"/>
+              <a:t>팀별 서비스 활동 실적</a:t>
+            </a:r>
+            <a:endParaRPr lang="en-US" sz="1400" dirty="0"/>
+          </a:p>
+        </p:txBody>
+      </p:sp>
+      <p:graphicFrame>
+        <p:nvGraphicFramePr>
+          <p:cNvPr id="4" name="Table 0"/>
+          <p:cNvGraphicFramePr>
+            <a:graphicFrameLocks noGrp="1"/>
+          </p:cNvGraphicFramePr>
+          <p:nvPr>
+            <p:extLst>
+              <p:ext uri="{D42A27DB-BD31-4B8C-83A1-F6EECF244321}">
+                <p14:modId xmlns:p14="http://schemas.microsoft.com/office/powerpoint/2010/main" val="1579011935"/>
+              </p:ext>
+            </p:extLst>
+          </p:nvPr>
+        </p:nvGraphicFramePr>
+        <p:xfrm>
+          <a:off x="530352" y="1508760"/>
+          <a:ext cx="10058400" cy="914400"/>
+        </p:xfrm>
+        <a:graphic>
+          <a:graphicData uri="http://schemas.openxmlformats.org/drawingml/2006/table">
+            <a:tbl>
+              <a:tblPr/>
+              <a:tblGrid>
+                <a:gridCol w="1828800"/>
+                <a:gridCol w="1463040"/>
+                <a:gridCol w="2377440"/>
+                <a:gridCol w="1463040"/>
+                <a:gridCol w="1463040"/>
+                <a:gridCol w="1463040"/>
+              </a:tblGrid>
+              <a:tr h="384048">
+                <a:tc>
+                  <a:txBody>
+                    <a:bodyPr/>
+                    <a:lstStyle/>
+                    <a:p>
+                      <a:pPr algn="l" indent="0" marL="0">
+                        <a:buNone/>
+                      </a:pPr>
+                      <a:r>
+                        <a:rPr lang="en-US" sz="1200" b="1" dirty="0">
+                          <a:solidFill>
+                            <a:srgbClr val="FFFFFF"/>
+                          </a:solidFill>
+                          <a:latin typeface="Malgun Gothic" pitchFamily="34" charset="0"/>
+                          <a:ea typeface="Malgun Gothic" pitchFamily="34" charset="-122"/>
+                          <a:cs typeface="Malgun Gothic" pitchFamily="34" charset="-120"/>
+                        </a:rPr>
+                        <a:t>팀</a:t>
+                      </a:r>
+                      <a:endParaRPr lang="en-US" sz="1200" dirty="0">
+                        <a:latin typeface="Malgun Gothic" charset="0"/>
+                        <a:ea typeface="Malgun Gothic" charset="0"/>
+                        <a:cs typeface="Malgun Gothic" charset="0"/>
+                      </a:endParaRPr>
+                    </a:p>
+                  </a:txBody>
+                  <a:tcPr marL="91440" marR="91440" marT="45720" marB="45720" anchor="ctr">
+                    <a:lnL w="9525" cap="flat" cmpd="sng" algn="ctr">
+                      <a:solidFill>
+                        <a:srgbClr val="D9D9D9"/>
+                      </a:solidFill>
+                      <a:prstDash val="solid"/>
+                      <a:round/>
+                      <a:headEnd type="none" w="med" len="med"/>
+                      <a:tailEnd type="none" w="med" len="med"/>
+                    </a:lnL>
+                    <a:lnR w="9525" cap="flat" cmpd="sng" algn="ctr">
+                      <a:solidFill>
+                        <a:srgbClr val="D9D9D9"/>
+                      </a:solidFill>
+                      <a:prstDash val="solid"/>
+                      <a:round/>
+                      <a:headEnd type="none" w="med" len="med"/>
+                      <a:tailEnd type="none" w="med" len="med"/>
+                    </a:lnR>
+                    <a:lnT w="9525" cap="flat" cmpd="sng" algn="ctr">
+                      <a:solidFill>
+                        <a:srgbClr val="D9D9D9"/>
+                      </a:solidFill>
+                      <a:prstDash val="solid"/>
+                      <a:round/>
+                      <a:headEnd type="none" w="med" len="med"/>
+                      <a:tailEnd type="none" w="med" len="med"/>
+                    </a:lnT>
+                    <a:lnB w="9525" cap="flat" cmpd="sng" algn="ctr">
+                      <a:solidFill>
+                        <a:srgbClr val="D9D9D9"/>
+                      </a:solidFill>
+                      <a:prstDash val="solid"/>
+                      <a:round/>
+                      <a:headEnd type="none" w="med" len="med"/>
+                      <a:tailEnd type="none" w="med" len="med"/>
+                    </a:lnB>
+                    <a:solidFill>
+                      <a:srgbClr val="005BAC"/>
+                    </a:solidFill>
+                  </a:tcPr>
+                </a:tc>
+                <a:tc>
+                  <a:txBody>
+                    <a:bodyPr/>
+                    <a:lstStyle/>
+                    <a:p>
+                      <a:pPr algn="ctr" indent="0" marL="0">
+                        <a:buNone/>
+                      </a:pPr>
+                      <a:r>
+                        <a:rPr lang="en-US" sz="1200" b="1" dirty="0">
+                          <a:solidFill>
+                            <a:srgbClr val="FFFFFF"/>
+                          </a:solidFill>
+                          <a:latin typeface="Malgun Gothic" pitchFamily="34" charset="0"/>
+                          <a:ea typeface="Malgun Gothic" pitchFamily="34" charset="-122"/>
+                          <a:cs typeface="Malgun Gothic" pitchFamily="34" charset="-120"/>
+                        </a:rPr>
+                        <a:t>리더</a:t>
+                      </a:r>
+                      <a:endParaRPr lang="en-US" sz="1200" dirty="0">
+                        <a:latin typeface="Malgun Gothic" charset="0"/>
+                        <a:ea typeface="Malgun Gothic" charset="0"/>
+                        <a:cs typeface="Malgun Gothic" charset="0"/>
+                      </a:endParaRPr>
+                    </a:p>
+                  </a:txBody>
+                  <a:tcPr marL="91440" marR="91440" marT="45720" marB="45720" anchor="ctr">
+                    <a:lnL w="9525" cap="flat" cmpd="sng" algn="ctr">
+                      <a:solidFill>
+                        <a:srgbClr val="D9D9D9"/>
+                      </a:solidFill>
+                      <a:prstDash val="solid"/>
+                      <a:round/>
+                      <a:headEnd type="none" w="med" len="med"/>
+                      <a:tailEnd type="none" w="med" len="med"/>
+                    </a:lnL>
+                    <a:lnR w="9525" cap="flat" cmpd="sng" algn="ctr">
+                      <a:solidFill>
+                        <a:srgbClr val="D9D9D9"/>
+                      </a:solidFill>
+                      <a:prstDash val="solid"/>
+                      <a:round/>
+                      <a:headEnd type="none" w="med" len="med"/>
+                      <a:tailEnd type="none" w="med" len="med"/>
+                    </a:lnR>
+                    <a:lnT w="9525" cap="flat" cmpd="sng" algn="ctr">
+                      <a:solidFill>
+                        <a:srgbClr val="D9D9D9"/>
+                      </a:solidFill>
+                      <a:prstDash val="solid"/>
+                      <a:round/>
+                      <a:headEnd type="none" w="med" len="med"/>
+                      <a:tailEnd type="none" w="med" len="med"/>
+                    </a:lnT>
+                    <a:lnB w="9525" cap="flat" cmpd="sng" algn="ctr">
+                      <a:solidFill>
+                        <a:srgbClr val="D9D9D9"/>
+                      </a:solidFill>
+                      <a:prstDash val="solid"/>
+                      <a:round/>
+                      <a:headEnd type="none" w="med" len="med"/>
+                      <a:tailEnd type="none" w="med" len="med"/>
+                    </a:lnB>
+                    <a:solidFill>
+                      <a:srgbClr val="005BAC"/>
+                    </a:solidFill>
+                  </a:tcPr>
+                </a:tc>
+                <a:tc>
+                  <a:txBody>
+                    <a:bodyPr/>
+                    <a:lstStyle/>
+                    <a:p>
+                      <a:pPr algn="ctr" indent="0" marL="0">
+                        <a:buNone/>
+                      </a:pPr>
+                      <a:r>
+                        <a:rPr lang="en-US" sz="1200" b="1" dirty="0">
+                          <a:solidFill>
+                            <a:srgbClr val="FFFFFF"/>
+                          </a:solidFill>
+                          <a:latin typeface="Malgun Gothic" pitchFamily="34" charset="0"/>
+                          <a:ea typeface="Malgun Gothic" pitchFamily="34" charset="-122"/>
+                          <a:cs typeface="Malgun Gothic" pitchFamily="34" charset="-120"/>
+                        </a:rPr>
+                        <a:t>설치</a:t>
+                      </a:r>
+                      <a:endParaRPr lang="en-US" sz="1200" dirty="0">
+                        <a:latin typeface="Malgun Gothic" charset="0"/>
+                        <a:ea typeface="Malgun Gothic" charset="0"/>
+                        <a:cs typeface="Malgun Gothic" charset="0"/>
+                      </a:endParaRPr>
+                    </a:p>
+                  </a:txBody>
+                  <a:tcPr marL="91440" marR="91440" marT="45720" marB="45720" anchor="ctr">
+                    <a:lnL w="9525" cap="flat" cmpd="sng" algn="ctr">
+                      <a:solidFill>
+                        <a:srgbClr val="D9D9D9"/>
+                      </a:solidFill>
+                      <a:prstDash val="solid"/>
+                      <a:round/>
+                      <a:headEnd type="none" w="med" len="med"/>
+                      <a:tailEnd type="none" w="med" len="med"/>
+                    </a:lnL>
+                    <a:lnR w="9525" cap="flat" cmpd="sng" algn="ctr">
+                      <a:solidFill>
+                        <a:srgbClr val="D9D9D9"/>
+                      </a:solidFill>
+                      <a:prstDash val="solid"/>
+                      <a:round/>
+                      <a:headEnd type="none" w="med" len="med"/>
+                      <a:tailEnd type="none" w="med" len="med"/>
+                    </a:lnR>
+                    <a:lnT w="9525" cap="flat" cmpd="sng" algn="ctr">
+                      <a:solidFill>
+                        <a:srgbClr val="D9D9D9"/>
+                      </a:solidFill>
+                      <a:prstDash val="solid"/>
+                      <a:round/>
+                      <a:headEnd type="none" w="med" len="med"/>
+                      <a:tailEnd type="none" w="med" len="med"/>
+                    </a:lnT>
+                    <a:lnB w="9525" cap="flat" cmpd="sng" algn="ctr">
+                      <a:solidFill>
+                        <a:srgbClr val="D9D9D9"/>
+                      </a:solidFill>
+                      <a:prstDash val="solid"/>
+                      <a:round/>
+                      <a:headEnd type="none" w="med" len="med"/>
+                      <a:tailEnd type="none" w="med" len="med"/>
+                    </a:lnB>
+                    <a:solidFill>
+                      <a:srgbClr val="005BAC"/>
+                    </a:solidFill>
+                  </a:tcPr>
+                </a:tc>
+                <a:tc>
+                  <a:txBody>
+                    <a:bodyPr/>
+                    <a:lstStyle/>
+                    <a:p>
+                      <a:pPr algn="ctr" indent="0" marL="0">
+                        <a:buNone/>
+                      </a:pPr>
+                      <a:r>
+                        <a:rPr lang="en-US" sz="1200" b="1" dirty="0">
+                          <a:solidFill>
+                            <a:srgbClr val="FFFFFF"/>
+                          </a:solidFill>
+                          <a:latin typeface="Malgun Gothic" pitchFamily="34" charset="0"/>
+                          <a:ea typeface="Malgun Gothic" pitchFamily="34" charset="-122"/>
+                          <a:cs typeface="Malgun Gothic" pitchFamily="34" charset="-120"/>
+                        </a:rPr>
+                        <a:t>PM</a:t>
+                      </a:r>
+                      <a:endParaRPr lang="en-US" sz="1200" dirty="0">
+                        <a:latin typeface="Malgun Gothic" charset="0"/>
+                        <a:ea typeface="Malgun Gothic" charset="0"/>
+                        <a:cs typeface="Malgun Gothic" charset="0"/>
+                      </a:endParaRPr>
+                    </a:p>
+                  </a:txBody>
+                  <a:tcPr marL="91440" marR="91440" marT="45720" marB="45720" anchor="ctr">
+                    <a:lnL w="9525" cap="flat" cmpd="sng" algn="ctr">
+                      <a:solidFill>
+                        <a:srgbClr val="D9D9D9"/>
+                      </a:solidFill>
+                      <a:prstDash val="solid"/>
+                      <a:round/>
+                      <a:headEnd type="none" w="med" len="med"/>
+                      <a:tailEnd type="none" w="med" len="med"/>
+                    </a:lnL>
+                    <a:lnR w="9525" cap="flat" cmpd="sng" algn="ctr">
+                      <a:solidFill>
+                        <a:srgbClr val="D9D9D9"/>
+                      </a:solidFill>
+                      <a:prstDash val="solid"/>
+                      <a:round/>
+                      <a:headEnd type="none" w="med" len="med"/>
+                      <a:tailEnd type="none" w="med" len="med"/>
+                    </a:lnR>
+                    <a:lnT w="9525" cap="flat" cmpd="sng" algn="ctr">
+                      <a:solidFill>
+                        <a:srgbClr val="D9D9D9"/>
+                      </a:solidFill>
+                      <a:prstDash val="solid"/>
+                      <a:round/>
+                      <a:headEnd type="none" w="med" len="med"/>
+                      <a:tailEnd type="none" w="med" len="med"/>
+                    </a:lnT>
+                    <a:lnB w="9525" cap="flat" cmpd="sng" algn="ctr">
+                      <a:solidFill>
+                        <a:srgbClr val="D9D9D9"/>
+                      </a:solidFill>
+                      <a:prstDash val="solid"/>
+                      <a:round/>
+                      <a:headEnd type="none" w="med" len="med"/>
+                      <a:tailEnd type="none" w="med" len="med"/>
+                    </a:lnB>
+                    <a:solidFill>
+                      <a:srgbClr val="005BAC"/>
+                    </a:solidFill>
+                  </a:tcPr>
+                </a:tc>
+                <a:tc>
+                  <a:txBody>
+                    <a:bodyPr/>
+                    <a:lstStyle/>
+                    <a:p>
+                      <a:pPr algn="ctr" indent="0" marL="0">
+                        <a:buNone/>
+                      </a:pPr>
+                      <a:r>
+                        <a:rPr lang="en-US" sz="1200" b="1" dirty="0">
+                          <a:solidFill>
+                            <a:srgbClr val="FFFFFF"/>
+                          </a:solidFill>
+                          <a:latin typeface="Malgun Gothic" pitchFamily="34" charset="0"/>
+                          <a:ea typeface="Malgun Gothic" pitchFamily="34" charset="-122"/>
+                          <a:cs typeface="Malgun Gothic" pitchFamily="34" charset="-120"/>
+                        </a:rPr>
+                        <a:t>A/S</a:t>
+                      </a:r>
+                      <a:endParaRPr lang="en-US" sz="1200" dirty="0">
+                        <a:latin typeface="Malgun Gothic" charset="0"/>
+                        <a:ea typeface="Malgun Gothic" charset="0"/>
+                        <a:cs typeface="Malgun Gothic" charset="0"/>
+                      </a:endParaRPr>
+                    </a:p>
+                  </a:txBody>
+                  <a:tcPr marL="91440" marR="91440" marT="45720" marB="45720" anchor="ctr">
+                    <a:lnL w="9525" cap="flat" cmpd="sng" algn="ctr">
+                      <a:solidFill>
+                        <a:srgbClr val="D9D9D9"/>
+                      </a:solidFill>
+                      <a:prstDash val="solid"/>
+                      <a:round/>
+                      <a:headEnd type="none" w="med" len="med"/>
+                      <a:tailEnd type="none" w="med" len="med"/>
+                    </a:lnL>
+                    <a:lnR w="9525" cap="flat" cmpd="sng" algn="ctr">
+                      <a:solidFill>
+                        <a:srgbClr val="D9D9D9"/>
+                      </a:solidFill>
+                      <a:prstDash val="solid"/>
+                      <a:round/>
+                      <a:headEnd type="none" w="med" len="med"/>
+                      <a:tailEnd type="none" w="med" len="med"/>
+                    </a:lnR>
+                    <a:lnT w="9525" cap="flat" cmpd="sng" algn="ctr">
+                      <a:solidFill>
+                        <a:srgbClr val="D9D9D9"/>
+                      </a:solidFill>
+                      <a:prstDash val="solid"/>
+                      <a:round/>
+                      <a:headEnd type="none" w="med" len="med"/>
+                      <a:tailEnd type="none" w="med" len="med"/>
+                    </a:lnT>
+                    <a:lnB w="9525" cap="flat" cmpd="sng" algn="ctr">
+                      <a:solidFill>
+                        <a:srgbClr val="D9D9D9"/>
+                      </a:solidFill>
+                      <a:prstDash val="solid"/>
+                      <a:round/>
+                      <a:headEnd type="none" w="med" len="med"/>
+                      <a:tailEnd type="none" w="med" len="med"/>
+                    </a:lnB>
+                    <a:solidFill>
+                      <a:srgbClr val="005BAC"/>
+                    </a:solidFill>
+                  </a:tcPr>
+                </a:tc>
+                <a:tc>
+                  <a:txBody>
+                    <a:bodyPr/>
+                    <a:lstStyle/>
+                    <a:p>
+                      <a:pPr algn="ctr" indent="0" marL="0">
+                        <a:buNone/>
+                      </a:pPr>
+                      <a:r>
+                        <a:rPr lang="en-US" sz="1200" b="1" dirty="0">
+                          <a:solidFill>
+                            <a:srgbClr val="FFFFFF"/>
+                          </a:solidFill>
+                          <a:latin typeface="Malgun Gothic" pitchFamily="34" charset="0"/>
+                          <a:ea typeface="Malgun Gothic" pitchFamily="34" charset="-122"/>
+                          <a:cs typeface="Malgun Gothic" pitchFamily="34" charset="-120"/>
+                        </a:rPr>
+                        <a:t>합계</a:t>
+                      </a:r>
+                      <a:endParaRPr lang="en-US" sz="1200" dirty="0">
+                        <a:latin typeface="Malgun Gothic" charset="0"/>
+                        <a:ea typeface="Malgun Gothic" charset="0"/>
+                        <a:cs typeface="Malgun Gothic" charset="0"/>
+                      </a:endParaRPr>
+                    </a:p>
+                  </a:txBody>
+                  <a:tcPr marL="91440" marR="91440" marT="45720" marB="45720" anchor="ctr">
+                    <a:lnL w="9525" cap="flat" cmpd="sng" algn="ctr">
+                      <a:solidFill>
+                        <a:srgbClr val="D9D9D9"/>
+                      </a:solidFill>
+                      <a:prstDash val="solid"/>
+                      <a:round/>
+                      <a:headEnd type="none" w="med" len="med"/>
+                      <a:tailEnd type="none" w="med" len="med"/>
+                    </a:lnL>
+                    <a:lnR w="9525" cap="flat" cmpd="sng" algn="ctr">
+                      <a:solidFill>
+                        <a:srgbClr val="D9D9D9"/>
+                      </a:solidFill>
+                      <a:prstDash val="solid"/>
+                      <a:round/>
+                      <a:headEnd type="none" w="med" len="med"/>
+                      <a:tailEnd type="none" w="med" len="med"/>
+                    </a:lnR>
+                    <a:lnT w="9525" cap="flat" cmpd="sng" algn="ctr">
+                      <a:solidFill>
+                        <a:srgbClr val="D9D9D9"/>
+                      </a:solidFill>
+                      <a:prstDash val="solid"/>
+                      <a:round/>
+                      <a:headEnd type="none" w="med" len="med"/>
+                      <a:tailEnd type="none" w="med" len="med"/>
+                    </a:lnT>
+                    <a:lnB w="9525" cap="flat" cmpd="sng" algn="ctr">
+                      <a:solidFill>
+                        <a:srgbClr val="D9D9D9"/>
+                      </a:solidFill>
+                      <a:prstDash val="solid"/>
+                      <a:round/>
+                      <a:headEnd type="none" w="med" len="med"/>
+                      <a:tailEnd type="none" w="med" len="med"/>
+                    </a:lnB>
+                    <a:solidFill>
+                      <a:srgbClr val="005BAC"/>
+                    </a:solidFill>
+                  </a:tcPr>
+                </a:tc>
+              </a:tr>
+              <a:tr h="384048">
+                <a:tc>
+                  <a:txBody>
+                    <a:bodyPr/>
+                    <a:lstStyle/>
+                    <a:p>
+                      <a:pPr algn="l" indent="0" marL="0">
+                        <a:buNone/>
+                      </a:pPr>
+                      <a:r>
+                        <a:rPr lang="en-US" sz="1200" dirty="0">
+                          <a:solidFill>
+                            <a:srgbClr val="3F3F3F"/>
+                          </a:solidFill>
+                          <a:latin typeface="Malgun Gothic" pitchFamily="34" charset="0"/>
+                          <a:ea typeface="Malgun Gothic" pitchFamily="34" charset="-122"/>
+                          <a:cs typeface="Malgun Gothic" pitchFamily="34" charset="-120"/>
+                        </a:rPr>
+                        <a:t>FS East</a:t>
+                      </a:r>
+                      <a:endParaRPr lang="en-US" sz="1200" dirty="0">
+                        <a:latin typeface="Malgun Gothic" charset="0"/>
+                        <a:ea typeface="Malgun Gothic" charset="0"/>
+                        <a:cs typeface="Malgun Gothic" charset="0"/>
+                      </a:endParaRPr>
+                    </a:p>
+                  </a:txBody>
+                  <a:tcPr marL="91440" marR="91440" marT="45720" marB="45720" anchor="ctr">
+                    <a:lnL w="9525" cap="flat" cmpd="sng" algn="ctr">
+                      <a:solidFill>
+                        <a:srgbClr val="D9D9D9"/>
+                      </a:solidFill>
+                      <a:prstDash val="solid"/>
+                      <a:round/>
+                      <a:headEnd type="none" w="med" len="med"/>
+                      <a:tailEnd type="none" w="med" len="med"/>
+                    </a:lnL>
+                    <a:lnR w="9525" cap="flat" cmpd="sng" algn="ctr">
+                      <a:solidFill>
+                        <a:srgbClr val="D9D9D9"/>
+                      </a:solidFill>
+                      <a:prstDash val="solid"/>
+                      <a:round/>
+                      <a:headEnd type="none" w="med" len="med"/>
+                      <a:tailEnd type="none" w="med" len="med"/>
+                    </a:lnR>
+                    <a:lnT w="9525" cap="flat" cmpd="sng" algn="ctr">
+                      <a:solidFill>
+                        <a:srgbClr val="D9D9D9"/>
+                      </a:solidFill>
+                      <a:prstDash val="solid"/>
+                      <a:round/>
+                      <a:headEnd type="none" w="med" len="med"/>
+                      <a:tailEnd type="none" w="med" len="med"/>
+                    </a:lnT>
+                    <a:lnB w="9525" cap="flat" cmpd="sng" algn="ctr">
+                      <a:solidFill>
+                        <a:srgbClr val="D9D9D9"/>
+                      </a:solidFill>
+                      <a:prstDash val="solid"/>
+                      <a:round/>
+                      <a:headEnd type="none" w="med" len="med"/>
+                      <a:tailEnd type="none" w="med" len="med"/>
+                    </a:lnB>
+                    <a:solidFill>
+                      <a:srgbClr val="FFFFFF"/>
+                    </a:solidFill>
+                  </a:tcPr>
+                </a:tc>
+                <a:tc>
+                  <a:txBody>
+                    <a:bodyPr/>
+                    <a:lstStyle/>
+                    <a:p>
+                      <a:pPr algn="ctr" indent="0" marL="0">
+                        <a:buNone/>
+                      </a:pPr>
+                      <a:r>
+                        <a:rPr lang="en-US" sz="1200" dirty="0">
+                          <a:solidFill>
+                            <a:srgbClr val="3F3F3F"/>
+                          </a:solidFill>
+                          <a:latin typeface="Malgun Gothic" pitchFamily="34" charset="0"/>
+                          <a:ea typeface="Malgun Gothic" pitchFamily="34" charset="-122"/>
+                          <a:cs typeface="Malgun Gothic" pitchFamily="34" charset="-120"/>
+                        </a:rPr>
+                        <a:t>Gray</a:t>
+                      </a:r>
+                      <a:endParaRPr lang="en-US" sz="1200" dirty="0">
+                        <a:latin typeface="Malgun Gothic" charset="0"/>
+                        <a:ea typeface="Malgun Gothic" charset="0"/>
+                        <a:cs typeface="Malgun Gothic" charset="0"/>
+                      </a:endParaRPr>
+                    </a:p>
+                  </a:txBody>
+                  <a:tcPr marL="91440" marR="91440" marT="45720" marB="45720" anchor="ctr">
+                    <a:lnL w="9525" cap="flat" cmpd="sng" algn="ctr">
+                      <a:solidFill>
+                        <a:srgbClr val="D9D9D9"/>
+                      </a:solidFill>
+                      <a:prstDash val="solid"/>
+                      <a:round/>
+                      <a:headEnd type="none" w="med" len="med"/>
+                      <a:tailEnd type="none" w="med" len="med"/>
+                    </a:lnL>
+                    <a:lnR w="9525" cap="flat" cmpd="sng" algn="ctr">
+                      <a:solidFill>
+                        <a:srgbClr val="D9D9D9"/>
+                      </a:solidFill>
+                      <a:prstDash val="solid"/>
+                      <a:round/>
+                      <a:headEnd type="none" w="med" len="med"/>
+                      <a:tailEnd type="none" w="med" len="med"/>
+                    </a:lnR>
+                    <a:lnT w="9525" cap="flat" cmpd="sng" algn="ctr">
+                      <a:solidFill>
+                        <a:srgbClr val="D9D9D9"/>
+                      </a:solidFill>
+                      <a:prstDash val="solid"/>
+                      <a:round/>
+                      <a:headEnd type="none" w="med" len="med"/>
+                      <a:tailEnd type="none" w="med" len="med"/>
+                    </a:lnT>
+                    <a:lnB w="9525" cap="flat" cmpd="sng" algn="ctr">
+                      <a:solidFill>
+                        <a:srgbClr val="D9D9D9"/>
+                      </a:solidFill>
+                      <a:prstDash val="solid"/>
+                      <a:round/>
+                      <a:headEnd type="none" w="med" len="med"/>
+                      <a:tailEnd type="none" w="med" len="med"/>
+                    </a:lnB>
+                    <a:solidFill>
+                      <a:srgbClr val="FFFFFF"/>
+                    </a:solidFill>
+                  </a:tcPr>
+                </a:tc>
+                <a:tc>
+                  <a:txBody>
+                    <a:bodyPr/>
+                    <a:lstStyle/>
+                    <a:p>
+                      <a:pPr algn="ctr" indent="0" marL="0">
+                        <a:buNone/>
+                      </a:pPr>
+                      <a:r>
+                        <a:rPr lang="en-US" sz="1200" dirty="0">
+                          <a:solidFill>
+                            <a:srgbClr val="3F3F3F"/>
+                          </a:solidFill>
+                          <a:latin typeface="Malgun Gothic" pitchFamily="34" charset="0"/>
+                          <a:ea typeface="Malgun Gothic" pitchFamily="34" charset="-122"/>
+                          <a:cs typeface="Malgun Gothic" pitchFamily="34" charset="-120"/>
+                        </a:rPr>
+                        <a:t>자료 미제공 – 추후 업데이트</a:t>
+                      </a:r>
+                      <a:endParaRPr lang="en-US" sz="1200" dirty="0">
+                        <a:latin typeface="Malgun Gothic" charset="0"/>
+                        <a:ea typeface="Malgun Gothic" charset="0"/>
+                        <a:cs typeface="Malgun Gothic" charset="0"/>
+                      </a:endParaRPr>
+                    </a:p>
+                  </a:txBody>
+                  <a:tcPr marL="91440" marR="91440" marT="45720" marB="45720" anchor="ctr">
+                    <a:lnL w="9525" cap="flat" cmpd="sng" algn="ctr">
+                      <a:solidFill>
+                        <a:srgbClr val="D9D9D9"/>
+                      </a:solidFill>
+                      <a:prstDash val="solid"/>
+                      <a:round/>
+                      <a:headEnd type="none" w="med" len="med"/>
+                      <a:tailEnd type="none" w="med" len="med"/>
+                    </a:lnL>
+                    <a:lnR w="9525" cap="flat" cmpd="sng" algn="ctr">
+                      <a:solidFill>
+                        <a:srgbClr val="D9D9D9"/>
+                      </a:solidFill>
+                      <a:prstDash val="solid"/>
+                      <a:round/>
+                      <a:headEnd type="none" w="med" len="med"/>
+                      <a:tailEnd type="none" w="med" len="med"/>
+                    </a:lnR>
+                    <a:lnT w="9525" cap="flat" cmpd="sng" algn="ctr">
+                      <a:solidFill>
+                        <a:srgbClr val="D9D9D9"/>
+                      </a:solidFill>
+                      <a:prstDash val="solid"/>
+                      <a:round/>
+                      <a:headEnd type="none" w="med" len="med"/>
+                      <a:tailEnd type="none" w="med" len="med"/>
+                    </a:lnT>
+                    <a:lnB w="9525" cap="flat" cmpd="sng" algn="ctr">
+                      <a:solidFill>
+                        <a:srgbClr val="D9D9D9"/>
+                      </a:solidFill>
+                      <a:prstDash val="solid"/>
+                      <a:round/>
+                      <a:headEnd type="none" w="med" len="med"/>
+                      <a:tailEnd type="none" w="med" len="med"/>
+                    </a:lnB>
+                    <a:solidFill>
+                      <a:srgbClr val="FFFFFF"/>
+                    </a:solidFill>
+                  </a:tcPr>
+                </a:tc>
+                <a:tc>
+                  <a:txBody>
+                    <a:bodyPr/>
+                    <a:lstStyle/>
+                    <a:p>
+                      <a:pPr algn="ctr" indent="0" marL="0">
+                        <a:buNone/>
+                      </a:pPr>
+                      <a:endParaRPr lang="en-US" sz="1200" dirty="0">
+                        <a:latin typeface="Malgun Gothic" charset="0"/>
+                        <a:ea typeface="Malgun Gothic" charset="0"/>
+                        <a:cs typeface="Malgun Gothic" charset="0"/>
+                      </a:endParaRPr>
+                    </a:p>
+                  </a:txBody>
+                  <a:tcPr marL="91440" marR="91440" marT="45720" marB="45720" anchor="ctr">
+                    <a:lnL w="9525" cap="flat" cmpd="sng" algn="ctr">
+                      <a:solidFill>
+                        <a:srgbClr val="D9D9D9"/>
+                      </a:solidFill>
+                      <a:prstDash val="solid"/>
+                      <a:round/>
+                      <a:headEnd type="none" w="med" len="med"/>
+                      <a:tailEnd type="none" w="med" len="med"/>
+                    </a:lnL>
+                    <a:lnR w="9525" cap="flat" cmpd="sng" algn="ctr">
+                      <a:solidFill>
+                        <a:srgbClr val="D9D9D9"/>
+                      </a:solidFill>
+                      <a:prstDash val="solid"/>
+                      <a:round/>
+                      <a:headEnd type="none" w="med" len="med"/>
+                      <a:tailEnd type="none" w="med" len="med"/>
+                    </a:lnR>
+                    <a:lnT w="9525" cap="flat" cmpd="sng" algn="ctr">
+                      <a:solidFill>
+                        <a:srgbClr val="D9D9D9"/>
+                      </a:solidFill>
+                      <a:prstDash val="solid"/>
+                      <a:round/>
+                      <a:headEnd type="none" w="med" len="med"/>
+                      <a:tailEnd type="none" w="med" len="med"/>
+                    </a:lnT>
+                    <a:lnB w="9525" cap="flat" cmpd="sng" algn="ctr">
+                      <a:solidFill>
+                        <a:srgbClr val="D9D9D9"/>
+                      </a:solidFill>
+                      <a:prstDash val="solid"/>
+                      <a:round/>
+                      <a:headEnd type="none" w="med" len="med"/>
+                      <a:tailEnd type="none" w="med" len="med"/>
+                    </a:lnB>
+                    <a:solidFill>
+                      <a:srgbClr val="FFFFFF"/>
+                    </a:solidFill>
+                  </a:tcPr>
+                </a:tc>
+                <a:tc>
+                  <a:txBody>
+                    <a:bodyPr/>
+                    <a:lstStyle/>
+                    <a:p>
+                      <a:pPr algn="ctr" indent="0" marL="0">
+                        <a:buNone/>
+                      </a:pPr>
+                      <a:endParaRPr lang="en-US" sz="1200" dirty="0">
+                        <a:latin typeface="Malgun Gothic" charset="0"/>
+                        <a:ea typeface="Malgun Gothic" charset="0"/>
+                        <a:cs typeface="Malgun Gothic" charset="0"/>
+                      </a:endParaRPr>
+                    </a:p>
+                  </a:txBody>
+                  <a:tcPr marL="91440" marR="91440" marT="45720" marB="45720" anchor="ctr">
+                    <a:lnL w="9525" cap="flat" cmpd="sng" algn="ctr">
+                      <a:solidFill>
+                        <a:srgbClr val="D9D9D9"/>
+                      </a:solidFill>
+                      <a:prstDash val="solid"/>
+                      <a:round/>
+                      <a:headEnd type="none" w="med" len="med"/>
+                      <a:tailEnd type="none" w="med" len="med"/>
+                    </a:lnL>
+                    <a:lnR w="9525" cap="flat" cmpd="sng" algn="ctr">
+                      <a:solidFill>
+                        <a:srgbClr val="D9D9D9"/>
+                      </a:solidFill>
+                      <a:prstDash val="solid"/>
+                      <a:round/>
+                      <a:headEnd type="none" w="med" len="med"/>
+                      <a:tailEnd type="none" w="med" len="med"/>
+                    </a:lnR>
+                    <a:lnT w="9525" cap="flat" cmpd="sng" algn="ctr">
+                      <a:solidFill>
+                        <a:srgbClr val="D9D9D9"/>
+                      </a:solidFill>
+                      <a:prstDash val="solid"/>
+                      <a:round/>
+                      <a:headEnd type="none" w="med" len="med"/>
+                      <a:tailEnd type="none" w="med" len="med"/>
+                    </a:lnT>
+                    <a:lnB w="9525" cap="flat" cmpd="sng" algn="ctr">
+                      <a:solidFill>
+                        <a:srgbClr val="D9D9D9"/>
+                      </a:solidFill>
+                      <a:prstDash val="solid"/>
+                      <a:round/>
+                      <a:headEnd type="none" w="med" len="med"/>
+                      <a:tailEnd type="none" w="med" len="med"/>
+                    </a:lnB>
+                    <a:solidFill>
+                      <a:srgbClr val="FFFFFF"/>
+                    </a:solidFill>
+                  </a:tcPr>
+                </a:tc>
+                <a:tc>
+                  <a:txBody>
+                    <a:bodyPr/>
+                    <a:lstStyle/>
+                    <a:p>
+                      <a:pPr algn="ctr" indent="0" marL="0">
+                        <a:buNone/>
+                      </a:pPr>
+                      <a:endParaRPr lang="en-US" sz="1200" dirty="0">
+                        <a:latin typeface="Malgun Gothic" charset="0"/>
+                        <a:ea typeface="Malgun Gothic" charset="0"/>
+                        <a:cs typeface="Malgun Gothic" charset="0"/>
+                      </a:endParaRPr>
+                    </a:p>
+                  </a:txBody>
+                  <a:tcPr marL="91440" marR="91440" marT="45720" marB="45720" anchor="ctr">
+                    <a:lnL w="9525" cap="flat" cmpd="sng" algn="ctr">
+                      <a:solidFill>
+                        <a:srgbClr val="D9D9D9"/>
+                      </a:solidFill>
+                      <a:prstDash val="solid"/>
+                      <a:round/>
+                      <a:headEnd type="none" w="med" len="med"/>
+                      <a:tailEnd type="none" w="med" len="med"/>
+                    </a:lnL>
+                    <a:lnR w="9525" cap="flat" cmpd="sng" algn="ctr">
+                      <a:solidFill>
+                        <a:srgbClr val="D9D9D9"/>
+                      </a:solidFill>
+                      <a:prstDash val="solid"/>
+                      <a:round/>
+                      <a:headEnd type="none" w="med" len="med"/>
+                      <a:tailEnd type="none" w="med" len="med"/>
+                    </a:lnR>
+                    <a:lnT w="9525" cap="flat" cmpd="sng" algn="ctr">
+                      <a:solidFill>
+                        <a:srgbClr val="D9D9D9"/>
+                      </a:solidFill>
+                      <a:prstDash val="solid"/>
+                      <a:round/>
+                      <a:headEnd type="none" w="med" len="med"/>
+                      <a:tailEnd type="none" w="med" len="med"/>
+                    </a:lnT>
+                    <a:lnB w="9525" cap="flat" cmpd="sng" algn="ctr">
+                      <a:solidFill>
+                        <a:srgbClr val="D9D9D9"/>
+                      </a:solidFill>
+                      <a:prstDash val="solid"/>
+                      <a:round/>
+                      <a:headEnd type="none" w="med" len="med"/>
+                      <a:tailEnd type="none" w="med" len="med"/>
+                    </a:lnB>
+                    <a:solidFill>
+                      <a:srgbClr val="FFFFFF"/>
+                    </a:solidFill>
+                  </a:tcPr>
+                </a:tc>
+              </a:tr>
+              <a:tr h="384048">
+                <a:tc>
+                  <a:txBody>
+                    <a:bodyPr/>
+                    <a:lstStyle/>
+                    <a:p>
+                      <a:pPr algn="l" indent="0" marL="0">
+                        <a:buNone/>
+                      </a:pPr>
+                      <a:r>
+                        <a:rPr lang="en-US" sz="1200" dirty="0">
+                          <a:solidFill>
+                            <a:srgbClr val="3F3F3F"/>
+                          </a:solidFill>
+                          <a:latin typeface="Malgun Gothic" pitchFamily="34" charset="0"/>
+                          <a:ea typeface="Malgun Gothic" pitchFamily="34" charset="-122"/>
+                          <a:cs typeface="Malgun Gothic" pitchFamily="34" charset="-120"/>
+                        </a:rPr>
+                        <a:t>FS West</a:t>
+                      </a:r>
+                      <a:endParaRPr lang="en-US" sz="1200" dirty="0">
+                        <a:latin typeface="Malgun Gothic" charset="0"/>
+                        <a:ea typeface="Malgun Gothic" charset="0"/>
+                        <a:cs typeface="Malgun Gothic" charset="0"/>
+                      </a:endParaRPr>
+                    </a:p>
+                  </a:txBody>
+                  <a:tcPr marL="91440" marR="91440" marT="45720" marB="45720" anchor="ctr">
+                    <a:lnL w="9525" cap="flat" cmpd="sng" algn="ctr">
+                      <a:solidFill>
+                        <a:srgbClr val="D9D9D9"/>
+                      </a:solidFill>
+                      <a:prstDash val="solid"/>
+                      <a:round/>
+                      <a:headEnd type="none" w="med" len="med"/>
+                      <a:tailEnd type="none" w="med" len="med"/>
+                    </a:lnL>
+                    <a:lnR w="9525" cap="flat" cmpd="sng" algn="ctr">
+                      <a:solidFill>
+                        <a:srgbClr val="D9D9D9"/>
+                      </a:solidFill>
+                      <a:prstDash val="solid"/>
+                      <a:round/>
+                      <a:headEnd type="none" w="med" len="med"/>
+                      <a:tailEnd type="none" w="med" len="med"/>
+                    </a:lnR>
+                    <a:lnT w="9525" cap="flat" cmpd="sng" algn="ctr">
+                      <a:solidFill>
+                        <a:srgbClr val="D9D9D9"/>
+                      </a:solidFill>
+                      <a:prstDash val="solid"/>
+                      <a:round/>
+                      <a:headEnd type="none" w="med" len="med"/>
+                      <a:tailEnd type="none" w="med" len="med"/>
+                    </a:lnT>
+                    <a:lnB w="9525" cap="flat" cmpd="sng" algn="ctr">
+                      <a:solidFill>
+                        <a:srgbClr val="D9D9D9"/>
+                      </a:solidFill>
+                      <a:prstDash val="solid"/>
+                      <a:round/>
+                      <a:headEnd type="none" w="med" len="med"/>
+                      <a:tailEnd type="none" w="med" len="med"/>
+                    </a:lnB>
+                    <a:solidFill>
+                      <a:srgbClr val="FFFFFF"/>
+                    </a:solidFill>
+                  </a:tcPr>
+                </a:tc>
+                <a:tc>
+                  <a:txBody>
+                    <a:bodyPr/>
+                    <a:lstStyle/>
+                    <a:p>
+                      <a:pPr algn="ctr" indent="0" marL="0">
+                        <a:buNone/>
+                      </a:pPr>
+                      <a:r>
+                        <a:rPr lang="en-US" sz="1200" dirty="0">
+                          <a:solidFill>
+                            <a:srgbClr val="3F3F3F"/>
+                          </a:solidFill>
+                          <a:latin typeface="Malgun Gothic" pitchFamily="34" charset="0"/>
+                          <a:ea typeface="Malgun Gothic" pitchFamily="34" charset="-122"/>
+                          <a:cs typeface="Malgun Gothic" pitchFamily="34" charset="-120"/>
+                        </a:rPr>
+                        <a:t>Huymori</a:t>
+                      </a:r>
+                      <a:endParaRPr lang="en-US" sz="1200" dirty="0">
+                        <a:latin typeface="Malgun Gothic" charset="0"/>
+                        <a:ea typeface="Malgun Gothic" charset="0"/>
+                        <a:cs typeface="Malgun Gothic" charset="0"/>
+                      </a:endParaRPr>
+                    </a:p>
+                  </a:txBody>
+                  <a:tcPr marL="91440" marR="91440" marT="45720" marB="45720" anchor="ctr">
+                    <a:lnL w="9525" cap="flat" cmpd="sng" algn="ctr">
+                      <a:solidFill>
+                        <a:srgbClr val="D9D9D9"/>
+                      </a:solidFill>
+                      <a:prstDash val="solid"/>
+                      <a:round/>
+                      <a:headEnd type="none" w="med" len="med"/>
+                      <a:tailEnd type="none" w="med" len="med"/>
+                    </a:lnL>
+                    <a:lnR w="9525" cap="flat" cmpd="sng" algn="ctr">
+                      <a:solidFill>
+                        <a:srgbClr val="D9D9D9"/>
+                      </a:solidFill>
+                      <a:prstDash val="solid"/>
+                      <a:round/>
+                      <a:headEnd type="none" w="med" len="med"/>
+                      <a:tailEnd type="none" w="med" len="med"/>
+                    </a:lnR>
+                    <a:lnT w="9525" cap="flat" cmpd="sng" algn="ctr">
+                      <a:solidFill>
+                        <a:srgbClr val="D9D9D9"/>
+                      </a:solidFill>
+                      <a:prstDash val="solid"/>
+                      <a:round/>
+                      <a:headEnd type="none" w="med" len="med"/>
+                      <a:tailEnd type="none" w="med" len="med"/>
+                    </a:lnT>
+                    <a:lnB w="9525" cap="flat" cmpd="sng" algn="ctr">
+                      <a:solidFill>
+                        <a:srgbClr val="D9D9D9"/>
+                      </a:solidFill>
+                      <a:prstDash val="solid"/>
+                      <a:round/>
+                      <a:headEnd type="none" w="med" len="med"/>
+                      <a:tailEnd type="none" w="med" len="med"/>
+                    </a:lnB>
+                    <a:solidFill>
+                      <a:srgbClr val="FFFFFF"/>
+                    </a:solidFill>
+                  </a:tcPr>
+                </a:tc>
+                <a:tc>
+                  <a:txBody>
+                    <a:bodyPr/>
+                    <a:lstStyle/>
+                    <a:p>
+                      <a:pPr algn="ctr" indent="0" marL="0">
+                        <a:buNone/>
+                      </a:pPr>
+                      <a:r>
+                        <a:rPr lang="en-US" sz="1200" dirty="0">
+                          <a:solidFill>
+                            <a:srgbClr val="3F3F3F"/>
+                          </a:solidFill>
+                          <a:latin typeface="Malgun Gothic" pitchFamily="34" charset="0"/>
+                          <a:ea typeface="Malgun Gothic" pitchFamily="34" charset="-122"/>
+                          <a:cs typeface="Malgun Gothic" pitchFamily="34" charset="-120"/>
+                        </a:rPr>
+                        <a:t>자료 미제공 – 추후 업데이트</a:t>
+                      </a:r>
+                      <a:endParaRPr lang="en-US" sz="1200" dirty="0">
+                        <a:latin typeface="Malgun Gothic" charset="0"/>
+                        <a:ea typeface="Malgun Gothic" charset="0"/>
+                        <a:cs typeface="Malgun Gothic" charset="0"/>
+                      </a:endParaRPr>
+                    </a:p>
+                  </a:txBody>
+                  <a:tcPr marL="91440" marR="91440" marT="45720" marB="45720" anchor="ctr">
+                    <a:lnL w="9525" cap="flat" cmpd="sng" algn="ctr">
+                      <a:solidFill>
+                        <a:srgbClr val="D9D9D9"/>
+                      </a:solidFill>
+                      <a:prstDash val="solid"/>
+                      <a:round/>
+                      <a:headEnd type="none" w="med" len="med"/>
+                      <a:tailEnd type="none" w="med" len="med"/>
+                    </a:lnL>
+                    <a:lnR w="9525" cap="flat" cmpd="sng" algn="ctr">
+                      <a:solidFill>
+                        <a:srgbClr val="D9D9D9"/>
+                      </a:solidFill>
+                      <a:prstDash val="solid"/>
+                      <a:round/>
+                      <a:headEnd type="none" w="med" len="med"/>
+                      <a:tailEnd type="none" w="med" len="med"/>
+                    </a:lnR>
+                    <a:lnT w="9525" cap="flat" cmpd="sng" algn="ctr">
+                      <a:solidFill>
+                        <a:srgbClr val="D9D9D9"/>
+                      </a:solidFill>
+                      <a:prstDash val="solid"/>
+                      <a:round/>
+                      <a:headEnd type="none" w="med" len="med"/>
+                      <a:tailEnd type="none" w="med" len="med"/>
+                    </a:lnT>
+                    <a:lnB w="9525" cap="flat" cmpd="sng" algn="ctr">
+                      <a:solidFill>
+                        <a:srgbClr val="D9D9D9"/>
+                      </a:solidFill>
+                      <a:prstDash val="solid"/>
+                      <a:round/>
+                      <a:headEnd type="none" w="med" len="med"/>
+                      <a:tailEnd type="none" w="med" len="med"/>
+                    </a:lnB>
+                    <a:solidFill>
+                      <a:srgbClr val="FFFFFF"/>
+                    </a:solidFill>
+                  </a:tcPr>
+                </a:tc>
+                <a:tc>
+                  <a:txBody>
+                    <a:bodyPr/>
+                    <a:lstStyle/>
+                    <a:p>
+                      <a:pPr algn="ctr" indent="0" marL="0">
+                        <a:buNone/>
+                      </a:pPr>
+                      <a:endParaRPr lang="en-US" sz="1200" dirty="0">
+                        <a:latin typeface="Malgun Gothic" charset="0"/>
+                        <a:ea typeface="Malgun Gothic" charset="0"/>
+                        <a:cs typeface="Malgun Gothic" charset="0"/>
+                      </a:endParaRPr>
+                    </a:p>
+                  </a:txBody>
+                  <a:tcPr marL="91440" marR="91440" marT="45720" marB="45720" anchor="ctr">
+                    <a:lnL w="9525" cap="flat" cmpd="sng" algn="ctr">
+                      <a:solidFill>
+                        <a:srgbClr val="D9D9D9"/>
+                      </a:solidFill>
+                      <a:prstDash val="solid"/>
+                      <a:round/>
+                      <a:headEnd type="none" w="med" len="med"/>
+                      <a:tailEnd type="none" w="med" len="med"/>
+                    </a:lnL>
+                    <a:lnR w="9525" cap="flat" cmpd="sng" algn="ctr">
+                      <a:solidFill>
+                        <a:srgbClr val="D9D9D9"/>
+                      </a:solidFill>
+                      <a:prstDash val="solid"/>
+                      <a:round/>
+                      <a:headEnd type="none" w="med" len="med"/>
+                      <a:tailEnd type="none" w="med" len="med"/>
+                    </a:lnR>
+                    <a:lnT w="9525" cap="flat" cmpd="sng" algn="ctr">
+                      <a:solidFill>
+                        <a:srgbClr val="D9D9D9"/>
+                      </a:solidFill>
+                      <a:prstDash val="solid"/>
+                      <a:round/>
+                      <a:headEnd type="none" w="med" len="med"/>
+                      <a:tailEnd type="none" w="med" len="med"/>
+                    </a:lnT>
+                    <a:lnB w="9525" cap="flat" cmpd="sng" algn="ctr">
+                      <a:solidFill>
+                        <a:srgbClr val="D9D9D9"/>
+                      </a:solidFill>
+                      <a:prstDash val="solid"/>
+                      <a:round/>
+                      <a:headEnd type="none" w="med" len="med"/>
+                      <a:tailEnd type="none" w="med" len="med"/>
+                    </a:lnB>
+                    <a:solidFill>
+                      <a:srgbClr val="FFFFFF"/>
+                    </a:solidFill>
+                  </a:tcPr>
+                </a:tc>
+                <a:tc>
+                  <a:txBody>
+                    <a:bodyPr/>
+                    <a:lstStyle/>
+                    <a:p>
+                      <a:pPr algn="ctr" indent="0" marL="0">
+                        <a:buNone/>
+                      </a:pPr>
+                      <a:endParaRPr lang="en-US" sz="1200" dirty="0">
+                        <a:latin typeface="Malgun Gothic" charset="0"/>
+                        <a:ea typeface="Malgun Gothic" charset="0"/>
+                        <a:cs typeface="Malgun Gothic" charset="0"/>
+                      </a:endParaRPr>
+                    </a:p>
+                  </a:txBody>
+                  <a:tcPr marL="91440" marR="91440" marT="45720" marB="45720" anchor="ctr">
+                    <a:lnL w="9525" cap="flat" cmpd="sng" algn="ctr">
+                      <a:solidFill>
+                        <a:srgbClr val="D9D9D9"/>
+                      </a:solidFill>
+                      <a:prstDash val="solid"/>
+                      <a:round/>
+                      <a:headEnd type="none" w="med" len="med"/>
+                      <a:tailEnd type="none" w="med" len="med"/>
+                    </a:lnL>
+                    <a:lnR w="9525" cap="flat" cmpd="sng" algn="ctr">
+                      <a:solidFill>
+                        <a:srgbClr val="D9D9D9"/>
+                      </a:solidFill>
+                      <a:prstDash val="solid"/>
+                      <a:round/>
+                      <a:headEnd type="none" w="med" len="med"/>
+                      <a:tailEnd type="none" w="med" len="med"/>
+                    </a:lnR>
+                    <a:lnT w="9525" cap="flat" cmpd="sng" algn="ctr">
+                      <a:solidFill>
+                        <a:srgbClr val="D9D9D9"/>
+                      </a:solidFill>
+                      <a:prstDash val="solid"/>
+                      <a:round/>
+                      <a:headEnd type="none" w="med" len="med"/>
+                      <a:tailEnd type="none" w="med" len="med"/>
+                    </a:lnT>
+                    <a:lnB w="9525" cap="flat" cmpd="sng" algn="ctr">
+                      <a:solidFill>
+                        <a:srgbClr val="D9D9D9"/>
+                      </a:solidFill>
+                      <a:prstDash val="solid"/>
+                      <a:round/>
+                      <a:headEnd type="none" w="med" len="med"/>
+                      <a:tailEnd type="none" w="med" len="med"/>
+                    </a:lnB>
+                    <a:solidFill>
+                      <a:srgbClr val="FFFFFF"/>
+                    </a:solidFill>
+                  </a:tcPr>
+                </a:tc>
+                <a:tc>
+                  <a:txBody>
+                    <a:bodyPr/>
+                    <a:lstStyle/>
+                    <a:p>
+                      <a:pPr algn="ctr" indent="0" marL="0">
+                        <a:buNone/>
+                      </a:pPr>
+                      <a:endParaRPr lang="en-US" sz="1200" dirty="0">
+                        <a:latin typeface="Malgun Gothic" charset="0"/>
+                        <a:ea typeface="Malgun Gothic" charset="0"/>
+                        <a:cs typeface="Malgun Gothic" charset="0"/>
+                      </a:endParaRPr>
+                    </a:p>
+                  </a:txBody>
+                  <a:tcPr marL="91440" marR="91440" marT="45720" marB="45720" anchor="ctr">
+                    <a:lnL w="9525" cap="flat" cmpd="sng" algn="ctr">
+                      <a:solidFill>
+                        <a:srgbClr val="D9D9D9"/>
+                      </a:solidFill>
+                      <a:prstDash val="solid"/>
+                      <a:round/>
+                      <a:headEnd type="none" w="med" len="med"/>
+                      <a:tailEnd type="none" w="med" len="med"/>
+                    </a:lnL>
+                    <a:lnR w="9525" cap="flat" cmpd="sng" algn="ctr">
+                      <a:solidFill>
+                        <a:srgbClr val="D9D9D9"/>
+                      </a:solidFill>
+                      <a:prstDash val="solid"/>
+                      <a:round/>
+                      <a:headEnd type="none" w="med" len="med"/>
+                      <a:tailEnd type="none" w="med" len="med"/>
+                    </a:lnR>
+                    <a:lnT w="9525" cap="flat" cmpd="sng" algn="ctr">
+                      <a:solidFill>
+                        <a:srgbClr val="D9D9D9"/>
+                      </a:solidFill>
+                      <a:prstDash val="solid"/>
+                      <a:round/>
+                      <a:headEnd type="none" w="med" len="med"/>
+                      <a:tailEnd type="none" w="med" len="med"/>
+                    </a:lnT>
+                    <a:lnB w="9525" cap="flat" cmpd="sng" algn="ctr">
+                      <a:solidFill>
+                        <a:srgbClr val="D9D9D9"/>
+                      </a:solidFill>
+                      <a:prstDash val="solid"/>
+                      <a:round/>
+                      <a:headEnd type="none" w="med" len="med"/>
+                      <a:tailEnd type="none" w="med" len="med"/>
+                    </a:lnB>
+                    <a:solidFill>
+                      <a:srgbClr val="FFFFFF"/>
+                    </a:solidFill>
+                  </a:tcPr>
+                </a:tc>
+              </a:tr>
+              <a:tr h="384048">
+                <a:tc>
+                  <a:txBody>
+                    <a:bodyPr/>
+                    <a:lstStyle/>
+                    <a:p>
+                      <a:pPr algn="l" indent="0" marL="0">
+                        <a:buNone/>
+                      </a:pPr>
+                      <a:r>
+                        <a:rPr lang="en-US" sz="1200" dirty="0">
+                          <a:solidFill>
+                            <a:srgbClr val="3F3F3F"/>
+                          </a:solidFill>
+                          <a:latin typeface="Malgun Gothic" pitchFamily="34" charset="0"/>
+                          <a:ea typeface="Malgun Gothic" pitchFamily="34" charset="-122"/>
+                          <a:cs typeface="Malgun Gothic" pitchFamily="34" charset="-120"/>
+                        </a:rPr>
+                        <a:t>FS South</a:t>
+                      </a:r>
+                      <a:endParaRPr lang="en-US" sz="1200" dirty="0">
+                        <a:latin typeface="Malgun Gothic" charset="0"/>
+                        <a:ea typeface="Malgun Gothic" charset="0"/>
+                        <a:cs typeface="Malgun Gothic" charset="0"/>
+                      </a:endParaRPr>
+                    </a:p>
+                  </a:txBody>
+                  <a:tcPr marL="91440" marR="91440" marT="45720" marB="45720" anchor="ctr">
+                    <a:lnL w="9525" cap="flat" cmpd="sng" algn="ctr">
+                      <a:solidFill>
+                        <a:srgbClr val="D9D9D9"/>
+                      </a:solidFill>
+                      <a:prstDash val="solid"/>
+                      <a:round/>
+                      <a:headEnd type="none" w="med" len="med"/>
+                      <a:tailEnd type="none" w="med" len="med"/>
+                    </a:lnL>
+                    <a:lnR w="9525" cap="flat" cmpd="sng" algn="ctr">
+                      <a:solidFill>
+                        <a:srgbClr val="D9D9D9"/>
+                      </a:solidFill>
+                      <a:prstDash val="solid"/>
+                      <a:round/>
+                      <a:headEnd type="none" w="med" len="med"/>
+                      <a:tailEnd type="none" w="med" len="med"/>
+                    </a:lnR>
+                    <a:lnT w="9525" cap="flat" cmpd="sng" algn="ctr">
+                      <a:solidFill>
+                        <a:srgbClr val="D9D9D9"/>
+                      </a:solidFill>
+                      <a:prstDash val="solid"/>
+                      <a:round/>
+                      <a:headEnd type="none" w="med" len="med"/>
+                      <a:tailEnd type="none" w="med" len="med"/>
+                    </a:lnT>
+                    <a:lnB w="9525" cap="flat" cmpd="sng" algn="ctr">
+                      <a:solidFill>
+                        <a:srgbClr val="D9D9D9"/>
+                      </a:solidFill>
+                      <a:prstDash val="solid"/>
+                      <a:round/>
+                      <a:headEnd type="none" w="med" len="med"/>
+                      <a:tailEnd type="none" w="med" len="med"/>
+                    </a:lnB>
+                    <a:solidFill>
+                      <a:srgbClr val="FFFFFF"/>
+                    </a:solidFill>
+                  </a:tcPr>
+                </a:tc>
+                <a:tc>
+                  <a:txBody>
+                    <a:bodyPr/>
+                    <a:lstStyle/>
+                    <a:p>
+                      <a:pPr algn="ctr" indent="0" marL="0">
+                        <a:buNone/>
+                      </a:pPr>
+                      <a:r>
+                        <a:rPr lang="en-US" sz="1200" dirty="0">
+                          <a:solidFill>
+                            <a:srgbClr val="3F3F3F"/>
+                          </a:solidFill>
+                          <a:latin typeface="Malgun Gothic" pitchFamily="34" charset="0"/>
+                          <a:ea typeface="Malgun Gothic" pitchFamily="34" charset="-122"/>
+                          <a:cs typeface="Malgun Gothic" pitchFamily="34" charset="-120"/>
+                        </a:rPr>
+                        <a:t>John</a:t>
+                      </a:r>
+                      <a:endParaRPr lang="en-US" sz="1200" dirty="0">
+                        <a:latin typeface="Malgun Gothic" charset="0"/>
+                        <a:ea typeface="Malgun Gothic" charset="0"/>
+                        <a:cs typeface="Malgun Gothic" charset="0"/>
+                      </a:endParaRPr>
+                    </a:p>
+                  </a:txBody>
+                  <a:tcPr marL="91440" marR="91440" marT="45720" marB="45720" anchor="ctr">
+                    <a:lnL w="9525" cap="flat" cmpd="sng" algn="ctr">
+                      <a:solidFill>
+                        <a:srgbClr val="D9D9D9"/>
+                      </a:solidFill>
+                      <a:prstDash val="solid"/>
+                      <a:round/>
+                      <a:headEnd type="none" w="med" len="med"/>
+                      <a:tailEnd type="none" w="med" len="med"/>
+                    </a:lnL>
+                    <a:lnR w="9525" cap="flat" cmpd="sng" algn="ctr">
+                      <a:solidFill>
+                        <a:srgbClr val="D9D9D9"/>
+                      </a:solidFill>
+                      <a:prstDash val="solid"/>
+                      <a:round/>
+                      <a:headEnd type="none" w="med" len="med"/>
+                      <a:tailEnd type="none" w="med" len="med"/>
+                    </a:lnR>
+                    <a:lnT w="9525" cap="flat" cmpd="sng" algn="ctr">
+                      <a:solidFill>
+                        <a:srgbClr val="D9D9D9"/>
+                      </a:solidFill>
+                      <a:prstDash val="solid"/>
+                      <a:round/>
+                      <a:headEnd type="none" w="med" len="med"/>
+                      <a:tailEnd type="none" w="med" len="med"/>
+                    </a:lnT>
+                    <a:lnB w="9525" cap="flat" cmpd="sng" algn="ctr">
+                      <a:solidFill>
+                        <a:srgbClr val="D9D9D9"/>
+                      </a:solidFill>
+                      <a:prstDash val="solid"/>
+                      <a:round/>
+                      <a:headEnd type="none" w="med" len="med"/>
+                      <a:tailEnd type="none" w="med" len="med"/>
+                    </a:lnB>
+                    <a:solidFill>
+                      <a:srgbClr val="FFFFFF"/>
+                    </a:solidFill>
+                  </a:tcPr>
+                </a:tc>
+                <a:tc>
+                  <a:txBody>
+                    <a:bodyPr/>
+                    <a:lstStyle/>
+                    <a:p>
+                      <a:pPr algn="ctr" indent="0" marL="0">
+                        <a:buNone/>
+                      </a:pPr>
+                      <a:r>
+                        <a:rPr lang="en-US" sz="1200" dirty="0">
+                          <a:solidFill>
+                            <a:srgbClr val="3F3F3F"/>
+                          </a:solidFill>
+                          <a:latin typeface="Malgun Gothic" pitchFamily="34" charset="0"/>
+                          <a:ea typeface="Malgun Gothic" pitchFamily="34" charset="-122"/>
+                          <a:cs typeface="Malgun Gothic" pitchFamily="34" charset="-120"/>
+                        </a:rPr>
+                        <a:t>자료 미제공 – 추후 업데이트</a:t>
+                      </a:r>
+                      <a:endParaRPr lang="en-US" sz="1200" dirty="0">
+                        <a:latin typeface="Malgun Gothic" charset="0"/>
+                        <a:ea typeface="Malgun Gothic" charset="0"/>
+                        <a:cs typeface="Malgun Gothic" charset="0"/>
+                      </a:endParaRPr>
+                    </a:p>
+                  </a:txBody>
+                  <a:tcPr marL="91440" marR="91440" marT="45720" marB="45720" anchor="ctr">
+                    <a:lnL w="9525" cap="flat" cmpd="sng" algn="ctr">
+                      <a:solidFill>
+                        <a:srgbClr val="D9D9D9"/>
+                      </a:solidFill>
+                      <a:prstDash val="solid"/>
+                      <a:round/>
+                      <a:headEnd type="none" w="med" len="med"/>
+                      <a:tailEnd type="none" w="med" len="med"/>
+                    </a:lnL>
+                    <a:lnR w="9525" cap="flat" cmpd="sng" algn="ctr">
+                      <a:solidFill>
+                        <a:srgbClr val="D9D9D9"/>
+                      </a:solidFill>
+                      <a:prstDash val="solid"/>
+                      <a:round/>
+                      <a:headEnd type="none" w="med" len="med"/>
+                      <a:tailEnd type="none" w="med" len="med"/>
+                    </a:lnR>
+                    <a:lnT w="9525" cap="flat" cmpd="sng" algn="ctr">
+                      <a:solidFill>
+                        <a:srgbClr val="D9D9D9"/>
+                      </a:solidFill>
+                      <a:prstDash val="solid"/>
+                      <a:round/>
+                      <a:headEnd type="none" w="med" len="med"/>
+                      <a:tailEnd type="none" w="med" len="med"/>
+                    </a:lnT>
+                    <a:lnB w="9525" cap="flat" cmpd="sng" algn="ctr">
+                      <a:solidFill>
+                        <a:srgbClr val="D9D9D9"/>
+                      </a:solidFill>
+                      <a:prstDash val="solid"/>
+                      <a:round/>
+                      <a:headEnd type="none" w="med" len="med"/>
+                      <a:tailEnd type="none" w="med" len="med"/>
+                    </a:lnB>
+                    <a:solidFill>
+                      <a:srgbClr val="FFFFFF"/>
+                    </a:solidFill>
+                  </a:tcPr>
+                </a:tc>
+                <a:tc>
+                  <a:txBody>
+                    <a:bodyPr/>
+                    <a:lstStyle/>
+                    <a:p>
+                      <a:pPr algn="ctr" indent="0" marL="0">
+                        <a:buNone/>
+                      </a:pPr>
+                      <a:endParaRPr lang="en-US" sz="1200" dirty="0">
+                        <a:latin typeface="Malgun Gothic" charset="0"/>
+                        <a:ea typeface="Malgun Gothic" charset="0"/>
+                        <a:cs typeface="Malgun Gothic" charset="0"/>
+                      </a:endParaRPr>
+                    </a:p>
+                  </a:txBody>
+                  <a:tcPr marL="91440" marR="91440" marT="45720" marB="45720" anchor="ctr">
+                    <a:lnL w="9525" cap="flat" cmpd="sng" algn="ctr">
+                      <a:solidFill>
+                        <a:srgbClr val="D9D9D9"/>
+                      </a:solidFill>
+                      <a:prstDash val="solid"/>
+                      <a:round/>
+                      <a:headEnd type="none" w="med" len="med"/>
+                      <a:tailEnd type="none" w="med" len="med"/>
+                    </a:lnL>
+                    <a:lnR w="9525" cap="flat" cmpd="sng" algn="ctr">
+                      <a:solidFill>
+                        <a:srgbClr val="D9D9D9"/>
+                      </a:solidFill>
+                      <a:prstDash val="solid"/>
+                      <a:round/>
+                      <a:headEnd type="none" w="med" len="med"/>
+                      <a:tailEnd type="none" w="med" len="med"/>
+                    </a:lnR>
+                    <a:lnT w="9525" cap="flat" cmpd="sng" algn="ctr">
+                      <a:solidFill>
+                        <a:srgbClr val="D9D9D9"/>
+                      </a:solidFill>
+                      <a:prstDash val="solid"/>
+                      <a:round/>
+                      <a:headEnd type="none" w="med" len="med"/>
+                      <a:tailEnd type="none" w="med" len="med"/>
+                    </a:lnT>
+                    <a:lnB w="9525" cap="flat" cmpd="sng" algn="ctr">
+                      <a:solidFill>
+                        <a:srgbClr val="D9D9D9"/>
+                      </a:solidFill>
+                      <a:prstDash val="solid"/>
+                      <a:round/>
+                      <a:headEnd type="none" w="med" len="med"/>
+                      <a:tailEnd type="none" w="med" len="med"/>
+                    </a:lnB>
+                    <a:solidFill>
+                      <a:srgbClr val="FFFFFF"/>
+                    </a:solidFill>
+                  </a:tcPr>
+                </a:tc>
+                <a:tc>
+                  <a:txBody>
+                    <a:bodyPr/>
+                    <a:lstStyle/>
+                    <a:p>
+                      <a:pPr algn="ctr" indent="0" marL="0">
+                        <a:buNone/>
+                      </a:pPr>
+                      <a:endParaRPr lang="en-US" sz="1200" dirty="0">
+                        <a:latin typeface="Malgun Gothic" charset="0"/>
+                        <a:ea typeface="Malgun Gothic" charset="0"/>
+                        <a:cs typeface="Malgun Gothic" charset="0"/>
+                      </a:endParaRPr>
+                    </a:p>
+                  </a:txBody>
+                  <a:tcPr marL="91440" marR="91440" marT="45720" marB="45720" anchor="ctr">
+                    <a:lnL w="9525" cap="flat" cmpd="sng" algn="ctr">
+                      <a:solidFill>
+                        <a:srgbClr val="D9D9D9"/>
+                      </a:solidFill>
+                      <a:prstDash val="solid"/>
+                      <a:round/>
+                      <a:headEnd type="none" w="med" len="med"/>
+                      <a:tailEnd type="none" w="med" len="med"/>
+                    </a:lnL>
+                    <a:lnR w="9525" cap="flat" cmpd="sng" algn="ctr">
+                      <a:solidFill>
+                        <a:srgbClr val="D9D9D9"/>
+                      </a:solidFill>
+                      <a:prstDash val="solid"/>
+                      <a:round/>
+                      <a:headEnd type="none" w="med" len="med"/>
+                      <a:tailEnd type="none" w="med" len="med"/>
+                    </a:lnR>
+                    <a:lnT w="9525" cap="flat" cmpd="sng" algn="ctr">
+                      <a:solidFill>
+                        <a:srgbClr val="D9D9D9"/>
+                      </a:solidFill>
+                      <a:prstDash val="solid"/>
+                      <a:round/>
+                      <a:headEnd type="none" w="med" len="med"/>
+                      <a:tailEnd type="none" w="med" len="med"/>
+                    </a:lnT>
+                    <a:lnB w="9525" cap="flat" cmpd="sng" algn="ctr">
+                      <a:solidFill>
+                        <a:srgbClr val="D9D9D9"/>
+                      </a:solidFill>
+                      <a:prstDash val="solid"/>
+                      <a:round/>
+                      <a:headEnd type="none" w="med" len="med"/>
+                      <a:tailEnd type="none" w="med" len="med"/>
+                    </a:lnB>
+                    <a:solidFill>
+                      <a:srgbClr val="FFFFFF"/>
+                    </a:solidFill>
+                  </a:tcPr>
+                </a:tc>
+                <a:tc>
+                  <a:txBody>
+                    <a:bodyPr/>
+                    <a:lstStyle/>
+                    <a:p>
+                      <a:pPr algn="ctr" indent="0" marL="0">
+                        <a:buNone/>
+                      </a:pPr>
+                      <a:endParaRPr lang="en-US" sz="1200" dirty="0">
+                        <a:latin typeface="Malgun Gothic" charset="0"/>
+                        <a:ea typeface="Malgun Gothic" charset="0"/>
+                        <a:cs typeface="Malgun Gothic" charset="0"/>
+                      </a:endParaRPr>
+                    </a:p>
+                  </a:txBody>
+                  <a:tcPr marL="91440" marR="91440" marT="45720" marB="45720" anchor="ctr">
+                    <a:lnL w="9525" cap="flat" cmpd="sng" algn="ctr">
+                      <a:solidFill>
+                        <a:srgbClr val="D9D9D9"/>
+                      </a:solidFill>
+                      <a:prstDash val="solid"/>
+                      <a:round/>
+                      <a:headEnd type="none" w="med" len="med"/>
+                      <a:tailEnd type="none" w="med" len="med"/>
+                    </a:lnL>
+                    <a:lnR w="9525" cap="flat" cmpd="sng" algn="ctr">
+                      <a:solidFill>
+                        <a:srgbClr val="D9D9D9"/>
+                      </a:solidFill>
+                      <a:prstDash val="solid"/>
+                      <a:round/>
+                      <a:headEnd type="none" w="med" len="med"/>
+                      <a:tailEnd type="none" w="med" len="med"/>
+                    </a:lnR>
+                    <a:lnT w="9525" cap="flat" cmpd="sng" algn="ctr">
+                      <a:solidFill>
+                        <a:srgbClr val="D9D9D9"/>
+                      </a:solidFill>
+                      <a:prstDash val="solid"/>
+                      <a:round/>
+                      <a:headEnd type="none" w="med" len="med"/>
+                      <a:tailEnd type="none" w="med" len="med"/>
+                    </a:lnT>
+                    <a:lnB w="9525" cap="flat" cmpd="sng" algn="ctr">
+                      <a:solidFill>
+                        <a:srgbClr val="D9D9D9"/>
+                      </a:solidFill>
+                      <a:prstDash val="solid"/>
+                      <a:round/>
+                      <a:headEnd type="none" w="med" len="med"/>
+                      <a:tailEnd type="none" w="med" len="med"/>
+                    </a:lnB>
+                    <a:solidFill>
+                      <a:srgbClr val="FFFFFF"/>
+                    </a:solidFill>
+                  </a:tcPr>
+                </a:tc>
+              </a:tr>
+              <a:tr h="384048">
+                <a:tc>
+                  <a:txBody>
+                    <a:bodyPr/>
+                    <a:lstStyle/>
+                    <a:p>
+                      <a:pPr algn="l" indent="0" marL="0">
+                        <a:buNone/>
+                      </a:pPr>
+                      <a:r>
+                        <a:rPr lang="en-US" sz="1200" dirty="0">
+                          <a:solidFill>
+                            <a:srgbClr val="3F3F3F"/>
+                          </a:solidFill>
+                          <a:latin typeface="Malgun Gothic" pitchFamily="34" charset="0"/>
+                          <a:ea typeface="Malgun Gothic" pitchFamily="34" charset="-122"/>
+                          <a:cs typeface="Malgun Gothic" pitchFamily="34" charset="-120"/>
+                        </a:rPr>
+                        <a:t>FS Central</a:t>
+                      </a:r>
+                      <a:endParaRPr lang="en-US" sz="1200" dirty="0">
+                        <a:latin typeface="Malgun Gothic" charset="0"/>
+                        <a:ea typeface="Malgun Gothic" charset="0"/>
+                        <a:cs typeface="Malgun Gothic" charset="0"/>
+                      </a:endParaRPr>
+                    </a:p>
+                  </a:txBody>
+                  <a:tcPr marL="91440" marR="91440" marT="45720" marB="45720" anchor="ctr">
+                    <a:lnL w="9525" cap="flat" cmpd="sng" algn="ctr">
+                      <a:solidFill>
+                        <a:srgbClr val="D9D9D9"/>
+                      </a:solidFill>
+                      <a:prstDash val="solid"/>
+                      <a:round/>
+                      <a:headEnd type="none" w="med" len="med"/>
+                      <a:tailEnd type="none" w="med" len="med"/>
+                    </a:lnL>
+                    <a:lnR w="9525" cap="flat" cmpd="sng" algn="ctr">
+                      <a:solidFill>
+                        <a:srgbClr val="D9D9D9"/>
+                      </a:solidFill>
+                      <a:prstDash val="solid"/>
+                      <a:round/>
+                      <a:headEnd type="none" w="med" len="med"/>
+                      <a:tailEnd type="none" w="med" len="med"/>
+                    </a:lnR>
+                    <a:lnT w="9525" cap="flat" cmpd="sng" algn="ctr">
+                      <a:solidFill>
+                        <a:srgbClr val="D9D9D9"/>
+                      </a:solidFill>
+                      <a:prstDash val="solid"/>
+                      <a:round/>
+                      <a:headEnd type="none" w="med" len="med"/>
+                      <a:tailEnd type="none" w="med" len="med"/>
+                    </a:lnT>
+                    <a:lnB w="9525" cap="flat" cmpd="sng" algn="ctr">
+                      <a:solidFill>
+                        <a:srgbClr val="D9D9D9"/>
+                      </a:solidFill>
+                      <a:prstDash val="solid"/>
+                      <a:round/>
+                      <a:headEnd type="none" w="med" len="med"/>
+                      <a:tailEnd type="none" w="med" len="med"/>
+                    </a:lnB>
+                    <a:solidFill>
+                      <a:srgbClr val="FFFFFF"/>
+                    </a:solidFill>
+                  </a:tcPr>
+                </a:tc>
+                <a:tc>
+                  <a:txBody>
+                    <a:bodyPr/>
+                    <a:lstStyle/>
+                    <a:p>
+                      <a:pPr algn="ctr" indent="0" marL="0">
+                        <a:buNone/>
+                      </a:pPr>
+                      <a:r>
+                        <a:rPr lang="en-US" sz="1200" dirty="0">
+                          <a:solidFill>
+                            <a:srgbClr val="3F3F3F"/>
+                          </a:solidFill>
+                          <a:latin typeface="Malgun Gothic" pitchFamily="34" charset="0"/>
+                          <a:ea typeface="Malgun Gothic" pitchFamily="34" charset="-122"/>
+                          <a:cs typeface="Malgun Gothic" pitchFamily="34" charset="-120"/>
+                        </a:rPr>
+                        <a:t>Eden</a:t>
+                      </a:r>
+                      <a:endParaRPr lang="en-US" sz="1200" dirty="0">
+                        <a:latin typeface="Malgun Gothic" charset="0"/>
+                        <a:ea typeface="Malgun Gothic" charset="0"/>
+                        <a:cs typeface="Malgun Gothic" charset="0"/>
+                      </a:endParaRPr>
+                    </a:p>
+                  </a:txBody>
+                  <a:tcPr marL="91440" marR="91440" marT="45720" marB="45720" anchor="ctr">
+                    <a:lnL w="9525" cap="flat" cmpd="sng" algn="ctr">
+                      <a:solidFill>
+                        <a:srgbClr val="D9D9D9"/>
+                      </a:solidFill>
+                      <a:prstDash val="solid"/>
+                      <a:round/>
+                      <a:headEnd type="none" w="med" len="med"/>
+                      <a:tailEnd type="none" w="med" len="med"/>
+                    </a:lnL>
+                    <a:lnR w="9525" cap="flat" cmpd="sng" algn="ctr">
+                      <a:solidFill>
+                        <a:srgbClr val="D9D9D9"/>
+                      </a:solidFill>
+                      <a:prstDash val="solid"/>
+                      <a:round/>
+                      <a:headEnd type="none" w="med" len="med"/>
+                      <a:tailEnd type="none" w="med" len="med"/>
+                    </a:lnR>
+                    <a:lnT w="9525" cap="flat" cmpd="sng" algn="ctr">
+                      <a:solidFill>
+                        <a:srgbClr val="D9D9D9"/>
+                      </a:solidFill>
+                      <a:prstDash val="solid"/>
+                      <a:round/>
+                      <a:headEnd type="none" w="med" len="med"/>
+                      <a:tailEnd type="none" w="med" len="med"/>
+                    </a:lnT>
+                    <a:lnB w="9525" cap="flat" cmpd="sng" algn="ctr">
+                      <a:solidFill>
+                        <a:srgbClr val="D9D9D9"/>
+                      </a:solidFill>
+                      <a:prstDash val="solid"/>
+                      <a:round/>
+                      <a:headEnd type="none" w="med" len="med"/>
+                      <a:tailEnd type="none" w="med" len="med"/>
+                    </a:lnB>
+                    <a:solidFill>
+                      <a:srgbClr val="FFFFFF"/>
+                    </a:solidFill>
+                  </a:tcPr>
+                </a:tc>
+                <a:tc>
+                  <a:txBody>
+                    <a:bodyPr/>
+                    <a:lstStyle/>
+                    <a:p>
+                      <a:pPr algn="ctr" indent="0" marL="0">
+                        <a:buNone/>
+                      </a:pPr>
+                      <a:r>
+                        <a:rPr lang="en-US" sz="1200" dirty="0">
+                          <a:solidFill>
+                            <a:srgbClr val="3F3F3F"/>
+                          </a:solidFill>
+                          <a:latin typeface="Malgun Gothic" pitchFamily="34" charset="0"/>
+                          <a:ea typeface="Malgun Gothic" pitchFamily="34" charset="-122"/>
+                          <a:cs typeface="Malgun Gothic" pitchFamily="34" charset="-120"/>
+                        </a:rPr>
+                        <a:t>자료 미제공 – 추후 업데이트</a:t>
+                      </a:r>
+                      <a:endParaRPr lang="en-US" sz="1200" dirty="0">
+                        <a:latin typeface="Malgun Gothic" charset="0"/>
+                        <a:ea typeface="Malgun Gothic" charset="0"/>
+                        <a:cs typeface="Malgun Gothic" charset="0"/>
+                      </a:endParaRPr>
+                    </a:p>
+                  </a:txBody>
+                  <a:tcPr marL="91440" marR="91440" marT="45720" marB="45720" anchor="ctr">
+                    <a:lnL w="9525" cap="flat" cmpd="sng" algn="ctr">
+                      <a:solidFill>
+                        <a:srgbClr val="D9D9D9"/>
+                      </a:solidFill>
+                      <a:prstDash val="solid"/>
+                      <a:round/>
+                      <a:headEnd type="none" w="med" len="med"/>
+                      <a:tailEnd type="none" w="med" len="med"/>
+                    </a:lnL>
+                    <a:lnR w="9525" cap="flat" cmpd="sng" algn="ctr">
+                      <a:solidFill>
+                        <a:srgbClr val="D9D9D9"/>
+                      </a:solidFill>
+                      <a:prstDash val="solid"/>
+                      <a:round/>
+                      <a:headEnd type="none" w="med" len="med"/>
+                      <a:tailEnd type="none" w="med" len="med"/>
+                    </a:lnR>
+                    <a:lnT w="9525" cap="flat" cmpd="sng" algn="ctr">
+                      <a:solidFill>
+                        <a:srgbClr val="D9D9D9"/>
+                      </a:solidFill>
+                      <a:prstDash val="solid"/>
+                      <a:round/>
+                      <a:headEnd type="none" w="med" len="med"/>
+                      <a:tailEnd type="none" w="med" len="med"/>
+                    </a:lnT>
+                    <a:lnB w="9525" cap="flat" cmpd="sng" algn="ctr">
+                      <a:solidFill>
+                        <a:srgbClr val="D9D9D9"/>
+                      </a:solidFill>
+                      <a:prstDash val="solid"/>
+                      <a:round/>
+                      <a:headEnd type="none" w="med" len="med"/>
+                      <a:tailEnd type="none" w="med" len="med"/>
+                    </a:lnB>
+                    <a:solidFill>
+                      <a:srgbClr val="FFFFFF"/>
+                    </a:solidFill>
+                  </a:tcPr>
+                </a:tc>
+                <a:tc>
+                  <a:txBody>
+                    <a:bodyPr/>
+                    <a:lstStyle/>
+                    <a:p>
+                      <a:pPr algn="ctr" indent="0" marL="0">
+                        <a:buNone/>
+                      </a:pPr>
+                      <a:endParaRPr lang="en-US" sz="1200" dirty="0">
+                        <a:latin typeface="Malgun Gothic" charset="0"/>
+                        <a:ea typeface="Malgun Gothic" charset="0"/>
+                        <a:cs typeface="Malgun Gothic" charset="0"/>
+                      </a:endParaRPr>
+                    </a:p>
+                  </a:txBody>
+                  <a:tcPr marL="91440" marR="91440" marT="45720" marB="45720" anchor="ctr">
+                    <a:lnL w="9525" cap="flat" cmpd="sng" algn="ctr">
+                      <a:solidFill>
+                        <a:srgbClr val="D9D9D9"/>
+                      </a:solidFill>
+                      <a:prstDash val="solid"/>
+                      <a:round/>
+                      <a:headEnd type="none" w="med" len="med"/>
+                      <a:tailEnd type="none" w="med" len="med"/>
+                    </a:lnL>
+                    <a:lnR w="9525" cap="flat" cmpd="sng" algn="ctr">
+                      <a:solidFill>
+                        <a:srgbClr val="D9D9D9"/>
+                      </a:solidFill>
+                      <a:prstDash val="solid"/>
+                      <a:round/>
+                      <a:headEnd type="none" w="med" len="med"/>
+                      <a:tailEnd type="none" w="med" len="med"/>
+                    </a:lnR>
+                    <a:lnT w="9525" cap="flat" cmpd="sng" algn="ctr">
+                      <a:solidFill>
+                        <a:srgbClr val="D9D9D9"/>
+                      </a:solidFill>
+                      <a:prstDash val="solid"/>
+                      <a:round/>
+                      <a:headEnd type="none" w="med" len="med"/>
+                      <a:tailEnd type="none" w="med" len="med"/>
+                    </a:lnT>
+                    <a:lnB w="9525" cap="flat" cmpd="sng" algn="ctr">
+                      <a:solidFill>
+                        <a:srgbClr val="D9D9D9"/>
+                      </a:solidFill>
+                      <a:prstDash val="solid"/>
+                      <a:round/>
+                      <a:headEnd type="none" w="med" len="med"/>
+                      <a:tailEnd type="none" w="med" len="med"/>
+                    </a:lnB>
+                    <a:solidFill>
+                      <a:srgbClr val="FFFFFF"/>
+                    </a:solidFill>
+                  </a:tcPr>
+                </a:tc>
+                <a:tc>
+                  <a:txBody>
+                    <a:bodyPr/>
+                    <a:lstStyle/>
+                    <a:p>
+                      <a:pPr algn="ctr" indent="0" marL="0">
+                        <a:buNone/>
+                      </a:pPr>
+                      <a:endParaRPr lang="en-US" sz="1200" dirty="0">
+                        <a:latin typeface="Malgun Gothic" charset="0"/>
+                        <a:ea typeface="Malgun Gothic" charset="0"/>
+                        <a:cs typeface="Malgun Gothic" charset="0"/>
+                      </a:endParaRPr>
+                    </a:p>
+                  </a:txBody>
+                  <a:tcPr marL="91440" marR="91440" marT="45720" marB="45720" anchor="ctr">
+                    <a:lnL w="9525" cap="flat" cmpd="sng" algn="ctr">
+                      <a:solidFill>
+                        <a:srgbClr val="D9D9D9"/>
+                      </a:solidFill>
+                      <a:prstDash val="solid"/>
+                      <a:round/>
+                      <a:headEnd type="none" w="med" len="med"/>
+                      <a:tailEnd type="none" w="med" len="med"/>
+                    </a:lnL>
+                    <a:lnR w="9525" cap="flat" cmpd="sng" algn="ctr">
+                      <a:solidFill>
+                        <a:srgbClr val="D9D9D9"/>
+                      </a:solidFill>
+                      <a:prstDash val="solid"/>
+                      <a:round/>
+                      <a:headEnd type="none" w="med" len="med"/>
+                      <a:tailEnd type="none" w="med" len="med"/>
+                    </a:lnR>
+                    <a:lnT w="9525" cap="flat" cmpd="sng" algn="ctr">
+                      <a:solidFill>
+                        <a:srgbClr val="D9D9D9"/>
+                      </a:solidFill>
+                      <a:prstDash val="solid"/>
+                      <a:round/>
+                      <a:headEnd type="none" w="med" len="med"/>
+                      <a:tailEnd type="none" w="med" len="med"/>
+                    </a:lnT>
+                    <a:lnB w="9525" cap="flat" cmpd="sng" algn="ctr">
+                      <a:solidFill>
+                        <a:srgbClr val="D9D9D9"/>
+                      </a:solidFill>
+                      <a:prstDash val="solid"/>
+                      <a:round/>
+                      <a:headEnd type="none" w="med" len="med"/>
+                      <a:tailEnd type="none" w="med" len="med"/>
+                    </a:lnB>
+                    <a:solidFill>
+                      <a:srgbClr val="FFFFFF"/>
+                    </a:solidFill>
+                  </a:tcPr>
+                </a:tc>
+                <a:tc>
+                  <a:txBody>
+                    <a:bodyPr/>
+                    <a:lstStyle/>
+                    <a:p>
+                      <a:pPr algn="ctr" indent="0" marL="0">
+                        <a:buNone/>
+                      </a:pPr>
+                      <a:endParaRPr lang="en-US" sz="1200" dirty="0">
+                        <a:latin typeface="Malgun Gothic" charset="0"/>
+                        <a:ea typeface="Malgun Gothic" charset="0"/>
+                        <a:cs typeface="Malgun Gothic" charset="0"/>
+                      </a:endParaRPr>
+                    </a:p>
+                  </a:txBody>
+                  <a:tcPr marL="91440" marR="91440" marT="45720" marB="45720" anchor="ctr">
+                    <a:lnL w="9525" cap="flat" cmpd="sng" algn="ctr">
+                      <a:solidFill>
+                        <a:srgbClr val="D9D9D9"/>
+                      </a:solidFill>
+                      <a:prstDash val="solid"/>
+                      <a:round/>
+                      <a:headEnd type="none" w="med" len="med"/>
+                      <a:tailEnd type="none" w="med" len="med"/>
+                    </a:lnL>
+                    <a:lnR w="9525" cap="flat" cmpd="sng" algn="ctr">
+                      <a:solidFill>
+                        <a:srgbClr val="D9D9D9"/>
+                      </a:solidFill>
+                      <a:prstDash val="solid"/>
+                      <a:round/>
+                      <a:headEnd type="none" w="med" len="med"/>
+                      <a:tailEnd type="none" w="med" len="med"/>
+                    </a:lnR>
+                    <a:lnT w="9525" cap="flat" cmpd="sng" algn="ctr">
+                      <a:solidFill>
+                        <a:srgbClr val="D9D9D9"/>
+                      </a:solidFill>
+                      <a:prstDash val="solid"/>
+                      <a:round/>
+                      <a:headEnd type="none" w="med" len="med"/>
+                      <a:tailEnd type="none" w="med" len="med"/>
+                    </a:lnT>
+                    <a:lnB w="9525" cap="flat" cmpd="sng" algn="ctr">
+                      <a:solidFill>
+                        <a:srgbClr val="D9D9D9"/>
+                      </a:solidFill>
+                      <a:prstDash val="solid"/>
+                      <a:round/>
+                      <a:headEnd type="none" w="med" len="med"/>
+                      <a:tailEnd type="none" w="med" len="med"/>
+                    </a:lnB>
+                    <a:solidFill>
+                      <a:srgbClr val="FFFFFF"/>
+                    </a:solidFill>
+                  </a:tcPr>
+                </a:tc>
+              </a:tr>
+              <a:tr h="384048">
+                <a:tc>
+                  <a:txBody>
+                    <a:bodyPr/>
+                    <a:lstStyle/>
+                    <a:p>
+                      <a:pPr algn="l" indent="0" marL="0">
+                        <a:buNone/>
+                      </a:pPr>
+                      <a:r>
+                        <a:rPr lang="en-US" sz="1200" b="1" dirty="0">
+                          <a:solidFill>
+                            <a:srgbClr val="3F3F3F"/>
+                          </a:solidFill>
+                          <a:latin typeface="Malgun Gothic" pitchFamily="34" charset="0"/>
+                          <a:ea typeface="Malgun Gothic" pitchFamily="34" charset="-122"/>
+                          <a:cs typeface="Malgun Gothic" pitchFamily="34" charset="-120"/>
+                        </a:rPr>
+                        <a:t>합계</a:t>
+                      </a:r>
+                      <a:endParaRPr lang="en-US" sz="1200" dirty="0">
+                        <a:latin typeface="Malgun Gothic" charset="0"/>
+                        <a:ea typeface="Malgun Gothic" charset="0"/>
+                        <a:cs typeface="Malgun Gothic" charset="0"/>
+                      </a:endParaRPr>
+                    </a:p>
+                  </a:txBody>
+                  <a:tcPr marL="91440" marR="91440" marT="45720" marB="45720" anchor="ctr">
+                    <a:lnL w="9525" cap="flat" cmpd="sng" algn="ctr">
+                      <a:solidFill>
+                        <a:srgbClr val="D9D9D9"/>
+                      </a:solidFill>
+                      <a:prstDash val="solid"/>
+                      <a:round/>
+                      <a:headEnd type="none" w="med" len="med"/>
+                      <a:tailEnd type="none" w="med" len="med"/>
+                    </a:lnL>
+                    <a:lnR w="9525" cap="flat" cmpd="sng" algn="ctr">
+                      <a:solidFill>
+                        <a:srgbClr val="D9D9D9"/>
+                      </a:solidFill>
+                      <a:prstDash val="solid"/>
+                      <a:round/>
+                      <a:headEnd type="none" w="med" len="med"/>
+                      <a:tailEnd type="none" w="med" len="med"/>
+                    </a:lnR>
+                    <a:lnT w="9525" cap="flat" cmpd="sng" algn="ctr">
+                      <a:solidFill>
+                        <a:srgbClr val="D9D9D9"/>
+                      </a:solidFill>
+                      <a:prstDash val="solid"/>
+                      <a:round/>
+                      <a:headEnd type="none" w="med" len="med"/>
+                      <a:tailEnd type="none" w="med" len="med"/>
+                    </a:lnT>
+                    <a:lnB w="9525" cap="flat" cmpd="sng" algn="ctr">
+                      <a:solidFill>
+                        <a:srgbClr val="D9D9D9"/>
+                      </a:solidFill>
+                      <a:prstDash val="solid"/>
+                      <a:round/>
+                      <a:headEnd type="none" w="med" len="med"/>
+                      <a:tailEnd type="none" w="med" len="med"/>
+                    </a:lnB>
+                    <a:solidFill>
+                      <a:srgbClr val="EAF1F8"/>
+                    </a:solidFill>
+                  </a:tcPr>
+                </a:tc>
+                <a:tc>
+                  <a:txBody>
+                    <a:bodyPr/>
+                    <a:lstStyle/>
+                    <a:p>
+                      <a:pPr algn="ctr" indent="0" marL="0">
+                        <a:buNone/>
+                      </a:pPr>
+                      <a:endParaRPr lang="en-US" sz="1200" dirty="0">
+                        <a:latin typeface="Malgun Gothic" charset="0"/>
+                        <a:ea typeface="Malgun Gothic" charset="0"/>
+                        <a:cs typeface="Malgun Gothic" charset="0"/>
+                      </a:endParaRPr>
+                    </a:p>
+                  </a:txBody>
+                  <a:tcPr marL="91440" marR="91440" marT="45720" marB="45720" anchor="ctr">
+                    <a:lnL w="9525" cap="flat" cmpd="sng" algn="ctr">
+                      <a:solidFill>
+                        <a:srgbClr val="D9D9D9"/>
+                      </a:solidFill>
+                      <a:prstDash val="solid"/>
+                      <a:round/>
+                      <a:headEnd type="none" w="med" len="med"/>
+                      <a:tailEnd type="none" w="med" len="med"/>
+                    </a:lnL>
+                    <a:lnR w="9525" cap="flat" cmpd="sng" algn="ctr">
+                      <a:solidFill>
+                        <a:srgbClr val="D9D9D9"/>
+                      </a:solidFill>
+                      <a:prstDash val="solid"/>
+                      <a:round/>
+                      <a:headEnd type="none" w="med" len="med"/>
+                      <a:tailEnd type="none" w="med" len="med"/>
+                    </a:lnR>
+                    <a:lnT w="9525" cap="flat" cmpd="sng" algn="ctr">
+                      <a:solidFill>
+                        <a:srgbClr val="D9D9D9"/>
+                      </a:solidFill>
+                      <a:prstDash val="solid"/>
+                      <a:round/>
+                      <a:headEnd type="none" w="med" len="med"/>
+                      <a:tailEnd type="none" w="med" len="med"/>
+                    </a:lnT>
+                    <a:lnB w="9525" cap="flat" cmpd="sng" algn="ctr">
+                      <a:solidFill>
+                        <a:srgbClr val="D9D9D9"/>
+                      </a:solidFill>
+                      <a:prstDash val="solid"/>
+                      <a:round/>
+                      <a:headEnd type="none" w="med" len="med"/>
+                      <a:tailEnd type="none" w="med" len="med"/>
+                    </a:lnB>
+                    <a:solidFill>
+                      <a:srgbClr val="EAF1F8"/>
+                    </a:solidFill>
+                  </a:tcPr>
+                </a:tc>
+                <a:tc>
+                  <a:txBody>
+                    <a:bodyPr/>
+                    <a:lstStyle/>
+                    <a:p>
+                      <a:pPr algn="ctr" indent="0" marL="0">
+                        <a:buNone/>
+                      </a:pPr>
+                      <a:endParaRPr lang="en-US" sz="1200" dirty="0">
+                        <a:latin typeface="Malgun Gothic" charset="0"/>
+                        <a:ea typeface="Malgun Gothic" charset="0"/>
+                        <a:cs typeface="Malgun Gothic" charset="0"/>
+                      </a:endParaRPr>
+                    </a:p>
+                  </a:txBody>
+                  <a:tcPr marL="91440" marR="91440" marT="45720" marB="45720" anchor="ctr">
+                    <a:lnL w="9525" cap="flat" cmpd="sng" algn="ctr">
+                      <a:solidFill>
+                        <a:srgbClr val="D9D9D9"/>
+                      </a:solidFill>
+                      <a:prstDash val="solid"/>
+                      <a:round/>
+                      <a:headEnd type="none" w="med" len="med"/>
+                      <a:tailEnd type="none" w="med" len="med"/>
+                    </a:lnL>
+                    <a:lnR w="9525" cap="flat" cmpd="sng" algn="ctr">
+                      <a:solidFill>
+                        <a:srgbClr val="D9D9D9"/>
+                      </a:solidFill>
+                      <a:prstDash val="solid"/>
+                      <a:round/>
+                      <a:headEnd type="none" w="med" len="med"/>
+                      <a:tailEnd type="none" w="med" len="med"/>
+                    </a:lnR>
+                    <a:lnT w="9525" cap="flat" cmpd="sng" algn="ctr">
+                      <a:solidFill>
+                        <a:srgbClr val="D9D9D9"/>
+                      </a:solidFill>
+                      <a:prstDash val="solid"/>
+                      <a:round/>
+                      <a:headEnd type="none" w="med" len="med"/>
+                      <a:tailEnd type="none" w="med" len="med"/>
+                    </a:lnT>
+                    <a:lnB w="9525" cap="flat" cmpd="sng" algn="ctr">
+                      <a:solidFill>
+                        <a:srgbClr val="D9D9D9"/>
+                      </a:solidFill>
+                      <a:prstDash val="solid"/>
+                      <a:round/>
+                      <a:headEnd type="none" w="med" len="med"/>
+                      <a:tailEnd type="none" w="med" len="med"/>
+                    </a:lnB>
+                    <a:solidFill>
+                      <a:srgbClr val="EAF1F8"/>
+                    </a:solidFill>
+                  </a:tcPr>
+                </a:tc>
+                <a:tc>
+                  <a:txBody>
+                    <a:bodyPr/>
+                    <a:lstStyle/>
+                    <a:p>
+                      <a:pPr algn="ctr" indent="0" marL="0">
+                        <a:buNone/>
+                      </a:pPr>
+                      <a:endParaRPr lang="en-US" sz="1200" dirty="0">
+                        <a:latin typeface="Malgun Gothic" charset="0"/>
+                        <a:ea typeface="Malgun Gothic" charset="0"/>
+                        <a:cs typeface="Malgun Gothic" charset="0"/>
+                      </a:endParaRPr>
+                    </a:p>
+                  </a:txBody>
+                  <a:tcPr marL="91440" marR="91440" marT="45720" marB="45720" anchor="ctr">
+                    <a:lnL w="9525" cap="flat" cmpd="sng" algn="ctr">
+                      <a:solidFill>
+                        <a:srgbClr val="D9D9D9"/>
+                      </a:solidFill>
+                      <a:prstDash val="solid"/>
+                      <a:round/>
+                      <a:headEnd type="none" w="med" len="med"/>
+                      <a:tailEnd type="none" w="med" len="med"/>
+                    </a:lnL>
+                    <a:lnR w="9525" cap="flat" cmpd="sng" algn="ctr">
+                      <a:solidFill>
+                        <a:srgbClr val="D9D9D9"/>
+                      </a:solidFill>
+                      <a:prstDash val="solid"/>
+                      <a:round/>
+                      <a:headEnd type="none" w="med" len="med"/>
+                      <a:tailEnd type="none" w="med" len="med"/>
+                    </a:lnR>
+                    <a:lnT w="9525" cap="flat" cmpd="sng" algn="ctr">
+                      <a:solidFill>
+                        <a:srgbClr val="D9D9D9"/>
+                      </a:solidFill>
+                      <a:prstDash val="solid"/>
+                      <a:round/>
+                      <a:headEnd type="none" w="med" len="med"/>
+                      <a:tailEnd type="none" w="med" len="med"/>
+                    </a:lnT>
+                    <a:lnB w="9525" cap="flat" cmpd="sng" algn="ctr">
+                      <a:solidFill>
+                        <a:srgbClr val="D9D9D9"/>
+                      </a:solidFill>
+                      <a:prstDash val="solid"/>
+                      <a:round/>
+                      <a:headEnd type="none" w="med" len="med"/>
+                      <a:tailEnd type="none" w="med" len="med"/>
+                    </a:lnB>
+                    <a:solidFill>
+                      <a:srgbClr val="EAF1F8"/>
+                    </a:solidFill>
+                  </a:tcPr>
+                </a:tc>
+                <a:tc>
+                  <a:txBody>
+                    <a:bodyPr/>
+                    <a:lstStyle/>
+                    <a:p>
+                      <a:pPr algn="ctr" indent="0" marL="0">
+                        <a:buNone/>
+                      </a:pPr>
+                      <a:endParaRPr lang="en-US" sz="1200" dirty="0">
+                        <a:latin typeface="Malgun Gothic" charset="0"/>
+                        <a:ea typeface="Malgun Gothic" charset="0"/>
+                        <a:cs typeface="Malgun Gothic" charset="0"/>
+                      </a:endParaRPr>
+                    </a:p>
+                  </a:txBody>
+                  <a:tcPr marL="91440" marR="91440" marT="45720" marB="45720" anchor="ctr">
+                    <a:lnL w="9525" cap="flat" cmpd="sng" algn="ctr">
+                      <a:solidFill>
+                        <a:srgbClr val="D9D9D9"/>
+                      </a:solidFill>
+                      <a:prstDash val="solid"/>
+                      <a:round/>
+                      <a:headEnd type="none" w="med" len="med"/>
+                      <a:tailEnd type="none" w="med" len="med"/>
+                    </a:lnL>
+                    <a:lnR w="9525" cap="flat" cmpd="sng" algn="ctr">
+                      <a:solidFill>
+                        <a:srgbClr val="D9D9D9"/>
+                      </a:solidFill>
+                      <a:prstDash val="solid"/>
+                      <a:round/>
+                      <a:headEnd type="none" w="med" len="med"/>
+                      <a:tailEnd type="none" w="med" len="med"/>
+                    </a:lnR>
+                    <a:lnT w="9525" cap="flat" cmpd="sng" algn="ctr">
+                      <a:solidFill>
+                        <a:srgbClr val="D9D9D9"/>
+                      </a:solidFill>
+                      <a:prstDash val="solid"/>
+                      <a:round/>
+                      <a:headEnd type="none" w="med" len="med"/>
+                      <a:tailEnd type="none" w="med" len="med"/>
+                    </a:lnT>
+                    <a:lnB w="9525" cap="flat" cmpd="sng" algn="ctr">
+                      <a:solidFill>
+                        <a:srgbClr val="D9D9D9"/>
+                      </a:solidFill>
+                      <a:prstDash val="solid"/>
+                      <a:round/>
+                      <a:headEnd type="none" w="med" len="med"/>
+                      <a:tailEnd type="none" w="med" len="med"/>
+                    </a:lnB>
+                    <a:solidFill>
+                      <a:srgbClr val="EAF1F8"/>
+                    </a:solidFill>
+                  </a:tcPr>
+                </a:tc>
+                <a:tc>
+                  <a:txBody>
+                    <a:bodyPr/>
+                    <a:lstStyle/>
+                    <a:p>
+                      <a:pPr algn="ctr" indent="0" marL="0">
+                        <a:buNone/>
+                      </a:pPr>
+                      <a:endParaRPr lang="en-US" sz="1200" dirty="0">
+                        <a:latin typeface="Malgun Gothic" charset="0"/>
+                        <a:ea typeface="Malgun Gothic" charset="0"/>
+                        <a:cs typeface="Malgun Gothic" charset="0"/>
+                      </a:endParaRPr>
+                    </a:p>
+                  </a:txBody>
+                  <a:tcPr marL="91440" marR="91440" marT="45720" marB="45720" anchor="ctr">
+                    <a:lnL w="9525" cap="flat" cmpd="sng" algn="ctr">
+                      <a:solidFill>
+                        <a:srgbClr val="D9D9D9"/>
+                      </a:solidFill>
+                      <a:prstDash val="solid"/>
+                      <a:round/>
+                      <a:headEnd type="none" w="med" len="med"/>
+                      <a:tailEnd type="none" w="med" len="med"/>
+                    </a:lnL>
+                    <a:lnR w="9525" cap="flat" cmpd="sng" algn="ctr">
+                      <a:solidFill>
+                        <a:srgbClr val="D9D9D9"/>
+                      </a:solidFill>
+                      <a:prstDash val="solid"/>
+                      <a:round/>
+                      <a:headEnd type="none" w="med" len="med"/>
+                      <a:tailEnd type="none" w="med" len="med"/>
+                    </a:lnR>
+                    <a:lnT w="9525" cap="flat" cmpd="sng" algn="ctr">
+                      <a:solidFill>
+                        <a:srgbClr val="D9D9D9"/>
+                      </a:solidFill>
+                      <a:prstDash val="solid"/>
+                      <a:round/>
+                      <a:headEnd type="none" w="med" len="med"/>
+                      <a:tailEnd type="none" w="med" len="med"/>
+                    </a:lnT>
+                    <a:lnB w="9525" cap="flat" cmpd="sng" algn="ctr">
+                      <a:solidFill>
+                        <a:srgbClr val="D9D9D9"/>
+                      </a:solidFill>
+                      <a:prstDash val="solid"/>
+                      <a:round/>
+                      <a:headEnd type="none" w="med" len="med"/>
+                      <a:tailEnd type="none" w="med" len="med"/>
+                    </a:lnB>
+                    <a:solidFill>
+                      <a:srgbClr val="EAF1F8"/>
+                    </a:solidFill>
+                  </a:tcPr>
+                </a:tc>
+              </a:tr>
+            </a:tbl>
+          </a:graphicData>
+        </a:graphic>
+      </p:graphicFrame>
+      <p:sp>
+        <p:nvSpPr>
+          <p:cNvPr id="8" name="Text 4"/>
+          <p:cNvSpPr/>
+          <p:nvPr/>
+        </p:nvSpPr>
+        <p:spPr>
+          <a:xfrm>
+            <a:off x="530352" y="4160520"/>
+            <a:ext cx="7315200" cy="320040"/>
           </a:xfrm>
           <a:prstGeom prst="rect">
             <a:avLst/>
@@ -2967,11 +5286,11 @@
           <a:bodyPr wrap="square" lIns="0" tIns="0" rIns="0" bIns="0" rtlCol="0" anchor="ctr"/>
           <a:lstStyle/>
           <a:p>
-            <a:pPr algn="ctr" indent="0" marL="0">
+            <a:pPr indent="0" marL="0">
               <a:buNone/>
             </a:pPr>
             <a:r>
-              <a:rPr lang="en-US" sz="1600" i="1" dirty="0">
+              <a:rPr lang="en-US" sz="1400" b="1" dirty="0">
                 <a:solidFill>
                   <a:srgbClr val="005BAC"/>
                 </a:solidFill>
@@ -2979,22 +5298,44 @@
                 <a:ea typeface="Malgun Gothic" pitchFamily="34" charset="-122"/>
                 <a:cs typeface="Malgun Gothic" pitchFamily="34" charset="-120"/>
               </a:rPr>
-              <a:t>자료 미제공 – 추후 업데이트</a:t>
-            </a:r>
-            <a:endParaRPr lang="en-US" sz="1600" dirty="0"/>
-          </a:p>
-        </p:txBody>
-      </p:sp>
-      <p:sp>
-        <p:nvSpPr>
-          <p:cNvPr id="9" name="Text 6"/>
-          <p:cNvSpPr/>
-          <p:nvPr/>
-        </p:nvSpPr>
-        <p:spPr>
-          <a:xfrm>
-            <a:off x="6309360" y="1188720"/>
-            <a:ext cx="5486400" cy="365760"/>
+              <a:t>KPI 요약</a:t>
+            </a:r>
+            <a:endParaRPr lang="en-US" sz="1400" dirty="0"/>
+          </a:p>
+        </p:txBody>
+      </p:sp>
+      <p:sp>
+        <p:nvSpPr>
+          <p:cNvPr id="9" name="Shape 5"/>
+          <p:cNvSpPr/>
+          <p:nvPr/>
+        </p:nvSpPr>
+        <p:spPr>
+          <a:xfrm>
+            <a:off x="530352" y="4526280"/>
+            <a:ext cx="2651760" cy="1463040"/>
+          </a:xfrm>
+          <a:prstGeom prst="roundRect">
+            <a:avLst>
+              <a:gd name="adj" fmla="val 4375"/>
+            </a:avLst>
+          </a:prstGeom>
+          <a:solidFill>
+            <a:srgbClr val="F5F8FC"/>
+          </a:solidFill>
+          <a:ln/>
+        </p:spPr>
+      </p:sp>
+      <p:sp>
+        <p:nvSpPr>
+          <p:cNvPr id="10" name="Text 6"/>
+          <p:cNvSpPr/>
+          <p:nvPr/>
+        </p:nvSpPr>
+        <p:spPr>
+          <a:xfrm>
+            <a:off x="530352" y="4645152"/>
+            <a:ext cx="2651760" cy="320040"/>
           </a:xfrm>
           <a:prstGeom prst="rect">
             <a:avLst/>
@@ -3006,11 +5347,11 @@
           <a:bodyPr wrap="square" lIns="0" tIns="0" rIns="0" bIns="0" rtlCol="0" anchor="ctr"/>
           <a:lstStyle/>
           <a:p>
-            <a:pPr indent="0" marL="0">
+            <a:pPr algn="ctr" indent="0" marL="0">
               <a:buNone/>
             </a:pPr>
             <a:r>
-              <a:rPr lang="en-US" sz="1500" b="1" dirty="0">
+              <a:rPr lang="en-US" sz="1200" b="1" dirty="0">
                 <a:solidFill>
                   <a:srgbClr val="005BAC"/>
                 </a:solidFill>
@@ -3018,44 +5359,22 @@
                 <a:ea typeface="Malgun Gothic" pitchFamily="34" charset="-122"/>
                 <a:cs typeface="Malgun Gothic" pitchFamily="34" charset="-120"/>
               </a:rPr>
-              <a:t>평가 항목 평균 점수</a:t>
-            </a:r>
-            <a:endParaRPr lang="en-US" sz="1500" dirty="0"/>
-          </a:p>
-        </p:txBody>
-      </p:sp>
-      <p:sp>
-        <p:nvSpPr>
-          <p:cNvPr id="10" name="Shape 7"/>
-          <p:cNvSpPr/>
-          <p:nvPr/>
-        </p:nvSpPr>
-        <p:spPr>
-          <a:xfrm>
-            <a:off x="6309360" y="1691640"/>
-            <a:ext cx="5486400" cy="868680"/>
-          </a:xfrm>
-          <a:prstGeom prst="roundRect">
-            <a:avLst>
-              <a:gd name="adj" fmla="val 6316"/>
-            </a:avLst>
-          </a:prstGeom>
-          <a:solidFill>
-            <a:srgbClr val="F5F8FC"/>
-          </a:solidFill>
-          <a:ln/>
-        </p:spPr>
-      </p:sp>
-      <p:sp>
-        <p:nvSpPr>
-          <p:cNvPr id="11" name="Text 8"/>
-          <p:cNvSpPr/>
-          <p:nvPr/>
-        </p:nvSpPr>
-        <p:spPr>
-          <a:xfrm>
-            <a:off x="6537960" y="1783080"/>
-            <a:ext cx="3291840" cy="365760"/>
+              <a:t>재방문율</a:t>
+            </a:r>
+            <a:endParaRPr lang="en-US" sz="1200" dirty="0"/>
+          </a:p>
+        </p:txBody>
+      </p:sp>
+      <p:sp>
+        <p:nvSpPr>
+          <p:cNvPr id="11" name="Text 7"/>
+          <p:cNvSpPr/>
+          <p:nvPr/>
+        </p:nvSpPr>
+        <p:spPr>
+          <a:xfrm>
+            <a:off x="530352" y="4956048"/>
+            <a:ext cx="2651760" cy="640080"/>
           </a:xfrm>
           <a:prstGeom prst="rect">
             <a:avLst/>
@@ -3067,50 +5386,11 @@
           <a:bodyPr wrap="square" lIns="0" tIns="0" rIns="0" bIns="0" rtlCol="0" anchor="ctr"/>
           <a:lstStyle/>
           <a:p>
-            <a:pPr indent="0" marL="0">
+            <a:pPr algn="ctr" indent="0" marL="0">
               <a:buNone/>
             </a:pPr>
             <a:r>
-              <a:rPr lang="en-US" sz="1300" dirty="0">
-                <a:solidFill>
-                  <a:srgbClr val="3F3F3F"/>
-                </a:solidFill>
-                <a:latin typeface="Malgun Gothic" pitchFamily="34" charset="0"/>
-                <a:ea typeface="Malgun Gothic" pitchFamily="34" charset="-122"/>
-                <a:cs typeface="Malgun Gothic" pitchFamily="34" charset="-120"/>
-              </a:rPr>
-              <a:t>응대/일정 조율</a:t>
-            </a:r>
-            <a:endParaRPr lang="en-US" sz="1300" dirty="0"/>
-          </a:p>
-        </p:txBody>
-      </p:sp>
-      <p:sp>
-        <p:nvSpPr>
-          <p:cNvPr id="12" name="Text 9"/>
-          <p:cNvSpPr/>
-          <p:nvPr/>
-        </p:nvSpPr>
-        <p:spPr>
-          <a:xfrm>
-            <a:off x="9692640" y="1783080"/>
-            <a:ext cx="1920240" cy="685800"/>
-          </a:xfrm>
-          <a:prstGeom prst="rect">
-            <a:avLst/>
-          </a:prstGeom>
-          <a:noFill/>
-          <a:ln/>
-        </p:spPr>
-        <p:txBody>
-          <a:bodyPr wrap="square" lIns="0" tIns="0" rIns="0" bIns="0" rtlCol="0" anchor="ctr"/>
-          <a:lstStyle/>
-          <a:p>
-            <a:pPr algn="r" indent="0" marL="0">
-              <a:buNone/>
-            </a:pPr>
-            <a:r>
-              <a:rPr lang="en-US" sz="1100" i="1" dirty="0">
+              <a:rPr lang="en-US" sz="1000" i="1" dirty="0">
                 <a:solidFill>
                   <a:srgbClr val="9E9E9E"/>
                 </a:solidFill>
@@ -3120,42 +5400,20 @@
               </a:rPr>
               <a:t>자료 미제공 – 추후 업데이트</a:t>
             </a:r>
-            <a:endParaRPr lang="en-US" sz="1100" dirty="0"/>
-          </a:p>
-        </p:txBody>
-      </p:sp>
-      <p:sp>
-        <p:nvSpPr>
-          <p:cNvPr id="13" name="Shape 10"/>
-          <p:cNvSpPr/>
-          <p:nvPr/>
-        </p:nvSpPr>
-        <p:spPr>
-          <a:xfrm>
-            <a:off x="6309360" y="2697480"/>
-            <a:ext cx="5486400" cy="868680"/>
-          </a:xfrm>
-          <a:prstGeom prst="roundRect">
-            <a:avLst>
-              <a:gd name="adj" fmla="val 6316"/>
-            </a:avLst>
-          </a:prstGeom>
-          <a:solidFill>
-            <a:srgbClr val="F5F8FC"/>
-          </a:solidFill>
-          <a:ln/>
-        </p:spPr>
-      </p:sp>
-      <p:sp>
-        <p:nvSpPr>
-          <p:cNvPr id="14" name="Text 11"/>
-          <p:cNvSpPr/>
-          <p:nvPr/>
-        </p:nvSpPr>
-        <p:spPr>
-          <a:xfrm>
-            <a:off x="6537960" y="2788920"/>
-            <a:ext cx="3291840" cy="365760"/>
+            <a:endParaRPr lang="en-US" sz="1000" dirty="0"/>
+          </a:p>
+        </p:txBody>
+      </p:sp>
+      <p:sp>
+        <p:nvSpPr>
+          <p:cNvPr id="12" name="Text 8"/>
+          <p:cNvSpPr/>
+          <p:nvPr/>
+        </p:nvSpPr>
+        <p:spPr>
+          <a:xfrm>
+            <a:off x="530352" y="5577840"/>
+            <a:ext cx="2651760" cy="320040"/>
           </a:xfrm>
           <a:prstGeom prst="rect">
             <a:avLst/>
@@ -3167,34 +5425,56 @@
           <a:bodyPr wrap="square" lIns="0" tIns="0" rIns="0" bIns="0" rtlCol="0" anchor="ctr"/>
           <a:lstStyle/>
           <a:p>
-            <a:pPr indent="0" marL="0">
+            <a:pPr algn="ctr" indent="0" marL="0">
               <a:buNone/>
             </a:pPr>
             <a:r>
-              <a:rPr lang="en-US" sz="1300" dirty="0">
+              <a:rPr lang="en-US" sz="1000" dirty="0">
                 <a:solidFill>
-                  <a:srgbClr val="3F3F3F"/>
+                  <a:srgbClr val="9E9E9E"/>
                 </a:solidFill>
                 <a:latin typeface="Malgun Gothic" pitchFamily="34" charset="0"/>
                 <a:ea typeface="Malgun Gothic" pitchFamily="34" charset="-122"/>
                 <a:cs typeface="Malgun Gothic" pitchFamily="34" charset="-120"/>
               </a:rPr>
-              <a:t>전문성/문제해결</a:t>
-            </a:r>
-            <a:endParaRPr lang="en-US" sz="1300" dirty="0"/>
-          </a:p>
-        </p:txBody>
-      </p:sp>
-      <p:sp>
-        <p:nvSpPr>
-          <p:cNvPr id="15" name="Text 12"/>
-          <p:cNvSpPr/>
-          <p:nvPr/>
-        </p:nvSpPr>
-        <p:spPr>
-          <a:xfrm>
-            <a:off x="9692640" y="2788920"/>
-            <a:ext cx="1920240" cy="685800"/>
+              <a:t>목표 15% 이하</a:t>
+            </a:r>
+            <a:endParaRPr lang="en-US" sz="1000" dirty="0"/>
+          </a:p>
+        </p:txBody>
+      </p:sp>
+      <p:sp>
+        <p:nvSpPr>
+          <p:cNvPr id="13" name="Shape 9"/>
+          <p:cNvSpPr/>
+          <p:nvPr/>
+        </p:nvSpPr>
+        <p:spPr>
+          <a:xfrm>
+            <a:off x="3383280" y="4526280"/>
+            <a:ext cx="2651760" cy="1463040"/>
+          </a:xfrm>
+          <a:prstGeom prst="roundRect">
+            <a:avLst>
+              <a:gd name="adj" fmla="val 4375"/>
+            </a:avLst>
+          </a:prstGeom>
+          <a:solidFill>
+            <a:srgbClr val="F5F8FC"/>
+          </a:solidFill>
+          <a:ln/>
+        </p:spPr>
+      </p:sp>
+      <p:sp>
+        <p:nvSpPr>
+          <p:cNvPr id="14" name="Text 10"/>
+          <p:cNvSpPr/>
+          <p:nvPr/>
+        </p:nvSpPr>
+        <p:spPr>
+          <a:xfrm>
+            <a:off x="3383280" y="4645152"/>
+            <a:ext cx="2651760" cy="320040"/>
           </a:xfrm>
           <a:prstGeom prst="rect">
             <a:avLst/>
@@ -3206,11 +5486,50 @@
           <a:bodyPr wrap="square" lIns="0" tIns="0" rIns="0" bIns="0" rtlCol="0" anchor="ctr"/>
           <a:lstStyle/>
           <a:p>
-            <a:pPr algn="r" indent="0" marL="0">
+            <a:pPr algn="ctr" indent="0" marL="0">
               <a:buNone/>
             </a:pPr>
             <a:r>
-              <a:rPr lang="en-US" sz="1100" i="1" dirty="0">
+              <a:rPr lang="en-US" sz="1200" b="1" dirty="0">
+                <a:solidFill>
+                  <a:srgbClr val="005BAC"/>
+                </a:solidFill>
+                <a:latin typeface="Malgun Gothic" pitchFamily="34" charset="0"/>
+                <a:ea typeface="Malgun Gothic" pitchFamily="34" charset="-122"/>
+                <a:cs typeface="Malgun Gothic" pitchFamily="34" charset="-120"/>
+              </a:rPr>
+              <a:t>Uptime</a:t>
+            </a:r>
+            <a:endParaRPr lang="en-US" sz="1200" dirty="0"/>
+          </a:p>
+        </p:txBody>
+      </p:sp>
+      <p:sp>
+        <p:nvSpPr>
+          <p:cNvPr id="15" name="Text 11"/>
+          <p:cNvSpPr/>
+          <p:nvPr/>
+        </p:nvSpPr>
+        <p:spPr>
+          <a:xfrm>
+            <a:off x="3383280" y="4956048"/>
+            <a:ext cx="2651760" cy="640080"/>
+          </a:xfrm>
+          <a:prstGeom prst="rect">
+            <a:avLst/>
+          </a:prstGeom>
+          <a:noFill/>
+          <a:ln/>
+        </p:spPr>
+        <p:txBody>
+          <a:bodyPr wrap="square" lIns="0" tIns="0" rIns="0" bIns="0" rtlCol="0" anchor="ctr"/>
+          <a:lstStyle/>
+          <a:p>
+            <a:pPr algn="ctr" indent="0" marL="0">
+              <a:buNone/>
+            </a:pPr>
+            <a:r>
+              <a:rPr lang="en-US" sz="1000" i="1" dirty="0">
                 <a:solidFill>
                   <a:srgbClr val="9E9E9E"/>
                 </a:solidFill>
@@ -3220,42 +5539,20 @@
               </a:rPr>
               <a:t>자료 미제공 – 추후 업데이트</a:t>
             </a:r>
-            <a:endParaRPr lang="en-US" sz="1100" dirty="0"/>
-          </a:p>
-        </p:txBody>
-      </p:sp>
-      <p:sp>
-        <p:nvSpPr>
-          <p:cNvPr id="16" name="Shape 13"/>
-          <p:cNvSpPr/>
-          <p:nvPr/>
-        </p:nvSpPr>
-        <p:spPr>
-          <a:xfrm>
-            <a:off x="6309360" y="3703320"/>
-            <a:ext cx="5486400" cy="868680"/>
-          </a:xfrm>
-          <a:prstGeom prst="roundRect">
-            <a:avLst>
-              <a:gd name="adj" fmla="val 6316"/>
-            </a:avLst>
-          </a:prstGeom>
-          <a:solidFill>
-            <a:srgbClr val="F5F8FC"/>
-          </a:solidFill>
-          <a:ln/>
-        </p:spPr>
-      </p:sp>
-      <p:sp>
-        <p:nvSpPr>
-          <p:cNvPr id="17" name="Text 14"/>
-          <p:cNvSpPr/>
-          <p:nvPr/>
-        </p:nvSpPr>
-        <p:spPr>
-          <a:xfrm>
-            <a:off x="6537960" y="3794760"/>
-            <a:ext cx="3291840" cy="365760"/>
+            <a:endParaRPr lang="en-US" sz="1000" dirty="0"/>
+          </a:p>
+        </p:txBody>
+      </p:sp>
+      <p:sp>
+        <p:nvSpPr>
+          <p:cNvPr id="16" name="Text 12"/>
+          <p:cNvSpPr/>
+          <p:nvPr/>
+        </p:nvSpPr>
+        <p:spPr>
+          <a:xfrm>
+            <a:off x="3383280" y="5577840"/>
+            <a:ext cx="2651760" cy="320040"/>
           </a:xfrm>
           <a:prstGeom prst="rect">
             <a:avLst/>
@@ -3267,34 +5564,56 @@
           <a:bodyPr wrap="square" lIns="0" tIns="0" rIns="0" bIns="0" rtlCol="0" anchor="ctr"/>
           <a:lstStyle/>
           <a:p>
-            <a:pPr indent="0" marL="0">
+            <a:pPr algn="ctr" indent="0" marL="0">
               <a:buNone/>
             </a:pPr>
             <a:r>
-              <a:rPr lang="en-US" sz="1300" dirty="0">
+              <a:rPr lang="en-US" sz="1000" dirty="0">
                 <a:solidFill>
-                  <a:srgbClr val="3F3F3F"/>
+                  <a:srgbClr val="9E9E9E"/>
                 </a:solidFill>
                 <a:latin typeface="Malgun Gothic" pitchFamily="34" charset="0"/>
                 <a:ea typeface="Malgun Gothic" pitchFamily="34" charset="-122"/>
                 <a:cs typeface="Malgun Gothic" pitchFamily="34" charset="-120"/>
               </a:rPr>
-              <a:t>고객 응대·마무리</a:t>
-            </a:r>
-            <a:endParaRPr lang="en-US" sz="1300" dirty="0"/>
-          </a:p>
-        </p:txBody>
-      </p:sp>
-      <p:sp>
-        <p:nvSpPr>
-          <p:cNvPr id="18" name="Text 15"/>
-          <p:cNvSpPr/>
-          <p:nvPr/>
-        </p:nvSpPr>
-        <p:spPr>
-          <a:xfrm>
-            <a:off x="9692640" y="3794760"/>
-            <a:ext cx="1920240" cy="685800"/>
+              <a:t>목표 90% 이상</a:t>
+            </a:r>
+            <a:endParaRPr lang="en-US" sz="1000" dirty="0"/>
+          </a:p>
+        </p:txBody>
+      </p:sp>
+      <p:sp>
+        <p:nvSpPr>
+          <p:cNvPr id="17" name="Shape 13"/>
+          <p:cNvSpPr/>
+          <p:nvPr/>
+        </p:nvSpPr>
+        <p:spPr>
+          <a:xfrm>
+            <a:off x="6236208" y="4526280"/>
+            <a:ext cx="2651760" cy="1463040"/>
+          </a:xfrm>
+          <a:prstGeom prst="roundRect">
+            <a:avLst>
+              <a:gd name="adj" fmla="val 4375"/>
+            </a:avLst>
+          </a:prstGeom>
+          <a:solidFill>
+            <a:srgbClr val="F5F8FC"/>
+          </a:solidFill>
+          <a:ln/>
+        </p:spPr>
+      </p:sp>
+      <p:sp>
+        <p:nvSpPr>
+          <p:cNvPr id="18" name="Text 14"/>
+          <p:cNvSpPr/>
+          <p:nvPr/>
+        </p:nvSpPr>
+        <p:spPr>
+          <a:xfrm>
+            <a:off x="6236208" y="4645152"/>
+            <a:ext cx="2651760" cy="320040"/>
           </a:xfrm>
           <a:prstGeom prst="rect">
             <a:avLst/>
@@ -3306,11 +5625,50 @@
           <a:bodyPr wrap="square" lIns="0" tIns="0" rIns="0" bIns="0" rtlCol="0" anchor="ctr"/>
           <a:lstStyle/>
           <a:p>
-            <a:pPr algn="r" indent="0" marL="0">
+            <a:pPr algn="ctr" indent="0" marL="0">
               <a:buNone/>
             </a:pPr>
             <a:r>
-              <a:rPr lang="en-US" sz="1100" i="1" dirty="0">
+              <a:rPr lang="en-US" sz="1200" b="1" dirty="0">
+                <a:solidFill>
+                  <a:srgbClr val="005BAC"/>
+                </a:solidFill>
+                <a:latin typeface="Malgun Gothic" pitchFamily="34" charset="0"/>
+                <a:ea typeface="Malgun Gothic" pitchFamily="34" charset="-122"/>
+                <a:cs typeface="Malgun Gothic" pitchFamily="34" charset="-120"/>
+              </a:rPr>
+              <a:t>FTFR</a:t>
+            </a:r>
+            <a:endParaRPr lang="en-US" sz="1200" dirty="0"/>
+          </a:p>
+        </p:txBody>
+      </p:sp>
+      <p:sp>
+        <p:nvSpPr>
+          <p:cNvPr id="19" name="Text 15"/>
+          <p:cNvSpPr/>
+          <p:nvPr/>
+        </p:nvSpPr>
+        <p:spPr>
+          <a:xfrm>
+            <a:off x="6236208" y="4956048"/>
+            <a:ext cx="2651760" cy="640080"/>
+          </a:xfrm>
+          <a:prstGeom prst="rect">
+            <a:avLst/>
+          </a:prstGeom>
+          <a:noFill/>
+          <a:ln/>
+        </p:spPr>
+        <p:txBody>
+          <a:bodyPr wrap="square" lIns="0" tIns="0" rIns="0" bIns="0" rtlCol="0" anchor="ctr"/>
+          <a:lstStyle/>
+          <a:p>
+            <a:pPr algn="ctr" indent="0" marL="0">
+              <a:buNone/>
+            </a:pPr>
+            <a:r>
+              <a:rPr lang="en-US" sz="1000" i="1" dirty="0">
                 <a:solidFill>
                   <a:srgbClr val="9E9E9E"/>
                 </a:solidFill>
@@ -3320,20 +5678,20 @@
               </a:rPr>
               <a:t>자료 미제공 – 추후 업데이트</a:t>
             </a:r>
-            <a:endParaRPr lang="en-US" sz="1100" dirty="0"/>
-          </a:p>
-        </p:txBody>
-      </p:sp>
-      <p:sp>
-        <p:nvSpPr>
-          <p:cNvPr id="19" name="Text 16"/>
-          <p:cNvSpPr/>
-          <p:nvPr/>
-        </p:nvSpPr>
-        <p:spPr>
-          <a:xfrm>
-            <a:off x="6309360" y="4800600"/>
-            <a:ext cx="5486400" cy="457200"/>
+            <a:endParaRPr lang="en-US" sz="1000" dirty="0"/>
+          </a:p>
+        </p:txBody>
+      </p:sp>
+      <p:sp>
+        <p:nvSpPr>
+          <p:cNvPr id="20" name="Text 16"/>
+          <p:cNvSpPr/>
+          <p:nvPr/>
+        </p:nvSpPr>
+        <p:spPr>
+          <a:xfrm>
+            <a:off x="6236208" y="5577840"/>
+            <a:ext cx="2651760" cy="320040"/>
           </a:xfrm>
           <a:prstGeom prst="rect">
             <a:avLst/>
@@ -3345,7 +5703,107 @@
           <a:bodyPr wrap="square" lIns="0" tIns="0" rIns="0" bIns="0" rtlCol="0" anchor="ctr"/>
           <a:lstStyle/>
           <a:p>
-            <a:pPr indent="0" marL="0">
+            <a:pPr algn="ctr" indent="0" marL="0">
+              <a:buNone/>
+            </a:pPr>
+            <a:r>
+              <a:rPr lang="en-US" sz="1000" dirty="0">
+                <a:solidFill>
+                  <a:srgbClr val="9E9E9E"/>
+                </a:solidFill>
+                <a:latin typeface="Malgun Gothic" pitchFamily="34" charset="0"/>
+                <a:ea typeface="Malgun Gothic" pitchFamily="34" charset="-122"/>
+                <a:cs typeface="Malgun Gothic" pitchFamily="34" charset="-120"/>
+              </a:rPr>
+              <a:t>참고 지표</a:t>
+            </a:r>
+            <a:endParaRPr lang="en-US" sz="1000" dirty="0"/>
+          </a:p>
+        </p:txBody>
+      </p:sp>
+      <p:sp>
+        <p:nvSpPr>
+          <p:cNvPr id="21" name="Shape 17"/>
+          <p:cNvSpPr/>
+          <p:nvPr/>
+        </p:nvSpPr>
+        <p:spPr>
+          <a:xfrm>
+            <a:off x="9089136" y="4526280"/>
+            <a:ext cx="2651760" cy="1463040"/>
+          </a:xfrm>
+          <a:prstGeom prst="roundRect">
+            <a:avLst>
+              <a:gd name="adj" fmla="val 4375"/>
+            </a:avLst>
+          </a:prstGeom>
+          <a:solidFill>
+            <a:srgbClr val="F5F8FC"/>
+          </a:solidFill>
+          <a:ln/>
+        </p:spPr>
+      </p:sp>
+      <p:sp>
+        <p:nvSpPr>
+          <p:cNvPr id="22" name="Text 18"/>
+          <p:cNvSpPr/>
+          <p:nvPr/>
+        </p:nvSpPr>
+        <p:spPr>
+          <a:xfrm>
+            <a:off x="9089136" y="4645152"/>
+            <a:ext cx="2651760" cy="320040"/>
+          </a:xfrm>
+          <a:prstGeom prst="rect">
+            <a:avLst/>
+          </a:prstGeom>
+          <a:noFill/>
+          <a:ln/>
+        </p:spPr>
+        <p:txBody>
+          <a:bodyPr wrap="square" lIns="0" tIns="0" rIns="0" bIns="0" rtlCol="0" anchor="ctr"/>
+          <a:lstStyle/>
+          <a:p>
+            <a:pPr algn="ctr" indent="0" marL="0">
+              <a:buNone/>
+            </a:pPr>
+            <a:r>
+              <a:rPr lang="en-US" sz="1200" b="1" dirty="0">
+                <a:solidFill>
+                  <a:srgbClr val="005BAC"/>
+                </a:solidFill>
+                <a:latin typeface="Malgun Gothic" pitchFamily="34" charset="0"/>
+                <a:ea typeface="Malgun Gothic" pitchFamily="34" charset="-122"/>
+                <a:cs typeface="Malgun Gothic" pitchFamily="34" charset="-120"/>
+              </a:rPr>
+              <a:t>책임 배정율</a:t>
+            </a:r>
+            <a:endParaRPr lang="en-US" sz="1200" dirty="0"/>
+          </a:p>
+        </p:txBody>
+      </p:sp>
+      <p:sp>
+        <p:nvSpPr>
+          <p:cNvPr id="23" name="Text 19"/>
+          <p:cNvSpPr/>
+          <p:nvPr/>
+        </p:nvSpPr>
+        <p:spPr>
+          <a:xfrm>
+            <a:off x="9089136" y="4956048"/>
+            <a:ext cx="2651760" cy="640080"/>
+          </a:xfrm>
+          <a:prstGeom prst="rect">
+            <a:avLst/>
+          </a:prstGeom>
+          <a:noFill/>
+          <a:ln/>
+        </p:spPr>
+        <p:txBody>
+          <a:bodyPr wrap="square" lIns="0" tIns="0" rIns="0" bIns="0" rtlCol="0" anchor="ctr"/>
+          <a:lstStyle/>
+          <a:p>
+            <a:pPr algn="ctr" indent="0" marL="0">
               <a:buNone/>
             </a:pPr>
             <a:r>
@@ -3357,7 +5815,7 @@
                 <a:ea typeface="Malgun Gothic" pitchFamily="34" charset="-122"/>
                 <a:cs typeface="Malgun Gothic" pitchFamily="34" charset="-120"/>
               </a:rPr>
-              <a:t>응답 건수: 자료 미제공 – 추후 업데이트 (고객 만족도 대시보드, 7월 기간 리포트 연동 예정)</a:t>
+              <a:t>자료 미제공 – 추후 업데이트</a:t>
             </a:r>
             <a:endParaRPr lang="en-US" sz="1000" dirty="0"/>
           </a:p>
@@ -3365,7 +5823,46 @@
       </p:sp>
       <p:sp>
         <p:nvSpPr>
-          <p:cNvPr id="20" name="Text 17"/>
+          <p:cNvPr id="24" name="Text 20"/>
+          <p:cNvSpPr/>
+          <p:nvPr/>
+        </p:nvSpPr>
+        <p:spPr>
+          <a:xfrm>
+            <a:off x="9089136" y="5577840"/>
+            <a:ext cx="2651760" cy="320040"/>
+          </a:xfrm>
+          <a:prstGeom prst="rect">
+            <a:avLst/>
+          </a:prstGeom>
+          <a:noFill/>
+          <a:ln/>
+        </p:spPr>
+        <p:txBody>
+          <a:bodyPr wrap="square" lIns="0" tIns="0" rIns="0" bIns="0" rtlCol="0" anchor="ctr"/>
+          <a:lstStyle/>
+          <a:p>
+            <a:pPr algn="ctr" indent="0" marL="0">
+              <a:buNone/>
+            </a:pPr>
+            <a:r>
+              <a:rPr lang="en-US" sz="1000" dirty="0">
+                <a:solidFill>
+                  <a:srgbClr val="9E9E9E"/>
+                </a:solidFill>
+                <a:latin typeface="Malgun Gothic" pitchFamily="34" charset="0"/>
+                <a:ea typeface="Malgun Gothic" pitchFamily="34" charset="-122"/>
+                <a:cs typeface="Malgun Gothic" pitchFamily="34" charset="-120"/>
+              </a:rPr>
+              <a:t>목표 100%</a:t>
+            </a:r>
+            <a:endParaRPr lang="en-US" sz="1000" dirty="0"/>
+          </a:p>
+        </p:txBody>
+      </p:sp>
+      <p:sp>
+        <p:nvSpPr>
+          <p:cNvPr id="25" name="Text 21"/>
           <p:cNvSpPr/>
           <p:nvPr/>
         </p:nvSpPr>
@@ -3404,7 +5901,7 @@
       </p:sp>
       <p:sp>
         <p:nvSpPr>
-          <p:cNvPr id="21" name="Text 18"/>
+          <p:cNvPr id="26" name="Text 22"/>
           <p:cNvSpPr/>
           <p:nvPr/>
         </p:nvSpPr>
@@ -3565,7 +6062,7 @@
                 <a:ea typeface="Malgun Gothic" pitchFamily="34" charset="-122"/>
                 <a:cs typeface="Malgun Gothic" pitchFamily="34" charset="-120"/>
               </a:rPr>
-              <a:t>특이사항 조치/해결 현황</a:t>
+              <a:t>VOC 수집 정보 및 처리현황</a:t>
             </a:r>
             <a:endParaRPr lang="en-US" sz="2600" dirty="0"/>
           </a:p>
@@ -3597,41 +6094,14 @@
       </p:pic>
       <p:sp>
         <p:nvSpPr>
-          <p:cNvPr id="6" name="Shape 3"/>
+          <p:cNvPr id="6" name="Text 3"/>
           <p:cNvSpPr/>
           <p:nvPr/>
         </p:nvSpPr>
         <p:spPr>
           <a:xfrm>
             <a:off x="530352" y="1188720"/>
-            <a:ext cx="11100816" cy="4480560"/>
-          </a:xfrm>
-          <a:prstGeom prst="roundRect">
-            <a:avLst>
-              <a:gd name="adj" fmla="val 1633"/>
-            </a:avLst>
-          </a:prstGeom>
-          <a:solidFill>
-            <a:srgbClr val="E6EEF7"/>
-          </a:solidFill>
-          <a:ln w="9525">
-            <a:solidFill>
-              <a:srgbClr val="005BAC"/>
-            </a:solidFill>
-            <a:prstDash val="dash"/>
-          </a:ln>
-        </p:spPr>
-      </p:sp>
-      <p:sp>
-        <p:nvSpPr>
-          <p:cNvPr id="7" name="Text 4"/>
-          <p:cNvSpPr/>
-          <p:nvPr/>
-        </p:nvSpPr>
-        <p:spPr>
-          <a:xfrm>
-            <a:off x="530352" y="1188720"/>
-            <a:ext cx="11100816" cy="4480560"/>
+            <a:ext cx="5486400" cy="320040"/>
           </a:xfrm>
           <a:prstGeom prst="rect">
             <a:avLst/>
@@ -3643,11 +6113,11 @@
           <a:bodyPr wrap="square" lIns="0" tIns="0" rIns="0" bIns="0" rtlCol="0" anchor="ctr"/>
           <a:lstStyle/>
           <a:p>
-            <a:pPr algn="ctr" indent="0" marL="0">
+            <a:pPr indent="0" marL="0">
               <a:buNone/>
             </a:pPr>
             <a:r>
-              <a:rPr lang="en-US" sz="1600" i="1" dirty="0">
+              <a:rPr lang="en-US" sz="1400" b="1" dirty="0">
                 <a:solidFill>
                   <a:srgbClr val="005BAC"/>
                 </a:solidFill>
@@ -3655,15 +6125,1215 @@
                 <a:ea typeface="Malgun Gothic" pitchFamily="34" charset="-122"/>
                 <a:cs typeface="Malgun Gothic" pitchFamily="34" charset="-120"/>
               </a:rPr>
+              <a:t>VOC 수집 현황</a:t>
+            </a:r>
+            <a:endParaRPr lang="en-US" sz="1400" dirty="0"/>
+          </a:p>
+        </p:txBody>
+      </p:sp>
+      <p:sp>
+        <p:nvSpPr>
+          <p:cNvPr id="7" name="Shape 4"/>
+          <p:cNvSpPr/>
+          <p:nvPr/>
+        </p:nvSpPr>
+        <p:spPr>
+          <a:xfrm>
+            <a:off x="530352" y="1554480"/>
+            <a:ext cx="5486400" cy="868680"/>
+          </a:xfrm>
+          <a:prstGeom prst="roundRect">
+            <a:avLst>
+              <a:gd name="adj" fmla="val 6316"/>
+            </a:avLst>
+          </a:prstGeom>
+          <a:solidFill>
+            <a:srgbClr val="F5F8FC"/>
+          </a:solidFill>
+          <a:ln/>
+        </p:spPr>
+      </p:sp>
+      <p:sp>
+        <p:nvSpPr>
+          <p:cNvPr id="8" name="Text 5"/>
+          <p:cNvSpPr/>
+          <p:nvPr/>
+        </p:nvSpPr>
+        <p:spPr>
+          <a:xfrm>
+            <a:off x="713232" y="1627632"/>
+            <a:ext cx="5120640" cy="365760"/>
+          </a:xfrm>
+          <a:prstGeom prst="rect">
+            <a:avLst/>
+          </a:prstGeom>
+          <a:noFill/>
+          <a:ln/>
+        </p:spPr>
+        <p:txBody>
+          <a:bodyPr wrap="square" lIns="0" tIns="0" rIns="0" bIns="0" rtlCol="0" anchor="ctr"/>
+          <a:lstStyle/>
+          <a:p>
+            <a:pPr indent="0" marL="0">
+              <a:buNone/>
+            </a:pPr>
+            <a:r>
+              <a:rPr lang="en-US" sz="1100" dirty="0">
+                <a:solidFill>
+                  <a:srgbClr val="3F3F3F"/>
+                </a:solidFill>
+                <a:latin typeface="Malgun Gothic" pitchFamily="34" charset="0"/>
+                <a:ea typeface="Malgun Gothic" pitchFamily="34" charset="-122"/>
+                <a:cs typeface="Malgun Gothic" pitchFamily="34" charset="-120"/>
+              </a:rPr>
+              <a:t>응답 건수</a:t>
+            </a:r>
+            <a:endParaRPr lang="en-US" sz="1100" dirty="0"/>
+          </a:p>
+        </p:txBody>
+      </p:sp>
+      <p:sp>
+        <p:nvSpPr>
+          <p:cNvPr id="9" name="Text 6"/>
+          <p:cNvSpPr/>
+          <p:nvPr/>
+        </p:nvSpPr>
+        <p:spPr>
+          <a:xfrm>
+            <a:off x="713232" y="1993392"/>
+            <a:ext cx="5120640" cy="365760"/>
+          </a:xfrm>
+          <a:prstGeom prst="rect">
+            <a:avLst/>
+          </a:prstGeom>
+          <a:noFill/>
+          <a:ln/>
+        </p:spPr>
+        <p:txBody>
+          <a:bodyPr wrap="square" lIns="0" tIns="0" rIns="0" bIns="0" rtlCol="0" anchor="ctr"/>
+          <a:lstStyle/>
+          <a:p>
+            <a:pPr indent="0" marL="0">
+              <a:buNone/>
+            </a:pPr>
+            <a:r>
+              <a:rPr lang="en-US" sz="1100" i="1" dirty="0">
+                <a:solidFill>
+                  <a:srgbClr val="9E9E9E"/>
+                </a:solidFill>
+                <a:latin typeface="Malgun Gothic" pitchFamily="34" charset="0"/>
+                <a:ea typeface="Malgun Gothic" pitchFamily="34" charset="-122"/>
+                <a:cs typeface="Malgun Gothic" pitchFamily="34" charset="-120"/>
+              </a:rPr>
               <a:t>자료 미제공 – 추후 업데이트</a:t>
             </a:r>
-            <a:endParaRPr lang="en-US" sz="1600" dirty="0"/>
-          </a:p>
-        </p:txBody>
-      </p:sp>
-      <p:sp>
-        <p:nvSpPr>
-          <p:cNvPr id="8" name="Text 5"/>
+            <a:endParaRPr lang="en-US" sz="1100" dirty="0"/>
+          </a:p>
+        </p:txBody>
+      </p:sp>
+      <p:sp>
+        <p:nvSpPr>
+          <p:cNvPr id="10" name="Shape 7"/>
+          <p:cNvSpPr/>
+          <p:nvPr/>
+        </p:nvSpPr>
+        <p:spPr>
+          <a:xfrm>
+            <a:off x="530352" y="2542032"/>
+            <a:ext cx="5486400" cy="868680"/>
+          </a:xfrm>
+          <a:prstGeom prst="roundRect">
+            <a:avLst>
+              <a:gd name="adj" fmla="val 6316"/>
+            </a:avLst>
+          </a:prstGeom>
+          <a:solidFill>
+            <a:srgbClr val="F5F8FC"/>
+          </a:solidFill>
+          <a:ln/>
+        </p:spPr>
+      </p:sp>
+      <p:sp>
+        <p:nvSpPr>
+          <p:cNvPr id="11" name="Text 8"/>
+          <p:cNvSpPr/>
+          <p:nvPr/>
+        </p:nvSpPr>
+        <p:spPr>
+          <a:xfrm>
+            <a:off x="713232" y="2615184"/>
+            <a:ext cx="5120640" cy="365760"/>
+          </a:xfrm>
+          <a:prstGeom prst="rect">
+            <a:avLst/>
+          </a:prstGeom>
+          <a:noFill/>
+          <a:ln/>
+        </p:spPr>
+        <p:txBody>
+          <a:bodyPr wrap="square" lIns="0" tIns="0" rIns="0" bIns="0" rtlCol="0" anchor="ctr"/>
+          <a:lstStyle/>
+          <a:p>
+            <a:pPr indent="0" marL="0">
+              <a:buNone/>
+            </a:pPr>
+            <a:r>
+              <a:rPr lang="en-US" sz="1100" dirty="0">
+                <a:solidFill>
+                  <a:srgbClr val="3F3F3F"/>
+                </a:solidFill>
+                <a:latin typeface="Malgun Gothic" pitchFamily="34" charset="0"/>
+                <a:ea typeface="Malgun Gothic" pitchFamily="34" charset="-122"/>
+                <a:cs typeface="Malgun Gothic" pitchFamily="34" charset="-120"/>
+              </a:rPr>
+              <a:t>평균 평점 (응대/일정·전문성/문제해결·고객응대)</a:t>
+            </a:r>
+            <a:endParaRPr lang="en-US" sz="1100" dirty="0"/>
+          </a:p>
+        </p:txBody>
+      </p:sp>
+      <p:sp>
+        <p:nvSpPr>
+          <p:cNvPr id="12" name="Text 9"/>
+          <p:cNvSpPr/>
+          <p:nvPr/>
+        </p:nvSpPr>
+        <p:spPr>
+          <a:xfrm>
+            <a:off x="713232" y="2980944"/>
+            <a:ext cx="5120640" cy="365760"/>
+          </a:xfrm>
+          <a:prstGeom prst="rect">
+            <a:avLst/>
+          </a:prstGeom>
+          <a:noFill/>
+          <a:ln/>
+        </p:spPr>
+        <p:txBody>
+          <a:bodyPr wrap="square" lIns="0" tIns="0" rIns="0" bIns="0" rtlCol="0" anchor="ctr"/>
+          <a:lstStyle/>
+          <a:p>
+            <a:pPr indent="0" marL="0">
+              <a:buNone/>
+            </a:pPr>
+            <a:r>
+              <a:rPr lang="en-US" sz="1100" i="1" dirty="0">
+                <a:solidFill>
+                  <a:srgbClr val="9E9E9E"/>
+                </a:solidFill>
+                <a:latin typeface="Malgun Gothic" pitchFamily="34" charset="0"/>
+                <a:ea typeface="Malgun Gothic" pitchFamily="34" charset="-122"/>
+                <a:cs typeface="Malgun Gothic" pitchFamily="34" charset="-120"/>
+              </a:rPr>
+              <a:t>자료 미제공 – 추후 업데이트</a:t>
+            </a:r>
+            <a:endParaRPr lang="en-US" sz="1100" dirty="0"/>
+          </a:p>
+        </p:txBody>
+      </p:sp>
+      <p:sp>
+        <p:nvSpPr>
+          <p:cNvPr id="13" name="Shape 10"/>
+          <p:cNvSpPr/>
+          <p:nvPr/>
+        </p:nvSpPr>
+        <p:spPr>
+          <a:xfrm>
+            <a:off x="530352" y="3529584"/>
+            <a:ext cx="5486400" cy="868680"/>
+          </a:xfrm>
+          <a:prstGeom prst="roundRect">
+            <a:avLst>
+              <a:gd name="adj" fmla="val 6316"/>
+            </a:avLst>
+          </a:prstGeom>
+          <a:solidFill>
+            <a:srgbClr val="F5F8FC"/>
+          </a:solidFill>
+          <a:ln/>
+        </p:spPr>
+      </p:sp>
+      <p:sp>
+        <p:nvSpPr>
+          <p:cNvPr id="14" name="Text 11"/>
+          <p:cNvSpPr/>
+          <p:nvPr/>
+        </p:nvSpPr>
+        <p:spPr>
+          <a:xfrm>
+            <a:off x="713232" y="3602736"/>
+            <a:ext cx="5120640" cy="365760"/>
+          </a:xfrm>
+          <a:prstGeom prst="rect">
+            <a:avLst/>
+          </a:prstGeom>
+          <a:noFill/>
+          <a:ln/>
+        </p:spPr>
+        <p:txBody>
+          <a:bodyPr wrap="square" lIns="0" tIns="0" rIns="0" bIns="0" rtlCol="0" anchor="ctr"/>
+          <a:lstStyle/>
+          <a:p>
+            <a:pPr indent="0" marL="0">
+              <a:buNone/>
+            </a:pPr>
+            <a:r>
+              <a:rPr lang="en-US" sz="1100" dirty="0">
+                <a:solidFill>
+                  <a:srgbClr val="3F3F3F"/>
+                </a:solidFill>
+                <a:latin typeface="Malgun Gothic" pitchFamily="34" charset="0"/>
+                <a:ea typeface="Malgun Gothic" pitchFamily="34" charset="-122"/>
+                <a:cs typeface="Malgun Gothic" pitchFamily="34" charset="-120"/>
+              </a:rPr>
+              <a:t>유형별 분포 (기술문의/AS·응대지연·인력공백·장비신뢰성·기타)</a:t>
+            </a:r>
+            <a:endParaRPr lang="en-US" sz="1100" dirty="0"/>
+          </a:p>
+        </p:txBody>
+      </p:sp>
+      <p:sp>
+        <p:nvSpPr>
+          <p:cNvPr id="15" name="Text 12"/>
+          <p:cNvSpPr/>
+          <p:nvPr/>
+        </p:nvSpPr>
+        <p:spPr>
+          <a:xfrm>
+            <a:off x="713232" y="3968496"/>
+            <a:ext cx="5120640" cy="365760"/>
+          </a:xfrm>
+          <a:prstGeom prst="rect">
+            <a:avLst/>
+          </a:prstGeom>
+          <a:noFill/>
+          <a:ln/>
+        </p:spPr>
+        <p:txBody>
+          <a:bodyPr wrap="square" lIns="0" tIns="0" rIns="0" bIns="0" rtlCol="0" anchor="ctr"/>
+          <a:lstStyle/>
+          <a:p>
+            <a:pPr indent="0" marL="0">
+              <a:buNone/>
+            </a:pPr>
+            <a:r>
+              <a:rPr lang="en-US" sz="1100" i="1" dirty="0">
+                <a:solidFill>
+                  <a:srgbClr val="9E9E9E"/>
+                </a:solidFill>
+                <a:latin typeface="Malgun Gothic" pitchFamily="34" charset="0"/>
+                <a:ea typeface="Malgun Gothic" pitchFamily="34" charset="-122"/>
+                <a:cs typeface="Malgun Gothic" pitchFamily="34" charset="-120"/>
+              </a:rPr>
+              <a:t>자료 미제공 – 추후 업데이트</a:t>
+            </a:r>
+            <a:endParaRPr lang="en-US" sz="1100" dirty="0"/>
+          </a:p>
+        </p:txBody>
+      </p:sp>
+      <p:sp>
+        <p:nvSpPr>
+          <p:cNvPr id="16" name="Text 13"/>
+          <p:cNvSpPr/>
+          <p:nvPr/>
+        </p:nvSpPr>
+        <p:spPr>
+          <a:xfrm>
+            <a:off x="6309360" y="1188720"/>
+            <a:ext cx="5486400" cy="320040"/>
+          </a:xfrm>
+          <a:prstGeom prst="rect">
+            <a:avLst/>
+          </a:prstGeom>
+          <a:noFill/>
+          <a:ln/>
+        </p:spPr>
+        <p:txBody>
+          <a:bodyPr wrap="square" lIns="0" tIns="0" rIns="0" bIns="0" rtlCol="0" anchor="ctr"/>
+          <a:lstStyle/>
+          <a:p>
+            <a:pPr indent="0" marL="0">
+              <a:buNone/>
+            </a:pPr>
+            <a:r>
+              <a:rPr lang="en-US" sz="1400" b="1" dirty="0">
+                <a:solidFill>
+                  <a:srgbClr val="005BAC"/>
+                </a:solidFill>
+                <a:latin typeface="Malgun Gothic" pitchFamily="34" charset="0"/>
+                <a:ea typeface="Malgun Gothic" pitchFamily="34" charset="-122"/>
+                <a:cs typeface="Malgun Gothic" pitchFamily="34" charset="-120"/>
+              </a:rPr>
+              <a:t>VOC 처리현황</a:t>
+            </a:r>
+            <a:endParaRPr lang="en-US" sz="1400" dirty="0"/>
+          </a:p>
+        </p:txBody>
+      </p:sp>
+      <p:graphicFrame>
+        <p:nvGraphicFramePr>
+          <p:cNvPr id="5" name="Table 0"/>
+          <p:cNvGraphicFramePr>
+            <a:graphicFrameLocks noGrp="1"/>
+          </p:cNvGraphicFramePr>
+          <p:nvPr>
+            <p:extLst>
+              <p:ext uri="{D42A27DB-BD31-4B8C-83A1-F6EECF244321}">
+                <p14:modId xmlns:p14="http://schemas.microsoft.com/office/powerpoint/2010/main" val="1579011935"/>
+              </p:ext>
+            </p:extLst>
+          </p:nvPr>
+        </p:nvGraphicFramePr>
+        <p:xfrm>
+          <a:off x="6309360" y="1554480"/>
+          <a:ext cx="5486400" cy="914400"/>
+        </p:xfrm>
+        <a:graphic>
+          <a:graphicData uri="http://schemas.openxmlformats.org/drawingml/2006/table">
+            <a:tbl>
+              <a:tblPr/>
+              <a:tblGrid>
+                <a:gridCol w="2377440"/>
+                <a:gridCol w="1554480"/>
+                <a:gridCol w="1554480"/>
+              </a:tblGrid>
+              <a:tr h="502920">
+                <a:tc>
+                  <a:txBody>
+                    <a:bodyPr/>
+                    <a:lstStyle/>
+                    <a:p>
+                      <a:pPr algn="l" indent="0" marL="0">
+                        <a:buNone/>
+                      </a:pPr>
+                      <a:r>
+                        <a:rPr lang="en-US" sz="1200" b="1" dirty="0">
+                          <a:solidFill>
+                            <a:srgbClr val="FFFFFF"/>
+                          </a:solidFill>
+                          <a:latin typeface="Malgun Gothic" pitchFamily="34" charset="0"/>
+                          <a:ea typeface="Malgun Gothic" pitchFamily="34" charset="-122"/>
+                          <a:cs typeface="Malgun Gothic" pitchFamily="34" charset="-120"/>
+                        </a:rPr>
+                        <a:t>처리 상태</a:t>
+                      </a:r>
+                      <a:endParaRPr lang="en-US" sz="1200" dirty="0">
+                        <a:latin typeface="Malgun Gothic" charset="0"/>
+                        <a:ea typeface="Malgun Gothic" charset="0"/>
+                        <a:cs typeface="Malgun Gothic" charset="0"/>
+                      </a:endParaRPr>
+                    </a:p>
+                  </a:txBody>
+                  <a:tcPr marL="91440" marR="91440" marT="45720" marB="45720" anchor="ctr">
+                    <a:lnL w="9525" cap="flat" cmpd="sng" algn="ctr">
+                      <a:solidFill>
+                        <a:srgbClr val="D9D9D9"/>
+                      </a:solidFill>
+                      <a:prstDash val="solid"/>
+                      <a:round/>
+                      <a:headEnd type="none" w="med" len="med"/>
+                      <a:tailEnd type="none" w="med" len="med"/>
+                    </a:lnL>
+                    <a:lnR w="9525" cap="flat" cmpd="sng" algn="ctr">
+                      <a:solidFill>
+                        <a:srgbClr val="D9D9D9"/>
+                      </a:solidFill>
+                      <a:prstDash val="solid"/>
+                      <a:round/>
+                      <a:headEnd type="none" w="med" len="med"/>
+                      <a:tailEnd type="none" w="med" len="med"/>
+                    </a:lnR>
+                    <a:lnT w="9525" cap="flat" cmpd="sng" algn="ctr">
+                      <a:solidFill>
+                        <a:srgbClr val="D9D9D9"/>
+                      </a:solidFill>
+                      <a:prstDash val="solid"/>
+                      <a:round/>
+                      <a:headEnd type="none" w="med" len="med"/>
+                      <a:tailEnd type="none" w="med" len="med"/>
+                    </a:lnT>
+                    <a:lnB w="9525" cap="flat" cmpd="sng" algn="ctr">
+                      <a:solidFill>
+                        <a:srgbClr val="D9D9D9"/>
+                      </a:solidFill>
+                      <a:prstDash val="solid"/>
+                      <a:round/>
+                      <a:headEnd type="none" w="med" len="med"/>
+                      <a:tailEnd type="none" w="med" len="med"/>
+                    </a:lnB>
+                    <a:solidFill>
+                      <a:srgbClr val="005BAC"/>
+                    </a:solidFill>
+                  </a:tcPr>
+                </a:tc>
+                <a:tc>
+                  <a:txBody>
+                    <a:bodyPr/>
+                    <a:lstStyle/>
+                    <a:p>
+                      <a:pPr algn="ctr" indent="0" marL="0">
+                        <a:buNone/>
+                      </a:pPr>
+                      <a:r>
+                        <a:rPr lang="en-US" sz="1200" b="1" dirty="0">
+                          <a:solidFill>
+                            <a:srgbClr val="FFFFFF"/>
+                          </a:solidFill>
+                          <a:latin typeface="Malgun Gothic" pitchFamily="34" charset="0"/>
+                          <a:ea typeface="Malgun Gothic" pitchFamily="34" charset="-122"/>
+                          <a:cs typeface="Malgun Gothic" pitchFamily="34" charset="-120"/>
+                        </a:rPr>
+                        <a:t>건수</a:t>
+                      </a:r>
+                      <a:endParaRPr lang="en-US" sz="1200" dirty="0">
+                        <a:latin typeface="Malgun Gothic" charset="0"/>
+                        <a:ea typeface="Malgun Gothic" charset="0"/>
+                        <a:cs typeface="Malgun Gothic" charset="0"/>
+                      </a:endParaRPr>
+                    </a:p>
+                  </a:txBody>
+                  <a:tcPr marL="91440" marR="91440" marT="45720" marB="45720" anchor="ctr">
+                    <a:lnL w="9525" cap="flat" cmpd="sng" algn="ctr">
+                      <a:solidFill>
+                        <a:srgbClr val="D9D9D9"/>
+                      </a:solidFill>
+                      <a:prstDash val="solid"/>
+                      <a:round/>
+                      <a:headEnd type="none" w="med" len="med"/>
+                      <a:tailEnd type="none" w="med" len="med"/>
+                    </a:lnL>
+                    <a:lnR w="9525" cap="flat" cmpd="sng" algn="ctr">
+                      <a:solidFill>
+                        <a:srgbClr val="D9D9D9"/>
+                      </a:solidFill>
+                      <a:prstDash val="solid"/>
+                      <a:round/>
+                      <a:headEnd type="none" w="med" len="med"/>
+                      <a:tailEnd type="none" w="med" len="med"/>
+                    </a:lnR>
+                    <a:lnT w="9525" cap="flat" cmpd="sng" algn="ctr">
+                      <a:solidFill>
+                        <a:srgbClr val="D9D9D9"/>
+                      </a:solidFill>
+                      <a:prstDash val="solid"/>
+                      <a:round/>
+                      <a:headEnd type="none" w="med" len="med"/>
+                      <a:tailEnd type="none" w="med" len="med"/>
+                    </a:lnT>
+                    <a:lnB w="9525" cap="flat" cmpd="sng" algn="ctr">
+                      <a:solidFill>
+                        <a:srgbClr val="D9D9D9"/>
+                      </a:solidFill>
+                      <a:prstDash val="solid"/>
+                      <a:round/>
+                      <a:headEnd type="none" w="med" len="med"/>
+                      <a:tailEnd type="none" w="med" len="med"/>
+                    </a:lnB>
+                    <a:solidFill>
+                      <a:srgbClr val="005BAC"/>
+                    </a:solidFill>
+                  </a:tcPr>
+                </a:tc>
+                <a:tc>
+                  <a:txBody>
+                    <a:bodyPr/>
+                    <a:lstStyle/>
+                    <a:p>
+                      <a:pPr algn="ctr" indent="0" marL="0">
+                        <a:buNone/>
+                      </a:pPr>
+                      <a:r>
+                        <a:rPr lang="en-US" sz="1200" b="1" dirty="0">
+                          <a:solidFill>
+                            <a:srgbClr val="FFFFFF"/>
+                          </a:solidFill>
+                          <a:latin typeface="Malgun Gothic" pitchFamily="34" charset="0"/>
+                          <a:ea typeface="Malgun Gothic" pitchFamily="34" charset="-122"/>
+                          <a:cs typeface="Malgun Gothic" pitchFamily="34" charset="-120"/>
+                        </a:rPr>
+                        <a:t>비고</a:t>
+                      </a:r>
+                      <a:endParaRPr lang="en-US" sz="1200" dirty="0">
+                        <a:latin typeface="Malgun Gothic" charset="0"/>
+                        <a:ea typeface="Malgun Gothic" charset="0"/>
+                        <a:cs typeface="Malgun Gothic" charset="0"/>
+                      </a:endParaRPr>
+                    </a:p>
+                  </a:txBody>
+                  <a:tcPr marL="91440" marR="91440" marT="45720" marB="45720" anchor="ctr">
+                    <a:lnL w="9525" cap="flat" cmpd="sng" algn="ctr">
+                      <a:solidFill>
+                        <a:srgbClr val="D9D9D9"/>
+                      </a:solidFill>
+                      <a:prstDash val="solid"/>
+                      <a:round/>
+                      <a:headEnd type="none" w="med" len="med"/>
+                      <a:tailEnd type="none" w="med" len="med"/>
+                    </a:lnL>
+                    <a:lnR w="9525" cap="flat" cmpd="sng" algn="ctr">
+                      <a:solidFill>
+                        <a:srgbClr val="D9D9D9"/>
+                      </a:solidFill>
+                      <a:prstDash val="solid"/>
+                      <a:round/>
+                      <a:headEnd type="none" w="med" len="med"/>
+                      <a:tailEnd type="none" w="med" len="med"/>
+                    </a:lnR>
+                    <a:lnT w="9525" cap="flat" cmpd="sng" algn="ctr">
+                      <a:solidFill>
+                        <a:srgbClr val="D9D9D9"/>
+                      </a:solidFill>
+                      <a:prstDash val="solid"/>
+                      <a:round/>
+                      <a:headEnd type="none" w="med" len="med"/>
+                      <a:tailEnd type="none" w="med" len="med"/>
+                    </a:lnT>
+                    <a:lnB w="9525" cap="flat" cmpd="sng" algn="ctr">
+                      <a:solidFill>
+                        <a:srgbClr val="D9D9D9"/>
+                      </a:solidFill>
+                      <a:prstDash val="solid"/>
+                      <a:round/>
+                      <a:headEnd type="none" w="med" len="med"/>
+                      <a:tailEnd type="none" w="med" len="med"/>
+                    </a:lnB>
+                    <a:solidFill>
+                      <a:srgbClr val="005BAC"/>
+                    </a:solidFill>
+                  </a:tcPr>
+                </a:tc>
+              </a:tr>
+              <a:tr h="502920">
+                <a:tc>
+                  <a:txBody>
+                    <a:bodyPr/>
+                    <a:lstStyle/>
+                    <a:p>
+                      <a:pPr algn="l" indent="0" marL="0">
+                        <a:buNone/>
+                      </a:pPr>
+                      <a:r>
+                        <a:rPr lang="en-US" sz="1200" dirty="0">
+                          <a:solidFill>
+                            <a:srgbClr val="3F3F3F"/>
+                          </a:solidFill>
+                          <a:latin typeface="Malgun Gothic" pitchFamily="34" charset="0"/>
+                          <a:ea typeface="Malgun Gothic" pitchFamily="34" charset="-122"/>
+                          <a:cs typeface="Malgun Gothic" pitchFamily="34" charset="-120"/>
+                        </a:rPr>
+                        <a:t>처리완료</a:t>
+                      </a:r>
+                      <a:endParaRPr lang="en-US" sz="1200" dirty="0">
+                        <a:latin typeface="Malgun Gothic" charset="0"/>
+                        <a:ea typeface="Malgun Gothic" charset="0"/>
+                        <a:cs typeface="Malgun Gothic" charset="0"/>
+                      </a:endParaRPr>
+                    </a:p>
+                  </a:txBody>
+                  <a:tcPr marL="91440" marR="91440" marT="45720" marB="45720" anchor="ctr">
+                    <a:lnL w="9525" cap="flat" cmpd="sng" algn="ctr">
+                      <a:solidFill>
+                        <a:srgbClr val="D9D9D9"/>
+                      </a:solidFill>
+                      <a:prstDash val="solid"/>
+                      <a:round/>
+                      <a:headEnd type="none" w="med" len="med"/>
+                      <a:tailEnd type="none" w="med" len="med"/>
+                    </a:lnL>
+                    <a:lnR w="9525" cap="flat" cmpd="sng" algn="ctr">
+                      <a:solidFill>
+                        <a:srgbClr val="D9D9D9"/>
+                      </a:solidFill>
+                      <a:prstDash val="solid"/>
+                      <a:round/>
+                      <a:headEnd type="none" w="med" len="med"/>
+                      <a:tailEnd type="none" w="med" len="med"/>
+                    </a:lnR>
+                    <a:lnT w="9525" cap="flat" cmpd="sng" algn="ctr">
+                      <a:solidFill>
+                        <a:srgbClr val="D9D9D9"/>
+                      </a:solidFill>
+                      <a:prstDash val="solid"/>
+                      <a:round/>
+                      <a:headEnd type="none" w="med" len="med"/>
+                      <a:tailEnd type="none" w="med" len="med"/>
+                    </a:lnT>
+                    <a:lnB w="9525" cap="flat" cmpd="sng" algn="ctr">
+                      <a:solidFill>
+                        <a:srgbClr val="D9D9D9"/>
+                      </a:solidFill>
+                      <a:prstDash val="solid"/>
+                      <a:round/>
+                      <a:headEnd type="none" w="med" len="med"/>
+                      <a:tailEnd type="none" w="med" len="med"/>
+                    </a:lnB>
+                    <a:solidFill>
+                      <a:srgbClr val="FFFFFF"/>
+                    </a:solidFill>
+                  </a:tcPr>
+                </a:tc>
+                <a:tc>
+                  <a:txBody>
+                    <a:bodyPr/>
+                    <a:lstStyle/>
+                    <a:p>
+                      <a:pPr algn="ctr" indent="0" marL="0">
+                        <a:buNone/>
+                      </a:pPr>
+                      <a:r>
+                        <a:rPr lang="en-US" sz="1200" i="1" dirty="0">
+                          <a:solidFill>
+                            <a:srgbClr val="3F3F3F"/>
+                          </a:solidFill>
+                          <a:latin typeface="Malgun Gothic" pitchFamily="34" charset="0"/>
+                          <a:ea typeface="Malgun Gothic" pitchFamily="34" charset="-122"/>
+                          <a:cs typeface="Malgun Gothic" pitchFamily="34" charset="-120"/>
+                        </a:rPr>
+                        <a:t>자료 미제공 – 추후 업데이트</a:t>
+                      </a:r>
+                      <a:endParaRPr lang="en-US" sz="1200" dirty="0">
+                        <a:latin typeface="Malgun Gothic" charset="0"/>
+                        <a:ea typeface="Malgun Gothic" charset="0"/>
+                        <a:cs typeface="Malgun Gothic" charset="0"/>
+                      </a:endParaRPr>
+                    </a:p>
+                  </a:txBody>
+                  <a:tcPr marL="91440" marR="91440" marT="45720" marB="45720" anchor="ctr">
+                    <a:lnL w="9525" cap="flat" cmpd="sng" algn="ctr">
+                      <a:solidFill>
+                        <a:srgbClr val="D9D9D9"/>
+                      </a:solidFill>
+                      <a:prstDash val="solid"/>
+                      <a:round/>
+                      <a:headEnd type="none" w="med" len="med"/>
+                      <a:tailEnd type="none" w="med" len="med"/>
+                    </a:lnL>
+                    <a:lnR w="9525" cap="flat" cmpd="sng" algn="ctr">
+                      <a:solidFill>
+                        <a:srgbClr val="D9D9D9"/>
+                      </a:solidFill>
+                      <a:prstDash val="solid"/>
+                      <a:round/>
+                      <a:headEnd type="none" w="med" len="med"/>
+                      <a:tailEnd type="none" w="med" len="med"/>
+                    </a:lnR>
+                    <a:lnT w="9525" cap="flat" cmpd="sng" algn="ctr">
+                      <a:solidFill>
+                        <a:srgbClr val="D9D9D9"/>
+                      </a:solidFill>
+                      <a:prstDash val="solid"/>
+                      <a:round/>
+                      <a:headEnd type="none" w="med" len="med"/>
+                      <a:tailEnd type="none" w="med" len="med"/>
+                    </a:lnT>
+                    <a:lnB w="9525" cap="flat" cmpd="sng" algn="ctr">
+                      <a:solidFill>
+                        <a:srgbClr val="D9D9D9"/>
+                      </a:solidFill>
+                      <a:prstDash val="solid"/>
+                      <a:round/>
+                      <a:headEnd type="none" w="med" len="med"/>
+                      <a:tailEnd type="none" w="med" len="med"/>
+                    </a:lnB>
+                    <a:solidFill>
+                      <a:srgbClr val="FFFFFF"/>
+                    </a:solidFill>
+                  </a:tcPr>
+                </a:tc>
+                <a:tc>
+                  <a:txBody>
+                    <a:bodyPr/>
+                    <a:lstStyle/>
+                    <a:p>
+                      <a:pPr algn="ctr" indent="0" marL="0">
+                        <a:buNone/>
+                      </a:pPr>
+                      <a:endParaRPr lang="en-US" sz="1200" dirty="0">
+                        <a:latin typeface="Malgun Gothic" charset="0"/>
+                        <a:ea typeface="Malgun Gothic" charset="0"/>
+                        <a:cs typeface="Malgun Gothic" charset="0"/>
+                      </a:endParaRPr>
+                    </a:p>
+                  </a:txBody>
+                  <a:tcPr marL="91440" marR="91440" marT="45720" marB="45720" anchor="ctr">
+                    <a:lnL w="9525" cap="flat" cmpd="sng" algn="ctr">
+                      <a:solidFill>
+                        <a:srgbClr val="D9D9D9"/>
+                      </a:solidFill>
+                      <a:prstDash val="solid"/>
+                      <a:round/>
+                      <a:headEnd type="none" w="med" len="med"/>
+                      <a:tailEnd type="none" w="med" len="med"/>
+                    </a:lnL>
+                    <a:lnR w="9525" cap="flat" cmpd="sng" algn="ctr">
+                      <a:solidFill>
+                        <a:srgbClr val="D9D9D9"/>
+                      </a:solidFill>
+                      <a:prstDash val="solid"/>
+                      <a:round/>
+                      <a:headEnd type="none" w="med" len="med"/>
+                      <a:tailEnd type="none" w="med" len="med"/>
+                    </a:lnR>
+                    <a:lnT w="9525" cap="flat" cmpd="sng" algn="ctr">
+                      <a:solidFill>
+                        <a:srgbClr val="D9D9D9"/>
+                      </a:solidFill>
+                      <a:prstDash val="solid"/>
+                      <a:round/>
+                      <a:headEnd type="none" w="med" len="med"/>
+                      <a:tailEnd type="none" w="med" len="med"/>
+                    </a:lnT>
+                    <a:lnB w="9525" cap="flat" cmpd="sng" algn="ctr">
+                      <a:solidFill>
+                        <a:srgbClr val="D9D9D9"/>
+                      </a:solidFill>
+                      <a:prstDash val="solid"/>
+                      <a:round/>
+                      <a:headEnd type="none" w="med" len="med"/>
+                      <a:tailEnd type="none" w="med" len="med"/>
+                    </a:lnB>
+                    <a:solidFill>
+                      <a:srgbClr val="FFFFFF"/>
+                    </a:solidFill>
+                  </a:tcPr>
+                </a:tc>
+              </a:tr>
+              <a:tr h="502920">
+                <a:tc>
+                  <a:txBody>
+                    <a:bodyPr/>
+                    <a:lstStyle/>
+                    <a:p>
+                      <a:pPr algn="l" indent="0" marL="0">
+                        <a:buNone/>
+                      </a:pPr>
+                      <a:r>
+                        <a:rPr lang="en-US" sz="1200" dirty="0">
+                          <a:solidFill>
+                            <a:srgbClr val="3F3F3F"/>
+                          </a:solidFill>
+                          <a:latin typeface="Malgun Gothic" pitchFamily="34" charset="0"/>
+                          <a:ea typeface="Malgun Gothic" pitchFamily="34" charset="-122"/>
+                          <a:cs typeface="Malgun Gothic" pitchFamily="34" charset="-120"/>
+                        </a:rPr>
+                        <a:t>처리중</a:t>
+                      </a:r>
+                      <a:endParaRPr lang="en-US" sz="1200" dirty="0">
+                        <a:latin typeface="Malgun Gothic" charset="0"/>
+                        <a:ea typeface="Malgun Gothic" charset="0"/>
+                        <a:cs typeface="Malgun Gothic" charset="0"/>
+                      </a:endParaRPr>
+                    </a:p>
+                  </a:txBody>
+                  <a:tcPr marL="91440" marR="91440" marT="45720" marB="45720" anchor="ctr">
+                    <a:lnL w="9525" cap="flat" cmpd="sng" algn="ctr">
+                      <a:solidFill>
+                        <a:srgbClr val="D9D9D9"/>
+                      </a:solidFill>
+                      <a:prstDash val="solid"/>
+                      <a:round/>
+                      <a:headEnd type="none" w="med" len="med"/>
+                      <a:tailEnd type="none" w="med" len="med"/>
+                    </a:lnL>
+                    <a:lnR w="9525" cap="flat" cmpd="sng" algn="ctr">
+                      <a:solidFill>
+                        <a:srgbClr val="D9D9D9"/>
+                      </a:solidFill>
+                      <a:prstDash val="solid"/>
+                      <a:round/>
+                      <a:headEnd type="none" w="med" len="med"/>
+                      <a:tailEnd type="none" w="med" len="med"/>
+                    </a:lnR>
+                    <a:lnT w="9525" cap="flat" cmpd="sng" algn="ctr">
+                      <a:solidFill>
+                        <a:srgbClr val="D9D9D9"/>
+                      </a:solidFill>
+                      <a:prstDash val="solid"/>
+                      <a:round/>
+                      <a:headEnd type="none" w="med" len="med"/>
+                      <a:tailEnd type="none" w="med" len="med"/>
+                    </a:lnT>
+                    <a:lnB w="9525" cap="flat" cmpd="sng" algn="ctr">
+                      <a:solidFill>
+                        <a:srgbClr val="D9D9D9"/>
+                      </a:solidFill>
+                      <a:prstDash val="solid"/>
+                      <a:round/>
+                      <a:headEnd type="none" w="med" len="med"/>
+                      <a:tailEnd type="none" w="med" len="med"/>
+                    </a:lnB>
+                    <a:solidFill>
+                      <a:srgbClr val="FFFFFF"/>
+                    </a:solidFill>
+                  </a:tcPr>
+                </a:tc>
+                <a:tc>
+                  <a:txBody>
+                    <a:bodyPr/>
+                    <a:lstStyle/>
+                    <a:p>
+                      <a:pPr algn="ctr" indent="0" marL="0">
+                        <a:buNone/>
+                      </a:pPr>
+                      <a:r>
+                        <a:rPr lang="en-US" sz="1200" i="1" dirty="0">
+                          <a:solidFill>
+                            <a:srgbClr val="3F3F3F"/>
+                          </a:solidFill>
+                          <a:latin typeface="Malgun Gothic" pitchFamily="34" charset="0"/>
+                          <a:ea typeface="Malgun Gothic" pitchFamily="34" charset="-122"/>
+                          <a:cs typeface="Malgun Gothic" pitchFamily="34" charset="-120"/>
+                        </a:rPr>
+                        <a:t>자료 미제공 – 추후 업데이트</a:t>
+                      </a:r>
+                      <a:endParaRPr lang="en-US" sz="1200" dirty="0">
+                        <a:latin typeface="Malgun Gothic" charset="0"/>
+                        <a:ea typeface="Malgun Gothic" charset="0"/>
+                        <a:cs typeface="Malgun Gothic" charset="0"/>
+                      </a:endParaRPr>
+                    </a:p>
+                  </a:txBody>
+                  <a:tcPr marL="91440" marR="91440" marT="45720" marB="45720" anchor="ctr">
+                    <a:lnL w="9525" cap="flat" cmpd="sng" algn="ctr">
+                      <a:solidFill>
+                        <a:srgbClr val="D9D9D9"/>
+                      </a:solidFill>
+                      <a:prstDash val="solid"/>
+                      <a:round/>
+                      <a:headEnd type="none" w="med" len="med"/>
+                      <a:tailEnd type="none" w="med" len="med"/>
+                    </a:lnL>
+                    <a:lnR w="9525" cap="flat" cmpd="sng" algn="ctr">
+                      <a:solidFill>
+                        <a:srgbClr val="D9D9D9"/>
+                      </a:solidFill>
+                      <a:prstDash val="solid"/>
+                      <a:round/>
+                      <a:headEnd type="none" w="med" len="med"/>
+                      <a:tailEnd type="none" w="med" len="med"/>
+                    </a:lnR>
+                    <a:lnT w="9525" cap="flat" cmpd="sng" algn="ctr">
+                      <a:solidFill>
+                        <a:srgbClr val="D9D9D9"/>
+                      </a:solidFill>
+                      <a:prstDash val="solid"/>
+                      <a:round/>
+                      <a:headEnd type="none" w="med" len="med"/>
+                      <a:tailEnd type="none" w="med" len="med"/>
+                    </a:lnT>
+                    <a:lnB w="9525" cap="flat" cmpd="sng" algn="ctr">
+                      <a:solidFill>
+                        <a:srgbClr val="D9D9D9"/>
+                      </a:solidFill>
+                      <a:prstDash val="solid"/>
+                      <a:round/>
+                      <a:headEnd type="none" w="med" len="med"/>
+                      <a:tailEnd type="none" w="med" len="med"/>
+                    </a:lnB>
+                    <a:solidFill>
+                      <a:srgbClr val="FFFFFF"/>
+                    </a:solidFill>
+                  </a:tcPr>
+                </a:tc>
+                <a:tc>
+                  <a:txBody>
+                    <a:bodyPr/>
+                    <a:lstStyle/>
+                    <a:p>
+                      <a:pPr algn="ctr" indent="0" marL="0">
+                        <a:buNone/>
+                      </a:pPr>
+                      <a:endParaRPr lang="en-US" sz="1200" dirty="0">
+                        <a:latin typeface="Malgun Gothic" charset="0"/>
+                        <a:ea typeface="Malgun Gothic" charset="0"/>
+                        <a:cs typeface="Malgun Gothic" charset="0"/>
+                      </a:endParaRPr>
+                    </a:p>
+                  </a:txBody>
+                  <a:tcPr marL="91440" marR="91440" marT="45720" marB="45720" anchor="ctr">
+                    <a:lnL w="9525" cap="flat" cmpd="sng" algn="ctr">
+                      <a:solidFill>
+                        <a:srgbClr val="D9D9D9"/>
+                      </a:solidFill>
+                      <a:prstDash val="solid"/>
+                      <a:round/>
+                      <a:headEnd type="none" w="med" len="med"/>
+                      <a:tailEnd type="none" w="med" len="med"/>
+                    </a:lnL>
+                    <a:lnR w="9525" cap="flat" cmpd="sng" algn="ctr">
+                      <a:solidFill>
+                        <a:srgbClr val="D9D9D9"/>
+                      </a:solidFill>
+                      <a:prstDash val="solid"/>
+                      <a:round/>
+                      <a:headEnd type="none" w="med" len="med"/>
+                      <a:tailEnd type="none" w="med" len="med"/>
+                    </a:lnR>
+                    <a:lnT w="9525" cap="flat" cmpd="sng" algn="ctr">
+                      <a:solidFill>
+                        <a:srgbClr val="D9D9D9"/>
+                      </a:solidFill>
+                      <a:prstDash val="solid"/>
+                      <a:round/>
+                      <a:headEnd type="none" w="med" len="med"/>
+                      <a:tailEnd type="none" w="med" len="med"/>
+                    </a:lnT>
+                    <a:lnB w="9525" cap="flat" cmpd="sng" algn="ctr">
+                      <a:solidFill>
+                        <a:srgbClr val="D9D9D9"/>
+                      </a:solidFill>
+                      <a:prstDash val="solid"/>
+                      <a:round/>
+                      <a:headEnd type="none" w="med" len="med"/>
+                      <a:tailEnd type="none" w="med" len="med"/>
+                    </a:lnB>
+                    <a:solidFill>
+                      <a:srgbClr val="FFFFFF"/>
+                    </a:solidFill>
+                  </a:tcPr>
+                </a:tc>
+              </a:tr>
+              <a:tr h="502920">
+                <a:tc>
+                  <a:txBody>
+                    <a:bodyPr/>
+                    <a:lstStyle/>
+                    <a:p>
+                      <a:pPr algn="l" indent="0" marL="0">
+                        <a:buNone/>
+                      </a:pPr>
+                      <a:r>
+                        <a:rPr lang="en-US" sz="1200" dirty="0">
+                          <a:solidFill>
+                            <a:srgbClr val="3F3F3F"/>
+                          </a:solidFill>
+                          <a:latin typeface="Malgun Gothic" pitchFamily="34" charset="0"/>
+                          <a:ea typeface="Malgun Gothic" pitchFamily="34" charset="-122"/>
+                          <a:cs typeface="Malgun Gothic" pitchFamily="34" charset="-120"/>
+                        </a:rPr>
+                        <a:t>미처리</a:t>
+                      </a:r>
+                      <a:endParaRPr lang="en-US" sz="1200" dirty="0">
+                        <a:latin typeface="Malgun Gothic" charset="0"/>
+                        <a:ea typeface="Malgun Gothic" charset="0"/>
+                        <a:cs typeface="Malgun Gothic" charset="0"/>
+                      </a:endParaRPr>
+                    </a:p>
+                  </a:txBody>
+                  <a:tcPr marL="91440" marR="91440" marT="45720" marB="45720" anchor="ctr">
+                    <a:lnL w="9525" cap="flat" cmpd="sng" algn="ctr">
+                      <a:solidFill>
+                        <a:srgbClr val="D9D9D9"/>
+                      </a:solidFill>
+                      <a:prstDash val="solid"/>
+                      <a:round/>
+                      <a:headEnd type="none" w="med" len="med"/>
+                      <a:tailEnd type="none" w="med" len="med"/>
+                    </a:lnL>
+                    <a:lnR w="9525" cap="flat" cmpd="sng" algn="ctr">
+                      <a:solidFill>
+                        <a:srgbClr val="D9D9D9"/>
+                      </a:solidFill>
+                      <a:prstDash val="solid"/>
+                      <a:round/>
+                      <a:headEnd type="none" w="med" len="med"/>
+                      <a:tailEnd type="none" w="med" len="med"/>
+                    </a:lnR>
+                    <a:lnT w="9525" cap="flat" cmpd="sng" algn="ctr">
+                      <a:solidFill>
+                        <a:srgbClr val="D9D9D9"/>
+                      </a:solidFill>
+                      <a:prstDash val="solid"/>
+                      <a:round/>
+                      <a:headEnd type="none" w="med" len="med"/>
+                      <a:tailEnd type="none" w="med" len="med"/>
+                    </a:lnT>
+                    <a:lnB w="9525" cap="flat" cmpd="sng" algn="ctr">
+                      <a:solidFill>
+                        <a:srgbClr val="D9D9D9"/>
+                      </a:solidFill>
+                      <a:prstDash val="solid"/>
+                      <a:round/>
+                      <a:headEnd type="none" w="med" len="med"/>
+                      <a:tailEnd type="none" w="med" len="med"/>
+                    </a:lnB>
+                    <a:solidFill>
+                      <a:srgbClr val="FFFFFF"/>
+                    </a:solidFill>
+                  </a:tcPr>
+                </a:tc>
+                <a:tc>
+                  <a:txBody>
+                    <a:bodyPr/>
+                    <a:lstStyle/>
+                    <a:p>
+                      <a:pPr algn="ctr" indent="0" marL="0">
+                        <a:buNone/>
+                      </a:pPr>
+                      <a:r>
+                        <a:rPr lang="en-US" sz="1200" i="1" dirty="0">
+                          <a:solidFill>
+                            <a:srgbClr val="3F3F3F"/>
+                          </a:solidFill>
+                          <a:latin typeface="Malgun Gothic" pitchFamily="34" charset="0"/>
+                          <a:ea typeface="Malgun Gothic" pitchFamily="34" charset="-122"/>
+                          <a:cs typeface="Malgun Gothic" pitchFamily="34" charset="-120"/>
+                        </a:rPr>
+                        <a:t>자료 미제공 – 추후 업데이트</a:t>
+                      </a:r>
+                      <a:endParaRPr lang="en-US" sz="1200" dirty="0">
+                        <a:latin typeface="Malgun Gothic" charset="0"/>
+                        <a:ea typeface="Malgun Gothic" charset="0"/>
+                        <a:cs typeface="Malgun Gothic" charset="0"/>
+                      </a:endParaRPr>
+                    </a:p>
+                  </a:txBody>
+                  <a:tcPr marL="91440" marR="91440" marT="45720" marB="45720" anchor="ctr">
+                    <a:lnL w="9525" cap="flat" cmpd="sng" algn="ctr">
+                      <a:solidFill>
+                        <a:srgbClr val="D9D9D9"/>
+                      </a:solidFill>
+                      <a:prstDash val="solid"/>
+                      <a:round/>
+                      <a:headEnd type="none" w="med" len="med"/>
+                      <a:tailEnd type="none" w="med" len="med"/>
+                    </a:lnL>
+                    <a:lnR w="9525" cap="flat" cmpd="sng" algn="ctr">
+                      <a:solidFill>
+                        <a:srgbClr val="D9D9D9"/>
+                      </a:solidFill>
+                      <a:prstDash val="solid"/>
+                      <a:round/>
+                      <a:headEnd type="none" w="med" len="med"/>
+                      <a:tailEnd type="none" w="med" len="med"/>
+                    </a:lnR>
+                    <a:lnT w="9525" cap="flat" cmpd="sng" algn="ctr">
+                      <a:solidFill>
+                        <a:srgbClr val="D9D9D9"/>
+                      </a:solidFill>
+                      <a:prstDash val="solid"/>
+                      <a:round/>
+                      <a:headEnd type="none" w="med" len="med"/>
+                      <a:tailEnd type="none" w="med" len="med"/>
+                    </a:lnT>
+                    <a:lnB w="9525" cap="flat" cmpd="sng" algn="ctr">
+                      <a:solidFill>
+                        <a:srgbClr val="D9D9D9"/>
+                      </a:solidFill>
+                      <a:prstDash val="solid"/>
+                      <a:round/>
+                      <a:headEnd type="none" w="med" len="med"/>
+                      <a:tailEnd type="none" w="med" len="med"/>
+                    </a:lnB>
+                    <a:solidFill>
+                      <a:srgbClr val="FFFFFF"/>
+                    </a:solidFill>
+                  </a:tcPr>
+                </a:tc>
+                <a:tc>
+                  <a:txBody>
+                    <a:bodyPr/>
+                    <a:lstStyle/>
+                    <a:p>
+                      <a:pPr algn="ctr" indent="0" marL="0">
+                        <a:buNone/>
+                      </a:pPr>
+                      <a:endParaRPr lang="en-US" sz="1200" dirty="0">
+                        <a:latin typeface="Malgun Gothic" charset="0"/>
+                        <a:ea typeface="Malgun Gothic" charset="0"/>
+                        <a:cs typeface="Malgun Gothic" charset="0"/>
+                      </a:endParaRPr>
+                    </a:p>
+                  </a:txBody>
+                  <a:tcPr marL="91440" marR="91440" marT="45720" marB="45720" anchor="ctr">
+                    <a:lnL w="9525" cap="flat" cmpd="sng" algn="ctr">
+                      <a:solidFill>
+                        <a:srgbClr val="D9D9D9"/>
+                      </a:solidFill>
+                      <a:prstDash val="solid"/>
+                      <a:round/>
+                      <a:headEnd type="none" w="med" len="med"/>
+                      <a:tailEnd type="none" w="med" len="med"/>
+                    </a:lnL>
+                    <a:lnR w="9525" cap="flat" cmpd="sng" algn="ctr">
+                      <a:solidFill>
+                        <a:srgbClr val="D9D9D9"/>
+                      </a:solidFill>
+                      <a:prstDash val="solid"/>
+                      <a:round/>
+                      <a:headEnd type="none" w="med" len="med"/>
+                      <a:tailEnd type="none" w="med" len="med"/>
+                    </a:lnR>
+                    <a:lnT w="9525" cap="flat" cmpd="sng" algn="ctr">
+                      <a:solidFill>
+                        <a:srgbClr val="D9D9D9"/>
+                      </a:solidFill>
+                      <a:prstDash val="solid"/>
+                      <a:round/>
+                      <a:headEnd type="none" w="med" len="med"/>
+                      <a:tailEnd type="none" w="med" len="med"/>
+                    </a:lnT>
+                    <a:lnB w="9525" cap="flat" cmpd="sng" algn="ctr">
+                      <a:solidFill>
+                        <a:srgbClr val="D9D9D9"/>
+                      </a:solidFill>
+                      <a:prstDash val="solid"/>
+                      <a:round/>
+                      <a:headEnd type="none" w="med" len="med"/>
+                      <a:tailEnd type="none" w="med" len="med"/>
+                    </a:lnB>
+                    <a:solidFill>
+                      <a:srgbClr val="FFFFFF"/>
+                    </a:solidFill>
+                  </a:tcPr>
+                </a:tc>
+              </a:tr>
+            </a:tbl>
+          </a:graphicData>
+        </a:graphic>
+      </p:graphicFrame>
+      <p:sp>
+        <p:nvSpPr>
+          <p:cNvPr id="18" name="Text 14"/>
+          <p:cNvSpPr/>
+          <p:nvPr/>
+        </p:nvSpPr>
+        <p:spPr>
+          <a:xfrm>
+            <a:off x="6309360" y="3703320"/>
+            <a:ext cx="5486400" cy="365760"/>
+          </a:xfrm>
+          <a:prstGeom prst="rect">
+            <a:avLst/>
+          </a:prstGeom>
+          <a:noFill/>
+          <a:ln/>
+        </p:spPr>
+        <p:txBody>
+          <a:bodyPr wrap="square" lIns="0" tIns="0" rIns="0" bIns="0" rtlCol="0" anchor="ctr"/>
+          <a:lstStyle/>
+          <a:p>
+            <a:pPr indent="0" marL="0">
+              <a:buNone/>
+            </a:pPr>
+            <a:r>
+              <a:rPr lang="en-US" sz="1000" i="1" dirty="0">
+                <a:solidFill>
+                  <a:srgbClr val="9E9E9E"/>
+                </a:solidFill>
+                <a:latin typeface="Malgun Gothic" pitchFamily="34" charset="0"/>
+                <a:ea typeface="Malgun Gothic" pitchFamily="34" charset="-122"/>
+                <a:cs typeface="Malgun Gothic" pitchFamily="34" charset="-120"/>
+              </a:rPr>
+              <a:t>VOC 대시보드(Google Forms 자동화)의 해당 기간 리포트를 소스로 함</a:t>
+            </a:r>
+            <a:endParaRPr lang="en-US" sz="1000" dirty="0"/>
+          </a:p>
+        </p:txBody>
+      </p:sp>
+      <p:sp>
+        <p:nvSpPr>
+          <p:cNvPr id="19" name="Text 15"/>
           <p:cNvSpPr/>
           <p:nvPr/>
         </p:nvSpPr>
@@ -3702,7 +7372,7 @@
       </p:sp>
       <p:sp>
         <p:nvSpPr>
-          <p:cNvPr id="9" name="Text 6"/>
+          <p:cNvPr id="20" name="Text 16"/>
           <p:cNvSpPr/>
           <p:nvPr/>
         </p:nvSpPr>
@@ -3863,7 +7533,7 @@
                 <a:ea typeface="Malgun Gothic" pitchFamily="34" charset="-122"/>
                 <a:cs typeface="Malgun Gothic" pitchFamily="34" charset="-120"/>
               </a:rPr>
-              <a:t>서비스 활동 실적</a:t>
+              <a:t>중대 이슈 처리</a:t>
             </a:r>
             <a:endParaRPr lang="en-US" sz="2600" dirty="0"/>
           </a:p>
@@ -3893,2316 +7563,214 @@
           </a:prstGeom>
         </p:spPr>
       </p:pic>
-      <p:graphicFrame>
-        <p:nvGraphicFramePr>
-          <p:cNvPr id="6" name="Table 0"/>
-          <p:cNvGraphicFramePr>
-            <a:graphicFrameLocks noGrp="1"/>
-          </p:cNvGraphicFramePr>
-          <p:nvPr>
-            <p:extLst>
-              <p:ext uri="{D42A27DB-BD31-4B8C-83A1-F6EECF244321}">
-                <p14:modId xmlns:p14="http://schemas.microsoft.com/office/powerpoint/2010/main" val="1579011935"/>
-              </p:ext>
-            </p:extLst>
-          </p:nvPr>
-        </p:nvGraphicFramePr>
-        <p:xfrm>
-          <a:off x="530352" y="1234440"/>
-          <a:ext cx="10972800" cy="914400"/>
-        </p:xfrm>
-        <a:graphic>
-          <a:graphicData uri="http://schemas.openxmlformats.org/drawingml/2006/table">
-            <a:tbl>
-              <a:tblPr/>
-              <a:tblGrid>
-                <a:gridCol w="1920240"/>
-                <a:gridCol w="1645920"/>
-                <a:gridCol w="2468880"/>
-                <a:gridCol w="1645920"/>
-                <a:gridCol w="1645920"/>
-                <a:gridCol w="1645920"/>
-              </a:tblGrid>
-              <a:tr h="502920">
-                <a:tc>
-                  <a:txBody>
-                    <a:bodyPr/>
-                    <a:lstStyle/>
-                    <a:p>
-                      <a:pPr algn="l" indent="0" marL="0">
-                        <a:buNone/>
-                      </a:pPr>
-                      <a:r>
-                        <a:rPr lang="en-US" sz="1300" b="1" dirty="0">
-                          <a:solidFill>
-                            <a:srgbClr val="FFFFFF"/>
-                          </a:solidFill>
-                          <a:latin typeface="Malgun Gothic" pitchFamily="34" charset="0"/>
-                          <a:ea typeface="Malgun Gothic" pitchFamily="34" charset="-122"/>
-                          <a:cs typeface="Malgun Gothic" pitchFamily="34" charset="-120"/>
-                        </a:rPr>
-                        <a:t>팀</a:t>
-                      </a:r>
-                      <a:endParaRPr lang="en-US" sz="1300" dirty="0">
-                        <a:latin typeface="Malgun Gothic" charset="0"/>
-                        <a:ea typeface="Malgun Gothic" charset="0"/>
-                        <a:cs typeface="Malgun Gothic" charset="0"/>
-                      </a:endParaRPr>
-                    </a:p>
-                  </a:txBody>
-                  <a:tcPr marL="91440" marR="91440" marT="45720" marB="45720" anchor="ctr">
-                    <a:lnL w="9525" cap="flat" cmpd="sng" algn="ctr">
-                      <a:solidFill>
-                        <a:srgbClr val="D9D9D9"/>
-                      </a:solidFill>
-                      <a:prstDash val="solid"/>
-                      <a:round/>
-                      <a:headEnd type="none" w="med" len="med"/>
-                      <a:tailEnd type="none" w="med" len="med"/>
-                    </a:lnL>
-                    <a:lnR w="9525" cap="flat" cmpd="sng" algn="ctr">
-                      <a:solidFill>
-                        <a:srgbClr val="D9D9D9"/>
-                      </a:solidFill>
-                      <a:prstDash val="solid"/>
-                      <a:round/>
-                      <a:headEnd type="none" w="med" len="med"/>
-                      <a:tailEnd type="none" w="med" len="med"/>
-                    </a:lnR>
-                    <a:lnT w="9525" cap="flat" cmpd="sng" algn="ctr">
-                      <a:solidFill>
-                        <a:srgbClr val="D9D9D9"/>
-                      </a:solidFill>
-                      <a:prstDash val="solid"/>
-                      <a:round/>
-                      <a:headEnd type="none" w="med" len="med"/>
-                      <a:tailEnd type="none" w="med" len="med"/>
-                    </a:lnT>
-                    <a:lnB w="9525" cap="flat" cmpd="sng" algn="ctr">
-                      <a:solidFill>
-                        <a:srgbClr val="D9D9D9"/>
-                      </a:solidFill>
-                      <a:prstDash val="solid"/>
-                      <a:round/>
-                      <a:headEnd type="none" w="med" len="med"/>
-                      <a:tailEnd type="none" w="med" len="med"/>
-                    </a:lnB>
-                    <a:solidFill>
-                      <a:srgbClr val="005BAC"/>
-                    </a:solidFill>
-                  </a:tcPr>
-                </a:tc>
-                <a:tc>
-                  <a:txBody>
-                    <a:bodyPr/>
-                    <a:lstStyle/>
-                    <a:p>
-                      <a:pPr algn="ctr" indent="0" marL="0">
-                        <a:buNone/>
-                      </a:pPr>
-                      <a:r>
-                        <a:rPr lang="en-US" sz="1300" b="1" dirty="0">
-                          <a:solidFill>
-                            <a:srgbClr val="FFFFFF"/>
-                          </a:solidFill>
-                          <a:latin typeface="Malgun Gothic" pitchFamily="34" charset="0"/>
-                          <a:ea typeface="Malgun Gothic" pitchFamily="34" charset="-122"/>
-                          <a:cs typeface="Malgun Gothic" pitchFamily="34" charset="-120"/>
-                        </a:rPr>
-                        <a:t>리더</a:t>
-                      </a:r>
-                      <a:endParaRPr lang="en-US" sz="1300" dirty="0">
-                        <a:latin typeface="Malgun Gothic" charset="0"/>
-                        <a:ea typeface="Malgun Gothic" charset="0"/>
-                        <a:cs typeface="Malgun Gothic" charset="0"/>
-                      </a:endParaRPr>
-                    </a:p>
-                  </a:txBody>
-                  <a:tcPr marL="91440" marR="91440" marT="45720" marB="45720" anchor="ctr">
-                    <a:lnL w="9525" cap="flat" cmpd="sng" algn="ctr">
-                      <a:solidFill>
-                        <a:srgbClr val="D9D9D9"/>
-                      </a:solidFill>
-                      <a:prstDash val="solid"/>
-                      <a:round/>
-                      <a:headEnd type="none" w="med" len="med"/>
-                      <a:tailEnd type="none" w="med" len="med"/>
-                    </a:lnL>
-                    <a:lnR w="9525" cap="flat" cmpd="sng" algn="ctr">
-                      <a:solidFill>
-                        <a:srgbClr val="D9D9D9"/>
-                      </a:solidFill>
-                      <a:prstDash val="solid"/>
-                      <a:round/>
-                      <a:headEnd type="none" w="med" len="med"/>
-                      <a:tailEnd type="none" w="med" len="med"/>
-                    </a:lnR>
-                    <a:lnT w="9525" cap="flat" cmpd="sng" algn="ctr">
-                      <a:solidFill>
-                        <a:srgbClr val="D9D9D9"/>
-                      </a:solidFill>
-                      <a:prstDash val="solid"/>
-                      <a:round/>
-                      <a:headEnd type="none" w="med" len="med"/>
-                      <a:tailEnd type="none" w="med" len="med"/>
-                    </a:lnT>
-                    <a:lnB w="9525" cap="flat" cmpd="sng" algn="ctr">
-                      <a:solidFill>
-                        <a:srgbClr val="D9D9D9"/>
-                      </a:solidFill>
-                      <a:prstDash val="solid"/>
-                      <a:round/>
-                      <a:headEnd type="none" w="med" len="med"/>
-                      <a:tailEnd type="none" w="med" len="med"/>
-                    </a:lnB>
-                    <a:solidFill>
-                      <a:srgbClr val="005BAC"/>
-                    </a:solidFill>
-                  </a:tcPr>
-                </a:tc>
-                <a:tc>
-                  <a:txBody>
-                    <a:bodyPr/>
-                    <a:lstStyle/>
-                    <a:p>
-                      <a:pPr algn="ctr" indent="0" marL="0">
-                        <a:buNone/>
-                      </a:pPr>
-                      <a:r>
-                        <a:rPr lang="en-US" sz="1300" b="1" dirty="0">
-                          <a:solidFill>
-                            <a:srgbClr val="FFFFFF"/>
-                          </a:solidFill>
-                          <a:latin typeface="Malgun Gothic" pitchFamily="34" charset="0"/>
-                          <a:ea typeface="Malgun Gothic" pitchFamily="34" charset="-122"/>
-                          <a:cs typeface="Malgun Gothic" pitchFamily="34" charset="-120"/>
-                        </a:rPr>
-                        <a:t>설치</a:t>
-                      </a:r>
-                      <a:endParaRPr lang="en-US" sz="1300" dirty="0">
-                        <a:latin typeface="Malgun Gothic" charset="0"/>
-                        <a:ea typeface="Malgun Gothic" charset="0"/>
-                        <a:cs typeface="Malgun Gothic" charset="0"/>
-                      </a:endParaRPr>
-                    </a:p>
-                  </a:txBody>
-                  <a:tcPr marL="91440" marR="91440" marT="45720" marB="45720" anchor="ctr">
-                    <a:lnL w="9525" cap="flat" cmpd="sng" algn="ctr">
-                      <a:solidFill>
-                        <a:srgbClr val="D9D9D9"/>
-                      </a:solidFill>
-                      <a:prstDash val="solid"/>
-                      <a:round/>
-                      <a:headEnd type="none" w="med" len="med"/>
-                      <a:tailEnd type="none" w="med" len="med"/>
-                    </a:lnL>
-                    <a:lnR w="9525" cap="flat" cmpd="sng" algn="ctr">
-                      <a:solidFill>
-                        <a:srgbClr val="D9D9D9"/>
-                      </a:solidFill>
-                      <a:prstDash val="solid"/>
-                      <a:round/>
-                      <a:headEnd type="none" w="med" len="med"/>
-                      <a:tailEnd type="none" w="med" len="med"/>
-                    </a:lnR>
-                    <a:lnT w="9525" cap="flat" cmpd="sng" algn="ctr">
-                      <a:solidFill>
-                        <a:srgbClr val="D9D9D9"/>
-                      </a:solidFill>
-                      <a:prstDash val="solid"/>
-                      <a:round/>
-                      <a:headEnd type="none" w="med" len="med"/>
-                      <a:tailEnd type="none" w="med" len="med"/>
-                    </a:lnT>
-                    <a:lnB w="9525" cap="flat" cmpd="sng" algn="ctr">
-                      <a:solidFill>
-                        <a:srgbClr val="D9D9D9"/>
-                      </a:solidFill>
-                      <a:prstDash val="solid"/>
-                      <a:round/>
-                      <a:headEnd type="none" w="med" len="med"/>
-                      <a:tailEnd type="none" w="med" len="med"/>
-                    </a:lnB>
-                    <a:solidFill>
-                      <a:srgbClr val="005BAC"/>
-                    </a:solidFill>
-                  </a:tcPr>
-                </a:tc>
-                <a:tc>
-                  <a:txBody>
-                    <a:bodyPr/>
-                    <a:lstStyle/>
-                    <a:p>
-                      <a:pPr algn="ctr" indent="0" marL="0">
-                        <a:buNone/>
-                      </a:pPr>
-                      <a:r>
-                        <a:rPr lang="en-US" sz="1300" b="1" dirty="0">
-                          <a:solidFill>
-                            <a:srgbClr val="FFFFFF"/>
-                          </a:solidFill>
-                          <a:latin typeface="Malgun Gothic" pitchFamily="34" charset="0"/>
-                          <a:ea typeface="Malgun Gothic" pitchFamily="34" charset="-122"/>
-                          <a:cs typeface="Malgun Gothic" pitchFamily="34" charset="-120"/>
-                        </a:rPr>
-                        <a:t>PM</a:t>
-                      </a:r>
-                      <a:endParaRPr lang="en-US" sz="1300" dirty="0">
-                        <a:latin typeface="Malgun Gothic" charset="0"/>
-                        <a:ea typeface="Malgun Gothic" charset="0"/>
-                        <a:cs typeface="Malgun Gothic" charset="0"/>
-                      </a:endParaRPr>
-                    </a:p>
-                  </a:txBody>
-                  <a:tcPr marL="91440" marR="91440" marT="45720" marB="45720" anchor="ctr">
-                    <a:lnL w="9525" cap="flat" cmpd="sng" algn="ctr">
-                      <a:solidFill>
-                        <a:srgbClr val="D9D9D9"/>
-                      </a:solidFill>
-                      <a:prstDash val="solid"/>
-                      <a:round/>
-                      <a:headEnd type="none" w="med" len="med"/>
-                      <a:tailEnd type="none" w="med" len="med"/>
-                    </a:lnL>
-                    <a:lnR w="9525" cap="flat" cmpd="sng" algn="ctr">
-                      <a:solidFill>
-                        <a:srgbClr val="D9D9D9"/>
-                      </a:solidFill>
-                      <a:prstDash val="solid"/>
-                      <a:round/>
-                      <a:headEnd type="none" w="med" len="med"/>
-                      <a:tailEnd type="none" w="med" len="med"/>
-                    </a:lnR>
-                    <a:lnT w="9525" cap="flat" cmpd="sng" algn="ctr">
-                      <a:solidFill>
-                        <a:srgbClr val="D9D9D9"/>
-                      </a:solidFill>
-                      <a:prstDash val="solid"/>
-                      <a:round/>
-                      <a:headEnd type="none" w="med" len="med"/>
-                      <a:tailEnd type="none" w="med" len="med"/>
-                    </a:lnT>
-                    <a:lnB w="9525" cap="flat" cmpd="sng" algn="ctr">
-                      <a:solidFill>
-                        <a:srgbClr val="D9D9D9"/>
-                      </a:solidFill>
-                      <a:prstDash val="solid"/>
-                      <a:round/>
-                      <a:headEnd type="none" w="med" len="med"/>
-                      <a:tailEnd type="none" w="med" len="med"/>
-                    </a:lnB>
-                    <a:solidFill>
-                      <a:srgbClr val="005BAC"/>
-                    </a:solidFill>
-                  </a:tcPr>
-                </a:tc>
-                <a:tc>
-                  <a:txBody>
-                    <a:bodyPr/>
-                    <a:lstStyle/>
-                    <a:p>
-                      <a:pPr algn="ctr" indent="0" marL="0">
-                        <a:buNone/>
-                      </a:pPr>
-                      <a:r>
-                        <a:rPr lang="en-US" sz="1300" b="1" dirty="0">
-                          <a:solidFill>
-                            <a:srgbClr val="FFFFFF"/>
-                          </a:solidFill>
-                          <a:latin typeface="Malgun Gothic" pitchFamily="34" charset="0"/>
-                          <a:ea typeface="Malgun Gothic" pitchFamily="34" charset="-122"/>
-                          <a:cs typeface="Malgun Gothic" pitchFamily="34" charset="-120"/>
-                        </a:rPr>
-                        <a:t>A/S</a:t>
-                      </a:r>
-                      <a:endParaRPr lang="en-US" sz="1300" dirty="0">
-                        <a:latin typeface="Malgun Gothic" charset="0"/>
-                        <a:ea typeface="Malgun Gothic" charset="0"/>
-                        <a:cs typeface="Malgun Gothic" charset="0"/>
-                      </a:endParaRPr>
-                    </a:p>
-                  </a:txBody>
-                  <a:tcPr marL="91440" marR="91440" marT="45720" marB="45720" anchor="ctr">
-                    <a:lnL w="9525" cap="flat" cmpd="sng" algn="ctr">
-                      <a:solidFill>
-                        <a:srgbClr val="D9D9D9"/>
-                      </a:solidFill>
-                      <a:prstDash val="solid"/>
-                      <a:round/>
-                      <a:headEnd type="none" w="med" len="med"/>
-                      <a:tailEnd type="none" w="med" len="med"/>
-                    </a:lnL>
-                    <a:lnR w="9525" cap="flat" cmpd="sng" algn="ctr">
-                      <a:solidFill>
-                        <a:srgbClr val="D9D9D9"/>
-                      </a:solidFill>
-                      <a:prstDash val="solid"/>
-                      <a:round/>
-                      <a:headEnd type="none" w="med" len="med"/>
-                      <a:tailEnd type="none" w="med" len="med"/>
-                    </a:lnR>
-                    <a:lnT w="9525" cap="flat" cmpd="sng" algn="ctr">
-                      <a:solidFill>
-                        <a:srgbClr val="D9D9D9"/>
-                      </a:solidFill>
-                      <a:prstDash val="solid"/>
-                      <a:round/>
-                      <a:headEnd type="none" w="med" len="med"/>
-                      <a:tailEnd type="none" w="med" len="med"/>
-                    </a:lnT>
-                    <a:lnB w="9525" cap="flat" cmpd="sng" algn="ctr">
-                      <a:solidFill>
-                        <a:srgbClr val="D9D9D9"/>
-                      </a:solidFill>
-                      <a:prstDash val="solid"/>
-                      <a:round/>
-                      <a:headEnd type="none" w="med" len="med"/>
-                      <a:tailEnd type="none" w="med" len="med"/>
-                    </a:lnB>
-                    <a:solidFill>
-                      <a:srgbClr val="005BAC"/>
-                    </a:solidFill>
-                  </a:tcPr>
-                </a:tc>
-                <a:tc>
-                  <a:txBody>
-                    <a:bodyPr/>
-                    <a:lstStyle/>
-                    <a:p>
-                      <a:pPr algn="ctr" indent="0" marL="0">
-                        <a:buNone/>
-                      </a:pPr>
-                      <a:r>
-                        <a:rPr lang="en-US" sz="1300" b="1" dirty="0">
-                          <a:solidFill>
-                            <a:srgbClr val="FFFFFF"/>
-                          </a:solidFill>
-                          <a:latin typeface="Malgun Gothic" pitchFamily="34" charset="0"/>
-                          <a:ea typeface="Malgun Gothic" pitchFamily="34" charset="-122"/>
-                          <a:cs typeface="Malgun Gothic" pitchFamily="34" charset="-120"/>
-                        </a:rPr>
-                        <a:t>합계</a:t>
-                      </a:r>
-                      <a:endParaRPr lang="en-US" sz="1300" dirty="0">
-                        <a:latin typeface="Malgun Gothic" charset="0"/>
-                        <a:ea typeface="Malgun Gothic" charset="0"/>
-                        <a:cs typeface="Malgun Gothic" charset="0"/>
-                      </a:endParaRPr>
-                    </a:p>
-                  </a:txBody>
-                  <a:tcPr marL="91440" marR="91440" marT="45720" marB="45720" anchor="ctr">
-                    <a:lnL w="9525" cap="flat" cmpd="sng" algn="ctr">
-                      <a:solidFill>
-                        <a:srgbClr val="D9D9D9"/>
-                      </a:solidFill>
-                      <a:prstDash val="solid"/>
-                      <a:round/>
-                      <a:headEnd type="none" w="med" len="med"/>
-                      <a:tailEnd type="none" w="med" len="med"/>
-                    </a:lnL>
-                    <a:lnR w="9525" cap="flat" cmpd="sng" algn="ctr">
-                      <a:solidFill>
-                        <a:srgbClr val="D9D9D9"/>
-                      </a:solidFill>
-                      <a:prstDash val="solid"/>
-                      <a:round/>
-                      <a:headEnd type="none" w="med" len="med"/>
-                      <a:tailEnd type="none" w="med" len="med"/>
-                    </a:lnR>
-                    <a:lnT w="9525" cap="flat" cmpd="sng" algn="ctr">
-                      <a:solidFill>
-                        <a:srgbClr val="D9D9D9"/>
-                      </a:solidFill>
-                      <a:prstDash val="solid"/>
-                      <a:round/>
-                      <a:headEnd type="none" w="med" len="med"/>
-                      <a:tailEnd type="none" w="med" len="med"/>
-                    </a:lnT>
-                    <a:lnB w="9525" cap="flat" cmpd="sng" algn="ctr">
-                      <a:solidFill>
-                        <a:srgbClr val="D9D9D9"/>
-                      </a:solidFill>
-                      <a:prstDash val="solid"/>
-                      <a:round/>
-                      <a:headEnd type="none" w="med" len="med"/>
-                      <a:tailEnd type="none" w="med" len="med"/>
-                    </a:lnB>
-                    <a:solidFill>
-                      <a:srgbClr val="005BAC"/>
-                    </a:solidFill>
-                  </a:tcPr>
-                </a:tc>
-              </a:tr>
-              <a:tr h="502920">
-                <a:tc>
-                  <a:txBody>
-                    <a:bodyPr/>
-                    <a:lstStyle/>
-                    <a:p>
-                      <a:pPr algn="l" indent="0" marL="0">
-                        <a:buNone/>
-                      </a:pPr>
-                      <a:r>
-                        <a:rPr lang="en-US" sz="1300" dirty="0">
-                          <a:solidFill>
-                            <a:srgbClr val="3F3F3F"/>
-                          </a:solidFill>
-                          <a:latin typeface="Malgun Gothic" pitchFamily="34" charset="0"/>
-                          <a:ea typeface="Malgun Gothic" pitchFamily="34" charset="-122"/>
-                          <a:cs typeface="Malgun Gothic" pitchFamily="34" charset="-120"/>
-                        </a:rPr>
-                        <a:t>FS East</a:t>
-                      </a:r>
-                      <a:endParaRPr lang="en-US" sz="1300" dirty="0">
-                        <a:latin typeface="Malgun Gothic" charset="0"/>
-                        <a:ea typeface="Malgun Gothic" charset="0"/>
-                        <a:cs typeface="Malgun Gothic" charset="0"/>
-                      </a:endParaRPr>
-                    </a:p>
-                  </a:txBody>
-                  <a:tcPr marL="91440" marR="91440" marT="45720" marB="45720" anchor="ctr">
-                    <a:lnL w="9525" cap="flat" cmpd="sng" algn="ctr">
-                      <a:solidFill>
-                        <a:srgbClr val="D9D9D9"/>
-                      </a:solidFill>
-                      <a:prstDash val="solid"/>
-                      <a:round/>
-                      <a:headEnd type="none" w="med" len="med"/>
-                      <a:tailEnd type="none" w="med" len="med"/>
-                    </a:lnL>
-                    <a:lnR w="9525" cap="flat" cmpd="sng" algn="ctr">
-                      <a:solidFill>
-                        <a:srgbClr val="D9D9D9"/>
-                      </a:solidFill>
-                      <a:prstDash val="solid"/>
-                      <a:round/>
-                      <a:headEnd type="none" w="med" len="med"/>
-                      <a:tailEnd type="none" w="med" len="med"/>
-                    </a:lnR>
-                    <a:lnT w="9525" cap="flat" cmpd="sng" algn="ctr">
-                      <a:solidFill>
-                        <a:srgbClr val="D9D9D9"/>
-                      </a:solidFill>
-                      <a:prstDash val="solid"/>
-                      <a:round/>
-                      <a:headEnd type="none" w="med" len="med"/>
-                      <a:tailEnd type="none" w="med" len="med"/>
-                    </a:lnT>
-                    <a:lnB w="9525" cap="flat" cmpd="sng" algn="ctr">
-                      <a:solidFill>
-                        <a:srgbClr val="D9D9D9"/>
-                      </a:solidFill>
-                      <a:prstDash val="solid"/>
-                      <a:round/>
-                      <a:headEnd type="none" w="med" len="med"/>
-                      <a:tailEnd type="none" w="med" len="med"/>
-                    </a:lnB>
-                    <a:solidFill>
-                      <a:srgbClr val="FFFFFF"/>
-                    </a:solidFill>
-                  </a:tcPr>
-                </a:tc>
-                <a:tc>
-                  <a:txBody>
-                    <a:bodyPr/>
-                    <a:lstStyle/>
-                    <a:p>
-                      <a:pPr algn="ctr" indent="0" marL="0">
-                        <a:buNone/>
-                      </a:pPr>
-                      <a:r>
-                        <a:rPr lang="en-US" sz="1300" dirty="0">
-                          <a:solidFill>
-                            <a:srgbClr val="3F3F3F"/>
-                          </a:solidFill>
-                          <a:latin typeface="Malgun Gothic" pitchFamily="34" charset="0"/>
-                          <a:ea typeface="Malgun Gothic" pitchFamily="34" charset="-122"/>
-                          <a:cs typeface="Malgun Gothic" pitchFamily="34" charset="-120"/>
-                        </a:rPr>
-                        <a:t>Gray</a:t>
-                      </a:r>
-                      <a:endParaRPr lang="en-US" sz="1300" dirty="0">
-                        <a:latin typeface="Malgun Gothic" charset="0"/>
-                        <a:ea typeface="Malgun Gothic" charset="0"/>
-                        <a:cs typeface="Malgun Gothic" charset="0"/>
-                      </a:endParaRPr>
-                    </a:p>
-                  </a:txBody>
-                  <a:tcPr marL="91440" marR="91440" marT="45720" marB="45720" anchor="ctr">
-                    <a:lnL w="9525" cap="flat" cmpd="sng" algn="ctr">
-                      <a:solidFill>
-                        <a:srgbClr val="D9D9D9"/>
-                      </a:solidFill>
-                      <a:prstDash val="solid"/>
-                      <a:round/>
-                      <a:headEnd type="none" w="med" len="med"/>
-                      <a:tailEnd type="none" w="med" len="med"/>
-                    </a:lnL>
-                    <a:lnR w="9525" cap="flat" cmpd="sng" algn="ctr">
-                      <a:solidFill>
-                        <a:srgbClr val="D9D9D9"/>
-                      </a:solidFill>
-                      <a:prstDash val="solid"/>
-                      <a:round/>
-                      <a:headEnd type="none" w="med" len="med"/>
-                      <a:tailEnd type="none" w="med" len="med"/>
-                    </a:lnR>
-                    <a:lnT w="9525" cap="flat" cmpd="sng" algn="ctr">
-                      <a:solidFill>
-                        <a:srgbClr val="D9D9D9"/>
-                      </a:solidFill>
-                      <a:prstDash val="solid"/>
-                      <a:round/>
-                      <a:headEnd type="none" w="med" len="med"/>
-                      <a:tailEnd type="none" w="med" len="med"/>
-                    </a:lnT>
-                    <a:lnB w="9525" cap="flat" cmpd="sng" algn="ctr">
-                      <a:solidFill>
-                        <a:srgbClr val="D9D9D9"/>
-                      </a:solidFill>
-                      <a:prstDash val="solid"/>
-                      <a:round/>
-                      <a:headEnd type="none" w="med" len="med"/>
-                      <a:tailEnd type="none" w="med" len="med"/>
-                    </a:lnB>
-                    <a:solidFill>
-                      <a:srgbClr val="FFFFFF"/>
-                    </a:solidFill>
-                  </a:tcPr>
-                </a:tc>
-                <a:tc>
-                  <a:txBody>
-                    <a:bodyPr/>
-                    <a:lstStyle/>
-                    <a:p>
-                      <a:pPr algn="ctr" indent="0" marL="0">
-                        <a:buNone/>
-                      </a:pPr>
-                      <a:r>
-                        <a:rPr lang="en-US" sz="1300" dirty="0">
-                          <a:solidFill>
-                            <a:srgbClr val="3F3F3F"/>
-                          </a:solidFill>
-                          <a:latin typeface="Malgun Gothic" pitchFamily="34" charset="0"/>
-                          <a:ea typeface="Malgun Gothic" pitchFamily="34" charset="-122"/>
-                          <a:cs typeface="Malgun Gothic" pitchFamily="34" charset="-120"/>
-                        </a:rPr>
-                        <a:t>자료 미제공 – 추후 업데이트</a:t>
-                      </a:r>
-                      <a:endParaRPr lang="en-US" sz="1300" dirty="0">
-                        <a:latin typeface="Malgun Gothic" charset="0"/>
-                        <a:ea typeface="Malgun Gothic" charset="0"/>
-                        <a:cs typeface="Malgun Gothic" charset="0"/>
-                      </a:endParaRPr>
-                    </a:p>
-                  </a:txBody>
-                  <a:tcPr marL="91440" marR="91440" marT="45720" marB="45720" anchor="ctr">
-                    <a:lnL w="9525" cap="flat" cmpd="sng" algn="ctr">
-                      <a:solidFill>
-                        <a:srgbClr val="D9D9D9"/>
-                      </a:solidFill>
-                      <a:prstDash val="solid"/>
-                      <a:round/>
-                      <a:headEnd type="none" w="med" len="med"/>
-                      <a:tailEnd type="none" w="med" len="med"/>
-                    </a:lnL>
-                    <a:lnR w="9525" cap="flat" cmpd="sng" algn="ctr">
-                      <a:solidFill>
-                        <a:srgbClr val="D9D9D9"/>
-                      </a:solidFill>
-                      <a:prstDash val="solid"/>
-                      <a:round/>
-                      <a:headEnd type="none" w="med" len="med"/>
-                      <a:tailEnd type="none" w="med" len="med"/>
-                    </a:lnR>
-                    <a:lnT w="9525" cap="flat" cmpd="sng" algn="ctr">
-                      <a:solidFill>
-                        <a:srgbClr val="D9D9D9"/>
-                      </a:solidFill>
-                      <a:prstDash val="solid"/>
-                      <a:round/>
-                      <a:headEnd type="none" w="med" len="med"/>
-                      <a:tailEnd type="none" w="med" len="med"/>
-                    </a:lnT>
-                    <a:lnB w="9525" cap="flat" cmpd="sng" algn="ctr">
-                      <a:solidFill>
-                        <a:srgbClr val="D9D9D9"/>
-                      </a:solidFill>
-                      <a:prstDash val="solid"/>
-                      <a:round/>
-                      <a:headEnd type="none" w="med" len="med"/>
-                      <a:tailEnd type="none" w="med" len="med"/>
-                    </a:lnB>
-                    <a:solidFill>
-                      <a:srgbClr val="FFFFFF"/>
-                    </a:solidFill>
-                  </a:tcPr>
-                </a:tc>
-                <a:tc>
-                  <a:txBody>
-                    <a:bodyPr/>
-                    <a:lstStyle/>
-                    <a:p>
-                      <a:pPr algn="ctr" indent="0" marL="0">
-                        <a:buNone/>
-                      </a:pPr>
-                      <a:endParaRPr lang="en-US" sz="1300" dirty="0">
-                        <a:latin typeface="Malgun Gothic" charset="0"/>
-                        <a:ea typeface="Malgun Gothic" charset="0"/>
-                        <a:cs typeface="Malgun Gothic" charset="0"/>
-                      </a:endParaRPr>
-                    </a:p>
-                  </a:txBody>
-                  <a:tcPr marL="91440" marR="91440" marT="45720" marB="45720" anchor="ctr">
-                    <a:lnL w="9525" cap="flat" cmpd="sng" algn="ctr">
-                      <a:solidFill>
-                        <a:srgbClr val="D9D9D9"/>
-                      </a:solidFill>
-                      <a:prstDash val="solid"/>
-                      <a:round/>
-                      <a:headEnd type="none" w="med" len="med"/>
-                      <a:tailEnd type="none" w="med" len="med"/>
-                    </a:lnL>
-                    <a:lnR w="9525" cap="flat" cmpd="sng" algn="ctr">
-                      <a:solidFill>
-                        <a:srgbClr val="D9D9D9"/>
-                      </a:solidFill>
-                      <a:prstDash val="solid"/>
-                      <a:round/>
-                      <a:headEnd type="none" w="med" len="med"/>
-                      <a:tailEnd type="none" w="med" len="med"/>
-                    </a:lnR>
-                    <a:lnT w="9525" cap="flat" cmpd="sng" algn="ctr">
-                      <a:solidFill>
-                        <a:srgbClr val="D9D9D9"/>
-                      </a:solidFill>
-                      <a:prstDash val="solid"/>
-                      <a:round/>
-                      <a:headEnd type="none" w="med" len="med"/>
-                      <a:tailEnd type="none" w="med" len="med"/>
-                    </a:lnT>
-                    <a:lnB w="9525" cap="flat" cmpd="sng" algn="ctr">
-                      <a:solidFill>
-                        <a:srgbClr val="D9D9D9"/>
-                      </a:solidFill>
-                      <a:prstDash val="solid"/>
-                      <a:round/>
-                      <a:headEnd type="none" w="med" len="med"/>
-                      <a:tailEnd type="none" w="med" len="med"/>
-                    </a:lnB>
-                    <a:solidFill>
-                      <a:srgbClr val="FFFFFF"/>
-                    </a:solidFill>
-                  </a:tcPr>
-                </a:tc>
-                <a:tc>
-                  <a:txBody>
-                    <a:bodyPr/>
-                    <a:lstStyle/>
-                    <a:p>
-                      <a:pPr algn="ctr" indent="0" marL="0">
-                        <a:buNone/>
-                      </a:pPr>
-                      <a:endParaRPr lang="en-US" sz="1300" dirty="0">
-                        <a:latin typeface="Malgun Gothic" charset="0"/>
-                        <a:ea typeface="Malgun Gothic" charset="0"/>
-                        <a:cs typeface="Malgun Gothic" charset="0"/>
-                      </a:endParaRPr>
-                    </a:p>
-                  </a:txBody>
-                  <a:tcPr marL="91440" marR="91440" marT="45720" marB="45720" anchor="ctr">
-                    <a:lnL w="9525" cap="flat" cmpd="sng" algn="ctr">
-                      <a:solidFill>
-                        <a:srgbClr val="D9D9D9"/>
-                      </a:solidFill>
-                      <a:prstDash val="solid"/>
-                      <a:round/>
-                      <a:headEnd type="none" w="med" len="med"/>
-                      <a:tailEnd type="none" w="med" len="med"/>
-                    </a:lnL>
-                    <a:lnR w="9525" cap="flat" cmpd="sng" algn="ctr">
-                      <a:solidFill>
-                        <a:srgbClr val="D9D9D9"/>
-                      </a:solidFill>
-                      <a:prstDash val="solid"/>
-                      <a:round/>
-                      <a:headEnd type="none" w="med" len="med"/>
-                      <a:tailEnd type="none" w="med" len="med"/>
-                    </a:lnR>
-                    <a:lnT w="9525" cap="flat" cmpd="sng" algn="ctr">
-                      <a:solidFill>
-                        <a:srgbClr val="D9D9D9"/>
-                      </a:solidFill>
-                      <a:prstDash val="solid"/>
-                      <a:round/>
-                      <a:headEnd type="none" w="med" len="med"/>
-                      <a:tailEnd type="none" w="med" len="med"/>
-                    </a:lnT>
-                    <a:lnB w="9525" cap="flat" cmpd="sng" algn="ctr">
-                      <a:solidFill>
-                        <a:srgbClr val="D9D9D9"/>
-                      </a:solidFill>
-                      <a:prstDash val="solid"/>
-                      <a:round/>
-                      <a:headEnd type="none" w="med" len="med"/>
-                      <a:tailEnd type="none" w="med" len="med"/>
-                    </a:lnB>
-                    <a:solidFill>
-                      <a:srgbClr val="FFFFFF"/>
-                    </a:solidFill>
-                  </a:tcPr>
-                </a:tc>
-                <a:tc>
-                  <a:txBody>
-                    <a:bodyPr/>
-                    <a:lstStyle/>
-                    <a:p>
-                      <a:pPr algn="ctr" indent="0" marL="0">
-                        <a:buNone/>
-                      </a:pPr>
-                      <a:endParaRPr lang="en-US" sz="1300" dirty="0">
-                        <a:latin typeface="Malgun Gothic" charset="0"/>
-                        <a:ea typeface="Malgun Gothic" charset="0"/>
-                        <a:cs typeface="Malgun Gothic" charset="0"/>
-                      </a:endParaRPr>
-                    </a:p>
-                  </a:txBody>
-                  <a:tcPr marL="91440" marR="91440" marT="45720" marB="45720" anchor="ctr">
-                    <a:lnL w="9525" cap="flat" cmpd="sng" algn="ctr">
-                      <a:solidFill>
-                        <a:srgbClr val="D9D9D9"/>
-                      </a:solidFill>
-                      <a:prstDash val="solid"/>
-                      <a:round/>
-                      <a:headEnd type="none" w="med" len="med"/>
-                      <a:tailEnd type="none" w="med" len="med"/>
-                    </a:lnL>
-                    <a:lnR w="9525" cap="flat" cmpd="sng" algn="ctr">
-                      <a:solidFill>
-                        <a:srgbClr val="D9D9D9"/>
-                      </a:solidFill>
-                      <a:prstDash val="solid"/>
-                      <a:round/>
-                      <a:headEnd type="none" w="med" len="med"/>
-                      <a:tailEnd type="none" w="med" len="med"/>
-                    </a:lnR>
-                    <a:lnT w="9525" cap="flat" cmpd="sng" algn="ctr">
-                      <a:solidFill>
-                        <a:srgbClr val="D9D9D9"/>
-                      </a:solidFill>
-                      <a:prstDash val="solid"/>
-                      <a:round/>
-                      <a:headEnd type="none" w="med" len="med"/>
-                      <a:tailEnd type="none" w="med" len="med"/>
-                    </a:lnT>
-                    <a:lnB w="9525" cap="flat" cmpd="sng" algn="ctr">
-                      <a:solidFill>
-                        <a:srgbClr val="D9D9D9"/>
-                      </a:solidFill>
-                      <a:prstDash val="solid"/>
-                      <a:round/>
-                      <a:headEnd type="none" w="med" len="med"/>
-                      <a:tailEnd type="none" w="med" len="med"/>
-                    </a:lnB>
-                    <a:solidFill>
-                      <a:srgbClr val="FFFFFF"/>
-                    </a:solidFill>
-                  </a:tcPr>
-                </a:tc>
-              </a:tr>
-              <a:tr h="502920">
-                <a:tc>
-                  <a:txBody>
-                    <a:bodyPr/>
-                    <a:lstStyle/>
-                    <a:p>
-                      <a:pPr algn="l" indent="0" marL="0">
-                        <a:buNone/>
-                      </a:pPr>
-                      <a:r>
-                        <a:rPr lang="en-US" sz="1300" dirty="0">
-                          <a:solidFill>
-                            <a:srgbClr val="3F3F3F"/>
-                          </a:solidFill>
-                          <a:latin typeface="Malgun Gothic" pitchFamily="34" charset="0"/>
-                          <a:ea typeface="Malgun Gothic" pitchFamily="34" charset="-122"/>
-                          <a:cs typeface="Malgun Gothic" pitchFamily="34" charset="-120"/>
-                        </a:rPr>
-                        <a:t>FS West</a:t>
-                      </a:r>
-                      <a:endParaRPr lang="en-US" sz="1300" dirty="0">
-                        <a:latin typeface="Malgun Gothic" charset="0"/>
-                        <a:ea typeface="Malgun Gothic" charset="0"/>
-                        <a:cs typeface="Malgun Gothic" charset="0"/>
-                      </a:endParaRPr>
-                    </a:p>
-                  </a:txBody>
-                  <a:tcPr marL="91440" marR="91440" marT="45720" marB="45720" anchor="ctr">
-                    <a:lnL w="9525" cap="flat" cmpd="sng" algn="ctr">
-                      <a:solidFill>
-                        <a:srgbClr val="D9D9D9"/>
-                      </a:solidFill>
-                      <a:prstDash val="solid"/>
-                      <a:round/>
-                      <a:headEnd type="none" w="med" len="med"/>
-                      <a:tailEnd type="none" w="med" len="med"/>
-                    </a:lnL>
-                    <a:lnR w="9525" cap="flat" cmpd="sng" algn="ctr">
-                      <a:solidFill>
-                        <a:srgbClr val="D9D9D9"/>
-                      </a:solidFill>
-                      <a:prstDash val="solid"/>
-                      <a:round/>
-                      <a:headEnd type="none" w="med" len="med"/>
-                      <a:tailEnd type="none" w="med" len="med"/>
-                    </a:lnR>
-                    <a:lnT w="9525" cap="flat" cmpd="sng" algn="ctr">
-                      <a:solidFill>
-                        <a:srgbClr val="D9D9D9"/>
-                      </a:solidFill>
-                      <a:prstDash val="solid"/>
-                      <a:round/>
-                      <a:headEnd type="none" w="med" len="med"/>
-                      <a:tailEnd type="none" w="med" len="med"/>
-                    </a:lnT>
-                    <a:lnB w="9525" cap="flat" cmpd="sng" algn="ctr">
-                      <a:solidFill>
-                        <a:srgbClr val="D9D9D9"/>
-                      </a:solidFill>
-                      <a:prstDash val="solid"/>
-                      <a:round/>
-                      <a:headEnd type="none" w="med" len="med"/>
-                      <a:tailEnd type="none" w="med" len="med"/>
-                    </a:lnB>
-                    <a:solidFill>
-                      <a:srgbClr val="FFFFFF"/>
-                    </a:solidFill>
-                  </a:tcPr>
-                </a:tc>
-                <a:tc>
-                  <a:txBody>
-                    <a:bodyPr/>
-                    <a:lstStyle/>
-                    <a:p>
-                      <a:pPr algn="ctr" indent="0" marL="0">
-                        <a:buNone/>
-                      </a:pPr>
-                      <a:r>
-                        <a:rPr lang="en-US" sz="1300" dirty="0">
-                          <a:solidFill>
-                            <a:srgbClr val="3F3F3F"/>
-                          </a:solidFill>
-                          <a:latin typeface="Malgun Gothic" pitchFamily="34" charset="0"/>
-                          <a:ea typeface="Malgun Gothic" pitchFamily="34" charset="-122"/>
-                          <a:cs typeface="Malgun Gothic" pitchFamily="34" charset="-120"/>
-                        </a:rPr>
-                        <a:t>Huymori</a:t>
-                      </a:r>
-                      <a:endParaRPr lang="en-US" sz="1300" dirty="0">
-                        <a:latin typeface="Malgun Gothic" charset="0"/>
-                        <a:ea typeface="Malgun Gothic" charset="0"/>
-                        <a:cs typeface="Malgun Gothic" charset="0"/>
-                      </a:endParaRPr>
-                    </a:p>
-                  </a:txBody>
-                  <a:tcPr marL="91440" marR="91440" marT="45720" marB="45720" anchor="ctr">
-                    <a:lnL w="9525" cap="flat" cmpd="sng" algn="ctr">
-                      <a:solidFill>
-                        <a:srgbClr val="D9D9D9"/>
-                      </a:solidFill>
-                      <a:prstDash val="solid"/>
-                      <a:round/>
-                      <a:headEnd type="none" w="med" len="med"/>
-                      <a:tailEnd type="none" w="med" len="med"/>
-                    </a:lnL>
-                    <a:lnR w="9525" cap="flat" cmpd="sng" algn="ctr">
-                      <a:solidFill>
-                        <a:srgbClr val="D9D9D9"/>
-                      </a:solidFill>
-                      <a:prstDash val="solid"/>
-                      <a:round/>
-                      <a:headEnd type="none" w="med" len="med"/>
-                      <a:tailEnd type="none" w="med" len="med"/>
-                    </a:lnR>
-                    <a:lnT w="9525" cap="flat" cmpd="sng" algn="ctr">
-                      <a:solidFill>
-                        <a:srgbClr val="D9D9D9"/>
-                      </a:solidFill>
-                      <a:prstDash val="solid"/>
-                      <a:round/>
-                      <a:headEnd type="none" w="med" len="med"/>
-                      <a:tailEnd type="none" w="med" len="med"/>
-                    </a:lnT>
-                    <a:lnB w="9525" cap="flat" cmpd="sng" algn="ctr">
-                      <a:solidFill>
-                        <a:srgbClr val="D9D9D9"/>
-                      </a:solidFill>
-                      <a:prstDash val="solid"/>
-                      <a:round/>
-                      <a:headEnd type="none" w="med" len="med"/>
-                      <a:tailEnd type="none" w="med" len="med"/>
-                    </a:lnB>
-                    <a:solidFill>
-                      <a:srgbClr val="FFFFFF"/>
-                    </a:solidFill>
-                  </a:tcPr>
-                </a:tc>
-                <a:tc>
-                  <a:txBody>
-                    <a:bodyPr/>
-                    <a:lstStyle/>
-                    <a:p>
-                      <a:pPr algn="ctr" indent="0" marL="0">
-                        <a:buNone/>
-                      </a:pPr>
-                      <a:r>
-                        <a:rPr lang="en-US" sz="1300" dirty="0">
-                          <a:solidFill>
-                            <a:srgbClr val="3F3F3F"/>
-                          </a:solidFill>
-                          <a:latin typeface="Malgun Gothic" pitchFamily="34" charset="0"/>
-                          <a:ea typeface="Malgun Gothic" pitchFamily="34" charset="-122"/>
-                          <a:cs typeface="Malgun Gothic" pitchFamily="34" charset="-120"/>
-                        </a:rPr>
-                        <a:t>자료 미제공 – 추후 업데이트</a:t>
-                      </a:r>
-                      <a:endParaRPr lang="en-US" sz="1300" dirty="0">
-                        <a:latin typeface="Malgun Gothic" charset="0"/>
-                        <a:ea typeface="Malgun Gothic" charset="0"/>
-                        <a:cs typeface="Malgun Gothic" charset="0"/>
-                      </a:endParaRPr>
-                    </a:p>
-                  </a:txBody>
-                  <a:tcPr marL="91440" marR="91440" marT="45720" marB="45720" anchor="ctr">
-                    <a:lnL w="9525" cap="flat" cmpd="sng" algn="ctr">
-                      <a:solidFill>
-                        <a:srgbClr val="D9D9D9"/>
-                      </a:solidFill>
-                      <a:prstDash val="solid"/>
-                      <a:round/>
-                      <a:headEnd type="none" w="med" len="med"/>
-                      <a:tailEnd type="none" w="med" len="med"/>
-                    </a:lnL>
-                    <a:lnR w="9525" cap="flat" cmpd="sng" algn="ctr">
-                      <a:solidFill>
-                        <a:srgbClr val="D9D9D9"/>
-                      </a:solidFill>
-                      <a:prstDash val="solid"/>
-                      <a:round/>
-                      <a:headEnd type="none" w="med" len="med"/>
-                      <a:tailEnd type="none" w="med" len="med"/>
-                    </a:lnR>
-                    <a:lnT w="9525" cap="flat" cmpd="sng" algn="ctr">
-                      <a:solidFill>
-                        <a:srgbClr val="D9D9D9"/>
-                      </a:solidFill>
-                      <a:prstDash val="solid"/>
-                      <a:round/>
-                      <a:headEnd type="none" w="med" len="med"/>
-                      <a:tailEnd type="none" w="med" len="med"/>
-                    </a:lnT>
-                    <a:lnB w="9525" cap="flat" cmpd="sng" algn="ctr">
-                      <a:solidFill>
-                        <a:srgbClr val="D9D9D9"/>
-                      </a:solidFill>
-                      <a:prstDash val="solid"/>
-                      <a:round/>
-                      <a:headEnd type="none" w="med" len="med"/>
-                      <a:tailEnd type="none" w="med" len="med"/>
-                    </a:lnB>
-                    <a:solidFill>
-                      <a:srgbClr val="FFFFFF"/>
-                    </a:solidFill>
-                  </a:tcPr>
-                </a:tc>
-                <a:tc>
-                  <a:txBody>
-                    <a:bodyPr/>
-                    <a:lstStyle/>
-                    <a:p>
-                      <a:pPr algn="ctr" indent="0" marL="0">
-                        <a:buNone/>
-                      </a:pPr>
-                      <a:endParaRPr lang="en-US" sz="1300" dirty="0">
-                        <a:latin typeface="Malgun Gothic" charset="0"/>
-                        <a:ea typeface="Malgun Gothic" charset="0"/>
-                        <a:cs typeface="Malgun Gothic" charset="0"/>
-                      </a:endParaRPr>
-                    </a:p>
-                  </a:txBody>
-                  <a:tcPr marL="91440" marR="91440" marT="45720" marB="45720" anchor="ctr">
-                    <a:lnL w="9525" cap="flat" cmpd="sng" algn="ctr">
-                      <a:solidFill>
-                        <a:srgbClr val="D9D9D9"/>
-                      </a:solidFill>
-                      <a:prstDash val="solid"/>
-                      <a:round/>
-                      <a:headEnd type="none" w="med" len="med"/>
-                      <a:tailEnd type="none" w="med" len="med"/>
-                    </a:lnL>
-                    <a:lnR w="9525" cap="flat" cmpd="sng" algn="ctr">
-                      <a:solidFill>
-                        <a:srgbClr val="D9D9D9"/>
-                      </a:solidFill>
-                      <a:prstDash val="solid"/>
-                      <a:round/>
-                      <a:headEnd type="none" w="med" len="med"/>
-                      <a:tailEnd type="none" w="med" len="med"/>
-                    </a:lnR>
-                    <a:lnT w="9525" cap="flat" cmpd="sng" algn="ctr">
-                      <a:solidFill>
-                        <a:srgbClr val="D9D9D9"/>
-                      </a:solidFill>
-                      <a:prstDash val="solid"/>
-                      <a:round/>
-                      <a:headEnd type="none" w="med" len="med"/>
-                      <a:tailEnd type="none" w="med" len="med"/>
-                    </a:lnT>
-                    <a:lnB w="9525" cap="flat" cmpd="sng" algn="ctr">
-                      <a:solidFill>
-                        <a:srgbClr val="D9D9D9"/>
-                      </a:solidFill>
-                      <a:prstDash val="solid"/>
-                      <a:round/>
-                      <a:headEnd type="none" w="med" len="med"/>
-                      <a:tailEnd type="none" w="med" len="med"/>
-                    </a:lnB>
-                    <a:solidFill>
-                      <a:srgbClr val="FFFFFF"/>
-                    </a:solidFill>
-                  </a:tcPr>
-                </a:tc>
-                <a:tc>
-                  <a:txBody>
-                    <a:bodyPr/>
-                    <a:lstStyle/>
-                    <a:p>
-                      <a:pPr algn="ctr" indent="0" marL="0">
-                        <a:buNone/>
-                      </a:pPr>
-                      <a:endParaRPr lang="en-US" sz="1300" dirty="0">
-                        <a:latin typeface="Malgun Gothic" charset="0"/>
-                        <a:ea typeface="Malgun Gothic" charset="0"/>
-                        <a:cs typeface="Malgun Gothic" charset="0"/>
-                      </a:endParaRPr>
-                    </a:p>
-                  </a:txBody>
-                  <a:tcPr marL="91440" marR="91440" marT="45720" marB="45720" anchor="ctr">
-                    <a:lnL w="9525" cap="flat" cmpd="sng" algn="ctr">
-                      <a:solidFill>
-                        <a:srgbClr val="D9D9D9"/>
-                      </a:solidFill>
-                      <a:prstDash val="solid"/>
-                      <a:round/>
-                      <a:headEnd type="none" w="med" len="med"/>
-                      <a:tailEnd type="none" w="med" len="med"/>
-                    </a:lnL>
-                    <a:lnR w="9525" cap="flat" cmpd="sng" algn="ctr">
-                      <a:solidFill>
-                        <a:srgbClr val="D9D9D9"/>
-                      </a:solidFill>
-                      <a:prstDash val="solid"/>
-                      <a:round/>
-                      <a:headEnd type="none" w="med" len="med"/>
-                      <a:tailEnd type="none" w="med" len="med"/>
-                    </a:lnR>
-                    <a:lnT w="9525" cap="flat" cmpd="sng" algn="ctr">
-                      <a:solidFill>
-                        <a:srgbClr val="D9D9D9"/>
-                      </a:solidFill>
-                      <a:prstDash val="solid"/>
-                      <a:round/>
-                      <a:headEnd type="none" w="med" len="med"/>
-                      <a:tailEnd type="none" w="med" len="med"/>
-                    </a:lnT>
-                    <a:lnB w="9525" cap="flat" cmpd="sng" algn="ctr">
-                      <a:solidFill>
-                        <a:srgbClr val="D9D9D9"/>
-                      </a:solidFill>
-                      <a:prstDash val="solid"/>
-                      <a:round/>
-                      <a:headEnd type="none" w="med" len="med"/>
-                      <a:tailEnd type="none" w="med" len="med"/>
-                    </a:lnB>
-                    <a:solidFill>
-                      <a:srgbClr val="FFFFFF"/>
-                    </a:solidFill>
-                  </a:tcPr>
-                </a:tc>
-                <a:tc>
-                  <a:txBody>
-                    <a:bodyPr/>
-                    <a:lstStyle/>
-                    <a:p>
-                      <a:pPr algn="ctr" indent="0" marL="0">
-                        <a:buNone/>
-                      </a:pPr>
-                      <a:endParaRPr lang="en-US" sz="1300" dirty="0">
-                        <a:latin typeface="Malgun Gothic" charset="0"/>
-                        <a:ea typeface="Malgun Gothic" charset="0"/>
-                        <a:cs typeface="Malgun Gothic" charset="0"/>
-                      </a:endParaRPr>
-                    </a:p>
-                  </a:txBody>
-                  <a:tcPr marL="91440" marR="91440" marT="45720" marB="45720" anchor="ctr">
-                    <a:lnL w="9525" cap="flat" cmpd="sng" algn="ctr">
-                      <a:solidFill>
-                        <a:srgbClr val="D9D9D9"/>
-                      </a:solidFill>
-                      <a:prstDash val="solid"/>
-                      <a:round/>
-                      <a:headEnd type="none" w="med" len="med"/>
-                      <a:tailEnd type="none" w="med" len="med"/>
-                    </a:lnL>
-                    <a:lnR w="9525" cap="flat" cmpd="sng" algn="ctr">
-                      <a:solidFill>
-                        <a:srgbClr val="D9D9D9"/>
-                      </a:solidFill>
-                      <a:prstDash val="solid"/>
-                      <a:round/>
-                      <a:headEnd type="none" w="med" len="med"/>
-                      <a:tailEnd type="none" w="med" len="med"/>
-                    </a:lnR>
-                    <a:lnT w="9525" cap="flat" cmpd="sng" algn="ctr">
-                      <a:solidFill>
-                        <a:srgbClr val="D9D9D9"/>
-                      </a:solidFill>
-                      <a:prstDash val="solid"/>
-                      <a:round/>
-                      <a:headEnd type="none" w="med" len="med"/>
-                      <a:tailEnd type="none" w="med" len="med"/>
-                    </a:lnT>
-                    <a:lnB w="9525" cap="flat" cmpd="sng" algn="ctr">
-                      <a:solidFill>
-                        <a:srgbClr val="D9D9D9"/>
-                      </a:solidFill>
-                      <a:prstDash val="solid"/>
-                      <a:round/>
-                      <a:headEnd type="none" w="med" len="med"/>
-                      <a:tailEnd type="none" w="med" len="med"/>
-                    </a:lnB>
-                    <a:solidFill>
-                      <a:srgbClr val="FFFFFF"/>
-                    </a:solidFill>
-                  </a:tcPr>
-                </a:tc>
-              </a:tr>
-              <a:tr h="502920">
-                <a:tc>
-                  <a:txBody>
-                    <a:bodyPr/>
-                    <a:lstStyle/>
-                    <a:p>
-                      <a:pPr algn="l" indent="0" marL="0">
-                        <a:buNone/>
-                      </a:pPr>
-                      <a:r>
-                        <a:rPr lang="en-US" sz="1300" dirty="0">
-                          <a:solidFill>
-                            <a:srgbClr val="3F3F3F"/>
-                          </a:solidFill>
-                          <a:latin typeface="Malgun Gothic" pitchFamily="34" charset="0"/>
-                          <a:ea typeface="Malgun Gothic" pitchFamily="34" charset="-122"/>
-                          <a:cs typeface="Malgun Gothic" pitchFamily="34" charset="-120"/>
-                        </a:rPr>
-                        <a:t>FS South</a:t>
-                      </a:r>
-                      <a:endParaRPr lang="en-US" sz="1300" dirty="0">
-                        <a:latin typeface="Malgun Gothic" charset="0"/>
-                        <a:ea typeface="Malgun Gothic" charset="0"/>
-                        <a:cs typeface="Malgun Gothic" charset="0"/>
-                      </a:endParaRPr>
-                    </a:p>
-                  </a:txBody>
-                  <a:tcPr marL="91440" marR="91440" marT="45720" marB="45720" anchor="ctr">
-                    <a:lnL w="9525" cap="flat" cmpd="sng" algn="ctr">
-                      <a:solidFill>
-                        <a:srgbClr val="D9D9D9"/>
-                      </a:solidFill>
-                      <a:prstDash val="solid"/>
-                      <a:round/>
-                      <a:headEnd type="none" w="med" len="med"/>
-                      <a:tailEnd type="none" w="med" len="med"/>
-                    </a:lnL>
-                    <a:lnR w="9525" cap="flat" cmpd="sng" algn="ctr">
-                      <a:solidFill>
-                        <a:srgbClr val="D9D9D9"/>
-                      </a:solidFill>
-                      <a:prstDash val="solid"/>
-                      <a:round/>
-                      <a:headEnd type="none" w="med" len="med"/>
-                      <a:tailEnd type="none" w="med" len="med"/>
-                    </a:lnR>
-                    <a:lnT w="9525" cap="flat" cmpd="sng" algn="ctr">
-                      <a:solidFill>
-                        <a:srgbClr val="D9D9D9"/>
-                      </a:solidFill>
-                      <a:prstDash val="solid"/>
-                      <a:round/>
-                      <a:headEnd type="none" w="med" len="med"/>
-                      <a:tailEnd type="none" w="med" len="med"/>
-                    </a:lnT>
-                    <a:lnB w="9525" cap="flat" cmpd="sng" algn="ctr">
-                      <a:solidFill>
-                        <a:srgbClr val="D9D9D9"/>
-                      </a:solidFill>
-                      <a:prstDash val="solid"/>
-                      <a:round/>
-                      <a:headEnd type="none" w="med" len="med"/>
-                      <a:tailEnd type="none" w="med" len="med"/>
-                    </a:lnB>
-                    <a:solidFill>
-                      <a:srgbClr val="FFFFFF"/>
-                    </a:solidFill>
-                  </a:tcPr>
-                </a:tc>
-                <a:tc>
-                  <a:txBody>
-                    <a:bodyPr/>
-                    <a:lstStyle/>
-                    <a:p>
-                      <a:pPr algn="ctr" indent="0" marL="0">
-                        <a:buNone/>
-                      </a:pPr>
-                      <a:r>
-                        <a:rPr lang="en-US" sz="1300" dirty="0">
-                          <a:solidFill>
-                            <a:srgbClr val="3F3F3F"/>
-                          </a:solidFill>
-                          <a:latin typeface="Malgun Gothic" pitchFamily="34" charset="0"/>
-                          <a:ea typeface="Malgun Gothic" pitchFamily="34" charset="-122"/>
-                          <a:cs typeface="Malgun Gothic" pitchFamily="34" charset="-120"/>
-                        </a:rPr>
-                        <a:t>John</a:t>
-                      </a:r>
-                      <a:endParaRPr lang="en-US" sz="1300" dirty="0">
-                        <a:latin typeface="Malgun Gothic" charset="0"/>
-                        <a:ea typeface="Malgun Gothic" charset="0"/>
-                        <a:cs typeface="Malgun Gothic" charset="0"/>
-                      </a:endParaRPr>
-                    </a:p>
-                  </a:txBody>
-                  <a:tcPr marL="91440" marR="91440" marT="45720" marB="45720" anchor="ctr">
-                    <a:lnL w="9525" cap="flat" cmpd="sng" algn="ctr">
-                      <a:solidFill>
-                        <a:srgbClr val="D9D9D9"/>
-                      </a:solidFill>
-                      <a:prstDash val="solid"/>
-                      <a:round/>
-                      <a:headEnd type="none" w="med" len="med"/>
-                      <a:tailEnd type="none" w="med" len="med"/>
-                    </a:lnL>
-                    <a:lnR w="9525" cap="flat" cmpd="sng" algn="ctr">
-                      <a:solidFill>
-                        <a:srgbClr val="D9D9D9"/>
-                      </a:solidFill>
-                      <a:prstDash val="solid"/>
-                      <a:round/>
-                      <a:headEnd type="none" w="med" len="med"/>
-                      <a:tailEnd type="none" w="med" len="med"/>
-                    </a:lnR>
-                    <a:lnT w="9525" cap="flat" cmpd="sng" algn="ctr">
-                      <a:solidFill>
-                        <a:srgbClr val="D9D9D9"/>
-                      </a:solidFill>
-                      <a:prstDash val="solid"/>
-                      <a:round/>
-                      <a:headEnd type="none" w="med" len="med"/>
-                      <a:tailEnd type="none" w="med" len="med"/>
-                    </a:lnT>
-                    <a:lnB w="9525" cap="flat" cmpd="sng" algn="ctr">
-                      <a:solidFill>
-                        <a:srgbClr val="D9D9D9"/>
-                      </a:solidFill>
-                      <a:prstDash val="solid"/>
-                      <a:round/>
-                      <a:headEnd type="none" w="med" len="med"/>
-                      <a:tailEnd type="none" w="med" len="med"/>
-                    </a:lnB>
-                    <a:solidFill>
-                      <a:srgbClr val="FFFFFF"/>
-                    </a:solidFill>
-                  </a:tcPr>
-                </a:tc>
-                <a:tc>
-                  <a:txBody>
-                    <a:bodyPr/>
-                    <a:lstStyle/>
-                    <a:p>
-                      <a:pPr algn="ctr" indent="0" marL="0">
-                        <a:buNone/>
-                      </a:pPr>
-                      <a:r>
-                        <a:rPr lang="en-US" sz="1300" dirty="0">
-                          <a:solidFill>
-                            <a:srgbClr val="3F3F3F"/>
-                          </a:solidFill>
-                          <a:latin typeface="Malgun Gothic" pitchFamily="34" charset="0"/>
-                          <a:ea typeface="Malgun Gothic" pitchFamily="34" charset="-122"/>
-                          <a:cs typeface="Malgun Gothic" pitchFamily="34" charset="-120"/>
-                        </a:rPr>
-                        <a:t>자료 미제공 – 추후 업데이트</a:t>
-                      </a:r>
-                      <a:endParaRPr lang="en-US" sz="1300" dirty="0">
-                        <a:latin typeface="Malgun Gothic" charset="0"/>
-                        <a:ea typeface="Malgun Gothic" charset="0"/>
-                        <a:cs typeface="Malgun Gothic" charset="0"/>
-                      </a:endParaRPr>
-                    </a:p>
-                  </a:txBody>
-                  <a:tcPr marL="91440" marR="91440" marT="45720" marB="45720" anchor="ctr">
-                    <a:lnL w="9525" cap="flat" cmpd="sng" algn="ctr">
-                      <a:solidFill>
-                        <a:srgbClr val="D9D9D9"/>
-                      </a:solidFill>
-                      <a:prstDash val="solid"/>
-                      <a:round/>
-                      <a:headEnd type="none" w="med" len="med"/>
-                      <a:tailEnd type="none" w="med" len="med"/>
-                    </a:lnL>
-                    <a:lnR w="9525" cap="flat" cmpd="sng" algn="ctr">
-                      <a:solidFill>
-                        <a:srgbClr val="D9D9D9"/>
-                      </a:solidFill>
-                      <a:prstDash val="solid"/>
-                      <a:round/>
-                      <a:headEnd type="none" w="med" len="med"/>
-                      <a:tailEnd type="none" w="med" len="med"/>
-                    </a:lnR>
-                    <a:lnT w="9525" cap="flat" cmpd="sng" algn="ctr">
-                      <a:solidFill>
-                        <a:srgbClr val="D9D9D9"/>
-                      </a:solidFill>
-                      <a:prstDash val="solid"/>
-                      <a:round/>
-                      <a:headEnd type="none" w="med" len="med"/>
-                      <a:tailEnd type="none" w="med" len="med"/>
-                    </a:lnT>
-                    <a:lnB w="9525" cap="flat" cmpd="sng" algn="ctr">
-                      <a:solidFill>
-                        <a:srgbClr val="D9D9D9"/>
-                      </a:solidFill>
-                      <a:prstDash val="solid"/>
-                      <a:round/>
-                      <a:headEnd type="none" w="med" len="med"/>
-                      <a:tailEnd type="none" w="med" len="med"/>
-                    </a:lnB>
-                    <a:solidFill>
-                      <a:srgbClr val="FFFFFF"/>
-                    </a:solidFill>
-                  </a:tcPr>
-                </a:tc>
-                <a:tc>
-                  <a:txBody>
-                    <a:bodyPr/>
-                    <a:lstStyle/>
-                    <a:p>
-                      <a:pPr algn="ctr" indent="0" marL="0">
-                        <a:buNone/>
-                      </a:pPr>
-                      <a:endParaRPr lang="en-US" sz="1300" dirty="0">
-                        <a:latin typeface="Malgun Gothic" charset="0"/>
-                        <a:ea typeface="Malgun Gothic" charset="0"/>
-                        <a:cs typeface="Malgun Gothic" charset="0"/>
-                      </a:endParaRPr>
-                    </a:p>
-                  </a:txBody>
-                  <a:tcPr marL="91440" marR="91440" marT="45720" marB="45720" anchor="ctr">
-                    <a:lnL w="9525" cap="flat" cmpd="sng" algn="ctr">
-                      <a:solidFill>
-                        <a:srgbClr val="D9D9D9"/>
-                      </a:solidFill>
-                      <a:prstDash val="solid"/>
-                      <a:round/>
-                      <a:headEnd type="none" w="med" len="med"/>
-                      <a:tailEnd type="none" w="med" len="med"/>
-                    </a:lnL>
-                    <a:lnR w="9525" cap="flat" cmpd="sng" algn="ctr">
-                      <a:solidFill>
-                        <a:srgbClr val="D9D9D9"/>
-                      </a:solidFill>
-                      <a:prstDash val="solid"/>
-                      <a:round/>
-                      <a:headEnd type="none" w="med" len="med"/>
-                      <a:tailEnd type="none" w="med" len="med"/>
-                    </a:lnR>
-                    <a:lnT w="9525" cap="flat" cmpd="sng" algn="ctr">
-                      <a:solidFill>
-                        <a:srgbClr val="D9D9D9"/>
-                      </a:solidFill>
-                      <a:prstDash val="solid"/>
-                      <a:round/>
-                      <a:headEnd type="none" w="med" len="med"/>
-                      <a:tailEnd type="none" w="med" len="med"/>
-                    </a:lnT>
-                    <a:lnB w="9525" cap="flat" cmpd="sng" algn="ctr">
-                      <a:solidFill>
-                        <a:srgbClr val="D9D9D9"/>
-                      </a:solidFill>
-                      <a:prstDash val="solid"/>
-                      <a:round/>
-                      <a:headEnd type="none" w="med" len="med"/>
-                      <a:tailEnd type="none" w="med" len="med"/>
-                    </a:lnB>
-                    <a:solidFill>
-                      <a:srgbClr val="FFFFFF"/>
-                    </a:solidFill>
-                  </a:tcPr>
-                </a:tc>
-                <a:tc>
-                  <a:txBody>
-                    <a:bodyPr/>
-                    <a:lstStyle/>
-                    <a:p>
-                      <a:pPr algn="ctr" indent="0" marL="0">
-                        <a:buNone/>
-                      </a:pPr>
-                      <a:endParaRPr lang="en-US" sz="1300" dirty="0">
-                        <a:latin typeface="Malgun Gothic" charset="0"/>
-                        <a:ea typeface="Malgun Gothic" charset="0"/>
-                        <a:cs typeface="Malgun Gothic" charset="0"/>
-                      </a:endParaRPr>
-                    </a:p>
-                  </a:txBody>
-                  <a:tcPr marL="91440" marR="91440" marT="45720" marB="45720" anchor="ctr">
-                    <a:lnL w="9525" cap="flat" cmpd="sng" algn="ctr">
-                      <a:solidFill>
-                        <a:srgbClr val="D9D9D9"/>
-                      </a:solidFill>
-                      <a:prstDash val="solid"/>
-                      <a:round/>
-                      <a:headEnd type="none" w="med" len="med"/>
-                      <a:tailEnd type="none" w="med" len="med"/>
-                    </a:lnL>
-                    <a:lnR w="9525" cap="flat" cmpd="sng" algn="ctr">
-                      <a:solidFill>
-                        <a:srgbClr val="D9D9D9"/>
-                      </a:solidFill>
-                      <a:prstDash val="solid"/>
-                      <a:round/>
-                      <a:headEnd type="none" w="med" len="med"/>
-                      <a:tailEnd type="none" w="med" len="med"/>
-                    </a:lnR>
-                    <a:lnT w="9525" cap="flat" cmpd="sng" algn="ctr">
-                      <a:solidFill>
-                        <a:srgbClr val="D9D9D9"/>
-                      </a:solidFill>
-                      <a:prstDash val="solid"/>
-                      <a:round/>
-                      <a:headEnd type="none" w="med" len="med"/>
-                      <a:tailEnd type="none" w="med" len="med"/>
-                    </a:lnT>
-                    <a:lnB w="9525" cap="flat" cmpd="sng" algn="ctr">
-                      <a:solidFill>
-                        <a:srgbClr val="D9D9D9"/>
-                      </a:solidFill>
-                      <a:prstDash val="solid"/>
-                      <a:round/>
-                      <a:headEnd type="none" w="med" len="med"/>
-                      <a:tailEnd type="none" w="med" len="med"/>
-                    </a:lnB>
-                    <a:solidFill>
-                      <a:srgbClr val="FFFFFF"/>
-                    </a:solidFill>
-                  </a:tcPr>
-                </a:tc>
-                <a:tc>
-                  <a:txBody>
-                    <a:bodyPr/>
-                    <a:lstStyle/>
-                    <a:p>
-                      <a:pPr algn="ctr" indent="0" marL="0">
-                        <a:buNone/>
-                      </a:pPr>
-                      <a:endParaRPr lang="en-US" sz="1300" dirty="0">
-                        <a:latin typeface="Malgun Gothic" charset="0"/>
-                        <a:ea typeface="Malgun Gothic" charset="0"/>
-                        <a:cs typeface="Malgun Gothic" charset="0"/>
-                      </a:endParaRPr>
-                    </a:p>
-                  </a:txBody>
-                  <a:tcPr marL="91440" marR="91440" marT="45720" marB="45720" anchor="ctr">
-                    <a:lnL w="9525" cap="flat" cmpd="sng" algn="ctr">
-                      <a:solidFill>
-                        <a:srgbClr val="D9D9D9"/>
-                      </a:solidFill>
-                      <a:prstDash val="solid"/>
-                      <a:round/>
-                      <a:headEnd type="none" w="med" len="med"/>
-                      <a:tailEnd type="none" w="med" len="med"/>
-                    </a:lnL>
-                    <a:lnR w="9525" cap="flat" cmpd="sng" algn="ctr">
-                      <a:solidFill>
-                        <a:srgbClr val="D9D9D9"/>
-                      </a:solidFill>
-                      <a:prstDash val="solid"/>
-                      <a:round/>
-                      <a:headEnd type="none" w="med" len="med"/>
-                      <a:tailEnd type="none" w="med" len="med"/>
-                    </a:lnR>
-                    <a:lnT w="9525" cap="flat" cmpd="sng" algn="ctr">
-                      <a:solidFill>
-                        <a:srgbClr val="D9D9D9"/>
-                      </a:solidFill>
-                      <a:prstDash val="solid"/>
-                      <a:round/>
-                      <a:headEnd type="none" w="med" len="med"/>
-                      <a:tailEnd type="none" w="med" len="med"/>
-                    </a:lnT>
-                    <a:lnB w="9525" cap="flat" cmpd="sng" algn="ctr">
-                      <a:solidFill>
-                        <a:srgbClr val="D9D9D9"/>
-                      </a:solidFill>
-                      <a:prstDash val="solid"/>
-                      <a:round/>
-                      <a:headEnd type="none" w="med" len="med"/>
-                      <a:tailEnd type="none" w="med" len="med"/>
-                    </a:lnB>
-                    <a:solidFill>
-                      <a:srgbClr val="FFFFFF"/>
-                    </a:solidFill>
-                  </a:tcPr>
-                </a:tc>
-              </a:tr>
-              <a:tr h="502920">
-                <a:tc>
-                  <a:txBody>
-                    <a:bodyPr/>
-                    <a:lstStyle/>
-                    <a:p>
-                      <a:pPr algn="l" indent="0" marL="0">
-                        <a:buNone/>
-                      </a:pPr>
-                      <a:r>
-                        <a:rPr lang="en-US" sz="1300" dirty="0">
-                          <a:solidFill>
-                            <a:srgbClr val="3F3F3F"/>
-                          </a:solidFill>
-                          <a:latin typeface="Malgun Gothic" pitchFamily="34" charset="0"/>
-                          <a:ea typeface="Malgun Gothic" pitchFamily="34" charset="-122"/>
-                          <a:cs typeface="Malgun Gothic" pitchFamily="34" charset="-120"/>
-                        </a:rPr>
-                        <a:t>FS Central</a:t>
-                      </a:r>
-                      <a:endParaRPr lang="en-US" sz="1300" dirty="0">
-                        <a:latin typeface="Malgun Gothic" charset="0"/>
-                        <a:ea typeface="Malgun Gothic" charset="0"/>
-                        <a:cs typeface="Malgun Gothic" charset="0"/>
-                      </a:endParaRPr>
-                    </a:p>
-                  </a:txBody>
-                  <a:tcPr marL="91440" marR="91440" marT="45720" marB="45720" anchor="ctr">
-                    <a:lnL w="9525" cap="flat" cmpd="sng" algn="ctr">
-                      <a:solidFill>
-                        <a:srgbClr val="D9D9D9"/>
-                      </a:solidFill>
-                      <a:prstDash val="solid"/>
-                      <a:round/>
-                      <a:headEnd type="none" w="med" len="med"/>
-                      <a:tailEnd type="none" w="med" len="med"/>
-                    </a:lnL>
-                    <a:lnR w="9525" cap="flat" cmpd="sng" algn="ctr">
-                      <a:solidFill>
-                        <a:srgbClr val="D9D9D9"/>
-                      </a:solidFill>
-                      <a:prstDash val="solid"/>
-                      <a:round/>
-                      <a:headEnd type="none" w="med" len="med"/>
-                      <a:tailEnd type="none" w="med" len="med"/>
-                    </a:lnR>
-                    <a:lnT w="9525" cap="flat" cmpd="sng" algn="ctr">
-                      <a:solidFill>
-                        <a:srgbClr val="D9D9D9"/>
-                      </a:solidFill>
-                      <a:prstDash val="solid"/>
-                      <a:round/>
-                      <a:headEnd type="none" w="med" len="med"/>
-                      <a:tailEnd type="none" w="med" len="med"/>
-                    </a:lnT>
-                    <a:lnB w="9525" cap="flat" cmpd="sng" algn="ctr">
-                      <a:solidFill>
-                        <a:srgbClr val="D9D9D9"/>
-                      </a:solidFill>
-                      <a:prstDash val="solid"/>
-                      <a:round/>
-                      <a:headEnd type="none" w="med" len="med"/>
-                      <a:tailEnd type="none" w="med" len="med"/>
-                    </a:lnB>
-                    <a:solidFill>
-                      <a:srgbClr val="FFFFFF"/>
-                    </a:solidFill>
-                  </a:tcPr>
-                </a:tc>
-                <a:tc>
-                  <a:txBody>
-                    <a:bodyPr/>
-                    <a:lstStyle/>
-                    <a:p>
-                      <a:pPr algn="ctr" indent="0" marL="0">
-                        <a:buNone/>
-                      </a:pPr>
-                      <a:r>
-                        <a:rPr lang="en-US" sz="1300" dirty="0">
-                          <a:solidFill>
-                            <a:srgbClr val="3F3F3F"/>
-                          </a:solidFill>
-                          <a:latin typeface="Malgun Gothic" pitchFamily="34" charset="0"/>
-                          <a:ea typeface="Malgun Gothic" pitchFamily="34" charset="-122"/>
-                          <a:cs typeface="Malgun Gothic" pitchFamily="34" charset="-120"/>
-                        </a:rPr>
-                        <a:t>Eden</a:t>
-                      </a:r>
-                      <a:endParaRPr lang="en-US" sz="1300" dirty="0">
-                        <a:latin typeface="Malgun Gothic" charset="0"/>
-                        <a:ea typeface="Malgun Gothic" charset="0"/>
-                        <a:cs typeface="Malgun Gothic" charset="0"/>
-                      </a:endParaRPr>
-                    </a:p>
-                  </a:txBody>
-                  <a:tcPr marL="91440" marR="91440" marT="45720" marB="45720" anchor="ctr">
-                    <a:lnL w="9525" cap="flat" cmpd="sng" algn="ctr">
-                      <a:solidFill>
-                        <a:srgbClr val="D9D9D9"/>
-                      </a:solidFill>
-                      <a:prstDash val="solid"/>
-                      <a:round/>
-                      <a:headEnd type="none" w="med" len="med"/>
-                      <a:tailEnd type="none" w="med" len="med"/>
-                    </a:lnL>
-                    <a:lnR w="9525" cap="flat" cmpd="sng" algn="ctr">
-                      <a:solidFill>
-                        <a:srgbClr val="D9D9D9"/>
-                      </a:solidFill>
-                      <a:prstDash val="solid"/>
-                      <a:round/>
-                      <a:headEnd type="none" w="med" len="med"/>
-                      <a:tailEnd type="none" w="med" len="med"/>
-                    </a:lnR>
-                    <a:lnT w="9525" cap="flat" cmpd="sng" algn="ctr">
-                      <a:solidFill>
-                        <a:srgbClr val="D9D9D9"/>
-                      </a:solidFill>
-                      <a:prstDash val="solid"/>
-                      <a:round/>
-                      <a:headEnd type="none" w="med" len="med"/>
-                      <a:tailEnd type="none" w="med" len="med"/>
-                    </a:lnT>
-                    <a:lnB w="9525" cap="flat" cmpd="sng" algn="ctr">
-                      <a:solidFill>
-                        <a:srgbClr val="D9D9D9"/>
-                      </a:solidFill>
-                      <a:prstDash val="solid"/>
-                      <a:round/>
-                      <a:headEnd type="none" w="med" len="med"/>
-                      <a:tailEnd type="none" w="med" len="med"/>
-                    </a:lnB>
-                    <a:solidFill>
-                      <a:srgbClr val="FFFFFF"/>
-                    </a:solidFill>
-                  </a:tcPr>
-                </a:tc>
-                <a:tc>
-                  <a:txBody>
-                    <a:bodyPr/>
-                    <a:lstStyle/>
-                    <a:p>
-                      <a:pPr algn="ctr" indent="0" marL="0">
-                        <a:buNone/>
-                      </a:pPr>
-                      <a:r>
-                        <a:rPr lang="en-US" sz="1300" dirty="0">
-                          <a:solidFill>
-                            <a:srgbClr val="3F3F3F"/>
-                          </a:solidFill>
-                          <a:latin typeface="Malgun Gothic" pitchFamily="34" charset="0"/>
-                          <a:ea typeface="Malgun Gothic" pitchFamily="34" charset="-122"/>
-                          <a:cs typeface="Malgun Gothic" pitchFamily="34" charset="-120"/>
-                        </a:rPr>
-                        <a:t>자료 미제공 – 추후 업데이트</a:t>
-                      </a:r>
-                      <a:endParaRPr lang="en-US" sz="1300" dirty="0">
-                        <a:latin typeface="Malgun Gothic" charset="0"/>
-                        <a:ea typeface="Malgun Gothic" charset="0"/>
-                        <a:cs typeface="Malgun Gothic" charset="0"/>
-                      </a:endParaRPr>
-                    </a:p>
-                  </a:txBody>
-                  <a:tcPr marL="91440" marR="91440" marT="45720" marB="45720" anchor="ctr">
-                    <a:lnL w="9525" cap="flat" cmpd="sng" algn="ctr">
-                      <a:solidFill>
-                        <a:srgbClr val="D9D9D9"/>
-                      </a:solidFill>
-                      <a:prstDash val="solid"/>
-                      <a:round/>
-                      <a:headEnd type="none" w="med" len="med"/>
-                      <a:tailEnd type="none" w="med" len="med"/>
-                    </a:lnL>
-                    <a:lnR w="9525" cap="flat" cmpd="sng" algn="ctr">
-                      <a:solidFill>
-                        <a:srgbClr val="D9D9D9"/>
-                      </a:solidFill>
-                      <a:prstDash val="solid"/>
-                      <a:round/>
-                      <a:headEnd type="none" w="med" len="med"/>
-                      <a:tailEnd type="none" w="med" len="med"/>
-                    </a:lnR>
-                    <a:lnT w="9525" cap="flat" cmpd="sng" algn="ctr">
-                      <a:solidFill>
-                        <a:srgbClr val="D9D9D9"/>
-                      </a:solidFill>
-                      <a:prstDash val="solid"/>
-                      <a:round/>
-                      <a:headEnd type="none" w="med" len="med"/>
-                      <a:tailEnd type="none" w="med" len="med"/>
-                    </a:lnT>
-                    <a:lnB w="9525" cap="flat" cmpd="sng" algn="ctr">
-                      <a:solidFill>
-                        <a:srgbClr val="D9D9D9"/>
-                      </a:solidFill>
-                      <a:prstDash val="solid"/>
-                      <a:round/>
-                      <a:headEnd type="none" w="med" len="med"/>
-                      <a:tailEnd type="none" w="med" len="med"/>
-                    </a:lnB>
-                    <a:solidFill>
-                      <a:srgbClr val="FFFFFF"/>
-                    </a:solidFill>
-                  </a:tcPr>
-                </a:tc>
-                <a:tc>
-                  <a:txBody>
-                    <a:bodyPr/>
-                    <a:lstStyle/>
-                    <a:p>
-                      <a:pPr algn="ctr" indent="0" marL="0">
-                        <a:buNone/>
-                      </a:pPr>
-                      <a:endParaRPr lang="en-US" sz="1300" dirty="0">
-                        <a:latin typeface="Malgun Gothic" charset="0"/>
-                        <a:ea typeface="Malgun Gothic" charset="0"/>
-                        <a:cs typeface="Malgun Gothic" charset="0"/>
-                      </a:endParaRPr>
-                    </a:p>
-                  </a:txBody>
-                  <a:tcPr marL="91440" marR="91440" marT="45720" marB="45720" anchor="ctr">
-                    <a:lnL w="9525" cap="flat" cmpd="sng" algn="ctr">
-                      <a:solidFill>
-                        <a:srgbClr val="D9D9D9"/>
-                      </a:solidFill>
-                      <a:prstDash val="solid"/>
-                      <a:round/>
-                      <a:headEnd type="none" w="med" len="med"/>
-                      <a:tailEnd type="none" w="med" len="med"/>
-                    </a:lnL>
-                    <a:lnR w="9525" cap="flat" cmpd="sng" algn="ctr">
-                      <a:solidFill>
-                        <a:srgbClr val="D9D9D9"/>
-                      </a:solidFill>
-                      <a:prstDash val="solid"/>
-                      <a:round/>
-                      <a:headEnd type="none" w="med" len="med"/>
-                      <a:tailEnd type="none" w="med" len="med"/>
-                    </a:lnR>
-                    <a:lnT w="9525" cap="flat" cmpd="sng" algn="ctr">
-                      <a:solidFill>
-                        <a:srgbClr val="D9D9D9"/>
-                      </a:solidFill>
-                      <a:prstDash val="solid"/>
-                      <a:round/>
-                      <a:headEnd type="none" w="med" len="med"/>
-                      <a:tailEnd type="none" w="med" len="med"/>
-                    </a:lnT>
-                    <a:lnB w="9525" cap="flat" cmpd="sng" algn="ctr">
-                      <a:solidFill>
-                        <a:srgbClr val="D9D9D9"/>
-                      </a:solidFill>
-                      <a:prstDash val="solid"/>
-                      <a:round/>
-                      <a:headEnd type="none" w="med" len="med"/>
-                      <a:tailEnd type="none" w="med" len="med"/>
-                    </a:lnB>
-                    <a:solidFill>
-                      <a:srgbClr val="FFFFFF"/>
-                    </a:solidFill>
-                  </a:tcPr>
-                </a:tc>
-                <a:tc>
-                  <a:txBody>
-                    <a:bodyPr/>
-                    <a:lstStyle/>
-                    <a:p>
-                      <a:pPr algn="ctr" indent="0" marL="0">
-                        <a:buNone/>
-                      </a:pPr>
-                      <a:endParaRPr lang="en-US" sz="1300" dirty="0">
-                        <a:latin typeface="Malgun Gothic" charset="0"/>
-                        <a:ea typeface="Malgun Gothic" charset="0"/>
-                        <a:cs typeface="Malgun Gothic" charset="0"/>
-                      </a:endParaRPr>
-                    </a:p>
-                  </a:txBody>
-                  <a:tcPr marL="91440" marR="91440" marT="45720" marB="45720" anchor="ctr">
-                    <a:lnL w="9525" cap="flat" cmpd="sng" algn="ctr">
-                      <a:solidFill>
-                        <a:srgbClr val="D9D9D9"/>
-                      </a:solidFill>
-                      <a:prstDash val="solid"/>
-                      <a:round/>
-                      <a:headEnd type="none" w="med" len="med"/>
-                      <a:tailEnd type="none" w="med" len="med"/>
-                    </a:lnL>
-                    <a:lnR w="9525" cap="flat" cmpd="sng" algn="ctr">
-                      <a:solidFill>
-                        <a:srgbClr val="D9D9D9"/>
-                      </a:solidFill>
-                      <a:prstDash val="solid"/>
-                      <a:round/>
-                      <a:headEnd type="none" w="med" len="med"/>
-                      <a:tailEnd type="none" w="med" len="med"/>
-                    </a:lnR>
-                    <a:lnT w="9525" cap="flat" cmpd="sng" algn="ctr">
-                      <a:solidFill>
-                        <a:srgbClr val="D9D9D9"/>
-                      </a:solidFill>
-                      <a:prstDash val="solid"/>
-                      <a:round/>
-                      <a:headEnd type="none" w="med" len="med"/>
-                      <a:tailEnd type="none" w="med" len="med"/>
-                    </a:lnT>
-                    <a:lnB w="9525" cap="flat" cmpd="sng" algn="ctr">
-                      <a:solidFill>
-                        <a:srgbClr val="D9D9D9"/>
-                      </a:solidFill>
-                      <a:prstDash val="solid"/>
-                      <a:round/>
-                      <a:headEnd type="none" w="med" len="med"/>
-                      <a:tailEnd type="none" w="med" len="med"/>
-                    </a:lnB>
-                    <a:solidFill>
-                      <a:srgbClr val="FFFFFF"/>
-                    </a:solidFill>
-                  </a:tcPr>
-                </a:tc>
-                <a:tc>
-                  <a:txBody>
-                    <a:bodyPr/>
-                    <a:lstStyle/>
-                    <a:p>
-                      <a:pPr algn="ctr" indent="0" marL="0">
-                        <a:buNone/>
-                      </a:pPr>
-                      <a:endParaRPr lang="en-US" sz="1300" dirty="0">
-                        <a:latin typeface="Malgun Gothic" charset="0"/>
-                        <a:ea typeface="Malgun Gothic" charset="0"/>
-                        <a:cs typeface="Malgun Gothic" charset="0"/>
-                      </a:endParaRPr>
-                    </a:p>
-                  </a:txBody>
-                  <a:tcPr marL="91440" marR="91440" marT="45720" marB="45720" anchor="ctr">
-                    <a:lnL w="9525" cap="flat" cmpd="sng" algn="ctr">
-                      <a:solidFill>
-                        <a:srgbClr val="D9D9D9"/>
-                      </a:solidFill>
-                      <a:prstDash val="solid"/>
-                      <a:round/>
-                      <a:headEnd type="none" w="med" len="med"/>
-                      <a:tailEnd type="none" w="med" len="med"/>
-                    </a:lnL>
-                    <a:lnR w="9525" cap="flat" cmpd="sng" algn="ctr">
-                      <a:solidFill>
-                        <a:srgbClr val="D9D9D9"/>
-                      </a:solidFill>
-                      <a:prstDash val="solid"/>
-                      <a:round/>
-                      <a:headEnd type="none" w="med" len="med"/>
-                      <a:tailEnd type="none" w="med" len="med"/>
-                    </a:lnR>
-                    <a:lnT w="9525" cap="flat" cmpd="sng" algn="ctr">
-                      <a:solidFill>
-                        <a:srgbClr val="D9D9D9"/>
-                      </a:solidFill>
-                      <a:prstDash val="solid"/>
-                      <a:round/>
-                      <a:headEnd type="none" w="med" len="med"/>
-                      <a:tailEnd type="none" w="med" len="med"/>
-                    </a:lnT>
-                    <a:lnB w="9525" cap="flat" cmpd="sng" algn="ctr">
-                      <a:solidFill>
-                        <a:srgbClr val="D9D9D9"/>
-                      </a:solidFill>
-                      <a:prstDash val="solid"/>
-                      <a:round/>
-                      <a:headEnd type="none" w="med" len="med"/>
-                      <a:tailEnd type="none" w="med" len="med"/>
-                    </a:lnB>
-                    <a:solidFill>
-                      <a:srgbClr val="FFFFFF"/>
-                    </a:solidFill>
-                  </a:tcPr>
-                </a:tc>
-              </a:tr>
-              <a:tr h="502920">
-                <a:tc>
-                  <a:txBody>
-                    <a:bodyPr/>
-                    <a:lstStyle/>
-                    <a:p>
-                      <a:pPr algn="l" indent="0" marL="0">
-                        <a:buNone/>
-                      </a:pPr>
-                      <a:r>
-                        <a:rPr lang="en-US" sz="1300" b="1" dirty="0">
-                          <a:solidFill>
-                            <a:srgbClr val="3F3F3F"/>
-                          </a:solidFill>
-                          <a:latin typeface="Malgun Gothic" pitchFamily="34" charset="0"/>
-                          <a:ea typeface="Malgun Gothic" pitchFamily="34" charset="-122"/>
-                          <a:cs typeface="Malgun Gothic" pitchFamily="34" charset="-120"/>
-                        </a:rPr>
-                        <a:t>합계</a:t>
-                      </a:r>
-                      <a:endParaRPr lang="en-US" sz="1300" dirty="0">
-                        <a:latin typeface="Malgun Gothic" charset="0"/>
-                        <a:ea typeface="Malgun Gothic" charset="0"/>
-                        <a:cs typeface="Malgun Gothic" charset="0"/>
-                      </a:endParaRPr>
-                    </a:p>
-                  </a:txBody>
-                  <a:tcPr marL="91440" marR="91440" marT="45720" marB="45720" anchor="ctr">
-                    <a:lnL w="9525" cap="flat" cmpd="sng" algn="ctr">
-                      <a:solidFill>
-                        <a:srgbClr val="D9D9D9"/>
-                      </a:solidFill>
-                      <a:prstDash val="solid"/>
-                      <a:round/>
-                      <a:headEnd type="none" w="med" len="med"/>
-                      <a:tailEnd type="none" w="med" len="med"/>
-                    </a:lnL>
-                    <a:lnR w="9525" cap="flat" cmpd="sng" algn="ctr">
-                      <a:solidFill>
-                        <a:srgbClr val="D9D9D9"/>
-                      </a:solidFill>
-                      <a:prstDash val="solid"/>
-                      <a:round/>
-                      <a:headEnd type="none" w="med" len="med"/>
-                      <a:tailEnd type="none" w="med" len="med"/>
-                    </a:lnR>
-                    <a:lnT w="9525" cap="flat" cmpd="sng" algn="ctr">
-                      <a:solidFill>
-                        <a:srgbClr val="D9D9D9"/>
-                      </a:solidFill>
-                      <a:prstDash val="solid"/>
-                      <a:round/>
-                      <a:headEnd type="none" w="med" len="med"/>
-                      <a:tailEnd type="none" w="med" len="med"/>
-                    </a:lnT>
-                    <a:lnB w="9525" cap="flat" cmpd="sng" algn="ctr">
-                      <a:solidFill>
-                        <a:srgbClr val="D9D9D9"/>
-                      </a:solidFill>
-                      <a:prstDash val="solid"/>
-                      <a:round/>
-                      <a:headEnd type="none" w="med" len="med"/>
-                      <a:tailEnd type="none" w="med" len="med"/>
-                    </a:lnB>
-                    <a:solidFill>
-                      <a:srgbClr val="EAF1F8"/>
-                    </a:solidFill>
-                  </a:tcPr>
-                </a:tc>
-                <a:tc>
-                  <a:txBody>
-                    <a:bodyPr/>
-                    <a:lstStyle/>
-                    <a:p>
-                      <a:pPr algn="ctr" indent="0" marL="0">
-                        <a:buNone/>
-                      </a:pPr>
-                      <a:endParaRPr lang="en-US" sz="1300" dirty="0">
-                        <a:latin typeface="Malgun Gothic" charset="0"/>
-                        <a:ea typeface="Malgun Gothic" charset="0"/>
-                        <a:cs typeface="Malgun Gothic" charset="0"/>
-                      </a:endParaRPr>
-                    </a:p>
-                  </a:txBody>
-                  <a:tcPr marL="91440" marR="91440" marT="45720" marB="45720" anchor="ctr">
-                    <a:lnL w="9525" cap="flat" cmpd="sng" algn="ctr">
-                      <a:solidFill>
-                        <a:srgbClr val="D9D9D9"/>
-                      </a:solidFill>
-                      <a:prstDash val="solid"/>
-                      <a:round/>
-                      <a:headEnd type="none" w="med" len="med"/>
-                      <a:tailEnd type="none" w="med" len="med"/>
-                    </a:lnL>
-                    <a:lnR w="9525" cap="flat" cmpd="sng" algn="ctr">
-                      <a:solidFill>
-                        <a:srgbClr val="D9D9D9"/>
-                      </a:solidFill>
-                      <a:prstDash val="solid"/>
-                      <a:round/>
-                      <a:headEnd type="none" w="med" len="med"/>
-                      <a:tailEnd type="none" w="med" len="med"/>
-                    </a:lnR>
-                    <a:lnT w="9525" cap="flat" cmpd="sng" algn="ctr">
-                      <a:solidFill>
-                        <a:srgbClr val="D9D9D9"/>
-                      </a:solidFill>
-                      <a:prstDash val="solid"/>
-                      <a:round/>
-                      <a:headEnd type="none" w="med" len="med"/>
-                      <a:tailEnd type="none" w="med" len="med"/>
-                    </a:lnT>
-                    <a:lnB w="9525" cap="flat" cmpd="sng" algn="ctr">
-                      <a:solidFill>
-                        <a:srgbClr val="D9D9D9"/>
-                      </a:solidFill>
-                      <a:prstDash val="solid"/>
-                      <a:round/>
-                      <a:headEnd type="none" w="med" len="med"/>
-                      <a:tailEnd type="none" w="med" len="med"/>
-                    </a:lnB>
-                    <a:solidFill>
-                      <a:srgbClr val="EAF1F8"/>
-                    </a:solidFill>
-                  </a:tcPr>
-                </a:tc>
-                <a:tc>
-                  <a:txBody>
-                    <a:bodyPr/>
-                    <a:lstStyle/>
-                    <a:p>
-                      <a:pPr algn="ctr" indent="0" marL="0">
-                        <a:buNone/>
-                      </a:pPr>
-                      <a:endParaRPr lang="en-US" sz="1300" dirty="0">
-                        <a:latin typeface="Malgun Gothic" charset="0"/>
-                        <a:ea typeface="Malgun Gothic" charset="0"/>
-                        <a:cs typeface="Malgun Gothic" charset="0"/>
-                      </a:endParaRPr>
-                    </a:p>
-                  </a:txBody>
-                  <a:tcPr marL="91440" marR="91440" marT="45720" marB="45720" anchor="ctr">
-                    <a:lnL w="9525" cap="flat" cmpd="sng" algn="ctr">
-                      <a:solidFill>
-                        <a:srgbClr val="D9D9D9"/>
-                      </a:solidFill>
-                      <a:prstDash val="solid"/>
-                      <a:round/>
-                      <a:headEnd type="none" w="med" len="med"/>
-                      <a:tailEnd type="none" w="med" len="med"/>
-                    </a:lnL>
-                    <a:lnR w="9525" cap="flat" cmpd="sng" algn="ctr">
-                      <a:solidFill>
-                        <a:srgbClr val="D9D9D9"/>
-                      </a:solidFill>
-                      <a:prstDash val="solid"/>
-                      <a:round/>
-                      <a:headEnd type="none" w="med" len="med"/>
-                      <a:tailEnd type="none" w="med" len="med"/>
-                    </a:lnR>
-                    <a:lnT w="9525" cap="flat" cmpd="sng" algn="ctr">
-                      <a:solidFill>
-                        <a:srgbClr val="D9D9D9"/>
-                      </a:solidFill>
-                      <a:prstDash val="solid"/>
-                      <a:round/>
-                      <a:headEnd type="none" w="med" len="med"/>
-                      <a:tailEnd type="none" w="med" len="med"/>
-                    </a:lnT>
-                    <a:lnB w="9525" cap="flat" cmpd="sng" algn="ctr">
-                      <a:solidFill>
-                        <a:srgbClr val="D9D9D9"/>
-                      </a:solidFill>
-                      <a:prstDash val="solid"/>
-                      <a:round/>
-                      <a:headEnd type="none" w="med" len="med"/>
-                      <a:tailEnd type="none" w="med" len="med"/>
-                    </a:lnB>
-                    <a:solidFill>
-                      <a:srgbClr val="EAF1F8"/>
-                    </a:solidFill>
-                  </a:tcPr>
-                </a:tc>
-                <a:tc>
-                  <a:txBody>
-                    <a:bodyPr/>
-                    <a:lstStyle/>
-                    <a:p>
-                      <a:pPr algn="ctr" indent="0" marL="0">
-                        <a:buNone/>
-                      </a:pPr>
-                      <a:endParaRPr lang="en-US" sz="1300" dirty="0">
-                        <a:latin typeface="Malgun Gothic" charset="0"/>
-                        <a:ea typeface="Malgun Gothic" charset="0"/>
-                        <a:cs typeface="Malgun Gothic" charset="0"/>
-                      </a:endParaRPr>
-                    </a:p>
-                  </a:txBody>
-                  <a:tcPr marL="91440" marR="91440" marT="45720" marB="45720" anchor="ctr">
-                    <a:lnL w="9525" cap="flat" cmpd="sng" algn="ctr">
-                      <a:solidFill>
-                        <a:srgbClr val="D9D9D9"/>
-                      </a:solidFill>
-                      <a:prstDash val="solid"/>
-                      <a:round/>
-                      <a:headEnd type="none" w="med" len="med"/>
-                      <a:tailEnd type="none" w="med" len="med"/>
-                    </a:lnL>
-                    <a:lnR w="9525" cap="flat" cmpd="sng" algn="ctr">
-                      <a:solidFill>
-                        <a:srgbClr val="D9D9D9"/>
-                      </a:solidFill>
-                      <a:prstDash val="solid"/>
-                      <a:round/>
-                      <a:headEnd type="none" w="med" len="med"/>
-                      <a:tailEnd type="none" w="med" len="med"/>
-                    </a:lnR>
-                    <a:lnT w="9525" cap="flat" cmpd="sng" algn="ctr">
-                      <a:solidFill>
-                        <a:srgbClr val="D9D9D9"/>
-                      </a:solidFill>
-                      <a:prstDash val="solid"/>
-                      <a:round/>
-                      <a:headEnd type="none" w="med" len="med"/>
-                      <a:tailEnd type="none" w="med" len="med"/>
-                    </a:lnT>
-                    <a:lnB w="9525" cap="flat" cmpd="sng" algn="ctr">
-                      <a:solidFill>
-                        <a:srgbClr val="D9D9D9"/>
-                      </a:solidFill>
-                      <a:prstDash val="solid"/>
-                      <a:round/>
-                      <a:headEnd type="none" w="med" len="med"/>
-                      <a:tailEnd type="none" w="med" len="med"/>
-                    </a:lnB>
-                    <a:solidFill>
-                      <a:srgbClr val="EAF1F8"/>
-                    </a:solidFill>
-                  </a:tcPr>
-                </a:tc>
-                <a:tc>
-                  <a:txBody>
-                    <a:bodyPr/>
-                    <a:lstStyle/>
-                    <a:p>
-                      <a:pPr algn="ctr" indent="0" marL="0">
-                        <a:buNone/>
-                      </a:pPr>
-                      <a:endParaRPr lang="en-US" sz="1300" dirty="0">
-                        <a:latin typeface="Malgun Gothic" charset="0"/>
-                        <a:ea typeface="Malgun Gothic" charset="0"/>
-                        <a:cs typeface="Malgun Gothic" charset="0"/>
-                      </a:endParaRPr>
-                    </a:p>
-                  </a:txBody>
-                  <a:tcPr marL="91440" marR="91440" marT="45720" marB="45720" anchor="ctr">
-                    <a:lnL w="9525" cap="flat" cmpd="sng" algn="ctr">
-                      <a:solidFill>
-                        <a:srgbClr val="D9D9D9"/>
-                      </a:solidFill>
-                      <a:prstDash val="solid"/>
-                      <a:round/>
-                      <a:headEnd type="none" w="med" len="med"/>
-                      <a:tailEnd type="none" w="med" len="med"/>
-                    </a:lnL>
-                    <a:lnR w="9525" cap="flat" cmpd="sng" algn="ctr">
-                      <a:solidFill>
-                        <a:srgbClr val="D9D9D9"/>
-                      </a:solidFill>
-                      <a:prstDash val="solid"/>
-                      <a:round/>
-                      <a:headEnd type="none" w="med" len="med"/>
-                      <a:tailEnd type="none" w="med" len="med"/>
-                    </a:lnR>
-                    <a:lnT w="9525" cap="flat" cmpd="sng" algn="ctr">
-                      <a:solidFill>
-                        <a:srgbClr val="D9D9D9"/>
-                      </a:solidFill>
-                      <a:prstDash val="solid"/>
-                      <a:round/>
-                      <a:headEnd type="none" w="med" len="med"/>
-                      <a:tailEnd type="none" w="med" len="med"/>
-                    </a:lnT>
-                    <a:lnB w="9525" cap="flat" cmpd="sng" algn="ctr">
-                      <a:solidFill>
-                        <a:srgbClr val="D9D9D9"/>
-                      </a:solidFill>
-                      <a:prstDash val="solid"/>
-                      <a:round/>
-                      <a:headEnd type="none" w="med" len="med"/>
-                      <a:tailEnd type="none" w="med" len="med"/>
-                    </a:lnB>
-                    <a:solidFill>
-                      <a:srgbClr val="EAF1F8"/>
-                    </a:solidFill>
-                  </a:tcPr>
-                </a:tc>
-                <a:tc>
-                  <a:txBody>
-                    <a:bodyPr/>
-                    <a:lstStyle/>
-                    <a:p>
-                      <a:pPr algn="ctr" indent="0" marL="0">
-                        <a:buNone/>
-                      </a:pPr>
-                      <a:endParaRPr lang="en-US" sz="1300" dirty="0">
-                        <a:latin typeface="Malgun Gothic" charset="0"/>
-                        <a:ea typeface="Malgun Gothic" charset="0"/>
-                        <a:cs typeface="Malgun Gothic" charset="0"/>
-                      </a:endParaRPr>
-                    </a:p>
-                  </a:txBody>
-                  <a:tcPr marL="91440" marR="91440" marT="45720" marB="45720" anchor="ctr">
-                    <a:lnL w="9525" cap="flat" cmpd="sng" algn="ctr">
-                      <a:solidFill>
-                        <a:srgbClr val="D9D9D9"/>
-                      </a:solidFill>
-                      <a:prstDash val="solid"/>
-                      <a:round/>
-                      <a:headEnd type="none" w="med" len="med"/>
-                      <a:tailEnd type="none" w="med" len="med"/>
-                    </a:lnL>
-                    <a:lnR w="9525" cap="flat" cmpd="sng" algn="ctr">
-                      <a:solidFill>
-                        <a:srgbClr val="D9D9D9"/>
-                      </a:solidFill>
-                      <a:prstDash val="solid"/>
-                      <a:round/>
-                      <a:headEnd type="none" w="med" len="med"/>
-                      <a:tailEnd type="none" w="med" len="med"/>
-                    </a:lnR>
-                    <a:lnT w="9525" cap="flat" cmpd="sng" algn="ctr">
-                      <a:solidFill>
-                        <a:srgbClr val="D9D9D9"/>
-                      </a:solidFill>
-                      <a:prstDash val="solid"/>
-                      <a:round/>
-                      <a:headEnd type="none" w="med" len="med"/>
-                      <a:tailEnd type="none" w="med" len="med"/>
-                    </a:lnT>
-                    <a:lnB w="9525" cap="flat" cmpd="sng" algn="ctr">
-                      <a:solidFill>
-                        <a:srgbClr val="D9D9D9"/>
-                      </a:solidFill>
-                      <a:prstDash val="solid"/>
-                      <a:round/>
-                      <a:headEnd type="none" w="med" len="med"/>
-                      <a:tailEnd type="none" w="med" len="med"/>
-                    </a:lnB>
-                    <a:solidFill>
-                      <a:srgbClr val="EAF1F8"/>
-                    </a:solidFill>
-                  </a:tcPr>
-                </a:tc>
-              </a:tr>
-            </a:tbl>
-          </a:graphicData>
-        </a:graphic>
-      </p:graphicFrame>
-      <p:sp>
-        <p:nvSpPr>
-          <p:cNvPr id="7" name="Text 3"/>
+      <p:sp>
+        <p:nvSpPr>
+          <p:cNvPr id="6" name="Shape 3"/>
+          <p:cNvSpPr/>
+          <p:nvPr/>
+        </p:nvSpPr>
+        <p:spPr>
+          <a:xfrm>
+            <a:off x="530352" y="1143000"/>
+            <a:ext cx="11100816" cy="777240"/>
+          </a:xfrm>
+          <a:prstGeom prst="roundRect">
+            <a:avLst>
+              <a:gd name="adj" fmla="val 7059"/>
+            </a:avLst>
+          </a:prstGeom>
+          <a:solidFill>
+            <a:srgbClr val="E6EEF7"/>
+          </a:solidFill>
+          <a:ln/>
+        </p:spPr>
+      </p:sp>
+      <p:sp>
+        <p:nvSpPr>
+          <p:cNvPr id="7" name="Text 4"/>
+          <p:cNvSpPr/>
+          <p:nvPr/>
+        </p:nvSpPr>
+        <p:spPr>
+          <a:xfrm>
+            <a:off x="713232" y="1225296"/>
+            <a:ext cx="2926080" cy="320040"/>
+          </a:xfrm>
+          <a:prstGeom prst="rect">
+            <a:avLst/>
+          </a:prstGeom>
+          <a:noFill/>
+          <a:ln/>
+        </p:spPr>
+        <p:txBody>
+          <a:bodyPr wrap="square" lIns="0" tIns="0" rIns="0" bIns="0" rtlCol="0" anchor="ctr"/>
+          <a:lstStyle/>
+          <a:p>
+            <a:pPr indent="0" marL="0">
+              <a:buNone/>
+            </a:pPr>
+            <a:r>
+              <a:rPr lang="en-US" sz="1200" b="1" dirty="0">
+                <a:solidFill>
+                  <a:srgbClr val="005BAC"/>
+                </a:solidFill>
+                <a:latin typeface="Malgun Gothic" pitchFamily="34" charset="0"/>
+                <a:ea typeface="Malgun Gothic" pitchFamily="34" charset="-122"/>
+                <a:cs typeface="Malgun Gothic" pitchFamily="34" charset="-120"/>
+              </a:rPr>
+              <a:t>VOC 레드 플래그 시스템</a:t>
+            </a:r>
+            <a:endParaRPr lang="en-US" sz="1200" dirty="0"/>
+          </a:p>
+        </p:txBody>
+      </p:sp>
+      <p:sp>
+        <p:nvSpPr>
+          <p:cNvPr id="8" name="Text 5"/>
+          <p:cNvSpPr/>
+          <p:nvPr/>
+        </p:nvSpPr>
+        <p:spPr>
+          <a:xfrm>
+            <a:off x="713232" y="1536192"/>
+            <a:ext cx="10789920" cy="320040"/>
+          </a:xfrm>
+          <a:prstGeom prst="rect">
+            <a:avLst/>
+          </a:prstGeom>
+          <a:noFill/>
+          <a:ln/>
+        </p:spPr>
+        <p:txBody>
+          <a:bodyPr wrap="square" lIns="0" tIns="0" rIns="0" bIns="0" rtlCol="0" anchor="ctr"/>
+          <a:lstStyle/>
+          <a:p>
+            <a:pPr indent="0" marL="0">
+              <a:buNone/>
+            </a:pPr>
+            <a:r>
+              <a:rPr lang="en-US" sz="1100" dirty="0">
+                <a:solidFill>
+                  <a:srgbClr val="3F3F3F"/>
+                </a:solidFill>
+                <a:latin typeface="Malgun Gothic" pitchFamily="34" charset="0"/>
+                <a:ea typeface="Malgun Gothic" pitchFamily="34" charset="-122"/>
+                <a:cs typeface="Malgun Gothic" pitchFamily="34" charset="-120"/>
+              </a:rPr>
+              <a:t>평가 2점 이하 또는 서술형 "심각" 분류 건을 즉시 감지 → 분야별 전문가 TFT 구성 → SLA(1차 컨택 24~48시간) 내 처리하여 신뢰 회복</a:t>
+            </a:r>
+            <a:endParaRPr lang="en-US" sz="1100" dirty="0"/>
+          </a:p>
+        </p:txBody>
+      </p:sp>
+      <p:sp>
+        <p:nvSpPr>
+          <p:cNvPr id="9" name="Text 6"/>
+          <p:cNvSpPr/>
+          <p:nvPr/>
+        </p:nvSpPr>
+        <p:spPr>
+          <a:xfrm>
+            <a:off x="530352" y="2103120"/>
+            <a:ext cx="7315200" cy="320040"/>
+          </a:xfrm>
+          <a:prstGeom prst="rect">
+            <a:avLst/>
+          </a:prstGeom>
+          <a:noFill/>
+          <a:ln/>
+        </p:spPr>
+        <p:txBody>
+          <a:bodyPr wrap="square" lIns="0" tIns="0" rIns="0" bIns="0" rtlCol="0" anchor="ctr"/>
+          <a:lstStyle/>
+          <a:p>
+            <a:pPr indent="0" marL="0">
+              <a:buNone/>
+            </a:pPr>
+            <a:r>
+              <a:rPr lang="en-US" sz="1400" b="1" dirty="0">
+                <a:solidFill>
+                  <a:srgbClr val="005BAC"/>
+                </a:solidFill>
+                <a:latin typeface="Malgun Gothic" pitchFamily="34" charset="0"/>
+                <a:ea typeface="Malgun Gothic" pitchFamily="34" charset="-122"/>
+                <a:cs typeface="Malgun Gothic" pitchFamily="34" charset="-120"/>
+              </a:rPr>
+              <a:t>접수 · 조치 · 종결 현황</a:t>
+            </a:r>
+            <a:endParaRPr lang="en-US" sz="1400" dirty="0"/>
+          </a:p>
+        </p:txBody>
+      </p:sp>
+      <p:sp>
+        <p:nvSpPr>
+          <p:cNvPr id="10" name="Shape 7"/>
+          <p:cNvSpPr/>
+          <p:nvPr/>
+        </p:nvSpPr>
+        <p:spPr>
+          <a:xfrm>
+            <a:off x="530352" y="2468880"/>
+            <a:ext cx="11100816" cy="3200400"/>
+          </a:xfrm>
+          <a:prstGeom prst="roundRect">
+            <a:avLst>
+              <a:gd name="adj" fmla="val 2286"/>
+            </a:avLst>
+          </a:prstGeom>
+          <a:solidFill>
+            <a:srgbClr val="E6EEF7"/>
+          </a:solidFill>
+          <a:ln w="9525">
+            <a:solidFill>
+              <a:srgbClr val="005BAC"/>
+            </a:solidFill>
+            <a:prstDash val="dash"/>
+          </a:ln>
+        </p:spPr>
+      </p:sp>
+      <p:sp>
+        <p:nvSpPr>
+          <p:cNvPr id="11" name="Text 8"/>
+          <p:cNvSpPr/>
+          <p:nvPr/>
+        </p:nvSpPr>
+        <p:spPr>
+          <a:xfrm>
+            <a:off x="530352" y="2468880"/>
+            <a:ext cx="11100816" cy="3200400"/>
+          </a:xfrm>
+          <a:prstGeom prst="rect">
+            <a:avLst/>
+          </a:prstGeom>
+          <a:noFill/>
+          <a:ln/>
+        </p:spPr>
+        <p:txBody>
+          <a:bodyPr wrap="square" lIns="0" tIns="0" rIns="0" bIns="0" rtlCol="0" anchor="ctr"/>
+          <a:lstStyle/>
+          <a:p>
+            <a:pPr algn="ctr" indent="0" marL="0">
+              <a:buNone/>
+            </a:pPr>
+            <a:r>
+              <a:rPr lang="en-US" sz="1600" i="1" dirty="0">
+                <a:solidFill>
+                  <a:srgbClr val="005BAC"/>
+                </a:solidFill>
+                <a:latin typeface="Malgun Gothic" pitchFamily="34" charset="0"/>
+                <a:ea typeface="Malgun Gothic" pitchFamily="34" charset="-122"/>
+                <a:cs typeface="Malgun Gothic" pitchFamily="34" charset="-120"/>
+              </a:rPr>
+              <a:t>자료 미제공 – 추후 업데이트</a:t>
+            </a:r>
+            <a:endParaRPr lang="en-US" sz="1600" dirty="0"/>
+          </a:p>
+        </p:txBody>
+      </p:sp>
+      <p:sp>
+        <p:nvSpPr>
+          <p:cNvPr id="12" name="Text 9"/>
           <p:cNvSpPr/>
           <p:nvPr/>
         </p:nvSpPr>
@@ -6241,7 +7809,7 @@
       </p:sp>
       <p:sp>
         <p:nvSpPr>
-          <p:cNvPr id="8" name="Text 4"/>
+          <p:cNvPr id="13" name="Text 10"/>
           <p:cNvSpPr/>
           <p:nvPr/>
         </p:nvSpPr>
@@ -6402,7 +7970,7 @@
                 <a:ea typeface="Malgun Gothic" pitchFamily="34" charset="-122"/>
                 <a:cs typeface="Malgun Gothic" pitchFamily="34" charset="-120"/>
               </a:rPr>
-              <a:t>KPI 현황</a:t>
+              <a:t>대리점 교육 등 처리</a:t>
             </a:r>
             <a:endParaRPr lang="en-US" sz="2600" dirty="0"/>
           </a:p>
@@ -6440,18 +8008,23 @@
         </p:nvSpPr>
         <p:spPr>
           <a:xfrm>
-            <a:off x="530352" y="1234440"/>
-            <a:ext cx="2651760" cy="1920240"/>
+            <a:off x="530352" y="1188720"/>
+            <a:ext cx="5394960" cy="2651760"/>
           </a:xfrm>
           <a:prstGeom prst="roundRect">
             <a:avLst>
-              <a:gd name="adj" fmla="val 3810"/>
+              <a:gd name="adj" fmla="val 2069"/>
             </a:avLst>
           </a:prstGeom>
           <a:solidFill>
-            <a:srgbClr val="F5F8FC"/>
+            <a:srgbClr val="EFEFEF"/>
           </a:solidFill>
-          <a:ln/>
+          <a:ln w="9525">
+            <a:solidFill>
+              <a:srgbClr val="9E9E9E"/>
+            </a:solidFill>
+            <a:prstDash val="dash"/>
+          </a:ln>
         </p:spPr>
       </p:sp>
       <p:sp>
@@ -6462,8 +8035,8 @@
         </p:nvSpPr>
         <p:spPr>
           <a:xfrm>
-            <a:off x="530352" y="1371600"/>
-            <a:ext cx="2651760" cy="365760"/>
+            <a:off x="530352" y="1188720"/>
+            <a:ext cx="5394960" cy="2651760"/>
           </a:xfrm>
           <a:prstGeom prst="rect">
             <a:avLst/>
@@ -6479,46 +8052,7 @@
               <a:buNone/>
             </a:pPr>
             <a:r>
-              <a:rPr lang="en-US" sz="1400" b="1" dirty="0">
-                <a:solidFill>
-                  <a:srgbClr val="005BAC"/>
-                </a:solidFill>
-                <a:latin typeface="Malgun Gothic" pitchFamily="34" charset="0"/>
-                <a:ea typeface="Malgun Gothic" pitchFamily="34" charset="-122"/>
-                <a:cs typeface="Malgun Gothic" pitchFamily="34" charset="-120"/>
-              </a:rPr>
-              <a:t>재방문율</a:t>
-            </a:r>
-            <a:endParaRPr lang="en-US" sz="1400" dirty="0"/>
-          </a:p>
-        </p:txBody>
-      </p:sp>
-      <p:sp>
-        <p:nvSpPr>
-          <p:cNvPr id="8" name="Text 5"/>
-          <p:cNvSpPr/>
-          <p:nvPr/>
-        </p:nvSpPr>
-        <p:spPr>
-          <a:xfrm>
-            <a:off x="530352" y="1783080"/>
-            <a:ext cx="2651760" cy="822960"/>
-          </a:xfrm>
-          <a:prstGeom prst="rect">
-            <a:avLst/>
-          </a:prstGeom>
-          <a:noFill/>
-          <a:ln/>
-        </p:spPr>
-        <p:txBody>
-          <a:bodyPr wrap="square" lIns="0" tIns="0" rIns="0" bIns="0" rtlCol="0" anchor="ctr"/>
-          <a:lstStyle/>
-          <a:p>
-            <a:pPr algn="ctr" indent="0" marL="0">
-              <a:buNone/>
-            </a:pPr>
-            <a:r>
-              <a:rPr lang="en-US" sz="1200" i="1" dirty="0">
+              <a:rPr lang="en-US" sz="1400" dirty="0">
                 <a:solidFill>
                   <a:srgbClr val="9E9E9E"/>
                 </a:solidFill>
@@ -6526,11 +8060,38 @@
                 <a:ea typeface="Malgun Gothic" pitchFamily="34" charset="-122"/>
                 <a:cs typeface="Malgun Gothic" pitchFamily="34" charset="-120"/>
               </a:rPr>
-              <a:t>자료 미제공 – 추후 업데이트</a:t>
-            </a:r>
-            <a:endParaRPr lang="en-US" sz="1200" dirty="0"/>
-          </a:p>
-        </p:txBody>
+              <a:t>사진 자리 (Placeholder)</a:t>
+            </a:r>
+            <a:endParaRPr lang="en-US" sz="1400" dirty="0"/>
+          </a:p>
+        </p:txBody>
+      </p:sp>
+      <p:sp>
+        <p:nvSpPr>
+          <p:cNvPr id="8" name="Shape 5"/>
+          <p:cNvSpPr/>
+          <p:nvPr/>
+        </p:nvSpPr>
+        <p:spPr>
+          <a:xfrm>
+            <a:off x="6263640" y="1188720"/>
+            <a:ext cx="5394960" cy="2651760"/>
+          </a:xfrm>
+          <a:prstGeom prst="roundRect">
+            <a:avLst>
+              <a:gd name="adj" fmla="val 2069"/>
+            </a:avLst>
+          </a:prstGeom>
+          <a:solidFill>
+            <a:srgbClr val="EFEFEF"/>
+          </a:solidFill>
+          <a:ln w="9525">
+            <a:solidFill>
+              <a:srgbClr val="9E9E9E"/>
+            </a:solidFill>
+            <a:prstDash val="dash"/>
+          </a:ln>
+        </p:spPr>
       </p:sp>
       <p:sp>
         <p:nvSpPr>
@@ -6540,8 +8101,8 @@
         </p:nvSpPr>
         <p:spPr>
           <a:xfrm>
-            <a:off x="530352" y="2697480"/>
-            <a:ext cx="2651760" cy="320040"/>
+            <a:off x="6263640" y="1188720"/>
+            <a:ext cx="5394960" cy="2651760"/>
           </a:xfrm>
           <a:prstGeom prst="rect">
             <a:avLst/>
@@ -6557,7 +8118,7 @@
               <a:buNone/>
             </a:pPr>
             <a:r>
-              <a:rPr lang="en-US" sz="1100" dirty="0">
+              <a:rPr lang="en-US" sz="1400" dirty="0">
                 <a:solidFill>
                   <a:srgbClr val="9E9E9E"/>
                 </a:solidFill>
@@ -6565,68 +8126,7 @@
                 <a:ea typeface="Malgun Gothic" pitchFamily="34" charset="-122"/>
                 <a:cs typeface="Malgun Gothic" pitchFamily="34" charset="-120"/>
               </a:rPr>
-              <a:t>목표 15% 이하</a:t>
-            </a:r>
-            <a:endParaRPr lang="en-US" sz="1100" dirty="0"/>
-          </a:p>
-        </p:txBody>
-      </p:sp>
-      <p:sp>
-        <p:nvSpPr>
-          <p:cNvPr id="10" name="Shape 7"/>
-          <p:cNvSpPr/>
-          <p:nvPr/>
-        </p:nvSpPr>
-        <p:spPr>
-          <a:xfrm>
-            <a:off x="3410712" y="1234440"/>
-            <a:ext cx="2651760" cy="1920240"/>
-          </a:xfrm>
-          <a:prstGeom prst="roundRect">
-            <a:avLst>
-              <a:gd name="adj" fmla="val 3810"/>
-            </a:avLst>
-          </a:prstGeom>
-          <a:solidFill>
-            <a:srgbClr val="F5F8FC"/>
-          </a:solidFill>
-          <a:ln/>
-        </p:spPr>
-      </p:sp>
-      <p:sp>
-        <p:nvSpPr>
-          <p:cNvPr id="11" name="Text 8"/>
-          <p:cNvSpPr/>
-          <p:nvPr/>
-        </p:nvSpPr>
-        <p:spPr>
-          <a:xfrm>
-            <a:off x="3410712" y="1371600"/>
-            <a:ext cx="2651760" cy="365760"/>
-          </a:xfrm>
-          <a:prstGeom prst="rect">
-            <a:avLst/>
-          </a:prstGeom>
-          <a:noFill/>
-          <a:ln/>
-        </p:spPr>
-        <p:txBody>
-          <a:bodyPr wrap="square" lIns="0" tIns="0" rIns="0" bIns="0" rtlCol="0" anchor="ctr"/>
-          <a:lstStyle/>
-          <a:p>
-            <a:pPr algn="ctr" indent="0" marL="0">
-              <a:buNone/>
-            </a:pPr>
-            <a:r>
-              <a:rPr lang="en-US" sz="1400" b="1" dirty="0">
-                <a:solidFill>
-                  <a:srgbClr val="005BAC"/>
-                </a:solidFill>
-                <a:latin typeface="Malgun Gothic" pitchFamily="34" charset="0"/>
-                <a:ea typeface="Malgun Gothic" pitchFamily="34" charset="-122"/>
-                <a:cs typeface="Malgun Gothic" pitchFamily="34" charset="-120"/>
-              </a:rPr>
-              <a:t>Uptime</a:t>
+              <a:t>사진 자리 (Placeholder)</a:t>
             </a:r>
             <a:endParaRPr lang="en-US" sz="1400" dirty="0"/>
           </a:p>
@@ -6634,431 +8134,14 @@
       </p:sp>
       <p:sp>
         <p:nvSpPr>
-          <p:cNvPr id="12" name="Text 9"/>
-          <p:cNvSpPr/>
-          <p:nvPr/>
-        </p:nvSpPr>
-        <p:spPr>
-          <a:xfrm>
-            <a:off x="3410712" y="1783080"/>
-            <a:ext cx="2651760" cy="822960"/>
-          </a:xfrm>
-          <a:prstGeom prst="rect">
-            <a:avLst/>
-          </a:prstGeom>
-          <a:noFill/>
-          <a:ln/>
-        </p:spPr>
-        <p:txBody>
-          <a:bodyPr wrap="square" lIns="0" tIns="0" rIns="0" bIns="0" rtlCol="0" anchor="ctr"/>
-          <a:lstStyle/>
-          <a:p>
-            <a:pPr algn="ctr" indent="0" marL="0">
-              <a:buNone/>
-            </a:pPr>
-            <a:r>
-              <a:rPr lang="en-US" sz="1200" i="1" dirty="0">
-                <a:solidFill>
-                  <a:srgbClr val="9E9E9E"/>
-                </a:solidFill>
-                <a:latin typeface="Malgun Gothic" pitchFamily="34" charset="0"/>
-                <a:ea typeface="Malgun Gothic" pitchFamily="34" charset="-122"/>
-                <a:cs typeface="Malgun Gothic" pitchFamily="34" charset="-120"/>
-              </a:rPr>
-              <a:t>자료 미제공 – 추후 업데이트</a:t>
-            </a:r>
-            <a:endParaRPr lang="en-US" sz="1200" dirty="0"/>
-          </a:p>
-        </p:txBody>
-      </p:sp>
-      <p:sp>
-        <p:nvSpPr>
-          <p:cNvPr id="13" name="Text 10"/>
-          <p:cNvSpPr/>
-          <p:nvPr/>
-        </p:nvSpPr>
-        <p:spPr>
-          <a:xfrm>
-            <a:off x="3410712" y="2697480"/>
-            <a:ext cx="2651760" cy="320040"/>
-          </a:xfrm>
-          <a:prstGeom prst="rect">
-            <a:avLst/>
-          </a:prstGeom>
-          <a:noFill/>
-          <a:ln/>
-        </p:spPr>
-        <p:txBody>
-          <a:bodyPr wrap="square" lIns="0" tIns="0" rIns="0" bIns="0" rtlCol="0" anchor="ctr"/>
-          <a:lstStyle/>
-          <a:p>
-            <a:pPr algn="ctr" indent="0" marL="0">
-              <a:buNone/>
-            </a:pPr>
-            <a:r>
-              <a:rPr lang="en-US" sz="1100" dirty="0">
-                <a:solidFill>
-                  <a:srgbClr val="9E9E9E"/>
-                </a:solidFill>
-                <a:latin typeface="Malgun Gothic" pitchFamily="34" charset="0"/>
-                <a:ea typeface="Malgun Gothic" pitchFamily="34" charset="-122"/>
-                <a:cs typeface="Malgun Gothic" pitchFamily="34" charset="-120"/>
-              </a:rPr>
-              <a:t>목표 90% 이상</a:t>
-            </a:r>
-            <a:endParaRPr lang="en-US" sz="1100" dirty="0"/>
-          </a:p>
-        </p:txBody>
-      </p:sp>
-      <p:sp>
-        <p:nvSpPr>
-          <p:cNvPr id="14" name="Shape 11"/>
-          <p:cNvSpPr/>
-          <p:nvPr/>
-        </p:nvSpPr>
-        <p:spPr>
-          <a:xfrm>
-            <a:off x="6291072" y="1234440"/>
-            <a:ext cx="2651760" cy="1920240"/>
-          </a:xfrm>
-          <a:prstGeom prst="roundRect">
-            <a:avLst>
-              <a:gd name="adj" fmla="val 3810"/>
-            </a:avLst>
-          </a:prstGeom>
-          <a:solidFill>
-            <a:srgbClr val="F5F8FC"/>
-          </a:solidFill>
-          <a:ln/>
-        </p:spPr>
-      </p:sp>
-      <p:sp>
-        <p:nvSpPr>
-          <p:cNvPr id="15" name="Text 12"/>
-          <p:cNvSpPr/>
-          <p:nvPr/>
-        </p:nvSpPr>
-        <p:spPr>
-          <a:xfrm>
-            <a:off x="6291072" y="1371600"/>
-            <a:ext cx="2651760" cy="365760"/>
-          </a:xfrm>
-          <a:prstGeom prst="rect">
-            <a:avLst/>
-          </a:prstGeom>
-          <a:noFill/>
-          <a:ln/>
-        </p:spPr>
-        <p:txBody>
-          <a:bodyPr wrap="square" lIns="0" tIns="0" rIns="0" bIns="0" rtlCol="0" anchor="ctr"/>
-          <a:lstStyle/>
-          <a:p>
-            <a:pPr algn="ctr" indent="0" marL="0">
-              <a:buNone/>
-            </a:pPr>
-            <a:r>
-              <a:rPr lang="en-US" sz="1400" b="1" dirty="0">
-                <a:solidFill>
-                  <a:srgbClr val="005BAC"/>
-                </a:solidFill>
-                <a:latin typeface="Malgun Gothic" pitchFamily="34" charset="0"/>
-                <a:ea typeface="Malgun Gothic" pitchFamily="34" charset="-122"/>
-                <a:cs typeface="Malgun Gothic" pitchFamily="34" charset="-120"/>
-              </a:rPr>
-              <a:t>FTFR</a:t>
-            </a:r>
-            <a:endParaRPr lang="en-US" sz="1400" dirty="0"/>
-          </a:p>
-        </p:txBody>
-      </p:sp>
-      <p:sp>
-        <p:nvSpPr>
-          <p:cNvPr id="16" name="Text 13"/>
-          <p:cNvSpPr/>
-          <p:nvPr/>
-        </p:nvSpPr>
-        <p:spPr>
-          <a:xfrm>
-            <a:off x="6291072" y="1783080"/>
-            <a:ext cx="2651760" cy="822960"/>
-          </a:xfrm>
-          <a:prstGeom prst="rect">
-            <a:avLst/>
-          </a:prstGeom>
-          <a:noFill/>
-          <a:ln/>
-        </p:spPr>
-        <p:txBody>
-          <a:bodyPr wrap="square" lIns="0" tIns="0" rIns="0" bIns="0" rtlCol="0" anchor="ctr"/>
-          <a:lstStyle/>
-          <a:p>
-            <a:pPr algn="ctr" indent="0" marL="0">
-              <a:buNone/>
-            </a:pPr>
-            <a:r>
-              <a:rPr lang="en-US" sz="1200" i="1" dirty="0">
-                <a:solidFill>
-                  <a:srgbClr val="9E9E9E"/>
-                </a:solidFill>
-                <a:latin typeface="Malgun Gothic" pitchFamily="34" charset="0"/>
-                <a:ea typeface="Malgun Gothic" pitchFamily="34" charset="-122"/>
-                <a:cs typeface="Malgun Gothic" pitchFamily="34" charset="-120"/>
-              </a:rPr>
-              <a:t>자료 미제공 – 추후 업데이트</a:t>
-            </a:r>
-            <a:endParaRPr lang="en-US" sz="1200" dirty="0"/>
-          </a:p>
-        </p:txBody>
-      </p:sp>
-      <p:sp>
-        <p:nvSpPr>
-          <p:cNvPr id="17" name="Text 14"/>
-          <p:cNvSpPr/>
-          <p:nvPr/>
-        </p:nvSpPr>
-        <p:spPr>
-          <a:xfrm>
-            <a:off x="6291072" y="2697480"/>
-            <a:ext cx="2651760" cy="320040"/>
-          </a:xfrm>
-          <a:prstGeom prst="rect">
-            <a:avLst/>
-          </a:prstGeom>
-          <a:noFill/>
-          <a:ln/>
-        </p:spPr>
-        <p:txBody>
-          <a:bodyPr wrap="square" lIns="0" tIns="0" rIns="0" bIns="0" rtlCol="0" anchor="ctr"/>
-          <a:lstStyle/>
-          <a:p>
-            <a:pPr algn="ctr" indent="0" marL="0">
-              <a:buNone/>
-            </a:pPr>
-            <a:r>
-              <a:rPr lang="en-US" sz="1100" dirty="0">
-                <a:solidFill>
-                  <a:srgbClr val="9E9E9E"/>
-                </a:solidFill>
-                <a:latin typeface="Malgun Gothic" pitchFamily="34" charset="0"/>
-                <a:ea typeface="Malgun Gothic" pitchFamily="34" charset="-122"/>
-                <a:cs typeface="Malgun Gothic" pitchFamily="34" charset="-120"/>
-              </a:rPr>
-              <a:t>참고 지표</a:t>
-            </a:r>
-            <a:endParaRPr lang="en-US" sz="1100" dirty="0"/>
-          </a:p>
-        </p:txBody>
-      </p:sp>
-      <p:sp>
-        <p:nvSpPr>
-          <p:cNvPr id="18" name="Shape 15"/>
-          <p:cNvSpPr/>
-          <p:nvPr/>
-        </p:nvSpPr>
-        <p:spPr>
-          <a:xfrm>
-            <a:off x="9171432" y="1234440"/>
-            <a:ext cx="2651760" cy="1920240"/>
-          </a:xfrm>
-          <a:prstGeom prst="roundRect">
-            <a:avLst>
-              <a:gd name="adj" fmla="val 3810"/>
-            </a:avLst>
-          </a:prstGeom>
-          <a:solidFill>
-            <a:srgbClr val="F5F8FC"/>
-          </a:solidFill>
-          <a:ln/>
-        </p:spPr>
-      </p:sp>
-      <p:sp>
-        <p:nvSpPr>
-          <p:cNvPr id="19" name="Text 16"/>
-          <p:cNvSpPr/>
-          <p:nvPr/>
-        </p:nvSpPr>
-        <p:spPr>
-          <a:xfrm>
-            <a:off x="9171432" y="1371600"/>
-            <a:ext cx="2651760" cy="365760"/>
-          </a:xfrm>
-          <a:prstGeom prst="rect">
-            <a:avLst/>
-          </a:prstGeom>
-          <a:noFill/>
-          <a:ln/>
-        </p:spPr>
-        <p:txBody>
-          <a:bodyPr wrap="square" lIns="0" tIns="0" rIns="0" bIns="0" rtlCol="0" anchor="ctr"/>
-          <a:lstStyle/>
-          <a:p>
-            <a:pPr algn="ctr" indent="0" marL="0">
-              <a:buNone/>
-            </a:pPr>
-            <a:r>
-              <a:rPr lang="en-US" sz="1400" b="1" dirty="0">
-                <a:solidFill>
-                  <a:srgbClr val="005BAC"/>
-                </a:solidFill>
-                <a:latin typeface="Malgun Gothic" pitchFamily="34" charset="0"/>
-                <a:ea typeface="Malgun Gothic" pitchFamily="34" charset="-122"/>
-                <a:cs typeface="Malgun Gothic" pitchFamily="34" charset="-120"/>
-              </a:rPr>
-              <a:t>책임 배정율</a:t>
-            </a:r>
-            <a:endParaRPr lang="en-US" sz="1400" dirty="0"/>
-          </a:p>
-        </p:txBody>
-      </p:sp>
-      <p:sp>
-        <p:nvSpPr>
-          <p:cNvPr id="20" name="Text 17"/>
-          <p:cNvSpPr/>
-          <p:nvPr/>
-        </p:nvSpPr>
-        <p:spPr>
-          <a:xfrm>
-            <a:off x="9171432" y="1783080"/>
-            <a:ext cx="2651760" cy="822960"/>
-          </a:xfrm>
-          <a:prstGeom prst="rect">
-            <a:avLst/>
-          </a:prstGeom>
-          <a:noFill/>
-          <a:ln/>
-        </p:spPr>
-        <p:txBody>
-          <a:bodyPr wrap="square" lIns="0" tIns="0" rIns="0" bIns="0" rtlCol="0" anchor="ctr"/>
-          <a:lstStyle/>
-          <a:p>
-            <a:pPr algn="ctr" indent="0" marL="0">
-              <a:buNone/>
-            </a:pPr>
-            <a:r>
-              <a:rPr lang="en-US" sz="1200" i="1" dirty="0">
-                <a:solidFill>
-                  <a:srgbClr val="9E9E9E"/>
-                </a:solidFill>
-                <a:latin typeface="Malgun Gothic" pitchFamily="34" charset="0"/>
-                <a:ea typeface="Malgun Gothic" pitchFamily="34" charset="-122"/>
-                <a:cs typeface="Malgun Gothic" pitchFamily="34" charset="-120"/>
-              </a:rPr>
-              <a:t>자료 미제공 – 추후 업데이트</a:t>
-            </a:r>
-            <a:endParaRPr lang="en-US" sz="1200" dirty="0"/>
-          </a:p>
-        </p:txBody>
-      </p:sp>
-      <p:sp>
-        <p:nvSpPr>
-          <p:cNvPr id="21" name="Text 18"/>
-          <p:cNvSpPr/>
-          <p:nvPr/>
-        </p:nvSpPr>
-        <p:spPr>
-          <a:xfrm>
-            <a:off x="9171432" y="2697480"/>
-            <a:ext cx="2651760" cy="320040"/>
-          </a:xfrm>
-          <a:prstGeom prst="rect">
-            <a:avLst/>
-          </a:prstGeom>
-          <a:noFill/>
-          <a:ln/>
-        </p:spPr>
-        <p:txBody>
-          <a:bodyPr wrap="square" lIns="0" tIns="0" rIns="0" bIns="0" rtlCol="0" anchor="ctr"/>
-          <a:lstStyle/>
-          <a:p>
-            <a:pPr algn="ctr" indent="0" marL="0">
-              <a:buNone/>
-            </a:pPr>
-            <a:r>
-              <a:rPr lang="en-US" sz="1100" dirty="0">
-                <a:solidFill>
-                  <a:srgbClr val="9E9E9E"/>
-                </a:solidFill>
-                <a:latin typeface="Malgun Gothic" pitchFamily="34" charset="0"/>
-                <a:ea typeface="Malgun Gothic" pitchFamily="34" charset="-122"/>
-                <a:cs typeface="Malgun Gothic" pitchFamily="34" charset="-120"/>
-              </a:rPr>
-              <a:t>목표 100%</a:t>
-            </a:r>
-            <a:endParaRPr lang="en-US" sz="1100" dirty="0"/>
-          </a:p>
-        </p:txBody>
-      </p:sp>
-      <p:sp>
-        <p:nvSpPr>
-          <p:cNvPr id="22" name="Shape 19"/>
-          <p:cNvSpPr/>
-          <p:nvPr/>
-        </p:nvSpPr>
-        <p:spPr>
-          <a:xfrm>
-            <a:off x="530352" y="3520440"/>
-            <a:ext cx="11100816" cy="2103120"/>
-          </a:xfrm>
-          <a:prstGeom prst="roundRect">
-            <a:avLst>
-              <a:gd name="adj" fmla="val 3478"/>
-            </a:avLst>
-          </a:prstGeom>
-          <a:solidFill>
-            <a:srgbClr val="E6EEF7"/>
-          </a:solidFill>
-          <a:ln/>
-        </p:spPr>
-      </p:sp>
-      <p:sp>
-        <p:nvSpPr>
-          <p:cNvPr id="23" name="Text 20"/>
-          <p:cNvSpPr/>
-          <p:nvPr/>
-        </p:nvSpPr>
-        <p:spPr>
-          <a:xfrm>
-            <a:off x="777240" y="3657600"/>
-            <a:ext cx="2743200" cy="320040"/>
-          </a:xfrm>
-          <a:prstGeom prst="rect">
-            <a:avLst/>
-          </a:prstGeom>
-          <a:noFill/>
-          <a:ln/>
-        </p:spPr>
-        <p:txBody>
-          <a:bodyPr wrap="square" lIns="0" tIns="0" rIns="0" bIns="0" rtlCol="0" anchor="ctr"/>
-          <a:lstStyle/>
-          <a:p>
-            <a:pPr indent="0" marL="0">
-              <a:buNone/>
-            </a:pPr>
-            <a:r>
-              <a:rPr lang="en-US" sz="1300" b="1" dirty="0">
-                <a:solidFill>
-                  <a:srgbClr val="005BAC"/>
-                </a:solidFill>
-                <a:latin typeface="Malgun Gothic" pitchFamily="34" charset="0"/>
-                <a:ea typeface="Malgun Gothic" pitchFamily="34" charset="-122"/>
-                <a:cs typeface="Malgun Gothic" pitchFamily="34" charset="-120"/>
-              </a:rPr>
-              <a:t>Insight</a:t>
-            </a:r>
-            <a:endParaRPr lang="en-US" sz="1300" dirty="0"/>
-          </a:p>
-        </p:txBody>
-      </p:sp>
-      <p:sp>
-        <p:nvSpPr>
-          <p:cNvPr id="24" name="Text 21"/>
-          <p:cNvSpPr/>
-          <p:nvPr/>
-        </p:nvSpPr>
-        <p:spPr>
-          <a:xfrm>
-            <a:off x="777240" y="4023360"/>
-            <a:ext cx="10607040" cy="1463040"/>
+          <p:cNvPr id="10" name="Text 7"/>
+          <p:cNvSpPr/>
+          <p:nvPr/>
+        </p:nvSpPr>
+        <p:spPr>
+          <a:xfrm>
+            <a:off x="530352" y="3977640"/>
+            <a:ext cx="5394960" cy="457200"/>
           </a:xfrm>
           <a:prstGeom prst="rect">
             <a:avLst/>
@@ -7090,7 +8173,85 @@
       </p:sp>
       <p:sp>
         <p:nvSpPr>
-          <p:cNvPr id="25" name="Text 22"/>
+          <p:cNvPr id="11" name="Text 8"/>
+          <p:cNvSpPr/>
+          <p:nvPr/>
+        </p:nvSpPr>
+        <p:spPr>
+          <a:xfrm>
+            <a:off x="6263640" y="3977640"/>
+            <a:ext cx="5394960" cy="457200"/>
+          </a:xfrm>
+          <a:prstGeom prst="rect">
+            <a:avLst/>
+          </a:prstGeom>
+          <a:noFill/>
+          <a:ln/>
+        </p:spPr>
+        <p:txBody>
+          <a:bodyPr wrap="square" lIns="0" tIns="0" rIns="0" bIns="0" rtlCol="0" anchor="ctr"/>
+          <a:lstStyle/>
+          <a:p>
+            <a:pPr indent="0" marL="0">
+              <a:buNone/>
+            </a:pPr>
+            <a:r>
+              <a:rPr lang="en-US" sz="1300" i="1" dirty="0">
+                <a:solidFill>
+                  <a:srgbClr val="9E9E9E"/>
+                </a:solidFill>
+                <a:latin typeface="Malgun Gothic" pitchFamily="34" charset="0"/>
+                <a:ea typeface="Malgun Gothic" pitchFamily="34" charset="-122"/>
+                <a:cs typeface="Malgun Gothic" pitchFamily="34" charset="-120"/>
+              </a:rPr>
+              <a:t>자료 미제공 – 추후 업데이트</a:t>
+            </a:r>
+            <a:endParaRPr lang="en-US" sz="1300" dirty="0"/>
+          </a:p>
+        </p:txBody>
+      </p:sp>
+      <p:sp>
+        <p:nvSpPr>
+          <p:cNvPr id="12" name="Text 9"/>
+          <p:cNvSpPr/>
+          <p:nvPr/>
+        </p:nvSpPr>
+        <p:spPr>
+          <a:xfrm>
+            <a:off x="530352" y="4480560"/>
+            <a:ext cx="11100816" cy="365760"/>
+          </a:xfrm>
+          <a:prstGeom prst="rect">
+            <a:avLst/>
+          </a:prstGeom>
+          <a:noFill/>
+          <a:ln/>
+        </p:spPr>
+        <p:txBody>
+          <a:bodyPr wrap="square" lIns="0" tIns="0" rIns="0" bIns="0" rtlCol="0" anchor="ctr"/>
+          <a:lstStyle/>
+          <a:p>
+            <a:pPr indent="0" marL="0">
+              <a:buNone/>
+            </a:pPr>
+            <a:r>
+              <a:rPr lang="en-US" sz="1100" i="1" dirty="0">
+                <a:solidFill>
+                  <a:srgbClr val="9E9E9E"/>
+                </a:solidFill>
+                <a:latin typeface="Malgun Gothic" pitchFamily="34" charset="0"/>
+                <a:ea typeface="Malgun Gothic" pitchFamily="34" charset="-122"/>
+                <a:cs typeface="Malgun Gothic" pitchFamily="34" charset="-120"/>
+              </a:rPr>
+              <a:t>대리점(에이전시) 대상 기술 교육, 서비스 프로세스 안내 등 처리 현황</a:t>
+            </a:r>
+            <a:endParaRPr lang="en-US" sz="1100" dirty="0"/>
+          </a:p>
+        </p:txBody>
+      </p:sp>
+      <p:sp>
+        <p:nvSpPr>
+          <p:cNvPr id="13" name="Text 10"/>
           <p:cNvSpPr/>
           <p:nvPr/>
         </p:nvSpPr>
@@ -7129,7 +8290,7 @@
       </p:sp>
       <p:sp>
         <p:nvSpPr>
-          <p:cNvPr id="26" name="Text 23"/>
+          <p:cNvPr id="14" name="Text 11"/>
           <p:cNvSpPr/>
           <p:nvPr/>
         </p:nvSpPr>
@@ -7290,7 +8451,7 @@
                 <a:ea typeface="Malgun Gothic" pitchFamily="34" charset="-122"/>
                 <a:cs typeface="Malgun Gothic" pitchFamily="34" charset="-120"/>
               </a:rPr>
-              <a:t>교육 및 그룹 진행사항</a:t>
+              <a:t>직원교육</a:t>
             </a:r>
             <a:endParaRPr lang="en-US" sz="2600" dirty="0"/>
           </a:p>
@@ -7322,18 +8483,57 @@
       </p:pic>
       <p:sp>
         <p:nvSpPr>
-          <p:cNvPr id="6" name="Shape 3"/>
-          <p:cNvSpPr/>
-          <p:nvPr/>
-        </p:nvSpPr>
-        <p:spPr>
-          <a:xfrm>
-            <a:off x="530352" y="1234440"/>
-            <a:ext cx="5394960" cy="3017520"/>
+          <p:cNvPr id="6" name="Text 3"/>
+          <p:cNvSpPr/>
+          <p:nvPr/>
+        </p:nvSpPr>
+        <p:spPr>
+          <a:xfrm>
+            <a:off x="530352" y="1051560"/>
+            <a:ext cx="11100816" cy="365760"/>
+          </a:xfrm>
+          <a:prstGeom prst="rect">
+            <a:avLst/>
+          </a:prstGeom>
+          <a:noFill/>
+          <a:ln/>
+        </p:spPr>
+        <p:txBody>
+          <a:bodyPr wrap="square" lIns="0" tIns="0" rIns="0" bIns="0" rtlCol="0" anchor="ctr"/>
+          <a:lstStyle/>
+          <a:p>
+            <a:pPr indent="0" marL="0">
+              <a:buNone/>
+            </a:pPr>
+            <a:r>
+              <a:rPr lang="en-US" sz="1100" i="1" dirty="0">
+                <a:solidFill>
+                  <a:srgbClr val="9E9E9E"/>
+                </a:solidFill>
+                <a:latin typeface="Malgun Gothic" pitchFamily="34" charset="0"/>
+                <a:ea typeface="Malgun Gothic" pitchFamily="34" charset="-122"/>
+                <a:cs typeface="Malgun Gothic" pitchFamily="34" charset="-120"/>
+              </a:rPr>
+              <a:t>Sysmex Technical Academy: 주니어 레벨 빠른 성장 및 Expert Engineer 육성 · Working Group: 4개 분야(Hema/Urine/Coa/Immuno) 전문성 강화</a:t>
+            </a:r>
+            <a:endParaRPr lang="en-US" sz="1100" dirty="0"/>
+          </a:p>
+        </p:txBody>
+      </p:sp>
+      <p:sp>
+        <p:nvSpPr>
+          <p:cNvPr id="7" name="Shape 4"/>
+          <p:cNvSpPr/>
+          <p:nvPr/>
+        </p:nvSpPr>
+        <p:spPr>
+          <a:xfrm>
+            <a:off x="530352" y="1508760"/>
+            <a:ext cx="5394960" cy="2468880"/>
           </a:xfrm>
           <a:prstGeom prst="roundRect">
             <a:avLst>
-              <a:gd name="adj" fmla="val 1818"/>
+              <a:gd name="adj" fmla="val 2222"/>
             </a:avLst>
           </a:prstGeom>
           <a:solidFill>
@@ -7349,14 +8549,14 @@
       </p:sp>
       <p:sp>
         <p:nvSpPr>
-          <p:cNvPr id="7" name="Text 4"/>
-          <p:cNvSpPr/>
-          <p:nvPr/>
-        </p:nvSpPr>
-        <p:spPr>
-          <a:xfrm>
-            <a:off x="530352" y="1234440"/>
-            <a:ext cx="5394960" cy="3017520"/>
+          <p:cNvPr id="8" name="Text 5"/>
+          <p:cNvSpPr/>
+          <p:nvPr/>
+        </p:nvSpPr>
+        <p:spPr>
+          <a:xfrm>
+            <a:off x="530352" y="1508760"/>
+            <a:ext cx="5394960" cy="2468880"/>
           </a:xfrm>
           <a:prstGeom prst="rect">
             <a:avLst/>
@@ -7388,18 +8588,18 @@
       </p:sp>
       <p:sp>
         <p:nvSpPr>
-          <p:cNvPr id="8" name="Shape 5"/>
-          <p:cNvSpPr/>
-          <p:nvPr/>
-        </p:nvSpPr>
-        <p:spPr>
-          <a:xfrm>
-            <a:off x="6263640" y="1234440"/>
-            <a:ext cx="5394960" cy="3017520"/>
+          <p:cNvPr id="9" name="Shape 6"/>
+          <p:cNvSpPr/>
+          <p:nvPr/>
+        </p:nvSpPr>
+        <p:spPr>
+          <a:xfrm>
+            <a:off x="6263640" y="1508760"/>
+            <a:ext cx="5394960" cy="2468880"/>
           </a:xfrm>
           <a:prstGeom prst="roundRect">
             <a:avLst>
-              <a:gd name="adj" fmla="val 1818"/>
+              <a:gd name="adj" fmla="val 2222"/>
             </a:avLst>
           </a:prstGeom>
           <a:solidFill>
@@ -7415,14 +8615,14 @@
       </p:sp>
       <p:sp>
         <p:nvSpPr>
-          <p:cNvPr id="9" name="Text 6"/>
-          <p:cNvSpPr/>
-          <p:nvPr/>
-        </p:nvSpPr>
-        <p:spPr>
-          <a:xfrm>
-            <a:off x="6263640" y="1234440"/>
-            <a:ext cx="5394960" cy="3017520"/>
+          <p:cNvPr id="10" name="Text 7"/>
+          <p:cNvSpPr/>
+          <p:nvPr/>
+        </p:nvSpPr>
+        <p:spPr>
+          <a:xfrm>
+            <a:off x="6263640" y="1508760"/>
+            <a:ext cx="5394960" cy="2468880"/>
           </a:xfrm>
           <a:prstGeom prst="rect">
             <a:avLst/>
@@ -7454,13 +8654,13 @@
       </p:sp>
       <p:sp>
         <p:nvSpPr>
-          <p:cNvPr id="10" name="Text 7"/>
-          <p:cNvSpPr/>
-          <p:nvPr/>
-        </p:nvSpPr>
-        <p:spPr>
-          <a:xfrm>
-            <a:off x="530352" y="4389120"/>
+          <p:cNvPr id="11" name="Text 8"/>
+          <p:cNvSpPr/>
+          <p:nvPr/>
+        </p:nvSpPr>
+        <p:spPr>
+          <a:xfrm>
+            <a:off x="530352" y="4114800"/>
             <a:ext cx="5394960" cy="457200"/>
           </a:xfrm>
           <a:prstGeom prst="rect">
@@ -7485,7 +8685,7 @@
                 <a:ea typeface="Malgun Gothic" pitchFamily="34" charset="-122"/>
                 <a:cs typeface="Malgun Gothic" pitchFamily="34" charset="-120"/>
               </a:rPr>
-              <a:t>자료 미제공 – 추후 업데이트</a:t>
+              <a:t>Technical Academy — 자료 미제공 – 추후 업데이트</a:t>
             </a:r>
             <a:endParaRPr lang="en-US" sz="1300" dirty="0"/>
           </a:p>
@@ -7493,13 +8693,13 @@
       </p:sp>
       <p:sp>
         <p:nvSpPr>
-          <p:cNvPr id="11" name="Text 8"/>
-          <p:cNvSpPr/>
-          <p:nvPr/>
-        </p:nvSpPr>
-        <p:spPr>
-          <a:xfrm>
-            <a:off x="6263640" y="4389120"/>
+          <p:cNvPr id="12" name="Text 9"/>
+          <p:cNvSpPr/>
+          <p:nvPr/>
+        </p:nvSpPr>
+        <p:spPr>
+          <a:xfrm>
+            <a:off x="6263640" y="4114800"/>
             <a:ext cx="5394960" cy="457200"/>
           </a:xfrm>
           <a:prstGeom prst="rect">
@@ -7524,7 +8724,7 @@
                 <a:ea typeface="Malgun Gothic" pitchFamily="34" charset="-122"/>
                 <a:cs typeface="Malgun Gothic" pitchFamily="34" charset="-120"/>
               </a:rPr>
-              <a:t>자료 미제공 – 추후 업데이트</a:t>
+              <a:t>Working Group — 자료 미제공 – 추후 업데이트</a:t>
             </a:r>
             <a:endParaRPr lang="en-US" sz="1300" dirty="0"/>
           </a:p>
@@ -7532,7 +8732,7 @@
       </p:sp>
       <p:sp>
         <p:nvSpPr>
-          <p:cNvPr id="12" name="Text 9"/>
+          <p:cNvPr id="13" name="Text 10"/>
           <p:cNvSpPr/>
           <p:nvPr/>
         </p:nvSpPr>
@@ -7571,7 +8771,7 @@
       </p:sp>
       <p:sp>
         <p:nvSpPr>
-          <p:cNvPr id="13" name="Text 10"/>
+          <p:cNvPr id="14" name="Text 11"/>
           <p:cNvSpPr/>
           <p:nvPr/>
         </p:nvSpPr>
@@ -7732,7 +8932,7 @@
                 <a:ea typeface="Malgun Gothic" pitchFamily="34" charset="-122"/>
                 <a:cs typeface="Malgun Gothic" pitchFamily="34" charset="-120"/>
               </a:rPr>
-              <a:t>Deep Care Service 전략 추진 현황</a:t>
+              <a:t>고객 중심 서비스 하이라이트</a:t>
             </a:r>
             <a:endParaRPr lang="en-US" sz="2600" dirty="0"/>
           </a:p>
@@ -7771,11 +8971,11 @@
         <p:spPr>
           <a:xfrm>
             <a:off x="530352" y="1234440"/>
-            <a:ext cx="3566160" cy="3291840"/>
+            <a:ext cx="3566160" cy="2011680"/>
           </a:xfrm>
           <a:prstGeom prst="roundRect">
             <a:avLst>
-              <a:gd name="adj" fmla="val 2222"/>
+              <a:gd name="adj" fmla="val 3636"/>
             </a:avLst>
           </a:prstGeom>
           <a:solidFill>
@@ -7792,8 +8992,8 @@
         </p:nvSpPr>
         <p:spPr>
           <a:xfrm>
-            <a:off x="530352" y="1417320"/>
-            <a:ext cx="3566160" cy="411480"/>
+            <a:off x="713232" y="1417320"/>
+            <a:ext cx="3200400" cy="457200"/>
           </a:xfrm>
           <a:prstGeom prst="rect">
             <a:avLst/>
@@ -7809,17 +9009,17 @@
               <a:buNone/>
             </a:pPr>
             <a:r>
-              <a:rPr lang="en-US" sz="1800" b="1" dirty="0">
+              <a:rPr lang="en-US" sz="1500" b="1" dirty="0">
                 <a:solidFill>
                   <a:srgbClr val="005BAC"/>
                 </a:solidFill>
-                <a:latin typeface="Arial" pitchFamily="34" charset="0"/>
-                <a:ea typeface="Arial" pitchFamily="34" charset="-122"/>
-                <a:cs typeface="Arial" pitchFamily="34" charset="-120"/>
+                <a:latin typeface="Malgun Gothic" pitchFamily="34" charset="0"/>
+                <a:ea typeface="Malgun Gothic" pitchFamily="34" charset="-122"/>
+                <a:cs typeface="Malgun Gothic" pitchFamily="34" charset="-120"/>
               </a:rPr>
-              <a:t>STEP 1</a:t>
-            </a:r>
-            <a:endParaRPr lang="en-US" sz="1800" dirty="0"/>
+              <a:t>VOC 대응</a:t>
+            </a:r>
+            <a:endParaRPr lang="en-US" sz="1500" dirty="0"/>
           </a:p>
         </p:txBody>
       </p:sp>
@@ -7831,8 +9031,8 @@
         </p:nvSpPr>
         <p:spPr>
           <a:xfrm>
-            <a:off x="713232" y="1874520"/>
-            <a:ext cx="3200400" cy="640080"/>
+            <a:off x="713232" y="1920240"/>
+            <a:ext cx="3200400" cy="365760"/>
           </a:xfrm>
           <a:prstGeom prst="rect">
             <a:avLst/>
@@ -7848,7 +9048,7 @@
               <a:buNone/>
             </a:pPr>
             <a:r>
-              <a:rPr lang="en-US" sz="1300" dirty="0">
+              <a:rPr lang="en-US" sz="1100" dirty="0">
                 <a:solidFill>
                   <a:srgbClr val="3F3F3F"/>
                 </a:solidFill>
@@ -7856,9 +9056,9 @@
                 <a:ea typeface="Malgun Gothic" pitchFamily="34" charset="-122"/>
                 <a:cs typeface="Malgun Gothic" pitchFamily="34" charset="-120"/>
               </a:rPr>
-              <a:t>담당제 정착 (High-Touch)</a:t>
-            </a:r>
-            <a:endParaRPr lang="en-US" sz="1300" dirty="0"/>
+              <a:t>고객 피드백 기반 개선</a:t>
+            </a:r>
+            <a:endParaRPr lang="en-US" sz="1100" dirty="0"/>
           </a:p>
         </p:txBody>
       </p:sp>
@@ -7870,8 +9070,8 @@
         </p:nvSpPr>
         <p:spPr>
           <a:xfrm>
-            <a:off x="713232" y="2651760"/>
-            <a:ext cx="3200400" cy="822960"/>
+            <a:off x="713232" y="2377440"/>
+            <a:ext cx="3200400" cy="731520"/>
           </a:xfrm>
           <a:prstGeom prst="rect">
             <a:avLst/>
@@ -7887,7 +9087,7 @@
               <a:buNone/>
             </a:pPr>
             <a:r>
-              <a:rPr lang="en-US" sz="1200" i="1" dirty="0">
+              <a:rPr lang="en-US" sz="1100" i="1" dirty="0">
                 <a:solidFill>
                   <a:srgbClr val="9E9E9E"/>
                 </a:solidFill>
@@ -7897,7 +9097,7 @@
               </a:rPr>
               <a:t>자료 미제공 – 추후 업데이트</a:t>
             </a:r>
-            <a:endParaRPr lang="en-US" sz="1200" dirty="0"/>
+            <a:endParaRPr lang="en-US" sz="1100" dirty="0"/>
           </a:p>
         </p:txBody>
       </p:sp>
@@ -7910,11 +9110,11 @@
         <p:spPr>
           <a:xfrm>
             <a:off x="4279392" y="1234440"/>
-            <a:ext cx="3566160" cy="3291840"/>
+            <a:ext cx="3566160" cy="2011680"/>
           </a:xfrm>
           <a:prstGeom prst="roundRect">
             <a:avLst>
-              <a:gd name="adj" fmla="val 2222"/>
+              <a:gd name="adj" fmla="val 3636"/>
             </a:avLst>
           </a:prstGeom>
           <a:solidFill>
@@ -7931,8 +9131,8 @@
         </p:nvSpPr>
         <p:spPr>
           <a:xfrm>
-            <a:off x="4279392" y="1417320"/>
-            <a:ext cx="3566160" cy="411480"/>
+            <a:off x="4462272" y="1417320"/>
+            <a:ext cx="3200400" cy="457200"/>
           </a:xfrm>
           <a:prstGeom prst="rect">
             <a:avLst/>
@@ -7948,17 +9148,17 @@
               <a:buNone/>
             </a:pPr>
             <a:r>
-              <a:rPr lang="en-US" sz="1800" b="1" dirty="0">
+              <a:rPr lang="en-US" sz="1500" b="1" dirty="0">
                 <a:solidFill>
                   <a:srgbClr val="005BAC"/>
                 </a:solidFill>
-                <a:latin typeface="Arial" pitchFamily="34" charset="0"/>
-                <a:ea typeface="Arial" pitchFamily="34" charset="-122"/>
-                <a:cs typeface="Arial" pitchFamily="34" charset="-120"/>
+                <a:latin typeface="Malgun Gothic" pitchFamily="34" charset="0"/>
+                <a:ea typeface="Malgun Gothic" pitchFamily="34" charset="-122"/>
+                <a:cs typeface="Malgun Gothic" pitchFamily="34" charset="-120"/>
               </a:rPr>
-              <a:t>STEP 2</a:t>
-            </a:r>
-            <a:endParaRPr lang="en-US" sz="1800" dirty="0"/>
+              <a:t>중대 이슈 대응력</a:t>
+            </a:r>
+            <a:endParaRPr lang="en-US" sz="1500" dirty="0"/>
           </a:p>
         </p:txBody>
       </p:sp>
@@ -7970,8 +9170,8 @@
         </p:nvSpPr>
         <p:spPr>
           <a:xfrm>
-            <a:off x="4462272" y="1874520"/>
-            <a:ext cx="3200400" cy="640080"/>
+            <a:off x="4462272" y="1920240"/>
+            <a:ext cx="3200400" cy="365760"/>
           </a:xfrm>
           <a:prstGeom prst="rect">
             <a:avLst/>
@@ -7987,7 +9187,7 @@
               <a:buNone/>
             </a:pPr>
             <a:r>
-              <a:rPr lang="en-US" sz="1300" dirty="0">
+              <a:rPr lang="en-US" sz="1100" dirty="0">
                 <a:solidFill>
                   <a:srgbClr val="3F3F3F"/>
                 </a:solidFill>
@@ -7995,9 +9195,9 @@
                 <a:ea typeface="Malgun Gothic" pitchFamily="34" charset="-122"/>
                 <a:cs typeface="Malgun Gothic" pitchFamily="34" charset="-120"/>
               </a:rPr>
-              <a:t>Technical Academy 확대 (High-Tech)</a:t>
-            </a:r>
-            <a:endParaRPr lang="en-US" sz="1300" dirty="0"/>
+              <a:t>SLA 준수 · 신속 종결</a:t>
+            </a:r>
+            <a:endParaRPr lang="en-US" sz="1100" dirty="0"/>
           </a:p>
         </p:txBody>
       </p:sp>
@@ -8009,8 +9209,8 @@
         </p:nvSpPr>
         <p:spPr>
           <a:xfrm>
-            <a:off x="4462272" y="2651760"/>
-            <a:ext cx="3200400" cy="822960"/>
+            <a:off x="4462272" y="2377440"/>
+            <a:ext cx="3200400" cy="731520"/>
           </a:xfrm>
           <a:prstGeom prst="rect">
             <a:avLst/>
@@ -8026,7 +9226,7 @@
               <a:buNone/>
             </a:pPr>
             <a:r>
-              <a:rPr lang="en-US" sz="1200" i="1" dirty="0">
+              <a:rPr lang="en-US" sz="1100" i="1" dirty="0">
                 <a:solidFill>
                   <a:srgbClr val="9E9E9E"/>
                 </a:solidFill>
@@ -8036,7 +9236,7 @@
               </a:rPr>
               <a:t>자료 미제공 – 추후 업데이트</a:t>
             </a:r>
-            <a:endParaRPr lang="en-US" sz="1200" dirty="0"/>
+            <a:endParaRPr lang="en-US" sz="1100" dirty="0"/>
           </a:p>
         </p:txBody>
       </p:sp>
@@ -8049,11 +9249,11 @@
         <p:spPr>
           <a:xfrm>
             <a:off x="8028432" y="1234440"/>
-            <a:ext cx="3566160" cy="3291840"/>
+            <a:ext cx="3566160" cy="2011680"/>
           </a:xfrm>
           <a:prstGeom prst="roundRect">
             <a:avLst>
-              <a:gd name="adj" fmla="val 2222"/>
+              <a:gd name="adj" fmla="val 3636"/>
             </a:avLst>
           </a:prstGeom>
           <a:solidFill>
@@ -8070,8 +9270,8 @@
         </p:nvSpPr>
         <p:spPr>
           <a:xfrm>
-            <a:off x="8028432" y="1417320"/>
-            <a:ext cx="3566160" cy="411480"/>
+            <a:off x="8211312" y="1417320"/>
+            <a:ext cx="3200400" cy="457200"/>
           </a:xfrm>
           <a:prstGeom prst="rect">
             <a:avLst/>
@@ -8087,17 +9287,17 @@
               <a:buNone/>
             </a:pPr>
             <a:r>
-              <a:rPr lang="en-US" sz="1800" b="1" dirty="0">
+              <a:rPr lang="en-US" sz="1500" b="1" dirty="0">
                 <a:solidFill>
                   <a:srgbClr val="005BAC"/>
                 </a:solidFill>
-                <a:latin typeface="Arial" pitchFamily="34" charset="0"/>
-                <a:ea typeface="Arial" pitchFamily="34" charset="-122"/>
-                <a:cs typeface="Arial" pitchFamily="34" charset="-120"/>
+                <a:latin typeface="Malgun Gothic" pitchFamily="34" charset="0"/>
+                <a:ea typeface="Malgun Gothic" pitchFamily="34" charset="-122"/>
+                <a:cs typeface="Malgun Gothic" pitchFamily="34" charset="-120"/>
               </a:rPr>
-              <a:t>STEP 3</a:t>
-            </a:r>
-            <a:endParaRPr lang="en-US" sz="1800" dirty="0"/>
+              <a:t>대리점/직원 역량</a:t>
+            </a:r>
+            <a:endParaRPr lang="en-US" sz="1500" dirty="0"/>
           </a:p>
         </p:txBody>
       </p:sp>
@@ -8109,8 +9309,8 @@
         </p:nvSpPr>
         <p:spPr>
           <a:xfrm>
-            <a:off x="8211312" y="1874520"/>
-            <a:ext cx="3200400" cy="640080"/>
+            <a:off x="8211312" y="1920240"/>
+            <a:ext cx="3200400" cy="365760"/>
           </a:xfrm>
           <a:prstGeom prst="rect">
             <a:avLst/>
@@ -8126,7 +9326,7 @@
               <a:buNone/>
             </a:pPr>
             <a:r>
-              <a:rPr lang="en-US" sz="1300" dirty="0">
+              <a:rPr lang="en-US" sz="1100" dirty="0">
                 <a:solidFill>
                   <a:srgbClr val="3F3F3F"/>
                 </a:solidFill>
@@ -8134,9 +9334,9 @@
                 <a:ea typeface="Malgun Gothic" pitchFamily="34" charset="-122"/>
                 <a:cs typeface="Malgun Gothic" pitchFamily="34" charset="-120"/>
               </a:rPr>
-              <a:t>AI/Data 기반 고도화</a:t>
-            </a:r>
-            <a:endParaRPr lang="en-US" sz="1300" dirty="0"/>
+              <a:t>교육 통한 서비스 품질 제고</a:t>
+            </a:r>
+            <a:endParaRPr lang="en-US" sz="1100" dirty="0"/>
           </a:p>
         </p:txBody>
       </p:sp>
@@ -8148,8 +9348,8 @@
         </p:nvSpPr>
         <p:spPr>
           <a:xfrm>
-            <a:off x="8211312" y="2651760"/>
-            <a:ext cx="3200400" cy="822960"/>
+            <a:off x="8211312" y="2377440"/>
+            <a:ext cx="3200400" cy="731520"/>
           </a:xfrm>
           <a:prstGeom prst="rect">
             <a:avLst/>
@@ -8165,7 +9365,7 @@
               <a:buNone/>
             </a:pPr>
             <a:r>
-              <a:rPr lang="en-US" sz="1200" i="1" dirty="0">
+              <a:rPr lang="en-US" sz="1100" i="1" dirty="0">
                 <a:solidFill>
                   <a:srgbClr val="9E9E9E"/>
                 </a:solidFill>
@@ -8175,13 +9375,113 @@
               </a:rPr>
               <a:t>자료 미제공 – 추후 업데이트</a:t>
             </a:r>
-            <a:endParaRPr lang="en-US" sz="1200" dirty="0"/>
-          </a:p>
-        </p:txBody>
-      </p:sp>
-      <p:sp>
-        <p:nvSpPr>
-          <p:cNvPr id="18" name="Text 15"/>
+            <a:endParaRPr lang="en-US" sz="1100" dirty="0"/>
+          </a:p>
+        </p:txBody>
+      </p:sp>
+      <p:sp>
+        <p:nvSpPr>
+          <p:cNvPr id="18" name="Shape 15"/>
+          <p:cNvSpPr/>
+          <p:nvPr/>
+        </p:nvSpPr>
+        <p:spPr>
+          <a:xfrm>
+            <a:off x="530352" y="3520440"/>
+            <a:ext cx="11100816" cy="2103120"/>
+          </a:xfrm>
+          <a:prstGeom prst="roundRect">
+            <a:avLst>
+              <a:gd name="adj" fmla="val 3478"/>
+            </a:avLst>
+          </a:prstGeom>
+          <a:solidFill>
+            <a:srgbClr val="E6EEF7"/>
+          </a:solidFill>
+          <a:ln/>
+        </p:spPr>
+      </p:sp>
+      <p:sp>
+        <p:nvSpPr>
+          <p:cNvPr id="19" name="Text 16"/>
+          <p:cNvSpPr/>
+          <p:nvPr/>
+        </p:nvSpPr>
+        <p:spPr>
+          <a:xfrm>
+            <a:off x="777240" y="3657600"/>
+            <a:ext cx="4572000" cy="320040"/>
+          </a:xfrm>
+          <a:prstGeom prst="rect">
+            <a:avLst/>
+          </a:prstGeom>
+          <a:noFill/>
+          <a:ln/>
+        </p:spPr>
+        <p:txBody>
+          <a:bodyPr wrap="square" lIns="0" tIns="0" rIns="0" bIns="0" rtlCol="0" anchor="ctr"/>
+          <a:lstStyle/>
+          <a:p>
+            <a:pPr indent="0" marL="0">
+              <a:buNone/>
+            </a:pPr>
+            <a:r>
+              <a:rPr lang="en-US" sz="1300" b="1" dirty="0">
+                <a:solidFill>
+                  <a:srgbClr val="005BAC"/>
+                </a:solidFill>
+                <a:latin typeface="Malgun Gothic" pitchFamily="34" charset="0"/>
+                <a:ea typeface="Malgun Gothic" pitchFamily="34" charset="-122"/>
+                <a:cs typeface="Malgun Gothic" pitchFamily="34" charset="-120"/>
+              </a:rPr>
+              <a:t>고객 중심 Insight</a:t>
+            </a:r>
+            <a:endParaRPr lang="en-US" sz="1300" dirty="0"/>
+          </a:p>
+        </p:txBody>
+      </p:sp>
+      <p:sp>
+        <p:nvSpPr>
+          <p:cNvPr id="20" name="Text 17"/>
+          <p:cNvSpPr/>
+          <p:nvPr/>
+        </p:nvSpPr>
+        <p:spPr>
+          <a:xfrm>
+            <a:off x="777240" y="4023360"/>
+            <a:ext cx="10607040" cy="1463040"/>
+          </a:xfrm>
+          <a:prstGeom prst="rect">
+            <a:avLst/>
+          </a:prstGeom>
+          <a:noFill/>
+          <a:ln/>
+        </p:spPr>
+        <p:txBody>
+          <a:bodyPr wrap="square" lIns="0" tIns="0" rIns="0" bIns="0" rtlCol="0" anchor="ctr"/>
+          <a:lstStyle/>
+          <a:p>
+            <a:pPr indent="0" marL="0">
+              <a:buNone/>
+            </a:pPr>
+            <a:r>
+              <a:rPr lang="en-US" sz="1300" i="1" dirty="0">
+                <a:solidFill>
+                  <a:srgbClr val="9E9E9E"/>
+                </a:solidFill>
+                <a:latin typeface="Malgun Gothic" pitchFamily="34" charset="0"/>
+                <a:ea typeface="Malgun Gothic" pitchFamily="34" charset="-122"/>
+                <a:cs typeface="Malgun Gothic" pitchFamily="34" charset="-120"/>
+              </a:rPr>
+              <a:t>자료 미제공 – 추후 업데이트</a:t>
+            </a:r>
+            <a:endParaRPr lang="en-US" sz="1300" dirty="0"/>
+          </a:p>
+        </p:txBody>
+      </p:sp>
+      <p:sp>
+        <p:nvSpPr>
+          <p:cNvPr id="21" name="Text 18"/>
           <p:cNvSpPr/>
           <p:nvPr/>
         </p:nvSpPr>
@@ -8220,7 +9520,7 @@
       </p:sp>
       <p:sp>
         <p:nvSpPr>
-          <p:cNvPr id="19" name="Text 16"/>
+          <p:cNvPr id="22" name="Text 19"/>
           <p:cNvSpPr/>
           <p:nvPr/>
         </p:nvSpPr>

--- a/reports/FSG_월간서비스보고_202607/FSG_월간서비스보고_202607.pptx
+++ b/reports/FSG_월간서비스보고_202607/FSG_월간서비스보고_202607.pptx
@@ -6286,7 +6286,7 @@
                 <a:ea typeface="Malgun Gothic" pitchFamily="34" charset="-122"/>
                 <a:cs typeface="Malgun Gothic" pitchFamily="34" charset="-120"/>
               </a:rPr>
-              <a:t>평균 평점 (응대/일정·전문성/문제해결·고객응대)</a:t>
+              <a:t>평균 평점 (①신속성·일정 ②전문성·문제해결 ③고객응대·마무리)</a:t>
             </a:r>
             <a:endParaRPr lang="en-US" sz="1100" dirty="0"/>
           </a:p>
@@ -6386,7 +6386,7 @@
                 <a:ea typeface="Malgun Gothic" pitchFamily="34" charset="-122"/>
                 <a:cs typeface="Malgun Gothic" pitchFamily="34" charset="-120"/>
               </a:rPr>
-              <a:t>유형별 분포 (기술문의/AS·응대지연·인력공백·장비신뢰성·기타)</a:t>
+              <a:t>서술형 의견 분류 (심각·개선요청·칭찬·단순의견)</a:t>
             </a:r>
             <a:endParaRPr lang="en-US" sz="1100" dirty="0"/>
           </a:p>
@@ -7301,7 +7301,7 @@
         <p:spPr>
           <a:xfrm>
             <a:off x="6309360" y="3703320"/>
-            <a:ext cx="5486400" cy="365760"/>
+            <a:ext cx="5486400" cy="457200"/>
           </a:xfrm>
           <a:prstGeom prst="rect">
             <a:avLst/>
@@ -7325,7 +7325,7 @@
                 <a:ea typeface="Malgun Gothic" pitchFamily="34" charset="-122"/>
                 <a:cs typeface="Malgun Gothic" pitchFamily="34" charset="-120"/>
               </a:rPr>
-              <a:t>VOC 대시보드(Google Forms 자동화)의 해당 기간 리포트를 소스로 함</a:t>
+              <a:t>데이터 소스: 방문 서비스 만족도 조사 자동 분석 시스템 (Google Forms + Apps Script, 팀별/개인별/직급별/지역별/월별 집계 및 기간별 보고서 자동 생성)</a:t>
             </a:r>
             <a:endParaRPr lang="en-US" sz="1000" dirty="0"/>
           </a:p>

--- a/reports/FSG_월간서비스보고_202607/FSG_월간서비스보고_202607.pptx
+++ b/reports/FSG_월간서비스보고_202607/FSG_월간서비스보고_202607.pptx
@@ -3552,7 +3552,7 @@
                           <a:ea typeface="Malgun Gothic" pitchFamily="34" charset="-122"/>
                           <a:cs typeface="Malgun Gothic" pitchFamily="34" charset="-120"/>
                         </a:rPr>
-                        <a:t>자료 미제공 – 추후 업데이트</a:t>
+                        <a:t>5</a:t>
                       </a:r>
                       <a:endParaRPr lang="en-US" sz="1200" dirty="0">
                         <a:latin typeface="Malgun Gothic" charset="0"/>
@@ -3611,6 +3611,17 @@
                       <a:pPr algn="ctr" indent="0" marL="0">
                         <a:buNone/>
                       </a:pPr>
+                      <a:r>
+                        <a:rPr lang="en-US" sz="1200" i="1" dirty="0">
+                          <a:solidFill>
+                            <a:srgbClr val="9E9E9E"/>
+                          </a:solidFill>
+                          <a:latin typeface="Malgun Gothic" pitchFamily="34" charset="0"/>
+                          <a:ea typeface="Malgun Gothic" pitchFamily="34" charset="-122"/>
+                          <a:cs typeface="Malgun Gothic" pitchFamily="34" charset="-120"/>
+                        </a:rPr>
+                        <a:t>미제공</a:t>
+                      </a:r>
                       <a:endParaRPr lang="en-US" sz="1200" dirty="0">
                         <a:latin typeface="Malgun Gothic" charset="0"/>
                         <a:ea typeface="Malgun Gothic" charset="0"/>
@@ -3668,6 +3679,17 @@
                       <a:pPr algn="ctr" indent="0" marL="0">
                         <a:buNone/>
                       </a:pPr>
+                      <a:r>
+                        <a:rPr lang="en-US" sz="1200" i="1" dirty="0">
+                          <a:solidFill>
+                            <a:srgbClr val="9E9E9E"/>
+                          </a:solidFill>
+                          <a:latin typeface="Malgun Gothic" pitchFamily="34" charset="0"/>
+                          <a:ea typeface="Malgun Gothic" pitchFamily="34" charset="-122"/>
+                          <a:cs typeface="Malgun Gothic" pitchFamily="34" charset="-120"/>
+                        </a:rPr>
+                        <a:t>미제공</a:t>
+                      </a:r>
                       <a:endParaRPr lang="en-US" sz="1200" dirty="0">
                         <a:latin typeface="Malgun Gothic" charset="0"/>
                         <a:ea typeface="Malgun Gothic" charset="0"/>
@@ -3725,6 +3747,17 @@
                       <a:pPr algn="ctr" indent="0" marL="0">
                         <a:buNone/>
                       </a:pPr>
+                      <a:r>
+                        <a:rPr lang="en-US" sz="1200" i="1" dirty="0">
+                          <a:solidFill>
+                            <a:srgbClr val="9E9E9E"/>
+                          </a:solidFill>
+                          <a:latin typeface="Malgun Gothic" pitchFamily="34" charset="0"/>
+                          <a:ea typeface="Malgun Gothic" pitchFamily="34" charset="-122"/>
+                          <a:cs typeface="Malgun Gothic" pitchFamily="34" charset="-120"/>
+                        </a:rPr>
+                        <a:t>미제공</a:t>
+                      </a:r>
                       <a:endParaRPr lang="en-US" sz="1200" dirty="0">
                         <a:latin typeface="Malgun Gothic" charset="0"/>
                         <a:ea typeface="Malgun Gothic" charset="0"/>
@@ -3929,7 +3962,7 @@
                           <a:ea typeface="Malgun Gothic" pitchFamily="34" charset="-122"/>
                           <a:cs typeface="Malgun Gothic" pitchFamily="34" charset="-120"/>
                         </a:rPr>
-                        <a:t>자료 미제공 – 추후 업데이트</a:t>
+                        <a:t>3</a:t>
                       </a:r>
                       <a:endParaRPr lang="en-US" sz="1200" dirty="0">
                         <a:latin typeface="Malgun Gothic" charset="0"/>
@@ -3988,6 +4021,17 @@
                       <a:pPr algn="ctr" indent="0" marL="0">
                         <a:buNone/>
                       </a:pPr>
+                      <a:r>
+                        <a:rPr lang="en-US" sz="1200" i="1" dirty="0">
+                          <a:solidFill>
+                            <a:srgbClr val="9E9E9E"/>
+                          </a:solidFill>
+                          <a:latin typeface="Malgun Gothic" pitchFamily="34" charset="0"/>
+                          <a:ea typeface="Malgun Gothic" pitchFamily="34" charset="-122"/>
+                          <a:cs typeface="Malgun Gothic" pitchFamily="34" charset="-120"/>
+                        </a:rPr>
+                        <a:t>미제공</a:t>
+                      </a:r>
                       <a:endParaRPr lang="en-US" sz="1200" dirty="0">
                         <a:latin typeface="Malgun Gothic" charset="0"/>
                         <a:ea typeface="Malgun Gothic" charset="0"/>
@@ -4045,6 +4089,17 @@
                       <a:pPr algn="ctr" indent="0" marL="0">
                         <a:buNone/>
                       </a:pPr>
+                      <a:r>
+                        <a:rPr lang="en-US" sz="1200" i="1" dirty="0">
+                          <a:solidFill>
+                            <a:srgbClr val="9E9E9E"/>
+                          </a:solidFill>
+                          <a:latin typeface="Malgun Gothic" pitchFamily="34" charset="0"/>
+                          <a:ea typeface="Malgun Gothic" pitchFamily="34" charset="-122"/>
+                          <a:cs typeface="Malgun Gothic" pitchFamily="34" charset="-120"/>
+                        </a:rPr>
+                        <a:t>미제공</a:t>
+                      </a:r>
                       <a:endParaRPr lang="en-US" sz="1200" dirty="0">
                         <a:latin typeface="Malgun Gothic" charset="0"/>
                         <a:ea typeface="Malgun Gothic" charset="0"/>
@@ -4102,6 +4157,17 @@
                       <a:pPr algn="ctr" indent="0" marL="0">
                         <a:buNone/>
                       </a:pPr>
+                      <a:r>
+                        <a:rPr lang="en-US" sz="1200" i="1" dirty="0">
+                          <a:solidFill>
+                            <a:srgbClr val="9E9E9E"/>
+                          </a:solidFill>
+                          <a:latin typeface="Malgun Gothic" pitchFamily="34" charset="0"/>
+                          <a:ea typeface="Malgun Gothic" pitchFamily="34" charset="-122"/>
+                          <a:cs typeface="Malgun Gothic" pitchFamily="34" charset="-120"/>
+                        </a:rPr>
+                        <a:t>미제공</a:t>
+                      </a:r>
                       <a:endParaRPr lang="en-US" sz="1200" dirty="0">
                         <a:latin typeface="Malgun Gothic" charset="0"/>
                         <a:ea typeface="Malgun Gothic" charset="0"/>
@@ -4306,7 +4372,7 @@
                           <a:ea typeface="Malgun Gothic" pitchFamily="34" charset="-122"/>
                           <a:cs typeface="Malgun Gothic" pitchFamily="34" charset="-120"/>
                         </a:rPr>
-                        <a:t>자료 미제공 – 추후 업데이트</a:t>
+                        <a:t>0</a:t>
                       </a:r>
                       <a:endParaRPr lang="en-US" sz="1200" dirty="0">
                         <a:latin typeface="Malgun Gothic" charset="0"/>
@@ -4365,6 +4431,17 @@
                       <a:pPr algn="ctr" indent="0" marL="0">
                         <a:buNone/>
                       </a:pPr>
+                      <a:r>
+                        <a:rPr lang="en-US" sz="1200" i="1" dirty="0">
+                          <a:solidFill>
+                            <a:srgbClr val="9E9E9E"/>
+                          </a:solidFill>
+                          <a:latin typeface="Malgun Gothic" pitchFamily="34" charset="0"/>
+                          <a:ea typeface="Malgun Gothic" pitchFamily="34" charset="-122"/>
+                          <a:cs typeface="Malgun Gothic" pitchFamily="34" charset="-120"/>
+                        </a:rPr>
+                        <a:t>미제공</a:t>
+                      </a:r>
                       <a:endParaRPr lang="en-US" sz="1200" dirty="0">
                         <a:latin typeface="Malgun Gothic" charset="0"/>
                         <a:ea typeface="Malgun Gothic" charset="0"/>
@@ -4422,6 +4499,17 @@
                       <a:pPr algn="ctr" indent="0" marL="0">
                         <a:buNone/>
                       </a:pPr>
+                      <a:r>
+                        <a:rPr lang="en-US" sz="1200" i="1" dirty="0">
+                          <a:solidFill>
+                            <a:srgbClr val="9E9E9E"/>
+                          </a:solidFill>
+                          <a:latin typeface="Malgun Gothic" pitchFamily="34" charset="0"/>
+                          <a:ea typeface="Malgun Gothic" pitchFamily="34" charset="-122"/>
+                          <a:cs typeface="Malgun Gothic" pitchFamily="34" charset="-120"/>
+                        </a:rPr>
+                        <a:t>미제공</a:t>
+                      </a:r>
                       <a:endParaRPr lang="en-US" sz="1200" dirty="0">
                         <a:latin typeface="Malgun Gothic" charset="0"/>
                         <a:ea typeface="Malgun Gothic" charset="0"/>
@@ -4479,6 +4567,17 @@
                       <a:pPr algn="ctr" indent="0" marL="0">
                         <a:buNone/>
                       </a:pPr>
+                      <a:r>
+                        <a:rPr lang="en-US" sz="1200" i="1" dirty="0">
+                          <a:solidFill>
+                            <a:srgbClr val="9E9E9E"/>
+                          </a:solidFill>
+                          <a:latin typeface="Malgun Gothic" pitchFamily="34" charset="0"/>
+                          <a:ea typeface="Malgun Gothic" pitchFamily="34" charset="-122"/>
+                          <a:cs typeface="Malgun Gothic" pitchFamily="34" charset="-120"/>
+                        </a:rPr>
+                        <a:t>미제공</a:t>
+                      </a:r>
                       <a:endParaRPr lang="en-US" sz="1200" dirty="0">
                         <a:latin typeface="Malgun Gothic" charset="0"/>
                         <a:ea typeface="Malgun Gothic" charset="0"/>
@@ -4683,7 +4782,7 @@
                           <a:ea typeface="Malgun Gothic" pitchFamily="34" charset="-122"/>
                           <a:cs typeface="Malgun Gothic" pitchFamily="34" charset="-120"/>
                         </a:rPr>
-                        <a:t>자료 미제공 – 추후 업데이트</a:t>
+                        <a:t>4</a:t>
                       </a:r>
                       <a:endParaRPr lang="en-US" sz="1200" dirty="0">
                         <a:latin typeface="Malgun Gothic" charset="0"/>
@@ -4742,6 +4841,17 @@
                       <a:pPr algn="ctr" indent="0" marL="0">
                         <a:buNone/>
                       </a:pPr>
+                      <a:r>
+                        <a:rPr lang="en-US" sz="1200" i="1" dirty="0">
+                          <a:solidFill>
+                            <a:srgbClr val="9E9E9E"/>
+                          </a:solidFill>
+                          <a:latin typeface="Malgun Gothic" pitchFamily="34" charset="0"/>
+                          <a:ea typeface="Malgun Gothic" pitchFamily="34" charset="-122"/>
+                          <a:cs typeface="Malgun Gothic" pitchFamily="34" charset="-120"/>
+                        </a:rPr>
+                        <a:t>미제공</a:t>
+                      </a:r>
                       <a:endParaRPr lang="en-US" sz="1200" dirty="0">
                         <a:latin typeface="Malgun Gothic" charset="0"/>
                         <a:ea typeface="Malgun Gothic" charset="0"/>
@@ -4799,6 +4909,17 @@
                       <a:pPr algn="ctr" indent="0" marL="0">
                         <a:buNone/>
                       </a:pPr>
+                      <a:r>
+                        <a:rPr lang="en-US" sz="1200" i="1" dirty="0">
+                          <a:solidFill>
+                            <a:srgbClr val="9E9E9E"/>
+                          </a:solidFill>
+                          <a:latin typeface="Malgun Gothic" pitchFamily="34" charset="0"/>
+                          <a:ea typeface="Malgun Gothic" pitchFamily="34" charset="-122"/>
+                          <a:cs typeface="Malgun Gothic" pitchFamily="34" charset="-120"/>
+                        </a:rPr>
+                        <a:t>미제공</a:t>
+                      </a:r>
                       <a:endParaRPr lang="en-US" sz="1200" dirty="0">
                         <a:latin typeface="Malgun Gothic" charset="0"/>
                         <a:ea typeface="Malgun Gothic" charset="0"/>
@@ -4856,6 +4977,17 @@
                       <a:pPr algn="ctr" indent="0" marL="0">
                         <a:buNone/>
                       </a:pPr>
+                      <a:r>
+                        <a:rPr lang="en-US" sz="1200" i="1" dirty="0">
+                          <a:solidFill>
+                            <a:srgbClr val="9E9E9E"/>
+                          </a:solidFill>
+                          <a:latin typeface="Malgun Gothic" pitchFamily="34" charset="0"/>
+                          <a:ea typeface="Malgun Gothic" pitchFamily="34" charset="-122"/>
+                          <a:cs typeface="Malgun Gothic" pitchFamily="34" charset="-120"/>
+                        </a:rPr>
+                        <a:t>미제공</a:t>
+                      </a:r>
                       <a:endParaRPr lang="en-US" sz="1200" dirty="0">
                         <a:latin typeface="Malgun Gothic" charset="0"/>
                         <a:ea typeface="Malgun Gothic" charset="0"/>
@@ -5040,6 +5172,17 @@
                       <a:pPr algn="ctr" indent="0" marL="0">
                         <a:buNone/>
                       </a:pPr>
+                      <a:r>
+                        <a:rPr lang="en-US" sz="1200" b="1" dirty="0">
+                          <a:solidFill>
+                            <a:srgbClr val="3F3F3F"/>
+                          </a:solidFill>
+                          <a:latin typeface="Malgun Gothic" pitchFamily="34" charset="0"/>
+                          <a:ea typeface="Malgun Gothic" pitchFamily="34" charset="-122"/>
+                          <a:cs typeface="Malgun Gothic" pitchFamily="34" charset="-120"/>
+                        </a:rPr>
+                        <a:t>12</a:t>
+                      </a:r>
                       <a:endParaRPr lang="en-US" sz="1200" dirty="0">
                         <a:latin typeface="Malgun Gothic" charset="0"/>
                         <a:ea typeface="Malgun Gothic" charset="0"/>
@@ -5097,6 +5240,17 @@
                       <a:pPr algn="ctr" indent="0" marL="0">
                         <a:buNone/>
                       </a:pPr>
+                      <a:r>
+                        <a:rPr lang="en-US" sz="1200" b="1" i="1" dirty="0">
+                          <a:solidFill>
+                            <a:srgbClr val="9E9E9E"/>
+                          </a:solidFill>
+                          <a:latin typeface="Malgun Gothic" pitchFamily="34" charset="0"/>
+                          <a:ea typeface="Malgun Gothic" pitchFamily="34" charset="-122"/>
+                          <a:cs typeface="Malgun Gothic" pitchFamily="34" charset="-120"/>
+                        </a:rPr>
+                        <a:t>미제공</a:t>
+                      </a:r>
                       <a:endParaRPr lang="en-US" sz="1200" dirty="0">
                         <a:latin typeface="Malgun Gothic" charset="0"/>
                         <a:ea typeface="Malgun Gothic" charset="0"/>
@@ -5154,6 +5308,17 @@
                       <a:pPr algn="ctr" indent="0" marL="0">
                         <a:buNone/>
                       </a:pPr>
+                      <a:r>
+                        <a:rPr lang="en-US" sz="1200" b="1" i="1" dirty="0">
+                          <a:solidFill>
+                            <a:srgbClr val="9E9E9E"/>
+                          </a:solidFill>
+                          <a:latin typeface="Malgun Gothic" pitchFamily="34" charset="0"/>
+                          <a:ea typeface="Malgun Gothic" pitchFamily="34" charset="-122"/>
+                          <a:cs typeface="Malgun Gothic" pitchFamily="34" charset="-120"/>
+                        </a:rPr>
+                        <a:t>미제공</a:t>
+                      </a:r>
                       <a:endParaRPr lang="en-US" sz="1200" dirty="0">
                         <a:latin typeface="Malgun Gothic" charset="0"/>
                         <a:ea typeface="Malgun Gothic" charset="0"/>
@@ -5211,6 +5376,17 @@
                       <a:pPr algn="ctr" indent="0" marL="0">
                         <a:buNone/>
                       </a:pPr>
+                      <a:r>
+                        <a:rPr lang="en-US" sz="1200" b="1" i="1" dirty="0">
+                          <a:solidFill>
+                            <a:srgbClr val="9E9E9E"/>
+                          </a:solidFill>
+                          <a:latin typeface="Malgun Gothic" pitchFamily="34" charset="0"/>
+                          <a:ea typeface="Malgun Gothic" pitchFamily="34" charset="-122"/>
+                          <a:cs typeface="Malgun Gothic" pitchFamily="34" charset="-120"/>
+                        </a:rPr>
+                        <a:t>미제공</a:t>
+                      </a:r>
                       <a:endParaRPr lang="en-US" sz="1200" dirty="0">
                         <a:latin typeface="Malgun Gothic" charset="0"/>
                         <a:ea typeface="Malgun Gothic" charset="0"/>
@@ -5273,6 +5449,45 @@
         </p:nvSpPr>
         <p:spPr>
           <a:xfrm>
+            <a:off x="530352" y="3776472"/>
+            <a:ext cx="11100816" cy="320040"/>
+          </a:xfrm>
+          <a:prstGeom prst="rect">
+            <a:avLst/>
+          </a:prstGeom>
+          <a:noFill/>
+          <a:ln/>
+        </p:spPr>
+        <p:txBody>
+          <a:bodyPr wrap="square" lIns="0" tIns="0" rIns="0" bIns="0" rtlCol="0" anchor="ctr"/>
+          <a:lstStyle/>
+          <a:p>
+            <a:pPr indent="0" marL="0">
+              <a:buNone/>
+            </a:pPr>
+            <a:r>
+              <a:rPr lang="en-US" sz="950" i="1" dirty="0">
+                <a:solidFill>
+                  <a:srgbClr val="9E9E9E"/>
+                </a:solidFill>
+                <a:latin typeface="Malgun Gothic" pitchFamily="34" charset="0"/>
+                <a:ea typeface="Malgun Gothic" pitchFamily="34" charset="-122"/>
+                <a:cs typeface="Malgun Gothic" pitchFamily="34" charset="-120"/>
+              </a:rPr>
+              <a:t>설치 건수는 신규 설치 기준(설치일정 관리 시트). 이전설치 4건 (FS East 3 · FS West 1), 장비 설치평가 4건 (SA팀 진행, FS팀 실적과 별도 집계)</a:t>
+            </a:r>
+            <a:endParaRPr lang="en-US" sz="950" dirty="0"/>
+          </a:p>
+        </p:txBody>
+      </p:sp>
+      <p:sp>
+        <p:nvSpPr>
+          <p:cNvPr id="9" name="Text 5"/>
+          <p:cNvSpPr/>
+          <p:nvPr/>
+        </p:nvSpPr>
+        <p:spPr>
+          <a:xfrm>
             <a:off x="530352" y="4160520"/>
             <a:ext cx="7315200" cy="320040"/>
           </a:xfrm>
@@ -5306,7 +5521,7 @@
       </p:sp>
       <p:sp>
         <p:nvSpPr>
-          <p:cNvPr id="9" name="Shape 5"/>
+          <p:cNvPr id="10" name="Shape 6"/>
           <p:cNvSpPr/>
           <p:nvPr/>
         </p:nvSpPr>
@@ -5328,7 +5543,7 @@
       </p:sp>
       <p:sp>
         <p:nvSpPr>
-          <p:cNvPr id="10" name="Text 6"/>
+          <p:cNvPr id="11" name="Text 7"/>
           <p:cNvSpPr/>
           <p:nvPr/>
         </p:nvSpPr>
@@ -5367,7 +5582,7 @@
       </p:sp>
       <p:sp>
         <p:nvSpPr>
-          <p:cNvPr id="11" name="Text 7"/>
+          <p:cNvPr id="12" name="Text 8"/>
           <p:cNvSpPr/>
           <p:nvPr/>
         </p:nvSpPr>
@@ -5406,7 +5621,7 @@
       </p:sp>
       <p:sp>
         <p:nvSpPr>
-          <p:cNvPr id="12" name="Text 8"/>
+          <p:cNvPr id="13" name="Text 9"/>
           <p:cNvSpPr/>
           <p:nvPr/>
         </p:nvSpPr>
@@ -5445,7 +5660,7 @@
       </p:sp>
       <p:sp>
         <p:nvSpPr>
-          <p:cNvPr id="13" name="Shape 9"/>
+          <p:cNvPr id="14" name="Shape 10"/>
           <p:cNvSpPr/>
           <p:nvPr/>
         </p:nvSpPr>
@@ -5467,7 +5682,7 @@
       </p:sp>
       <p:sp>
         <p:nvSpPr>
-          <p:cNvPr id="14" name="Text 10"/>
+          <p:cNvPr id="15" name="Text 11"/>
           <p:cNvSpPr/>
           <p:nvPr/>
         </p:nvSpPr>
@@ -5506,7 +5721,7 @@
       </p:sp>
       <p:sp>
         <p:nvSpPr>
-          <p:cNvPr id="15" name="Text 11"/>
+          <p:cNvPr id="16" name="Text 12"/>
           <p:cNvSpPr/>
           <p:nvPr/>
         </p:nvSpPr>
@@ -5545,7 +5760,7 @@
       </p:sp>
       <p:sp>
         <p:nvSpPr>
-          <p:cNvPr id="16" name="Text 12"/>
+          <p:cNvPr id="17" name="Text 13"/>
           <p:cNvSpPr/>
           <p:nvPr/>
         </p:nvSpPr>
@@ -5584,7 +5799,7 @@
       </p:sp>
       <p:sp>
         <p:nvSpPr>
-          <p:cNvPr id="17" name="Shape 13"/>
+          <p:cNvPr id="18" name="Shape 14"/>
           <p:cNvSpPr/>
           <p:nvPr/>
         </p:nvSpPr>
@@ -5606,7 +5821,7 @@
       </p:sp>
       <p:sp>
         <p:nvSpPr>
-          <p:cNvPr id="18" name="Text 14"/>
+          <p:cNvPr id="19" name="Text 15"/>
           <p:cNvSpPr/>
           <p:nvPr/>
         </p:nvSpPr>
@@ -5645,7 +5860,7 @@
       </p:sp>
       <p:sp>
         <p:nvSpPr>
-          <p:cNvPr id="19" name="Text 15"/>
+          <p:cNvPr id="20" name="Text 16"/>
           <p:cNvSpPr/>
           <p:nvPr/>
         </p:nvSpPr>
@@ -5684,7 +5899,7 @@
       </p:sp>
       <p:sp>
         <p:nvSpPr>
-          <p:cNvPr id="20" name="Text 16"/>
+          <p:cNvPr id="21" name="Text 17"/>
           <p:cNvSpPr/>
           <p:nvPr/>
         </p:nvSpPr>
@@ -5723,7 +5938,7 @@
       </p:sp>
       <p:sp>
         <p:nvSpPr>
-          <p:cNvPr id="21" name="Shape 17"/>
+          <p:cNvPr id="22" name="Shape 18"/>
           <p:cNvSpPr/>
           <p:nvPr/>
         </p:nvSpPr>
@@ -5745,7 +5960,7 @@
       </p:sp>
       <p:sp>
         <p:nvSpPr>
-          <p:cNvPr id="22" name="Text 18"/>
+          <p:cNvPr id="23" name="Text 19"/>
           <p:cNvSpPr/>
           <p:nvPr/>
         </p:nvSpPr>
@@ -5784,7 +5999,7 @@
       </p:sp>
       <p:sp>
         <p:nvSpPr>
-          <p:cNvPr id="23" name="Text 19"/>
+          <p:cNvPr id="24" name="Text 20"/>
           <p:cNvSpPr/>
           <p:nvPr/>
         </p:nvSpPr>
@@ -5823,7 +6038,7 @@
       </p:sp>
       <p:sp>
         <p:nvSpPr>
-          <p:cNvPr id="24" name="Text 20"/>
+          <p:cNvPr id="25" name="Text 21"/>
           <p:cNvSpPr/>
           <p:nvPr/>
         </p:nvSpPr>
@@ -5862,7 +6077,7 @@
       </p:sp>
       <p:sp>
         <p:nvSpPr>
-          <p:cNvPr id="25" name="Text 21"/>
+          <p:cNvPr id="26" name="Text 22"/>
           <p:cNvSpPr/>
           <p:nvPr/>
         </p:nvSpPr>
@@ -5901,7 +6116,7 @@
       </p:sp>
       <p:sp>
         <p:nvSpPr>
-          <p:cNvPr id="26" name="Text 22"/>
+          <p:cNvPr id="27" name="Text 23"/>
           <p:cNvSpPr/>
           <p:nvPr/>
         </p:nvSpPr>
@@ -6789,7 +7004,7 @@
                           <a:ea typeface="Malgun Gothic" pitchFamily="34" charset="-122"/>
                           <a:cs typeface="Malgun Gothic" pitchFamily="34" charset="-120"/>
                         </a:rPr>
-                        <a:t>자료 미제공 – 추후 업데이트</a:t>
+                        <a:t>미제공</a:t>
                       </a:r>
                       <a:endParaRPr lang="en-US" sz="1200" dirty="0">
                         <a:latin typeface="Malgun Gothic" charset="0"/>
@@ -6984,7 +7199,7 @@
                           <a:ea typeface="Malgun Gothic" pitchFamily="34" charset="-122"/>
                           <a:cs typeface="Malgun Gothic" pitchFamily="34" charset="-120"/>
                         </a:rPr>
-                        <a:t>자료 미제공 – 추후 업데이트</a:t>
+                        <a:t>미제공</a:t>
                       </a:r>
                       <a:endParaRPr lang="en-US" sz="1200" dirty="0">
                         <a:latin typeface="Malgun Gothic" charset="0"/>
@@ -7179,7 +7394,7 @@
                           <a:ea typeface="Malgun Gothic" pitchFamily="34" charset="-122"/>
                           <a:cs typeface="Malgun Gothic" pitchFamily="34" charset="-120"/>
                         </a:rPr>
-                        <a:t>자료 미제공 – 추후 업데이트</a:t>
+                        <a:t>미제공</a:t>
                       </a:r>
                       <a:endParaRPr lang="en-US" sz="1200" dirty="0">
                         <a:latin typeface="Malgun Gothic" charset="0"/>

--- a/reports/FSG_월간서비스보고_202607/FSG_월간서비스보고_202607.pptx
+++ b/reports/FSG_월간서비스보고_202607/FSG_월간서비스보고_202607.pptx
@@ -14,9 +14,10 @@
     <p:sldId id="262" r:id="rId8"/>
     <p:sldId id="263" r:id="rId9"/>
     <p:sldId id="264" r:id="rId10"/>
+    <p:sldId id="265" r:id="rId11"/>
   </p:sldIdLst>
   <p:notesMasterIdLst>
-    <p:notesMasterId r:id="rId11"/>
+    <p:notesMasterId r:id="rId12"/>
   </p:notesMasterIdLst>
   <p:sldSz cx="12192000" cy="6858000"/>
   <p:notesSz cx="6858000" cy="12192000"/>
@@ -534,6 +535,94 @@
             <a:fld id="{F7021451-1387-4CA6-816F-3879F97B5CBC}" type="slidenum">
               <a:rPr lang="en-US"/>
               <a:t>1</a:t>
+            </a:fld>
+            <a:endParaRPr lang="en-US"/>
+          </a:p>
+        </p:txBody>
+      </p:sp>
+    </p:spTree>
+    <p:extLst>
+      <p:ext uri="{BB962C8B-B14F-4D97-AF65-F5344CB8AC3E}">
+        <p14:creationId xmlns:p14="http://schemas.microsoft.com/office/powerpoint/2010/main" val="1024086991"/>
+      </p:ext>
+    </p:extLst>
+  </p:cSld>
+  <p:clrMapOvr>
+    <a:masterClrMapping/>
+  </p:clrMapOvr>
+</p:notes>
+</file>
+
+<file path=ppt/notesSlides/notesSlide10.xml><?xml version="1.0" encoding="utf-8"?>
+<p:notes xmlns:a="http://schemas.openxmlformats.org/drawingml/2006/main" xmlns:r="http://schemas.openxmlformats.org/officeDocument/2006/relationships" xmlns:p="http://schemas.openxmlformats.org/presentationml/2006/main">
+  <p:cSld>
+    <p:spTree>
+      <p:nvGrpSpPr>
+        <p:cNvPr id="1" name=""/>
+        <p:cNvGrpSpPr/>
+        <p:nvPr/>
+      </p:nvGrpSpPr>
+      <p:grpSpPr>
+        <a:xfrm>
+          <a:off x="0" y="0"/>
+          <a:ext cx="0" cy="0"/>
+          <a:chOff x="0" y="0"/>
+          <a:chExt cx="0" cy="0"/>
+        </a:xfrm>
+      </p:grpSpPr>
+      <p:sp>
+        <p:nvSpPr>
+          <p:cNvPr id="2" name="Slide Image Placeholder 1"/>
+          <p:cNvSpPr>
+            <a:spLocks noGrp="1" noRot="1" noChangeAspect="1"/>
+          </p:cNvSpPr>
+          <p:nvPr>
+            <p:ph type="sldImg"/>
+          </p:nvPr>
+        </p:nvSpPr>
+        <p:spPr/>
+      </p:sp>
+      <p:sp>
+        <p:nvSpPr>
+          <p:cNvPr id="3" name="Notes Placeholder 2"/>
+          <p:cNvSpPr>
+            <a:spLocks noGrp="1"/>
+          </p:cNvSpPr>
+          <p:nvPr>
+            <p:ph type="body" idx="1"/>
+          </p:nvPr>
+        </p:nvSpPr>
+        <p:spPr/>
+        <p:txBody>
+          <a:bodyPr/>
+          <a:lstStyle/>
+          <a:p>
+            <a:r>
+              <a:rPr lang="en-US" dirty="0"/>
+              <a:t/>
+            </a:r>
+            <a:endParaRPr lang="en-US" dirty="0"/>
+          </a:p>
+        </p:txBody>
+      </p:sp>
+      <p:sp>
+        <p:nvSpPr>
+          <p:cNvPr id="4" name="Slide Number Placeholder 3"/>
+          <p:cNvSpPr>
+            <a:spLocks noGrp="1"/>
+          </p:cNvSpPr>
+          <p:nvPr>
+            <p:ph type="sldNum" sz="quarter" idx="10"/>
+          </p:nvPr>
+        </p:nvSpPr>
+        <p:spPr/>
+        <p:txBody>
+          <a:bodyPr/>
+          <a:lstStyle/>
+          <a:p>
+            <a:fld id="{F7021451-1387-4CA6-816F-3879F97B5CBC}" type="slidenum">
+              <a:rPr lang="en-US"/>
+              <a:t>10</a:t>
             </a:fld>
             <a:endParaRPr lang="en-US"/>
           </a:p>
@@ -1856,6 +1945,304 @@
 </p:sld>
 </file>
 
+<file path=ppt/slides/slide10.xml><?xml version="1.0" encoding="utf-8"?>
+<p:sld xmlns:a="http://schemas.openxmlformats.org/drawingml/2006/main" xmlns:r="http://schemas.openxmlformats.org/officeDocument/2006/relationships" xmlns:p="http://schemas.openxmlformats.org/presentationml/2006/main">
+  <p:cSld name="Slide 10">
+    <p:bg>
+      <p:bgPr>
+        <a:solidFill>
+          <a:srgbClr val="FFFFFF"/>
+        </a:solidFill>
+      </p:bgPr>
+    </p:bg>
+    <p:spTree>
+      <p:nvGrpSpPr>
+        <p:cNvPr id="1" name=""/>
+        <p:cNvGrpSpPr/>
+        <p:nvPr/>
+      </p:nvGrpSpPr>
+      <p:grpSpPr>
+        <a:xfrm>
+          <a:off x="0" y="0"/>
+          <a:ext cx="0" cy="0"/>
+          <a:chOff x="0" y="0"/>
+          <a:chExt cx="0" cy="0"/>
+        </a:xfrm>
+      </p:grpSpPr>
+      <p:sp>
+        <p:nvSpPr>
+          <p:cNvPr id="2" name="Shape 0"/>
+          <p:cNvSpPr/>
+          <p:nvPr/>
+        </p:nvSpPr>
+        <p:spPr>
+          <a:xfrm>
+            <a:off x="0" y="0"/>
+            <a:ext cx="10378440" cy="914400"/>
+          </a:xfrm>
+          <a:prstGeom prst="rect">
+            <a:avLst/>
+          </a:prstGeom>
+          <a:solidFill>
+            <a:srgbClr val="005BAC"/>
+          </a:solidFill>
+          <a:ln/>
+        </p:spPr>
+      </p:sp>
+      <p:sp>
+        <p:nvSpPr>
+          <p:cNvPr id="3" name="Text 1"/>
+          <p:cNvSpPr/>
+          <p:nvPr/>
+        </p:nvSpPr>
+        <p:spPr>
+          <a:xfrm>
+            <a:off x="502920" y="164592"/>
+            <a:ext cx="822960" cy="585216"/>
+          </a:xfrm>
+          <a:prstGeom prst="rect">
+            <a:avLst/>
+          </a:prstGeom>
+          <a:noFill/>
+          <a:ln/>
+        </p:spPr>
+        <p:txBody>
+          <a:bodyPr wrap="square" lIns="0" tIns="0" rIns="0" bIns="0" rtlCol="0" anchor="ctr"/>
+          <a:lstStyle/>
+          <a:p>
+            <a:pPr algn="l" indent="0" marL="0">
+              <a:buNone/>
+            </a:pPr>
+            <a:r>
+              <a:rPr lang="en-US" sz="3000" b="1" dirty="0">
+                <a:solidFill>
+                  <a:srgbClr val="00B8EE"/>
+                </a:solidFill>
+                <a:latin typeface="Arial" pitchFamily="34" charset="0"/>
+                <a:ea typeface="Arial" pitchFamily="34" charset="-122"/>
+                <a:cs typeface="Arial" pitchFamily="34" charset="-120"/>
+              </a:rPr>
+              <a:t>10</a:t>
+            </a:r>
+            <a:endParaRPr lang="en-US" sz="3000" dirty="0"/>
+          </a:p>
+        </p:txBody>
+      </p:sp>
+      <p:sp>
+        <p:nvSpPr>
+          <p:cNvPr id="4" name="Text 2"/>
+          <p:cNvSpPr/>
+          <p:nvPr/>
+        </p:nvSpPr>
+        <p:spPr>
+          <a:xfrm>
+            <a:off x="1234440" y="164592"/>
+            <a:ext cx="8595360" cy="585216"/>
+          </a:xfrm>
+          <a:prstGeom prst="rect">
+            <a:avLst/>
+          </a:prstGeom>
+          <a:noFill/>
+          <a:ln/>
+        </p:spPr>
+        <p:txBody>
+          <a:bodyPr wrap="square" lIns="0" tIns="0" rIns="0" bIns="0" rtlCol="0" anchor="ctr"/>
+          <a:lstStyle/>
+          <a:p>
+            <a:pPr algn="l" indent="0" marL="0">
+              <a:buNone/>
+            </a:pPr>
+            <a:r>
+              <a:rPr lang="en-US" sz="2600" b="1" dirty="0">
+                <a:solidFill>
+                  <a:srgbClr val="FFFFFF"/>
+                </a:solidFill>
+                <a:latin typeface="Malgun Gothic" pitchFamily="34" charset="0"/>
+                <a:ea typeface="Malgun Gothic" pitchFamily="34" charset="-122"/>
+                <a:cs typeface="Malgun Gothic" pitchFamily="34" charset="-120"/>
+              </a:rPr>
+              <a:t>Next Step</a:t>
+            </a:r>
+            <a:endParaRPr lang="en-US" sz="2600" dirty="0"/>
+          </a:p>
+        </p:txBody>
+      </p:sp>
+      <p:pic>
+        <p:nvPicPr>
+          <p:cNvPr id="5" name="Image 0" descr="sysmex_logo_mono_blue.png">    </p:cNvPr>
+          <p:cNvPicPr>
+            <a:picLocks noChangeAspect="1"/>
+          </p:cNvPicPr>
+          <p:nvPr/>
+        </p:nvPicPr>
+        <p:blipFill>
+          <a:blip r:embed="rId1"/>
+          <a:stretch>
+            <a:fillRect/>
+          </a:stretch>
+        </p:blipFill>
+        <p:spPr>
+          <a:xfrm>
+            <a:off x="10652760" y="292608"/>
+            <a:ext cx="1097280" cy="420624"/>
+          </a:xfrm>
+          <a:prstGeom prst="rect">
+            <a:avLst/>
+          </a:prstGeom>
+        </p:spPr>
+      </p:pic>
+      <p:sp>
+        <p:nvSpPr>
+          <p:cNvPr id="6" name="Shape 3"/>
+          <p:cNvSpPr/>
+          <p:nvPr/>
+        </p:nvSpPr>
+        <p:spPr>
+          <a:xfrm>
+            <a:off x="530352" y="1234440"/>
+            <a:ext cx="11100816" cy="4480560"/>
+          </a:xfrm>
+          <a:prstGeom prst="roundRect">
+            <a:avLst>
+              <a:gd name="adj" fmla="val 1633"/>
+            </a:avLst>
+          </a:prstGeom>
+          <a:solidFill>
+            <a:srgbClr val="E6EEF7"/>
+          </a:solidFill>
+          <a:ln w="9525">
+            <a:solidFill>
+              <a:srgbClr val="005BAC"/>
+            </a:solidFill>
+            <a:prstDash val="dash"/>
+          </a:ln>
+        </p:spPr>
+      </p:sp>
+      <p:sp>
+        <p:nvSpPr>
+          <p:cNvPr id="7" name="Text 4"/>
+          <p:cNvSpPr/>
+          <p:nvPr/>
+        </p:nvSpPr>
+        <p:spPr>
+          <a:xfrm>
+            <a:off x="530352" y="1234440"/>
+            <a:ext cx="11100816" cy="4480560"/>
+          </a:xfrm>
+          <a:prstGeom prst="rect">
+            <a:avLst/>
+          </a:prstGeom>
+          <a:noFill/>
+          <a:ln/>
+        </p:spPr>
+        <p:txBody>
+          <a:bodyPr wrap="square" lIns="0" tIns="0" rIns="0" bIns="0" rtlCol="0" anchor="ctr"/>
+          <a:lstStyle/>
+          <a:p>
+            <a:pPr algn="ctr" indent="0" marL="0">
+              <a:buNone/>
+            </a:pPr>
+            <a:r>
+              <a:rPr lang="en-US" sz="1600" i="1" dirty="0">
+                <a:solidFill>
+                  <a:srgbClr val="005BAC"/>
+                </a:solidFill>
+                <a:latin typeface="Malgun Gothic" pitchFamily="34" charset="0"/>
+                <a:ea typeface="Malgun Gothic" pitchFamily="34" charset="-122"/>
+                <a:cs typeface="Malgun Gothic" pitchFamily="34" charset="-120"/>
+              </a:rPr>
+              <a:t>자료 미제공 – 추후 업데이트</a:t>
+            </a:r>
+            <a:endParaRPr lang="en-US" sz="1600" dirty="0"/>
+          </a:p>
+        </p:txBody>
+      </p:sp>
+      <p:sp>
+        <p:nvSpPr>
+          <p:cNvPr id="8" name="Text 5"/>
+          <p:cNvSpPr/>
+          <p:nvPr/>
+        </p:nvSpPr>
+        <p:spPr>
+          <a:xfrm>
+            <a:off x="457200" y="6547104"/>
+            <a:ext cx="9601200" cy="274320"/>
+          </a:xfrm>
+          <a:prstGeom prst="rect">
+            <a:avLst/>
+          </a:prstGeom>
+          <a:noFill/>
+          <a:ln/>
+        </p:spPr>
+        <p:txBody>
+          <a:bodyPr wrap="square" rtlCol="0" anchor="ctr"/>
+          <a:lstStyle/>
+          <a:p>
+            <a:pPr algn="l" indent="0" marL="0">
+              <a:buNone/>
+            </a:pPr>
+            <a:r>
+              <a:rPr lang="en-US" sz="900" dirty="0">
+                <a:solidFill>
+                  <a:srgbClr val="9E9E9E"/>
+                </a:solidFill>
+                <a:latin typeface="Malgun Gothic" pitchFamily="34" charset="0"/>
+                <a:ea typeface="Malgun Gothic" pitchFamily="34" charset="-122"/>
+                <a:cs typeface="Malgun Gothic" pitchFamily="34" charset="-120"/>
+              </a:rPr>
+              <a:t>FS Group │ FSS Team · 2026년 7월 · Confidential</a:t>
+            </a:r>
+            <a:endParaRPr lang="en-US" sz="900" dirty="0"/>
+          </a:p>
+        </p:txBody>
+      </p:sp>
+      <p:sp>
+        <p:nvSpPr>
+          <p:cNvPr id="9" name="Text 6"/>
+          <p:cNvSpPr/>
+          <p:nvPr/>
+        </p:nvSpPr>
+        <p:spPr>
+          <a:xfrm>
+            <a:off x="11247120" y="6547104"/>
+            <a:ext cx="731520" cy="274320"/>
+          </a:xfrm>
+          <a:prstGeom prst="rect">
+            <a:avLst/>
+          </a:prstGeom>
+          <a:noFill/>
+          <a:ln/>
+        </p:spPr>
+        <p:txBody>
+          <a:bodyPr wrap="square" rtlCol="0" anchor="ctr"/>
+          <a:lstStyle/>
+          <a:p>
+            <a:pPr algn="r" indent="0" marL="0">
+              <a:buNone/>
+            </a:pPr>
+            <a:r>
+              <a:rPr lang="en-US" sz="900" dirty="0">
+                <a:solidFill>
+                  <a:srgbClr val="9E9E9E"/>
+                </a:solidFill>
+                <a:latin typeface="Arial" pitchFamily="34" charset="0"/>
+                <a:ea typeface="Arial" pitchFamily="34" charset="-122"/>
+                <a:cs typeface="Arial" pitchFamily="34" charset="-120"/>
+              </a:rPr>
+              <a:t>10</a:t>
+            </a:r>
+            <a:endParaRPr lang="en-US" sz="900" dirty="0"/>
+          </a:p>
+        </p:txBody>
+      </p:sp>
+    </p:spTree>
+  </p:cSld>
+  <p:clrMapOvr>
+    <a:masterClrMapping/>
+  </p:clrMapOvr>
+</p:sld>
+</file>
+
 <file path=ppt/slides/slide2.xml><?xml version="1.0" encoding="utf-8"?>
 <p:sld xmlns:a="http://schemas.openxmlformats.org/drawingml/2006/main" xmlns:r="http://schemas.openxmlformats.org/officeDocument/2006/relationships" xmlns:p="http://schemas.openxmlformats.org/presentationml/2006/main">
   <p:cSld name="Slide 2">
@@ -2010,7 +2397,7 @@
         </p:nvSpPr>
         <p:spPr>
           <a:xfrm>
-            <a:off x="548640" y="1344168"/>
+            <a:off x="548640" y="1298448"/>
             <a:ext cx="502920" cy="502920"/>
           </a:xfrm>
           <a:prstGeom prst="ellipse">
@@ -2030,7 +2417,7 @@
         </p:nvSpPr>
         <p:spPr>
           <a:xfrm>
-            <a:off x="548640" y="1344168"/>
+            <a:off x="548640" y="1298448"/>
             <a:ext cx="502920" cy="502920"/>
           </a:xfrm>
           <a:prstGeom prst="rect">
@@ -2069,7 +2456,7 @@
         </p:nvSpPr>
         <p:spPr>
           <a:xfrm>
-            <a:off x="1280160" y="1234440"/>
+            <a:off x="1280160" y="1188720"/>
             <a:ext cx="5120640" cy="365760"/>
           </a:xfrm>
           <a:prstGeom prst="rect">
@@ -2108,7 +2495,7 @@
         </p:nvSpPr>
         <p:spPr>
           <a:xfrm>
-            <a:off x="1280160" y="1618488"/>
+            <a:off x="1280160" y="1572768"/>
             <a:ext cx="9509760" cy="365760"/>
           </a:xfrm>
           <a:prstGeom prst="rect">
@@ -2147,7 +2534,7 @@
         </p:nvSpPr>
         <p:spPr>
           <a:xfrm>
-            <a:off x="548640" y="2304288"/>
+            <a:off x="548640" y="2121408"/>
             <a:ext cx="502920" cy="502920"/>
           </a:xfrm>
           <a:prstGeom prst="ellipse">
@@ -2167,7 +2554,7 @@
         </p:nvSpPr>
         <p:spPr>
           <a:xfrm>
-            <a:off x="548640" y="2304288"/>
+            <a:off x="548640" y="2121408"/>
             <a:ext cx="502920" cy="502920"/>
           </a:xfrm>
           <a:prstGeom prst="rect">
@@ -2206,7 +2593,144 @@
         </p:nvSpPr>
         <p:spPr>
           <a:xfrm>
-            <a:off x="1280160" y="2194560"/>
+            <a:off x="1280160" y="2011680"/>
+            <a:ext cx="5120640" cy="365760"/>
+          </a:xfrm>
+          <a:prstGeom prst="rect">
+            <a:avLst/>
+          </a:prstGeom>
+          <a:noFill/>
+          <a:ln/>
+        </p:spPr>
+        <p:txBody>
+          <a:bodyPr wrap="square" lIns="0" tIns="0" rIns="0" bIns="0" rtlCol="0" anchor="ctr"/>
+          <a:lstStyle/>
+          <a:p>
+            <a:pPr indent="0" marL="0">
+              <a:buNone/>
+            </a:pPr>
+            <a:r>
+              <a:rPr lang="en-US" sz="1600" b="1" dirty="0">
+                <a:solidFill>
+                  <a:srgbClr val="3F3F3F"/>
+                </a:solidFill>
+                <a:latin typeface="Malgun Gothic" pitchFamily="34" charset="0"/>
+                <a:ea typeface="Malgun Gothic" pitchFamily="34" charset="-122"/>
+                <a:cs typeface="Malgun Gothic" pitchFamily="34" charset="-120"/>
+              </a:rPr>
+              <a:t>장비별 설치 현황</a:t>
+            </a:r>
+            <a:endParaRPr lang="en-US" sz="1600" dirty="0"/>
+          </a:p>
+        </p:txBody>
+      </p:sp>
+      <p:sp>
+        <p:nvSpPr>
+          <p:cNvPr id="13" name="Text 10"/>
+          <p:cNvSpPr/>
+          <p:nvPr/>
+        </p:nvSpPr>
+        <p:spPr>
+          <a:xfrm>
+            <a:off x="1280160" y="2395728"/>
+            <a:ext cx="9509760" cy="365760"/>
+          </a:xfrm>
+          <a:prstGeom prst="rect">
+            <a:avLst/>
+          </a:prstGeom>
+          <a:noFill/>
+          <a:ln/>
+        </p:spPr>
+        <p:txBody>
+          <a:bodyPr wrap="square" lIns="0" tIns="0" rIns="0" bIns="0" rtlCol="0" anchor="ctr"/>
+          <a:lstStyle/>
+          <a:p>
+            <a:pPr indent="0" marL="0">
+              <a:buNone/>
+            </a:pPr>
+            <a:r>
+              <a:rPr lang="en-US" sz="1200" i="1" dirty="0">
+                <a:solidFill>
+                  <a:srgbClr val="9E9E9E"/>
+                </a:solidFill>
+                <a:latin typeface="Malgun Gothic" pitchFamily="34" charset="0"/>
+                <a:ea typeface="Malgun Gothic" pitchFamily="34" charset="-122"/>
+                <a:cs typeface="Malgun Gothic" pitchFamily="34" charset="-120"/>
+              </a:rPr>
+              <a:t>팀 구분 없이 모델(시리즈)별 설치 집계</a:t>
+            </a:r>
+            <a:endParaRPr lang="en-US" sz="1200" dirty="0"/>
+          </a:p>
+        </p:txBody>
+      </p:sp>
+      <p:sp>
+        <p:nvSpPr>
+          <p:cNvPr id="14" name="Shape 11"/>
+          <p:cNvSpPr/>
+          <p:nvPr/>
+        </p:nvSpPr>
+        <p:spPr>
+          <a:xfrm>
+            <a:off x="548640" y="2944368"/>
+            <a:ext cx="502920" cy="502920"/>
+          </a:xfrm>
+          <a:prstGeom prst="ellipse">
+            <a:avLst/>
+          </a:prstGeom>
+          <a:solidFill>
+            <a:srgbClr val="005BAC"/>
+          </a:solidFill>
+          <a:ln/>
+        </p:spPr>
+      </p:sp>
+      <p:sp>
+        <p:nvSpPr>
+          <p:cNvPr id="15" name="Text 12"/>
+          <p:cNvSpPr/>
+          <p:nvPr/>
+        </p:nvSpPr>
+        <p:spPr>
+          <a:xfrm>
+            <a:off x="548640" y="2944368"/>
+            <a:ext cx="502920" cy="502920"/>
+          </a:xfrm>
+          <a:prstGeom prst="rect">
+            <a:avLst/>
+          </a:prstGeom>
+          <a:noFill/>
+          <a:ln/>
+        </p:spPr>
+        <p:txBody>
+          <a:bodyPr wrap="square" lIns="0" tIns="0" rIns="0" bIns="0" rtlCol="0" anchor="ctr"/>
+          <a:lstStyle/>
+          <a:p>
+            <a:pPr algn="ctr" indent="0" marL="0">
+              <a:buNone/>
+            </a:pPr>
+            <a:r>
+              <a:rPr lang="en-US" sz="1800" b="1" dirty="0">
+                <a:solidFill>
+                  <a:srgbClr val="FFFFFF"/>
+                </a:solidFill>
+                <a:latin typeface="Arial" pitchFamily="34" charset="0"/>
+                <a:ea typeface="Arial" pitchFamily="34" charset="-122"/>
+                <a:cs typeface="Arial" pitchFamily="34" charset="-120"/>
+              </a:rPr>
+              <a:t>3</a:t>
+            </a:r>
+            <a:endParaRPr lang="en-US" sz="1800" dirty="0"/>
+          </a:p>
+        </p:txBody>
+      </p:sp>
+      <p:sp>
+        <p:nvSpPr>
+          <p:cNvPr id="16" name="Text 13"/>
+          <p:cNvSpPr/>
+          <p:nvPr/>
+        </p:nvSpPr>
+        <p:spPr>
+          <a:xfrm>
+            <a:off x="1280160" y="2834640"/>
             <a:ext cx="5120640" cy="365760"/>
           </a:xfrm>
           <a:prstGeom prst="rect">
@@ -2239,13 +2763,13 @@
       </p:sp>
       <p:sp>
         <p:nvSpPr>
-          <p:cNvPr id="13" name="Text 10"/>
-          <p:cNvSpPr/>
-          <p:nvPr/>
-        </p:nvSpPr>
-        <p:spPr>
-          <a:xfrm>
-            <a:off x="1280160" y="2578608"/>
+          <p:cNvPr id="17" name="Text 14"/>
+          <p:cNvSpPr/>
+          <p:nvPr/>
+        </p:nvSpPr>
+        <p:spPr>
+          <a:xfrm>
+            <a:off x="1280160" y="3218688"/>
             <a:ext cx="9509760" cy="365760"/>
           </a:xfrm>
           <a:prstGeom prst="rect">
@@ -2278,13 +2802,13 @@
       </p:sp>
       <p:sp>
         <p:nvSpPr>
-          <p:cNvPr id="14" name="Shape 11"/>
-          <p:cNvSpPr/>
-          <p:nvPr/>
-        </p:nvSpPr>
-        <p:spPr>
-          <a:xfrm>
-            <a:off x="548640" y="3264408"/>
+          <p:cNvPr id="18" name="Shape 15"/>
+          <p:cNvSpPr/>
+          <p:nvPr/>
+        </p:nvSpPr>
+        <p:spPr>
+          <a:xfrm>
+            <a:off x="548640" y="3767328"/>
             <a:ext cx="502920" cy="502920"/>
           </a:xfrm>
           <a:prstGeom prst="ellipse">
@@ -2298,13 +2822,13 @@
       </p:sp>
       <p:sp>
         <p:nvSpPr>
-          <p:cNvPr id="15" name="Text 12"/>
-          <p:cNvSpPr/>
-          <p:nvPr/>
-        </p:nvSpPr>
-        <p:spPr>
-          <a:xfrm>
-            <a:off x="548640" y="3264408"/>
+          <p:cNvPr id="19" name="Text 16"/>
+          <p:cNvSpPr/>
+          <p:nvPr/>
+        </p:nvSpPr>
+        <p:spPr>
+          <a:xfrm>
+            <a:off x="548640" y="3767328"/>
             <a:ext cx="502920" cy="502920"/>
           </a:xfrm>
           <a:prstGeom prst="rect">
@@ -2329,7 +2853,7 @@
                 <a:ea typeface="Arial" pitchFamily="34" charset="-122"/>
                 <a:cs typeface="Arial" pitchFamily="34" charset="-120"/>
               </a:rPr>
-              <a:t>3</a:t>
+              <a:t>4</a:t>
             </a:r>
             <a:endParaRPr lang="en-US" sz="1800" dirty="0"/>
           </a:p>
@@ -2337,13 +2861,13 @@
       </p:sp>
       <p:sp>
         <p:nvSpPr>
-          <p:cNvPr id="16" name="Text 13"/>
-          <p:cNvSpPr/>
-          <p:nvPr/>
-        </p:nvSpPr>
-        <p:spPr>
-          <a:xfrm>
-            <a:off x="1280160" y="3154680"/>
+          <p:cNvPr id="20" name="Text 17"/>
+          <p:cNvSpPr/>
+          <p:nvPr/>
+        </p:nvSpPr>
+        <p:spPr>
+          <a:xfrm>
+            <a:off x="1280160" y="3657600"/>
             <a:ext cx="5120640" cy="365760"/>
           </a:xfrm>
           <a:prstGeom prst="rect">
@@ -2376,13 +2900,13 @@
       </p:sp>
       <p:sp>
         <p:nvSpPr>
-          <p:cNvPr id="17" name="Text 14"/>
-          <p:cNvSpPr/>
-          <p:nvPr/>
-        </p:nvSpPr>
-        <p:spPr>
-          <a:xfrm>
-            <a:off x="1280160" y="3538728"/>
+          <p:cNvPr id="21" name="Text 18"/>
+          <p:cNvSpPr/>
+          <p:nvPr/>
+        </p:nvSpPr>
+        <p:spPr>
+          <a:xfrm>
+            <a:off x="1280160" y="4041648"/>
             <a:ext cx="9509760" cy="365760"/>
           </a:xfrm>
           <a:prstGeom prst="rect">
@@ -2415,13 +2939,13 @@
       </p:sp>
       <p:sp>
         <p:nvSpPr>
-          <p:cNvPr id="18" name="Shape 15"/>
-          <p:cNvSpPr/>
-          <p:nvPr/>
-        </p:nvSpPr>
-        <p:spPr>
-          <a:xfrm>
-            <a:off x="548640" y="4224528"/>
+          <p:cNvPr id="22" name="Shape 19"/>
+          <p:cNvSpPr/>
+          <p:nvPr/>
+        </p:nvSpPr>
+        <p:spPr>
+          <a:xfrm>
+            <a:off x="548640" y="4590288"/>
             <a:ext cx="502920" cy="502920"/>
           </a:xfrm>
           <a:prstGeom prst="ellipse">
@@ -2435,13 +2959,13 @@
       </p:sp>
       <p:sp>
         <p:nvSpPr>
-          <p:cNvPr id="19" name="Text 16"/>
-          <p:cNvSpPr/>
-          <p:nvPr/>
-        </p:nvSpPr>
-        <p:spPr>
-          <a:xfrm>
-            <a:off x="548640" y="4224528"/>
+          <p:cNvPr id="23" name="Text 20"/>
+          <p:cNvSpPr/>
+          <p:nvPr/>
+        </p:nvSpPr>
+        <p:spPr>
+          <a:xfrm>
+            <a:off x="548640" y="4590288"/>
             <a:ext cx="502920" cy="502920"/>
           </a:xfrm>
           <a:prstGeom prst="rect">
@@ -2466,7 +2990,7 @@
                 <a:ea typeface="Arial" pitchFamily="34" charset="-122"/>
                 <a:cs typeface="Arial" pitchFamily="34" charset="-120"/>
               </a:rPr>
-              <a:t>4</a:t>
+              <a:t>5</a:t>
             </a:r>
             <a:endParaRPr lang="en-US" sz="1800" dirty="0"/>
           </a:p>
@@ -2474,13 +2998,13 @@
       </p:sp>
       <p:sp>
         <p:nvSpPr>
-          <p:cNvPr id="20" name="Text 17"/>
-          <p:cNvSpPr/>
-          <p:nvPr/>
-        </p:nvSpPr>
-        <p:spPr>
-          <a:xfrm>
-            <a:off x="1280160" y="4114800"/>
+          <p:cNvPr id="24" name="Text 21"/>
+          <p:cNvSpPr/>
+          <p:nvPr/>
+        </p:nvSpPr>
+        <p:spPr>
+          <a:xfrm>
+            <a:off x="1280160" y="4480560"/>
             <a:ext cx="5120640" cy="365760"/>
           </a:xfrm>
           <a:prstGeom prst="rect">
@@ -2513,13 +3037,13 @@
       </p:sp>
       <p:sp>
         <p:nvSpPr>
-          <p:cNvPr id="21" name="Text 18"/>
-          <p:cNvSpPr/>
-          <p:nvPr/>
-        </p:nvSpPr>
-        <p:spPr>
-          <a:xfrm>
-            <a:off x="1280160" y="4498848"/>
+          <p:cNvPr id="25" name="Text 22"/>
+          <p:cNvSpPr/>
+          <p:nvPr/>
+        </p:nvSpPr>
+        <p:spPr>
+          <a:xfrm>
+            <a:off x="1280160" y="4864608"/>
             <a:ext cx="9509760" cy="365760"/>
           </a:xfrm>
           <a:prstGeom prst="rect">
@@ -2552,13 +3076,13 @@
       </p:sp>
       <p:sp>
         <p:nvSpPr>
-          <p:cNvPr id="22" name="Shape 19"/>
-          <p:cNvSpPr/>
-          <p:nvPr/>
-        </p:nvSpPr>
-        <p:spPr>
-          <a:xfrm>
-            <a:off x="548640" y="5184648"/>
+          <p:cNvPr id="26" name="Shape 23"/>
+          <p:cNvSpPr/>
+          <p:nvPr/>
+        </p:nvSpPr>
+        <p:spPr>
+          <a:xfrm>
+            <a:off x="548640" y="5413248"/>
             <a:ext cx="502920" cy="502920"/>
           </a:xfrm>
           <a:prstGeom prst="ellipse">
@@ -2572,13 +3096,13 @@
       </p:sp>
       <p:sp>
         <p:nvSpPr>
-          <p:cNvPr id="23" name="Text 20"/>
-          <p:cNvSpPr/>
-          <p:nvPr/>
-        </p:nvSpPr>
-        <p:spPr>
-          <a:xfrm>
-            <a:off x="548640" y="5184648"/>
+          <p:cNvPr id="27" name="Text 24"/>
+          <p:cNvSpPr/>
+          <p:nvPr/>
+        </p:nvSpPr>
+        <p:spPr>
+          <a:xfrm>
+            <a:off x="548640" y="5413248"/>
             <a:ext cx="502920" cy="502920"/>
           </a:xfrm>
           <a:prstGeom prst="rect">
@@ -2603,7 +3127,7 @@
                 <a:ea typeface="Arial" pitchFamily="34" charset="-122"/>
                 <a:cs typeface="Arial" pitchFamily="34" charset="-120"/>
               </a:rPr>
-              <a:t>5</a:t>
+              <a:t>6</a:t>
             </a:r>
             <a:endParaRPr lang="en-US" sz="1800" dirty="0"/>
           </a:p>
@@ -2611,13 +3135,13 @@
       </p:sp>
       <p:sp>
         <p:nvSpPr>
-          <p:cNvPr id="24" name="Text 21"/>
-          <p:cNvSpPr/>
-          <p:nvPr/>
-        </p:nvSpPr>
-        <p:spPr>
-          <a:xfrm>
-            <a:off x="1280160" y="5074920"/>
+          <p:cNvPr id="28" name="Text 25"/>
+          <p:cNvSpPr/>
+          <p:nvPr/>
+        </p:nvSpPr>
+        <p:spPr>
+          <a:xfrm>
+            <a:off x="1280160" y="5303520"/>
             <a:ext cx="5120640" cy="365760"/>
           </a:xfrm>
           <a:prstGeom prst="rect">
@@ -2650,13 +3174,13 @@
       </p:sp>
       <p:sp>
         <p:nvSpPr>
-          <p:cNvPr id="25" name="Text 22"/>
-          <p:cNvSpPr/>
-          <p:nvPr/>
-        </p:nvSpPr>
-        <p:spPr>
-          <a:xfrm>
-            <a:off x="1280160" y="5458968"/>
+          <p:cNvPr id="29" name="Text 26"/>
+          <p:cNvSpPr/>
+          <p:nvPr/>
+        </p:nvSpPr>
+        <p:spPr>
+          <a:xfrm>
+            <a:off x="1280160" y="5687568"/>
             <a:ext cx="9509760" cy="365760"/>
           </a:xfrm>
           <a:prstGeom prst="rect">
@@ -2689,7 +3213,7 @@
       </p:sp>
       <p:sp>
         <p:nvSpPr>
-          <p:cNvPr id="26" name="Text 23"/>
+          <p:cNvPr id="30" name="Text 27"/>
           <p:cNvSpPr/>
           <p:nvPr/>
         </p:nvSpPr>
@@ -2728,7 +3252,7 @@
       </p:sp>
       <p:sp>
         <p:nvSpPr>
-          <p:cNvPr id="27" name="Text 24"/>
+          <p:cNvPr id="31" name="Text 28"/>
           <p:cNvSpPr/>
           <p:nvPr/>
         </p:nvSpPr>
@@ -6277,6 +6801,2279 @@
                 <a:ea typeface="Malgun Gothic" pitchFamily="34" charset="-122"/>
                 <a:cs typeface="Malgun Gothic" pitchFamily="34" charset="-120"/>
               </a:rPr>
+              <a:t>장비별 설치 현황</a:t>
+            </a:r>
+            <a:endParaRPr lang="en-US" sz="2600" dirty="0"/>
+          </a:p>
+        </p:txBody>
+      </p:sp>
+      <p:pic>
+        <p:nvPicPr>
+          <p:cNvPr id="5" name="Image 0" descr="sysmex_logo_mono_blue.png">    </p:cNvPr>
+          <p:cNvPicPr>
+            <a:picLocks noChangeAspect="1"/>
+          </p:cNvPicPr>
+          <p:nvPr/>
+        </p:nvPicPr>
+        <p:blipFill>
+          <a:blip r:embed="rId1"/>
+          <a:stretch>
+            <a:fillRect/>
+          </a:stretch>
+        </p:blipFill>
+        <p:spPr>
+          <a:xfrm>
+            <a:off x="10652760" y="292608"/>
+            <a:ext cx="1097280" cy="420624"/>
+          </a:xfrm>
+          <a:prstGeom prst="rect">
+            <a:avLst/>
+          </a:prstGeom>
+        </p:spPr>
+      </p:pic>
+      <p:sp>
+        <p:nvSpPr>
+          <p:cNvPr id="6" name="Text 3"/>
+          <p:cNvSpPr/>
+          <p:nvPr/>
+        </p:nvSpPr>
+        <p:spPr>
+          <a:xfrm>
+            <a:off x="530352" y="1097280"/>
+            <a:ext cx="11100816" cy="365760"/>
+          </a:xfrm>
+          <a:prstGeom prst="rect">
+            <a:avLst/>
+          </a:prstGeom>
+          <a:noFill/>
+          <a:ln/>
+        </p:spPr>
+        <p:txBody>
+          <a:bodyPr wrap="square" lIns="0" tIns="0" rIns="0" bIns="0" rtlCol="0" anchor="ctr"/>
+          <a:lstStyle/>
+          <a:p>
+            <a:pPr indent="0" marL="0">
+              <a:buNone/>
+            </a:pPr>
+            <a:r>
+              <a:rPr lang="en-US" sz="1200" i="1" dirty="0">
+                <a:solidFill>
+                  <a:srgbClr val="9E9E9E"/>
+                </a:solidFill>
+                <a:latin typeface="Malgun Gothic" pitchFamily="34" charset="0"/>
+                <a:ea typeface="Malgun Gothic" pitchFamily="34" charset="-122"/>
+                <a:cs typeface="Malgun Gothic" pitchFamily="34" charset="-120"/>
+              </a:rPr>
+              <a:t>2026년 7월 설치+이전설치 전체 16건 — 팀 구분 없이 모델(시리즈) 기준 집계</a:t>
+            </a:r>
+            <a:endParaRPr lang="en-US" sz="1200" dirty="0"/>
+          </a:p>
+        </p:txBody>
+      </p:sp>
+      <p:graphicFrame>
+        <p:nvGraphicFramePr>
+          <p:cNvPr id="5" name="Table 0"/>
+          <p:cNvGraphicFramePr>
+            <a:graphicFrameLocks noGrp="1"/>
+          </p:cNvGraphicFramePr>
+          <p:nvPr>
+            <p:extLst>
+              <p:ext uri="{D42A27DB-BD31-4B8C-83A1-F6EECF244321}">
+                <p14:modId xmlns:p14="http://schemas.microsoft.com/office/powerpoint/2010/main" val="1579011935"/>
+              </p:ext>
+            </p:extLst>
+          </p:nvPr>
+        </p:nvGraphicFramePr>
+        <p:xfrm>
+          <a:off x="530352" y="1600200"/>
+          <a:ext cx="5852160" cy="914400"/>
+        </p:xfrm>
+        <a:graphic>
+          <a:graphicData uri="http://schemas.openxmlformats.org/drawingml/2006/table">
+            <a:tbl>
+              <a:tblPr/>
+              <a:tblGrid>
+                <a:gridCol w="3291840"/>
+                <a:gridCol w="1280160"/>
+                <a:gridCol w="1280160"/>
+              </a:tblGrid>
+              <a:tr h="457200">
+                <a:tc>
+                  <a:txBody>
+                    <a:bodyPr/>
+                    <a:lstStyle/>
+                    <a:p>
+                      <a:pPr algn="l" indent="0" marL="0">
+                        <a:buNone/>
+                      </a:pPr>
+                      <a:r>
+                        <a:rPr lang="en-US" sz="1300" b="1" dirty="0">
+                          <a:solidFill>
+                            <a:srgbClr val="FFFFFF"/>
+                          </a:solidFill>
+                          <a:latin typeface="Malgun Gothic" pitchFamily="34" charset="0"/>
+                          <a:ea typeface="Malgun Gothic" pitchFamily="34" charset="-122"/>
+                          <a:cs typeface="Malgun Gothic" pitchFamily="34" charset="-120"/>
+                        </a:rPr>
+                        <a:t>장비 모델(시리즈)</a:t>
+                      </a:r>
+                      <a:endParaRPr lang="en-US" sz="1300" dirty="0">
+                        <a:latin typeface="Malgun Gothic" charset="0"/>
+                        <a:ea typeface="Malgun Gothic" charset="0"/>
+                        <a:cs typeface="Malgun Gothic" charset="0"/>
+                      </a:endParaRPr>
+                    </a:p>
+                  </a:txBody>
+                  <a:tcPr marL="91440" marR="91440" marT="45720" marB="45720" anchor="ctr">
+                    <a:lnL w="9525" cap="flat" cmpd="sng" algn="ctr">
+                      <a:solidFill>
+                        <a:srgbClr val="D9D9D9"/>
+                      </a:solidFill>
+                      <a:prstDash val="solid"/>
+                      <a:round/>
+                      <a:headEnd type="none" w="med" len="med"/>
+                      <a:tailEnd type="none" w="med" len="med"/>
+                    </a:lnL>
+                    <a:lnR w="9525" cap="flat" cmpd="sng" algn="ctr">
+                      <a:solidFill>
+                        <a:srgbClr val="D9D9D9"/>
+                      </a:solidFill>
+                      <a:prstDash val="solid"/>
+                      <a:round/>
+                      <a:headEnd type="none" w="med" len="med"/>
+                      <a:tailEnd type="none" w="med" len="med"/>
+                    </a:lnR>
+                    <a:lnT w="9525" cap="flat" cmpd="sng" algn="ctr">
+                      <a:solidFill>
+                        <a:srgbClr val="D9D9D9"/>
+                      </a:solidFill>
+                      <a:prstDash val="solid"/>
+                      <a:round/>
+                      <a:headEnd type="none" w="med" len="med"/>
+                      <a:tailEnd type="none" w="med" len="med"/>
+                    </a:lnT>
+                    <a:lnB w="9525" cap="flat" cmpd="sng" algn="ctr">
+                      <a:solidFill>
+                        <a:srgbClr val="D9D9D9"/>
+                      </a:solidFill>
+                      <a:prstDash val="solid"/>
+                      <a:round/>
+                      <a:headEnd type="none" w="med" len="med"/>
+                      <a:tailEnd type="none" w="med" len="med"/>
+                    </a:lnB>
+                    <a:solidFill>
+                      <a:srgbClr val="005BAC"/>
+                    </a:solidFill>
+                  </a:tcPr>
+                </a:tc>
+                <a:tc>
+                  <a:txBody>
+                    <a:bodyPr/>
+                    <a:lstStyle/>
+                    <a:p>
+                      <a:pPr algn="ctr" indent="0" marL="0">
+                        <a:buNone/>
+                      </a:pPr>
+                      <a:r>
+                        <a:rPr lang="en-US" sz="1300" b="1" dirty="0">
+                          <a:solidFill>
+                            <a:srgbClr val="FFFFFF"/>
+                          </a:solidFill>
+                          <a:latin typeface="Malgun Gothic" pitchFamily="34" charset="0"/>
+                          <a:ea typeface="Malgun Gothic" pitchFamily="34" charset="-122"/>
+                          <a:cs typeface="Malgun Gothic" pitchFamily="34" charset="-120"/>
+                        </a:rPr>
+                        <a:t>건수</a:t>
+                      </a:r>
+                      <a:endParaRPr lang="en-US" sz="1300" dirty="0">
+                        <a:latin typeface="Malgun Gothic" charset="0"/>
+                        <a:ea typeface="Malgun Gothic" charset="0"/>
+                        <a:cs typeface="Malgun Gothic" charset="0"/>
+                      </a:endParaRPr>
+                    </a:p>
+                  </a:txBody>
+                  <a:tcPr marL="91440" marR="91440" marT="45720" marB="45720" anchor="ctr">
+                    <a:lnL w="9525" cap="flat" cmpd="sng" algn="ctr">
+                      <a:solidFill>
+                        <a:srgbClr val="D9D9D9"/>
+                      </a:solidFill>
+                      <a:prstDash val="solid"/>
+                      <a:round/>
+                      <a:headEnd type="none" w="med" len="med"/>
+                      <a:tailEnd type="none" w="med" len="med"/>
+                    </a:lnL>
+                    <a:lnR w="9525" cap="flat" cmpd="sng" algn="ctr">
+                      <a:solidFill>
+                        <a:srgbClr val="D9D9D9"/>
+                      </a:solidFill>
+                      <a:prstDash val="solid"/>
+                      <a:round/>
+                      <a:headEnd type="none" w="med" len="med"/>
+                      <a:tailEnd type="none" w="med" len="med"/>
+                    </a:lnR>
+                    <a:lnT w="9525" cap="flat" cmpd="sng" algn="ctr">
+                      <a:solidFill>
+                        <a:srgbClr val="D9D9D9"/>
+                      </a:solidFill>
+                      <a:prstDash val="solid"/>
+                      <a:round/>
+                      <a:headEnd type="none" w="med" len="med"/>
+                      <a:tailEnd type="none" w="med" len="med"/>
+                    </a:lnT>
+                    <a:lnB w="9525" cap="flat" cmpd="sng" algn="ctr">
+                      <a:solidFill>
+                        <a:srgbClr val="D9D9D9"/>
+                      </a:solidFill>
+                      <a:prstDash val="solid"/>
+                      <a:round/>
+                      <a:headEnd type="none" w="med" len="med"/>
+                      <a:tailEnd type="none" w="med" len="med"/>
+                    </a:lnB>
+                    <a:solidFill>
+                      <a:srgbClr val="005BAC"/>
+                    </a:solidFill>
+                  </a:tcPr>
+                </a:tc>
+                <a:tc>
+                  <a:txBody>
+                    <a:bodyPr/>
+                    <a:lstStyle/>
+                    <a:p>
+                      <a:pPr algn="ctr" indent="0" marL="0">
+                        <a:buNone/>
+                      </a:pPr>
+                      <a:r>
+                        <a:rPr lang="en-US" sz="1300" b="1" dirty="0">
+                          <a:solidFill>
+                            <a:srgbClr val="FFFFFF"/>
+                          </a:solidFill>
+                          <a:latin typeface="Malgun Gothic" pitchFamily="34" charset="0"/>
+                          <a:ea typeface="Malgun Gothic" pitchFamily="34" charset="-122"/>
+                          <a:cs typeface="Malgun Gothic" pitchFamily="34" charset="-120"/>
+                        </a:rPr>
+                        <a:t>비중</a:t>
+                      </a:r>
+                      <a:endParaRPr lang="en-US" sz="1300" dirty="0">
+                        <a:latin typeface="Malgun Gothic" charset="0"/>
+                        <a:ea typeface="Malgun Gothic" charset="0"/>
+                        <a:cs typeface="Malgun Gothic" charset="0"/>
+                      </a:endParaRPr>
+                    </a:p>
+                  </a:txBody>
+                  <a:tcPr marL="91440" marR="91440" marT="45720" marB="45720" anchor="ctr">
+                    <a:lnL w="9525" cap="flat" cmpd="sng" algn="ctr">
+                      <a:solidFill>
+                        <a:srgbClr val="D9D9D9"/>
+                      </a:solidFill>
+                      <a:prstDash val="solid"/>
+                      <a:round/>
+                      <a:headEnd type="none" w="med" len="med"/>
+                      <a:tailEnd type="none" w="med" len="med"/>
+                    </a:lnL>
+                    <a:lnR w="9525" cap="flat" cmpd="sng" algn="ctr">
+                      <a:solidFill>
+                        <a:srgbClr val="D9D9D9"/>
+                      </a:solidFill>
+                      <a:prstDash val="solid"/>
+                      <a:round/>
+                      <a:headEnd type="none" w="med" len="med"/>
+                      <a:tailEnd type="none" w="med" len="med"/>
+                    </a:lnR>
+                    <a:lnT w="9525" cap="flat" cmpd="sng" algn="ctr">
+                      <a:solidFill>
+                        <a:srgbClr val="D9D9D9"/>
+                      </a:solidFill>
+                      <a:prstDash val="solid"/>
+                      <a:round/>
+                      <a:headEnd type="none" w="med" len="med"/>
+                      <a:tailEnd type="none" w="med" len="med"/>
+                    </a:lnT>
+                    <a:lnB w="9525" cap="flat" cmpd="sng" algn="ctr">
+                      <a:solidFill>
+                        <a:srgbClr val="D9D9D9"/>
+                      </a:solidFill>
+                      <a:prstDash val="solid"/>
+                      <a:round/>
+                      <a:headEnd type="none" w="med" len="med"/>
+                      <a:tailEnd type="none" w="med" len="med"/>
+                    </a:lnB>
+                    <a:solidFill>
+                      <a:srgbClr val="005BAC"/>
+                    </a:solidFill>
+                  </a:tcPr>
+                </a:tc>
+              </a:tr>
+              <a:tr h="457200">
+                <a:tc>
+                  <a:txBody>
+                    <a:bodyPr/>
+                    <a:lstStyle/>
+                    <a:p>
+                      <a:pPr algn="l" indent="0" marL="0">
+                        <a:buNone/>
+                      </a:pPr>
+                      <a:r>
+                        <a:rPr lang="en-US" sz="1300" dirty="0">
+                          <a:solidFill>
+                            <a:srgbClr val="3F3F3F"/>
+                          </a:solidFill>
+                          <a:latin typeface="Malgun Gothic" pitchFamily="34" charset="0"/>
+                          <a:ea typeface="Malgun Gothic" pitchFamily="34" charset="-122"/>
+                          <a:cs typeface="Malgun Gothic" pitchFamily="34" charset="-120"/>
+                        </a:rPr>
+                        <a:t>XR 시리즈 (Hematology)</a:t>
+                      </a:r>
+                      <a:endParaRPr lang="en-US" sz="1300" dirty="0">
+                        <a:latin typeface="Malgun Gothic" charset="0"/>
+                        <a:ea typeface="Malgun Gothic" charset="0"/>
+                        <a:cs typeface="Malgun Gothic" charset="0"/>
+                      </a:endParaRPr>
+                    </a:p>
+                  </a:txBody>
+                  <a:tcPr marL="91440" marR="91440" marT="45720" marB="45720" anchor="ctr">
+                    <a:lnL w="9525" cap="flat" cmpd="sng" algn="ctr">
+                      <a:solidFill>
+                        <a:srgbClr val="D9D9D9"/>
+                      </a:solidFill>
+                      <a:prstDash val="solid"/>
+                      <a:round/>
+                      <a:headEnd type="none" w="med" len="med"/>
+                      <a:tailEnd type="none" w="med" len="med"/>
+                    </a:lnL>
+                    <a:lnR w="9525" cap="flat" cmpd="sng" algn="ctr">
+                      <a:solidFill>
+                        <a:srgbClr val="D9D9D9"/>
+                      </a:solidFill>
+                      <a:prstDash val="solid"/>
+                      <a:round/>
+                      <a:headEnd type="none" w="med" len="med"/>
+                      <a:tailEnd type="none" w="med" len="med"/>
+                    </a:lnR>
+                    <a:lnT w="9525" cap="flat" cmpd="sng" algn="ctr">
+                      <a:solidFill>
+                        <a:srgbClr val="D9D9D9"/>
+                      </a:solidFill>
+                      <a:prstDash val="solid"/>
+                      <a:round/>
+                      <a:headEnd type="none" w="med" len="med"/>
+                      <a:tailEnd type="none" w="med" len="med"/>
+                    </a:lnT>
+                    <a:lnB w="9525" cap="flat" cmpd="sng" algn="ctr">
+                      <a:solidFill>
+                        <a:srgbClr val="D9D9D9"/>
+                      </a:solidFill>
+                      <a:prstDash val="solid"/>
+                      <a:round/>
+                      <a:headEnd type="none" w="med" len="med"/>
+                      <a:tailEnd type="none" w="med" len="med"/>
+                    </a:lnB>
+                    <a:solidFill>
+                      <a:srgbClr val="FFFFFF"/>
+                    </a:solidFill>
+                  </a:tcPr>
+                </a:tc>
+                <a:tc>
+                  <a:txBody>
+                    <a:bodyPr/>
+                    <a:lstStyle/>
+                    <a:p>
+                      <a:pPr algn="ctr" indent="0" marL="0">
+                        <a:buNone/>
+                      </a:pPr>
+                      <a:r>
+                        <a:rPr lang="en-US" sz="1300" dirty="0">
+                          <a:solidFill>
+                            <a:srgbClr val="3F3F3F"/>
+                          </a:solidFill>
+                          <a:latin typeface="Malgun Gothic" pitchFamily="34" charset="0"/>
+                          <a:ea typeface="Malgun Gothic" pitchFamily="34" charset="-122"/>
+                          <a:cs typeface="Malgun Gothic" pitchFamily="34" charset="-120"/>
+                        </a:rPr>
+                        <a:t>7</a:t>
+                      </a:r>
+                      <a:endParaRPr lang="en-US" sz="1300" dirty="0">
+                        <a:latin typeface="Malgun Gothic" charset="0"/>
+                        <a:ea typeface="Malgun Gothic" charset="0"/>
+                        <a:cs typeface="Malgun Gothic" charset="0"/>
+                      </a:endParaRPr>
+                    </a:p>
+                  </a:txBody>
+                  <a:tcPr marL="91440" marR="91440" marT="45720" marB="45720" anchor="ctr">
+                    <a:lnL w="9525" cap="flat" cmpd="sng" algn="ctr">
+                      <a:solidFill>
+                        <a:srgbClr val="D9D9D9"/>
+                      </a:solidFill>
+                      <a:prstDash val="solid"/>
+                      <a:round/>
+                      <a:headEnd type="none" w="med" len="med"/>
+                      <a:tailEnd type="none" w="med" len="med"/>
+                    </a:lnL>
+                    <a:lnR w="9525" cap="flat" cmpd="sng" algn="ctr">
+                      <a:solidFill>
+                        <a:srgbClr val="D9D9D9"/>
+                      </a:solidFill>
+                      <a:prstDash val="solid"/>
+                      <a:round/>
+                      <a:headEnd type="none" w="med" len="med"/>
+                      <a:tailEnd type="none" w="med" len="med"/>
+                    </a:lnR>
+                    <a:lnT w="9525" cap="flat" cmpd="sng" algn="ctr">
+                      <a:solidFill>
+                        <a:srgbClr val="D9D9D9"/>
+                      </a:solidFill>
+                      <a:prstDash val="solid"/>
+                      <a:round/>
+                      <a:headEnd type="none" w="med" len="med"/>
+                      <a:tailEnd type="none" w="med" len="med"/>
+                    </a:lnT>
+                    <a:lnB w="9525" cap="flat" cmpd="sng" algn="ctr">
+                      <a:solidFill>
+                        <a:srgbClr val="D9D9D9"/>
+                      </a:solidFill>
+                      <a:prstDash val="solid"/>
+                      <a:round/>
+                      <a:headEnd type="none" w="med" len="med"/>
+                      <a:tailEnd type="none" w="med" len="med"/>
+                    </a:lnB>
+                    <a:solidFill>
+                      <a:srgbClr val="FFFFFF"/>
+                    </a:solidFill>
+                  </a:tcPr>
+                </a:tc>
+                <a:tc>
+                  <a:txBody>
+                    <a:bodyPr/>
+                    <a:lstStyle/>
+                    <a:p>
+                      <a:pPr algn="ctr" indent="0" marL="0">
+                        <a:buNone/>
+                      </a:pPr>
+                      <a:r>
+                        <a:rPr lang="en-US" sz="1300" dirty="0">
+                          <a:solidFill>
+                            <a:srgbClr val="3F3F3F"/>
+                          </a:solidFill>
+                          <a:latin typeface="Malgun Gothic" pitchFamily="34" charset="0"/>
+                          <a:ea typeface="Malgun Gothic" pitchFamily="34" charset="-122"/>
+                          <a:cs typeface="Malgun Gothic" pitchFamily="34" charset="-120"/>
+                        </a:rPr>
+                        <a:t>44%</a:t>
+                      </a:r>
+                      <a:endParaRPr lang="en-US" sz="1300" dirty="0">
+                        <a:latin typeface="Malgun Gothic" charset="0"/>
+                        <a:ea typeface="Malgun Gothic" charset="0"/>
+                        <a:cs typeface="Malgun Gothic" charset="0"/>
+                      </a:endParaRPr>
+                    </a:p>
+                  </a:txBody>
+                  <a:tcPr marL="91440" marR="91440" marT="45720" marB="45720" anchor="ctr">
+                    <a:lnL w="9525" cap="flat" cmpd="sng" algn="ctr">
+                      <a:solidFill>
+                        <a:srgbClr val="D9D9D9"/>
+                      </a:solidFill>
+                      <a:prstDash val="solid"/>
+                      <a:round/>
+                      <a:headEnd type="none" w="med" len="med"/>
+                      <a:tailEnd type="none" w="med" len="med"/>
+                    </a:lnL>
+                    <a:lnR w="9525" cap="flat" cmpd="sng" algn="ctr">
+                      <a:solidFill>
+                        <a:srgbClr val="D9D9D9"/>
+                      </a:solidFill>
+                      <a:prstDash val="solid"/>
+                      <a:round/>
+                      <a:headEnd type="none" w="med" len="med"/>
+                      <a:tailEnd type="none" w="med" len="med"/>
+                    </a:lnR>
+                    <a:lnT w="9525" cap="flat" cmpd="sng" algn="ctr">
+                      <a:solidFill>
+                        <a:srgbClr val="D9D9D9"/>
+                      </a:solidFill>
+                      <a:prstDash val="solid"/>
+                      <a:round/>
+                      <a:headEnd type="none" w="med" len="med"/>
+                      <a:tailEnd type="none" w="med" len="med"/>
+                    </a:lnT>
+                    <a:lnB w="9525" cap="flat" cmpd="sng" algn="ctr">
+                      <a:solidFill>
+                        <a:srgbClr val="D9D9D9"/>
+                      </a:solidFill>
+                      <a:prstDash val="solid"/>
+                      <a:round/>
+                      <a:headEnd type="none" w="med" len="med"/>
+                      <a:tailEnd type="none" w="med" len="med"/>
+                    </a:lnB>
+                    <a:solidFill>
+                      <a:srgbClr val="FFFFFF"/>
+                    </a:solidFill>
+                  </a:tcPr>
+                </a:tc>
+              </a:tr>
+              <a:tr h="457200">
+                <a:tc>
+                  <a:txBody>
+                    <a:bodyPr/>
+                    <a:lstStyle/>
+                    <a:p>
+                      <a:pPr algn="l" indent="0" marL="0">
+                        <a:buNone/>
+                      </a:pPr>
+                      <a:r>
+                        <a:rPr lang="en-US" sz="1300" dirty="0">
+                          <a:solidFill>
+                            <a:srgbClr val="3F3F3F"/>
+                          </a:solidFill>
+                          <a:latin typeface="Malgun Gothic" pitchFamily="34" charset="0"/>
+                          <a:ea typeface="Malgun Gothic" pitchFamily="34" charset="-122"/>
+                          <a:cs typeface="Malgun Gothic" pitchFamily="34" charset="-120"/>
+                        </a:rPr>
+                        <a:t>XN 시리즈 (Hematology)</a:t>
+                      </a:r>
+                      <a:endParaRPr lang="en-US" sz="1300" dirty="0">
+                        <a:latin typeface="Malgun Gothic" charset="0"/>
+                        <a:ea typeface="Malgun Gothic" charset="0"/>
+                        <a:cs typeface="Malgun Gothic" charset="0"/>
+                      </a:endParaRPr>
+                    </a:p>
+                  </a:txBody>
+                  <a:tcPr marL="91440" marR="91440" marT="45720" marB="45720" anchor="ctr">
+                    <a:lnL w="9525" cap="flat" cmpd="sng" algn="ctr">
+                      <a:solidFill>
+                        <a:srgbClr val="D9D9D9"/>
+                      </a:solidFill>
+                      <a:prstDash val="solid"/>
+                      <a:round/>
+                      <a:headEnd type="none" w="med" len="med"/>
+                      <a:tailEnd type="none" w="med" len="med"/>
+                    </a:lnL>
+                    <a:lnR w="9525" cap="flat" cmpd="sng" algn="ctr">
+                      <a:solidFill>
+                        <a:srgbClr val="D9D9D9"/>
+                      </a:solidFill>
+                      <a:prstDash val="solid"/>
+                      <a:round/>
+                      <a:headEnd type="none" w="med" len="med"/>
+                      <a:tailEnd type="none" w="med" len="med"/>
+                    </a:lnR>
+                    <a:lnT w="9525" cap="flat" cmpd="sng" algn="ctr">
+                      <a:solidFill>
+                        <a:srgbClr val="D9D9D9"/>
+                      </a:solidFill>
+                      <a:prstDash val="solid"/>
+                      <a:round/>
+                      <a:headEnd type="none" w="med" len="med"/>
+                      <a:tailEnd type="none" w="med" len="med"/>
+                    </a:lnT>
+                    <a:lnB w="9525" cap="flat" cmpd="sng" algn="ctr">
+                      <a:solidFill>
+                        <a:srgbClr val="D9D9D9"/>
+                      </a:solidFill>
+                      <a:prstDash val="solid"/>
+                      <a:round/>
+                      <a:headEnd type="none" w="med" len="med"/>
+                      <a:tailEnd type="none" w="med" len="med"/>
+                    </a:lnB>
+                    <a:solidFill>
+                      <a:srgbClr val="FFFFFF"/>
+                    </a:solidFill>
+                  </a:tcPr>
+                </a:tc>
+                <a:tc>
+                  <a:txBody>
+                    <a:bodyPr/>
+                    <a:lstStyle/>
+                    <a:p>
+                      <a:pPr algn="ctr" indent="0" marL="0">
+                        <a:buNone/>
+                      </a:pPr>
+                      <a:r>
+                        <a:rPr lang="en-US" sz="1300" dirty="0">
+                          <a:solidFill>
+                            <a:srgbClr val="3F3F3F"/>
+                          </a:solidFill>
+                          <a:latin typeface="Malgun Gothic" pitchFamily="34" charset="0"/>
+                          <a:ea typeface="Malgun Gothic" pitchFamily="34" charset="-122"/>
+                          <a:cs typeface="Malgun Gothic" pitchFamily="34" charset="-120"/>
+                        </a:rPr>
+                        <a:t>5</a:t>
+                      </a:r>
+                      <a:endParaRPr lang="en-US" sz="1300" dirty="0">
+                        <a:latin typeface="Malgun Gothic" charset="0"/>
+                        <a:ea typeface="Malgun Gothic" charset="0"/>
+                        <a:cs typeface="Malgun Gothic" charset="0"/>
+                      </a:endParaRPr>
+                    </a:p>
+                  </a:txBody>
+                  <a:tcPr marL="91440" marR="91440" marT="45720" marB="45720" anchor="ctr">
+                    <a:lnL w="9525" cap="flat" cmpd="sng" algn="ctr">
+                      <a:solidFill>
+                        <a:srgbClr val="D9D9D9"/>
+                      </a:solidFill>
+                      <a:prstDash val="solid"/>
+                      <a:round/>
+                      <a:headEnd type="none" w="med" len="med"/>
+                      <a:tailEnd type="none" w="med" len="med"/>
+                    </a:lnL>
+                    <a:lnR w="9525" cap="flat" cmpd="sng" algn="ctr">
+                      <a:solidFill>
+                        <a:srgbClr val="D9D9D9"/>
+                      </a:solidFill>
+                      <a:prstDash val="solid"/>
+                      <a:round/>
+                      <a:headEnd type="none" w="med" len="med"/>
+                      <a:tailEnd type="none" w="med" len="med"/>
+                    </a:lnR>
+                    <a:lnT w="9525" cap="flat" cmpd="sng" algn="ctr">
+                      <a:solidFill>
+                        <a:srgbClr val="D9D9D9"/>
+                      </a:solidFill>
+                      <a:prstDash val="solid"/>
+                      <a:round/>
+                      <a:headEnd type="none" w="med" len="med"/>
+                      <a:tailEnd type="none" w="med" len="med"/>
+                    </a:lnT>
+                    <a:lnB w="9525" cap="flat" cmpd="sng" algn="ctr">
+                      <a:solidFill>
+                        <a:srgbClr val="D9D9D9"/>
+                      </a:solidFill>
+                      <a:prstDash val="solid"/>
+                      <a:round/>
+                      <a:headEnd type="none" w="med" len="med"/>
+                      <a:tailEnd type="none" w="med" len="med"/>
+                    </a:lnB>
+                    <a:solidFill>
+                      <a:srgbClr val="FFFFFF"/>
+                    </a:solidFill>
+                  </a:tcPr>
+                </a:tc>
+                <a:tc>
+                  <a:txBody>
+                    <a:bodyPr/>
+                    <a:lstStyle/>
+                    <a:p>
+                      <a:pPr algn="ctr" indent="0" marL="0">
+                        <a:buNone/>
+                      </a:pPr>
+                      <a:r>
+                        <a:rPr lang="en-US" sz="1300" dirty="0">
+                          <a:solidFill>
+                            <a:srgbClr val="3F3F3F"/>
+                          </a:solidFill>
+                          <a:latin typeface="Malgun Gothic" pitchFamily="34" charset="0"/>
+                          <a:ea typeface="Malgun Gothic" pitchFamily="34" charset="-122"/>
+                          <a:cs typeface="Malgun Gothic" pitchFamily="34" charset="-120"/>
+                        </a:rPr>
+                        <a:t>31%</a:t>
+                      </a:r>
+                      <a:endParaRPr lang="en-US" sz="1300" dirty="0">
+                        <a:latin typeface="Malgun Gothic" charset="0"/>
+                        <a:ea typeface="Malgun Gothic" charset="0"/>
+                        <a:cs typeface="Malgun Gothic" charset="0"/>
+                      </a:endParaRPr>
+                    </a:p>
+                  </a:txBody>
+                  <a:tcPr marL="91440" marR="91440" marT="45720" marB="45720" anchor="ctr">
+                    <a:lnL w="9525" cap="flat" cmpd="sng" algn="ctr">
+                      <a:solidFill>
+                        <a:srgbClr val="D9D9D9"/>
+                      </a:solidFill>
+                      <a:prstDash val="solid"/>
+                      <a:round/>
+                      <a:headEnd type="none" w="med" len="med"/>
+                      <a:tailEnd type="none" w="med" len="med"/>
+                    </a:lnL>
+                    <a:lnR w="9525" cap="flat" cmpd="sng" algn="ctr">
+                      <a:solidFill>
+                        <a:srgbClr val="D9D9D9"/>
+                      </a:solidFill>
+                      <a:prstDash val="solid"/>
+                      <a:round/>
+                      <a:headEnd type="none" w="med" len="med"/>
+                      <a:tailEnd type="none" w="med" len="med"/>
+                    </a:lnR>
+                    <a:lnT w="9525" cap="flat" cmpd="sng" algn="ctr">
+                      <a:solidFill>
+                        <a:srgbClr val="D9D9D9"/>
+                      </a:solidFill>
+                      <a:prstDash val="solid"/>
+                      <a:round/>
+                      <a:headEnd type="none" w="med" len="med"/>
+                      <a:tailEnd type="none" w="med" len="med"/>
+                    </a:lnT>
+                    <a:lnB w="9525" cap="flat" cmpd="sng" algn="ctr">
+                      <a:solidFill>
+                        <a:srgbClr val="D9D9D9"/>
+                      </a:solidFill>
+                      <a:prstDash val="solid"/>
+                      <a:round/>
+                      <a:headEnd type="none" w="med" len="med"/>
+                      <a:tailEnd type="none" w="med" len="med"/>
+                    </a:lnB>
+                    <a:solidFill>
+                      <a:srgbClr val="FFFFFF"/>
+                    </a:solidFill>
+                  </a:tcPr>
+                </a:tc>
+              </a:tr>
+              <a:tr h="457200">
+                <a:tc>
+                  <a:txBody>
+                    <a:bodyPr/>
+                    <a:lstStyle/>
+                    <a:p>
+                      <a:pPr algn="l" indent="0" marL="0">
+                        <a:buNone/>
+                      </a:pPr>
+                      <a:r>
+                        <a:rPr lang="en-US" sz="1300" dirty="0">
+                          <a:solidFill>
+                            <a:srgbClr val="3F3F3F"/>
+                          </a:solidFill>
+                          <a:latin typeface="Malgun Gothic" pitchFamily="34" charset="0"/>
+                          <a:ea typeface="Malgun Gothic" pitchFamily="34" charset="-122"/>
+                          <a:cs typeface="Malgun Gothic" pitchFamily="34" charset="-120"/>
+                        </a:rPr>
+                        <a:t>CA 시리즈 (Coagulation)</a:t>
+                      </a:r>
+                      <a:endParaRPr lang="en-US" sz="1300" dirty="0">
+                        <a:latin typeface="Malgun Gothic" charset="0"/>
+                        <a:ea typeface="Malgun Gothic" charset="0"/>
+                        <a:cs typeface="Malgun Gothic" charset="0"/>
+                      </a:endParaRPr>
+                    </a:p>
+                  </a:txBody>
+                  <a:tcPr marL="91440" marR="91440" marT="45720" marB="45720" anchor="ctr">
+                    <a:lnL w="9525" cap="flat" cmpd="sng" algn="ctr">
+                      <a:solidFill>
+                        <a:srgbClr val="D9D9D9"/>
+                      </a:solidFill>
+                      <a:prstDash val="solid"/>
+                      <a:round/>
+                      <a:headEnd type="none" w="med" len="med"/>
+                      <a:tailEnd type="none" w="med" len="med"/>
+                    </a:lnL>
+                    <a:lnR w="9525" cap="flat" cmpd="sng" algn="ctr">
+                      <a:solidFill>
+                        <a:srgbClr val="D9D9D9"/>
+                      </a:solidFill>
+                      <a:prstDash val="solid"/>
+                      <a:round/>
+                      <a:headEnd type="none" w="med" len="med"/>
+                      <a:tailEnd type="none" w="med" len="med"/>
+                    </a:lnR>
+                    <a:lnT w="9525" cap="flat" cmpd="sng" algn="ctr">
+                      <a:solidFill>
+                        <a:srgbClr val="D9D9D9"/>
+                      </a:solidFill>
+                      <a:prstDash val="solid"/>
+                      <a:round/>
+                      <a:headEnd type="none" w="med" len="med"/>
+                      <a:tailEnd type="none" w="med" len="med"/>
+                    </a:lnT>
+                    <a:lnB w="9525" cap="flat" cmpd="sng" algn="ctr">
+                      <a:solidFill>
+                        <a:srgbClr val="D9D9D9"/>
+                      </a:solidFill>
+                      <a:prstDash val="solid"/>
+                      <a:round/>
+                      <a:headEnd type="none" w="med" len="med"/>
+                      <a:tailEnd type="none" w="med" len="med"/>
+                    </a:lnB>
+                    <a:solidFill>
+                      <a:srgbClr val="FFFFFF"/>
+                    </a:solidFill>
+                  </a:tcPr>
+                </a:tc>
+                <a:tc>
+                  <a:txBody>
+                    <a:bodyPr/>
+                    <a:lstStyle/>
+                    <a:p>
+                      <a:pPr algn="ctr" indent="0" marL="0">
+                        <a:buNone/>
+                      </a:pPr>
+                      <a:r>
+                        <a:rPr lang="en-US" sz="1300" dirty="0">
+                          <a:solidFill>
+                            <a:srgbClr val="3F3F3F"/>
+                          </a:solidFill>
+                          <a:latin typeface="Malgun Gothic" pitchFamily="34" charset="0"/>
+                          <a:ea typeface="Malgun Gothic" pitchFamily="34" charset="-122"/>
+                          <a:cs typeface="Malgun Gothic" pitchFamily="34" charset="-120"/>
+                        </a:rPr>
+                        <a:t>2</a:t>
+                      </a:r>
+                      <a:endParaRPr lang="en-US" sz="1300" dirty="0">
+                        <a:latin typeface="Malgun Gothic" charset="0"/>
+                        <a:ea typeface="Malgun Gothic" charset="0"/>
+                        <a:cs typeface="Malgun Gothic" charset="0"/>
+                      </a:endParaRPr>
+                    </a:p>
+                  </a:txBody>
+                  <a:tcPr marL="91440" marR="91440" marT="45720" marB="45720" anchor="ctr">
+                    <a:lnL w="9525" cap="flat" cmpd="sng" algn="ctr">
+                      <a:solidFill>
+                        <a:srgbClr val="D9D9D9"/>
+                      </a:solidFill>
+                      <a:prstDash val="solid"/>
+                      <a:round/>
+                      <a:headEnd type="none" w="med" len="med"/>
+                      <a:tailEnd type="none" w="med" len="med"/>
+                    </a:lnL>
+                    <a:lnR w="9525" cap="flat" cmpd="sng" algn="ctr">
+                      <a:solidFill>
+                        <a:srgbClr val="D9D9D9"/>
+                      </a:solidFill>
+                      <a:prstDash val="solid"/>
+                      <a:round/>
+                      <a:headEnd type="none" w="med" len="med"/>
+                      <a:tailEnd type="none" w="med" len="med"/>
+                    </a:lnR>
+                    <a:lnT w="9525" cap="flat" cmpd="sng" algn="ctr">
+                      <a:solidFill>
+                        <a:srgbClr val="D9D9D9"/>
+                      </a:solidFill>
+                      <a:prstDash val="solid"/>
+                      <a:round/>
+                      <a:headEnd type="none" w="med" len="med"/>
+                      <a:tailEnd type="none" w="med" len="med"/>
+                    </a:lnT>
+                    <a:lnB w="9525" cap="flat" cmpd="sng" algn="ctr">
+                      <a:solidFill>
+                        <a:srgbClr val="D9D9D9"/>
+                      </a:solidFill>
+                      <a:prstDash val="solid"/>
+                      <a:round/>
+                      <a:headEnd type="none" w="med" len="med"/>
+                      <a:tailEnd type="none" w="med" len="med"/>
+                    </a:lnB>
+                    <a:solidFill>
+                      <a:srgbClr val="FFFFFF"/>
+                    </a:solidFill>
+                  </a:tcPr>
+                </a:tc>
+                <a:tc>
+                  <a:txBody>
+                    <a:bodyPr/>
+                    <a:lstStyle/>
+                    <a:p>
+                      <a:pPr algn="ctr" indent="0" marL="0">
+                        <a:buNone/>
+                      </a:pPr>
+                      <a:r>
+                        <a:rPr lang="en-US" sz="1300" dirty="0">
+                          <a:solidFill>
+                            <a:srgbClr val="3F3F3F"/>
+                          </a:solidFill>
+                          <a:latin typeface="Malgun Gothic" pitchFamily="34" charset="0"/>
+                          <a:ea typeface="Malgun Gothic" pitchFamily="34" charset="-122"/>
+                          <a:cs typeface="Malgun Gothic" pitchFamily="34" charset="-120"/>
+                        </a:rPr>
+                        <a:t>13%</a:t>
+                      </a:r>
+                      <a:endParaRPr lang="en-US" sz="1300" dirty="0">
+                        <a:latin typeface="Malgun Gothic" charset="0"/>
+                        <a:ea typeface="Malgun Gothic" charset="0"/>
+                        <a:cs typeface="Malgun Gothic" charset="0"/>
+                      </a:endParaRPr>
+                    </a:p>
+                  </a:txBody>
+                  <a:tcPr marL="91440" marR="91440" marT="45720" marB="45720" anchor="ctr">
+                    <a:lnL w="9525" cap="flat" cmpd="sng" algn="ctr">
+                      <a:solidFill>
+                        <a:srgbClr val="D9D9D9"/>
+                      </a:solidFill>
+                      <a:prstDash val="solid"/>
+                      <a:round/>
+                      <a:headEnd type="none" w="med" len="med"/>
+                      <a:tailEnd type="none" w="med" len="med"/>
+                    </a:lnL>
+                    <a:lnR w="9525" cap="flat" cmpd="sng" algn="ctr">
+                      <a:solidFill>
+                        <a:srgbClr val="D9D9D9"/>
+                      </a:solidFill>
+                      <a:prstDash val="solid"/>
+                      <a:round/>
+                      <a:headEnd type="none" w="med" len="med"/>
+                      <a:tailEnd type="none" w="med" len="med"/>
+                    </a:lnR>
+                    <a:lnT w="9525" cap="flat" cmpd="sng" algn="ctr">
+                      <a:solidFill>
+                        <a:srgbClr val="D9D9D9"/>
+                      </a:solidFill>
+                      <a:prstDash val="solid"/>
+                      <a:round/>
+                      <a:headEnd type="none" w="med" len="med"/>
+                      <a:tailEnd type="none" w="med" len="med"/>
+                    </a:lnT>
+                    <a:lnB w="9525" cap="flat" cmpd="sng" algn="ctr">
+                      <a:solidFill>
+                        <a:srgbClr val="D9D9D9"/>
+                      </a:solidFill>
+                      <a:prstDash val="solid"/>
+                      <a:round/>
+                      <a:headEnd type="none" w="med" len="med"/>
+                      <a:tailEnd type="none" w="med" len="med"/>
+                    </a:lnB>
+                    <a:solidFill>
+                      <a:srgbClr val="FFFFFF"/>
+                    </a:solidFill>
+                  </a:tcPr>
+                </a:tc>
+              </a:tr>
+              <a:tr h="457200">
+                <a:tc>
+                  <a:txBody>
+                    <a:bodyPr/>
+                    <a:lstStyle/>
+                    <a:p>
+                      <a:pPr algn="l" indent="0" marL="0">
+                        <a:buNone/>
+                      </a:pPr>
+                      <a:r>
+                        <a:rPr lang="en-US" sz="1300" dirty="0">
+                          <a:solidFill>
+                            <a:srgbClr val="3F3F3F"/>
+                          </a:solidFill>
+                          <a:latin typeface="Malgun Gothic" pitchFamily="34" charset="0"/>
+                          <a:ea typeface="Malgun Gothic" pitchFamily="34" charset="-122"/>
+                          <a:cs typeface="Malgun Gothic" pitchFamily="34" charset="-120"/>
+                        </a:rPr>
+                        <a:t>UN/UC 시리즈 (Urine)</a:t>
+                      </a:r>
+                      <a:endParaRPr lang="en-US" sz="1300" dirty="0">
+                        <a:latin typeface="Malgun Gothic" charset="0"/>
+                        <a:ea typeface="Malgun Gothic" charset="0"/>
+                        <a:cs typeface="Malgun Gothic" charset="0"/>
+                      </a:endParaRPr>
+                    </a:p>
+                  </a:txBody>
+                  <a:tcPr marL="91440" marR="91440" marT="45720" marB="45720" anchor="ctr">
+                    <a:lnL w="9525" cap="flat" cmpd="sng" algn="ctr">
+                      <a:solidFill>
+                        <a:srgbClr val="D9D9D9"/>
+                      </a:solidFill>
+                      <a:prstDash val="solid"/>
+                      <a:round/>
+                      <a:headEnd type="none" w="med" len="med"/>
+                      <a:tailEnd type="none" w="med" len="med"/>
+                    </a:lnL>
+                    <a:lnR w="9525" cap="flat" cmpd="sng" algn="ctr">
+                      <a:solidFill>
+                        <a:srgbClr val="D9D9D9"/>
+                      </a:solidFill>
+                      <a:prstDash val="solid"/>
+                      <a:round/>
+                      <a:headEnd type="none" w="med" len="med"/>
+                      <a:tailEnd type="none" w="med" len="med"/>
+                    </a:lnR>
+                    <a:lnT w="9525" cap="flat" cmpd="sng" algn="ctr">
+                      <a:solidFill>
+                        <a:srgbClr val="D9D9D9"/>
+                      </a:solidFill>
+                      <a:prstDash val="solid"/>
+                      <a:round/>
+                      <a:headEnd type="none" w="med" len="med"/>
+                      <a:tailEnd type="none" w="med" len="med"/>
+                    </a:lnT>
+                    <a:lnB w="9525" cap="flat" cmpd="sng" algn="ctr">
+                      <a:solidFill>
+                        <a:srgbClr val="D9D9D9"/>
+                      </a:solidFill>
+                      <a:prstDash val="solid"/>
+                      <a:round/>
+                      <a:headEnd type="none" w="med" len="med"/>
+                      <a:tailEnd type="none" w="med" len="med"/>
+                    </a:lnB>
+                    <a:solidFill>
+                      <a:srgbClr val="FFFFFF"/>
+                    </a:solidFill>
+                  </a:tcPr>
+                </a:tc>
+                <a:tc>
+                  <a:txBody>
+                    <a:bodyPr/>
+                    <a:lstStyle/>
+                    <a:p>
+                      <a:pPr algn="ctr" indent="0" marL="0">
+                        <a:buNone/>
+                      </a:pPr>
+                      <a:r>
+                        <a:rPr lang="en-US" sz="1300" dirty="0">
+                          <a:solidFill>
+                            <a:srgbClr val="3F3F3F"/>
+                          </a:solidFill>
+                          <a:latin typeface="Malgun Gothic" pitchFamily="34" charset="0"/>
+                          <a:ea typeface="Malgun Gothic" pitchFamily="34" charset="-122"/>
+                          <a:cs typeface="Malgun Gothic" pitchFamily="34" charset="-120"/>
+                        </a:rPr>
+                        <a:t>1</a:t>
+                      </a:r>
+                      <a:endParaRPr lang="en-US" sz="1300" dirty="0">
+                        <a:latin typeface="Malgun Gothic" charset="0"/>
+                        <a:ea typeface="Malgun Gothic" charset="0"/>
+                        <a:cs typeface="Malgun Gothic" charset="0"/>
+                      </a:endParaRPr>
+                    </a:p>
+                  </a:txBody>
+                  <a:tcPr marL="91440" marR="91440" marT="45720" marB="45720" anchor="ctr">
+                    <a:lnL w="9525" cap="flat" cmpd="sng" algn="ctr">
+                      <a:solidFill>
+                        <a:srgbClr val="D9D9D9"/>
+                      </a:solidFill>
+                      <a:prstDash val="solid"/>
+                      <a:round/>
+                      <a:headEnd type="none" w="med" len="med"/>
+                      <a:tailEnd type="none" w="med" len="med"/>
+                    </a:lnL>
+                    <a:lnR w="9525" cap="flat" cmpd="sng" algn="ctr">
+                      <a:solidFill>
+                        <a:srgbClr val="D9D9D9"/>
+                      </a:solidFill>
+                      <a:prstDash val="solid"/>
+                      <a:round/>
+                      <a:headEnd type="none" w="med" len="med"/>
+                      <a:tailEnd type="none" w="med" len="med"/>
+                    </a:lnR>
+                    <a:lnT w="9525" cap="flat" cmpd="sng" algn="ctr">
+                      <a:solidFill>
+                        <a:srgbClr val="D9D9D9"/>
+                      </a:solidFill>
+                      <a:prstDash val="solid"/>
+                      <a:round/>
+                      <a:headEnd type="none" w="med" len="med"/>
+                      <a:tailEnd type="none" w="med" len="med"/>
+                    </a:lnT>
+                    <a:lnB w="9525" cap="flat" cmpd="sng" algn="ctr">
+                      <a:solidFill>
+                        <a:srgbClr val="D9D9D9"/>
+                      </a:solidFill>
+                      <a:prstDash val="solid"/>
+                      <a:round/>
+                      <a:headEnd type="none" w="med" len="med"/>
+                      <a:tailEnd type="none" w="med" len="med"/>
+                    </a:lnB>
+                    <a:solidFill>
+                      <a:srgbClr val="FFFFFF"/>
+                    </a:solidFill>
+                  </a:tcPr>
+                </a:tc>
+                <a:tc>
+                  <a:txBody>
+                    <a:bodyPr/>
+                    <a:lstStyle/>
+                    <a:p>
+                      <a:pPr algn="ctr" indent="0" marL="0">
+                        <a:buNone/>
+                      </a:pPr>
+                      <a:r>
+                        <a:rPr lang="en-US" sz="1300" dirty="0">
+                          <a:solidFill>
+                            <a:srgbClr val="3F3F3F"/>
+                          </a:solidFill>
+                          <a:latin typeface="Malgun Gothic" pitchFamily="34" charset="0"/>
+                          <a:ea typeface="Malgun Gothic" pitchFamily="34" charset="-122"/>
+                          <a:cs typeface="Malgun Gothic" pitchFamily="34" charset="-120"/>
+                        </a:rPr>
+                        <a:t>6%</a:t>
+                      </a:r>
+                      <a:endParaRPr lang="en-US" sz="1300" dirty="0">
+                        <a:latin typeface="Malgun Gothic" charset="0"/>
+                        <a:ea typeface="Malgun Gothic" charset="0"/>
+                        <a:cs typeface="Malgun Gothic" charset="0"/>
+                      </a:endParaRPr>
+                    </a:p>
+                  </a:txBody>
+                  <a:tcPr marL="91440" marR="91440" marT="45720" marB="45720" anchor="ctr">
+                    <a:lnL w="9525" cap="flat" cmpd="sng" algn="ctr">
+                      <a:solidFill>
+                        <a:srgbClr val="D9D9D9"/>
+                      </a:solidFill>
+                      <a:prstDash val="solid"/>
+                      <a:round/>
+                      <a:headEnd type="none" w="med" len="med"/>
+                      <a:tailEnd type="none" w="med" len="med"/>
+                    </a:lnL>
+                    <a:lnR w="9525" cap="flat" cmpd="sng" algn="ctr">
+                      <a:solidFill>
+                        <a:srgbClr val="D9D9D9"/>
+                      </a:solidFill>
+                      <a:prstDash val="solid"/>
+                      <a:round/>
+                      <a:headEnd type="none" w="med" len="med"/>
+                      <a:tailEnd type="none" w="med" len="med"/>
+                    </a:lnR>
+                    <a:lnT w="9525" cap="flat" cmpd="sng" algn="ctr">
+                      <a:solidFill>
+                        <a:srgbClr val="D9D9D9"/>
+                      </a:solidFill>
+                      <a:prstDash val="solid"/>
+                      <a:round/>
+                      <a:headEnd type="none" w="med" len="med"/>
+                      <a:tailEnd type="none" w="med" len="med"/>
+                    </a:lnT>
+                    <a:lnB w="9525" cap="flat" cmpd="sng" algn="ctr">
+                      <a:solidFill>
+                        <a:srgbClr val="D9D9D9"/>
+                      </a:solidFill>
+                      <a:prstDash val="solid"/>
+                      <a:round/>
+                      <a:headEnd type="none" w="med" len="med"/>
+                      <a:tailEnd type="none" w="med" len="med"/>
+                    </a:lnB>
+                    <a:solidFill>
+                      <a:srgbClr val="FFFFFF"/>
+                    </a:solidFill>
+                  </a:tcPr>
+                </a:tc>
+              </a:tr>
+              <a:tr h="457200">
+                <a:tc>
+                  <a:txBody>
+                    <a:bodyPr/>
+                    <a:lstStyle/>
+                    <a:p>
+                      <a:pPr algn="l" indent="0" marL="0">
+                        <a:buNone/>
+                      </a:pPr>
+                      <a:r>
+                        <a:rPr lang="en-US" sz="1300" dirty="0">
+                          <a:solidFill>
+                            <a:srgbClr val="3F3F3F"/>
+                          </a:solidFill>
+                          <a:latin typeface="Malgun Gothic" pitchFamily="34" charset="0"/>
+                          <a:ea typeface="Malgun Gothic" pitchFamily="34" charset="-122"/>
+                          <a:cs typeface="Malgun Gothic" pitchFamily="34" charset="-120"/>
+                        </a:rPr>
+                        <a:t>SP/DI 시리즈 (도말표본)</a:t>
+                      </a:r>
+                      <a:endParaRPr lang="en-US" sz="1300" dirty="0">
+                        <a:latin typeface="Malgun Gothic" charset="0"/>
+                        <a:ea typeface="Malgun Gothic" charset="0"/>
+                        <a:cs typeface="Malgun Gothic" charset="0"/>
+                      </a:endParaRPr>
+                    </a:p>
+                  </a:txBody>
+                  <a:tcPr marL="91440" marR="91440" marT="45720" marB="45720" anchor="ctr">
+                    <a:lnL w="9525" cap="flat" cmpd="sng" algn="ctr">
+                      <a:solidFill>
+                        <a:srgbClr val="D9D9D9"/>
+                      </a:solidFill>
+                      <a:prstDash val="solid"/>
+                      <a:round/>
+                      <a:headEnd type="none" w="med" len="med"/>
+                      <a:tailEnd type="none" w="med" len="med"/>
+                    </a:lnL>
+                    <a:lnR w="9525" cap="flat" cmpd="sng" algn="ctr">
+                      <a:solidFill>
+                        <a:srgbClr val="D9D9D9"/>
+                      </a:solidFill>
+                      <a:prstDash val="solid"/>
+                      <a:round/>
+                      <a:headEnd type="none" w="med" len="med"/>
+                      <a:tailEnd type="none" w="med" len="med"/>
+                    </a:lnR>
+                    <a:lnT w="9525" cap="flat" cmpd="sng" algn="ctr">
+                      <a:solidFill>
+                        <a:srgbClr val="D9D9D9"/>
+                      </a:solidFill>
+                      <a:prstDash val="solid"/>
+                      <a:round/>
+                      <a:headEnd type="none" w="med" len="med"/>
+                      <a:tailEnd type="none" w="med" len="med"/>
+                    </a:lnT>
+                    <a:lnB w="9525" cap="flat" cmpd="sng" algn="ctr">
+                      <a:solidFill>
+                        <a:srgbClr val="D9D9D9"/>
+                      </a:solidFill>
+                      <a:prstDash val="solid"/>
+                      <a:round/>
+                      <a:headEnd type="none" w="med" len="med"/>
+                      <a:tailEnd type="none" w="med" len="med"/>
+                    </a:lnB>
+                    <a:solidFill>
+                      <a:srgbClr val="FFFFFF"/>
+                    </a:solidFill>
+                  </a:tcPr>
+                </a:tc>
+                <a:tc>
+                  <a:txBody>
+                    <a:bodyPr/>
+                    <a:lstStyle/>
+                    <a:p>
+                      <a:pPr algn="ctr" indent="0" marL="0">
+                        <a:buNone/>
+                      </a:pPr>
+                      <a:r>
+                        <a:rPr lang="en-US" sz="1300" dirty="0">
+                          <a:solidFill>
+                            <a:srgbClr val="3F3F3F"/>
+                          </a:solidFill>
+                          <a:latin typeface="Malgun Gothic" pitchFamily="34" charset="0"/>
+                          <a:ea typeface="Malgun Gothic" pitchFamily="34" charset="-122"/>
+                          <a:cs typeface="Malgun Gothic" pitchFamily="34" charset="-120"/>
+                        </a:rPr>
+                        <a:t>1</a:t>
+                      </a:r>
+                      <a:endParaRPr lang="en-US" sz="1300" dirty="0">
+                        <a:latin typeface="Malgun Gothic" charset="0"/>
+                        <a:ea typeface="Malgun Gothic" charset="0"/>
+                        <a:cs typeface="Malgun Gothic" charset="0"/>
+                      </a:endParaRPr>
+                    </a:p>
+                  </a:txBody>
+                  <a:tcPr marL="91440" marR="91440" marT="45720" marB="45720" anchor="ctr">
+                    <a:lnL w="9525" cap="flat" cmpd="sng" algn="ctr">
+                      <a:solidFill>
+                        <a:srgbClr val="D9D9D9"/>
+                      </a:solidFill>
+                      <a:prstDash val="solid"/>
+                      <a:round/>
+                      <a:headEnd type="none" w="med" len="med"/>
+                      <a:tailEnd type="none" w="med" len="med"/>
+                    </a:lnL>
+                    <a:lnR w="9525" cap="flat" cmpd="sng" algn="ctr">
+                      <a:solidFill>
+                        <a:srgbClr val="D9D9D9"/>
+                      </a:solidFill>
+                      <a:prstDash val="solid"/>
+                      <a:round/>
+                      <a:headEnd type="none" w="med" len="med"/>
+                      <a:tailEnd type="none" w="med" len="med"/>
+                    </a:lnR>
+                    <a:lnT w="9525" cap="flat" cmpd="sng" algn="ctr">
+                      <a:solidFill>
+                        <a:srgbClr val="D9D9D9"/>
+                      </a:solidFill>
+                      <a:prstDash val="solid"/>
+                      <a:round/>
+                      <a:headEnd type="none" w="med" len="med"/>
+                      <a:tailEnd type="none" w="med" len="med"/>
+                    </a:lnT>
+                    <a:lnB w="9525" cap="flat" cmpd="sng" algn="ctr">
+                      <a:solidFill>
+                        <a:srgbClr val="D9D9D9"/>
+                      </a:solidFill>
+                      <a:prstDash val="solid"/>
+                      <a:round/>
+                      <a:headEnd type="none" w="med" len="med"/>
+                      <a:tailEnd type="none" w="med" len="med"/>
+                    </a:lnB>
+                    <a:solidFill>
+                      <a:srgbClr val="FFFFFF"/>
+                    </a:solidFill>
+                  </a:tcPr>
+                </a:tc>
+                <a:tc>
+                  <a:txBody>
+                    <a:bodyPr/>
+                    <a:lstStyle/>
+                    <a:p>
+                      <a:pPr algn="ctr" indent="0" marL="0">
+                        <a:buNone/>
+                      </a:pPr>
+                      <a:r>
+                        <a:rPr lang="en-US" sz="1300" dirty="0">
+                          <a:solidFill>
+                            <a:srgbClr val="3F3F3F"/>
+                          </a:solidFill>
+                          <a:latin typeface="Malgun Gothic" pitchFamily="34" charset="0"/>
+                          <a:ea typeface="Malgun Gothic" pitchFamily="34" charset="-122"/>
+                          <a:cs typeface="Malgun Gothic" pitchFamily="34" charset="-120"/>
+                        </a:rPr>
+                        <a:t>6%</a:t>
+                      </a:r>
+                      <a:endParaRPr lang="en-US" sz="1300" dirty="0">
+                        <a:latin typeface="Malgun Gothic" charset="0"/>
+                        <a:ea typeface="Malgun Gothic" charset="0"/>
+                        <a:cs typeface="Malgun Gothic" charset="0"/>
+                      </a:endParaRPr>
+                    </a:p>
+                  </a:txBody>
+                  <a:tcPr marL="91440" marR="91440" marT="45720" marB="45720" anchor="ctr">
+                    <a:lnL w="9525" cap="flat" cmpd="sng" algn="ctr">
+                      <a:solidFill>
+                        <a:srgbClr val="D9D9D9"/>
+                      </a:solidFill>
+                      <a:prstDash val="solid"/>
+                      <a:round/>
+                      <a:headEnd type="none" w="med" len="med"/>
+                      <a:tailEnd type="none" w="med" len="med"/>
+                    </a:lnL>
+                    <a:lnR w="9525" cap="flat" cmpd="sng" algn="ctr">
+                      <a:solidFill>
+                        <a:srgbClr val="D9D9D9"/>
+                      </a:solidFill>
+                      <a:prstDash val="solid"/>
+                      <a:round/>
+                      <a:headEnd type="none" w="med" len="med"/>
+                      <a:tailEnd type="none" w="med" len="med"/>
+                    </a:lnR>
+                    <a:lnT w="9525" cap="flat" cmpd="sng" algn="ctr">
+                      <a:solidFill>
+                        <a:srgbClr val="D9D9D9"/>
+                      </a:solidFill>
+                      <a:prstDash val="solid"/>
+                      <a:round/>
+                      <a:headEnd type="none" w="med" len="med"/>
+                      <a:tailEnd type="none" w="med" len="med"/>
+                    </a:lnT>
+                    <a:lnB w="9525" cap="flat" cmpd="sng" algn="ctr">
+                      <a:solidFill>
+                        <a:srgbClr val="D9D9D9"/>
+                      </a:solidFill>
+                      <a:prstDash val="solid"/>
+                      <a:round/>
+                      <a:headEnd type="none" w="med" len="med"/>
+                      <a:tailEnd type="none" w="med" len="med"/>
+                    </a:lnB>
+                    <a:solidFill>
+                      <a:srgbClr val="FFFFFF"/>
+                    </a:solidFill>
+                  </a:tcPr>
+                </a:tc>
+              </a:tr>
+              <a:tr h="457200">
+                <a:tc>
+                  <a:txBody>
+                    <a:bodyPr/>
+                    <a:lstStyle/>
+                    <a:p>
+                      <a:pPr algn="l" indent="0" marL="0">
+                        <a:buNone/>
+                      </a:pPr>
+                      <a:r>
+                        <a:rPr lang="en-US" sz="1300" b="1" dirty="0">
+                          <a:solidFill>
+                            <a:srgbClr val="3F3F3F"/>
+                          </a:solidFill>
+                          <a:latin typeface="Malgun Gothic" pitchFamily="34" charset="0"/>
+                          <a:ea typeface="Malgun Gothic" pitchFamily="34" charset="-122"/>
+                          <a:cs typeface="Malgun Gothic" pitchFamily="34" charset="-120"/>
+                        </a:rPr>
+                        <a:t>합계</a:t>
+                      </a:r>
+                      <a:endParaRPr lang="en-US" sz="1300" dirty="0">
+                        <a:latin typeface="Malgun Gothic" charset="0"/>
+                        <a:ea typeface="Malgun Gothic" charset="0"/>
+                        <a:cs typeface="Malgun Gothic" charset="0"/>
+                      </a:endParaRPr>
+                    </a:p>
+                  </a:txBody>
+                  <a:tcPr marL="91440" marR="91440" marT="45720" marB="45720" anchor="ctr">
+                    <a:lnL w="9525" cap="flat" cmpd="sng" algn="ctr">
+                      <a:solidFill>
+                        <a:srgbClr val="D9D9D9"/>
+                      </a:solidFill>
+                      <a:prstDash val="solid"/>
+                      <a:round/>
+                      <a:headEnd type="none" w="med" len="med"/>
+                      <a:tailEnd type="none" w="med" len="med"/>
+                    </a:lnL>
+                    <a:lnR w="9525" cap="flat" cmpd="sng" algn="ctr">
+                      <a:solidFill>
+                        <a:srgbClr val="D9D9D9"/>
+                      </a:solidFill>
+                      <a:prstDash val="solid"/>
+                      <a:round/>
+                      <a:headEnd type="none" w="med" len="med"/>
+                      <a:tailEnd type="none" w="med" len="med"/>
+                    </a:lnR>
+                    <a:lnT w="9525" cap="flat" cmpd="sng" algn="ctr">
+                      <a:solidFill>
+                        <a:srgbClr val="D9D9D9"/>
+                      </a:solidFill>
+                      <a:prstDash val="solid"/>
+                      <a:round/>
+                      <a:headEnd type="none" w="med" len="med"/>
+                      <a:tailEnd type="none" w="med" len="med"/>
+                    </a:lnT>
+                    <a:lnB w="9525" cap="flat" cmpd="sng" algn="ctr">
+                      <a:solidFill>
+                        <a:srgbClr val="D9D9D9"/>
+                      </a:solidFill>
+                      <a:prstDash val="solid"/>
+                      <a:round/>
+                      <a:headEnd type="none" w="med" len="med"/>
+                      <a:tailEnd type="none" w="med" len="med"/>
+                    </a:lnB>
+                    <a:solidFill>
+                      <a:srgbClr val="EAF1F8"/>
+                    </a:solidFill>
+                  </a:tcPr>
+                </a:tc>
+                <a:tc>
+                  <a:txBody>
+                    <a:bodyPr/>
+                    <a:lstStyle/>
+                    <a:p>
+                      <a:pPr algn="ctr" indent="0" marL="0">
+                        <a:buNone/>
+                      </a:pPr>
+                      <a:r>
+                        <a:rPr lang="en-US" sz="1300" b="1" dirty="0">
+                          <a:solidFill>
+                            <a:srgbClr val="3F3F3F"/>
+                          </a:solidFill>
+                          <a:latin typeface="Malgun Gothic" pitchFamily="34" charset="0"/>
+                          <a:ea typeface="Malgun Gothic" pitchFamily="34" charset="-122"/>
+                          <a:cs typeface="Malgun Gothic" pitchFamily="34" charset="-120"/>
+                        </a:rPr>
+                        <a:t>16</a:t>
+                      </a:r>
+                      <a:endParaRPr lang="en-US" sz="1300" dirty="0">
+                        <a:latin typeface="Malgun Gothic" charset="0"/>
+                        <a:ea typeface="Malgun Gothic" charset="0"/>
+                        <a:cs typeface="Malgun Gothic" charset="0"/>
+                      </a:endParaRPr>
+                    </a:p>
+                  </a:txBody>
+                  <a:tcPr marL="91440" marR="91440" marT="45720" marB="45720" anchor="ctr">
+                    <a:lnL w="9525" cap="flat" cmpd="sng" algn="ctr">
+                      <a:solidFill>
+                        <a:srgbClr val="D9D9D9"/>
+                      </a:solidFill>
+                      <a:prstDash val="solid"/>
+                      <a:round/>
+                      <a:headEnd type="none" w="med" len="med"/>
+                      <a:tailEnd type="none" w="med" len="med"/>
+                    </a:lnL>
+                    <a:lnR w="9525" cap="flat" cmpd="sng" algn="ctr">
+                      <a:solidFill>
+                        <a:srgbClr val="D9D9D9"/>
+                      </a:solidFill>
+                      <a:prstDash val="solid"/>
+                      <a:round/>
+                      <a:headEnd type="none" w="med" len="med"/>
+                      <a:tailEnd type="none" w="med" len="med"/>
+                    </a:lnR>
+                    <a:lnT w="9525" cap="flat" cmpd="sng" algn="ctr">
+                      <a:solidFill>
+                        <a:srgbClr val="D9D9D9"/>
+                      </a:solidFill>
+                      <a:prstDash val="solid"/>
+                      <a:round/>
+                      <a:headEnd type="none" w="med" len="med"/>
+                      <a:tailEnd type="none" w="med" len="med"/>
+                    </a:lnT>
+                    <a:lnB w="9525" cap="flat" cmpd="sng" algn="ctr">
+                      <a:solidFill>
+                        <a:srgbClr val="D9D9D9"/>
+                      </a:solidFill>
+                      <a:prstDash val="solid"/>
+                      <a:round/>
+                      <a:headEnd type="none" w="med" len="med"/>
+                      <a:tailEnd type="none" w="med" len="med"/>
+                    </a:lnB>
+                    <a:solidFill>
+                      <a:srgbClr val="EAF1F8"/>
+                    </a:solidFill>
+                  </a:tcPr>
+                </a:tc>
+                <a:tc>
+                  <a:txBody>
+                    <a:bodyPr/>
+                    <a:lstStyle/>
+                    <a:p>
+                      <a:pPr algn="ctr" indent="0" marL="0">
+                        <a:buNone/>
+                      </a:pPr>
+                      <a:r>
+                        <a:rPr lang="en-US" sz="1300" b="1" dirty="0">
+                          <a:solidFill>
+                            <a:srgbClr val="3F3F3F"/>
+                          </a:solidFill>
+                          <a:latin typeface="Malgun Gothic" pitchFamily="34" charset="0"/>
+                          <a:ea typeface="Malgun Gothic" pitchFamily="34" charset="-122"/>
+                          <a:cs typeface="Malgun Gothic" pitchFamily="34" charset="-120"/>
+                        </a:rPr>
+                        <a:t>100%</a:t>
+                      </a:r>
+                      <a:endParaRPr lang="en-US" sz="1300" dirty="0">
+                        <a:latin typeface="Malgun Gothic" charset="0"/>
+                        <a:ea typeface="Malgun Gothic" charset="0"/>
+                        <a:cs typeface="Malgun Gothic" charset="0"/>
+                      </a:endParaRPr>
+                    </a:p>
+                  </a:txBody>
+                  <a:tcPr marL="91440" marR="91440" marT="45720" marB="45720" anchor="ctr">
+                    <a:lnL w="9525" cap="flat" cmpd="sng" algn="ctr">
+                      <a:solidFill>
+                        <a:srgbClr val="D9D9D9"/>
+                      </a:solidFill>
+                      <a:prstDash val="solid"/>
+                      <a:round/>
+                      <a:headEnd type="none" w="med" len="med"/>
+                      <a:tailEnd type="none" w="med" len="med"/>
+                    </a:lnL>
+                    <a:lnR w="9525" cap="flat" cmpd="sng" algn="ctr">
+                      <a:solidFill>
+                        <a:srgbClr val="D9D9D9"/>
+                      </a:solidFill>
+                      <a:prstDash val="solid"/>
+                      <a:round/>
+                      <a:headEnd type="none" w="med" len="med"/>
+                      <a:tailEnd type="none" w="med" len="med"/>
+                    </a:lnR>
+                    <a:lnT w="9525" cap="flat" cmpd="sng" algn="ctr">
+                      <a:solidFill>
+                        <a:srgbClr val="D9D9D9"/>
+                      </a:solidFill>
+                      <a:prstDash val="solid"/>
+                      <a:round/>
+                      <a:headEnd type="none" w="med" len="med"/>
+                      <a:tailEnd type="none" w="med" len="med"/>
+                    </a:lnT>
+                    <a:lnB w="9525" cap="flat" cmpd="sng" algn="ctr">
+                      <a:solidFill>
+                        <a:srgbClr val="D9D9D9"/>
+                      </a:solidFill>
+                      <a:prstDash val="solid"/>
+                      <a:round/>
+                      <a:headEnd type="none" w="med" len="med"/>
+                      <a:tailEnd type="none" w="med" len="med"/>
+                    </a:lnB>
+                    <a:solidFill>
+                      <a:srgbClr val="EAF1F8"/>
+                    </a:solidFill>
+                  </a:tcPr>
+                </a:tc>
+              </a:tr>
+            </a:tbl>
+          </a:graphicData>
+        </a:graphic>
+      </p:graphicFrame>
+      <p:sp>
+        <p:nvSpPr>
+          <p:cNvPr id="8" name="Text 4"/>
+          <p:cNvSpPr/>
+          <p:nvPr/>
+        </p:nvSpPr>
+        <p:spPr>
+          <a:xfrm>
+            <a:off x="6858000" y="1600200"/>
+            <a:ext cx="4754880" cy="274320"/>
+          </a:xfrm>
+          <a:prstGeom prst="rect">
+            <a:avLst/>
+          </a:prstGeom>
+          <a:noFill/>
+          <a:ln/>
+        </p:spPr>
+        <p:txBody>
+          <a:bodyPr wrap="square" lIns="0" tIns="0" rIns="0" bIns="0" rtlCol="0" anchor="ctr"/>
+          <a:lstStyle/>
+          <a:p>
+            <a:pPr indent="0" marL="0">
+              <a:buNone/>
+            </a:pPr>
+            <a:r>
+              <a:rPr lang="en-US" sz="1050" dirty="0">
+                <a:solidFill>
+                  <a:srgbClr val="3F3F3F"/>
+                </a:solidFill>
+                <a:latin typeface="Malgun Gothic" pitchFamily="34" charset="0"/>
+                <a:ea typeface="Malgun Gothic" pitchFamily="34" charset="-122"/>
+                <a:cs typeface="Malgun Gothic" pitchFamily="34" charset="-120"/>
+              </a:rPr>
+              <a:t>XR 시리즈 (Hematology)</a:t>
+            </a:r>
+            <a:endParaRPr lang="en-US" sz="1050" dirty="0"/>
+          </a:p>
+        </p:txBody>
+      </p:sp>
+      <p:sp>
+        <p:nvSpPr>
+          <p:cNvPr id="9" name="Shape 5"/>
+          <p:cNvSpPr/>
+          <p:nvPr/>
+        </p:nvSpPr>
+        <p:spPr>
+          <a:xfrm>
+            <a:off x="6858000" y="1892808"/>
+            <a:ext cx="4206240" cy="256032"/>
+          </a:xfrm>
+          <a:prstGeom prst="rect">
+            <a:avLst/>
+          </a:prstGeom>
+          <a:solidFill>
+            <a:srgbClr val="005BAC"/>
+          </a:solidFill>
+          <a:ln/>
+        </p:spPr>
+      </p:sp>
+      <p:sp>
+        <p:nvSpPr>
+          <p:cNvPr id="10" name="Text 6"/>
+          <p:cNvSpPr/>
+          <p:nvPr/>
+        </p:nvSpPr>
+        <p:spPr>
+          <a:xfrm>
+            <a:off x="11155680" y="1856232"/>
+            <a:ext cx="731520" cy="292608"/>
+          </a:xfrm>
+          <a:prstGeom prst="rect">
+            <a:avLst/>
+          </a:prstGeom>
+          <a:noFill/>
+          <a:ln/>
+        </p:spPr>
+        <p:txBody>
+          <a:bodyPr wrap="square" lIns="0" tIns="0" rIns="0" bIns="0" rtlCol="0" anchor="ctr"/>
+          <a:lstStyle/>
+          <a:p>
+            <a:pPr indent="0" marL="0">
+              <a:buNone/>
+            </a:pPr>
+            <a:r>
+              <a:rPr lang="en-US" sz="1100" b="1" dirty="0">
+                <a:solidFill>
+                  <a:srgbClr val="3F3F3F"/>
+                </a:solidFill>
+                <a:latin typeface="Arial" pitchFamily="34" charset="0"/>
+                <a:ea typeface="Arial" pitchFamily="34" charset="-122"/>
+                <a:cs typeface="Arial" pitchFamily="34" charset="-120"/>
+              </a:rPr>
+              <a:t>7건</a:t>
+            </a:r>
+            <a:endParaRPr lang="en-US" sz="1100" dirty="0"/>
+          </a:p>
+        </p:txBody>
+      </p:sp>
+      <p:sp>
+        <p:nvSpPr>
+          <p:cNvPr id="11" name="Text 7"/>
+          <p:cNvSpPr/>
+          <p:nvPr/>
+        </p:nvSpPr>
+        <p:spPr>
+          <a:xfrm>
+            <a:off x="6858000" y="2258568"/>
+            <a:ext cx="4754880" cy="274320"/>
+          </a:xfrm>
+          <a:prstGeom prst="rect">
+            <a:avLst/>
+          </a:prstGeom>
+          <a:noFill/>
+          <a:ln/>
+        </p:spPr>
+        <p:txBody>
+          <a:bodyPr wrap="square" lIns="0" tIns="0" rIns="0" bIns="0" rtlCol="0" anchor="ctr"/>
+          <a:lstStyle/>
+          <a:p>
+            <a:pPr indent="0" marL="0">
+              <a:buNone/>
+            </a:pPr>
+            <a:r>
+              <a:rPr lang="en-US" sz="1050" dirty="0">
+                <a:solidFill>
+                  <a:srgbClr val="3F3F3F"/>
+                </a:solidFill>
+                <a:latin typeface="Malgun Gothic" pitchFamily="34" charset="0"/>
+                <a:ea typeface="Malgun Gothic" pitchFamily="34" charset="-122"/>
+                <a:cs typeface="Malgun Gothic" pitchFamily="34" charset="-120"/>
+              </a:rPr>
+              <a:t>XN 시리즈 (Hematology)</a:t>
+            </a:r>
+            <a:endParaRPr lang="en-US" sz="1050" dirty="0"/>
+          </a:p>
+        </p:txBody>
+      </p:sp>
+      <p:sp>
+        <p:nvSpPr>
+          <p:cNvPr id="12" name="Shape 8"/>
+          <p:cNvSpPr/>
+          <p:nvPr/>
+        </p:nvSpPr>
+        <p:spPr>
+          <a:xfrm>
+            <a:off x="6858000" y="2551176"/>
+            <a:ext cx="3004457" cy="256032"/>
+          </a:xfrm>
+          <a:prstGeom prst="rect">
+            <a:avLst/>
+          </a:prstGeom>
+          <a:solidFill>
+            <a:srgbClr val="00B8EE"/>
+          </a:solidFill>
+          <a:ln/>
+        </p:spPr>
+      </p:sp>
+      <p:sp>
+        <p:nvSpPr>
+          <p:cNvPr id="13" name="Text 9"/>
+          <p:cNvSpPr/>
+          <p:nvPr/>
+        </p:nvSpPr>
+        <p:spPr>
+          <a:xfrm>
+            <a:off x="9953897" y="2514600"/>
+            <a:ext cx="731520" cy="292608"/>
+          </a:xfrm>
+          <a:prstGeom prst="rect">
+            <a:avLst/>
+          </a:prstGeom>
+          <a:noFill/>
+          <a:ln/>
+        </p:spPr>
+        <p:txBody>
+          <a:bodyPr wrap="square" lIns="0" tIns="0" rIns="0" bIns="0" rtlCol="0" anchor="ctr"/>
+          <a:lstStyle/>
+          <a:p>
+            <a:pPr indent="0" marL="0">
+              <a:buNone/>
+            </a:pPr>
+            <a:r>
+              <a:rPr lang="en-US" sz="1100" b="1" dirty="0">
+                <a:solidFill>
+                  <a:srgbClr val="3F3F3F"/>
+                </a:solidFill>
+                <a:latin typeface="Arial" pitchFamily="34" charset="0"/>
+                <a:ea typeface="Arial" pitchFamily="34" charset="-122"/>
+                <a:cs typeface="Arial" pitchFamily="34" charset="-120"/>
+              </a:rPr>
+              <a:t>5건</a:t>
+            </a:r>
+            <a:endParaRPr lang="en-US" sz="1100" dirty="0"/>
+          </a:p>
+        </p:txBody>
+      </p:sp>
+      <p:sp>
+        <p:nvSpPr>
+          <p:cNvPr id="14" name="Text 10"/>
+          <p:cNvSpPr/>
+          <p:nvPr/>
+        </p:nvSpPr>
+        <p:spPr>
+          <a:xfrm>
+            <a:off x="6858000" y="2916936"/>
+            <a:ext cx="4754880" cy="274320"/>
+          </a:xfrm>
+          <a:prstGeom prst="rect">
+            <a:avLst/>
+          </a:prstGeom>
+          <a:noFill/>
+          <a:ln/>
+        </p:spPr>
+        <p:txBody>
+          <a:bodyPr wrap="square" lIns="0" tIns="0" rIns="0" bIns="0" rtlCol="0" anchor="ctr"/>
+          <a:lstStyle/>
+          <a:p>
+            <a:pPr indent="0" marL="0">
+              <a:buNone/>
+            </a:pPr>
+            <a:r>
+              <a:rPr lang="en-US" sz="1050" dirty="0">
+                <a:solidFill>
+                  <a:srgbClr val="3F3F3F"/>
+                </a:solidFill>
+                <a:latin typeface="Malgun Gothic" pitchFamily="34" charset="0"/>
+                <a:ea typeface="Malgun Gothic" pitchFamily="34" charset="-122"/>
+                <a:cs typeface="Malgun Gothic" pitchFamily="34" charset="-120"/>
+              </a:rPr>
+              <a:t>CA 시리즈 (Coagulation)</a:t>
+            </a:r>
+            <a:endParaRPr lang="en-US" sz="1050" dirty="0"/>
+          </a:p>
+        </p:txBody>
+      </p:sp>
+      <p:sp>
+        <p:nvSpPr>
+          <p:cNvPr id="15" name="Shape 11"/>
+          <p:cNvSpPr/>
+          <p:nvPr/>
+        </p:nvSpPr>
+        <p:spPr>
+          <a:xfrm>
+            <a:off x="6858000" y="3209544"/>
+            <a:ext cx="1201783" cy="256032"/>
+          </a:xfrm>
+          <a:prstGeom prst="rect">
+            <a:avLst/>
+          </a:prstGeom>
+          <a:solidFill>
+            <a:srgbClr val="3FBA46"/>
+          </a:solidFill>
+          <a:ln/>
+        </p:spPr>
+      </p:sp>
+      <p:sp>
+        <p:nvSpPr>
+          <p:cNvPr id="16" name="Text 12"/>
+          <p:cNvSpPr/>
+          <p:nvPr/>
+        </p:nvSpPr>
+        <p:spPr>
+          <a:xfrm>
+            <a:off x="8151223" y="3172968"/>
+            <a:ext cx="731520" cy="292608"/>
+          </a:xfrm>
+          <a:prstGeom prst="rect">
+            <a:avLst/>
+          </a:prstGeom>
+          <a:noFill/>
+          <a:ln/>
+        </p:spPr>
+        <p:txBody>
+          <a:bodyPr wrap="square" lIns="0" tIns="0" rIns="0" bIns="0" rtlCol="0" anchor="ctr"/>
+          <a:lstStyle/>
+          <a:p>
+            <a:pPr indent="0" marL="0">
+              <a:buNone/>
+            </a:pPr>
+            <a:r>
+              <a:rPr lang="en-US" sz="1100" b="1" dirty="0">
+                <a:solidFill>
+                  <a:srgbClr val="3F3F3F"/>
+                </a:solidFill>
+                <a:latin typeface="Arial" pitchFamily="34" charset="0"/>
+                <a:ea typeface="Arial" pitchFamily="34" charset="-122"/>
+                <a:cs typeface="Arial" pitchFamily="34" charset="-120"/>
+              </a:rPr>
+              <a:t>2건</a:t>
+            </a:r>
+            <a:endParaRPr lang="en-US" sz="1100" dirty="0"/>
+          </a:p>
+        </p:txBody>
+      </p:sp>
+      <p:sp>
+        <p:nvSpPr>
+          <p:cNvPr id="17" name="Text 13"/>
+          <p:cNvSpPr/>
+          <p:nvPr/>
+        </p:nvSpPr>
+        <p:spPr>
+          <a:xfrm>
+            <a:off x="6858000" y="3575304"/>
+            <a:ext cx="4754880" cy="274320"/>
+          </a:xfrm>
+          <a:prstGeom prst="rect">
+            <a:avLst/>
+          </a:prstGeom>
+          <a:noFill/>
+          <a:ln/>
+        </p:spPr>
+        <p:txBody>
+          <a:bodyPr wrap="square" lIns="0" tIns="0" rIns="0" bIns="0" rtlCol="0" anchor="ctr"/>
+          <a:lstStyle/>
+          <a:p>
+            <a:pPr indent="0" marL="0">
+              <a:buNone/>
+            </a:pPr>
+            <a:r>
+              <a:rPr lang="en-US" sz="1050" dirty="0">
+                <a:solidFill>
+                  <a:srgbClr val="3F3F3F"/>
+                </a:solidFill>
+                <a:latin typeface="Malgun Gothic" pitchFamily="34" charset="0"/>
+                <a:ea typeface="Malgun Gothic" pitchFamily="34" charset="-122"/>
+                <a:cs typeface="Malgun Gothic" pitchFamily="34" charset="-120"/>
+              </a:rPr>
+              <a:t>UN/UC 시리즈 (Urine)</a:t>
+            </a:r>
+            <a:endParaRPr lang="en-US" sz="1050" dirty="0"/>
+          </a:p>
+        </p:txBody>
+      </p:sp>
+      <p:sp>
+        <p:nvSpPr>
+          <p:cNvPr id="18" name="Shape 14"/>
+          <p:cNvSpPr/>
+          <p:nvPr/>
+        </p:nvSpPr>
+        <p:spPr>
+          <a:xfrm>
+            <a:off x="6858000" y="3867912"/>
+            <a:ext cx="600891" cy="256032"/>
+          </a:xfrm>
+          <a:prstGeom prst="rect">
+            <a:avLst/>
+          </a:prstGeom>
+          <a:solidFill>
+            <a:srgbClr val="7E49DC"/>
+          </a:solidFill>
+          <a:ln/>
+        </p:spPr>
+      </p:sp>
+      <p:sp>
+        <p:nvSpPr>
+          <p:cNvPr id="19" name="Text 15"/>
+          <p:cNvSpPr/>
+          <p:nvPr/>
+        </p:nvSpPr>
+        <p:spPr>
+          <a:xfrm>
+            <a:off x="7550331" y="3831336"/>
+            <a:ext cx="731520" cy="292608"/>
+          </a:xfrm>
+          <a:prstGeom prst="rect">
+            <a:avLst/>
+          </a:prstGeom>
+          <a:noFill/>
+          <a:ln/>
+        </p:spPr>
+        <p:txBody>
+          <a:bodyPr wrap="square" lIns="0" tIns="0" rIns="0" bIns="0" rtlCol="0" anchor="ctr"/>
+          <a:lstStyle/>
+          <a:p>
+            <a:pPr indent="0" marL="0">
+              <a:buNone/>
+            </a:pPr>
+            <a:r>
+              <a:rPr lang="en-US" sz="1100" b="1" dirty="0">
+                <a:solidFill>
+                  <a:srgbClr val="3F3F3F"/>
+                </a:solidFill>
+                <a:latin typeface="Arial" pitchFamily="34" charset="0"/>
+                <a:ea typeface="Arial" pitchFamily="34" charset="-122"/>
+                <a:cs typeface="Arial" pitchFamily="34" charset="-120"/>
+              </a:rPr>
+              <a:t>1건</a:t>
+            </a:r>
+            <a:endParaRPr lang="en-US" sz="1100" dirty="0"/>
+          </a:p>
+        </p:txBody>
+      </p:sp>
+      <p:sp>
+        <p:nvSpPr>
+          <p:cNvPr id="20" name="Text 16"/>
+          <p:cNvSpPr/>
+          <p:nvPr/>
+        </p:nvSpPr>
+        <p:spPr>
+          <a:xfrm>
+            <a:off x="6858000" y="4233672"/>
+            <a:ext cx="4754880" cy="274320"/>
+          </a:xfrm>
+          <a:prstGeom prst="rect">
+            <a:avLst/>
+          </a:prstGeom>
+          <a:noFill/>
+          <a:ln/>
+        </p:spPr>
+        <p:txBody>
+          <a:bodyPr wrap="square" lIns="0" tIns="0" rIns="0" bIns="0" rtlCol="0" anchor="ctr"/>
+          <a:lstStyle/>
+          <a:p>
+            <a:pPr indent="0" marL="0">
+              <a:buNone/>
+            </a:pPr>
+            <a:r>
+              <a:rPr lang="en-US" sz="1050" dirty="0">
+                <a:solidFill>
+                  <a:srgbClr val="3F3F3F"/>
+                </a:solidFill>
+                <a:latin typeface="Malgun Gothic" pitchFamily="34" charset="0"/>
+                <a:ea typeface="Malgun Gothic" pitchFamily="34" charset="-122"/>
+                <a:cs typeface="Malgun Gothic" pitchFamily="34" charset="-120"/>
+              </a:rPr>
+              <a:t>SP/DI 시리즈 (도말표본)</a:t>
+            </a:r>
+            <a:endParaRPr lang="en-US" sz="1050" dirty="0"/>
+          </a:p>
+        </p:txBody>
+      </p:sp>
+      <p:sp>
+        <p:nvSpPr>
+          <p:cNvPr id="21" name="Shape 17"/>
+          <p:cNvSpPr/>
+          <p:nvPr/>
+        </p:nvSpPr>
+        <p:spPr>
+          <a:xfrm>
+            <a:off x="6858000" y="4526280"/>
+            <a:ext cx="600891" cy="256032"/>
+          </a:xfrm>
+          <a:prstGeom prst="rect">
+            <a:avLst/>
+          </a:prstGeom>
+          <a:solidFill>
+            <a:srgbClr val="E69E0B"/>
+          </a:solidFill>
+          <a:ln/>
+        </p:spPr>
+      </p:sp>
+      <p:sp>
+        <p:nvSpPr>
+          <p:cNvPr id="22" name="Text 18"/>
+          <p:cNvSpPr/>
+          <p:nvPr/>
+        </p:nvSpPr>
+        <p:spPr>
+          <a:xfrm>
+            <a:off x="7550331" y="4489704"/>
+            <a:ext cx="731520" cy="292608"/>
+          </a:xfrm>
+          <a:prstGeom prst="rect">
+            <a:avLst/>
+          </a:prstGeom>
+          <a:noFill/>
+          <a:ln/>
+        </p:spPr>
+        <p:txBody>
+          <a:bodyPr wrap="square" lIns="0" tIns="0" rIns="0" bIns="0" rtlCol="0" anchor="ctr"/>
+          <a:lstStyle/>
+          <a:p>
+            <a:pPr indent="0" marL="0">
+              <a:buNone/>
+            </a:pPr>
+            <a:r>
+              <a:rPr lang="en-US" sz="1100" b="1" dirty="0">
+                <a:solidFill>
+                  <a:srgbClr val="3F3F3F"/>
+                </a:solidFill>
+                <a:latin typeface="Arial" pitchFamily="34" charset="0"/>
+                <a:ea typeface="Arial" pitchFamily="34" charset="-122"/>
+                <a:cs typeface="Arial" pitchFamily="34" charset="-120"/>
+              </a:rPr>
+              <a:t>1건</a:t>
+            </a:r>
+            <a:endParaRPr lang="en-US" sz="1100" dirty="0"/>
+          </a:p>
+        </p:txBody>
+      </p:sp>
+      <p:sp>
+        <p:nvSpPr>
+          <p:cNvPr id="23" name="Text 19"/>
+          <p:cNvSpPr/>
+          <p:nvPr/>
+        </p:nvSpPr>
+        <p:spPr>
+          <a:xfrm>
+            <a:off x="530352" y="5120640"/>
+            <a:ext cx="11100816" cy="365760"/>
+          </a:xfrm>
+          <a:prstGeom prst="rect">
+            <a:avLst/>
+          </a:prstGeom>
+          <a:noFill/>
+          <a:ln/>
+        </p:spPr>
+        <p:txBody>
+          <a:bodyPr wrap="square" lIns="0" tIns="0" rIns="0" bIns="0" rtlCol="0" anchor="ctr"/>
+          <a:lstStyle/>
+          <a:p>
+            <a:pPr indent="0" marL="0">
+              <a:buNone/>
+            </a:pPr>
+            <a:r>
+              <a:rPr lang="en-US" sz="1000" i="1" dirty="0">
+                <a:solidFill>
+                  <a:srgbClr val="9E9E9E"/>
+                </a:solidFill>
+                <a:latin typeface="Malgun Gothic" pitchFamily="34" charset="0"/>
+                <a:ea typeface="Malgun Gothic" pitchFamily="34" charset="-122"/>
+                <a:cs typeface="Malgun Gothic" pitchFamily="34" charset="-120"/>
+              </a:rPr>
+              <a:t>데이터 소스: 설치일정 관리 시트 (2026년 7월, 설치+이전설치 전체 대상, 원본 모델명을 시리즈 단위로 그룹핑)</a:t>
+            </a:r>
+            <a:endParaRPr lang="en-US" sz="1000" dirty="0"/>
+          </a:p>
+        </p:txBody>
+      </p:sp>
+      <p:sp>
+        <p:nvSpPr>
+          <p:cNvPr id="24" name="Text 20"/>
+          <p:cNvSpPr/>
+          <p:nvPr/>
+        </p:nvSpPr>
+        <p:spPr>
+          <a:xfrm>
+            <a:off x="457200" y="6547104"/>
+            <a:ext cx="9601200" cy="274320"/>
+          </a:xfrm>
+          <a:prstGeom prst="rect">
+            <a:avLst/>
+          </a:prstGeom>
+          <a:noFill/>
+          <a:ln/>
+        </p:spPr>
+        <p:txBody>
+          <a:bodyPr wrap="square" rtlCol="0" anchor="ctr"/>
+          <a:lstStyle/>
+          <a:p>
+            <a:pPr algn="l" indent="0" marL="0">
+              <a:buNone/>
+            </a:pPr>
+            <a:r>
+              <a:rPr lang="en-US" sz="900" dirty="0">
+                <a:solidFill>
+                  <a:srgbClr val="9E9E9E"/>
+                </a:solidFill>
+                <a:latin typeface="Malgun Gothic" pitchFamily="34" charset="0"/>
+                <a:ea typeface="Malgun Gothic" pitchFamily="34" charset="-122"/>
+                <a:cs typeface="Malgun Gothic" pitchFamily="34" charset="-120"/>
+              </a:rPr>
+              <a:t>FS Group │ FSS Team · 2026년 7월 · Confidential</a:t>
+            </a:r>
+            <a:endParaRPr lang="en-US" sz="900" dirty="0"/>
+          </a:p>
+        </p:txBody>
+      </p:sp>
+      <p:sp>
+        <p:nvSpPr>
+          <p:cNvPr id="25" name="Text 21"/>
+          <p:cNvSpPr/>
+          <p:nvPr/>
+        </p:nvSpPr>
+        <p:spPr>
+          <a:xfrm>
+            <a:off x="11247120" y="6547104"/>
+            <a:ext cx="731520" cy="274320"/>
+          </a:xfrm>
+          <a:prstGeom prst="rect">
+            <a:avLst/>
+          </a:prstGeom>
+          <a:noFill/>
+          <a:ln/>
+        </p:spPr>
+        <p:txBody>
+          <a:bodyPr wrap="square" rtlCol="0" anchor="ctr"/>
+          <a:lstStyle/>
+          <a:p>
+            <a:pPr algn="r" indent="0" marL="0">
+              <a:buNone/>
+            </a:pPr>
+            <a:r>
+              <a:rPr lang="en-US" sz="900" dirty="0">
+                <a:solidFill>
+                  <a:srgbClr val="9E9E9E"/>
+                </a:solidFill>
+                <a:latin typeface="Arial" pitchFamily="34" charset="0"/>
+                <a:ea typeface="Arial" pitchFamily="34" charset="-122"/>
+                <a:cs typeface="Arial" pitchFamily="34" charset="-120"/>
+              </a:rPr>
+              <a:t>4</a:t>
+            </a:r>
+            <a:endParaRPr lang="en-US" sz="900" dirty="0"/>
+          </a:p>
+        </p:txBody>
+      </p:sp>
+    </p:spTree>
+  </p:cSld>
+  <p:clrMapOvr>
+    <a:masterClrMapping/>
+  </p:clrMapOvr>
+</p:sld>
+</file>
+
+<file path=ppt/slides/slide5.xml><?xml version="1.0" encoding="utf-8"?>
+<p:sld xmlns:a="http://schemas.openxmlformats.org/drawingml/2006/main" xmlns:r="http://schemas.openxmlformats.org/officeDocument/2006/relationships" xmlns:p="http://schemas.openxmlformats.org/presentationml/2006/main">
+  <p:cSld name="Slide 5">
+    <p:bg>
+      <p:bgPr>
+        <a:solidFill>
+          <a:srgbClr val="FFFFFF"/>
+        </a:solidFill>
+      </p:bgPr>
+    </p:bg>
+    <p:spTree>
+      <p:nvGrpSpPr>
+        <p:cNvPr id="1" name=""/>
+        <p:cNvGrpSpPr/>
+        <p:nvPr/>
+      </p:nvGrpSpPr>
+      <p:grpSpPr>
+        <a:xfrm>
+          <a:off x="0" y="0"/>
+          <a:ext cx="0" cy="0"/>
+          <a:chOff x="0" y="0"/>
+          <a:chExt cx="0" cy="0"/>
+        </a:xfrm>
+      </p:grpSpPr>
+      <p:sp>
+        <p:nvSpPr>
+          <p:cNvPr id="2" name="Shape 0"/>
+          <p:cNvSpPr/>
+          <p:nvPr/>
+        </p:nvSpPr>
+        <p:spPr>
+          <a:xfrm>
+            <a:off x="0" y="0"/>
+            <a:ext cx="10378440" cy="914400"/>
+          </a:xfrm>
+          <a:prstGeom prst="rect">
+            <a:avLst/>
+          </a:prstGeom>
+          <a:solidFill>
+            <a:srgbClr val="005BAC"/>
+          </a:solidFill>
+          <a:ln/>
+        </p:spPr>
+      </p:sp>
+      <p:sp>
+        <p:nvSpPr>
+          <p:cNvPr id="3" name="Text 1"/>
+          <p:cNvSpPr/>
+          <p:nvPr/>
+        </p:nvSpPr>
+        <p:spPr>
+          <a:xfrm>
+            <a:off x="502920" y="164592"/>
+            <a:ext cx="822960" cy="585216"/>
+          </a:xfrm>
+          <a:prstGeom prst="rect">
+            <a:avLst/>
+          </a:prstGeom>
+          <a:noFill/>
+          <a:ln/>
+        </p:spPr>
+        <p:txBody>
+          <a:bodyPr wrap="square" lIns="0" tIns="0" rIns="0" bIns="0" rtlCol="0" anchor="ctr"/>
+          <a:lstStyle/>
+          <a:p>
+            <a:pPr algn="l" indent="0" marL="0">
+              <a:buNone/>
+            </a:pPr>
+            <a:r>
+              <a:rPr lang="en-US" sz="3000" b="1" dirty="0">
+                <a:solidFill>
+                  <a:srgbClr val="00B8EE"/>
+                </a:solidFill>
+                <a:latin typeface="Arial" pitchFamily="34" charset="0"/>
+                <a:ea typeface="Arial" pitchFamily="34" charset="-122"/>
+                <a:cs typeface="Arial" pitchFamily="34" charset="-120"/>
+              </a:rPr>
+              <a:t>05</a:t>
+            </a:r>
+            <a:endParaRPr lang="en-US" sz="3000" dirty="0"/>
+          </a:p>
+        </p:txBody>
+      </p:sp>
+      <p:sp>
+        <p:nvSpPr>
+          <p:cNvPr id="4" name="Text 2"/>
+          <p:cNvSpPr/>
+          <p:nvPr/>
+        </p:nvSpPr>
+        <p:spPr>
+          <a:xfrm>
+            <a:off x="1234440" y="164592"/>
+            <a:ext cx="8595360" cy="585216"/>
+          </a:xfrm>
+          <a:prstGeom prst="rect">
+            <a:avLst/>
+          </a:prstGeom>
+          <a:noFill/>
+          <a:ln/>
+        </p:spPr>
+        <p:txBody>
+          <a:bodyPr wrap="square" lIns="0" tIns="0" rIns="0" bIns="0" rtlCol="0" anchor="ctr"/>
+          <a:lstStyle/>
+          <a:p>
+            <a:pPr algn="l" indent="0" marL="0">
+              <a:buNone/>
+            </a:pPr>
+            <a:r>
+              <a:rPr lang="en-US" sz="2600" b="1" dirty="0">
+                <a:solidFill>
+                  <a:srgbClr val="FFFFFF"/>
+                </a:solidFill>
+                <a:latin typeface="Malgun Gothic" pitchFamily="34" charset="0"/>
+                <a:ea typeface="Malgun Gothic" pitchFamily="34" charset="-122"/>
+                <a:cs typeface="Malgun Gothic" pitchFamily="34" charset="-120"/>
+              </a:rPr>
               <a:t>VOC 수집 정보 및 처리현황</a:t>
             </a:r>
             <a:endParaRPr lang="en-US" sz="2600" dirty="0"/>
@@ -6687,7 +9484,7 @@
       </p:sp>
       <p:graphicFrame>
         <p:nvGraphicFramePr>
-          <p:cNvPr id="5" name="Table 0"/>
+          <p:cNvPr id="6" name="Table 0"/>
           <p:cNvGraphicFramePr>
             <a:graphicFrameLocks noGrp="1"/>
           </p:cNvGraphicFramePr>
@@ -7618,443 +10415,6 @@
                 <a:ea typeface="Arial" pitchFamily="34" charset="-122"/>
                 <a:cs typeface="Arial" pitchFamily="34" charset="-120"/>
               </a:rPr>
-              <a:t>4</a:t>
-            </a:r>
-            <a:endParaRPr lang="en-US" sz="900" dirty="0"/>
-          </a:p>
-        </p:txBody>
-      </p:sp>
-    </p:spTree>
-  </p:cSld>
-  <p:clrMapOvr>
-    <a:masterClrMapping/>
-  </p:clrMapOvr>
-</p:sld>
-</file>
-
-<file path=ppt/slides/slide5.xml><?xml version="1.0" encoding="utf-8"?>
-<p:sld xmlns:a="http://schemas.openxmlformats.org/drawingml/2006/main" xmlns:r="http://schemas.openxmlformats.org/officeDocument/2006/relationships" xmlns:p="http://schemas.openxmlformats.org/presentationml/2006/main">
-  <p:cSld name="Slide 5">
-    <p:bg>
-      <p:bgPr>
-        <a:solidFill>
-          <a:srgbClr val="FFFFFF"/>
-        </a:solidFill>
-      </p:bgPr>
-    </p:bg>
-    <p:spTree>
-      <p:nvGrpSpPr>
-        <p:cNvPr id="1" name=""/>
-        <p:cNvGrpSpPr/>
-        <p:nvPr/>
-      </p:nvGrpSpPr>
-      <p:grpSpPr>
-        <a:xfrm>
-          <a:off x="0" y="0"/>
-          <a:ext cx="0" cy="0"/>
-          <a:chOff x="0" y="0"/>
-          <a:chExt cx="0" cy="0"/>
-        </a:xfrm>
-      </p:grpSpPr>
-      <p:sp>
-        <p:nvSpPr>
-          <p:cNvPr id="2" name="Shape 0"/>
-          <p:cNvSpPr/>
-          <p:nvPr/>
-        </p:nvSpPr>
-        <p:spPr>
-          <a:xfrm>
-            <a:off x="0" y="0"/>
-            <a:ext cx="10378440" cy="914400"/>
-          </a:xfrm>
-          <a:prstGeom prst="rect">
-            <a:avLst/>
-          </a:prstGeom>
-          <a:solidFill>
-            <a:srgbClr val="005BAC"/>
-          </a:solidFill>
-          <a:ln/>
-        </p:spPr>
-      </p:sp>
-      <p:sp>
-        <p:nvSpPr>
-          <p:cNvPr id="3" name="Text 1"/>
-          <p:cNvSpPr/>
-          <p:nvPr/>
-        </p:nvSpPr>
-        <p:spPr>
-          <a:xfrm>
-            <a:off x="502920" y="164592"/>
-            <a:ext cx="822960" cy="585216"/>
-          </a:xfrm>
-          <a:prstGeom prst="rect">
-            <a:avLst/>
-          </a:prstGeom>
-          <a:noFill/>
-          <a:ln/>
-        </p:spPr>
-        <p:txBody>
-          <a:bodyPr wrap="square" lIns="0" tIns="0" rIns="0" bIns="0" rtlCol="0" anchor="ctr"/>
-          <a:lstStyle/>
-          <a:p>
-            <a:pPr algn="l" indent="0" marL="0">
-              <a:buNone/>
-            </a:pPr>
-            <a:r>
-              <a:rPr lang="en-US" sz="3000" b="1" dirty="0">
-                <a:solidFill>
-                  <a:srgbClr val="00B8EE"/>
-                </a:solidFill>
-                <a:latin typeface="Arial" pitchFamily="34" charset="0"/>
-                <a:ea typeface="Arial" pitchFamily="34" charset="-122"/>
-                <a:cs typeface="Arial" pitchFamily="34" charset="-120"/>
-              </a:rPr>
-              <a:t>05</a:t>
-            </a:r>
-            <a:endParaRPr lang="en-US" sz="3000" dirty="0"/>
-          </a:p>
-        </p:txBody>
-      </p:sp>
-      <p:sp>
-        <p:nvSpPr>
-          <p:cNvPr id="4" name="Text 2"/>
-          <p:cNvSpPr/>
-          <p:nvPr/>
-        </p:nvSpPr>
-        <p:spPr>
-          <a:xfrm>
-            <a:off x="1234440" y="164592"/>
-            <a:ext cx="8595360" cy="585216"/>
-          </a:xfrm>
-          <a:prstGeom prst="rect">
-            <a:avLst/>
-          </a:prstGeom>
-          <a:noFill/>
-          <a:ln/>
-        </p:spPr>
-        <p:txBody>
-          <a:bodyPr wrap="square" lIns="0" tIns="0" rIns="0" bIns="0" rtlCol="0" anchor="ctr"/>
-          <a:lstStyle/>
-          <a:p>
-            <a:pPr algn="l" indent="0" marL="0">
-              <a:buNone/>
-            </a:pPr>
-            <a:r>
-              <a:rPr lang="en-US" sz="2600" b="1" dirty="0">
-                <a:solidFill>
-                  <a:srgbClr val="FFFFFF"/>
-                </a:solidFill>
-                <a:latin typeface="Malgun Gothic" pitchFamily="34" charset="0"/>
-                <a:ea typeface="Malgun Gothic" pitchFamily="34" charset="-122"/>
-                <a:cs typeface="Malgun Gothic" pitchFamily="34" charset="-120"/>
-              </a:rPr>
-              <a:t>중대 이슈 처리</a:t>
-            </a:r>
-            <a:endParaRPr lang="en-US" sz="2600" dirty="0"/>
-          </a:p>
-        </p:txBody>
-      </p:sp>
-      <p:pic>
-        <p:nvPicPr>
-          <p:cNvPr id="5" name="Image 0" descr="sysmex_logo_mono_blue.png">    </p:cNvPr>
-          <p:cNvPicPr>
-            <a:picLocks noChangeAspect="1"/>
-          </p:cNvPicPr>
-          <p:nvPr/>
-        </p:nvPicPr>
-        <p:blipFill>
-          <a:blip r:embed="rId1"/>
-          <a:stretch>
-            <a:fillRect/>
-          </a:stretch>
-        </p:blipFill>
-        <p:spPr>
-          <a:xfrm>
-            <a:off x="10652760" y="292608"/>
-            <a:ext cx="1097280" cy="420624"/>
-          </a:xfrm>
-          <a:prstGeom prst="rect">
-            <a:avLst/>
-          </a:prstGeom>
-        </p:spPr>
-      </p:pic>
-      <p:sp>
-        <p:nvSpPr>
-          <p:cNvPr id="6" name="Shape 3"/>
-          <p:cNvSpPr/>
-          <p:nvPr/>
-        </p:nvSpPr>
-        <p:spPr>
-          <a:xfrm>
-            <a:off x="530352" y="1143000"/>
-            <a:ext cx="11100816" cy="777240"/>
-          </a:xfrm>
-          <a:prstGeom prst="roundRect">
-            <a:avLst>
-              <a:gd name="adj" fmla="val 7059"/>
-            </a:avLst>
-          </a:prstGeom>
-          <a:solidFill>
-            <a:srgbClr val="E6EEF7"/>
-          </a:solidFill>
-          <a:ln/>
-        </p:spPr>
-      </p:sp>
-      <p:sp>
-        <p:nvSpPr>
-          <p:cNvPr id="7" name="Text 4"/>
-          <p:cNvSpPr/>
-          <p:nvPr/>
-        </p:nvSpPr>
-        <p:spPr>
-          <a:xfrm>
-            <a:off x="713232" y="1225296"/>
-            <a:ext cx="2926080" cy="320040"/>
-          </a:xfrm>
-          <a:prstGeom prst="rect">
-            <a:avLst/>
-          </a:prstGeom>
-          <a:noFill/>
-          <a:ln/>
-        </p:spPr>
-        <p:txBody>
-          <a:bodyPr wrap="square" lIns="0" tIns="0" rIns="0" bIns="0" rtlCol="0" anchor="ctr"/>
-          <a:lstStyle/>
-          <a:p>
-            <a:pPr indent="0" marL="0">
-              <a:buNone/>
-            </a:pPr>
-            <a:r>
-              <a:rPr lang="en-US" sz="1200" b="1" dirty="0">
-                <a:solidFill>
-                  <a:srgbClr val="005BAC"/>
-                </a:solidFill>
-                <a:latin typeface="Malgun Gothic" pitchFamily="34" charset="0"/>
-                <a:ea typeface="Malgun Gothic" pitchFamily="34" charset="-122"/>
-                <a:cs typeface="Malgun Gothic" pitchFamily="34" charset="-120"/>
-              </a:rPr>
-              <a:t>VOC 레드 플래그 시스템</a:t>
-            </a:r>
-            <a:endParaRPr lang="en-US" sz="1200" dirty="0"/>
-          </a:p>
-        </p:txBody>
-      </p:sp>
-      <p:sp>
-        <p:nvSpPr>
-          <p:cNvPr id="8" name="Text 5"/>
-          <p:cNvSpPr/>
-          <p:nvPr/>
-        </p:nvSpPr>
-        <p:spPr>
-          <a:xfrm>
-            <a:off x="713232" y="1536192"/>
-            <a:ext cx="10789920" cy="320040"/>
-          </a:xfrm>
-          <a:prstGeom prst="rect">
-            <a:avLst/>
-          </a:prstGeom>
-          <a:noFill/>
-          <a:ln/>
-        </p:spPr>
-        <p:txBody>
-          <a:bodyPr wrap="square" lIns="0" tIns="0" rIns="0" bIns="0" rtlCol="0" anchor="ctr"/>
-          <a:lstStyle/>
-          <a:p>
-            <a:pPr indent="0" marL="0">
-              <a:buNone/>
-            </a:pPr>
-            <a:r>
-              <a:rPr lang="en-US" sz="1100" dirty="0">
-                <a:solidFill>
-                  <a:srgbClr val="3F3F3F"/>
-                </a:solidFill>
-                <a:latin typeface="Malgun Gothic" pitchFamily="34" charset="0"/>
-                <a:ea typeface="Malgun Gothic" pitchFamily="34" charset="-122"/>
-                <a:cs typeface="Malgun Gothic" pitchFamily="34" charset="-120"/>
-              </a:rPr>
-              <a:t>평가 2점 이하 또는 서술형 "심각" 분류 건을 즉시 감지 → 분야별 전문가 TFT 구성 → SLA(1차 컨택 24~48시간) 내 처리하여 신뢰 회복</a:t>
-            </a:r>
-            <a:endParaRPr lang="en-US" sz="1100" dirty="0"/>
-          </a:p>
-        </p:txBody>
-      </p:sp>
-      <p:sp>
-        <p:nvSpPr>
-          <p:cNvPr id="9" name="Text 6"/>
-          <p:cNvSpPr/>
-          <p:nvPr/>
-        </p:nvSpPr>
-        <p:spPr>
-          <a:xfrm>
-            <a:off x="530352" y="2103120"/>
-            <a:ext cx="7315200" cy="320040"/>
-          </a:xfrm>
-          <a:prstGeom prst="rect">
-            <a:avLst/>
-          </a:prstGeom>
-          <a:noFill/>
-          <a:ln/>
-        </p:spPr>
-        <p:txBody>
-          <a:bodyPr wrap="square" lIns="0" tIns="0" rIns="0" bIns="0" rtlCol="0" anchor="ctr"/>
-          <a:lstStyle/>
-          <a:p>
-            <a:pPr indent="0" marL="0">
-              <a:buNone/>
-            </a:pPr>
-            <a:r>
-              <a:rPr lang="en-US" sz="1400" b="1" dirty="0">
-                <a:solidFill>
-                  <a:srgbClr val="005BAC"/>
-                </a:solidFill>
-                <a:latin typeface="Malgun Gothic" pitchFamily="34" charset="0"/>
-                <a:ea typeface="Malgun Gothic" pitchFamily="34" charset="-122"/>
-                <a:cs typeface="Malgun Gothic" pitchFamily="34" charset="-120"/>
-              </a:rPr>
-              <a:t>접수 · 조치 · 종결 현황</a:t>
-            </a:r>
-            <a:endParaRPr lang="en-US" sz="1400" dirty="0"/>
-          </a:p>
-        </p:txBody>
-      </p:sp>
-      <p:sp>
-        <p:nvSpPr>
-          <p:cNvPr id="10" name="Shape 7"/>
-          <p:cNvSpPr/>
-          <p:nvPr/>
-        </p:nvSpPr>
-        <p:spPr>
-          <a:xfrm>
-            <a:off x="530352" y="2468880"/>
-            <a:ext cx="11100816" cy="3200400"/>
-          </a:xfrm>
-          <a:prstGeom prst="roundRect">
-            <a:avLst>
-              <a:gd name="adj" fmla="val 2286"/>
-            </a:avLst>
-          </a:prstGeom>
-          <a:solidFill>
-            <a:srgbClr val="E6EEF7"/>
-          </a:solidFill>
-          <a:ln w="9525">
-            <a:solidFill>
-              <a:srgbClr val="005BAC"/>
-            </a:solidFill>
-            <a:prstDash val="dash"/>
-          </a:ln>
-        </p:spPr>
-      </p:sp>
-      <p:sp>
-        <p:nvSpPr>
-          <p:cNvPr id="11" name="Text 8"/>
-          <p:cNvSpPr/>
-          <p:nvPr/>
-        </p:nvSpPr>
-        <p:spPr>
-          <a:xfrm>
-            <a:off x="530352" y="2468880"/>
-            <a:ext cx="11100816" cy="3200400"/>
-          </a:xfrm>
-          <a:prstGeom prst="rect">
-            <a:avLst/>
-          </a:prstGeom>
-          <a:noFill/>
-          <a:ln/>
-        </p:spPr>
-        <p:txBody>
-          <a:bodyPr wrap="square" lIns="0" tIns="0" rIns="0" bIns="0" rtlCol="0" anchor="ctr"/>
-          <a:lstStyle/>
-          <a:p>
-            <a:pPr algn="ctr" indent="0" marL="0">
-              <a:buNone/>
-            </a:pPr>
-            <a:r>
-              <a:rPr lang="en-US" sz="1600" i="1" dirty="0">
-                <a:solidFill>
-                  <a:srgbClr val="005BAC"/>
-                </a:solidFill>
-                <a:latin typeface="Malgun Gothic" pitchFamily="34" charset="0"/>
-                <a:ea typeface="Malgun Gothic" pitchFamily="34" charset="-122"/>
-                <a:cs typeface="Malgun Gothic" pitchFamily="34" charset="-120"/>
-              </a:rPr>
-              <a:t>자료 미제공 – 추후 업데이트</a:t>
-            </a:r>
-            <a:endParaRPr lang="en-US" sz="1600" dirty="0"/>
-          </a:p>
-        </p:txBody>
-      </p:sp>
-      <p:sp>
-        <p:nvSpPr>
-          <p:cNvPr id="12" name="Text 9"/>
-          <p:cNvSpPr/>
-          <p:nvPr/>
-        </p:nvSpPr>
-        <p:spPr>
-          <a:xfrm>
-            <a:off x="457200" y="6547104"/>
-            <a:ext cx="9601200" cy="274320"/>
-          </a:xfrm>
-          <a:prstGeom prst="rect">
-            <a:avLst/>
-          </a:prstGeom>
-          <a:noFill/>
-          <a:ln/>
-        </p:spPr>
-        <p:txBody>
-          <a:bodyPr wrap="square" rtlCol="0" anchor="ctr"/>
-          <a:lstStyle/>
-          <a:p>
-            <a:pPr algn="l" indent="0" marL="0">
-              <a:buNone/>
-            </a:pPr>
-            <a:r>
-              <a:rPr lang="en-US" sz="900" dirty="0">
-                <a:solidFill>
-                  <a:srgbClr val="9E9E9E"/>
-                </a:solidFill>
-                <a:latin typeface="Malgun Gothic" pitchFamily="34" charset="0"/>
-                <a:ea typeface="Malgun Gothic" pitchFamily="34" charset="-122"/>
-                <a:cs typeface="Malgun Gothic" pitchFamily="34" charset="-120"/>
-              </a:rPr>
-              <a:t>FS Group │ FSS Team · 2026년 7월 · Confidential</a:t>
-            </a:r>
-            <a:endParaRPr lang="en-US" sz="900" dirty="0"/>
-          </a:p>
-        </p:txBody>
-      </p:sp>
-      <p:sp>
-        <p:nvSpPr>
-          <p:cNvPr id="13" name="Text 10"/>
-          <p:cNvSpPr/>
-          <p:nvPr/>
-        </p:nvSpPr>
-        <p:spPr>
-          <a:xfrm>
-            <a:off x="11247120" y="6547104"/>
-            <a:ext cx="731520" cy="274320"/>
-          </a:xfrm>
-          <a:prstGeom prst="rect">
-            <a:avLst/>
-          </a:prstGeom>
-          <a:noFill/>
-          <a:ln/>
-        </p:spPr>
-        <p:txBody>
-          <a:bodyPr wrap="square" rtlCol="0" anchor="ctr"/>
-          <a:lstStyle/>
-          <a:p>
-            <a:pPr algn="r" indent="0" marL="0">
-              <a:buNone/>
-            </a:pPr>
-            <a:r>
-              <a:rPr lang="en-US" sz="900" dirty="0">
-                <a:solidFill>
-                  <a:srgbClr val="9E9E9E"/>
-                </a:solidFill>
-                <a:latin typeface="Arial" pitchFamily="34" charset="0"/>
-                <a:ea typeface="Arial" pitchFamily="34" charset="-122"/>
-                <a:cs typeface="Arial" pitchFamily="34" charset="-120"/>
-              </a:rPr>
               <a:t>5</a:t>
             </a:r>
             <a:endParaRPr lang="en-US" sz="900" dirty="0"/>
@@ -8185,7 +10545,7 @@
                 <a:ea typeface="Malgun Gothic" pitchFamily="34" charset="-122"/>
                 <a:cs typeface="Malgun Gothic" pitchFamily="34" charset="-120"/>
               </a:rPr>
-              <a:t>대리점 교육 등 처리</a:t>
+              <a:t>중대 이슈 처리</a:t>
             </a:r>
             <a:endParaRPr lang="en-US" sz="2600" dirty="0"/>
           </a:p>
@@ -8223,23 +10583,18 @@
         </p:nvSpPr>
         <p:spPr>
           <a:xfrm>
-            <a:off x="530352" y="1188720"/>
-            <a:ext cx="5394960" cy="2651760"/>
+            <a:off x="530352" y="1143000"/>
+            <a:ext cx="11100816" cy="777240"/>
           </a:xfrm>
           <a:prstGeom prst="roundRect">
             <a:avLst>
-              <a:gd name="adj" fmla="val 2069"/>
+              <a:gd name="adj" fmla="val 7059"/>
             </a:avLst>
           </a:prstGeom>
           <a:solidFill>
-            <a:srgbClr val="EFEFEF"/>
+            <a:srgbClr val="E6EEF7"/>
           </a:solidFill>
-          <a:ln w="9525">
-            <a:solidFill>
-              <a:srgbClr val="9E9E9E"/>
-            </a:solidFill>
-            <a:prstDash val="dash"/>
-          </a:ln>
+          <a:ln/>
         </p:spPr>
       </p:sp>
       <p:sp>
@@ -8250,8 +10605,8 @@
         </p:nvSpPr>
         <p:spPr>
           <a:xfrm>
-            <a:off x="530352" y="1188720"/>
-            <a:ext cx="5394960" cy="2651760"/>
+            <a:off x="713232" y="1225296"/>
+            <a:ext cx="2926080" cy="320040"/>
           </a:xfrm>
           <a:prstGeom prst="rect">
             <a:avLst/>
@@ -8263,61 +10618,34 @@
           <a:bodyPr wrap="square" lIns="0" tIns="0" rIns="0" bIns="0" rtlCol="0" anchor="ctr"/>
           <a:lstStyle/>
           <a:p>
-            <a:pPr algn="ctr" indent="0" marL="0">
+            <a:pPr indent="0" marL="0">
               <a:buNone/>
             </a:pPr>
             <a:r>
-              <a:rPr lang="en-US" sz="1400" dirty="0">
+              <a:rPr lang="en-US" sz="1200" b="1" dirty="0">
                 <a:solidFill>
-                  <a:srgbClr val="9E9E9E"/>
+                  <a:srgbClr val="005BAC"/>
                 </a:solidFill>
                 <a:latin typeface="Malgun Gothic" pitchFamily="34" charset="0"/>
                 <a:ea typeface="Malgun Gothic" pitchFamily="34" charset="-122"/>
                 <a:cs typeface="Malgun Gothic" pitchFamily="34" charset="-120"/>
               </a:rPr>
-              <a:t>사진 자리 (Placeholder)</a:t>
-            </a:r>
-            <a:endParaRPr lang="en-US" sz="1400" dirty="0"/>
-          </a:p>
-        </p:txBody>
-      </p:sp>
-      <p:sp>
-        <p:nvSpPr>
-          <p:cNvPr id="8" name="Shape 5"/>
-          <p:cNvSpPr/>
-          <p:nvPr/>
-        </p:nvSpPr>
-        <p:spPr>
-          <a:xfrm>
-            <a:off x="6263640" y="1188720"/>
-            <a:ext cx="5394960" cy="2651760"/>
-          </a:xfrm>
-          <a:prstGeom prst="roundRect">
-            <a:avLst>
-              <a:gd name="adj" fmla="val 2069"/>
-            </a:avLst>
-          </a:prstGeom>
-          <a:solidFill>
-            <a:srgbClr val="EFEFEF"/>
-          </a:solidFill>
-          <a:ln w="9525">
-            <a:solidFill>
-              <a:srgbClr val="9E9E9E"/>
-            </a:solidFill>
-            <a:prstDash val="dash"/>
-          </a:ln>
-        </p:spPr>
-      </p:sp>
-      <p:sp>
-        <p:nvSpPr>
-          <p:cNvPr id="9" name="Text 6"/>
-          <p:cNvSpPr/>
-          <p:nvPr/>
-        </p:nvSpPr>
-        <p:spPr>
-          <a:xfrm>
-            <a:off x="6263640" y="1188720"/>
-            <a:ext cx="5394960" cy="2651760"/>
+              <a:t>VOC 레드 플래그 시스템</a:t>
+            </a:r>
+            <a:endParaRPr lang="en-US" sz="1200" dirty="0"/>
+          </a:p>
+        </p:txBody>
+      </p:sp>
+      <p:sp>
+        <p:nvSpPr>
+          <p:cNvPr id="8" name="Text 5"/>
+          <p:cNvSpPr/>
+          <p:nvPr/>
+        </p:nvSpPr>
+        <p:spPr>
+          <a:xfrm>
+            <a:off x="713232" y="1536192"/>
+            <a:ext cx="10789920" cy="320040"/>
           </a:xfrm>
           <a:prstGeom prst="rect">
             <a:avLst/>
@@ -8329,34 +10657,34 @@
           <a:bodyPr wrap="square" lIns="0" tIns="0" rIns="0" bIns="0" rtlCol="0" anchor="ctr"/>
           <a:lstStyle/>
           <a:p>
-            <a:pPr algn="ctr" indent="0" marL="0">
+            <a:pPr indent="0" marL="0">
               <a:buNone/>
             </a:pPr>
             <a:r>
-              <a:rPr lang="en-US" sz="1400" dirty="0">
+              <a:rPr lang="en-US" sz="1100" dirty="0">
                 <a:solidFill>
-                  <a:srgbClr val="9E9E9E"/>
+                  <a:srgbClr val="3F3F3F"/>
                 </a:solidFill>
                 <a:latin typeface="Malgun Gothic" pitchFamily="34" charset="0"/>
                 <a:ea typeface="Malgun Gothic" pitchFamily="34" charset="-122"/>
                 <a:cs typeface="Malgun Gothic" pitchFamily="34" charset="-120"/>
               </a:rPr>
-              <a:t>사진 자리 (Placeholder)</a:t>
-            </a:r>
-            <a:endParaRPr lang="en-US" sz="1400" dirty="0"/>
-          </a:p>
-        </p:txBody>
-      </p:sp>
-      <p:sp>
-        <p:nvSpPr>
-          <p:cNvPr id="10" name="Text 7"/>
-          <p:cNvSpPr/>
-          <p:nvPr/>
-        </p:nvSpPr>
-        <p:spPr>
-          <a:xfrm>
-            <a:off x="530352" y="3977640"/>
-            <a:ext cx="5394960" cy="457200"/>
+              <a:t>평가 2점 이하 또는 서술형 "심각" 분류 건을 즉시 감지 → 분야별 전문가 TFT 구성 → SLA(1차 컨택 24~48시간) 내 처리하여 신뢰 회복</a:t>
+            </a:r>
+            <a:endParaRPr lang="en-US" sz="1100" dirty="0"/>
+          </a:p>
+        </p:txBody>
+      </p:sp>
+      <p:sp>
+        <p:nvSpPr>
+          <p:cNvPr id="9" name="Text 6"/>
+          <p:cNvSpPr/>
+          <p:nvPr/>
+        </p:nvSpPr>
+        <p:spPr>
+          <a:xfrm>
+            <a:off x="530352" y="2103120"/>
+            <a:ext cx="7315200" cy="320040"/>
           </a:xfrm>
           <a:prstGeom prst="rect">
             <a:avLst/>
@@ -8372,9 +10700,75 @@
               <a:buNone/>
             </a:pPr>
             <a:r>
-              <a:rPr lang="en-US" sz="1300" i="1" dirty="0">
+              <a:rPr lang="en-US" sz="1400" b="1" dirty="0">
                 <a:solidFill>
-                  <a:srgbClr val="9E9E9E"/>
+                  <a:srgbClr val="005BAC"/>
+                </a:solidFill>
+                <a:latin typeface="Malgun Gothic" pitchFamily="34" charset="0"/>
+                <a:ea typeface="Malgun Gothic" pitchFamily="34" charset="-122"/>
+                <a:cs typeface="Malgun Gothic" pitchFamily="34" charset="-120"/>
+              </a:rPr>
+              <a:t>접수 · 조치 · 종결 현황</a:t>
+            </a:r>
+            <a:endParaRPr lang="en-US" sz="1400" dirty="0"/>
+          </a:p>
+        </p:txBody>
+      </p:sp>
+      <p:sp>
+        <p:nvSpPr>
+          <p:cNvPr id="10" name="Shape 7"/>
+          <p:cNvSpPr/>
+          <p:nvPr/>
+        </p:nvSpPr>
+        <p:spPr>
+          <a:xfrm>
+            <a:off x="530352" y="2468880"/>
+            <a:ext cx="11100816" cy="3200400"/>
+          </a:xfrm>
+          <a:prstGeom prst="roundRect">
+            <a:avLst>
+              <a:gd name="adj" fmla="val 2286"/>
+            </a:avLst>
+          </a:prstGeom>
+          <a:solidFill>
+            <a:srgbClr val="E6EEF7"/>
+          </a:solidFill>
+          <a:ln w="9525">
+            <a:solidFill>
+              <a:srgbClr val="005BAC"/>
+            </a:solidFill>
+            <a:prstDash val="dash"/>
+          </a:ln>
+        </p:spPr>
+      </p:sp>
+      <p:sp>
+        <p:nvSpPr>
+          <p:cNvPr id="11" name="Text 8"/>
+          <p:cNvSpPr/>
+          <p:nvPr/>
+        </p:nvSpPr>
+        <p:spPr>
+          <a:xfrm>
+            <a:off x="530352" y="2468880"/>
+            <a:ext cx="11100816" cy="3200400"/>
+          </a:xfrm>
+          <a:prstGeom prst="rect">
+            <a:avLst/>
+          </a:prstGeom>
+          <a:noFill/>
+          <a:ln/>
+        </p:spPr>
+        <p:txBody>
+          <a:bodyPr wrap="square" lIns="0" tIns="0" rIns="0" bIns="0" rtlCol="0" anchor="ctr"/>
+          <a:lstStyle/>
+          <a:p>
+            <a:pPr algn="ctr" indent="0" marL="0">
+              <a:buNone/>
+            </a:pPr>
+            <a:r>
+              <a:rPr lang="en-US" sz="1600" i="1" dirty="0">
+                <a:solidFill>
+                  <a:srgbClr val="005BAC"/>
                 </a:solidFill>
                 <a:latin typeface="Malgun Gothic" pitchFamily="34" charset="0"/>
                 <a:ea typeface="Malgun Gothic" pitchFamily="34" charset="-122"/>
@@ -8382,91 +10776,13 @@
               </a:rPr>
               <a:t>자료 미제공 – 추후 업데이트</a:t>
             </a:r>
-            <a:endParaRPr lang="en-US" sz="1300" dirty="0"/>
-          </a:p>
-        </p:txBody>
-      </p:sp>
-      <p:sp>
-        <p:nvSpPr>
-          <p:cNvPr id="11" name="Text 8"/>
-          <p:cNvSpPr/>
-          <p:nvPr/>
-        </p:nvSpPr>
-        <p:spPr>
-          <a:xfrm>
-            <a:off x="6263640" y="3977640"/>
-            <a:ext cx="5394960" cy="457200"/>
-          </a:xfrm>
-          <a:prstGeom prst="rect">
-            <a:avLst/>
-          </a:prstGeom>
-          <a:noFill/>
-          <a:ln/>
-        </p:spPr>
-        <p:txBody>
-          <a:bodyPr wrap="square" lIns="0" tIns="0" rIns="0" bIns="0" rtlCol="0" anchor="ctr"/>
-          <a:lstStyle/>
-          <a:p>
-            <a:pPr indent="0" marL="0">
-              <a:buNone/>
-            </a:pPr>
-            <a:r>
-              <a:rPr lang="en-US" sz="1300" i="1" dirty="0">
-                <a:solidFill>
-                  <a:srgbClr val="9E9E9E"/>
-                </a:solidFill>
-                <a:latin typeface="Malgun Gothic" pitchFamily="34" charset="0"/>
-                <a:ea typeface="Malgun Gothic" pitchFamily="34" charset="-122"/>
-                <a:cs typeface="Malgun Gothic" pitchFamily="34" charset="-120"/>
-              </a:rPr>
-              <a:t>자료 미제공 – 추후 업데이트</a:t>
-            </a:r>
-            <a:endParaRPr lang="en-US" sz="1300" dirty="0"/>
+            <a:endParaRPr lang="en-US" sz="1600" dirty="0"/>
           </a:p>
         </p:txBody>
       </p:sp>
       <p:sp>
         <p:nvSpPr>
           <p:cNvPr id="12" name="Text 9"/>
-          <p:cNvSpPr/>
-          <p:nvPr/>
-        </p:nvSpPr>
-        <p:spPr>
-          <a:xfrm>
-            <a:off x="530352" y="4480560"/>
-            <a:ext cx="11100816" cy="365760"/>
-          </a:xfrm>
-          <a:prstGeom prst="rect">
-            <a:avLst/>
-          </a:prstGeom>
-          <a:noFill/>
-          <a:ln/>
-        </p:spPr>
-        <p:txBody>
-          <a:bodyPr wrap="square" lIns="0" tIns="0" rIns="0" bIns="0" rtlCol="0" anchor="ctr"/>
-          <a:lstStyle/>
-          <a:p>
-            <a:pPr indent="0" marL="0">
-              <a:buNone/>
-            </a:pPr>
-            <a:r>
-              <a:rPr lang="en-US" sz="1100" i="1" dirty="0">
-                <a:solidFill>
-                  <a:srgbClr val="9E9E9E"/>
-                </a:solidFill>
-                <a:latin typeface="Malgun Gothic" pitchFamily="34" charset="0"/>
-                <a:ea typeface="Malgun Gothic" pitchFamily="34" charset="-122"/>
-                <a:cs typeface="Malgun Gothic" pitchFamily="34" charset="-120"/>
-              </a:rPr>
-              <a:t>대리점(에이전시) 대상 기술 교육, 서비스 프로세스 안내 등 처리 현황</a:t>
-            </a:r>
-            <a:endParaRPr lang="en-US" sz="1100" dirty="0"/>
-          </a:p>
-        </p:txBody>
-      </p:sp>
-      <p:sp>
-        <p:nvSpPr>
-          <p:cNvPr id="13" name="Text 10"/>
           <p:cNvSpPr/>
           <p:nvPr/>
         </p:nvSpPr>
@@ -8505,7 +10821,7 @@
       </p:sp>
       <p:sp>
         <p:nvSpPr>
-          <p:cNvPr id="14" name="Text 11"/>
+          <p:cNvPr id="13" name="Text 10"/>
           <p:cNvSpPr/>
           <p:nvPr/>
         </p:nvSpPr>
@@ -8666,7 +10982,7 @@
                 <a:ea typeface="Malgun Gothic" pitchFamily="34" charset="-122"/>
                 <a:cs typeface="Malgun Gothic" pitchFamily="34" charset="-120"/>
               </a:rPr>
-              <a:t>직원교육</a:t>
+              <a:t>대리점 교육 등 처리</a:t>
             </a:r>
             <a:endParaRPr lang="en-US" sz="2600" dirty="0"/>
           </a:p>
@@ -8698,57 +11014,18 @@
       </p:pic>
       <p:sp>
         <p:nvSpPr>
-          <p:cNvPr id="6" name="Text 3"/>
-          <p:cNvSpPr/>
-          <p:nvPr/>
-        </p:nvSpPr>
-        <p:spPr>
-          <a:xfrm>
-            <a:off x="530352" y="1051560"/>
-            <a:ext cx="11100816" cy="365760"/>
-          </a:xfrm>
-          <a:prstGeom prst="rect">
-            <a:avLst/>
-          </a:prstGeom>
-          <a:noFill/>
-          <a:ln/>
-        </p:spPr>
-        <p:txBody>
-          <a:bodyPr wrap="square" lIns="0" tIns="0" rIns="0" bIns="0" rtlCol="0" anchor="ctr"/>
-          <a:lstStyle/>
-          <a:p>
-            <a:pPr indent="0" marL="0">
-              <a:buNone/>
-            </a:pPr>
-            <a:r>
-              <a:rPr lang="en-US" sz="1100" i="1" dirty="0">
-                <a:solidFill>
-                  <a:srgbClr val="9E9E9E"/>
-                </a:solidFill>
-                <a:latin typeface="Malgun Gothic" pitchFamily="34" charset="0"/>
-                <a:ea typeface="Malgun Gothic" pitchFamily="34" charset="-122"/>
-                <a:cs typeface="Malgun Gothic" pitchFamily="34" charset="-120"/>
-              </a:rPr>
-              <a:t>Sysmex Technical Academy: 주니어 레벨 빠른 성장 및 Expert Engineer 육성 · Working Group: 4개 분야(Hema/Urine/Coa/Immuno) 전문성 강화</a:t>
-            </a:r>
-            <a:endParaRPr lang="en-US" sz="1100" dirty="0"/>
-          </a:p>
-        </p:txBody>
-      </p:sp>
-      <p:sp>
-        <p:nvSpPr>
-          <p:cNvPr id="7" name="Shape 4"/>
-          <p:cNvSpPr/>
-          <p:nvPr/>
-        </p:nvSpPr>
-        <p:spPr>
-          <a:xfrm>
-            <a:off x="530352" y="1508760"/>
-            <a:ext cx="5394960" cy="2468880"/>
+          <p:cNvPr id="6" name="Shape 3"/>
+          <p:cNvSpPr/>
+          <p:nvPr/>
+        </p:nvSpPr>
+        <p:spPr>
+          <a:xfrm>
+            <a:off x="530352" y="1188720"/>
+            <a:ext cx="5394960" cy="2651760"/>
           </a:xfrm>
           <a:prstGeom prst="roundRect">
             <a:avLst>
-              <a:gd name="adj" fmla="val 2222"/>
+              <a:gd name="adj" fmla="val 2069"/>
             </a:avLst>
           </a:prstGeom>
           <a:solidFill>
@@ -8764,14 +11041,14 @@
       </p:sp>
       <p:sp>
         <p:nvSpPr>
-          <p:cNvPr id="8" name="Text 5"/>
-          <p:cNvSpPr/>
-          <p:nvPr/>
-        </p:nvSpPr>
-        <p:spPr>
-          <a:xfrm>
-            <a:off x="530352" y="1508760"/>
-            <a:ext cx="5394960" cy="2468880"/>
+          <p:cNvPr id="7" name="Text 4"/>
+          <p:cNvSpPr/>
+          <p:nvPr/>
+        </p:nvSpPr>
+        <p:spPr>
+          <a:xfrm>
+            <a:off x="530352" y="1188720"/>
+            <a:ext cx="5394960" cy="2651760"/>
           </a:xfrm>
           <a:prstGeom prst="rect">
             <a:avLst/>
@@ -8803,18 +11080,18 @@
       </p:sp>
       <p:sp>
         <p:nvSpPr>
-          <p:cNvPr id="9" name="Shape 6"/>
-          <p:cNvSpPr/>
-          <p:nvPr/>
-        </p:nvSpPr>
-        <p:spPr>
-          <a:xfrm>
-            <a:off x="6263640" y="1508760"/>
-            <a:ext cx="5394960" cy="2468880"/>
+          <p:cNvPr id="8" name="Shape 5"/>
+          <p:cNvSpPr/>
+          <p:nvPr/>
+        </p:nvSpPr>
+        <p:spPr>
+          <a:xfrm>
+            <a:off x="6263640" y="1188720"/>
+            <a:ext cx="5394960" cy="2651760"/>
           </a:xfrm>
           <a:prstGeom prst="roundRect">
             <a:avLst>
-              <a:gd name="adj" fmla="val 2222"/>
+              <a:gd name="adj" fmla="val 2069"/>
             </a:avLst>
           </a:prstGeom>
           <a:solidFill>
@@ -8830,14 +11107,14 @@
       </p:sp>
       <p:sp>
         <p:nvSpPr>
-          <p:cNvPr id="10" name="Text 7"/>
-          <p:cNvSpPr/>
-          <p:nvPr/>
-        </p:nvSpPr>
-        <p:spPr>
-          <a:xfrm>
-            <a:off x="6263640" y="1508760"/>
-            <a:ext cx="5394960" cy="2468880"/>
+          <p:cNvPr id="9" name="Text 6"/>
+          <p:cNvSpPr/>
+          <p:nvPr/>
+        </p:nvSpPr>
+        <p:spPr>
+          <a:xfrm>
+            <a:off x="6263640" y="1188720"/>
+            <a:ext cx="5394960" cy="2651760"/>
           </a:xfrm>
           <a:prstGeom prst="rect">
             <a:avLst/>
@@ -8869,13 +11146,13 @@
       </p:sp>
       <p:sp>
         <p:nvSpPr>
-          <p:cNvPr id="11" name="Text 8"/>
-          <p:cNvSpPr/>
-          <p:nvPr/>
-        </p:nvSpPr>
-        <p:spPr>
-          <a:xfrm>
-            <a:off x="530352" y="4114800"/>
+          <p:cNvPr id="10" name="Text 7"/>
+          <p:cNvSpPr/>
+          <p:nvPr/>
+        </p:nvSpPr>
+        <p:spPr>
+          <a:xfrm>
+            <a:off x="530352" y="3977640"/>
             <a:ext cx="5394960" cy="457200"/>
           </a:xfrm>
           <a:prstGeom prst="rect">
@@ -8900,7 +11177,7 @@
                 <a:ea typeface="Malgun Gothic" pitchFamily="34" charset="-122"/>
                 <a:cs typeface="Malgun Gothic" pitchFamily="34" charset="-120"/>
               </a:rPr>
-              <a:t>Technical Academy — 자료 미제공 – 추후 업데이트</a:t>
+              <a:t>자료 미제공 – 추후 업데이트</a:t>
             </a:r>
             <a:endParaRPr lang="en-US" sz="1300" dirty="0"/>
           </a:p>
@@ -8908,13 +11185,13 @@
       </p:sp>
       <p:sp>
         <p:nvSpPr>
-          <p:cNvPr id="12" name="Text 9"/>
-          <p:cNvSpPr/>
-          <p:nvPr/>
-        </p:nvSpPr>
-        <p:spPr>
-          <a:xfrm>
-            <a:off x="6263640" y="4114800"/>
+          <p:cNvPr id="11" name="Text 8"/>
+          <p:cNvSpPr/>
+          <p:nvPr/>
+        </p:nvSpPr>
+        <p:spPr>
+          <a:xfrm>
+            <a:off x="6263640" y="3977640"/>
             <a:ext cx="5394960" cy="457200"/>
           </a:xfrm>
           <a:prstGeom prst="rect">
@@ -8939,9 +11216,48 @@
                 <a:ea typeface="Malgun Gothic" pitchFamily="34" charset="-122"/>
                 <a:cs typeface="Malgun Gothic" pitchFamily="34" charset="-120"/>
               </a:rPr>
-              <a:t>Working Group — 자료 미제공 – 추후 업데이트</a:t>
+              <a:t>자료 미제공 – 추후 업데이트</a:t>
             </a:r>
             <a:endParaRPr lang="en-US" sz="1300" dirty="0"/>
+          </a:p>
+        </p:txBody>
+      </p:sp>
+      <p:sp>
+        <p:nvSpPr>
+          <p:cNvPr id="12" name="Text 9"/>
+          <p:cNvSpPr/>
+          <p:nvPr/>
+        </p:nvSpPr>
+        <p:spPr>
+          <a:xfrm>
+            <a:off x="530352" y="4480560"/>
+            <a:ext cx="11100816" cy="365760"/>
+          </a:xfrm>
+          <a:prstGeom prst="rect">
+            <a:avLst/>
+          </a:prstGeom>
+          <a:noFill/>
+          <a:ln/>
+        </p:spPr>
+        <p:txBody>
+          <a:bodyPr wrap="square" lIns="0" tIns="0" rIns="0" bIns="0" rtlCol="0" anchor="ctr"/>
+          <a:lstStyle/>
+          <a:p>
+            <a:pPr indent="0" marL="0">
+              <a:buNone/>
+            </a:pPr>
+            <a:r>
+              <a:rPr lang="en-US" sz="1100" i="1" dirty="0">
+                <a:solidFill>
+                  <a:srgbClr val="9E9E9E"/>
+                </a:solidFill>
+                <a:latin typeface="Malgun Gothic" pitchFamily="34" charset="0"/>
+                <a:ea typeface="Malgun Gothic" pitchFamily="34" charset="-122"/>
+                <a:cs typeface="Malgun Gothic" pitchFamily="34" charset="-120"/>
+              </a:rPr>
+              <a:t>대리점(에이전시) 대상 기술 교육, 서비스 프로세스 안내 등 처리 현황</a:t>
+            </a:r>
+            <a:endParaRPr lang="en-US" sz="1100" dirty="0"/>
           </a:p>
         </p:txBody>
       </p:sp>
@@ -9147,7 +11463,7 @@
                 <a:ea typeface="Malgun Gothic" pitchFamily="34" charset="-122"/>
                 <a:cs typeface="Malgun Gothic" pitchFamily="34" charset="-120"/>
               </a:rPr>
-              <a:t>고객 중심 서비스 하이라이트</a:t>
+              <a:t>직원교육</a:t>
             </a:r>
             <a:endParaRPr lang="en-US" sz="2600" dirty="0"/>
           </a:p>
@@ -9179,36 +11495,14 @@
       </p:pic>
       <p:sp>
         <p:nvSpPr>
-          <p:cNvPr id="6" name="Shape 3"/>
-          <p:cNvSpPr/>
-          <p:nvPr/>
-        </p:nvSpPr>
-        <p:spPr>
-          <a:xfrm>
-            <a:off x="530352" y="1234440"/>
-            <a:ext cx="3566160" cy="2011680"/>
-          </a:xfrm>
-          <a:prstGeom prst="roundRect">
-            <a:avLst>
-              <a:gd name="adj" fmla="val 3636"/>
-            </a:avLst>
-          </a:prstGeom>
-          <a:solidFill>
-            <a:srgbClr val="F5F8FC"/>
-          </a:solidFill>
-          <a:ln/>
-        </p:spPr>
-      </p:sp>
-      <p:sp>
-        <p:nvSpPr>
-          <p:cNvPr id="7" name="Text 4"/>
-          <p:cNvSpPr/>
-          <p:nvPr/>
-        </p:nvSpPr>
-        <p:spPr>
-          <a:xfrm>
-            <a:off x="713232" y="1417320"/>
-            <a:ext cx="3200400" cy="457200"/>
+          <p:cNvPr id="6" name="Text 3"/>
+          <p:cNvSpPr/>
+          <p:nvPr/>
+        </p:nvSpPr>
+        <p:spPr>
+          <a:xfrm>
+            <a:off x="530352" y="1051560"/>
+            <a:ext cx="11100816" cy="365760"/>
           </a:xfrm>
           <a:prstGeom prst="rect">
             <a:avLst/>
@@ -9220,85 +11514,7 @@
           <a:bodyPr wrap="square" lIns="0" tIns="0" rIns="0" bIns="0" rtlCol="0" anchor="ctr"/>
           <a:lstStyle/>
           <a:p>
-            <a:pPr algn="ctr" indent="0" marL="0">
-              <a:buNone/>
-            </a:pPr>
-            <a:r>
-              <a:rPr lang="en-US" sz="1500" b="1" dirty="0">
-                <a:solidFill>
-                  <a:srgbClr val="005BAC"/>
-                </a:solidFill>
-                <a:latin typeface="Malgun Gothic" pitchFamily="34" charset="0"/>
-                <a:ea typeface="Malgun Gothic" pitchFamily="34" charset="-122"/>
-                <a:cs typeface="Malgun Gothic" pitchFamily="34" charset="-120"/>
-              </a:rPr>
-              <a:t>VOC 대응</a:t>
-            </a:r>
-            <a:endParaRPr lang="en-US" sz="1500" dirty="0"/>
-          </a:p>
-        </p:txBody>
-      </p:sp>
-      <p:sp>
-        <p:nvSpPr>
-          <p:cNvPr id="8" name="Text 5"/>
-          <p:cNvSpPr/>
-          <p:nvPr/>
-        </p:nvSpPr>
-        <p:spPr>
-          <a:xfrm>
-            <a:off x="713232" y="1920240"/>
-            <a:ext cx="3200400" cy="365760"/>
-          </a:xfrm>
-          <a:prstGeom prst="rect">
-            <a:avLst/>
-          </a:prstGeom>
-          <a:noFill/>
-          <a:ln/>
-        </p:spPr>
-        <p:txBody>
-          <a:bodyPr wrap="square" lIns="0" tIns="0" rIns="0" bIns="0" rtlCol="0" anchor="ctr"/>
-          <a:lstStyle/>
-          <a:p>
-            <a:pPr algn="ctr" indent="0" marL="0">
-              <a:buNone/>
-            </a:pPr>
-            <a:r>
-              <a:rPr lang="en-US" sz="1100" dirty="0">
-                <a:solidFill>
-                  <a:srgbClr val="3F3F3F"/>
-                </a:solidFill>
-                <a:latin typeface="Malgun Gothic" pitchFamily="34" charset="0"/>
-                <a:ea typeface="Malgun Gothic" pitchFamily="34" charset="-122"/>
-                <a:cs typeface="Malgun Gothic" pitchFamily="34" charset="-120"/>
-              </a:rPr>
-              <a:t>고객 피드백 기반 개선</a:t>
-            </a:r>
-            <a:endParaRPr lang="en-US" sz="1100" dirty="0"/>
-          </a:p>
-        </p:txBody>
-      </p:sp>
-      <p:sp>
-        <p:nvSpPr>
-          <p:cNvPr id="9" name="Text 6"/>
-          <p:cNvSpPr/>
-          <p:nvPr/>
-        </p:nvSpPr>
-        <p:spPr>
-          <a:xfrm>
-            <a:off x="713232" y="2377440"/>
-            <a:ext cx="3200400" cy="731520"/>
-          </a:xfrm>
-          <a:prstGeom prst="rect">
-            <a:avLst/>
-          </a:prstGeom>
-          <a:noFill/>
-          <a:ln/>
-        </p:spPr>
-        <p:txBody>
-          <a:bodyPr wrap="square" lIns="0" tIns="0" rIns="0" bIns="0" rtlCol="0" anchor="ctr"/>
-          <a:lstStyle/>
-          <a:p>
-            <a:pPr algn="ctr" indent="0" marL="0">
+            <a:pPr indent="0" marL="0">
               <a:buNone/>
             </a:pPr>
             <a:r>
@@ -9310,7 +11526,7 @@
                 <a:ea typeface="Malgun Gothic" pitchFamily="34" charset="-122"/>
                 <a:cs typeface="Malgun Gothic" pitchFamily="34" charset="-120"/>
               </a:rPr>
-              <a:t>자료 미제공 – 추후 업데이트</a:t>
+              <a:t>Sysmex Technical Academy: 주니어 레벨 빠른 성장 및 Expert Engineer 육성 · Working Group: 4개 분야(Hema/Urine/Coa/Immuno) 전문성 강화</a:t>
             </a:r>
             <a:endParaRPr lang="en-US" sz="1100" dirty="0"/>
           </a:p>
@@ -9318,36 +11534,41 @@
       </p:sp>
       <p:sp>
         <p:nvSpPr>
-          <p:cNvPr id="10" name="Shape 7"/>
-          <p:cNvSpPr/>
-          <p:nvPr/>
-        </p:nvSpPr>
-        <p:spPr>
-          <a:xfrm>
-            <a:off x="4279392" y="1234440"/>
-            <a:ext cx="3566160" cy="2011680"/>
+          <p:cNvPr id="7" name="Shape 4"/>
+          <p:cNvSpPr/>
+          <p:nvPr/>
+        </p:nvSpPr>
+        <p:spPr>
+          <a:xfrm>
+            <a:off x="530352" y="1508760"/>
+            <a:ext cx="5394960" cy="2468880"/>
           </a:xfrm>
           <a:prstGeom prst="roundRect">
             <a:avLst>
-              <a:gd name="adj" fmla="val 3636"/>
+              <a:gd name="adj" fmla="val 2222"/>
             </a:avLst>
           </a:prstGeom>
           <a:solidFill>
-            <a:srgbClr val="F5F8FC"/>
+            <a:srgbClr val="EFEFEF"/>
           </a:solidFill>
-          <a:ln/>
-        </p:spPr>
-      </p:sp>
-      <p:sp>
-        <p:nvSpPr>
-          <p:cNvPr id="11" name="Text 8"/>
-          <p:cNvSpPr/>
-          <p:nvPr/>
-        </p:nvSpPr>
-        <p:spPr>
-          <a:xfrm>
-            <a:off x="4462272" y="1417320"/>
-            <a:ext cx="3200400" cy="457200"/>
+          <a:ln w="9525">
+            <a:solidFill>
+              <a:srgbClr val="9E9E9E"/>
+            </a:solidFill>
+            <a:prstDash val="dash"/>
+          </a:ln>
+        </p:spPr>
+      </p:sp>
+      <p:sp>
+        <p:nvSpPr>
+          <p:cNvPr id="8" name="Text 5"/>
+          <p:cNvSpPr/>
+          <p:nvPr/>
+        </p:nvSpPr>
+        <p:spPr>
+          <a:xfrm>
+            <a:off x="530352" y="1508760"/>
+            <a:ext cx="5394960" cy="2468880"/>
           </a:xfrm>
           <a:prstGeom prst="rect">
             <a:avLst/>
@@ -9363,85 +11584,7 @@
               <a:buNone/>
             </a:pPr>
             <a:r>
-              <a:rPr lang="en-US" sz="1500" b="1" dirty="0">
-                <a:solidFill>
-                  <a:srgbClr val="005BAC"/>
-                </a:solidFill>
-                <a:latin typeface="Malgun Gothic" pitchFamily="34" charset="0"/>
-                <a:ea typeface="Malgun Gothic" pitchFamily="34" charset="-122"/>
-                <a:cs typeface="Malgun Gothic" pitchFamily="34" charset="-120"/>
-              </a:rPr>
-              <a:t>중대 이슈 대응력</a:t>
-            </a:r>
-            <a:endParaRPr lang="en-US" sz="1500" dirty="0"/>
-          </a:p>
-        </p:txBody>
-      </p:sp>
-      <p:sp>
-        <p:nvSpPr>
-          <p:cNvPr id="12" name="Text 9"/>
-          <p:cNvSpPr/>
-          <p:nvPr/>
-        </p:nvSpPr>
-        <p:spPr>
-          <a:xfrm>
-            <a:off x="4462272" y="1920240"/>
-            <a:ext cx="3200400" cy="365760"/>
-          </a:xfrm>
-          <a:prstGeom prst="rect">
-            <a:avLst/>
-          </a:prstGeom>
-          <a:noFill/>
-          <a:ln/>
-        </p:spPr>
-        <p:txBody>
-          <a:bodyPr wrap="square" lIns="0" tIns="0" rIns="0" bIns="0" rtlCol="0" anchor="ctr"/>
-          <a:lstStyle/>
-          <a:p>
-            <a:pPr algn="ctr" indent="0" marL="0">
-              <a:buNone/>
-            </a:pPr>
-            <a:r>
-              <a:rPr lang="en-US" sz="1100" dirty="0">
-                <a:solidFill>
-                  <a:srgbClr val="3F3F3F"/>
-                </a:solidFill>
-                <a:latin typeface="Malgun Gothic" pitchFamily="34" charset="0"/>
-                <a:ea typeface="Malgun Gothic" pitchFamily="34" charset="-122"/>
-                <a:cs typeface="Malgun Gothic" pitchFamily="34" charset="-120"/>
-              </a:rPr>
-              <a:t>SLA 준수 · 신속 종결</a:t>
-            </a:r>
-            <a:endParaRPr lang="en-US" sz="1100" dirty="0"/>
-          </a:p>
-        </p:txBody>
-      </p:sp>
-      <p:sp>
-        <p:nvSpPr>
-          <p:cNvPr id="13" name="Text 10"/>
-          <p:cNvSpPr/>
-          <p:nvPr/>
-        </p:nvSpPr>
-        <p:spPr>
-          <a:xfrm>
-            <a:off x="4462272" y="2377440"/>
-            <a:ext cx="3200400" cy="731520"/>
-          </a:xfrm>
-          <a:prstGeom prst="rect">
-            <a:avLst/>
-          </a:prstGeom>
-          <a:noFill/>
-          <a:ln/>
-        </p:spPr>
-        <p:txBody>
-          <a:bodyPr wrap="square" lIns="0" tIns="0" rIns="0" bIns="0" rtlCol="0" anchor="ctr"/>
-          <a:lstStyle/>
-          <a:p>
-            <a:pPr algn="ctr" indent="0" marL="0">
-              <a:buNone/>
-            </a:pPr>
-            <a:r>
-              <a:rPr lang="en-US" sz="1100" i="1" dirty="0">
+              <a:rPr lang="en-US" sz="1400" dirty="0">
                 <a:solidFill>
                   <a:srgbClr val="9E9E9E"/>
                 </a:solidFill>
@@ -9449,44 +11592,49 @@
                 <a:ea typeface="Malgun Gothic" pitchFamily="34" charset="-122"/>
                 <a:cs typeface="Malgun Gothic" pitchFamily="34" charset="-120"/>
               </a:rPr>
-              <a:t>자료 미제공 – 추후 업데이트</a:t>
-            </a:r>
-            <a:endParaRPr lang="en-US" sz="1100" dirty="0"/>
-          </a:p>
-        </p:txBody>
-      </p:sp>
-      <p:sp>
-        <p:nvSpPr>
-          <p:cNvPr id="14" name="Shape 11"/>
-          <p:cNvSpPr/>
-          <p:nvPr/>
-        </p:nvSpPr>
-        <p:spPr>
-          <a:xfrm>
-            <a:off x="8028432" y="1234440"/>
-            <a:ext cx="3566160" cy="2011680"/>
+              <a:t>사진 자리 (Placeholder)</a:t>
+            </a:r>
+            <a:endParaRPr lang="en-US" sz="1400" dirty="0"/>
+          </a:p>
+        </p:txBody>
+      </p:sp>
+      <p:sp>
+        <p:nvSpPr>
+          <p:cNvPr id="9" name="Shape 6"/>
+          <p:cNvSpPr/>
+          <p:nvPr/>
+        </p:nvSpPr>
+        <p:spPr>
+          <a:xfrm>
+            <a:off x="6263640" y="1508760"/>
+            <a:ext cx="5394960" cy="2468880"/>
           </a:xfrm>
           <a:prstGeom prst="roundRect">
             <a:avLst>
-              <a:gd name="adj" fmla="val 3636"/>
+              <a:gd name="adj" fmla="val 2222"/>
             </a:avLst>
           </a:prstGeom>
           <a:solidFill>
-            <a:srgbClr val="F5F8FC"/>
+            <a:srgbClr val="EFEFEF"/>
           </a:solidFill>
-          <a:ln/>
-        </p:spPr>
-      </p:sp>
-      <p:sp>
-        <p:nvSpPr>
-          <p:cNvPr id="15" name="Text 12"/>
-          <p:cNvSpPr/>
-          <p:nvPr/>
-        </p:nvSpPr>
-        <p:spPr>
-          <a:xfrm>
-            <a:off x="8211312" y="1417320"/>
-            <a:ext cx="3200400" cy="457200"/>
+          <a:ln w="9525">
+            <a:solidFill>
+              <a:srgbClr val="9E9E9E"/>
+            </a:solidFill>
+            <a:prstDash val="dash"/>
+          </a:ln>
+        </p:spPr>
+      </p:sp>
+      <p:sp>
+        <p:nvSpPr>
+          <p:cNvPr id="10" name="Text 7"/>
+          <p:cNvSpPr/>
+          <p:nvPr/>
+        </p:nvSpPr>
+        <p:spPr>
+          <a:xfrm>
+            <a:off x="6263640" y="1508760"/>
+            <a:ext cx="5394960" cy="2468880"/>
           </a:xfrm>
           <a:prstGeom prst="rect">
             <a:avLst/>
@@ -9502,85 +11650,7 @@
               <a:buNone/>
             </a:pPr>
             <a:r>
-              <a:rPr lang="en-US" sz="1500" b="1" dirty="0">
-                <a:solidFill>
-                  <a:srgbClr val="005BAC"/>
-                </a:solidFill>
-                <a:latin typeface="Malgun Gothic" pitchFamily="34" charset="0"/>
-                <a:ea typeface="Malgun Gothic" pitchFamily="34" charset="-122"/>
-                <a:cs typeface="Malgun Gothic" pitchFamily="34" charset="-120"/>
-              </a:rPr>
-              <a:t>대리점/직원 역량</a:t>
-            </a:r>
-            <a:endParaRPr lang="en-US" sz="1500" dirty="0"/>
-          </a:p>
-        </p:txBody>
-      </p:sp>
-      <p:sp>
-        <p:nvSpPr>
-          <p:cNvPr id="16" name="Text 13"/>
-          <p:cNvSpPr/>
-          <p:nvPr/>
-        </p:nvSpPr>
-        <p:spPr>
-          <a:xfrm>
-            <a:off x="8211312" y="1920240"/>
-            <a:ext cx="3200400" cy="365760"/>
-          </a:xfrm>
-          <a:prstGeom prst="rect">
-            <a:avLst/>
-          </a:prstGeom>
-          <a:noFill/>
-          <a:ln/>
-        </p:spPr>
-        <p:txBody>
-          <a:bodyPr wrap="square" lIns="0" tIns="0" rIns="0" bIns="0" rtlCol="0" anchor="ctr"/>
-          <a:lstStyle/>
-          <a:p>
-            <a:pPr algn="ctr" indent="0" marL="0">
-              <a:buNone/>
-            </a:pPr>
-            <a:r>
-              <a:rPr lang="en-US" sz="1100" dirty="0">
-                <a:solidFill>
-                  <a:srgbClr val="3F3F3F"/>
-                </a:solidFill>
-                <a:latin typeface="Malgun Gothic" pitchFamily="34" charset="0"/>
-                <a:ea typeface="Malgun Gothic" pitchFamily="34" charset="-122"/>
-                <a:cs typeface="Malgun Gothic" pitchFamily="34" charset="-120"/>
-              </a:rPr>
-              <a:t>교육 통한 서비스 품질 제고</a:t>
-            </a:r>
-            <a:endParaRPr lang="en-US" sz="1100" dirty="0"/>
-          </a:p>
-        </p:txBody>
-      </p:sp>
-      <p:sp>
-        <p:nvSpPr>
-          <p:cNvPr id="17" name="Text 14"/>
-          <p:cNvSpPr/>
-          <p:nvPr/>
-        </p:nvSpPr>
-        <p:spPr>
-          <a:xfrm>
-            <a:off x="8211312" y="2377440"/>
-            <a:ext cx="3200400" cy="731520"/>
-          </a:xfrm>
-          <a:prstGeom prst="rect">
-            <a:avLst/>
-          </a:prstGeom>
-          <a:noFill/>
-          <a:ln/>
-        </p:spPr>
-        <p:txBody>
-          <a:bodyPr wrap="square" lIns="0" tIns="0" rIns="0" bIns="0" rtlCol="0" anchor="ctr"/>
-          <a:lstStyle/>
-          <a:p>
-            <a:pPr algn="ctr" indent="0" marL="0">
-              <a:buNone/>
-            </a:pPr>
-            <a:r>
-              <a:rPr lang="en-US" sz="1100" i="1" dirty="0">
+              <a:rPr lang="en-US" sz="1400" dirty="0">
                 <a:solidFill>
                   <a:srgbClr val="9E9E9E"/>
                 </a:solidFill>
@@ -9588,83 +11658,22 @@
                 <a:ea typeface="Malgun Gothic" pitchFamily="34" charset="-122"/>
                 <a:cs typeface="Malgun Gothic" pitchFamily="34" charset="-120"/>
               </a:rPr>
-              <a:t>자료 미제공 – 추후 업데이트</a:t>
-            </a:r>
-            <a:endParaRPr lang="en-US" sz="1100" dirty="0"/>
-          </a:p>
-        </p:txBody>
-      </p:sp>
-      <p:sp>
-        <p:nvSpPr>
-          <p:cNvPr id="18" name="Shape 15"/>
-          <p:cNvSpPr/>
-          <p:nvPr/>
-        </p:nvSpPr>
-        <p:spPr>
-          <a:xfrm>
-            <a:off x="530352" y="3520440"/>
-            <a:ext cx="11100816" cy="2103120"/>
-          </a:xfrm>
-          <a:prstGeom prst="roundRect">
-            <a:avLst>
-              <a:gd name="adj" fmla="val 3478"/>
-            </a:avLst>
-          </a:prstGeom>
-          <a:solidFill>
-            <a:srgbClr val="E6EEF7"/>
-          </a:solidFill>
-          <a:ln/>
-        </p:spPr>
-      </p:sp>
-      <p:sp>
-        <p:nvSpPr>
-          <p:cNvPr id="19" name="Text 16"/>
-          <p:cNvSpPr/>
-          <p:nvPr/>
-        </p:nvSpPr>
-        <p:spPr>
-          <a:xfrm>
-            <a:off x="777240" y="3657600"/>
-            <a:ext cx="4572000" cy="320040"/>
-          </a:xfrm>
-          <a:prstGeom prst="rect">
-            <a:avLst/>
-          </a:prstGeom>
-          <a:noFill/>
-          <a:ln/>
-        </p:spPr>
-        <p:txBody>
-          <a:bodyPr wrap="square" lIns="0" tIns="0" rIns="0" bIns="0" rtlCol="0" anchor="ctr"/>
-          <a:lstStyle/>
-          <a:p>
-            <a:pPr indent="0" marL="0">
-              <a:buNone/>
-            </a:pPr>
-            <a:r>
-              <a:rPr lang="en-US" sz="1300" b="1" dirty="0">
-                <a:solidFill>
-                  <a:srgbClr val="005BAC"/>
-                </a:solidFill>
-                <a:latin typeface="Malgun Gothic" pitchFamily="34" charset="0"/>
-                <a:ea typeface="Malgun Gothic" pitchFamily="34" charset="-122"/>
-                <a:cs typeface="Malgun Gothic" pitchFamily="34" charset="-120"/>
-              </a:rPr>
-              <a:t>고객 중심 Insight</a:t>
-            </a:r>
-            <a:endParaRPr lang="en-US" sz="1300" dirty="0"/>
-          </a:p>
-        </p:txBody>
-      </p:sp>
-      <p:sp>
-        <p:nvSpPr>
-          <p:cNvPr id="20" name="Text 17"/>
-          <p:cNvSpPr/>
-          <p:nvPr/>
-        </p:nvSpPr>
-        <p:spPr>
-          <a:xfrm>
-            <a:off x="777240" y="4023360"/>
-            <a:ext cx="10607040" cy="1463040"/>
+              <a:t>사진 자리 (Placeholder)</a:t>
+            </a:r>
+            <a:endParaRPr lang="en-US" sz="1400" dirty="0"/>
+          </a:p>
+        </p:txBody>
+      </p:sp>
+      <p:sp>
+        <p:nvSpPr>
+          <p:cNvPr id="11" name="Text 8"/>
+          <p:cNvSpPr/>
+          <p:nvPr/>
+        </p:nvSpPr>
+        <p:spPr>
+          <a:xfrm>
+            <a:off x="530352" y="4114800"/>
+            <a:ext cx="5394960" cy="457200"/>
           </a:xfrm>
           <a:prstGeom prst="rect">
             <a:avLst/>
@@ -9688,7 +11697,7 @@
                 <a:ea typeface="Malgun Gothic" pitchFamily="34" charset="-122"/>
                 <a:cs typeface="Malgun Gothic" pitchFamily="34" charset="-120"/>
               </a:rPr>
-              <a:t>자료 미제공 – 추후 업데이트</a:t>
+              <a:t>Technical Academy — 자료 미제공 – 추후 업데이트</a:t>
             </a:r>
             <a:endParaRPr lang="en-US" sz="1300" dirty="0"/>
           </a:p>
@@ -9696,7 +11705,46 @@
       </p:sp>
       <p:sp>
         <p:nvSpPr>
-          <p:cNvPr id="21" name="Text 18"/>
+          <p:cNvPr id="12" name="Text 9"/>
+          <p:cNvSpPr/>
+          <p:nvPr/>
+        </p:nvSpPr>
+        <p:spPr>
+          <a:xfrm>
+            <a:off x="6263640" y="4114800"/>
+            <a:ext cx="5394960" cy="457200"/>
+          </a:xfrm>
+          <a:prstGeom prst="rect">
+            <a:avLst/>
+          </a:prstGeom>
+          <a:noFill/>
+          <a:ln/>
+        </p:spPr>
+        <p:txBody>
+          <a:bodyPr wrap="square" lIns="0" tIns="0" rIns="0" bIns="0" rtlCol="0" anchor="ctr"/>
+          <a:lstStyle/>
+          <a:p>
+            <a:pPr indent="0" marL="0">
+              <a:buNone/>
+            </a:pPr>
+            <a:r>
+              <a:rPr lang="en-US" sz="1300" i="1" dirty="0">
+                <a:solidFill>
+                  <a:srgbClr val="9E9E9E"/>
+                </a:solidFill>
+                <a:latin typeface="Malgun Gothic" pitchFamily="34" charset="0"/>
+                <a:ea typeface="Malgun Gothic" pitchFamily="34" charset="-122"/>
+                <a:cs typeface="Malgun Gothic" pitchFamily="34" charset="-120"/>
+              </a:rPr>
+              <a:t>Working Group — 자료 미제공 – 추후 업데이트</a:t>
+            </a:r>
+            <a:endParaRPr lang="en-US" sz="1300" dirty="0"/>
+          </a:p>
+        </p:txBody>
+      </p:sp>
+      <p:sp>
+        <p:nvSpPr>
+          <p:cNvPr id="13" name="Text 10"/>
           <p:cNvSpPr/>
           <p:nvPr/>
         </p:nvSpPr>
@@ -9735,7 +11783,7 @@
       </p:sp>
       <p:sp>
         <p:nvSpPr>
-          <p:cNvPr id="22" name="Text 19"/>
+          <p:cNvPr id="14" name="Text 11"/>
           <p:cNvSpPr/>
           <p:nvPr/>
         </p:nvSpPr>
@@ -9896,7 +11944,7 @@
                 <a:ea typeface="Malgun Gothic" pitchFamily="34" charset="-122"/>
                 <a:cs typeface="Malgun Gothic" pitchFamily="34" charset="-120"/>
               </a:rPr>
-              <a:t>Next Step</a:t>
+              <a:t>고객 중심 서비스 하이라이트</a:t>
             </a:r>
             <a:endParaRPr lang="en-US" sz="2600" dirty="0"/>
           </a:p>
@@ -9935,22 +11983,17 @@
         <p:spPr>
           <a:xfrm>
             <a:off x="530352" y="1234440"/>
-            <a:ext cx="11100816" cy="4480560"/>
+            <a:ext cx="3566160" cy="2011680"/>
           </a:xfrm>
           <a:prstGeom prst="roundRect">
             <a:avLst>
-              <a:gd name="adj" fmla="val 1633"/>
+              <a:gd name="adj" fmla="val 3636"/>
             </a:avLst>
           </a:prstGeom>
           <a:solidFill>
-            <a:srgbClr val="E6EEF7"/>
+            <a:srgbClr val="F5F8FC"/>
           </a:solidFill>
-          <a:ln w="9525">
-            <a:solidFill>
-              <a:srgbClr val="005BAC"/>
-            </a:solidFill>
-            <a:prstDash val="dash"/>
-          </a:ln>
+          <a:ln/>
         </p:spPr>
       </p:sp>
       <p:sp>
@@ -9961,8 +12004,8 @@
         </p:nvSpPr>
         <p:spPr>
           <a:xfrm>
-            <a:off x="530352" y="1234440"/>
-            <a:ext cx="11100816" cy="4480560"/>
+            <a:off x="713232" y="1417320"/>
+            <a:ext cx="3200400" cy="457200"/>
           </a:xfrm>
           <a:prstGeom prst="rect">
             <a:avLst/>
@@ -9978,7 +12021,7 @@
               <a:buNone/>
             </a:pPr>
             <a:r>
-              <a:rPr lang="en-US" sz="1600" i="1" dirty="0">
+              <a:rPr lang="en-US" sz="1500" b="1" dirty="0">
                 <a:solidFill>
                   <a:srgbClr val="005BAC"/>
                 </a:solidFill>
@@ -9986,15 +12029,471 @@
                 <a:ea typeface="Malgun Gothic" pitchFamily="34" charset="-122"/>
                 <a:cs typeface="Malgun Gothic" pitchFamily="34" charset="-120"/>
               </a:rPr>
+              <a:t>VOC 대응</a:t>
+            </a:r>
+            <a:endParaRPr lang="en-US" sz="1500" dirty="0"/>
+          </a:p>
+        </p:txBody>
+      </p:sp>
+      <p:sp>
+        <p:nvSpPr>
+          <p:cNvPr id="8" name="Text 5"/>
+          <p:cNvSpPr/>
+          <p:nvPr/>
+        </p:nvSpPr>
+        <p:spPr>
+          <a:xfrm>
+            <a:off x="713232" y="1920240"/>
+            <a:ext cx="3200400" cy="365760"/>
+          </a:xfrm>
+          <a:prstGeom prst="rect">
+            <a:avLst/>
+          </a:prstGeom>
+          <a:noFill/>
+          <a:ln/>
+        </p:spPr>
+        <p:txBody>
+          <a:bodyPr wrap="square" lIns="0" tIns="0" rIns="0" bIns="0" rtlCol="0" anchor="ctr"/>
+          <a:lstStyle/>
+          <a:p>
+            <a:pPr algn="ctr" indent="0" marL="0">
+              <a:buNone/>
+            </a:pPr>
+            <a:r>
+              <a:rPr lang="en-US" sz="1100" dirty="0">
+                <a:solidFill>
+                  <a:srgbClr val="3F3F3F"/>
+                </a:solidFill>
+                <a:latin typeface="Malgun Gothic" pitchFamily="34" charset="0"/>
+                <a:ea typeface="Malgun Gothic" pitchFamily="34" charset="-122"/>
+                <a:cs typeface="Malgun Gothic" pitchFamily="34" charset="-120"/>
+              </a:rPr>
+              <a:t>고객 피드백 기반 개선</a:t>
+            </a:r>
+            <a:endParaRPr lang="en-US" sz="1100" dirty="0"/>
+          </a:p>
+        </p:txBody>
+      </p:sp>
+      <p:sp>
+        <p:nvSpPr>
+          <p:cNvPr id="9" name="Text 6"/>
+          <p:cNvSpPr/>
+          <p:nvPr/>
+        </p:nvSpPr>
+        <p:spPr>
+          <a:xfrm>
+            <a:off x="713232" y="2377440"/>
+            <a:ext cx="3200400" cy="731520"/>
+          </a:xfrm>
+          <a:prstGeom prst="rect">
+            <a:avLst/>
+          </a:prstGeom>
+          <a:noFill/>
+          <a:ln/>
+        </p:spPr>
+        <p:txBody>
+          <a:bodyPr wrap="square" lIns="0" tIns="0" rIns="0" bIns="0" rtlCol="0" anchor="ctr"/>
+          <a:lstStyle/>
+          <a:p>
+            <a:pPr algn="ctr" indent="0" marL="0">
+              <a:buNone/>
+            </a:pPr>
+            <a:r>
+              <a:rPr lang="en-US" sz="1100" i="1" dirty="0">
+                <a:solidFill>
+                  <a:srgbClr val="9E9E9E"/>
+                </a:solidFill>
+                <a:latin typeface="Malgun Gothic" pitchFamily="34" charset="0"/>
+                <a:ea typeface="Malgun Gothic" pitchFamily="34" charset="-122"/>
+                <a:cs typeface="Malgun Gothic" pitchFamily="34" charset="-120"/>
+              </a:rPr>
               <a:t>자료 미제공 – 추후 업데이트</a:t>
             </a:r>
-            <a:endParaRPr lang="en-US" sz="1600" dirty="0"/>
-          </a:p>
-        </p:txBody>
-      </p:sp>
-      <p:sp>
-        <p:nvSpPr>
-          <p:cNvPr id="8" name="Text 5"/>
+            <a:endParaRPr lang="en-US" sz="1100" dirty="0"/>
+          </a:p>
+        </p:txBody>
+      </p:sp>
+      <p:sp>
+        <p:nvSpPr>
+          <p:cNvPr id="10" name="Shape 7"/>
+          <p:cNvSpPr/>
+          <p:nvPr/>
+        </p:nvSpPr>
+        <p:spPr>
+          <a:xfrm>
+            <a:off x="4279392" y="1234440"/>
+            <a:ext cx="3566160" cy="2011680"/>
+          </a:xfrm>
+          <a:prstGeom prst="roundRect">
+            <a:avLst>
+              <a:gd name="adj" fmla="val 3636"/>
+            </a:avLst>
+          </a:prstGeom>
+          <a:solidFill>
+            <a:srgbClr val="F5F8FC"/>
+          </a:solidFill>
+          <a:ln/>
+        </p:spPr>
+      </p:sp>
+      <p:sp>
+        <p:nvSpPr>
+          <p:cNvPr id="11" name="Text 8"/>
+          <p:cNvSpPr/>
+          <p:nvPr/>
+        </p:nvSpPr>
+        <p:spPr>
+          <a:xfrm>
+            <a:off x="4462272" y="1417320"/>
+            <a:ext cx="3200400" cy="457200"/>
+          </a:xfrm>
+          <a:prstGeom prst="rect">
+            <a:avLst/>
+          </a:prstGeom>
+          <a:noFill/>
+          <a:ln/>
+        </p:spPr>
+        <p:txBody>
+          <a:bodyPr wrap="square" lIns="0" tIns="0" rIns="0" bIns="0" rtlCol="0" anchor="ctr"/>
+          <a:lstStyle/>
+          <a:p>
+            <a:pPr algn="ctr" indent="0" marL="0">
+              <a:buNone/>
+            </a:pPr>
+            <a:r>
+              <a:rPr lang="en-US" sz="1500" b="1" dirty="0">
+                <a:solidFill>
+                  <a:srgbClr val="005BAC"/>
+                </a:solidFill>
+                <a:latin typeface="Malgun Gothic" pitchFamily="34" charset="0"/>
+                <a:ea typeface="Malgun Gothic" pitchFamily="34" charset="-122"/>
+                <a:cs typeface="Malgun Gothic" pitchFamily="34" charset="-120"/>
+              </a:rPr>
+              <a:t>중대 이슈 대응력</a:t>
+            </a:r>
+            <a:endParaRPr lang="en-US" sz="1500" dirty="0"/>
+          </a:p>
+        </p:txBody>
+      </p:sp>
+      <p:sp>
+        <p:nvSpPr>
+          <p:cNvPr id="12" name="Text 9"/>
+          <p:cNvSpPr/>
+          <p:nvPr/>
+        </p:nvSpPr>
+        <p:spPr>
+          <a:xfrm>
+            <a:off x="4462272" y="1920240"/>
+            <a:ext cx="3200400" cy="365760"/>
+          </a:xfrm>
+          <a:prstGeom prst="rect">
+            <a:avLst/>
+          </a:prstGeom>
+          <a:noFill/>
+          <a:ln/>
+        </p:spPr>
+        <p:txBody>
+          <a:bodyPr wrap="square" lIns="0" tIns="0" rIns="0" bIns="0" rtlCol="0" anchor="ctr"/>
+          <a:lstStyle/>
+          <a:p>
+            <a:pPr algn="ctr" indent="0" marL="0">
+              <a:buNone/>
+            </a:pPr>
+            <a:r>
+              <a:rPr lang="en-US" sz="1100" dirty="0">
+                <a:solidFill>
+                  <a:srgbClr val="3F3F3F"/>
+                </a:solidFill>
+                <a:latin typeface="Malgun Gothic" pitchFamily="34" charset="0"/>
+                <a:ea typeface="Malgun Gothic" pitchFamily="34" charset="-122"/>
+                <a:cs typeface="Malgun Gothic" pitchFamily="34" charset="-120"/>
+              </a:rPr>
+              <a:t>SLA 준수 · 신속 종결</a:t>
+            </a:r>
+            <a:endParaRPr lang="en-US" sz="1100" dirty="0"/>
+          </a:p>
+        </p:txBody>
+      </p:sp>
+      <p:sp>
+        <p:nvSpPr>
+          <p:cNvPr id="13" name="Text 10"/>
+          <p:cNvSpPr/>
+          <p:nvPr/>
+        </p:nvSpPr>
+        <p:spPr>
+          <a:xfrm>
+            <a:off x="4462272" y="2377440"/>
+            <a:ext cx="3200400" cy="731520"/>
+          </a:xfrm>
+          <a:prstGeom prst="rect">
+            <a:avLst/>
+          </a:prstGeom>
+          <a:noFill/>
+          <a:ln/>
+        </p:spPr>
+        <p:txBody>
+          <a:bodyPr wrap="square" lIns="0" tIns="0" rIns="0" bIns="0" rtlCol="0" anchor="ctr"/>
+          <a:lstStyle/>
+          <a:p>
+            <a:pPr algn="ctr" indent="0" marL="0">
+              <a:buNone/>
+            </a:pPr>
+            <a:r>
+              <a:rPr lang="en-US" sz="1100" i="1" dirty="0">
+                <a:solidFill>
+                  <a:srgbClr val="9E9E9E"/>
+                </a:solidFill>
+                <a:latin typeface="Malgun Gothic" pitchFamily="34" charset="0"/>
+                <a:ea typeface="Malgun Gothic" pitchFamily="34" charset="-122"/>
+                <a:cs typeface="Malgun Gothic" pitchFamily="34" charset="-120"/>
+              </a:rPr>
+              <a:t>자료 미제공 – 추후 업데이트</a:t>
+            </a:r>
+            <a:endParaRPr lang="en-US" sz="1100" dirty="0"/>
+          </a:p>
+        </p:txBody>
+      </p:sp>
+      <p:sp>
+        <p:nvSpPr>
+          <p:cNvPr id="14" name="Shape 11"/>
+          <p:cNvSpPr/>
+          <p:nvPr/>
+        </p:nvSpPr>
+        <p:spPr>
+          <a:xfrm>
+            <a:off x="8028432" y="1234440"/>
+            <a:ext cx="3566160" cy="2011680"/>
+          </a:xfrm>
+          <a:prstGeom prst="roundRect">
+            <a:avLst>
+              <a:gd name="adj" fmla="val 3636"/>
+            </a:avLst>
+          </a:prstGeom>
+          <a:solidFill>
+            <a:srgbClr val="F5F8FC"/>
+          </a:solidFill>
+          <a:ln/>
+        </p:spPr>
+      </p:sp>
+      <p:sp>
+        <p:nvSpPr>
+          <p:cNvPr id="15" name="Text 12"/>
+          <p:cNvSpPr/>
+          <p:nvPr/>
+        </p:nvSpPr>
+        <p:spPr>
+          <a:xfrm>
+            <a:off x="8211312" y="1417320"/>
+            <a:ext cx="3200400" cy="457200"/>
+          </a:xfrm>
+          <a:prstGeom prst="rect">
+            <a:avLst/>
+          </a:prstGeom>
+          <a:noFill/>
+          <a:ln/>
+        </p:spPr>
+        <p:txBody>
+          <a:bodyPr wrap="square" lIns="0" tIns="0" rIns="0" bIns="0" rtlCol="0" anchor="ctr"/>
+          <a:lstStyle/>
+          <a:p>
+            <a:pPr algn="ctr" indent="0" marL="0">
+              <a:buNone/>
+            </a:pPr>
+            <a:r>
+              <a:rPr lang="en-US" sz="1500" b="1" dirty="0">
+                <a:solidFill>
+                  <a:srgbClr val="005BAC"/>
+                </a:solidFill>
+                <a:latin typeface="Malgun Gothic" pitchFamily="34" charset="0"/>
+                <a:ea typeface="Malgun Gothic" pitchFamily="34" charset="-122"/>
+                <a:cs typeface="Malgun Gothic" pitchFamily="34" charset="-120"/>
+              </a:rPr>
+              <a:t>대리점/직원 역량</a:t>
+            </a:r>
+            <a:endParaRPr lang="en-US" sz="1500" dirty="0"/>
+          </a:p>
+        </p:txBody>
+      </p:sp>
+      <p:sp>
+        <p:nvSpPr>
+          <p:cNvPr id="16" name="Text 13"/>
+          <p:cNvSpPr/>
+          <p:nvPr/>
+        </p:nvSpPr>
+        <p:spPr>
+          <a:xfrm>
+            <a:off x="8211312" y="1920240"/>
+            <a:ext cx="3200400" cy="365760"/>
+          </a:xfrm>
+          <a:prstGeom prst="rect">
+            <a:avLst/>
+          </a:prstGeom>
+          <a:noFill/>
+          <a:ln/>
+        </p:spPr>
+        <p:txBody>
+          <a:bodyPr wrap="square" lIns="0" tIns="0" rIns="0" bIns="0" rtlCol="0" anchor="ctr"/>
+          <a:lstStyle/>
+          <a:p>
+            <a:pPr algn="ctr" indent="0" marL="0">
+              <a:buNone/>
+            </a:pPr>
+            <a:r>
+              <a:rPr lang="en-US" sz="1100" dirty="0">
+                <a:solidFill>
+                  <a:srgbClr val="3F3F3F"/>
+                </a:solidFill>
+                <a:latin typeface="Malgun Gothic" pitchFamily="34" charset="0"/>
+                <a:ea typeface="Malgun Gothic" pitchFamily="34" charset="-122"/>
+                <a:cs typeface="Malgun Gothic" pitchFamily="34" charset="-120"/>
+              </a:rPr>
+              <a:t>교육 통한 서비스 품질 제고</a:t>
+            </a:r>
+            <a:endParaRPr lang="en-US" sz="1100" dirty="0"/>
+          </a:p>
+        </p:txBody>
+      </p:sp>
+      <p:sp>
+        <p:nvSpPr>
+          <p:cNvPr id="17" name="Text 14"/>
+          <p:cNvSpPr/>
+          <p:nvPr/>
+        </p:nvSpPr>
+        <p:spPr>
+          <a:xfrm>
+            <a:off x="8211312" y="2377440"/>
+            <a:ext cx="3200400" cy="731520"/>
+          </a:xfrm>
+          <a:prstGeom prst="rect">
+            <a:avLst/>
+          </a:prstGeom>
+          <a:noFill/>
+          <a:ln/>
+        </p:spPr>
+        <p:txBody>
+          <a:bodyPr wrap="square" lIns="0" tIns="0" rIns="0" bIns="0" rtlCol="0" anchor="ctr"/>
+          <a:lstStyle/>
+          <a:p>
+            <a:pPr algn="ctr" indent="0" marL="0">
+              <a:buNone/>
+            </a:pPr>
+            <a:r>
+              <a:rPr lang="en-US" sz="1100" i="1" dirty="0">
+                <a:solidFill>
+                  <a:srgbClr val="9E9E9E"/>
+                </a:solidFill>
+                <a:latin typeface="Malgun Gothic" pitchFamily="34" charset="0"/>
+                <a:ea typeface="Malgun Gothic" pitchFamily="34" charset="-122"/>
+                <a:cs typeface="Malgun Gothic" pitchFamily="34" charset="-120"/>
+              </a:rPr>
+              <a:t>자료 미제공 – 추후 업데이트</a:t>
+            </a:r>
+            <a:endParaRPr lang="en-US" sz="1100" dirty="0"/>
+          </a:p>
+        </p:txBody>
+      </p:sp>
+      <p:sp>
+        <p:nvSpPr>
+          <p:cNvPr id="18" name="Shape 15"/>
+          <p:cNvSpPr/>
+          <p:nvPr/>
+        </p:nvSpPr>
+        <p:spPr>
+          <a:xfrm>
+            <a:off x="530352" y="3520440"/>
+            <a:ext cx="11100816" cy="2103120"/>
+          </a:xfrm>
+          <a:prstGeom prst="roundRect">
+            <a:avLst>
+              <a:gd name="adj" fmla="val 3478"/>
+            </a:avLst>
+          </a:prstGeom>
+          <a:solidFill>
+            <a:srgbClr val="E6EEF7"/>
+          </a:solidFill>
+          <a:ln/>
+        </p:spPr>
+      </p:sp>
+      <p:sp>
+        <p:nvSpPr>
+          <p:cNvPr id="19" name="Text 16"/>
+          <p:cNvSpPr/>
+          <p:nvPr/>
+        </p:nvSpPr>
+        <p:spPr>
+          <a:xfrm>
+            <a:off x="777240" y="3657600"/>
+            <a:ext cx="4572000" cy="320040"/>
+          </a:xfrm>
+          <a:prstGeom prst="rect">
+            <a:avLst/>
+          </a:prstGeom>
+          <a:noFill/>
+          <a:ln/>
+        </p:spPr>
+        <p:txBody>
+          <a:bodyPr wrap="square" lIns="0" tIns="0" rIns="0" bIns="0" rtlCol="0" anchor="ctr"/>
+          <a:lstStyle/>
+          <a:p>
+            <a:pPr indent="0" marL="0">
+              <a:buNone/>
+            </a:pPr>
+            <a:r>
+              <a:rPr lang="en-US" sz="1300" b="1" dirty="0">
+                <a:solidFill>
+                  <a:srgbClr val="005BAC"/>
+                </a:solidFill>
+                <a:latin typeface="Malgun Gothic" pitchFamily="34" charset="0"/>
+                <a:ea typeface="Malgun Gothic" pitchFamily="34" charset="-122"/>
+                <a:cs typeface="Malgun Gothic" pitchFamily="34" charset="-120"/>
+              </a:rPr>
+              <a:t>고객 중심 Insight</a:t>
+            </a:r>
+            <a:endParaRPr lang="en-US" sz="1300" dirty="0"/>
+          </a:p>
+        </p:txBody>
+      </p:sp>
+      <p:sp>
+        <p:nvSpPr>
+          <p:cNvPr id="20" name="Text 17"/>
+          <p:cNvSpPr/>
+          <p:nvPr/>
+        </p:nvSpPr>
+        <p:spPr>
+          <a:xfrm>
+            <a:off x="777240" y="4023360"/>
+            <a:ext cx="10607040" cy="1463040"/>
+          </a:xfrm>
+          <a:prstGeom prst="rect">
+            <a:avLst/>
+          </a:prstGeom>
+          <a:noFill/>
+          <a:ln/>
+        </p:spPr>
+        <p:txBody>
+          <a:bodyPr wrap="square" lIns="0" tIns="0" rIns="0" bIns="0" rtlCol="0" anchor="ctr"/>
+          <a:lstStyle/>
+          <a:p>
+            <a:pPr indent="0" marL="0">
+              <a:buNone/>
+            </a:pPr>
+            <a:r>
+              <a:rPr lang="en-US" sz="1300" i="1" dirty="0">
+                <a:solidFill>
+                  <a:srgbClr val="9E9E9E"/>
+                </a:solidFill>
+                <a:latin typeface="Malgun Gothic" pitchFamily="34" charset="0"/>
+                <a:ea typeface="Malgun Gothic" pitchFamily="34" charset="-122"/>
+                <a:cs typeface="Malgun Gothic" pitchFamily="34" charset="-120"/>
+              </a:rPr>
+              <a:t>자료 미제공 – 추후 업데이트</a:t>
+            </a:r>
+            <a:endParaRPr lang="en-US" sz="1300" dirty="0"/>
+          </a:p>
+        </p:txBody>
+      </p:sp>
+      <p:sp>
+        <p:nvSpPr>
+          <p:cNvPr id="21" name="Text 18"/>
           <p:cNvSpPr/>
           <p:nvPr/>
         </p:nvSpPr>
@@ -10033,7 +12532,7 @@
       </p:sp>
       <p:sp>
         <p:nvSpPr>
-          <p:cNvPr id="9" name="Text 6"/>
+          <p:cNvPr id="22" name="Text 19"/>
           <p:cNvSpPr/>
           <p:nvPr/>
         </p:nvSpPr>

--- a/reports/FSG_월간서비스보고_202607/FSG_월간서비스보고_202607.pptx
+++ b/reports/FSG_월간서비스보고_202607/FSG_월간서비스보고_202607.pptx
@@ -2099,23 +2099,16 @@
         </p:nvSpPr>
         <p:spPr>
           <a:xfrm>
-            <a:off x="530352" y="1234440"/>
-            <a:ext cx="11100816" cy="4480560"/>
-          </a:xfrm>
-          <a:prstGeom prst="roundRect">
-            <a:avLst>
-              <a:gd name="adj" fmla="val 1633"/>
-            </a:avLst>
+            <a:off x="548640" y="1417320"/>
+            <a:ext cx="502920" cy="502920"/>
+          </a:xfrm>
+          <a:prstGeom prst="ellipse">
+            <a:avLst/>
           </a:prstGeom>
           <a:solidFill>
-            <a:srgbClr val="E6EEF7"/>
+            <a:srgbClr val="005BAC"/>
           </a:solidFill>
-          <a:ln w="9525">
-            <a:solidFill>
-              <a:srgbClr val="005BAC"/>
-            </a:solidFill>
-            <a:prstDash val="dash"/>
-          </a:ln>
+          <a:ln/>
         </p:spPr>
       </p:sp>
       <p:sp>
@@ -2126,8 +2119,8 @@
         </p:nvSpPr>
         <p:spPr>
           <a:xfrm>
-            <a:off x="530352" y="1234440"/>
-            <a:ext cx="11100816" cy="4480560"/>
+            <a:off x="548640" y="1417320"/>
+            <a:ext cx="502920" cy="502920"/>
           </a:xfrm>
           <a:prstGeom prst="rect">
             <a:avLst/>
@@ -2143,23 +2136,512 @@
               <a:buNone/>
             </a:pPr>
             <a:r>
-              <a:rPr lang="en-US" sz="1600" i="1" dirty="0">
+              <a:rPr lang="en-US" sz="1800" b="1" dirty="0">
                 <a:solidFill>
-                  <a:srgbClr val="005BAC"/>
+                  <a:srgbClr val="FFFFFF"/>
+                </a:solidFill>
+                <a:latin typeface="Arial" pitchFamily="34" charset="0"/>
+                <a:ea typeface="Arial" pitchFamily="34" charset="-122"/>
+                <a:cs typeface="Arial" pitchFamily="34" charset="-120"/>
+              </a:rPr>
+              <a:t>1</a:t>
+            </a:r>
+            <a:endParaRPr lang="en-US" sz="1800" dirty="0"/>
+          </a:p>
+        </p:txBody>
+      </p:sp>
+      <p:sp>
+        <p:nvSpPr>
+          <p:cNvPr id="8" name="Text 5"/>
+          <p:cNvSpPr/>
+          <p:nvPr/>
+        </p:nvSpPr>
+        <p:spPr>
+          <a:xfrm>
+            <a:off x="1280160" y="1325880"/>
+            <a:ext cx="9875520" cy="365760"/>
+          </a:xfrm>
+          <a:prstGeom prst="rect">
+            <a:avLst/>
+          </a:prstGeom>
+          <a:noFill/>
+          <a:ln/>
+        </p:spPr>
+        <p:txBody>
+          <a:bodyPr wrap="square" lIns="0" tIns="0" rIns="0" bIns="0" rtlCol="0" anchor="ctr"/>
+          <a:lstStyle/>
+          <a:p>
+            <a:pPr indent="0" marL="0">
+              <a:buNone/>
+            </a:pPr>
+            <a:r>
+              <a:rPr lang="en-US" sz="1500" b="1" dirty="0">
+                <a:solidFill>
+                  <a:srgbClr val="3F3F3F"/>
                 </a:solidFill>
                 <a:latin typeface="Malgun Gothic" pitchFamily="34" charset="0"/>
                 <a:ea typeface="Malgun Gothic" pitchFamily="34" charset="-122"/>
                 <a:cs typeface="Malgun Gothic" pitchFamily="34" charset="-120"/>
               </a:rPr>
-              <a:t>자료 미제공 – 추후 업데이트</a:t>
-            </a:r>
-            <a:endParaRPr lang="en-US" sz="1600" dirty="0"/>
-          </a:p>
-        </p:txBody>
-      </p:sp>
-      <p:sp>
-        <p:nvSpPr>
-          <p:cNvPr id="8" name="Text 5"/>
+              <a:t>8월 설치 파이프라인 대응</a:t>
+            </a:r>
+            <a:endParaRPr lang="en-US" sz="1500" dirty="0"/>
+          </a:p>
+        </p:txBody>
+      </p:sp>
+      <p:sp>
+        <p:nvSpPr>
+          <p:cNvPr id="9" name="Text 6"/>
+          <p:cNvSpPr/>
+          <p:nvPr/>
+        </p:nvSpPr>
+        <p:spPr>
+          <a:xfrm>
+            <a:off x="1280160" y="1709928"/>
+            <a:ext cx="9875520" cy="640080"/>
+          </a:xfrm>
+          <a:prstGeom prst="rect">
+            <a:avLst/>
+          </a:prstGeom>
+          <a:noFill/>
+          <a:ln/>
+        </p:spPr>
+        <p:txBody>
+          <a:bodyPr wrap="square" lIns="0" tIns="0" rIns="0" bIns="0" rtlCol="0" anchor="ctr"/>
+          <a:lstStyle/>
+          <a:p>
+            <a:pPr indent="0" marL="0">
+              <a:buNone/>
+            </a:pPr>
+            <a:r>
+              <a:rPr lang="en-US" sz="1200" dirty="0">
+                <a:solidFill>
+                  <a:srgbClr val="9E9E9E"/>
+                </a:solidFill>
+                <a:latin typeface="Malgun Gothic" pitchFamily="34" charset="0"/>
+                <a:ea typeface="Malgun Gothic" pitchFamily="34" charset="-122"/>
+                <a:cs typeface="Malgun Gothic" pitchFamily="34" charset="-120"/>
+              </a:rPr>
+              <a:t>설치일정 CRM 기준 8월 예정 16건(설치 9 · 평가 5 · 이전설치 2) 사전 리소스 배정 및 일정 조율</a:t>
+            </a:r>
+            <a:endParaRPr lang="en-US" sz="1200" dirty="0"/>
+          </a:p>
+        </p:txBody>
+      </p:sp>
+      <p:sp>
+        <p:nvSpPr>
+          <p:cNvPr id="10" name="Shape 7"/>
+          <p:cNvSpPr/>
+          <p:nvPr/>
+        </p:nvSpPr>
+        <p:spPr>
+          <a:xfrm>
+            <a:off x="548640" y="2587752"/>
+            <a:ext cx="502920" cy="502920"/>
+          </a:xfrm>
+          <a:prstGeom prst="ellipse">
+            <a:avLst/>
+          </a:prstGeom>
+          <a:solidFill>
+            <a:srgbClr val="005BAC"/>
+          </a:solidFill>
+          <a:ln/>
+        </p:spPr>
+      </p:sp>
+      <p:sp>
+        <p:nvSpPr>
+          <p:cNvPr id="11" name="Text 8"/>
+          <p:cNvSpPr/>
+          <p:nvPr/>
+        </p:nvSpPr>
+        <p:spPr>
+          <a:xfrm>
+            <a:off x="548640" y="2587752"/>
+            <a:ext cx="502920" cy="502920"/>
+          </a:xfrm>
+          <a:prstGeom prst="rect">
+            <a:avLst/>
+          </a:prstGeom>
+          <a:noFill/>
+          <a:ln/>
+        </p:spPr>
+        <p:txBody>
+          <a:bodyPr wrap="square" lIns="0" tIns="0" rIns="0" bIns="0" rtlCol="0" anchor="ctr"/>
+          <a:lstStyle/>
+          <a:p>
+            <a:pPr algn="ctr" indent="0" marL="0">
+              <a:buNone/>
+            </a:pPr>
+            <a:r>
+              <a:rPr lang="en-US" sz="1800" b="1" dirty="0">
+                <a:solidFill>
+                  <a:srgbClr val="FFFFFF"/>
+                </a:solidFill>
+                <a:latin typeface="Arial" pitchFamily="34" charset="0"/>
+                <a:ea typeface="Arial" pitchFamily="34" charset="-122"/>
+                <a:cs typeface="Arial" pitchFamily="34" charset="-120"/>
+              </a:rPr>
+              <a:t>2</a:t>
+            </a:r>
+            <a:endParaRPr lang="en-US" sz="1800" dirty="0"/>
+          </a:p>
+        </p:txBody>
+      </p:sp>
+      <p:sp>
+        <p:nvSpPr>
+          <p:cNvPr id="12" name="Text 9"/>
+          <p:cNvSpPr/>
+          <p:nvPr/>
+        </p:nvSpPr>
+        <p:spPr>
+          <a:xfrm>
+            <a:off x="1280160" y="2496312"/>
+            <a:ext cx="9875520" cy="365760"/>
+          </a:xfrm>
+          <a:prstGeom prst="rect">
+            <a:avLst/>
+          </a:prstGeom>
+          <a:noFill/>
+          <a:ln/>
+        </p:spPr>
+        <p:txBody>
+          <a:bodyPr wrap="square" lIns="0" tIns="0" rIns="0" bIns="0" rtlCol="0" anchor="ctr"/>
+          <a:lstStyle/>
+          <a:p>
+            <a:pPr indent="0" marL="0">
+              <a:buNone/>
+            </a:pPr>
+            <a:r>
+              <a:rPr lang="en-US" sz="1500" b="1" dirty="0">
+                <a:solidFill>
+                  <a:srgbClr val="3F3F3F"/>
+                </a:solidFill>
+                <a:latin typeface="Malgun Gothic" pitchFamily="34" charset="0"/>
+                <a:ea typeface="Malgun Gothic" pitchFamily="34" charset="-122"/>
+                <a:cs typeface="Malgun Gothic" pitchFamily="34" charset="-120"/>
+              </a:rPr>
+              <a:t>FS South팀 업무량 편차 점검</a:t>
+            </a:r>
+            <a:endParaRPr lang="en-US" sz="1500" dirty="0"/>
+          </a:p>
+        </p:txBody>
+      </p:sp>
+      <p:sp>
+        <p:nvSpPr>
+          <p:cNvPr id="13" name="Text 10"/>
+          <p:cNvSpPr/>
+          <p:nvPr/>
+        </p:nvSpPr>
+        <p:spPr>
+          <a:xfrm>
+            <a:off x="1280160" y="2880360"/>
+            <a:ext cx="9875520" cy="640080"/>
+          </a:xfrm>
+          <a:prstGeom prst="rect">
+            <a:avLst/>
+          </a:prstGeom>
+          <a:noFill/>
+          <a:ln/>
+        </p:spPr>
+        <p:txBody>
+          <a:bodyPr wrap="square" lIns="0" tIns="0" rIns="0" bIns="0" rtlCol="0" anchor="ctr"/>
+          <a:lstStyle/>
+          <a:p>
+            <a:pPr indent="0" marL="0">
+              <a:buNone/>
+            </a:pPr>
+            <a:r>
+              <a:rPr lang="en-US" sz="1200" dirty="0">
+                <a:solidFill>
+                  <a:srgbClr val="9E9E9E"/>
+                </a:solidFill>
+                <a:latin typeface="Malgun Gothic" pitchFamily="34" charset="0"/>
+                <a:ea typeface="Malgun Gothic" pitchFamily="34" charset="-122"/>
+                <a:cs typeface="Malgun Gothic" pitchFamily="34" charset="-120"/>
+              </a:rPr>
+              <a:t>7월 설치 실적 0건 원인 파악 후 8월 배정 검토</a:t>
+            </a:r>
+            <a:endParaRPr lang="en-US" sz="1200" dirty="0"/>
+          </a:p>
+        </p:txBody>
+      </p:sp>
+      <p:sp>
+        <p:nvSpPr>
+          <p:cNvPr id="14" name="Shape 11"/>
+          <p:cNvSpPr/>
+          <p:nvPr/>
+        </p:nvSpPr>
+        <p:spPr>
+          <a:xfrm>
+            <a:off x="548640" y="3758184"/>
+            <a:ext cx="502920" cy="502920"/>
+          </a:xfrm>
+          <a:prstGeom prst="ellipse">
+            <a:avLst/>
+          </a:prstGeom>
+          <a:solidFill>
+            <a:srgbClr val="005BAC"/>
+          </a:solidFill>
+          <a:ln/>
+        </p:spPr>
+      </p:sp>
+      <p:sp>
+        <p:nvSpPr>
+          <p:cNvPr id="15" name="Text 12"/>
+          <p:cNvSpPr/>
+          <p:nvPr/>
+        </p:nvSpPr>
+        <p:spPr>
+          <a:xfrm>
+            <a:off x="548640" y="3758184"/>
+            <a:ext cx="502920" cy="502920"/>
+          </a:xfrm>
+          <a:prstGeom prst="rect">
+            <a:avLst/>
+          </a:prstGeom>
+          <a:noFill/>
+          <a:ln/>
+        </p:spPr>
+        <p:txBody>
+          <a:bodyPr wrap="square" lIns="0" tIns="0" rIns="0" bIns="0" rtlCol="0" anchor="ctr"/>
+          <a:lstStyle/>
+          <a:p>
+            <a:pPr algn="ctr" indent="0" marL="0">
+              <a:buNone/>
+            </a:pPr>
+            <a:r>
+              <a:rPr lang="en-US" sz="1800" b="1" dirty="0">
+                <a:solidFill>
+                  <a:srgbClr val="FFFFFF"/>
+                </a:solidFill>
+                <a:latin typeface="Arial" pitchFamily="34" charset="0"/>
+                <a:ea typeface="Arial" pitchFamily="34" charset="-122"/>
+                <a:cs typeface="Arial" pitchFamily="34" charset="-120"/>
+              </a:rPr>
+              <a:t>3</a:t>
+            </a:r>
+            <a:endParaRPr lang="en-US" sz="1800" dirty="0"/>
+          </a:p>
+        </p:txBody>
+      </p:sp>
+      <p:sp>
+        <p:nvSpPr>
+          <p:cNvPr id="16" name="Text 13"/>
+          <p:cNvSpPr/>
+          <p:nvPr/>
+        </p:nvSpPr>
+        <p:spPr>
+          <a:xfrm>
+            <a:off x="1280160" y="3666744"/>
+            <a:ext cx="9875520" cy="365760"/>
+          </a:xfrm>
+          <a:prstGeom prst="rect">
+            <a:avLst/>
+          </a:prstGeom>
+          <a:noFill/>
+          <a:ln/>
+        </p:spPr>
+        <p:txBody>
+          <a:bodyPr wrap="square" lIns="0" tIns="0" rIns="0" bIns="0" rtlCol="0" anchor="ctr"/>
+          <a:lstStyle/>
+          <a:p>
+            <a:pPr indent="0" marL="0">
+              <a:buNone/>
+            </a:pPr>
+            <a:r>
+              <a:rPr lang="en-US" sz="1500" b="1" dirty="0">
+                <a:solidFill>
+                  <a:srgbClr val="3F3F3F"/>
+                </a:solidFill>
+                <a:latin typeface="Malgun Gothic" pitchFamily="34" charset="0"/>
+                <a:ea typeface="Malgun Gothic" pitchFamily="34" charset="-122"/>
+                <a:cs typeface="Malgun Gothic" pitchFamily="34" charset="-120"/>
+              </a:rPr>
+              <a:t>책임 담당제 우수 사례 확산</a:t>
+            </a:r>
+            <a:endParaRPr lang="en-US" sz="1500" dirty="0"/>
+          </a:p>
+        </p:txBody>
+      </p:sp>
+      <p:sp>
+        <p:nvSpPr>
+          <p:cNvPr id="17" name="Text 14"/>
+          <p:cNvSpPr/>
+          <p:nvPr/>
+        </p:nvSpPr>
+        <p:spPr>
+          <a:xfrm>
+            <a:off x="1280160" y="4050792"/>
+            <a:ext cx="9875520" cy="640080"/>
+          </a:xfrm>
+          <a:prstGeom prst="rect">
+            <a:avLst/>
+          </a:prstGeom>
+          <a:noFill/>
+          <a:ln/>
+        </p:spPr>
+        <p:txBody>
+          <a:bodyPr wrap="square" lIns="0" tIns="0" rIns="0" bIns="0" rtlCol="0" anchor="ctr"/>
+          <a:lstStyle/>
+          <a:p>
+            <a:pPr indent="0" marL="0">
+              <a:buNone/>
+            </a:pPr>
+            <a:r>
+              <a:rPr lang="en-US" sz="1200" dirty="0">
+                <a:solidFill>
+                  <a:srgbClr val="9E9E9E"/>
+                </a:solidFill>
+                <a:latin typeface="Malgun Gothic" pitchFamily="34" charset="0"/>
+                <a:ea typeface="Malgun Gothic" pitchFamily="34" charset="-122"/>
+                <a:cs typeface="Malgun Gothic" pitchFamily="34" charset="-120"/>
+              </a:rPr>
+              <a:t>강남차병원 사례(담당 엔지니어 연속 대응)를 타 팀 벤치마킹 사례로 공유</a:t>
+            </a:r>
+            <a:endParaRPr lang="en-US" sz="1200" dirty="0"/>
+          </a:p>
+        </p:txBody>
+      </p:sp>
+      <p:sp>
+        <p:nvSpPr>
+          <p:cNvPr id="18" name="Shape 15"/>
+          <p:cNvSpPr/>
+          <p:nvPr/>
+        </p:nvSpPr>
+        <p:spPr>
+          <a:xfrm>
+            <a:off x="548640" y="4928616"/>
+            <a:ext cx="502920" cy="502920"/>
+          </a:xfrm>
+          <a:prstGeom prst="ellipse">
+            <a:avLst/>
+          </a:prstGeom>
+          <a:solidFill>
+            <a:srgbClr val="005BAC"/>
+          </a:solidFill>
+          <a:ln/>
+        </p:spPr>
+      </p:sp>
+      <p:sp>
+        <p:nvSpPr>
+          <p:cNvPr id="19" name="Text 16"/>
+          <p:cNvSpPr/>
+          <p:nvPr/>
+        </p:nvSpPr>
+        <p:spPr>
+          <a:xfrm>
+            <a:off x="548640" y="4928616"/>
+            <a:ext cx="502920" cy="502920"/>
+          </a:xfrm>
+          <a:prstGeom prst="rect">
+            <a:avLst/>
+          </a:prstGeom>
+          <a:noFill/>
+          <a:ln/>
+        </p:spPr>
+        <p:txBody>
+          <a:bodyPr wrap="square" lIns="0" tIns="0" rIns="0" bIns="0" rtlCol="0" anchor="ctr"/>
+          <a:lstStyle/>
+          <a:p>
+            <a:pPr algn="ctr" indent="0" marL="0">
+              <a:buNone/>
+            </a:pPr>
+            <a:r>
+              <a:rPr lang="en-US" sz="1800" b="1" dirty="0">
+                <a:solidFill>
+                  <a:srgbClr val="FFFFFF"/>
+                </a:solidFill>
+                <a:latin typeface="Arial" pitchFamily="34" charset="0"/>
+                <a:ea typeface="Arial" pitchFamily="34" charset="-122"/>
+                <a:cs typeface="Arial" pitchFamily="34" charset="-120"/>
+              </a:rPr>
+              <a:t>4</a:t>
+            </a:r>
+            <a:endParaRPr lang="en-US" sz="1800" dirty="0"/>
+          </a:p>
+        </p:txBody>
+      </p:sp>
+      <p:sp>
+        <p:nvSpPr>
+          <p:cNvPr id="20" name="Text 17"/>
+          <p:cNvSpPr/>
+          <p:nvPr/>
+        </p:nvSpPr>
+        <p:spPr>
+          <a:xfrm>
+            <a:off x="1280160" y="4837176"/>
+            <a:ext cx="9875520" cy="365760"/>
+          </a:xfrm>
+          <a:prstGeom prst="rect">
+            <a:avLst/>
+          </a:prstGeom>
+          <a:noFill/>
+          <a:ln/>
+        </p:spPr>
+        <p:txBody>
+          <a:bodyPr wrap="square" lIns="0" tIns="0" rIns="0" bIns="0" rtlCol="0" anchor="ctr"/>
+          <a:lstStyle/>
+          <a:p>
+            <a:pPr indent="0" marL="0">
+              <a:buNone/>
+            </a:pPr>
+            <a:r>
+              <a:rPr lang="en-US" sz="1500" b="1" dirty="0">
+                <a:solidFill>
+                  <a:srgbClr val="3F3F3F"/>
+                </a:solidFill>
+                <a:latin typeface="Malgun Gothic" pitchFamily="34" charset="0"/>
+                <a:ea typeface="Malgun Gothic" pitchFamily="34" charset="-122"/>
+                <a:cs typeface="Malgun Gothic" pitchFamily="34" charset="-120"/>
+              </a:rPr>
+              <a:t>미확보 데이터 확보</a:t>
+            </a:r>
+            <a:endParaRPr lang="en-US" sz="1500" dirty="0"/>
+          </a:p>
+        </p:txBody>
+      </p:sp>
+      <p:sp>
+        <p:nvSpPr>
+          <p:cNvPr id="21" name="Text 18"/>
+          <p:cNvSpPr/>
+          <p:nvPr/>
+        </p:nvSpPr>
+        <p:spPr>
+          <a:xfrm>
+            <a:off x="1280160" y="5221224"/>
+            <a:ext cx="9875520" cy="640080"/>
+          </a:xfrm>
+          <a:prstGeom prst="rect">
+            <a:avLst/>
+          </a:prstGeom>
+          <a:noFill/>
+          <a:ln/>
+        </p:spPr>
+        <p:txBody>
+          <a:bodyPr wrap="square" lIns="0" tIns="0" rIns="0" bIns="0" rtlCol="0" anchor="ctr"/>
+          <a:lstStyle/>
+          <a:p>
+            <a:pPr indent="0" marL="0">
+              <a:buNone/>
+            </a:pPr>
+            <a:r>
+              <a:rPr lang="en-US" sz="1200" dirty="0">
+                <a:solidFill>
+                  <a:srgbClr val="9E9E9E"/>
+                </a:solidFill>
+                <a:latin typeface="Malgun Gothic" pitchFamily="34" charset="0"/>
+                <a:ea typeface="Malgun Gothic" pitchFamily="34" charset="-122"/>
+                <a:cs typeface="Malgun Gothic" pitchFamily="34" charset="-120"/>
+              </a:rPr>
+              <a:t>PM·A/S 실적, VOC 대시보드 연동 데이터 확보하여 다음 보고 시 KPI·VOC 항목 완성</a:t>
+            </a:r>
+            <a:endParaRPr lang="en-US" sz="1200" dirty="0"/>
+          </a:p>
+        </p:txBody>
+      </p:sp>
+      <p:sp>
+        <p:nvSpPr>
+          <p:cNvPr id="22" name="Text 19"/>
           <p:cNvSpPr/>
           <p:nvPr/>
         </p:nvSpPr>
@@ -2198,7 +2680,7 @@
       </p:sp>
       <p:sp>
         <p:nvSpPr>
-          <p:cNvPr id="9" name="Text 6"/>
+          <p:cNvPr id="23" name="Text 20"/>
           <p:cNvSpPr/>
           <p:nvPr/>
         </p:nvSpPr>
@@ -12477,15 +12959,15 @@
               <a:buNone/>
             </a:pPr>
             <a:r>
-              <a:rPr lang="en-US" sz="1300" i="1" dirty="0">
+              <a:rPr lang="en-US" sz="1300" dirty="0">
                 <a:solidFill>
-                  <a:srgbClr val="9E9E9E"/>
+                  <a:srgbClr val="3F3F3F"/>
                 </a:solidFill>
                 <a:latin typeface="Malgun Gothic" pitchFamily="34" charset="0"/>
                 <a:ea typeface="Malgun Gothic" pitchFamily="34" charset="-122"/>
                 <a:cs typeface="Malgun Gothic" pitchFamily="34" charset="-120"/>
               </a:rPr>
-              <a:t>자료 미제공 – 추후 업데이트</a:t>
+              <a:t>설치일정 CRM 데이터 분석 결과 (2026년 7월): 강남차병원·강남차여성병원 프로젝트(XR-9000/XR-1000)는 담당 엔지니어(Martin)가 설치 → 평가 지원 → 이전설치까지 4건을 연속 담당해 책임 담당제의 고객 연속성을 보여주는 우수 사례입니다. 설치·이전설치 평균 소요기간은 1.25일로 신속하게 처리되었으나, FS South팀은 7월 설치 실적 0건으로 팀간 업무량 편차 확인이 필요합니다.</a:t>
             </a:r>
             <a:endParaRPr lang="en-US" sz="1300" dirty="0"/>
           </a:p>

--- a/reports/FSG_월간서비스보고_202607/FSG_월간서비스보고_202607.pptx
+++ b/reports/FSG_월간서비스보고_202607/FSG_월간서비스보고_202607.pptx
@@ -15,9 +15,11 @@
     <p:sldId id="263" r:id="rId9"/>
     <p:sldId id="264" r:id="rId10"/>
     <p:sldId id="265" r:id="rId11"/>
+    <p:sldId id="266" r:id="rId12"/>
+    <p:sldId id="267" r:id="rId13"/>
   </p:sldIdLst>
   <p:notesMasterIdLst>
-    <p:notesMasterId r:id="rId12"/>
+    <p:notesMasterId r:id="rId14"/>
   </p:notesMasterIdLst>
   <p:sldSz cx="12192000" cy="6858000"/>
   <p:notesSz cx="6858000" cy="12192000"/>
@@ -623,6 +625,182 @@
             <a:fld id="{F7021451-1387-4CA6-816F-3879F97B5CBC}" type="slidenum">
               <a:rPr lang="en-US"/>
               <a:t>10</a:t>
+            </a:fld>
+            <a:endParaRPr lang="en-US"/>
+          </a:p>
+        </p:txBody>
+      </p:sp>
+    </p:spTree>
+    <p:extLst>
+      <p:ext uri="{BB962C8B-B14F-4D97-AF65-F5344CB8AC3E}">
+        <p14:creationId xmlns:p14="http://schemas.microsoft.com/office/powerpoint/2010/main" val="1024086991"/>
+      </p:ext>
+    </p:extLst>
+  </p:cSld>
+  <p:clrMapOvr>
+    <a:masterClrMapping/>
+  </p:clrMapOvr>
+</p:notes>
+</file>
+
+<file path=ppt/notesSlides/notesSlide11.xml><?xml version="1.0" encoding="utf-8"?>
+<p:notes xmlns:a="http://schemas.openxmlformats.org/drawingml/2006/main" xmlns:r="http://schemas.openxmlformats.org/officeDocument/2006/relationships" xmlns:p="http://schemas.openxmlformats.org/presentationml/2006/main">
+  <p:cSld>
+    <p:spTree>
+      <p:nvGrpSpPr>
+        <p:cNvPr id="1" name=""/>
+        <p:cNvGrpSpPr/>
+        <p:nvPr/>
+      </p:nvGrpSpPr>
+      <p:grpSpPr>
+        <a:xfrm>
+          <a:off x="0" y="0"/>
+          <a:ext cx="0" cy="0"/>
+          <a:chOff x="0" y="0"/>
+          <a:chExt cx="0" cy="0"/>
+        </a:xfrm>
+      </p:grpSpPr>
+      <p:sp>
+        <p:nvSpPr>
+          <p:cNvPr id="2" name="Slide Image Placeholder 1"/>
+          <p:cNvSpPr>
+            <a:spLocks noGrp="1" noRot="1" noChangeAspect="1"/>
+          </p:cNvSpPr>
+          <p:nvPr>
+            <p:ph type="sldImg"/>
+          </p:nvPr>
+        </p:nvSpPr>
+        <p:spPr/>
+      </p:sp>
+      <p:sp>
+        <p:nvSpPr>
+          <p:cNvPr id="3" name="Notes Placeholder 2"/>
+          <p:cNvSpPr>
+            <a:spLocks noGrp="1"/>
+          </p:cNvSpPr>
+          <p:nvPr>
+            <p:ph type="body" idx="1"/>
+          </p:nvPr>
+        </p:nvSpPr>
+        <p:spPr/>
+        <p:txBody>
+          <a:bodyPr/>
+          <a:lstStyle/>
+          <a:p>
+            <a:r>
+              <a:rPr lang="en-US" dirty="0"/>
+              <a:t/>
+            </a:r>
+            <a:endParaRPr lang="en-US" dirty="0"/>
+          </a:p>
+        </p:txBody>
+      </p:sp>
+      <p:sp>
+        <p:nvSpPr>
+          <p:cNvPr id="4" name="Slide Number Placeholder 3"/>
+          <p:cNvSpPr>
+            <a:spLocks noGrp="1"/>
+          </p:cNvSpPr>
+          <p:nvPr>
+            <p:ph type="sldNum" sz="quarter" idx="10"/>
+          </p:nvPr>
+        </p:nvSpPr>
+        <p:spPr/>
+        <p:txBody>
+          <a:bodyPr/>
+          <a:lstStyle/>
+          <a:p>
+            <a:fld id="{F7021451-1387-4CA6-816F-3879F97B5CBC}" type="slidenum">
+              <a:rPr lang="en-US"/>
+              <a:t>11</a:t>
+            </a:fld>
+            <a:endParaRPr lang="en-US"/>
+          </a:p>
+        </p:txBody>
+      </p:sp>
+    </p:spTree>
+    <p:extLst>
+      <p:ext uri="{BB962C8B-B14F-4D97-AF65-F5344CB8AC3E}">
+        <p14:creationId xmlns:p14="http://schemas.microsoft.com/office/powerpoint/2010/main" val="1024086991"/>
+      </p:ext>
+    </p:extLst>
+  </p:cSld>
+  <p:clrMapOvr>
+    <a:masterClrMapping/>
+  </p:clrMapOvr>
+</p:notes>
+</file>
+
+<file path=ppt/notesSlides/notesSlide12.xml><?xml version="1.0" encoding="utf-8"?>
+<p:notes xmlns:a="http://schemas.openxmlformats.org/drawingml/2006/main" xmlns:r="http://schemas.openxmlformats.org/officeDocument/2006/relationships" xmlns:p="http://schemas.openxmlformats.org/presentationml/2006/main">
+  <p:cSld>
+    <p:spTree>
+      <p:nvGrpSpPr>
+        <p:cNvPr id="1" name=""/>
+        <p:cNvGrpSpPr/>
+        <p:nvPr/>
+      </p:nvGrpSpPr>
+      <p:grpSpPr>
+        <a:xfrm>
+          <a:off x="0" y="0"/>
+          <a:ext cx="0" cy="0"/>
+          <a:chOff x="0" y="0"/>
+          <a:chExt cx="0" cy="0"/>
+        </a:xfrm>
+      </p:grpSpPr>
+      <p:sp>
+        <p:nvSpPr>
+          <p:cNvPr id="2" name="Slide Image Placeholder 1"/>
+          <p:cNvSpPr>
+            <a:spLocks noGrp="1" noRot="1" noChangeAspect="1"/>
+          </p:cNvSpPr>
+          <p:nvPr>
+            <p:ph type="sldImg"/>
+          </p:nvPr>
+        </p:nvSpPr>
+        <p:spPr/>
+      </p:sp>
+      <p:sp>
+        <p:nvSpPr>
+          <p:cNvPr id="3" name="Notes Placeholder 2"/>
+          <p:cNvSpPr>
+            <a:spLocks noGrp="1"/>
+          </p:cNvSpPr>
+          <p:nvPr>
+            <p:ph type="body" idx="1"/>
+          </p:nvPr>
+        </p:nvSpPr>
+        <p:spPr/>
+        <p:txBody>
+          <a:bodyPr/>
+          <a:lstStyle/>
+          <a:p>
+            <a:r>
+              <a:rPr lang="en-US" dirty="0"/>
+              <a:t/>
+            </a:r>
+            <a:endParaRPr lang="en-US" dirty="0"/>
+          </a:p>
+        </p:txBody>
+      </p:sp>
+      <p:sp>
+        <p:nvSpPr>
+          <p:cNvPr id="4" name="Slide Number Placeholder 3"/>
+          <p:cNvSpPr>
+            <a:spLocks noGrp="1"/>
+          </p:cNvSpPr>
+          <p:nvPr>
+            <p:ph type="sldNum" sz="quarter" idx="10"/>
+          </p:nvPr>
+        </p:nvSpPr>
+        <p:spPr/>
+        <p:txBody>
+          <a:bodyPr/>
+          <a:lstStyle/>
+          <a:p>
+            <a:fld id="{F7021451-1387-4CA6-816F-3879F97B5CBC}" type="slidenum">
+              <a:rPr lang="en-US"/>
+              <a:t>12</a:t>
             </a:fld>
             <a:endParaRPr lang="en-US"/>
           </a:p>
@@ -2061,7 +2239,7 @@
                 <a:ea typeface="Malgun Gothic" pitchFamily="34" charset="-122"/>
                 <a:cs typeface="Malgun Gothic" pitchFamily="34" charset="-120"/>
               </a:rPr>
-              <a:t>Next Step</a:t>
+              <a:t>직원교육</a:t>
             </a:r>
             <a:endParaRPr lang="en-US" sz="2600" dirty="0"/>
           </a:p>
@@ -2093,16 +2271,375 @@
       </p:pic>
       <p:sp>
         <p:nvSpPr>
-          <p:cNvPr id="6" name="Shape 3"/>
-          <p:cNvSpPr/>
-          <p:nvPr/>
-        </p:nvSpPr>
-        <p:spPr>
-          <a:xfrm>
-            <a:off x="548640" y="1417320"/>
-            <a:ext cx="502920" cy="502920"/>
-          </a:xfrm>
-          <a:prstGeom prst="ellipse">
+          <p:cNvPr id="6" name="Text 3"/>
+          <p:cNvSpPr/>
+          <p:nvPr/>
+        </p:nvSpPr>
+        <p:spPr>
+          <a:xfrm>
+            <a:off x="530352" y="1051560"/>
+            <a:ext cx="11100816" cy="365760"/>
+          </a:xfrm>
+          <a:prstGeom prst="rect">
+            <a:avLst/>
+          </a:prstGeom>
+          <a:noFill/>
+          <a:ln/>
+        </p:spPr>
+        <p:txBody>
+          <a:bodyPr wrap="square" lIns="0" tIns="0" rIns="0" bIns="0" rtlCol="0" anchor="ctr"/>
+          <a:lstStyle/>
+          <a:p>
+            <a:pPr indent="0" marL="0">
+              <a:buNone/>
+            </a:pPr>
+            <a:r>
+              <a:rPr lang="en-US" sz="1100" i="1" dirty="0">
+                <a:solidFill>
+                  <a:srgbClr val="9E9E9E"/>
+                </a:solidFill>
+                <a:latin typeface="Malgun Gothic" pitchFamily="34" charset="0"/>
+                <a:ea typeface="Malgun Gothic" pitchFamily="34" charset="-122"/>
+                <a:cs typeface="Malgun Gothic" pitchFamily="34" charset="-120"/>
+              </a:rPr>
+              <a:t>Sysmex Technical Academy: 주니어 레벨 빠른 성장 및 Expert Engineer 육성 · Working Group: 4개 분야(Hema/Urine/Coa/Immuno) 전문성 강화</a:t>
+            </a:r>
+            <a:endParaRPr lang="en-US" sz="1100" dirty="0"/>
+          </a:p>
+        </p:txBody>
+      </p:sp>
+      <p:sp>
+        <p:nvSpPr>
+          <p:cNvPr id="7" name="Shape 4"/>
+          <p:cNvSpPr/>
+          <p:nvPr/>
+        </p:nvSpPr>
+        <p:spPr>
+          <a:xfrm>
+            <a:off x="530352" y="1508760"/>
+            <a:ext cx="5394960" cy="2468880"/>
+          </a:xfrm>
+          <a:prstGeom prst="roundRect">
+            <a:avLst>
+              <a:gd name="adj" fmla="val 2222"/>
+            </a:avLst>
+          </a:prstGeom>
+          <a:solidFill>
+            <a:srgbClr val="EFEFEF"/>
+          </a:solidFill>
+          <a:ln w="9525">
+            <a:solidFill>
+              <a:srgbClr val="9E9E9E"/>
+            </a:solidFill>
+            <a:prstDash val="dash"/>
+          </a:ln>
+        </p:spPr>
+      </p:sp>
+      <p:sp>
+        <p:nvSpPr>
+          <p:cNvPr id="8" name="Text 5"/>
+          <p:cNvSpPr/>
+          <p:nvPr/>
+        </p:nvSpPr>
+        <p:spPr>
+          <a:xfrm>
+            <a:off x="530352" y="1508760"/>
+            <a:ext cx="5394960" cy="2468880"/>
+          </a:xfrm>
+          <a:prstGeom prst="rect">
+            <a:avLst/>
+          </a:prstGeom>
+          <a:noFill/>
+          <a:ln/>
+        </p:spPr>
+        <p:txBody>
+          <a:bodyPr wrap="square" lIns="0" tIns="0" rIns="0" bIns="0" rtlCol="0" anchor="ctr"/>
+          <a:lstStyle/>
+          <a:p>
+            <a:pPr algn="ctr" indent="0" marL="0">
+              <a:buNone/>
+            </a:pPr>
+            <a:r>
+              <a:rPr lang="en-US" sz="1400" dirty="0">
+                <a:solidFill>
+                  <a:srgbClr val="9E9E9E"/>
+                </a:solidFill>
+                <a:latin typeface="Malgun Gothic" pitchFamily="34" charset="0"/>
+                <a:ea typeface="Malgun Gothic" pitchFamily="34" charset="-122"/>
+                <a:cs typeface="Malgun Gothic" pitchFamily="34" charset="-120"/>
+              </a:rPr>
+              <a:t>사진 자리 (Placeholder)</a:t>
+            </a:r>
+            <a:endParaRPr lang="en-US" sz="1400" dirty="0"/>
+          </a:p>
+        </p:txBody>
+      </p:sp>
+      <p:sp>
+        <p:nvSpPr>
+          <p:cNvPr id="9" name="Shape 6"/>
+          <p:cNvSpPr/>
+          <p:nvPr/>
+        </p:nvSpPr>
+        <p:spPr>
+          <a:xfrm>
+            <a:off x="6263640" y="1508760"/>
+            <a:ext cx="5394960" cy="2468880"/>
+          </a:xfrm>
+          <a:prstGeom prst="roundRect">
+            <a:avLst>
+              <a:gd name="adj" fmla="val 2222"/>
+            </a:avLst>
+          </a:prstGeom>
+          <a:solidFill>
+            <a:srgbClr val="EFEFEF"/>
+          </a:solidFill>
+          <a:ln w="9525">
+            <a:solidFill>
+              <a:srgbClr val="9E9E9E"/>
+            </a:solidFill>
+            <a:prstDash val="dash"/>
+          </a:ln>
+        </p:spPr>
+      </p:sp>
+      <p:sp>
+        <p:nvSpPr>
+          <p:cNvPr id="10" name="Text 7"/>
+          <p:cNvSpPr/>
+          <p:nvPr/>
+        </p:nvSpPr>
+        <p:spPr>
+          <a:xfrm>
+            <a:off x="6263640" y="1508760"/>
+            <a:ext cx="5394960" cy="2468880"/>
+          </a:xfrm>
+          <a:prstGeom prst="rect">
+            <a:avLst/>
+          </a:prstGeom>
+          <a:noFill/>
+          <a:ln/>
+        </p:spPr>
+        <p:txBody>
+          <a:bodyPr wrap="square" lIns="0" tIns="0" rIns="0" bIns="0" rtlCol="0" anchor="ctr"/>
+          <a:lstStyle/>
+          <a:p>
+            <a:pPr algn="ctr" indent="0" marL="0">
+              <a:buNone/>
+            </a:pPr>
+            <a:r>
+              <a:rPr lang="en-US" sz="1400" dirty="0">
+                <a:solidFill>
+                  <a:srgbClr val="9E9E9E"/>
+                </a:solidFill>
+                <a:latin typeface="Malgun Gothic" pitchFamily="34" charset="0"/>
+                <a:ea typeface="Malgun Gothic" pitchFamily="34" charset="-122"/>
+                <a:cs typeface="Malgun Gothic" pitchFamily="34" charset="-120"/>
+              </a:rPr>
+              <a:t>사진 자리 (Placeholder)</a:t>
+            </a:r>
+            <a:endParaRPr lang="en-US" sz="1400" dirty="0"/>
+          </a:p>
+        </p:txBody>
+      </p:sp>
+      <p:sp>
+        <p:nvSpPr>
+          <p:cNvPr id="11" name="Text 8"/>
+          <p:cNvSpPr/>
+          <p:nvPr/>
+        </p:nvSpPr>
+        <p:spPr>
+          <a:xfrm>
+            <a:off x="530352" y="4114800"/>
+            <a:ext cx="5394960" cy="457200"/>
+          </a:xfrm>
+          <a:prstGeom prst="rect">
+            <a:avLst/>
+          </a:prstGeom>
+          <a:noFill/>
+          <a:ln/>
+        </p:spPr>
+        <p:txBody>
+          <a:bodyPr wrap="square" lIns="0" tIns="0" rIns="0" bIns="0" rtlCol="0" anchor="ctr"/>
+          <a:lstStyle/>
+          <a:p>
+            <a:pPr indent="0" marL="0">
+              <a:buNone/>
+            </a:pPr>
+            <a:r>
+              <a:rPr lang="en-US" sz="1300" i="1" dirty="0">
+                <a:solidFill>
+                  <a:srgbClr val="9E9E9E"/>
+                </a:solidFill>
+                <a:latin typeface="Malgun Gothic" pitchFamily="34" charset="0"/>
+                <a:ea typeface="Malgun Gothic" pitchFamily="34" charset="-122"/>
+                <a:cs typeface="Malgun Gothic" pitchFamily="34" charset="-120"/>
+              </a:rPr>
+              <a:t>Technical Academy — 자료 미제공 – 추후 업데이트</a:t>
+            </a:r>
+            <a:endParaRPr lang="en-US" sz="1300" dirty="0"/>
+          </a:p>
+        </p:txBody>
+      </p:sp>
+      <p:sp>
+        <p:nvSpPr>
+          <p:cNvPr id="12" name="Text 9"/>
+          <p:cNvSpPr/>
+          <p:nvPr/>
+        </p:nvSpPr>
+        <p:spPr>
+          <a:xfrm>
+            <a:off x="6263640" y="4114800"/>
+            <a:ext cx="5394960" cy="457200"/>
+          </a:xfrm>
+          <a:prstGeom prst="rect">
+            <a:avLst/>
+          </a:prstGeom>
+          <a:noFill/>
+          <a:ln/>
+        </p:spPr>
+        <p:txBody>
+          <a:bodyPr wrap="square" lIns="0" tIns="0" rIns="0" bIns="0" rtlCol="0" anchor="ctr"/>
+          <a:lstStyle/>
+          <a:p>
+            <a:pPr indent="0" marL="0">
+              <a:buNone/>
+            </a:pPr>
+            <a:r>
+              <a:rPr lang="en-US" sz="1300" i="1" dirty="0">
+                <a:solidFill>
+                  <a:srgbClr val="9E9E9E"/>
+                </a:solidFill>
+                <a:latin typeface="Malgun Gothic" pitchFamily="34" charset="0"/>
+                <a:ea typeface="Malgun Gothic" pitchFamily="34" charset="-122"/>
+                <a:cs typeface="Malgun Gothic" pitchFamily="34" charset="-120"/>
+              </a:rPr>
+              <a:t>Working Group — 자료 미제공 – 추후 업데이트</a:t>
+            </a:r>
+            <a:endParaRPr lang="en-US" sz="1300" dirty="0"/>
+          </a:p>
+        </p:txBody>
+      </p:sp>
+      <p:sp>
+        <p:nvSpPr>
+          <p:cNvPr id="13" name="Text 10"/>
+          <p:cNvSpPr/>
+          <p:nvPr/>
+        </p:nvSpPr>
+        <p:spPr>
+          <a:xfrm>
+            <a:off x="457200" y="6547104"/>
+            <a:ext cx="9601200" cy="274320"/>
+          </a:xfrm>
+          <a:prstGeom prst="rect">
+            <a:avLst/>
+          </a:prstGeom>
+          <a:noFill/>
+          <a:ln/>
+        </p:spPr>
+        <p:txBody>
+          <a:bodyPr wrap="square" rtlCol="0" anchor="ctr"/>
+          <a:lstStyle/>
+          <a:p>
+            <a:pPr algn="l" indent="0" marL="0">
+              <a:buNone/>
+            </a:pPr>
+            <a:r>
+              <a:rPr lang="en-US" sz="900" dirty="0">
+                <a:solidFill>
+                  <a:srgbClr val="9E9E9E"/>
+                </a:solidFill>
+                <a:latin typeface="Malgun Gothic" pitchFamily="34" charset="0"/>
+                <a:ea typeface="Malgun Gothic" pitchFamily="34" charset="-122"/>
+                <a:cs typeface="Malgun Gothic" pitchFamily="34" charset="-120"/>
+              </a:rPr>
+              <a:t>FS Group │ FSS Team · 2026년 7월 · Confidential</a:t>
+            </a:r>
+            <a:endParaRPr lang="en-US" sz="900" dirty="0"/>
+          </a:p>
+        </p:txBody>
+      </p:sp>
+      <p:sp>
+        <p:nvSpPr>
+          <p:cNvPr id="14" name="Text 11"/>
+          <p:cNvSpPr/>
+          <p:nvPr/>
+        </p:nvSpPr>
+        <p:spPr>
+          <a:xfrm>
+            <a:off x="11247120" y="6547104"/>
+            <a:ext cx="731520" cy="274320"/>
+          </a:xfrm>
+          <a:prstGeom prst="rect">
+            <a:avLst/>
+          </a:prstGeom>
+          <a:noFill/>
+          <a:ln/>
+        </p:spPr>
+        <p:txBody>
+          <a:bodyPr wrap="square" rtlCol="0" anchor="ctr"/>
+          <a:lstStyle/>
+          <a:p>
+            <a:pPr algn="r" indent="0" marL="0">
+              <a:buNone/>
+            </a:pPr>
+            <a:r>
+              <a:rPr lang="en-US" sz="900" dirty="0">
+                <a:solidFill>
+                  <a:srgbClr val="9E9E9E"/>
+                </a:solidFill>
+                <a:latin typeface="Arial" pitchFamily="34" charset="0"/>
+                <a:ea typeface="Arial" pitchFamily="34" charset="-122"/>
+                <a:cs typeface="Arial" pitchFamily="34" charset="-120"/>
+              </a:rPr>
+              <a:t>10</a:t>
+            </a:r>
+            <a:endParaRPr lang="en-US" sz="900" dirty="0"/>
+          </a:p>
+        </p:txBody>
+      </p:sp>
+    </p:spTree>
+  </p:cSld>
+  <p:clrMapOvr>
+    <a:masterClrMapping/>
+  </p:clrMapOvr>
+</p:sld>
+</file>
+
+<file path=ppt/slides/slide11.xml><?xml version="1.0" encoding="utf-8"?>
+<p:sld xmlns:a="http://schemas.openxmlformats.org/drawingml/2006/main" xmlns:r="http://schemas.openxmlformats.org/officeDocument/2006/relationships" xmlns:p="http://schemas.openxmlformats.org/presentationml/2006/main">
+  <p:cSld name="Slide 11">
+    <p:bg>
+      <p:bgPr>
+        <a:solidFill>
+          <a:srgbClr val="FFFFFF"/>
+        </a:solidFill>
+      </p:bgPr>
+    </p:bg>
+    <p:spTree>
+      <p:nvGrpSpPr>
+        <p:cNvPr id="1" name=""/>
+        <p:cNvGrpSpPr/>
+        <p:nvPr/>
+      </p:nvGrpSpPr>
+      <p:grpSpPr>
+        <a:xfrm>
+          <a:off x="0" y="0"/>
+          <a:ext cx="0" cy="0"/>
+          <a:chOff x="0" y="0"/>
+          <a:chExt cx="0" cy="0"/>
+        </a:xfrm>
+      </p:grpSpPr>
+      <p:sp>
+        <p:nvSpPr>
+          <p:cNvPr id="2" name="Shape 0"/>
+          <p:cNvSpPr/>
+          <p:nvPr/>
+        </p:nvSpPr>
+        <p:spPr>
+          <a:xfrm>
+            <a:off x="0" y="0"/>
+            <a:ext cx="10378440" cy="914400"/>
+          </a:xfrm>
+          <a:prstGeom prst="rect">
             <a:avLst/>
           </a:prstGeom>
           <a:solidFill>
@@ -2113,14 +2650,14 @@
       </p:sp>
       <p:sp>
         <p:nvSpPr>
-          <p:cNvPr id="7" name="Text 4"/>
-          <p:cNvSpPr/>
-          <p:nvPr/>
-        </p:nvSpPr>
-        <p:spPr>
-          <a:xfrm>
-            <a:off x="548640" y="1417320"/>
-            <a:ext cx="502920" cy="502920"/>
+          <p:cNvPr id="3" name="Text 1"/>
+          <p:cNvSpPr/>
+          <p:nvPr/>
+        </p:nvSpPr>
+        <p:spPr>
+          <a:xfrm>
+            <a:off x="502920" y="164592"/>
+            <a:ext cx="822960" cy="585216"/>
           </a:xfrm>
           <a:prstGeom prst="rect">
             <a:avLst/>
@@ -2132,34 +2669,34 @@
           <a:bodyPr wrap="square" lIns="0" tIns="0" rIns="0" bIns="0" rtlCol="0" anchor="ctr"/>
           <a:lstStyle/>
           <a:p>
-            <a:pPr algn="ctr" indent="0" marL="0">
-              <a:buNone/>
-            </a:pPr>
-            <a:r>
-              <a:rPr lang="en-US" sz="1800" b="1" dirty="0">
-                <a:solidFill>
-                  <a:srgbClr val="FFFFFF"/>
+            <a:pPr algn="l" indent="0" marL="0">
+              <a:buNone/>
+            </a:pPr>
+            <a:r>
+              <a:rPr lang="en-US" sz="3000" b="1" dirty="0">
+                <a:solidFill>
+                  <a:srgbClr val="00B8EE"/>
                 </a:solidFill>
                 <a:latin typeface="Arial" pitchFamily="34" charset="0"/>
                 <a:ea typeface="Arial" pitchFamily="34" charset="-122"/>
                 <a:cs typeface="Arial" pitchFamily="34" charset="-120"/>
               </a:rPr>
-              <a:t>1</a:t>
-            </a:r>
-            <a:endParaRPr lang="en-US" sz="1800" dirty="0"/>
-          </a:p>
-        </p:txBody>
-      </p:sp>
-      <p:sp>
-        <p:nvSpPr>
-          <p:cNvPr id="8" name="Text 5"/>
-          <p:cNvSpPr/>
-          <p:nvPr/>
-        </p:nvSpPr>
-        <p:spPr>
-          <a:xfrm>
-            <a:off x="1280160" y="1325880"/>
-            <a:ext cx="9875520" cy="365760"/>
+              <a:t>11</a:t>
+            </a:r>
+            <a:endParaRPr lang="en-US" sz="3000" dirty="0"/>
+          </a:p>
+        </p:txBody>
+      </p:sp>
+      <p:sp>
+        <p:nvSpPr>
+          <p:cNvPr id="4" name="Text 2"/>
+          <p:cNvSpPr/>
+          <p:nvPr/>
+        </p:nvSpPr>
+        <p:spPr>
+          <a:xfrm>
+            <a:off x="1234440" y="164592"/>
+            <a:ext cx="8595360" cy="585216"/>
           </a:xfrm>
           <a:prstGeom prst="rect">
             <a:avLst/>
@@ -2171,34 +2708,80 @@
           <a:bodyPr wrap="square" lIns="0" tIns="0" rIns="0" bIns="0" rtlCol="0" anchor="ctr"/>
           <a:lstStyle/>
           <a:p>
-            <a:pPr indent="0" marL="0">
-              <a:buNone/>
-            </a:pPr>
-            <a:r>
-              <a:rPr lang="en-US" sz="1500" b="1" dirty="0">
-                <a:solidFill>
-                  <a:srgbClr val="3F3F3F"/>
+            <a:pPr algn="l" indent="0" marL="0">
+              <a:buNone/>
+            </a:pPr>
+            <a:r>
+              <a:rPr lang="en-US" sz="2600" b="1" dirty="0">
+                <a:solidFill>
+                  <a:srgbClr val="FFFFFF"/>
                 </a:solidFill>
                 <a:latin typeface="Malgun Gothic" pitchFamily="34" charset="0"/>
                 <a:ea typeface="Malgun Gothic" pitchFamily="34" charset="-122"/>
                 <a:cs typeface="Malgun Gothic" pitchFamily="34" charset="-120"/>
               </a:rPr>
-              <a:t>8월 설치 파이프라인 대응</a:t>
-            </a:r>
-            <a:endParaRPr lang="en-US" sz="1500" dirty="0"/>
-          </a:p>
-        </p:txBody>
-      </p:sp>
-      <p:sp>
-        <p:nvSpPr>
-          <p:cNvPr id="9" name="Text 6"/>
-          <p:cNvSpPr/>
-          <p:nvPr/>
-        </p:nvSpPr>
-        <p:spPr>
-          <a:xfrm>
-            <a:off x="1280160" y="1709928"/>
-            <a:ext cx="9875520" cy="640080"/>
+              <a:t>고객 중심 서비스 하이라이트</a:t>
+            </a:r>
+            <a:endParaRPr lang="en-US" sz="2600" dirty="0"/>
+          </a:p>
+        </p:txBody>
+      </p:sp>
+      <p:pic>
+        <p:nvPicPr>
+          <p:cNvPr id="5" name="Image 0" descr="sysmex_logo_mono_blue.png">    </p:cNvPr>
+          <p:cNvPicPr>
+            <a:picLocks noChangeAspect="1"/>
+          </p:cNvPicPr>
+          <p:nvPr/>
+        </p:nvPicPr>
+        <p:blipFill>
+          <a:blip r:embed="rId1"/>
+          <a:stretch>
+            <a:fillRect/>
+          </a:stretch>
+        </p:blipFill>
+        <p:spPr>
+          <a:xfrm>
+            <a:off x="10652760" y="292608"/>
+            <a:ext cx="1097280" cy="420624"/>
+          </a:xfrm>
+          <a:prstGeom prst="rect">
+            <a:avLst/>
+          </a:prstGeom>
+        </p:spPr>
+      </p:pic>
+      <p:sp>
+        <p:nvSpPr>
+          <p:cNvPr id="6" name="Shape 3"/>
+          <p:cNvSpPr/>
+          <p:nvPr/>
+        </p:nvSpPr>
+        <p:spPr>
+          <a:xfrm>
+            <a:off x="530352" y="1234440"/>
+            <a:ext cx="3566160" cy="2011680"/>
+          </a:xfrm>
+          <a:prstGeom prst="roundRect">
+            <a:avLst>
+              <a:gd name="adj" fmla="val 3636"/>
+            </a:avLst>
+          </a:prstGeom>
+          <a:solidFill>
+            <a:srgbClr val="F5F8FC"/>
+          </a:solidFill>
+          <a:ln/>
+        </p:spPr>
+      </p:sp>
+      <p:sp>
+        <p:nvSpPr>
+          <p:cNvPr id="7" name="Text 4"/>
+          <p:cNvSpPr/>
+          <p:nvPr/>
+        </p:nvSpPr>
+        <p:spPr>
+          <a:xfrm>
+            <a:off x="713232" y="1417320"/>
+            <a:ext cx="3200400" cy="457200"/>
           </a:xfrm>
           <a:prstGeom prst="rect">
             <a:avLst/>
@@ -2210,21 +2793,99 @@
           <a:bodyPr wrap="square" lIns="0" tIns="0" rIns="0" bIns="0" rtlCol="0" anchor="ctr"/>
           <a:lstStyle/>
           <a:p>
-            <a:pPr indent="0" marL="0">
-              <a:buNone/>
-            </a:pPr>
-            <a:r>
-              <a:rPr lang="en-US" sz="1200" dirty="0">
-                <a:solidFill>
-                  <a:srgbClr val="9E9E9E"/>
+            <a:pPr algn="ctr" indent="0" marL="0">
+              <a:buNone/>
+            </a:pPr>
+            <a:r>
+              <a:rPr lang="en-US" sz="1500" b="1" dirty="0">
+                <a:solidFill>
+                  <a:srgbClr val="005BAC"/>
                 </a:solidFill>
                 <a:latin typeface="Malgun Gothic" pitchFamily="34" charset="0"/>
                 <a:ea typeface="Malgun Gothic" pitchFamily="34" charset="-122"/>
                 <a:cs typeface="Malgun Gothic" pitchFamily="34" charset="-120"/>
               </a:rPr>
-              <a:t>설치일정 CRM 기준 8월 예정 16건(설치 9 · 평가 5 · 이전설치 2) 사전 리소스 배정 및 일정 조율</a:t>
-            </a:r>
-            <a:endParaRPr lang="en-US" sz="1200" dirty="0"/>
+              <a:t>VOC 대응</a:t>
+            </a:r>
+            <a:endParaRPr lang="en-US" sz="1500" dirty="0"/>
+          </a:p>
+        </p:txBody>
+      </p:sp>
+      <p:sp>
+        <p:nvSpPr>
+          <p:cNvPr id="8" name="Text 5"/>
+          <p:cNvSpPr/>
+          <p:nvPr/>
+        </p:nvSpPr>
+        <p:spPr>
+          <a:xfrm>
+            <a:off x="713232" y="1920240"/>
+            <a:ext cx="3200400" cy="365760"/>
+          </a:xfrm>
+          <a:prstGeom prst="rect">
+            <a:avLst/>
+          </a:prstGeom>
+          <a:noFill/>
+          <a:ln/>
+        </p:spPr>
+        <p:txBody>
+          <a:bodyPr wrap="square" lIns="0" tIns="0" rIns="0" bIns="0" rtlCol="0" anchor="ctr"/>
+          <a:lstStyle/>
+          <a:p>
+            <a:pPr algn="ctr" indent="0" marL="0">
+              <a:buNone/>
+            </a:pPr>
+            <a:r>
+              <a:rPr lang="en-US" sz="1100" dirty="0">
+                <a:solidFill>
+                  <a:srgbClr val="3F3F3F"/>
+                </a:solidFill>
+                <a:latin typeface="Malgun Gothic" pitchFamily="34" charset="0"/>
+                <a:ea typeface="Malgun Gothic" pitchFamily="34" charset="-122"/>
+                <a:cs typeface="Malgun Gothic" pitchFamily="34" charset="-120"/>
+              </a:rPr>
+              <a:t>고객 피드백 기반 개선</a:t>
+            </a:r>
+            <a:endParaRPr lang="en-US" sz="1100" dirty="0"/>
+          </a:p>
+        </p:txBody>
+      </p:sp>
+      <p:sp>
+        <p:nvSpPr>
+          <p:cNvPr id="9" name="Text 6"/>
+          <p:cNvSpPr/>
+          <p:nvPr/>
+        </p:nvSpPr>
+        <p:spPr>
+          <a:xfrm>
+            <a:off x="713232" y="2377440"/>
+            <a:ext cx="3200400" cy="731520"/>
+          </a:xfrm>
+          <a:prstGeom prst="rect">
+            <a:avLst/>
+          </a:prstGeom>
+          <a:noFill/>
+          <a:ln/>
+        </p:spPr>
+        <p:txBody>
+          <a:bodyPr wrap="square" lIns="0" tIns="0" rIns="0" bIns="0" rtlCol="0" anchor="ctr"/>
+          <a:lstStyle/>
+          <a:p>
+            <a:pPr algn="ctr" indent="0" marL="0">
+              <a:buNone/>
+            </a:pPr>
+            <a:r>
+              <a:rPr lang="en-US" sz="1100" i="1" dirty="0">
+                <a:solidFill>
+                  <a:srgbClr val="9E9E9E"/>
+                </a:solidFill>
+                <a:latin typeface="Malgun Gothic" pitchFamily="34" charset="0"/>
+                <a:ea typeface="Malgun Gothic" pitchFamily="34" charset="-122"/>
+                <a:cs typeface="Malgun Gothic" pitchFamily="34" charset="-120"/>
+              </a:rPr>
+              <a:t>자료 미제공 – 추후 업데이트</a:t>
+            </a:r>
+            <a:endParaRPr lang="en-US" sz="1100" dirty="0"/>
           </a:p>
         </p:txBody>
       </p:sp>
@@ -2236,10 +2897,498 @@
         </p:nvSpPr>
         <p:spPr>
           <a:xfrm>
-            <a:off x="548640" y="2587752"/>
-            <a:ext cx="502920" cy="502920"/>
-          </a:xfrm>
-          <a:prstGeom prst="ellipse">
+            <a:off x="4279392" y="1234440"/>
+            <a:ext cx="3566160" cy="2011680"/>
+          </a:xfrm>
+          <a:prstGeom prst="roundRect">
+            <a:avLst>
+              <a:gd name="adj" fmla="val 3636"/>
+            </a:avLst>
+          </a:prstGeom>
+          <a:solidFill>
+            <a:srgbClr val="F5F8FC"/>
+          </a:solidFill>
+          <a:ln/>
+        </p:spPr>
+      </p:sp>
+      <p:sp>
+        <p:nvSpPr>
+          <p:cNvPr id="11" name="Text 8"/>
+          <p:cNvSpPr/>
+          <p:nvPr/>
+        </p:nvSpPr>
+        <p:spPr>
+          <a:xfrm>
+            <a:off x="4462272" y="1417320"/>
+            <a:ext cx="3200400" cy="457200"/>
+          </a:xfrm>
+          <a:prstGeom prst="rect">
+            <a:avLst/>
+          </a:prstGeom>
+          <a:noFill/>
+          <a:ln/>
+        </p:spPr>
+        <p:txBody>
+          <a:bodyPr wrap="square" lIns="0" tIns="0" rIns="0" bIns="0" rtlCol="0" anchor="ctr"/>
+          <a:lstStyle/>
+          <a:p>
+            <a:pPr algn="ctr" indent="0" marL="0">
+              <a:buNone/>
+            </a:pPr>
+            <a:r>
+              <a:rPr lang="en-US" sz="1500" b="1" dirty="0">
+                <a:solidFill>
+                  <a:srgbClr val="005BAC"/>
+                </a:solidFill>
+                <a:latin typeface="Malgun Gothic" pitchFamily="34" charset="0"/>
+                <a:ea typeface="Malgun Gothic" pitchFamily="34" charset="-122"/>
+                <a:cs typeface="Malgun Gothic" pitchFamily="34" charset="-120"/>
+              </a:rPr>
+              <a:t>중대 이슈 대응력</a:t>
+            </a:r>
+            <a:endParaRPr lang="en-US" sz="1500" dirty="0"/>
+          </a:p>
+        </p:txBody>
+      </p:sp>
+      <p:sp>
+        <p:nvSpPr>
+          <p:cNvPr id="12" name="Text 9"/>
+          <p:cNvSpPr/>
+          <p:nvPr/>
+        </p:nvSpPr>
+        <p:spPr>
+          <a:xfrm>
+            <a:off x="4462272" y="1920240"/>
+            <a:ext cx="3200400" cy="365760"/>
+          </a:xfrm>
+          <a:prstGeom prst="rect">
+            <a:avLst/>
+          </a:prstGeom>
+          <a:noFill/>
+          <a:ln/>
+        </p:spPr>
+        <p:txBody>
+          <a:bodyPr wrap="square" lIns="0" tIns="0" rIns="0" bIns="0" rtlCol="0" anchor="ctr"/>
+          <a:lstStyle/>
+          <a:p>
+            <a:pPr algn="ctr" indent="0" marL="0">
+              <a:buNone/>
+            </a:pPr>
+            <a:r>
+              <a:rPr lang="en-US" sz="1100" dirty="0">
+                <a:solidFill>
+                  <a:srgbClr val="3F3F3F"/>
+                </a:solidFill>
+                <a:latin typeface="Malgun Gothic" pitchFamily="34" charset="0"/>
+                <a:ea typeface="Malgun Gothic" pitchFamily="34" charset="-122"/>
+                <a:cs typeface="Malgun Gothic" pitchFamily="34" charset="-120"/>
+              </a:rPr>
+              <a:t>SLA 준수 · 신속 종결</a:t>
+            </a:r>
+            <a:endParaRPr lang="en-US" sz="1100" dirty="0"/>
+          </a:p>
+        </p:txBody>
+      </p:sp>
+      <p:sp>
+        <p:nvSpPr>
+          <p:cNvPr id="13" name="Text 10"/>
+          <p:cNvSpPr/>
+          <p:nvPr/>
+        </p:nvSpPr>
+        <p:spPr>
+          <a:xfrm>
+            <a:off x="4462272" y="2377440"/>
+            <a:ext cx="3200400" cy="731520"/>
+          </a:xfrm>
+          <a:prstGeom prst="rect">
+            <a:avLst/>
+          </a:prstGeom>
+          <a:noFill/>
+          <a:ln/>
+        </p:spPr>
+        <p:txBody>
+          <a:bodyPr wrap="square" lIns="0" tIns="0" rIns="0" bIns="0" rtlCol="0" anchor="ctr"/>
+          <a:lstStyle/>
+          <a:p>
+            <a:pPr algn="ctr" indent="0" marL="0">
+              <a:buNone/>
+            </a:pPr>
+            <a:r>
+              <a:rPr lang="en-US" sz="1100" i="1" dirty="0">
+                <a:solidFill>
+                  <a:srgbClr val="9E9E9E"/>
+                </a:solidFill>
+                <a:latin typeface="Malgun Gothic" pitchFamily="34" charset="0"/>
+                <a:ea typeface="Malgun Gothic" pitchFamily="34" charset="-122"/>
+                <a:cs typeface="Malgun Gothic" pitchFamily="34" charset="-120"/>
+              </a:rPr>
+              <a:t>자료 미제공 – 추후 업데이트</a:t>
+            </a:r>
+            <a:endParaRPr lang="en-US" sz="1100" dirty="0"/>
+          </a:p>
+        </p:txBody>
+      </p:sp>
+      <p:sp>
+        <p:nvSpPr>
+          <p:cNvPr id="14" name="Shape 11"/>
+          <p:cNvSpPr/>
+          <p:nvPr/>
+        </p:nvSpPr>
+        <p:spPr>
+          <a:xfrm>
+            <a:off x="8028432" y="1234440"/>
+            <a:ext cx="3566160" cy="2011680"/>
+          </a:xfrm>
+          <a:prstGeom prst="roundRect">
+            <a:avLst>
+              <a:gd name="adj" fmla="val 3636"/>
+            </a:avLst>
+          </a:prstGeom>
+          <a:solidFill>
+            <a:srgbClr val="F5F8FC"/>
+          </a:solidFill>
+          <a:ln/>
+        </p:spPr>
+      </p:sp>
+      <p:sp>
+        <p:nvSpPr>
+          <p:cNvPr id="15" name="Text 12"/>
+          <p:cNvSpPr/>
+          <p:nvPr/>
+        </p:nvSpPr>
+        <p:spPr>
+          <a:xfrm>
+            <a:off x="8211312" y="1417320"/>
+            <a:ext cx="3200400" cy="457200"/>
+          </a:xfrm>
+          <a:prstGeom prst="rect">
+            <a:avLst/>
+          </a:prstGeom>
+          <a:noFill/>
+          <a:ln/>
+        </p:spPr>
+        <p:txBody>
+          <a:bodyPr wrap="square" lIns="0" tIns="0" rIns="0" bIns="0" rtlCol="0" anchor="ctr"/>
+          <a:lstStyle/>
+          <a:p>
+            <a:pPr algn="ctr" indent="0" marL="0">
+              <a:buNone/>
+            </a:pPr>
+            <a:r>
+              <a:rPr lang="en-US" sz="1500" b="1" dirty="0">
+                <a:solidFill>
+                  <a:srgbClr val="005BAC"/>
+                </a:solidFill>
+                <a:latin typeface="Malgun Gothic" pitchFamily="34" charset="0"/>
+                <a:ea typeface="Malgun Gothic" pitchFamily="34" charset="-122"/>
+                <a:cs typeface="Malgun Gothic" pitchFamily="34" charset="-120"/>
+              </a:rPr>
+              <a:t>대리점/직원 역량</a:t>
+            </a:r>
+            <a:endParaRPr lang="en-US" sz="1500" dirty="0"/>
+          </a:p>
+        </p:txBody>
+      </p:sp>
+      <p:sp>
+        <p:nvSpPr>
+          <p:cNvPr id="16" name="Text 13"/>
+          <p:cNvSpPr/>
+          <p:nvPr/>
+        </p:nvSpPr>
+        <p:spPr>
+          <a:xfrm>
+            <a:off x="8211312" y="1920240"/>
+            <a:ext cx="3200400" cy="365760"/>
+          </a:xfrm>
+          <a:prstGeom prst="rect">
+            <a:avLst/>
+          </a:prstGeom>
+          <a:noFill/>
+          <a:ln/>
+        </p:spPr>
+        <p:txBody>
+          <a:bodyPr wrap="square" lIns="0" tIns="0" rIns="0" bIns="0" rtlCol="0" anchor="ctr"/>
+          <a:lstStyle/>
+          <a:p>
+            <a:pPr algn="ctr" indent="0" marL="0">
+              <a:buNone/>
+            </a:pPr>
+            <a:r>
+              <a:rPr lang="en-US" sz="1100" dirty="0">
+                <a:solidFill>
+                  <a:srgbClr val="3F3F3F"/>
+                </a:solidFill>
+                <a:latin typeface="Malgun Gothic" pitchFamily="34" charset="0"/>
+                <a:ea typeface="Malgun Gothic" pitchFamily="34" charset="-122"/>
+                <a:cs typeface="Malgun Gothic" pitchFamily="34" charset="-120"/>
+              </a:rPr>
+              <a:t>교육 통한 서비스 품질 제고</a:t>
+            </a:r>
+            <a:endParaRPr lang="en-US" sz="1100" dirty="0"/>
+          </a:p>
+        </p:txBody>
+      </p:sp>
+      <p:sp>
+        <p:nvSpPr>
+          <p:cNvPr id="17" name="Text 14"/>
+          <p:cNvSpPr/>
+          <p:nvPr/>
+        </p:nvSpPr>
+        <p:spPr>
+          <a:xfrm>
+            <a:off x="8211312" y="2377440"/>
+            <a:ext cx="3200400" cy="731520"/>
+          </a:xfrm>
+          <a:prstGeom prst="rect">
+            <a:avLst/>
+          </a:prstGeom>
+          <a:noFill/>
+          <a:ln/>
+        </p:spPr>
+        <p:txBody>
+          <a:bodyPr wrap="square" lIns="0" tIns="0" rIns="0" bIns="0" rtlCol="0" anchor="ctr"/>
+          <a:lstStyle/>
+          <a:p>
+            <a:pPr algn="ctr" indent="0" marL="0">
+              <a:buNone/>
+            </a:pPr>
+            <a:r>
+              <a:rPr lang="en-US" sz="1100" i="1" dirty="0">
+                <a:solidFill>
+                  <a:srgbClr val="9E9E9E"/>
+                </a:solidFill>
+                <a:latin typeface="Malgun Gothic" pitchFamily="34" charset="0"/>
+                <a:ea typeface="Malgun Gothic" pitchFamily="34" charset="-122"/>
+                <a:cs typeface="Malgun Gothic" pitchFamily="34" charset="-120"/>
+              </a:rPr>
+              <a:t>자료 미제공 – 추후 업데이트</a:t>
+            </a:r>
+            <a:endParaRPr lang="en-US" sz="1100" dirty="0"/>
+          </a:p>
+        </p:txBody>
+      </p:sp>
+      <p:sp>
+        <p:nvSpPr>
+          <p:cNvPr id="18" name="Shape 15"/>
+          <p:cNvSpPr/>
+          <p:nvPr/>
+        </p:nvSpPr>
+        <p:spPr>
+          <a:xfrm>
+            <a:off x="530352" y="3520440"/>
+            <a:ext cx="11100816" cy="2103120"/>
+          </a:xfrm>
+          <a:prstGeom prst="roundRect">
+            <a:avLst>
+              <a:gd name="adj" fmla="val 3478"/>
+            </a:avLst>
+          </a:prstGeom>
+          <a:solidFill>
+            <a:srgbClr val="E6EEF7"/>
+          </a:solidFill>
+          <a:ln/>
+        </p:spPr>
+      </p:sp>
+      <p:sp>
+        <p:nvSpPr>
+          <p:cNvPr id="19" name="Text 16"/>
+          <p:cNvSpPr/>
+          <p:nvPr/>
+        </p:nvSpPr>
+        <p:spPr>
+          <a:xfrm>
+            <a:off x="777240" y="3657600"/>
+            <a:ext cx="4572000" cy="320040"/>
+          </a:xfrm>
+          <a:prstGeom prst="rect">
+            <a:avLst/>
+          </a:prstGeom>
+          <a:noFill/>
+          <a:ln/>
+        </p:spPr>
+        <p:txBody>
+          <a:bodyPr wrap="square" lIns="0" tIns="0" rIns="0" bIns="0" rtlCol="0" anchor="ctr"/>
+          <a:lstStyle/>
+          <a:p>
+            <a:pPr indent="0" marL="0">
+              <a:buNone/>
+            </a:pPr>
+            <a:r>
+              <a:rPr lang="en-US" sz="1300" b="1" dirty="0">
+                <a:solidFill>
+                  <a:srgbClr val="005BAC"/>
+                </a:solidFill>
+                <a:latin typeface="Malgun Gothic" pitchFamily="34" charset="0"/>
+                <a:ea typeface="Malgun Gothic" pitchFamily="34" charset="-122"/>
+                <a:cs typeface="Malgun Gothic" pitchFamily="34" charset="-120"/>
+              </a:rPr>
+              <a:t>고객 중심 Insight</a:t>
+            </a:r>
+            <a:endParaRPr lang="en-US" sz="1300" dirty="0"/>
+          </a:p>
+        </p:txBody>
+      </p:sp>
+      <p:sp>
+        <p:nvSpPr>
+          <p:cNvPr id="20" name="Text 17"/>
+          <p:cNvSpPr/>
+          <p:nvPr/>
+        </p:nvSpPr>
+        <p:spPr>
+          <a:xfrm>
+            <a:off x="777240" y="4023360"/>
+            <a:ext cx="10607040" cy="1463040"/>
+          </a:xfrm>
+          <a:prstGeom prst="rect">
+            <a:avLst/>
+          </a:prstGeom>
+          <a:noFill/>
+          <a:ln/>
+        </p:spPr>
+        <p:txBody>
+          <a:bodyPr wrap="square" lIns="0" tIns="0" rIns="0" bIns="0" rtlCol="0" anchor="ctr"/>
+          <a:lstStyle/>
+          <a:p>
+            <a:pPr indent="0" marL="0">
+              <a:buNone/>
+            </a:pPr>
+            <a:r>
+              <a:rPr lang="en-US" sz="1300" dirty="0">
+                <a:solidFill>
+                  <a:srgbClr val="3F3F3F"/>
+                </a:solidFill>
+                <a:latin typeface="Malgun Gothic" pitchFamily="34" charset="0"/>
+                <a:ea typeface="Malgun Gothic" pitchFamily="34" charset="-122"/>
+                <a:cs typeface="Malgun Gothic" pitchFamily="34" charset="-120"/>
+              </a:rPr>
+              <a:t>설치일정 CRM 데이터 분석 결과 (2026년 7월): 강남차병원·강남차여성병원 프로젝트(XR-9000/XR-1000)는 담당 엔지니어(Martin)가 설치 → 평가 지원 → 이전설치까지 4건을 연속 담당해 책임 담당제의 고객 연속성을 보여주는 우수 사례입니다. 설치·이전설치 평균 소요기간은 1.25일로 신속하게 처리되었으나, FS South팀은 7월 설치 실적 0건으로 팀간 업무량 편차 확인이 필요합니다.</a:t>
+            </a:r>
+            <a:endParaRPr lang="en-US" sz="1300" dirty="0"/>
+          </a:p>
+        </p:txBody>
+      </p:sp>
+      <p:sp>
+        <p:nvSpPr>
+          <p:cNvPr id="21" name="Text 18"/>
+          <p:cNvSpPr/>
+          <p:nvPr/>
+        </p:nvSpPr>
+        <p:spPr>
+          <a:xfrm>
+            <a:off x="457200" y="6547104"/>
+            <a:ext cx="9601200" cy="274320"/>
+          </a:xfrm>
+          <a:prstGeom prst="rect">
+            <a:avLst/>
+          </a:prstGeom>
+          <a:noFill/>
+          <a:ln/>
+        </p:spPr>
+        <p:txBody>
+          <a:bodyPr wrap="square" rtlCol="0" anchor="ctr"/>
+          <a:lstStyle/>
+          <a:p>
+            <a:pPr algn="l" indent="0" marL="0">
+              <a:buNone/>
+            </a:pPr>
+            <a:r>
+              <a:rPr lang="en-US" sz="900" dirty="0">
+                <a:solidFill>
+                  <a:srgbClr val="9E9E9E"/>
+                </a:solidFill>
+                <a:latin typeface="Malgun Gothic" pitchFamily="34" charset="0"/>
+                <a:ea typeface="Malgun Gothic" pitchFamily="34" charset="-122"/>
+                <a:cs typeface="Malgun Gothic" pitchFamily="34" charset="-120"/>
+              </a:rPr>
+              <a:t>FS Group │ FSS Team · 2026년 7월 · Confidential</a:t>
+            </a:r>
+            <a:endParaRPr lang="en-US" sz="900" dirty="0"/>
+          </a:p>
+        </p:txBody>
+      </p:sp>
+      <p:sp>
+        <p:nvSpPr>
+          <p:cNvPr id="22" name="Text 19"/>
+          <p:cNvSpPr/>
+          <p:nvPr/>
+        </p:nvSpPr>
+        <p:spPr>
+          <a:xfrm>
+            <a:off x="11247120" y="6547104"/>
+            <a:ext cx="731520" cy="274320"/>
+          </a:xfrm>
+          <a:prstGeom prst="rect">
+            <a:avLst/>
+          </a:prstGeom>
+          <a:noFill/>
+          <a:ln/>
+        </p:spPr>
+        <p:txBody>
+          <a:bodyPr wrap="square" rtlCol="0" anchor="ctr"/>
+          <a:lstStyle/>
+          <a:p>
+            <a:pPr algn="r" indent="0" marL="0">
+              <a:buNone/>
+            </a:pPr>
+            <a:r>
+              <a:rPr lang="en-US" sz="900" dirty="0">
+                <a:solidFill>
+                  <a:srgbClr val="9E9E9E"/>
+                </a:solidFill>
+                <a:latin typeface="Arial" pitchFamily="34" charset="0"/>
+                <a:ea typeface="Arial" pitchFamily="34" charset="-122"/>
+                <a:cs typeface="Arial" pitchFamily="34" charset="-120"/>
+              </a:rPr>
+              <a:t>11</a:t>
+            </a:r>
+            <a:endParaRPr lang="en-US" sz="900" dirty="0"/>
+          </a:p>
+        </p:txBody>
+      </p:sp>
+    </p:spTree>
+  </p:cSld>
+  <p:clrMapOvr>
+    <a:masterClrMapping/>
+  </p:clrMapOvr>
+</p:sld>
+</file>
+
+<file path=ppt/slides/slide12.xml><?xml version="1.0" encoding="utf-8"?>
+<p:sld xmlns:a="http://schemas.openxmlformats.org/drawingml/2006/main" xmlns:r="http://schemas.openxmlformats.org/officeDocument/2006/relationships" xmlns:p="http://schemas.openxmlformats.org/presentationml/2006/main">
+  <p:cSld name="Slide 12">
+    <p:bg>
+      <p:bgPr>
+        <a:solidFill>
+          <a:srgbClr val="FFFFFF"/>
+        </a:solidFill>
+      </p:bgPr>
+    </p:bg>
+    <p:spTree>
+      <p:nvGrpSpPr>
+        <p:cNvPr id="1" name=""/>
+        <p:cNvGrpSpPr/>
+        <p:nvPr/>
+      </p:nvGrpSpPr>
+      <p:grpSpPr>
+        <a:xfrm>
+          <a:off x="0" y="0"/>
+          <a:ext cx="0" cy="0"/>
+          <a:chOff x="0" y="0"/>
+          <a:chExt cx="0" cy="0"/>
+        </a:xfrm>
+      </p:grpSpPr>
+      <p:sp>
+        <p:nvSpPr>
+          <p:cNvPr id="2" name="Shape 0"/>
+          <p:cNvSpPr/>
+          <p:nvPr/>
+        </p:nvSpPr>
+        <p:spPr>
+          <a:xfrm>
+            <a:off x="0" y="0"/>
+            <a:ext cx="10378440" cy="914400"/>
+          </a:xfrm>
+          <a:prstGeom prst="rect">
             <a:avLst/>
           </a:prstGeom>
           <a:solidFill>
@@ -2250,14 +3399,14 @@
       </p:sp>
       <p:sp>
         <p:nvSpPr>
-          <p:cNvPr id="11" name="Text 8"/>
-          <p:cNvSpPr/>
-          <p:nvPr/>
-        </p:nvSpPr>
-        <p:spPr>
-          <a:xfrm>
-            <a:off x="548640" y="2587752"/>
-            <a:ext cx="502920" cy="502920"/>
+          <p:cNvPr id="3" name="Text 1"/>
+          <p:cNvSpPr/>
+          <p:nvPr/>
+        </p:nvSpPr>
+        <p:spPr>
+          <a:xfrm>
+            <a:off x="502920" y="164592"/>
+            <a:ext cx="822960" cy="585216"/>
           </a:xfrm>
           <a:prstGeom prst="rect">
             <a:avLst/>
@@ -2269,34 +3418,34 @@
           <a:bodyPr wrap="square" lIns="0" tIns="0" rIns="0" bIns="0" rtlCol="0" anchor="ctr"/>
           <a:lstStyle/>
           <a:p>
-            <a:pPr algn="ctr" indent="0" marL="0">
-              <a:buNone/>
-            </a:pPr>
-            <a:r>
-              <a:rPr lang="en-US" sz="1800" b="1" dirty="0">
-                <a:solidFill>
-                  <a:srgbClr val="FFFFFF"/>
+            <a:pPr algn="l" indent="0" marL="0">
+              <a:buNone/>
+            </a:pPr>
+            <a:r>
+              <a:rPr lang="en-US" sz="3000" b="1" dirty="0">
+                <a:solidFill>
+                  <a:srgbClr val="00B8EE"/>
                 </a:solidFill>
                 <a:latin typeface="Arial" pitchFamily="34" charset="0"/>
                 <a:ea typeface="Arial" pitchFamily="34" charset="-122"/>
                 <a:cs typeface="Arial" pitchFamily="34" charset="-120"/>
               </a:rPr>
-              <a:t>2</a:t>
-            </a:r>
-            <a:endParaRPr lang="en-US" sz="1800" dirty="0"/>
-          </a:p>
-        </p:txBody>
-      </p:sp>
-      <p:sp>
-        <p:nvSpPr>
-          <p:cNvPr id="12" name="Text 9"/>
-          <p:cNvSpPr/>
-          <p:nvPr/>
-        </p:nvSpPr>
-        <p:spPr>
-          <a:xfrm>
-            <a:off x="1280160" y="2496312"/>
-            <a:ext cx="9875520" cy="365760"/>
+              <a:t>12</a:t>
+            </a:r>
+            <a:endParaRPr lang="en-US" sz="3000" dirty="0"/>
+          </a:p>
+        </p:txBody>
+      </p:sp>
+      <p:sp>
+        <p:nvSpPr>
+          <p:cNvPr id="4" name="Text 2"/>
+          <p:cNvSpPr/>
+          <p:nvPr/>
+        </p:nvSpPr>
+        <p:spPr>
+          <a:xfrm>
+            <a:off x="1234440" y="164592"/>
+            <a:ext cx="8595360" cy="585216"/>
           </a:xfrm>
           <a:prstGeom prst="rect">
             <a:avLst/>
@@ -2308,34 +3457,78 @@
           <a:bodyPr wrap="square" lIns="0" tIns="0" rIns="0" bIns="0" rtlCol="0" anchor="ctr"/>
           <a:lstStyle/>
           <a:p>
-            <a:pPr indent="0" marL="0">
-              <a:buNone/>
-            </a:pPr>
-            <a:r>
-              <a:rPr lang="en-US" sz="1500" b="1" dirty="0">
-                <a:solidFill>
-                  <a:srgbClr val="3F3F3F"/>
+            <a:pPr algn="l" indent="0" marL="0">
+              <a:buNone/>
+            </a:pPr>
+            <a:r>
+              <a:rPr lang="en-US" sz="2600" b="1" dirty="0">
+                <a:solidFill>
+                  <a:srgbClr val="FFFFFF"/>
                 </a:solidFill>
                 <a:latin typeface="Malgun Gothic" pitchFamily="34" charset="0"/>
                 <a:ea typeface="Malgun Gothic" pitchFamily="34" charset="-122"/>
                 <a:cs typeface="Malgun Gothic" pitchFamily="34" charset="-120"/>
               </a:rPr>
-              <a:t>FS South팀 업무량 편차 점검</a:t>
-            </a:r>
-            <a:endParaRPr lang="en-US" sz="1500" dirty="0"/>
-          </a:p>
-        </p:txBody>
-      </p:sp>
-      <p:sp>
-        <p:nvSpPr>
-          <p:cNvPr id="13" name="Text 10"/>
-          <p:cNvSpPr/>
-          <p:nvPr/>
-        </p:nvSpPr>
-        <p:spPr>
-          <a:xfrm>
-            <a:off x="1280160" y="2880360"/>
-            <a:ext cx="9875520" cy="640080"/>
+              <a:t>Next Step</a:t>
+            </a:r>
+            <a:endParaRPr lang="en-US" sz="2600" dirty="0"/>
+          </a:p>
+        </p:txBody>
+      </p:sp>
+      <p:pic>
+        <p:nvPicPr>
+          <p:cNvPr id="5" name="Image 0" descr="sysmex_logo_mono_blue.png">    </p:cNvPr>
+          <p:cNvPicPr>
+            <a:picLocks noChangeAspect="1"/>
+          </p:cNvPicPr>
+          <p:nvPr/>
+        </p:nvPicPr>
+        <p:blipFill>
+          <a:blip r:embed="rId1"/>
+          <a:stretch>
+            <a:fillRect/>
+          </a:stretch>
+        </p:blipFill>
+        <p:spPr>
+          <a:xfrm>
+            <a:off x="10652760" y="292608"/>
+            <a:ext cx="1097280" cy="420624"/>
+          </a:xfrm>
+          <a:prstGeom prst="rect">
+            <a:avLst/>
+          </a:prstGeom>
+        </p:spPr>
+      </p:pic>
+      <p:sp>
+        <p:nvSpPr>
+          <p:cNvPr id="6" name="Shape 3"/>
+          <p:cNvSpPr/>
+          <p:nvPr/>
+        </p:nvSpPr>
+        <p:spPr>
+          <a:xfrm>
+            <a:off x="548640" y="1417320"/>
+            <a:ext cx="502920" cy="502920"/>
+          </a:xfrm>
+          <a:prstGeom prst="ellipse">
+            <a:avLst/>
+          </a:prstGeom>
+          <a:solidFill>
+            <a:srgbClr val="005BAC"/>
+          </a:solidFill>
+          <a:ln/>
+        </p:spPr>
+      </p:sp>
+      <p:sp>
+        <p:nvSpPr>
+          <p:cNvPr id="7" name="Text 4"/>
+          <p:cNvSpPr/>
+          <p:nvPr/>
+        </p:nvSpPr>
+        <p:spPr>
+          <a:xfrm>
+            <a:off x="548640" y="1417320"/>
+            <a:ext cx="502920" cy="502920"/>
           </a:xfrm>
           <a:prstGeom prst="rect">
             <a:avLst/>
@@ -2347,19 +3540,97 @@
           <a:bodyPr wrap="square" lIns="0" tIns="0" rIns="0" bIns="0" rtlCol="0" anchor="ctr"/>
           <a:lstStyle/>
           <a:p>
+            <a:pPr algn="ctr" indent="0" marL="0">
+              <a:buNone/>
+            </a:pPr>
+            <a:r>
+              <a:rPr lang="en-US" sz="1800" b="1" dirty="0">
+                <a:solidFill>
+                  <a:srgbClr val="FFFFFF"/>
+                </a:solidFill>
+                <a:latin typeface="Arial" pitchFamily="34" charset="0"/>
+                <a:ea typeface="Arial" pitchFamily="34" charset="-122"/>
+                <a:cs typeface="Arial" pitchFamily="34" charset="-120"/>
+              </a:rPr>
+              <a:t>1</a:t>
+            </a:r>
+            <a:endParaRPr lang="en-US" sz="1800" dirty="0"/>
+          </a:p>
+        </p:txBody>
+      </p:sp>
+      <p:sp>
+        <p:nvSpPr>
+          <p:cNvPr id="8" name="Text 5"/>
+          <p:cNvSpPr/>
+          <p:nvPr/>
+        </p:nvSpPr>
+        <p:spPr>
+          <a:xfrm>
+            <a:off x="1280160" y="1325880"/>
+            <a:ext cx="9875520" cy="365760"/>
+          </a:xfrm>
+          <a:prstGeom prst="rect">
+            <a:avLst/>
+          </a:prstGeom>
+          <a:noFill/>
+          <a:ln/>
+        </p:spPr>
+        <p:txBody>
+          <a:bodyPr wrap="square" lIns="0" tIns="0" rIns="0" bIns="0" rtlCol="0" anchor="ctr"/>
+          <a:lstStyle/>
+          <a:p>
             <a:pPr indent="0" marL="0">
               <a:buNone/>
             </a:pPr>
             <a:r>
-              <a:rPr lang="en-US" sz="1200" dirty="0">
-                <a:solidFill>
-                  <a:srgbClr val="9E9E9E"/>
+              <a:rPr lang="en-US" sz="1500" b="1" dirty="0">
+                <a:solidFill>
+                  <a:srgbClr val="3F3F3F"/>
                 </a:solidFill>
                 <a:latin typeface="Malgun Gothic" pitchFamily="34" charset="0"/>
                 <a:ea typeface="Malgun Gothic" pitchFamily="34" charset="-122"/>
                 <a:cs typeface="Malgun Gothic" pitchFamily="34" charset="-120"/>
               </a:rPr>
-              <a:t>7월 설치 실적 0건 원인 파악 후 8월 배정 검토</a:t>
+              <a:t>8월 설치 파이프라인 대응</a:t>
+            </a:r>
+            <a:endParaRPr lang="en-US" sz="1500" dirty="0"/>
+          </a:p>
+        </p:txBody>
+      </p:sp>
+      <p:sp>
+        <p:nvSpPr>
+          <p:cNvPr id="9" name="Text 6"/>
+          <p:cNvSpPr/>
+          <p:nvPr/>
+        </p:nvSpPr>
+        <p:spPr>
+          <a:xfrm>
+            <a:off x="1280160" y="1709928"/>
+            <a:ext cx="9875520" cy="640080"/>
+          </a:xfrm>
+          <a:prstGeom prst="rect">
+            <a:avLst/>
+          </a:prstGeom>
+          <a:noFill/>
+          <a:ln/>
+        </p:spPr>
+        <p:txBody>
+          <a:bodyPr wrap="square" lIns="0" tIns="0" rIns="0" bIns="0" rtlCol="0" anchor="ctr"/>
+          <a:lstStyle/>
+          <a:p>
+            <a:pPr indent="0" marL="0">
+              <a:buNone/>
+            </a:pPr>
+            <a:r>
+              <a:rPr lang="en-US" sz="1200" dirty="0">
+                <a:solidFill>
+                  <a:srgbClr val="9E9E9E"/>
+                </a:solidFill>
+                <a:latin typeface="Malgun Gothic" pitchFamily="34" charset="0"/>
+                <a:ea typeface="Malgun Gothic" pitchFamily="34" charset="-122"/>
+                <a:cs typeface="Malgun Gothic" pitchFamily="34" charset="-120"/>
+              </a:rPr>
+              <a:t>설치일정 CRM 기준 8월 예정 16건(설치 9 · 평가 5 · 이전설치 2) 사전 리소스 배정 및 일정 조율</a:t>
             </a:r>
             <a:endParaRPr lang="en-US" sz="1200" dirty="0"/>
           </a:p>
@@ -2367,13 +3638,13 @@
       </p:sp>
       <p:sp>
         <p:nvSpPr>
-          <p:cNvPr id="14" name="Shape 11"/>
-          <p:cNvSpPr/>
-          <p:nvPr/>
-        </p:nvSpPr>
-        <p:spPr>
-          <a:xfrm>
-            <a:off x="548640" y="3758184"/>
+          <p:cNvPr id="10" name="Shape 7"/>
+          <p:cNvSpPr/>
+          <p:nvPr/>
+        </p:nvSpPr>
+        <p:spPr>
+          <a:xfrm>
+            <a:off x="548640" y="2587752"/>
             <a:ext cx="502920" cy="502920"/>
           </a:xfrm>
           <a:prstGeom prst="ellipse">
@@ -2387,13 +3658,13 @@
       </p:sp>
       <p:sp>
         <p:nvSpPr>
-          <p:cNvPr id="15" name="Text 12"/>
-          <p:cNvSpPr/>
-          <p:nvPr/>
-        </p:nvSpPr>
-        <p:spPr>
-          <a:xfrm>
-            <a:off x="548640" y="3758184"/>
+          <p:cNvPr id="11" name="Text 8"/>
+          <p:cNvSpPr/>
+          <p:nvPr/>
+        </p:nvSpPr>
+        <p:spPr>
+          <a:xfrm>
+            <a:off x="548640" y="2587752"/>
             <a:ext cx="502920" cy="502920"/>
           </a:xfrm>
           <a:prstGeom prst="rect">
@@ -2418,7 +3689,7 @@
                 <a:ea typeface="Arial" pitchFamily="34" charset="-122"/>
                 <a:cs typeface="Arial" pitchFamily="34" charset="-120"/>
               </a:rPr>
-              <a:t>3</a:t>
+              <a:t>2</a:t>
             </a:r>
             <a:endParaRPr lang="en-US" sz="1800" dirty="0"/>
           </a:p>
@@ -2426,13 +3697,13 @@
       </p:sp>
       <p:sp>
         <p:nvSpPr>
-          <p:cNvPr id="16" name="Text 13"/>
-          <p:cNvSpPr/>
-          <p:nvPr/>
-        </p:nvSpPr>
-        <p:spPr>
-          <a:xfrm>
-            <a:off x="1280160" y="3666744"/>
+          <p:cNvPr id="12" name="Text 9"/>
+          <p:cNvSpPr/>
+          <p:nvPr/>
+        </p:nvSpPr>
+        <p:spPr>
+          <a:xfrm>
+            <a:off x="1280160" y="2496312"/>
             <a:ext cx="9875520" cy="365760"/>
           </a:xfrm>
           <a:prstGeom prst="rect">
@@ -2457,7 +3728,7 @@
                 <a:ea typeface="Malgun Gothic" pitchFamily="34" charset="-122"/>
                 <a:cs typeface="Malgun Gothic" pitchFamily="34" charset="-120"/>
               </a:rPr>
-              <a:t>책임 담당제 우수 사례 확산</a:t>
+              <a:t>FS South팀 업무량 편차 점검</a:t>
             </a:r>
             <a:endParaRPr lang="en-US" sz="1500" dirty="0"/>
           </a:p>
@@ -2465,13 +3736,13 @@
       </p:sp>
       <p:sp>
         <p:nvSpPr>
-          <p:cNvPr id="17" name="Text 14"/>
-          <p:cNvSpPr/>
-          <p:nvPr/>
-        </p:nvSpPr>
-        <p:spPr>
-          <a:xfrm>
-            <a:off x="1280160" y="4050792"/>
+          <p:cNvPr id="13" name="Text 10"/>
+          <p:cNvSpPr/>
+          <p:nvPr/>
+        </p:nvSpPr>
+        <p:spPr>
+          <a:xfrm>
+            <a:off x="1280160" y="2880360"/>
             <a:ext cx="9875520" cy="640080"/>
           </a:xfrm>
           <a:prstGeom prst="rect">
@@ -2496,7 +3767,7 @@
                 <a:ea typeface="Malgun Gothic" pitchFamily="34" charset="-122"/>
                 <a:cs typeface="Malgun Gothic" pitchFamily="34" charset="-120"/>
               </a:rPr>
-              <a:t>강남차병원 사례(담당 엔지니어 연속 대응)를 타 팀 벤치마킹 사례로 공유</a:t>
+              <a:t>7월 설치 실적 0건 원인 파악 후 8월 배정 검토</a:t>
             </a:r>
             <a:endParaRPr lang="en-US" sz="1200" dirty="0"/>
           </a:p>
@@ -2504,13 +3775,13 @@
       </p:sp>
       <p:sp>
         <p:nvSpPr>
-          <p:cNvPr id="18" name="Shape 15"/>
-          <p:cNvSpPr/>
-          <p:nvPr/>
-        </p:nvSpPr>
-        <p:spPr>
-          <a:xfrm>
-            <a:off x="548640" y="4928616"/>
+          <p:cNvPr id="14" name="Shape 11"/>
+          <p:cNvSpPr/>
+          <p:nvPr/>
+        </p:nvSpPr>
+        <p:spPr>
+          <a:xfrm>
+            <a:off x="548640" y="3758184"/>
             <a:ext cx="502920" cy="502920"/>
           </a:xfrm>
           <a:prstGeom prst="ellipse">
@@ -2524,13 +3795,13 @@
       </p:sp>
       <p:sp>
         <p:nvSpPr>
-          <p:cNvPr id="19" name="Text 16"/>
-          <p:cNvSpPr/>
-          <p:nvPr/>
-        </p:nvSpPr>
-        <p:spPr>
-          <a:xfrm>
-            <a:off x="548640" y="4928616"/>
+          <p:cNvPr id="15" name="Text 12"/>
+          <p:cNvSpPr/>
+          <p:nvPr/>
+        </p:nvSpPr>
+        <p:spPr>
+          <a:xfrm>
+            <a:off x="548640" y="3758184"/>
             <a:ext cx="502920" cy="502920"/>
           </a:xfrm>
           <a:prstGeom prst="rect">
@@ -2555,7 +3826,7 @@
                 <a:ea typeface="Arial" pitchFamily="34" charset="-122"/>
                 <a:cs typeface="Arial" pitchFamily="34" charset="-120"/>
               </a:rPr>
-              <a:t>4</a:t>
+              <a:t>3</a:t>
             </a:r>
             <a:endParaRPr lang="en-US" sz="1800" dirty="0"/>
           </a:p>
@@ -2563,13 +3834,13 @@
       </p:sp>
       <p:sp>
         <p:nvSpPr>
-          <p:cNvPr id="20" name="Text 17"/>
-          <p:cNvSpPr/>
-          <p:nvPr/>
-        </p:nvSpPr>
-        <p:spPr>
-          <a:xfrm>
-            <a:off x="1280160" y="4837176"/>
+          <p:cNvPr id="16" name="Text 13"/>
+          <p:cNvSpPr/>
+          <p:nvPr/>
+        </p:nvSpPr>
+        <p:spPr>
+          <a:xfrm>
+            <a:off x="1280160" y="3666744"/>
             <a:ext cx="9875520" cy="365760"/>
           </a:xfrm>
           <a:prstGeom prst="rect">
@@ -2594,7 +3865,7 @@
                 <a:ea typeface="Malgun Gothic" pitchFamily="34" charset="-122"/>
                 <a:cs typeface="Malgun Gothic" pitchFamily="34" charset="-120"/>
               </a:rPr>
-              <a:t>미확보 데이터 확보</a:t>
+              <a:t>책임 담당제 우수 사례 확산</a:t>
             </a:r>
             <a:endParaRPr lang="en-US" sz="1500" dirty="0"/>
           </a:p>
@@ -2602,13 +3873,13 @@
       </p:sp>
       <p:sp>
         <p:nvSpPr>
-          <p:cNvPr id="21" name="Text 18"/>
-          <p:cNvSpPr/>
-          <p:nvPr/>
-        </p:nvSpPr>
-        <p:spPr>
-          <a:xfrm>
-            <a:off x="1280160" y="5221224"/>
+          <p:cNvPr id="17" name="Text 14"/>
+          <p:cNvSpPr/>
+          <p:nvPr/>
+        </p:nvSpPr>
+        <p:spPr>
+          <a:xfrm>
+            <a:off x="1280160" y="4050792"/>
             <a:ext cx="9875520" cy="640080"/>
           </a:xfrm>
           <a:prstGeom prst="rect">
@@ -2633,7 +3904,7 @@
                 <a:ea typeface="Malgun Gothic" pitchFamily="34" charset="-122"/>
                 <a:cs typeface="Malgun Gothic" pitchFamily="34" charset="-120"/>
               </a:rPr>
-              <a:t>PM·A/S 실적, VOC 대시보드 연동 데이터 확보하여 다음 보고 시 KPI·VOC 항목 완성</a:t>
+              <a:t>강남차병원 사례(담당 엔지니어 연속 대응)를 타 팀 벤치마킹 사례로 공유</a:t>
             </a:r>
             <a:endParaRPr lang="en-US" sz="1200" dirty="0"/>
           </a:p>
@@ -2641,37 +3912,174 @@
       </p:sp>
       <p:sp>
         <p:nvSpPr>
-          <p:cNvPr id="22" name="Text 19"/>
-          <p:cNvSpPr/>
-          <p:nvPr/>
-        </p:nvSpPr>
-        <p:spPr>
-          <a:xfrm>
-            <a:off x="457200" y="6547104"/>
-            <a:ext cx="9601200" cy="274320"/>
-          </a:xfrm>
-          <a:prstGeom prst="rect">
-            <a:avLst/>
-          </a:prstGeom>
-          <a:noFill/>
-          <a:ln/>
-        </p:spPr>
-        <p:txBody>
-          <a:bodyPr wrap="square" rtlCol="0" anchor="ctr"/>
-          <a:lstStyle/>
-          <a:p>
-            <a:pPr algn="l" indent="0" marL="0">
-              <a:buNone/>
-            </a:pPr>
-            <a:r>
-              <a:rPr lang="en-US" sz="900" dirty="0">
-                <a:solidFill>
-                  <a:srgbClr val="9E9E9E"/>
+          <p:cNvPr id="18" name="Shape 15"/>
+          <p:cNvSpPr/>
+          <p:nvPr/>
+        </p:nvSpPr>
+        <p:spPr>
+          <a:xfrm>
+            <a:off x="548640" y="4928616"/>
+            <a:ext cx="502920" cy="502920"/>
+          </a:xfrm>
+          <a:prstGeom prst="ellipse">
+            <a:avLst/>
+          </a:prstGeom>
+          <a:solidFill>
+            <a:srgbClr val="005BAC"/>
+          </a:solidFill>
+          <a:ln/>
+        </p:spPr>
+      </p:sp>
+      <p:sp>
+        <p:nvSpPr>
+          <p:cNvPr id="19" name="Text 16"/>
+          <p:cNvSpPr/>
+          <p:nvPr/>
+        </p:nvSpPr>
+        <p:spPr>
+          <a:xfrm>
+            <a:off x="548640" y="4928616"/>
+            <a:ext cx="502920" cy="502920"/>
+          </a:xfrm>
+          <a:prstGeom prst="rect">
+            <a:avLst/>
+          </a:prstGeom>
+          <a:noFill/>
+          <a:ln/>
+        </p:spPr>
+        <p:txBody>
+          <a:bodyPr wrap="square" lIns="0" tIns="0" rIns="0" bIns="0" rtlCol="0" anchor="ctr"/>
+          <a:lstStyle/>
+          <a:p>
+            <a:pPr algn="ctr" indent="0" marL="0">
+              <a:buNone/>
+            </a:pPr>
+            <a:r>
+              <a:rPr lang="en-US" sz="1800" b="1" dirty="0">
+                <a:solidFill>
+                  <a:srgbClr val="FFFFFF"/>
+                </a:solidFill>
+                <a:latin typeface="Arial" pitchFamily="34" charset="0"/>
+                <a:ea typeface="Arial" pitchFamily="34" charset="-122"/>
+                <a:cs typeface="Arial" pitchFamily="34" charset="-120"/>
+              </a:rPr>
+              <a:t>4</a:t>
+            </a:r>
+            <a:endParaRPr lang="en-US" sz="1800" dirty="0"/>
+          </a:p>
+        </p:txBody>
+      </p:sp>
+      <p:sp>
+        <p:nvSpPr>
+          <p:cNvPr id="20" name="Text 17"/>
+          <p:cNvSpPr/>
+          <p:nvPr/>
+        </p:nvSpPr>
+        <p:spPr>
+          <a:xfrm>
+            <a:off x="1280160" y="4837176"/>
+            <a:ext cx="9875520" cy="365760"/>
+          </a:xfrm>
+          <a:prstGeom prst="rect">
+            <a:avLst/>
+          </a:prstGeom>
+          <a:noFill/>
+          <a:ln/>
+        </p:spPr>
+        <p:txBody>
+          <a:bodyPr wrap="square" lIns="0" tIns="0" rIns="0" bIns="0" rtlCol="0" anchor="ctr"/>
+          <a:lstStyle/>
+          <a:p>
+            <a:pPr indent="0" marL="0">
+              <a:buNone/>
+            </a:pPr>
+            <a:r>
+              <a:rPr lang="en-US" sz="1500" b="1" dirty="0">
+                <a:solidFill>
+                  <a:srgbClr val="3F3F3F"/>
                 </a:solidFill>
                 <a:latin typeface="Malgun Gothic" pitchFamily="34" charset="0"/>
                 <a:ea typeface="Malgun Gothic" pitchFamily="34" charset="-122"/>
                 <a:cs typeface="Malgun Gothic" pitchFamily="34" charset="-120"/>
               </a:rPr>
+              <a:t>미확보 데이터 확보</a:t>
+            </a:r>
+            <a:endParaRPr lang="en-US" sz="1500" dirty="0"/>
+          </a:p>
+        </p:txBody>
+      </p:sp>
+      <p:sp>
+        <p:nvSpPr>
+          <p:cNvPr id="21" name="Text 18"/>
+          <p:cNvSpPr/>
+          <p:nvPr/>
+        </p:nvSpPr>
+        <p:spPr>
+          <a:xfrm>
+            <a:off x="1280160" y="5221224"/>
+            <a:ext cx="9875520" cy="640080"/>
+          </a:xfrm>
+          <a:prstGeom prst="rect">
+            <a:avLst/>
+          </a:prstGeom>
+          <a:noFill/>
+          <a:ln/>
+        </p:spPr>
+        <p:txBody>
+          <a:bodyPr wrap="square" lIns="0" tIns="0" rIns="0" bIns="0" rtlCol="0" anchor="ctr"/>
+          <a:lstStyle/>
+          <a:p>
+            <a:pPr indent="0" marL="0">
+              <a:buNone/>
+            </a:pPr>
+            <a:r>
+              <a:rPr lang="en-US" sz="1200" dirty="0">
+                <a:solidFill>
+                  <a:srgbClr val="9E9E9E"/>
+                </a:solidFill>
+                <a:latin typeface="Malgun Gothic" pitchFamily="34" charset="0"/>
+                <a:ea typeface="Malgun Gothic" pitchFamily="34" charset="-122"/>
+                <a:cs typeface="Malgun Gothic" pitchFamily="34" charset="-120"/>
+              </a:rPr>
+              <a:t>PM·A/S 실적, VOC 대시보드 연동 데이터 확보하여 다음 보고 시 KPI·VOC 항목 완성</a:t>
+            </a:r>
+            <a:endParaRPr lang="en-US" sz="1200" dirty="0"/>
+          </a:p>
+        </p:txBody>
+      </p:sp>
+      <p:sp>
+        <p:nvSpPr>
+          <p:cNvPr id="22" name="Text 19"/>
+          <p:cNvSpPr/>
+          <p:nvPr/>
+        </p:nvSpPr>
+        <p:spPr>
+          <a:xfrm>
+            <a:off x="457200" y="6547104"/>
+            <a:ext cx="9601200" cy="274320"/>
+          </a:xfrm>
+          <a:prstGeom prst="rect">
+            <a:avLst/>
+          </a:prstGeom>
+          <a:noFill/>
+          <a:ln/>
+        </p:spPr>
+        <p:txBody>
+          <a:bodyPr wrap="square" rtlCol="0" anchor="ctr"/>
+          <a:lstStyle/>
+          <a:p>
+            <a:pPr algn="l" indent="0" marL="0">
+              <a:buNone/>
+            </a:pPr>
+            <a:r>
+              <a:rPr lang="en-US" sz="900" dirty="0">
+                <a:solidFill>
+                  <a:srgbClr val="9E9E9E"/>
+                </a:solidFill>
+                <a:latin typeface="Malgun Gothic" pitchFamily="34" charset="0"/>
+                <a:ea typeface="Malgun Gothic" pitchFamily="34" charset="-122"/>
+                <a:cs typeface="Malgun Gothic" pitchFamily="34" charset="-120"/>
+              </a:rPr>
               <a:t>FS Group │ FSS Team · 2026년 7월 · Confidential</a:t>
             </a:r>
             <a:endParaRPr lang="en-US" sz="900" dirty="0"/>
@@ -2711,7 +4119,7 @@
                 <a:ea typeface="Arial" pitchFamily="34" charset="-122"/>
                 <a:cs typeface="Arial" pitchFamily="34" charset="-120"/>
               </a:rPr>
-              <a:t>10</a:t>
+              <a:t>12</a:t>
             </a:r>
             <a:endParaRPr lang="en-US" sz="900" dirty="0"/>
           </a:p>
@@ -2879,7 +4287,7 @@
         </p:nvSpPr>
         <p:spPr>
           <a:xfrm>
-            <a:off x="548640" y="1298448"/>
+            <a:off x="548640" y="1344168"/>
             <a:ext cx="502920" cy="502920"/>
           </a:xfrm>
           <a:prstGeom prst="ellipse">
@@ -2899,7 +4307,7 @@
         </p:nvSpPr>
         <p:spPr>
           <a:xfrm>
-            <a:off x="548640" y="1298448"/>
+            <a:off x="548640" y="1344168"/>
             <a:ext cx="502920" cy="502920"/>
           </a:xfrm>
           <a:prstGeom prst="rect">
@@ -2938,8 +4346,8 @@
         </p:nvSpPr>
         <p:spPr>
           <a:xfrm>
-            <a:off x="1280160" y="1188720"/>
-            <a:ext cx="5120640" cy="365760"/>
+            <a:off x="1280160" y="1234440"/>
+            <a:ext cx="4572000" cy="365760"/>
           </a:xfrm>
           <a:prstGeom prst="rect">
             <a:avLst/>
@@ -2955,7 +4363,7 @@
               <a:buNone/>
             </a:pPr>
             <a:r>
-              <a:rPr lang="en-US" sz="1600" b="1" dirty="0">
+              <a:rPr lang="en-US" sz="1500" b="1" dirty="0">
                 <a:solidFill>
                   <a:srgbClr val="3F3F3F"/>
                 </a:solidFill>
@@ -2965,7 +4373,7 @@
               </a:rPr>
               <a:t>서비스 활동 보고</a:t>
             </a:r>
-            <a:endParaRPr lang="en-US" sz="1600" dirty="0"/>
+            <a:endParaRPr lang="en-US" sz="1500" dirty="0"/>
           </a:p>
         </p:txBody>
       </p:sp>
@@ -2977,8 +4385,8 @@
         </p:nvSpPr>
         <p:spPr>
           <a:xfrm>
-            <a:off x="1280160" y="1572768"/>
-            <a:ext cx="9509760" cy="365760"/>
+            <a:off x="1280160" y="1618488"/>
+            <a:ext cx="4572000" cy="640080"/>
           </a:xfrm>
           <a:prstGeom prst="rect">
             <a:avLst/>
@@ -2994,7 +4402,7 @@
               <a:buNone/>
             </a:pPr>
             <a:r>
-              <a:rPr lang="en-US" sz="1200" i="1" dirty="0">
+              <a:rPr lang="en-US" sz="1100" i="1" dirty="0">
                 <a:solidFill>
                   <a:srgbClr val="9E9E9E"/>
                 </a:solidFill>
@@ -3004,7 +4412,7 @@
               </a:rPr>
               <a:t>설치·PM·A/S 실적 및 KPI 요약</a:t>
             </a:r>
-            <a:endParaRPr lang="en-US" sz="1200" dirty="0"/>
+            <a:endParaRPr lang="en-US" sz="1100" dirty="0"/>
           </a:p>
         </p:txBody>
       </p:sp>
@@ -3016,7 +4424,7 @@
         </p:nvSpPr>
         <p:spPr>
           <a:xfrm>
-            <a:off x="548640" y="2121408"/>
+            <a:off x="548640" y="2578608"/>
             <a:ext cx="502920" cy="502920"/>
           </a:xfrm>
           <a:prstGeom prst="ellipse">
@@ -3036,7 +4444,7 @@
         </p:nvSpPr>
         <p:spPr>
           <a:xfrm>
-            <a:off x="548640" y="2121408"/>
+            <a:off x="548640" y="2578608"/>
             <a:ext cx="502920" cy="502920"/>
           </a:xfrm>
           <a:prstGeom prst="rect">
@@ -3075,8 +4483,8 @@
         </p:nvSpPr>
         <p:spPr>
           <a:xfrm>
-            <a:off x="1280160" y="2011680"/>
-            <a:ext cx="5120640" cy="365760"/>
+            <a:off x="1280160" y="2468880"/>
+            <a:ext cx="4572000" cy="365760"/>
           </a:xfrm>
           <a:prstGeom prst="rect">
             <a:avLst/>
@@ -3092,7 +4500,7 @@
               <a:buNone/>
             </a:pPr>
             <a:r>
-              <a:rPr lang="en-US" sz="1600" b="1" dirty="0">
+              <a:rPr lang="en-US" sz="1500" b="1" dirty="0">
                 <a:solidFill>
                   <a:srgbClr val="3F3F3F"/>
                 </a:solidFill>
@@ -3102,7 +4510,7 @@
               </a:rPr>
               <a:t>장비별 설치 현황</a:t>
             </a:r>
-            <a:endParaRPr lang="en-US" sz="1600" dirty="0"/>
+            <a:endParaRPr lang="en-US" sz="1500" dirty="0"/>
           </a:p>
         </p:txBody>
       </p:sp>
@@ -3114,8 +4522,8 @@
         </p:nvSpPr>
         <p:spPr>
           <a:xfrm>
-            <a:off x="1280160" y="2395728"/>
-            <a:ext cx="9509760" cy="365760"/>
+            <a:off x="1280160" y="2852928"/>
+            <a:ext cx="4572000" cy="640080"/>
           </a:xfrm>
           <a:prstGeom prst="rect">
             <a:avLst/>
@@ -3131,7 +4539,7 @@
               <a:buNone/>
             </a:pPr>
             <a:r>
-              <a:rPr lang="en-US" sz="1200" i="1" dirty="0">
+              <a:rPr lang="en-US" sz="1100" i="1" dirty="0">
                 <a:solidFill>
                   <a:srgbClr val="9E9E9E"/>
                 </a:solidFill>
@@ -3141,7 +4549,7 @@
               </a:rPr>
               <a:t>팀 구분 없이 모델(시리즈)별 설치 집계</a:t>
             </a:r>
-            <a:endParaRPr lang="en-US" sz="1200" dirty="0"/>
+            <a:endParaRPr lang="en-US" sz="1100" dirty="0"/>
           </a:p>
         </p:txBody>
       </p:sp>
@@ -3153,7 +4561,7 @@
         </p:nvSpPr>
         <p:spPr>
           <a:xfrm>
-            <a:off x="548640" y="2944368"/>
+            <a:off x="548640" y="3813048"/>
             <a:ext cx="502920" cy="502920"/>
           </a:xfrm>
           <a:prstGeom prst="ellipse">
@@ -3173,7 +4581,7 @@
         </p:nvSpPr>
         <p:spPr>
           <a:xfrm>
-            <a:off x="548640" y="2944368"/>
+            <a:off x="548640" y="3813048"/>
             <a:ext cx="502920" cy="502920"/>
           </a:xfrm>
           <a:prstGeom prst="rect">
@@ -3212,8 +4620,8 @@
         </p:nvSpPr>
         <p:spPr>
           <a:xfrm>
-            <a:off x="1280160" y="2834640"/>
-            <a:ext cx="5120640" cy="365760"/>
+            <a:off x="1280160" y="3703320"/>
+            <a:ext cx="4572000" cy="365760"/>
           </a:xfrm>
           <a:prstGeom prst="rect">
             <a:avLst/>
@@ -3229,7 +4637,7 @@
               <a:buNone/>
             </a:pPr>
             <a:r>
-              <a:rPr lang="en-US" sz="1600" b="1" dirty="0">
+              <a:rPr lang="en-US" sz="1500" b="1" dirty="0">
                 <a:solidFill>
                   <a:srgbClr val="3F3F3F"/>
                 </a:solidFill>
@@ -3237,9 +4645,9 @@
                 <a:ea typeface="Malgun Gothic" pitchFamily="34" charset="-122"/>
                 <a:cs typeface="Malgun Gothic" pitchFamily="34" charset="-120"/>
               </a:rPr>
-              <a:t>VOC 수집 정보 및 처리현황</a:t>
-            </a:r>
-            <a:endParaRPr lang="en-US" sz="1600" dirty="0"/>
+              <a:t>서비스 케이스 분석</a:t>
+            </a:r>
+            <a:endParaRPr lang="en-US" sz="1500" dirty="0"/>
           </a:p>
         </p:txBody>
       </p:sp>
@@ -3251,8 +4659,8 @@
         </p:nvSpPr>
         <p:spPr>
           <a:xfrm>
-            <a:off x="1280160" y="3218688"/>
-            <a:ext cx="9509760" cy="365760"/>
+            <a:off x="1280160" y="4087368"/>
+            <a:ext cx="4572000" cy="640080"/>
           </a:xfrm>
           <a:prstGeom prst="rect">
             <a:avLst/>
@@ -3268,7 +4676,7 @@
               <a:buNone/>
             </a:pPr>
             <a:r>
-              <a:rPr lang="en-US" sz="1200" i="1" dirty="0">
+              <a:rPr lang="en-US" sz="1100" i="1" dirty="0">
                 <a:solidFill>
                   <a:srgbClr val="9E9E9E"/>
                 </a:solidFill>
@@ -3276,9 +4684,9 @@
                 <a:ea typeface="Malgun Gothic" pitchFamily="34" charset="-122"/>
                 <a:cs typeface="Malgun Gothic" pitchFamily="34" charset="-120"/>
               </a:rPr>
-              <a:t>고객 만족도 서베이 응답·유형별 처리 현황</a:t>
-            </a:r>
-            <a:endParaRPr lang="en-US" sz="1200" dirty="0"/>
+              <a:t>최근 1년 추이·서비스 목적별 비율·예방정비 지수</a:t>
+            </a:r>
+            <a:endParaRPr lang="en-US" sz="1100" dirty="0"/>
           </a:p>
         </p:txBody>
       </p:sp>
@@ -3290,7 +4698,7 @@
         </p:nvSpPr>
         <p:spPr>
           <a:xfrm>
-            <a:off x="548640" y="3767328"/>
+            <a:off x="548640" y="5047488"/>
             <a:ext cx="502920" cy="502920"/>
           </a:xfrm>
           <a:prstGeom prst="ellipse">
@@ -3310,7 +4718,7 @@
         </p:nvSpPr>
         <p:spPr>
           <a:xfrm>
-            <a:off x="548640" y="3767328"/>
+            <a:off x="548640" y="5047488"/>
             <a:ext cx="502920" cy="502920"/>
           </a:xfrm>
           <a:prstGeom prst="rect">
@@ -3349,8 +4757,8 @@
         </p:nvSpPr>
         <p:spPr>
           <a:xfrm>
-            <a:off x="1280160" y="3657600"/>
-            <a:ext cx="5120640" cy="365760"/>
+            <a:off x="1280160" y="4937760"/>
+            <a:ext cx="4572000" cy="365760"/>
           </a:xfrm>
           <a:prstGeom prst="rect">
             <a:avLst/>
@@ -3366,7 +4774,7 @@
               <a:buNone/>
             </a:pPr>
             <a:r>
-              <a:rPr lang="en-US" sz="1600" b="1" dirty="0">
+              <a:rPr lang="en-US" sz="1500" b="1" dirty="0">
                 <a:solidFill>
                   <a:srgbClr val="3F3F3F"/>
                 </a:solidFill>
@@ -3374,9 +4782,9 @@
                 <a:ea typeface="Malgun Gothic" pitchFamily="34" charset="-122"/>
                 <a:cs typeface="Malgun Gothic" pitchFamily="34" charset="-120"/>
               </a:rPr>
-              <a:t>중대 이슈 처리</a:t>
-            </a:r>
-            <a:endParaRPr lang="en-US" sz="1600" dirty="0"/>
+              <a:t>주요 고객 및 장애 분석</a:t>
+            </a:r>
+            <a:endParaRPr lang="en-US" sz="1500" dirty="0"/>
           </a:p>
         </p:txBody>
       </p:sp>
@@ -3388,8 +4796,8 @@
         </p:nvSpPr>
         <p:spPr>
           <a:xfrm>
-            <a:off x="1280160" y="4041648"/>
-            <a:ext cx="9509760" cy="365760"/>
+            <a:off x="1280160" y="5321808"/>
+            <a:ext cx="4572000" cy="640080"/>
           </a:xfrm>
           <a:prstGeom prst="rect">
             <a:avLst/>
@@ -3405,7 +4813,7 @@
               <a:buNone/>
             </a:pPr>
             <a:r>
-              <a:rPr lang="en-US" sz="1200" i="1" dirty="0">
+              <a:rPr lang="en-US" sz="1100" i="1" dirty="0">
                 <a:solidFill>
                   <a:srgbClr val="9E9E9E"/>
                 </a:solidFill>
@@ -3413,9 +4821,9 @@
                 <a:ea typeface="Malgun Gothic" pitchFamily="34" charset="-122"/>
                 <a:cs typeface="Malgun Gothic" pitchFamily="34" charset="-120"/>
               </a:rPr>
-              <a:t>긴급/중대 VOC 접수·조치·종결 현황</a:t>
-            </a:r>
-            <a:endParaRPr lang="en-US" sz="1200" dirty="0"/>
+              <a:t>병원 TOP5·반복 장애 장비·주요 장애 요인</a:t>
+            </a:r>
+            <a:endParaRPr lang="en-US" sz="1100" dirty="0"/>
           </a:p>
         </p:txBody>
       </p:sp>
@@ -3427,7 +4835,7 @@
         </p:nvSpPr>
         <p:spPr>
           <a:xfrm>
-            <a:off x="548640" y="4590288"/>
+            <a:off x="6263640" y="1344168"/>
             <a:ext cx="502920" cy="502920"/>
           </a:xfrm>
           <a:prstGeom prst="ellipse">
@@ -3447,7 +4855,7 @@
         </p:nvSpPr>
         <p:spPr>
           <a:xfrm>
-            <a:off x="548640" y="4590288"/>
+            <a:off x="6263640" y="1344168"/>
             <a:ext cx="502920" cy="502920"/>
           </a:xfrm>
           <a:prstGeom prst="rect">
@@ -3486,8 +4894,8 @@
         </p:nvSpPr>
         <p:spPr>
           <a:xfrm>
-            <a:off x="1280160" y="4480560"/>
-            <a:ext cx="5120640" cy="365760"/>
+            <a:off x="6995160" y="1234440"/>
+            <a:ext cx="4572000" cy="365760"/>
           </a:xfrm>
           <a:prstGeom prst="rect">
             <a:avLst/>
@@ -3503,7 +4911,7 @@
               <a:buNone/>
             </a:pPr>
             <a:r>
-              <a:rPr lang="en-US" sz="1600" b="1" dirty="0">
+              <a:rPr lang="en-US" sz="1500" b="1" dirty="0">
                 <a:solidFill>
                   <a:srgbClr val="3F3F3F"/>
                 </a:solidFill>
@@ -3511,9 +4919,9 @@
                 <a:ea typeface="Malgun Gothic" pitchFamily="34" charset="-122"/>
                 <a:cs typeface="Malgun Gothic" pitchFamily="34" charset="-120"/>
               </a:rPr>
-              <a:t>대리점 교육 등 처리</a:t>
-            </a:r>
-            <a:endParaRPr lang="en-US" sz="1600" dirty="0"/>
+              <a:t>VOC 수집 정보 및 처리현황</a:t>
+            </a:r>
+            <a:endParaRPr lang="en-US" sz="1500" dirty="0"/>
           </a:p>
         </p:txBody>
       </p:sp>
@@ -3525,8 +4933,8 @@
         </p:nvSpPr>
         <p:spPr>
           <a:xfrm>
-            <a:off x="1280160" y="4864608"/>
-            <a:ext cx="9509760" cy="365760"/>
+            <a:off x="6995160" y="1618488"/>
+            <a:ext cx="4572000" cy="640080"/>
           </a:xfrm>
           <a:prstGeom prst="rect">
             <a:avLst/>
@@ -3542,7 +4950,7 @@
               <a:buNone/>
             </a:pPr>
             <a:r>
-              <a:rPr lang="en-US" sz="1200" i="1" dirty="0">
+              <a:rPr lang="en-US" sz="1100" i="1" dirty="0">
                 <a:solidFill>
                   <a:srgbClr val="9E9E9E"/>
                 </a:solidFill>
@@ -3550,9 +4958,9 @@
                 <a:ea typeface="Malgun Gothic" pitchFamily="34" charset="-122"/>
                 <a:cs typeface="Malgun Gothic" pitchFamily="34" charset="-120"/>
               </a:rPr>
-              <a:t>대리점(에이전시) 대상 기술·서비스 교육 현황</a:t>
-            </a:r>
-            <a:endParaRPr lang="en-US" sz="1200" dirty="0"/>
+              <a:t>고객 만족도 서베이 응답·유형별 처리 현황</a:t>
+            </a:r>
+            <a:endParaRPr lang="en-US" sz="1100" dirty="0"/>
           </a:p>
         </p:txBody>
       </p:sp>
@@ -3564,7 +4972,7 @@
         </p:nvSpPr>
         <p:spPr>
           <a:xfrm>
-            <a:off x="548640" y="5413248"/>
+            <a:off x="6263640" y="2578608"/>
             <a:ext cx="502920" cy="502920"/>
           </a:xfrm>
           <a:prstGeom prst="ellipse">
@@ -3584,7 +4992,7 @@
         </p:nvSpPr>
         <p:spPr>
           <a:xfrm>
-            <a:off x="548640" y="5413248"/>
+            <a:off x="6263640" y="2578608"/>
             <a:ext cx="502920" cy="502920"/>
           </a:xfrm>
           <a:prstGeom prst="rect">
@@ -3623,8 +5031,8 @@
         </p:nvSpPr>
         <p:spPr>
           <a:xfrm>
-            <a:off x="1280160" y="5303520"/>
-            <a:ext cx="5120640" cy="365760"/>
+            <a:off x="6995160" y="2468880"/>
+            <a:ext cx="4572000" cy="365760"/>
           </a:xfrm>
           <a:prstGeom prst="rect">
             <a:avLst/>
@@ -3640,7 +5048,7 @@
               <a:buNone/>
             </a:pPr>
             <a:r>
-              <a:rPr lang="en-US" sz="1600" b="1" dirty="0">
+              <a:rPr lang="en-US" sz="1500" b="1" dirty="0">
                 <a:solidFill>
                   <a:srgbClr val="3F3F3F"/>
                 </a:solidFill>
@@ -3648,9 +5056,9 @@
                 <a:ea typeface="Malgun Gothic" pitchFamily="34" charset="-122"/>
                 <a:cs typeface="Malgun Gothic" pitchFamily="34" charset="-120"/>
               </a:rPr>
-              <a:t>직원교육</a:t>
-            </a:r>
-            <a:endParaRPr lang="en-US" sz="1600" dirty="0"/>
+              <a:t>중대 이슈 처리</a:t>
+            </a:r>
+            <a:endParaRPr lang="en-US" sz="1500" dirty="0"/>
           </a:p>
         </p:txBody>
       </p:sp>
@@ -3662,8 +5070,8 @@
         </p:nvSpPr>
         <p:spPr>
           <a:xfrm>
-            <a:off x="1280160" y="5687568"/>
-            <a:ext cx="9509760" cy="365760"/>
+            <a:off x="6995160" y="2852928"/>
+            <a:ext cx="4572000" cy="640080"/>
           </a:xfrm>
           <a:prstGeom prst="rect">
             <a:avLst/>
@@ -3679,7 +5087,7 @@
               <a:buNone/>
             </a:pPr>
             <a:r>
-              <a:rPr lang="en-US" sz="1200" i="1" dirty="0">
+              <a:rPr lang="en-US" sz="1100" i="1" dirty="0">
                 <a:solidFill>
                   <a:srgbClr val="9E9E9E"/>
                 </a:solidFill>
@@ -3687,45 +5095,319 @@
                 <a:ea typeface="Malgun Gothic" pitchFamily="34" charset="-122"/>
                 <a:cs typeface="Malgun Gothic" pitchFamily="34" charset="-120"/>
               </a:rPr>
-              <a:t>Technical Academy 및 사내 그룹 활동</a:t>
-            </a:r>
-            <a:endParaRPr lang="en-US" sz="1200" dirty="0"/>
-          </a:p>
-        </p:txBody>
-      </p:sp>
-      <p:sp>
-        <p:nvSpPr>
-          <p:cNvPr id="30" name="Text 27"/>
-          <p:cNvSpPr/>
-          <p:nvPr/>
-        </p:nvSpPr>
-        <p:spPr>
-          <a:xfrm>
-            <a:off x="457200" y="6547104"/>
-            <a:ext cx="9601200" cy="274320"/>
-          </a:xfrm>
-          <a:prstGeom prst="rect">
-            <a:avLst/>
-          </a:prstGeom>
-          <a:noFill/>
-          <a:ln/>
-        </p:spPr>
-        <p:txBody>
-          <a:bodyPr wrap="square" rtlCol="0" anchor="ctr"/>
-          <a:lstStyle/>
-          <a:p>
-            <a:pPr algn="l" indent="0" marL="0">
-              <a:buNone/>
-            </a:pPr>
-            <a:r>
-              <a:rPr lang="en-US" sz="900" dirty="0">
-                <a:solidFill>
-                  <a:srgbClr val="9E9E9E"/>
+              <a:t>긴급/중대 VOC 접수·조치·종결 현황</a:t>
+            </a:r>
+            <a:endParaRPr lang="en-US" sz="1100" dirty="0"/>
+          </a:p>
+        </p:txBody>
+      </p:sp>
+      <p:sp>
+        <p:nvSpPr>
+          <p:cNvPr id="30" name="Shape 27"/>
+          <p:cNvSpPr/>
+          <p:nvPr/>
+        </p:nvSpPr>
+        <p:spPr>
+          <a:xfrm>
+            <a:off x="6263640" y="3813048"/>
+            <a:ext cx="502920" cy="502920"/>
+          </a:xfrm>
+          <a:prstGeom prst="ellipse">
+            <a:avLst/>
+          </a:prstGeom>
+          <a:solidFill>
+            <a:srgbClr val="005BAC"/>
+          </a:solidFill>
+          <a:ln/>
+        </p:spPr>
+      </p:sp>
+      <p:sp>
+        <p:nvSpPr>
+          <p:cNvPr id="31" name="Text 28"/>
+          <p:cNvSpPr/>
+          <p:nvPr/>
+        </p:nvSpPr>
+        <p:spPr>
+          <a:xfrm>
+            <a:off x="6263640" y="3813048"/>
+            <a:ext cx="502920" cy="502920"/>
+          </a:xfrm>
+          <a:prstGeom prst="rect">
+            <a:avLst/>
+          </a:prstGeom>
+          <a:noFill/>
+          <a:ln/>
+        </p:spPr>
+        <p:txBody>
+          <a:bodyPr wrap="square" lIns="0" tIns="0" rIns="0" bIns="0" rtlCol="0" anchor="ctr"/>
+          <a:lstStyle/>
+          <a:p>
+            <a:pPr algn="ctr" indent="0" marL="0">
+              <a:buNone/>
+            </a:pPr>
+            <a:r>
+              <a:rPr lang="en-US" sz="1800" b="1" dirty="0">
+                <a:solidFill>
+                  <a:srgbClr val="FFFFFF"/>
+                </a:solidFill>
+                <a:latin typeface="Arial" pitchFamily="34" charset="0"/>
+                <a:ea typeface="Arial" pitchFamily="34" charset="-122"/>
+                <a:cs typeface="Arial" pitchFamily="34" charset="-120"/>
+              </a:rPr>
+              <a:t>7</a:t>
+            </a:r>
+            <a:endParaRPr lang="en-US" sz="1800" dirty="0"/>
+          </a:p>
+        </p:txBody>
+      </p:sp>
+      <p:sp>
+        <p:nvSpPr>
+          <p:cNvPr id="32" name="Text 29"/>
+          <p:cNvSpPr/>
+          <p:nvPr/>
+        </p:nvSpPr>
+        <p:spPr>
+          <a:xfrm>
+            <a:off x="6995160" y="3703320"/>
+            <a:ext cx="4572000" cy="365760"/>
+          </a:xfrm>
+          <a:prstGeom prst="rect">
+            <a:avLst/>
+          </a:prstGeom>
+          <a:noFill/>
+          <a:ln/>
+        </p:spPr>
+        <p:txBody>
+          <a:bodyPr wrap="square" lIns="0" tIns="0" rIns="0" bIns="0" rtlCol="0" anchor="ctr"/>
+          <a:lstStyle/>
+          <a:p>
+            <a:pPr indent="0" marL="0">
+              <a:buNone/>
+            </a:pPr>
+            <a:r>
+              <a:rPr lang="en-US" sz="1500" b="1" dirty="0">
+                <a:solidFill>
+                  <a:srgbClr val="3F3F3F"/>
                 </a:solidFill>
                 <a:latin typeface="Malgun Gothic" pitchFamily="34" charset="0"/>
                 <a:ea typeface="Malgun Gothic" pitchFamily="34" charset="-122"/>
                 <a:cs typeface="Malgun Gothic" pitchFamily="34" charset="-120"/>
               </a:rPr>
+              <a:t>대리점 교육 등 처리</a:t>
+            </a:r>
+            <a:endParaRPr lang="en-US" sz="1500" dirty="0"/>
+          </a:p>
+        </p:txBody>
+      </p:sp>
+      <p:sp>
+        <p:nvSpPr>
+          <p:cNvPr id="33" name="Text 30"/>
+          <p:cNvSpPr/>
+          <p:nvPr/>
+        </p:nvSpPr>
+        <p:spPr>
+          <a:xfrm>
+            <a:off x="6995160" y="4087368"/>
+            <a:ext cx="4572000" cy="640080"/>
+          </a:xfrm>
+          <a:prstGeom prst="rect">
+            <a:avLst/>
+          </a:prstGeom>
+          <a:noFill/>
+          <a:ln/>
+        </p:spPr>
+        <p:txBody>
+          <a:bodyPr wrap="square" lIns="0" tIns="0" rIns="0" bIns="0" rtlCol="0" anchor="ctr"/>
+          <a:lstStyle/>
+          <a:p>
+            <a:pPr indent="0" marL="0">
+              <a:buNone/>
+            </a:pPr>
+            <a:r>
+              <a:rPr lang="en-US" sz="1100" i="1" dirty="0">
+                <a:solidFill>
+                  <a:srgbClr val="9E9E9E"/>
+                </a:solidFill>
+                <a:latin typeface="Malgun Gothic" pitchFamily="34" charset="0"/>
+                <a:ea typeface="Malgun Gothic" pitchFamily="34" charset="-122"/>
+                <a:cs typeface="Malgun Gothic" pitchFamily="34" charset="-120"/>
+              </a:rPr>
+              <a:t>대리점(에이전시) 대상 기술·서비스 교육 현황</a:t>
+            </a:r>
+            <a:endParaRPr lang="en-US" sz="1100" dirty="0"/>
+          </a:p>
+        </p:txBody>
+      </p:sp>
+      <p:sp>
+        <p:nvSpPr>
+          <p:cNvPr id="34" name="Shape 31"/>
+          <p:cNvSpPr/>
+          <p:nvPr/>
+        </p:nvSpPr>
+        <p:spPr>
+          <a:xfrm>
+            <a:off x="6263640" y="5047488"/>
+            <a:ext cx="502920" cy="502920"/>
+          </a:xfrm>
+          <a:prstGeom prst="ellipse">
+            <a:avLst/>
+          </a:prstGeom>
+          <a:solidFill>
+            <a:srgbClr val="005BAC"/>
+          </a:solidFill>
+          <a:ln/>
+        </p:spPr>
+      </p:sp>
+      <p:sp>
+        <p:nvSpPr>
+          <p:cNvPr id="35" name="Text 32"/>
+          <p:cNvSpPr/>
+          <p:nvPr/>
+        </p:nvSpPr>
+        <p:spPr>
+          <a:xfrm>
+            <a:off x="6263640" y="5047488"/>
+            <a:ext cx="502920" cy="502920"/>
+          </a:xfrm>
+          <a:prstGeom prst="rect">
+            <a:avLst/>
+          </a:prstGeom>
+          <a:noFill/>
+          <a:ln/>
+        </p:spPr>
+        <p:txBody>
+          <a:bodyPr wrap="square" lIns="0" tIns="0" rIns="0" bIns="0" rtlCol="0" anchor="ctr"/>
+          <a:lstStyle/>
+          <a:p>
+            <a:pPr algn="ctr" indent="0" marL="0">
+              <a:buNone/>
+            </a:pPr>
+            <a:r>
+              <a:rPr lang="en-US" sz="1800" b="1" dirty="0">
+                <a:solidFill>
+                  <a:srgbClr val="FFFFFF"/>
+                </a:solidFill>
+                <a:latin typeface="Arial" pitchFamily="34" charset="0"/>
+                <a:ea typeface="Arial" pitchFamily="34" charset="-122"/>
+                <a:cs typeface="Arial" pitchFamily="34" charset="-120"/>
+              </a:rPr>
+              <a:t>8</a:t>
+            </a:r>
+            <a:endParaRPr lang="en-US" sz="1800" dirty="0"/>
+          </a:p>
+        </p:txBody>
+      </p:sp>
+      <p:sp>
+        <p:nvSpPr>
+          <p:cNvPr id="36" name="Text 33"/>
+          <p:cNvSpPr/>
+          <p:nvPr/>
+        </p:nvSpPr>
+        <p:spPr>
+          <a:xfrm>
+            <a:off x="6995160" y="4937760"/>
+            <a:ext cx="4572000" cy="365760"/>
+          </a:xfrm>
+          <a:prstGeom prst="rect">
+            <a:avLst/>
+          </a:prstGeom>
+          <a:noFill/>
+          <a:ln/>
+        </p:spPr>
+        <p:txBody>
+          <a:bodyPr wrap="square" lIns="0" tIns="0" rIns="0" bIns="0" rtlCol="0" anchor="ctr"/>
+          <a:lstStyle/>
+          <a:p>
+            <a:pPr indent="0" marL="0">
+              <a:buNone/>
+            </a:pPr>
+            <a:r>
+              <a:rPr lang="en-US" sz="1500" b="1" dirty="0">
+                <a:solidFill>
+                  <a:srgbClr val="3F3F3F"/>
+                </a:solidFill>
+                <a:latin typeface="Malgun Gothic" pitchFamily="34" charset="0"/>
+                <a:ea typeface="Malgun Gothic" pitchFamily="34" charset="-122"/>
+                <a:cs typeface="Malgun Gothic" pitchFamily="34" charset="-120"/>
+              </a:rPr>
+              <a:t>직원교육</a:t>
+            </a:r>
+            <a:endParaRPr lang="en-US" sz="1500" dirty="0"/>
+          </a:p>
+        </p:txBody>
+      </p:sp>
+      <p:sp>
+        <p:nvSpPr>
+          <p:cNvPr id="37" name="Text 34"/>
+          <p:cNvSpPr/>
+          <p:nvPr/>
+        </p:nvSpPr>
+        <p:spPr>
+          <a:xfrm>
+            <a:off x="6995160" y="5321808"/>
+            <a:ext cx="4572000" cy="640080"/>
+          </a:xfrm>
+          <a:prstGeom prst="rect">
+            <a:avLst/>
+          </a:prstGeom>
+          <a:noFill/>
+          <a:ln/>
+        </p:spPr>
+        <p:txBody>
+          <a:bodyPr wrap="square" lIns="0" tIns="0" rIns="0" bIns="0" rtlCol="0" anchor="ctr"/>
+          <a:lstStyle/>
+          <a:p>
+            <a:pPr indent="0" marL="0">
+              <a:buNone/>
+            </a:pPr>
+            <a:r>
+              <a:rPr lang="en-US" sz="1100" i="1" dirty="0">
+                <a:solidFill>
+                  <a:srgbClr val="9E9E9E"/>
+                </a:solidFill>
+                <a:latin typeface="Malgun Gothic" pitchFamily="34" charset="0"/>
+                <a:ea typeface="Malgun Gothic" pitchFamily="34" charset="-122"/>
+                <a:cs typeface="Malgun Gothic" pitchFamily="34" charset="-120"/>
+              </a:rPr>
+              <a:t>Technical Academy 및 사내 그룹 활동</a:t>
+            </a:r>
+            <a:endParaRPr lang="en-US" sz="1100" dirty="0"/>
+          </a:p>
+        </p:txBody>
+      </p:sp>
+      <p:sp>
+        <p:nvSpPr>
+          <p:cNvPr id="38" name="Text 35"/>
+          <p:cNvSpPr/>
+          <p:nvPr/>
+        </p:nvSpPr>
+        <p:spPr>
+          <a:xfrm>
+            <a:off x="457200" y="6547104"/>
+            <a:ext cx="9601200" cy="274320"/>
+          </a:xfrm>
+          <a:prstGeom prst="rect">
+            <a:avLst/>
+          </a:prstGeom>
+          <a:noFill/>
+          <a:ln/>
+        </p:spPr>
+        <p:txBody>
+          <a:bodyPr wrap="square" rtlCol="0" anchor="ctr"/>
+          <a:lstStyle/>
+          <a:p>
+            <a:pPr algn="l" indent="0" marL="0">
+              <a:buNone/>
+            </a:pPr>
+            <a:r>
+              <a:rPr lang="en-US" sz="900" dirty="0">
+                <a:solidFill>
+                  <a:srgbClr val="9E9E9E"/>
+                </a:solidFill>
+                <a:latin typeface="Malgun Gothic" pitchFamily="34" charset="0"/>
+                <a:ea typeface="Malgun Gothic" pitchFamily="34" charset="-122"/>
+                <a:cs typeface="Malgun Gothic" pitchFamily="34" charset="-120"/>
+              </a:rPr>
               <a:t>FS Group │ FSS Team · 2026년 7월 · Confidential</a:t>
             </a:r>
             <a:endParaRPr lang="en-US" sz="900" dirty="0"/>
@@ -3734,7 +5416,7 @@
       </p:sp>
       <p:sp>
         <p:nvSpPr>
-          <p:cNvPr id="31" name="Text 28"/>
+          <p:cNvPr id="39" name="Text 36"/>
           <p:cNvSpPr/>
           <p:nvPr/>
         </p:nvSpPr>
@@ -9556,7 +11238,7 @@
                 <a:ea typeface="Malgun Gothic" pitchFamily="34" charset="-122"/>
                 <a:cs typeface="Malgun Gothic" pitchFamily="34" charset="-120"/>
               </a:rPr>
-              <a:t>VOC 수집 정보 및 처리현황</a:t>
+              <a:t>서비스 케이스 분석 – 추이 및 지수</a:t>
             </a:r>
             <a:endParaRPr lang="en-US" sz="2600" dirty="0"/>
           </a:p>
@@ -9594,6 +11276,3616 @@
         </p:nvSpPr>
         <p:spPr>
           <a:xfrm>
+            <a:off x="530352" y="1051560"/>
+            <a:ext cx="11100816" cy="320040"/>
+          </a:xfrm>
+          <a:prstGeom prst="rect">
+            <a:avLst/>
+          </a:prstGeom>
+          <a:noFill/>
+          <a:ln/>
+        </p:spPr>
+        <p:txBody>
+          <a:bodyPr wrap="square" lIns="0" tIns="0" rIns="0" bIns="0" rtlCol="0" anchor="ctr"/>
+          <a:lstStyle/>
+          <a:p>
+            <a:pPr indent="0" marL="0">
+              <a:buNone/>
+            </a:pPr>
+            <a:r>
+              <a:rPr lang="en-US" sz="1100" i="1" dirty="0">
+                <a:solidFill>
+                  <a:srgbClr val="9E9E9E"/>
+                </a:solidFill>
+                <a:latin typeface="Malgun Gothic" pitchFamily="34" charset="0"/>
+                <a:ea typeface="Malgun Gothic" pitchFamily="34" charset="-122"/>
+                <a:cs typeface="Malgun Gothic" pitchFamily="34" charset="-120"/>
+              </a:rPr>
+              <a:t>CRM 서비스 케이스 데이터, 최근 1년 누적 기준 (월간 서비스 활동 실적과 별도 참고 지표)</a:t>
+            </a:r>
+            <a:endParaRPr lang="en-US" sz="1100" dirty="0"/>
+          </a:p>
+        </p:txBody>
+      </p:sp>
+      <p:sp>
+        <p:nvSpPr>
+          <p:cNvPr id="7" name="Text 4"/>
+          <p:cNvSpPr/>
+          <p:nvPr/>
+        </p:nvSpPr>
+        <p:spPr>
+          <a:xfrm>
+            <a:off x="530352" y="1463040"/>
+            <a:ext cx="5486400" cy="320040"/>
+          </a:xfrm>
+          <a:prstGeom prst="rect">
+            <a:avLst/>
+          </a:prstGeom>
+          <a:noFill/>
+          <a:ln/>
+        </p:spPr>
+        <p:txBody>
+          <a:bodyPr wrap="square" lIns="0" tIns="0" rIns="0" bIns="0" rtlCol="0" anchor="ctr"/>
+          <a:lstStyle/>
+          <a:p>
+            <a:pPr indent="0" marL="0">
+              <a:buNone/>
+            </a:pPr>
+            <a:r>
+              <a:rPr lang="en-US" sz="1400" b="1" dirty="0">
+                <a:solidFill>
+                  <a:srgbClr val="005BAC"/>
+                </a:solidFill>
+                <a:latin typeface="Malgun Gothic" pitchFamily="34" charset="0"/>
+                <a:ea typeface="Malgun Gothic" pitchFamily="34" charset="-122"/>
+                <a:cs typeface="Malgun Gothic" pitchFamily="34" charset="-120"/>
+              </a:rPr>
+              <a:t>월별 Service Case 추이</a:t>
+            </a:r>
+            <a:endParaRPr lang="en-US" sz="1400" dirty="0"/>
+          </a:p>
+        </p:txBody>
+      </p:sp>
+      <p:sp>
+        <p:nvSpPr>
+          <p:cNvPr id="8" name="Shape 5"/>
+          <p:cNvSpPr/>
+          <p:nvPr/>
+        </p:nvSpPr>
+        <p:spPr>
+          <a:xfrm>
+            <a:off x="530352" y="1874520"/>
+            <a:ext cx="5486400" cy="914400"/>
+          </a:xfrm>
+          <a:prstGeom prst="roundRect">
+            <a:avLst>
+              <a:gd name="adj" fmla="val 7000"/>
+            </a:avLst>
+          </a:prstGeom>
+          <a:solidFill>
+            <a:srgbClr val="F5F8FC"/>
+          </a:solidFill>
+          <a:ln/>
+        </p:spPr>
+      </p:sp>
+      <p:sp>
+        <p:nvSpPr>
+          <p:cNvPr id="9" name="Text 6"/>
+          <p:cNvSpPr/>
+          <p:nvPr/>
+        </p:nvSpPr>
+        <p:spPr>
+          <a:xfrm>
+            <a:off x="731520" y="1984248"/>
+            <a:ext cx="2926080" cy="365760"/>
+          </a:xfrm>
+          <a:prstGeom prst="rect">
+            <a:avLst/>
+          </a:prstGeom>
+          <a:noFill/>
+          <a:ln/>
+        </p:spPr>
+        <p:txBody>
+          <a:bodyPr wrap="square" lIns="0" tIns="0" rIns="0" bIns="0" rtlCol="0" anchor="ctr"/>
+          <a:lstStyle/>
+          <a:p>
+            <a:pPr indent="0" marL="0">
+              <a:buNone/>
+            </a:pPr>
+            <a:r>
+              <a:rPr lang="en-US" sz="1300" dirty="0">
+                <a:solidFill>
+                  <a:srgbClr val="3F3F3F"/>
+                </a:solidFill>
+                <a:latin typeface="Malgun Gothic" pitchFamily="34" charset="0"/>
+                <a:ea typeface="Malgun Gothic" pitchFamily="34" charset="-122"/>
+                <a:cs typeface="Malgun Gothic" pitchFamily="34" charset="-120"/>
+              </a:rPr>
+              <a:t>최고 · 2026년 6월</a:t>
+            </a:r>
+            <a:endParaRPr lang="en-US" sz="1300" dirty="0"/>
+          </a:p>
+        </p:txBody>
+      </p:sp>
+      <p:sp>
+        <p:nvSpPr>
+          <p:cNvPr id="10" name="Text 7"/>
+          <p:cNvSpPr/>
+          <p:nvPr/>
+        </p:nvSpPr>
+        <p:spPr>
+          <a:xfrm>
+            <a:off x="3749040" y="1947672"/>
+            <a:ext cx="2103120" cy="731520"/>
+          </a:xfrm>
+          <a:prstGeom prst="rect">
+            <a:avLst/>
+          </a:prstGeom>
+          <a:noFill/>
+          <a:ln/>
+        </p:spPr>
+        <p:txBody>
+          <a:bodyPr wrap="square" lIns="0" tIns="0" rIns="0" bIns="0" rtlCol="0" anchor="ctr"/>
+          <a:lstStyle/>
+          <a:p>
+            <a:pPr algn="r" indent="0" marL="0">
+              <a:buNone/>
+            </a:pPr>
+            <a:r>
+              <a:rPr lang="en-US" sz="2400" b="1" dirty="0">
+                <a:solidFill>
+                  <a:srgbClr val="E7413E"/>
+                </a:solidFill>
+                <a:latin typeface="Arial" pitchFamily="34" charset="0"/>
+                <a:ea typeface="Arial" pitchFamily="34" charset="-122"/>
+                <a:cs typeface="Arial" pitchFamily="34" charset="-120"/>
+              </a:rPr>
+              <a:t>2,425건</a:t>
+            </a:r>
+            <a:endParaRPr lang="en-US" sz="2400" dirty="0"/>
+          </a:p>
+        </p:txBody>
+      </p:sp>
+      <p:sp>
+        <p:nvSpPr>
+          <p:cNvPr id="11" name="Shape 8"/>
+          <p:cNvSpPr/>
+          <p:nvPr/>
+        </p:nvSpPr>
+        <p:spPr>
+          <a:xfrm>
+            <a:off x="530352" y="2926080"/>
+            <a:ext cx="5486400" cy="914400"/>
+          </a:xfrm>
+          <a:prstGeom prst="roundRect">
+            <a:avLst>
+              <a:gd name="adj" fmla="val 7000"/>
+            </a:avLst>
+          </a:prstGeom>
+          <a:solidFill>
+            <a:srgbClr val="F5F8FC"/>
+          </a:solidFill>
+          <a:ln/>
+        </p:spPr>
+      </p:sp>
+      <p:sp>
+        <p:nvSpPr>
+          <p:cNvPr id="12" name="Text 9"/>
+          <p:cNvSpPr/>
+          <p:nvPr/>
+        </p:nvSpPr>
+        <p:spPr>
+          <a:xfrm>
+            <a:off x="731520" y="3035808"/>
+            <a:ext cx="2926080" cy="365760"/>
+          </a:xfrm>
+          <a:prstGeom prst="rect">
+            <a:avLst/>
+          </a:prstGeom>
+          <a:noFill/>
+          <a:ln/>
+        </p:spPr>
+        <p:txBody>
+          <a:bodyPr wrap="square" lIns="0" tIns="0" rIns="0" bIns="0" rtlCol="0" anchor="ctr"/>
+          <a:lstStyle/>
+          <a:p>
+            <a:pPr indent="0" marL="0">
+              <a:buNone/>
+            </a:pPr>
+            <a:r>
+              <a:rPr lang="en-US" sz="1300" dirty="0">
+                <a:solidFill>
+                  <a:srgbClr val="3F3F3F"/>
+                </a:solidFill>
+                <a:latin typeface="Malgun Gothic" pitchFamily="34" charset="0"/>
+                <a:ea typeface="Malgun Gothic" pitchFamily="34" charset="-122"/>
+                <a:cs typeface="Malgun Gothic" pitchFamily="34" charset="-120"/>
+              </a:rPr>
+              <a:t>최저 · 2026년 2월</a:t>
+            </a:r>
+            <a:endParaRPr lang="en-US" sz="1300" dirty="0"/>
+          </a:p>
+        </p:txBody>
+      </p:sp>
+      <p:sp>
+        <p:nvSpPr>
+          <p:cNvPr id="13" name="Text 10"/>
+          <p:cNvSpPr/>
+          <p:nvPr/>
+        </p:nvSpPr>
+        <p:spPr>
+          <a:xfrm>
+            <a:off x="3749040" y="2999232"/>
+            <a:ext cx="2103120" cy="731520"/>
+          </a:xfrm>
+          <a:prstGeom prst="rect">
+            <a:avLst/>
+          </a:prstGeom>
+          <a:noFill/>
+          <a:ln/>
+        </p:spPr>
+        <p:txBody>
+          <a:bodyPr wrap="square" lIns="0" tIns="0" rIns="0" bIns="0" rtlCol="0" anchor="ctr"/>
+          <a:lstStyle/>
+          <a:p>
+            <a:pPr algn="r" indent="0" marL="0">
+              <a:buNone/>
+            </a:pPr>
+            <a:r>
+              <a:rPr lang="en-US" sz="2400" b="1" dirty="0">
+                <a:solidFill>
+                  <a:srgbClr val="005BAC"/>
+                </a:solidFill>
+                <a:latin typeface="Arial" pitchFamily="34" charset="0"/>
+                <a:ea typeface="Arial" pitchFamily="34" charset="-122"/>
+                <a:cs typeface="Arial" pitchFamily="34" charset="-120"/>
+              </a:rPr>
+              <a:t>1,449건</a:t>
+            </a:r>
+            <a:endParaRPr lang="en-US" sz="2400" dirty="0"/>
+          </a:p>
+        </p:txBody>
+      </p:sp>
+      <p:sp>
+        <p:nvSpPr>
+          <p:cNvPr id="14" name="Text 11"/>
+          <p:cNvSpPr/>
+          <p:nvPr/>
+        </p:nvSpPr>
+        <p:spPr>
+          <a:xfrm>
+            <a:off x="530352" y="4069080"/>
+            <a:ext cx="5486400" cy="548640"/>
+          </a:xfrm>
+          <a:prstGeom prst="rect">
+            <a:avLst/>
+          </a:prstGeom>
+          <a:noFill/>
+          <a:ln/>
+        </p:spPr>
+        <p:txBody>
+          <a:bodyPr wrap="square" lIns="0" tIns="0" rIns="0" bIns="0" rtlCol="0" anchor="ctr"/>
+          <a:lstStyle/>
+          <a:p>
+            <a:pPr indent="0" marL="0">
+              <a:buNone/>
+            </a:pPr>
+            <a:r>
+              <a:rPr lang="en-US" sz="1050" i="1" dirty="0">
+                <a:solidFill>
+                  <a:srgbClr val="9E9E9E"/>
+                </a:solidFill>
+                <a:latin typeface="Malgun Gothic" pitchFamily="34" charset="0"/>
+                <a:ea typeface="Malgun Gothic" pitchFamily="34" charset="-122"/>
+                <a:cs typeface="Malgun Gothic" pitchFamily="34" charset="-120"/>
+              </a:rPr>
+              <a:t>지속적인 증가·변동 추세를 보이며, 계절/이벤트에 따른 월별 편차가 존재합니다.</a:t>
+            </a:r>
+            <a:endParaRPr lang="en-US" sz="1050" dirty="0"/>
+          </a:p>
+        </p:txBody>
+      </p:sp>
+      <p:sp>
+        <p:nvSpPr>
+          <p:cNvPr id="15" name="Text 12"/>
+          <p:cNvSpPr/>
+          <p:nvPr/>
+        </p:nvSpPr>
+        <p:spPr>
+          <a:xfrm>
+            <a:off x="6309360" y="1463040"/>
+            <a:ext cx="5486400" cy="320040"/>
+          </a:xfrm>
+          <a:prstGeom prst="rect">
+            <a:avLst/>
+          </a:prstGeom>
+          <a:noFill/>
+          <a:ln/>
+        </p:spPr>
+        <p:txBody>
+          <a:bodyPr wrap="square" lIns="0" tIns="0" rIns="0" bIns="0" rtlCol="0" anchor="ctr"/>
+          <a:lstStyle/>
+          <a:p>
+            <a:pPr indent="0" marL="0">
+              <a:buNone/>
+            </a:pPr>
+            <a:r>
+              <a:rPr lang="en-US" sz="1400" b="1" dirty="0">
+                <a:solidFill>
+                  <a:srgbClr val="005BAC"/>
+                </a:solidFill>
+                <a:latin typeface="Malgun Gothic" pitchFamily="34" charset="0"/>
+                <a:ea typeface="Malgun Gothic" pitchFamily="34" charset="-122"/>
+                <a:cs typeface="Malgun Gothic" pitchFamily="34" charset="-120"/>
+              </a:rPr>
+              <a:t>서비스 목적별 비율</a:t>
+            </a:r>
+            <a:endParaRPr lang="en-US" sz="1400" dirty="0"/>
+          </a:p>
+        </p:txBody>
+      </p:sp>
+      <p:sp>
+        <p:nvSpPr>
+          <p:cNvPr id="16" name="Text 13"/>
+          <p:cNvSpPr/>
+          <p:nvPr/>
+        </p:nvSpPr>
+        <p:spPr>
+          <a:xfrm>
+            <a:off x="6309360" y="1874520"/>
+            <a:ext cx="3291840" cy="256032"/>
+          </a:xfrm>
+          <a:prstGeom prst="rect">
+            <a:avLst/>
+          </a:prstGeom>
+          <a:noFill/>
+          <a:ln/>
+        </p:spPr>
+        <p:txBody>
+          <a:bodyPr wrap="square" lIns="0" tIns="0" rIns="0" bIns="0" rtlCol="0" anchor="ctr"/>
+          <a:lstStyle/>
+          <a:p>
+            <a:pPr indent="0" marL="0">
+              <a:buNone/>
+            </a:pPr>
+            <a:r>
+              <a:rPr lang="en-US" sz="1050" dirty="0">
+                <a:solidFill>
+                  <a:srgbClr val="3F3F3F"/>
+                </a:solidFill>
+                <a:latin typeface="Malgun Gothic" pitchFamily="34" charset="0"/>
+                <a:ea typeface="Malgun Gothic" pitchFamily="34" charset="-122"/>
+                <a:cs typeface="Malgun Gothic" pitchFamily="34" charset="-120"/>
+              </a:rPr>
+              <a:t>고장 수리 (Breakdown Repair)</a:t>
+            </a:r>
+            <a:endParaRPr lang="en-US" sz="1050" dirty="0"/>
+          </a:p>
+        </p:txBody>
+      </p:sp>
+      <p:sp>
+        <p:nvSpPr>
+          <p:cNvPr id="17" name="Shape 14"/>
+          <p:cNvSpPr/>
+          <p:nvPr/>
+        </p:nvSpPr>
+        <p:spPr>
+          <a:xfrm>
+            <a:off x="6309360" y="2130552"/>
+            <a:ext cx="3108960" cy="182880"/>
+          </a:xfrm>
+          <a:prstGeom prst="rect">
+            <a:avLst/>
+          </a:prstGeom>
+          <a:solidFill>
+            <a:srgbClr val="E7413E"/>
+          </a:solidFill>
+          <a:ln/>
+        </p:spPr>
+      </p:sp>
+      <p:sp>
+        <p:nvSpPr>
+          <p:cNvPr id="18" name="Text 15"/>
+          <p:cNvSpPr/>
+          <p:nvPr/>
+        </p:nvSpPr>
+        <p:spPr>
+          <a:xfrm>
+            <a:off x="9509760" y="1874520"/>
+            <a:ext cx="2286000" cy="457200"/>
+          </a:xfrm>
+          <a:prstGeom prst="rect">
+            <a:avLst/>
+          </a:prstGeom>
+          <a:noFill/>
+          <a:ln/>
+        </p:spPr>
+        <p:txBody>
+          <a:bodyPr wrap="square" lIns="0" tIns="0" rIns="0" bIns="0" rtlCol="0" anchor="ctr"/>
+          <a:lstStyle/>
+          <a:p>
+            <a:pPr indent="0" marL="0">
+              <a:buNone/>
+            </a:pPr>
+            <a:r>
+              <a:rPr lang="en-US" sz="1050" b="1" dirty="0">
+                <a:solidFill>
+                  <a:srgbClr val="3F3F3F"/>
+                </a:solidFill>
+                <a:latin typeface="Arial" pitchFamily="34" charset="0"/>
+                <a:ea typeface="Arial" pitchFamily="34" charset="-122"/>
+                <a:cs typeface="Arial" pitchFamily="34" charset="-120"/>
+              </a:rPr>
+              <a:t>15,149건 · 37.9%</a:t>
+            </a:r>
+            <a:endParaRPr lang="en-US" sz="1050" dirty="0"/>
+          </a:p>
+        </p:txBody>
+      </p:sp>
+      <p:sp>
+        <p:nvSpPr>
+          <p:cNvPr id="19" name="Text 16"/>
+          <p:cNvSpPr/>
+          <p:nvPr/>
+        </p:nvSpPr>
+        <p:spPr>
+          <a:xfrm>
+            <a:off x="6309360" y="2404872"/>
+            <a:ext cx="3291840" cy="256032"/>
+          </a:xfrm>
+          <a:prstGeom prst="rect">
+            <a:avLst/>
+          </a:prstGeom>
+          <a:noFill/>
+          <a:ln/>
+        </p:spPr>
+        <p:txBody>
+          <a:bodyPr wrap="square" lIns="0" tIns="0" rIns="0" bIns="0" rtlCol="0" anchor="ctr"/>
+          <a:lstStyle/>
+          <a:p>
+            <a:pPr indent="0" marL="0">
+              <a:buNone/>
+            </a:pPr>
+            <a:r>
+              <a:rPr lang="en-US" sz="1050" dirty="0">
+                <a:solidFill>
+                  <a:srgbClr val="3F3F3F"/>
+                </a:solidFill>
+                <a:latin typeface="Malgun Gothic" pitchFamily="34" charset="0"/>
+                <a:ea typeface="Malgun Gothic" pitchFamily="34" charset="-122"/>
+                <a:cs typeface="Malgun Gothic" pitchFamily="34" charset="-120"/>
+              </a:rPr>
+              <a:t>PM (정기 점검)</a:t>
+            </a:r>
+            <a:endParaRPr lang="en-US" sz="1050" dirty="0"/>
+          </a:p>
+        </p:txBody>
+      </p:sp>
+      <p:sp>
+        <p:nvSpPr>
+          <p:cNvPr id="20" name="Shape 17"/>
+          <p:cNvSpPr/>
+          <p:nvPr/>
+        </p:nvSpPr>
+        <p:spPr>
+          <a:xfrm>
+            <a:off x="6309360" y="2660904"/>
+            <a:ext cx="3059742" cy="182880"/>
+          </a:xfrm>
+          <a:prstGeom prst="rect">
+            <a:avLst/>
+          </a:prstGeom>
+          <a:solidFill>
+            <a:srgbClr val="005BAC"/>
+          </a:solidFill>
+          <a:ln/>
+        </p:spPr>
+      </p:sp>
+      <p:sp>
+        <p:nvSpPr>
+          <p:cNvPr id="21" name="Text 18"/>
+          <p:cNvSpPr/>
+          <p:nvPr/>
+        </p:nvSpPr>
+        <p:spPr>
+          <a:xfrm>
+            <a:off x="9509760" y="2404872"/>
+            <a:ext cx="2286000" cy="457200"/>
+          </a:xfrm>
+          <a:prstGeom prst="rect">
+            <a:avLst/>
+          </a:prstGeom>
+          <a:noFill/>
+          <a:ln/>
+        </p:spPr>
+        <p:txBody>
+          <a:bodyPr wrap="square" lIns="0" tIns="0" rIns="0" bIns="0" rtlCol="0" anchor="ctr"/>
+          <a:lstStyle/>
+          <a:p>
+            <a:pPr indent="0" marL="0">
+              <a:buNone/>
+            </a:pPr>
+            <a:r>
+              <a:rPr lang="en-US" sz="1050" b="1" dirty="0">
+                <a:solidFill>
+                  <a:srgbClr val="3F3F3F"/>
+                </a:solidFill>
+                <a:latin typeface="Arial" pitchFamily="34" charset="0"/>
+                <a:ea typeface="Arial" pitchFamily="34" charset="-122"/>
+                <a:cs typeface="Arial" pitchFamily="34" charset="-120"/>
+              </a:rPr>
+              <a:t>14,904건 · 37.3%</a:t>
+            </a:r>
+            <a:endParaRPr lang="en-US" sz="1050" dirty="0"/>
+          </a:p>
+        </p:txBody>
+      </p:sp>
+      <p:sp>
+        <p:nvSpPr>
+          <p:cNvPr id="22" name="Text 19"/>
+          <p:cNvSpPr/>
+          <p:nvPr/>
+        </p:nvSpPr>
+        <p:spPr>
+          <a:xfrm>
+            <a:off x="6309360" y="2935224"/>
+            <a:ext cx="3291840" cy="256032"/>
+          </a:xfrm>
+          <a:prstGeom prst="rect">
+            <a:avLst/>
+          </a:prstGeom>
+          <a:noFill/>
+          <a:ln/>
+        </p:spPr>
+        <p:txBody>
+          <a:bodyPr wrap="square" lIns="0" tIns="0" rIns="0" bIns="0" rtlCol="0" anchor="ctr"/>
+          <a:lstStyle/>
+          <a:p>
+            <a:pPr indent="0" marL="0">
+              <a:buNone/>
+            </a:pPr>
+            <a:r>
+              <a:rPr lang="en-US" sz="1050" dirty="0">
+                <a:solidFill>
+                  <a:srgbClr val="3F3F3F"/>
+                </a:solidFill>
+                <a:latin typeface="Malgun Gothic" pitchFamily="34" charset="0"/>
+                <a:ea typeface="Malgun Gothic" pitchFamily="34" charset="-122"/>
+                <a:cs typeface="Malgun Gothic" pitchFamily="34" charset="-120"/>
+              </a:rPr>
+              <a:t>Calibration</a:t>
+            </a:r>
+            <a:endParaRPr lang="en-US" sz="1050" dirty="0"/>
+          </a:p>
+        </p:txBody>
+      </p:sp>
+      <p:sp>
+        <p:nvSpPr>
+          <p:cNvPr id="23" name="Shape 20"/>
+          <p:cNvSpPr/>
+          <p:nvPr/>
+        </p:nvSpPr>
+        <p:spPr>
+          <a:xfrm>
+            <a:off x="6309360" y="3191256"/>
+            <a:ext cx="1164835" cy="182880"/>
+          </a:xfrm>
+          <a:prstGeom prst="rect">
+            <a:avLst/>
+          </a:prstGeom>
+          <a:solidFill>
+            <a:srgbClr val="00B8EE"/>
+          </a:solidFill>
+          <a:ln/>
+        </p:spPr>
+      </p:sp>
+      <p:sp>
+        <p:nvSpPr>
+          <p:cNvPr id="24" name="Text 21"/>
+          <p:cNvSpPr/>
+          <p:nvPr/>
+        </p:nvSpPr>
+        <p:spPr>
+          <a:xfrm>
+            <a:off x="9509760" y="2935224"/>
+            <a:ext cx="2286000" cy="457200"/>
+          </a:xfrm>
+          <a:prstGeom prst="rect">
+            <a:avLst/>
+          </a:prstGeom>
+          <a:noFill/>
+          <a:ln/>
+        </p:spPr>
+        <p:txBody>
+          <a:bodyPr wrap="square" lIns="0" tIns="0" rIns="0" bIns="0" rtlCol="0" anchor="ctr"/>
+          <a:lstStyle/>
+          <a:p>
+            <a:pPr indent="0" marL="0">
+              <a:buNone/>
+            </a:pPr>
+            <a:r>
+              <a:rPr lang="en-US" sz="1050" b="1" dirty="0">
+                <a:solidFill>
+                  <a:srgbClr val="3F3F3F"/>
+                </a:solidFill>
+                <a:latin typeface="Arial" pitchFamily="34" charset="0"/>
+                <a:ea typeface="Arial" pitchFamily="34" charset="-122"/>
+                <a:cs typeface="Arial" pitchFamily="34" charset="-120"/>
+              </a:rPr>
+              <a:t>5,699건 · 14.2%</a:t>
+            </a:r>
+            <a:endParaRPr lang="en-US" sz="1050" dirty="0"/>
+          </a:p>
+        </p:txBody>
+      </p:sp>
+      <p:sp>
+        <p:nvSpPr>
+          <p:cNvPr id="25" name="Text 22"/>
+          <p:cNvSpPr/>
+          <p:nvPr/>
+        </p:nvSpPr>
+        <p:spPr>
+          <a:xfrm>
+            <a:off x="6309360" y="3465576"/>
+            <a:ext cx="3291840" cy="256032"/>
+          </a:xfrm>
+          <a:prstGeom prst="rect">
+            <a:avLst/>
+          </a:prstGeom>
+          <a:noFill/>
+          <a:ln/>
+        </p:spPr>
+        <p:txBody>
+          <a:bodyPr wrap="square" lIns="0" tIns="0" rIns="0" bIns="0" rtlCol="0" anchor="ctr"/>
+          <a:lstStyle/>
+          <a:p>
+            <a:pPr indent="0" marL="0">
+              <a:buNone/>
+            </a:pPr>
+            <a:r>
+              <a:rPr lang="en-US" sz="1050" dirty="0">
+                <a:solidFill>
+                  <a:srgbClr val="3F3F3F"/>
+                </a:solidFill>
+                <a:latin typeface="Malgun Gothic" pitchFamily="34" charset="0"/>
+                <a:ea typeface="Malgun Gothic" pitchFamily="34" charset="-122"/>
+                <a:cs typeface="Malgun Gothic" pitchFamily="34" charset="-120"/>
+              </a:rPr>
+              <a:t>기타</a:t>
+            </a:r>
+            <a:endParaRPr lang="en-US" sz="1050" dirty="0"/>
+          </a:p>
+        </p:txBody>
+      </p:sp>
+      <p:sp>
+        <p:nvSpPr>
+          <p:cNvPr id="26" name="Shape 23"/>
+          <p:cNvSpPr/>
+          <p:nvPr/>
+        </p:nvSpPr>
+        <p:spPr>
+          <a:xfrm>
+            <a:off x="6309360" y="3721608"/>
+            <a:ext cx="869524" cy="182880"/>
+          </a:xfrm>
+          <a:prstGeom prst="rect">
+            <a:avLst/>
+          </a:prstGeom>
+          <a:solidFill>
+            <a:srgbClr val="9E9E9E"/>
+          </a:solidFill>
+          <a:ln/>
+        </p:spPr>
+      </p:sp>
+      <p:sp>
+        <p:nvSpPr>
+          <p:cNvPr id="27" name="Text 24"/>
+          <p:cNvSpPr/>
+          <p:nvPr/>
+        </p:nvSpPr>
+        <p:spPr>
+          <a:xfrm>
+            <a:off x="9509760" y="3465576"/>
+            <a:ext cx="2286000" cy="457200"/>
+          </a:xfrm>
+          <a:prstGeom prst="rect">
+            <a:avLst/>
+          </a:prstGeom>
+          <a:noFill/>
+          <a:ln/>
+        </p:spPr>
+        <p:txBody>
+          <a:bodyPr wrap="square" lIns="0" tIns="0" rIns="0" bIns="0" rtlCol="0" anchor="ctr"/>
+          <a:lstStyle/>
+          <a:p>
+            <a:pPr indent="0" marL="0">
+              <a:buNone/>
+            </a:pPr>
+            <a:r>
+              <a:rPr lang="en-US" sz="1050" b="1" dirty="0">
+                <a:solidFill>
+                  <a:srgbClr val="3F3F3F"/>
+                </a:solidFill>
+                <a:latin typeface="Arial" pitchFamily="34" charset="0"/>
+                <a:ea typeface="Arial" pitchFamily="34" charset="-122"/>
+                <a:cs typeface="Arial" pitchFamily="34" charset="-120"/>
+              </a:rPr>
+              <a:t>10.6%</a:t>
+            </a:r>
+            <a:endParaRPr lang="en-US" sz="1050" dirty="0"/>
+          </a:p>
+        </p:txBody>
+      </p:sp>
+      <p:sp>
+        <p:nvSpPr>
+          <p:cNvPr id="28" name="Shape 25"/>
+          <p:cNvSpPr/>
+          <p:nvPr/>
+        </p:nvSpPr>
+        <p:spPr>
+          <a:xfrm>
+            <a:off x="6309360" y="4114800"/>
+            <a:ext cx="5486400" cy="1371600"/>
+          </a:xfrm>
+          <a:prstGeom prst="roundRect">
+            <a:avLst>
+              <a:gd name="adj" fmla="val 4667"/>
+            </a:avLst>
+          </a:prstGeom>
+          <a:solidFill>
+            <a:srgbClr val="E6EEF7"/>
+          </a:solidFill>
+          <a:ln/>
+        </p:spPr>
+      </p:sp>
+      <p:sp>
+        <p:nvSpPr>
+          <p:cNvPr id="29" name="Text 26"/>
+          <p:cNvSpPr/>
+          <p:nvPr/>
+        </p:nvSpPr>
+        <p:spPr>
+          <a:xfrm>
+            <a:off x="6492240" y="4224528"/>
+            <a:ext cx="2926080" cy="320040"/>
+          </a:xfrm>
+          <a:prstGeom prst="rect">
+            <a:avLst/>
+          </a:prstGeom>
+          <a:noFill/>
+          <a:ln/>
+        </p:spPr>
+        <p:txBody>
+          <a:bodyPr wrap="square" lIns="0" tIns="0" rIns="0" bIns="0" rtlCol="0" anchor="ctr"/>
+          <a:lstStyle/>
+          <a:p>
+            <a:pPr indent="0" marL="0">
+              <a:buNone/>
+            </a:pPr>
+            <a:r>
+              <a:rPr lang="en-US" sz="1200" b="1" dirty="0">
+                <a:solidFill>
+                  <a:srgbClr val="005BAC"/>
+                </a:solidFill>
+                <a:latin typeface="Malgun Gothic" pitchFamily="34" charset="0"/>
+                <a:ea typeface="Malgun Gothic" pitchFamily="34" charset="-122"/>
+                <a:cs typeface="Malgun Gothic" pitchFamily="34" charset="-120"/>
+              </a:rPr>
+              <a:t>예방정비 지수 (PM Ratio)</a:t>
+            </a:r>
+            <a:endParaRPr lang="en-US" sz="1200" dirty="0"/>
+          </a:p>
+        </p:txBody>
+      </p:sp>
+      <p:sp>
+        <p:nvSpPr>
+          <p:cNvPr id="30" name="Text 27"/>
+          <p:cNvSpPr/>
+          <p:nvPr/>
+        </p:nvSpPr>
+        <p:spPr>
+          <a:xfrm>
+            <a:off x="9326880" y="4160520"/>
+            <a:ext cx="2011680" cy="457200"/>
+          </a:xfrm>
+          <a:prstGeom prst="rect">
+            <a:avLst/>
+          </a:prstGeom>
+          <a:noFill/>
+          <a:ln/>
+        </p:spPr>
+        <p:txBody>
+          <a:bodyPr wrap="square" lIns="0" tIns="0" rIns="0" bIns="0" rtlCol="0" anchor="ctr"/>
+          <a:lstStyle/>
+          <a:p>
+            <a:pPr algn="r" indent="0" marL="0">
+              <a:buNone/>
+            </a:pPr>
+            <a:r>
+              <a:rPr lang="en-US" sz="2200" b="1" dirty="0">
+                <a:solidFill>
+                  <a:srgbClr val="005BAC"/>
+                </a:solidFill>
+                <a:latin typeface="Arial" pitchFamily="34" charset="0"/>
+                <a:ea typeface="Arial" pitchFamily="34" charset="-122"/>
+                <a:cs typeface="Arial" pitchFamily="34" charset="-120"/>
+              </a:rPr>
+              <a:t>49.6%</a:t>
+            </a:r>
+            <a:endParaRPr lang="en-US" sz="2200" dirty="0"/>
+          </a:p>
+        </p:txBody>
+      </p:sp>
+      <p:sp>
+        <p:nvSpPr>
+          <p:cNvPr id="31" name="Text 28"/>
+          <p:cNvSpPr/>
+          <p:nvPr/>
+        </p:nvSpPr>
+        <p:spPr>
+          <a:xfrm>
+            <a:off x="6492240" y="4617720"/>
+            <a:ext cx="5029200" cy="777240"/>
+          </a:xfrm>
+          <a:prstGeom prst="rect">
+            <a:avLst/>
+          </a:prstGeom>
+          <a:noFill/>
+          <a:ln/>
+        </p:spPr>
+        <p:txBody>
+          <a:bodyPr wrap="square" lIns="0" tIns="0" rIns="0" bIns="0" rtlCol="0" anchor="ctr"/>
+          <a:lstStyle/>
+          <a:p>
+            <a:pPr indent="0" marL="0">
+              <a:buNone/>
+            </a:pPr>
+            <a:r>
+              <a:rPr lang="en-US" sz="1000" dirty="0">
+                <a:solidFill>
+                  <a:srgbClr val="3F3F3F"/>
+                </a:solidFill>
+                <a:latin typeface="Malgun Gothic" pitchFamily="34" charset="0"/>
+                <a:ea typeface="Malgun Gothic" pitchFamily="34" charset="-122"/>
+                <a:cs typeface="Malgun Gothic" pitchFamily="34" charset="-120"/>
+              </a:rPr>
+              <a:t>= PM건수 ÷ (PM+고장수리) × 100. PM과 고장수리 비율이 팽팽히 맞서고 있어, 예방점검 품질을 높여 사후 고장수리 비율을 낮추는 전략이 필요합니다.</a:t>
+            </a:r>
+            <a:endParaRPr lang="en-US" sz="1000" dirty="0"/>
+          </a:p>
+        </p:txBody>
+      </p:sp>
+      <p:sp>
+        <p:nvSpPr>
+          <p:cNvPr id="32" name="Text 29"/>
+          <p:cNvSpPr/>
+          <p:nvPr/>
+        </p:nvSpPr>
+        <p:spPr>
+          <a:xfrm>
+            <a:off x="457200" y="6547104"/>
+            <a:ext cx="9601200" cy="274320"/>
+          </a:xfrm>
+          <a:prstGeom prst="rect">
+            <a:avLst/>
+          </a:prstGeom>
+          <a:noFill/>
+          <a:ln/>
+        </p:spPr>
+        <p:txBody>
+          <a:bodyPr wrap="square" rtlCol="0" anchor="ctr"/>
+          <a:lstStyle/>
+          <a:p>
+            <a:pPr algn="l" indent="0" marL="0">
+              <a:buNone/>
+            </a:pPr>
+            <a:r>
+              <a:rPr lang="en-US" sz="900" dirty="0">
+                <a:solidFill>
+                  <a:srgbClr val="9E9E9E"/>
+                </a:solidFill>
+                <a:latin typeface="Malgun Gothic" pitchFamily="34" charset="0"/>
+                <a:ea typeface="Malgun Gothic" pitchFamily="34" charset="-122"/>
+                <a:cs typeface="Malgun Gothic" pitchFamily="34" charset="-120"/>
+              </a:rPr>
+              <a:t>FS Group │ FSS Team · 2026년 7월 · Confidential</a:t>
+            </a:r>
+            <a:endParaRPr lang="en-US" sz="900" dirty="0"/>
+          </a:p>
+        </p:txBody>
+      </p:sp>
+      <p:sp>
+        <p:nvSpPr>
+          <p:cNvPr id="33" name="Text 30"/>
+          <p:cNvSpPr/>
+          <p:nvPr/>
+        </p:nvSpPr>
+        <p:spPr>
+          <a:xfrm>
+            <a:off x="11247120" y="6547104"/>
+            <a:ext cx="731520" cy="274320"/>
+          </a:xfrm>
+          <a:prstGeom prst="rect">
+            <a:avLst/>
+          </a:prstGeom>
+          <a:noFill/>
+          <a:ln/>
+        </p:spPr>
+        <p:txBody>
+          <a:bodyPr wrap="square" rtlCol="0" anchor="ctr"/>
+          <a:lstStyle/>
+          <a:p>
+            <a:pPr algn="r" indent="0" marL="0">
+              <a:buNone/>
+            </a:pPr>
+            <a:r>
+              <a:rPr lang="en-US" sz="900" dirty="0">
+                <a:solidFill>
+                  <a:srgbClr val="9E9E9E"/>
+                </a:solidFill>
+                <a:latin typeface="Arial" pitchFamily="34" charset="0"/>
+                <a:ea typeface="Arial" pitchFamily="34" charset="-122"/>
+                <a:cs typeface="Arial" pitchFamily="34" charset="-120"/>
+              </a:rPr>
+              <a:t>5</a:t>
+            </a:r>
+            <a:endParaRPr lang="en-US" sz="900" dirty="0"/>
+          </a:p>
+        </p:txBody>
+      </p:sp>
+    </p:spTree>
+  </p:cSld>
+  <p:clrMapOvr>
+    <a:masterClrMapping/>
+  </p:clrMapOvr>
+</p:sld>
+</file>
+
+<file path=ppt/slides/slide6.xml><?xml version="1.0" encoding="utf-8"?>
+<p:sld xmlns:a="http://schemas.openxmlformats.org/drawingml/2006/main" xmlns:r="http://schemas.openxmlformats.org/officeDocument/2006/relationships" xmlns:p="http://schemas.openxmlformats.org/presentationml/2006/main">
+  <p:cSld name="Slide 6">
+    <p:bg>
+      <p:bgPr>
+        <a:solidFill>
+          <a:srgbClr val="FFFFFF"/>
+        </a:solidFill>
+      </p:bgPr>
+    </p:bg>
+    <p:spTree>
+      <p:nvGrpSpPr>
+        <p:cNvPr id="1" name=""/>
+        <p:cNvGrpSpPr/>
+        <p:nvPr/>
+      </p:nvGrpSpPr>
+      <p:grpSpPr>
+        <a:xfrm>
+          <a:off x="0" y="0"/>
+          <a:ext cx="0" cy="0"/>
+          <a:chOff x="0" y="0"/>
+          <a:chExt cx="0" cy="0"/>
+        </a:xfrm>
+      </p:grpSpPr>
+      <p:sp>
+        <p:nvSpPr>
+          <p:cNvPr id="2" name="Shape 0"/>
+          <p:cNvSpPr/>
+          <p:nvPr/>
+        </p:nvSpPr>
+        <p:spPr>
+          <a:xfrm>
+            <a:off x="0" y="0"/>
+            <a:ext cx="10378440" cy="914400"/>
+          </a:xfrm>
+          <a:prstGeom prst="rect">
+            <a:avLst/>
+          </a:prstGeom>
+          <a:solidFill>
+            <a:srgbClr val="005BAC"/>
+          </a:solidFill>
+          <a:ln/>
+        </p:spPr>
+      </p:sp>
+      <p:sp>
+        <p:nvSpPr>
+          <p:cNvPr id="3" name="Text 1"/>
+          <p:cNvSpPr/>
+          <p:nvPr/>
+        </p:nvSpPr>
+        <p:spPr>
+          <a:xfrm>
+            <a:off x="502920" y="164592"/>
+            <a:ext cx="822960" cy="585216"/>
+          </a:xfrm>
+          <a:prstGeom prst="rect">
+            <a:avLst/>
+          </a:prstGeom>
+          <a:noFill/>
+          <a:ln/>
+        </p:spPr>
+        <p:txBody>
+          <a:bodyPr wrap="square" lIns="0" tIns="0" rIns="0" bIns="0" rtlCol="0" anchor="ctr"/>
+          <a:lstStyle/>
+          <a:p>
+            <a:pPr algn="l" indent="0" marL="0">
+              <a:buNone/>
+            </a:pPr>
+            <a:r>
+              <a:rPr lang="en-US" sz="3000" b="1" dirty="0">
+                <a:solidFill>
+                  <a:srgbClr val="00B8EE"/>
+                </a:solidFill>
+                <a:latin typeface="Arial" pitchFamily="34" charset="0"/>
+                <a:ea typeface="Arial" pitchFamily="34" charset="-122"/>
+                <a:cs typeface="Arial" pitchFamily="34" charset="-120"/>
+              </a:rPr>
+              <a:t>06</a:t>
+            </a:r>
+            <a:endParaRPr lang="en-US" sz="3000" dirty="0"/>
+          </a:p>
+        </p:txBody>
+      </p:sp>
+      <p:sp>
+        <p:nvSpPr>
+          <p:cNvPr id="4" name="Text 2"/>
+          <p:cNvSpPr/>
+          <p:nvPr/>
+        </p:nvSpPr>
+        <p:spPr>
+          <a:xfrm>
+            <a:off x="1234440" y="164592"/>
+            <a:ext cx="8595360" cy="585216"/>
+          </a:xfrm>
+          <a:prstGeom prst="rect">
+            <a:avLst/>
+          </a:prstGeom>
+          <a:noFill/>
+          <a:ln/>
+        </p:spPr>
+        <p:txBody>
+          <a:bodyPr wrap="square" lIns="0" tIns="0" rIns="0" bIns="0" rtlCol="0" anchor="ctr"/>
+          <a:lstStyle/>
+          <a:p>
+            <a:pPr algn="l" indent="0" marL="0">
+              <a:buNone/>
+            </a:pPr>
+            <a:r>
+              <a:rPr lang="en-US" sz="2600" b="1" dirty="0">
+                <a:solidFill>
+                  <a:srgbClr val="FFFFFF"/>
+                </a:solidFill>
+                <a:latin typeface="Malgun Gothic" pitchFamily="34" charset="0"/>
+                <a:ea typeface="Malgun Gothic" pitchFamily="34" charset="-122"/>
+                <a:cs typeface="Malgun Gothic" pitchFamily="34" charset="-120"/>
+              </a:rPr>
+              <a:t>주요 고객 및 장애 분석</a:t>
+            </a:r>
+            <a:endParaRPr lang="en-US" sz="2600" dirty="0"/>
+          </a:p>
+        </p:txBody>
+      </p:sp>
+      <p:pic>
+        <p:nvPicPr>
+          <p:cNvPr id="5" name="Image 0" descr="sysmex_logo_mono_blue.png">    </p:cNvPr>
+          <p:cNvPicPr>
+            <a:picLocks noChangeAspect="1"/>
+          </p:cNvPicPr>
+          <p:nvPr/>
+        </p:nvPicPr>
+        <p:blipFill>
+          <a:blip r:embed="rId1"/>
+          <a:stretch>
+            <a:fillRect/>
+          </a:stretch>
+        </p:blipFill>
+        <p:spPr>
+          <a:xfrm>
+            <a:off x="10652760" y="292608"/>
+            <a:ext cx="1097280" cy="420624"/>
+          </a:xfrm>
+          <a:prstGeom prst="rect">
+            <a:avLst/>
+          </a:prstGeom>
+        </p:spPr>
+      </p:pic>
+      <p:sp>
+        <p:nvSpPr>
+          <p:cNvPr id="6" name="Text 3"/>
+          <p:cNvSpPr/>
+          <p:nvPr/>
+        </p:nvSpPr>
+        <p:spPr>
+          <a:xfrm>
+            <a:off x="530352" y="1051560"/>
+            <a:ext cx="11100816" cy="320040"/>
+          </a:xfrm>
+          <a:prstGeom prst="rect">
+            <a:avLst/>
+          </a:prstGeom>
+          <a:noFill/>
+          <a:ln/>
+        </p:spPr>
+        <p:txBody>
+          <a:bodyPr wrap="square" lIns="0" tIns="0" rIns="0" bIns="0" rtlCol="0" anchor="ctr"/>
+          <a:lstStyle/>
+          <a:p>
+            <a:pPr indent="0" marL="0">
+              <a:buNone/>
+            </a:pPr>
+            <a:r>
+              <a:rPr lang="en-US" sz="1100" i="1" dirty="0">
+                <a:solidFill>
+                  <a:srgbClr val="9E9E9E"/>
+                </a:solidFill>
+                <a:latin typeface="Malgun Gothic" pitchFamily="34" charset="0"/>
+                <a:ea typeface="Malgun Gothic" pitchFamily="34" charset="-122"/>
+                <a:cs typeface="Malgun Gothic" pitchFamily="34" charset="-120"/>
+              </a:rPr>
+              <a:t>CRM 서비스 케이스 데이터, 최근 1년 누적 기준</a:t>
+            </a:r>
+            <a:endParaRPr lang="en-US" sz="1100" dirty="0"/>
+          </a:p>
+        </p:txBody>
+      </p:sp>
+      <p:sp>
+        <p:nvSpPr>
+          <p:cNvPr id="7" name="Text 4"/>
+          <p:cNvSpPr/>
+          <p:nvPr/>
+        </p:nvSpPr>
+        <p:spPr>
+          <a:xfrm>
+            <a:off x="530352" y="1463040"/>
+            <a:ext cx="5486400" cy="320040"/>
+          </a:xfrm>
+          <a:prstGeom prst="rect">
+            <a:avLst/>
+          </a:prstGeom>
+          <a:noFill/>
+          <a:ln/>
+        </p:spPr>
+        <p:txBody>
+          <a:bodyPr wrap="square" lIns="0" tIns="0" rIns="0" bIns="0" rtlCol="0" anchor="ctr"/>
+          <a:lstStyle/>
+          <a:p>
+            <a:pPr indent="0" marL="0">
+              <a:buNone/>
+            </a:pPr>
+            <a:r>
+              <a:rPr lang="en-US" sz="1300" b="1" dirty="0">
+                <a:solidFill>
+                  <a:srgbClr val="005BAC"/>
+                </a:solidFill>
+                <a:latin typeface="Malgun Gothic" pitchFamily="34" charset="0"/>
+                <a:ea typeface="Malgun Gothic" pitchFamily="34" charset="-122"/>
+                <a:cs typeface="Malgun Gothic" pitchFamily="34" charset="-120"/>
+              </a:rPr>
+              <a:t>병원 TOP 5 (서비스 활동 기준)</a:t>
+            </a:r>
+            <a:endParaRPr lang="en-US" sz="1300" dirty="0"/>
+          </a:p>
+        </p:txBody>
+      </p:sp>
+      <p:graphicFrame>
+        <p:nvGraphicFramePr>
+          <p:cNvPr id="7" name="Table 0"/>
+          <p:cNvGraphicFramePr>
+            <a:graphicFrameLocks noGrp="1"/>
+          </p:cNvGraphicFramePr>
+          <p:nvPr>
+            <p:extLst>
+              <p:ext uri="{D42A27DB-BD31-4B8C-83A1-F6EECF244321}">
+                <p14:modId xmlns:p14="http://schemas.microsoft.com/office/powerpoint/2010/main" val="1579011935"/>
+              </p:ext>
+            </p:extLst>
+          </p:nvPr>
+        </p:nvGraphicFramePr>
+        <p:xfrm>
+          <a:off x="530352" y="1828800"/>
+          <a:ext cx="5486400" cy="914400"/>
+        </p:xfrm>
+        <a:graphic>
+          <a:graphicData uri="http://schemas.openxmlformats.org/drawingml/2006/table">
+            <a:tbl>
+              <a:tblPr/>
+              <a:tblGrid>
+                <a:gridCol w="640080"/>
+                <a:gridCol w="3566160"/>
+                <a:gridCol w="1280160"/>
+              </a:tblGrid>
+              <a:tr h="365760">
+                <a:tc>
+                  <a:txBody>
+                    <a:bodyPr/>
+                    <a:lstStyle/>
+                    <a:p>
+                      <a:pPr algn="ctr" indent="0" marL="0">
+                        <a:buNone/>
+                      </a:pPr>
+                      <a:r>
+                        <a:rPr lang="en-US" sz="1100" b="1" dirty="0">
+                          <a:solidFill>
+                            <a:srgbClr val="FFFFFF"/>
+                          </a:solidFill>
+                          <a:latin typeface="Malgun Gothic" pitchFamily="34" charset="0"/>
+                          <a:ea typeface="Malgun Gothic" pitchFamily="34" charset="-122"/>
+                          <a:cs typeface="Malgun Gothic" pitchFamily="34" charset="-120"/>
+                        </a:rPr>
+                        <a:t>순위</a:t>
+                      </a:r>
+                      <a:endParaRPr lang="en-US" sz="1100" dirty="0">
+                        <a:latin typeface="Malgun Gothic" charset="0"/>
+                        <a:ea typeface="Malgun Gothic" charset="0"/>
+                        <a:cs typeface="Malgun Gothic" charset="0"/>
+                      </a:endParaRPr>
+                    </a:p>
+                  </a:txBody>
+                  <a:tcPr marL="91440" marR="91440" marT="45720" marB="45720" anchor="ctr">
+                    <a:lnL w="9525" cap="flat" cmpd="sng" algn="ctr">
+                      <a:solidFill>
+                        <a:srgbClr val="D9D9D9"/>
+                      </a:solidFill>
+                      <a:prstDash val="solid"/>
+                      <a:round/>
+                      <a:headEnd type="none" w="med" len="med"/>
+                      <a:tailEnd type="none" w="med" len="med"/>
+                    </a:lnL>
+                    <a:lnR w="9525" cap="flat" cmpd="sng" algn="ctr">
+                      <a:solidFill>
+                        <a:srgbClr val="D9D9D9"/>
+                      </a:solidFill>
+                      <a:prstDash val="solid"/>
+                      <a:round/>
+                      <a:headEnd type="none" w="med" len="med"/>
+                      <a:tailEnd type="none" w="med" len="med"/>
+                    </a:lnR>
+                    <a:lnT w="9525" cap="flat" cmpd="sng" algn="ctr">
+                      <a:solidFill>
+                        <a:srgbClr val="D9D9D9"/>
+                      </a:solidFill>
+                      <a:prstDash val="solid"/>
+                      <a:round/>
+                      <a:headEnd type="none" w="med" len="med"/>
+                      <a:tailEnd type="none" w="med" len="med"/>
+                    </a:lnT>
+                    <a:lnB w="9525" cap="flat" cmpd="sng" algn="ctr">
+                      <a:solidFill>
+                        <a:srgbClr val="D9D9D9"/>
+                      </a:solidFill>
+                      <a:prstDash val="solid"/>
+                      <a:round/>
+                      <a:headEnd type="none" w="med" len="med"/>
+                      <a:tailEnd type="none" w="med" len="med"/>
+                    </a:lnB>
+                    <a:solidFill>
+                      <a:srgbClr val="005BAC"/>
+                    </a:solidFill>
+                  </a:tcPr>
+                </a:tc>
+                <a:tc>
+                  <a:txBody>
+                    <a:bodyPr/>
+                    <a:lstStyle/>
+                    <a:p>
+                      <a:pPr algn="l" indent="0" marL="0">
+                        <a:buNone/>
+                      </a:pPr>
+                      <a:r>
+                        <a:rPr lang="en-US" sz="1100" b="1" dirty="0">
+                          <a:solidFill>
+                            <a:srgbClr val="FFFFFF"/>
+                          </a:solidFill>
+                          <a:latin typeface="Malgun Gothic" pitchFamily="34" charset="0"/>
+                          <a:ea typeface="Malgun Gothic" pitchFamily="34" charset="-122"/>
+                          <a:cs typeface="Malgun Gothic" pitchFamily="34" charset="-120"/>
+                        </a:rPr>
+                        <a:t>기관명</a:t>
+                      </a:r>
+                      <a:endParaRPr lang="en-US" sz="1100" dirty="0">
+                        <a:latin typeface="Malgun Gothic" charset="0"/>
+                        <a:ea typeface="Malgun Gothic" charset="0"/>
+                        <a:cs typeface="Malgun Gothic" charset="0"/>
+                      </a:endParaRPr>
+                    </a:p>
+                  </a:txBody>
+                  <a:tcPr marL="91440" marR="91440" marT="45720" marB="45720" anchor="ctr">
+                    <a:lnL w="9525" cap="flat" cmpd="sng" algn="ctr">
+                      <a:solidFill>
+                        <a:srgbClr val="D9D9D9"/>
+                      </a:solidFill>
+                      <a:prstDash val="solid"/>
+                      <a:round/>
+                      <a:headEnd type="none" w="med" len="med"/>
+                      <a:tailEnd type="none" w="med" len="med"/>
+                    </a:lnL>
+                    <a:lnR w="9525" cap="flat" cmpd="sng" algn="ctr">
+                      <a:solidFill>
+                        <a:srgbClr val="D9D9D9"/>
+                      </a:solidFill>
+                      <a:prstDash val="solid"/>
+                      <a:round/>
+                      <a:headEnd type="none" w="med" len="med"/>
+                      <a:tailEnd type="none" w="med" len="med"/>
+                    </a:lnR>
+                    <a:lnT w="9525" cap="flat" cmpd="sng" algn="ctr">
+                      <a:solidFill>
+                        <a:srgbClr val="D9D9D9"/>
+                      </a:solidFill>
+                      <a:prstDash val="solid"/>
+                      <a:round/>
+                      <a:headEnd type="none" w="med" len="med"/>
+                      <a:tailEnd type="none" w="med" len="med"/>
+                    </a:lnT>
+                    <a:lnB w="9525" cap="flat" cmpd="sng" algn="ctr">
+                      <a:solidFill>
+                        <a:srgbClr val="D9D9D9"/>
+                      </a:solidFill>
+                      <a:prstDash val="solid"/>
+                      <a:round/>
+                      <a:headEnd type="none" w="med" len="med"/>
+                      <a:tailEnd type="none" w="med" len="med"/>
+                    </a:lnB>
+                    <a:solidFill>
+                      <a:srgbClr val="005BAC"/>
+                    </a:solidFill>
+                  </a:tcPr>
+                </a:tc>
+                <a:tc>
+                  <a:txBody>
+                    <a:bodyPr/>
+                    <a:lstStyle/>
+                    <a:p>
+                      <a:pPr algn="ctr" indent="0" marL="0">
+                        <a:buNone/>
+                      </a:pPr>
+                      <a:r>
+                        <a:rPr lang="en-US" sz="1100" b="1" dirty="0">
+                          <a:solidFill>
+                            <a:srgbClr val="FFFFFF"/>
+                          </a:solidFill>
+                          <a:latin typeface="Malgun Gothic" pitchFamily="34" charset="0"/>
+                          <a:ea typeface="Malgun Gothic" pitchFamily="34" charset="-122"/>
+                          <a:cs typeface="Malgun Gothic" pitchFamily="34" charset="-120"/>
+                        </a:rPr>
+                        <a:t>건수</a:t>
+                      </a:r>
+                      <a:endParaRPr lang="en-US" sz="1100" dirty="0">
+                        <a:latin typeface="Malgun Gothic" charset="0"/>
+                        <a:ea typeface="Malgun Gothic" charset="0"/>
+                        <a:cs typeface="Malgun Gothic" charset="0"/>
+                      </a:endParaRPr>
+                    </a:p>
+                  </a:txBody>
+                  <a:tcPr marL="91440" marR="91440" marT="45720" marB="45720" anchor="ctr">
+                    <a:lnL w="9525" cap="flat" cmpd="sng" algn="ctr">
+                      <a:solidFill>
+                        <a:srgbClr val="D9D9D9"/>
+                      </a:solidFill>
+                      <a:prstDash val="solid"/>
+                      <a:round/>
+                      <a:headEnd type="none" w="med" len="med"/>
+                      <a:tailEnd type="none" w="med" len="med"/>
+                    </a:lnL>
+                    <a:lnR w="9525" cap="flat" cmpd="sng" algn="ctr">
+                      <a:solidFill>
+                        <a:srgbClr val="D9D9D9"/>
+                      </a:solidFill>
+                      <a:prstDash val="solid"/>
+                      <a:round/>
+                      <a:headEnd type="none" w="med" len="med"/>
+                      <a:tailEnd type="none" w="med" len="med"/>
+                    </a:lnR>
+                    <a:lnT w="9525" cap="flat" cmpd="sng" algn="ctr">
+                      <a:solidFill>
+                        <a:srgbClr val="D9D9D9"/>
+                      </a:solidFill>
+                      <a:prstDash val="solid"/>
+                      <a:round/>
+                      <a:headEnd type="none" w="med" len="med"/>
+                      <a:tailEnd type="none" w="med" len="med"/>
+                    </a:lnT>
+                    <a:lnB w="9525" cap="flat" cmpd="sng" algn="ctr">
+                      <a:solidFill>
+                        <a:srgbClr val="D9D9D9"/>
+                      </a:solidFill>
+                      <a:prstDash val="solid"/>
+                      <a:round/>
+                      <a:headEnd type="none" w="med" len="med"/>
+                      <a:tailEnd type="none" w="med" len="med"/>
+                    </a:lnB>
+                    <a:solidFill>
+                      <a:srgbClr val="005BAC"/>
+                    </a:solidFill>
+                  </a:tcPr>
+                </a:tc>
+              </a:tr>
+              <a:tr h="365760">
+                <a:tc>
+                  <a:txBody>
+                    <a:bodyPr/>
+                    <a:lstStyle/>
+                    <a:p>
+                      <a:pPr algn="ctr" indent="0" marL="0">
+                        <a:buNone/>
+                      </a:pPr>
+                      <a:r>
+                        <a:rPr lang="en-US" sz="1100" dirty="0">
+                          <a:solidFill>
+                            <a:srgbClr val="3F3F3F"/>
+                          </a:solidFill>
+                          <a:latin typeface="Malgun Gothic" pitchFamily="34" charset="0"/>
+                          <a:ea typeface="Malgun Gothic" pitchFamily="34" charset="-122"/>
+                          <a:cs typeface="Malgun Gothic" pitchFamily="34" charset="-120"/>
+                        </a:rPr>
+                        <a:t>1</a:t>
+                      </a:r>
+                      <a:endParaRPr lang="en-US" sz="1100" dirty="0">
+                        <a:latin typeface="Malgun Gothic" charset="0"/>
+                        <a:ea typeface="Malgun Gothic" charset="0"/>
+                        <a:cs typeface="Malgun Gothic" charset="0"/>
+                      </a:endParaRPr>
+                    </a:p>
+                  </a:txBody>
+                  <a:tcPr marL="91440" marR="91440" marT="45720" marB="45720" anchor="ctr">
+                    <a:lnL w="9525" cap="flat" cmpd="sng" algn="ctr">
+                      <a:solidFill>
+                        <a:srgbClr val="D9D9D9"/>
+                      </a:solidFill>
+                      <a:prstDash val="solid"/>
+                      <a:round/>
+                      <a:headEnd type="none" w="med" len="med"/>
+                      <a:tailEnd type="none" w="med" len="med"/>
+                    </a:lnL>
+                    <a:lnR w="9525" cap="flat" cmpd="sng" algn="ctr">
+                      <a:solidFill>
+                        <a:srgbClr val="D9D9D9"/>
+                      </a:solidFill>
+                      <a:prstDash val="solid"/>
+                      <a:round/>
+                      <a:headEnd type="none" w="med" len="med"/>
+                      <a:tailEnd type="none" w="med" len="med"/>
+                    </a:lnR>
+                    <a:lnT w="9525" cap="flat" cmpd="sng" algn="ctr">
+                      <a:solidFill>
+                        <a:srgbClr val="D9D9D9"/>
+                      </a:solidFill>
+                      <a:prstDash val="solid"/>
+                      <a:round/>
+                      <a:headEnd type="none" w="med" len="med"/>
+                      <a:tailEnd type="none" w="med" len="med"/>
+                    </a:lnT>
+                    <a:lnB w="9525" cap="flat" cmpd="sng" algn="ctr">
+                      <a:solidFill>
+                        <a:srgbClr val="D9D9D9"/>
+                      </a:solidFill>
+                      <a:prstDash val="solid"/>
+                      <a:round/>
+                      <a:headEnd type="none" w="med" len="med"/>
+                      <a:tailEnd type="none" w="med" len="med"/>
+                    </a:lnB>
+                    <a:solidFill>
+                      <a:srgbClr val="FFFFFF"/>
+                    </a:solidFill>
+                  </a:tcPr>
+                </a:tc>
+                <a:tc>
+                  <a:txBody>
+                    <a:bodyPr/>
+                    <a:lstStyle/>
+                    <a:p>
+                      <a:pPr algn="l" indent="0" marL="0">
+                        <a:buNone/>
+                      </a:pPr>
+                      <a:r>
+                        <a:rPr lang="en-US" sz="1100" dirty="0">
+                          <a:solidFill>
+                            <a:srgbClr val="3F3F3F"/>
+                          </a:solidFill>
+                          <a:latin typeface="Malgun Gothic" pitchFamily="34" charset="0"/>
+                          <a:ea typeface="Malgun Gothic" pitchFamily="34" charset="-122"/>
+                          <a:cs typeface="Malgun Gothic" pitchFamily="34" charset="-120"/>
+                        </a:rPr>
+                        <a:t>의료법인녹십자의료재단 (용인)</a:t>
+                      </a:r>
+                      <a:endParaRPr lang="en-US" sz="1100" dirty="0">
+                        <a:latin typeface="Malgun Gothic" charset="0"/>
+                        <a:ea typeface="Malgun Gothic" charset="0"/>
+                        <a:cs typeface="Malgun Gothic" charset="0"/>
+                      </a:endParaRPr>
+                    </a:p>
+                  </a:txBody>
+                  <a:tcPr marL="91440" marR="91440" marT="45720" marB="45720" anchor="ctr">
+                    <a:lnL w="9525" cap="flat" cmpd="sng" algn="ctr">
+                      <a:solidFill>
+                        <a:srgbClr val="D9D9D9"/>
+                      </a:solidFill>
+                      <a:prstDash val="solid"/>
+                      <a:round/>
+                      <a:headEnd type="none" w="med" len="med"/>
+                      <a:tailEnd type="none" w="med" len="med"/>
+                    </a:lnL>
+                    <a:lnR w="9525" cap="flat" cmpd="sng" algn="ctr">
+                      <a:solidFill>
+                        <a:srgbClr val="D9D9D9"/>
+                      </a:solidFill>
+                      <a:prstDash val="solid"/>
+                      <a:round/>
+                      <a:headEnd type="none" w="med" len="med"/>
+                      <a:tailEnd type="none" w="med" len="med"/>
+                    </a:lnR>
+                    <a:lnT w="9525" cap="flat" cmpd="sng" algn="ctr">
+                      <a:solidFill>
+                        <a:srgbClr val="D9D9D9"/>
+                      </a:solidFill>
+                      <a:prstDash val="solid"/>
+                      <a:round/>
+                      <a:headEnd type="none" w="med" len="med"/>
+                      <a:tailEnd type="none" w="med" len="med"/>
+                    </a:lnT>
+                    <a:lnB w="9525" cap="flat" cmpd="sng" algn="ctr">
+                      <a:solidFill>
+                        <a:srgbClr val="D9D9D9"/>
+                      </a:solidFill>
+                      <a:prstDash val="solid"/>
+                      <a:round/>
+                      <a:headEnd type="none" w="med" len="med"/>
+                      <a:tailEnd type="none" w="med" len="med"/>
+                    </a:lnB>
+                    <a:solidFill>
+                      <a:srgbClr val="FFFFFF"/>
+                    </a:solidFill>
+                  </a:tcPr>
+                </a:tc>
+                <a:tc>
+                  <a:txBody>
+                    <a:bodyPr/>
+                    <a:lstStyle/>
+                    <a:p>
+                      <a:pPr algn="ctr" indent="0" marL="0">
+                        <a:buNone/>
+                      </a:pPr>
+                      <a:r>
+                        <a:rPr lang="en-US" sz="1100" dirty="0">
+                          <a:solidFill>
+                            <a:srgbClr val="3F3F3F"/>
+                          </a:solidFill>
+                          <a:latin typeface="Malgun Gothic" pitchFamily="34" charset="0"/>
+                          <a:ea typeface="Malgun Gothic" pitchFamily="34" charset="-122"/>
+                          <a:cs typeface="Malgun Gothic" pitchFamily="34" charset="-120"/>
+                        </a:rPr>
+                        <a:t>1,464</a:t>
+                      </a:r>
+                      <a:endParaRPr lang="en-US" sz="1100" dirty="0">
+                        <a:latin typeface="Malgun Gothic" charset="0"/>
+                        <a:ea typeface="Malgun Gothic" charset="0"/>
+                        <a:cs typeface="Malgun Gothic" charset="0"/>
+                      </a:endParaRPr>
+                    </a:p>
+                  </a:txBody>
+                  <a:tcPr marL="91440" marR="91440" marT="45720" marB="45720" anchor="ctr">
+                    <a:lnL w="9525" cap="flat" cmpd="sng" algn="ctr">
+                      <a:solidFill>
+                        <a:srgbClr val="D9D9D9"/>
+                      </a:solidFill>
+                      <a:prstDash val="solid"/>
+                      <a:round/>
+                      <a:headEnd type="none" w="med" len="med"/>
+                      <a:tailEnd type="none" w="med" len="med"/>
+                    </a:lnL>
+                    <a:lnR w="9525" cap="flat" cmpd="sng" algn="ctr">
+                      <a:solidFill>
+                        <a:srgbClr val="D9D9D9"/>
+                      </a:solidFill>
+                      <a:prstDash val="solid"/>
+                      <a:round/>
+                      <a:headEnd type="none" w="med" len="med"/>
+                      <a:tailEnd type="none" w="med" len="med"/>
+                    </a:lnR>
+                    <a:lnT w="9525" cap="flat" cmpd="sng" algn="ctr">
+                      <a:solidFill>
+                        <a:srgbClr val="D9D9D9"/>
+                      </a:solidFill>
+                      <a:prstDash val="solid"/>
+                      <a:round/>
+                      <a:headEnd type="none" w="med" len="med"/>
+                      <a:tailEnd type="none" w="med" len="med"/>
+                    </a:lnT>
+                    <a:lnB w="9525" cap="flat" cmpd="sng" algn="ctr">
+                      <a:solidFill>
+                        <a:srgbClr val="D9D9D9"/>
+                      </a:solidFill>
+                      <a:prstDash val="solid"/>
+                      <a:round/>
+                      <a:headEnd type="none" w="med" len="med"/>
+                      <a:tailEnd type="none" w="med" len="med"/>
+                    </a:lnB>
+                    <a:solidFill>
+                      <a:srgbClr val="FFFFFF"/>
+                    </a:solidFill>
+                  </a:tcPr>
+                </a:tc>
+              </a:tr>
+              <a:tr h="365760">
+                <a:tc>
+                  <a:txBody>
+                    <a:bodyPr/>
+                    <a:lstStyle/>
+                    <a:p>
+                      <a:pPr algn="ctr" indent="0" marL="0">
+                        <a:buNone/>
+                      </a:pPr>
+                      <a:r>
+                        <a:rPr lang="en-US" sz="1100" dirty="0">
+                          <a:solidFill>
+                            <a:srgbClr val="3F3F3F"/>
+                          </a:solidFill>
+                          <a:latin typeface="Malgun Gothic" pitchFamily="34" charset="0"/>
+                          <a:ea typeface="Malgun Gothic" pitchFamily="34" charset="-122"/>
+                          <a:cs typeface="Malgun Gothic" pitchFamily="34" charset="-120"/>
+                        </a:rPr>
+                        <a:t>2</a:t>
+                      </a:r>
+                      <a:endParaRPr lang="en-US" sz="1100" dirty="0">
+                        <a:latin typeface="Malgun Gothic" charset="0"/>
+                        <a:ea typeface="Malgun Gothic" charset="0"/>
+                        <a:cs typeface="Malgun Gothic" charset="0"/>
+                      </a:endParaRPr>
+                    </a:p>
+                  </a:txBody>
+                  <a:tcPr marL="91440" marR="91440" marT="45720" marB="45720" anchor="ctr">
+                    <a:lnL w="9525" cap="flat" cmpd="sng" algn="ctr">
+                      <a:solidFill>
+                        <a:srgbClr val="D9D9D9"/>
+                      </a:solidFill>
+                      <a:prstDash val="solid"/>
+                      <a:round/>
+                      <a:headEnd type="none" w="med" len="med"/>
+                      <a:tailEnd type="none" w="med" len="med"/>
+                    </a:lnL>
+                    <a:lnR w="9525" cap="flat" cmpd="sng" algn="ctr">
+                      <a:solidFill>
+                        <a:srgbClr val="D9D9D9"/>
+                      </a:solidFill>
+                      <a:prstDash val="solid"/>
+                      <a:round/>
+                      <a:headEnd type="none" w="med" len="med"/>
+                      <a:tailEnd type="none" w="med" len="med"/>
+                    </a:lnR>
+                    <a:lnT w="9525" cap="flat" cmpd="sng" algn="ctr">
+                      <a:solidFill>
+                        <a:srgbClr val="D9D9D9"/>
+                      </a:solidFill>
+                      <a:prstDash val="solid"/>
+                      <a:round/>
+                      <a:headEnd type="none" w="med" len="med"/>
+                      <a:tailEnd type="none" w="med" len="med"/>
+                    </a:lnT>
+                    <a:lnB w="9525" cap="flat" cmpd="sng" algn="ctr">
+                      <a:solidFill>
+                        <a:srgbClr val="D9D9D9"/>
+                      </a:solidFill>
+                      <a:prstDash val="solid"/>
+                      <a:round/>
+                      <a:headEnd type="none" w="med" len="med"/>
+                      <a:tailEnd type="none" w="med" len="med"/>
+                    </a:lnB>
+                    <a:solidFill>
+                      <a:srgbClr val="FFFFFF"/>
+                    </a:solidFill>
+                  </a:tcPr>
+                </a:tc>
+                <a:tc>
+                  <a:txBody>
+                    <a:bodyPr/>
+                    <a:lstStyle/>
+                    <a:p>
+                      <a:pPr algn="l" indent="0" marL="0">
+                        <a:buNone/>
+                      </a:pPr>
+                      <a:r>
+                        <a:rPr lang="en-US" sz="1100" dirty="0">
+                          <a:solidFill>
+                            <a:srgbClr val="3F3F3F"/>
+                          </a:solidFill>
+                          <a:latin typeface="Malgun Gothic" pitchFamily="34" charset="0"/>
+                          <a:ea typeface="Malgun Gothic" pitchFamily="34" charset="-122"/>
+                          <a:cs typeface="Malgun Gothic" pitchFamily="34" charset="-120"/>
+                        </a:rPr>
+                        <a:t>서울의과학연구소</a:t>
+                      </a:r>
+                      <a:endParaRPr lang="en-US" sz="1100" dirty="0">
+                        <a:latin typeface="Malgun Gothic" charset="0"/>
+                        <a:ea typeface="Malgun Gothic" charset="0"/>
+                        <a:cs typeface="Malgun Gothic" charset="0"/>
+                      </a:endParaRPr>
+                    </a:p>
+                  </a:txBody>
+                  <a:tcPr marL="91440" marR="91440" marT="45720" marB="45720" anchor="ctr">
+                    <a:lnL w="9525" cap="flat" cmpd="sng" algn="ctr">
+                      <a:solidFill>
+                        <a:srgbClr val="D9D9D9"/>
+                      </a:solidFill>
+                      <a:prstDash val="solid"/>
+                      <a:round/>
+                      <a:headEnd type="none" w="med" len="med"/>
+                      <a:tailEnd type="none" w="med" len="med"/>
+                    </a:lnL>
+                    <a:lnR w="9525" cap="flat" cmpd="sng" algn="ctr">
+                      <a:solidFill>
+                        <a:srgbClr val="D9D9D9"/>
+                      </a:solidFill>
+                      <a:prstDash val="solid"/>
+                      <a:round/>
+                      <a:headEnd type="none" w="med" len="med"/>
+                      <a:tailEnd type="none" w="med" len="med"/>
+                    </a:lnR>
+                    <a:lnT w="9525" cap="flat" cmpd="sng" algn="ctr">
+                      <a:solidFill>
+                        <a:srgbClr val="D9D9D9"/>
+                      </a:solidFill>
+                      <a:prstDash val="solid"/>
+                      <a:round/>
+                      <a:headEnd type="none" w="med" len="med"/>
+                      <a:tailEnd type="none" w="med" len="med"/>
+                    </a:lnT>
+                    <a:lnB w="9525" cap="flat" cmpd="sng" algn="ctr">
+                      <a:solidFill>
+                        <a:srgbClr val="D9D9D9"/>
+                      </a:solidFill>
+                      <a:prstDash val="solid"/>
+                      <a:round/>
+                      <a:headEnd type="none" w="med" len="med"/>
+                      <a:tailEnd type="none" w="med" len="med"/>
+                    </a:lnB>
+                    <a:solidFill>
+                      <a:srgbClr val="FFFFFF"/>
+                    </a:solidFill>
+                  </a:tcPr>
+                </a:tc>
+                <a:tc>
+                  <a:txBody>
+                    <a:bodyPr/>
+                    <a:lstStyle/>
+                    <a:p>
+                      <a:pPr algn="ctr" indent="0" marL="0">
+                        <a:buNone/>
+                      </a:pPr>
+                      <a:r>
+                        <a:rPr lang="en-US" sz="1100" dirty="0">
+                          <a:solidFill>
+                            <a:srgbClr val="3F3F3F"/>
+                          </a:solidFill>
+                          <a:latin typeface="Malgun Gothic" pitchFamily="34" charset="0"/>
+                          <a:ea typeface="Malgun Gothic" pitchFamily="34" charset="-122"/>
+                          <a:cs typeface="Malgun Gothic" pitchFamily="34" charset="-120"/>
+                        </a:rPr>
+                        <a:t>909</a:t>
+                      </a:r>
+                      <a:endParaRPr lang="en-US" sz="1100" dirty="0">
+                        <a:latin typeface="Malgun Gothic" charset="0"/>
+                        <a:ea typeface="Malgun Gothic" charset="0"/>
+                        <a:cs typeface="Malgun Gothic" charset="0"/>
+                      </a:endParaRPr>
+                    </a:p>
+                  </a:txBody>
+                  <a:tcPr marL="91440" marR="91440" marT="45720" marB="45720" anchor="ctr">
+                    <a:lnL w="9525" cap="flat" cmpd="sng" algn="ctr">
+                      <a:solidFill>
+                        <a:srgbClr val="D9D9D9"/>
+                      </a:solidFill>
+                      <a:prstDash val="solid"/>
+                      <a:round/>
+                      <a:headEnd type="none" w="med" len="med"/>
+                      <a:tailEnd type="none" w="med" len="med"/>
+                    </a:lnL>
+                    <a:lnR w="9525" cap="flat" cmpd="sng" algn="ctr">
+                      <a:solidFill>
+                        <a:srgbClr val="D9D9D9"/>
+                      </a:solidFill>
+                      <a:prstDash val="solid"/>
+                      <a:round/>
+                      <a:headEnd type="none" w="med" len="med"/>
+                      <a:tailEnd type="none" w="med" len="med"/>
+                    </a:lnR>
+                    <a:lnT w="9525" cap="flat" cmpd="sng" algn="ctr">
+                      <a:solidFill>
+                        <a:srgbClr val="D9D9D9"/>
+                      </a:solidFill>
+                      <a:prstDash val="solid"/>
+                      <a:round/>
+                      <a:headEnd type="none" w="med" len="med"/>
+                      <a:tailEnd type="none" w="med" len="med"/>
+                    </a:lnT>
+                    <a:lnB w="9525" cap="flat" cmpd="sng" algn="ctr">
+                      <a:solidFill>
+                        <a:srgbClr val="D9D9D9"/>
+                      </a:solidFill>
+                      <a:prstDash val="solid"/>
+                      <a:round/>
+                      <a:headEnd type="none" w="med" len="med"/>
+                      <a:tailEnd type="none" w="med" len="med"/>
+                    </a:lnB>
+                    <a:solidFill>
+                      <a:srgbClr val="FFFFFF"/>
+                    </a:solidFill>
+                  </a:tcPr>
+                </a:tc>
+              </a:tr>
+              <a:tr h="365760">
+                <a:tc>
+                  <a:txBody>
+                    <a:bodyPr/>
+                    <a:lstStyle/>
+                    <a:p>
+                      <a:pPr algn="ctr" indent="0" marL="0">
+                        <a:buNone/>
+                      </a:pPr>
+                      <a:r>
+                        <a:rPr lang="en-US" sz="1100" dirty="0">
+                          <a:solidFill>
+                            <a:srgbClr val="3F3F3F"/>
+                          </a:solidFill>
+                          <a:latin typeface="Malgun Gothic" pitchFamily="34" charset="0"/>
+                          <a:ea typeface="Malgun Gothic" pitchFamily="34" charset="-122"/>
+                          <a:cs typeface="Malgun Gothic" pitchFamily="34" charset="-120"/>
+                        </a:rPr>
+                        <a:t>3</a:t>
+                      </a:r>
+                      <a:endParaRPr lang="en-US" sz="1100" dirty="0">
+                        <a:latin typeface="Malgun Gothic" charset="0"/>
+                        <a:ea typeface="Malgun Gothic" charset="0"/>
+                        <a:cs typeface="Malgun Gothic" charset="0"/>
+                      </a:endParaRPr>
+                    </a:p>
+                  </a:txBody>
+                  <a:tcPr marL="91440" marR="91440" marT="45720" marB="45720" anchor="ctr">
+                    <a:lnL w="9525" cap="flat" cmpd="sng" algn="ctr">
+                      <a:solidFill>
+                        <a:srgbClr val="D9D9D9"/>
+                      </a:solidFill>
+                      <a:prstDash val="solid"/>
+                      <a:round/>
+                      <a:headEnd type="none" w="med" len="med"/>
+                      <a:tailEnd type="none" w="med" len="med"/>
+                    </a:lnL>
+                    <a:lnR w="9525" cap="flat" cmpd="sng" algn="ctr">
+                      <a:solidFill>
+                        <a:srgbClr val="D9D9D9"/>
+                      </a:solidFill>
+                      <a:prstDash val="solid"/>
+                      <a:round/>
+                      <a:headEnd type="none" w="med" len="med"/>
+                      <a:tailEnd type="none" w="med" len="med"/>
+                    </a:lnR>
+                    <a:lnT w="9525" cap="flat" cmpd="sng" algn="ctr">
+                      <a:solidFill>
+                        <a:srgbClr val="D9D9D9"/>
+                      </a:solidFill>
+                      <a:prstDash val="solid"/>
+                      <a:round/>
+                      <a:headEnd type="none" w="med" len="med"/>
+                      <a:tailEnd type="none" w="med" len="med"/>
+                    </a:lnT>
+                    <a:lnB w="9525" cap="flat" cmpd="sng" algn="ctr">
+                      <a:solidFill>
+                        <a:srgbClr val="D9D9D9"/>
+                      </a:solidFill>
+                      <a:prstDash val="solid"/>
+                      <a:round/>
+                      <a:headEnd type="none" w="med" len="med"/>
+                      <a:tailEnd type="none" w="med" len="med"/>
+                    </a:lnB>
+                    <a:solidFill>
+                      <a:srgbClr val="FFFFFF"/>
+                    </a:solidFill>
+                  </a:tcPr>
+                </a:tc>
+                <a:tc>
+                  <a:txBody>
+                    <a:bodyPr/>
+                    <a:lstStyle/>
+                    <a:p>
+                      <a:pPr algn="l" indent="0" marL="0">
+                        <a:buNone/>
+                      </a:pPr>
+                      <a:r>
+                        <a:rPr lang="en-US" sz="1100" dirty="0">
+                          <a:solidFill>
+                            <a:srgbClr val="3F3F3F"/>
+                          </a:solidFill>
+                          <a:latin typeface="Malgun Gothic" pitchFamily="34" charset="0"/>
+                          <a:ea typeface="Malgun Gothic" pitchFamily="34" charset="-122"/>
+                          <a:cs typeface="Malgun Gothic" pitchFamily="34" charset="-120"/>
+                        </a:rPr>
+                        <a:t>서울아산병원</a:t>
+                      </a:r>
+                      <a:endParaRPr lang="en-US" sz="1100" dirty="0">
+                        <a:latin typeface="Malgun Gothic" charset="0"/>
+                        <a:ea typeface="Malgun Gothic" charset="0"/>
+                        <a:cs typeface="Malgun Gothic" charset="0"/>
+                      </a:endParaRPr>
+                    </a:p>
+                  </a:txBody>
+                  <a:tcPr marL="91440" marR="91440" marT="45720" marB="45720" anchor="ctr">
+                    <a:lnL w="9525" cap="flat" cmpd="sng" algn="ctr">
+                      <a:solidFill>
+                        <a:srgbClr val="D9D9D9"/>
+                      </a:solidFill>
+                      <a:prstDash val="solid"/>
+                      <a:round/>
+                      <a:headEnd type="none" w="med" len="med"/>
+                      <a:tailEnd type="none" w="med" len="med"/>
+                    </a:lnL>
+                    <a:lnR w="9525" cap="flat" cmpd="sng" algn="ctr">
+                      <a:solidFill>
+                        <a:srgbClr val="D9D9D9"/>
+                      </a:solidFill>
+                      <a:prstDash val="solid"/>
+                      <a:round/>
+                      <a:headEnd type="none" w="med" len="med"/>
+                      <a:tailEnd type="none" w="med" len="med"/>
+                    </a:lnR>
+                    <a:lnT w="9525" cap="flat" cmpd="sng" algn="ctr">
+                      <a:solidFill>
+                        <a:srgbClr val="D9D9D9"/>
+                      </a:solidFill>
+                      <a:prstDash val="solid"/>
+                      <a:round/>
+                      <a:headEnd type="none" w="med" len="med"/>
+                      <a:tailEnd type="none" w="med" len="med"/>
+                    </a:lnT>
+                    <a:lnB w="9525" cap="flat" cmpd="sng" algn="ctr">
+                      <a:solidFill>
+                        <a:srgbClr val="D9D9D9"/>
+                      </a:solidFill>
+                      <a:prstDash val="solid"/>
+                      <a:round/>
+                      <a:headEnd type="none" w="med" len="med"/>
+                      <a:tailEnd type="none" w="med" len="med"/>
+                    </a:lnB>
+                    <a:solidFill>
+                      <a:srgbClr val="FFFFFF"/>
+                    </a:solidFill>
+                  </a:tcPr>
+                </a:tc>
+                <a:tc>
+                  <a:txBody>
+                    <a:bodyPr/>
+                    <a:lstStyle/>
+                    <a:p>
+                      <a:pPr algn="ctr" indent="0" marL="0">
+                        <a:buNone/>
+                      </a:pPr>
+                      <a:r>
+                        <a:rPr lang="en-US" sz="1100" dirty="0">
+                          <a:solidFill>
+                            <a:srgbClr val="3F3F3F"/>
+                          </a:solidFill>
+                          <a:latin typeface="Malgun Gothic" pitchFamily="34" charset="0"/>
+                          <a:ea typeface="Malgun Gothic" pitchFamily="34" charset="-122"/>
+                          <a:cs typeface="Malgun Gothic" pitchFamily="34" charset="-120"/>
+                        </a:rPr>
+                        <a:t>775</a:t>
+                      </a:r>
+                      <a:endParaRPr lang="en-US" sz="1100" dirty="0">
+                        <a:latin typeface="Malgun Gothic" charset="0"/>
+                        <a:ea typeface="Malgun Gothic" charset="0"/>
+                        <a:cs typeface="Malgun Gothic" charset="0"/>
+                      </a:endParaRPr>
+                    </a:p>
+                  </a:txBody>
+                  <a:tcPr marL="91440" marR="91440" marT="45720" marB="45720" anchor="ctr">
+                    <a:lnL w="9525" cap="flat" cmpd="sng" algn="ctr">
+                      <a:solidFill>
+                        <a:srgbClr val="D9D9D9"/>
+                      </a:solidFill>
+                      <a:prstDash val="solid"/>
+                      <a:round/>
+                      <a:headEnd type="none" w="med" len="med"/>
+                      <a:tailEnd type="none" w="med" len="med"/>
+                    </a:lnL>
+                    <a:lnR w="9525" cap="flat" cmpd="sng" algn="ctr">
+                      <a:solidFill>
+                        <a:srgbClr val="D9D9D9"/>
+                      </a:solidFill>
+                      <a:prstDash val="solid"/>
+                      <a:round/>
+                      <a:headEnd type="none" w="med" len="med"/>
+                      <a:tailEnd type="none" w="med" len="med"/>
+                    </a:lnR>
+                    <a:lnT w="9525" cap="flat" cmpd="sng" algn="ctr">
+                      <a:solidFill>
+                        <a:srgbClr val="D9D9D9"/>
+                      </a:solidFill>
+                      <a:prstDash val="solid"/>
+                      <a:round/>
+                      <a:headEnd type="none" w="med" len="med"/>
+                      <a:tailEnd type="none" w="med" len="med"/>
+                    </a:lnT>
+                    <a:lnB w="9525" cap="flat" cmpd="sng" algn="ctr">
+                      <a:solidFill>
+                        <a:srgbClr val="D9D9D9"/>
+                      </a:solidFill>
+                      <a:prstDash val="solid"/>
+                      <a:round/>
+                      <a:headEnd type="none" w="med" len="med"/>
+                      <a:tailEnd type="none" w="med" len="med"/>
+                    </a:lnB>
+                    <a:solidFill>
+                      <a:srgbClr val="FFFFFF"/>
+                    </a:solidFill>
+                  </a:tcPr>
+                </a:tc>
+              </a:tr>
+              <a:tr h="365760">
+                <a:tc>
+                  <a:txBody>
+                    <a:bodyPr/>
+                    <a:lstStyle/>
+                    <a:p>
+                      <a:pPr algn="ctr" indent="0" marL="0">
+                        <a:buNone/>
+                      </a:pPr>
+                      <a:r>
+                        <a:rPr lang="en-US" sz="1100" dirty="0">
+                          <a:solidFill>
+                            <a:srgbClr val="3F3F3F"/>
+                          </a:solidFill>
+                          <a:latin typeface="Malgun Gothic" pitchFamily="34" charset="0"/>
+                          <a:ea typeface="Malgun Gothic" pitchFamily="34" charset="-122"/>
+                          <a:cs typeface="Malgun Gothic" pitchFamily="34" charset="-120"/>
+                        </a:rPr>
+                        <a:t>4</a:t>
+                      </a:r>
+                      <a:endParaRPr lang="en-US" sz="1100" dirty="0">
+                        <a:latin typeface="Malgun Gothic" charset="0"/>
+                        <a:ea typeface="Malgun Gothic" charset="0"/>
+                        <a:cs typeface="Malgun Gothic" charset="0"/>
+                      </a:endParaRPr>
+                    </a:p>
+                  </a:txBody>
+                  <a:tcPr marL="91440" marR="91440" marT="45720" marB="45720" anchor="ctr">
+                    <a:lnL w="9525" cap="flat" cmpd="sng" algn="ctr">
+                      <a:solidFill>
+                        <a:srgbClr val="D9D9D9"/>
+                      </a:solidFill>
+                      <a:prstDash val="solid"/>
+                      <a:round/>
+                      <a:headEnd type="none" w="med" len="med"/>
+                      <a:tailEnd type="none" w="med" len="med"/>
+                    </a:lnL>
+                    <a:lnR w="9525" cap="flat" cmpd="sng" algn="ctr">
+                      <a:solidFill>
+                        <a:srgbClr val="D9D9D9"/>
+                      </a:solidFill>
+                      <a:prstDash val="solid"/>
+                      <a:round/>
+                      <a:headEnd type="none" w="med" len="med"/>
+                      <a:tailEnd type="none" w="med" len="med"/>
+                    </a:lnR>
+                    <a:lnT w="9525" cap="flat" cmpd="sng" algn="ctr">
+                      <a:solidFill>
+                        <a:srgbClr val="D9D9D9"/>
+                      </a:solidFill>
+                      <a:prstDash val="solid"/>
+                      <a:round/>
+                      <a:headEnd type="none" w="med" len="med"/>
+                      <a:tailEnd type="none" w="med" len="med"/>
+                    </a:lnT>
+                    <a:lnB w="9525" cap="flat" cmpd="sng" algn="ctr">
+                      <a:solidFill>
+                        <a:srgbClr val="D9D9D9"/>
+                      </a:solidFill>
+                      <a:prstDash val="solid"/>
+                      <a:round/>
+                      <a:headEnd type="none" w="med" len="med"/>
+                      <a:tailEnd type="none" w="med" len="med"/>
+                    </a:lnB>
+                    <a:solidFill>
+                      <a:srgbClr val="FFFFFF"/>
+                    </a:solidFill>
+                  </a:tcPr>
+                </a:tc>
+                <a:tc>
+                  <a:txBody>
+                    <a:bodyPr/>
+                    <a:lstStyle/>
+                    <a:p>
+                      <a:pPr algn="l" indent="0" marL="0">
+                        <a:buNone/>
+                      </a:pPr>
+                      <a:r>
+                        <a:rPr lang="en-US" sz="1100" dirty="0">
+                          <a:solidFill>
+                            <a:srgbClr val="3F3F3F"/>
+                          </a:solidFill>
+                          <a:latin typeface="Malgun Gothic" pitchFamily="34" charset="0"/>
+                          <a:ea typeface="Malgun Gothic" pitchFamily="34" charset="-122"/>
+                          <a:cs typeface="Malgun Gothic" pitchFamily="34" charset="-120"/>
+                        </a:rPr>
+                        <a:t>이원의료재단</a:t>
+                      </a:r>
+                      <a:endParaRPr lang="en-US" sz="1100" dirty="0">
+                        <a:latin typeface="Malgun Gothic" charset="0"/>
+                        <a:ea typeface="Malgun Gothic" charset="0"/>
+                        <a:cs typeface="Malgun Gothic" charset="0"/>
+                      </a:endParaRPr>
+                    </a:p>
+                  </a:txBody>
+                  <a:tcPr marL="91440" marR="91440" marT="45720" marB="45720" anchor="ctr">
+                    <a:lnL w="9525" cap="flat" cmpd="sng" algn="ctr">
+                      <a:solidFill>
+                        <a:srgbClr val="D9D9D9"/>
+                      </a:solidFill>
+                      <a:prstDash val="solid"/>
+                      <a:round/>
+                      <a:headEnd type="none" w="med" len="med"/>
+                      <a:tailEnd type="none" w="med" len="med"/>
+                    </a:lnL>
+                    <a:lnR w="9525" cap="flat" cmpd="sng" algn="ctr">
+                      <a:solidFill>
+                        <a:srgbClr val="D9D9D9"/>
+                      </a:solidFill>
+                      <a:prstDash val="solid"/>
+                      <a:round/>
+                      <a:headEnd type="none" w="med" len="med"/>
+                      <a:tailEnd type="none" w="med" len="med"/>
+                    </a:lnR>
+                    <a:lnT w="9525" cap="flat" cmpd="sng" algn="ctr">
+                      <a:solidFill>
+                        <a:srgbClr val="D9D9D9"/>
+                      </a:solidFill>
+                      <a:prstDash val="solid"/>
+                      <a:round/>
+                      <a:headEnd type="none" w="med" len="med"/>
+                      <a:tailEnd type="none" w="med" len="med"/>
+                    </a:lnT>
+                    <a:lnB w="9525" cap="flat" cmpd="sng" algn="ctr">
+                      <a:solidFill>
+                        <a:srgbClr val="D9D9D9"/>
+                      </a:solidFill>
+                      <a:prstDash val="solid"/>
+                      <a:round/>
+                      <a:headEnd type="none" w="med" len="med"/>
+                      <a:tailEnd type="none" w="med" len="med"/>
+                    </a:lnB>
+                    <a:solidFill>
+                      <a:srgbClr val="FFFFFF"/>
+                    </a:solidFill>
+                  </a:tcPr>
+                </a:tc>
+                <a:tc>
+                  <a:txBody>
+                    <a:bodyPr/>
+                    <a:lstStyle/>
+                    <a:p>
+                      <a:pPr algn="ctr" indent="0" marL="0">
+                        <a:buNone/>
+                      </a:pPr>
+                      <a:r>
+                        <a:rPr lang="en-US" sz="1100" dirty="0">
+                          <a:solidFill>
+                            <a:srgbClr val="3F3F3F"/>
+                          </a:solidFill>
+                          <a:latin typeface="Malgun Gothic" pitchFamily="34" charset="0"/>
+                          <a:ea typeface="Malgun Gothic" pitchFamily="34" charset="-122"/>
+                          <a:cs typeface="Malgun Gothic" pitchFamily="34" charset="-120"/>
+                        </a:rPr>
+                        <a:t>710</a:t>
+                      </a:r>
+                      <a:endParaRPr lang="en-US" sz="1100" dirty="0">
+                        <a:latin typeface="Malgun Gothic" charset="0"/>
+                        <a:ea typeface="Malgun Gothic" charset="0"/>
+                        <a:cs typeface="Malgun Gothic" charset="0"/>
+                      </a:endParaRPr>
+                    </a:p>
+                  </a:txBody>
+                  <a:tcPr marL="91440" marR="91440" marT="45720" marB="45720" anchor="ctr">
+                    <a:lnL w="9525" cap="flat" cmpd="sng" algn="ctr">
+                      <a:solidFill>
+                        <a:srgbClr val="D9D9D9"/>
+                      </a:solidFill>
+                      <a:prstDash val="solid"/>
+                      <a:round/>
+                      <a:headEnd type="none" w="med" len="med"/>
+                      <a:tailEnd type="none" w="med" len="med"/>
+                    </a:lnL>
+                    <a:lnR w="9525" cap="flat" cmpd="sng" algn="ctr">
+                      <a:solidFill>
+                        <a:srgbClr val="D9D9D9"/>
+                      </a:solidFill>
+                      <a:prstDash val="solid"/>
+                      <a:round/>
+                      <a:headEnd type="none" w="med" len="med"/>
+                      <a:tailEnd type="none" w="med" len="med"/>
+                    </a:lnR>
+                    <a:lnT w="9525" cap="flat" cmpd="sng" algn="ctr">
+                      <a:solidFill>
+                        <a:srgbClr val="D9D9D9"/>
+                      </a:solidFill>
+                      <a:prstDash val="solid"/>
+                      <a:round/>
+                      <a:headEnd type="none" w="med" len="med"/>
+                      <a:tailEnd type="none" w="med" len="med"/>
+                    </a:lnT>
+                    <a:lnB w="9525" cap="flat" cmpd="sng" algn="ctr">
+                      <a:solidFill>
+                        <a:srgbClr val="D9D9D9"/>
+                      </a:solidFill>
+                      <a:prstDash val="solid"/>
+                      <a:round/>
+                      <a:headEnd type="none" w="med" len="med"/>
+                      <a:tailEnd type="none" w="med" len="med"/>
+                    </a:lnB>
+                    <a:solidFill>
+                      <a:srgbClr val="FFFFFF"/>
+                    </a:solidFill>
+                  </a:tcPr>
+                </a:tc>
+              </a:tr>
+              <a:tr h="365760">
+                <a:tc>
+                  <a:txBody>
+                    <a:bodyPr/>
+                    <a:lstStyle/>
+                    <a:p>
+                      <a:pPr algn="ctr" indent="0" marL="0">
+                        <a:buNone/>
+                      </a:pPr>
+                      <a:r>
+                        <a:rPr lang="en-US" sz="1100" dirty="0">
+                          <a:solidFill>
+                            <a:srgbClr val="3F3F3F"/>
+                          </a:solidFill>
+                          <a:latin typeface="Malgun Gothic" pitchFamily="34" charset="0"/>
+                          <a:ea typeface="Malgun Gothic" pitchFamily="34" charset="-122"/>
+                          <a:cs typeface="Malgun Gothic" pitchFamily="34" charset="-120"/>
+                        </a:rPr>
+                        <a:t>5</a:t>
+                      </a:r>
+                      <a:endParaRPr lang="en-US" sz="1100" dirty="0">
+                        <a:latin typeface="Malgun Gothic" charset="0"/>
+                        <a:ea typeface="Malgun Gothic" charset="0"/>
+                        <a:cs typeface="Malgun Gothic" charset="0"/>
+                      </a:endParaRPr>
+                    </a:p>
+                  </a:txBody>
+                  <a:tcPr marL="91440" marR="91440" marT="45720" marB="45720" anchor="ctr">
+                    <a:lnL w="9525" cap="flat" cmpd="sng" algn="ctr">
+                      <a:solidFill>
+                        <a:srgbClr val="D9D9D9"/>
+                      </a:solidFill>
+                      <a:prstDash val="solid"/>
+                      <a:round/>
+                      <a:headEnd type="none" w="med" len="med"/>
+                      <a:tailEnd type="none" w="med" len="med"/>
+                    </a:lnL>
+                    <a:lnR w="9525" cap="flat" cmpd="sng" algn="ctr">
+                      <a:solidFill>
+                        <a:srgbClr val="D9D9D9"/>
+                      </a:solidFill>
+                      <a:prstDash val="solid"/>
+                      <a:round/>
+                      <a:headEnd type="none" w="med" len="med"/>
+                      <a:tailEnd type="none" w="med" len="med"/>
+                    </a:lnR>
+                    <a:lnT w="9525" cap="flat" cmpd="sng" algn="ctr">
+                      <a:solidFill>
+                        <a:srgbClr val="D9D9D9"/>
+                      </a:solidFill>
+                      <a:prstDash val="solid"/>
+                      <a:round/>
+                      <a:headEnd type="none" w="med" len="med"/>
+                      <a:tailEnd type="none" w="med" len="med"/>
+                    </a:lnT>
+                    <a:lnB w="9525" cap="flat" cmpd="sng" algn="ctr">
+                      <a:solidFill>
+                        <a:srgbClr val="D9D9D9"/>
+                      </a:solidFill>
+                      <a:prstDash val="solid"/>
+                      <a:round/>
+                      <a:headEnd type="none" w="med" len="med"/>
+                      <a:tailEnd type="none" w="med" len="med"/>
+                    </a:lnB>
+                    <a:solidFill>
+                      <a:srgbClr val="FFFFFF"/>
+                    </a:solidFill>
+                  </a:tcPr>
+                </a:tc>
+                <a:tc>
+                  <a:txBody>
+                    <a:bodyPr/>
+                    <a:lstStyle/>
+                    <a:p>
+                      <a:pPr algn="l" indent="0" marL="0">
+                        <a:buNone/>
+                      </a:pPr>
+                      <a:r>
+                        <a:rPr lang="en-US" sz="1100" dirty="0">
+                          <a:solidFill>
+                            <a:srgbClr val="3F3F3F"/>
+                          </a:solidFill>
+                          <a:latin typeface="Malgun Gothic" pitchFamily="34" charset="0"/>
+                          <a:ea typeface="Malgun Gothic" pitchFamily="34" charset="-122"/>
+                          <a:cs typeface="Malgun Gothic" pitchFamily="34" charset="-120"/>
+                        </a:rPr>
+                        <a:t>씨젠의료재단 (서울)</a:t>
+                      </a:r>
+                      <a:endParaRPr lang="en-US" sz="1100" dirty="0">
+                        <a:latin typeface="Malgun Gothic" charset="0"/>
+                        <a:ea typeface="Malgun Gothic" charset="0"/>
+                        <a:cs typeface="Malgun Gothic" charset="0"/>
+                      </a:endParaRPr>
+                    </a:p>
+                  </a:txBody>
+                  <a:tcPr marL="91440" marR="91440" marT="45720" marB="45720" anchor="ctr">
+                    <a:lnL w="9525" cap="flat" cmpd="sng" algn="ctr">
+                      <a:solidFill>
+                        <a:srgbClr val="D9D9D9"/>
+                      </a:solidFill>
+                      <a:prstDash val="solid"/>
+                      <a:round/>
+                      <a:headEnd type="none" w="med" len="med"/>
+                      <a:tailEnd type="none" w="med" len="med"/>
+                    </a:lnL>
+                    <a:lnR w="9525" cap="flat" cmpd="sng" algn="ctr">
+                      <a:solidFill>
+                        <a:srgbClr val="D9D9D9"/>
+                      </a:solidFill>
+                      <a:prstDash val="solid"/>
+                      <a:round/>
+                      <a:headEnd type="none" w="med" len="med"/>
+                      <a:tailEnd type="none" w="med" len="med"/>
+                    </a:lnR>
+                    <a:lnT w="9525" cap="flat" cmpd="sng" algn="ctr">
+                      <a:solidFill>
+                        <a:srgbClr val="D9D9D9"/>
+                      </a:solidFill>
+                      <a:prstDash val="solid"/>
+                      <a:round/>
+                      <a:headEnd type="none" w="med" len="med"/>
+                      <a:tailEnd type="none" w="med" len="med"/>
+                    </a:lnT>
+                    <a:lnB w="9525" cap="flat" cmpd="sng" algn="ctr">
+                      <a:solidFill>
+                        <a:srgbClr val="D9D9D9"/>
+                      </a:solidFill>
+                      <a:prstDash val="solid"/>
+                      <a:round/>
+                      <a:headEnd type="none" w="med" len="med"/>
+                      <a:tailEnd type="none" w="med" len="med"/>
+                    </a:lnB>
+                    <a:solidFill>
+                      <a:srgbClr val="FFFFFF"/>
+                    </a:solidFill>
+                  </a:tcPr>
+                </a:tc>
+                <a:tc>
+                  <a:txBody>
+                    <a:bodyPr/>
+                    <a:lstStyle/>
+                    <a:p>
+                      <a:pPr algn="ctr" indent="0" marL="0">
+                        <a:buNone/>
+                      </a:pPr>
+                      <a:r>
+                        <a:rPr lang="en-US" sz="1100" dirty="0">
+                          <a:solidFill>
+                            <a:srgbClr val="3F3F3F"/>
+                          </a:solidFill>
+                          <a:latin typeface="Malgun Gothic" pitchFamily="34" charset="0"/>
+                          <a:ea typeface="Malgun Gothic" pitchFamily="34" charset="-122"/>
+                          <a:cs typeface="Malgun Gothic" pitchFamily="34" charset="-120"/>
+                        </a:rPr>
+                        <a:t>689</a:t>
+                      </a:r>
+                      <a:endParaRPr lang="en-US" sz="1100" dirty="0">
+                        <a:latin typeface="Malgun Gothic" charset="0"/>
+                        <a:ea typeface="Malgun Gothic" charset="0"/>
+                        <a:cs typeface="Malgun Gothic" charset="0"/>
+                      </a:endParaRPr>
+                    </a:p>
+                  </a:txBody>
+                  <a:tcPr marL="91440" marR="91440" marT="45720" marB="45720" anchor="ctr">
+                    <a:lnL w="9525" cap="flat" cmpd="sng" algn="ctr">
+                      <a:solidFill>
+                        <a:srgbClr val="D9D9D9"/>
+                      </a:solidFill>
+                      <a:prstDash val="solid"/>
+                      <a:round/>
+                      <a:headEnd type="none" w="med" len="med"/>
+                      <a:tailEnd type="none" w="med" len="med"/>
+                    </a:lnL>
+                    <a:lnR w="9525" cap="flat" cmpd="sng" algn="ctr">
+                      <a:solidFill>
+                        <a:srgbClr val="D9D9D9"/>
+                      </a:solidFill>
+                      <a:prstDash val="solid"/>
+                      <a:round/>
+                      <a:headEnd type="none" w="med" len="med"/>
+                      <a:tailEnd type="none" w="med" len="med"/>
+                    </a:lnR>
+                    <a:lnT w="9525" cap="flat" cmpd="sng" algn="ctr">
+                      <a:solidFill>
+                        <a:srgbClr val="D9D9D9"/>
+                      </a:solidFill>
+                      <a:prstDash val="solid"/>
+                      <a:round/>
+                      <a:headEnd type="none" w="med" len="med"/>
+                      <a:tailEnd type="none" w="med" len="med"/>
+                    </a:lnT>
+                    <a:lnB w="9525" cap="flat" cmpd="sng" algn="ctr">
+                      <a:solidFill>
+                        <a:srgbClr val="D9D9D9"/>
+                      </a:solidFill>
+                      <a:prstDash val="solid"/>
+                      <a:round/>
+                      <a:headEnd type="none" w="med" len="med"/>
+                      <a:tailEnd type="none" w="med" len="med"/>
+                    </a:lnB>
+                    <a:solidFill>
+                      <a:srgbClr val="FFFFFF"/>
+                    </a:solidFill>
+                  </a:tcPr>
+                </a:tc>
+              </a:tr>
+            </a:tbl>
+          </a:graphicData>
+        </a:graphic>
+      </p:graphicFrame>
+      <p:sp>
+        <p:nvSpPr>
+          <p:cNvPr id="9" name="Text 5"/>
+          <p:cNvSpPr/>
+          <p:nvPr/>
+        </p:nvSpPr>
+        <p:spPr>
+          <a:xfrm>
+            <a:off x="530352" y="4114800"/>
+            <a:ext cx="5486400" cy="320040"/>
+          </a:xfrm>
+          <a:prstGeom prst="rect">
+            <a:avLst/>
+          </a:prstGeom>
+          <a:noFill/>
+          <a:ln/>
+        </p:spPr>
+        <p:txBody>
+          <a:bodyPr wrap="square" lIns="0" tIns="0" rIns="0" bIns="0" rtlCol="0" anchor="ctr"/>
+          <a:lstStyle/>
+          <a:p>
+            <a:pPr indent="0" marL="0">
+              <a:buNone/>
+            </a:pPr>
+            <a:r>
+              <a:rPr lang="en-US" sz="1300" b="1" dirty="0">
+                <a:solidFill>
+                  <a:srgbClr val="005BAC"/>
+                </a:solidFill>
+                <a:latin typeface="Malgun Gothic" pitchFamily="34" charset="0"/>
+                <a:ea typeface="Malgun Gothic" pitchFamily="34" charset="-122"/>
+                <a:cs typeface="Malgun Gothic" pitchFamily="34" charset="-120"/>
+              </a:rPr>
+              <a:t>엔지니어 생산성 TOP 5</a:t>
+            </a:r>
+            <a:endParaRPr lang="en-US" sz="1300" dirty="0"/>
+          </a:p>
+        </p:txBody>
+      </p:sp>
+      <p:sp>
+        <p:nvSpPr>
+          <p:cNvPr id="10" name="Shape 6"/>
+          <p:cNvSpPr/>
+          <p:nvPr/>
+        </p:nvSpPr>
+        <p:spPr>
+          <a:xfrm>
+            <a:off x="530352" y="4434840"/>
+            <a:ext cx="5486400" cy="1371600"/>
+          </a:xfrm>
+          <a:prstGeom prst="roundRect">
+            <a:avLst>
+              <a:gd name="adj" fmla="val 5333"/>
+            </a:avLst>
+          </a:prstGeom>
+          <a:solidFill>
+            <a:srgbClr val="E6EEF7"/>
+          </a:solidFill>
+          <a:ln w="9525">
+            <a:solidFill>
+              <a:srgbClr val="005BAC"/>
+            </a:solidFill>
+            <a:prstDash val="dash"/>
+          </a:ln>
+        </p:spPr>
+      </p:sp>
+      <p:sp>
+        <p:nvSpPr>
+          <p:cNvPr id="11" name="Text 7"/>
+          <p:cNvSpPr/>
+          <p:nvPr/>
+        </p:nvSpPr>
+        <p:spPr>
+          <a:xfrm>
+            <a:off x="530352" y="4434840"/>
+            <a:ext cx="5486400" cy="1371600"/>
+          </a:xfrm>
+          <a:prstGeom prst="rect">
+            <a:avLst/>
+          </a:prstGeom>
+          <a:noFill/>
+          <a:ln/>
+        </p:spPr>
+        <p:txBody>
+          <a:bodyPr wrap="square" lIns="0" tIns="0" rIns="0" bIns="0" rtlCol="0" anchor="ctr"/>
+          <a:lstStyle/>
+          <a:p>
+            <a:pPr algn="ctr" indent="0" marL="0">
+              <a:buNone/>
+            </a:pPr>
+            <a:r>
+              <a:rPr lang="en-US" sz="1600" i="1" dirty="0">
+                <a:solidFill>
+                  <a:srgbClr val="005BAC"/>
+                </a:solidFill>
+                <a:latin typeface="Malgun Gothic" pitchFamily="34" charset="0"/>
+                <a:ea typeface="Malgun Gothic" pitchFamily="34" charset="-122"/>
+                <a:cs typeface="Malgun Gothic" pitchFamily="34" charset="-120"/>
+              </a:rPr>
+              <a:t>자료 미제공 – 추후 업데이트</a:t>
+            </a:r>
+            <a:endParaRPr lang="en-US" sz="1600" dirty="0"/>
+          </a:p>
+        </p:txBody>
+      </p:sp>
+      <p:sp>
+        <p:nvSpPr>
+          <p:cNvPr id="12" name="Text 8"/>
+          <p:cNvSpPr/>
+          <p:nvPr/>
+        </p:nvSpPr>
+        <p:spPr>
+          <a:xfrm>
+            <a:off x="6309360" y="1463040"/>
+            <a:ext cx="5486400" cy="320040"/>
+          </a:xfrm>
+          <a:prstGeom prst="rect">
+            <a:avLst/>
+          </a:prstGeom>
+          <a:noFill/>
+          <a:ln/>
+        </p:spPr>
+        <p:txBody>
+          <a:bodyPr wrap="square" lIns="0" tIns="0" rIns="0" bIns="0" rtlCol="0" anchor="ctr"/>
+          <a:lstStyle/>
+          <a:p>
+            <a:pPr indent="0" marL="0">
+              <a:buNone/>
+            </a:pPr>
+            <a:r>
+              <a:rPr lang="en-US" sz="1300" b="1" dirty="0">
+                <a:solidFill>
+                  <a:srgbClr val="005BAC"/>
+                </a:solidFill>
+                <a:latin typeface="Malgun Gothic" pitchFamily="34" charset="0"/>
+                <a:ea typeface="Malgun Gothic" pitchFamily="34" charset="-122"/>
+                <a:cs typeface="Malgun Gothic" pitchFamily="34" charset="-120"/>
+              </a:rPr>
+              <a:t>반복 장애 장비 TOP 3 (Proactive Service 1순위 대상)</a:t>
+            </a:r>
+            <a:endParaRPr lang="en-US" sz="1300" dirty="0"/>
+          </a:p>
+        </p:txBody>
+      </p:sp>
+      <p:sp>
+        <p:nvSpPr>
+          <p:cNvPr id="13" name="Shape 9"/>
+          <p:cNvSpPr/>
+          <p:nvPr/>
+        </p:nvSpPr>
+        <p:spPr>
+          <a:xfrm>
+            <a:off x="6309360" y="1828800"/>
+            <a:ext cx="5486400" cy="502920"/>
+          </a:xfrm>
+          <a:prstGeom prst="roundRect">
+            <a:avLst>
+              <a:gd name="adj" fmla="val 9091"/>
+            </a:avLst>
+          </a:prstGeom>
+          <a:solidFill>
+            <a:srgbClr val="FCE9E8"/>
+          </a:solidFill>
+          <a:ln/>
+        </p:spPr>
+      </p:sp>
+      <p:sp>
+        <p:nvSpPr>
+          <p:cNvPr id="14" name="Text 10"/>
+          <p:cNvSpPr/>
+          <p:nvPr/>
+        </p:nvSpPr>
+        <p:spPr>
+          <a:xfrm>
+            <a:off x="6492240" y="1883664"/>
+            <a:ext cx="3200400" cy="365760"/>
+          </a:xfrm>
+          <a:prstGeom prst="rect">
+            <a:avLst/>
+          </a:prstGeom>
+          <a:noFill/>
+          <a:ln/>
+        </p:spPr>
+        <p:txBody>
+          <a:bodyPr wrap="square" lIns="0" tIns="0" rIns="0" bIns="0" rtlCol="0" anchor="ctr"/>
+          <a:lstStyle/>
+          <a:p>
+            <a:pPr indent="0" marL="0">
+              <a:buNone/>
+            </a:pPr>
+            <a:r>
+              <a:rPr lang="en-US" sz="1200" b="1" dirty="0">
+                <a:solidFill>
+                  <a:srgbClr val="E7413E"/>
+                </a:solidFill>
+                <a:latin typeface="Arial" pitchFamily="34" charset="0"/>
+                <a:ea typeface="Arial" pitchFamily="34" charset="-122"/>
+                <a:cs typeface="Arial" pitchFamily="34" charset="-120"/>
+              </a:rPr>
+              <a:t>S/N 15032</a:t>
+            </a:r>
+            <a:endParaRPr lang="en-US" sz="1200" dirty="0"/>
+          </a:p>
+        </p:txBody>
+      </p:sp>
+      <p:sp>
+        <p:nvSpPr>
+          <p:cNvPr id="15" name="Text 11"/>
+          <p:cNvSpPr/>
+          <p:nvPr/>
+        </p:nvSpPr>
+        <p:spPr>
+          <a:xfrm>
+            <a:off x="9509760" y="1883664"/>
+            <a:ext cx="2103120" cy="365760"/>
+          </a:xfrm>
+          <a:prstGeom prst="rect">
+            <a:avLst/>
+          </a:prstGeom>
+          <a:noFill/>
+          <a:ln/>
+        </p:spPr>
+        <p:txBody>
+          <a:bodyPr wrap="square" lIns="0" tIns="0" rIns="0" bIns="0" rtlCol="0" anchor="ctr"/>
+          <a:lstStyle/>
+          <a:p>
+            <a:pPr algn="r" indent="0" marL="0">
+              <a:buNone/>
+            </a:pPr>
+            <a:r>
+              <a:rPr lang="en-US" sz="1300" b="1" dirty="0">
+                <a:solidFill>
+                  <a:srgbClr val="E7413E"/>
+                </a:solidFill>
+                <a:latin typeface="Arial" pitchFamily="34" charset="0"/>
+                <a:ea typeface="Arial" pitchFamily="34" charset="-122"/>
+                <a:cs typeface="Arial" pitchFamily="34" charset="-120"/>
+              </a:rPr>
+              <a:t>92건</a:t>
+            </a:r>
+            <a:endParaRPr lang="en-US" sz="1300" dirty="0"/>
+          </a:p>
+        </p:txBody>
+      </p:sp>
+      <p:sp>
+        <p:nvSpPr>
+          <p:cNvPr id="16" name="Shape 12"/>
+          <p:cNvSpPr/>
+          <p:nvPr/>
+        </p:nvSpPr>
+        <p:spPr>
+          <a:xfrm>
+            <a:off x="6309360" y="2404872"/>
+            <a:ext cx="5486400" cy="502920"/>
+          </a:xfrm>
+          <a:prstGeom prst="roundRect">
+            <a:avLst>
+              <a:gd name="adj" fmla="val 9091"/>
+            </a:avLst>
+          </a:prstGeom>
+          <a:solidFill>
+            <a:srgbClr val="F5F8FC"/>
+          </a:solidFill>
+          <a:ln/>
+        </p:spPr>
+      </p:sp>
+      <p:sp>
+        <p:nvSpPr>
+          <p:cNvPr id="17" name="Text 13"/>
+          <p:cNvSpPr/>
+          <p:nvPr/>
+        </p:nvSpPr>
+        <p:spPr>
+          <a:xfrm>
+            <a:off x="6492240" y="2459736"/>
+            <a:ext cx="3200400" cy="365760"/>
+          </a:xfrm>
+          <a:prstGeom prst="rect">
+            <a:avLst/>
+          </a:prstGeom>
+          <a:noFill/>
+          <a:ln/>
+        </p:spPr>
+        <p:txBody>
+          <a:bodyPr wrap="square" lIns="0" tIns="0" rIns="0" bIns="0" rtlCol="0" anchor="ctr"/>
+          <a:lstStyle/>
+          <a:p>
+            <a:pPr indent="0" marL="0">
+              <a:buNone/>
+            </a:pPr>
+            <a:r>
+              <a:rPr lang="en-US" sz="1200" b="1" dirty="0">
+                <a:solidFill>
+                  <a:srgbClr val="3F3F3F"/>
+                </a:solidFill>
+                <a:latin typeface="Arial" pitchFamily="34" charset="0"/>
+                <a:ea typeface="Arial" pitchFamily="34" charset="-122"/>
+                <a:cs typeface="Arial" pitchFamily="34" charset="-120"/>
+              </a:rPr>
+              <a:t>S/N 14982</a:t>
+            </a:r>
+            <a:endParaRPr lang="en-US" sz="1200" dirty="0"/>
+          </a:p>
+        </p:txBody>
+      </p:sp>
+      <p:sp>
+        <p:nvSpPr>
+          <p:cNvPr id="18" name="Text 14"/>
+          <p:cNvSpPr/>
+          <p:nvPr/>
+        </p:nvSpPr>
+        <p:spPr>
+          <a:xfrm>
+            <a:off x="9509760" y="2459736"/>
+            <a:ext cx="2103120" cy="365760"/>
+          </a:xfrm>
+          <a:prstGeom prst="rect">
+            <a:avLst/>
+          </a:prstGeom>
+          <a:noFill/>
+          <a:ln/>
+        </p:spPr>
+        <p:txBody>
+          <a:bodyPr wrap="square" lIns="0" tIns="0" rIns="0" bIns="0" rtlCol="0" anchor="ctr"/>
+          <a:lstStyle/>
+          <a:p>
+            <a:pPr algn="r" indent="0" marL="0">
+              <a:buNone/>
+            </a:pPr>
+            <a:r>
+              <a:rPr lang="en-US" sz="1300" b="1" dirty="0">
+                <a:solidFill>
+                  <a:srgbClr val="3F3F3F"/>
+                </a:solidFill>
+                <a:latin typeface="Arial" pitchFamily="34" charset="0"/>
+                <a:ea typeface="Arial" pitchFamily="34" charset="-122"/>
+                <a:cs typeface="Arial" pitchFamily="34" charset="-120"/>
+              </a:rPr>
+              <a:t>56건</a:t>
+            </a:r>
+            <a:endParaRPr lang="en-US" sz="1300" dirty="0"/>
+          </a:p>
+        </p:txBody>
+      </p:sp>
+      <p:sp>
+        <p:nvSpPr>
+          <p:cNvPr id="19" name="Shape 15"/>
+          <p:cNvSpPr/>
+          <p:nvPr/>
+        </p:nvSpPr>
+        <p:spPr>
+          <a:xfrm>
+            <a:off x="6309360" y="2980944"/>
+            <a:ext cx="5486400" cy="502920"/>
+          </a:xfrm>
+          <a:prstGeom prst="roundRect">
+            <a:avLst>
+              <a:gd name="adj" fmla="val 9091"/>
+            </a:avLst>
+          </a:prstGeom>
+          <a:solidFill>
+            <a:srgbClr val="F5F8FC"/>
+          </a:solidFill>
+          <a:ln/>
+        </p:spPr>
+      </p:sp>
+      <p:sp>
+        <p:nvSpPr>
+          <p:cNvPr id="20" name="Text 16"/>
+          <p:cNvSpPr/>
+          <p:nvPr/>
+        </p:nvSpPr>
+        <p:spPr>
+          <a:xfrm>
+            <a:off x="6492240" y="3035808"/>
+            <a:ext cx="3200400" cy="365760"/>
+          </a:xfrm>
+          <a:prstGeom prst="rect">
+            <a:avLst/>
+          </a:prstGeom>
+          <a:noFill/>
+          <a:ln/>
+        </p:spPr>
+        <p:txBody>
+          <a:bodyPr wrap="square" lIns="0" tIns="0" rIns="0" bIns="0" rtlCol="0" anchor="ctr"/>
+          <a:lstStyle/>
+          <a:p>
+            <a:pPr indent="0" marL="0">
+              <a:buNone/>
+            </a:pPr>
+            <a:r>
+              <a:rPr lang="en-US" sz="1200" b="1" dirty="0">
+                <a:solidFill>
+                  <a:srgbClr val="3F3F3F"/>
+                </a:solidFill>
+                <a:latin typeface="Arial" pitchFamily="34" charset="0"/>
+                <a:ea typeface="Arial" pitchFamily="34" charset="-122"/>
+                <a:cs typeface="Arial" pitchFamily="34" charset="-120"/>
+              </a:rPr>
+              <a:t>S/N 15031</a:t>
+            </a:r>
+            <a:endParaRPr lang="en-US" sz="1200" dirty="0"/>
+          </a:p>
+        </p:txBody>
+      </p:sp>
+      <p:sp>
+        <p:nvSpPr>
+          <p:cNvPr id="21" name="Text 17"/>
+          <p:cNvSpPr/>
+          <p:nvPr/>
+        </p:nvSpPr>
+        <p:spPr>
+          <a:xfrm>
+            <a:off x="9509760" y="3035808"/>
+            <a:ext cx="2103120" cy="365760"/>
+          </a:xfrm>
+          <a:prstGeom prst="rect">
+            <a:avLst/>
+          </a:prstGeom>
+          <a:noFill/>
+          <a:ln/>
+        </p:spPr>
+        <p:txBody>
+          <a:bodyPr wrap="square" lIns="0" tIns="0" rIns="0" bIns="0" rtlCol="0" anchor="ctr"/>
+          <a:lstStyle/>
+          <a:p>
+            <a:pPr algn="r" indent="0" marL="0">
+              <a:buNone/>
+            </a:pPr>
+            <a:r>
+              <a:rPr lang="en-US" sz="1300" b="1" dirty="0">
+                <a:solidFill>
+                  <a:srgbClr val="3F3F3F"/>
+                </a:solidFill>
+                <a:latin typeface="Arial" pitchFamily="34" charset="0"/>
+                <a:ea typeface="Arial" pitchFamily="34" charset="-122"/>
+                <a:cs typeface="Arial" pitchFamily="34" charset="-120"/>
+              </a:rPr>
+              <a:t>54건</a:t>
+            </a:r>
+            <a:endParaRPr lang="en-US" sz="1300" dirty="0"/>
+          </a:p>
+        </p:txBody>
+      </p:sp>
+      <p:sp>
+        <p:nvSpPr>
+          <p:cNvPr id="22" name="Text 18"/>
+          <p:cNvSpPr/>
+          <p:nvPr/>
+        </p:nvSpPr>
+        <p:spPr>
+          <a:xfrm>
+            <a:off x="6309360" y="3630168"/>
+            <a:ext cx="5486400" cy="502920"/>
+          </a:xfrm>
+          <a:prstGeom prst="rect">
+            <a:avLst/>
+          </a:prstGeom>
+          <a:noFill/>
+          <a:ln/>
+        </p:spPr>
+        <p:txBody>
+          <a:bodyPr wrap="square" lIns="0" tIns="0" rIns="0" bIns="0" rtlCol="0" anchor="ctr"/>
+          <a:lstStyle/>
+          <a:p>
+            <a:pPr indent="0" marL="0">
+              <a:buNone/>
+            </a:pPr>
+            <a:r>
+              <a:rPr lang="en-US" sz="1000" i="1" dirty="0">
+                <a:solidFill>
+                  <a:srgbClr val="9E9E9E"/>
+                </a:solidFill>
+                <a:latin typeface="Malgun Gothic" pitchFamily="34" charset="0"/>
+                <a:ea typeface="Malgun Gothic" pitchFamily="34" charset="-122"/>
+                <a:cs typeface="Malgun Gothic" pitchFamily="34" charset="-120"/>
+              </a:rPr>
+              <a:t>TOP3 장비가 전체 고장수리(15,149건)의 1.3%를 차지 — 즉각 정밀진단 및 부품 교체 우선 검토</a:t>
+            </a:r>
+            <a:endParaRPr lang="en-US" sz="1000" dirty="0"/>
+          </a:p>
+        </p:txBody>
+      </p:sp>
+      <p:sp>
+        <p:nvSpPr>
+          <p:cNvPr id="23" name="Text 19"/>
+          <p:cNvSpPr/>
+          <p:nvPr/>
+        </p:nvSpPr>
+        <p:spPr>
+          <a:xfrm>
+            <a:off x="6309360" y="4215384"/>
+            <a:ext cx="5486400" cy="320040"/>
+          </a:xfrm>
+          <a:prstGeom prst="rect">
+            <a:avLst/>
+          </a:prstGeom>
+          <a:noFill/>
+          <a:ln/>
+        </p:spPr>
+        <p:txBody>
+          <a:bodyPr wrap="square" lIns="0" tIns="0" rIns="0" bIns="0" rtlCol="0" anchor="ctr"/>
+          <a:lstStyle/>
+          <a:p>
+            <a:pPr indent="0" marL="0">
+              <a:buNone/>
+            </a:pPr>
+            <a:r>
+              <a:rPr lang="en-US" sz="1300" b="1" dirty="0">
+                <a:solidFill>
+                  <a:srgbClr val="005BAC"/>
+                </a:solidFill>
+                <a:latin typeface="Malgun Gothic" pitchFamily="34" charset="0"/>
+                <a:ea typeface="Malgun Gothic" pitchFamily="34" charset="-122"/>
+                <a:cs typeface="Malgun Gothic" pitchFamily="34" charset="-120"/>
+              </a:rPr>
+              <a:t>주요 장애 요인 (Top Errors, '기타' 제외)</a:t>
+            </a:r>
+            <a:endParaRPr lang="en-US" sz="1300" dirty="0"/>
+          </a:p>
+        </p:txBody>
+      </p:sp>
+      <p:sp>
+        <p:nvSpPr>
+          <p:cNvPr id="24" name="Text 20"/>
+          <p:cNvSpPr/>
+          <p:nvPr/>
+        </p:nvSpPr>
+        <p:spPr>
+          <a:xfrm>
+            <a:off x="6309360" y="4581144"/>
+            <a:ext cx="3108960" cy="274320"/>
+          </a:xfrm>
+          <a:prstGeom prst="rect">
+            <a:avLst/>
+          </a:prstGeom>
+          <a:noFill/>
+          <a:ln/>
+        </p:spPr>
+        <p:txBody>
+          <a:bodyPr wrap="square" lIns="0" tIns="0" rIns="0" bIns="0" rtlCol="0" anchor="ctr"/>
+          <a:lstStyle/>
+          <a:p>
+            <a:pPr indent="0" marL="0">
+              <a:buNone/>
+            </a:pPr>
+            <a:r>
+              <a:rPr lang="en-US" sz="1000" dirty="0">
+                <a:solidFill>
+                  <a:srgbClr val="3F3F3F"/>
+                </a:solidFill>
+                <a:latin typeface="Malgun Gothic" pitchFamily="34" charset="0"/>
+                <a:ea typeface="Malgun Gothic" pitchFamily="34" charset="-122"/>
+                <a:cs typeface="Malgun Gothic" pitchFamily="34" charset="-120"/>
+              </a:rPr>
+              <a:t>Data 불량 (QC)</a:t>
+            </a:r>
+            <a:endParaRPr lang="en-US" sz="1000" dirty="0"/>
+          </a:p>
+        </p:txBody>
+      </p:sp>
+      <p:sp>
+        <p:nvSpPr>
+          <p:cNvPr id="25" name="Shape 21"/>
+          <p:cNvSpPr/>
+          <p:nvPr/>
+        </p:nvSpPr>
+        <p:spPr>
+          <a:xfrm>
+            <a:off x="9464040" y="4599432"/>
+            <a:ext cx="1463040" cy="182880"/>
+          </a:xfrm>
+          <a:prstGeom prst="rect">
+            <a:avLst/>
+          </a:prstGeom>
+          <a:solidFill>
+            <a:srgbClr val="E69E0B"/>
+          </a:solidFill>
+          <a:ln/>
+        </p:spPr>
+      </p:sp>
+      <p:sp>
+        <p:nvSpPr>
+          <p:cNvPr id="26" name="Text 22"/>
+          <p:cNvSpPr/>
+          <p:nvPr/>
+        </p:nvSpPr>
+        <p:spPr>
+          <a:xfrm>
+            <a:off x="11000232" y="4562856"/>
+            <a:ext cx="548640" cy="274320"/>
+          </a:xfrm>
+          <a:prstGeom prst="rect">
+            <a:avLst/>
+          </a:prstGeom>
+          <a:noFill/>
+          <a:ln/>
+        </p:spPr>
+        <p:txBody>
+          <a:bodyPr wrap="square" lIns="0" tIns="0" rIns="0" bIns="0" rtlCol="0" anchor="ctr"/>
+          <a:lstStyle/>
+          <a:p>
+            <a:pPr indent="0" marL="0">
+              <a:buNone/>
+            </a:pPr>
+            <a:r>
+              <a:rPr lang="en-US" sz="1000" b="1" dirty="0">
+                <a:solidFill>
+                  <a:srgbClr val="3F3F3F"/>
+                </a:solidFill>
+                <a:latin typeface="Arial" pitchFamily="34" charset="0"/>
+                <a:ea typeface="Arial" pitchFamily="34" charset="-122"/>
+                <a:cs typeface="Arial" pitchFamily="34" charset="-120"/>
+              </a:rPr>
+              <a:t>514</a:t>
+            </a:r>
+            <a:endParaRPr lang="en-US" sz="1000" dirty="0"/>
+          </a:p>
+        </p:txBody>
+      </p:sp>
+      <p:sp>
+        <p:nvSpPr>
+          <p:cNvPr id="27" name="Text 23"/>
+          <p:cNvSpPr/>
+          <p:nvPr/>
+        </p:nvSpPr>
+        <p:spPr>
+          <a:xfrm>
+            <a:off x="6309360" y="4965192"/>
+            <a:ext cx="3108960" cy="274320"/>
+          </a:xfrm>
+          <a:prstGeom prst="rect">
+            <a:avLst/>
+          </a:prstGeom>
+          <a:noFill/>
+          <a:ln/>
+        </p:spPr>
+        <p:txBody>
+          <a:bodyPr wrap="square" lIns="0" tIns="0" rIns="0" bIns="0" rtlCol="0" anchor="ctr"/>
+          <a:lstStyle/>
+          <a:p>
+            <a:pPr indent="0" marL="0">
+              <a:buNone/>
+            </a:pPr>
+            <a:r>
+              <a:rPr lang="en-US" sz="1000" dirty="0">
+                <a:solidFill>
+                  <a:srgbClr val="3F3F3F"/>
+                </a:solidFill>
+                <a:latin typeface="Malgun Gothic" pitchFamily="34" charset="0"/>
+                <a:ea typeface="Malgun Gothic" pitchFamily="34" charset="-122"/>
+                <a:cs typeface="Malgun Gothic" pitchFamily="34" charset="-120"/>
+              </a:rPr>
+              <a:t>RBC/HGB chamber not draining</a:t>
+            </a:r>
+            <a:endParaRPr lang="en-US" sz="1000" dirty="0"/>
+          </a:p>
+        </p:txBody>
+      </p:sp>
+      <p:sp>
+        <p:nvSpPr>
+          <p:cNvPr id="28" name="Shape 24"/>
+          <p:cNvSpPr/>
+          <p:nvPr/>
+        </p:nvSpPr>
+        <p:spPr>
+          <a:xfrm>
+            <a:off x="9464040" y="4983480"/>
+            <a:ext cx="472499" cy="182880"/>
+          </a:xfrm>
+          <a:prstGeom prst="rect">
+            <a:avLst/>
+          </a:prstGeom>
+          <a:solidFill>
+            <a:srgbClr val="E69E0B"/>
+          </a:solidFill>
+          <a:ln/>
+        </p:spPr>
+      </p:sp>
+      <p:sp>
+        <p:nvSpPr>
+          <p:cNvPr id="29" name="Text 25"/>
+          <p:cNvSpPr/>
+          <p:nvPr/>
+        </p:nvSpPr>
+        <p:spPr>
+          <a:xfrm>
+            <a:off x="10009691" y="4946904"/>
+            <a:ext cx="548640" cy="274320"/>
+          </a:xfrm>
+          <a:prstGeom prst="rect">
+            <a:avLst/>
+          </a:prstGeom>
+          <a:noFill/>
+          <a:ln/>
+        </p:spPr>
+        <p:txBody>
+          <a:bodyPr wrap="square" lIns="0" tIns="0" rIns="0" bIns="0" rtlCol="0" anchor="ctr"/>
+          <a:lstStyle/>
+          <a:p>
+            <a:pPr indent="0" marL="0">
+              <a:buNone/>
+            </a:pPr>
+            <a:r>
+              <a:rPr lang="en-US" sz="1000" b="1" dirty="0">
+                <a:solidFill>
+                  <a:srgbClr val="3F3F3F"/>
+                </a:solidFill>
+                <a:latin typeface="Arial" pitchFamily="34" charset="0"/>
+                <a:ea typeface="Arial" pitchFamily="34" charset="-122"/>
+                <a:cs typeface="Arial" pitchFamily="34" charset="-120"/>
+              </a:rPr>
+              <a:t>166</a:t>
+            </a:r>
+            <a:endParaRPr lang="en-US" sz="1000" dirty="0"/>
+          </a:p>
+        </p:txBody>
+      </p:sp>
+      <p:sp>
+        <p:nvSpPr>
+          <p:cNvPr id="30" name="Text 26"/>
+          <p:cNvSpPr/>
+          <p:nvPr/>
+        </p:nvSpPr>
+        <p:spPr>
+          <a:xfrm>
+            <a:off x="6309360" y="5349240"/>
+            <a:ext cx="3108960" cy="274320"/>
+          </a:xfrm>
+          <a:prstGeom prst="rect">
+            <a:avLst/>
+          </a:prstGeom>
+          <a:noFill/>
+          <a:ln/>
+        </p:spPr>
+        <p:txBody>
+          <a:bodyPr wrap="square" lIns="0" tIns="0" rIns="0" bIns="0" rtlCol="0" anchor="ctr"/>
+          <a:lstStyle/>
+          <a:p>
+            <a:pPr indent="0" marL="0">
+              <a:buNone/>
+            </a:pPr>
+            <a:r>
+              <a:rPr lang="en-US" sz="1000" dirty="0">
+                <a:solidFill>
+                  <a:srgbClr val="3F3F3F"/>
+                </a:solidFill>
+                <a:latin typeface="Malgun Gothic" pitchFamily="34" charset="0"/>
+                <a:ea typeface="Malgun Gothic" pitchFamily="34" charset="-122"/>
+                <a:cs typeface="Malgun Gothic" pitchFamily="34" charset="-120"/>
+              </a:rPr>
+              <a:t>Chamber move error</a:t>
+            </a:r>
+            <a:endParaRPr lang="en-US" sz="1000" dirty="0"/>
+          </a:p>
+        </p:txBody>
+      </p:sp>
+      <p:sp>
+        <p:nvSpPr>
+          <p:cNvPr id="31" name="Shape 27"/>
+          <p:cNvSpPr/>
+          <p:nvPr/>
+        </p:nvSpPr>
+        <p:spPr>
+          <a:xfrm>
+            <a:off x="9464040" y="5367528"/>
+            <a:ext cx="452575" cy="182880"/>
+          </a:xfrm>
+          <a:prstGeom prst="rect">
+            <a:avLst/>
+          </a:prstGeom>
+          <a:solidFill>
+            <a:srgbClr val="E69E0B"/>
+          </a:solidFill>
+          <a:ln/>
+        </p:spPr>
+      </p:sp>
+      <p:sp>
+        <p:nvSpPr>
+          <p:cNvPr id="32" name="Text 28"/>
+          <p:cNvSpPr/>
+          <p:nvPr/>
+        </p:nvSpPr>
+        <p:spPr>
+          <a:xfrm>
+            <a:off x="9989767" y="5330952"/>
+            <a:ext cx="548640" cy="274320"/>
+          </a:xfrm>
+          <a:prstGeom prst="rect">
+            <a:avLst/>
+          </a:prstGeom>
+          <a:noFill/>
+          <a:ln/>
+        </p:spPr>
+        <p:txBody>
+          <a:bodyPr wrap="square" lIns="0" tIns="0" rIns="0" bIns="0" rtlCol="0" anchor="ctr"/>
+          <a:lstStyle/>
+          <a:p>
+            <a:pPr indent="0" marL="0">
+              <a:buNone/>
+            </a:pPr>
+            <a:r>
+              <a:rPr lang="en-US" sz="1000" b="1" dirty="0">
+                <a:solidFill>
+                  <a:srgbClr val="3F3F3F"/>
+                </a:solidFill>
+                <a:latin typeface="Arial" pitchFamily="34" charset="0"/>
+                <a:ea typeface="Arial" pitchFamily="34" charset="-122"/>
+                <a:cs typeface="Arial" pitchFamily="34" charset="-120"/>
+              </a:rPr>
+              <a:t>159</a:t>
+            </a:r>
+            <a:endParaRPr lang="en-US" sz="1000" dirty="0"/>
+          </a:p>
+        </p:txBody>
+      </p:sp>
+      <p:sp>
+        <p:nvSpPr>
+          <p:cNvPr id="33" name="Text 29"/>
+          <p:cNvSpPr/>
+          <p:nvPr/>
+        </p:nvSpPr>
+        <p:spPr>
+          <a:xfrm>
+            <a:off x="6309360" y="5733288"/>
+            <a:ext cx="3108960" cy="274320"/>
+          </a:xfrm>
+          <a:prstGeom prst="rect">
+            <a:avLst/>
+          </a:prstGeom>
+          <a:noFill/>
+          <a:ln/>
+        </p:spPr>
+        <p:txBody>
+          <a:bodyPr wrap="square" lIns="0" tIns="0" rIns="0" bIns="0" rtlCol="0" anchor="ctr"/>
+          <a:lstStyle/>
+          <a:p>
+            <a:pPr indent="0" marL="0">
+              <a:buNone/>
+            </a:pPr>
+            <a:r>
+              <a:rPr lang="en-US" sz="1000" dirty="0">
+                <a:solidFill>
+                  <a:srgbClr val="3F3F3F"/>
+                </a:solidFill>
+                <a:latin typeface="Malgun Gothic" pitchFamily="34" charset="0"/>
+                <a:ea typeface="Malgun Gothic" pitchFamily="34" charset="-122"/>
+                <a:cs typeface="Malgun Gothic" pitchFamily="34" charset="-120"/>
+              </a:rPr>
+              <a:t>Water leak detected</a:t>
+            </a:r>
+            <a:endParaRPr lang="en-US" sz="1000" dirty="0"/>
+          </a:p>
+        </p:txBody>
+      </p:sp>
+      <p:sp>
+        <p:nvSpPr>
+          <p:cNvPr id="34" name="Shape 30"/>
+          <p:cNvSpPr/>
+          <p:nvPr/>
+        </p:nvSpPr>
+        <p:spPr>
+          <a:xfrm>
+            <a:off x="9464040" y="5751576"/>
+            <a:ext cx="444035" cy="182880"/>
+          </a:xfrm>
+          <a:prstGeom prst="rect">
+            <a:avLst/>
+          </a:prstGeom>
+          <a:solidFill>
+            <a:srgbClr val="E69E0B"/>
+          </a:solidFill>
+          <a:ln/>
+        </p:spPr>
+      </p:sp>
+      <p:sp>
+        <p:nvSpPr>
+          <p:cNvPr id="35" name="Text 31"/>
+          <p:cNvSpPr/>
+          <p:nvPr/>
+        </p:nvSpPr>
+        <p:spPr>
+          <a:xfrm>
+            <a:off x="9981227" y="5715000"/>
+            <a:ext cx="548640" cy="274320"/>
+          </a:xfrm>
+          <a:prstGeom prst="rect">
+            <a:avLst/>
+          </a:prstGeom>
+          <a:noFill/>
+          <a:ln/>
+        </p:spPr>
+        <p:txBody>
+          <a:bodyPr wrap="square" lIns="0" tIns="0" rIns="0" bIns="0" rtlCol="0" anchor="ctr"/>
+          <a:lstStyle/>
+          <a:p>
+            <a:pPr indent="0" marL="0">
+              <a:buNone/>
+            </a:pPr>
+            <a:r>
+              <a:rPr lang="en-US" sz="1000" b="1" dirty="0">
+                <a:solidFill>
+                  <a:srgbClr val="3F3F3F"/>
+                </a:solidFill>
+                <a:latin typeface="Arial" pitchFamily="34" charset="0"/>
+                <a:ea typeface="Arial" pitchFamily="34" charset="-122"/>
+                <a:cs typeface="Arial" pitchFamily="34" charset="-120"/>
+              </a:rPr>
+              <a:t>156</a:t>
+            </a:r>
+            <a:endParaRPr lang="en-US" sz="1000" dirty="0"/>
+          </a:p>
+        </p:txBody>
+      </p:sp>
+      <p:sp>
+        <p:nvSpPr>
+          <p:cNvPr id="36" name="Text 32"/>
+          <p:cNvSpPr/>
+          <p:nvPr/>
+        </p:nvSpPr>
+        <p:spPr>
+          <a:xfrm>
+            <a:off x="457200" y="6547104"/>
+            <a:ext cx="9601200" cy="274320"/>
+          </a:xfrm>
+          <a:prstGeom prst="rect">
+            <a:avLst/>
+          </a:prstGeom>
+          <a:noFill/>
+          <a:ln/>
+        </p:spPr>
+        <p:txBody>
+          <a:bodyPr wrap="square" rtlCol="0" anchor="ctr"/>
+          <a:lstStyle/>
+          <a:p>
+            <a:pPr algn="l" indent="0" marL="0">
+              <a:buNone/>
+            </a:pPr>
+            <a:r>
+              <a:rPr lang="en-US" sz="900" dirty="0">
+                <a:solidFill>
+                  <a:srgbClr val="9E9E9E"/>
+                </a:solidFill>
+                <a:latin typeface="Malgun Gothic" pitchFamily="34" charset="0"/>
+                <a:ea typeface="Malgun Gothic" pitchFamily="34" charset="-122"/>
+                <a:cs typeface="Malgun Gothic" pitchFamily="34" charset="-120"/>
+              </a:rPr>
+              <a:t>FS Group │ FSS Team · 2026년 7월 · Confidential</a:t>
+            </a:r>
+            <a:endParaRPr lang="en-US" sz="900" dirty="0"/>
+          </a:p>
+        </p:txBody>
+      </p:sp>
+      <p:sp>
+        <p:nvSpPr>
+          <p:cNvPr id="37" name="Text 33"/>
+          <p:cNvSpPr/>
+          <p:nvPr/>
+        </p:nvSpPr>
+        <p:spPr>
+          <a:xfrm>
+            <a:off x="11247120" y="6547104"/>
+            <a:ext cx="731520" cy="274320"/>
+          </a:xfrm>
+          <a:prstGeom prst="rect">
+            <a:avLst/>
+          </a:prstGeom>
+          <a:noFill/>
+          <a:ln/>
+        </p:spPr>
+        <p:txBody>
+          <a:bodyPr wrap="square" rtlCol="0" anchor="ctr"/>
+          <a:lstStyle/>
+          <a:p>
+            <a:pPr algn="r" indent="0" marL="0">
+              <a:buNone/>
+            </a:pPr>
+            <a:r>
+              <a:rPr lang="en-US" sz="900" dirty="0">
+                <a:solidFill>
+                  <a:srgbClr val="9E9E9E"/>
+                </a:solidFill>
+                <a:latin typeface="Arial" pitchFamily="34" charset="0"/>
+                <a:ea typeface="Arial" pitchFamily="34" charset="-122"/>
+                <a:cs typeface="Arial" pitchFamily="34" charset="-120"/>
+              </a:rPr>
+              <a:t>6</a:t>
+            </a:r>
+            <a:endParaRPr lang="en-US" sz="900" dirty="0"/>
+          </a:p>
+        </p:txBody>
+      </p:sp>
+    </p:spTree>
+  </p:cSld>
+  <p:clrMapOvr>
+    <a:masterClrMapping/>
+  </p:clrMapOvr>
+</p:sld>
+</file>
+
+<file path=ppt/slides/slide7.xml><?xml version="1.0" encoding="utf-8"?>
+<p:sld xmlns:a="http://schemas.openxmlformats.org/drawingml/2006/main" xmlns:r="http://schemas.openxmlformats.org/officeDocument/2006/relationships" xmlns:p="http://schemas.openxmlformats.org/presentationml/2006/main">
+  <p:cSld name="Slide 7">
+    <p:bg>
+      <p:bgPr>
+        <a:solidFill>
+          <a:srgbClr val="FFFFFF"/>
+        </a:solidFill>
+      </p:bgPr>
+    </p:bg>
+    <p:spTree>
+      <p:nvGrpSpPr>
+        <p:cNvPr id="1" name=""/>
+        <p:cNvGrpSpPr/>
+        <p:nvPr/>
+      </p:nvGrpSpPr>
+      <p:grpSpPr>
+        <a:xfrm>
+          <a:off x="0" y="0"/>
+          <a:ext cx="0" cy="0"/>
+          <a:chOff x="0" y="0"/>
+          <a:chExt cx="0" cy="0"/>
+        </a:xfrm>
+      </p:grpSpPr>
+      <p:sp>
+        <p:nvSpPr>
+          <p:cNvPr id="2" name="Shape 0"/>
+          <p:cNvSpPr/>
+          <p:nvPr/>
+        </p:nvSpPr>
+        <p:spPr>
+          <a:xfrm>
+            <a:off x="0" y="0"/>
+            <a:ext cx="10378440" cy="914400"/>
+          </a:xfrm>
+          <a:prstGeom prst="rect">
+            <a:avLst/>
+          </a:prstGeom>
+          <a:solidFill>
+            <a:srgbClr val="005BAC"/>
+          </a:solidFill>
+          <a:ln/>
+        </p:spPr>
+      </p:sp>
+      <p:sp>
+        <p:nvSpPr>
+          <p:cNvPr id="3" name="Text 1"/>
+          <p:cNvSpPr/>
+          <p:nvPr/>
+        </p:nvSpPr>
+        <p:spPr>
+          <a:xfrm>
+            <a:off x="502920" y="164592"/>
+            <a:ext cx="822960" cy="585216"/>
+          </a:xfrm>
+          <a:prstGeom prst="rect">
+            <a:avLst/>
+          </a:prstGeom>
+          <a:noFill/>
+          <a:ln/>
+        </p:spPr>
+        <p:txBody>
+          <a:bodyPr wrap="square" lIns="0" tIns="0" rIns="0" bIns="0" rtlCol="0" anchor="ctr"/>
+          <a:lstStyle/>
+          <a:p>
+            <a:pPr algn="l" indent="0" marL="0">
+              <a:buNone/>
+            </a:pPr>
+            <a:r>
+              <a:rPr lang="en-US" sz="3000" b="1" dirty="0">
+                <a:solidFill>
+                  <a:srgbClr val="00B8EE"/>
+                </a:solidFill>
+                <a:latin typeface="Arial" pitchFamily="34" charset="0"/>
+                <a:ea typeface="Arial" pitchFamily="34" charset="-122"/>
+                <a:cs typeface="Arial" pitchFamily="34" charset="-120"/>
+              </a:rPr>
+              <a:t>07</a:t>
+            </a:r>
+            <a:endParaRPr lang="en-US" sz="3000" dirty="0"/>
+          </a:p>
+        </p:txBody>
+      </p:sp>
+      <p:sp>
+        <p:nvSpPr>
+          <p:cNvPr id="4" name="Text 2"/>
+          <p:cNvSpPr/>
+          <p:nvPr/>
+        </p:nvSpPr>
+        <p:spPr>
+          <a:xfrm>
+            <a:off x="1234440" y="164592"/>
+            <a:ext cx="8595360" cy="585216"/>
+          </a:xfrm>
+          <a:prstGeom prst="rect">
+            <a:avLst/>
+          </a:prstGeom>
+          <a:noFill/>
+          <a:ln/>
+        </p:spPr>
+        <p:txBody>
+          <a:bodyPr wrap="square" lIns="0" tIns="0" rIns="0" bIns="0" rtlCol="0" anchor="ctr"/>
+          <a:lstStyle/>
+          <a:p>
+            <a:pPr algn="l" indent="0" marL="0">
+              <a:buNone/>
+            </a:pPr>
+            <a:r>
+              <a:rPr lang="en-US" sz="2600" b="1" dirty="0">
+                <a:solidFill>
+                  <a:srgbClr val="FFFFFF"/>
+                </a:solidFill>
+                <a:latin typeface="Malgun Gothic" pitchFamily="34" charset="0"/>
+                <a:ea typeface="Malgun Gothic" pitchFamily="34" charset="-122"/>
+                <a:cs typeface="Malgun Gothic" pitchFamily="34" charset="-120"/>
+              </a:rPr>
+              <a:t>VOC 수집 정보 및 처리현황</a:t>
+            </a:r>
+            <a:endParaRPr lang="en-US" sz="2600" dirty="0"/>
+          </a:p>
+        </p:txBody>
+      </p:sp>
+      <p:pic>
+        <p:nvPicPr>
+          <p:cNvPr id="5" name="Image 0" descr="sysmex_logo_mono_blue.png">    </p:cNvPr>
+          <p:cNvPicPr>
+            <a:picLocks noChangeAspect="1"/>
+          </p:cNvPicPr>
+          <p:nvPr/>
+        </p:nvPicPr>
+        <p:blipFill>
+          <a:blip r:embed="rId1"/>
+          <a:stretch>
+            <a:fillRect/>
+          </a:stretch>
+        </p:blipFill>
+        <p:spPr>
+          <a:xfrm>
+            <a:off x="10652760" y="292608"/>
+            <a:ext cx="1097280" cy="420624"/>
+          </a:xfrm>
+          <a:prstGeom prst="rect">
+            <a:avLst/>
+          </a:prstGeom>
+        </p:spPr>
+      </p:pic>
+      <p:sp>
+        <p:nvSpPr>
+          <p:cNvPr id="6" name="Text 3"/>
+          <p:cNvSpPr/>
+          <p:nvPr/>
+        </p:nvSpPr>
+        <p:spPr>
+          <a:xfrm>
             <a:off x="530352" y="1188720"/>
             <a:ext cx="5486400" cy="320040"/>
           </a:xfrm>
@@ -9966,7 +15258,7 @@
       </p:sp>
       <p:graphicFrame>
         <p:nvGraphicFramePr>
-          <p:cNvPr id="6" name="Table 0"/>
+          <p:cNvPr id="8" name="Table 0"/>
           <p:cNvGraphicFramePr>
             <a:graphicFrameLocks noGrp="1"/>
           </p:cNvGraphicFramePr>
@@ -10897,924 +16189,6 @@
                 <a:ea typeface="Arial" pitchFamily="34" charset="-122"/>
                 <a:cs typeface="Arial" pitchFamily="34" charset="-120"/>
               </a:rPr>
-              <a:t>5</a:t>
-            </a:r>
-            <a:endParaRPr lang="en-US" sz="900" dirty="0"/>
-          </a:p>
-        </p:txBody>
-      </p:sp>
-    </p:spTree>
-  </p:cSld>
-  <p:clrMapOvr>
-    <a:masterClrMapping/>
-  </p:clrMapOvr>
-</p:sld>
-</file>
-
-<file path=ppt/slides/slide6.xml><?xml version="1.0" encoding="utf-8"?>
-<p:sld xmlns:a="http://schemas.openxmlformats.org/drawingml/2006/main" xmlns:r="http://schemas.openxmlformats.org/officeDocument/2006/relationships" xmlns:p="http://schemas.openxmlformats.org/presentationml/2006/main">
-  <p:cSld name="Slide 6">
-    <p:bg>
-      <p:bgPr>
-        <a:solidFill>
-          <a:srgbClr val="FFFFFF"/>
-        </a:solidFill>
-      </p:bgPr>
-    </p:bg>
-    <p:spTree>
-      <p:nvGrpSpPr>
-        <p:cNvPr id="1" name=""/>
-        <p:cNvGrpSpPr/>
-        <p:nvPr/>
-      </p:nvGrpSpPr>
-      <p:grpSpPr>
-        <a:xfrm>
-          <a:off x="0" y="0"/>
-          <a:ext cx="0" cy="0"/>
-          <a:chOff x="0" y="0"/>
-          <a:chExt cx="0" cy="0"/>
-        </a:xfrm>
-      </p:grpSpPr>
-      <p:sp>
-        <p:nvSpPr>
-          <p:cNvPr id="2" name="Shape 0"/>
-          <p:cNvSpPr/>
-          <p:nvPr/>
-        </p:nvSpPr>
-        <p:spPr>
-          <a:xfrm>
-            <a:off x="0" y="0"/>
-            <a:ext cx="10378440" cy="914400"/>
-          </a:xfrm>
-          <a:prstGeom prst="rect">
-            <a:avLst/>
-          </a:prstGeom>
-          <a:solidFill>
-            <a:srgbClr val="005BAC"/>
-          </a:solidFill>
-          <a:ln/>
-        </p:spPr>
-      </p:sp>
-      <p:sp>
-        <p:nvSpPr>
-          <p:cNvPr id="3" name="Text 1"/>
-          <p:cNvSpPr/>
-          <p:nvPr/>
-        </p:nvSpPr>
-        <p:spPr>
-          <a:xfrm>
-            <a:off x="502920" y="164592"/>
-            <a:ext cx="822960" cy="585216"/>
-          </a:xfrm>
-          <a:prstGeom prst="rect">
-            <a:avLst/>
-          </a:prstGeom>
-          <a:noFill/>
-          <a:ln/>
-        </p:spPr>
-        <p:txBody>
-          <a:bodyPr wrap="square" lIns="0" tIns="0" rIns="0" bIns="0" rtlCol="0" anchor="ctr"/>
-          <a:lstStyle/>
-          <a:p>
-            <a:pPr algn="l" indent="0" marL="0">
-              <a:buNone/>
-            </a:pPr>
-            <a:r>
-              <a:rPr lang="en-US" sz="3000" b="1" dirty="0">
-                <a:solidFill>
-                  <a:srgbClr val="00B8EE"/>
-                </a:solidFill>
-                <a:latin typeface="Arial" pitchFamily="34" charset="0"/>
-                <a:ea typeface="Arial" pitchFamily="34" charset="-122"/>
-                <a:cs typeface="Arial" pitchFamily="34" charset="-120"/>
-              </a:rPr>
-              <a:t>06</a:t>
-            </a:r>
-            <a:endParaRPr lang="en-US" sz="3000" dirty="0"/>
-          </a:p>
-        </p:txBody>
-      </p:sp>
-      <p:sp>
-        <p:nvSpPr>
-          <p:cNvPr id="4" name="Text 2"/>
-          <p:cNvSpPr/>
-          <p:nvPr/>
-        </p:nvSpPr>
-        <p:spPr>
-          <a:xfrm>
-            <a:off x="1234440" y="164592"/>
-            <a:ext cx="8595360" cy="585216"/>
-          </a:xfrm>
-          <a:prstGeom prst="rect">
-            <a:avLst/>
-          </a:prstGeom>
-          <a:noFill/>
-          <a:ln/>
-        </p:spPr>
-        <p:txBody>
-          <a:bodyPr wrap="square" lIns="0" tIns="0" rIns="0" bIns="0" rtlCol="0" anchor="ctr"/>
-          <a:lstStyle/>
-          <a:p>
-            <a:pPr algn="l" indent="0" marL="0">
-              <a:buNone/>
-            </a:pPr>
-            <a:r>
-              <a:rPr lang="en-US" sz="2600" b="1" dirty="0">
-                <a:solidFill>
-                  <a:srgbClr val="FFFFFF"/>
-                </a:solidFill>
-                <a:latin typeface="Malgun Gothic" pitchFamily="34" charset="0"/>
-                <a:ea typeface="Malgun Gothic" pitchFamily="34" charset="-122"/>
-                <a:cs typeface="Malgun Gothic" pitchFamily="34" charset="-120"/>
-              </a:rPr>
-              <a:t>중대 이슈 처리</a:t>
-            </a:r>
-            <a:endParaRPr lang="en-US" sz="2600" dirty="0"/>
-          </a:p>
-        </p:txBody>
-      </p:sp>
-      <p:pic>
-        <p:nvPicPr>
-          <p:cNvPr id="5" name="Image 0" descr="sysmex_logo_mono_blue.png">    </p:cNvPr>
-          <p:cNvPicPr>
-            <a:picLocks noChangeAspect="1"/>
-          </p:cNvPicPr>
-          <p:nvPr/>
-        </p:nvPicPr>
-        <p:blipFill>
-          <a:blip r:embed="rId1"/>
-          <a:stretch>
-            <a:fillRect/>
-          </a:stretch>
-        </p:blipFill>
-        <p:spPr>
-          <a:xfrm>
-            <a:off x="10652760" y="292608"/>
-            <a:ext cx="1097280" cy="420624"/>
-          </a:xfrm>
-          <a:prstGeom prst="rect">
-            <a:avLst/>
-          </a:prstGeom>
-        </p:spPr>
-      </p:pic>
-      <p:sp>
-        <p:nvSpPr>
-          <p:cNvPr id="6" name="Shape 3"/>
-          <p:cNvSpPr/>
-          <p:nvPr/>
-        </p:nvSpPr>
-        <p:spPr>
-          <a:xfrm>
-            <a:off x="530352" y="1143000"/>
-            <a:ext cx="11100816" cy="777240"/>
-          </a:xfrm>
-          <a:prstGeom prst="roundRect">
-            <a:avLst>
-              <a:gd name="adj" fmla="val 7059"/>
-            </a:avLst>
-          </a:prstGeom>
-          <a:solidFill>
-            <a:srgbClr val="E6EEF7"/>
-          </a:solidFill>
-          <a:ln/>
-        </p:spPr>
-      </p:sp>
-      <p:sp>
-        <p:nvSpPr>
-          <p:cNvPr id="7" name="Text 4"/>
-          <p:cNvSpPr/>
-          <p:nvPr/>
-        </p:nvSpPr>
-        <p:spPr>
-          <a:xfrm>
-            <a:off x="713232" y="1225296"/>
-            <a:ext cx="2926080" cy="320040"/>
-          </a:xfrm>
-          <a:prstGeom prst="rect">
-            <a:avLst/>
-          </a:prstGeom>
-          <a:noFill/>
-          <a:ln/>
-        </p:spPr>
-        <p:txBody>
-          <a:bodyPr wrap="square" lIns="0" tIns="0" rIns="0" bIns="0" rtlCol="0" anchor="ctr"/>
-          <a:lstStyle/>
-          <a:p>
-            <a:pPr indent="0" marL="0">
-              <a:buNone/>
-            </a:pPr>
-            <a:r>
-              <a:rPr lang="en-US" sz="1200" b="1" dirty="0">
-                <a:solidFill>
-                  <a:srgbClr val="005BAC"/>
-                </a:solidFill>
-                <a:latin typeface="Malgun Gothic" pitchFamily="34" charset="0"/>
-                <a:ea typeface="Malgun Gothic" pitchFamily="34" charset="-122"/>
-                <a:cs typeface="Malgun Gothic" pitchFamily="34" charset="-120"/>
-              </a:rPr>
-              <a:t>VOC 레드 플래그 시스템</a:t>
-            </a:r>
-            <a:endParaRPr lang="en-US" sz="1200" dirty="0"/>
-          </a:p>
-        </p:txBody>
-      </p:sp>
-      <p:sp>
-        <p:nvSpPr>
-          <p:cNvPr id="8" name="Text 5"/>
-          <p:cNvSpPr/>
-          <p:nvPr/>
-        </p:nvSpPr>
-        <p:spPr>
-          <a:xfrm>
-            <a:off x="713232" y="1536192"/>
-            <a:ext cx="10789920" cy="320040"/>
-          </a:xfrm>
-          <a:prstGeom prst="rect">
-            <a:avLst/>
-          </a:prstGeom>
-          <a:noFill/>
-          <a:ln/>
-        </p:spPr>
-        <p:txBody>
-          <a:bodyPr wrap="square" lIns="0" tIns="0" rIns="0" bIns="0" rtlCol="0" anchor="ctr"/>
-          <a:lstStyle/>
-          <a:p>
-            <a:pPr indent="0" marL="0">
-              <a:buNone/>
-            </a:pPr>
-            <a:r>
-              <a:rPr lang="en-US" sz="1100" dirty="0">
-                <a:solidFill>
-                  <a:srgbClr val="3F3F3F"/>
-                </a:solidFill>
-                <a:latin typeface="Malgun Gothic" pitchFamily="34" charset="0"/>
-                <a:ea typeface="Malgun Gothic" pitchFamily="34" charset="-122"/>
-                <a:cs typeface="Malgun Gothic" pitchFamily="34" charset="-120"/>
-              </a:rPr>
-              <a:t>평가 2점 이하 또는 서술형 "심각" 분류 건을 즉시 감지 → 분야별 전문가 TFT 구성 → SLA(1차 컨택 24~48시간) 내 처리하여 신뢰 회복</a:t>
-            </a:r>
-            <a:endParaRPr lang="en-US" sz="1100" dirty="0"/>
-          </a:p>
-        </p:txBody>
-      </p:sp>
-      <p:sp>
-        <p:nvSpPr>
-          <p:cNvPr id="9" name="Text 6"/>
-          <p:cNvSpPr/>
-          <p:nvPr/>
-        </p:nvSpPr>
-        <p:spPr>
-          <a:xfrm>
-            <a:off x="530352" y="2103120"/>
-            <a:ext cx="7315200" cy="320040"/>
-          </a:xfrm>
-          <a:prstGeom prst="rect">
-            <a:avLst/>
-          </a:prstGeom>
-          <a:noFill/>
-          <a:ln/>
-        </p:spPr>
-        <p:txBody>
-          <a:bodyPr wrap="square" lIns="0" tIns="0" rIns="0" bIns="0" rtlCol="0" anchor="ctr"/>
-          <a:lstStyle/>
-          <a:p>
-            <a:pPr indent="0" marL="0">
-              <a:buNone/>
-            </a:pPr>
-            <a:r>
-              <a:rPr lang="en-US" sz="1400" b="1" dirty="0">
-                <a:solidFill>
-                  <a:srgbClr val="005BAC"/>
-                </a:solidFill>
-                <a:latin typeface="Malgun Gothic" pitchFamily="34" charset="0"/>
-                <a:ea typeface="Malgun Gothic" pitchFamily="34" charset="-122"/>
-                <a:cs typeface="Malgun Gothic" pitchFamily="34" charset="-120"/>
-              </a:rPr>
-              <a:t>접수 · 조치 · 종결 현황</a:t>
-            </a:r>
-            <a:endParaRPr lang="en-US" sz="1400" dirty="0"/>
-          </a:p>
-        </p:txBody>
-      </p:sp>
-      <p:sp>
-        <p:nvSpPr>
-          <p:cNvPr id="10" name="Shape 7"/>
-          <p:cNvSpPr/>
-          <p:nvPr/>
-        </p:nvSpPr>
-        <p:spPr>
-          <a:xfrm>
-            <a:off x="530352" y="2468880"/>
-            <a:ext cx="11100816" cy="3200400"/>
-          </a:xfrm>
-          <a:prstGeom prst="roundRect">
-            <a:avLst>
-              <a:gd name="adj" fmla="val 2286"/>
-            </a:avLst>
-          </a:prstGeom>
-          <a:solidFill>
-            <a:srgbClr val="E6EEF7"/>
-          </a:solidFill>
-          <a:ln w="9525">
-            <a:solidFill>
-              <a:srgbClr val="005BAC"/>
-            </a:solidFill>
-            <a:prstDash val="dash"/>
-          </a:ln>
-        </p:spPr>
-      </p:sp>
-      <p:sp>
-        <p:nvSpPr>
-          <p:cNvPr id="11" name="Text 8"/>
-          <p:cNvSpPr/>
-          <p:nvPr/>
-        </p:nvSpPr>
-        <p:spPr>
-          <a:xfrm>
-            <a:off x="530352" y="2468880"/>
-            <a:ext cx="11100816" cy="3200400"/>
-          </a:xfrm>
-          <a:prstGeom prst="rect">
-            <a:avLst/>
-          </a:prstGeom>
-          <a:noFill/>
-          <a:ln/>
-        </p:spPr>
-        <p:txBody>
-          <a:bodyPr wrap="square" lIns="0" tIns="0" rIns="0" bIns="0" rtlCol="0" anchor="ctr"/>
-          <a:lstStyle/>
-          <a:p>
-            <a:pPr algn="ctr" indent="0" marL="0">
-              <a:buNone/>
-            </a:pPr>
-            <a:r>
-              <a:rPr lang="en-US" sz="1600" i="1" dirty="0">
-                <a:solidFill>
-                  <a:srgbClr val="005BAC"/>
-                </a:solidFill>
-                <a:latin typeface="Malgun Gothic" pitchFamily="34" charset="0"/>
-                <a:ea typeface="Malgun Gothic" pitchFamily="34" charset="-122"/>
-                <a:cs typeface="Malgun Gothic" pitchFamily="34" charset="-120"/>
-              </a:rPr>
-              <a:t>자료 미제공 – 추후 업데이트</a:t>
-            </a:r>
-            <a:endParaRPr lang="en-US" sz="1600" dirty="0"/>
-          </a:p>
-        </p:txBody>
-      </p:sp>
-      <p:sp>
-        <p:nvSpPr>
-          <p:cNvPr id="12" name="Text 9"/>
-          <p:cNvSpPr/>
-          <p:nvPr/>
-        </p:nvSpPr>
-        <p:spPr>
-          <a:xfrm>
-            <a:off x="457200" y="6547104"/>
-            <a:ext cx="9601200" cy="274320"/>
-          </a:xfrm>
-          <a:prstGeom prst="rect">
-            <a:avLst/>
-          </a:prstGeom>
-          <a:noFill/>
-          <a:ln/>
-        </p:spPr>
-        <p:txBody>
-          <a:bodyPr wrap="square" rtlCol="0" anchor="ctr"/>
-          <a:lstStyle/>
-          <a:p>
-            <a:pPr algn="l" indent="0" marL="0">
-              <a:buNone/>
-            </a:pPr>
-            <a:r>
-              <a:rPr lang="en-US" sz="900" dirty="0">
-                <a:solidFill>
-                  <a:srgbClr val="9E9E9E"/>
-                </a:solidFill>
-                <a:latin typeface="Malgun Gothic" pitchFamily="34" charset="0"/>
-                <a:ea typeface="Malgun Gothic" pitchFamily="34" charset="-122"/>
-                <a:cs typeface="Malgun Gothic" pitchFamily="34" charset="-120"/>
-              </a:rPr>
-              <a:t>FS Group │ FSS Team · 2026년 7월 · Confidential</a:t>
-            </a:r>
-            <a:endParaRPr lang="en-US" sz="900" dirty="0"/>
-          </a:p>
-        </p:txBody>
-      </p:sp>
-      <p:sp>
-        <p:nvSpPr>
-          <p:cNvPr id="13" name="Text 10"/>
-          <p:cNvSpPr/>
-          <p:nvPr/>
-        </p:nvSpPr>
-        <p:spPr>
-          <a:xfrm>
-            <a:off x="11247120" y="6547104"/>
-            <a:ext cx="731520" cy="274320"/>
-          </a:xfrm>
-          <a:prstGeom prst="rect">
-            <a:avLst/>
-          </a:prstGeom>
-          <a:noFill/>
-          <a:ln/>
-        </p:spPr>
-        <p:txBody>
-          <a:bodyPr wrap="square" rtlCol="0" anchor="ctr"/>
-          <a:lstStyle/>
-          <a:p>
-            <a:pPr algn="r" indent="0" marL="0">
-              <a:buNone/>
-            </a:pPr>
-            <a:r>
-              <a:rPr lang="en-US" sz="900" dirty="0">
-                <a:solidFill>
-                  <a:srgbClr val="9E9E9E"/>
-                </a:solidFill>
-                <a:latin typeface="Arial" pitchFamily="34" charset="0"/>
-                <a:ea typeface="Arial" pitchFamily="34" charset="-122"/>
-                <a:cs typeface="Arial" pitchFamily="34" charset="-120"/>
-              </a:rPr>
-              <a:t>6</a:t>
-            </a:r>
-            <a:endParaRPr lang="en-US" sz="900" dirty="0"/>
-          </a:p>
-        </p:txBody>
-      </p:sp>
-    </p:spTree>
-  </p:cSld>
-  <p:clrMapOvr>
-    <a:masterClrMapping/>
-  </p:clrMapOvr>
-</p:sld>
-</file>
-
-<file path=ppt/slides/slide7.xml><?xml version="1.0" encoding="utf-8"?>
-<p:sld xmlns:a="http://schemas.openxmlformats.org/drawingml/2006/main" xmlns:r="http://schemas.openxmlformats.org/officeDocument/2006/relationships" xmlns:p="http://schemas.openxmlformats.org/presentationml/2006/main">
-  <p:cSld name="Slide 7">
-    <p:bg>
-      <p:bgPr>
-        <a:solidFill>
-          <a:srgbClr val="FFFFFF"/>
-        </a:solidFill>
-      </p:bgPr>
-    </p:bg>
-    <p:spTree>
-      <p:nvGrpSpPr>
-        <p:cNvPr id="1" name=""/>
-        <p:cNvGrpSpPr/>
-        <p:nvPr/>
-      </p:nvGrpSpPr>
-      <p:grpSpPr>
-        <a:xfrm>
-          <a:off x="0" y="0"/>
-          <a:ext cx="0" cy="0"/>
-          <a:chOff x="0" y="0"/>
-          <a:chExt cx="0" cy="0"/>
-        </a:xfrm>
-      </p:grpSpPr>
-      <p:sp>
-        <p:nvSpPr>
-          <p:cNvPr id="2" name="Shape 0"/>
-          <p:cNvSpPr/>
-          <p:nvPr/>
-        </p:nvSpPr>
-        <p:spPr>
-          <a:xfrm>
-            <a:off x="0" y="0"/>
-            <a:ext cx="10378440" cy="914400"/>
-          </a:xfrm>
-          <a:prstGeom prst="rect">
-            <a:avLst/>
-          </a:prstGeom>
-          <a:solidFill>
-            <a:srgbClr val="005BAC"/>
-          </a:solidFill>
-          <a:ln/>
-        </p:spPr>
-      </p:sp>
-      <p:sp>
-        <p:nvSpPr>
-          <p:cNvPr id="3" name="Text 1"/>
-          <p:cNvSpPr/>
-          <p:nvPr/>
-        </p:nvSpPr>
-        <p:spPr>
-          <a:xfrm>
-            <a:off x="502920" y="164592"/>
-            <a:ext cx="822960" cy="585216"/>
-          </a:xfrm>
-          <a:prstGeom prst="rect">
-            <a:avLst/>
-          </a:prstGeom>
-          <a:noFill/>
-          <a:ln/>
-        </p:spPr>
-        <p:txBody>
-          <a:bodyPr wrap="square" lIns="0" tIns="0" rIns="0" bIns="0" rtlCol="0" anchor="ctr"/>
-          <a:lstStyle/>
-          <a:p>
-            <a:pPr algn="l" indent="0" marL="0">
-              <a:buNone/>
-            </a:pPr>
-            <a:r>
-              <a:rPr lang="en-US" sz="3000" b="1" dirty="0">
-                <a:solidFill>
-                  <a:srgbClr val="00B8EE"/>
-                </a:solidFill>
-                <a:latin typeface="Arial" pitchFamily="34" charset="0"/>
-                <a:ea typeface="Arial" pitchFamily="34" charset="-122"/>
-                <a:cs typeface="Arial" pitchFamily="34" charset="-120"/>
-              </a:rPr>
-              <a:t>07</a:t>
-            </a:r>
-            <a:endParaRPr lang="en-US" sz="3000" dirty="0"/>
-          </a:p>
-        </p:txBody>
-      </p:sp>
-      <p:sp>
-        <p:nvSpPr>
-          <p:cNvPr id="4" name="Text 2"/>
-          <p:cNvSpPr/>
-          <p:nvPr/>
-        </p:nvSpPr>
-        <p:spPr>
-          <a:xfrm>
-            <a:off x="1234440" y="164592"/>
-            <a:ext cx="8595360" cy="585216"/>
-          </a:xfrm>
-          <a:prstGeom prst="rect">
-            <a:avLst/>
-          </a:prstGeom>
-          <a:noFill/>
-          <a:ln/>
-        </p:spPr>
-        <p:txBody>
-          <a:bodyPr wrap="square" lIns="0" tIns="0" rIns="0" bIns="0" rtlCol="0" anchor="ctr"/>
-          <a:lstStyle/>
-          <a:p>
-            <a:pPr algn="l" indent="0" marL="0">
-              <a:buNone/>
-            </a:pPr>
-            <a:r>
-              <a:rPr lang="en-US" sz="2600" b="1" dirty="0">
-                <a:solidFill>
-                  <a:srgbClr val="FFFFFF"/>
-                </a:solidFill>
-                <a:latin typeface="Malgun Gothic" pitchFamily="34" charset="0"/>
-                <a:ea typeface="Malgun Gothic" pitchFamily="34" charset="-122"/>
-                <a:cs typeface="Malgun Gothic" pitchFamily="34" charset="-120"/>
-              </a:rPr>
-              <a:t>대리점 교육 등 처리</a:t>
-            </a:r>
-            <a:endParaRPr lang="en-US" sz="2600" dirty="0"/>
-          </a:p>
-        </p:txBody>
-      </p:sp>
-      <p:pic>
-        <p:nvPicPr>
-          <p:cNvPr id="5" name="Image 0" descr="sysmex_logo_mono_blue.png">    </p:cNvPr>
-          <p:cNvPicPr>
-            <a:picLocks noChangeAspect="1"/>
-          </p:cNvPicPr>
-          <p:nvPr/>
-        </p:nvPicPr>
-        <p:blipFill>
-          <a:blip r:embed="rId1"/>
-          <a:stretch>
-            <a:fillRect/>
-          </a:stretch>
-        </p:blipFill>
-        <p:spPr>
-          <a:xfrm>
-            <a:off x="10652760" y="292608"/>
-            <a:ext cx="1097280" cy="420624"/>
-          </a:xfrm>
-          <a:prstGeom prst="rect">
-            <a:avLst/>
-          </a:prstGeom>
-        </p:spPr>
-      </p:pic>
-      <p:sp>
-        <p:nvSpPr>
-          <p:cNvPr id="6" name="Shape 3"/>
-          <p:cNvSpPr/>
-          <p:nvPr/>
-        </p:nvSpPr>
-        <p:spPr>
-          <a:xfrm>
-            <a:off x="530352" y="1188720"/>
-            <a:ext cx="5394960" cy="2651760"/>
-          </a:xfrm>
-          <a:prstGeom prst="roundRect">
-            <a:avLst>
-              <a:gd name="adj" fmla="val 2069"/>
-            </a:avLst>
-          </a:prstGeom>
-          <a:solidFill>
-            <a:srgbClr val="EFEFEF"/>
-          </a:solidFill>
-          <a:ln w="9525">
-            <a:solidFill>
-              <a:srgbClr val="9E9E9E"/>
-            </a:solidFill>
-            <a:prstDash val="dash"/>
-          </a:ln>
-        </p:spPr>
-      </p:sp>
-      <p:sp>
-        <p:nvSpPr>
-          <p:cNvPr id="7" name="Text 4"/>
-          <p:cNvSpPr/>
-          <p:nvPr/>
-        </p:nvSpPr>
-        <p:spPr>
-          <a:xfrm>
-            <a:off x="530352" y="1188720"/>
-            <a:ext cx="5394960" cy="2651760"/>
-          </a:xfrm>
-          <a:prstGeom prst="rect">
-            <a:avLst/>
-          </a:prstGeom>
-          <a:noFill/>
-          <a:ln/>
-        </p:spPr>
-        <p:txBody>
-          <a:bodyPr wrap="square" lIns="0" tIns="0" rIns="0" bIns="0" rtlCol="0" anchor="ctr"/>
-          <a:lstStyle/>
-          <a:p>
-            <a:pPr algn="ctr" indent="0" marL="0">
-              <a:buNone/>
-            </a:pPr>
-            <a:r>
-              <a:rPr lang="en-US" sz="1400" dirty="0">
-                <a:solidFill>
-                  <a:srgbClr val="9E9E9E"/>
-                </a:solidFill>
-                <a:latin typeface="Malgun Gothic" pitchFamily="34" charset="0"/>
-                <a:ea typeface="Malgun Gothic" pitchFamily="34" charset="-122"/>
-                <a:cs typeface="Malgun Gothic" pitchFamily="34" charset="-120"/>
-              </a:rPr>
-              <a:t>사진 자리 (Placeholder)</a:t>
-            </a:r>
-            <a:endParaRPr lang="en-US" sz="1400" dirty="0"/>
-          </a:p>
-        </p:txBody>
-      </p:sp>
-      <p:sp>
-        <p:nvSpPr>
-          <p:cNvPr id="8" name="Shape 5"/>
-          <p:cNvSpPr/>
-          <p:nvPr/>
-        </p:nvSpPr>
-        <p:spPr>
-          <a:xfrm>
-            <a:off x="6263640" y="1188720"/>
-            <a:ext cx="5394960" cy="2651760"/>
-          </a:xfrm>
-          <a:prstGeom prst="roundRect">
-            <a:avLst>
-              <a:gd name="adj" fmla="val 2069"/>
-            </a:avLst>
-          </a:prstGeom>
-          <a:solidFill>
-            <a:srgbClr val="EFEFEF"/>
-          </a:solidFill>
-          <a:ln w="9525">
-            <a:solidFill>
-              <a:srgbClr val="9E9E9E"/>
-            </a:solidFill>
-            <a:prstDash val="dash"/>
-          </a:ln>
-        </p:spPr>
-      </p:sp>
-      <p:sp>
-        <p:nvSpPr>
-          <p:cNvPr id="9" name="Text 6"/>
-          <p:cNvSpPr/>
-          <p:nvPr/>
-        </p:nvSpPr>
-        <p:spPr>
-          <a:xfrm>
-            <a:off x="6263640" y="1188720"/>
-            <a:ext cx="5394960" cy="2651760"/>
-          </a:xfrm>
-          <a:prstGeom prst="rect">
-            <a:avLst/>
-          </a:prstGeom>
-          <a:noFill/>
-          <a:ln/>
-        </p:spPr>
-        <p:txBody>
-          <a:bodyPr wrap="square" lIns="0" tIns="0" rIns="0" bIns="0" rtlCol="0" anchor="ctr"/>
-          <a:lstStyle/>
-          <a:p>
-            <a:pPr algn="ctr" indent="0" marL="0">
-              <a:buNone/>
-            </a:pPr>
-            <a:r>
-              <a:rPr lang="en-US" sz="1400" dirty="0">
-                <a:solidFill>
-                  <a:srgbClr val="9E9E9E"/>
-                </a:solidFill>
-                <a:latin typeface="Malgun Gothic" pitchFamily="34" charset="0"/>
-                <a:ea typeface="Malgun Gothic" pitchFamily="34" charset="-122"/>
-                <a:cs typeface="Malgun Gothic" pitchFamily="34" charset="-120"/>
-              </a:rPr>
-              <a:t>사진 자리 (Placeholder)</a:t>
-            </a:r>
-            <a:endParaRPr lang="en-US" sz="1400" dirty="0"/>
-          </a:p>
-        </p:txBody>
-      </p:sp>
-      <p:sp>
-        <p:nvSpPr>
-          <p:cNvPr id="10" name="Text 7"/>
-          <p:cNvSpPr/>
-          <p:nvPr/>
-        </p:nvSpPr>
-        <p:spPr>
-          <a:xfrm>
-            <a:off x="530352" y="3977640"/>
-            <a:ext cx="5394960" cy="457200"/>
-          </a:xfrm>
-          <a:prstGeom prst="rect">
-            <a:avLst/>
-          </a:prstGeom>
-          <a:noFill/>
-          <a:ln/>
-        </p:spPr>
-        <p:txBody>
-          <a:bodyPr wrap="square" lIns="0" tIns="0" rIns="0" bIns="0" rtlCol="0" anchor="ctr"/>
-          <a:lstStyle/>
-          <a:p>
-            <a:pPr indent="0" marL="0">
-              <a:buNone/>
-            </a:pPr>
-            <a:r>
-              <a:rPr lang="en-US" sz="1300" i="1" dirty="0">
-                <a:solidFill>
-                  <a:srgbClr val="9E9E9E"/>
-                </a:solidFill>
-                <a:latin typeface="Malgun Gothic" pitchFamily="34" charset="0"/>
-                <a:ea typeface="Malgun Gothic" pitchFamily="34" charset="-122"/>
-                <a:cs typeface="Malgun Gothic" pitchFamily="34" charset="-120"/>
-              </a:rPr>
-              <a:t>자료 미제공 – 추후 업데이트</a:t>
-            </a:r>
-            <a:endParaRPr lang="en-US" sz="1300" dirty="0"/>
-          </a:p>
-        </p:txBody>
-      </p:sp>
-      <p:sp>
-        <p:nvSpPr>
-          <p:cNvPr id="11" name="Text 8"/>
-          <p:cNvSpPr/>
-          <p:nvPr/>
-        </p:nvSpPr>
-        <p:spPr>
-          <a:xfrm>
-            <a:off x="6263640" y="3977640"/>
-            <a:ext cx="5394960" cy="457200"/>
-          </a:xfrm>
-          <a:prstGeom prst="rect">
-            <a:avLst/>
-          </a:prstGeom>
-          <a:noFill/>
-          <a:ln/>
-        </p:spPr>
-        <p:txBody>
-          <a:bodyPr wrap="square" lIns="0" tIns="0" rIns="0" bIns="0" rtlCol="0" anchor="ctr"/>
-          <a:lstStyle/>
-          <a:p>
-            <a:pPr indent="0" marL="0">
-              <a:buNone/>
-            </a:pPr>
-            <a:r>
-              <a:rPr lang="en-US" sz="1300" i="1" dirty="0">
-                <a:solidFill>
-                  <a:srgbClr val="9E9E9E"/>
-                </a:solidFill>
-                <a:latin typeface="Malgun Gothic" pitchFamily="34" charset="0"/>
-                <a:ea typeface="Malgun Gothic" pitchFamily="34" charset="-122"/>
-                <a:cs typeface="Malgun Gothic" pitchFamily="34" charset="-120"/>
-              </a:rPr>
-              <a:t>자료 미제공 – 추후 업데이트</a:t>
-            </a:r>
-            <a:endParaRPr lang="en-US" sz="1300" dirty="0"/>
-          </a:p>
-        </p:txBody>
-      </p:sp>
-      <p:sp>
-        <p:nvSpPr>
-          <p:cNvPr id="12" name="Text 9"/>
-          <p:cNvSpPr/>
-          <p:nvPr/>
-        </p:nvSpPr>
-        <p:spPr>
-          <a:xfrm>
-            <a:off x="530352" y="4480560"/>
-            <a:ext cx="11100816" cy="365760"/>
-          </a:xfrm>
-          <a:prstGeom prst="rect">
-            <a:avLst/>
-          </a:prstGeom>
-          <a:noFill/>
-          <a:ln/>
-        </p:spPr>
-        <p:txBody>
-          <a:bodyPr wrap="square" lIns="0" tIns="0" rIns="0" bIns="0" rtlCol="0" anchor="ctr"/>
-          <a:lstStyle/>
-          <a:p>
-            <a:pPr indent="0" marL="0">
-              <a:buNone/>
-            </a:pPr>
-            <a:r>
-              <a:rPr lang="en-US" sz="1100" i="1" dirty="0">
-                <a:solidFill>
-                  <a:srgbClr val="9E9E9E"/>
-                </a:solidFill>
-                <a:latin typeface="Malgun Gothic" pitchFamily="34" charset="0"/>
-                <a:ea typeface="Malgun Gothic" pitchFamily="34" charset="-122"/>
-                <a:cs typeface="Malgun Gothic" pitchFamily="34" charset="-120"/>
-              </a:rPr>
-              <a:t>대리점(에이전시) 대상 기술 교육, 서비스 프로세스 안내 등 처리 현황</a:t>
-            </a:r>
-            <a:endParaRPr lang="en-US" sz="1100" dirty="0"/>
-          </a:p>
-        </p:txBody>
-      </p:sp>
-      <p:sp>
-        <p:nvSpPr>
-          <p:cNvPr id="13" name="Text 10"/>
-          <p:cNvSpPr/>
-          <p:nvPr/>
-        </p:nvSpPr>
-        <p:spPr>
-          <a:xfrm>
-            <a:off x="457200" y="6547104"/>
-            <a:ext cx="9601200" cy="274320"/>
-          </a:xfrm>
-          <a:prstGeom prst="rect">
-            <a:avLst/>
-          </a:prstGeom>
-          <a:noFill/>
-          <a:ln/>
-        </p:spPr>
-        <p:txBody>
-          <a:bodyPr wrap="square" rtlCol="0" anchor="ctr"/>
-          <a:lstStyle/>
-          <a:p>
-            <a:pPr algn="l" indent="0" marL="0">
-              <a:buNone/>
-            </a:pPr>
-            <a:r>
-              <a:rPr lang="en-US" sz="900" dirty="0">
-                <a:solidFill>
-                  <a:srgbClr val="9E9E9E"/>
-                </a:solidFill>
-                <a:latin typeface="Malgun Gothic" pitchFamily="34" charset="0"/>
-                <a:ea typeface="Malgun Gothic" pitchFamily="34" charset="-122"/>
-                <a:cs typeface="Malgun Gothic" pitchFamily="34" charset="-120"/>
-              </a:rPr>
-              <a:t>FS Group │ FSS Team · 2026년 7월 · Confidential</a:t>
-            </a:r>
-            <a:endParaRPr lang="en-US" sz="900" dirty="0"/>
-          </a:p>
-        </p:txBody>
-      </p:sp>
-      <p:sp>
-        <p:nvSpPr>
-          <p:cNvPr id="14" name="Text 11"/>
-          <p:cNvSpPr/>
-          <p:nvPr/>
-        </p:nvSpPr>
-        <p:spPr>
-          <a:xfrm>
-            <a:off x="11247120" y="6547104"/>
-            <a:ext cx="731520" cy="274320"/>
-          </a:xfrm>
-          <a:prstGeom prst="rect">
-            <a:avLst/>
-          </a:prstGeom>
-          <a:noFill/>
-          <a:ln/>
-        </p:spPr>
-        <p:txBody>
-          <a:bodyPr wrap="square" rtlCol="0" anchor="ctr"/>
-          <a:lstStyle/>
-          <a:p>
-            <a:pPr algn="r" indent="0" marL="0">
-              <a:buNone/>
-            </a:pPr>
-            <a:r>
-              <a:rPr lang="en-US" sz="900" dirty="0">
-                <a:solidFill>
-                  <a:srgbClr val="9E9E9E"/>
-                </a:solidFill>
-                <a:latin typeface="Arial" pitchFamily="34" charset="0"/>
-                <a:ea typeface="Arial" pitchFamily="34" charset="-122"/>
-                <a:cs typeface="Arial" pitchFamily="34" charset="-120"/>
-              </a:rPr>
               <a:t>7</a:t>
             </a:r>
             <a:endParaRPr lang="en-US" sz="900" dirty="0"/>
@@ -11945,7 +16319,7 @@
                 <a:ea typeface="Malgun Gothic" pitchFamily="34" charset="-122"/>
                 <a:cs typeface="Malgun Gothic" pitchFamily="34" charset="-120"/>
               </a:rPr>
-              <a:t>직원교육</a:t>
+              <a:t>중대 이슈 처리</a:t>
             </a:r>
             <a:endParaRPr lang="en-US" sz="2600" dirty="0"/>
           </a:p>
@@ -11977,14 +16351,36 @@
       </p:pic>
       <p:sp>
         <p:nvSpPr>
-          <p:cNvPr id="6" name="Text 3"/>
-          <p:cNvSpPr/>
-          <p:nvPr/>
-        </p:nvSpPr>
-        <p:spPr>
-          <a:xfrm>
-            <a:off x="530352" y="1051560"/>
-            <a:ext cx="11100816" cy="365760"/>
+          <p:cNvPr id="6" name="Shape 3"/>
+          <p:cNvSpPr/>
+          <p:nvPr/>
+        </p:nvSpPr>
+        <p:spPr>
+          <a:xfrm>
+            <a:off x="530352" y="1143000"/>
+            <a:ext cx="11100816" cy="777240"/>
+          </a:xfrm>
+          <a:prstGeom prst="roundRect">
+            <a:avLst>
+              <a:gd name="adj" fmla="val 7059"/>
+            </a:avLst>
+          </a:prstGeom>
+          <a:solidFill>
+            <a:srgbClr val="E6EEF7"/>
+          </a:solidFill>
+          <a:ln/>
+        </p:spPr>
+      </p:sp>
+      <p:sp>
+        <p:nvSpPr>
+          <p:cNvPr id="7" name="Text 4"/>
+          <p:cNvSpPr/>
+          <p:nvPr/>
+        </p:nvSpPr>
+        <p:spPr>
+          <a:xfrm>
+            <a:off x="713232" y="1225296"/>
+            <a:ext cx="2926080" cy="320040"/>
           </a:xfrm>
           <a:prstGeom prst="rect">
             <a:avLst/>
@@ -12000,15 +16396,54 @@
               <a:buNone/>
             </a:pPr>
             <a:r>
-              <a:rPr lang="en-US" sz="1100" i="1" dirty="0">
-                <a:solidFill>
-                  <a:srgbClr val="9E9E9E"/>
+              <a:rPr lang="en-US" sz="1200" b="1" dirty="0">
+                <a:solidFill>
+                  <a:srgbClr val="005BAC"/>
                 </a:solidFill>
                 <a:latin typeface="Malgun Gothic" pitchFamily="34" charset="0"/>
                 <a:ea typeface="Malgun Gothic" pitchFamily="34" charset="-122"/>
                 <a:cs typeface="Malgun Gothic" pitchFamily="34" charset="-120"/>
               </a:rPr>
-              <a:t>Sysmex Technical Academy: 주니어 레벨 빠른 성장 및 Expert Engineer 육성 · Working Group: 4개 분야(Hema/Urine/Coa/Immuno) 전문성 강화</a:t>
+              <a:t>VOC 레드 플래그 시스템</a:t>
+            </a:r>
+            <a:endParaRPr lang="en-US" sz="1200" dirty="0"/>
+          </a:p>
+        </p:txBody>
+      </p:sp>
+      <p:sp>
+        <p:nvSpPr>
+          <p:cNvPr id="8" name="Text 5"/>
+          <p:cNvSpPr/>
+          <p:nvPr/>
+        </p:nvSpPr>
+        <p:spPr>
+          <a:xfrm>
+            <a:off x="713232" y="1536192"/>
+            <a:ext cx="10789920" cy="320040"/>
+          </a:xfrm>
+          <a:prstGeom prst="rect">
+            <a:avLst/>
+          </a:prstGeom>
+          <a:noFill/>
+          <a:ln/>
+        </p:spPr>
+        <p:txBody>
+          <a:bodyPr wrap="square" lIns="0" tIns="0" rIns="0" bIns="0" rtlCol="0" anchor="ctr"/>
+          <a:lstStyle/>
+          <a:p>
+            <a:pPr indent="0" marL="0">
+              <a:buNone/>
+            </a:pPr>
+            <a:r>
+              <a:rPr lang="en-US" sz="1100" dirty="0">
+                <a:solidFill>
+                  <a:srgbClr val="3F3F3F"/>
+                </a:solidFill>
+                <a:latin typeface="Malgun Gothic" pitchFamily="34" charset="0"/>
+                <a:ea typeface="Malgun Gothic" pitchFamily="34" charset="-122"/>
+                <a:cs typeface="Malgun Gothic" pitchFamily="34" charset="-120"/>
+              </a:rPr>
+              <a:t>평가 2점 이하 또는 서술형 "심각" 분류 건을 즉시 감지 → 분야별 전문가 TFT 구성 → SLA(1차 컨택 24~48시간) 내 처리하여 신뢰 회복</a:t>
             </a:r>
             <a:endParaRPr lang="en-US" sz="1100" dirty="0"/>
           </a:p>
@@ -12016,26 +16451,65 @@
       </p:sp>
       <p:sp>
         <p:nvSpPr>
-          <p:cNvPr id="7" name="Shape 4"/>
-          <p:cNvSpPr/>
-          <p:nvPr/>
-        </p:nvSpPr>
-        <p:spPr>
-          <a:xfrm>
-            <a:off x="530352" y="1508760"/>
-            <a:ext cx="5394960" cy="2468880"/>
+          <p:cNvPr id="9" name="Text 6"/>
+          <p:cNvSpPr/>
+          <p:nvPr/>
+        </p:nvSpPr>
+        <p:spPr>
+          <a:xfrm>
+            <a:off x="530352" y="2103120"/>
+            <a:ext cx="7315200" cy="320040"/>
+          </a:xfrm>
+          <a:prstGeom prst="rect">
+            <a:avLst/>
+          </a:prstGeom>
+          <a:noFill/>
+          <a:ln/>
+        </p:spPr>
+        <p:txBody>
+          <a:bodyPr wrap="square" lIns="0" tIns="0" rIns="0" bIns="0" rtlCol="0" anchor="ctr"/>
+          <a:lstStyle/>
+          <a:p>
+            <a:pPr indent="0" marL="0">
+              <a:buNone/>
+            </a:pPr>
+            <a:r>
+              <a:rPr lang="en-US" sz="1400" b="1" dirty="0">
+                <a:solidFill>
+                  <a:srgbClr val="005BAC"/>
+                </a:solidFill>
+                <a:latin typeface="Malgun Gothic" pitchFamily="34" charset="0"/>
+                <a:ea typeface="Malgun Gothic" pitchFamily="34" charset="-122"/>
+                <a:cs typeface="Malgun Gothic" pitchFamily="34" charset="-120"/>
+              </a:rPr>
+              <a:t>접수 · 조치 · 종결 현황</a:t>
+            </a:r>
+            <a:endParaRPr lang="en-US" sz="1400" dirty="0"/>
+          </a:p>
+        </p:txBody>
+      </p:sp>
+      <p:sp>
+        <p:nvSpPr>
+          <p:cNvPr id="10" name="Shape 7"/>
+          <p:cNvSpPr/>
+          <p:nvPr/>
+        </p:nvSpPr>
+        <p:spPr>
+          <a:xfrm>
+            <a:off x="530352" y="2468880"/>
+            <a:ext cx="11100816" cy="3200400"/>
           </a:xfrm>
           <a:prstGeom prst="roundRect">
             <a:avLst>
-              <a:gd name="adj" fmla="val 2222"/>
+              <a:gd name="adj" fmla="val 2286"/>
             </a:avLst>
           </a:prstGeom>
           <a:solidFill>
-            <a:srgbClr val="EFEFEF"/>
+            <a:srgbClr val="E6EEF7"/>
           </a:solidFill>
           <a:ln w="9525">
             <a:solidFill>
-              <a:srgbClr val="9E9E9E"/>
+              <a:srgbClr val="005BAC"/>
             </a:solidFill>
             <a:prstDash val="dash"/>
           </a:ln>
@@ -12043,14 +16517,14 @@
       </p:sp>
       <p:sp>
         <p:nvSpPr>
-          <p:cNvPr id="8" name="Text 5"/>
-          <p:cNvSpPr/>
-          <p:nvPr/>
-        </p:nvSpPr>
-        <p:spPr>
-          <a:xfrm>
-            <a:off x="530352" y="1508760"/>
-            <a:ext cx="5394960" cy="2468880"/>
+          <p:cNvPr id="11" name="Text 8"/>
+          <p:cNvSpPr/>
+          <p:nvPr/>
+        </p:nvSpPr>
+        <p:spPr>
+          <a:xfrm>
+            <a:off x="530352" y="2468880"/>
+            <a:ext cx="11100816" cy="3200400"/>
           </a:xfrm>
           <a:prstGeom prst="rect">
             <a:avLst/>
@@ -12066,73 +16540,46 @@
               <a:buNone/>
             </a:pPr>
             <a:r>
-              <a:rPr lang="en-US" sz="1400" dirty="0">
-                <a:solidFill>
-                  <a:srgbClr val="9E9E9E"/>
+              <a:rPr lang="en-US" sz="1600" i="1" dirty="0">
+                <a:solidFill>
+                  <a:srgbClr val="005BAC"/>
                 </a:solidFill>
                 <a:latin typeface="Malgun Gothic" pitchFamily="34" charset="0"/>
                 <a:ea typeface="Malgun Gothic" pitchFamily="34" charset="-122"/>
                 <a:cs typeface="Malgun Gothic" pitchFamily="34" charset="-120"/>
               </a:rPr>
-              <a:t>사진 자리 (Placeholder)</a:t>
-            </a:r>
-            <a:endParaRPr lang="en-US" sz="1400" dirty="0"/>
-          </a:p>
-        </p:txBody>
-      </p:sp>
-      <p:sp>
-        <p:nvSpPr>
-          <p:cNvPr id="9" name="Shape 6"/>
-          <p:cNvSpPr/>
-          <p:nvPr/>
-        </p:nvSpPr>
-        <p:spPr>
-          <a:xfrm>
-            <a:off x="6263640" y="1508760"/>
-            <a:ext cx="5394960" cy="2468880"/>
-          </a:xfrm>
-          <a:prstGeom prst="roundRect">
-            <a:avLst>
-              <a:gd name="adj" fmla="val 2222"/>
-            </a:avLst>
-          </a:prstGeom>
-          <a:solidFill>
-            <a:srgbClr val="EFEFEF"/>
-          </a:solidFill>
-          <a:ln w="9525">
-            <a:solidFill>
-              <a:srgbClr val="9E9E9E"/>
-            </a:solidFill>
-            <a:prstDash val="dash"/>
-          </a:ln>
-        </p:spPr>
-      </p:sp>
-      <p:sp>
-        <p:nvSpPr>
-          <p:cNvPr id="10" name="Text 7"/>
-          <p:cNvSpPr/>
-          <p:nvPr/>
-        </p:nvSpPr>
-        <p:spPr>
-          <a:xfrm>
-            <a:off x="6263640" y="1508760"/>
-            <a:ext cx="5394960" cy="2468880"/>
-          </a:xfrm>
-          <a:prstGeom prst="rect">
-            <a:avLst/>
-          </a:prstGeom>
-          <a:noFill/>
-          <a:ln/>
-        </p:spPr>
-        <p:txBody>
-          <a:bodyPr wrap="square" lIns="0" tIns="0" rIns="0" bIns="0" rtlCol="0" anchor="ctr"/>
-          <a:lstStyle/>
-          <a:p>
-            <a:pPr algn="ctr" indent="0" marL="0">
-              <a:buNone/>
-            </a:pPr>
-            <a:r>
-              <a:rPr lang="en-US" sz="1400" dirty="0">
+              <a:t>자료 미제공 – 추후 업데이트</a:t>
+            </a:r>
+            <a:endParaRPr lang="en-US" sz="1600" dirty="0"/>
+          </a:p>
+        </p:txBody>
+      </p:sp>
+      <p:sp>
+        <p:nvSpPr>
+          <p:cNvPr id="12" name="Text 9"/>
+          <p:cNvSpPr/>
+          <p:nvPr/>
+        </p:nvSpPr>
+        <p:spPr>
+          <a:xfrm>
+            <a:off x="457200" y="6547104"/>
+            <a:ext cx="9601200" cy="274320"/>
+          </a:xfrm>
+          <a:prstGeom prst="rect">
+            <a:avLst/>
+          </a:prstGeom>
+          <a:noFill/>
+          <a:ln/>
+        </p:spPr>
+        <p:txBody>
+          <a:bodyPr wrap="square" rtlCol="0" anchor="ctr"/>
+          <a:lstStyle/>
+          <a:p>
+            <a:pPr algn="l" indent="0" marL="0">
+              <a:buNone/>
+            </a:pPr>
+            <a:r>
+              <a:rPr lang="en-US" sz="900" dirty="0">
                 <a:solidFill>
                   <a:srgbClr val="9E9E9E"/>
                 </a:solidFill>
@@ -12140,132 +16587,15 @@
                 <a:ea typeface="Malgun Gothic" pitchFamily="34" charset="-122"/>
                 <a:cs typeface="Malgun Gothic" pitchFamily="34" charset="-120"/>
               </a:rPr>
-              <a:t>사진 자리 (Placeholder)</a:t>
-            </a:r>
-            <a:endParaRPr lang="en-US" sz="1400" dirty="0"/>
-          </a:p>
-        </p:txBody>
-      </p:sp>
-      <p:sp>
-        <p:nvSpPr>
-          <p:cNvPr id="11" name="Text 8"/>
-          <p:cNvSpPr/>
-          <p:nvPr/>
-        </p:nvSpPr>
-        <p:spPr>
-          <a:xfrm>
-            <a:off x="530352" y="4114800"/>
-            <a:ext cx="5394960" cy="457200"/>
-          </a:xfrm>
-          <a:prstGeom prst="rect">
-            <a:avLst/>
-          </a:prstGeom>
-          <a:noFill/>
-          <a:ln/>
-        </p:spPr>
-        <p:txBody>
-          <a:bodyPr wrap="square" lIns="0" tIns="0" rIns="0" bIns="0" rtlCol="0" anchor="ctr"/>
-          <a:lstStyle/>
-          <a:p>
-            <a:pPr indent="0" marL="0">
-              <a:buNone/>
-            </a:pPr>
-            <a:r>
-              <a:rPr lang="en-US" sz="1300" i="1" dirty="0">
-                <a:solidFill>
-                  <a:srgbClr val="9E9E9E"/>
-                </a:solidFill>
-                <a:latin typeface="Malgun Gothic" pitchFamily="34" charset="0"/>
-                <a:ea typeface="Malgun Gothic" pitchFamily="34" charset="-122"/>
-                <a:cs typeface="Malgun Gothic" pitchFamily="34" charset="-120"/>
-              </a:rPr>
-              <a:t>Technical Academy — 자료 미제공 – 추후 업데이트</a:t>
-            </a:r>
-            <a:endParaRPr lang="en-US" sz="1300" dirty="0"/>
-          </a:p>
-        </p:txBody>
-      </p:sp>
-      <p:sp>
-        <p:nvSpPr>
-          <p:cNvPr id="12" name="Text 9"/>
-          <p:cNvSpPr/>
-          <p:nvPr/>
-        </p:nvSpPr>
-        <p:spPr>
-          <a:xfrm>
-            <a:off x="6263640" y="4114800"/>
-            <a:ext cx="5394960" cy="457200"/>
-          </a:xfrm>
-          <a:prstGeom prst="rect">
-            <a:avLst/>
-          </a:prstGeom>
-          <a:noFill/>
-          <a:ln/>
-        </p:spPr>
-        <p:txBody>
-          <a:bodyPr wrap="square" lIns="0" tIns="0" rIns="0" bIns="0" rtlCol="0" anchor="ctr"/>
-          <a:lstStyle/>
-          <a:p>
-            <a:pPr indent="0" marL="0">
-              <a:buNone/>
-            </a:pPr>
-            <a:r>
-              <a:rPr lang="en-US" sz="1300" i="1" dirty="0">
-                <a:solidFill>
-                  <a:srgbClr val="9E9E9E"/>
-                </a:solidFill>
-                <a:latin typeface="Malgun Gothic" pitchFamily="34" charset="0"/>
-                <a:ea typeface="Malgun Gothic" pitchFamily="34" charset="-122"/>
-                <a:cs typeface="Malgun Gothic" pitchFamily="34" charset="-120"/>
-              </a:rPr>
-              <a:t>Working Group — 자료 미제공 – 추후 업데이트</a:t>
-            </a:r>
-            <a:endParaRPr lang="en-US" sz="1300" dirty="0"/>
+              <a:t>FS Group │ FSS Team · 2026년 7월 · Confidential</a:t>
+            </a:r>
+            <a:endParaRPr lang="en-US" sz="900" dirty="0"/>
           </a:p>
         </p:txBody>
       </p:sp>
       <p:sp>
         <p:nvSpPr>
           <p:cNvPr id="13" name="Text 10"/>
-          <p:cNvSpPr/>
-          <p:nvPr/>
-        </p:nvSpPr>
-        <p:spPr>
-          <a:xfrm>
-            <a:off x="457200" y="6547104"/>
-            <a:ext cx="9601200" cy="274320"/>
-          </a:xfrm>
-          <a:prstGeom prst="rect">
-            <a:avLst/>
-          </a:prstGeom>
-          <a:noFill/>
-          <a:ln/>
-        </p:spPr>
-        <p:txBody>
-          <a:bodyPr wrap="square" rtlCol="0" anchor="ctr"/>
-          <a:lstStyle/>
-          <a:p>
-            <a:pPr algn="l" indent="0" marL="0">
-              <a:buNone/>
-            </a:pPr>
-            <a:r>
-              <a:rPr lang="en-US" sz="900" dirty="0">
-                <a:solidFill>
-                  <a:srgbClr val="9E9E9E"/>
-                </a:solidFill>
-                <a:latin typeface="Malgun Gothic" pitchFamily="34" charset="0"/>
-                <a:ea typeface="Malgun Gothic" pitchFamily="34" charset="-122"/>
-                <a:cs typeface="Malgun Gothic" pitchFamily="34" charset="-120"/>
-              </a:rPr>
-              <a:t>FS Group │ FSS Team · 2026년 7월 · Confidential</a:t>
-            </a:r>
-            <a:endParaRPr lang="en-US" sz="900" dirty="0"/>
-          </a:p>
-        </p:txBody>
-      </p:sp>
-      <p:sp>
-        <p:nvSpPr>
-          <p:cNvPr id="14" name="Text 11"/>
           <p:cNvSpPr/>
           <p:nvPr/>
         </p:nvSpPr>
@@ -12426,7 +16756,7 @@
                 <a:ea typeface="Malgun Gothic" pitchFamily="34" charset="-122"/>
                 <a:cs typeface="Malgun Gothic" pitchFamily="34" charset="-120"/>
               </a:rPr>
-              <a:t>고객 중심 서비스 하이라이트</a:t>
+              <a:t>대리점 교육 등 처리</a:t>
             </a:r>
             <a:endParaRPr lang="en-US" sz="2600" dirty="0"/>
           </a:p>
@@ -12464,18 +16794,23 @@
         </p:nvSpPr>
         <p:spPr>
           <a:xfrm>
-            <a:off x="530352" y="1234440"/>
-            <a:ext cx="3566160" cy="2011680"/>
+            <a:off x="530352" y="1188720"/>
+            <a:ext cx="5394960" cy="2651760"/>
           </a:xfrm>
           <a:prstGeom prst="roundRect">
             <a:avLst>
-              <a:gd name="adj" fmla="val 3636"/>
+              <a:gd name="adj" fmla="val 2069"/>
             </a:avLst>
           </a:prstGeom>
           <a:solidFill>
-            <a:srgbClr val="F5F8FC"/>
+            <a:srgbClr val="EFEFEF"/>
           </a:solidFill>
-          <a:ln/>
+          <a:ln w="9525">
+            <a:solidFill>
+              <a:srgbClr val="9E9E9E"/>
+            </a:solidFill>
+            <a:prstDash val="dash"/>
+          </a:ln>
         </p:spPr>
       </p:sp>
       <p:sp>
@@ -12486,8 +16821,8 @@
         </p:nvSpPr>
         <p:spPr>
           <a:xfrm>
-            <a:off x="713232" y="1417320"/>
-            <a:ext cx="3200400" cy="457200"/>
+            <a:off x="530352" y="1188720"/>
+            <a:ext cx="5394960" cy="2651760"/>
           </a:xfrm>
           <a:prstGeom prst="rect">
             <a:avLst/>
@@ -12503,30 +16838,57 @@
               <a:buNone/>
             </a:pPr>
             <a:r>
-              <a:rPr lang="en-US" sz="1500" b="1" dirty="0">
-                <a:solidFill>
-                  <a:srgbClr val="005BAC"/>
+              <a:rPr lang="en-US" sz="1400" dirty="0">
+                <a:solidFill>
+                  <a:srgbClr val="9E9E9E"/>
                 </a:solidFill>
                 <a:latin typeface="Malgun Gothic" pitchFamily="34" charset="0"/>
                 <a:ea typeface="Malgun Gothic" pitchFamily="34" charset="-122"/>
                 <a:cs typeface="Malgun Gothic" pitchFamily="34" charset="-120"/>
               </a:rPr>
-              <a:t>VOC 대응</a:t>
-            </a:r>
-            <a:endParaRPr lang="en-US" sz="1500" dirty="0"/>
-          </a:p>
-        </p:txBody>
-      </p:sp>
-      <p:sp>
-        <p:nvSpPr>
-          <p:cNvPr id="8" name="Text 5"/>
-          <p:cNvSpPr/>
-          <p:nvPr/>
-        </p:nvSpPr>
-        <p:spPr>
-          <a:xfrm>
-            <a:off x="713232" y="1920240"/>
-            <a:ext cx="3200400" cy="365760"/>
+              <a:t>사진 자리 (Placeholder)</a:t>
+            </a:r>
+            <a:endParaRPr lang="en-US" sz="1400" dirty="0"/>
+          </a:p>
+        </p:txBody>
+      </p:sp>
+      <p:sp>
+        <p:nvSpPr>
+          <p:cNvPr id="8" name="Shape 5"/>
+          <p:cNvSpPr/>
+          <p:nvPr/>
+        </p:nvSpPr>
+        <p:spPr>
+          <a:xfrm>
+            <a:off x="6263640" y="1188720"/>
+            <a:ext cx="5394960" cy="2651760"/>
+          </a:xfrm>
+          <a:prstGeom prst="roundRect">
+            <a:avLst>
+              <a:gd name="adj" fmla="val 2069"/>
+            </a:avLst>
+          </a:prstGeom>
+          <a:solidFill>
+            <a:srgbClr val="EFEFEF"/>
+          </a:solidFill>
+          <a:ln w="9525">
+            <a:solidFill>
+              <a:srgbClr val="9E9E9E"/>
+            </a:solidFill>
+            <a:prstDash val="dash"/>
+          </a:ln>
+        </p:spPr>
+      </p:sp>
+      <p:sp>
+        <p:nvSpPr>
+          <p:cNvPr id="9" name="Text 6"/>
+          <p:cNvSpPr/>
+          <p:nvPr/>
+        </p:nvSpPr>
+        <p:spPr>
+          <a:xfrm>
+            <a:off x="6263640" y="1188720"/>
+            <a:ext cx="5394960" cy="2651760"/>
           </a:xfrm>
           <a:prstGeom prst="rect">
             <a:avLst/>
@@ -12542,30 +16904,30 @@
               <a:buNone/>
             </a:pPr>
             <a:r>
-              <a:rPr lang="en-US" sz="1100" dirty="0">
-                <a:solidFill>
-                  <a:srgbClr val="3F3F3F"/>
+              <a:rPr lang="en-US" sz="1400" dirty="0">
+                <a:solidFill>
+                  <a:srgbClr val="9E9E9E"/>
                 </a:solidFill>
                 <a:latin typeface="Malgun Gothic" pitchFamily="34" charset="0"/>
                 <a:ea typeface="Malgun Gothic" pitchFamily="34" charset="-122"/>
                 <a:cs typeface="Malgun Gothic" pitchFamily="34" charset="-120"/>
               </a:rPr>
-              <a:t>고객 피드백 기반 개선</a:t>
-            </a:r>
-            <a:endParaRPr lang="en-US" sz="1100" dirty="0"/>
-          </a:p>
-        </p:txBody>
-      </p:sp>
-      <p:sp>
-        <p:nvSpPr>
-          <p:cNvPr id="9" name="Text 6"/>
-          <p:cNvSpPr/>
-          <p:nvPr/>
-        </p:nvSpPr>
-        <p:spPr>
-          <a:xfrm>
-            <a:off x="713232" y="2377440"/>
-            <a:ext cx="3200400" cy="731520"/>
+              <a:t>사진 자리 (Placeholder)</a:t>
+            </a:r>
+            <a:endParaRPr lang="en-US" sz="1400" dirty="0"/>
+          </a:p>
+        </p:txBody>
+      </p:sp>
+      <p:sp>
+        <p:nvSpPr>
+          <p:cNvPr id="10" name="Text 7"/>
+          <p:cNvSpPr/>
+          <p:nvPr/>
+        </p:nvSpPr>
+        <p:spPr>
+          <a:xfrm>
+            <a:off x="530352" y="3977640"/>
+            <a:ext cx="5394960" cy="457200"/>
           </a:xfrm>
           <a:prstGeom prst="rect">
             <a:avLst/>
@@ -12577,11 +16939,11 @@
           <a:bodyPr wrap="square" lIns="0" tIns="0" rIns="0" bIns="0" rtlCol="0" anchor="ctr"/>
           <a:lstStyle/>
           <a:p>
-            <a:pPr algn="ctr" indent="0" marL="0">
-              <a:buNone/>
-            </a:pPr>
-            <a:r>
-              <a:rPr lang="en-US" sz="1100" i="1" dirty="0">
+            <a:pPr indent="0" marL="0">
+              <a:buNone/>
+            </a:pPr>
+            <a:r>
+              <a:rPr lang="en-US" sz="1300" i="1" dirty="0">
                 <a:solidFill>
                   <a:srgbClr val="9E9E9E"/>
                 </a:solidFill>
@@ -12591,31 +16953,9 @@
               </a:rPr>
               <a:t>자료 미제공 – 추후 업데이트</a:t>
             </a:r>
-            <a:endParaRPr lang="en-US" sz="1100" dirty="0"/>
-          </a:p>
-        </p:txBody>
-      </p:sp>
-      <p:sp>
-        <p:nvSpPr>
-          <p:cNvPr id="10" name="Shape 7"/>
-          <p:cNvSpPr/>
-          <p:nvPr/>
-        </p:nvSpPr>
-        <p:spPr>
-          <a:xfrm>
-            <a:off x="4279392" y="1234440"/>
-            <a:ext cx="3566160" cy="2011680"/>
-          </a:xfrm>
-          <a:prstGeom prst="roundRect">
-            <a:avLst>
-              <a:gd name="adj" fmla="val 3636"/>
-            </a:avLst>
-          </a:prstGeom>
-          <a:solidFill>
-            <a:srgbClr val="F5F8FC"/>
-          </a:solidFill>
-          <a:ln/>
-        </p:spPr>
+            <a:endParaRPr lang="en-US" sz="1300" dirty="0"/>
+          </a:p>
+        </p:txBody>
       </p:sp>
       <p:sp>
         <p:nvSpPr>
@@ -12625,8 +16965,8 @@
         </p:nvSpPr>
         <p:spPr>
           <a:xfrm>
-            <a:off x="4462272" y="1417320"/>
-            <a:ext cx="3200400" cy="457200"/>
+            <a:off x="6263640" y="3977640"/>
+            <a:ext cx="5394960" cy="457200"/>
           </a:xfrm>
           <a:prstGeom prst="rect">
             <a:avLst/>
@@ -12638,21 +16978,21 @@
           <a:bodyPr wrap="square" lIns="0" tIns="0" rIns="0" bIns="0" rtlCol="0" anchor="ctr"/>
           <a:lstStyle/>
           <a:p>
-            <a:pPr algn="ctr" indent="0" marL="0">
-              <a:buNone/>
-            </a:pPr>
-            <a:r>
-              <a:rPr lang="en-US" sz="1500" b="1" dirty="0">
-                <a:solidFill>
-                  <a:srgbClr val="005BAC"/>
+            <a:pPr indent="0" marL="0">
+              <a:buNone/>
+            </a:pPr>
+            <a:r>
+              <a:rPr lang="en-US" sz="1300" i="1" dirty="0">
+                <a:solidFill>
+                  <a:srgbClr val="9E9E9E"/>
                 </a:solidFill>
                 <a:latin typeface="Malgun Gothic" pitchFamily="34" charset="0"/>
                 <a:ea typeface="Malgun Gothic" pitchFamily="34" charset="-122"/>
                 <a:cs typeface="Malgun Gothic" pitchFamily="34" charset="-120"/>
               </a:rPr>
-              <a:t>중대 이슈 대응력</a:t>
-            </a:r>
-            <a:endParaRPr lang="en-US" sz="1500" dirty="0"/>
+              <a:t>자료 미제공 – 추후 업데이트</a:t>
+            </a:r>
+            <a:endParaRPr lang="en-US" sz="1300" dirty="0"/>
           </a:p>
         </p:txBody>
       </p:sp>
@@ -12664,8 +17004,8 @@
         </p:nvSpPr>
         <p:spPr>
           <a:xfrm>
-            <a:off x="4462272" y="1920240"/>
-            <a:ext cx="3200400" cy="365760"/>
+            <a:off x="530352" y="4480560"/>
+            <a:ext cx="11100816" cy="365760"/>
           </a:xfrm>
           <a:prstGeom prst="rect">
             <a:avLst/>
@@ -12677,19 +17017,19 @@
           <a:bodyPr wrap="square" lIns="0" tIns="0" rIns="0" bIns="0" rtlCol="0" anchor="ctr"/>
           <a:lstStyle/>
           <a:p>
-            <a:pPr algn="ctr" indent="0" marL="0">
-              <a:buNone/>
-            </a:pPr>
-            <a:r>
-              <a:rPr lang="en-US" sz="1100" dirty="0">
-                <a:solidFill>
-                  <a:srgbClr val="3F3F3F"/>
+            <a:pPr indent="0" marL="0">
+              <a:buNone/>
+            </a:pPr>
+            <a:r>
+              <a:rPr lang="en-US" sz="1100" i="1" dirty="0">
+                <a:solidFill>
+                  <a:srgbClr val="9E9E9E"/>
                 </a:solidFill>
                 <a:latin typeface="Malgun Gothic" pitchFamily="34" charset="0"/>
                 <a:ea typeface="Malgun Gothic" pitchFamily="34" charset="-122"/>
                 <a:cs typeface="Malgun Gothic" pitchFamily="34" charset="-120"/>
               </a:rPr>
-              <a:t>SLA 준수 · 신속 종결</a:t>
+              <a:t>대리점(에이전시) 대상 기술 교육, 서비스 프로세스 안내 등 처리 현황</a:t>
             </a:r>
             <a:endParaRPr lang="en-US" sz="1100" dirty="0"/>
           </a:p>
@@ -12703,24 +17043,24 @@
         </p:nvSpPr>
         <p:spPr>
           <a:xfrm>
-            <a:off x="4462272" y="2377440"/>
-            <a:ext cx="3200400" cy="731520"/>
-          </a:xfrm>
-          <a:prstGeom prst="rect">
-            <a:avLst/>
-          </a:prstGeom>
-          <a:noFill/>
-          <a:ln/>
-        </p:spPr>
-        <p:txBody>
-          <a:bodyPr wrap="square" lIns="0" tIns="0" rIns="0" bIns="0" rtlCol="0" anchor="ctr"/>
-          <a:lstStyle/>
-          <a:p>
-            <a:pPr algn="ctr" indent="0" marL="0">
-              <a:buNone/>
-            </a:pPr>
-            <a:r>
-              <a:rPr lang="en-US" sz="1100" i="1" dirty="0">
+            <a:off x="457200" y="6547104"/>
+            <a:ext cx="9601200" cy="274320"/>
+          </a:xfrm>
+          <a:prstGeom prst="rect">
+            <a:avLst/>
+          </a:prstGeom>
+          <a:noFill/>
+          <a:ln/>
+        </p:spPr>
+        <p:txBody>
+          <a:bodyPr wrap="square" rtlCol="0" anchor="ctr"/>
+          <a:lstStyle/>
+          <a:p>
+            <a:pPr algn="l" indent="0" marL="0">
+              <a:buNone/>
+            </a:pPr>
+            <a:r>
+              <a:rPr lang="en-US" sz="900" dirty="0">
                 <a:solidFill>
                   <a:srgbClr val="9E9E9E"/>
                 </a:solidFill>
@@ -12728,284 +17068,6 @@
                 <a:ea typeface="Malgun Gothic" pitchFamily="34" charset="-122"/>
                 <a:cs typeface="Malgun Gothic" pitchFamily="34" charset="-120"/>
               </a:rPr>
-              <a:t>자료 미제공 – 추후 업데이트</a:t>
-            </a:r>
-            <a:endParaRPr lang="en-US" sz="1100" dirty="0"/>
-          </a:p>
-        </p:txBody>
-      </p:sp>
-      <p:sp>
-        <p:nvSpPr>
-          <p:cNvPr id="14" name="Shape 11"/>
-          <p:cNvSpPr/>
-          <p:nvPr/>
-        </p:nvSpPr>
-        <p:spPr>
-          <a:xfrm>
-            <a:off x="8028432" y="1234440"/>
-            <a:ext cx="3566160" cy="2011680"/>
-          </a:xfrm>
-          <a:prstGeom prst="roundRect">
-            <a:avLst>
-              <a:gd name="adj" fmla="val 3636"/>
-            </a:avLst>
-          </a:prstGeom>
-          <a:solidFill>
-            <a:srgbClr val="F5F8FC"/>
-          </a:solidFill>
-          <a:ln/>
-        </p:spPr>
-      </p:sp>
-      <p:sp>
-        <p:nvSpPr>
-          <p:cNvPr id="15" name="Text 12"/>
-          <p:cNvSpPr/>
-          <p:nvPr/>
-        </p:nvSpPr>
-        <p:spPr>
-          <a:xfrm>
-            <a:off x="8211312" y="1417320"/>
-            <a:ext cx="3200400" cy="457200"/>
-          </a:xfrm>
-          <a:prstGeom prst="rect">
-            <a:avLst/>
-          </a:prstGeom>
-          <a:noFill/>
-          <a:ln/>
-        </p:spPr>
-        <p:txBody>
-          <a:bodyPr wrap="square" lIns="0" tIns="0" rIns="0" bIns="0" rtlCol="0" anchor="ctr"/>
-          <a:lstStyle/>
-          <a:p>
-            <a:pPr algn="ctr" indent="0" marL="0">
-              <a:buNone/>
-            </a:pPr>
-            <a:r>
-              <a:rPr lang="en-US" sz="1500" b="1" dirty="0">
-                <a:solidFill>
-                  <a:srgbClr val="005BAC"/>
-                </a:solidFill>
-                <a:latin typeface="Malgun Gothic" pitchFamily="34" charset="0"/>
-                <a:ea typeface="Malgun Gothic" pitchFamily="34" charset="-122"/>
-                <a:cs typeface="Malgun Gothic" pitchFamily="34" charset="-120"/>
-              </a:rPr>
-              <a:t>대리점/직원 역량</a:t>
-            </a:r>
-            <a:endParaRPr lang="en-US" sz="1500" dirty="0"/>
-          </a:p>
-        </p:txBody>
-      </p:sp>
-      <p:sp>
-        <p:nvSpPr>
-          <p:cNvPr id="16" name="Text 13"/>
-          <p:cNvSpPr/>
-          <p:nvPr/>
-        </p:nvSpPr>
-        <p:spPr>
-          <a:xfrm>
-            <a:off x="8211312" y="1920240"/>
-            <a:ext cx="3200400" cy="365760"/>
-          </a:xfrm>
-          <a:prstGeom prst="rect">
-            <a:avLst/>
-          </a:prstGeom>
-          <a:noFill/>
-          <a:ln/>
-        </p:spPr>
-        <p:txBody>
-          <a:bodyPr wrap="square" lIns="0" tIns="0" rIns="0" bIns="0" rtlCol="0" anchor="ctr"/>
-          <a:lstStyle/>
-          <a:p>
-            <a:pPr algn="ctr" indent="0" marL="0">
-              <a:buNone/>
-            </a:pPr>
-            <a:r>
-              <a:rPr lang="en-US" sz="1100" dirty="0">
-                <a:solidFill>
-                  <a:srgbClr val="3F3F3F"/>
-                </a:solidFill>
-                <a:latin typeface="Malgun Gothic" pitchFamily="34" charset="0"/>
-                <a:ea typeface="Malgun Gothic" pitchFamily="34" charset="-122"/>
-                <a:cs typeface="Malgun Gothic" pitchFamily="34" charset="-120"/>
-              </a:rPr>
-              <a:t>교육 통한 서비스 품질 제고</a:t>
-            </a:r>
-            <a:endParaRPr lang="en-US" sz="1100" dirty="0"/>
-          </a:p>
-        </p:txBody>
-      </p:sp>
-      <p:sp>
-        <p:nvSpPr>
-          <p:cNvPr id="17" name="Text 14"/>
-          <p:cNvSpPr/>
-          <p:nvPr/>
-        </p:nvSpPr>
-        <p:spPr>
-          <a:xfrm>
-            <a:off x="8211312" y="2377440"/>
-            <a:ext cx="3200400" cy="731520"/>
-          </a:xfrm>
-          <a:prstGeom prst="rect">
-            <a:avLst/>
-          </a:prstGeom>
-          <a:noFill/>
-          <a:ln/>
-        </p:spPr>
-        <p:txBody>
-          <a:bodyPr wrap="square" lIns="0" tIns="0" rIns="0" bIns="0" rtlCol="0" anchor="ctr"/>
-          <a:lstStyle/>
-          <a:p>
-            <a:pPr algn="ctr" indent="0" marL="0">
-              <a:buNone/>
-            </a:pPr>
-            <a:r>
-              <a:rPr lang="en-US" sz="1100" i="1" dirty="0">
-                <a:solidFill>
-                  <a:srgbClr val="9E9E9E"/>
-                </a:solidFill>
-                <a:latin typeface="Malgun Gothic" pitchFamily="34" charset="0"/>
-                <a:ea typeface="Malgun Gothic" pitchFamily="34" charset="-122"/>
-                <a:cs typeface="Malgun Gothic" pitchFamily="34" charset="-120"/>
-              </a:rPr>
-              <a:t>자료 미제공 – 추후 업데이트</a:t>
-            </a:r>
-            <a:endParaRPr lang="en-US" sz="1100" dirty="0"/>
-          </a:p>
-        </p:txBody>
-      </p:sp>
-      <p:sp>
-        <p:nvSpPr>
-          <p:cNvPr id="18" name="Shape 15"/>
-          <p:cNvSpPr/>
-          <p:nvPr/>
-        </p:nvSpPr>
-        <p:spPr>
-          <a:xfrm>
-            <a:off x="530352" y="3520440"/>
-            <a:ext cx="11100816" cy="2103120"/>
-          </a:xfrm>
-          <a:prstGeom prst="roundRect">
-            <a:avLst>
-              <a:gd name="adj" fmla="val 3478"/>
-            </a:avLst>
-          </a:prstGeom>
-          <a:solidFill>
-            <a:srgbClr val="E6EEF7"/>
-          </a:solidFill>
-          <a:ln/>
-        </p:spPr>
-      </p:sp>
-      <p:sp>
-        <p:nvSpPr>
-          <p:cNvPr id="19" name="Text 16"/>
-          <p:cNvSpPr/>
-          <p:nvPr/>
-        </p:nvSpPr>
-        <p:spPr>
-          <a:xfrm>
-            <a:off x="777240" y="3657600"/>
-            <a:ext cx="4572000" cy="320040"/>
-          </a:xfrm>
-          <a:prstGeom prst="rect">
-            <a:avLst/>
-          </a:prstGeom>
-          <a:noFill/>
-          <a:ln/>
-        </p:spPr>
-        <p:txBody>
-          <a:bodyPr wrap="square" lIns="0" tIns="0" rIns="0" bIns="0" rtlCol="0" anchor="ctr"/>
-          <a:lstStyle/>
-          <a:p>
-            <a:pPr indent="0" marL="0">
-              <a:buNone/>
-            </a:pPr>
-            <a:r>
-              <a:rPr lang="en-US" sz="1300" b="1" dirty="0">
-                <a:solidFill>
-                  <a:srgbClr val="005BAC"/>
-                </a:solidFill>
-                <a:latin typeface="Malgun Gothic" pitchFamily="34" charset="0"/>
-                <a:ea typeface="Malgun Gothic" pitchFamily="34" charset="-122"/>
-                <a:cs typeface="Malgun Gothic" pitchFamily="34" charset="-120"/>
-              </a:rPr>
-              <a:t>고객 중심 Insight</a:t>
-            </a:r>
-            <a:endParaRPr lang="en-US" sz="1300" dirty="0"/>
-          </a:p>
-        </p:txBody>
-      </p:sp>
-      <p:sp>
-        <p:nvSpPr>
-          <p:cNvPr id="20" name="Text 17"/>
-          <p:cNvSpPr/>
-          <p:nvPr/>
-        </p:nvSpPr>
-        <p:spPr>
-          <a:xfrm>
-            <a:off x="777240" y="4023360"/>
-            <a:ext cx="10607040" cy="1463040"/>
-          </a:xfrm>
-          <a:prstGeom prst="rect">
-            <a:avLst/>
-          </a:prstGeom>
-          <a:noFill/>
-          <a:ln/>
-        </p:spPr>
-        <p:txBody>
-          <a:bodyPr wrap="square" lIns="0" tIns="0" rIns="0" bIns="0" rtlCol="0" anchor="ctr"/>
-          <a:lstStyle/>
-          <a:p>
-            <a:pPr indent="0" marL="0">
-              <a:buNone/>
-            </a:pPr>
-            <a:r>
-              <a:rPr lang="en-US" sz="1300" dirty="0">
-                <a:solidFill>
-                  <a:srgbClr val="3F3F3F"/>
-                </a:solidFill>
-                <a:latin typeface="Malgun Gothic" pitchFamily="34" charset="0"/>
-                <a:ea typeface="Malgun Gothic" pitchFamily="34" charset="-122"/>
-                <a:cs typeface="Malgun Gothic" pitchFamily="34" charset="-120"/>
-              </a:rPr>
-              <a:t>설치일정 CRM 데이터 분석 결과 (2026년 7월): 강남차병원·강남차여성병원 프로젝트(XR-9000/XR-1000)는 담당 엔지니어(Martin)가 설치 → 평가 지원 → 이전설치까지 4건을 연속 담당해 책임 담당제의 고객 연속성을 보여주는 우수 사례입니다. 설치·이전설치 평균 소요기간은 1.25일로 신속하게 처리되었으나, FS South팀은 7월 설치 실적 0건으로 팀간 업무량 편차 확인이 필요합니다.</a:t>
-            </a:r>
-            <a:endParaRPr lang="en-US" sz="1300" dirty="0"/>
-          </a:p>
-        </p:txBody>
-      </p:sp>
-      <p:sp>
-        <p:nvSpPr>
-          <p:cNvPr id="21" name="Text 18"/>
-          <p:cNvSpPr/>
-          <p:nvPr/>
-        </p:nvSpPr>
-        <p:spPr>
-          <a:xfrm>
-            <a:off x="457200" y="6547104"/>
-            <a:ext cx="9601200" cy="274320"/>
-          </a:xfrm>
-          <a:prstGeom prst="rect">
-            <a:avLst/>
-          </a:prstGeom>
-          <a:noFill/>
-          <a:ln/>
-        </p:spPr>
-        <p:txBody>
-          <a:bodyPr wrap="square" rtlCol="0" anchor="ctr"/>
-          <a:lstStyle/>
-          <a:p>
-            <a:pPr algn="l" indent="0" marL="0">
-              <a:buNone/>
-            </a:pPr>
-            <a:r>
-              <a:rPr lang="en-US" sz="900" dirty="0">
-                <a:solidFill>
-                  <a:srgbClr val="9E9E9E"/>
-                </a:solidFill>
-                <a:latin typeface="Malgun Gothic" pitchFamily="34" charset="0"/>
-                <a:ea typeface="Malgun Gothic" pitchFamily="34" charset="-122"/>
-                <a:cs typeface="Malgun Gothic" pitchFamily="34" charset="-120"/>
-              </a:rPr>
               <a:t>FS Group │ FSS Team · 2026년 7월 · Confidential</a:t>
             </a:r>
             <a:endParaRPr lang="en-US" sz="900" dirty="0"/>
@@ -13014,7 +17076,7 @@
       </p:sp>
       <p:sp>
         <p:nvSpPr>
-          <p:cNvPr id="22" name="Text 19"/>
+          <p:cNvPr id="14" name="Text 11"/>
           <p:cNvSpPr/>
           <p:nvPr/>
         </p:nvSpPr>

--- a/reports/FSG_월간서비스보고_202607/FSG_월간서비스보고_202607.pptx
+++ b/reports/FSG_월간서비스보고_202607/FSG_월간서비스보고_202607.pptx
@@ -17,9 +17,10 @@
     <p:sldId id="265" r:id="rId11"/>
     <p:sldId id="266" r:id="rId12"/>
     <p:sldId id="267" r:id="rId13"/>
+    <p:sldId id="268" r:id="rId14"/>
   </p:sldIdLst>
   <p:notesMasterIdLst>
-    <p:notesMasterId r:id="rId14"/>
+    <p:notesMasterId r:id="rId15"/>
   </p:notesMasterIdLst>
   <p:sldSz cx="12192000" cy="6858000"/>
   <p:notesSz cx="6858000" cy="12192000"/>
@@ -801,6 +802,94 @@
             <a:fld id="{F7021451-1387-4CA6-816F-3879F97B5CBC}" type="slidenum">
               <a:rPr lang="en-US"/>
               <a:t>12</a:t>
+            </a:fld>
+            <a:endParaRPr lang="en-US"/>
+          </a:p>
+        </p:txBody>
+      </p:sp>
+    </p:spTree>
+    <p:extLst>
+      <p:ext uri="{BB962C8B-B14F-4D97-AF65-F5344CB8AC3E}">
+        <p14:creationId xmlns:p14="http://schemas.microsoft.com/office/powerpoint/2010/main" val="1024086991"/>
+      </p:ext>
+    </p:extLst>
+  </p:cSld>
+  <p:clrMapOvr>
+    <a:masterClrMapping/>
+  </p:clrMapOvr>
+</p:notes>
+</file>
+
+<file path=ppt/notesSlides/notesSlide13.xml><?xml version="1.0" encoding="utf-8"?>
+<p:notes xmlns:a="http://schemas.openxmlformats.org/drawingml/2006/main" xmlns:r="http://schemas.openxmlformats.org/officeDocument/2006/relationships" xmlns:p="http://schemas.openxmlformats.org/presentationml/2006/main">
+  <p:cSld>
+    <p:spTree>
+      <p:nvGrpSpPr>
+        <p:cNvPr id="1" name=""/>
+        <p:cNvGrpSpPr/>
+        <p:nvPr/>
+      </p:nvGrpSpPr>
+      <p:grpSpPr>
+        <a:xfrm>
+          <a:off x="0" y="0"/>
+          <a:ext cx="0" cy="0"/>
+          <a:chOff x="0" y="0"/>
+          <a:chExt cx="0" cy="0"/>
+        </a:xfrm>
+      </p:grpSpPr>
+      <p:sp>
+        <p:nvSpPr>
+          <p:cNvPr id="2" name="Slide Image Placeholder 1"/>
+          <p:cNvSpPr>
+            <a:spLocks noGrp="1" noRot="1" noChangeAspect="1"/>
+          </p:cNvSpPr>
+          <p:nvPr>
+            <p:ph type="sldImg"/>
+          </p:nvPr>
+        </p:nvSpPr>
+        <p:spPr/>
+      </p:sp>
+      <p:sp>
+        <p:nvSpPr>
+          <p:cNvPr id="3" name="Notes Placeholder 2"/>
+          <p:cNvSpPr>
+            <a:spLocks noGrp="1"/>
+          </p:cNvSpPr>
+          <p:nvPr>
+            <p:ph type="body" idx="1"/>
+          </p:nvPr>
+        </p:nvSpPr>
+        <p:spPr/>
+        <p:txBody>
+          <a:bodyPr/>
+          <a:lstStyle/>
+          <a:p>
+            <a:r>
+              <a:rPr lang="en-US" dirty="0"/>
+              <a:t/>
+            </a:r>
+            <a:endParaRPr lang="en-US" dirty="0"/>
+          </a:p>
+        </p:txBody>
+      </p:sp>
+      <p:sp>
+        <p:nvSpPr>
+          <p:cNvPr id="4" name="Slide Number Placeholder 3"/>
+          <p:cNvSpPr>
+            <a:spLocks noGrp="1"/>
+          </p:cNvSpPr>
+          <p:nvPr>
+            <p:ph type="sldNum" sz="quarter" idx="10"/>
+          </p:nvPr>
+        </p:nvSpPr>
+        <p:spPr/>
+        <p:txBody>
+          <a:bodyPr/>
+          <a:lstStyle/>
+          <a:p>
+            <a:fld id="{F7021451-1387-4CA6-816F-3879F97B5CBC}" type="slidenum">
+              <a:rPr lang="en-US"/>
+              <a:t>13</a:t>
             </a:fld>
             <a:endParaRPr lang="en-US"/>
           </a:p>
@@ -2239,7 +2328,7 @@
                 <a:ea typeface="Malgun Gothic" pitchFamily="34" charset="-122"/>
                 <a:cs typeface="Malgun Gothic" pitchFamily="34" charset="-120"/>
               </a:rPr>
-              <a:t>직원교육</a:t>
+              <a:t>대리점 교육 등 처리</a:t>
             </a:r>
             <a:endParaRPr lang="en-US" sz="2600" dirty="0"/>
           </a:p>
@@ -2271,57 +2360,18 @@
       </p:pic>
       <p:sp>
         <p:nvSpPr>
-          <p:cNvPr id="6" name="Text 3"/>
-          <p:cNvSpPr/>
-          <p:nvPr/>
-        </p:nvSpPr>
-        <p:spPr>
-          <a:xfrm>
-            <a:off x="530352" y="1051560"/>
-            <a:ext cx="11100816" cy="365760"/>
-          </a:xfrm>
-          <a:prstGeom prst="rect">
-            <a:avLst/>
-          </a:prstGeom>
-          <a:noFill/>
-          <a:ln/>
-        </p:spPr>
-        <p:txBody>
-          <a:bodyPr wrap="square" lIns="0" tIns="0" rIns="0" bIns="0" rtlCol="0" anchor="ctr"/>
-          <a:lstStyle/>
-          <a:p>
-            <a:pPr indent="0" marL="0">
-              <a:buNone/>
-            </a:pPr>
-            <a:r>
-              <a:rPr lang="en-US" sz="1100" i="1" dirty="0">
-                <a:solidFill>
-                  <a:srgbClr val="9E9E9E"/>
-                </a:solidFill>
-                <a:latin typeface="Malgun Gothic" pitchFamily="34" charset="0"/>
-                <a:ea typeface="Malgun Gothic" pitchFamily="34" charset="-122"/>
-                <a:cs typeface="Malgun Gothic" pitchFamily="34" charset="-120"/>
-              </a:rPr>
-              <a:t>Sysmex Technical Academy: 주니어 레벨 빠른 성장 및 Expert Engineer 육성 · Working Group: 4개 분야(Hema/Urine/Coa/Immuno) 전문성 강화</a:t>
-            </a:r>
-            <a:endParaRPr lang="en-US" sz="1100" dirty="0"/>
-          </a:p>
-        </p:txBody>
-      </p:sp>
-      <p:sp>
-        <p:nvSpPr>
-          <p:cNvPr id="7" name="Shape 4"/>
-          <p:cNvSpPr/>
-          <p:nvPr/>
-        </p:nvSpPr>
-        <p:spPr>
-          <a:xfrm>
-            <a:off x="530352" y="1508760"/>
-            <a:ext cx="5394960" cy="2468880"/>
+          <p:cNvPr id="6" name="Shape 3"/>
+          <p:cNvSpPr/>
+          <p:nvPr/>
+        </p:nvSpPr>
+        <p:spPr>
+          <a:xfrm>
+            <a:off x="530352" y="1188720"/>
+            <a:ext cx="5394960" cy="2651760"/>
           </a:xfrm>
           <a:prstGeom prst="roundRect">
             <a:avLst>
-              <a:gd name="adj" fmla="val 2222"/>
+              <a:gd name="adj" fmla="val 2069"/>
             </a:avLst>
           </a:prstGeom>
           <a:solidFill>
@@ -2337,14 +2387,14 @@
       </p:sp>
       <p:sp>
         <p:nvSpPr>
-          <p:cNvPr id="8" name="Text 5"/>
-          <p:cNvSpPr/>
-          <p:nvPr/>
-        </p:nvSpPr>
-        <p:spPr>
-          <a:xfrm>
-            <a:off x="530352" y="1508760"/>
-            <a:ext cx="5394960" cy="2468880"/>
+          <p:cNvPr id="7" name="Text 4"/>
+          <p:cNvSpPr/>
+          <p:nvPr/>
+        </p:nvSpPr>
+        <p:spPr>
+          <a:xfrm>
+            <a:off x="530352" y="1188720"/>
+            <a:ext cx="5394960" cy="2651760"/>
           </a:xfrm>
           <a:prstGeom prst="rect">
             <a:avLst/>
@@ -2376,18 +2426,18 @@
       </p:sp>
       <p:sp>
         <p:nvSpPr>
-          <p:cNvPr id="9" name="Shape 6"/>
-          <p:cNvSpPr/>
-          <p:nvPr/>
-        </p:nvSpPr>
-        <p:spPr>
-          <a:xfrm>
-            <a:off x="6263640" y="1508760"/>
-            <a:ext cx="5394960" cy="2468880"/>
+          <p:cNvPr id="8" name="Shape 5"/>
+          <p:cNvSpPr/>
+          <p:nvPr/>
+        </p:nvSpPr>
+        <p:spPr>
+          <a:xfrm>
+            <a:off x="6263640" y="1188720"/>
+            <a:ext cx="5394960" cy="2651760"/>
           </a:xfrm>
           <a:prstGeom prst="roundRect">
             <a:avLst>
-              <a:gd name="adj" fmla="val 2222"/>
+              <a:gd name="adj" fmla="val 2069"/>
             </a:avLst>
           </a:prstGeom>
           <a:solidFill>
@@ -2403,14 +2453,14 @@
       </p:sp>
       <p:sp>
         <p:nvSpPr>
-          <p:cNvPr id="10" name="Text 7"/>
-          <p:cNvSpPr/>
-          <p:nvPr/>
-        </p:nvSpPr>
-        <p:spPr>
-          <a:xfrm>
-            <a:off x="6263640" y="1508760"/>
-            <a:ext cx="5394960" cy="2468880"/>
+          <p:cNvPr id="9" name="Text 6"/>
+          <p:cNvSpPr/>
+          <p:nvPr/>
+        </p:nvSpPr>
+        <p:spPr>
+          <a:xfrm>
+            <a:off x="6263640" y="1188720"/>
+            <a:ext cx="5394960" cy="2651760"/>
           </a:xfrm>
           <a:prstGeom prst="rect">
             <a:avLst/>
@@ -2442,13 +2492,13 @@
       </p:sp>
       <p:sp>
         <p:nvSpPr>
-          <p:cNvPr id="11" name="Text 8"/>
-          <p:cNvSpPr/>
-          <p:nvPr/>
-        </p:nvSpPr>
-        <p:spPr>
-          <a:xfrm>
-            <a:off x="530352" y="4114800"/>
+          <p:cNvPr id="10" name="Text 7"/>
+          <p:cNvSpPr/>
+          <p:nvPr/>
+        </p:nvSpPr>
+        <p:spPr>
+          <a:xfrm>
+            <a:off x="530352" y="3977640"/>
             <a:ext cx="5394960" cy="457200"/>
           </a:xfrm>
           <a:prstGeom prst="rect">
@@ -2473,7 +2523,7 @@
                 <a:ea typeface="Malgun Gothic" pitchFamily="34" charset="-122"/>
                 <a:cs typeface="Malgun Gothic" pitchFamily="34" charset="-120"/>
               </a:rPr>
-              <a:t>Technical Academy — 자료 미제공 – 추후 업데이트</a:t>
+              <a:t>자료 미제공 – 추후 업데이트</a:t>
             </a:r>
             <a:endParaRPr lang="en-US" sz="1300" dirty="0"/>
           </a:p>
@@ -2481,13 +2531,13 @@
       </p:sp>
       <p:sp>
         <p:nvSpPr>
-          <p:cNvPr id="12" name="Text 9"/>
-          <p:cNvSpPr/>
-          <p:nvPr/>
-        </p:nvSpPr>
-        <p:spPr>
-          <a:xfrm>
-            <a:off x="6263640" y="4114800"/>
+          <p:cNvPr id="11" name="Text 8"/>
+          <p:cNvSpPr/>
+          <p:nvPr/>
+        </p:nvSpPr>
+        <p:spPr>
+          <a:xfrm>
+            <a:off x="6263640" y="3977640"/>
             <a:ext cx="5394960" cy="457200"/>
           </a:xfrm>
           <a:prstGeom prst="rect">
@@ -2512,9 +2562,48 @@
                 <a:ea typeface="Malgun Gothic" pitchFamily="34" charset="-122"/>
                 <a:cs typeface="Malgun Gothic" pitchFamily="34" charset="-120"/>
               </a:rPr>
-              <a:t>Working Group — 자료 미제공 – 추후 업데이트</a:t>
+              <a:t>자료 미제공 – 추후 업데이트</a:t>
             </a:r>
             <a:endParaRPr lang="en-US" sz="1300" dirty="0"/>
+          </a:p>
+        </p:txBody>
+      </p:sp>
+      <p:sp>
+        <p:nvSpPr>
+          <p:cNvPr id="12" name="Text 9"/>
+          <p:cNvSpPr/>
+          <p:nvPr/>
+        </p:nvSpPr>
+        <p:spPr>
+          <a:xfrm>
+            <a:off x="530352" y="4480560"/>
+            <a:ext cx="11100816" cy="365760"/>
+          </a:xfrm>
+          <a:prstGeom prst="rect">
+            <a:avLst/>
+          </a:prstGeom>
+          <a:noFill/>
+          <a:ln/>
+        </p:spPr>
+        <p:txBody>
+          <a:bodyPr wrap="square" lIns="0" tIns="0" rIns="0" bIns="0" rtlCol="0" anchor="ctr"/>
+          <a:lstStyle/>
+          <a:p>
+            <a:pPr indent="0" marL="0">
+              <a:buNone/>
+            </a:pPr>
+            <a:r>
+              <a:rPr lang="en-US" sz="1100" i="1" dirty="0">
+                <a:solidFill>
+                  <a:srgbClr val="9E9E9E"/>
+                </a:solidFill>
+                <a:latin typeface="Malgun Gothic" pitchFamily="34" charset="0"/>
+                <a:ea typeface="Malgun Gothic" pitchFamily="34" charset="-122"/>
+                <a:cs typeface="Malgun Gothic" pitchFamily="34" charset="-120"/>
+              </a:rPr>
+              <a:t>대리점(에이전시) 대상 기술 교육, 서비스 프로세스 안내 등 처리 현황</a:t>
+            </a:r>
+            <a:endParaRPr lang="en-US" sz="1100" dirty="0"/>
           </a:p>
         </p:txBody>
       </p:sp>
@@ -2720,7 +2809,7 @@
                 <a:ea typeface="Malgun Gothic" pitchFamily="34" charset="-122"/>
                 <a:cs typeface="Malgun Gothic" pitchFamily="34" charset="-120"/>
               </a:rPr>
-              <a:t>고객 중심 서비스 하이라이트</a:t>
+              <a:t>직원교육</a:t>
             </a:r>
             <a:endParaRPr lang="en-US" sz="2600" dirty="0"/>
           </a:p>
@@ -2752,36 +2841,14 @@
       </p:pic>
       <p:sp>
         <p:nvSpPr>
-          <p:cNvPr id="6" name="Shape 3"/>
-          <p:cNvSpPr/>
-          <p:nvPr/>
-        </p:nvSpPr>
-        <p:spPr>
-          <a:xfrm>
-            <a:off x="530352" y="1234440"/>
-            <a:ext cx="3566160" cy="2011680"/>
-          </a:xfrm>
-          <a:prstGeom prst="roundRect">
-            <a:avLst>
-              <a:gd name="adj" fmla="val 3636"/>
-            </a:avLst>
-          </a:prstGeom>
-          <a:solidFill>
-            <a:srgbClr val="F5F8FC"/>
-          </a:solidFill>
-          <a:ln/>
-        </p:spPr>
-      </p:sp>
-      <p:sp>
-        <p:nvSpPr>
-          <p:cNvPr id="7" name="Text 4"/>
-          <p:cNvSpPr/>
-          <p:nvPr/>
-        </p:nvSpPr>
-        <p:spPr>
-          <a:xfrm>
-            <a:off x="713232" y="1417320"/>
-            <a:ext cx="3200400" cy="457200"/>
+          <p:cNvPr id="6" name="Text 3"/>
+          <p:cNvSpPr/>
+          <p:nvPr/>
+        </p:nvSpPr>
+        <p:spPr>
+          <a:xfrm>
+            <a:off x="530352" y="1051560"/>
+            <a:ext cx="11100816" cy="365760"/>
           </a:xfrm>
           <a:prstGeom prst="rect">
             <a:avLst/>
@@ -2793,85 +2860,7 @@
           <a:bodyPr wrap="square" lIns="0" tIns="0" rIns="0" bIns="0" rtlCol="0" anchor="ctr"/>
           <a:lstStyle/>
           <a:p>
-            <a:pPr algn="ctr" indent="0" marL="0">
-              <a:buNone/>
-            </a:pPr>
-            <a:r>
-              <a:rPr lang="en-US" sz="1500" b="1" dirty="0">
-                <a:solidFill>
-                  <a:srgbClr val="005BAC"/>
-                </a:solidFill>
-                <a:latin typeface="Malgun Gothic" pitchFamily="34" charset="0"/>
-                <a:ea typeface="Malgun Gothic" pitchFamily="34" charset="-122"/>
-                <a:cs typeface="Malgun Gothic" pitchFamily="34" charset="-120"/>
-              </a:rPr>
-              <a:t>VOC 대응</a:t>
-            </a:r>
-            <a:endParaRPr lang="en-US" sz="1500" dirty="0"/>
-          </a:p>
-        </p:txBody>
-      </p:sp>
-      <p:sp>
-        <p:nvSpPr>
-          <p:cNvPr id="8" name="Text 5"/>
-          <p:cNvSpPr/>
-          <p:nvPr/>
-        </p:nvSpPr>
-        <p:spPr>
-          <a:xfrm>
-            <a:off x="713232" y="1920240"/>
-            <a:ext cx="3200400" cy="365760"/>
-          </a:xfrm>
-          <a:prstGeom prst="rect">
-            <a:avLst/>
-          </a:prstGeom>
-          <a:noFill/>
-          <a:ln/>
-        </p:spPr>
-        <p:txBody>
-          <a:bodyPr wrap="square" lIns="0" tIns="0" rIns="0" bIns="0" rtlCol="0" anchor="ctr"/>
-          <a:lstStyle/>
-          <a:p>
-            <a:pPr algn="ctr" indent="0" marL="0">
-              <a:buNone/>
-            </a:pPr>
-            <a:r>
-              <a:rPr lang="en-US" sz="1100" dirty="0">
-                <a:solidFill>
-                  <a:srgbClr val="3F3F3F"/>
-                </a:solidFill>
-                <a:latin typeface="Malgun Gothic" pitchFamily="34" charset="0"/>
-                <a:ea typeface="Malgun Gothic" pitchFamily="34" charset="-122"/>
-                <a:cs typeface="Malgun Gothic" pitchFamily="34" charset="-120"/>
-              </a:rPr>
-              <a:t>고객 피드백 기반 개선</a:t>
-            </a:r>
-            <a:endParaRPr lang="en-US" sz="1100" dirty="0"/>
-          </a:p>
-        </p:txBody>
-      </p:sp>
-      <p:sp>
-        <p:nvSpPr>
-          <p:cNvPr id="9" name="Text 6"/>
-          <p:cNvSpPr/>
-          <p:nvPr/>
-        </p:nvSpPr>
-        <p:spPr>
-          <a:xfrm>
-            <a:off x="713232" y="2377440"/>
-            <a:ext cx="3200400" cy="731520"/>
-          </a:xfrm>
-          <a:prstGeom prst="rect">
-            <a:avLst/>
-          </a:prstGeom>
-          <a:noFill/>
-          <a:ln/>
-        </p:spPr>
-        <p:txBody>
-          <a:bodyPr wrap="square" lIns="0" tIns="0" rIns="0" bIns="0" rtlCol="0" anchor="ctr"/>
-          <a:lstStyle/>
-          <a:p>
-            <a:pPr algn="ctr" indent="0" marL="0">
+            <a:pPr indent="0" marL="0">
               <a:buNone/>
             </a:pPr>
             <a:r>
@@ -2883,7 +2872,7 @@
                 <a:ea typeface="Malgun Gothic" pitchFamily="34" charset="-122"/>
                 <a:cs typeface="Malgun Gothic" pitchFamily="34" charset="-120"/>
               </a:rPr>
-              <a:t>자료 미제공 – 추후 업데이트</a:t>
+              <a:t>Sysmex Technical Academy: 주니어 레벨 빠른 성장 및 Expert Engineer 육성 · Working Group: 4개 분야(Hema/Urine/Coa/Immuno) 전문성 강화</a:t>
             </a:r>
             <a:endParaRPr lang="en-US" sz="1100" dirty="0"/>
           </a:p>
@@ -2891,36 +2880,41 @@
       </p:sp>
       <p:sp>
         <p:nvSpPr>
-          <p:cNvPr id="10" name="Shape 7"/>
-          <p:cNvSpPr/>
-          <p:nvPr/>
-        </p:nvSpPr>
-        <p:spPr>
-          <a:xfrm>
-            <a:off x="4279392" y="1234440"/>
-            <a:ext cx="3566160" cy="2011680"/>
+          <p:cNvPr id="7" name="Shape 4"/>
+          <p:cNvSpPr/>
+          <p:nvPr/>
+        </p:nvSpPr>
+        <p:spPr>
+          <a:xfrm>
+            <a:off x="530352" y="1508760"/>
+            <a:ext cx="5394960" cy="2468880"/>
           </a:xfrm>
           <a:prstGeom prst="roundRect">
             <a:avLst>
-              <a:gd name="adj" fmla="val 3636"/>
+              <a:gd name="adj" fmla="val 2222"/>
             </a:avLst>
           </a:prstGeom>
           <a:solidFill>
-            <a:srgbClr val="F5F8FC"/>
+            <a:srgbClr val="EFEFEF"/>
           </a:solidFill>
-          <a:ln/>
-        </p:spPr>
-      </p:sp>
-      <p:sp>
-        <p:nvSpPr>
-          <p:cNvPr id="11" name="Text 8"/>
-          <p:cNvSpPr/>
-          <p:nvPr/>
-        </p:nvSpPr>
-        <p:spPr>
-          <a:xfrm>
-            <a:off x="4462272" y="1417320"/>
-            <a:ext cx="3200400" cy="457200"/>
+          <a:ln w="9525">
+            <a:solidFill>
+              <a:srgbClr val="9E9E9E"/>
+            </a:solidFill>
+            <a:prstDash val="dash"/>
+          </a:ln>
+        </p:spPr>
+      </p:sp>
+      <p:sp>
+        <p:nvSpPr>
+          <p:cNvPr id="8" name="Text 5"/>
+          <p:cNvSpPr/>
+          <p:nvPr/>
+        </p:nvSpPr>
+        <p:spPr>
+          <a:xfrm>
+            <a:off x="530352" y="1508760"/>
+            <a:ext cx="5394960" cy="2468880"/>
           </a:xfrm>
           <a:prstGeom prst="rect">
             <a:avLst/>
@@ -2936,85 +2930,7 @@
               <a:buNone/>
             </a:pPr>
             <a:r>
-              <a:rPr lang="en-US" sz="1500" b="1" dirty="0">
-                <a:solidFill>
-                  <a:srgbClr val="005BAC"/>
-                </a:solidFill>
-                <a:latin typeface="Malgun Gothic" pitchFamily="34" charset="0"/>
-                <a:ea typeface="Malgun Gothic" pitchFamily="34" charset="-122"/>
-                <a:cs typeface="Malgun Gothic" pitchFamily="34" charset="-120"/>
-              </a:rPr>
-              <a:t>중대 이슈 대응력</a:t>
-            </a:r>
-            <a:endParaRPr lang="en-US" sz="1500" dirty="0"/>
-          </a:p>
-        </p:txBody>
-      </p:sp>
-      <p:sp>
-        <p:nvSpPr>
-          <p:cNvPr id="12" name="Text 9"/>
-          <p:cNvSpPr/>
-          <p:nvPr/>
-        </p:nvSpPr>
-        <p:spPr>
-          <a:xfrm>
-            <a:off x="4462272" y="1920240"/>
-            <a:ext cx="3200400" cy="365760"/>
-          </a:xfrm>
-          <a:prstGeom prst="rect">
-            <a:avLst/>
-          </a:prstGeom>
-          <a:noFill/>
-          <a:ln/>
-        </p:spPr>
-        <p:txBody>
-          <a:bodyPr wrap="square" lIns="0" tIns="0" rIns="0" bIns="0" rtlCol="0" anchor="ctr"/>
-          <a:lstStyle/>
-          <a:p>
-            <a:pPr algn="ctr" indent="0" marL="0">
-              <a:buNone/>
-            </a:pPr>
-            <a:r>
-              <a:rPr lang="en-US" sz="1100" dirty="0">
-                <a:solidFill>
-                  <a:srgbClr val="3F3F3F"/>
-                </a:solidFill>
-                <a:latin typeface="Malgun Gothic" pitchFamily="34" charset="0"/>
-                <a:ea typeface="Malgun Gothic" pitchFamily="34" charset="-122"/>
-                <a:cs typeface="Malgun Gothic" pitchFamily="34" charset="-120"/>
-              </a:rPr>
-              <a:t>SLA 준수 · 신속 종결</a:t>
-            </a:r>
-            <a:endParaRPr lang="en-US" sz="1100" dirty="0"/>
-          </a:p>
-        </p:txBody>
-      </p:sp>
-      <p:sp>
-        <p:nvSpPr>
-          <p:cNvPr id="13" name="Text 10"/>
-          <p:cNvSpPr/>
-          <p:nvPr/>
-        </p:nvSpPr>
-        <p:spPr>
-          <a:xfrm>
-            <a:off x="4462272" y="2377440"/>
-            <a:ext cx="3200400" cy="731520"/>
-          </a:xfrm>
-          <a:prstGeom prst="rect">
-            <a:avLst/>
-          </a:prstGeom>
-          <a:noFill/>
-          <a:ln/>
-        </p:spPr>
-        <p:txBody>
-          <a:bodyPr wrap="square" lIns="0" tIns="0" rIns="0" bIns="0" rtlCol="0" anchor="ctr"/>
-          <a:lstStyle/>
-          <a:p>
-            <a:pPr algn="ctr" indent="0" marL="0">
-              <a:buNone/>
-            </a:pPr>
-            <a:r>
-              <a:rPr lang="en-US" sz="1100" i="1" dirty="0">
+              <a:rPr lang="en-US" sz="1400" dirty="0">
                 <a:solidFill>
                   <a:srgbClr val="9E9E9E"/>
                 </a:solidFill>
@@ -3022,44 +2938,49 @@
                 <a:ea typeface="Malgun Gothic" pitchFamily="34" charset="-122"/>
                 <a:cs typeface="Malgun Gothic" pitchFamily="34" charset="-120"/>
               </a:rPr>
-              <a:t>자료 미제공 – 추후 업데이트</a:t>
-            </a:r>
-            <a:endParaRPr lang="en-US" sz="1100" dirty="0"/>
-          </a:p>
-        </p:txBody>
-      </p:sp>
-      <p:sp>
-        <p:nvSpPr>
-          <p:cNvPr id="14" name="Shape 11"/>
-          <p:cNvSpPr/>
-          <p:nvPr/>
-        </p:nvSpPr>
-        <p:spPr>
-          <a:xfrm>
-            <a:off x="8028432" y="1234440"/>
-            <a:ext cx="3566160" cy="2011680"/>
+              <a:t>사진 자리 (Placeholder)</a:t>
+            </a:r>
+            <a:endParaRPr lang="en-US" sz="1400" dirty="0"/>
+          </a:p>
+        </p:txBody>
+      </p:sp>
+      <p:sp>
+        <p:nvSpPr>
+          <p:cNvPr id="9" name="Shape 6"/>
+          <p:cNvSpPr/>
+          <p:nvPr/>
+        </p:nvSpPr>
+        <p:spPr>
+          <a:xfrm>
+            <a:off x="6263640" y="1508760"/>
+            <a:ext cx="5394960" cy="2468880"/>
           </a:xfrm>
           <a:prstGeom prst="roundRect">
             <a:avLst>
-              <a:gd name="adj" fmla="val 3636"/>
+              <a:gd name="adj" fmla="val 2222"/>
             </a:avLst>
           </a:prstGeom>
           <a:solidFill>
-            <a:srgbClr val="F5F8FC"/>
+            <a:srgbClr val="EFEFEF"/>
           </a:solidFill>
-          <a:ln/>
-        </p:spPr>
-      </p:sp>
-      <p:sp>
-        <p:nvSpPr>
-          <p:cNvPr id="15" name="Text 12"/>
-          <p:cNvSpPr/>
-          <p:nvPr/>
-        </p:nvSpPr>
-        <p:spPr>
-          <a:xfrm>
-            <a:off x="8211312" y="1417320"/>
-            <a:ext cx="3200400" cy="457200"/>
+          <a:ln w="9525">
+            <a:solidFill>
+              <a:srgbClr val="9E9E9E"/>
+            </a:solidFill>
+            <a:prstDash val="dash"/>
+          </a:ln>
+        </p:spPr>
+      </p:sp>
+      <p:sp>
+        <p:nvSpPr>
+          <p:cNvPr id="10" name="Text 7"/>
+          <p:cNvSpPr/>
+          <p:nvPr/>
+        </p:nvSpPr>
+        <p:spPr>
+          <a:xfrm>
+            <a:off x="6263640" y="1508760"/>
+            <a:ext cx="5394960" cy="2468880"/>
           </a:xfrm>
           <a:prstGeom prst="rect">
             <a:avLst/>
@@ -3075,85 +2996,7 @@
               <a:buNone/>
             </a:pPr>
             <a:r>
-              <a:rPr lang="en-US" sz="1500" b="1" dirty="0">
-                <a:solidFill>
-                  <a:srgbClr val="005BAC"/>
-                </a:solidFill>
-                <a:latin typeface="Malgun Gothic" pitchFamily="34" charset="0"/>
-                <a:ea typeface="Malgun Gothic" pitchFamily="34" charset="-122"/>
-                <a:cs typeface="Malgun Gothic" pitchFamily="34" charset="-120"/>
-              </a:rPr>
-              <a:t>대리점/직원 역량</a:t>
-            </a:r>
-            <a:endParaRPr lang="en-US" sz="1500" dirty="0"/>
-          </a:p>
-        </p:txBody>
-      </p:sp>
-      <p:sp>
-        <p:nvSpPr>
-          <p:cNvPr id="16" name="Text 13"/>
-          <p:cNvSpPr/>
-          <p:nvPr/>
-        </p:nvSpPr>
-        <p:spPr>
-          <a:xfrm>
-            <a:off x="8211312" y="1920240"/>
-            <a:ext cx="3200400" cy="365760"/>
-          </a:xfrm>
-          <a:prstGeom prst="rect">
-            <a:avLst/>
-          </a:prstGeom>
-          <a:noFill/>
-          <a:ln/>
-        </p:spPr>
-        <p:txBody>
-          <a:bodyPr wrap="square" lIns="0" tIns="0" rIns="0" bIns="0" rtlCol="0" anchor="ctr"/>
-          <a:lstStyle/>
-          <a:p>
-            <a:pPr algn="ctr" indent="0" marL="0">
-              <a:buNone/>
-            </a:pPr>
-            <a:r>
-              <a:rPr lang="en-US" sz="1100" dirty="0">
-                <a:solidFill>
-                  <a:srgbClr val="3F3F3F"/>
-                </a:solidFill>
-                <a:latin typeface="Malgun Gothic" pitchFamily="34" charset="0"/>
-                <a:ea typeface="Malgun Gothic" pitchFamily="34" charset="-122"/>
-                <a:cs typeface="Malgun Gothic" pitchFamily="34" charset="-120"/>
-              </a:rPr>
-              <a:t>교육 통한 서비스 품질 제고</a:t>
-            </a:r>
-            <a:endParaRPr lang="en-US" sz="1100" dirty="0"/>
-          </a:p>
-        </p:txBody>
-      </p:sp>
-      <p:sp>
-        <p:nvSpPr>
-          <p:cNvPr id="17" name="Text 14"/>
-          <p:cNvSpPr/>
-          <p:nvPr/>
-        </p:nvSpPr>
-        <p:spPr>
-          <a:xfrm>
-            <a:off x="8211312" y="2377440"/>
-            <a:ext cx="3200400" cy="731520"/>
-          </a:xfrm>
-          <a:prstGeom prst="rect">
-            <a:avLst/>
-          </a:prstGeom>
-          <a:noFill/>
-          <a:ln/>
-        </p:spPr>
-        <p:txBody>
-          <a:bodyPr wrap="square" lIns="0" tIns="0" rIns="0" bIns="0" rtlCol="0" anchor="ctr"/>
-          <a:lstStyle/>
-          <a:p>
-            <a:pPr algn="ctr" indent="0" marL="0">
-              <a:buNone/>
-            </a:pPr>
-            <a:r>
-              <a:rPr lang="en-US" sz="1100" i="1" dirty="0">
+              <a:rPr lang="en-US" sz="1400" dirty="0">
                 <a:solidFill>
                   <a:srgbClr val="9E9E9E"/>
                 </a:solidFill>
@@ -3161,44 +3004,22 @@
                 <a:ea typeface="Malgun Gothic" pitchFamily="34" charset="-122"/>
                 <a:cs typeface="Malgun Gothic" pitchFamily="34" charset="-120"/>
               </a:rPr>
-              <a:t>자료 미제공 – 추후 업데이트</a:t>
-            </a:r>
-            <a:endParaRPr lang="en-US" sz="1100" dirty="0"/>
-          </a:p>
-        </p:txBody>
-      </p:sp>
-      <p:sp>
-        <p:nvSpPr>
-          <p:cNvPr id="18" name="Shape 15"/>
-          <p:cNvSpPr/>
-          <p:nvPr/>
-        </p:nvSpPr>
-        <p:spPr>
-          <a:xfrm>
-            <a:off x="530352" y="3520440"/>
-            <a:ext cx="11100816" cy="2103120"/>
-          </a:xfrm>
-          <a:prstGeom prst="roundRect">
-            <a:avLst>
-              <a:gd name="adj" fmla="val 3478"/>
-            </a:avLst>
-          </a:prstGeom>
-          <a:solidFill>
-            <a:srgbClr val="E6EEF7"/>
-          </a:solidFill>
-          <a:ln/>
-        </p:spPr>
-      </p:sp>
-      <p:sp>
-        <p:nvSpPr>
-          <p:cNvPr id="19" name="Text 16"/>
-          <p:cNvSpPr/>
-          <p:nvPr/>
-        </p:nvSpPr>
-        <p:spPr>
-          <a:xfrm>
-            <a:off x="777240" y="3657600"/>
-            <a:ext cx="4572000" cy="320040"/>
+              <a:t>사진 자리 (Placeholder)</a:t>
+            </a:r>
+            <a:endParaRPr lang="en-US" sz="1400" dirty="0"/>
+          </a:p>
+        </p:txBody>
+      </p:sp>
+      <p:sp>
+        <p:nvSpPr>
+          <p:cNvPr id="11" name="Text 8"/>
+          <p:cNvSpPr/>
+          <p:nvPr/>
+        </p:nvSpPr>
+        <p:spPr>
+          <a:xfrm>
+            <a:off x="530352" y="4114800"/>
+            <a:ext cx="5394960" cy="457200"/>
           </a:xfrm>
           <a:prstGeom prst="rect">
             <a:avLst/>
@@ -3214,15 +3035,15 @@
               <a:buNone/>
             </a:pPr>
             <a:r>
-              <a:rPr lang="en-US" sz="1300" b="1" dirty="0">
+              <a:rPr lang="en-US" sz="1300" i="1" dirty="0">
                 <a:solidFill>
-                  <a:srgbClr val="005BAC"/>
+                  <a:srgbClr val="9E9E9E"/>
                 </a:solidFill>
                 <a:latin typeface="Malgun Gothic" pitchFamily="34" charset="0"/>
                 <a:ea typeface="Malgun Gothic" pitchFamily="34" charset="-122"/>
                 <a:cs typeface="Malgun Gothic" pitchFamily="34" charset="-120"/>
               </a:rPr>
-              <a:t>고객 중심 Insight</a:t>
+              <a:t>Technical Academy — 자료 미제공 – 추후 업데이트</a:t>
             </a:r>
             <a:endParaRPr lang="en-US" sz="1300" dirty="0"/>
           </a:p>
@@ -3230,14 +3051,14 @@
       </p:sp>
       <p:sp>
         <p:nvSpPr>
-          <p:cNvPr id="20" name="Text 17"/>
-          <p:cNvSpPr/>
-          <p:nvPr/>
-        </p:nvSpPr>
-        <p:spPr>
-          <a:xfrm>
-            <a:off x="777240" y="4023360"/>
-            <a:ext cx="10607040" cy="1463040"/>
+          <p:cNvPr id="12" name="Text 9"/>
+          <p:cNvSpPr/>
+          <p:nvPr/>
+        </p:nvSpPr>
+        <p:spPr>
+          <a:xfrm>
+            <a:off x="6263640" y="4114800"/>
+            <a:ext cx="5394960" cy="457200"/>
           </a:xfrm>
           <a:prstGeom prst="rect">
             <a:avLst/>
@@ -3253,15 +3074,15 @@
               <a:buNone/>
             </a:pPr>
             <a:r>
-              <a:rPr lang="en-US" sz="1300" dirty="0">
+              <a:rPr lang="en-US" sz="1300" i="1" dirty="0">
                 <a:solidFill>
-                  <a:srgbClr val="3F3F3F"/>
+                  <a:srgbClr val="9E9E9E"/>
                 </a:solidFill>
                 <a:latin typeface="Malgun Gothic" pitchFamily="34" charset="0"/>
                 <a:ea typeface="Malgun Gothic" pitchFamily="34" charset="-122"/>
                 <a:cs typeface="Malgun Gothic" pitchFamily="34" charset="-120"/>
               </a:rPr>
-              <a:t>설치일정 CRM 데이터 분석 결과 (2026년 7월): 강남차병원·강남차여성병원 프로젝트(XR-9000/XR-1000)는 담당 엔지니어(Martin)가 설치 → 평가 지원 → 이전설치까지 4건을 연속 담당해 책임 담당제의 고객 연속성을 보여주는 우수 사례입니다. 설치·이전설치 평균 소요기간은 1.25일로 신속하게 처리되었으나, FS South팀은 7월 설치 실적 0건으로 팀간 업무량 편차 확인이 필요합니다.</a:t>
+              <a:t>Working Group — 자료 미제공 – 추후 업데이트</a:t>
             </a:r>
             <a:endParaRPr lang="en-US" sz="1300" dirty="0"/>
           </a:p>
@@ -3269,7 +3090,7 @@
       </p:sp>
       <p:sp>
         <p:nvSpPr>
-          <p:cNvPr id="21" name="Text 18"/>
+          <p:cNvPr id="13" name="Text 10"/>
           <p:cNvSpPr/>
           <p:nvPr/>
         </p:nvSpPr>
@@ -3308,7 +3129,7 @@
       </p:sp>
       <p:sp>
         <p:nvSpPr>
-          <p:cNvPr id="22" name="Text 19"/>
+          <p:cNvPr id="14" name="Text 11"/>
           <p:cNvSpPr/>
           <p:nvPr/>
         </p:nvSpPr>
@@ -3469,6 +3290,755 @@
                 <a:ea typeface="Malgun Gothic" pitchFamily="34" charset="-122"/>
                 <a:cs typeface="Malgun Gothic" pitchFamily="34" charset="-120"/>
               </a:rPr>
+              <a:t>고객 중심 서비스 하이라이트</a:t>
+            </a:r>
+            <a:endParaRPr lang="en-US" sz="2600" dirty="0"/>
+          </a:p>
+        </p:txBody>
+      </p:sp>
+      <p:pic>
+        <p:nvPicPr>
+          <p:cNvPr id="5" name="Image 0" descr="sysmex_logo_mono_blue.png">    </p:cNvPr>
+          <p:cNvPicPr>
+            <a:picLocks noChangeAspect="1"/>
+          </p:cNvPicPr>
+          <p:nvPr/>
+        </p:nvPicPr>
+        <p:blipFill>
+          <a:blip r:embed="rId1"/>
+          <a:stretch>
+            <a:fillRect/>
+          </a:stretch>
+        </p:blipFill>
+        <p:spPr>
+          <a:xfrm>
+            <a:off x="10652760" y="292608"/>
+            <a:ext cx="1097280" cy="420624"/>
+          </a:xfrm>
+          <a:prstGeom prst="rect">
+            <a:avLst/>
+          </a:prstGeom>
+        </p:spPr>
+      </p:pic>
+      <p:sp>
+        <p:nvSpPr>
+          <p:cNvPr id="6" name="Shape 3"/>
+          <p:cNvSpPr/>
+          <p:nvPr/>
+        </p:nvSpPr>
+        <p:spPr>
+          <a:xfrm>
+            <a:off x="530352" y="1234440"/>
+            <a:ext cx="3566160" cy="2011680"/>
+          </a:xfrm>
+          <a:prstGeom prst="roundRect">
+            <a:avLst>
+              <a:gd name="adj" fmla="val 3636"/>
+            </a:avLst>
+          </a:prstGeom>
+          <a:solidFill>
+            <a:srgbClr val="F5F8FC"/>
+          </a:solidFill>
+          <a:ln/>
+        </p:spPr>
+      </p:sp>
+      <p:sp>
+        <p:nvSpPr>
+          <p:cNvPr id="7" name="Text 4"/>
+          <p:cNvSpPr/>
+          <p:nvPr/>
+        </p:nvSpPr>
+        <p:spPr>
+          <a:xfrm>
+            <a:off x="713232" y="1417320"/>
+            <a:ext cx="3200400" cy="457200"/>
+          </a:xfrm>
+          <a:prstGeom prst="rect">
+            <a:avLst/>
+          </a:prstGeom>
+          <a:noFill/>
+          <a:ln/>
+        </p:spPr>
+        <p:txBody>
+          <a:bodyPr wrap="square" lIns="0" tIns="0" rIns="0" bIns="0" rtlCol="0" anchor="ctr"/>
+          <a:lstStyle/>
+          <a:p>
+            <a:pPr algn="ctr" indent="0" marL="0">
+              <a:buNone/>
+            </a:pPr>
+            <a:r>
+              <a:rPr lang="en-US" sz="1500" b="1" dirty="0">
+                <a:solidFill>
+                  <a:srgbClr val="005BAC"/>
+                </a:solidFill>
+                <a:latin typeface="Malgun Gothic" pitchFamily="34" charset="0"/>
+                <a:ea typeface="Malgun Gothic" pitchFamily="34" charset="-122"/>
+                <a:cs typeface="Malgun Gothic" pitchFamily="34" charset="-120"/>
+              </a:rPr>
+              <a:t>VOC 대응</a:t>
+            </a:r>
+            <a:endParaRPr lang="en-US" sz="1500" dirty="0"/>
+          </a:p>
+        </p:txBody>
+      </p:sp>
+      <p:sp>
+        <p:nvSpPr>
+          <p:cNvPr id="8" name="Text 5"/>
+          <p:cNvSpPr/>
+          <p:nvPr/>
+        </p:nvSpPr>
+        <p:spPr>
+          <a:xfrm>
+            <a:off x="713232" y="1920240"/>
+            <a:ext cx="3200400" cy="365760"/>
+          </a:xfrm>
+          <a:prstGeom prst="rect">
+            <a:avLst/>
+          </a:prstGeom>
+          <a:noFill/>
+          <a:ln/>
+        </p:spPr>
+        <p:txBody>
+          <a:bodyPr wrap="square" lIns="0" tIns="0" rIns="0" bIns="0" rtlCol="0" anchor="ctr"/>
+          <a:lstStyle/>
+          <a:p>
+            <a:pPr algn="ctr" indent="0" marL="0">
+              <a:buNone/>
+            </a:pPr>
+            <a:r>
+              <a:rPr lang="en-US" sz="1100" dirty="0">
+                <a:solidFill>
+                  <a:srgbClr val="3F3F3F"/>
+                </a:solidFill>
+                <a:latin typeface="Malgun Gothic" pitchFamily="34" charset="0"/>
+                <a:ea typeface="Malgun Gothic" pitchFamily="34" charset="-122"/>
+                <a:cs typeface="Malgun Gothic" pitchFamily="34" charset="-120"/>
+              </a:rPr>
+              <a:t>고객 피드백 기반 개선</a:t>
+            </a:r>
+            <a:endParaRPr lang="en-US" sz="1100" dirty="0"/>
+          </a:p>
+        </p:txBody>
+      </p:sp>
+      <p:sp>
+        <p:nvSpPr>
+          <p:cNvPr id="9" name="Text 6"/>
+          <p:cNvSpPr/>
+          <p:nvPr/>
+        </p:nvSpPr>
+        <p:spPr>
+          <a:xfrm>
+            <a:off x="713232" y="2377440"/>
+            <a:ext cx="3200400" cy="731520"/>
+          </a:xfrm>
+          <a:prstGeom prst="rect">
+            <a:avLst/>
+          </a:prstGeom>
+          <a:noFill/>
+          <a:ln/>
+        </p:spPr>
+        <p:txBody>
+          <a:bodyPr wrap="square" lIns="0" tIns="0" rIns="0" bIns="0" rtlCol="0" anchor="ctr"/>
+          <a:lstStyle/>
+          <a:p>
+            <a:pPr algn="ctr" indent="0" marL="0">
+              <a:buNone/>
+            </a:pPr>
+            <a:r>
+              <a:rPr lang="en-US" sz="1100" i="1" dirty="0">
+                <a:solidFill>
+                  <a:srgbClr val="9E9E9E"/>
+                </a:solidFill>
+                <a:latin typeface="Malgun Gothic" pitchFamily="34" charset="0"/>
+                <a:ea typeface="Malgun Gothic" pitchFamily="34" charset="-122"/>
+                <a:cs typeface="Malgun Gothic" pitchFamily="34" charset="-120"/>
+              </a:rPr>
+              <a:t>자료 미제공 – 추후 업데이트</a:t>
+            </a:r>
+            <a:endParaRPr lang="en-US" sz="1100" dirty="0"/>
+          </a:p>
+        </p:txBody>
+      </p:sp>
+      <p:sp>
+        <p:nvSpPr>
+          <p:cNvPr id="10" name="Shape 7"/>
+          <p:cNvSpPr/>
+          <p:nvPr/>
+        </p:nvSpPr>
+        <p:spPr>
+          <a:xfrm>
+            <a:off x="4279392" y="1234440"/>
+            <a:ext cx="3566160" cy="2011680"/>
+          </a:xfrm>
+          <a:prstGeom prst="roundRect">
+            <a:avLst>
+              <a:gd name="adj" fmla="val 3636"/>
+            </a:avLst>
+          </a:prstGeom>
+          <a:solidFill>
+            <a:srgbClr val="F5F8FC"/>
+          </a:solidFill>
+          <a:ln/>
+        </p:spPr>
+      </p:sp>
+      <p:sp>
+        <p:nvSpPr>
+          <p:cNvPr id="11" name="Text 8"/>
+          <p:cNvSpPr/>
+          <p:nvPr/>
+        </p:nvSpPr>
+        <p:spPr>
+          <a:xfrm>
+            <a:off x="4462272" y="1417320"/>
+            <a:ext cx="3200400" cy="457200"/>
+          </a:xfrm>
+          <a:prstGeom prst="rect">
+            <a:avLst/>
+          </a:prstGeom>
+          <a:noFill/>
+          <a:ln/>
+        </p:spPr>
+        <p:txBody>
+          <a:bodyPr wrap="square" lIns="0" tIns="0" rIns="0" bIns="0" rtlCol="0" anchor="ctr"/>
+          <a:lstStyle/>
+          <a:p>
+            <a:pPr algn="ctr" indent="0" marL="0">
+              <a:buNone/>
+            </a:pPr>
+            <a:r>
+              <a:rPr lang="en-US" sz="1500" b="1" dirty="0">
+                <a:solidFill>
+                  <a:srgbClr val="005BAC"/>
+                </a:solidFill>
+                <a:latin typeface="Malgun Gothic" pitchFamily="34" charset="0"/>
+                <a:ea typeface="Malgun Gothic" pitchFamily="34" charset="-122"/>
+                <a:cs typeface="Malgun Gothic" pitchFamily="34" charset="-120"/>
+              </a:rPr>
+              <a:t>중대 이슈 대응력</a:t>
+            </a:r>
+            <a:endParaRPr lang="en-US" sz="1500" dirty="0"/>
+          </a:p>
+        </p:txBody>
+      </p:sp>
+      <p:sp>
+        <p:nvSpPr>
+          <p:cNvPr id="12" name="Text 9"/>
+          <p:cNvSpPr/>
+          <p:nvPr/>
+        </p:nvSpPr>
+        <p:spPr>
+          <a:xfrm>
+            <a:off x="4462272" y="1920240"/>
+            <a:ext cx="3200400" cy="365760"/>
+          </a:xfrm>
+          <a:prstGeom prst="rect">
+            <a:avLst/>
+          </a:prstGeom>
+          <a:noFill/>
+          <a:ln/>
+        </p:spPr>
+        <p:txBody>
+          <a:bodyPr wrap="square" lIns="0" tIns="0" rIns="0" bIns="0" rtlCol="0" anchor="ctr"/>
+          <a:lstStyle/>
+          <a:p>
+            <a:pPr algn="ctr" indent="0" marL="0">
+              <a:buNone/>
+            </a:pPr>
+            <a:r>
+              <a:rPr lang="en-US" sz="1100" dirty="0">
+                <a:solidFill>
+                  <a:srgbClr val="3F3F3F"/>
+                </a:solidFill>
+                <a:latin typeface="Malgun Gothic" pitchFamily="34" charset="0"/>
+                <a:ea typeface="Malgun Gothic" pitchFamily="34" charset="-122"/>
+                <a:cs typeface="Malgun Gothic" pitchFamily="34" charset="-120"/>
+              </a:rPr>
+              <a:t>SLA 준수 · 신속 종결</a:t>
+            </a:r>
+            <a:endParaRPr lang="en-US" sz="1100" dirty="0"/>
+          </a:p>
+        </p:txBody>
+      </p:sp>
+      <p:sp>
+        <p:nvSpPr>
+          <p:cNvPr id="13" name="Text 10"/>
+          <p:cNvSpPr/>
+          <p:nvPr/>
+        </p:nvSpPr>
+        <p:spPr>
+          <a:xfrm>
+            <a:off x="4462272" y="2377440"/>
+            <a:ext cx="3200400" cy="731520"/>
+          </a:xfrm>
+          <a:prstGeom prst="rect">
+            <a:avLst/>
+          </a:prstGeom>
+          <a:noFill/>
+          <a:ln/>
+        </p:spPr>
+        <p:txBody>
+          <a:bodyPr wrap="square" lIns="0" tIns="0" rIns="0" bIns="0" rtlCol="0" anchor="ctr"/>
+          <a:lstStyle/>
+          <a:p>
+            <a:pPr algn="ctr" indent="0" marL="0">
+              <a:buNone/>
+            </a:pPr>
+            <a:r>
+              <a:rPr lang="en-US" sz="1100" i="1" dirty="0">
+                <a:solidFill>
+                  <a:srgbClr val="9E9E9E"/>
+                </a:solidFill>
+                <a:latin typeface="Malgun Gothic" pitchFamily="34" charset="0"/>
+                <a:ea typeface="Malgun Gothic" pitchFamily="34" charset="-122"/>
+                <a:cs typeface="Malgun Gothic" pitchFamily="34" charset="-120"/>
+              </a:rPr>
+              <a:t>자료 미제공 – 추후 업데이트</a:t>
+            </a:r>
+            <a:endParaRPr lang="en-US" sz="1100" dirty="0"/>
+          </a:p>
+        </p:txBody>
+      </p:sp>
+      <p:sp>
+        <p:nvSpPr>
+          <p:cNvPr id="14" name="Shape 11"/>
+          <p:cNvSpPr/>
+          <p:nvPr/>
+        </p:nvSpPr>
+        <p:spPr>
+          <a:xfrm>
+            <a:off x="8028432" y="1234440"/>
+            <a:ext cx="3566160" cy="2011680"/>
+          </a:xfrm>
+          <a:prstGeom prst="roundRect">
+            <a:avLst>
+              <a:gd name="adj" fmla="val 3636"/>
+            </a:avLst>
+          </a:prstGeom>
+          <a:solidFill>
+            <a:srgbClr val="F5F8FC"/>
+          </a:solidFill>
+          <a:ln/>
+        </p:spPr>
+      </p:sp>
+      <p:sp>
+        <p:nvSpPr>
+          <p:cNvPr id="15" name="Text 12"/>
+          <p:cNvSpPr/>
+          <p:nvPr/>
+        </p:nvSpPr>
+        <p:spPr>
+          <a:xfrm>
+            <a:off x="8211312" y="1417320"/>
+            <a:ext cx="3200400" cy="457200"/>
+          </a:xfrm>
+          <a:prstGeom prst="rect">
+            <a:avLst/>
+          </a:prstGeom>
+          <a:noFill/>
+          <a:ln/>
+        </p:spPr>
+        <p:txBody>
+          <a:bodyPr wrap="square" lIns="0" tIns="0" rIns="0" bIns="0" rtlCol="0" anchor="ctr"/>
+          <a:lstStyle/>
+          <a:p>
+            <a:pPr algn="ctr" indent="0" marL="0">
+              <a:buNone/>
+            </a:pPr>
+            <a:r>
+              <a:rPr lang="en-US" sz="1500" b="1" dirty="0">
+                <a:solidFill>
+                  <a:srgbClr val="005BAC"/>
+                </a:solidFill>
+                <a:latin typeface="Malgun Gothic" pitchFamily="34" charset="0"/>
+                <a:ea typeface="Malgun Gothic" pitchFamily="34" charset="-122"/>
+                <a:cs typeface="Malgun Gothic" pitchFamily="34" charset="-120"/>
+              </a:rPr>
+              <a:t>대리점/직원 역량</a:t>
+            </a:r>
+            <a:endParaRPr lang="en-US" sz="1500" dirty="0"/>
+          </a:p>
+        </p:txBody>
+      </p:sp>
+      <p:sp>
+        <p:nvSpPr>
+          <p:cNvPr id="16" name="Text 13"/>
+          <p:cNvSpPr/>
+          <p:nvPr/>
+        </p:nvSpPr>
+        <p:spPr>
+          <a:xfrm>
+            <a:off x="8211312" y="1920240"/>
+            <a:ext cx="3200400" cy="365760"/>
+          </a:xfrm>
+          <a:prstGeom prst="rect">
+            <a:avLst/>
+          </a:prstGeom>
+          <a:noFill/>
+          <a:ln/>
+        </p:spPr>
+        <p:txBody>
+          <a:bodyPr wrap="square" lIns="0" tIns="0" rIns="0" bIns="0" rtlCol="0" anchor="ctr"/>
+          <a:lstStyle/>
+          <a:p>
+            <a:pPr algn="ctr" indent="0" marL="0">
+              <a:buNone/>
+            </a:pPr>
+            <a:r>
+              <a:rPr lang="en-US" sz="1100" dirty="0">
+                <a:solidFill>
+                  <a:srgbClr val="3F3F3F"/>
+                </a:solidFill>
+                <a:latin typeface="Malgun Gothic" pitchFamily="34" charset="0"/>
+                <a:ea typeface="Malgun Gothic" pitchFamily="34" charset="-122"/>
+                <a:cs typeface="Malgun Gothic" pitchFamily="34" charset="-120"/>
+              </a:rPr>
+              <a:t>교육 통한 서비스 품질 제고</a:t>
+            </a:r>
+            <a:endParaRPr lang="en-US" sz="1100" dirty="0"/>
+          </a:p>
+        </p:txBody>
+      </p:sp>
+      <p:sp>
+        <p:nvSpPr>
+          <p:cNvPr id="17" name="Text 14"/>
+          <p:cNvSpPr/>
+          <p:nvPr/>
+        </p:nvSpPr>
+        <p:spPr>
+          <a:xfrm>
+            <a:off x="8211312" y="2377440"/>
+            <a:ext cx="3200400" cy="731520"/>
+          </a:xfrm>
+          <a:prstGeom prst="rect">
+            <a:avLst/>
+          </a:prstGeom>
+          <a:noFill/>
+          <a:ln/>
+        </p:spPr>
+        <p:txBody>
+          <a:bodyPr wrap="square" lIns="0" tIns="0" rIns="0" bIns="0" rtlCol="0" anchor="ctr"/>
+          <a:lstStyle/>
+          <a:p>
+            <a:pPr algn="ctr" indent="0" marL="0">
+              <a:buNone/>
+            </a:pPr>
+            <a:r>
+              <a:rPr lang="en-US" sz="1100" i="1" dirty="0">
+                <a:solidFill>
+                  <a:srgbClr val="9E9E9E"/>
+                </a:solidFill>
+                <a:latin typeface="Malgun Gothic" pitchFamily="34" charset="0"/>
+                <a:ea typeface="Malgun Gothic" pitchFamily="34" charset="-122"/>
+                <a:cs typeface="Malgun Gothic" pitchFamily="34" charset="-120"/>
+              </a:rPr>
+              <a:t>자료 미제공 – 추후 업데이트</a:t>
+            </a:r>
+            <a:endParaRPr lang="en-US" sz="1100" dirty="0"/>
+          </a:p>
+        </p:txBody>
+      </p:sp>
+      <p:sp>
+        <p:nvSpPr>
+          <p:cNvPr id="18" name="Shape 15"/>
+          <p:cNvSpPr/>
+          <p:nvPr/>
+        </p:nvSpPr>
+        <p:spPr>
+          <a:xfrm>
+            <a:off x="530352" y="3520440"/>
+            <a:ext cx="11100816" cy="2103120"/>
+          </a:xfrm>
+          <a:prstGeom prst="roundRect">
+            <a:avLst>
+              <a:gd name="adj" fmla="val 3478"/>
+            </a:avLst>
+          </a:prstGeom>
+          <a:solidFill>
+            <a:srgbClr val="E6EEF7"/>
+          </a:solidFill>
+          <a:ln/>
+        </p:spPr>
+      </p:sp>
+      <p:sp>
+        <p:nvSpPr>
+          <p:cNvPr id="19" name="Text 16"/>
+          <p:cNvSpPr/>
+          <p:nvPr/>
+        </p:nvSpPr>
+        <p:spPr>
+          <a:xfrm>
+            <a:off x="777240" y="3657600"/>
+            <a:ext cx="4572000" cy="320040"/>
+          </a:xfrm>
+          <a:prstGeom prst="rect">
+            <a:avLst/>
+          </a:prstGeom>
+          <a:noFill/>
+          <a:ln/>
+        </p:spPr>
+        <p:txBody>
+          <a:bodyPr wrap="square" lIns="0" tIns="0" rIns="0" bIns="0" rtlCol="0" anchor="ctr"/>
+          <a:lstStyle/>
+          <a:p>
+            <a:pPr indent="0" marL="0">
+              <a:buNone/>
+            </a:pPr>
+            <a:r>
+              <a:rPr lang="en-US" sz="1300" b="1" dirty="0">
+                <a:solidFill>
+                  <a:srgbClr val="005BAC"/>
+                </a:solidFill>
+                <a:latin typeface="Malgun Gothic" pitchFamily="34" charset="0"/>
+                <a:ea typeface="Malgun Gothic" pitchFamily="34" charset="-122"/>
+                <a:cs typeface="Malgun Gothic" pitchFamily="34" charset="-120"/>
+              </a:rPr>
+              <a:t>고객 중심 Insight</a:t>
+            </a:r>
+            <a:endParaRPr lang="en-US" sz="1300" dirty="0"/>
+          </a:p>
+        </p:txBody>
+      </p:sp>
+      <p:sp>
+        <p:nvSpPr>
+          <p:cNvPr id="20" name="Text 17"/>
+          <p:cNvSpPr/>
+          <p:nvPr/>
+        </p:nvSpPr>
+        <p:spPr>
+          <a:xfrm>
+            <a:off x="777240" y="4023360"/>
+            <a:ext cx="10607040" cy="1463040"/>
+          </a:xfrm>
+          <a:prstGeom prst="rect">
+            <a:avLst/>
+          </a:prstGeom>
+          <a:noFill/>
+          <a:ln/>
+        </p:spPr>
+        <p:txBody>
+          <a:bodyPr wrap="square" lIns="0" tIns="0" rIns="0" bIns="0" rtlCol="0" anchor="ctr"/>
+          <a:lstStyle/>
+          <a:p>
+            <a:pPr indent="0" marL="0">
+              <a:buNone/>
+            </a:pPr>
+            <a:r>
+              <a:rPr lang="en-US" sz="1300" dirty="0">
+                <a:solidFill>
+                  <a:srgbClr val="3F3F3F"/>
+                </a:solidFill>
+                <a:latin typeface="Malgun Gothic" pitchFamily="34" charset="0"/>
+                <a:ea typeface="Malgun Gothic" pitchFamily="34" charset="-122"/>
+                <a:cs typeface="Malgun Gothic" pitchFamily="34" charset="-120"/>
+              </a:rPr>
+              <a:t>설치일정 CRM 데이터 분석 결과 (2026년 7월): 강남차병원·강남차여성병원 프로젝트(XR-9000/XR-1000)는 담당 엔지니어(Martin)가 설치 → 평가 지원 → 이전설치까지 4건을 연속 담당해 책임 담당제의 고객 연속성을 보여주는 우수 사례입니다. 설치·이전설치 평균 소요기간은 1.25일로 신속하게 처리되었으나, FS South팀은 7월 설치 실적 0건으로 팀간 업무량 편차 확인이 필요합니다.</a:t>
+            </a:r>
+            <a:endParaRPr lang="en-US" sz="1300" dirty="0"/>
+          </a:p>
+        </p:txBody>
+      </p:sp>
+      <p:sp>
+        <p:nvSpPr>
+          <p:cNvPr id="21" name="Text 18"/>
+          <p:cNvSpPr/>
+          <p:nvPr/>
+        </p:nvSpPr>
+        <p:spPr>
+          <a:xfrm>
+            <a:off x="457200" y="6547104"/>
+            <a:ext cx="9601200" cy="274320"/>
+          </a:xfrm>
+          <a:prstGeom prst="rect">
+            <a:avLst/>
+          </a:prstGeom>
+          <a:noFill/>
+          <a:ln/>
+        </p:spPr>
+        <p:txBody>
+          <a:bodyPr wrap="square" rtlCol="0" anchor="ctr"/>
+          <a:lstStyle/>
+          <a:p>
+            <a:pPr algn="l" indent="0" marL="0">
+              <a:buNone/>
+            </a:pPr>
+            <a:r>
+              <a:rPr lang="en-US" sz="900" dirty="0">
+                <a:solidFill>
+                  <a:srgbClr val="9E9E9E"/>
+                </a:solidFill>
+                <a:latin typeface="Malgun Gothic" pitchFamily="34" charset="0"/>
+                <a:ea typeface="Malgun Gothic" pitchFamily="34" charset="-122"/>
+                <a:cs typeface="Malgun Gothic" pitchFamily="34" charset="-120"/>
+              </a:rPr>
+              <a:t>FS Group │ FSS Team · 2026년 7월 · Confidential</a:t>
+            </a:r>
+            <a:endParaRPr lang="en-US" sz="900" dirty="0"/>
+          </a:p>
+        </p:txBody>
+      </p:sp>
+      <p:sp>
+        <p:nvSpPr>
+          <p:cNvPr id="22" name="Text 19"/>
+          <p:cNvSpPr/>
+          <p:nvPr/>
+        </p:nvSpPr>
+        <p:spPr>
+          <a:xfrm>
+            <a:off x="11247120" y="6547104"/>
+            <a:ext cx="731520" cy="274320"/>
+          </a:xfrm>
+          <a:prstGeom prst="rect">
+            <a:avLst/>
+          </a:prstGeom>
+          <a:noFill/>
+          <a:ln/>
+        </p:spPr>
+        <p:txBody>
+          <a:bodyPr wrap="square" rtlCol="0" anchor="ctr"/>
+          <a:lstStyle/>
+          <a:p>
+            <a:pPr algn="r" indent="0" marL="0">
+              <a:buNone/>
+            </a:pPr>
+            <a:r>
+              <a:rPr lang="en-US" sz="900" dirty="0">
+                <a:solidFill>
+                  <a:srgbClr val="9E9E9E"/>
+                </a:solidFill>
+                <a:latin typeface="Arial" pitchFamily="34" charset="0"/>
+                <a:ea typeface="Arial" pitchFamily="34" charset="-122"/>
+                <a:cs typeface="Arial" pitchFamily="34" charset="-120"/>
+              </a:rPr>
+              <a:t>12</a:t>
+            </a:r>
+            <a:endParaRPr lang="en-US" sz="900" dirty="0"/>
+          </a:p>
+        </p:txBody>
+      </p:sp>
+    </p:spTree>
+  </p:cSld>
+  <p:clrMapOvr>
+    <a:masterClrMapping/>
+  </p:clrMapOvr>
+</p:sld>
+</file>
+
+<file path=ppt/slides/slide13.xml><?xml version="1.0" encoding="utf-8"?>
+<p:sld xmlns:a="http://schemas.openxmlformats.org/drawingml/2006/main" xmlns:r="http://schemas.openxmlformats.org/officeDocument/2006/relationships" xmlns:p="http://schemas.openxmlformats.org/presentationml/2006/main">
+  <p:cSld name="Slide 13">
+    <p:bg>
+      <p:bgPr>
+        <a:solidFill>
+          <a:srgbClr val="FFFFFF"/>
+        </a:solidFill>
+      </p:bgPr>
+    </p:bg>
+    <p:spTree>
+      <p:nvGrpSpPr>
+        <p:cNvPr id="1" name=""/>
+        <p:cNvGrpSpPr/>
+        <p:nvPr/>
+      </p:nvGrpSpPr>
+      <p:grpSpPr>
+        <a:xfrm>
+          <a:off x="0" y="0"/>
+          <a:ext cx="0" cy="0"/>
+          <a:chOff x="0" y="0"/>
+          <a:chExt cx="0" cy="0"/>
+        </a:xfrm>
+      </p:grpSpPr>
+      <p:sp>
+        <p:nvSpPr>
+          <p:cNvPr id="2" name="Shape 0"/>
+          <p:cNvSpPr/>
+          <p:nvPr/>
+        </p:nvSpPr>
+        <p:spPr>
+          <a:xfrm>
+            <a:off x="0" y="0"/>
+            <a:ext cx="10378440" cy="914400"/>
+          </a:xfrm>
+          <a:prstGeom prst="rect">
+            <a:avLst/>
+          </a:prstGeom>
+          <a:solidFill>
+            <a:srgbClr val="005BAC"/>
+          </a:solidFill>
+          <a:ln/>
+        </p:spPr>
+      </p:sp>
+      <p:sp>
+        <p:nvSpPr>
+          <p:cNvPr id="3" name="Text 1"/>
+          <p:cNvSpPr/>
+          <p:nvPr/>
+        </p:nvSpPr>
+        <p:spPr>
+          <a:xfrm>
+            <a:off x="502920" y="164592"/>
+            <a:ext cx="822960" cy="585216"/>
+          </a:xfrm>
+          <a:prstGeom prst="rect">
+            <a:avLst/>
+          </a:prstGeom>
+          <a:noFill/>
+          <a:ln/>
+        </p:spPr>
+        <p:txBody>
+          <a:bodyPr wrap="square" lIns="0" tIns="0" rIns="0" bIns="0" rtlCol="0" anchor="ctr"/>
+          <a:lstStyle/>
+          <a:p>
+            <a:pPr algn="l" indent="0" marL="0">
+              <a:buNone/>
+            </a:pPr>
+            <a:r>
+              <a:rPr lang="en-US" sz="3000" b="1" dirty="0">
+                <a:solidFill>
+                  <a:srgbClr val="00B8EE"/>
+                </a:solidFill>
+                <a:latin typeface="Arial" pitchFamily="34" charset="0"/>
+                <a:ea typeface="Arial" pitchFamily="34" charset="-122"/>
+                <a:cs typeface="Arial" pitchFamily="34" charset="-120"/>
+              </a:rPr>
+              <a:t>13</a:t>
+            </a:r>
+            <a:endParaRPr lang="en-US" sz="3000" dirty="0"/>
+          </a:p>
+        </p:txBody>
+      </p:sp>
+      <p:sp>
+        <p:nvSpPr>
+          <p:cNvPr id="4" name="Text 2"/>
+          <p:cNvSpPr/>
+          <p:nvPr/>
+        </p:nvSpPr>
+        <p:spPr>
+          <a:xfrm>
+            <a:off x="1234440" y="164592"/>
+            <a:ext cx="8595360" cy="585216"/>
+          </a:xfrm>
+          <a:prstGeom prst="rect">
+            <a:avLst/>
+          </a:prstGeom>
+          <a:noFill/>
+          <a:ln/>
+        </p:spPr>
+        <p:txBody>
+          <a:bodyPr wrap="square" lIns="0" tIns="0" rIns="0" bIns="0" rtlCol="0" anchor="ctr"/>
+          <a:lstStyle/>
+          <a:p>
+            <a:pPr algn="l" indent="0" marL="0">
+              <a:buNone/>
+            </a:pPr>
+            <a:r>
+              <a:rPr lang="en-US" sz="2600" b="1" dirty="0">
+                <a:solidFill>
+                  <a:srgbClr val="FFFFFF"/>
+                </a:solidFill>
+                <a:latin typeface="Malgun Gothic" pitchFamily="34" charset="0"/>
+                <a:ea typeface="Malgun Gothic" pitchFamily="34" charset="-122"/>
+                <a:cs typeface="Malgun Gothic" pitchFamily="34" charset="-120"/>
+              </a:rPr>
               <a:t>Next Step</a:t>
             </a:r>
             <a:endParaRPr lang="en-US" sz="2600" dirty="0"/>
@@ -4119,7 +4689,7 @@
                 <a:ea typeface="Arial" pitchFamily="34" charset="-122"/>
                 <a:cs typeface="Arial" pitchFamily="34" charset="-120"/>
               </a:rPr>
-              <a:t>12</a:t>
+              <a:t>13</a:t>
             </a:r>
             <a:endParaRPr lang="en-US" sz="900" dirty="0"/>
           </a:p>
@@ -4287,8 +4857,8 @@
         </p:nvSpPr>
         <p:spPr>
           <a:xfrm>
-            <a:off x="548640" y="1344168"/>
-            <a:ext cx="502920" cy="502920"/>
+            <a:off x="548640" y="1280160"/>
+            <a:ext cx="457200" cy="457200"/>
           </a:xfrm>
           <a:prstGeom prst="ellipse">
             <a:avLst/>
@@ -4307,8 +4877,8 @@
         </p:nvSpPr>
         <p:spPr>
           <a:xfrm>
-            <a:off x="548640" y="1344168"/>
-            <a:ext cx="502920" cy="502920"/>
+            <a:off x="548640" y="1280160"/>
+            <a:ext cx="457200" cy="457200"/>
           </a:xfrm>
           <a:prstGeom prst="rect">
             <a:avLst/>
@@ -4324,7 +4894,7 @@
               <a:buNone/>
             </a:pPr>
             <a:r>
-              <a:rPr lang="en-US" sz="1800" b="1" dirty="0">
+              <a:rPr lang="en-US" sz="1600" b="1" dirty="0">
                 <a:solidFill>
                   <a:srgbClr val="FFFFFF"/>
                 </a:solidFill>
@@ -4334,7 +4904,7 @@
               </a:rPr>
               <a:t>1</a:t>
             </a:r>
-            <a:endParaRPr lang="en-US" sz="1800" dirty="0"/>
+            <a:endParaRPr lang="en-US" sz="1600" dirty="0"/>
           </a:p>
         </p:txBody>
       </p:sp>
@@ -4346,8 +4916,8 @@
         </p:nvSpPr>
         <p:spPr>
           <a:xfrm>
-            <a:off x="1280160" y="1234440"/>
-            <a:ext cx="4572000" cy="365760"/>
+            <a:off x="1207008" y="1188720"/>
+            <a:ext cx="4572000" cy="347472"/>
           </a:xfrm>
           <a:prstGeom prst="rect">
             <a:avLst/>
@@ -4363,7 +4933,7 @@
               <a:buNone/>
             </a:pPr>
             <a:r>
-              <a:rPr lang="en-US" sz="1500" b="1" dirty="0">
+              <a:rPr lang="en-US" sz="1400" b="1" dirty="0">
                 <a:solidFill>
                   <a:srgbClr val="3F3F3F"/>
                 </a:solidFill>
@@ -4373,7 +4943,7 @@
               </a:rPr>
               <a:t>서비스 활동 보고</a:t>
             </a:r>
-            <a:endParaRPr lang="en-US" sz="1500" dirty="0"/>
+            <a:endParaRPr lang="en-US" sz="1400" dirty="0"/>
           </a:p>
         </p:txBody>
       </p:sp>
@@ -4385,8 +4955,8 @@
         </p:nvSpPr>
         <p:spPr>
           <a:xfrm>
-            <a:off x="1280160" y="1618488"/>
-            <a:ext cx="4572000" cy="640080"/>
+            <a:off x="1207008" y="1536192"/>
+            <a:ext cx="4572000" cy="548640"/>
           </a:xfrm>
           <a:prstGeom prst="rect">
             <a:avLst/>
@@ -4402,7 +4972,7 @@
               <a:buNone/>
             </a:pPr>
             <a:r>
-              <a:rPr lang="en-US" sz="1100" i="1" dirty="0">
+              <a:rPr lang="en-US" sz="1050" i="1" dirty="0">
                 <a:solidFill>
                   <a:srgbClr val="9E9E9E"/>
                 </a:solidFill>
@@ -4412,7 +4982,7 @@
               </a:rPr>
               <a:t>설치·PM·A/S 실적 및 KPI 요약</a:t>
             </a:r>
-            <a:endParaRPr lang="en-US" sz="1100" dirty="0"/>
+            <a:endParaRPr lang="en-US" sz="1050" dirty="0"/>
           </a:p>
         </p:txBody>
       </p:sp>
@@ -4424,8 +4994,8 @@
         </p:nvSpPr>
         <p:spPr>
           <a:xfrm>
-            <a:off x="548640" y="2578608"/>
-            <a:ext cx="502920" cy="502920"/>
+            <a:off x="548640" y="2286000"/>
+            <a:ext cx="457200" cy="457200"/>
           </a:xfrm>
           <a:prstGeom prst="ellipse">
             <a:avLst/>
@@ -4444,8 +5014,8 @@
         </p:nvSpPr>
         <p:spPr>
           <a:xfrm>
-            <a:off x="548640" y="2578608"/>
-            <a:ext cx="502920" cy="502920"/>
+            <a:off x="548640" y="2286000"/>
+            <a:ext cx="457200" cy="457200"/>
           </a:xfrm>
           <a:prstGeom prst="rect">
             <a:avLst/>
@@ -4461,7 +5031,7 @@
               <a:buNone/>
             </a:pPr>
             <a:r>
-              <a:rPr lang="en-US" sz="1800" b="1" dirty="0">
+              <a:rPr lang="en-US" sz="1600" b="1" dirty="0">
                 <a:solidFill>
                   <a:srgbClr val="FFFFFF"/>
                 </a:solidFill>
@@ -4471,7 +5041,7 @@
               </a:rPr>
               <a:t>2</a:t>
             </a:r>
-            <a:endParaRPr lang="en-US" sz="1800" dirty="0"/>
+            <a:endParaRPr lang="en-US" sz="1600" dirty="0"/>
           </a:p>
         </p:txBody>
       </p:sp>
@@ -4483,8 +5053,8 @@
         </p:nvSpPr>
         <p:spPr>
           <a:xfrm>
-            <a:off x="1280160" y="2468880"/>
-            <a:ext cx="4572000" cy="365760"/>
+            <a:off x="1207008" y="2194560"/>
+            <a:ext cx="4572000" cy="347472"/>
           </a:xfrm>
           <a:prstGeom prst="rect">
             <a:avLst/>
@@ -4500,7 +5070,7 @@
               <a:buNone/>
             </a:pPr>
             <a:r>
-              <a:rPr lang="en-US" sz="1500" b="1" dirty="0">
+              <a:rPr lang="en-US" sz="1400" b="1" dirty="0">
                 <a:solidFill>
                   <a:srgbClr val="3F3F3F"/>
                 </a:solidFill>
@@ -4510,7 +5080,7 @@
               </a:rPr>
               <a:t>장비별 설치 현황</a:t>
             </a:r>
-            <a:endParaRPr lang="en-US" sz="1500" dirty="0"/>
+            <a:endParaRPr lang="en-US" sz="1400" dirty="0"/>
           </a:p>
         </p:txBody>
       </p:sp>
@@ -4522,8 +5092,8 @@
         </p:nvSpPr>
         <p:spPr>
           <a:xfrm>
-            <a:off x="1280160" y="2852928"/>
-            <a:ext cx="4572000" cy="640080"/>
+            <a:off x="1207008" y="2542032"/>
+            <a:ext cx="4572000" cy="548640"/>
           </a:xfrm>
           <a:prstGeom prst="rect">
             <a:avLst/>
@@ -4539,7 +5109,7 @@
               <a:buNone/>
             </a:pPr>
             <a:r>
-              <a:rPr lang="en-US" sz="1100" i="1" dirty="0">
+              <a:rPr lang="en-US" sz="1050" i="1" dirty="0">
                 <a:solidFill>
                   <a:srgbClr val="9E9E9E"/>
                 </a:solidFill>
@@ -4549,7 +5119,7 @@
               </a:rPr>
               <a:t>팀 구분 없이 모델(시리즈)별 설치 집계</a:t>
             </a:r>
-            <a:endParaRPr lang="en-US" sz="1100" dirty="0"/>
+            <a:endParaRPr lang="en-US" sz="1050" dirty="0"/>
           </a:p>
         </p:txBody>
       </p:sp>
@@ -4561,8 +5131,8 @@
         </p:nvSpPr>
         <p:spPr>
           <a:xfrm>
-            <a:off x="548640" y="3813048"/>
-            <a:ext cx="502920" cy="502920"/>
+            <a:off x="548640" y="3291840"/>
+            <a:ext cx="457200" cy="457200"/>
           </a:xfrm>
           <a:prstGeom prst="ellipse">
             <a:avLst/>
@@ -4581,8 +5151,8 @@
         </p:nvSpPr>
         <p:spPr>
           <a:xfrm>
-            <a:off x="548640" y="3813048"/>
-            <a:ext cx="502920" cy="502920"/>
+            <a:off x="548640" y="3291840"/>
+            <a:ext cx="457200" cy="457200"/>
           </a:xfrm>
           <a:prstGeom prst="rect">
             <a:avLst/>
@@ -4598,7 +5168,7 @@
               <a:buNone/>
             </a:pPr>
             <a:r>
-              <a:rPr lang="en-US" sz="1800" b="1" dirty="0">
+              <a:rPr lang="en-US" sz="1600" b="1" dirty="0">
                 <a:solidFill>
                   <a:srgbClr val="FFFFFF"/>
                 </a:solidFill>
@@ -4608,7 +5178,7 @@
               </a:rPr>
               <a:t>3</a:t>
             </a:r>
-            <a:endParaRPr lang="en-US" sz="1800" dirty="0"/>
+            <a:endParaRPr lang="en-US" sz="1600" dirty="0"/>
           </a:p>
         </p:txBody>
       </p:sp>
@@ -4620,8 +5190,8 @@
         </p:nvSpPr>
         <p:spPr>
           <a:xfrm>
-            <a:off x="1280160" y="3703320"/>
-            <a:ext cx="4572000" cy="365760"/>
+            <a:off x="1207008" y="3200400"/>
+            <a:ext cx="4572000" cy="347472"/>
           </a:xfrm>
           <a:prstGeom prst="rect">
             <a:avLst/>
@@ -4637,7 +5207,7 @@
               <a:buNone/>
             </a:pPr>
             <a:r>
-              <a:rPr lang="en-US" sz="1500" b="1" dirty="0">
+              <a:rPr lang="en-US" sz="1400" b="1" dirty="0">
                 <a:solidFill>
                   <a:srgbClr val="3F3F3F"/>
                 </a:solidFill>
@@ -4647,7 +5217,7 @@
               </a:rPr>
               <a:t>서비스 케이스 분석</a:t>
             </a:r>
-            <a:endParaRPr lang="en-US" sz="1500" dirty="0"/>
+            <a:endParaRPr lang="en-US" sz="1400" dirty="0"/>
           </a:p>
         </p:txBody>
       </p:sp>
@@ -4659,8 +5229,8 @@
         </p:nvSpPr>
         <p:spPr>
           <a:xfrm>
-            <a:off x="1280160" y="4087368"/>
-            <a:ext cx="4572000" cy="640080"/>
+            <a:off x="1207008" y="3547872"/>
+            <a:ext cx="4572000" cy="548640"/>
           </a:xfrm>
           <a:prstGeom prst="rect">
             <a:avLst/>
@@ -4676,7 +5246,7 @@
               <a:buNone/>
             </a:pPr>
             <a:r>
-              <a:rPr lang="en-US" sz="1100" i="1" dirty="0">
+              <a:rPr lang="en-US" sz="1050" i="1" dirty="0">
                 <a:solidFill>
                   <a:srgbClr val="9E9E9E"/>
                 </a:solidFill>
@@ -4686,7 +5256,7 @@
               </a:rPr>
               <a:t>최근 1년 추이·서비스 목적별 비율·예방정비 지수</a:t>
             </a:r>
-            <a:endParaRPr lang="en-US" sz="1100" dirty="0"/>
+            <a:endParaRPr lang="en-US" sz="1050" dirty="0"/>
           </a:p>
         </p:txBody>
       </p:sp>
@@ -4698,8 +5268,8 @@
         </p:nvSpPr>
         <p:spPr>
           <a:xfrm>
-            <a:off x="548640" y="5047488"/>
-            <a:ext cx="502920" cy="502920"/>
+            <a:off x="548640" y="4297680"/>
+            <a:ext cx="457200" cy="457200"/>
           </a:xfrm>
           <a:prstGeom prst="ellipse">
             <a:avLst/>
@@ -4718,8 +5288,8 @@
         </p:nvSpPr>
         <p:spPr>
           <a:xfrm>
-            <a:off x="548640" y="5047488"/>
-            <a:ext cx="502920" cy="502920"/>
+            <a:off x="548640" y="4297680"/>
+            <a:ext cx="457200" cy="457200"/>
           </a:xfrm>
           <a:prstGeom prst="rect">
             <a:avLst/>
@@ -4735,7 +5305,7 @@
               <a:buNone/>
             </a:pPr>
             <a:r>
-              <a:rPr lang="en-US" sz="1800" b="1" dirty="0">
+              <a:rPr lang="en-US" sz="1600" b="1" dirty="0">
                 <a:solidFill>
                   <a:srgbClr val="FFFFFF"/>
                 </a:solidFill>
@@ -4745,7 +5315,7 @@
               </a:rPr>
               <a:t>4</a:t>
             </a:r>
-            <a:endParaRPr lang="en-US" sz="1800" dirty="0"/>
+            <a:endParaRPr lang="en-US" sz="1600" dirty="0"/>
           </a:p>
         </p:txBody>
       </p:sp>
@@ -4757,8 +5327,8 @@
         </p:nvSpPr>
         <p:spPr>
           <a:xfrm>
-            <a:off x="1280160" y="4937760"/>
-            <a:ext cx="4572000" cy="365760"/>
+            <a:off x="1207008" y="4206240"/>
+            <a:ext cx="4572000" cy="347472"/>
           </a:xfrm>
           <a:prstGeom prst="rect">
             <a:avLst/>
@@ -4774,7 +5344,7 @@
               <a:buNone/>
             </a:pPr>
             <a:r>
-              <a:rPr lang="en-US" sz="1500" b="1" dirty="0">
+              <a:rPr lang="en-US" sz="1400" b="1" dirty="0">
                 <a:solidFill>
                   <a:srgbClr val="3F3F3F"/>
                 </a:solidFill>
@@ -4784,7 +5354,7 @@
               </a:rPr>
               <a:t>주요 고객 및 장애 분석</a:t>
             </a:r>
-            <a:endParaRPr lang="en-US" sz="1500" dirty="0"/>
+            <a:endParaRPr lang="en-US" sz="1400" dirty="0"/>
           </a:p>
         </p:txBody>
       </p:sp>
@@ -4796,8 +5366,8 @@
         </p:nvSpPr>
         <p:spPr>
           <a:xfrm>
-            <a:off x="1280160" y="5321808"/>
-            <a:ext cx="4572000" cy="640080"/>
+            <a:off x="1207008" y="4553712"/>
+            <a:ext cx="4572000" cy="548640"/>
           </a:xfrm>
           <a:prstGeom prst="rect">
             <a:avLst/>
@@ -4813,7 +5383,7 @@
               <a:buNone/>
             </a:pPr>
             <a:r>
-              <a:rPr lang="en-US" sz="1100" i="1" dirty="0">
+              <a:rPr lang="en-US" sz="1050" i="1" dirty="0">
                 <a:solidFill>
                   <a:srgbClr val="9E9E9E"/>
                 </a:solidFill>
@@ -4823,7 +5393,7 @@
               </a:rPr>
               <a:t>병원 TOP5·반복 장애 장비·주요 장애 요인</a:t>
             </a:r>
-            <a:endParaRPr lang="en-US" sz="1100" dirty="0"/>
+            <a:endParaRPr lang="en-US" sz="1050" dirty="0"/>
           </a:p>
         </p:txBody>
       </p:sp>
@@ -4835,8 +5405,8 @@
         </p:nvSpPr>
         <p:spPr>
           <a:xfrm>
-            <a:off x="6263640" y="1344168"/>
-            <a:ext cx="502920" cy="502920"/>
+            <a:off x="548640" y="5303520"/>
+            <a:ext cx="457200" cy="457200"/>
           </a:xfrm>
           <a:prstGeom prst="ellipse">
             <a:avLst/>
@@ -4855,8 +5425,8 @@
         </p:nvSpPr>
         <p:spPr>
           <a:xfrm>
-            <a:off x="6263640" y="1344168"/>
-            <a:ext cx="502920" cy="502920"/>
+            <a:off x="548640" y="5303520"/>
+            <a:ext cx="457200" cy="457200"/>
           </a:xfrm>
           <a:prstGeom prst="rect">
             <a:avLst/>
@@ -4872,7 +5442,7 @@
               <a:buNone/>
             </a:pPr>
             <a:r>
-              <a:rPr lang="en-US" sz="1800" b="1" dirty="0">
+              <a:rPr lang="en-US" sz="1600" b="1" dirty="0">
                 <a:solidFill>
                   <a:srgbClr val="FFFFFF"/>
                 </a:solidFill>
@@ -4882,7 +5452,7 @@
               </a:rPr>
               <a:t>5</a:t>
             </a:r>
-            <a:endParaRPr lang="en-US" sz="1800" dirty="0"/>
+            <a:endParaRPr lang="en-US" sz="1600" dirty="0"/>
           </a:p>
         </p:txBody>
       </p:sp>
@@ -4894,8 +5464,8 @@
         </p:nvSpPr>
         <p:spPr>
           <a:xfrm>
-            <a:off x="6995160" y="1234440"/>
-            <a:ext cx="4572000" cy="365760"/>
+            <a:off x="1207008" y="5212080"/>
+            <a:ext cx="4572000" cy="347472"/>
           </a:xfrm>
           <a:prstGeom prst="rect">
             <a:avLst/>
@@ -4911,7 +5481,144 @@
               <a:buNone/>
             </a:pPr>
             <a:r>
-              <a:rPr lang="en-US" sz="1500" b="1" dirty="0">
+              <a:rPr lang="en-US" sz="1400" b="1" dirty="0">
+                <a:solidFill>
+                  <a:srgbClr val="3F3F3F"/>
+                </a:solidFill>
+                <a:latin typeface="Malgun Gothic" pitchFamily="34" charset="0"/>
+                <a:ea typeface="Malgun Gothic" pitchFamily="34" charset="-122"/>
+                <a:cs typeface="Malgun Gothic" pitchFamily="34" charset="-120"/>
+              </a:rPr>
+              <a:t>장비별 에러율 분석</a:t>
+            </a:r>
+            <a:endParaRPr lang="en-US" sz="1400" dirty="0"/>
+          </a:p>
+        </p:txBody>
+      </p:sp>
+      <p:sp>
+        <p:nvSpPr>
+          <p:cNvPr id="25" name="Text 22"/>
+          <p:cNvSpPr/>
+          <p:nvPr/>
+        </p:nvSpPr>
+        <p:spPr>
+          <a:xfrm>
+            <a:off x="1207008" y="5559552"/>
+            <a:ext cx="4572000" cy="548640"/>
+          </a:xfrm>
+          <a:prstGeom prst="rect">
+            <a:avLst/>
+          </a:prstGeom>
+          <a:noFill/>
+          <a:ln/>
+        </p:spPr>
+        <p:txBody>
+          <a:bodyPr wrap="square" lIns="0" tIns="0" rIns="0" bIns="0" rtlCol="0" anchor="ctr"/>
+          <a:lstStyle/>
+          <a:p>
+            <a:pPr indent="0" marL="0">
+              <a:buNone/>
+            </a:pPr>
+            <a:r>
+              <a:rPr lang="en-US" sz="1050" i="1" dirty="0">
+                <a:solidFill>
+                  <a:srgbClr val="9E9E9E"/>
+                </a:solidFill>
+                <a:latin typeface="Malgun Gothic" pitchFamily="34" charset="0"/>
+                <a:ea typeface="Malgun Gothic" pitchFamily="34" charset="-122"/>
+                <a:cs typeface="Malgun Gothic" pitchFamily="34" charset="-120"/>
+              </a:rPr>
+              <a:t>XN/XR·CN·SP·HISCL 계열별 에러율</a:t>
+            </a:r>
+            <a:endParaRPr lang="en-US" sz="1050" dirty="0"/>
+          </a:p>
+        </p:txBody>
+      </p:sp>
+      <p:sp>
+        <p:nvSpPr>
+          <p:cNvPr id="26" name="Shape 23"/>
+          <p:cNvSpPr/>
+          <p:nvPr/>
+        </p:nvSpPr>
+        <p:spPr>
+          <a:xfrm>
+            <a:off x="6263640" y="1280160"/>
+            <a:ext cx="457200" cy="457200"/>
+          </a:xfrm>
+          <a:prstGeom prst="ellipse">
+            <a:avLst/>
+          </a:prstGeom>
+          <a:solidFill>
+            <a:srgbClr val="005BAC"/>
+          </a:solidFill>
+          <a:ln/>
+        </p:spPr>
+      </p:sp>
+      <p:sp>
+        <p:nvSpPr>
+          <p:cNvPr id="27" name="Text 24"/>
+          <p:cNvSpPr/>
+          <p:nvPr/>
+        </p:nvSpPr>
+        <p:spPr>
+          <a:xfrm>
+            <a:off x="6263640" y="1280160"/>
+            <a:ext cx="457200" cy="457200"/>
+          </a:xfrm>
+          <a:prstGeom prst="rect">
+            <a:avLst/>
+          </a:prstGeom>
+          <a:noFill/>
+          <a:ln/>
+        </p:spPr>
+        <p:txBody>
+          <a:bodyPr wrap="square" lIns="0" tIns="0" rIns="0" bIns="0" rtlCol="0" anchor="ctr"/>
+          <a:lstStyle/>
+          <a:p>
+            <a:pPr algn="ctr" indent="0" marL="0">
+              <a:buNone/>
+            </a:pPr>
+            <a:r>
+              <a:rPr lang="en-US" sz="1600" b="1" dirty="0">
+                <a:solidFill>
+                  <a:srgbClr val="FFFFFF"/>
+                </a:solidFill>
+                <a:latin typeface="Arial" pitchFamily="34" charset="0"/>
+                <a:ea typeface="Arial" pitchFamily="34" charset="-122"/>
+                <a:cs typeface="Arial" pitchFamily="34" charset="-120"/>
+              </a:rPr>
+              <a:t>6</a:t>
+            </a:r>
+            <a:endParaRPr lang="en-US" sz="1600" dirty="0"/>
+          </a:p>
+        </p:txBody>
+      </p:sp>
+      <p:sp>
+        <p:nvSpPr>
+          <p:cNvPr id="28" name="Text 25"/>
+          <p:cNvSpPr/>
+          <p:nvPr/>
+        </p:nvSpPr>
+        <p:spPr>
+          <a:xfrm>
+            <a:off x="6922008" y="1188720"/>
+            <a:ext cx="4572000" cy="347472"/>
+          </a:xfrm>
+          <a:prstGeom prst="rect">
+            <a:avLst/>
+          </a:prstGeom>
+          <a:noFill/>
+          <a:ln/>
+        </p:spPr>
+        <p:txBody>
+          <a:bodyPr wrap="square" lIns="0" tIns="0" rIns="0" bIns="0" rtlCol="0" anchor="ctr"/>
+          <a:lstStyle/>
+          <a:p>
+            <a:pPr indent="0" marL="0">
+              <a:buNone/>
+            </a:pPr>
+            <a:r>
+              <a:rPr lang="en-US" sz="1400" b="1" dirty="0">
                 <a:solidFill>
                   <a:srgbClr val="3F3F3F"/>
                 </a:solidFill>
@@ -4921,20 +5628,20 @@
               </a:rPr>
               <a:t>VOC 수집 정보 및 처리현황</a:t>
             </a:r>
-            <a:endParaRPr lang="en-US" sz="1500" dirty="0"/>
-          </a:p>
-        </p:txBody>
-      </p:sp>
-      <p:sp>
-        <p:nvSpPr>
-          <p:cNvPr id="25" name="Text 22"/>
-          <p:cNvSpPr/>
-          <p:nvPr/>
-        </p:nvSpPr>
-        <p:spPr>
-          <a:xfrm>
-            <a:off x="6995160" y="1618488"/>
-            <a:ext cx="4572000" cy="640080"/>
+            <a:endParaRPr lang="en-US" sz="1400" dirty="0"/>
+          </a:p>
+        </p:txBody>
+      </p:sp>
+      <p:sp>
+        <p:nvSpPr>
+          <p:cNvPr id="29" name="Text 26"/>
+          <p:cNvSpPr/>
+          <p:nvPr/>
+        </p:nvSpPr>
+        <p:spPr>
+          <a:xfrm>
+            <a:off x="6922008" y="1536192"/>
+            <a:ext cx="4572000" cy="548640"/>
           </a:xfrm>
           <a:prstGeom prst="rect">
             <a:avLst/>
@@ -4950,7 +5657,7 @@
               <a:buNone/>
             </a:pPr>
             <a:r>
-              <a:rPr lang="en-US" sz="1100" i="1" dirty="0">
+              <a:rPr lang="en-US" sz="1050" i="1" dirty="0">
                 <a:solidFill>
                   <a:srgbClr val="9E9E9E"/>
                 </a:solidFill>
@@ -4960,20 +5667,20 @@
               </a:rPr>
               <a:t>고객 만족도 서베이 응답·유형별 처리 현황</a:t>
             </a:r>
-            <a:endParaRPr lang="en-US" sz="1100" dirty="0"/>
-          </a:p>
-        </p:txBody>
-      </p:sp>
-      <p:sp>
-        <p:nvSpPr>
-          <p:cNvPr id="26" name="Shape 23"/>
-          <p:cNvSpPr/>
-          <p:nvPr/>
-        </p:nvSpPr>
-        <p:spPr>
-          <a:xfrm>
-            <a:off x="6263640" y="2578608"/>
-            <a:ext cx="502920" cy="502920"/>
+            <a:endParaRPr lang="en-US" sz="1050" dirty="0"/>
+          </a:p>
+        </p:txBody>
+      </p:sp>
+      <p:sp>
+        <p:nvSpPr>
+          <p:cNvPr id="30" name="Shape 27"/>
+          <p:cNvSpPr/>
+          <p:nvPr/>
+        </p:nvSpPr>
+        <p:spPr>
+          <a:xfrm>
+            <a:off x="6263640" y="2286000"/>
+            <a:ext cx="457200" cy="457200"/>
           </a:xfrm>
           <a:prstGeom prst="ellipse">
             <a:avLst/>
@@ -4986,14 +5693,14 @@
       </p:sp>
       <p:sp>
         <p:nvSpPr>
-          <p:cNvPr id="27" name="Text 24"/>
-          <p:cNvSpPr/>
-          <p:nvPr/>
-        </p:nvSpPr>
-        <p:spPr>
-          <a:xfrm>
-            <a:off x="6263640" y="2578608"/>
-            <a:ext cx="502920" cy="502920"/>
+          <p:cNvPr id="31" name="Text 28"/>
+          <p:cNvSpPr/>
+          <p:nvPr/>
+        </p:nvSpPr>
+        <p:spPr>
+          <a:xfrm>
+            <a:off x="6263640" y="2286000"/>
+            <a:ext cx="457200" cy="457200"/>
           </a:xfrm>
           <a:prstGeom prst="rect">
             <a:avLst/>
@@ -5009,7 +5716,7 @@
               <a:buNone/>
             </a:pPr>
             <a:r>
-              <a:rPr lang="en-US" sz="1800" b="1" dirty="0">
+              <a:rPr lang="en-US" sz="1600" b="1" dirty="0">
                 <a:solidFill>
                   <a:srgbClr val="FFFFFF"/>
                 </a:solidFill>
@@ -5017,22 +5724,22 @@
                 <a:ea typeface="Arial" pitchFamily="34" charset="-122"/>
                 <a:cs typeface="Arial" pitchFamily="34" charset="-120"/>
               </a:rPr>
-              <a:t>6</a:t>
-            </a:r>
-            <a:endParaRPr lang="en-US" sz="1800" dirty="0"/>
-          </a:p>
-        </p:txBody>
-      </p:sp>
-      <p:sp>
-        <p:nvSpPr>
-          <p:cNvPr id="28" name="Text 25"/>
-          <p:cNvSpPr/>
-          <p:nvPr/>
-        </p:nvSpPr>
-        <p:spPr>
-          <a:xfrm>
-            <a:off x="6995160" y="2468880"/>
-            <a:ext cx="4572000" cy="365760"/>
+              <a:t>7</a:t>
+            </a:r>
+            <a:endParaRPr lang="en-US" sz="1600" dirty="0"/>
+          </a:p>
+        </p:txBody>
+      </p:sp>
+      <p:sp>
+        <p:nvSpPr>
+          <p:cNvPr id="32" name="Text 29"/>
+          <p:cNvSpPr/>
+          <p:nvPr/>
+        </p:nvSpPr>
+        <p:spPr>
+          <a:xfrm>
+            <a:off x="6922008" y="2194560"/>
+            <a:ext cx="4572000" cy="347472"/>
           </a:xfrm>
           <a:prstGeom prst="rect">
             <a:avLst/>
@@ -5048,7 +5755,7 @@
               <a:buNone/>
             </a:pPr>
             <a:r>
-              <a:rPr lang="en-US" sz="1500" b="1" dirty="0">
+              <a:rPr lang="en-US" sz="1400" b="1" dirty="0">
                 <a:solidFill>
                   <a:srgbClr val="3F3F3F"/>
                 </a:solidFill>
@@ -5058,20 +5765,20 @@
               </a:rPr>
               <a:t>중대 이슈 처리</a:t>
             </a:r>
-            <a:endParaRPr lang="en-US" sz="1500" dirty="0"/>
-          </a:p>
-        </p:txBody>
-      </p:sp>
-      <p:sp>
-        <p:nvSpPr>
-          <p:cNvPr id="29" name="Text 26"/>
-          <p:cNvSpPr/>
-          <p:nvPr/>
-        </p:nvSpPr>
-        <p:spPr>
-          <a:xfrm>
-            <a:off x="6995160" y="2852928"/>
-            <a:ext cx="4572000" cy="640080"/>
+            <a:endParaRPr lang="en-US" sz="1400" dirty="0"/>
+          </a:p>
+        </p:txBody>
+      </p:sp>
+      <p:sp>
+        <p:nvSpPr>
+          <p:cNvPr id="33" name="Text 30"/>
+          <p:cNvSpPr/>
+          <p:nvPr/>
+        </p:nvSpPr>
+        <p:spPr>
+          <a:xfrm>
+            <a:off x="6922008" y="2542032"/>
+            <a:ext cx="4572000" cy="548640"/>
           </a:xfrm>
           <a:prstGeom prst="rect">
             <a:avLst/>
@@ -5087,7 +5794,7 @@
               <a:buNone/>
             </a:pPr>
             <a:r>
-              <a:rPr lang="en-US" sz="1100" i="1" dirty="0">
+              <a:rPr lang="en-US" sz="1050" i="1" dirty="0">
                 <a:solidFill>
                   <a:srgbClr val="9E9E9E"/>
                 </a:solidFill>
@@ -5097,20 +5804,20 @@
               </a:rPr>
               <a:t>긴급/중대 VOC 접수·조치·종결 현황</a:t>
             </a:r>
-            <a:endParaRPr lang="en-US" sz="1100" dirty="0"/>
-          </a:p>
-        </p:txBody>
-      </p:sp>
-      <p:sp>
-        <p:nvSpPr>
-          <p:cNvPr id="30" name="Shape 27"/>
-          <p:cNvSpPr/>
-          <p:nvPr/>
-        </p:nvSpPr>
-        <p:spPr>
-          <a:xfrm>
-            <a:off x="6263640" y="3813048"/>
-            <a:ext cx="502920" cy="502920"/>
+            <a:endParaRPr lang="en-US" sz="1050" dirty="0"/>
+          </a:p>
+        </p:txBody>
+      </p:sp>
+      <p:sp>
+        <p:nvSpPr>
+          <p:cNvPr id="34" name="Shape 31"/>
+          <p:cNvSpPr/>
+          <p:nvPr/>
+        </p:nvSpPr>
+        <p:spPr>
+          <a:xfrm>
+            <a:off x="6263640" y="3291840"/>
+            <a:ext cx="457200" cy="457200"/>
           </a:xfrm>
           <a:prstGeom prst="ellipse">
             <a:avLst/>
@@ -5123,14 +5830,14 @@
       </p:sp>
       <p:sp>
         <p:nvSpPr>
-          <p:cNvPr id="31" name="Text 28"/>
-          <p:cNvSpPr/>
-          <p:nvPr/>
-        </p:nvSpPr>
-        <p:spPr>
-          <a:xfrm>
-            <a:off x="6263640" y="3813048"/>
-            <a:ext cx="502920" cy="502920"/>
+          <p:cNvPr id="35" name="Text 32"/>
+          <p:cNvSpPr/>
+          <p:nvPr/>
+        </p:nvSpPr>
+        <p:spPr>
+          <a:xfrm>
+            <a:off x="6263640" y="3291840"/>
+            <a:ext cx="457200" cy="457200"/>
           </a:xfrm>
           <a:prstGeom prst="rect">
             <a:avLst/>
@@ -5146,7 +5853,7 @@
               <a:buNone/>
             </a:pPr>
             <a:r>
-              <a:rPr lang="en-US" sz="1800" b="1" dirty="0">
+              <a:rPr lang="en-US" sz="1600" b="1" dirty="0">
                 <a:solidFill>
                   <a:srgbClr val="FFFFFF"/>
                 </a:solidFill>
@@ -5154,22 +5861,22 @@
                 <a:ea typeface="Arial" pitchFamily="34" charset="-122"/>
                 <a:cs typeface="Arial" pitchFamily="34" charset="-120"/>
               </a:rPr>
-              <a:t>7</a:t>
-            </a:r>
-            <a:endParaRPr lang="en-US" sz="1800" dirty="0"/>
-          </a:p>
-        </p:txBody>
-      </p:sp>
-      <p:sp>
-        <p:nvSpPr>
-          <p:cNvPr id="32" name="Text 29"/>
-          <p:cNvSpPr/>
-          <p:nvPr/>
-        </p:nvSpPr>
-        <p:spPr>
-          <a:xfrm>
-            <a:off x="6995160" y="3703320"/>
-            <a:ext cx="4572000" cy="365760"/>
+              <a:t>8</a:t>
+            </a:r>
+            <a:endParaRPr lang="en-US" sz="1600" dirty="0"/>
+          </a:p>
+        </p:txBody>
+      </p:sp>
+      <p:sp>
+        <p:nvSpPr>
+          <p:cNvPr id="36" name="Text 33"/>
+          <p:cNvSpPr/>
+          <p:nvPr/>
+        </p:nvSpPr>
+        <p:spPr>
+          <a:xfrm>
+            <a:off x="6922008" y="3200400"/>
+            <a:ext cx="4572000" cy="347472"/>
           </a:xfrm>
           <a:prstGeom prst="rect">
             <a:avLst/>
@@ -5185,7 +5892,7 @@
               <a:buNone/>
             </a:pPr>
             <a:r>
-              <a:rPr lang="en-US" sz="1500" b="1" dirty="0">
+              <a:rPr lang="en-US" sz="1400" b="1" dirty="0">
                 <a:solidFill>
                   <a:srgbClr val="3F3F3F"/>
                 </a:solidFill>
@@ -5195,20 +5902,20 @@
               </a:rPr>
               <a:t>대리점 교육 등 처리</a:t>
             </a:r>
-            <a:endParaRPr lang="en-US" sz="1500" dirty="0"/>
-          </a:p>
-        </p:txBody>
-      </p:sp>
-      <p:sp>
-        <p:nvSpPr>
-          <p:cNvPr id="33" name="Text 30"/>
-          <p:cNvSpPr/>
-          <p:nvPr/>
-        </p:nvSpPr>
-        <p:spPr>
-          <a:xfrm>
-            <a:off x="6995160" y="4087368"/>
-            <a:ext cx="4572000" cy="640080"/>
+            <a:endParaRPr lang="en-US" sz="1400" dirty="0"/>
+          </a:p>
+        </p:txBody>
+      </p:sp>
+      <p:sp>
+        <p:nvSpPr>
+          <p:cNvPr id="37" name="Text 34"/>
+          <p:cNvSpPr/>
+          <p:nvPr/>
+        </p:nvSpPr>
+        <p:spPr>
+          <a:xfrm>
+            <a:off x="6922008" y="3547872"/>
+            <a:ext cx="4572000" cy="548640"/>
           </a:xfrm>
           <a:prstGeom prst="rect">
             <a:avLst/>
@@ -5224,7 +5931,7 @@
               <a:buNone/>
             </a:pPr>
             <a:r>
-              <a:rPr lang="en-US" sz="1100" i="1" dirty="0">
+              <a:rPr lang="en-US" sz="1050" i="1" dirty="0">
                 <a:solidFill>
                   <a:srgbClr val="9E9E9E"/>
                 </a:solidFill>
@@ -5234,20 +5941,20 @@
               </a:rPr>
               <a:t>대리점(에이전시) 대상 기술·서비스 교육 현황</a:t>
             </a:r>
-            <a:endParaRPr lang="en-US" sz="1100" dirty="0"/>
-          </a:p>
-        </p:txBody>
-      </p:sp>
-      <p:sp>
-        <p:nvSpPr>
-          <p:cNvPr id="34" name="Shape 31"/>
-          <p:cNvSpPr/>
-          <p:nvPr/>
-        </p:nvSpPr>
-        <p:spPr>
-          <a:xfrm>
-            <a:off x="6263640" y="5047488"/>
-            <a:ext cx="502920" cy="502920"/>
+            <a:endParaRPr lang="en-US" sz="1050" dirty="0"/>
+          </a:p>
+        </p:txBody>
+      </p:sp>
+      <p:sp>
+        <p:nvSpPr>
+          <p:cNvPr id="38" name="Shape 35"/>
+          <p:cNvSpPr/>
+          <p:nvPr/>
+        </p:nvSpPr>
+        <p:spPr>
+          <a:xfrm>
+            <a:off x="6263640" y="4297680"/>
+            <a:ext cx="457200" cy="457200"/>
           </a:xfrm>
           <a:prstGeom prst="ellipse">
             <a:avLst/>
@@ -5260,14 +5967,14 @@
       </p:sp>
       <p:sp>
         <p:nvSpPr>
-          <p:cNvPr id="35" name="Text 32"/>
-          <p:cNvSpPr/>
-          <p:nvPr/>
-        </p:nvSpPr>
-        <p:spPr>
-          <a:xfrm>
-            <a:off x="6263640" y="5047488"/>
-            <a:ext cx="502920" cy="502920"/>
+          <p:cNvPr id="39" name="Text 36"/>
+          <p:cNvSpPr/>
+          <p:nvPr/>
+        </p:nvSpPr>
+        <p:spPr>
+          <a:xfrm>
+            <a:off x="6263640" y="4297680"/>
+            <a:ext cx="457200" cy="457200"/>
           </a:xfrm>
           <a:prstGeom prst="rect">
             <a:avLst/>
@@ -5283,7 +5990,7 @@
               <a:buNone/>
             </a:pPr>
             <a:r>
-              <a:rPr lang="en-US" sz="1800" b="1" dirty="0">
+              <a:rPr lang="en-US" sz="1600" b="1" dirty="0">
                 <a:solidFill>
                   <a:srgbClr val="FFFFFF"/>
                 </a:solidFill>
@@ -5291,22 +5998,22 @@
                 <a:ea typeface="Arial" pitchFamily="34" charset="-122"/>
                 <a:cs typeface="Arial" pitchFamily="34" charset="-120"/>
               </a:rPr>
-              <a:t>8</a:t>
-            </a:r>
-            <a:endParaRPr lang="en-US" sz="1800" dirty="0"/>
-          </a:p>
-        </p:txBody>
-      </p:sp>
-      <p:sp>
-        <p:nvSpPr>
-          <p:cNvPr id="36" name="Text 33"/>
-          <p:cNvSpPr/>
-          <p:nvPr/>
-        </p:nvSpPr>
-        <p:spPr>
-          <a:xfrm>
-            <a:off x="6995160" y="4937760"/>
-            <a:ext cx="4572000" cy="365760"/>
+              <a:t>9</a:t>
+            </a:r>
+            <a:endParaRPr lang="en-US" sz="1600" dirty="0"/>
+          </a:p>
+        </p:txBody>
+      </p:sp>
+      <p:sp>
+        <p:nvSpPr>
+          <p:cNvPr id="40" name="Text 37"/>
+          <p:cNvSpPr/>
+          <p:nvPr/>
+        </p:nvSpPr>
+        <p:spPr>
+          <a:xfrm>
+            <a:off x="6922008" y="4206240"/>
+            <a:ext cx="4572000" cy="347472"/>
           </a:xfrm>
           <a:prstGeom prst="rect">
             <a:avLst/>
@@ -5322,7 +6029,7 @@
               <a:buNone/>
             </a:pPr>
             <a:r>
-              <a:rPr lang="en-US" sz="1500" b="1" dirty="0">
+              <a:rPr lang="en-US" sz="1400" b="1" dirty="0">
                 <a:solidFill>
                   <a:srgbClr val="3F3F3F"/>
                 </a:solidFill>
@@ -5332,20 +6039,20 @@
               </a:rPr>
               <a:t>직원교육</a:t>
             </a:r>
-            <a:endParaRPr lang="en-US" sz="1500" dirty="0"/>
-          </a:p>
-        </p:txBody>
-      </p:sp>
-      <p:sp>
-        <p:nvSpPr>
-          <p:cNvPr id="37" name="Text 34"/>
-          <p:cNvSpPr/>
-          <p:nvPr/>
-        </p:nvSpPr>
-        <p:spPr>
-          <a:xfrm>
-            <a:off x="6995160" y="5321808"/>
-            <a:ext cx="4572000" cy="640080"/>
+            <a:endParaRPr lang="en-US" sz="1400" dirty="0"/>
+          </a:p>
+        </p:txBody>
+      </p:sp>
+      <p:sp>
+        <p:nvSpPr>
+          <p:cNvPr id="41" name="Text 38"/>
+          <p:cNvSpPr/>
+          <p:nvPr/>
+        </p:nvSpPr>
+        <p:spPr>
+          <a:xfrm>
+            <a:off x="6922008" y="4553712"/>
+            <a:ext cx="4572000" cy="548640"/>
           </a:xfrm>
           <a:prstGeom prst="rect">
             <a:avLst/>
@@ -5361,7 +6068,7 @@
               <a:buNone/>
             </a:pPr>
             <a:r>
-              <a:rPr lang="en-US" sz="1100" i="1" dirty="0">
+              <a:rPr lang="en-US" sz="1050" i="1" dirty="0">
                 <a:solidFill>
                   <a:srgbClr val="9E9E9E"/>
                 </a:solidFill>
@@ -5371,13 +6078,13 @@
               </a:rPr>
               <a:t>Technical Academy 및 사내 그룹 활동</a:t>
             </a:r>
-            <a:endParaRPr lang="en-US" sz="1100" dirty="0"/>
-          </a:p>
-        </p:txBody>
-      </p:sp>
-      <p:sp>
-        <p:nvSpPr>
-          <p:cNvPr id="38" name="Text 35"/>
+            <a:endParaRPr lang="en-US" sz="1050" dirty="0"/>
+          </a:p>
+        </p:txBody>
+      </p:sp>
+      <p:sp>
+        <p:nvSpPr>
+          <p:cNvPr id="42" name="Text 39"/>
           <p:cNvSpPr/>
           <p:nvPr/>
         </p:nvSpPr>
@@ -5416,7 +6123,7 @@
       </p:sp>
       <p:sp>
         <p:nvSpPr>
-          <p:cNvPr id="39" name="Text 36"/>
+          <p:cNvPr id="43" name="Text 40"/>
           <p:cNvSpPr/>
           <p:nvPr/>
         </p:nvSpPr>
@@ -13771,43 +14478,2101 @@
           </a:p>
         </p:txBody>
       </p:sp>
-      <p:sp>
-        <p:nvSpPr>
-          <p:cNvPr id="10" name="Shape 6"/>
-          <p:cNvSpPr/>
-          <p:nvPr/>
-        </p:nvSpPr>
-        <p:spPr>
-          <a:xfrm>
-            <a:off x="530352" y="4434840"/>
-            <a:ext cx="5486400" cy="1371600"/>
-          </a:xfrm>
-          <a:prstGeom prst="roundRect">
-            <a:avLst>
-              <a:gd name="adj" fmla="val 5333"/>
-            </a:avLst>
-          </a:prstGeom>
-          <a:solidFill>
-            <a:srgbClr val="E6EEF7"/>
-          </a:solidFill>
-          <a:ln w="9525">
-            <a:solidFill>
-              <a:srgbClr val="005BAC"/>
-            </a:solidFill>
-            <a:prstDash val="dash"/>
-          </a:ln>
-        </p:spPr>
-      </p:sp>
-      <p:sp>
-        <p:nvSpPr>
-          <p:cNvPr id="11" name="Text 7"/>
-          <p:cNvSpPr/>
-          <p:nvPr/>
-        </p:nvSpPr>
-        <p:spPr>
-          <a:xfrm>
-            <a:off x="530352" y="4434840"/>
-            <a:ext cx="5486400" cy="1371600"/>
+      <p:graphicFrame>
+        <p:nvGraphicFramePr>
+          <p:cNvPr id="13" name="Table 1"/>
+          <p:cNvGraphicFramePr>
+            <a:graphicFrameLocks noGrp="1"/>
+          </p:cNvGraphicFramePr>
+          <p:nvPr>
+            <p:extLst>
+              <p:ext uri="{D42A27DB-BD31-4B8C-83A1-F6EECF244321}">
+                <p14:modId xmlns:p14="http://schemas.microsoft.com/office/powerpoint/2010/main" val="1579011935"/>
+              </p:ext>
+            </p:extLst>
+          </p:nvPr>
+        </p:nvGraphicFramePr>
+        <p:xfrm>
+          <a:off x="530352" y="4434840"/>
+          <a:ext cx="5486400" cy="914400"/>
+        </p:xfrm>
+        <a:graphic>
+          <a:graphicData uri="http://schemas.openxmlformats.org/drawingml/2006/table">
+            <a:tbl>
+              <a:tblPr/>
+              <a:tblGrid>
+                <a:gridCol w="1280160"/>
+                <a:gridCol w="914400"/>
+                <a:gridCol w="1188720"/>
+                <a:gridCol w="1188720"/>
+                <a:gridCol w="914400"/>
+              </a:tblGrid>
+              <a:tr h="292608">
+                <a:tc>
+                  <a:txBody>
+                    <a:bodyPr/>
+                    <a:lstStyle/>
+                    <a:p>
+                      <a:pPr algn="l" indent="0" marL="0">
+                        <a:buNone/>
+                      </a:pPr>
+                      <a:r>
+                        <a:rPr lang="en-US" sz="1050" b="1" dirty="0">
+                          <a:solidFill>
+                            <a:srgbClr val="FFFFFF"/>
+                          </a:solidFill>
+                          <a:latin typeface="Malgun Gothic" pitchFamily="34" charset="0"/>
+                          <a:ea typeface="Malgun Gothic" pitchFamily="34" charset="-122"/>
+                          <a:cs typeface="Malgun Gothic" pitchFamily="34" charset="-120"/>
+                        </a:rPr>
+                        <a:t>담당자</a:t>
+                      </a:r>
+                      <a:endParaRPr lang="en-US" sz="1050" dirty="0">
+                        <a:latin typeface="Malgun Gothic" charset="0"/>
+                        <a:ea typeface="Malgun Gothic" charset="0"/>
+                        <a:cs typeface="Malgun Gothic" charset="0"/>
+                      </a:endParaRPr>
+                    </a:p>
+                  </a:txBody>
+                  <a:tcPr marL="91440" marR="91440" marT="45720" marB="45720" anchor="ctr">
+                    <a:lnL w="9525" cap="flat" cmpd="sng" algn="ctr">
+                      <a:solidFill>
+                        <a:srgbClr val="D9D9D9"/>
+                      </a:solidFill>
+                      <a:prstDash val="solid"/>
+                      <a:round/>
+                      <a:headEnd type="none" w="med" len="med"/>
+                      <a:tailEnd type="none" w="med" len="med"/>
+                    </a:lnL>
+                    <a:lnR w="9525" cap="flat" cmpd="sng" algn="ctr">
+                      <a:solidFill>
+                        <a:srgbClr val="D9D9D9"/>
+                      </a:solidFill>
+                      <a:prstDash val="solid"/>
+                      <a:round/>
+                      <a:headEnd type="none" w="med" len="med"/>
+                      <a:tailEnd type="none" w="med" len="med"/>
+                    </a:lnR>
+                    <a:lnT w="9525" cap="flat" cmpd="sng" algn="ctr">
+                      <a:solidFill>
+                        <a:srgbClr val="D9D9D9"/>
+                      </a:solidFill>
+                      <a:prstDash val="solid"/>
+                      <a:round/>
+                      <a:headEnd type="none" w="med" len="med"/>
+                      <a:tailEnd type="none" w="med" len="med"/>
+                    </a:lnT>
+                    <a:lnB w="9525" cap="flat" cmpd="sng" algn="ctr">
+                      <a:solidFill>
+                        <a:srgbClr val="D9D9D9"/>
+                      </a:solidFill>
+                      <a:prstDash val="solid"/>
+                      <a:round/>
+                      <a:headEnd type="none" w="med" len="med"/>
+                      <a:tailEnd type="none" w="med" len="med"/>
+                    </a:lnB>
+                    <a:solidFill>
+                      <a:srgbClr val="005BAC"/>
+                    </a:solidFill>
+                  </a:tcPr>
+                </a:tc>
+                <a:tc>
+                  <a:txBody>
+                    <a:bodyPr/>
+                    <a:lstStyle/>
+                    <a:p>
+                      <a:pPr algn="ctr" indent="0" marL="0">
+                        <a:buNone/>
+                      </a:pPr>
+                      <a:r>
+                        <a:rPr lang="en-US" sz="1050" b="1" dirty="0">
+                          <a:solidFill>
+                            <a:srgbClr val="FFFFFF"/>
+                          </a:solidFill>
+                          <a:latin typeface="Malgun Gothic" pitchFamily="34" charset="0"/>
+                          <a:ea typeface="Malgun Gothic" pitchFamily="34" charset="-122"/>
+                          <a:cs typeface="Malgun Gothic" pitchFamily="34" charset="-120"/>
+                        </a:rPr>
+                        <a:t>건수</a:t>
+                      </a:r>
+                      <a:endParaRPr lang="en-US" sz="1050" dirty="0">
+                        <a:latin typeface="Malgun Gothic" charset="0"/>
+                        <a:ea typeface="Malgun Gothic" charset="0"/>
+                        <a:cs typeface="Malgun Gothic" charset="0"/>
+                      </a:endParaRPr>
+                    </a:p>
+                  </a:txBody>
+                  <a:tcPr marL="91440" marR="91440" marT="45720" marB="45720" anchor="ctr">
+                    <a:lnL w="9525" cap="flat" cmpd="sng" algn="ctr">
+                      <a:solidFill>
+                        <a:srgbClr val="D9D9D9"/>
+                      </a:solidFill>
+                      <a:prstDash val="solid"/>
+                      <a:round/>
+                      <a:headEnd type="none" w="med" len="med"/>
+                      <a:tailEnd type="none" w="med" len="med"/>
+                    </a:lnL>
+                    <a:lnR w="9525" cap="flat" cmpd="sng" algn="ctr">
+                      <a:solidFill>
+                        <a:srgbClr val="D9D9D9"/>
+                      </a:solidFill>
+                      <a:prstDash val="solid"/>
+                      <a:round/>
+                      <a:headEnd type="none" w="med" len="med"/>
+                      <a:tailEnd type="none" w="med" len="med"/>
+                    </a:lnR>
+                    <a:lnT w="9525" cap="flat" cmpd="sng" algn="ctr">
+                      <a:solidFill>
+                        <a:srgbClr val="D9D9D9"/>
+                      </a:solidFill>
+                      <a:prstDash val="solid"/>
+                      <a:round/>
+                      <a:headEnd type="none" w="med" len="med"/>
+                      <a:tailEnd type="none" w="med" len="med"/>
+                    </a:lnT>
+                    <a:lnB w="9525" cap="flat" cmpd="sng" algn="ctr">
+                      <a:solidFill>
+                        <a:srgbClr val="D9D9D9"/>
+                      </a:solidFill>
+                      <a:prstDash val="solid"/>
+                      <a:round/>
+                      <a:headEnd type="none" w="med" len="med"/>
+                      <a:tailEnd type="none" w="med" len="med"/>
+                    </a:lnB>
+                    <a:solidFill>
+                      <a:srgbClr val="005BAC"/>
+                    </a:solidFill>
+                  </a:tcPr>
+                </a:tc>
+                <a:tc>
+                  <a:txBody>
+                    <a:bodyPr/>
+                    <a:lstStyle/>
+                    <a:p>
+                      <a:pPr algn="ctr" indent="0" marL="0">
+                        <a:buNone/>
+                      </a:pPr>
+                      <a:r>
+                        <a:rPr lang="en-US" sz="1050" b="1" dirty="0">
+                          <a:solidFill>
+                            <a:srgbClr val="FFFFFF"/>
+                          </a:solidFill>
+                          <a:latin typeface="Malgun Gothic" pitchFamily="34" charset="0"/>
+                          <a:ea typeface="Malgun Gothic" pitchFamily="34" charset="-122"/>
+                          <a:cs typeface="Malgun Gothic" pitchFamily="34" charset="-120"/>
+                        </a:rPr>
+                        <a:t>작업시간</a:t>
+                      </a:r>
+                      <a:endParaRPr lang="en-US" sz="1050" dirty="0">
+                        <a:latin typeface="Malgun Gothic" charset="0"/>
+                        <a:ea typeface="Malgun Gothic" charset="0"/>
+                        <a:cs typeface="Malgun Gothic" charset="0"/>
+                      </a:endParaRPr>
+                    </a:p>
+                  </a:txBody>
+                  <a:tcPr marL="91440" marR="91440" marT="45720" marB="45720" anchor="ctr">
+                    <a:lnL w="9525" cap="flat" cmpd="sng" algn="ctr">
+                      <a:solidFill>
+                        <a:srgbClr val="D9D9D9"/>
+                      </a:solidFill>
+                      <a:prstDash val="solid"/>
+                      <a:round/>
+                      <a:headEnd type="none" w="med" len="med"/>
+                      <a:tailEnd type="none" w="med" len="med"/>
+                    </a:lnL>
+                    <a:lnR w="9525" cap="flat" cmpd="sng" algn="ctr">
+                      <a:solidFill>
+                        <a:srgbClr val="D9D9D9"/>
+                      </a:solidFill>
+                      <a:prstDash val="solid"/>
+                      <a:round/>
+                      <a:headEnd type="none" w="med" len="med"/>
+                      <a:tailEnd type="none" w="med" len="med"/>
+                    </a:lnR>
+                    <a:lnT w="9525" cap="flat" cmpd="sng" algn="ctr">
+                      <a:solidFill>
+                        <a:srgbClr val="D9D9D9"/>
+                      </a:solidFill>
+                      <a:prstDash val="solid"/>
+                      <a:round/>
+                      <a:headEnd type="none" w="med" len="med"/>
+                      <a:tailEnd type="none" w="med" len="med"/>
+                    </a:lnT>
+                    <a:lnB w="9525" cap="flat" cmpd="sng" algn="ctr">
+                      <a:solidFill>
+                        <a:srgbClr val="D9D9D9"/>
+                      </a:solidFill>
+                      <a:prstDash val="solid"/>
+                      <a:round/>
+                      <a:headEnd type="none" w="med" len="med"/>
+                      <a:tailEnd type="none" w="med" len="med"/>
+                    </a:lnB>
+                    <a:solidFill>
+                      <a:srgbClr val="005BAC"/>
+                    </a:solidFill>
+                  </a:tcPr>
+                </a:tc>
+                <a:tc>
+                  <a:txBody>
+                    <a:bodyPr/>
+                    <a:lstStyle/>
+                    <a:p>
+                      <a:pPr algn="ctr" indent="0" marL="0">
+                        <a:buNone/>
+                      </a:pPr>
+                      <a:r>
+                        <a:rPr lang="en-US" sz="1050" b="1" dirty="0">
+                          <a:solidFill>
+                            <a:srgbClr val="FFFFFF"/>
+                          </a:solidFill>
+                          <a:latin typeface="Malgun Gothic" pitchFamily="34" charset="0"/>
+                          <a:ea typeface="Malgun Gothic" pitchFamily="34" charset="-122"/>
+                          <a:cs typeface="Malgun Gothic" pitchFamily="34" charset="-120"/>
+                        </a:rPr>
+                        <a:t>고장수리%</a:t>
+                      </a:r>
+                      <a:endParaRPr lang="en-US" sz="1050" dirty="0">
+                        <a:latin typeface="Malgun Gothic" charset="0"/>
+                        <a:ea typeface="Malgun Gothic" charset="0"/>
+                        <a:cs typeface="Malgun Gothic" charset="0"/>
+                      </a:endParaRPr>
+                    </a:p>
+                  </a:txBody>
+                  <a:tcPr marL="91440" marR="91440" marT="45720" marB="45720" anchor="ctr">
+                    <a:lnL w="9525" cap="flat" cmpd="sng" algn="ctr">
+                      <a:solidFill>
+                        <a:srgbClr val="D9D9D9"/>
+                      </a:solidFill>
+                      <a:prstDash val="solid"/>
+                      <a:round/>
+                      <a:headEnd type="none" w="med" len="med"/>
+                      <a:tailEnd type="none" w="med" len="med"/>
+                    </a:lnL>
+                    <a:lnR w="9525" cap="flat" cmpd="sng" algn="ctr">
+                      <a:solidFill>
+                        <a:srgbClr val="D9D9D9"/>
+                      </a:solidFill>
+                      <a:prstDash val="solid"/>
+                      <a:round/>
+                      <a:headEnd type="none" w="med" len="med"/>
+                      <a:tailEnd type="none" w="med" len="med"/>
+                    </a:lnR>
+                    <a:lnT w="9525" cap="flat" cmpd="sng" algn="ctr">
+                      <a:solidFill>
+                        <a:srgbClr val="D9D9D9"/>
+                      </a:solidFill>
+                      <a:prstDash val="solid"/>
+                      <a:round/>
+                      <a:headEnd type="none" w="med" len="med"/>
+                      <a:tailEnd type="none" w="med" len="med"/>
+                    </a:lnT>
+                    <a:lnB w="9525" cap="flat" cmpd="sng" algn="ctr">
+                      <a:solidFill>
+                        <a:srgbClr val="D9D9D9"/>
+                      </a:solidFill>
+                      <a:prstDash val="solid"/>
+                      <a:round/>
+                      <a:headEnd type="none" w="med" len="med"/>
+                      <a:tailEnd type="none" w="med" len="med"/>
+                    </a:lnB>
+                    <a:solidFill>
+                      <a:srgbClr val="005BAC"/>
+                    </a:solidFill>
+                  </a:tcPr>
+                </a:tc>
+                <a:tc>
+                  <a:txBody>
+                    <a:bodyPr/>
+                    <a:lstStyle/>
+                    <a:p>
+                      <a:pPr algn="ctr" indent="0" marL="0">
+                        <a:buNone/>
+                      </a:pPr>
+                      <a:r>
+                        <a:rPr lang="en-US" sz="1050" b="1" dirty="0">
+                          <a:solidFill>
+                            <a:srgbClr val="FFFFFF"/>
+                          </a:solidFill>
+                          <a:latin typeface="Malgun Gothic" pitchFamily="34" charset="0"/>
+                          <a:ea typeface="Malgun Gothic" pitchFamily="34" charset="-122"/>
+                          <a:cs typeface="Malgun Gothic" pitchFamily="34" charset="-120"/>
+                        </a:rPr>
+                        <a:t>PM%</a:t>
+                      </a:r>
+                      <a:endParaRPr lang="en-US" sz="1050" dirty="0">
+                        <a:latin typeface="Malgun Gothic" charset="0"/>
+                        <a:ea typeface="Malgun Gothic" charset="0"/>
+                        <a:cs typeface="Malgun Gothic" charset="0"/>
+                      </a:endParaRPr>
+                    </a:p>
+                  </a:txBody>
+                  <a:tcPr marL="91440" marR="91440" marT="45720" marB="45720" anchor="ctr">
+                    <a:lnL w="9525" cap="flat" cmpd="sng" algn="ctr">
+                      <a:solidFill>
+                        <a:srgbClr val="D9D9D9"/>
+                      </a:solidFill>
+                      <a:prstDash val="solid"/>
+                      <a:round/>
+                      <a:headEnd type="none" w="med" len="med"/>
+                      <a:tailEnd type="none" w="med" len="med"/>
+                    </a:lnL>
+                    <a:lnR w="9525" cap="flat" cmpd="sng" algn="ctr">
+                      <a:solidFill>
+                        <a:srgbClr val="D9D9D9"/>
+                      </a:solidFill>
+                      <a:prstDash val="solid"/>
+                      <a:round/>
+                      <a:headEnd type="none" w="med" len="med"/>
+                      <a:tailEnd type="none" w="med" len="med"/>
+                    </a:lnR>
+                    <a:lnT w="9525" cap="flat" cmpd="sng" algn="ctr">
+                      <a:solidFill>
+                        <a:srgbClr val="D9D9D9"/>
+                      </a:solidFill>
+                      <a:prstDash val="solid"/>
+                      <a:round/>
+                      <a:headEnd type="none" w="med" len="med"/>
+                      <a:tailEnd type="none" w="med" len="med"/>
+                    </a:lnT>
+                    <a:lnB w="9525" cap="flat" cmpd="sng" algn="ctr">
+                      <a:solidFill>
+                        <a:srgbClr val="D9D9D9"/>
+                      </a:solidFill>
+                      <a:prstDash val="solid"/>
+                      <a:round/>
+                      <a:headEnd type="none" w="med" len="med"/>
+                      <a:tailEnd type="none" w="med" len="med"/>
+                    </a:lnB>
+                    <a:solidFill>
+                      <a:srgbClr val="005BAC"/>
+                    </a:solidFill>
+                  </a:tcPr>
+                </a:tc>
+              </a:tr>
+              <a:tr h="292608">
+                <a:tc>
+                  <a:txBody>
+                    <a:bodyPr/>
+                    <a:lstStyle/>
+                    <a:p>
+                      <a:pPr algn="l" indent="0" marL="0">
+                        <a:buNone/>
+                      </a:pPr>
+                      <a:r>
+                        <a:rPr lang="en-US" sz="1050" dirty="0">
+                          <a:solidFill>
+                            <a:srgbClr val="3F3F3F"/>
+                          </a:solidFill>
+                          <a:latin typeface="Malgun Gothic" pitchFamily="34" charset="0"/>
+                          <a:ea typeface="Malgun Gothic" pitchFamily="34" charset="-122"/>
+                          <a:cs typeface="Malgun Gothic" pitchFamily="34" charset="-120"/>
+                        </a:rPr>
+                        <a:t>이인구</a:t>
+                      </a:r>
+                      <a:endParaRPr lang="en-US" sz="1050" dirty="0">
+                        <a:latin typeface="Malgun Gothic" charset="0"/>
+                        <a:ea typeface="Malgun Gothic" charset="0"/>
+                        <a:cs typeface="Malgun Gothic" charset="0"/>
+                      </a:endParaRPr>
+                    </a:p>
+                  </a:txBody>
+                  <a:tcPr marL="91440" marR="91440" marT="45720" marB="45720" anchor="ctr">
+                    <a:lnL w="9525" cap="flat" cmpd="sng" algn="ctr">
+                      <a:solidFill>
+                        <a:srgbClr val="D9D9D9"/>
+                      </a:solidFill>
+                      <a:prstDash val="solid"/>
+                      <a:round/>
+                      <a:headEnd type="none" w="med" len="med"/>
+                      <a:tailEnd type="none" w="med" len="med"/>
+                    </a:lnL>
+                    <a:lnR w="9525" cap="flat" cmpd="sng" algn="ctr">
+                      <a:solidFill>
+                        <a:srgbClr val="D9D9D9"/>
+                      </a:solidFill>
+                      <a:prstDash val="solid"/>
+                      <a:round/>
+                      <a:headEnd type="none" w="med" len="med"/>
+                      <a:tailEnd type="none" w="med" len="med"/>
+                    </a:lnR>
+                    <a:lnT w="9525" cap="flat" cmpd="sng" algn="ctr">
+                      <a:solidFill>
+                        <a:srgbClr val="D9D9D9"/>
+                      </a:solidFill>
+                      <a:prstDash val="solid"/>
+                      <a:round/>
+                      <a:headEnd type="none" w="med" len="med"/>
+                      <a:tailEnd type="none" w="med" len="med"/>
+                    </a:lnT>
+                    <a:lnB w="9525" cap="flat" cmpd="sng" algn="ctr">
+                      <a:solidFill>
+                        <a:srgbClr val="D9D9D9"/>
+                      </a:solidFill>
+                      <a:prstDash val="solid"/>
+                      <a:round/>
+                      <a:headEnd type="none" w="med" len="med"/>
+                      <a:tailEnd type="none" w="med" len="med"/>
+                    </a:lnB>
+                    <a:solidFill>
+                      <a:srgbClr val="FFFFFF"/>
+                    </a:solidFill>
+                  </a:tcPr>
+                </a:tc>
+                <a:tc>
+                  <a:txBody>
+                    <a:bodyPr/>
+                    <a:lstStyle/>
+                    <a:p>
+                      <a:pPr algn="ctr" indent="0" marL="0">
+                        <a:buNone/>
+                      </a:pPr>
+                      <a:r>
+                        <a:rPr lang="en-US" sz="1050" dirty="0">
+                          <a:solidFill>
+                            <a:srgbClr val="3F3F3F"/>
+                          </a:solidFill>
+                          <a:latin typeface="Malgun Gothic" pitchFamily="34" charset="0"/>
+                          <a:ea typeface="Malgun Gothic" pitchFamily="34" charset="-122"/>
+                          <a:cs typeface="Malgun Gothic" pitchFamily="34" charset="-120"/>
+                        </a:rPr>
+                        <a:t>1727</a:t>
+                      </a:r>
+                      <a:endParaRPr lang="en-US" sz="1050" dirty="0">
+                        <a:latin typeface="Malgun Gothic" charset="0"/>
+                        <a:ea typeface="Malgun Gothic" charset="0"/>
+                        <a:cs typeface="Malgun Gothic" charset="0"/>
+                      </a:endParaRPr>
+                    </a:p>
+                  </a:txBody>
+                  <a:tcPr marL="91440" marR="91440" marT="45720" marB="45720" anchor="ctr">
+                    <a:lnL w="9525" cap="flat" cmpd="sng" algn="ctr">
+                      <a:solidFill>
+                        <a:srgbClr val="D9D9D9"/>
+                      </a:solidFill>
+                      <a:prstDash val="solid"/>
+                      <a:round/>
+                      <a:headEnd type="none" w="med" len="med"/>
+                      <a:tailEnd type="none" w="med" len="med"/>
+                    </a:lnL>
+                    <a:lnR w="9525" cap="flat" cmpd="sng" algn="ctr">
+                      <a:solidFill>
+                        <a:srgbClr val="D9D9D9"/>
+                      </a:solidFill>
+                      <a:prstDash val="solid"/>
+                      <a:round/>
+                      <a:headEnd type="none" w="med" len="med"/>
+                      <a:tailEnd type="none" w="med" len="med"/>
+                    </a:lnR>
+                    <a:lnT w="9525" cap="flat" cmpd="sng" algn="ctr">
+                      <a:solidFill>
+                        <a:srgbClr val="D9D9D9"/>
+                      </a:solidFill>
+                      <a:prstDash val="solid"/>
+                      <a:round/>
+                      <a:headEnd type="none" w="med" len="med"/>
+                      <a:tailEnd type="none" w="med" len="med"/>
+                    </a:lnT>
+                    <a:lnB w="9525" cap="flat" cmpd="sng" algn="ctr">
+                      <a:solidFill>
+                        <a:srgbClr val="D9D9D9"/>
+                      </a:solidFill>
+                      <a:prstDash val="solid"/>
+                      <a:round/>
+                      <a:headEnd type="none" w="med" len="med"/>
+                      <a:tailEnd type="none" w="med" len="med"/>
+                    </a:lnB>
+                    <a:solidFill>
+                      <a:srgbClr val="FFFFFF"/>
+                    </a:solidFill>
+                  </a:tcPr>
+                </a:tc>
+                <a:tc>
+                  <a:txBody>
+                    <a:bodyPr/>
+                    <a:lstStyle/>
+                    <a:p>
+                      <a:pPr algn="ctr" indent="0" marL="0">
+                        <a:buNone/>
+                      </a:pPr>
+                      <a:r>
+                        <a:rPr lang="en-US" sz="1050" dirty="0">
+                          <a:solidFill>
+                            <a:srgbClr val="3F3F3F"/>
+                          </a:solidFill>
+                          <a:latin typeface="Malgun Gothic" pitchFamily="34" charset="0"/>
+                          <a:ea typeface="Malgun Gothic" pitchFamily="34" charset="-122"/>
+                          <a:cs typeface="Malgun Gothic" pitchFamily="34" charset="-120"/>
+                        </a:rPr>
+                        <a:t>2760h</a:t>
+                      </a:r>
+                      <a:endParaRPr lang="en-US" sz="1050" dirty="0">
+                        <a:latin typeface="Malgun Gothic" charset="0"/>
+                        <a:ea typeface="Malgun Gothic" charset="0"/>
+                        <a:cs typeface="Malgun Gothic" charset="0"/>
+                      </a:endParaRPr>
+                    </a:p>
+                  </a:txBody>
+                  <a:tcPr marL="91440" marR="91440" marT="45720" marB="45720" anchor="ctr">
+                    <a:lnL w="9525" cap="flat" cmpd="sng" algn="ctr">
+                      <a:solidFill>
+                        <a:srgbClr val="D9D9D9"/>
+                      </a:solidFill>
+                      <a:prstDash val="solid"/>
+                      <a:round/>
+                      <a:headEnd type="none" w="med" len="med"/>
+                      <a:tailEnd type="none" w="med" len="med"/>
+                    </a:lnL>
+                    <a:lnR w="9525" cap="flat" cmpd="sng" algn="ctr">
+                      <a:solidFill>
+                        <a:srgbClr val="D9D9D9"/>
+                      </a:solidFill>
+                      <a:prstDash val="solid"/>
+                      <a:round/>
+                      <a:headEnd type="none" w="med" len="med"/>
+                      <a:tailEnd type="none" w="med" len="med"/>
+                    </a:lnR>
+                    <a:lnT w="9525" cap="flat" cmpd="sng" algn="ctr">
+                      <a:solidFill>
+                        <a:srgbClr val="D9D9D9"/>
+                      </a:solidFill>
+                      <a:prstDash val="solid"/>
+                      <a:round/>
+                      <a:headEnd type="none" w="med" len="med"/>
+                      <a:tailEnd type="none" w="med" len="med"/>
+                    </a:lnT>
+                    <a:lnB w="9525" cap="flat" cmpd="sng" algn="ctr">
+                      <a:solidFill>
+                        <a:srgbClr val="D9D9D9"/>
+                      </a:solidFill>
+                      <a:prstDash val="solid"/>
+                      <a:round/>
+                      <a:headEnd type="none" w="med" len="med"/>
+                      <a:tailEnd type="none" w="med" len="med"/>
+                    </a:lnB>
+                    <a:solidFill>
+                      <a:srgbClr val="FFFFFF"/>
+                    </a:solidFill>
+                  </a:tcPr>
+                </a:tc>
+                <a:tc>
+                  <a:txBody>
+                    <a:bodyPr/>
+                    <a:lstStyle/>
+                    <a:p>
+                      <a:pPr algn="ctr" indent="0" marL="0">
+                        <a:buNone/>
+                      </a:pPr>
+                      <a:r>
+                        <a:rPr lang="en-US" sz="1050" dirty="0">
+                          <a:solidFill>
+                            <a:srgbClr val="3F3F3F"/>
+                          </a:solidFill>
+                          <a:latin typeface="Malgun Gothic" pitchFamily="34" charset="0"/>
+                          <a:ea typeface="Malgun Gothic" pitchFamily="34" charset="-122"/>
+                          <a:cs typeface="Malgun Gothic" pitchFamily="34" charset="-120"/>
+                        </a:rPr>
+                        <a:t>44.4%</a:t>
+                      </a:r>
+                      <a:endParaRPr lang="en-US" sz="1050" dirty="0">
+                        <a:latin typeface="Malgun Gothic" charset="0"/>
+                        <a:ea typeface="Malgun Gothic" charset="0"/>
+                        <a:cs typeface="Malgun Gothic" charset="0"/>
+                      </a:endParaRPr>
+                    </a:p>
+                  </a:txBody>
+                  <a:tcPr marL="91440" marR="91440" marT="45720" marB="45720" anchor="ctr">
+                    <a:lnL w="9525" cap="flat" cmpd="sng" algn="ctr">
+                      <a:solidFill>
+                        <a:srgbClr val="D9D9D9"/>
+                      </a:solidFill>
+                      <a:prstDash val="solid"/>
+                      <a:round/>
+                      <a:headEnd type="none" w="med" len="med"/>
+                      <a:tailEnd type="none" w="med" len="med"/>
+                    </a:lnL>
+                    <a:lnR w="9525" cap="flat" cmpd="sng" algn="ctr">
+                      <a:solidFill>
+                        <a:srgbClr val="D9D9D9"/>
+                      </a:solidFill>
+                      <a:prstDash val="solid"/>
+                      <a:round/>
+                      <a:headEnd type="none" w="med" len="med"/>
+                      <a:tailEnd type="none" w="med" len="med"/>
+                    </a:lnR>
+                    <a:lnT w="9525" cap="flat" cmpd="sng" algn="ctr">
+                      <a:solidFill>
+                        <a:srgbClr val="D9D9D9"/>
+                      </a:solidFill>
+                      <a:prstDash val="solid"/>
+                      <a:round/>
+                      <a:headEnd type="none" w="med" len="med"/>
+                      <a:tailEnd type="none" w="med" len="med"/>
+                    </a:lnT>
+                    <a:lnB w="9525" cap="flat" cmpd="sng" algn="ctr">
+                      <a:solidFill>
+                        <a:srgbClr val="D9D9D9"/>
+                      </a:solidFill>
+                      <a:prstDash val="solid"/>
+                      <a:round/>
+                      <a:headEnd type="none" w="med" len="med"/>
+                      <a:tailEnd type="none" w="med" len="med"/>
+                    </a:lnB>
+                    <a:solidFill>
+                      <a:srgbClr val="FFFFFF"/>
+                    </a:solidFill>
+                  </a:tcPr>
+                </a:tc>
+                <a:tc>
+                  <a:txBody>
+                    <a:bodyPr/>
+                    <a:lstStyle/>
+                    <a:p>
+                      <a:pPr algn="ctr" indent="0" marL="0">
+                        <a:buNone/>
+                      </a:pPr>
+                      <a:r>
+                        <a:rPr lang="en-US" sz="1050" dirty="0">
+                          <a:solidFill>
+                            <a:srgbClr val="3F3F3F"/>
+                          </a:solidFill>
+                          <a:latin typeface="Malgun Gothic" pitchFamily="34" charset="0"/>
+                          <a:ea typeface="Malgun Gothic" pitchFamily="34" charset="-122"/>
+                          <a:cs typeface="Malgun Gothic" pitchFamily="34" charset="-120"/>
+                        </a:rPr>
+                        <a:t>37.6%</a:t>
+                      </a:r>
+                      <a:endParaRPr lang="en-US" sz="1050" dirty="0">
+                        <a:latin typeface="Malgun Gothic" charset="0"/>
+                        <a:ea typeface="Malgun Gothic" charset="0"/>
+                        <a:cs typeface="Malgun Gothic" charset="0"/>
+                      </a:endParaRPr>
+                    </a:p>
+                  </a:txBody>
+                  <a:tcPr marL="91440" marR="91440" marT="45720" marB="45720" anchor="ctr">
+                    <a:lnL w="9525" cap="flat" cmpd="sng" algn="ctr">
+                      <a:solidFill>
+                        <a:srgbClr val="D9D9D9"/>
+                      </a:solidFill>
+                      <a:prstDash val="solid"/>
+                      <a:round/>
+                      <a:headEnd type="none" w="med" len="med"/>
+                      <a:tailEnd type="none" w="med" len="med"/>
+                    </a:lnL>
+                    <a:lnR w="9525" cap="flat" cmpd="sng" algn="ctr">
+                      <a:solidFill>
+                        <a:srgbClr val="D9D9D9"/>
+                      </a:solidFill>
+                      <a:prstDash val="solid"/>
+                      <a:round/>
+                      <a:headEnd type="none" w="med" len="med"/>
+                      <a:tailEnd type="none" w="med" len="med"/>
+                    </a:lnR>
+                    <a:lnT w="9525" cap="flat" cmpd="sng" algn="ctr">
+                      <a:solidFill>
+                        <a:srgbClr val="D9D9D9"/>
+                      </a:solidFill>
+                      <a:prstDash val="solid"/>
+                      <a:round/>
+                      <a:headEnd type="none" w="med" len="med"/>
+                      <a:tailEnd type="none" w="med" len="med"/>
+                    </a:lnT>
+                    <a:lnB w="9525" cap="flat" cmpd="sng" algn="ctr">
+                      <a:solidFill>
+                        <a:srgbClr val="D9D9D9"/>
+                      </a:solidFill>
+                      <a:prstDash val="solid"/>
+                      <a:round/>
+                      <a:headEnd type="none" w="med" len="med"/>
+                      <a:tailEnd type="none" w="med" len="med"/>
+                    </a:lnB>
+                    <a:solidFill>
+                      <a:srgbClr val="FFFFFF"/>
+                    </a:solidFill>
+                  </a:tcPr>
+                </a:tc>
+              </a:tr>
+              <a:tr h="292608">
+                <a:tc>
+                  <a:txBody>
+                    <a:bodyPr/>
+                    <a:lstStyle/>
+                    <a:p>
+                      <a:pPr algn="l" indent="0" marL="0">
+                        <a:buNone/>
+                      </a:pPr>
+                      <a:r>
+                        <a:rPr lang="en-US" sz="1050" dirty="0">
+                          <a:solidFill>
+                            <a:srgbClr val="3F3F3F"/>
+                          </a:solidFill>
+                          <a:latin typeface="Malgun Gothic" pitchFamily="34" charset="0"/>
+                          <a:ea typeface="Malgun Gothic" pitchFamily="34" charset="-122"/>
+                          <a:cs typeface="Malgun Gothic" pitchFamily="34" charset="-120"/>
+                        </a:rPr>
+                        <a:t>조수호</a:t>
+                      </a:r>
+                      <a:endParaRPr lang="en-US" sz="1050" dirty="0">
+                        <a:latin typeface="Malgun Gothic" charset="0"/>
+                        <a:ea typeface="Malgun Gothic" charset="0"/>
+                        <a:cs typeface="Malgun Gothic" charset="0"/>
+                      </a:endParaRPr>
+                    </a:p>
+                  </a:txBody>
+                  <a:tcPr marL="91440" marR="91440" marT="45720" marB="45720" anchor="ctr">
+                    <a:lnL w="9525" cap="flat" cmpd="sng" algn="ctr">
+                      <a:solidFill>
+                        <a:srgbClr val="D9D9D9"/>
+                      </a:solidFill>
+                      <a:prstDash val="solid"/>
+                      <a:round/>
+                      <a:headEnd type="none" w="med" len="med"/>
+                      <a:tailEnd type="none" w="med" len="med"/>
+                    </a:lnL>
+                    <a:lnR w="9525" cap="flat" cmpd="sng" algn="ctr">
+                      <a:solidFill>
+                        <a:srgbClr val="D9D9D9"/>
+                      </a:solidFill>
+                      <a:prstDash val="solid"/>
+                      <a:round/>
+                      <a:headEnd type="none" w="med" len="med"/>
+                      <a:tailEnd type="none" w="med" len="med"/>
+                    </a:lnR>
+                    <a:lnT w="9525" cap="flat" cmpd="sng" algn="ctr">
+                      <a:solidFill>
+                        <a:srgbClr val="D9D9D9"/>
+                      </a:solidFill>
+                      <a:prstDash val="solid"/>
+                      <a:round/>
+                      <a:headEnd type="none" w="med" len="med"/>
+                      <a:tailEnd type="none" w="med" len="med"/>
+                    </a:lnT>
+                    <a:lnB w="9525" cap="flat" cmpd="sng" algn="ctr">
+                      <a:solidFill>
+                        <a:srgbClr val="D9D9D9"/>
+                      </a:solidFill>
+                      <a:prstDash val="solid"/>
+                      <a:round/>
+                      <a:headEnd type="none" w="med" len="med"/>
+                      <a:tailEnd type="none" w="med" len="med"/>
+                    </a:lnB>
+                    <a:solidFill>
+                      <a:srgbClr val="FFFFFF"/>
+                    </a:solidFill>
+                  </a:tcPr>
+                </a:tc>
+                <a:tc>
+                  <a:txBody>
+                    <a:bodyPr/>
+                    <a:lstStyle/>
+                    <a:p>
+                      <a:pPr algn="ctr" indent="0" marL="0">
+                        <a:buNone/>
+                      </a:pPr>
+                      <a:r>
+                        <a:rPr lang="en-US" sz="1050" dirty="0">
+                          <a:solidFill>
+                            <a:srgbClr val="3F3F3F"/>
+                          </a:solidFill>
+                          <a:latin typeface="Malgun Gothic" pitchFamily="34" charset="0"/>
+                          <a:ea typeface="Malgun Gothic" pitchFamily="34" charset="-122"/>
+                          <a:cs typeface="Malgun Gothic" pitchFamily="34" charset="-120"/>
+                        </a:rPr>
+                        <a:t>1469</a:t>
+                      </a:r>
+                      <a:endParaRPr lang="en-US" sz="1050" dirty="0">
+                        <a:latin typeface="Malgun Gothic" charset="0"/>
+                        <a:ea typeface="Malgun Gothic" charset="0"/>
+                        <a:cs typeface="Malgun Gothic" charset="0"/>
+                      </a:endParaRPr>
+                    </a:p>
+                  </a:txBody>
+                  <a:tcPr marL="91440" marR="91440" marT="45720" marB="45720" anchor="ctr">
+                    <a:lnL w="9525" cap="flat" cmpd="sng" algn="ctr">
+                      <a:solidFill>
+                        <a:srgbClr val="D9D9D9"/>
+                      </a:solidFill>
+                      <a:prstDash val="solid"/>
+                      <a:round/>
+                      <a:headEnd type="none" w="med" len="med"/>
+                      <a:tailEnd type="none" w="med" len="med"/>
+                    </a:lnL>
+                    <a:lnR w="9525" cap="flat" cmpd="sng" algn="ctr">
+                      <a:solidFill>
+                        <a:srgbClr val="D9D9D9"/>
+                      </a:solidFill>
+                      <a:prstDash val="solid"/>
+                      <a:round/>
+                      <a:headEnd type="none" w="med" len="med"/>
+                      <a:tailEnd type="none" w="med" len="med"/>
+                    </a:lnR>
+                    <a:lnT w="9525" cap="flat" cmpd="sng" algn="ctr">
+                      <a:solidFill>
+                        <a:srgbClr val="D9D9D9"/>
+                      </a:solidFill>
+                      <a:prstDash val="solid"/>
+                      <a:round/>
+                      <a:headEnd type="none" w="med" len="med"/>
+                      <a:tailEnd type="none" w="med" len="med"/>
+                    </a:lnT>
+                    <a:lnB w="9525" cap="flat" cmpd="sng" algn="ctr">
+                      <a:solidFill>
+                        <a:srgbClr val="D9D9D9"/>
+                      </a:solidFill>
+                      <a:prstDash val="solid"/>
+                      <a:round/>
+                      <a:headEnd type="none" w="med" len="med"/>
+                      <a:tailEnd type="none" w="med" len="med"/>
+                    </a:lnB>
+                    <a:solidFill>
+                      <a:srgbClr val="FFFFFF"/>
+                    </a:solidFill>
+                  </a:tcPr>
+                </a:tc>
+                <a:tc>
+                  <a:txBody>
+                    <a:bodyPr/>
+                    <a:lstStyle/>
+                    <a:p>
+                      <a:pPr algn="ctr" indent="0" marL="0">
+                        <a:buNone/>
+                      </a:pPr>
+                      <a:r>
+                        <a:rPr lang="en-US" sz="1050" dirty="0">
+                          <a:solidFill>
+                            <a:srgbClr val="3F3F3F"/>
+                          </a:solidFill>
+                          <a:latin typeface="Malgun Gothic" pitchFamily="34" charset="0"/>
+                          <a:ea typeface="Malgun Gothic" pitchFamily="34" charset="-122"/>
+                          <a:cs typeface="Malgun Gothic" pitchFamily="34" charset="-120"/>
+                        </a:rPr>
+                        <a:t>2081h</a:t>
+                      </a:r>
+                      <a:endParaRPr lang="en-US" sz="1050" dirty="0">
+                        <a:latin typeface="Malgun Gothic" charset="0"/>
+                        <a:ea typeface="Malgun Gothic" charset="0"/>
+                        <a:cs typeface="Malgun Gothic" charset="0"/>
+                      </a:endParaRPr>
+                    </a:p>
+                  </a:txBody>
+                  <a:tcPr marL="91440" marR="91440" marT="45720" marB="45720" anchor="ctr">
+                    <a:lnL w="9525" cap="flat" cmpd="sng" algn="ctr">
+                      <a:solidFill>
+                        <a:srgbClr val="D9D9D9"/>
+                      </a:solidFill>
+                      <a:prstDash val="solid"/>
+                      <a:round/>
+                      <a:headEnd type="none" w="med" len="med"/>
+                      <a:tailEnd type="none" w="med" len="med"/>
+                    </a:lnL>
+                    <a:lnR w="9525" cap="flat" cmpd="sng" algn="ctr">
+                      <a:solidFill>
+                        <a:srgbClr val="D9D9D9"/>
+                      </a:solidFill>
+                      <a:prstDash val="solid"/>
+                      <a:round/>
+                      <a:headEnd type="none" w="med" len="med"/>
+                      <a:tailEnd type="none" w="med" len="med"/>
+                    </a:lnR>
+                    <a:lnT w="9525" cap="flat" cmpd="sng" algn="ctr">
+                      <a:solidFill>
+                        <a:srgbClr val="D9D9D9"/>
+                      </a:solidFill>
+                      <a:prstDash val="solid"/>
+                      <a:round/>
+                      <a:headEnd type="none" w="med" len="med"/>
+                      <a:tailEnd type="none" w="med" len="med"/>
+                    </a:lnT>
+                    <a:lnB w="9525" cap="flat" cmpd="sng" algn="ctr">
+                      <a:solidFill>
+                        <a:srgbClr val="D9D9D9"/>
+                      </a:solidFill>
+                      <a:prstDash val="solid"/>
+                      <a:round/>
+                      <a:headEnd type="none" w="med" len="med"/>
+                      <a:tailEnd type="none" w="med" len="med"/>
+                    </a:lnB>
+                    <a:solidFill>
+                      <a:srgbClr val="FFFFFF"/>
+                    </a:solidFill>
+                  </a:tcPr>
+                </a:tc>
+                <a:tc>
+                  <a:txBody>
+                    <a:bodyPr/>
+                    <a:lstStyle/>
+                    <a:p>
+                      <a:pPr algn="ctr" indent="0" marL="0">
+                        <a:buNone/>
+                      </a:pPr>
+                      <a:r>
+                        <a:rPr lang="en-US" sz="1050" dirty="0">
+                          <a:solidFill>
+                            <a:srgbClr val="3F3F3F"/>
+                          </a:solidFill>
+                          <a:latin typeface="Malgun Gothic" pitchFamily="34" charset="0"/>
+                          <a:ea typeface="Malgun Gothic" pitchFamily="34" charset="-122"/>
+                          <a:cs typeface="Malgun Gothic" pitchFamily="34" charset="-120"/>
+                        </a:rPr>
+                        <a:t>19.7%</a:t>
+                      </a:r>
+                      <a:endParaRPr lang="en-US" sz="1050" dirty="0">
+                        <a:latin typeface="Malgun Gothic" charset="0"/>
+                        <a:ea typeface="Malgun Gothic" charset="0"/>
+                        <a:cs typeface="Malgun Gothic" charset="0"/>
+                      </a:endParaRPr>
+                    </a:p>
+                  </a:txBody>
+                  <a:tcPr marL="91440" marR="91440" marT="45720" marB="45720" anchor="ctr">
+                    <a:lnL w="9525" cap="flat" cmpd="sng" algn="ctr">
+                      <a:solidFill>
+                        <a:srgbClr val="D9D9D9"/>
+                      </a:solidFill>
+                      <a:prstDash val="solid"/>
+                      <a:round/>
+                      <a:headEnd type="none" w="med" len="med"/>
+                      <a:tailEnd type="none" w="med" len="med"/>
+                    </a:lnL>
+                    <a:lnR w="9525" cap="flat" cmpd="sng" algn="ctr">
+                      <a:solidFill>
+                        <a:srgbClr val="D9D9D9"/>
+                      </a:solidFill>
+                      <a:prstDash val="solid"/>
+                      <a:round/>
+                      <a:headEnd type="none" w="med" len="med"/>
+                      <a:tailEnd type="none" w="med" len="med"/>
+                    </a:lnR>
+                    <a:lnT w="9525" cap="flat" cmpd="sng" algn="ctr">
+                      <a:solidFill>
+                        <a:srgbClr val="D9D9D9"/>
+                      </a:solidFill>
+                      <a:prstDash val="solid"/>
+                      <a:round/>
+                      <a:headEnd type="none" w="med" len="med"/>
+                      <a:tailEnd type="none" w="med" len="med"/>
+                    </a:lnT>
+                    <a:lnB w="9525" cap="flat" cmpd="sng" algn="ctr">
+                      <a:solidFill>
+                        <a:srgbClr val="D9D9D9"/>
+                      </a:solidFill>
+                      <a:prstDash val="solid"/>
+                      <a:round/>
+                      <a:headEnd type="none" w="med" len="med"/>
+                      <a:tailEnd type="none" w="med" len="med"/>
+                    </a:lnB>
+                    <a:solidFill>
+                      <a:srgbClr val="FFFFFF"/>
+                    </a:solidFill>
+                  </a:tcPr>
+                </a:tc>
+                <a:tc>
+                  <a:txBody>
+                    <a:bodyPr/>
+                    <a:lstStyle/>
+                    <a:p>
+                      <a:pPr algn="ctr" indent="0" marL="0">
+                        <a:buNone/>
+                      </a:pPr>
+                      <a:r>
+                        <a:rPr lang="en-US" sz="1050" dirty="0">
+                          <a:solidFill>
+                            <a:srgbClr val="3F3F3F"/>
+                          </a:solidFill>
+                          <a:latin typeface="Malgun Gothic" pitchFamily="34" charset="0"/>
+                          <a:ea typeface="Malgun Gothic" pitchFamily="34" charset="-122"/>
+                          <a:cs typeface="Malgun Gothic" pitchFamily="34" charset="-120"/>
+                        </a:rPr>
+                        <a:t>49.4%</a:t>
+                      </a:r>
+                      <a:endParaRPr lang="en-US" sz="1050" dirty="0">
+                        <a:latin typeface="Malgun Gothic" charset="0"/>
+                        <a:ea typeface="Malgun Gothic" charset="0"/>
+                        <a:cs typeface="Malgun Gothic" charset="0"/>
+                      </a:endParaRPr>
+                    </a:p>
+                  </a:txBody>
+                  <a:tcPr marL="91440" marR="91440" marT="45720" marB="45720" anchor="ctr">
+                    <a:lnL w="9525" cap="flat" cmpd="sng" algn="ctr">
+                      <a:solidFill>
+                        <a:srgbClr val="D9D9D9"/>
+                      </a:solidFill>
+                      <a:prstDash val="solid"/>
+                      <a:round/>
+                      <a:headEnd type="none" w="med" len="med"/>
+                      <a:tailEnd type="none" w="med" len="med"/>
+                    </a:lnL>
+                    <a:lnR w="9525" cap="flat" cmpd="sng" algn="ctr">
+                      <a:solidFill>
+                        <a:srgbClr val="D9D9D9"/>
+                      </a:solidFill>
+                      <a:prstDash val="solid"/>
+                      <a:round/>
+                      <a:headEnd type="none" w="med" len="med"/>
+                      <a:tailEnd type="none" w="med" len="med"/>
+                    </a:lnR>
+                    <a:lnT w="9525" cap="flat" cmpd="sng" algn="ctr">
+                      <a:solidFill>
+                        <a:srgbClr val="D9D9D9"/>
+                      </a:solidFill>
+                      <a:prstDash val="solid"/>
+                      <a:round/>
+                      <a:headEnd type="none" w="med" len="med"/>
+                      <a:tailEnd type="none" w="med" len="med"/>
+                    </a:lnT>
+                    <a:lnB w="9525" cap="flat" cmpd="sng" algn="ctr">
+                      <a:solidFill>
+                        <a:srgbClr val="D9D9D9"/>
+                      </a:solidFill>
+                      <a:prstDash val="solid"/>
+                      <a:round/>
+                      <a:headEnd type="none" w="med" len="med"/>
+                      <a:tailEnd type="none" w="med" len="med"/>
+                    </a:lnB>
+                    <a:solidFill>
+                      <a:srgbClr val="FFFFFF"/>
+                    </a:solidFill>
+                  </a:tcPr>
+                </a:tc>
+              </a:tr>
+              <a:tr h="292608">
+                <a:tc>
+                  <a:txBody>
+                    <a:bodyPr/>
+                    <a:lstStyle/>
+                    <a:p>
+                      <a:pPr algn="l" indent="0" marL="0">
+                        <a:buNone/>
+                      </a:pPr>
+                      <a:r>
+                        <a:rPr lang="en-US" sz="1050" dirty="0">
+                          <a:solidFill>
+                            <a:srgbClr val="3F3F3F"/>
+                          </a:solidFill>
+                          <a:latin typeface="Malgun Gothic" pitchFamily="34" charset="0"/>
+                          <a:ea typeface="Malgun Gothic" pitchFamily="34" charset="-122"/>
+                          <a:cs typeface="Malgun Gothic" pitchFamily="34" charset="-120"/>
+                        </a:rPr>
+                        <a:t>김태현</a:t>
+                      </a:r>
+                      <a:endParaRPr lang="en-US" sz="1050" dirty="0">
+                        <a:latin typeface="Malgun Gothic" charset="0"/>
+                        <a:ea typeface="Malgun Gothic" charset="0"/>
+                        <a:cs typeface="Malgun Gothic" charset="0"/>
+                      </a:endParaRPr>
+                    </a:p>
+                  </a:txBody>
+                  <a:tcPr marL="91440" marR="91440" marT="45720" marB="45720" anchor="ctr">
+                    <a:lnL w="9525" cap="flat" cmpd="sng" algn="ctr">
+                      <a:solidFill>
+                        <a:srgbClr val="D9D9D9"/>
+                      </a:solidFill>
+                      <a:prstDash val="solid"/>
+                      <a:round/>
+                      <a:headEnd type="none" w="med" len="med"/>
+                      <a:tailEnd type="none" w="med" len="med"/>
+                    </a:lnL>
+                    <a:lnR w="9525" cap="flat" cmpd="sng" algn="ctr">
+                      <a:solidFill>
+                        <a:srgbClr val="D9D9D9"/>
+                      </a:solidFill>
+                      <a:prstDash val="solid"/>
+                      <a:round/>
+                      <a:headEnd type="none" w="med" len="med"/>
+                      <a:tailEnd type="none" w="med" len="med"/>
+                    </a:lnR>
+                    <a:lnT w="9525" cap="flat" cmpd="sng" algn="ctr">
+                      <a:solidFill>
+                        <a:srgbClr val="D9D9D9"/>
+                      </a:solidFill>
+                      <a:prstDash val="solid"/>
+                      <a:round/>
+                      <a:headEnd type="none" w="med" len="med"/>
+                      <a:tailEnd type="none" w="med" len="med"/>
+                    </a:lnT>
+                    <a:lnB w="9525" cap="flat" cmpd="sng" algn="ctr">
+                      <a:solidFill>
+                        <a:srgbClr val="D9D9D9"/>
+                      </a:solidFill>
+                      <a:prstDash val="solid"/>
+                      <a:round/>
+                      <a:headEnd type="none" w="med" len="med"/>
+                      <a:tailEnd type="none" w="med" len="med"/>
+                    </a:lnB>
+                    <a:solidFill>
+                      <a:srgbClr val="FFFFFF"/>
+                    </a:solidFill>
+                  </a:tcPr>
+                </a:tc>
+                <a:tc>
+                  <a:txBody>
+                    <a:bodyPr/>
+                    <a:lstStyle/>
+                    <a:p>
+                      <a:pPr algn="ctr" indent="0" marL="0">
+                        <a:buNone/>
+                      </a:pPr>
+                      <a:r>
+                        <a:rPr lang="en-US" sz="1050" dirty="0">
+                          <a:solidFill>
+                            <a:srgbClr val="3F3F3F"/>
+                          </a:solidFill>
+                          <a:latin typeface="Malgun Gothic" pitchFamily="34" charset="0"/>
+                          <a:ea typeface="Malgun Gothic" pitchFamily="34" charset="-122"/>
+                          <a:cs typeface="Malgun Gothic" pitchFamily="34" charset="-120"/>
+                        </a:rPr>
+                        <a:t>1409</a:t>
+                      </a:r>
+                      <a:endParaRPr lang="en-US" sz="1050" dirty="0">
+                        <a:latin typeface="Malgun Gothic" charset="0"/>
+                        <a:ea typeface="Malgun Gothic" charset="0"/>
+                        <a:cs typeface="Malgun Gothic" charset="0"/>
+                      </a:endParaRPr>
+                    </a:p>
+                  </a:txBody>
+                  <a:tcPr marL="91440" marR="91440" marT="45720" marB="45720" anchor="ctr">
+                    <a:lnL w="9525" cap="flat" cmpd="sng" algn="ctr">
+                      <a:solidFill>
+                        <a:srgbClr val="D9D9D9"/>
+                      </a:solidFill>
+                      <a:prstDash val="solid"/>
+                      <a:round/>
+                      <a:headEnd type="none" w="med" len="med"/>
+                      <a:tailEnd type="none" w="med" len="med"/>
+                    </a:lnL>
+                    <a:lnR w="9525" cap="flat" cmpd="sng" algn="ctr">
+                      <a:solidFill>
+                        <a:srgbClr val="D9D9D9"/>
+                      </a:solidFill>
+                      <a:prstDash val="solid"/>
+                      <a:round/>
+                      <a:headEnd type="none" w="med" len="med"/>
+                      <a:tailEnd type="none" w="med" len="med"/>
+                    </a:lnR>
+                    <a:lnT w="9525" cap="flat" cmpd="sng" algn="ctr">
+                      <a:solidFill>
+                        <a:srgbClr val="D9D9D9"/>
+                      </a:solidFill>
+                      <a:prstDash val="solid"/>
+                      <a:round/>
+                      <a:headEnd type="none" w="med" len="med"/>
+                      <a:tailEnd type="none" w="med" len="med"/>
+                    </a:lnT>
+                    <a:lnB w="9525" cap="flat" cmpd="sng" algn="ctr">
+                      <a:solidFill>
+                        <a:srgbClr val="D9D9D9"/>
+                      </a:solidFill>
+                      <a:prstDash val="solid"/>
+                      <a:round/>
+                      <a:headEnd type="none" w="med" len="med"/>
+                      <a:tailEnd type="none" w="med" len="med"/>
+                    </a:lnB>
+                    <a:solidFill>
+                      <a:srgbClr val="FFFFFF"/>
+                    </a:solidFill>
+                  </a:tcPr>
+                </a:tc>
+                <a:tc>
+                  <a:txBody>
+                    <a:bodyPr/>
+                    <a:lstStyle/>
+                    <a:p>
+                      <a:pPr algn="ctr" indent="0" marL="0">
+                        <a:buNone/>
+                      </a:pPr>
+                      <a:r>
+                        <a:rPr lang="en-US" sz="1050" dirty="0">
+                          <a:solidFill>
+                            <a:srgbClr val="3F3F3F"/>
+                          </a:solidFill>
+                          <a:latin typeface="Malgun Gothic" pitchFamily="34" charset="0"/>
+                          <a:ea typeface="Malgun Gothic" pitchFamily="34" charset="-122"/>
+                          <a:cs typeface="Malgun Gothic" pitchFamily="34" charset="-120"/>
+                        </a:rPr>
+                        <a:t>2101h</a:t>
+                      </a:r>
+                      <a:endParaRPr lang="en-US" sz="1050" dirty="0">
+                        <a:latin typeface="Malgun Gothic" charset="0"/>
+                        <a:ea typeface="Malgun Gothic" charset="0"/>
+                        <a:cs typeface="Malgun Gothic" charset="0"/>
+                      </a:endParaRPr>
+                    </a:p>
+                  </a:txBody>
+                  <a:tcPr marL="91440" marR="91440" marT="45720" marB="45720" anchor="ctr">
+                    <a:lnL w="9525" cap="flat" cmpd="sng" algn="ctr">
+                      <a:solidFill>
+                        <a:srgbClr val="D9D9D9"/>
+                      </a:solidFill>
+                      <a:prstDash val="solid"/>
+                      <a:round/>
+                      <a:headEnd type="none" w="med" len="med"/>
+                      <a:tailEnd type="none" w="med" len="med"/>
+                    </a:lnL>
+                    <a:lnR w="9525" cap="flat" cmpd="sng" algn="ctr">
+                      <a:solidFill>
+                        <a:srgbClr val="D9D9D9"/>
+                      </a:solidFill>
+                      <a:prstDash val="solid"/>
+                      <a:round/>
+                      <a:headEnd type="none" w="med" len="med"/>
+                      <a:tailEnd type="none" w="med" len="med"/>
+                    </a:lnR>
+                    <a:lnT w="9525" cap="flat" cmpd="sng" algn="ctr">
+                      <a:solidFill>
+                        <a:srgbClr val="D9D9D9"/>
+                      </a:solidFill>
+                      <a:prstDash val="solid"/>
+                      <a:round/>
+                      <a:headEnd type="none" w="med" len="med"/>
+                      <a:tailEnd type="none" w="med" len="med"/>
+                    </a:lnT>
+                    <a:lnB w="9525" cap="flat" cmpd="sng" algn="ctr">
+                      <a:solidFill>
+                        <a:srgbClr val="D9D9D9"/>
+                      </a:solidFill>
+                      <a:prstDash val="solid"/>
+                      <a:round/>
+                      <a:headEnd type="none" w="med" len="med"/>
+                      <a:tailEnd type="none" w="med" len="med"/>
+                    </a:lnB>
+                    <a:solidFill>
+                      <a:srgbClr val="FFFFFF"/>
+                    </a:solidFill>
+                  </a:tcPr>
+                </a:tc>
+                <a:tc>
+                  <a:txBody>
+                    <a:bodyPr/>
+                    <a:lstStyle/>
+                    <a:p>
+                      <a:pPr algn="ctr" indent="0" marL="0">
+                        <a:buNone/>
+                      </a:pPr>
+                      <a:r>
+                        <a:rPr lang="en-US" sz="1050" dirty="0">
+                          <a:solidFill>
+                            <a:srgbClr val="3F3F3F"/>
+                          </a:solidFill>
+                          <a:latin typeface="Malgun Gothic" pitchFamily="34" charset="0"/>
+                          <a:ea typeface="Malgun Gothic" pitchFamily="34" charset="-122"/>
+                          <a:cs typeface="Malgun Gothic" pitchFamily="34" charset="-120"/>
+                        </a:rPr>
+                        <a:t>29.7%</a:t>
+                      </a:r>
+                      <a:endParaRPr lang="en-US" sz="1050" dirty="0">
+                        <a:latin typeface="Malgun Gothic" charset="0"/>
+                        <a:ea typeface="Malgun Gothic" charset="0"/>
+                        <a:cs typeface="Malgun Gothic" charset="0"/>
+                      </a:endParaRPr>
+                    </a:p>
+                  </a:txBody>
+                  <a:tcPr marL="91440" marR="91440" marT="45720" marB="45720" anchor="ctr">
+                    <a:lnL w="9525" cap="flat" cmpd="sng" algn="ctr">
+                      <a:solidFill>
+                        <a:srgbClr val="D9D9D9"/>
+                      </a:solidFill>
+                      <a:prstDash val="solid"/>
+                      <a:round/>
+                      <a:headEnd type="none" w="med" len="med"/>
+                      <a:tailEnd type="none" w="med" len="med"/>
+                    </a:lnL>
+                    <a:lnR w="9525" cap="flat" cmpd="sng" algn="ctr">
+                      <a:solidFill>
+                        <a:srgbClr val="D9D9D9"/>
+                      </a:solidFill>
+                      <a:prstDash val="solid"/>
+                      <a:round/>
+                      <a:headEnd type="none" w="med" len="med"/>
+                      <a:tailEnd type="none" w="med" len="med"/>
+                    </a:lnR>
+                    <a:lnT w="9525" cap="flat" cmpd="sng" algn="ctr">
+                      <a:solidFill>
+                        <a:srgbClr val="D9D9D9"/>
+                      </a:solidFill>
+                      <a:prstDash val="solid"/>
+                      <a:round/>
+                      <a:headEnd type="none" w="med" len="med"/>
+                      <a:tailEnd type="none" w="med" len="med"/>
+                    </a:lnT>
+                    <a:lnB w="9525" cap="flat" cmpd="sng" algn="ctr">
+                      <a:solidFill>
+                        <a:srgbClr val="D9D9D9"/>
+                      </a:solidFill>
+                      <a:prstDash val="solid"/>
+                      <a:round/>
+                      <a:headEnd type="none" w="med" len="med"/>
+                      <a:tailEnd type="none" w="med" len="med"/>
+                    </a:lnB>
+                    <a:solidFill>
+                      <a:srgbClr val="FFFFFF"/>
+                    </a:solidFill>
+                  </a:tcPr>
+                </a:tc>
+                <a:tc>
+                  <a:txBody>
+                    <a:bodyPr/>
+                    <a:lstStyle/>
+                    <a:p>
+                      <a:pPr algn="ctr" indent="0" marL="0">
+                        <a:buNone/>
+                      </a:pPr>
+                      <a:r>
+                        <a:rPr lang="en-US" sz="1050" dirty="0">
+                          <a:solidFill>
+                            <a:srgbClr val="3F3F3F"/>
+                          </a:solidFill>
+                          <a:latin typeface="Malgun Gothic" pitchFamily="34" charset="0"/>
+                          <a:ea typeface="Malgun Gothic" pitchFamily="34" charset="-122"/>
+                          <a:cs typeface="Malgun Gothic" pitchFamily="34" charset="-120"/>
+                        </a:rPr>
+                        <a:t>37.2%</a:t>
+                      </a:r>
+                      <a:endParaRPr lang="en-US" sz="1050" dirty="0">
+                        <a:latin typeface="Malgun Gothic" charset="0"/>
+                        <a:ea typeface="Malgun Gothic" charset="0"/>
+                        <a:cs typeface="Malgun Gothic" charset="0"/>
+                      </a:endParaRPr>
+                    </a:p>
+                  </a:txBody>
+                  <a:tcPr marL="91440" marR="91440" marT="45720" marB="45720" anchor="ctr">
+                    <a:lnL w="9525" cap="flat" cmpd="sng" algn="ctr">
+                      <a:solidFill>
+                        <a:srgbClr val="D9D9D9"/>
+                      </a:solidFill>
+                      <a:prstDash val="solid"/>
+                      <a:round/>
+                      <a:headEnd type="none" w="med" len="med"/>
+                      <a:tailEnd type="none" w="med" len="med"/>
+                    </a:lnL>
+                    <a:lnR w="9525" cap="flat" cmpd="sng" algn="ctr">
+                      <a:solidFill>
+                        <a:srgbClr val="D9D9D9"/>
+                      </a:solidFill>
+                      <a:prstDash val="solid"/>
+                      <a:round/>
+                      <a:headEnd type="none" w="med" len="med"/>
+                      <a:tailEnd type="none" w="med" len="med"/>
+                    </a:lnR>
+                    <a:lnT w="9525" cap="flat" cmpd="sng" algn="ctr">
+                      <a:solidFill>
+                        <a:srgbClr val="D9D9D9"/>
+                      </a:solidFill>
+                      <a:prstDash val="solid"/>
+                      <a:round/>
+                      <a:headEnd type="none" w="med" len="med"/>
+                      <a:tailEnd type="none" w="med" len="med"/>
+                    </a:lnT>
+                    <a:lnB w="9525" cap="flat" cmpd="sng" algn="ctr">
+                      <a:solidFill>
+                        <a:srgbClr val="D9D9D9"/>
+                      </a:solidFill>
+                      <a:prstDash val="solid"/>
+                      <a:round/>
+                      <a:headEnd type="none" w="med" len="med"/>
+                      <a:tailEnd type="none" w="med" len="med"/>
+                    </a:lnB>
+                    <a:solidFill>
+                      <a:srgbClr val="FFFFFF"/>
+                    </a:solidFill>
+                  </a:tcPr>
+                </a:tc>
+              </a:tr>
+              <a:tr h="292608">
+                <a:tc>
+                  <a:txBody>
+                    <a:bodyPr/>
+                    <a:lstStyle/>
+                    <a:p>
+                      <a:pPr algn="l" indent="0" marL="0">
+                        <a:buNone/>
+                      </a:pPr>
+                      <a:r>
+                        <a:rPr lang="en-US" sz="1050" dirty="0">
+                          <a:solidFill>
+                            <a:srgbClr val="3F3F3F"/>
+                          </a:solidFill>
+                          <a:latin typeface="Malgun Gothic" pitchFamily="34" charset="0"/>
+                          <a:ea typeface="Malgun Gothic" pitchFamily="34" charset="-122"/>
+                          <a:cs typeface="Malgun Gothic" pitchFamily="34" charset="-120"/>
+                        </a:rPr>
+                        <a:t>박석영</a:t>
+                      </a:r>
+                      <a:endParaRPr lang="en-US" sz="1050" dirty="0">
+                        <a:latin typeface="Malgun Gothic" charset="0"/>
+                        <a:ea typeface="Malgun Gothic" charset="0"/>
+                        <a:cs typeface="Malgun Gothic" charset="0"/>
+                      </a:endParaRPr>
+                    </a:p>
+                  </a:txBody>
+                  <a:tcPr marL="91440" marR="91440" marT="45720" marB="45720" anchor="ctr">
+                    <a:lnL w="9525" cap="flat" cmpd="sng" algn="ctr">
+                      <a:solidFill>
+                        <a:srgbClr val="D9D9D9"/>
+                      </a:solidFill>
+                      <a:prstDash val="solid"/>
+                      <a:round/>
+                      <a:headEnd type="none" w="med" len="med"/>
+                      <a:tailEnd type="none" w="med" len="med"/>
+                    </a:lnL>
+                    <a:lnR w="9525" cap="flat" cmpd="sng" algn="ctr">
+                      <a:solidFill>
+                        <a:srgbClr val="D9D9D9"/>
+                      </a:solidFill>
+                      <a:prstDash val="solid"/>
+                      <a:round/>
+                      <a:headEnd type="none" w="med" len="med"/>
+                      <a:tailEnd type="none" w="med" len="med"/>
+                    </a:lnR>
+                    <a:lnT w="9525" cap="flat" cmpd="sng" algn="ctr">
+                      <a:solidFill>
+                        <a:srgbClr val="D9D9D9"/>
+                      </a:solidFill>
+                      <a:prstDash val="solid"/>
+                      <a:round/>
+                      <a:headEnd type="none" w="med" len="med"/>
+                      <a:tailEnd type="none" w="med" len="med"/>
+                    </a:lnT>
+                    <a:lnB w="9525" cap="flat" cmpd="sng" algn="ctr">
+                      <a:solidFill>
+                        <a:srgbClr val="D9D9D9"/>
+                      </a:solidFill>
+                      <a:prstDash val="solid"/>
+                      <a:round/>
+                      <a:headEnd type="none" w="med" len="med"/>
+                      <a:tailEnd type="none" w="med" len="med"/>
+                    </a:lnB>
+                    <a:solidFill>
+                      <a:srgbClr val="FFFFFF"/>
+                    </a:solidFill>
+                  </a:tcPr>
+                </a:tc>
+                <a:tc>
+                  <a:txBody>
+                    <a:bodyPr/>
+                    <a:lstStyle/>
+                    <a:p>
+                      <a:pPr algn="ctr" indent="0" marL="0">
+                        <a:buNone/>
+                      </a:pPr>
+                      <a:r>
+                        <a:rPr lang="en-US" sz="1050" dirty="0">
+                          <a:solidFill>
+                            <a:srgbClr val="3F3F3F"/>
+                          </a:solidFill>
+                          <a:latin typeface="Malgun Gothic" pitchFamily="34" charset="0"/>
+                          <a:ea typeface="Malgun Gothic" pitchFamily="34" charset="-122"/>
+                          <a:cs typeface="Malgun Gothic" pitchFamily="34" charset="-120"/>
+                        </a:rPr>
+                        <a:t>1397</a:t>
+                      </a:r>
+                      <a:endParaRPr lang="en-US" sz="1050" dirty="0">
+                        <a:latin typeface="Malgun Gothic" charset="0"/>
+                        <a:ea typeface="Malgun Gothic" charset="0"/>
+                        <a:cs typeface="Malgun Gothic" charset="0"/>
+                      </a:endParaRPr>
+                    </a:p>
+                  </a:txBody>
+                  <a:tcPr marL="91440" marR="91440" marT="45720" marB="45720" anchor="ctr">
+                    <a:lnL w="9525" cap="flat" cmpd="sng" algn="ctr">
+                      <a:solidFill>
+                        <a:srgbClr val="D9D9D9"/>
+                      </a:solidFill>
+                      <a:prstDash val="solid"/>
+                      <a:round/>
+                      <a:headEnd type="none" w="med" len="med"/>
+                      <a:tailEnd type="none" w="med" len="med"/>
+                    </a:lnL>
+                    <a:lnR w="9525" cap="flat" cmpd="sng" algn="ctr">
+                      <a:solidFill>
+                        <a:srgbClr val="D9D9D9"/>
+                      </a:solidFill>
+                      <a:prstDash val="solid"/>
+                      <a:round/>
+                      <a:headEnd type="none" w="med" len="med"/>
+                      <a:tailEnd type="none" w="med" len="med"/>
+                    </a:lnR>
+                    <a:lnT w="9525" cap="flat" cmpd="sng" algn="ctr">
+                      <a:solidFill>
+                        <a:srgbClr val="D9D9D9"/>
+                      </a:solidFill>
+                      <a:prstDash val="solid"/>
+                      <a:round/>
+                      <a:headEnd type="none" w="med" len="med"/>
+                      <a:tailEnd type="none" w="med" len="med"/>
+                    </a:lnT>
+                    <a:lnB w="9525" cap="flat" cmpd="sng" algn="ctr">
+                      <a:solidFill>
+                        <a:srgbClr val="D9D9D9"/>
+                      </a:solidFill>
+                      <a:prstDash val="solid"/>
+                      <a:round/>
+                      <a:headEnd type="none" w="med" len="med"/>
+                      <a:tailEnd type="none" w="med" len="med"/>
+                    </a:lnB>
+                    <a:solidFill>
+                      <a:srgbClr val="FFFFFF"/>
+                    </a:solidFill>
+                  </a:tcPr>
+                </a:tc>
+                <a:tc>
+                  <a:txBody>
+                    <a:bodyPr/>
+                    <a:lstStyle/>
+                    <a:p>
+                      <a:pPr algn="ctr" indent="0" marL="0">
+                        <a:buNone/>
+                      </a:pPr>
+                      <a:r>
+                        <a:rPr lang="en-US" sz="1050" dirty="0">
+                          <a:solidFill>
+                            <a:srgbClr val="3F3F3F"/>
+                          </a:solidFill>
+                          <a:latin typeface="Malgun Gothic" pitchFamily="34" charset="0"/>
+                          <a:ea typeface="Malgun Gothic" pitchFamily="34" charset="-122"/>
+                          <a:cs typeface="Malgun Gothic" pitchFamily="34" charset="-120"/>
+                        </a:rPr>
+                        <a:t>2005h</a:t>
+                      </a:r>
+                      <a:endParaRPr lang="en-US" sz="1050" dirty="0">
+                        <a:latin typeface="Malgun Gothic" charset="0"/>
+                        <a:ea typeface="Malgun Gothic" charset="0"/>
+                        <a:cs typeface="Malgun Gothic" charset="0"/>
+                      </a:endParaRPr>
+                    </a:p>
+                  </a:txBody>
+                  <a:tcPr marL="91440" marR="91440" marT="45720" marB="45720" anchor="ctr">
+                    <a:lnL w="9525" cap="flat" cmpd="sng" algn="ctr">
+                      <a:solidFill>
+                        <a:srgbClr val="D9D9D9"/>
+                      </a:solidFill>
+                      <a:prstDash val="solid"/>
+                      <a:round/>
+                      <a:headEnd type="none" w="med" len="med"/>
+                      <a:tailEnd type="none" w="med" len="med"/>
+                    </a:lnL>
+                    <a:lnR w="9525" cap="flat" cmpd="sng" algn="ctr">
+                      <a:solidFill>
+                        <a:srgbClr val="D9D9D9"/>
+                      </a:solidFill>
+                      <a:prstDash val="solid"/>
+                      <a:round/>
+                      <a:headEnd type="none" w="med" len="med"/>
+                      <a:tailEnd type="none" w="med" len="med"/>
+                    </a:lnR>
+                    <a:lnT w="9525" cap="flat" cmpd="sng" algn="ctr">
+                      <a:solidFill>
+                        <a:srgbClr val="D9D9D9"/>
+                      </a:solidFill>
+                      <a:prstDash val="solid"/>
+                      <a:round/>
+                      <a:headEnd type="none" w="med" len="med"/>
+                      <a:tailEnd type="none" w="med" len="med"/>
+                    </a:lnT>
+                    <a:lnB w="9525" cap="flat" cmpd="sng" algn="ctr">
+                      <a:solidFill>
+                        <a:srgbClr val="D9D9D9"/>
+                      </a:solidFill>
+                      <a:prstDash val="solid"/>
+                      <a:round/>
+                      <a:headEnd type="none" w="med" len="med"/>
+                      <a:tailEnd type="none" w="med" len="med"/>
+                    </a:lnB>
+                    <a:solidFill>
+                      <a:srgbClr val="FFFFFF"/>
+                    </a:solidFill>
+                  </a:tcPr>
+                </a:tc>
+                <a:tc>
+                  <a:txBody>
+                    <a:bodyPr/>
+                    <a:lstStyle/>
+                    <a:p>
+                      <a:pPr algn="ctr" indent="0" marL="0">
+                        <a:buNone/>
+                      </a:pPr>
+                      <a:r>
+                        <a:rPr lang="en-US" sz="1050" dirty="0">
+                          <a:solidFill>
+                            <a:srgbClr val="3F3F3F"/>
+                          </a:solidFill>
+                          <a:latin typeface="Malgun Gothic" pitchFamily="34" charset="0"/>
+                          <a:ea typeface="Malgun Gothic" pitchFamily="34" charset="-122"/>
+                          <a:cs typeface="Malgun Gothic" pitchFamily="34" charset="-120"/>
+                        </a:rPr>
+                        <a:t>31.6%</a:t>
+                      </a:r>
+                      <a:endParaRPr lang="en-US" sz="1050" dirty="0">
+                        <a:latin typeface="Malgun Gothic" charset="0"/>
+                        <a:ea typeface="Malgun Gothic" charset="0"/>
+                        <a:cs typeface="Malgun Gothic" charset="0"/>
+                      </a:endParaRPr>
+                    </a:p>
+                  </a:txBody>
+                  <a:tcPr marL="91440" marR="91440" marT="45720" marB="45720" anchor="ctr">
+                    <a:lnL w="9525" cap="flat" cmpd="sng" algn="ctr">
+                      <a:solidFill>
+                        <a:srgbClr val="D9D9D9"/>
+                      </a:solidFill>
+                      <a:prstDash val="solid"/>
+                      <a:round/>
+                      <a:headEnd type="none" w="med" len="med"/>
+                      <a:tailEnd type="none" w="med" len="med"/>
+                    </a:lnL>
+                    <a:lnR w="9525" cap="flat" cmpd="sng" algn="ctr">
+                      <a:solidFill>
+                        <a:srgbClr val="D9D9D9"/>
+                      </a:solidFill>
+                      <a:prstDash val="solid"/>
+                      <a:round/>
+                      <a:headEnd type="none" w="med" len="med"/>
+                      <a:tailEnd type="none" w="med" len="med"/>
+                    </a:lnR>
+                    <a:lnT w="9525" cap="flat" cmpd="sng" algn="ctr">
+                      <a:solidFill>
+                        <a:srgbClr val="D9D9D9"/>
+                      </a:solidFill>
+                      <a:prstDash val="solid"/>
+                      <a:round/>
+                      <a:headEnd type="none" w="med" len="med"/>
+                      <a:tailEnd type="none" w="med" len="med"/>
+                    </a:lnT>
+                    <a:lnB w="9525" cap="flat" cmpd="sng" algn="ctr">
+                      <a:solidFill>
+                        <a:srgbClr val="D9D9D9"/>
+                      </a:solidFill>
+                      <a:prstDash val="solid"/>
+                      <a:round/>
+                      <a:headEnd type="none" w="med" len="med"/>
+                      <a:tailEnd type="none" w="med" len="med"/>
+                    </a:lnB>
+                    <a:solidFill>
+                      <a:srgbClr val="FFFFFF"/>
+                    </a:solidFill>
+                  </a:tcPr>
+                </a:tc>
+                <a:tc>
+                  <a:txBody>
+                    <a:bodyPr/>
+                    <a:lstStyle/>
+                    <a:p>
+                      <a:pPr algn="ctr" indent="0" marL="0">
+                        <a:buNone/>
+                      </a:pPr>
+                      <a:r>
+                        <a:rPr lang="en-US" sz="1050" dirty="0">
+                          <a:solidFill>
+                            <a:srgbClr val="3F3F3F"/>
+                          </a:solidFill>
+                          <a:latin typeface="Malgun Gothic" pitchFamily="34" charset="0"/>
+                          <a:ea typeface="Malgun Gothic" pitchFamily="34" charset="-122"/>
+                          <a:cs typeface="Malgun Gothic" pitchFamily="34" charset="-120"/>
+                        </a:rPr>
+                        <a:t>49.9%</a:t>
+                      </a:r>
+                      <a:endParaRPr lang="en-US" sz="1050" dirty="0">
+                        <a:latin typeface="Malgun Gothic" charset="0"/>
+                        <a:ea typeface="Malgun Gothic" charset="0"/>
+                        <a:cs typeface="Malgun Gothic" charset="0"/>
+                      </a:endParaRPr>
+                    </a:p>
+                  </a:txBody>
+                  <a:tcPr marL="91440" marR="91440" marT="45720" marB="45720" anchor="ctr">
+                    <a:lnL w="9525" cap="flat" cmpd="sng" algn="ctr">
+                      <a:solidFill>
+                        <a:srgbClr val="D9D9D9"/>
+                      </a:solidFill>
+                      <a:prstDash val="solid"/>
+                      <a:round/>
+                      <a:headEnd type="none" w="med" len="med"/>
+                      <a:tailEnd type="none" w="med" len="med"/>
+                    </a:lnL>
+                    <a:lnR w="9525" cap="flat" cmpd="sng" algn="ctr">
+                      <a:solidFill>
+                        <a:srgbClr val="D9D9D9"/>
+                      </a:solidFill>
+                      <a:prstDash val="solid"/>
+                      <a:round/>
+                      <a:headEnd type="none" w="med" len="med"/>
+                      <a:tailEnd type="none" w="med" len="med"/>
+                    </a:lnR>
+                    <a:lnT w="9525" cap="flat" cmpd="sng" algn="ctr">
+                      <a:solidFill>
+                        <a:srgbClr val="D9D9D9"/>
+                      </a:solidFill>
+                      <a:prstDash val="solid"/>
+                      <a:round/>
+                      <a:headEnd type="none" w="med" len="med"/>
+                      <a:tailEnd type="none" w="med" len="med"/>
+                    </a:lnT>
+                    <a:lnB w="9525" cap="flat" cmpd="sng" algn="ctr">
+                      <a:solidFill>
+                        <a:srgbClr val="D9D9D9"/>
+                      </a:solidFill>
+                      <a:prstDash val="solid"/>
+                      <a:round/>
+                      <a:headEnd type="none" w="med" len="med"/>
+                      <a:tailEnd type="none" w="med" len="med"/>
+                    </a:lnB>
+                    <a:solidFill>
+                      <a:srgbClr val="FFFFFF"/>
+                    </a:solidFill>
+                  </a:tcPr>
+                </a:tc>
+              </a:tr>
+              <a:tr h="292608">
+                <a:tc>
+                  <a:txBody>
+                    <a:bodyPr/>
+                    <a:lstStyle/>
+                    <a:p>
+                      <a:pPr algn="l" indent="0" marL="0">
+                        <a:buNone/>
+                      </a:pPr>
+                      <a:r>
+                        <a:rPr lang="en-US" sz="1050" dirty="0">
+                          <a:solidFill>
+                            <a:srgbClr val="3F3F3F"/>
+                          </a:solidFill>
+                          <a:latin typeface="Malgun Gothic" pitchFamily="34" charset="0"/>
+                          <a:ea typeface="Malgun Gothic" pitchFamily="34" charset="-122"/>
+                          <a:cs typeface="Malgun Gothic" pitchFamily="34" charset="-120"/>
+                        </a:rPr>
+                        <a:t>이준민</a:t>
+                      </a:r>
+                      <a:endParaRPr lang="en-US" sz="1050" dirty="0">
+                        <a:latin typeface="Malgun Gothic" charset="0"/>
+                        <a:ea typeface="Malgun Gothic" charset="0"/>
+                        <a:cs typeface="Malgun Gothic" charset="0"/>
+                      </a:endParaRPr>
+                    </a:p>
+                  </a:txBody>
+                  <a:tcPr marL="91440" marR="91440" marT="45720" marB="45720" anchor="ctr">
+                    <a:lnL w="9525" cap="flat" cmpd="sng" algn="ctr">
+                      <a:solidFill>
+                        <a:srgbClr val="D9D9D9"/>
+                      </a:solidFill>
+                      <a:prstDash val="solid"/>
+                      <a:round/>
+                      <a:headEnd type="none" w="med" len="med"/>
+                      <a:tailEnd type="none" w="med" len="med"/>
+                    </a:lnL>
+                    <a:lnR w="9525" cap="flat" cmpd="sng" algn="ctr">
+                      <a:solidFill>
+                        <a:srgbClr val="D9D9D9"/>
+                      </a:solidFill>
+                      <a:prstDash val="solid"/>
+                      <a:round/>
+                      <a:headEnd type="none" w="med" len="med"/>
+                      <a:tailEnd type="none" w="med" len="med"/>
+                    </a:lnR>
+                    <a:lnT w="9525" cap="flat" cmpd="sng" algn="ctr">
+                      <a:solidFill>
+                        <a:srgbClr val="D9D9D9"/>
+                      </a:solidFill>
+                      <a:prstDash val="solid"/>
+                      <a:round/>
+                      <a:headEnd type="none" w="med" len="med"/>
+                      <a:tailEnd type="none" w="med" len="med"/>
+                    </a:lnT>
+                    <a:lnB w="9525" cap="flat" cmpd="sng" algn="ctr">
+                      <a:solidFill>
+                        <a:srgbClr val="D9D9D9"/>
+                      </a:solidFill>
+                      <a:prstDash val="solid"/>
+                      <a:round/>
+                      <a:headEnd type="none" w="med" len="med"/>
+                      <a:tailEnd type="none" w="med" len="med"/>
+                    </a:lnB>
+                    <a:solidFill>
+                      <a:srgbClr val="FFFFFF"/>
+                    </a:solidFill>
+                  </a:tcPr>
+                </a:tc>
+                <a:tc>
+                  <a:txBody>
+                    <a:bodyPr/>
+                    <a:lstStyle/>
+                    <a:p>
+                      <a:pPr algn="ctr" indent="0" marL="0">
+                        <a:buNone/>
+                      </a:pPr>
+                      <a:r>
+                        <a:rPr lang="en-US" sz="1050" dirty="0">
+                          <a:solidFill>
+                            <a:srgbClr val="3F3F3F"/>
+                          </a:solidFill>
+                          <a:latin typeface="Malgun Gothic" pitchFamily="34" charset="0"/>
+                          <a:ea typeface="Malgun Gothic" pitchFamily="34" charset="-122"/>
+                          <a:cs typeface="Malgun Gothic" pitchFamily="34" charset="-120"/>
+                        </a:rPr>
+                        <a:t>1391</a:t>
+                      </a:r>
+                      <a:endParaRPr lang="en-US" sz="1050" dirty="0">
+                        <a:latin typeface="Malgun Gothic" charset="0"/>
+                        <a:ea typeface="Malgun Gothic" charset="0"/>
+                        <a:cs typeface="Malgun Gothic" charset="0"/>
+                      </a:endParaRPr>
+                    </a:p>
+                  </a:txBody>
+                  <a:tcPr marL="91440" marR="91440" marT="45720" marB="45720" anchor="ctr">
+                    <a:lnL w="9525" cap="flat" cmpd="sng" algn="ctr">
+                      <a:solidFill>
+                        <a:srgbClr val="D9D9D9"/>
+                      </a:solidFill>
+                      <a:prstDash val="solid"/>
+                      <a:round/>
+                      <a:headEnd type="none" w="med" len="med"/>
+                      <a:tailEnd type="none" w="med" len="med"/>
+                    </a:lnL>
+                    <a:lnR w="9525" cap="flat" cmpd="sng" algn="ctr">
+                      <a:solidFill>
+                        <a:srgbClr val="D9D9D9"/>
+                      </a:solidFill>
+                      <a:prstDash val="solid"/>
+                      <a:round/>
+                      <a:headEnd type="none" w="med" len="med"/>
+                      <a:tailEnd type="none" w="med" len="med"/>
+                    </a:lnR>
+                    <a:lnT w="9525" cap="flat" cmpd="sng" algn="ctr">
+                      <a:solidFill>
+                        <a:srgbClr val="D9D9D9"/>
+                      </a:solidFill>
+                      <a:prstDash val="solid"/>
+                      <a:round/>
+                      <a:headEnd type="none" w="med" len="med"/>
+                      <a:tailEnd type="none" w="med" len="med"/>
+                    </a:lnT>
+                    <a:lnB w="9525" cap="flat" cmpd="sng" algn="ctr">
+                      <a:solidFill>
+                        <a:srgbClr val="D9D9D9"/>
+                      </a:solidFill>
+                      <a:prstDash val="solid"/>
+                      <a:round/>
+                      <a:headEnd type="none" w="med" len="med"/>
+                      <a:tailEnd type="none" w="med" len="med"/>
+                    </a:lnB>
+                    <a:solidFill>
+                      <a:srgbClr val="FFFFFF"/>
+                    </a:solidFill>
+                  </a:tcPr>
+                </a:tc>
+                <a:tc>
+                  <a:txBody>
+                    <a:bodyPr/>
+                    <a:lstStyle/>
+                    <a:p>
+                      <a:pPr algn="ctr" indent="0" marL="0">
+                        <a:buNone/>
+                      </a:pPr>
+                      <a:r>
+                        <a:rPr lang="en-US" sz="1050" dirty="0">
+                          <a:solidFill>
+                            <a:srgbClr val="3F3F3F"/>
+                          </a:solidFill>
+                          <a:latin typeface="Malgun Gothic" pitchFamily="34" charset="0"/>
+                          <a:ea typeface="Malgun Gothic" pitchFamily="34" charset="-122"/>
+                          <a:cs typeface="Malgun Gothic" pitchFamily="34" charset="-120"/>
+                        </a:rPr>
+                        <a:t>2713h</a:t>
+                      </a:r>
+                      <a:endParaRPr lang="en-US" sz="1050" dirty="0">
+                        <a:latin typeface="Malgun Gothic" charset="0"/>
+                        <a:ea typeface="Malgun Gothic" charset="0"/>
+                        <a:cs typeface="Malgun Gothic" charset="0"/>
+                      </a:endParaRPr>
+                    </a:p>
+                  </a:txBody>
+                  <a:tcPr marL="91440" marR="91440" marT="45720" marB="45720" anchor="ctr">
+                    <a:lnL w="9525" cap="flat" cmpd="sng" algn="ctr">
+                      <a:solidFill>
+                        <a:srgbClr val="D9D9D9"/>
+                      </a:solidFill>
+                      <a:prstDash val="solid"/>
+                      <a:round/>
+                      <a:headEnd type="none" w="med" len="med"/>
+                      <a:tailEnd type="none" w="med" len="med"/>
+                    </a:lnL>
+                    <a:lnR w="9525" cap="flat" cmpd="sng" algn="ctr">
+                      <a:solidFill>
+                        <a:srgbClr val="D9D9D9"/>
+                      </a:solidFill>
+                      <a:prstDash val="solid"/>
+                      <a:round/>
+                      <a:headEnd type="none" w="med" len="med"/>
+                      <a:tailEnd type="none" w="med" len="med"/>
+                    </a:lnR>
+                    <a:lnT w="9525" cap="flat" cmpd="sng" algn="ctr">
+                      <a:solidFill>
+                        <a:srgbClr val="D9D9D9"/>
+                      </a:solidFill>
+                      <a:prstDash val="solid"/>
+                      <a:round/>
+                      <a:headEnd type="none" w="med" len="med"/>
+                      <a:tailEnd type="none" w="med" len="med"/>
+                    </a:lnT>
+                    <a:lnB w="9525" cap="flat" cmpd="sng" algn="ctr">
+                      <a:solidFill>
+                        <a:srgbClr val="D9D9D9"/>
+                      </a:solidFill>
+                      <a:prstDash val="solid"/>
+                      <a:round/>
+                      <a:headEnd type="none" w="med" len="med"/>
+                      <a:tailEnd type="none" w="med" len="med"/>
+                    </a:lnB>
+                    <a:solidFill>
+                      <a:srgbClr val="FFFFFF"/>
+                    </a:solidFill>
+                  </a:tcPr>
+                </a:tc>
+                <a:tc>
+                  <a:txBody>
+                    <a:bodyPr/>
+                    <a:lstStyle/>
+                    <a:p>
+                      <a:pPr algn="ctr" indent="0" marL="0">
+                        <a:buNone/>
+                      </a:pPr>
+                      <a:r>
+                        <a:rPr lang="en-US" sz="1050" dirty="0">
+                          <a:solidFill>
+                            <a:srgbClr val="3F3F3F"/>
+                          </a:solidFill>
+                          <a:latin typeface="Malgun Gothic" pitchFamily="34" charset="0"/>
+                          <a:ea typeface="Malgun Gothic" pitchFamily="34" charset="-122"/>
+                          <a:cs typeface="Malgun Gothic" pitchFamily="34" charset="-120"/>
+                        </a:rPr>
+                        <a:t>30.9%</a:t>
+                      </a:r>
+                      <a:endParaRPr lang="en-US" sz="1050" dirty="0">
+                        <a:latin typeface="Malgun Gothic" charset="0"/>
+                        <a:ea typeface="Malgun Gothic" charset="0"/>
+                        <a:cs typeface="Malgun Gothic" charset="0"/>
+                      </a:endParaRPr>
+                    </a:p>
+                  </a:txBody>
+                  <a:tcPr marL="91440" marR="91440" marT="45720" marB="45720" anchor="ctr">
+                    <a:lnL w="9525" cap="flat" cmpd="sng" algn="ctr">
+                      <a:solidFill>
+                        <a:srgbClr val="D9D9D9"/>
+                      </a:solidFill>
+                      <a:prstDash val="solid"/>
+                      <a:round/>
+                      <a:headEnd type="none" w="med" len="med"/>
+                      <a:tailEnd type="none" w="med" len="med"/>
+                    </a:lnL>
+                    <a:lnR w="9525" cap="flat" cmpd="sng" algn="ctr">
+                      <a:solidFill>
+                        <a:srgbClr val="D9D9D9"/>
+                      </a:solidFill>
+                      <a:prstDash val="solid"/>
+                      <a:round/>
+                      <a:headEnd type="none" w="med" len="med"/>
+                      <a:tailEnd type="none" w="med" len="med"/>
+                    </a:lnR>
+                    <a:lnT w="9525" cap="flat" cmpd="sng" algn="ctr">
+                      <a:solidFill>
+                        <a:srgbClr val="D9D9D9"/>
+                      </a:solidFill>
+                      <a:prstDash val="solid"/>
+                      <a:round/>
+                      <a:headEnd type="none" w="med" len="med"/>
+                      <a:tailEnd type="none" w="med" len="med"/>
+                    </a:lnT>
+                    <a:lnB w="9525" cap="flat" cmpd="sng" algn="ctr">
+                      <a:solidFill>
+                        <a:srgbClr val="D9D9D9"/>
+                      </a:solidFill>
+                      <a:prstDash val="solid"/>
+                      <a:round/>
+                      <a:headEnd type="none" w="med" len="med"/>
+                      <a:tailEnd type="none" w="med" len="med"/>
+                    </a:lnB>
+                    <a:solidFill>
+                      <a:srgbClr val="FFFFFF"/>
+                    </a:solidFill>
+                  </a:tcPr>
+                </a:tc>
+                <a:tc>
+                  <a:txBody>
+                    <a:bodyPr/>
+                    <a:lstStyle/>
+                    <a:p>
+                      <a:pPr algn="ctr" indent="0" marL="0">
+                        <a:buNone/>
+                      </a:pPr>
+                      <a:r>
+                        <a:rPr lang="en-US" sz="1050" dirty="0">
+                          <a:solidFill>
+                            <a:srgbClr val="3F3F3F"/>
+                          </a:solidFill>
+                          <a:latin typeface="Malgun Gothic" pitchFamily="34" charset="0"/>
+                          <a:ea typeface="Malgun Gothic" pitchFamily="34" charset="-122"/>
+                          <a:cs typeface="Malgun Gothic" pitchFamily="34" charset="-120"/>
+                        </a:rPr>
+                        <a:t>45%</a:t>
+                      </a:r>
+                      <a:endParaRPr lang="en-US" sz="1050" dirty="0">
+                        <a:latin typeface="Malgun Gothic" charset="0"/>
+                        <a:ea typeface="Malgun Gothic" charset="0"/>
+                        <a:cs typeface="Malgun Gothic" charset="0"/>
+                      </a:endParaRPr>
+                    </a:p>
+                  </a:txBody>
+                  <a:tcPr marL="91440" marR="91440" marT="45720" marB="45720" anchor="ctr">
+                    <a:lnL w="9525" cap="flat" cmpd="sng" algn="ctr">
+                      <a:solidFill>
+                        <a:srgbClr val="D9D9D9"/>
+                      </a:solidFill>
+                      <a:prstDash val="solid"/>
+                      <a:round/>
+                      <a:headEnd type="none" w="med" len="med"/>
+                      <a:tailEnd type="none" w="med" len="med"/>
+                    </a:lnL>
+                    <a:lnR w="9525" cap="flat" cmpd="sng" algn="ctr">
+                      <a:solidFill>
+                        <a:srgbClr val="D9D9D9"/>
+                      </a:solidFill>
+                      <a:prstDash val="solid"/>
+                      <a:round/>
+                      <a:headEnd type="none" w="med" len="med"/>
+                      <a:tailEnd type="none" w="med" len="med"/>
+                    </a:lnR>
+                    <a:lnT w="9525" cap="flat" cmpd="sng" algn="ctr">
+                      <a:solidFill>
+                        <a:srgbClr val="D9D9D9"/>
+                      </a:solidFill>
+                      <a:prstDash val="solid"/>
+                      <a:round/>
+                      <a:headEnd type="none" w="med" len="med"/>
+                      <a:tailEnd type="none" w="med" len="med"/>
+                    </a:lnT>
+                    <a:lnB w="9525" cap="flat" cmpd="sng" algn="ctr">
+                      <a:solidFill>
+                        <a:srgbClr val="D9D9D9"/>
+                      </a:solidFill>
+                      <a:prstDash val="solid"/>
+                      <a:round/>
+                      <a:headEnd type="none" w="med" len="med"/>
+                      <a:tailEnd type="none" w="med" len="med"/>
+                    </a:lnB>
+                    <a:solidFill>
+                      <a:srgbClr val="FFFFFF"/>
+                    </a:solidFill>
+                  </a:tcPr>
+                </a:tc>
+              </a:tr>
+            </a:tbl>
+          </a:graphicData>
+        </a:graphic>
+      </p:graphicFrame>
+      <p:sp>
+        <p:nvSpPr>
+          <p:cNvPr id="11" name="Text 6"/>
+          <p:cNvSpPr/>
+          <p:nvPr/>
+        </p:nvSpPr>
+        <p:spPr>
+          <a:xfrm>
+            <a:off x="530352" y="6172200"/>
+            <a:ext cx="5486400" cy="320040"/>
           </a:xfrm>
           <a:prstGeom prst="rect">
             <a:avLst/>
@@ -13819,27 +16584,27 @@
           <a:bodyPr wrap="square" lIns="0" tIns="0" rIns="0" bIns="0" rtlCol="0" anchor="ctr"/>
           <a:lstStyle/>
           <a:p>
-            <a:pPr algn="ctr" indent="0" marL="0">
+            <a:pPr indent="0" marL="0">
               <a:buNone/>
             </a:pPr>
             <a:r>
-              <a:rPr lang="en-US" sz="1600" i="1" dirty="0">
+              <a:rPr lang="en-US" sz="900" i="1" dirty="0">
                 <a:solidFill>
-                  <a:srgbClr val="005BAC"/>
+                  <a:srgbClr val="9E9E9E"/>
                 </a:solidFill>
                 <a:latin typeface="Malgun Gothic" pitchFamily="34" charset="0"/>
                 <a:ea typeface="Malgun Gothic" pitchFamily="34" charset="-122"/>
                 <a:cs typeface="Malgun Gothic" pitchFamily="34" charset="-120"/>
               </a:rPr>
-              <a:t>자료 미제공 – 추후 업데이트</a:t>
-            </a:r>
-            <a:endParaRPr lang="en-US" sz="1600" dirty="0"/>
-          </a:p>
-        </p:txBody>
-      </p:sp>
-      <p:sp>
-        <p:nvSpPr>
-          <p:cNvPr id="12" name="Text 8"/>
+              <a:t>데이터 소스: CRM 약속·활동 로그 (담당자·시작/종료시간 기준, 취소 건 제외)</a:t>
+            </a:r>
+            <a:endParaRPr lang="en-US" sz="900" dirty="0"/>
+          </a:p>
+        </p:txBody>
+      </p:sp>
+      <p:sp>
+        <p:nvSpPr>
+          <p:cNvPr id="12" name="Text 7"/>
           <p:cNvSpPr/>
           <p:nvPr/>
         </p:nvSpPr>
@@ -13878,7 +16643,7 @@
       </p:sp>
       <p:sp>
         <p:nvSpPr>
-          <p:cNvPr id="13" name="Shape 9"/>
+          <p:cNvPr id="13" name="Shape 8"/>
           <p:cNvSpPr/>
           <p:nvPr/>
         </p:nvSpPr>
@@ -13900,7 +16665,7 @@
       </p:sp>
       <p:sp>
         <p:nvSpPr>
-          <p:cNvPr id="14" name="Text 10"/>
+          <p:cNvPr id="14" name="Text 9"/>
           <p:cNvSpPr/>
           <p:nvPr/>
         </p:nvSpPr>
@@ -13939,7 +16704,7 @@
       </p:sp>
       <p:sp>
         <p:nvSpPr>
-          <p:cNvPr id="15" name="Text 11"/>
+          <p:cNvPr id="15" name="Text 10"/>
           <p:cNvSpPr/>
           <p:nvPr/>
         </p:nvSpPr>
@@ -13978,7 +16743,7 @@
       </p:sp>
       <p:sp>
         <p:nvSpPr>
-          <p:cNvPr id="16" name="Shape 12"/>
+          <p:cNvPr id="16" name="Shape 11"/>
           <p:cNvSpPr/>
           <p:nvPr/>
         </p:nvSpPr>
@@ -14000,7 +16765,7 @@
       </p:sp>
       <p:sp>
         <p:nvSpPr>
-          <p:cNvPr id="17" name="Text 13"/>
+          <p:cNvPr id="17" name="Text 12"/>
           <p:cNvSpPr/>
           <p:nvPr/>
         </p:nvSpPr>
@@ -14039,7 +16804,7 @@
       </p:sp>
       <p:sp>
         <p:nvSpPr>
-          <p:cNvPr id="18" name="Text 14"/>
+          <p:cNvPr id="18" name="Text 13"/>
           <p:cNvSpPr/>
           <p:nvPr/>
         </p:nvSpPr>
@@ -14078,7 +16843,7 @@
       </p:sp>
       <p:sp>
         <p:nvSpPr>
-          <p:cNvPr id="19" name="Shape 15"/>
+          <p:cNvPr id="19" name="Shape 14"/>
           <p:cNvSpPr/>
           <p:nvPr/>
         </p:nvSpPr>
@@ -14100,7 +16865,7 @@
       </p:sp>
       <p:sp>
         <p:nvSpPr>
-          <p:cNvPr id="20" name="Text 16"/>
+          <p:cNvPr id="20" name="Text 15"/>
           <p:cNvSpPr/>
           <p:nvPr/>
         </p:nvSpPr>
@@ -14139,7 +16904,7 @@
       </p:sp>
       <p:sp>
         <p:nvSpPr>
-          <p:cNvPr id="21" name="Text 17"/>
+          <p:cNvPr id="21" name="Text 16"/>
           <p:cNvSpPr/>
           <p:nvPr/>
         </p:nvSpPr>
@@ -14178,7 +16943,7 @@
       </p:sp>
       <p:sp>
         <p:nvSpPr>
-          <p:cNvPr id="22" name="Text 18"/>
+          <p:cNvPr id="22" name="Text 17"/>
           <p:cNvSpPr/>
           <p:nvPr/>
         </p:nvSpPr>
@@ -14217,7 +16982,7 @@
       </p:sp>
       <p:sp>
         <p:nvSpPr>
-          <p:cNvPr id="23" name="Text 19"/>
+          <p:cNvPr id="23" name="Text 18"/>
           <p:cNvSpPr/>
           <p:nvPr/>
         </p:nvSpPr>
@@ -14256,7 +17021,7 @@
       </p:sp>
       <p:sp>
         <p:nvSpPr>
-          <p:cNvPr id="24" name="Text 20"/>
+          <p:cNvPr id="24" name="Text 19"/>
           <p:cNvSpPr/>
           <p:nvPr/>
         </p:nvSpPr>
@@ -14295,7 +17060,7 @@
       </p:sp>
       <p:sp>
         <p:nvSpPr>
-          <p:cNvPr id="25" name="Shape 21"/>
+          <p:cNvPr id="25" name="Shape 20"/>
           <p:cNvSpPr/>
           <p:nvPr/>
         </p:nvSpPr>
@@ -14315,7 +17080,7 @@
       </p:sp>
       <p:sp>
         <p:nvSpPr>
-          <p:cNvPr id="26" name="Text 22"/>
+          <p:cNvPr id="26" name="Text 21"/>
           <p:cNvSpPr/>
           <p:nvPr/>
         </p:nvSpPr>
@@ -14354,7 +17119,7 @@
       </p:sp>
       <p:sp>
         <p:nvSpPr>
-          <p:cNvPr id="27" name="Text 23"/>
+          <p:cNvPr id="27" name="Text 22"/>
           <p:cNvSpPr/>
           <p:nvPr/>
         </p:nvSpPr>
@@ -14393,7 +17158,7 @@
       </p:sp>
       <p:sp>
         <p:nvSpPr>
-          <p:cNvPr id="28" name="Shape 24"/>
+          <p:cNvPr id="28" name="Shape 23"/>
           <p:cNvSpPr/>
           <p:nvPr/>
         </p:nvSpPr>
@@ -14413,7 +17178,7 @@
       </p:sp>
       <p:sp>
         <p:nvSpPr>
-          <p:cNvPr id="29" name="Text 25"/>
+          <p:cNvPr id="29" name="Text 24"/>
           <p:cNvSpPr/>
           <p:nvPr/>
         </p:nvSpPr>
@@ -14452,7 +17217,7 @@
       </p:sp>
       <p:sp>
         <p:nvSpPr>
-          <p:cNvPr id="30" name="Text 26"/>
+          <p:cNvPr id="30" name="Text 25"/>
           <p:cNvSpPr/>
           <p:nvPr/>
         </p:nvSpPr>
@@ -14491,7 +17256,7 @@
       </p:sp>
       <p:sp>
         <p:nvSpPr>
-          <p:cNvPr id="31" name="Shape 27"/>
+          <p:cNvPr id="31" name="Shape 26"/>
           <p:cNvSpPr/>
           <p:nvPr/>
         </p:nvSpPr>
@@ -14511,7 +17276,7 @@
       </p:sp>
       <p:sp>
         <p:nvSpPr>
-          <p:cNvPr id="32" name="Text 28"/>
+          <p:cNvPr id="32" name="Text 27"/>
           <p:cNvSpPr/>
           <p:nvPr/>
         </p:nvSpPr>
@@ -14550,7 +17315,7 @@
       </p:sp>
       <p:sp>
         <p:nvSpPr>
-          <p:cNvPr id="33" name="Text 29"/>
+          <p:cNvPr id="33" name="Text 28"/>
           <p:cNvSpPr/>
           <p:nvPr/>
         </p:nvSpPr>
@@ -14589,7 +17354,7 @@
       </p:sp>
       <p:sp>
         <p:nvSpPr>
-          <p:cNvPr id="34" name="Shape 30"/>
+          <p:cNvPr id="34" name="Shape 29"/>
           <p:cNvSpPr/>
           <p:nvPr/>
         </p:nvSpPr>
@@ -14609,7 +17374,7 @@
       </p:sp>
       <p:sp>
         <p:nvSpPr>
-          <p:cNvPr id="35" name="Text 31"/>
+          <p:cNvPr id="35" name="Text 30"/>
           <p:cNvSpPr/>
           <p:nvPr/>
         </p:nvSpPr>
@@ -14648,7 +17413,7 @@
       </p:sp>
       <p:sp>
         <p:nvSpPr>
-          <p:cNvPr id="36" name="Text 32"/>
+          <p:cNvPr id="36" name="Text 31"/>
           <p:cNvSpPr/>
           <p:nvPr/>
         </p:nvSpPr>
@@ -14687,7 +17452,7 @@
       </p:sp>
       <p:sp>
         <p:nvSpPr>
-          <p:cNvPr id="37" name="Text 33"/>
+          <p:cNvPr id="37" name="Text 32"/>
           <p:cNvSpPr/>
           <p:nvPr/>
         </p:nvSpPr>
@@ -14848,6 +17613,2171 @@
                 <a:ea typeface="Malgun Gothic" pitchFamily="34" charset="-122"/>
                 <a:cs typeface="Malgun Gothic" pitchFamily="34" charset="-120"/>
               </a:rPr>
+              <a:t>장비별 에러율 분석</a:t>
+            </a:r>
+            <a:endParaRPr lang="en-US" sz="2600" dirty="0"/>
+          </a:p>
+        </p:txBody>
+      </p:sp>
+      <p:pic>
+        <p:nvPicPr>
+          <p:cNvPr id="5" name="Image 0" descr="sysmex_logo_mono_blue.png">    </p:cNvPr>
+          <p:cNvPicPr>
+            <a:picLocks noChangeAspect="1"/>
+          </p:cNvPicPr>
+          <p:nvPr/>
+        </p:nvPicPr>
+        <p:blipFill>
+          <a:blip r:embed="rId1"/>
+          <a:stretch>
+            <a:fillRect/>
+          </a:stretch>
+        </p:blipFill>
+        <p:spPr>
+          <a:xfrm>
+            <a:off x="10652760" y="292608"/>
+            <a:ext cx="1097280" cy="420624"/>
+          </a:xfrm>
+          <a:prstGeom prst="rect">
+            <a:avLst/>
+          </a:prstGeom>
+        </p:spPr>
+      </p:pic>
+      <p:sp>
+        <p:nvSpPr>
+          <p:cNvPr id="6" name="Text 3"/>
+          <p:cNvSpPr/>
+          <p:nvPr/>
+        </p:nvSpPr>
+        <p:spPr>
+          <a:xfrm>
+            <a:off x="530352" y="1051560"/>
+            <a:ext cx="11100816" cy="365760"/>
+          </a:xfrm>
+          <a:prstGeom prst="rect">
+            <a:avLst/>
+          </a:prstGeom>
+          <a:noFill/>
+          <a:ln/>
+        </p:spPr>
+        <p:txBody>
+          <a:bodyPr wrap="square" lIns="0" tIns="0" rIns="0" bIns="0" rtlCol="0" anchor="ctr"/>
+          <a:lstStyle/>
+          <a:p>
+            <a:pPr indent="0" marL="0">
+              <a:buNone/>
+            </a:pPr>
+            <a:r>
+              <a:rPr lang="en-US" sz="1100" i="1" dirty="0">
+                <a:solidFill>
+                  <a:srgbClr val="9E9E9E"/>
+                </a:solidFill>
+                <a:latin typeface="Malgun Gothic" pitchFamily="34" charset="0"/>
+                <a:ea typeface="Malgun Gothic" pitchFamily="34" charset="-122"/>
+                <a:cs typeface="Malgun Gothic" pitchFamily="34" charset="-120"/>
+              </a:rPr>
+              <a:t>CRM 약속·활동 로그 40,000건 원자료 직접 집계 (취소 건 제외) · 에러율 = 고장 수리 건수 ÷ 전체 서비스 활동 건수 × 100</a:t>
+            </a:r>
+            <a:endParaRPr lang="en-US" sz="1100" dirty="0"/>
+          </a:p>
+        </p:txBody>
+      </p:sp>
+      <p:graphicFrame>
+        <p:nvGraphicFramePr>
+          <p:cNvPr id="8" name="Table 0"/>
+          <p:cNvGraphicFramePr>
+            <a:graphicFrameLocks noGrp="1"/>
+          </p:cNvGraphicFramePr>
+          <p:nvPr>
+            <p:extLst>
+              <p:ext uri="{D42A27DB-BD31-4B8C-83A1-F6EECF244321}">
+                <p14:modId xmlns:p14="http://schemas.microsoft.com/office/powerpoint/2010/main" val="1579011935"/>
+              </p:ext>
+            </p:extLst>
+          </p:nvPr>
+        </p:nvGraphicFramePr>
+        <p:xfrm>
+          <a:off x="530352" y="1508760"/>
+          <a:ext cx="6400800" cy="914400"/>
+        </p:xfrm>
+        <a:graphic>
+          <a:graphicData uri="http://schemas.openxmlformats.org/drawingml/2006/table">
+            <a:tbl>
+              <a:tblPr/>
+              <a:tblGrid>
+                <a:gridCol w="2560320"/>
+                <a:gridCol w="1371600"/>
+                <a:gridCol w="1371600"/>
+                <a:gridCol w="1097280"/>
+              </a:tblGrid>
+              <a:tr h="502920">
+                <a:tc>
+                  <a:txBody>
+                    <a:bodyPr/>
+                    <a:lstStyle/>
+                    <a:p>
+                      <a:pPr algn="l" indent="0" marL="0">
+                        <a:buNone/>
+                      </a:pPr>
+                      <a:r>
+                        <a:rPr lang="en-US" sz="1300" b="1" dirty="0">
+                          <a:solidFill>
+                            <a:srgbClr val="FFFFFF"/>
+                          </a:solidFill>
+                          <a:latin typeface="Malgun Gothic" pitchFamily="34" charset="0"/>
+                          <a:ea typeface="Malgun Gothic" pitchFamily="34" charset="-122"/>
+                          <a:cs typeface="Malgun Gothic" pitchFamily="34" charset="-120"/>
+                        </a:rPr>
+                        <a:t>장비군</a:t>
+                      </a:r>
+                      <a:endParaRPr lang="en-US" sz="1300" dirty="0">
+                        <a:latin typeface="Malgun Gothic" charset="0"/>
+                        <a:ea typeface="Malgun Gothic" charset="0"/>
+                        <a:cs typeface="Malgun Gothic" charset="0"/>
+                      </a:endParaRPr>
+                    </a:p>
+                  </a:txBody>
+                  <a:tcPr marL="91440" marR="91440" marT="45720" marB="45720" anchor="ctr">
+                    <a:lnL w="9525" cap="flat" cmpd="sng" algn="ctr">
+                      <a:solidFill>
+                        <a:srgbClr val="D9D9D9"/>
+                      </a:solidFill>
+                      <a:prstDash val="solid"/>
+                      <a:round/>
+                      <a:headEnd type="none" w="med" len="med"/>
+                      <a:tailEnd type="none" w="med" len="med"/>
+                    </a:lnL>
+                    <a:lnR w="9525" cap="flat" cmpd="sng" algn="ctr">
+                      <a:solidFill>
+                        <a:srgbClr val="D9D9D9"/>
+                      </a:solidFill>
+                      <a:prstDash val="solid"/>
+                      <a:round/>
+                      <a:headEnd type="none" w="med" len="med"/>
+                      <a:tailEnd type="none" w="med" len="med"/>
+                    </a:lnR>
+                    <a:lnT w="9525" cap="flat" cmpd="sng" algn="ctr">
+                      <a:solidFill>
+                        <a:srgbClr val="D9D9D9"/>
+                      </a:solidFill>
+                      <a:prstDash val="solid"/>
+                      <a:round/>
+                      <a:headEnd type="none" w="med" len="med"/>
+                      <a:tailEnd type="none" w="med" len="med"/>
+                    </a:lnT>
+                    <a:lnB w="9525" cap="flat" cmpd="sng" algn="ctr">
+                      <a:solidFill>
+                        <a:srgbClr val="D9D9D9"/>
+                      </a:solidFill>
+                      <a:prstDash val="solid"/>
+                      <a:round/>
+                      <a:headEnd type="none" w="med" len="med"/>
+                      <a:tailEnd type="none" w="med" len="med"/>
+                    </a:lnB>
+                    <a:solidFill>
+                      <a:srgbClr val="005BAC"/>
+                    </a:solidFill>
+                  </a:tcPr>
+                </a:tc>
+                <a:tc>
+                  <a:txBody>
+                    <a:bodyPr/>
+                    <a:lstStyle/>
+                    <a:p>
+                      <a:pPr algn="ctr" indent="0" marL="0">
+                        <a:buNone/>
+                      </a:pPr>
+                      <a:r>
+                        <a:rPr lang="en-US" sz="1300" b="1" dirty="0">
+                          <a:solidFill>
+                            <a:srgbClr val="FFFFFF"/>
+                          </a:solidFill>
+                          <a:latin typeface="Malgun Gothic" pitchFamily="34" charset="0"/>
+                          <a:ea typeface="Malgun Gothic" pitchFamily="34" charset="-122"/>
+                          <a:cs typeface="Malgun Gothic" pitchFamily="34" charset="-120"/>
+                        </a:rPr>
+                        <a:t>전체 활동</a:t>
+                      </a:r>
+                      <a:endParaRPr lang="en-US" sz="1300" dirty="0">
+                        <a:latin typeface="Malgun Gothic" charset="0"/>
+                        <a:ea typeface="Malgun Gothic" charset="0"/>
+                        <a:cs typeface="Malgun Gothic" charset="0"/>
+                      </a:endParaRPr>
+                    </a:p>
+                  </a:txBody>
+                  <a:tcPr marL="91440" marR="91440" marT="45720" marB="45720" anchor="ctr">
+                    <a:lnL w="9525" cap="flat" cmpd="sng" algn="ctr">
+                      <a:solidFill>
+                        <a:srgbClr val="D9D9D9"/>
+                      </a:solidFill>
+                      <a:prstDash val="solid"/>
+                      <a:round/>
+                      <a:headEnd type="none" w="med" len="med"/>
+                      <a:tailEnd type="none" w="med" len="med"/>
+                    </a:lnL>
+                    <a:lnR w="9525" cap="flat" cmpd="sng" algn="ctr">
+                      <a:solidFill>
+                        <a:srgbClr val="D9D9D9"/>
+                      </a:solidFill>
+                      <a:prstDash val="solid"/>
+                      <a:round/>
+                      <a:headEnd type="none" w="med" len="med"/>
+                      <a:tailEnd type="none" w="med" len="med"/>
+                    </a:lnR>
+                    <a:lnT w="9525" cap="flat" cmpd="sng" algn="ctr">
+                      <a:solidFill>
+                        <a:srgbClr val="D9D9D9"/>
+                      </a:solidFill>
+                      <a:prstDash val="solid"/>
+                      <a:round/>
+                      <a:headEnd type="none" w="med" len="med"/>
+                      <a:tailEnd type="none" w="med" len="med"/>
+                    </a:lnT>
+                    <a:lnB w="9525" cap="flat" cmpd="sng" algn="ctr">
+                      <a:solidFill>
+                        <a:srgbClr val="D9D9D9"/>
+                      </a:solidFill>
+                      <a:prstDash val="solid"/>
+                      <a:round/>
+                      <a:headEnd type="none" w="med" len="med"/>
+                      <a:tailEnd type="none" w="med" len="med"/>
+                    </a:lnB>
+                    <a:solidFill>
+                      <a:srgbClr val="005BAC"/>
+                    </a:solidFill>
+                  </a:tcPr>
+                </a:tc>
+                <a:tc>
+                  <a:txBody>
+                    <a:bodyPr/>
+                    <a:lstStyle/>
+                    <a:p>
+                      <a:pPr algn="ctr" indent="0" marL="0">
+                        <a:buNone/>
+                      </a:pPr>
+                      <a:r>
+                        <a:rPr lang="en-US" sz="1300" b="1" dirty="0">
+                          <a:solidFill>
+                            <a:srgbClr val="FFFFFF"/>
+                          </a:solidFill>
+                          <a:latin typeface="Malgun Gothic" pitchFamily="34" charset="0"/>
+                          <a:ea typeface="Malgun Gothic" pitchFamily="34" charset="-122"/>
+                          <a:cs typeface="Malgun Gothic" pitchFamily="34" charset="-120"/>
+                        </a:rPr>
+                        <a:t>고장 수리</a:t>
+                      </a:r>
+                      <a:endParaRPr lang="en-US" sz="1300" dirty="0">
+                        <a:latin typeface="Malgun Gothic" charset="0"/>
+                        <a:ea typeface="Malgun Gothic" charset="0"/>
+                        <a:cs typeface="Malgun Gothic" charset="0"/>
+                      </a:endParaRPr>
+                    </a:p>
+                  </a:txBody>
+                  <a:tcPr marL="91440" marR="91440" marT="45720" marB="45720" anchor="ctr">
+                    <a:lnL w="9525" cap="flat" cmpd="sng" algn="ctr">
+                      <a:solidFill>
+                        <a:srgbClr val="D9D9D9"/>
+                      </a:solidFill>
+                      <a:prstDash val="solid"/>
+                      <a:round/>
+                      <a:headEnd type="none" w="med" len="med"/>
+                      <a:tailEnd type="none" w="med" len="med"/>
+                    </a:lnL>
+                    <a:lnR w="9525" cap="flat" cmpd="sng" algn="ctr">
+                      <a:solidFill>
+                        <a:srgbClr val="D9D9D9"/>
+                      </a:solidFill>
+                      <a:prstDash val="solid"/>
+                      <a:round/>
+                      <a:headEnd type="none" w="med" len="med"/>
+                      <a:tailEnd type="none" w="med" len="med"/>
+                    </a:lnR>
+                    <a:lnT w="9525" cap="flat" cmpd="sng" algn="ctr">
+                      <a:solidFill>
+                        <a:srgbClr val="D9D9D9"/>
+                      </a:solidFill>
+                      <a:prstDash val="solid"/>
+                      <a:round/>
+                      <a:headEnd type="none" w="med" len="med"/>
+                      <a:tailEnd type="none" w="med" len="med"/>
+                    </a:lnT>
+                    <a:lnB w="9525" cap="flat" cmpd="sng" algn="ctr">
+                      <a:solidFill>
+                        <a:srgbClr val="D9D9D9"/>
+                      </a:solidFill>
+                      <a:prstDash val="solid"/>
+                      <a:round/>
+                      <a:headEnd type="none" w="med" len="med"/>
+                      <a:tailEnd type="none" w="med" len="med"/>
+                    </a:lnB>
+                    <a:solidFill>
+                      <a:srgbClr val="005BAC"/>
+                    </a:solidFill>
+                  </a:tcPr>
+                </a:tc>
+                <a:tc>
+                  <a:txBody>
+                    <a:bodyPr/>
+                    <a:lstStyle/>
+                    <a:p>
+                      <a:pPr algn="ctr" indent="0" marL="0">
+                        <a:buNone/>
+                      </a:pPr>
+                      <a:r>
+                        <a:rPr lang="en-US" sz="1300" b="1" dirty="0">
+                          <a:solidFill>
+                            <a:srgbClr val="FFFFFF"/>
+                          </a:solidFill>
+                          <a:latin typeface="Malgun Gothic" pitchFamily="34" charset="0"/>
+                          <a:ea typeface="Malgun Gothic" pitchFamily="34" charset="-122"/>
+                          <a:cs typeface="Malgun Gothic" pitchFamily="34" charset="-120"/>
+                        </a:rPr>
+                        <a:t>에러율</a:t>
+                      </a:r>
+                      <a:endParaRPr lang="en-US" sz="1300" dirty="0">
+                        <a:latin typeface="Malgun Gothic" charset="0"/>
+                        <a:ea typeface="Malgun Gothic" charset="0"/>
+                        <a:cs typeface="Malgun Gothic" charset="0"/>
+                      </a:endParaRPr>
+                    </a:p>
+                  </a:txBody>
+                  <a:tcPr marL="91440" marR="91440" marT="45720" marB="45720" anchor="ctr">
+                    <a:lnL w="9525" cap="flat" cmpd="sng" algn="ctr">
+                      <a:solidFill>
+                        <a:srgbClr val="D9D9D9"/>
+                      </a:solidFill>
+                      <a:prstDash val="solid"/>
+                      <a:round/>
+                      <a:headEnd type="none" w="med" len="med"/>
+                      <a:tailEnd type="none" w="med" len="med"/>
+                    </a:lnL>
+                    <a:lnR w="9525" cap="flat" cmpd="sng" algn="ctr">
+                      <a:solidFill>
+                        <a:srgbClr val="D9D9D9"/>
+                      </a:solidFill>
+                      <a:prstDash val="solid"/>
+                      <a:round/>
+                      <a:headEnd type="none" w="med" len="med"/>
+                      <a:tailEnd type="none" w="med" len="med"/>
+                    </a:lnR>
+                    <a:lnT w="9525" cap="flat" cmpd="sng" algn="ctr">
+                      <a:solidFill>
+                        <a:srgbClr val="D9D9D9"/>
+                      </a:solidFill>
+                      <a:prstDash val="solid"/>
+                      <a:round/>
+                      <a:headEnd type="none" w="med" len="med"/>
+                      <a:tailEnd type="none" w="med" len="med"/>
+                    </a:lnT>
+                    <a:lnB w="9525" cap="flat" cmpd="sng" algn="ctr">
+                      <a:solidFill>
+                        <a:srgbClr val="D9D9D9"/>
+                      </a:solidFill>
+                      <a:prstDash val="solid"/>
+                      <a:round/>
+                      <a:headEnd type="none" w="med" len="med"/>
+                      <a:tailEnd type="none" w="med" len="med"/>
+                    </a:lnB>
+                    <a:solidFill>
+                      <a:srgbClr val="005BAC"/>
+                    </a:solidFill>
+                  </a:tcPr>
+                </a:tc>
+              </a:tr>
+              <a:tr h="502920">
+                <a:tc>
+                  <a:txBody>
+                    <a:bodyPr/>
+                    <a:lstStyle/>
+                    <a:p>
+                      <a:pPr algn="l" indent="0" marL="0">
+                        <a:buNone/>
+                      </a:pPr>
+                      <a:r>
+                        <a:rPr lang="en-US" sz="1300" dirty="0">
+                          <a:solidFill>
+                            <a:srgbClr val="E7413E"/>
+                          </a:solidFill>
+                          <a:latin typeface="Malgun Gothic" pitchFamily="34" charset="0"/>
+                          <a:ea typeface="Malgun Gothic" pitchFamily="34" charset="-122"/>
+                          <a:cs typeface="Malgun Gothic" pitchFamily="34" charset="-120"/>
+                        </a:rPr>
+                        <a:t>SP (Slide Preparation)</a:t>
+                      </a:r>
+                      <a:endParaRPr lang="en-US" sz="1300" dirty="0">
+                        <a:latin typeface="Malgun Gothic" charset="0"/>
+                        <a:ea typeface="Malgun Gothic" charset="0"/>
+                        <a:cs typeface="Malgun Gothic" charset="0"/>
+                      </a:endParaRPr>
+                    </a:p>
+                  </a:txBody>
+                  <a:tcPr marL="91440" marR="91440" marT="45720" marB="45720" anchor="ctr">
+                    <a:lnL w="9525" cap="flat" cmpd="sng" algn="ctr">
+                      <a:solidFill>
+                        <a:srgbClr val="D9D9D9"/>
+                      </a:solidFill>
+                      <a:prstDash val="solid"/>
+                      <a:round/>
+                      <a:headEnd type="none" w="med" len="med"/>
+                      <a:tailEnd type="none" w="med" len="med"/>
+                    </a:lnL>
+                    <a:lnR w="9525" cap="flat" cmpd="sng" algn="ctr">
+                      <a:solidFill>
+                        <a:srgbClr val="D9D9D9"/>
+                      </a:solidFill>
+                      <a:prstDash val="solid"/>
+                      <a:round/>
+                      <a:headEnd type="none" w="med" len="med"/>
+                      <a:tailEnd type="none" w="med" len="med"/>
+                    </a:lnR>
+                    <a:lnT w="9525" cap="flat" cmpd="sng" algn="ctr">
+                      <a:solidFill>
+                        <a:srgbClr val="D9D9D9"/>
+                      </a:solidFill>
+                      <a:prstDash val="solid"/>
+                      <a:round/>
+                      <a:headEnd type="none" w="med" len="med"/>
+                      <a:tailEnd type="none" w="med" len="med"/>
+                    </a:lnT>
+                    <a:lnB w="9525" cap="flat" cmpd="sng" algn="ctr">
+                      <a:solidFill>
+                        <a:srgbClr val="D9D9D9"/>
+                      </a:solidFill>
+                      <a:prstDash val="solid"/>
+                      <a:round/>
+                      <a:headEnd type="none" w="med" len="med"/>
+                      <a:tailEnd type="none" w="med" len="med"/>
+                    </a:lnB>
+                    <a:solidFill>
+                      <a:srgbClr val="FFFFFF"/>
+                    </a:solidFill>
+                  </a:tcPr>
+                </a:tc>
+                <a:tc>
+                  <a:txBody>
+                    <a:bodyPr/>
+                    <a:lstStyle/>
+                    <a:p>
+                      <a:pPr algn="ctr" indent="0" marL="0">
+                        <a:buNone/>
+                      </a:pPr>
+                      <a:r>
+                        <a:rPr lang="en-US" sz="1300" dirty="0">
+                          <a:solidFill>
+                            <a:srgbClr val="E7413E"/>
+                          </a:solidFill>
+                          <a:latin typeface="Malgun Gothic" pitchFamily="34" charset="0"/>
+                          <a:ea typeface="Malgun Gothic" pitchFamily="34" charset="-122"/>
+                          <a:cs typeface="Malgun Gothic" pitchFamily="34" charset="-120"/>
+                        </a:rPr>
+                        <a:t>4,436</a:t>
+                      </a:r>
+                      <a:endParaRPr lang="en-US" sz="1300" dirty="0">
+                        <a:latin typeface="Malgun Gothic" charset="0"/>
+                        <a:ea typeface="Malgun Gothic" charset="0"/>
+                        <a:cs typeface="Malgun Gothic" charset="0"/>
+                      </a:endParaRPr>
+                    </a:p>
+                  </a:txBody>
+                  <a:tcPr marL="91440" marR="91440" marT="45720" marB="45720" anchor="ctr">
+                    <a:lnL w="9525" cap="flat" cmpd="sng" algn="ctr">
+                      <a:solidFill>
+                        <a:srgbClr val="D9D9D9"/>
+                      </a:solidFill>
+                      <a:prstDash val="solid"/>
+                      <a:round/>
+                      <a:headEnd type="none" w="med" len="med"/>
+                      <a:tailEnd type="none" w="med" len="med"/>
+                    </a:lnL>
+                    <a:lnR w="9525" cap="flat" cmpd="sng" algn="ctr">
+                      <a:solidFill>
+                        <a:srgbClr val="D9D9D9"/>
+                      </a:solidFill>
+                      <a:prstDash val="solid"/>
+                      <a:round/>
+                      <a:headEnd type="none" w="med" len="med"/>
+                      <a:tailEnd type="none" w="med" len="med"/>
+                    </a:lnR>
+                    <a:lnT w="9525" cap="flat" cmpd="sng" algn="ctr">
+                      <a:solidFill>
+                        <a:srgbClr val="D9D9D9"/>
+                      </a:solidFill>
+                      <a:prstDash val="solid"/>
+                      <a:round/>
+                      <a:headEnd type="none" w="med" len="med"/>
+                      <a:tailEnd type="none" w="med" len="med"/>
+                    </a:lnT>
+                    <a:lnB w="9525" cap="flat" cmpd="sng" algn="ctr">
+                      <a:solidFill>
+                        <a:srgbClr val="D9D9D9"/>
+                      </a:solidFill>
+                      <a:prstDash val="solid"/>
+                      <a:round/>
+                      <a:headEnd type="none" w="med" len="med"/>
+                      <a:tailEnd type="none" w="med" len="med"/>
+                    </a:lnB>
+                    <a:solidFill>
+                      <a:srgbClr val="FFFFFF"/>
+                    </a:solidFill>
+                  </a:tcPr>
+                </a:tc>
+                <a:tc>
+                  <a:txBody>
+                    <a:bodyPr/>
+                    <a:lstStyle/>
+                    <a:p>
+                      <a:pPr algn="ctr" indent="0" marL="0">
+                        <a:buNone/>
+                      </a:pPr>
+                      <a:r>
+                        <a:rPr lang="en-US" sz="1300" dirty="0">
+                          <a:solidFill>
+                            <a:srgbClr val="E7413E"/>
+                          </a:solidFill>
+                          <a:latin typeface="Malgun Gothic" pitchFamily="34" charset="0"/>
+                          <a:ea typeface="Malgun Gothic" pitchFamily="34" charset="-122"/>
+                          <a:cs typeface="Malgun Gothic" pitchFamily="34" charset="-120"/>
+                        </a:rPr>
+                        <a:t>3,233</a:t>
+                      </a:r>
+                      <a:endParaRPr lang="en-US" sz="1300" dirty="0">
+                        <a:latin typeface="Malgun Gothic" charset="0"/>
+                        <a:ea typeface="Malgun Gothic" charset="0"/>
+                        <a:cs typeface="Malgun Gothic" charset="0"/>
+                      </a:endParaRPr>
+                    </a:p>
+                  </a:txBody>
+                  <a:tcPr marL="91440" marR="91440" marT="45720" marB="45720" anchor="ctr">
+                    <a:lnL w="9525" cap="flat" cmpd="sng" algn="ctr">
+                      <a:solidFill>
+                        <a:srgbClr val="D9D9D9"/>
+                      </a:solidFill>
+                      <a:prstDash val="solid"/>
+                      <a:round/>
+                      <a:headEnd type="none" w="med" len="med"/>
+                      <a:tailEnd type="none" w="med" len="med"/>
+                    </a:lnL>
+                    <a:lnR w="9525" cap="flat" cmpd="sng" algn="ctr">
+                      <a:solidFill>
+                        <a:srgbClr val="D9D9D9"/>
+                      </a:solidFill>
+                      <a:prstDash val="solid"/>
+                      <a:round/>
+                      <a:headEnd type="none" w="med" len="med"/>
+                      <a:tailEnd type="none" w="med" len="med"/>
+                    </a:lnR>
+                    <a:lnT w="9525" cap="flat" cmpd="sng" algn="ctr">
+                      <a:solidFill>
+                        <a:srgbClr val="D9D9D9"/>
+                      </a:solidFill>
+                      <a:prstDash val="solid"/>
+                      <a:round/>
+                      <a:headEnd type="none" w="med" len="med"/>
+                      <a:tailEnd type="none" w="med" len="med"/>
+                    </a:lnT>
+                    <a:lnB w="9525" cap="flat" cmpd="sng" algn="ctr">
+                      <a:solidFill>
+                        <a:srgbClr val="D9D9D9"/>
+                      </a:solidFill>
+                      <a:prstDash val="solid"/>
+                      <a:round/>
+                      <a:headEnd type="none" w="med" len="med"/>
+                      <a:tailEnd type="none" w="med" len="med"/>
+                    </a:lnB>
+                    <a:solidFill>
+                      <a:srgbClr val="FFFFFF"/>
+                    </a:solidFill>
+                  </a:tcPr>
+                </a:tc>
+                <a:tc>
+                  <a:txBody>
+                    <a:bodyPr/>
+                    <a:lstStyle/>
+                    <a:p>
+                      <a:pPr algn="ctr" indent="0" marL="0">
+                        <a:buNone/>
+                      </a:pPr>
+                      <a:r>
+                        <a:rPr lang="en-US" sz="1300" dirty="0">
+                          <a:solidFill>
+                            <a:srgbClr val="E7413E"/>
+                          </a:solidFill>
+                          <a:latin typeface="Malgun Gothic" pitchFamily="34" charset="0"/>
+                          <a:ea typeface="Malgun Gothic" pitchFamily="34" charset="-122"/>
+                          <a:cs typeface="Malgun Gothic" pitchFamily="34" charset="-120"/>
+                        </a:rPr>
+                        <a:t>72.9%</a:t>
+                      </a:r>
+                      <a:endParaRPr lang="en-US" sz="1300" dirty="0">
+                        <a:latin typeface="Malgun Gothic" charset="0"/>
+                        <a:ea typeface="Malgun Gothic" charset="0"/>
+                        <a:cs typeface="Malgun Gothic" charset="0"/>
+                      </a:endParaRPr>
+                    </a:p>
+                  </a:txBody>
+                  <a:tcPr marL="91440" marR="91440" marT="45720" marB="45720" anchor="ctr">
+                    <a:lnL w="9525" cap="flat" cmpd="sng" algn="ctr">
+                      <a:solidFill>
+                        <a:srgbClr val="D9D9D9"/>
+                      </a:solidFill>
+                      <a:prstDash val="solid"/>
+                      <a:round/>
+                      <a:headEnd type="none" w="med" len="med"/>
+                      <a:tailEnd type="none" w="med" len="med"/>
+                    </a:lnL>
+                    <a:lnR w="9525" cap="flat" cmpd="sng" algn="ctr">
+                      <a:solidFill>
+                        <a:srgbClr val="D9D9D9"/>
+                      </a:solidFill>
+                      <a:prstDash val="solid"/>
+                      <a:round/>
+                      <a:headEnd type="none" w="med" len="med"/>
+                      <a:tailEnd type="none" w="med" len="med"/>
+                    </a:lnR>
+                    <a:lnT w="9525" cap="flat" cmpd="sng" algn="ctr">
+                      <a:solidFill>
+                        <a:srgbClr val="D9D9D9"/>
+                      </a:solidFill>
+                      <a:prstDash val="solid"/>
+                      <a:round/>
+                      <a:headEnd type="none" w="med" len="med"/>
+                      <a:tailEnd type="none" w="med" len="med"/>
+                    </a:lnT>
+                    <a:lnB w="9525" cap="flat" cmpd="sng" algn="ctr">
+                      <a:solidFill>
+                        <a:srgbClr val="D9D9D9"/>
+                      </a:solidFill>
+                      <a:prstDash val="solid"/>
+                      <a:round/>
+                      <a:headEnd type="none" w="med" len="med"/>
+                      <a:tailEnd type="none" w="med" len="med"/>
+                    </a:lnB>
+                    <a:solidFill>
+                      <a:srgbClr val="FFFFFF"/>
+                    </a:solidFill>
+                  </a:tcPr>
+                </a:tc>
+              </a:tr>
+              <a:tr h="502920">
+                <a:tc>
+                  <a:txBody>
+                    <a:bodyPr/>
+                    <a:lstStyle/>
+                    <a:p>
+                      <a:pPr algn="l" indent="0" marL="0">
+                        <a:buNone/>
+                      </a:pPr>
+                      <a:r>
+                        <a:rPr lang="en-US" sz="1300" dirty="0">
+                          <a:solidFill>
+                            <a:srgbClr val="3F3F3F"/>
+                          </a:solidFill>
+                          <a:latin typeface="Malgun Gothic" pitchFamily="34" charset="0"/>
+                          <a:ea typeface="Malgun Gothic" pitchFamily="34" charset="-122"/>
+                          <a:cs typeface="Malgun Gothic" pitchFamily="34" charset="-120"/>
+                        </a:rPr>
+                        <a:t>CN (Coagulation)</a:t>
+                      </a:r>
+                      <a:endParaRPr lang="en-US" sz="1300" dirty="0">
+                        <a:latin typeface="Malgun Gothic" charset="0"/>
+                        <a:ea typeface="Malgun Gothic" charset="0"/>
+                        <a:cs typeface="Malgun Gothic" charset="0"/>
+                      </a:endParaRPr>
+                    </a:p>
+                  </a:txBody>
+                  <a:tcPr marL="91440" marR="91440" marT="45720" marB="45720" anchor="ctr">
+                    <a:lnL w="9525" cap="flat" cmpd="sng" algn="ctr">
+                      <a:solidFill>
+                        <a:srgbClr val="D9D9D9"/>
+                      </a:solidFill>
+                      <a:prstDash val="solid"/>
+                      <a:round/>
+                      <a:headEnd type="none" w="med" len="med"/>
+                      <a:tailEnd type="none" w="med" len="med"/>
+                    </a:lnL>
+                    <a:lnR w="9525" cap="flat" cmpd="sng" algn="ctr">
+                      <a:solidFill>
+                        <a:srgbClr val="D9D9D9"/>
+                      </a:solidFill>
+                      <a:prstDash val="solid"/>
+                      <a:round/>
+                      <a:headEnd type="none" w="med" len="med"/>
+                      <a:tailEnd type="none" w="med" len="med"/>
+                    </a:lnR>
+                    <a:lnT w="9525" cap="flat" cmpd="sng" algn="ctr">
+                      <a:solidFill>
+                        <a:srgbClr val="D9D9D9"/>
+                      </a:solidFill>
+                      <a:prstDash val="solid"/>
+                      <a:round/>
+                      <a:headEnd type="none" w="med" len="med"/>
+                      <a:tailEnd type="none" w="med" len="med"/>
+                    </a:lnT>
+                    <a:lnB w="9525" cap="flat" cmpd="sng" algn="ctr">
+                      <a:solidFill>
+                        <a:srgbClr val="D9D9D9"/>
+                      </a:solidFill>
+                      <a:prstDash val="solid"/>
+                      <a:round/>
+                      <a:headEnd type="none" w="med" len="med"/>
+                      <a:tailEnd type="none" w="med" len="med"/>
+                    </a:lnB>
+                    <a:solidFill>
+                      <a:srgbClr val="FFFFFF"/>
+                    </a:solidFill>
+                  </a:tcPr>
+                </a:tc>
+                <a:tc>
+                  <a:txBody>
+                    <a:bodyPr/>
+                    <a:lstStyle/>
+                    <a:p>
+                      <a:pPr algn="ctr" indent="0" marL="0">
+                        <a:buNone/>
+                      </a:pPr>
+                      <a:r>
+                        <a:rPr lang="en-US" sz="1300" dirty="0">
+                          <a:solidFill>
+                            <a:srgbClr val="3F3F3F"/>
+                          </a:solidFill>
+                          <a:latin typeface="Malgun Gothic" pitchFamily="34" charset="0"/>
+                          <a:ea typeface="Malgun Gothic" pitchFamily="34" charset="-122"/>
+                          <a:cs typeface="Malgun Gothic" pitchFamily="34" charset="-120"/>
+                        </a:rPr>
+                        <a:t>2,095</a:t>
+                      </a:r>
+                      <a:endParaRPr lang="en-US" sz="1300" dirty="0">
+                        <a:latin typeface="Malgun Gothic" charset="0"/>
+                        <a:ea typeface="Malgun Gothic" charset="0"/>
+                        <a:cs typeface="Malgun Gothic" charset="0"/>
+                      </a:endParaRPr>
+                    </a:p>
+                  </a:txBody>
+                  <a:tcPr marL="91440" marR="91440" marT="45720" marB="45720" anchor="ctr">
+                    <a:lnL w="9525" cap="flat" cmpd="sng" algn="ctr">
+                      <a:solidFill>
+                        <a:srgbClr val="D9D9D9"/>
+                      </a:solidFill>
+                      <a:prstDash val="solid"/>
+                      <a:round/>
+                      <a:headEnd type="none" w="med" len="med"/>
+                      <a:tailEnd type="none" w="med" len="med"/>
+                    </a:lnL>
+                    <a:lnR w="9525" cap="flat" cmpd="sng" algn="ctr">
+                      <a:solidFill>
+                        <a:srgbClr val="D9D9D9"/>
+                      </a:solidFill>
+                      <a:prstDash val="solid"/>
+                      <a:round/>
+                      <a:headEnd type="none" w="med" len="med"/>
+                      <a:tailEnd type="none" w="med" len="med"/>
+                    </a:lnR>
+                    <a:lnT w="9525" cap="flat" cmpd="sng" algn="ctr">
+                      <a:solidFill>
+                        <a:srgbClr val="D9D9D9"/>
+                      </a:solidFill>
+                      <a:prstDash val="solid"/>
+                      <a:round/>
+                      <a:headEnd type="none" w="med" len="med"/>
+                      <a:tailEnd type="none" w="med" len="med"/>
+                    </a:lnT>
+                    <a:lnB w="9525" cap="flat" cmpd="sng" algn="ctr">
+                      <a:solidFill>
+                        <a:srgbClr val="D9D9D9"/>
+                      </a:solidFill>
+                      <a:prstDash val="solid"/>
+                      <a:round/>
+                      <a:headEnd type="none" w="med" len="med"/>
+                      <a:tailEnd type="none" w="med" len="med"/>
+                    </a:lnB>
+                    <a:solidFill>
+                      <a:srgbClr val="FFFFFF"/>
+                    </a:solidFill>
+                  </a:tcPr>
+                </a:tc>
+                <a:tc>
+                  <a:txBody>
+                    <a:bodyPr/>
+                    <a:lstStyle/>
+                    <a:p>
+                      <a:pPr algn="ctr" indent="0" marL="0">
+                        <a:buNone/>
+                      </a:pPr>
+                      <a:r>
+                        <a:rPr lang="en-US" sz="1300" dirty="0">
+                          <a:solidFill>
+                            <a:srgbClr val="3F3F3F"/>
+                          </a:solidFill>
+                          <a:latin typeface="Malgun Gothic" pitchFamily="34" charset="0"/>
+                          <a:ea typeface="Malgun Gothic" pitchFamily="34" charset="-122"/>
+                          <a:cs typeface="Malgun Gothic" pitchFamily="34" charset="-120"/>
+                        </a:rPr>
+                        <a:t>1,038</a:t>
+                      </a:r>
+                      <a:endParaRPr lang="en-US" sz="1300" dirty="0">
+                        <a:latin typeface="Malgun Gothic" charset="0"/>
+                        <a:ea typeface="Malgun Gothic" charset="0"/>
+                        <a:cs typeface="Malgun Gothic" charset="0"/>
+                      </a:endParaRPr>
+                    </a:p>
+                  </a:txBody>
+                  <a:tcPr marL="91440" marR="91440" marT="45720" marB="45720" anchor="ctr">
+                    <a:lnL w="9525" cap="flat" cmpd="sng" algn="ctr">
+                      <a:solidFill>
+                        <a:srgbClr val="D9D9D9"/>
+                      </a:solidFill>
+                      <a:prstDash val="solid"/>
+                      <a:round/>
+                      <a:headEnd type="none" w="med" len="med"/>
+                      <a:tailEnd type="none" w="med" len="med"/>
+                    </a:lnL>
+                    <a:lnR w="9525" cap="flat" cmpd="sng" algn="ctr">
+                      <a:solidFill>
+                        <a:srgbClr val="D9D9D9"/>
+                      </a:solidFill>
+                      <a:prstDash val="solid"/>
+                      <a:round/>
+                      <a:headEnd type="none" w="med" len="med"/>
+                      <a:tailEnd type="none" w="med" len="med"/>
+                    </a:lnR>
+                    <a:lnT w="9525" cap="flat" cmpd="sng" algn="ctr">
+                      <a:solidFill>
+                        <a:srgbClr val="D9D9D9"/>
+                      </a:solidFill>
+                      <a:prstDash val="solid"/>
+                      <a:round/>
+                      <a:headEnd type="none" w="med" len="med"/>
+                      <a:tailEnd type="none" w="med" len="med"/>
+                    </a:lnT>
+                    <a:lnB w="9525" cap="flat" cmpd="sng" algn="ctr">
+                      <a:solidFill>
+                        <a:srgbClr val="D9D9D9"/>
+                      </a:solidFill>
+                      <a:prstDash val="solid"/>
+                      <a:round/>
+                      <a:headEnd type="none" w="med" len="med"/>
+                      <a:tailEnd type="none" w="med" len="med"/>
+                    </a:lnB>
+                    <a:solidFill>
+                      <a:srgbClr val="FFFFFF"/>
+                    </a:solidFill>
+                  </a:tcPr>
+                </a:tc>
+                <a:tc>
+                  <a:txBody>
+                    <a:bodyPr/>
+                    <a:lstStyle/>
+                    <a:p>
+                      <a:pPr algn="ctr" indent="0" marL="0">
+                        <a:buNone/>
+                      </a:pPr>
+                      <a:r>
+                        <a:rPr lang="en-US" sz="1300" dirty="0">
+                          <a:solidFill>
+                            <a:srgbClr val="3F3F3F"/>
+                          </a:solidFill>
+                          <a:latin typeface="Malgun Gothic" pitchFamily="34" charset="0"/>
+                          <a:ea typeface="Malgun Gothic" pitchFamily="34" charset="-122"/>
+                          <a:cs typeface="Malgun Gothic" pitchFamily="34" charset="-120"/>
+                        </a:rPr>
+                        <a:t>49.5%</a:t>
+                      </a:r>
+                      <a:endParaRPr lang="en-US" sz="1300" dirty="0">
+                        <a:latin typeface="Malgun Gothic" charset="0"/>
+                        <a:ea typeface="Malgun Gothic" charset="0"/>
+                        <a:cs typeface="Malgun Gothic" charset="0"/>
+                      </a:endParaRPr>
+                    </a:p>
+                  </a:txBody>
+                  <a:tcPr marL="91440" marR="91440" marT="45720" marB="45720" anchor="ctr">
+                    <a:lnL w="9525" cap="flat" cmpd="sng" algn="ctr">
+                      <a:solidFill>
+                        <a:srgbClr val="D9D9D9"/>
+                      </a:solidFill>
+                      <a:prstDash val="solid"/>
+                      <a:round/>
+                      <a:headEnd type="none" w="med" len="med"/>
+                      <a:tailEnd type="none" w="med" len="med"/>
+                    </a:lnL>
+                    <a:lnR w="9525" cap="flat" cmpd="sng" algn="ctr">
+                      <a:solidFill>
+                        <a:srgbClr val="D9D9D9"/>
+                      </a:solidFill>
+                      <a:prstDash val="solid"/>
+                      <a:round/>
+                      <a:headEnd type="none" w="med" len="med"/>
+                      <a:tailEnd type="none" w="med" len="med"/>
+                    </a:lnR>
+                    <a:lnT w="9525" cap="flat" cmpd="sng" algn="ctr">
+                      <a:solidFill>
+                        <a:srgbClr val="D9D9D9"/>
+                      </a:solidFill>
+                      <a:prstDash val="solid"/>
+                      <a:round/>
+                      <a:headEnd type="none" w="med" len="med"/>
+                      <a:tailEnd type="none" w="med" len="med"/>
+                    </a:lnT>
+                    <a:lnB w="9525" cap="flat" cmpd="sng" algn="ctr">
+                      <a:solidFill>
+                        <a:srgbClr val="D9D9D9"/>
+                      </a:solidFill>
+                      <a:prstDash val="solid"/>
+                      <a:round/>
+                      <a:headEnd type="none" w="med" len="med"/>
+                      <a:tailEnd type="none" w="med" len="med"/>
+                    </a:lnB>
+                    <a:solidFill>
+                      <a:srgbClr val="FFFFFF"/>
+                    </a:solidFill>
+                  </a:tcPr>
+                </a:tc>
+              </a:tr>
+              <a:tr h="502920">
+                <a:tc>
+                  <a:txBody>
+                    <a:bodyPr/>
+                    <a:lstStyle/>
+                    <a:p>
+                      <a:pPr algn="l" indent="0" marL="0">
+                        <a:buNone/>
+                      </a:pPr>
+                      <a:r>
+                        <a:rPr lang="en-US" sz="1300" dirty="0">
+                          <a:solidFill>
+                            <a:srgbClr val="3F3F3F"/>
+                          </a:solidFill>
+                          <a:latin typeface="Malgun Gothic" pitchFamily="34" charset="0"/>
+                          <a:ea typeface="Malgun Gothic" pitchFamily="34" charset="-122"/>
+                          <a:cs typeface="Malgun Gothic" pitchFamily="34" charset="-120"/>
+                        </a:rPr>
+                        <a:t>HISCL (Immunoassay)</a:t>
+                      </a:r>
+                      <a:endParaRPr lang="en-US" sz="1300" dirty="0">
+                        <a:latin typeface="Malgun Gothic" charset="0"/>
+                        <a:ea typeface="Malgun Gothic" charset="0"/>
+                        <a:cs typeface="Malgun Gothic" charset="0"/>
+                      </a:endParaRPr>
+                    </a:p>
+                  </a:txBody>
+                  <a:tcPr marL="91440" marR="91440" marT="45720" marB="45720" anchor="ctr">
+                    <a:lnL w="9525" cap="flat" cmpd="sng" algn="ctr">
+                      <a:solidFill>
+                        <a:srgbClr val="D9D9D9"/>
+                      </a:solidFill>
+                      <a:prstDash val="solid"/>
+                      <a:round/>
+                      <a:headEnd type="none" w="med" len="med"/>
+                      <a:tailEnd type="none" w="med" len="med"/>
+                    </a:lnL>
+                    <a:lnR w="9525" cap="flat" cmpd="sng" algn="ctr">
+                      <a:solidFill>
+                        <a:srgbClr val="D9D9D9"/>
+                      </a:solidFill>
+                      <a:prstDash val="solid"/>
+                      <a:round/>
+                      <a:headEnd type="none" w="med" len="med"/>
+                      <a:tailEnd type="none" w="med" len="med"/>
+                    </a:lnR>
+                    <a:lnT w="9525" cap="flat" cmpd="sng" algn="ctr">
+                      <a:solidFill>
+                        <a:srgbClr val="D9D9D9"/>
+                      </a:solidFill>
+                      <a:prstDash val="solid"/>
+                      <a:round/>
+                      <a:headEnd type="none" w="med" len="med"/>
+                      <a:tailEnd type="none" w="med" len="med"/>
+                    </a:lnT>
+                    <a:lnB w="9525" cap="flat" cmpd="sng" algn="ctr">
+                      <a:solidFill>
+                        <a:srgbClr val="D9D9D9"/>
+                      </a:solidFill>
+                      <a:prstDash val="solid"/>
+                      <a:round/>
+                      <a:headEnd type="none" w="med" len="med"/>
+                      <a:tailEnd type="none" w="med" len="med"/>
+                    </a:lnB>
+                    <a:solidFill>
+                      <a:srgbClr val="FFFFFF"/>
+                    </a:solidFill>
+                  </a:tcPr>
+                </a:tc>
+                <a:tc>
+                  <a:txBody>
+                    <a:bodyPr/>
+                    <a:lstStyle/>
+                    <a:p>
+                      <a:pPr algn="ctr" indent="0" marL="0">
+                        <a:buNone/>
+                      </a:pPr>
+                      <a:r>
+                        <a:rPr lang="en-US" sz="1300" dirty="0">
+                          <a:solidFill>
+                            <a:srgbClr val="3F3F3F"/>
+                          </a:solidFill>
+                          <a:latin typeface="Malgun Gothic" pitchFamily="34" charset="0"/>
+                          <a:ea typeface="Malgun Gothic" pitchFamily="34" charset="-122"/>
+                          <a:cs typeface="Malgun Gothic" pitchFamily="34" charset="-120"/>
+                        </a:rPr>
+                        <a:t>481</a:t>
+                      </a:r>
+                      <a:endParaRPr lang="en-US" sz="1300" dirty="0">
+                        <a:latin typeface="Malgun Gothic" charset="0"/>
+                        <a:ea typeface="Malgun Gothic" charset="0"/>
+                        <a:cs typeface="Malgun Gothic" charset="0"/>
+                      </a:endParaRPr>
+                    </a:p>
+                  </a:txBody>
+                  <a:tcPr marL="91440" marR="91440" marT="45720" marB="45720" anchor="ctr">
+                    <a:lnL w="9525" cap="flat" cmpd="sng" algn="ctr">
+                      <a:solidFill>
+                        <a:srgbClr val="D9D9D9"/>
+                      </a:solidFill>
+                      <a:prstDash val="solid"/>
+                      <a:round/>
+                      <a:headEnd type="none" w="med" len="med"/>
+                      <a:tailEnd type="none" w="med" len="med"/>
+                    </a:lnL>
+                    <a:lnR w="9525" cap="flat" cmpd="sng" algn="ctr">
+                      <a:solidFill>
+                        <a:srgbClr val="D9D9D9"/>
+                      </a:solidFill>
+                      <a:prstDash val="solid"/>
+                      <a:round/>
+                      <a:headEnd type="none" w="med" len="med"/>
+                      <a:tailEnd type="none" w="med" len="med"/>
+                    </a:lnR>
+                    <a:lnT w="9525" cap="flat" cmpd="sng" algn="ctr">
+                      <a:solidFill>
+                        <a:srgbClr val="D9D9D9"/>
+                      </a:solidFill>
+                      <a:prstDash val="solid"/>
+                      <a:round/>
+                      <a:headEnd type="none" w="med" len="med"/>
+                      <a:tailEnd type="none" w="med" len="med"/>
+                    </a:lnT>
+                    <a:lnB w="9525" cap="flat" cmpd="sng" algn="ctr">
+                      <a:solidFill>
+                        <a:srgbClr val="D9D9D9"/>
+                      </a:solidFill>
+                      <a:prstDash val="solid"/>
+                      <a:round/>
+                      <a:headEnd type="none" w="med" len="med"/>
+                      <a:tailEnd type="none" w="med" len="med"/>
+                    </a:lnB>
+                    <a:solidFill>
+                      <a:srgbClr val="FFFFFF"/>
+                    </a:solidFill>
+                  </a:tcPr>
+                </a:tc>
+                <a:tc>
+                  <a:txBody>
+                    <a:bodyPr/>
+                    <a:lstStyle/>
+                    <a:p>
+                      <a:pPr algn="ctr" indent="0" marL="0">
+                        <a:buNone/>
+                      </a:pPr>
+                      <a:r>
+                        <a:rPr lang="en-US" sz="1300" dirty="0">
+                          <a:solidFill>
+                            <a:srgbClr val="3F3F3F"/>
+                          </a:solidFill>
+                          <a:latin typeface="Malgun Gothic" pitchFamily="34" charset="0"/>
+                          <a:ea typeface="Malgun Gothic" pitchFamily="34" charset="-122"/>
+                          <a:cs typeface="Malgun Gothic" pitchFamily="34" charset="-120"/>
+                        </a:rPr>
+                        <a:t>152</a:t>
+                      </a:r>
+                      <a:endParaRPr lang="en-US" sz="1300" dirty="0">
+                        <a:latin typeface="Malgun Gothic" charset="0"/>
+                        <a:ea typeface="Malgun Gothic" charset="0"/>
+                        <a:cs typeface="Malgun Gothic" charset="0"/>
+                      </a:endParaRPr>
+                    </a:p>
+                  </a:txBody>
+                  <a:tcPr marL="91440" marR="91440" marT="45720" marB="45720" anchor="ctr">
+                    <a:lnL w="9525" cap="flat" cmpd="sng" algn="ctr">
+                      <a:solidFill>
+                        <a:srgbClr val="D9D9D9"/>
+                      </a:solidFill>
+                      <a:prstDash val="solid"/>
+                      <a:round/>
+                      <a:headEnd type="none" w="med" len="med"/>
+                      <a:tailEnd type="none" w="med" len="med"/>
+                    </a:lnL>
+                    <a:lnR w="9525" cap="flat" cmpd="sng" algn="ctr">
+                      <a:solidFill>
+                        <a:srgbClr val="D9D9D9"/>
+                      </a:solidFill>
+                      <a:prstDash val="solid"/>
+                      <a:round/>
+                      <a:headEnd type="none" w="med" len="med"/>
+                      <a:tailEnd type="none" w="med" len="med"/>
+                    </a:lnR>
+                    <a:lnT w="9525" cap="flat" cmpd="sng" algn="ctr">
+                      <a:solidFill>
+                        <a:srgbClr val="D9D9D9"/>
+                      </a:solidFill>
+                      <a:prstDash val="solid"/>
+                      <a:round/>
+                      <a:headEnd type="none" w="med" len="med"/>
+                      <a:tailEnd type="none" w="med" len="med"/>
+                    </a:lnT>
+                    <a:lnB w="9525" cap="flat" cmpd="sng" algn="ctr">
+                      <a:solidFill>
+                        <a:srgbClr val="D9D9D9"/>
+                      </a:solidFill>
+                      <a:prstDash val="solid"/>
+                      <a:round/>
+                      <a:headEnd type="none" w="med" len="med"/>
+                      <a:tailEnd type="none" w="med" len="med"/>
+                    </a:lnB>
+                    <a:solidFill>
+                      <a:srgbClr val="FFFFFF"/>
+                    </a:solidFill>
+                  </a:tcPr>
+                </a:tc>
+                <a:tc>
+                  <a:txBody>
+                    <a:bodyPr/>
+                    <a:lstStyle/>
+                    <a:p>
+                      <a:pPr algn="ctr" indent="0" marL="0">
+                        <a:buNone/>
+                      </a:pPr>
+                      <a:r>
+                        <a:rPr lang="en-US" sz="1300" dirty="0">
+                          <a:solidFill>
+                            <a:srgbClr val="3F3F3F"/>
+                          </a:solidFill>
+                          <a:latin typeface="Malgun Gothic" pitchFamily="34" charset="0"/>
+                          <a:ea typeface="Malgun Gothic" pitchFamily="34" charset="-122"/>
+                          <a:cs typeface="Malgun Gothic" pitchFamily="34" charset="-120"/>
+                        </a:rPr>
+                        <a:t>31.6%</a:t>
+                      </a:r>
+                      <a:endParaRPr lang="en-US" sz="1300" dirty="0">
+                        <a:latin typeface="Malgun Gothic" charset="0"/>
+                        <a:ea typeface="Malgun Gothic" charset="0"/>
+                        <a:cs typeface="Malgun Gothic" charset="0"/>
+                      </a:endParaRPr>
+                    </a:p>
+                  </a:txBody>
+                  <a:tcPr marL="91440" marR="91440" marT="45720" marB="45720" anchor="ctr">
+                    <a:lnL w="9525" cap="flat" cmpd="sng" algn="ctr">
+                      <a:solidFill>
+                        <a:srgbClr val="D9D9D9"/>
+                      </a:solidFill>
+                      <a:prstDash val="solid"/>
+                      <a:round/>
+                      <a:headEnd type="none" w="med" len="med"/>
+                      <a:tailEnd type="none" w="med" len="med"/>
+                    </a:lnL>
+                    <a:lnR w="9525" cap="flat" cmpd="sng" algn="ctr">
+                      <a:solidFill>
+                        <a:srgbClr val="D9D9D9"/>
+                      </a:solidFill>
+                      <a:prstDash val="solid"/>
+                      <a:round/>
+                      <a:headEnd type="none" w="med" len="med"/>
+                      <a:tailEnd type="none" w="med" len="med"/>
+                    </a:lnR>
+                    <a:lnT w="9525" cap="flat" cmpd="sng" algn="ctr">
+                      <a:solidFill>
+                        <a:srgbClr val="D9D9D9"/>
+                      </a:solidFill>
+                      <a:prstDash val="solid"/>
+                      <a:round/>
+                      <a:headEnd type="none" w="med" len="med"/>
+                      <a:tailEnd type="none" w="med" len="med"/>
+                    </a:lnT>
+                    <a:lnB w="9525" cap="flat" cmpd="sng" algn="ctr">
+                      <a:solidFill>
+                        <a:srgbClr val="D9D9D9"/>
+                      </a:solidFill>
+                      <a:prstDash val="solid"/>
+                      <a:round/>
+                      <a:headEnd type="none" w="med" len="med"/>
+                      <a:tailEnd type="none" w="med" len="med"/>
+                    </a:lnB>
+                    <a:solidFill>
+                      <a:srgbClr val="FFFFFF"/>
+                    </a:solidFill>
+                  </a:tcPr>
+                </a:tc>
+              </a:tr>
+              <a:tr h="502920">
+                <a:tc>
+                  <a:txBody>
+                    <a:bodyPr/>
+                    <a:lstStyle/>
+                    <a:p>
+                      <a:pPr algn="l" indent="0" marL="0">
+                        <a:buNone/>
+                      </a:pPr>
+                      <a:r>
+                        <a:rPr lang="en-US" sz="1300" dirty="0">
+                          <a:solidFill>
+                            <a:srgbClr val="3F3F3F"/>
+                          </a:solidFill>
+                          <a:latin typeface="Malgun Gothic" pitchFamily="34" charset="0"/>
+                          <a:ea typeface="Malgun Gothic" pitchFamily="34" charset="-122"/>
+                          <a:cs typeface="Malgun Gothic" pitchFamily="34" charset="-120"/>
+                        </a:rPr>
+                        <a:t>XN/XR (Hematology)</a:t>
+                      </a:r>
+                      <a:endParaRPr lang="en-US" sz="1300" dirty="0">
+                        <a:latin typeface="Malgun Gothic" charset="0"/>
+                        <a:ea typeface="Malgun Gothic" charset="0"/>
+                        <a:cs typeface="Malgun Gothic" charset="0"/>
+                      </a:endParaRPr>
+                    </a:p>
+                  </a:txBody>
+                  <a:tcPr marL="91440" marR="91440" marT="45720" marB="45720" anchor="ctr">
+                    <a:lnL w="9525" cap="flat" cmpd="sng" algn="ctr">
+                      <a:solidFill>
+                        <a:srgbClr val="D9D9D9"/>
+                      </a:solidFill>
+                      <a:prstDash val="solid"/>
+                      <a:round/>
+                      <a:headEnd type="none" w="med" len="med"/>
+                      <a:tailEnd type="none" w="med" len="med"/>
+                    </a:lnL>
+                    <a:lnR w="9525" cap="flat" cmpd="sng" algn="ctr">
+                      <a:solidFill>
+                        <a:srgbClr val="D9D9D9"/>
+                      </a:solidFill>
+                      <a:prstDash val="solid"/>
+                      <a:round/>
+                      <a:headEnd type="none" w="med" len="med"/>
+                      <a:tailEnd type="none" w="med" len="med"/>
+                    </a:lnR>
+                    <a:lnT w="9525" cap="flat" cmpd="sng" algn="ctr">
+                      <a:solidFill>
+                        <a:srgbClr val="D9D9D9"/>
+                      </a:solidFill>
+                      <a:prstDash val="solid"/>
+                      <a:round/>
+                      <a:headEnd type="none" w="med" len="med"/>
+                      <a:tailEnd type="none" w="med" len="med"/>
+                    </a:lnT>
+                    <a:lnB w="9525" cap="flat" cmpd="sng" algn="ctr">
+                      <a:solidFill>
+                        <a:srgbClr val="D9D9D9"/>
+                      </a:solidFill>
+                      <a:prstDash val="solid"/>
+                      <a:round/>
+                      <a:headEnd type="none" w="med" len="med"/>
+                      <a:tailEnd type="none" w="med" len="med"/>
+                    </a:lnB>
+                    <a:solidFill>
+                      <a:srgbClr val="FFFFFF"/>
+                    </a:solidFill>
+                  </a:tcPr>
+                </a:tc>
+                <a:tc>
+                  <a:txBody>
+                    <a:bodyPr/>
+                    <a:lstStyle/>
+                    <a:p>
+                      <a:pPr algn="ctr" indent="0" marL="0">
+                        <a:buNone/>
+                      </a:pPr>
+                      <a:r>
+                        <a:rPr lang="en-US" sz="1300" dirty="0">
+                          <a:solidFill>
+                            <a:srgbClr val="3F3F3F"/>
+                          </a:solidFill>
+                          <a:latin typeface="Malgun Gothic" pitchFamily="34" charset="0"/>
+                          <a:ea typeface="Malgun Gothic" pitchFamily="34" charset="-122"/>
+                          <a:cs typeface="Malgun Gothic" pitchFamily="34" charset="-120"/>
+                        </a:rPr>
+                        <a:t>19,119</a:t>
+                      </a:r>
+                      <a:endParaRPr lang="en-US" sz="1300" dirty="0">
+                        <a:latin typeface="Malgun Gothic" charset="0"/>
+                        <a:ea typeface="Malgun Gothic" charset="0"/>
+                        <a:cs typeface="Malgun Gothic" charset="0"/>
+                      </a:endParaRPr>
+                    </a:p>
+                  </a:txBody>
+                  <a:tcPr marL="91440" marR="91440" marT="45720" marB="45720" anchor="ctr">
+                    <a:lnL w="9525" cap="flat" cmpd="sng" algn="ctr">
+                      <a:solidFill>
+                        <a:srgbClr val="D9D9D9"/>
+                      </a:solidFill>
+                      <a:prstDash val="solid"/>
+                      <a:round/>
+                      <a:headEnd type="none" w="med" len="med"/>
+                      <a:tailEnd type="none" w="med" len="med"/>
+                    </a:lnL>
+                    <a:lnR w="9525" cap="flat" cmpd="sng" algn="ctr">
+                      <a:solidFill>
+                        <a:srgbClr val="D9D9D9"/>
+                      </a:solidFill>
+                      <a:prstDash val="solid"/>
+                      <a:round/>
+                      <a:headEnd type="none" w="med" len="med"/>
+                      <a:tailEnd type="none" w="med" len="med"/>
+                    </a:lnR>
+                    <a:lnT w="9525" cap="flat" cmpd="sng" algn="ctr">
+                      <a:solidFill>
+                        <a:srgbClr val="D9D9D9"/>
+                      </a:solidFill>
+                      <a:prstDash val="solid"/>
+                      <a:round/>
+                      <a:headEnd type="none" w="med" len="med"/>
+                      <a:tailEnd type="none" w="med" len="med"/>
+                    </a:lnT>
+                    <a:lnB w="9525" cap="flat" cmpd="sng" algn="ctr">
+                      <a:solidFill>
+                        <a:srgbClr val="D9D9D9"/>
+                      </a:solidFill>
+                      <a:prstDash val="solid"/>
+                      <a:round/>
+                      <a:headEnd type="none" w="med" len="med"/>
+                      <a:tailEnd type="none" w="med" len="med"/>
+                    </a:lnB>
+                    <a:solidFill>
+                      <a:srgbClr val="FFFFFF"/>
+                    </a:solidFill>
+                  </a:tcPr>
+                </a:tc>
+                <a:tc>
+                  <a:txBody>
+                    <a:bodyPr/>
+                    <a:lstStyle/>
+                    <a:p>
+                      <a:pPr algn="ctr" indent="0" marL="0">
+                        <a:buNone/>
+                      </a:pPr>
+                      <a:r>
+                        <a:rPr lang="en-US" sz="1300" dirty="0">
+                          <a:solidFill>
+                            <a:srgbClr val="3F3F3F"/>
+                          </a:solidFill>
+                          <a:latin typeface="Malgun Gothic" pitchFamily="34" charset="0"/>
+                          <a:ea typeface="Malgun Gothic" pitchFamily="34" charset="-122"/>
+                          <a:cs typeface="Malgun Gothic" pitchFamily="34" charset="-120"/>
+                        </a:rPr>
+                        <a:t>5,292</a:t>
+                      </a:r>
+                      <a:endParaRPr lang="en-US" sz="1300" dirty="0">
+                        <a:latin typeface="Malgun Gothic" charset="0"/>
+                        <a:ea typeface="Malgun Gothic" charset="0"/>
+                        <a:cs typeface="Malgun Gothic" charset="0"/>
+                      </a:endParaRPr>
+                    </a:p>
+                  </a:txBody>
+                  <a:tcPr marL="91440" marR="91440" marT="45720" marB="45720" anchor="ctr">
+                    <a:lnL w="9525" cap="flat" cmpd="sng" algn="ctr">
+                      <a:solidFill>
+                        <a:srgbClr val="D9D9D9"/>
+                      </a:solidFill>
+                      <a:prstDash val="solid"/>
+                      <a:round/>
+                      <a:headEnd type="none" w="med" len="med"/>
+                      <a:tailEnd type="none" w="med" len="med"/>
+                    </a:lnL>
+                    <a:lnR w="9525" cap="flat" cmpd="sng" algn="ctr">
+                      <a:solidFill>
+                        <a:srgbClr val="D9D9D9"/>
+                      </a:solidFill>
+                      <a:prstDash val="solid"/>
+                      <a:round/>
+                      <a:headEnd type="none" w="med" len="med"/>
+                      <a:tailEnd type="none" w="med" len="med"/>
+                    </a:lnR>
+                    <a:lnT w="9525" cap="flat" cmpd="sng" algn="ctr">
+                      <a:solidFill>
+                        <a:srgbClr val="D9D9D9"/>
+                      </a:solidFill>
+                      <a:prstDash val="solid"/>
+                      <a:round/>
+                      <a:headEnd type="none" w="med" len="med"/>
+                      <a:tailEnd type="none" w="med" len="med"/>
+                    </a:lnT>
+                    <a:lnB w="9525" cap="flat" cmpd="sng" algn="ctr">
+                      <a:solidFill>
+                        <a:srgbClr val="D9D9D9"/>
+                      </a:solidFill>
+                      <a:prstDash val="solid"/>
+                      <a:round/>
+                      <a:headEnd type="none" w="med" len="med"/>
+                      <a:tailEnd type="none" w="med" len="med"/>
+                    </a:lnB>
+                    <a:solidFill>
+                      <a:srgbClr val="FFFFFF"/>
+                    </a:solidFill>
+                  </a:tcPr>
+                </a:tc>
+                <a:tc>
+                  <a:txBody>
+                    <a:bodyPr/>
+                    <a:lstStyle/>
+                    <a:p>
+                      <a:pPr algn="ctr" indent="0" marL="0">
+                        <a:buNone/>
+                      </a:pPr>
+                      <a:r>
+                        <a:rPr lang="en-US" sz="1300" dirty="0">
+                          <a:solidFill>
+                            <a:srgbClr val="3F3F3F"/>
+                          </a:solidFill>
+                          <a:latin typeface="Malgun Gothic" pitchFamily="34" charset="0"/>
+                          <a:ea typeface="Malgun Gothic" pitchFamily="34" charset="-122"/>
+                          <a:cs typeface="Malgun Gothic" pitchFamily="34" charset="-120"/>
+                        </a:rPr>
+                        <a:t>27.7%</a:t>
+                      </a:r>
+                      <a:endParaRPr lang="en-US" sz="1300" dirty="0">
+                        <a:latin typeface="Malgun Gothic" charset="0"/>
+                        <a:ea typeface="Malgun Gothic" charset="0"/>
+                        <a:cs typeface="Malgun Gothic" charset="0"/>
+                      </a:endParaRPr>
+                    </a:p>
+                  </a:txBody>
+                  <a:tcPr marL="91440" marR="91440" marT="45720" marB="45720" anchor="ctr">
+                    <a:lnL w="9525" cap="flat" cmpd="sng" algn="ctr">
+                      <a:solidFill>
+                        <a:srgbClr val="D9D9D9"/>
+                      </a:solidFill>
+                      <a:prstDash val="solid"/>
+                      <a:round/>
+                      <a:headEnd type="none" w="med" len="med"/>
+                      <a:tailEnd type="none" w="med" len="med"/>
+                    </a:lnL>
+                    <a:lnR w="9525" cap="flat" cmpd="sng" algn="ctr">
+                      <a:solidFill>
+                        <a:srgbClr val="D9D9D9"/>
+                      </a:solidFill>
+                      <a:prstDash val="solid"/>
+                      <a:round/>
+                      <a:headEnd type="none" w="med" len="med"/>
+                      <a:tailEnd type="none" w="med" len="med"/>
+                    </a:lnR>
+                    <a:lnT w="9525" cap="flat" cmpd="sng" algn="ctr">
+                      <a:solidFill>
+                        <a:srgbClr val="D9D9D9"/>
+                      </a:solidFill>
+                      <a:prstDash val="solid"/>
+                      <a:round/>
+                      <a:headEnd type="none" w="med" len="med"/>
+                      <a:tailEnd type="none" w="med" len="med"/>
+                    </a:lnT>
+                    <a:lnB w="9525" cap="flat" cmpd="sng" algn="ctr">
+                      <a:solidFill>
+                        <a:srgbClr val="D9D9D9"/>
+                      </a:solidFill>
+                      <a:prstDash val="solid"/>
+                      <a:round/>
+                      <a:headEnd type="none" w="med" len="med"/>
+                      <a:tailEnd type="none" w="med" len="med"/>
+                    </a:lnB>
+                    <a:solidFill>
+                      <a:srgbClr val="FFFFFF"/>
+                    </a:solidFill>
+                  </a:tcPr>
+                </a:tc>
+              </a:tr>
+            </a:tbl>
+          </a:graphicData>
+        </a:graphic>
+      </p:graphicFrame>
+      <p:sp>
+        <p:nvSpPr>
+          <p:cNvPr id="8" name="Text 4"/>
+          <p:cNvSpPr/>
+          <p:nvPr/>
+        </p:nvSpPr>
+        <p:spPr>
+          <a:xfrm>
+            <a:off x="7223760" y="1508760"/>
+            <a:ext cx="4572000" cy="320040"/>
+          </a:xfrm>
+          <a:prstGeom prst="rect">
+            <a:avLst/>
+          </a:prstGeom>
+          <a:noFill/>
+          <a:ln/>
+        </p:spPr>
+        <p:txBody>
+          <a:bodyPr wrap="square" lIns="0" tIns="0" rIns="0" bIns="0" rtlCol="0" anchor="ctr"/>
+          <a:lstStyle/>
+          <a:p>
+            <a:pPr indent="0" marL="0">
+              <a:buNone/>
+            </a:pPr>
+            <a:r>
+              <a:rPr lang="en-US" sz="1300" b="1" dirty="0">
+                <a:solidFill>
+                  <a:srgbClr val="005BAC"/>
+                </a:solidFill>
+                <a:latin typeface="Malgun Gothic" pitchFamily="34" charset="0"/>
+                <a:ea typeface="Malgun Gothic" pitchFamily="34" charset="-122"/>
+                <a:cs typeface="Malgun Gothic" pitchFamily="34" charset="-120"/>
+              </a:rPr>
+              <a:t>에러율 비교</a:t>
+            </a:r>
+            <a:endParaRPr lang="en-US" sz="1300" dirty="0"/>
+          </a:p>
+        </p:txBody>
+      </p:sp>
+      <p:sp>
+        <p:nvSpPr>
+          <p:cNvPr id="9" name="Text 5"/>
+          <p:cNvSpPr/>
+          <p:nvPr/>
+        </p:nvSpPr>
+        <p:spPr>
+          <a:xfrm>
+            <a:off x="7223760" y="1920240"/>
+            <a:ext cx="4023360" cy="274320"/>
+          </a:xfrm>
+          <a:prstGeom prst="rect">
+            <a:avLst/>
+          </a:prstGeom>
+          <a:noFill/>
+          <a:ln/>
+        </p:spPr>
+        <p:txBody>
+          <a:bodyPr wrap="square" lIns="0" tIns="0" rIns="0" bIns="0" rtlCol="0" anchor="ctr"/>
+          <a:lstStyle/>
+          <a:p>
+            <a:pPr indent="0" marL="0">
+              <a:buNone/>
+            </a:pPr>
+            <a:r>
+              <a:rPr lang="en-US" sz="1100" dirty="0">
+                <a:solidFill>
+                  <a:srgbClr val="3F3F3F"/>
+                </a:solidFill>
+                <a:latin typeface="Malgun Gothic" pitchFamily="34" charset="0"/>
+                <a:ea typeface="Malgun Gothic" pitchFamily="34" charset="-122"/>
+                <a:cs typeface="Malgun Gothic" pitchFamily="34" charset="-120"/>
+              </a:rPr>
+              <a:t>SP (Slide Preparation)</a:t>
+            </a:r>
+            <a:endParaRPr lang="en-US" sz="1100" dirty="0"/>
+          </a:p>
+        </p:txBody>
+      </p:sp>
+      <p:sp>
+        <p:nvSpPr>
+          <p:cNvPr id="10" name="Shape 6"/>
+          <p:cNvSpPr/>
+          <p:nvPr/>
+        </p:nvSpPr>
+        <p:spPr>
+          <a:xfrm>
+            <a:off x="7223760" y="2212848"/>
+            <a:ext cx="3474720" cy="292608"/>
+          </a:xfrm>
+          <a:prstGeom prst="rect">
+            <a:avLst/>
+          </a:prstGeom>
+          <a:solidFill>
+            <a:srgbClr val="E7413E"/>
+          </a:solidFill>
+          <a:ln/>
+        </p:spPr>
+      </p:sp>
+      <p:sp>
+        <p:nvSpPr>
+          <p:cNvPr id="11" name="Text 7"/>
+          <p:cNvSpPr/>
+          <p:nvPr/>
+        </p:nvSpPr>
+        <p:spPr>
+          <a:xfrm>
+            <a:off x="10789920" y="2157984"/>
+            <a:ext cx="731520" cy="365760"/>
+          </a:xfrm>
+          <a:prstGeom prst="rect">
+            <a:avLst/>
+          </a:prstGeom>
+          <a:noFill/>
+          <a:ln/>
+        </p:spPr>
+        <p:txBody>
+          <a:bodyPr wrap="square" lIns="0" tIns="0" rIns="0" bIns="0" rtlCol="0" anchor="ctr"/>
+          <a:lstStyle/>
+          <a:p>
+            <a:pPr indent="0" marL="0">
+              <a:buNone/>
+            </a:pPr>
+            <a:r>
+              <a:rPr lang="en-US" sz="1300" b="1" dirty="0">
+                <a:solidFill>
+                  <a:srgbClr val="3F3F3F"/>
+                </a:solidFill>
+                <a:latin typeface="Arial" pitchFamily="34" charset="0"/>
+                <a:ea typeface="Arial" pitchFamily="34" charset="-122"/>
+                <a:cs typeface="Arial" pitchFamily="34" charset="-120"/>
+              </a:rPr>
+              <a:t>72.9%</a:t>
+            </a:r>
+            <a:endParaRPr lang="en-US" sz="1300" dirty="0"/>
+          </a:p>
+        </p:txBody>
+      </p:sp>
+      <p:sp>
+        <p:nvSpPr>
+          <p:cNvPr id="12" name="Text 8"/>
+          <p:cNvSpPr/>
+          <p:nvPr/>
+        </p:nvSpPr>
+        <p:spPr>
+          <a:xfrm>
+            <a:off x="7223760" y="2697480"/>
+            <a:ext cx="4023360" cy="274320"/>
+          </a:xfrm>
+          <a:prstGeom prst="rect">
+            <a:avLst/>
+          </a:prstGeom>
+          <a:noFill/>
+          <a:ln/>
+        </p:spPr>
+        <p:txBody>
+          <a:bodyPr wrap="square" lIns="0" tIns="0" rIns="0" bIns="0" rtlCol="0" anchor="ctr"/>
+          <a:lstStyle/>
+          <a:p>
+            <a:pPr indent="0" marL="0">
+              <a:buNone/>
+            </a:pPr>
+            <a:r>
+              <a:rPr lang="en-US" sz="1100" dirty="0">
+                <a:solidFill>
+                  <a:srgbClr val="3F3F3F"/>
+                </a:solidFill>
+                <a:latin typeface="Malgun Gothic" pitchFamily="34" charset="0"/>
+                <a:ea typeface="Malgun Gothic" pitchFamily="34" charset="-122"/>
+                <a:cs typeface="Malgun Gothic" pitchFamily="34" charset="-120"/>
+              </a:rPr>
+              <a:t>CN (Coagulation)</a:t>
+            </a:r>
+            <a:endParaRPr lang="en-US" sz="1100" dirty="0"/>
+          </a:p>
+        </p:txBody>
+      </p:sp>
+      <p:sp>
+        <p:nvSpPr>
+          <p:cNvPr id="13" name="Shape 9"/>
+          <p:cNvSpPr/>
+          <p:nvPr/>
+        </p:nvSpPr>
+        <p:spPr>
+          <a:xfrm>
+            <a:off x="7223760" y="2990088"/>
+            <a:ext cx="2359378" cy="292608"/>
+          </a:xfrm>
+          <a:prstGeom prst="rect">
+            <a:avLst/>
+          </a:prstGeom>
+          <a:solidFill>
+            <a:srgbClr val="005BAC"/>
+          </a:solidFill>
+          <a:ln/>
+        </p:spPr>
+      </p:sp>
+      <p:sp>
+        <p:nvSpPr>
+          <p:cNvPr id="14" name="Text 10"/>
+          <p:cNvSpPr/>
+          <p:nvPr/>
+        </p:nvSpPr>
+        <p:spPr>
+          <a:xfrm>
+            <a:off x="9674578" y="2935224"/>
+            <a:ext cx="731520" cy="365760"/>
+          </a:xfrm>
+          <a:prstGeom prst="rect">
+            <a:avLst/>
+          </a:prstGeom>
+          <a:noFill/>
+          <a:ln/>
+        </p:spPr>
+        <p:txBody>
+          <a:bodyPr wrap="square" lIns="0" tIns="0" rIns="0" bIns="0" rtlCol="0" anchor="ctr"/>
+          <a:lstStyle/>
+          <a:p>
+            <a:pPr indent="0" marL="0">
+              <a:buNone/>
+            </a:pPr>
+            <a:r>
+              <a:rPr lang="en-US" sz="1300" b="1" dirty="0">
+                <a:solidFill>
+                  <a:srgbClr val="3F3F3F"/>
+                </a:solidFill>
+                <a:latin typeface="Arial" pitchFamily="34" charset="0"/>
+                <a:ea typeface="Arial" pitchFamily="34" charset="-122"/>
+                <a:cs typeface="Arial" pitchFamily="34" charset="-120"/>
+              </a:rPr>
+              <a:t>49.5%</a:t>
+            </a:r>
+            <a:endParaRPr lang="en-US" sz="1300" dirty="0"/>
+          </a:p>
+        </p:txBody>
+      </p:sp>
+      <p:sp>
+        <p:nvSpPr>
+          <p:cNvPr id="15" name="Text 11"/>
+          <p:cNvSpPr/>
+          <p:nvPr/>
+        </p:nvSpPr>
+        <p:spPr>
+          <a:xfrm>
+            <a:off x="7223760" y="3474720"/>
+            <a:ext cx="4023360" cy="274320"/>
+          </a:xfrm>
+          <a:prstGeom prst="rect">
+            <a:avLst/>
+          </a:prstGeom>
+          <a:noFill/>
+          <a:ln/>
+        </p:spPr>
+        <p:txBody>
+          <a:bodyPr wrap="square" lIns="0" tIns="0" rIns="0" bIns="0" rtlCol="0" anchor="ctr"/>
+          <a:lstStyle/>
+          <a:p>
+            <a:pPr indent="0" marL="0">
+              <a:buNone/>
+            </a:pPr>
+            <a:r>
+              <a:rPr lang="en-US" sz="1100" dirty="0">
+                <a:solidFill>
+                  <a:srgbClr val="3F3F3F"/>
+                </a:solidFill>
+                <a:latin typeface="Malgun Gothic" pitchFamily="34" charset="0"/>
+                <a:ea typeface="Malgun Gothic" pitchFamily="34" charset="-122"/>
+                <a:cs typeface="Malgun Gothic" pitchFamily="34" charset="-120"/>
+              </a:rPr>
+              <a:t>HISCL (Immunoassay)</a:t>
+            </a:r>
+            <a:endParaRPr lang="en-US" sz="1100" dirty="0"/>
+          </a:p>
+        </p:txBody>
+      </p:sp>
+      <p:sp>
+        <p:nvSpPr>
+          <p:cNvPr id="16" name="Shape 12"/>
+          <p:cNvSpPr/>
+          <p:nvPr/>
+        </p:nvSpPr>
+        <p:spPr>
+          <a:xfrm>
+            <a:off x="7223760" y="3767328"/>
+            <a:ext cx="1506189" cy="292608"/>
+          </a:xfrm>
+          <a:prstGeom prst="rect">
+            <a:avLst/>
+          </a:prstGeom>
+          <a:solidFill>
+            <a:srgbClr val="005BAC"/>
+          </a:solidFill>
+          <a:ln/>
+        </p:spPr>
+      </p:sp>
+      <p:sp>
+        <p:nvSpPr>
+          <p:cNvPr id="17" name="Text 13"/>
+          <p:cNvSpPr/>
+          <p:nvPr/>
+        </p:nvSpPr>
+        <p:spPr>
+          <a:xfrm>
+            <a:off x="8821389" y="3712464"/>
+            <a:ext cx="731520" cy="365760"/>
+          </a:xfrm>
+          <a:prstGeom prst="rect">
+            <a:avLst/>
+          </a:prstGeom>
+          <a:noFill/>
+          <a:ln/>
+        </p:spPr>
+        <p:txBody>
+          <a:bodyPr wrap="square" lIns="0" tIns="0" rIns="0" bIns="0" rtlCol="0" anchor="ctr"/>
+          <a:lstStyle/>
+          <a:p>
+            <a:pPr indent="0" marL="0">
+              <a:buNone/>
+            </a:pPr>
+            <a:r>
+              <a:rPr lang="en-US" sz="1300" b="1" dirty="0">
+                <a:solidFill>
+                  <a:srgbClr val="3F3F3F"/>
+                </a:solidFill>
+                <a:latin typeface="Arial" pitchFamily="34" charset="0"/>
+                <a:ea typeface="Arial" pitchFamily="34" charset="-122"/>
+                <a:cs typeface="Arial" pitchFamily="34" charset="-120"/>
+              </a:rPr>
+              <a:t>31.6%</a:t>
+            </a:r>
+            <a:endParaRPr lang="en-US" sz="1300" dirty="0"/>
+          </a:p>
+        </p:txBody>
+      </p:sp>
+      <p:sp>
+        <p:nvSpPr>
+          <p:cNvPr id="18" name="Text 14"/>
+          <p:cNvSpPr/>
+          <p:nvPr/>
+        </p:nvSpPr>
+        <p:spPr>
+          <a:xfrm>
+            <a:off x="7223760" y="4251960"/>
+            <a:ext cx="4023360" cy="274320"/>
+          </a:xfrm>
+          <a:prstGeom prst="rect">
+            <a:avLst/>
+          </a:prstGeom>
+          <a:noFill/>
+          <a:ln/>
+        </p:spPr>
+        <p:txBody>
+          <a:bodyPr wrap="square" lIns="0" tIns="0" rIns="0" bIns="0" rtlCol="0" anchor="ctr"/>
+          <a:lstStyle/>
+          <a:p>
+            <a:pPr indent="0" marL="0">
+              <a:buNone/>
+            </a:pPr>
+            <a:r>
+              <a:rPr lang="en-US" sz="1100" dirty="0">
+                <a:solidFill>
+                  <a:srgbClr val="3F3F3F"/>
+                </a:solidFill>
+                <a:latin typeface="Malgun Gothic" pitchFamily="34" charset="0"/>
+                <a:ea typeface="Malgun Gothic" pitchFamily="34" charset="-122"/>
+                <a:cs typeface="Malgun Gothic" pitchFamily="34" charset="-120"/>
+              </a:rPr>
+              <a:t>XN/XR (Hematology)</a:t>
+            </a:r>
+            <a:endParaRPr lang="en-US" sz="1100" dirty="0"/>
+          </a:p>
+        </p:txBody>
+      </p:sp>
+      <p:sp>
+        <p:nvSpPr>
+          <p:cNvPr id="19" name="Shape 15"/>
+          <p:cNvSpPr/>
+          <p:nvPr/>
+        </p:nvSpPr>
+        <p:spPr>
+          <a:xfrm>
+            <a:off x="7223760" y="4544568"/>
+            <a:ext cx="1320298" cy="292608"/>
+          </a:xfrm>
+          <a:prstGeom prst="rect">
+            <a:avLst/>
+          </a:prstGeom>
+          <a:solidFill>
+            <a:srgbClr val="005BAC"/>
+          </a:solidFill>
+          <a:ln/>
+        </p:spPr>
+      </p:sp>
+      <p:sp>
+        <p:nvSpPr>
+          <p:cNvPr id="20" name="Text 16"/>
+          <p:cNvSpPr/>
+          <p:nvPr/>
+        </p:nvSpPr>
+        <p:spPr>
+          <a:xfrm>
+            <a:off x="8635498" y="4489704"/>
+            <a:ext cx="731520" cy="365760"/>
+          </a:xfrm>
+          <a:prstGeom prst="rect">
+            <a:avLst/>
+          </a:prstGeom>
+          <a:noFill/>
+          <a:ln/>
+        </p:spPr>
+        <p:txBody>
+          <a:bodyPr wrap="square" lIns="0" tIns="0" rIns="0" bIns="0" rtlCol="0" anchor="ctr"/>
+          <a:lstStyle/>
+          <a:p>
+            <a:pPr indent="0" marL="0">
+              <a:buNone/>
+            </a:pPr>
+            <a:r>
+              <a:rPr lang="en-US" sz="1300" b="1" dirty="0">
+                <a:solidFill>
+                  <a:srgbClr val="3F3F3F"/>
+                </a:solidFill>
+                <a:latin typeface="Arial" pitchFamily="34" charset="0"/>
+                <a:ea typeface="Arial" pitchFamily="34" charset="-122"/>
+                <a:cs typeface="Arial" pitchFamily="34" charset="-120"/>
+              </a:rPr>
+              <a:t>27.7%</a:t>
+            </a:r>
+            <a:endParaRPr lang="en-US" sz="1300" dirty="0"/>
+          </a:p>
+        </p:txBody>
+      </p:sp>
+      <p:sp>
+        <p:nvSpPr>
+          <p:cNvPr id="21" name="Shape 17"/>
+          <p:cNvSpPr/>
+          <p:nvPr/>
+        </p:nvSpPr>
+        <p:spPr>
+          <a:xfrm>
+            <a:off x="530352" y="5166360"/>
+            <a:ext cx="11100816" cy="1051560"/>
+          </a:xfrm>
+          <a:prstGeom prst="roundRect">
+            <a:avLst>
+              <a:gd name="adj" fmla="val 6087"/>
+            </a:avLst>
+          </a:prstGeom>
+          <a:solidFill>
+            <a:srgbClr val="E6EEF7"/>
+          </a:solidFill>
+          <a:ln/>
+        </p:spPr>
+      </p:sp>
+      <p:sp>
+        <p:nvSpPr>
+          <p:cNvPr id="22" name="Text 18"/>
+          <p:cNvSpPr/>
+          <p:nvPr/>
+        </p:nvSpPr>
+        <p:spPr>
+          <a:xfrm>
+            <a:off x="731520" y="5285232"/>
+            <a:ext cx="10698480" cy="822960"/>
+          </a:xfrm>
+          <a:prstGeom prst="rect">
+            <a:avLst/>
+          </a:prstGeom>
+          <a:noFill/>
+          <a:ln/>
+        </p:spPr>
+        <p:txBody>
+          <a:bodyPr wrap="square" lIns="0" tIns="0" rIns="0" bIns="0" rtlCol="0" anchor="ctr"/>
+          <a:lstStyle/>
+          <a:p>
+            <a:pPr indent="0" marL="0">
+              <a:buNone/>
+            </a:pPr>
+            <a:r>
+              <a:rPr lang="en-US" sz="1150" dirty="0">
+                <a:solidFill>
+                  <a:srgbClr val="3F3F3F"/>
+                </a:solidFill>
+                <a:latin typeface="Malgun Gothic" pitchFamily="34" charset="0"/>
+                <a:ea typeface="Malgun Gothic" pitchFamily="34" charset="-122"/>
+                <a:cs typeface="Malgun Gothic" pitchFamily="34" charset="-120"/>
+              </a:rPr>
+              <a:t>Insight: SP(도말표본 제작 장비) 계열의 에러율이 72.9%로 가장 높아 전체 서비스 활동의 대부분이 고장 수리로 발생하고 있습니다. CN(응고) 계열도 49.5%로 절반 수준이며, XN/XR(혈액) 계열은 27.7%로 상대적으로 안정적입니다. SP·CN 계열 우선 예방정비 강화가 필요합니다.</a:t>
+            </a:r>
+            <a:endParaRPr lang="en-US" sz="1150" dirty="0"/>
+          </a:p>
+        </p:txBody>
+      </p:sp>
+      <p:sp>
+        <p:nvSpPr>
+          <p:cNvPr id="23" name="Text 19"/>
+          <p:cNvSpPr/>
+          <p:nvPr/>
+        </p:nvSpPr>
+        <p:spPr>
+          <a:xfrm>
+            <a:off x="457200" y="6547104"/>
+            <a:ext cx="9601200" cy="274320"/>
+          </a:xfrm>
+          <a:prstGeom prst="rect">
+            <a:avLst/>
+          </a:prstGeom>
+          <a:noFill/>
+          <a:ln/>
+        </p:spPr>
+        <p:txBody>
+          <a:bodyPr wrap="square" rtlCol="0" anchor="ctr"/>
+          <a:lstStyle/>
+          <a:p>
+            <a:pPr algn="l" indent="0" marL="0">
+              <a:buNone/>
+            </a:pPr>
+            <a:r>
+              <a:rPr lang="en-US" sz="900" dirty="0">
+                <a:solidFill>
+                  <a:srgbClr val="9E9E9E"/>
+                </a:solidFill>
+                <a:latin typeface="Malgun Gothic" pitchFamily="34" charset="0"/>
+                <a:ea typeface="Malgun Gothic" pitchFamily="34" charset="-122"/>
+                <a:cs typeface="Malgun Gothic" pitchFamily="34" charset="-120"/>
+              </a:rPr>
+              <a:t>FS Group │ FSS Team · 2026년 7월 · Confidential</a:t>
+            </a:r>
+            <a:endParaRPr lang="en-US" sz="900" dirty="0"/>
+          </a:p>
+        </p:txBody>
+      </p:sp>
+      <p:sp>
+        <p:nvSpPr>
+          <p:cNvPr id="24" name="Text 20"/>
+          <p:cNvSpPr/>
+          <p:nvPr/>
+        </p:nvSpPr>
+        <p:spPr>
+          <a:xfrm>
+            <a:off x="11247120" y="6547104"/>
+            <a:ext cx="731520" cy="274320"/>
+          </a:xfrm>
+          <a:prstGeom prst="rect">
+            <a:avLst/>
+          </a:prstGeom>
+          <a:noFill/>
+          <a:ln/>
+        </p:spPr>
+        <p:txBody>
+          <a:bodyPr wrap="square" rtlCol="0" anchor="ctr"/>
+          <a:lstStyle/>
+          <a:p>
+            <a:pPr algn="r" indent="0" marL="0">
+              <a:buNone/>
+            </a:pPr>
+            <a:r>
+              <a:rPr lang="en-US" sz="900" dirty="0">
+                <a:solidFill>
+                  <a:srgbClr val="9E9E9E"/>
+                </a:solidFill>
+                <a:latin typeface="Arial" pitchFamily="34" charset="0"/>
+                <a:ea typeface="Arial" pitchFamily="34" charset="-122"/>
+                <a:cs typeface="Arial" pitchFamily="34" charset="-120"/>
+              </a:rPr>
+              <a:t>7</a:t>
+            </a:r>
+            <a:endParaRPr lang="en-US" sz="900" dirty="0"/>
+          </a:p>
+        </p:txBody>
+      </p:sp>
+    </p:spTree>
+  </p:cSld>
+  <p:clrMapOvr>
+    <a:masterClrMapping/>
+  </p:clrMapOvr>
+</p:sld>
+</file>
+
+<file path=ppt/slides/slide8.xml><?xml version="1.0" encoding="utf-8"?>
+<p:sld xmlns:a="http://schemas.openxmlformats.org/drawingml/2006/main" xmlns:r="http://schemas.openxmlformats.org/officeDocument/2006/relationships" xmlns:p="http://schemas.openxmlformats.org/presentationml/2006/main">
+  <p:cSld name="Slide 8">
+    <p:bg>
+      <p:bgPr>
+        <a:solidFill>
+          <a:srgbClr val="FFFFFF"/>
+        </a:solidFill>
+      </p:bgPr>
+    </p:bg>
+    <p:spTree>
+      <p:nvGrpSpPr>
+        <p:cNvPr id="1" name=""/>
+        <p:cNvGrpSpPr/>
+        <p:nvPr/>
+      </p:nvGrpSpPr>
+      <p:grpSpPr>
+        <a:xfrm>
+          <a:off x="0" y="0"/>
+          <a:ext cx="0" cy="0"/>
+          <a:chOff x="0" y="0"/>
+          <a:chExt cx="0" cy="0"/>
+        </a:xfrm>
+      </p:grpSpPr>
+      <p:sp>
+        <p:nvSpPr>
+          <p:cNvPr id="2" name="Shape 0"/>
+          <p:cNvSpPr/>
+          <p:nvPr/>
+        </p:nvSpPr>
+        <p:spPr>
+          <a:xfrm>
+            <a:off x="0" y="0"/>
+            <a:ext cx="10378440" cy="914400"/>
+          </a:xfrm>
+          <a:prstGeom prst="rect">
+            <a:avLst/>
+          </a:prstGeom>
+          <a:solidFill>
+            <a:srgbClr val="005BAC"/>
+          </a:solidFill>
+          <a:ln/>
+        </p:spPr>
+      </p:sp>
+      <p:sp>
+        <p:nvSpPr>
+          <p:cNvPr id="3" name="Text 1"/>
+          <p:cNvSpPr/>
+          <p:nvPr/>
+        </p:nvSpPr>
+        <p:spPr>
+          <a:xfrm>
+            <a:off x="502920" y="164592"/>
+            <a:ext cx="822960" cy="585216"/>
+          </a:xfrm>
+          <a:prstGeom prst="rect">
+            <a:avLst/>
+          </a:prstGeom>
+          <a:noFill/>
+          <a:ln/>
+        </p:spPr>
+        <p:txBody>
+          <a:bodyPr wrap="square" lIns="0" tIns="0" rIns="0" bIns="0" rtlCol="0" anchor="ctr"/>
+          <a:lstStyle/>
+          <a:p>
+            <a:pPr algn="l" indent="0" marL="0">
+              <a:buNone/>
+            </a:pPr>
+            <a:r>
+              <a:rPr lang="en-US" sz="3000" b="1" dirty="0">
+                <a:solidFill>
+                  <a:srgbClr val="00B8EE"/>
+                </a:solidFill>
+                <a:latin typeface="Arial" pitchFamily="34" charset="0"/>
+                <a:ea typeface="Arial" pitchFamily="34" charset="-122"/>
+                <a:cs typeface="Arial" pitchFamily="34" charset="-120"/>
+              </a:rPr>
+              <a:t>08</a:t>
+            </a:r>
+            <a:endParaRPr lang="en-US" sz="3000" dirty="0"/>
+          </a:p>
+        </p:txBody>
+      </p:sp>
+      <p:sp>
+        <p:nvSpPr>
+          <p:cNvPr id="4" name="Text 2"/>
+          <p:cNvSpPr/>
+          <p:nvPr/>
+        </p:nvSpPr>
+        <p:spPr>
+          <a:xfrm>
+            <a:off x="1234440" y="164592"/>
+            <a:ext cx="8595360" cy="585216"/>
+          </a:xfrm>
+          <a:prstGeom prst="rect">
+            <a:avLst/>
+          </a:prstGeom>
+          <a:noFill/>
+          <a:ln/>
+        </p:spPr>
+        <p:txBody>
+          <a:bodyPr wrap="square" lIns="0" tIns="0" rIns="0" bIns="0" rtlCol="0" anchor="ctr"/>
+          <a:lstStyle/>
+          <a:p>
+            <a:pPr algn="l" indent="0" marL="0">
+              <a:buNone/>
+            </a:pPr>
+            <a:r>
+              <a:rPr lang="en-US" sz="2600" b="1" dirty="0">
+                <a:solidFill>
+                  <a:srgbClr val="FFFFFF"/>
+                </a:solidFill>
+                <a:latin typeface="Malgun Gothic" pitchFamily="34" charset="0"/>
+                <a:ea typeface="Malgun Gothic" pitchFamily="34" charset="-122"/>
+                <a:cs typeface="Malgun Gothic" pitchFamily="34" charset="-120"/>
+              </a:rPr>
               <a:t>VOC 수집 정보 및 처리현황</a:t>
             </a:r>
             <a:endParaRPr lang="en-US" sz="2600" dirty="0"/>
@@ -15258,7 +20188,7 @@
       </p:sp>
       <p:graphicFrame>
         <p:nvGraphicFramePr>
-          <p:cNvPr id="8" name="Table 0"/>
+          <p:cNvPr id="9" name="Table 0"/>
           <p:cNvGraphicFramePr>
             <a:graphicFrameLocks noGrp="1"/>
           </p:cNvGraphicFramePr>
@@ -16189,443 +21119,6 @@
                 <a:ea typeface="Arial" pitchFamily="34" charset="-122"/>
                 <a:cs typeface="Arial" pitchFamily="34" charset="-120"/>
               </a:rPr>
-              <a:t>7</a:t>
-            </a:r>
-            <a:endParaRPr lang="en-US" sz="900" dirty="0"/>
-          </a:p>
-        </p:txBody>
-      </p:sp>
-    </p:spTree>
-  </p:cSld>
-  <p:clrMapOvr>
-    <a:masterClrMapping/>
-  </p:clrMapOvr>
-</p:sld>
-</file>
-
-<file path=ppt/slides/slide8.xml><?xml version="1.0" encoding="utf-8"?>
-<p:sld xmlns:a="http://schemas.openxmlformats.org/drawingml/2006/main" xmlns:r="http://schemas.openxmlformats.org/officeDocument/2006/relationships" xmlns:p="http://schemas.openxmlformats.org/presentationml/2006/main">
-  <p:cSld name="Slide 8">
-    <p:bg>
-      <p:bgPr>
-        <a:solidFill>
-          <a:srgbClr val="FFFFFF"/>
-        </a:solidFill>
-      </p:bgPr>
-    </p:bg>
-    <p:spTree>
-      <p:nvGrpSpPr>
-        <p:cNvPr id="1" name=""/>
-        <p:cNvGrpSpPr/>
-        <p:nvPr/>
-      </p:nvGrpSpPr>
-      <p:grpSpPr>
-        <a:xfrm>
-          <a:off x="0" y="0"/>
-          <a:ext cx="0" cy="0"/>
-          <a:chOff x="0" y="0"/>
-          <a:chExt cx="0" cy="0"/>
-        </a:xfrm>
-      </p:grpSpPr>
-      <p:sp>
-        <p:nvSpPr>
-          <p:cNvPr id="2" name="Shape 0"/>
-          <p:cNvSpPr/>
-          <p:nvPr/>
-        </p:nvSpPr>
-        <p:spPr>
-          <a:xfrm>
-            <a:off x="0" y="0"/>
-            <a:ext cx="10378440" cy="914400"/>
-          </a:xfrm>
-          <a:prstGeom prst="rect">
-            <a:avLst/>
-          </a:prstGeom>
-          <a:solidFill>
-            <a:srgbClr val="005BAC"/>
-          </a:solidFill>
-          <a:ln/>
-        </p:spPr>
-      </p:sp>
-      <p:sp>
-        <p:nvSpPr>
-          <p:cNvPr id="3" name="Text 1"/>
-          <p:cNvSpPr/>
-          <p:nvPr/>
-        </p:nvSpPr>
-        <p:spPr>
-          <a:xfrm>
-            <a:off x="502920" y="164592"/>
-            <a:ext cx="822960" cy="585216"/>
-          </a:xfrm>
-          <a:prstGeom prst="rect">
-            <a:avLst/>
-          </a:prstGeom>
-          <a:noFill/>
-          <a:ln/>
-        </p:spPr>
-        <p:txBody>
-          <a:bodyPr wrap="square" lIns="0" tIns="0" rIns="0" bIns="0" rtlCol="0" anchor="ctr"/>
-          <a:lstStyle/>
-          <a:p>
-            <a:pPr algn="l" indent="0" marL="0">
-              <a:buNone/>
-            </a:pPr>
-            <a:r>
-              <a:rPr lang="en-US" sz="3000" b="1" dirty="0">
-                <a:solidFill>
-                  <a:srgbClr val="00B8EE"/>
-                </a:solidFill>
-                <a:latin typeface="Arial" pitchFamily="34" charset="0"/>
-                <a:ea typeface="Arial" pitchFamily="34" charset="-122"/>
-                <a:cs typeface="Arial" pitchFamily="34" charset="-120"/>
-              </a:rPr>
-              <a:t>08</a:t>
-            </a:r>
-            <a:endParaRPr lang="en-US" sz="3000" dirty="0"/>
-          </a:p>
-        </p:txBody>
-      </p:sp>
-      <p:sp>
-        <p:nvSpPr>
-          <p:cNvPr id="4" name="Text 2"/>
-          <p:cNvSpPr/>
-          <p:nvPr/>
-        </p:nvSpPr>
-        <p:spPr>
-          <a:xfrm>
-            <a:off x="1234440" y="164592"/>
-            <a:ext cx="8595360" cy="585216"/>
-          </a:xfrm>
-          <a:prstGeom prst="rect">
-            <a:avLst/>
-          </a:prstGeom>
-          <a:noFill/>
-          <a:ln/>
-        </p:spPr>
-        <p:txBody>
-          <a:bodyPr wrap="square" lIns="0" tIns="0" rIns="0" bIns="0" rtlCol="0" anchor="ctr"/>
-          <a:lstStyle/>
-          <a:p>
-            <a:pPr algn="l" indent="0" marL="0">
-              <a:buNone/>
-            </a:pPr>
-            <a:r>
-              <a:rPr lang="en-US" sz="2600" b="1" dirty="0">
-                <a:solidFill>
-                  <a:srgbClr val="FFFFFF"/>
-                </a:solidFill>
-                <a:latin typeface="Malgun Gothic" pitchFamily="34" charset="0"/>
-                <a:ea typeface="Malgun Gothic" pitchFamily="34" charset="-122"/>
-                <a:cs typeface="Malgun Gothic" pitchFamily="34" charset="-120"/>
-              </a:rPr>
-              <a:t>중대 이슈 처리</a:t>
-            </a:r>
-            <a:endParaRPr lang="en-US" sz="2600" dirty="0"/>
-          </a:p>
-        </p:txBody>
-      </p:sp>
-      <p:pic>
-        <p:nvPicPr>
-          <p:cNvPr id="5" name="Image 0" descr="sysmex_logo_mono_blue.png">    </p:cNvPr>
-          <p:cNvPicPr>
-            <a:picLocks noChangeAspect="1"/>
-          </p:cNvPicPr>
-          <p:nvPr/>
-        </p:nvPicPr>
-        <p:blipFill>
-          <a:blip r:embed="rId1"/>
-          <a:stretch>
-            <a:fillRect/>
-          </a:stretch>
-        </p:blipFill>
-        <p:spPr>
-          <a:xfrm>
-            <a:off x="10652760" y="292608"/>
-            <a:ext cx="1097280" cy="420624"/>
-          </a:xfrm>
-          <a:prstGeom prst="rect">
-            <a:avLst/>
-          </a:prstGeom>
-        </p:spPr>
-      </p:pic>
-      <p:sp>
-        <p:nvSpPr>
-          <p:cNvPr id="6" name="Shape 3"/>
-          <p:cNvSpPr/>
-          <p:nvPr/>
-        </p:nvSpPr>
-        <p:spPr>
-          <a:xfrm>
-            <a:off x="530352" y="1143000"/>
-            <a:ext cx="11100816" cy="777240"/>
-          </a:xfrm>
-          <a:prstGeom prst="roundRect">
-            <a:avLst>
-              <a:gd name="adj" fmla="val 7059"/>
-            </a:avLst>
-          </a:prstGeom>
-          <a:solidFill>
-            <a:srgbClr val="E6EEF7"/>
-          </a:solidFill>
-          <a:ln/>
-        </p:spPr>
-      </p:sp>
-      <p:sp>
-        <p:nvSpPr>
-          <p:cNvPr id="7" name="Text 4"/>
-          <p:cNvSpPr/>
-          <p:nvPr/>
-        </p:nvSpPr>
-        <p:spPr>
-          <a:xfrm>
-            <a:off x="713232" y="1225296"/>
-            <a:ext cx="2926080" cy="320040"/>
-          </a:xfrm>
-          <a:prstGeom prst="rect">
-            <a:avLst/>
-          </a:prstGeom>
-          <a:noFill/>
-          <a:ln/>
-        </p:spPr>
-        <p:txBody>
-          <a:bodyPr wrap="square" lIns="0" tIns="0" rIns="0" bIns="0" rtlCol="0" anchor="ctr"/>
-          <a:lstStyle/>
-          <a:p>
-            <a:pPr indent="0" marL="0">
-              <a:buNone/>
-            </a:pPr>
-            <a:r>
-              <a:rPr lang="en-US" sz="1200" b="1" dirty="0">
-                <a:solidFill>
-                  <a:srgbClr val="005BAC"/>
-                </a:solidFill>
-                <a:latin typeface="Malgun Gothic" pitchFamily="34" charset="0"/>
-                <a:ea typeface="Malgun Gothic" pitchFamily="34" charset="-122"/>
-                <a:cs typeface="Malgun Gothic" pitchFamily="34" charset="-120"/>
-              </a:rPr>
-              <a:t>VOC 레드 플래그 시스템</a:t>
-            </a:r>
-            <a:endParaRPr lang="en-US" sz="1200" dirty="0"/>
-          </a:p>
-        </p:txBody>
-      </p:sp>
-      <p:sp>
-        <p:nvSpPr>
-          <p:cNvPr id="8" name="Text 5"/>
-          <p:cNvSpPr/>
-          <p:nvPr/>
-        </p:nvSpPr>
-        <p:spPr>
-          <a:xfrm>
-            <a:off x="713232" y="1536192"/>
-            <a:ext cx="10789920" cy="320040"/>
-          </a:xfrm>
-          <a:prstGeom prst="rect">
-            <a:avLst/>
-          </a:prstGeom>
-          <a:noFill/>
-          <a:ln/>
-        </p:spPr>
-        <p:txBody>
-          <a:bodyPr wrap="square" lIns="0" tIns="0" rIns="0" bIns="0" rtlCol="0" anchor="ctr"/>
-          <a:lstStyle/>
-          <a:p>
-            <a:pPr indent="0" marL="0">
-              <a:buNone/>
-            </a:pPr>
-            <a:r>
-              <a:rPr lang="en-US" sz="1100" dirty="0">
-                <a:solidFill>
-                  <a:srgbClr val="3F3F3F"/>
-                </a:solidFill>
-                <a:latin typeface="Malgun Gothic" pitchFamily="34" charset="0"/>
-                <a:ea typeface="Malgun Gothic" pitchFamily="34" charset="-122"/>
-                <a:cs typeface="Malgun Gothic" pitchFamily="34" charset="-120"/>
-              </a:rPr>
-              <a:t>평가 2점 이하 또는 서술형 "심각" 분류 건을 즉시 감지 → 분야별 전문가 TFT 구성 → SLA(1차 컨택 24~48시간) 내 처리하여 신뢰 회복</a:t>
-            </a:r>
-            <a:endParaRPr lang="en-US" sz="1100" dirty="0"/>
-          </a:p>
-        </p:txBody>
-      </p:sp>
-      <p:sp>
-        <p:nvSpPr>
-          <p:cNvPr id="9" name="Text 6"/>
-          <p:cNvSpPr/>
-          <p:nvPr/>
-        </p:nvSpPr>
-        <p:spPr>
-          <a:xfrm>
-            <a:off x="530352" y="2103120"/>
-            <a:ext cx="7315200" cy="320040"/>
-          </a:xfrm>
-          <a:prstGeom prst="rect">
-            <a:avLst/>
-          </a:prstGeom>
-          <a:noFill/>
-          <a:ln/>
-        </p:spPr>
-        <p:txBody>
-          <a:bodyPr wrap="square" lIns="0" tIns="0" rIns="0" bIns="0" rtlCol="0" anchor="ctr"/>
-          <a:lstStyle/>
-          <a:p>
-            <a:pPr indent="0" marL="0">
-              <a:buNone/>
-            </a:pPr>
-            <a:r>
-              <a:rPr lang="en-US" sz="1400" b="1" dirty="0">
-                <a:solidFill>
-                  <a:srgbClr val="005BAC"/>
-                </a:solidFill>
-                <a:latin typeface="Malgun Gothic" pitchFamily="34" charset="0"/>
-                <a:ea typeface="Malgun Gothic" pitchFamily="34" charset="-122"/>
-                <a:cs typeface="Malgun Gothic" pitchFamily="34" charset="-120"/>
-              </a:rPr>
-              <a:t>접수 · 조치 · 종결 현황</a:t>
-            </a:r>
-            <a:endParaRPr lang="en-US" sz="1400" dirty="0"/>
-          </a:p>
-        </p:txBody>
-      </p:sp>
-      <p:sp>
-        <p:nvSpPr>
-          <p:cNvPr id="10" name="Shape 7"/>
-          <p:cNvSpPr/>
-          <p:nvPr/>
-        </p:nvSpPr>
-        <p:spPr>
-          <a:xfrm>
-            <a:off x="530352" y="2468880"/>
-            <a:ext cx="11100816" cy="3200400"/>
-          </a:xfrm>
-          <a:prstGeom prst="roundRect">
-            <a:avLst>
-              <a:gd name="adj" fmla="val 2286"/>
-            </a:avLst>
-          </a:prstGeom>
-          <a:solidFill>
-            <a:srgbClr val="E6EEF7"/>
-          </a:solidFill>
-          <a:ln w="9525">
-            <a:solidFill>
-              <a:srgbClr val="005BAC"/>
-            </a:solidFill>
-            <a:prstDash val="dash"/>
-          </a:ln>
-        </p:spPr>
-      </p:sp>
-      <p:sp>
-        <p:nvSpPr>
-          <p:cNvPr id="11" name="Text 8"/>
-          <p:cNvSpPr/>
-          <p:nvPr/>
-        </p:nvSpPr>
-        <p:spPr>
-          <a:xfrm>
-            <a:off x="530352" y="2468880"/>
-            <a:ext cx="11100816" cy="3200400"/>
-          </a:xfrm>
-          <a:prstGeom prst="rect">
-            <a:avLst/>
-          </a:prstGeom>
-          <a:noFill/>
-          <a:ln/>
-        </p:spPr>
-        <p:txBody>
-          <a:bodyPr wrap="square" lIns="0" tIns="0" rIns="0" bIns="0" rtlCol="0" anchor="ctr"/>
-          <a:lstStyle/>
-          <a:p>
-            <a:pPr algn="ctr" indent="0" marL="0">
-              <a:buNone/>
-            </a:pPr>
-            <a:r>
-              <a:rPr lang="en-US" sz="1600" i="1" dirty="0">
-                <a:solidFill>
-                  <a:srgbClr val="005BAC"/>
-                </a:solidFill>
-                <a:latin typeface="Malgun Gothic" pitchFamily="34" charset="0"/>
-                <a:ea typeface="Malgun Gothic" pitchFamily="34" charset="-122"/>
-                <a:cs typeface="Malgun Gothic" pitchFamily="34" charset="-120"/>
-              </a:rPr>
-              <a:t>자료 미제공 – 추후 업데이트</a:t>
-            </a:r>
-            <a:endParaRPr lang="en-US" sz="1600" dirty="0"/>
-          </a:p>
-        </p:txBody>
-      </p:sp>
-      <p:sp>
-        <p:nvSpPr>
-          <p:cNvPr id="12" name="Text 9"/>
-          <p:cNvSpPr/>
-          <p:nvPr/>
-        </p:nvSpPr>
-        <p:spPr>
-          <a:xfrm>
-            <a:off x="457200" y="6547104"/>
-            <a:ext cx="9601200" cy="274320"/>
-          </a:xfrm>
-          <a:prstGeom prst="rect">
-            <a:avLst/>
-          </a:prstGeom>
-          <a:noFill/>
-          <a:ln/>
-        </p:spPr>
-        <p:txBody>
-          <a:bodyPr wrap="square" rtlCol="0" anchor="ctr"/>
-          <a:lstStyle/>
-          <a:p>
-            <a:pPr algn="l" indent="0" marL="0">
-              <a:buNone/>
-            </a:pPr>
-            <a:r>
-              <a:rPr lang="en-US" sz="900" dirty="0">
-                <a:solidFill>
-                  <a:srgbClr val="9E9E9E"/>
-                </a:solidFill>
-                <a:latin typeface="Malgun Gothic" pitchFamily="34" charset="0"/>
-                <a:ea typeface="Malgun Gothic" pitchFamily="34" charset="-122"/>
-                <a:cs typeface="Malgun Gothic" pitchFamily="34" charset="-120"/>
-              </a:rPr>
-              <a:t>FS Group │ FSS Team · 2026년 7월 · Confidential</a:t>
-            </a:r>
-            <a:endParaRPr lang="en-US" sz="900" dirty="0"/>
-          </a:p>
-        </p:txBody>
-      </p:sp>
-      <p:sp>
-        <p:nvSpPr>
-          <p:cNvPr id="13" name="Text 10"/>
-          <p:cNvSpPr/>
-          <p:nvPr/>
-        </p:nvSpPr>
-        <p:spPr>
-          <a:xfrm>
-            <a:off x="11247120" y="6547104"/>
-            <a:ext cx="731520" cy="274320"/>
-          </a:xfrm>
-          <a:prstGeom prst="rect">
-            <a:avLst/>
-          </a:prstGeom>
-          <a:noFill/>
-          <a:ln/>
-        </p:spPr>
-        <p:txBody>
-          <a:bodyPr wrap="square" rtlCol="0" anchor="ctr"/>
-          <a:lstStyle/>
-          <a:p>
-            <a:pPr algn="r" indent="0" marL="0">
-              <a:buNone/>
-            </a:pPr>
-            <a:r>
-              <a:rPr lang="en-US" sz="900" dirty="0">
-                <a:solidFill>
-                  <a:srgbClr val="9E9E9E"/>
-                </a:solidFill>
-                <a:latin typeface="Arial" pitchFamily="34" charset="0"/>
-                <a:ea typeface="Arial" pitchFamily="34" charset="-122"/>
-                <a:cs typeface="Arial" pitchFamily="34" charset="-120"/>
-              </a:rPr>
               <a:t>8</a:t>
             </a:r>
             <a:endParaRPr lang="en-US" sz="900" dirty="0"/>
@@ -16756,7 +21249,7 @@
                 <a:ea typeface="Malgun Gothic" pitchFamily="34" charset="-122"/>
                 <a:cs typeface="Malgun Gothic" pitchFamily="34" charset="-120"/>
               </a:rPr>
-              <a:t>대리점 교육 등 처리</a:t>
+              <a:t>중대 이슈 처리</a:t>
             </a:r>
             <a:endParaRPr lang="en-US" sz="2600" dirty="0"/>
           </a:p>
@@ -16794,23 +21287,18 @@
         </p:nvSpPr>
         <p:spPr>
           <a:xfrm>
-            <a:off x="530352" y="1188720"/>
-            <a:ext cx="5394960" cy="2651760"/>
+            <a:off x="530352" y="1143000"/>
+            <a:ext cx="11100816" cy="777240"/>
           </a:xfrm>
           <a:prstGeom prst="roundRect">
             <a:avLst>
-              <a:gd name="adj" fmla="val 2069"/>
+              <a:gd name="adj" fmla="val 7059"/>
             </a:avLst>
           </a:prstGeom>
           <a:solidFill>
-            <a:srgbClr val="EFEFEF"/>
+            <a:srgbClr val="E6EEF7"/>
           </a:solidFill>
-          <a:ln w="9525">
-            <a:solidFill>
-              <a:srgbClr val="9E9E9E"/>
-            </a:solidFill>
-            <a:prstDash val="dash"/>
-          </a:ln>
+          <a:ln/>
         </p:spPr>
       </p:sp>
       <p:sp>
@@ -16821,8 +21309,8 @@
         </p:nvSpPr>
         <p:spPr>
           <a:xfrm>
-            <a:off x="530352" y="1188720"/>
-            <a:ext cx="5394960" cy="2651760"/>
+            <a:off x="713232" y="1225296"/>
+            <a:ext cx="2926080" cy="320040"/>
           </a:xfrm>
           <a:prstGeom prst="rect">
             <a:avLst/>
@@ -16834,61 +21322,34 @@
           <a:bodyPr wrap="square" lIns="0" tIns="0" rIns="0" bIns="0" rtlCol="0" anchor="ctr"/>
           <a:lstStyle/>
           <a:p>
-            <a:pPr algn="ctr" indent="0" marL="0">
+            <a:pPr indent="0" marL="0">
               <a:buNone/>
             </a:pPr>
             <a:r>
-              <a:rPr lang="en-US" sz="1400" dirty="0">
+              <a:rPr lang="en-US" sz="1200" b="1" dirty="0">
                 <a:solidFill>
-                  <a:srgbClr val="9E9E9E"/>
+                  <a:srgbClr val="005BAC"/>
                 </a:solidFill>
                 <a:latin typeface="Malgun Gothic" pitchFamily="34" charset="0"/>
                 <a:ea typeface="Malgun Gothic" pitchFamily="34" charset="-122"/>
                 <a:cs typeface="Malgun Gothic" pitchFamily="34" charset="-120"/>
               </a:rPr>
-              <a:t>사진 자리 (Placeholder)</a:t>
-            </a:r>
-            <a:endParaRPr lang="en-US" sz="1400" dirty="0"/>
-          </a:p>
-        </p:txBody>
-      </p:sp>
-      <p:sp>
-        <p:nvSpPr>
-          <p:cNvPr id="8" name="Shape 5"/>
-          <p:cNvSpPr/>
-          <p:nvPr/>
-        </p:nvSpPr>
-        <p:spPr>
-          <a:xfrm>
-            <a:off x="6263640" y="1188720"/>
-            <a:ext cx="5394960" cy="2651760"/>
-          </a:xfrm>
-          <a:prstGeom prst="roundRect">
-            <a:avLst>
-              <a:gd name="adj" fmla="val 2069"/>
-            </a:avLst>
-          </a:prstGeom>
-          <a:solidFill>
-            <a:srgbClr val="EFEFEF"/>
-          </a:solidFill>
-          <a:ln w="9525">
-            <a:solidFill>
-              <a:srgbClr val="9E9E9E"/>
-            </a:solidFill>
-            <a:prstDash val="dash"/>
-          </a:ln>
-        </p:spPr>
-      </p:sp>
-      <p:sp>
-        <p:nvSpPr>
-          <p:cNvPr id="9" name="Text 6"/>
-          <p:cNvSpPr/>
-          <p:nvPr/>
-        </p:nvSpPr>
-        <p:spPr>
-          <a:xfrm>
-            <a:off x="6263640" y="1188720"/>
-            <a:ext cx="5394960" cy="2651760"/>
+              <a:t>VOC 레드 플래그 시스템</a:t>
+            </a:r>
+            <a:endParaRPr lang="en-US" sz="1200" dirty="0"/>
+          </a:p>
+        </p:txBody>
+      </p:sp>
+      <p:sp>
+        <p:nvSpPr>
+          <p:cNvPr id="8" name="Text 5"/>
+          <p:cNvSpPr/>
+          <p:nvPr/>
+        </p:nvSpPr>
+        <p:spPr>
+          <a:xfrm>
+            <a:off x="713232" y="1536192"/>
+            <a:ext cx="10789920" cy="320040"/>
           </a:xfrm>
           <a:prstGeom prst="rect">
             <a:avLst/>
@@ -16900,34 +21361,34 @@
           <a:bodyPr wrap="square" lIns="0" tIns="0" rIns="0" bIns="0" rtlCol="0" anchor="ctr"/>
           <a:lstStyle/>
           <a:p>
-            <a:pPr algn="ctr" indent="0" marL="0">
+            <a:pPr indent="0" marL="0">
               <a:buNone/>
             </a:pPr>
             <a:r>
-              <a:rPr lang="en-US" sz="1400" dirty="0">
+              <a:rPr lang="en-US" sz="1100" dirty="0">
                 <a:solidFill>
-                  <a:srgbClr val="9E9E9E"/>
+                  <a:srgbClr val="3F3F3F"/>
                 </a:solidFill>
                 <a:latin typeface="Malgun Gothic" pitchFamily="34" charset="0"/>
                 <a:ea typeface="Malgun Gothic" pitchFamily="34" charset="-122"/>
                 <a:cs typeface="Malgun Gothic" pitchFamily="34" charset="-120"/>
               </a:rPr>
-              <a:t>사진 자리 (Placeholder)</a:t>
-            </a:r>
-            <a:endParaRPr lang="en-US" sz="1400" dirty="0"/>
-          </a:p>
-        </p:txBody>
-      </p:sp>
-      <p:sp>
-        <p:nvSpPr>
-          <p:cNvPr id="10" name="Text 7"/>
-          <p:cNvSpPr/>
-          <p:nvPr/>
-        </p:nvSpPr>
-        <p:spPr>
-          <a:xfrm>
-            <a:off x="530352" y="3977640"/>
-            <a:ext cx="5394960" cy="457200"/>
+              <a:t>평가 2점 이하 또는 서술형 "심각" 분류 건을 즉시 감지 → 분야별 전문가 TFT 구성 → SLA(1차 컨택 24~48시간) 내 처리하여 신뢰 회복</a:t>
+            </a:r>
+            <a:endParaRPr lang="en-US" sz="1100" dirty="0"/>
+          </a:p>
+        </p:txBody>
+      </p:sp>
+      <p:sp>
+        <p:nvSpPr>
+          <p:cNvPr id="9" name="Text 6"/>
+          <p:cNvSpPr/>
+          <p:nvPr/>
+        </p:nvSpPr>
+        <p:spPr>
+          <a:xfrm>
+            <a:off x="530352" y="2103120"/>
+            <a:ext cx="7315200" cy="320040"/>
           </a:xfrm>
           <a:prstGeom prst="rect">
             <a:avLst/>
@@ -16943,9 +21404,75 @@
               <a:buNone/>
             </a:pPr>
             <a:r>
-              <a:rPr lang="en-US" sz="1300" i="1" dirty="0">
+              <a:rPr lang="en-US" sz="1400" b="1" dirty="0">
                 <a:solidFill>
-                  <a:srgbClr val="9E9E9E"/>
+                  <a:srgbClr val="005BAC"/>
+                </a:solidFill>
+                <a:latin typeface="Malgun Gothic" pitchFamily="34" charset="0"/>
+                <a:ea typeface="Malgun Gothic" pitchFamily="34" charset="-122"/>
+                <a:cs typeface="Malgun Gothic" pitchFamily="34" charset="-120"/>
+              </a:rPr>
+              <a:t>접수 · 조치 · 종결 현황</a:t>
+            </a:r>
+            <a:endParaRPr lang="en-US" sz="1400" dirty="0"/>
+          </a:p>
+        </p:txBody>
+      </p:sp>
+      <p:sp>
+        <p:nvSpPr>
+          <p:cNvPr id="10" name="Shape 7"/>
+          <p:cNvSpPr/>
+          <p:nvPr/>
+        </p:nvSpPr>
+        <p:spPr>
+          <a:xfrm>
+            <a:off x="530352" y="2468880"/>
+            <a:ext cx="11100816" cy="3200400"/>
+          </a:xfrm>
+          <a:prstGeom prst="roundRect">
+            <a:avLst>
+              <a:gd name="adj" fmla="val 2286"/>
+            </a:avLst>
+          </a:prstGeom>
+          <a:solidFill>
+            <a:srgbClr val="E6EEF7"/>
+          </a:solidFill>
+          <a:ln w="9525">
+            <a:solidFill>
+              <a:srgbClr val="005BAC"/>
+            </a:solidFill>
+            <a:prstDash val="dash"/>
+          </a:ln>
+        </p:spPr>
+      </p:sp>
+      <p:sp>
+        <p:nvSpPr>
+          <p:cNvPr id="11" name="Text 8"/>
+          <p:cNvSpPr/>
+          <p:nvPr/>
+        </p:nvSpPr>
+        <p:spPr>
+          <a:xfrm>
+            <a:off x="530352" y="2468880"/>
+            <a:ext cx="11100816" cy="3200400"/>
+          </a:xfrm>
+          <a:prstGeom prst="rect">
+            <a:avLst/>
+          </a:prstGeom>
+          <a:noFill/>
+          <a:ln/>
+        </p:spPr>
+        <p:txBody>
+          <a:bodyPr wrap="square" lIns="0" tIns="0" rIns="0" bIns="0" rtlCol="0" anchor="ctr"/>
+          <a:lstStyle/>
+          <a:p>
+            <a:pPr algn="ctr" indent="0" marL="0">
+              <a:buNone/>
+            </a:pPr>
+            <a:r>
+              <a:rPr lang="en-US" sz="1600" i="1" dirty="0">
+                <a:solidFill>
+                  <a:srgbClr val="005BAC"/>
                 </a:solidFill>
                 <a:latin typeface="Malgun Gothic" pitchFamily="34" charset="0"/>
                 <a:ea typeface="Malgun Gothic" pitchFamily="34" charset="-122"/>
@@ -16953,91 +21480,13 @@
               </a:rPr>
               <a:t>자료 미제공 – 추후 업데이트</a:t>
             </a:r>
-            <a:endParaRPr lang="en-US" sz="1300" dirty="0"/>
-          </a:p>
-        </p:txBody>
-      </p:sp>
-      <p:sp>
-        <p:nvSpPr>
-          <p:cNvPr id="11" name="Text 8"/>
-          <p:cNvSpPr/>
-          <p:nvPr/>
-        </p:nvSpPr>
-        <p:spPr>
-          <a:xfrm>
-            <a:off x="6263640" y="3977640"/>
-            <a:ext cx="5394960" cy="457200"/>
-          </a:xfrm>
-          <a:prstGeom prst="rect">
-            <a:avLst/>
-          </a:prstGeom>
-          <a:noFill/>
-          <a:ln/>
-        </p:spPr>
-        <p:txBody>
-          <a:bodyPr wrap="square" lIns="0" tIns="0" rIns="0" bIns="0" rtlCol="0" anchor="ctr"/>
-          <a:lstStyle/>
-          <a:p>
-            <a:pPr indent="0" marL="0">
-              <a:buNone/>
-            </a:pPr>
-            <a:r>
-              <a:rPr lang="en-US" sz="1300" i="1" dirty="0">
-                <a:solidFill>
-                  <a:srgbClr val="9E9E9E"/>
-                </a:solidFill>
-                <a:latin typeface="Malgun Gothic" pitchFamily="34" charset="0"/>
-                <a:ea typeface="Malgun Gothic" pitchFamily="34" charset="-122"/>
-                <a:cs typeface="Malgun Gothic" pitchFamily="34" charset="-120"/>
-              </a:rPr>
-              <a:t>자료 미제공 – 추후 업데이트</a:t>
-            </a:r>
-            <a:endParaRPr lang="en-US" sz="1300" dirty="0"/>
+            <a:endParaRPr lang="en-US" sz="1600" dirty="0"/>
           </a:p>
         </p:txBody>
       </p:sp>
       <p:sp>
         <p:nvSpPr>
           <p:cNvPr id="12" name="Text 9"/>
-          <p:cNvSpPr/>
-          <p:nvPr/>
-        </p:nvSpPr>
-        <p:spPr>
-          <a:xfrm>
-            <a:off x="530352" y="4480560"/>
-            <a:ext cx="11100816" cy="365760"/>
-          </a:xfrm>
-          <a:prstGeom prst="rect">
-            <a:avLst/>
-          </a:prstGeom>
-          <a:noFill/>
-          <a:ln/>
-        </p:spPr>
-        <p:txBody>
-          <a:bodyPr wrap="square" lIns="0" tIns="0" rIns="0" bIns="0" rtlCol="0" anchor="ctr"/>
-          <a:lstStyle/>
-          <a:p>
-            <a:pPr indent="0" marL="0">
-              <a:buNone/>
-            </a:pPr>
-            <a:r>
-              <a:rPr lang="en-US" sz="1100" i="1" dirty="0">
-                <a:solidFill>
-                  <a:srgbClr val="9E9E9E"/>
-                </a:solidFill>
-                <a:latin typeface="Malgun Gothic" pitchFamily="34" charset="0"/>
-                <a:ea typeface="Malgun Gothic" pitchFamily="34" charset="-122"/>
-                <a:cs typeface="Malgun Gothic" pitchFamily="34" charset="-120"/>
-              </a:rPr>
-              <a:t>대리점(에이전시) 대상 기술 교육, 서비스 프로세스 안내 등 처리 현황</a:t>
-            </a:r>
-            <a:endParaRPr lang="en-US" sz="1100" dirty="0"/>
-          </a:p>
-        </p:txBody>
-      </p:sp>
-      <p:sp>
-        <p:nvSpPr>
-          <p:cNvPr id="13" name="Text 10"/>
           <p:cNvSpPr/>
           <p:nvPr/>
         </p:nvSpPr>
@@ -17076,7 +21525,7 @@
       </p:sp>
       <p:sp>
         <p:nvSpPr>
-          <p:cNvPr id="14" name="Text 11"/>
+          <p:cNvPr id="13" name="Text 10"/>
           <p:cNvSpPr/>
           <p:nvPr/>
         </p:nvSpPr>

--- a/reports/FSG_월간서비스보고_202607/FSG_월간서비스보고_202607.pptx
+++ b/reports/FSG_월간서비스보고_202607/FSG_월간서비스보고_202607.pptx
@@ -6369,19 +6369,20 @@
         </p:nvGraphicFramePr>
         <p:xfrm>
           <a:off x="530352" y="1508760"/>
-          <a:ext cx="10058400" cy="914400"/>
+          <a:ext cx="9326880" cy="914400"/>
         </p:xfrm>
         <a:graphic>
           <a:graphicData uri="http://schemas.openxmlformats.org/drawingml/2006/table">
             <a:tbl>
               <a:tblPr/>
               <a:tblGrid>
-                <a:gridCol w="1828800"/>
-                <a:gridCol w="1463040"/>
-                <a:gridCol w="2377440"/>
-                <a:gridCol w="1463040"/>
-                <a:gridCol w="1463040"/>
-                <a:gridCol w="1463040"/>
+                <a:gridCol w="1554480"/>
+                <a:gridCol w="1188720"/>
+                <a:gridCol w="822960"/>
+                <a:gridCol w="1645920"/>
+                <a:gridCol w="1371600"/>
+                <a:gridCol w="1371600"/>
+                <a:gridCol w="1371600"/>
               </a:tblGrid>
               <a:tr h="384048">
                 <a:tc>
@@ -6470,6 +6471,74 @@
                           <a:cs typeface="Malgun Gothic" pitchFamily="34" charset="-120"/>
                         </a:rPr>
                         <a:t>리더</a:t>
+                      </a:r>
+                      <a:endParaRPr lang="en-US" sz="1200" dirty="0">
+                        <a:latin typeface="Malgun Gothic" charset="0"/>
+                        <a:ea typeface="Malgun Gothic" charset="0"/>
+                        <a:cs typeface="Malgun Gothic" charset="0"/>
+                      </a:endParaRPr>
+                    </a:p>
+                  </a:txBody>
+                  <a:tcPr marL="91440" marR="91440" marT="45720" marB="45720" anchor="ctr">
+                    <a:lnL w="9525" cap="flat" cmpd="sng" algn="ctr">
+                      <a:solidFill>
+                        <a:srgbClr val="D9D9D9"/>
+                      </a:solidFill>
+                      <a:prstDash val="solid"/>
+                      <a:round/>
+                      <a:headEnd type="none" w="med" len="med"/>
+                      <a:tailEnd type="none" w="med" len="med"/>
+                    </a:lnL>
+                    <a:lnR w="9525" cap="flat" cmpd="sng" algn="ctr">
+                      <a:solidFill>
+                        <a:srgbClr val="D9D9D9"/>
+                      </a:solidFill>
+                      <a:prstDash val="solid"/>
+                      <a:round/>
+                      <a:headEnd type="none" w="med" len="med"/>
+                      <a:tailEnd type="none" w="med" len="med"/>
+                    </a:lnR>
+                    <a:lnT w="9525" cap="flat" cmpd="sng" algn="ctr">
+                      <a:solidFill>
+                        <a:srgbClr val="D9D9D9"/>
+                      </a:solidFill>
+                      <a:prstDash val="solid"/>
+                      <a:round/>
+                      <a:headEnd type="none" w="med" len="med"/>
+                      <a:tailEnd type="none" w="med" len="med"/>
+                    </a:lnT>
+                    <a:lnB w="9525" cap="flat" cmpd="sng" algn="ctr">
+                      <a:solidFill>
+                        <a:srgbClr val="D9D9D9"/>
+                      </a:solidFill>
+                      <a:prstDash val="solid"/>
+                      <a:round/>
+                      <a:headEnd type="none" w="med" len="med"/>
+                      <a:tailEnd type="none" w="med" len="med"/>
+                    </a:lnB>
+                    <a:solidFill>
+                      <a:srgbClr val="005BAC"/>
+                    </a:solidFill>
+                  </a:tcPr>
+                </a:tc>
+                <a:tc>
+                  <a:txBody>
+                    <a:bodyPr/>
+                    <a:lstStyle/>
+                    <a:p>
+                      <a:pPr algn="ctr" indent="0" marL="0">
+                        <a:buNone/>
+                      </a:pPr>
+                      <a:r>
+                        <a:rPr lang="en-US" sz="1200" b="1" dirty="0">
+                          <a:solidFill>
+                            <a:srgbClr val="FFFFFF"/>
+                          </a:solidFill>
+                          <a:latin typeface="Malgun Gothic" pitchFamily="34" charset="0"/>
+                          <a:ea typeface="Malgun Gothic" pitchFamily="34" charset="-122"/>
+                          <a:cs typeface="Malgun Gothic" pitchFamily="34" charset="-120"/>
+                        </a:rPr>
+                        <a:t>인원</a:t>
                       </a:r>
                       <a:endParaRPr lang="en-US" sz="1200" dirty="0">
                         <a:latin typeface="Malgun Gothic" charset="0"/>
@@ -6879,7 +6948,75 @@
                           <a:ea typeface="Malgun Gothic" pitchFamily="34" charset="-122"/>
                           <a:cs typeface="Malgun Gothic" pitchFamily="34" charset="-120"/>
                         </a:rPr>
-                        <a:t>Gray</a:t>
+                        <a:t>김병우</a:t>
+                      </a:r>
+                      <a:endParaRPr lang="en-US" sz="1200" dirty="0">
+                        <a:latin typeface="Malgun Gothic" charset="0"/>
+                        <a:ea typeface="Malgun Gothic" charset="0"/>
+                        <a:cs typeface="Malgun Gothic" charset="0"/>
+                      </a:endParaRPr>
+                    </a:p>
+                  </a:txBody>
+                  <a:tcPr marL="91440" marR="91440" marT="45720" marB="45720" anchor="ctr">
+                    <a:lnL w="9525" cap="flat" cmpd="sng" algn="ctr">
+                      <a:solidFill>
+                        <a:srgbClr val="D9D9D9"/>
+                      </a:solidFill>
+                      <a:prstDash val="solid"/>
+                      <a:round/>
+                      <a:headEnd type="none" w="med" len="med"/>
+                      <a:tailEnd type="none" w="med" len="med"/>
+                    </a:lnL>
+                    <a:lnR w="9525" cap="flat" cmpd="sng" algn="ctr">
+                      <a:solidFill>
+                        <a:srgbClr val="D9D9D9"/>
+                      </a:solidFill>
+                      <a:prstDash val="solid"/>
+                      <a:round/>
+                      <a:headEnd type="none" w="med" len="med"/>
+                      <a:tailEnd type="none" w="med" len="med"/>
+                    </a:lnR>
+                    <a:lnT w="9525" cap="flat" cmpd="sng" algn="ctr">
+                      <a:solidFill>
+                        <a:srgbClr val="D9D9D9"/>
+                      </a:solidFill>
+                      <a:prstDash val="solid"/>
+                      <a:round/>
+                      <a:headEnd type="none" w="med" len="med"/>
+                      <a:tailEnd type="none" w="med" len="med"/>
+                    </a:lnT>
+                    <a:lnB w="9525" cap="flat" cmpd="sng" algn="ctr">
+                      <a:solidFill>
+                        <a:srgbClr val="D9D9D9"/>
+                      </a:solidFill>
+                      <a:prstDash val="solid"/>
+                      <a:round/>
+                      <a:headEnd type="none" w="med" len="med"/>
+                      <a:tailEnd type="none" w="med" len="med"/>
+                    </a:lnB>
+                    <a:solidFill>
+                      <a:srgbClr val="FFFFFF"/>
+                    </a:solidFill>
+                  </a:tcPr>
+                </a:tc>
+                <a:tc>
+                  <a:txBody>
+                    <a:bodyPr/>
+                    <a:lstStyle/>
+                    <a:p>
+                      <a:pPr algn="ctr" indent="0" marL="0">
+                        <a:buNone/>
+                      </a:pPr>
+                      <a:r>
+                        <a:rPr lang="en-US" sz="1200" dirty="0">
+                          <a:solidFill>
+                            <a:srgbClr val="3F3F3F"/>
+                          </a:solidFill>
+                          <a:latin typeface="Malgun Gothic" pitchFamily="34" charset="0"/>
+                          <a:ea typeface="Malgun Gothic" pitchFamily="34" charset="-122"/>
+                          <a:cs typeface="Malgun Gothic" pitchFamily="34" charset="-120"/>
+                        </a:rPr>
+                        <a:t>11명</a:t>
                       </a:r>
                       <a:endParaRPr lang="en-US" sz="1200" dirty="0">
                         <a:latin typeface="Malgun Gothic" charset="0"/>
@@ -7289,7 +7426,75 @@
                           <a:ea typeface="Malgun Gothic" pitchFamily="34" charset="-122"/>
                           <a:cs typeface="Malgun Gothic" pitchFamily="34" charset="-120"/>
                         </a:rPr>
-                        <a:t>Huymori</a:t>
+                        <a:t>허석</a:t>
+                      </a:r>
+                      <a:endParaRPr lang="en-US" sz="1200" dirty="0">
+                        <a:latin typeface="Malgun Gothic" charset="0"/>
+                        <a:ea typeface="Malgun Gothic" charset="0"/>
+                        <a:cs typeface="Malgun Gothic" charset="0"/>
+                      </a:endParaRPr>
+                    </a:p>
+                  </a:txBody>
+                  <a:tcPr marL="91440" marR="91440" marT="45720" marB="45720" anchor="ctr">
+                    <a:lnL w="9525" cap="flat" cmpd="sng" algn="ctr">
+                      <a:solidFill>
+                        <a:srgbClr val="D9D9D9"/>
+                      </a:solidFill>
+                      <a:prstDash val="solid"/>
+                      <a:round/>
+                      <a:headEnd type="none" w="med" len="med"/>
+                      <a:tailEnd type="none" w="med" len="med"/>
+                    </a:lnL>
+                    <a:lnR w="9525" cap="flat" cmpd="sng" algn="ctr">
+                      <a:solidFill>
+                        <a:srgbClr val="D9D9D9"/>
+                      </a:solidFill>
+                      <a:prstDash val="solid"/>
+                      <a:round/>
+                      <a:headEnd type="none" w="med" len="med"/>
+                      <a:tailEnd type="none" w="med" len="med"/>
+                    </a:lnR>
+                    <a:lnT w="9525" cap="flat" cmpd="sng" algn="ctr">
+                      <a:solidFill>
+                        <a:srgbClr val="D9D9D9"/>
+                      </a:solidFill>
+                      <a:prstDash val="solid"/>
+                      <a:round/>
+                      <a:headEnd type="none" w="med" len="med"/>
+                      <a:tailEnd type="none" w="med" len="med"/>
+                    </a:lnT>
+                    <a:lnB w="9525" cap="flat" cmpd="sng" algn="ctr">
+                      <a:solidFill>
+                        <a:srgbClr val="D9D9D9"/>
+                      </a:solidFill>
+                      <a:prstDash val="solid"/>
+                      <a:round/>
+                      <a:headEnd type="none" w="med" len="med"/>
+                      <a:tailEnd type="none" w="med" len="med"/>
+                    </a:lnB>
+                    <a:solidFill>
+                      <a:srgbClr val="FFFFFF"/>
+                    </a:solidFill>
+                  </a:tcPr>
+                </a:tc>
+                <a:tc>
+                  <a:txBody>
+                    <a:bodyPr/>
+                    <a:lstStyle/>
+                    <a:p>
+                      <a:pPr algn="ctr" indent="0" marL="0">
+                        <a:buNone/>
+                      </a:pPr>
+                      <a:r>
+                        <a:rPr lang="en-US" sz="1200" dirty="0">
+                          <a:solidFill>
+                            <a:srgbClr val="3F3F3F"/>
+                          </a:solidFill>
+                          <a:latin typeface="Malgun Gothic" pitchFamily="34" charset="0"/>
+                          <a:ea typeface="Malgun Gothic" pitchFamily="34" charset="-122"/>
+                          <a:cs typeface="Malgun Gothic" pitchFamily="34" charset="-120"/>
+                        </a:rPr>
+                        <a:t>12명</a:t>
                       </a:r>
                       <a:endParaRPr lang="en-US" sz="1200" dirty="0">
                         <a:latin typeface="Malgun Gothic" charset="0"/>
@@ -7699,7 +7904,75 @@
                           <a:ea typeface="Malgun Gothic" pitchFamily="34" charset="-122"/>
                           <a:cs typeface="Malgun Gothic" pitchFamily="34" charset="-120"/>
                         </a:rPr>
-                        <a:t>John</a:t>
+                        <a:t>성기홍</a:t>
+                      </a:r>
+                      <a:endParaRPr lang="en-US" sz="1200" dirty="0">
+                        <a:latin typeface="Malgun Gothic" charset="0"/>
+                        <a:ea typeface="Malgun Gothic" charset="0"/>
+                        <a:cs typeface="Malgun Gothic" charset="0"/>
+                      </a:endParaRPr>
+                    </a:p>
+                  </a:txBody>
+                  <a:tcPr marL="91440" marR="91440" marT="45720" marB="45720" anchor="ctr">
+                    <a:lnL w="9525" cap="flat" cmpd="sng" algn="ctr">
+                      <a:solidFill>
+                        <a:srgbClr val="D9D9D9"/>
+                      </a:solidFill>
+                      <a:prstDash val="solid"/>
+                      <a:round/>
+                      <a:headEnd type="none" w="med" len="med"/>
+                      <a:tailEnd type="none" w="med" len="med"/>
+                    </a:lnL>
+                    <a:lnR w="9525" cap="flat" cmpd="sng" algn="ctr">
+                      <a:solidFill>
+                        <a:srgbClr val="D9D9D9"/>
+                      </a:solidFill>
+                      <a:prstDash val="solid"/>
+                      <a:round/>
+                      <a:headEnd type="none" w="med" len="med"/>
+                      <a:tailEnd type="none" w="med" len="med"/>
+                    </a:lnR>
+                    <a:lnT w="9525" cap="flat" cmpd="sng" algn="ctr">
+                      <a:solidFill>
+                        <a:srgbClr val="D9D9D9"/>
+                      </a:solidFill>
+                      <a:prstDash val="solid"/>
+                      <a:round/>
+                      <a:headEnd type="none" w="med" len="med"/>
+                      <a:tailEnd type="none" w="med" len="med"/>
+                    </a:lnT>
+                    <a:lnB w="9525" cap="flat" cmpd="sng" algn="ctr">
+                      <a:solidFill>
+                        <a:srgbClr val="D9D9D9"/>
+                      </a:solidFill>
+                      <a:prstDash val="solid"/>
+                      <a:round/>
+                      <a:headEnd type="none" w="med" len="med"/>
+                      <a:tailEnd type="none" w="med" len="med"/>
+                    </a:lnB>
+                    <a:solidFill>
+                      <a:srgbClr val="FFFFFF"/>
+                    </a:solidFill>
+                  </a:tcPr>
+                </a:tc>
+                <a:tc>
+                  <a:txBody>
+                    <a:bodyPr/>
+                    <a:lstStyle/>
+                    <a:p>
+                      <a:pPr algn="ctr" indent="0" marL="0">
+                        <a:buNone/>
+                      </a:pPr>
+                      <a:r>
+                        <a:rPr lang="en-US" sz="1200" dirty="0">
+                          <a:solidFill>
+                            <a:srgbClr val="3F3F3F"/>
+                          </a:solidFill>
+                          <a:latin typeface="Malgun Gothic" pitchFamily="34" charset="0"/>
+                          <a:ea typeface="Malgun Gothic" pitchFamily="34" charset="-122"/>
+                          <a:cs typeface="Malgun Gothic" pitchFamily="34" charset="-120"/>
+                        </a:rPr>
+                        <a:t>11명</a:t>
                       </a:r>
                       <a:endParaRPr lang="en-US" sz="1200" dirty="0">
                         <a:latin typeface="Malgun Gothic" charset="0"/>
@@ -8109,7 +8382,75 @@
                           <a:ea typeface="Malgun Gothic" pitchFamily="34" charset="-122"/>
                           <a:cs typeface="Malgun Gothic" pitchFamily="34" charset="-120"/>
                         </a:rPr>
-                        <a:t>Eden</a:t>
+                        <a:t>정근하</a:t>
+                      </a:r>
+                      <a:endParaRPr lang="en-US" sz="1200" dirty="0">
+                        <a:latin typeface="Malgun Gothic" charset="0"/>
+                        <a:ea typeface="Malgun Gothic" charset="0"/>
+                        <a:cs typeface="Malgun Gothic" charset="0"/>
+                      </a:endParaRPr>
+                    </a:p>
+                  </a:txBody>
+                  <a:tcPr marL="91440" marR="91440" marT="45720" marB="45720" anchor="ctr">
+                    <a:lnL w="9525" cap="flat" cmpd="sng" algn="ctr">
+                      <a:solidFill>
+                        <a:srgbClr val="D9D9D9"/>
+                      </a:solidFill>
+                      <a:prstDash val="solid"/>
+                      <a:round/>
+                      <a:headEnd type="none" w="med" len="med"/>
+                      <a:tailEnd type="none" w="med" len="med"/>
+                    </a:lnL>
+                    <a:lnR w="9525" cap="flat" cmpd="sng" algn="ctr">
+                      <a:solidFill>
+                        <a:srgbClr val="D9D9D9"/>
+                      </a:solidFill>
+                      <a:prstDash val="solid"/>
+                      <a:round/>
+                      <a:headEnd type="none" w="med" len="med"/>
+                      <a:tailEnd type="none" w="med" len="med"/>
+                    </a:lnR>
+                    <a:lnT w="9525" cap="flat" cmpd="sng" algn="ctr">
+                      <a:solidFill>
+                        <a:srgbClr val="D9D9D9"/>
+                      </a:solidFill>
+                      <a:prstDash val="solid"/>
+                      <a:round/>
+                      <a:headEnd type="none" w="med" len="med"/>
+                      <a:tailEnd type="none" w="med" len="med"/>
+                    </a:lnT>
+                    <a:lnB w="9525" cap="flat" cmpd="sng" algn="ctr">
+                      <a:solidFill>
+                        <a:srgbClr val="D9D9D9"/>
+                      </a:solidFill>
+                      <a:prstDash val="solid"/>
+                      <a:round/>
+                      <a:headEnd type="none" w="med" len="med"/>
+                      <a:tailEnd type="none" w="med" len="med"/>
+                    </a:lnB>
+                    <a:solidFill>
+                      <a:srgbClr val="FFFFFF"/>
+                    </a:solidFill>
+                  </a:tcPr>
+                </a:tc>
+                <a:tc>
+                  <a:txBody>
+                    <a:bodyPr/>
+                    <a:lstStyle/>
+                    <a:p>
+                      <a:pPr algn="ctr" indent="0" marL="0">
+                        <a:buNone/>
+                      </a:pPr>
+                      <a:r>
+                        <a:rPr lang="en-US" sz="1200" dirty="0">
+                          <a:solidFill>
+                            <a:srgbClr val="3F3F3F"/>
+                          </a:solidFill>
+                          <a:latin typeface="Malgun Gothic" pitchFamily="34" charset="0"/>
+                          <a:ea typeface="Malgun Gothic" pitchFamily="34" charset="-122"/>
+                          <a:cs typeface="Malgun Gothic" pitchFamily="34" charset="-120"/>
+                        </a:rPr>
+                        <a:t>10명</a:t>
                       </a:r>
                       <a:endParaRPr lang="en-US" sz="1200" dirty="0">
                         <a:latin typeface="Malgun Gothic" charset="0"/>
@@ -8576,6 +8917,74 @@
                           <a:ea typeface="Malgun Gothic" pitchFamily="34" charset="-122"/>
                           <a:cs typeface="Malgun Gothic" pitchFamily="34" charset="-120"/>
                         </a:rPr>
+                        <a:t>44명</a:t>
+                      </a:r>
+                      <a:endParaRPr lang="en-US" sz="1200" dirty="0">
+                        <a:latin typeface="Malgun Gothic" charset="0"/>
+                        <a:ea typeface="Malgun Gothic" charset="0"/>
+                        <a:cs typeface="Malgun Gothic" charset="0"/>
+                      </a:endParaRPr>
+                    </a:p>
+                  </a:txBody>
+                  <a:tcPr marL="91440" marR="91440" marT="45720" marB="45720" anchor="ctr">
+                    <a:lnL w="9525" cap="flat" cmpd="sng" algn="ctr">
+                      <a:solidFill>
+                        <a:srgbClr val="D9D9D9"/>
+                      </a:solidFill>
+                      <a:prstDash val="solid"/>
+                      <a:round/>
+                      <a:headEnd type="none" w="med" len="med"/>
+                      <a:tailEnd type="none" w="med" len="med"/>
+                    </a:lnL>
+                    <a:lnR w="9525" cap="flat" cmpd="sng" algn="ctr">
+                      <a:solidFill>
+                        <a:srgbClr val="D9D9D9"/>
+                      </a:solidFill>
+                      <a:prstDash val="solid"/>
+                      <a:round/>
+                      <a:headEnd type="none" w="med" len="med"/>
+                      <a:tailEnd type="none" w="med" len="med"/>
+                    </a:lnR>
+                    <a:lnT w="9525" cap="flat" cmpd="sng" algn="ctr">
+                      <a:solidFill>
+                        <a:srgbClr val="D9D9D9"/>
+                      </a:solidFill>
+                      <a:prstDash val="solid"/>
+                      <a:round/>
+                      <a:headEnd type="none" w="med" len="med"/>
+                      <a:tailEnd type="none" w="med" len="med"/>
+                    </a:lnT>
+                    <a:lnB w="9525" cap="flat" cmpd="sng" algn="ctr">
+                      <a:solidFill>
+                        <a:srgbClr val="D9D9D9"/>
+                      </a:solidFill>
+                      <a:prstDash val="solid"/>
+                      <a:round/>
+                      <a:headEnd type="none" w="med" len="med"/>
+                      <a:tailEnd type="none" w="med" len="med"/>
+                    </a:lnB>
+                    <a:solidFill>
+                      <a:srgbClr val="EAF1F8"/>
+                    </a:solidFill>
+                  </a:tcPr>
+                </a:tc>
+                <a:tc>
+                  <a:txBody>
+                    <a:bodyPr/>
+                    <a:lstStyle/>
+                    <a:p>
+                      <a:pPr algn="ctr" indent="0" marL="0">
+                        <a:buNone/>
+                      </a:pPr>
+                      <a:r>
+                        <a:rPr lang="en-US" sz="1200" b="1" dirty="0">
+                          <a:solidFill>
+                            <a:srgbClr val="3F3F3F"/>
+                          </a:solidFill>
+                          <a:latin typeface="Malgun Gothic" pitchFamily="34" charset="0"/>
+                          <a:ea typeface="Malgun Gothic" pitchFamily="34" charset="-122"/>
+                          <a:cs typeface="Malgun Gothic" pitchFamily="34" charset="-120"/>
+                        </a:rPr>
                         <a:t>12</a:t>
                       </a:r>
                       <a:endParaRPr lang="en-US" sz="1200" dirty="0">
@@ -8869,7 +9278,7 @@
                 <a:ea typeface="Malgun Gothic" pitchFamily="34" charset="-122"/>
                 <a:cs typeface="Malgun Gothic" pitchFamily="34" charset="-120"/>
               </a:rPr>
-              <a:t>설치 건수는 신규 설치 기준(설치일정 관리 시트). 이전설치 4건 (FS East 3 · FS West 1), 장비 설치평가 4건 (SA팀 진행, FS팀 실적과 별도 집계)</a:t>
+              <a:t>팀장·인원수는 work-schedule.html 로스터 기준. 설치 건수는 신규 설치 기준(설치일정 관리 시트). 이전설치 4건 (FS East 3 · FS West 1), 장비 설치평가 4건 (SA팀 진행, FS팀 실적과 별도 집계)</a:t>
             </a:r>
             <a:endParaRPr lang="en-US" sz="950" dirty="0"/>
           </a:p>
@@ -14501,11 +14910,12 @@
             <a:tbl>
               <a:tblPr/>
               <a:tblGrid>
-                <a:gridCol w="1280160"/>
-                <a:gridCol w="914400"/>
-                <a:gridCol w="1188720"/>
-                <a:gridCol w="1188720"/>
-                <a:gridCol w="914400"/>
+                <a:gridCol w="1005840"/>
+                <a:gridCol w="1005840"/>
+                <a:gridCol w="731520"/>
+                <a:gridCol w="1005840"/>
+                <a:gridCol w="1005840"/>
+                <a:gridCol w="731520"/>
               </a:tblGrid>
               <a:tr h="292608">
                 <a:tc>
@@ -14517,7 +14927,7 @@
                         <a:buNone/>
                       </a:pPr>
                       <a:r>
-                        <a:rPr lang="en-US" sz="1050" b="1" dirty="0">
+                        <a:rPr lang="en-US" sz="1000" b="1" dirty="0">
                           <a:solidFill>
                             <a:srgbClr val="FFFFFF"/>
                           </a:solidFill>
@@ -14527,7 +14937,7 @@
                         </a:rPr>
                         <a:t>담당자</a:t>
                       </a:r>
-                      <a:endParaRPr lang="en-US" sz="1050" dirty="0">
+                      <a:endParaRPr lang="en-US" sz="1000" dirty="0">
                         <a:latin typeface="Malgun Gothic" charset="0"/>
                         <a:ea typeface="Malgun Gothic" charset="0"/>
                         <a:cs typeface="Malgun Gothic" charset="0"/>
@@ -14585,7 +14995,7 @@
                         <a:buNone/>
                       </a:pPr>
                       <a:r>
-                        <a:rPr lang="en-US" sz="1050" b="1" dirty="0">
+                        <a:rPr lang="en-US" sz="1000" b="1" dirty="0">
                           <a:solidFill>
                             <a:srgbClr val="FFFFFF"/>
                           </a:solidFill>
@@ -14593,9 +15003,9 @@
                           <a:ea typeface="Malgun Gothic" pitchFamily="34" charset="-122"/>
                           <a:cs typeface="Malgun Gothic" pitchFamily="34" charset="-120"/>
                         </a:rPr>
-                        <a:t>건수</a:t>
+                        <a:t>소속팀</a:t>
                       </a:r>
-                      <a:endParaRPr lang="en-US" sz="1050" dirty="0">
+                      <a:endParaRPr lang="en-US" sz="1000" dirty="0">
                         <a:latin typeface="Malgun Gothic" charset="0"/>
                         <a:ea typeface="Malgun Gothic" charset="0"/>
                         <a:cs typeface="Malgun Gothic" charset="0"/>
@@ -14653,7 +15063,7 @@
                         <a:buNone/>
                       </a:pPr>
                       <a:r>
-                        <a:rPr lang="en-US" sz="1050" b="1" dirty="0">
+                        <a:rPr lang="en-US" sz="1000" b="1" dirty="0">
                           <a:solidFill>
                             <a:srgbClr val="FFFFFF"/>
                           </a:solidFill>
@@ -14661,9 +15071,9 @@
                           <a:ea typeface="Malgun Gothic" pitchFamily="34" charset="-122"/>
                           <a:cs typeface="Malgun Gothic" pitchFamily="34" charset="-120"/>
                         </a:rPr>
-                        <a:t>작업시간</a:t>
+                        <a:t>건수</a:t>
                       </a:r>
-                      <a:endParaRPr lang="en-US" sz="1050" dirty="0">
+                      <a:endParaRPr lang="en-US" sz="1000" dirty="0">
                         <a:latin typeface="Malgun Gothic" charset="0"/>
                         <a:ea typeface="Malgun Gothic" charset="0"/>
                         <a:cs typeface="Malgun Gothic" charset="0"/>
@@ -14721,7 +15131,7 @@
                         <a:buNone/>
                       </a:pPr>
                       <a:r>
-                        <a:rPr lang="en-US" sz="1050" b="1" dirty="0">
+                        <a:rPr lang="en-US" sz="1000" b="1" dirty="0">
                           <a:solidFill>
                             <a:srgbClr val="FFFFFF"/>
                           </a:solidFill>
@@ -14729,9 +15139,9 @@
                           <a:ea typeface="Malgun Gothic" pitchFamily="34" charset="-122"/>
                           <a:cs typeface="Malgun Gothic" pitchFamily="34" charset="-120"/>
                         </a:rPr>
-                        <a:t>고장수리%</a:t>
+                        <a:t>작업시간</a:t>
                       </a:r>
-                      <a:endParaRPr lang="en-US" sz="1050" dirty="0">
+                      <a:endParaRPr lang="en-US" sz="1000" dirty="0">
                         <a:latin typeface="Malgun Gothic" charset="0"/>
                         <a:ea typeface="Malgun Gothic" charset="0"/>
                         <a:cs typeface="Malgun Gothic" charset="0"/>
@@ -14789,7 +15199,75 @@
                         <a:buNone/>
                       </a:pPr>
                       <a:r>
-                        <a:rPr lang="en-US" sz="1050" b="1" dirty="0">
+                        <a:rPr lang="en-US" sz="1000" b="1" dirty="0">
+                          <a:solidFill>
+                            <a:srgbClr val="FFFFFF"/>
+                          </a:solidFill>
+                          <a:latin typeface="Malgun Gothic" pitchFamily="34" charset="0"/>
+                          <a:ea typeface="Malgun Gothic" pitchFamily="34" charset="-122"/>
+                          <a:cs typeface="Malgun Gothic" pitchFamily="34" charset="-120"/>
+                        </a:rPr>
+                        <a:t>고장수리%</a:t>
+                      </a:r>
+                      <a:endParaRPr lang="en-US" sz="1000" dirty="0">
+                        <a:latin typeface="Malgun Gothic" charset="0"/>
+                        <a:ea typeface="Malgun Gothic" charset="0"/>
+                        <a:cs typeface="Malgun Gothic" charset="0"/>
+                      </a:endParaRPr>
+                    </a:p>
+                  </a:txBody>
+                  <a:tcPr marL="91440" marR="91440" marT="45720" marB="45720" anchor="ctr">
+                    <a:lnL w="9525" cap="flat" cmpd="sng" algn="ctr">
+                      <a:solidFill>
+                        <a:srgbClr val="D9D9D9"/>
+                      </a:solidFill>
+                      <a:prstDash val="solid"/>
+                      <a:round/>
+                      <a:headEnd type="none" w="med" len="med"/>
+                      <a:tailEnd type="none" w="med" len="med"/>
+                    </a:lnL>
+                    <a:lnR w="9525" cap="flat" cmpd="sng" algn="ctr">
+                      <a:solidFill>
+                        <a:srgbClr val="D9D9D9"/>
+                      </a:solidFill>
+                      <a:prstDash val="solid"/>
+                      <a:round/>
+                      <a:headEnd type="none" w="med" len="med"/>
+                      <a:tailEnd type="none" w="med" len="med"/>
+                    </a:lnR>
+                    <a:lnT w="9525" cap="flat" cmpd="sng" algn="ctr">
+                      <a:solidFill>
+                        <a:srgbClr val="D9D9D9"/>
+                      </a:solidFill>
+                      <a:prstDash val="solid"/>
+                      <a:round/>
+                      <a:headEnd type="none" w="med" len="med"/>
+                      <a:tailEnd type="none" w="med" len="med"/>
+                    </a:lnT>
+                    <a:lnB w="9525" cap="flat" cmpd="sng" algn="ctr">
+                      <a:solidFill>
+                        <a:srgbClr val="D9D9D9"/>
+                      </a:solidFill>
+                      <a:prstDash val="solid"/>
+                      <a:round/>
+                      <a:headEnd type="none" w="med" len="med"/>
+                      <a:tailEnd type="none" w="med" len="med"/>
+                    </a:lnB>
+                    <a:solidFill>
+                      <a:srgbClr val="005BAC"/>
+                    </a:solidFill>
+                  </a:tcPr>
+                </a:tc>
+                <a:tc>
+                  <a:txBody>
+                    <a:bodyPr/>
+                    <a:lstStyle/>
+                    <a:p>
+                      <a:pPr algn="ctr" indent="0" marL="0">
+                        <a:buNone/>
+                      </a:pPr>
+                      <a:r>
+                        <a:rPr lang="en-US" sz="1000" b="1" dirty="0">
                           <a:solidFill>
                             <a:srgbClr val="FFFFFF"/>
                           </a:solidFill>
@@ -14799,7 +15277,7 @@
                         </a:rPr>
                         <a:t>PM%</a:t>
                       </a:r>
-                      <a:endParaRPr lang="en-US" sz="1050" dirty="0">
+                      <a:endParaRPr lang="en-US" sz="1000" dirty="0">
                         <a:latin typeface="Malgun Gothic" charset="0"/>
                         <a:ea typeface="Malgun Gothic" charset="0"/>
                         <a:cs typeface="Malgun Gothic" charset="0"/>
@@ -14859,7 +15337,7 @@
                         <a:buNone/>
                       </a:pPr>
                       <a:r>
-                        <a:rPr lang="en-US" sz="1050" dirty="0">
+                        <a:rPr lang="en-US" sz="1000" dirty="0">
                           <a:solidFill>
                             <a:srgbClr val="3F3F3F"/>
                           </a:solidFill>
@@ -14869,7 +15347,7 @@
                         </a:rPr>
                         <a:t>이인구</a:t>
                       </a:r>
-                      <a:endParaRPr lang="en-US" sz="1050" dirty="0">
+                      <a:endParaRPr lang="en-US" sz="1000" dirty="0">
                         <a:latin typeface="Malgun Gothic" charset="0"/>
                         <a:ea typeface="Malgun Gothic" charset="0"/>
                         <a:cs typeface="Malgun Gothic" charset="0"/>
@@ -14927,7 +15405,7 @@
                         <a:buNone/>
                       </a:pPr>
                       <a:r>
-                        <a:rPr lang="en-US" sz="1050" dirty="0">
+                        <a:rPr lang="en-US" sz="1000" dirty="0">
                           <a:solidFill>
                             <a:srgbClr val="3F3F3F"/>
                           </a:solidFill>
@@ -14935,9 +15413,9 @@
                           <a:ea typeface="Malgun Gothic" pitchFamily="34" charset="-122"/>
                           <a:cs typeface="Malgun Gothic" pitchFamily="34" charset="-120"/>
                         </a:rPr>
-                        <a:t>1727</a:t>
+                        <a:t>FS West</a:t>
                       </a:r>
-                      <a:endParaRPr lang="en-US" sz="1050" dirty="0">
+                      <a:endParaRPr lang="en-US" sz="1000" dirty="0">
                         <a:latin typeface="Malgun Gothic" charset="0"/>
                         <a:ea typeface="Malgun Gothic" charset="0"/>
                         <a:cs typeface="Malgun Gothic" charset="0"/>
@@ -14995,7 +15473,7 @@
                         <a:buNone/>
                       </a:pPr>
                       <a:r>
-                        <a:rPr lang="en-US" sz="1050" dirty="0">
+                        <a:rPr lang="en-US" sz="1000" dirty="0">
                           <a:solidFill>
                             <a:srgbClr val="3F3F3F"/>
                           </a:solidFill>
@@ -15003,9 +15481,9 @@
                           <a:ea typeface="Malgun Gothic" pitchFamily="34" charset="-122"/>
                           <a:cs typeface="Malgun Gothic" pitchFamily="34" charset="-120"/>
                         </a:rPr>
-                        <a:t>2760h</a:t>
+                        <a:t>1727</a:t>
                       </a:r>
-                      <a:endParaRPr lang="en-US" sz="1050" dirty="0">
+                      <a:endParaRPr lang="en-US" sz="1000" dirty="0">
                         <a:latin typeface="Malgun Gothic" charset="0"/>
                         <a:ea typeface="Malgun Gothic" charset="0"/>
                         <a:cs typeface="Malgun Gothic" charset="0"/>
@@ -15063,7 +15541,7 @@
                         <a:buNone/>
                       </a:pPr>
                       <a:r>
-                        <a:rPr lang="en-US" sz="1050" dirty="0">
+                        <a:rPr lang="en-US" sz="1000" dirty="0">
                           <a:solidFill>
                             <a:srgbClr val="3F3F3F"/>
                           </a:solidFill>
@@ -15071,9 +15549,9 @@
                           <a:ea typeface="Malgun Gothic" pitchFamily="34" charset="-122"/>
                           <a:cs typeface="Malgun Gothic" pitchFamily="34" charset="-120"/>
                         </a:rPr>
-                        <a:t>44.4%</a:t>
+                        <a:t>2760h</a:t>
                       </a:r>
-                      <a:endParaRPr lang="en-US" sz="1050" dirty="0">
+                      <a:endParaRPr lang="en-US" sz="1000" dirty="0">
                         <a:latin typeface="Malgun Gothic" charset="0"/>
                         <a:ea typeface="Malgun Gothic" charset="0"/>
                         <a:cs typeface="Malgun Gothic" charset="0"/>
@@ -15131,7 +15609,75 @@
                         <a:buNone/>
                       </a:pPr>
                       <a:r>
-                        <a:rPr lang="en-US" sz="1050" dirty="0">
+                        <a:rPr lang="en-US" sz="1000" dirty="0">
+                          <a:solidFill>
+                            <a:srgbClr val="3F3F3F"/>
+                          </a:solidFill>
+                          <a:latin typeface="Malgun Gothic" pitchFamily="34" charset="0"/>
+                          <a:ea typeface="Malgun Gothic" pitchFamily="34" charset="-122"/>
+                          <a:cs typeface="Malgun Gothic" pitchFamily="34" charset="-120"/>
+                        </a:rPr>
+                        <a:t>44.4%</a:t>
+                      </a:r>
+                      <a:endParaRPr lang="en-US" sz="1000" dirty="0">
+                        <a:latin typeface="Malgun Gothic" charset="0"/>
+                        <a:ea typeface="Malgun Gothic" charset="0"/>
+                        <a:cs typeface="Malgun Gothic" charset="0"/>
+                      </a:endParaRPr>
+                    </a:p>
+                  </a:txBody>
+                  <a:tcPr marL="91440" marR="91440" marT="45720" marB="45720" anchor="ctr">
+                    <a:lnL w="9525" cap="flat" cmpd="sng" algn="ctr">
+                      <a:solidFill>
+                        <a:srgbClr val="D9D9D9"/>
+                      </a:solidFill>
+                      <a:prstDash val="solid"/>
+                      <a:round/>
+                      <a:headEnd type="none" w="med" len="med"/>
+                      <a:tailEnd type="none" w="med" len="med"/>
+                    </a:lnL>
+                    <a:lnR w="9525" cap="flat" cmpd="sng" algn="ctr">
+                      <a:solidFill>
+                        <a:srgbClr val="D9D9D9"/>
+                      </a:solidFill>
+                      <a:prstDash val="solid"/>
+                      <a:round/>
+                      <a:headEnd type="none" w="med" len="med"/>
+                      <a:tailEnd type="none" w="med" len="med"/>
+                    </a:lnR>
+                    <a:lnT w="9525" cap="flat" cmpd="sng" algn="ctr">
+                      <a:solidFill>
+                        <a:srgbClr val="D9D9D9"/>
+                      </a:solidFill>
+                      <a:prstDash val="solid"/>
+                      <a:round/>
+                      <a:headEnd type="none" w="med" len="med"/>
+                      <a:tailEnd type="none" w="med" len="med"/>
+                    </a:lnT>
+                    <a:lnB w="9525" cap="flat" cmpd="sng" algn="ctr">
+                      <a:solidFill>
+                        <a:srgbClr val="D9D9D9"/>
+                      </a:solidFill>
+                      <a:prstDash val="solid"/>
+                      <a:round/>
+                      <a:headEnd type="none" w="med" len="med"/>
+                      <a:tailEnd type="none" w="med" len="med"/>
+                    </a:lnB>
+                    <a:solidFill>
+                      <a:srgbClr val="FFFFFF"/>
+                    </a:solidFill>
+                  </a:tcPr>
+                </a:tc>
+                <a:tc>
+                  <a:txBody>
+                    <a:bodyPr/>
+                    <a:lstStyle/>
+                    <a:p>
+                      <a:pPr algn="ctr" indent="0" marL="0">
+                        <a:buNone/>
+                      </a:pPr>
+                      <a:r>
+                        <a:rPr lang="en-US" sz="1000" dirty="0">
                           <a:solidFill>
                             <a:srgbClr val="3F3F3F"/>
                           </a:solidFill>
@@ -15141,7 +15687,7 @@
                         </a:rPr>
                         <a:t>37.6%</a:t>
                       </a:r>
-                      <a:endParaRPr lang="en-US" sz="1050" dirty="0">
+                      <a:endParaRPr lang="en-US" sz="1000" dirty="0">
                         <a:latin typeface="Malgun Gothic" charset="0"/>
                         <a:ea typeface="Malgun Gothic" charset="0"/>
                         <a:cs typeface="Malgun Gothic" charset="0"/>
@@ -15201,7 +15747,7 @@
                         <a:buNone/>
                       </a:pPr>
                       <a:r>
-                        <a:rPr lang="en-US" sz="1050" dirty="0">
+                        <a:rPr lang="en-US" sz="1000" dirty="0">
                           <a:solidFill>
                             <a:srgbClr val="3F3F3F"/>
                           </a:solidFill>
@@ -15211,7 +15757,7 @@
                         </a:rPr>
                         <a:t>조수호</a:t>
                       </a:r>
-                      <a:endParaRPr lang="en-US" sz="1050" dirty="0">
+                      <a:endParaRPr lang="en-US" sz="1000" dirty="0">
                         <a:latin typeface="Malgun Gothic" charset="0"/>
                         <a:ea typeface="Malgun Gothic" charset="0"/>
                         <a:cs typeface="Malgun Gothic" charset="0"/>
@@ -15269,7 +15815,7 @@
                         <a:buNone/>
                       </a:pPr>
                       <a:r>
-                        <a:rPr lang="en-US" sz="1050" dirty="0">
+                        <a:rPr lang="en-US" sz="1000" dirty="0">
                           <a:solidFill>
                             <a:srgbClr val="3F3F3F"/>
                           </a:solidFill>
@@ -15277,9 +15823,9 @@
                           <a:ea typeface="Malgun Gothic" pitchFamily="34" charset="-122"/>
                           <a:cs typeface="Malgun Gothic" pitchFamily="34" charset="-120"/>
                         </a:rPr>
-                        <a:t>1469</a:t>
+                        <a:t>FS South</a:t>
                       </a:r>
-                      <a:endParaRPr lang="en-US" sz="1050" dirty="0">
+                      <a:endParaRPr lang="en-US" sz="1000" dirty="0">
                         <a:latin typeface="Malgun Gothic" charset="0"/>
                         <a:ea typeface="Malgun Gothic" charset="0"/>
                         <a:cs typeface="Malgun Gothic" charset="0"/>
@@ -15337,7 +15883,7 @@
                         <a:buNone/>
                       </a:pPr>
                       <a:r>
-                        <a:rPr lang="en-US" sz="1050" dirty="0">
+                        <a:rPr lang="en-US" sz="1000" dirty="0">
                           <a:solidFill>
                             <a:srgbClr val="3F3F3F"/>
                           </a:solidFill>
@@ -15345,9 +15891,9 @@
                           <a:ea typeface="Malgun Gothic" pitchFamily="34" charset="-122"/>
                           <a:cs typeface="Malgun Gothic" pitchFamily="34" charset="-120"/>
                         </a:rPr>
-                        <a:t>2081h</a:t>
+                        <a:t>1469</a:t>
                       </a:r>
-                      <a:endParaRPr lang="en-US" sz="1050" dirty="0">
+                      <a:endParaRPr lang="en-US" sz="1000" dirty="0">
                         <a:latin typeface="Malgun Gothic" charset="0"/>
                         <a:ea typeface="Malgun Gothic" charset="0"/>
                         <a:cs typeface="Malgun Gothic" charset="0"/>
@@ -15405,7 +15951,7 @@
                         <a:buNone/>
                       </a:pPr>
                       <a:r>
-                        <a:rPr lang="en-US" sz="1050" dirty="0">
+                        <a:rPr lang="en-US" sz="1000" dirty="0">
                           <a:solidFill>
                             <a:srgbClr val="3F3F3F"/>
                           </a:solidFill>
@@ -15413,9 +15959,9 @@
                           <a:ea typeface="Malgun Gothic" pitchFamily="34" charset="-122"/>
                           <a:cs typeface="Malgun Gothic" pitchFamily="34" charset="-120"/>
                         </a:rPr>
-                        <a:t>19.7%</a:t>
+                        <a:t>2081h</a:t>
                       </a:r>
-                      <a:endParaRPr lang="en-US" sz="1050" dirty="0">
+                      <a:endParaRPr lang="en-US" sz="1000" dirty="0">
                         <a:latin typeface="Malgun Gothic" charset="0"/>
                         <a:ea typeface="Malgun Gothic" charset="0"/>
                         <a:cs typeface="Malgun Gothic" charset="0"/>
@@ -15473,7 +16019,75 @@
                         <a:buNone/>
                       </a:pPr>
                       <a:r>
-                        <a:rPr lang="en-US" sz="1050" dirty="0">
+                        <a:rPr lang="en-US" sz="1000" dirty="0">
+                          <a:solidFill>
+                            <a:srgbClr val="3F3F3F"/>
+                          </a:solidFill>
+                          <a:latin typeface="Malgun Gothic" pitchFamily="34" charset="0"/>
+                          <a:ea typeface="Malgun Gothic" pitchFamily="34" charset="-122"/>
+                          <a:cs typeface="Malgun Gothic" pitchFamily="34" charset="-120"/>
+                        </a:rPr>
+                        <a:t>19.7%</a:t>
+                      </a:r>
+                      <a:endParaRPr lang="en-US" sz="1000" dirty="0">
+                        <a:latin typeface="Malgun Gothic" charset="0"/>
+                        <a:ea typeface="Malgun Gothic" charset="0"/>
+                        <a:cs typeface="Malgun Gothic" charset="0"/>
+                      </a:endParaRPr>
+                    </a:p>
+                  </a:txBody>
+                  <a:tcPr marL="91440" marR="91440" marT="45720" marB="45720" anchor="ctr">
+                    <a:lnL w="9525" cap="flat" cmpd="sng" algn="ctr">
+                      <a:solidFill>
+                        <a:srgbClr val="D9D9D9"/>
+                      </a:solidFill>
+                      <a:prstDash val="solid"/>
+                      <a:round/>
+                      <a:headEnd type="none" w="med" len="med"/>
+                      <a:tailEnd type="none" w="med" len="med"/>
+                    </a:lnL>
+                    <a:lnR w="9525" cap="flat" cmpd="sng" algn="ctr">
+                      <a:solidFill>
+                        <a:srgbClr val="D9D9D9"/>
+                      </a:solidFill>
+                      <a:prstDash val="solid"/>
+                      <a:round/>
+                      <a:headEnd type="none" w="med" len="med"/>
+                      <a:tailEnd type="none" w="med" len="med"/>
+                    </a:lnR>
+                    <a:lnT w="9525" cap="flat" cmpd="sng" algn="ctr">
+                      <a:solidFill>
+                        <a:srgbClr val="D9D9D9"/>
+                      </a:solidFill>
+                      <a:prstDash val="solid"/>
+                      <a:round/>
+                      <a:headEnd type="none" w="med" len="med"/>
+                      <a:tailEnd type="none" w="med" len="med"/>
+                    </a:lnT>
+                    <a:lnB w="9525" cap="flat" cmpd="sng" algn="ctr">
+                      <a:solidFill>
+                        <a:srgbClr val="D9D9D9"/>
+                      </a:solidFill>
+                      <a:prstDash val="solid"/>
+                      <a:round/>
+                      <a:headEnd type="none" w="med" len="med"/>
+                      <a:tailEnd type="none" w="med" len="med"/>
+                    </a:lnB>
+                    <a:solidFill>
+                      <a:srgbClr val="FFFFFF"/>
+                    </a:solidFill>
+                  </a:tcPr>
+                </a:tc>
+                <a:tc>
+                  <a:txBody>
+                    <a:bodyPr/>
+                    <a:lstStyle/>
+                    <a:p>
+                      <a:pPr algn="ctr" indent="0" marL="0">
+                        <a:buNone/>
+                      </a:pPr>
+                      <a:r>
+                        <a:rPr lang="en-US" sz="1000" dirty="0">
                           <a:solidFill>
                             <a:srgbClr val="3F3F3F"/>
                           </a:solidFill>
@@ -15483,7 +16097,7 @@
                         </a:rPr>
                         <a:t>49.4%</a:t>
                       </a:r>
-                      <a:endParaRPr lang="en-US" sz="1050" dirty="0">
+                      <a:endParaRPr lang="en-US" sz="1000" dirty="0">
                         <a:latin typeface="Malgun Gothic" charset="0"/>
                         <a:ea typeface="Malgun Gothic" charset="0"/>
                         <a:cs typeface="Malgun Gothic" charset="0"/>
@@ -15543,7 +16157,7 @@
                         <a:buNone/>
                       </a:pPr>
                       <a:r>
-                        <a:rPr lang="en-US" sz="1050" dirty="0">
+                        <a:rPr lang="en-US" sz="1000" dirty="0">
                           <a:solidFill>
                             <a:srgbClr val="3F3F3F"/>
                           </a:solidFill>
@@ -15553,7 +16167,7 @@
                         </a:rPr>
                         <a:t>김태현</a:t>
                       </a:r>
-                      <a:endParaRPr lang="en-US" sz="1050" dirty="0">
+                      <a:endParaRPr lang="en-US" sz="1000" dirty="0">
                         <a:latin typeface="Malgun Gothic" charset="0"/>
                         <a:ea typeface="Malgun Gothic" charset="0"/>
                         <a:cs typeface="Malgun Gothic" charset="0"/>
@@ -15611,7 +16225,7 @@
                         <a:buNone/>
                       </a:pPr>
                       <a:r>
-                        <a:rPr lang="en-US" sz="1050" dirty="0">
+                        <a:rPr lang="en-US" sz="1000" dirty="0">
                           <a:solidFill>
                             <a:srgbClr val="3F3F3F"/>
                           </a:solidFill>
@@ -15619,9 +16233,9 @@
                           <a:ea typeface="Malgun Gothic" pitchFamily="34" charset="-122"/>
                           <a:cs typeface="Malgun Gothic" pitchFamily="34" charset="-120"/>
                         </a:rPr>
-                        <a:t>1409</a:t>
+                        <a:t>FS South</a:t>
                       </a:r>
-                      <a:endParaRPr lang="en-US" sz="1050" dirty="0">
+                      <a:endParaRPr lang="en-US" sz="1000" dirty="0">
                         <a:latin typeface="Malgun Gothic" charset="0"/>
                         <a:ea typeface="Malgun Gothic" charset="0"/>
                         <a:cs typeface="Malgun Gothic" charset="0"/>
@@ -15679,7 +16293,7 @@
                         <a:buNone/>
                       </a:pPr>
                       <a:r>
-                        <a:rPr lang="en-US" sz="1050" dirty="0">
+                        <a:rPr lang="en-US" sz="1000" dirty="0">
                           <a:solidFill>
                             <a:srgbClr val="3F3F3F"/>
                           </a:solidFill>
@@ -15687,9 +16301,9 @@
                           <a:ea typeface="Malgun Gothic" pitchFamily="34" charset="-122"/>
                           <a:cs typeface="Malgun Gothic" pitchFamily="34" charset="-120"/>
                         </a:rPr>
-                        <a:t>2101h</a:t>
+                        <a:t>1409</a:t>
                       </a:r>
-                      <a:endParaRPr lang="en-US" sz="1050" dirty="0">
+                      <a:endParaRPr lang="en-US" sz="1000" dirty="0">
                         <a:latin typeface="Malgun Gothic" charset="0"/>
                         <a:ea typeface="Malgun Gothic" charset="0"/>
                         <a:cs typeface="Malgun Gothic" charset="0"/>
@@ -15747,7 +16361,7 @@
                         <a:buNone/>
                       </a:pPr>
                       <a:r>
-                        <a:rPr lang="en-US" sz="1050" dirty="0">
+                        <a:rPr lang="en-US" sz="1000" dirty="0">
                           <a:solidFill>
                             <a:srgbClr val="3F3F3F"/>
                           </a:solidFill>
@@ -15755,9 +16369,9 @@
                           <a:ea typeface="Malgun Gothic" pitchFamily="34" charset="-122"/>
                           <a:cs typeface="Malgun Gothic" pitchFamily="34" charset="-120"/>
                         </a:rPr>
-                        <a:t>29.7%</a:t>
+                        <a:t>2101h</a:t>
                       </a:r>
-                      <a:endParaRPr lang="en-US" sz="1050" dirty="0">
+                      <a:endParaRPr lang="en-US" sz="1000" dirty="0">
                         <a:latin typeface="Malgun Gothic" charset="0"/>
                         <a:ea typeface="Malgun Gothic" charset="0"/>
                         <a:cs typeface="Malgun Gothic" charset="0"/>
@@ -15815,7 +16429,75 @@
                         <a:buNone/>
                       </a:pPr>
                       <a:r>
-                        <a:rPr lang="en-US" sz="1050" dirty="0">
+                        <a:rPr lang="en-US" sz="1000" dirty="0">
+                          <a:solidFill>
+                            <a:srgbClr val="3F3F3F"/>
+                          </a:solidFill>
+                          <a:latin typeface="Malgun Gothic" pitchFamily="34" charset="0"/>
+                          <a:ea typeface="Malgun Gothic" pitchFamily="34" charset="-122"/>
+                          <a:cs typeface="Malgun Gothic" pitchFamily="34" charset="-120"/>
+                        </a:rPr>
+                        <a:t>29.7%</a:t>
+                      </a:r>
+                      <a:endParaRPr lang="en-US" sz="1000" dirty="0">
+                        <a:latin typeface="Malgun Gothic" charset="0"/>
+                        <a:ea typeface="Malgun Gothic" charset="0"/>
+                        <a:cs typeface="Malgun Gothic" charset="0"/>
+                      </a:endParaRPr>
+                    </a:p>
+                  </a:txBody>
+                  <a:tcPr marL="91440" marR="91440" marT="45720" marB="45720" anchor="ctr">
+                    <a:lnL w="9525" cap="flat" cmpd="sng" algn="ctr">
+                      <a:solidFill>
+                        <a:srgbClr val="D9D9D9"/>
+                      </a:solidFill>
+                      <a:prstDash val="solid"/>
+                      <a:round/>
+                      <a:headEnd type="none" w="med" len="med"/>
+                      <a:tailEnd type="none" w="med" len="med"/>
+                    </a:lnL>
+                    <a:lnR w="9525" cap="flat" cmpd="sng" algn="ctr">
+                      <a:solidFill>
+                        <a:srgbClr val="D9D9D9"/>
+                      </a:solidFill>
+                      <a:prstDash val="solid"/>
+                      <a:round/>
+                      <a:headEnd type="none" w="med" len="med"/>
+                      <a:tailEnd type="none" w="med" len="med"/>
+                    </a:lnR>
+                    <a:lnT w="9525" cap="flat" cmpd="sng" algn="ctr">
+                      <a:solidFill>
+                        <a:srgbClr val="D9D9D9"/>
+                      </a:solidFill>
+                      <a:prstDash val="solid"/>
+                      <a:round/>
+                      <a:headEnd type="none" w="med" len="med"/>
+                      <a:tailEnd type="none" w="med" len="med"/>
+                    </a:lnT>
+                    <a:lnB w="9525" cap="flat" cmpd="sng" algn="ctr">
+                      <a:solidFill>
+                        <a:srgbClr val="D9D9D9"/>
+                      </a:solidFill>
+                      <a:prstDash val="solid"/>
+                      <a:round/>
+                      <a:headEnd type="none" w="med" len="med"/>
+                      <a:tailEnd type="none" w="med" len="med"/>
+                    </a:lnB>
+                    <a:solidFill>
+                      <a:srgbClr val="FFFFFF"/>
+                    </a:solidFill>
+                  </a:tcPr>
+                </a:tc>
+                <a:tc>
+                  <a:txBody>
+                    <a:bodyPr/>
+                    <a:lstStyle/>
+                    <a:p>
+                      <a:pPr algn="ctr" indent="0" marL="0">
+                        <a:buNone/>
+                      </a:pPr>
+                      <a:r>
+                        <a:rPr lang="en-US" sz="1000" dirty="0">
                           <a:solidFill>
                             <a:srgbClr val="3F3F3F"/>
                           </a:solidFill>
@@ -15825,7 +16507,7 @@
                         </a:rPr>
                         <a:t>37.2%</a:t>
                       </a:r>
-                      <a:endParaRPr lang="en-US" sz="1050" dirty="0">
+                      <a:endParaRPr lang="en-US" sz="1000" dirty="0">
                         <a:latin typeface="Malgun Gothic" charset="0"/>
                         <a:ea typeface="Malgun Gothic" charset="0"/>
                         <a:cs typeface="Malgun Gothic" charset="0"/>
@@ -15885,7 +16567,7 @@
                         <a:buNone/>
                       </a:pPr>
                       <a:r>
-                        <a:rPr lang="en-US" sz="1050" dirty="0">
+                        <a:rPr lang="en-US" sz="1000" dirty="0">
                           <a:solidFill>
                             <a:srgbClr val="3F3F3F"/>
                           </a:solidFill>
@@ -15895,7 +16577,7 @@
                         </a:rPr>
                         <a:t>박석영</a:t>
                       </a:r>
-                      <a:endParaRPr lang="en-US" sz="1050" dirty="0">
+                      <a:endParaRPr lang="en-US" sz="1000" dirty="0">
                         <a:latin typeface="Malgun Gothic" charset="0"/>
                         <a:ea typeface="Malgun Gothic" charset="0"/>
                         <a:cs typeface="Malgun Gothic" charset="0"/>
@@ -15953,7 +16635,7 @@
                         <a:buNone/>
                       </a:pPr>
                       <a:r>
-                        <a:rPr lang="en-US" sz="1050" dirty="0">
+                        <a:rPr lang="en-US" sz="1000" dirty="0">
                           <a:solidFill>
                             <a:srgbClr val="3F3F3F"/>
                           </a:solidFill>
@@ -15961,9 +16643,9 @@
                           <a:ea typeface="Malgun Gothic" pitchFamily="34" charset="-122"/>
                           <a:cs typeface="Malgun Gothic" pitchFamily="34" charset="-120"/>
                         </a:rPr>
-                        <a:t>1397</a:t>
+                        <a:t>FS South</a:t>
                       </a:r>
-                      <a:endParaRPr lang="en-US" sz="1050" dirty="0">
+                      <a:endParaRPr lang="en-US" sz="1000" dirty="0">
                         <a:latin typeface="Malgun Gothic" charset="0"/>
                         <a:ea typeface="Malgun Gothic" charset="0"/>
                         <a:cs typeface="Malgun Gothic" charset="0"/>
@@ -16021,7 +16703,7 @@
                         <a:buNone/>
                       </a:pPr>
                       <a:r>
-                        <a:rPr lang="en-US" sz="1050" dirty="0">
+                        <a:rPr lang="en-US" sz="1000" dirty="0">
                           <a:solidFill>
                             <a:srgbClr val="3F3F3F"/>
                           </a:solidFill>
@@ -16029,9 +16711,9 @@
                           <a:ea typeface="Malgun Gothic" pitchFamily="34" charset="-122"/>
                           <a:cs typeface="Malgun Gothic" pitchFamily="34" charset="-120"/>
                         </a:rPr>
-                        <a:t>2005h</a:t>
+                        <a:t>1397</a:t>
                       </a:r>
-                      <a:endParaRPr lang="en-US" sz="1050" dirty="0">
+                      <a:endParaRPr lang="en-US" sz="1000" dirty="0">
                         <a:latin typeface="Malgun Gothic" charset="0"/>
                         <a:ea typeface="Malgun Gothic" charset="0"/>
                         <a:cs typeface="Malgun Gothic" charset="0"/>
@@ -16089,7 +16771,7 @@
                         <a:buNone/>
                       </a:pPr>
                       <a:r>
-                        <a:rPr lang="en-US" sz="1050" dirty="0">
+                        <a:rPr lang="en-US" sz="1000" dirty="0">
                           <a:solidFill>
                             <a:srgbClr val="3F3F3F"/>
                           </a:solidFill>
@@ -16097,9 +16779,9 @@
                           <a:ea typeface="Malgun Gothic" pitchFamily="34" charset="-122"/>
                           <a:cs typeface="Malgun Gothic" pitchFamily="34" charset="-120"/>
                         </a:rPr>
-                        <a:t>31.6%</a:t>
+                        <a:t>2005h</a:t>
                       </a:r>
-                      <a:endParaRPr lang="en-US" sz="1050" dirty="0">
+                      <a:endParaRPr lang="en-US" sz="1000" dirty="0">
                         <a:latin typeface="Malgun Gothic" charset="0"/>
                         <a:ea typeface="Malgun Gothic" charset="0"/>
                         <a:cs typeface="Malgun Gothic" charset="0"/>
@@ -16157,7 +16839,75 @@
                         <a:buNone/>
                       </a:pPr>
                       <a:r>
-                        <a:rPr lang="en-US" sz="1050" dirty="0">
+                        <a:rPr lang="en-US" sz="1000" dirty="0">
+                          <a:solidFill>
+                            <a:srgbClr val="3F3F3F"/>
+                          </a:solidFill>
+                          <a:latin typeface="Malgun Gothic" pitchFamily="34" charset="0"/>
+                          <a:ea typeface="Malgun Gothic" pitchFamily="34" charset="-122"/>
+                          <a:cs typeface="Malgun Gothic" pitchFamily="34" charset="-120"/>
+                        </a:rPr>
+                        <a:t>31.6%</a:t>
+                      </a:r>
+                      <a:endParaRPr lang="en-US" sz="1000" dirty="0">
+                        <a:latin typeface="Malgun Gothic" charset="0"/>
+                        <a:ea typeface="Malgun Gothic" charset="0"/>
+                        <a:cs typeface="Malgun Gothic" charset="0"/>
+                      </a:endParaRPr>
+                    </a:p>
+                  </a:txBody>
+                  <a:tcPr marL="91440" marR="91440" marT="45720" marB="45720" anchor="ctr">
+                    <a:lnL w="9525" cap="flat" cmpd="sng" algn="ctr">
+                      <a:solidFill>
+                        <a:srgbClr val="D9D9D9"/>
+                      </a:solidFill>
+                      <a:prstDash val="solid"/>
+                      <a:round/>
+                      <a:headEnd type="none" w="med" len="med"/>
+                      <a:tailEnd type="none" w="med" len="med"/>
+                    </a:lnL>
+                    <a:lnR w="9525" cap="flat" cmpd="sng" algn="ctr">
+                      <a:solidFill>
+                        <a:srgbClr val="D9D9D9"/>
+                      </a:solidFill>
+                      <a:prstDash val="solid"/>
+                      <a:round/>
+                      <a:headEnd type="none" w="med" len="med"/>
+                      <a:tailEnd type="none" w="med" len="med"/>
+                    </a:lnR>
+                    <a:lnT w="9525" cap="flat" cmpd="sng" algn="ctr">
+                      <a:solidFill>
+                        <a:srgbClr val="D9D9D9"/>
+                      </a:solidFill>
+                      <a:prstDash val="solid"/>
+                      <a:round/>
+                      <a:headEnd type="none" w="med" len="med"/>
+                      <a:tailEnd type="none" w="med" len="med"/>
+                    </a:lnT>
+                    <a:lnB w="9525" cap="flat" cmpd="sng" algn="ctr">
+                      <a:solidFill>
+                        <a:srgbClr val="D9D9D9"/>
+                      </a:solidFill>
+                      <a:prstDash val="solid"/>
+                      <a:round/>
+                      <a:headEnd type="none" w="med" len="med"/>
+                      <a:tailEnd type="none" w="med" len="med"/>
+                    </a:lnB>
+                    <a:solidFill>
+                      <a:srgbClr val="FFFFFF"/>
+                    </a:solidFill>
+                  </a:tcPr>
+                </a:tc>
+                <a:tc>
+                  <a:txBody>
+                    <a:bodyPr/>
+                    <a:lstStyle/>
+                    <a:p>
+                      <a:pPr algn="ctr" indent="0" marL="0">
+                        <a:buNone/>
+                      </a:pPr>
+                      <a:r>
+                        <a:rPr lang="en-US" sz="1000" dirty="0">
                           <a:solidFill>
                             <a:srgbClr val="3F3F3F"/>
                           </a:solidFill>
@@ -16167,7 +16917,7 @@
                         </a:rPr>
                         <a:t>49.9%</a:t>
                       </a:r>
-                      <a:endParaRPr lang="en-US" sz="1050" dirty="0">
+                      <a:endParaRPr lang="en-US" sz="1000" dirty="0">
                         <a:latin typeface="Malgun Gothic" charset="0"/>
                         <a:ea typeface="Malgun Gothic" charset="0"/>
                         <a:cs typeface="Malgun Gothic" charset="0"/>
@@ -16227,7 +16977,7 @@
                         <a:buNone/>
                       </a:pPr>
                       <a:r>
-                        <a:rPr lang="en-US" sz="1050" dirty="0">
+                        <a:rPr lang="en-US" sz="1000" dirty="0">
                           <a:solidFill>
                             <a:srgbClr val="3F3F3F"/>
                           </a:solidFill>
@@ -16237,7 +16987,7 @@
                         </a:rPr>
                         <a:t>이준민</a:t>
                       </a:r>
-                      <a:endParaRPr lang="en-US" sz="1050" dirty="0">
+                      <a:endParaRPr lang="en-US" sz="1000" dirty="0">
                         <a:latin typeface="Malgun Gothic" charset="0"/>
                         <a:ea typeface="Malgun Gothic" charset="0"/>
                         <a:cs typeface="Malgun Gothic" charset="0"/>
@@ -16295,7 +17045,7 @@
                         <a:buNone/>
                       </a:pPr>
                       <a:r>
-                        <a:rPr lang="en-US" sz="1050" dirty="0">
+                        <a:rPr lang="en-US" sz="1000" dirty="0">
                           <a:solidFill>
                             <a:srgbClr val="3F3F3F"/>
                           </a:solidFill>
@@ -16303,9 +17053,9 @@
                           <a:ea typeface="Malgun Gothic" pitchFamily="34" charset="-122"/>
                           <a:cs typeface="Malgun Gothic" pitchFamily="34" charset="-120"/>
                         </a:rPr>
-                        <a:t>1391</a:t>
+                        <a:t>FS South</a:t>
                       </a:r>
-                      <a:endParaRPr lang="en-US" sz="1050" dirty="0">
+                      <a:endParaRPr lang="en-US" sz="1000" dirty="0">
                         <a:latin typeface="Malgun Gothic" charset="0"/>
                         <a:ea typeface="Malgun Gothic" charset="0"/>
                         <a:cs typeface="Malgun Gothic" charset="0"/>
@@ -16363,7 +17113,7 @@
                         <a:buNone/>
                       </a:pPr>
                       <a:r>
-                        <a:rPr lang="en-US" sz="1050" dirty="0">
+                        <a:rPr lang="en-US" sz="1000" dirty="0">
                           <a:solidFill>
                             <a:srgbClr val="3F3F3F"/>
                           </a:solidFill>
@@ -16371,9 +17121,9 @@
                           <a:ea typeface="Malgun Gothic" pitchFamily="34" charset="-122"/>
                           <a:cs typeface="Malgun Gothic" pitchFamily="34" charset="-120"/>
                         </a:rPr>
-                        <a:t>2713h</a:t>
+                        <a:t>1391</a:t>
                       </a:r>
-                      <a:endParaRPr lang="en-US" sz="1050" dirty="0">
+                      <a:endParaRPr lang="en-US" sz="1000" dirty="0">
                         <a:latin typeface="Malgun Gothic" charset="0"/>
                         <a:ea typeface="Malgun Gothic" charset="0"/>
                         <a:cs typeface="Malgun Gothic" charset="0"/>
@@ -16431,7 +17181,7 @@
                         <a:buNone/>
                       </a:pPr>
                       <a:r>
-                        <a:rPr lang="en-US" sz="1050" dirty="0">
+                        <a:rPr lang="en-US" sz="1000" dirty="0">
                           <a:solidFill>
                             <a:srgbClr val="3F3F3F"/>
                           </a:solidFill>
@@ -16439,9 +17189,9 @@
                           <a:ea typeface="Malgun Gothic" pitchFamily="34" charset="-122"/>
                           <a:cs typeface="Malgun Gothic" pitchFamily="34" charset="-120"/>
                         </a:rPr>
-                        <a:t>30.9%</a:t>
+                        <a:t>2713h</a:t>
                       </a:r>
-                      <a:endParaRPr lang="en-US" sz="1050" dirty="0">
+                      <a:endParaRPr lang="en-US" sz="1000" dirty="0">
                         <a:latin typeface="Malgun Gothic" charset="0"/>
                         <a:ea typeface="Malgun Gothic" charset="0"/>
                         <a:cs typeface="Malgun Gothic" charset="0"/>
@@ -16499,7 +17249,75 @@
                         <a:buNone/>
                       </a:pPr>
                       <a:r>
-                        <a:rPr lang="en-US" sz="1050" dirty="0">
+                        <a:rPr lang="en-US" sz="1000" dirty="0">
+                          <a:solidFill>
+                            <a:srgbClr val="3F3F3F"/>
+                          </a:solidFill>
+                          <a:latin typeface="Malgun Gothic" pitchFamily="34" charset="0"/>
+                          <a:ea typeface="Malgun Gothic" pitchFamily="34" charset="-122"/>
+                          <a:cs typeface="Malgun Gothic" pitchFamily="34" charset="-120"/>
+                        </a:rPr>
+                        <a:t>30.9%</a:t>
+                      </a:r>
+                      <a:endParaRPr lang="en-US" sz="1000" dirty="0">
+                        <a:latin typeface="Malgun Gothic" charset="0"/>
+                        <a:ea typeface="Malgun Gothic" charset="0"/>
+                        <a:cs typeface="Malgun Gothic" charset="0"/>
+                      </a:endParaRPr>
+                    </a:p>
+                  </a:txBody>
+                  <a:tcPr marL="91440" marR="91440" marT="45720" marB="45720" anchor="ctr">
+                    <a:lnL w="9525" cap="flat" cmpd="sng" algn="ctr">
+                      <a:solidFill>
+                        <a:srgbClr val="D9D9D9"/>
+                      </a:solidFill>
+                      <a:prstDash val="solid"/>
+                      <a:round/>
+                      <a:headEnd type="none" w="med" len="med"/>
+                      <a:tailEnd type="none" w="med" len="med"/>
+                    </a:lnL>
+                    <a:lnR w="9525" cap="flat" cmpd="sng" algn="ctr">
+                      <a:solidFill>
+                        <a:srgbClr val="D9D9D9"/>
+                      </a:solidFill>
+                      <a:prstDash val="solid"/>
+                      <a:round/>
+                      <a:headEnd type="none" w="med" len="med"/>
+                      <a:tailEnd type="none" w="med" len="med"/>
+                    </a:lnR>
+                    <a:lnT w="9525" cap="flat" cmpd="sng" algn="ctr">
+                      <a:solidFill>
+                        <a:srgbClr val="D9D9D9"/>
+                      </a:solidFill>
+                      <a:prstDash val="solid"/>
+                      <a:round/>
+                      <a:headEnd type="none" w="med" len="med"/>
+                      <a:tailEnd type="none" w="med" len="med"/>
+                    </a:lnT>
+                    <a:lnB w="9525" cap="flat" cmpd="sng" algn="ctr">
+                      <a:solidFill>
+                        <a:srgbClr val="D9D9D9"/>
+                      </a:solidFill>
+                      <a:prstDash val="solid"/>
+                      <a:round/>
+                      <a:headEnd type="none" w="med" len="med"/>
+                      <a:tailEnd type="none" w="med" len="med"/>
+                    </a:lnB>
+                    <a:solidFill>
+                      <a:srgbClr val="FFFFFF"/>
+                    </a:solidFill>
+                  </a:tcPr>
+                </a:tc>
+                <a:tc>
+                  <a:txBody>
+                    <a:bodyPr/>
+                    <a:lstStyle/>
+                    <a:p>
+                      <a:pPr algn="ctr" indent="0" marL="0">
+                        <a:buNone/>
+                      </a:pPr>
+                      <a:r>
+                        <a:rPr lang="en-US" sz="1000" dirty="0">
                           <a:solidFill>
                             <a:srgbClr val="3F3F3F"/>
                           </a:solidFill>
@@ -16509,7 +17327,7 @@
                         </a:rPr>
                         <a:t>45%</a:t>
                       </a:r>
-                      <a:endParaRPr lang="en-US" sz="1050" dirty="0">
+                      <a:endParaRPr lang="en-US" sz="1000" dirty="0">
                         <a:latin typeface="Malgun Gothic" charset="0"/>
                         <a:ea typeface="Malgun Gothic" charset="0"/>
                         <a:cs typeface="Malgun Gothic" charset="0"/>

--- a/reports/FSG_월간서비스보고_202607/FSG_월간서비스보고_202607.pptx
+++ b/reports/FSG_월간서비스보고_202607/FSG_월간서비스보고_202607.pptx
@@ -117,6 +117,327 @@
     </a:lvl9pPr>
   </p:defaultTextStyle>
 </p:presentation>
+</file>
+
+<file path=ppt/charts/chart1.xml><?xml version="1.0" encoding="utf-8"?>
+<c:chartSpace xmlns:c="http://schemas.openxmlformats.org/drawingml/2006/chart" xmlns:a="http://schemas.openxmlformats.org/drawingml/2006/main" xmlns:r="http://schemas.openxmlformats.org/officeDocument/2006/relationships">
+  <c:date1904 val="0"/>
+  <c:roundedCorners val="1"/>
+  <c:chart>
+    <c:autoTitleDeleted val="1"/>
+    <c:plotArea>
+      <c:layout/>
+      <c:lineChart>
+        <c:varyColors val="0"/>
+        <c:ser>
+          <c:idx val="0"/>
+          <c:order val="0"/>
+          <c:tx>
+            <c:strRef>
+              <c:f>Sheet1!$B$1</c:f>
+              <c:strCache>
+                <c:ptCount val="1"/>
+                <c:pt idx="0">
+                  <c:v>SLA 준수율</c:v>
+                </c:pt>
+              </c:strCache>
+            </c:strRef>
+          </c:tx>
+          <c:spPr>
+            <a:solidFill>
+              <a:srgbClr val="005BAC"/>
+            </a:solidFill>
+            <a:ln w="31750" cap="flat">
+              <a:solidFill>
+                <a:srgbClr val="005BAC"/>
+              </a:solidFill>
+              <a:prstDash val="solid"/>
+              <a:round/>
+            </a:ln>
+            <a:effectLst/>
+          </c:spPr>
+          <c:invertIfNegative val="0"/>
+          <c:dLbls>
+            <c:numFmt formatCode="#,##0" sourceLinked="0"/>
+            <c:txPr>
+              <a:bodyPr/>
+              <a:lstStyle/>
+              <a:p>
+                <a:pPr>
+                  <a:defRPr b="0" i="0" strike="noStrike" sz="800" u="none">
+                    <a:solidFill>
+                      <a:srgbClr val="005BAC"/>
+                    </a:solidFill>
+                    <a:latin typeface="Arial"/>
+                  </a:defRPr>
+                </a:pPr>
+              </a:p>
+            </c:txPr>
+            <c:dLblPos val="t"/>
+            <c:showLegendKey val="0"/>
+            <c:showVal val="1"/>
+            <c:showCatName val="0"/>
+            <c:showSerName val="0"/>
+            <c:showPercent val="0"/>
+            <c:showBubbleSize val="0"/>
+            <c:showLeaderLines val="0"/>
+          </c:dLbls>
+          <c:marker>
+            <c:symbol val="circle"/>
+            <c:size val="5"/>
+            <c:spPr>
+              <a:solidFill>
+                <a:srgbClr val="005BAC"/>
+              </a:solidFill>
+              <a:ln w="9525" cap="flat">
+                <a:solidFill>
+                  <a:srgbClr val="005BAC"/>
+                </a:solidFill>
+                <a:prstDash val="solid"/>
+                <a:round/>
+              </a:ln>
+              <a:effectLst/>
+            </c:spPr>
+          </c:marker>
+          <c:cat>
+            <c:multiLvlStrRef>
+              <c:f>Sheet1!$A$2:$A$13</c:f>
+              <c:multiLvlStrCache>
+                <c:ptCount val="12"/>
+                <c:lvl>
+                  <c:pt idx="0">
+                    <c:v>25-08</c:v>
+                  </c:pt>
+                  <c:pt idx="1">
+                    <c:v>25-09</c:v>
+                  </c:pt>
+                  <c:pt idx="2">
+                    <c:v>25-10</c:v>
+                  </c:pt>
+                  <c:pt idx="3">
+                    <c:v>25-11</c:v>
+                  </c:pt>
+                  <c:pt idx="4">
+                    <c:v>25-12</c:v>
+                  </c:pt>
+                  <c:pt idx="5">
+                    <c:v>26-01</c:v>
+                  </c:pt>
+                  <c:pt idx="6">
+                    <c:v>26-02</c:v>
+                  </c:pt>
+                  <c:pt idx="7">
+                    <c:v>26-03</c:v>
+                  </c:pt>
+                  <c:pt idx="8">
+                    <c:v>26-04</c:v>
+                  </c:pt>
+                  <c:pt idx="9">
+                    <c:v>26-05</c:v>
+                  </c:pt>
+                  <c:pt idx="10">
+                    <c:v>26-06</c:v>
+                  </c:pt>
+                  <c:pt idx="11">
+                    <c:v>26-07*</c:v>
+                  </c:pt>
+                </c:lvl>
+              </c:multiLvlStrCache>
+            </c:multiLvlStrRef>
+          </c:cat>
+          <c:val>
+            <c:numRef>
+              <c:f>Sheet1!$B$2:$B$13</c:f>
+              <c:numCache>
+                <c:formatCode>General</c:formatCode>
+                <c:ptCount val="12"/>
+                <c:pt idx="0">
+                  <c:v>21.9</c:v>
+                </c:pt>
+                <c:pt idx="1">
+                  <c:v>20.5</c:v>
+                </c:pt>
+                <c:pt idx="2">
+                  <c:v>18.6</c:v>
+                </c:pt>
+                <c:pt idx="3">
+                  <c:v>25.8</c:v>
+                </c:pt>
+                <c:pt idx="4">
+                  <c:v>23.2</c:v>
+                </c:pt>
+                <c:pt idx="5">
+                  <c:v>30</c:v>
+                </c:pt>
+                <c:pt idx="6">
+                  <c:v>11.9</c:v>
+                </c:pt>
+                <c:pt idx="7">
+                  <c:v>37.6</c:v>
+                </c:pt>
+                <c:pt idx="8">
+                  <c:v>39.3</c:v>
+                </c:pt>
+                <c:pt idx="9">
+                  <c:v>31.3</c:v>
+                </c:pt>
+                <c:pt idx="10">
+                  <c:v>28</c:v>
+                </c:pt>
+                <c:pt idx="11">
+                  <c:v>44.1</c:v>
+                </c:pt>
+              </c:numCache>
+            </c:numRef>
+          </c:val>
+          <c:smooth val="0"/>
+        </c:ser>
+        <c:dLbls>
+          <c:numFmt formatCode="#,##0" sourceLinked="0"/>
+          <c:txPr>
+            <a:bodyPr/>
+            <a:lstStyle/>
+            <a:p>
+              <a:pPr>
+                <a:defRPr b="0" i="0" strike="noStrike" sz="800" u="none">
+                  <a:solidFill>
+                    <a:srgbClr val="005BAC"/>
+                  </a:solidFill>
+                  <a:latin typeface="Arial"/>
+                </a:defRPr>
+              </a:pPr>
+            </a:p>
+          </c:txPr>
+          <c:dLblPos val="t"/>
+          <c:showLegendKey val="0"/>
+          <c:showVal val="1"/>
+          <c:showCatName val="0"/>
+          <c:showSerName val="0"/>
+          <c:showPercent val="0"/>
+          <c:showBubbleSize val="0"/>
+          <c:showLeaderLines val="0"/>
+        </c:dLbls>
+        <c:marker val="1"/>
+        <c:axId val="2094734554"/>
+        <c:axId val="2094734552"/>
+        <c:axId val="2094734556"/>
+      </c:lineChart>
+      <c:catAx>
+        <c:axId val="2094734554"/>
+        <c:scaling>
+          <c:orientation val="minMax"/>
+        </c:scaling>
+        <c:delete val="0"/>
+        <c:axPos val="b"/>
+        <c:numFmt formatCode="General" sourceLinked="1"/>
+        <c:majorTickMark val="out"/>
+        <c:minorTickMark val="none"/>
+        <c:tickLblPos val="low"/>
+        <c:spPr>
+          <a:ln w="12700" cap="flat">
+            <a:solidFill>
+              <a:srgbClr val="888888"/>
+            </a:solidFill>
+            <a:prstDash val="solid"/>
+            <a:round/>
+          </a:ln>
+        </c:spPr>
+        <c:txPr>
+          <a:bodyPr/>
+          <a:lstStyle/>
+          <a:p>
+            <a:pPr>
+              <a:defRPr sz="800" b="0" i="0" u="none" strike="noStrike">
+                <a:solidFill>
+                  <a:srgbClr val="9E9E9E"/>
+                </a:solidFill>
+                <a:latin typeface="Arial"/>
+              </a:defRPr>
+            </a:pPr>
+            <a:endParaRPr lang="en-US"/>
+          </a:p>
+        </c:txPr>
+        <c:crossAx val="2094734552"/>
+        <c:crosses val="autoZero"/>
+        <c:auto val="1"/>
+        <c:lblAlgn val="ctr"/>
+        <c:noMultiLvlLbl val="1"/>
+      </c:catAx>
+      <c:valAx>
+        <c:axId val="2094734552"/>
+        <c:scaling>
+          <c:orientation val="minMax"/>
+          <c:max val="50"/>
+          <c:min val="0"/>
+        </c:scaling>
+        <c:delete val="0"/>
+        <c:axPos val="l"/>
+        <c:majorGridlines>
+          <c:spPr>
+            <a:ln w="12700" cap="flat">
+              <a:solidFill>
+                <a:srgbClr val="888888"/>
+              </a:solidFill>
+              <a:prstDash val="solid"/>
+              <a:round/>
+            </a:ln>
+          </c:spPr>
+        </c:majorGridlines>
+        <c:numFmt formatCode="General" sourceLinked="0"/>
+        <c:majorTickMark val="out"/>
+        <c:minorTickMark val="none"/>
+        <c:tickLblPos val="nextTo"/>
+        <c:spPr>
+          <a:ln w="12700" cap="flat">
+            <a:solidFill>
+              <a:srgbClr val="888888"/>
+            </a:solidFill>
+            <a:prstDash val="solid"/>
+            <a:round/>
+          </a:ln>
+        </c:spPr>
+        <c:txPr>
+          <a:bodyPr/>
+          <a:lstStyle/>
+          <a:p>
+            <a:pPr>
+              <a:defRPr sz="800" b="0" i="0" u="none" strike="noStrike">
+                <a:solidFill>
+                  <a:srgbClr val="9E9E9E"/>
+                </a:solidFill>
+                <a:latin typeface="Arial"/>
+              </a:defRPr>
+            </a:pPr>
+            <a:endParaRPr lang="en-US"/>
+          </a:p>
+        </c:txPr>
+        <c:crossAx val="2094734554"/>
+        <c:crosses val="autoZero"/>
+        <c:crossBetween val="between"/>
+        <c:majorUnit val="10"/>
+      </c:valAx>
+      <c:spPr>
+        <a:noFill/>
+        <a:ln>
+          <a:noFill/>
+        </a:ln>
+        <a:effectLst/>
+      </c:spPr>
+    </c:plotArea>
+    <c:plotVisOnly val="1"/>
+    <c:dispBlanksAs val="span"/>
+  </c:chart>
+  <c:spPr>
+    <a:noFill/>
+    <a:ln>
+      <a:noFill/>
+    </a:ln>
+    <a:effectLst/>
+  </c:spPr>
+  <c:externalData r:id="rId1">
+    <c:autoUpdate val="0"/>
+  </c:externalData>
+</c:chartSpace>
 </file>
 
 <file path=ppt/notesMasters/notesMaster1.xml><?xml version="1.0" encoding="utf-8"?>
@@ -9293,7 +9614,7 @@
         <p:spPr>
           <a:xfrm>
             <a:off x="530352" y="4160520"/>
-            <a:ext cx="7315200" cy="320040"/>
+            <a:ext cx="5486400" cy="320040"/>
           </a:xfrm>
           <a:prstGeom prst="rect">
             <a:avLst/>
@@ -9332,11 +9653,11 @@
         <p:spPr>
           <a:xfrm>
             <a:off x="530352" y="4526280"/>
-            <a:ext cx="2651760" cy="1463040"/>
+            <a:ext cx="2615184" cy="960120"/>
           </a:xfrm>
           <a:prstGeom prst="roundRect">
             <a:avLst>
-              <a:gd name="adj" fmla="val 4375"/>
+              <a:gd name="adj" fmla="val 5714"/>
             </a:avLst>
           </a:prstGeom>
           <a:solidFill>
@@ -9353,8 +9674,8 @@
         </p:nvSpPr>
         <p:spPr>
           <a:xfrm>
-            <a:off x="530352" y="4645152"/>
-            <a:ext cx="2651760" cy="320040"/>
+            <a:off x="530352" y="4599432"/>
+            <a:ext cx="2615184" cy="274320"/>
           </a:xfrm>
           <a:prstGeom prst="rect">
             <a:avLst/>
@@ -9370,7 +9691,7 @@
               <a:buNone/>
             </a:pPr>
             <a:r>
-              <a:rPr lang="en-US" sz="1200" b="1" dirty="0">
+              <a:rPr lang="en-US" sz="1100" b="1" dirty="0">
                 <a:solidFill>
                   <a:srgbClr val="005BAC"/>
                 </a:solidFill>
@@ -9380,7 +9701,7 @@
               </a:rPr>
               <a:t>재방문율</a:t>
             </a:r>
-            <a:endParaRPr lang="en-US" sz="1200" dirty="0"/>
+            <a:endParaRPr lang="en-US" sz="1100" dirty="0"/>
           </a:p>
         </p:txBody>
       </p:sp>
@@ -9392,8 +9713,8 @@
         </p:nvSpPr>
         <p:spPr>
           <a:xfrm>
-            <a:off x="530352" y="4956048"/>
-            <a:ext cx="2651760" cy="640080"/>
+            <a:off x="530352" y="4873752"/>
+            <a:ext cx="2615184" cy="320040"/>
           </a:xfrm>
           <a:prstGeom prst="rect">
             <a:avLst/>
@@ -9409,7 +9730,7 @@
               <a:buNone/>
             </a:pPr>
             <a:r>
-              <a:rPr lang="en-US" sz="1000" i="1" dirty="0">
+              <a:rPr lang="en-US" sz="900" i="1" dirty="0">
                 <a:solidFill>
                   <a:srgbClr val="9E9E9E"/>
                 </a:solidFill>
@@ -9419,7 +9740,7 @@
               </a:rPr>
               <a:t>자료 미제공 – 추후 업데이트</a:t>
             </a:r>
-            <a:endParaRPr lang="en-US" sz="1000" dirty="0"/>
+            <a:endParaRPr lang="en-US" sz="900" dirty="0"/>
           </a:p>
         </p:txBody>
       </p:sp>
@@ -9431,8 +9752,8 @@
         </p:nvSpPr>
         <p:spPr>
           <a:xfrm>
-            <a:off x="530352" y="5577840"/>
-            <a:ext cx="2651760" cy="320040"/>
+            <a:off x="530352" y="5212080"/>
+            <a:ext cx="2615184" cy="256032"/>
           </a:xfrm>
           <a:prstGeom prst="rect">
             <a:avLst/>
@@ -9448,7 +9769,7 @@
               <a:buNone/>
             </a:pPr>
             <a:r>
-              <a:rPr lang="en-US" sz="1000" dirty="0">
+              <a:rPr lang="en-US" sz="900" dirty="0">
                 <a:solidFill>
                   <a:srgbClr val="9E9E9E"/>
                 </a:solidFill>
@@ -9458,7 +9779,7 @@
               </a:rPr>
               <a:t>목표 15% 이하</a:t>
             </a:r>
-            <a:endParaRPr lang="en-US" sz="1000" dirty="0"/>
+            <a:endParaRPr lang="en-US" sz="900" dirty="0"/>
           </a:p>
         </p:txBody>
       </p:sp>
@@ -9470,12 +9791,12 @@
         </p:nvSpPr>
         <p:spPr>
           <a:xfrm>
-            <a:off x="3383280" y="4526280"/>
-            <a:ext cx="2651760" cy="1463040"/>
+            <a:off x="3328416" y="4526280"/>
+            <a:ext cx="2615184" cy="960120"/>
           </a:xfrm>
           <a:prstGeom prst="roundRect">
             <a:avLst>
-              <a:gd name="adj" fmla="val 4375"/>
+              <a:gd name="adj" fmla="val 5714"/>
             </a:avLst>
           </a:prstGeom>
           <a:solidFill>
@@ -9492,8 +9813,8 @@
         </p:nvSpPr>
         <p:spPr>
           <a:xfrm>
-            <a:off x="3383280" y="4645152"/>
-            <a:ext cx="2651760" cy="320040"/>
+            <a:off x="3328416" y="4599432"/>
+            <a:ext cx="2615184" cy="274320"/>
           </a:xfrm>
           <a:prstGeom prst="rect">
             <a:avLst/>
@@ -9509,7 +9830,7 @@
               <a:buNone/>
             </a:pPr>
             <a:r>
-              <a:rPr lang="en-US" sz="1200" b="1" dirty="0">
+              <a:rPr lang="en-US" sz="1100" b="1" dirty="0">
                 <a:solidFill>
                   <a:srgbClr val="005BAC"/>
                 </a:solidFill>
@@ -9519,7 +9840,7 @@
               </a:rPr>
               <a:t>Uptime</a:t>
             </a:r>
-            <a:endParaRPr lang="en-US" sz="1200" dirty="0"/>
+            <a:endParaRPr lang="en-US" sz="1100" dirty="0"/>
           </a:p>
         </p:txBody>
       </p:sp>
@@ -9531,8 +9852,8 @@
         </p:nvSpPr>
         <p:spPr>
           <a:xfrm>
-            <a:off x="3383280" y="4956048"/>
-            <a:ext cx="2651760" cy="640080"/>
+            <a:off x="3328416" y="4873752"/>
+            <a:ext cx="2615184" cy="320040"/>
           </a:xfrm>
           <a:prstGeom prst="rect">
             <a:avLst/>
@@ -9548,7 +9869,7 @@
               <a:buNone/>
             </a:pPr>
             <a:r>
-              <a:rPr lang="en-US" sz="1000" i="1" dirty="0">
+              <a:rPr lang="en-US" sz="900" i="1" dirty="0">
                 <a:solidFill>
                   <a:srgbClr val="9E9E9E"/>
                 </a:solidFill>
@@ -9558,7 +9879,7 @@
               </a:rPr>
               <a:t>자료 미제공 – 추후 업데이트</a:t>
             </a:r>
-            <a:endParaRPr lang="en-US" sz="1000" dirty="0"/>
+            <a:endParaRPr lang="en-US" sz="900" dirty="0"/>
           </a:p>
         </p:txBody>
       </p:sp>
@@ -9570,8 +9891,8 @@
         </p:nvSpPr>
         <p:spPr>
           <a:xfrm>
-            <a:off x="3383280" y="5577840"/>
-            <a:ext cx="2651760" cy="320040"/>
+            <a:off x="3328416" y="5212080"/>
+            <a:ext cx="2615184" cy="256032"/>
           </a:xfrm>
           <a:prstGeom prst="rect">
             <a:avLst/>
@@ -9587,7 +9908,7 @@
               <a:buNone/>
             </a:pPr>
             <a:r>
-              <a:rPr lang="en-US" sz="1000" dirty="0">
+              <a:rPr lang="en-US" sz="900" dirty="0">
                 <a:solidFill>
                   <a:srgbClr val="9E9E9E"/>
                 </a:solidFill>
@@ -9597,7 +9918,7 @@
               </a:rPr>
               <a:t>목표 90% 이상</a:t>
             </a:r>
-            <a:endParaRPr lang="en-US" sz="1000" dirty="0"/>
+            <a:endParaRPr lang="en-US" sz="900" dirty="0"/>
           </a:p>
         </p:txBody>
       </p:sp>
@@ -9609,12 +9930,12 @@
         </p:nvSpPr>
         <p:spPr>
           <a:xfrm>
-            <a:off x="6236208" y="4526280"/>
-            <a:ext cx="2651760" cy="1463040"/>
+            <a:off x="530352" y="5669280"/>
+            <a:ext cx="2615184" cy="960120"/>
           </a:xfrm>
           <a:prstGeom prst="roundRect">
             <a:avLst>
-              <a:gd name="adj" fmla="val 4375"/>
+              <a:gd name="adj" fmla="val 5714"/>
             </a:avLst>
           </a:prstGeom>
           <a:solidFill>
@@ -9631,8 +9952,8 @@
         </p:nvSpPr>
         <p:spPr>
           <a:xfrm>
-            <a:off x="6236208" y="4645152"/>
-            <a:ext cx="2651760" cy="320040"/>
+            <a:off x="530352" y="5742432"/>
+            <a:ext cx="2615184" cy="274320"/>
           </a:xfrm>
           <a:prstGeom prst="rect">
             <a:avLst/>
@@ -9648,7 +9969,7 @@
               <a:buNone/>
             </a:pPr>
             <a:r>
-              <a:rPr lang="en-US" sz="1200" b="1" dirty="0">
+              <a:rPr lang="en-US" sz="1100" b="1" dirty="0">
                 <a:solidFill>
                   <a:srgbClr val="005BAC"/>
                 </a:solidFill>
@@ -9658,7 +9979,7 @@
               </a:rPr>
               <a:t>FTFR</a:t>
             </a:r>
-            <a:endParaRPr lang="en-US" sz="1200" dirty="0"/>
+            <a:endParaRPr lang="en-US" sz="1100" dirty="0"/>
           </a:p>
         </p:txBody>
       </p:sp>
@@ -9670,8 +9991,8 @@
         </p:nvSpPr>
         <p:spPr>
           <a:xfrm>
-            <a:off x="6236208" y="4956048"/>
-            <a:ext cx="2651760" cy="640080"/>
+            <a:off x="530352" y="6016752"/>
+            <a:ext cx="2615184" cy="320040"/>
           </a:xfrm>
           <a:prstGeom prst="rect">
             <a:avLst/>
@@ -9687,7 +10008,7 @@
               <a:buNone/>
             </a:pPr>
             <a:r>
-              <a:rPr lang="en-US" sz="1000" i="1" dirty="0">
+              <a:rPr lang="en-US" sz="900" i="1" dirty="0">
                 <a:solidFill>
                   <a:srgbClr val="9E9E9E"/>
                 </a:solidFill>
@@ -9697,7 +10018,7 @@
               </a:rPr>
               <a:t>자료 미제공 – 추후 업데이트</a:t>
             </a:r>
-            <a:endParaRPr lang="en-US" sz="1000" dirty="0"/>
+            <a:endParaRPr lang="en-US" sz="900" dirty="0"/>
           </a:p>
         </p:txBody>
       </p:sp>
@@ -9709,8 +10030,8 @@
         </p:nvSpPr>
         <p:spPr>
           <a:xfrm>
-            <a:off x="6236208" y="5577840"/>
-            <a:ext cx="2651760" cy="320040"/>
+            <a:off x="530352" y="6355080"/>
+            <a:ext cx="2615184" cy="256032"/>
           </a:xfrm>
           <a:prstGeom prst="rect">
             <a:avLst/>
@@ -9726,7 +10047,7 @@
               <a:buNone/>
             </a:pPr>
             <a:r>
-              <a:rPr lang="en-US" sz="1000" dirty="0">
+              <a:rPr lang="en-US" sz="900" dirty="0">
                 <a:solidFill>
                   <a:srgbClr val="9E9E9E"/>
                 </a:solidFill>
@@ -9736,7 +10057,7 @@
               </a:rPr>
               <a:t>참고 지표</a:t>
             </a:r>
-            <a:endParaRPr lang="en-US" sz="1000" dirty="0"/>
+            <a:endParaRPr lang="en-US" sz="900" dirty="0"/>
           </a:p>
         </p:txBody>
       </p:sp>
@@ -9748,12 +10069,12 @@
         </p:nvSpPr>
         <p:spPr>
           <a:xfrm>
-            <a:off x="9089136" y="4526280"/>
-            <a:ext cx="2651760" cy="1463040"/>
+            <a:off x="3328416" y="5669280"/>
+            <a:ext cx="2615184" cy="960120"/>
           </a:xfrm>
           <a:prstGeom prst="roundRect">
             <a:avLst>
-              <a:gd name="adj" fmla="val 4375"/>
+              <a:gd name="adj" fmla="val 5714"/>
             </a:avLst>
           </a:prstGeom>
           <a:solidFill>
@@ -9770,8 +10091,8 @@
         </p:nvSpPr>
         <p:spPr>
           <a:xfrm>
-            <a:off x="9089136" y="4645152"/>
-            <a:ext cx="2651760" cy="320040"/>
+            <a:off x="3328416" y="5742432"/>
+            <a:ext cx="2615184" cy="274320"/>
           </a:xfrm>
           <a:prstGeom prst="rect">
             <a:avLst/>
@@ -9787,7 +10108,7 @@
               <a:buNone/>
             </a:pPr>
             <a:r>
-              <a:rPr lang="en-US" sz="1200" b="1" dirty="0">
+              <a:rPr lang="en-US" sz="1100" b="1" dirty="0">
                 <a:solidFill>
                   <a:srgbClr val="005BAC"/>
                 </a:solidFill>
@@ -9797,7 +10118,7 @@
               </a:rPr>
               <a:t>책임 배정율</a:t>
             </a:r>
-            <a:endParaRPr lang="en-US" sz="1200" dirty="0"/>
+            <a:endParaRPr lang="en-US" sz="1100" dirty="0"/>
           </a:p>
         </p:txBody>
       </p:sp>
@@ -9809,8 +10130,8 @@
         </p:nvSpPr>
         <p:spPr>
           <a:xfrm>
-            <a:off x="9089136" y="4956048"/>
-            <a:ext cx="2651760" cy="640080"/>
+            <a:off x="3328416" y="6016752"/>
+            <a:ext cx="2615184" cy="320040"/>
           </a:xfrm>
           <a:prstGeom prst="rect">
             <a:avLst/>
@@ -9826,7 +10147,7 @@
               <a:buNone/>
             </a:pPr>
             <a:r>
-              <a:rPr lang="en-US" sz="1000" i="1" dirty="0">
+              <a:rPr lang="en-US" sz="900" i="1" dirty="0">
                 <a:solidFill>
                   <a:srgbClr val="9E9E9E"/>
                 </a:solidFill>
@@ -9836,7 +10157,7 @@
               </a:rPr>
               <a:t>자료 미제공 – 추후 업데이트</a:t>
             </a:r>
-            <a:endParaRPr lang="en-US" sz="1000" dirty="0"/>
+            <a:endParaRPr lang="en-US" sz="900" dirty="0"/>
           </a:p>
         </p:txBody>
       </p:sp>
@@ -9848,8 +10169,8 @@
         </p:nvSpPr>
         <p:spPr>
           <a:xfrm>
-            <a:off x="9089136" y="5577840"/>
-            <a:ext cx="2651760" cy="320040"/>
+            <a:off x="3328416" y="6355080"/>
+            <a:ext cx="2615184" cy="256032"/>
           </a:xfrm>
           <a:prstGeom prst="rect">
             <a:avLst/>
@@ -9865,7 +10186,7 @@
               <a:buNone/>
             </a:pPr>
             <a:r>
-              <a:rPr lang="en-US" sz="1000" dirty="0">
+              <a:rPr lang="en-US" sz="900" dirty="0">
                 <a:solidFill>
                   <a:srgbClr val="9E9E9E"/>
                 </a:solidFill>
@@ -9875,13 +10196,107 @@
               </a:rPr>
               <a:t>목표 100%</a:t>
             </a:r>
-            <a:endParaRPr lang="en-US" sz="1000" dirty="0"/>
+            <a:endParaRPr lang="en-US" sz="900" dirty="0"/>
           </a:p>
         </p:txBody>
       </p:sp>
       <p:sp>
         <p:nvSpPr>
           <p:cNvPr id="26" name="Text 22"/>
+          <p:cNvSpPr/>
+          <p:nvPr/>
+        </p:nvSpPr>
+        <p:spPr>
+          <a:xfrm>
+            <a:off x="6309360" y="4160520"/>
+            <a:ext cx="5486400" cy="320040"/>
+          </a:xfrm>
+          <a:prstGeom prst="rect">
+            <a:avLst/>
+          </a:prstGeom>
+          <a:noFill/>
+          <a:ln/>
+        </p:spPr>
+        <p:txBody>
+          <a:bodyPr wrap="square" lIns="0" tIns="0" rIns="0" bIns="0" rtlCol="0" anchor="ctr"/>
+          <a:lstStyle/>
+          <a:p>
+            <a:pPr indent="0" marL="0">
+              <a:buNone/>
+            </a:pPr>
+            <a:r>
+              <a:rPr lang="en-US" sz="1400" b="1" dirty="0">
+                <a:solidFill>
+                  <a:srgbClr val="005BAC"/>
+                </a:solidFill>
+                <a:latin typeface="Malgun Gothic" pitchFamily="34" charset="0"/>
+                <a:ea typeface="Malgun Gothic" pitchFamily="34" charset="-122"/>
+                <a:cs typeface="Malgun Gothic" pitchFamily="34" charset="-120"/>
+              </a:rPr>
+              <a:t>서비스 SLA 월별 추이 (24시간 이내 해결 비율)</a:t>
+            </a:r>
+            <a:endParaRPr lang="en-US" sz="1400" dirty="0"/>
+          </a:p>
+        </p:txBody>
+      </p:sp>
+      <p:graphicFrame>
+        <p:nvGraphicFramePr>
+          <p:cNvPr id="27" name="Chart 0" descr=""/>
+          <p:cNvGraphicFramePr/>
+          <p:nvPr/>
+        </p:nvGraphicFramePr>
+        <p:xfrm>
+          <a:off x="6309360" y="4480560"/>
+          <a:ext cx="5486400" cy="1874520"/>
+        </p:xfrm>
+        <a:graphic xmlns:a="http://schemas.openxmlformats.org/drawingml/2006/main">
+          <a:graphicData uri="http://schemas.openxmlformats.org/drawingml/2006/chart">
+            <c:chart xmlns:c="http://schemas.openxmlformats.org/drawingml/2006/chart" r:id="rId2"/>
+          </a:graphicData>
+        </a:graphic>
+      </p:graphicFrame>
+      <p:sp>
+        <p:nvSpPr>
+          <p:cNvPr id="28" name="Text 23"/>
+          <p:cNvSpPr/>
+          <p:nvPr/>
+        </p:nvSpPr>
+        <p:spPr>
+          <a:xfrm>
+            <a:off x="6309360" y="6382512"/>
+            <a:ext cx="5486400" cy="146304"/>
+          </a:xfrm>
+          <a:prstGeom prst="rect">
+            <a:avLst/>
+          </a:prstGeom>
+          <a:noFill/>
+          <a:ln/>
+        </p:spPr>
+        <p:txBody>
+          <a:bodyPr wrap="square" lIns="0" tIns="0" rIns="0" bIns="0" rtlCol="0" anchor="ctr"/>
+          <a:lstStyle/>
+          <a:p>
+            <a:pPr indent="0" marL="0">
+              <a:buNone/>
+            </a:pPr>
+            <a:r>
+              <a:rPr lang="en-US" sz="750" i="1" dirty="0">
+                <a:solidFill>
+                  <a:srgbClr val="9E9E9E"/>
+                </a:solidFill>
+                <a:latin typeface="Malgun Gothic" pitchFamily="34" charset="0"/>
+                <a:ea typeface="Malgun Gothic" pitchFamily="34" charset="-122"/>
+                <a:cs typeface="Malgun Gothic" pitchFamily="34" charset="-120"/>
+              </a:rPr>
+              <a:t>SLA = 케이스 생성~해결 24시간 이내 비율(CRM). *7월은 21일까지 잠정치</a:t>
+            </a:r>
+            <a:endParaRPr lang="en-US" sz="750" dirty="0"/>
+          </a:p>
+        </p:txBody>
+      </p:sp>
+      <p:sp>
+        <p:nvSpPr>
+          <p:cNvPr id="29" name="Text 24"/>
           <p:cNvSpPr/>
           <p:nvPr/>
         </p:nvSpPr>
@@ -9920,7 +10335,7 @@
       </p:sp>
       <p:sp>
         <p:nvSpPr>
-          <p:cNvPr id="27" name="Text 23"/>
+          <p:cNvPr id="30" name="Text 25"/>
           <p:cNvSpPr/>
           <p:nvPr/>
         </p:nvSpPr>

--- a/reports/FSG_월간서비스보고_202607/FSG_월간서비스보고_202607.pptx
+++ b/reports/FSG_월간서비스보고_202607/FSG_월간서비스보고_202607.pptx
@@ -18,9 +18,10 @@
     <p:sldId id="266" r:id="rId12"/>
     <p:sldId id="267" r:id="rId13"/>
     <p:sldId id="268" r:id="rId14"/>
+    <p:sldId id="269" r:id="rId15"/>
   </p:sldIdLst>
   <p:notesMasterIdLst>
-    <p:notesMasterId r:id="rId15"/>
+    <p:notesMasterId r:id="rId16"/>
   </p:notesMasterIdLst>
   <p:sldSz cx="12192000" cy="6858000"/>
   <p:notesSz cx="6858000" cy="12192000"/>
@@ -1229,6 +1230,94 @@
 </p:notes>
 </file>
 
+<file path=ppt/notesSlides/notesSlide14.xml><?xml version="1.0" encoding="utf-8"?>
+<p:notes xmlns:a="http://schemas.openxmlformats.org/drawingml/2006/main" xmlns:r="http://schemas.openxmlformats.org/officeDocument/2006/relationships" xmlns:p="http://schemas.openxmlformats.org/presentationml/2006/main">
+  <p:cSld>
+    <p:spTree>
+      <p:nvGrpSpPr>
+        <p:cNvPr id="1" name=""/>
+        <p:cNvGrpSpPr/>
+        <p:nvPr/>
+      </p:nvGrpSpPr>
+      <p:grpSpPr>
+        <a:xfrm>
+          <a:off x="0" y="0"/>
+          <a:ext cx="0" cy="0"/>
+          <a:chOff x="0" y="0"/>
+          <a:chExt cx="0" cy="0"/>
+        </a:xfrm>
+      </p:grpSpPr>
+      <p:sp>
+        <p:nvSpPr>
+          <p:cNvPr id="2" name="Slide Image Placeholder 1"/>
+          <p:cNvSpPr>
+            <a:spLocks noGrp="1" noRot="1" noChangeAspect="1"/>
+          </p:cNvSpPr>
+          <p:nvPr>
+            <p:ph type="sldImg"/>
+          </p:nvPr>
+        </p:nvSpPr>
+        <p:spPr/>
+      </p:sp>
+      <p:sp>
+        <p:nvSpPr>
+          <p:cNvPr id="3" name="Notes Placeholder 2"/>
+          <p:cNvSpPr>
+            <a:spLocks noGrp="1"/>
+          </p:cNvSpPr>
+          <p:nvPr>
+            <p:ph type="body" idx="1"/>
+          </p:nvPr>
+        </p:nvSpPr>
+        <p:spPr/>
+        <p:txBody>
+          <a:bodyPr/>
+          <a:lstStyle/>
+          <a:p>
+            <a:r>
+              <a:rPr lang="en-US" dirty="0"/>
+              <a:t/>
+            </a:r>
+            <a:endParaRPr lang="en-US" dirty="0"/>
+          </a:p>
+        </p:txBody>
+      </p:sp>
+      <p:sp>
+        <p:nvSpPr>
+          <p:cNvPr id="4" name="Slide Number Placeholder 3"/>
+          <p:cNvSpPr>
+            <a:spLocks noGrp="1"/>
+          </p:cNvSpPr>
+          <p:nvPr>
+            <p:ph type="sldNum" sz="quarter" idx="10"/>
+          </p:nvPr>
+        </p:nvSpPr>
+        <p:spPr/>
+        <p:txBody>
+          <a:bodyPr/>
+          <a:lstStyle/>
+          <a:p>
+            <a:fld id="{F7021451-1387-4CA6-816F-3879F97B5CBC}" type="slidenum">
+              <a:rPr lang="en-US"/>
+              <a:t>14</a:t>
+            </a:fld>
+            <a:endParaRPr lang="en-US"/>
+          </a:p>
+        </p:txBody>
+      </p:sp>
+    </p:spTree>
+    <p:extLst>
+      <p:ext uri="{BB962C8B-B14F-4D97-AF65-F5344CB8AC3E}">
+        <p14:creationId xmlns:p14="http://schemas.microsoft.com/office/powerpoint/2010/main" val="1024086991"/>
+      </p:ext>
+    </p:extLst>
+  </p:cSld>
+  <p:clrMapOvr>
+    <a:masterClrMapping/>
+  </p:clrMapOvr>
+</p:notes>
+</file>
+
 <file path=ppt/notesSlides/notesSlide2.xml><?xml version="1.0" encoding="utf-8"?>
 <p:notes xmlns:a="http://schemas.openxmlformats.org/drawingml/2006/main" xmlns:r="http://schemas.openxmlformats.org/officeDocument/2006/relationships" xmlns:p="http://schemas.openxmlformats.org/presentationml/2006/main">
   <p:cSld>
@@ -2649,7 +2738,7 @@
                 <a:ea typeface="Malgun Gothic" pitchFamily="34" charset="-122"/>
                 <a:cs typeface="Malgun Gothic" pitchFamily="34" charset="-120"/>
               </a:rPr>
-              <a:t>대리점 교육 등 처리</a:t>
+              <a:t>중대 이슈 처리</a:t>
             </a:r>
             <a:endParaRPr lang="en-US" sz="2600" dirty="0"/>
           </a:p>
@@ -2687,20 +2776,159 @@
         </p:nvSpPr>
         <p:spPr>
           <a:xfrm>
-            <a:off x="530352" y="1188720"/>
-            <a:ext cx="5394960" cy="2651760"/>
+            <a:off x="530352" y="1143000"/>
+            <a:ext cx="11100816" cy="777240"/>
           </a:xfrm>
           <a:prstGeom prst="roundRect">
             <a:avLst>
-              <a:gd name="adj" fmla="val 2069"/>
+              <a:gd name="adj" fmla="val 7059"/>
             </a:avLst>
           </a:prstGeom>
           <a:solidFill>
-            <a:srgbClr val="EFEFEF"/>
+            <a:srgbClr val="E6EEF7"/>
+          </a:solidFill>
+          <a:ln/>
+        </p:spPr>
+      </p:sp>
+      <p:sp>
+        <p:nvSpPr>
+          <p:cNvPr id="7" name="Text 4"/>
+          <p:cNvSpPr/>
+          <p:nvPr/>
+        </p:nvSpPr>
+        <p:spPr>
+          <a:xfrm>
+            <a:off x="713232" y="1225296"/>
+            <a:ext cx="2926080" cy="320040"/>
+          </a:xfrm>
+          <a:prstGeom prst="rect">
+            <a:avLst/>
+          </a:prstGeom>
+          <a:noFill/>
+          <a:ln/>
+        </p:spPr>
+        <p:txBody>
+          <a:bodyPr wrap="square" lIns="0" tIns="0" rIns="0" bIns="0" rtlCol="0" anchor="ctr"/>
+          <a:lstStyle/>
+          <a:p>
+            <a:pPr indent="0" marL="0">
+              <a:buNone/>
+            </a:pPr>
+            <a:r>
+              <a:rPr lang="en-US" sz="1200" b="1" dirty="0">
+                <a:solidFill>
+                  <a:srgbClr val="005BAC"/>
+                </a:solidFill>
+                <a:latin typeface="Malgun Gothic" pitchFamily="34" charset="0"/>
+                <a:ea typeface="Malgun Gothic" pitchFamily="34" charset="-122"/>
+                <a:cs typeface="Malgun Gothic" pitchFamily="34" charset="-120"/>
+              </a:rPr>
+              <a:t>VOC 레드 플래그 시스템</a:t>
+            </a:r>
+            <a:endParaRPr lang="en-US" sz="1200" dirty="0"/>
+          </a:p>
+        </p:txBody>
+      </p:sp>
+      <p:sp>
+        <p:nvSpPr>
+          <p:cNvPr id="8" name="Text 5"/>
+          <p:cNvSpPr/>
+          <p:nvPr/>
+        </p:nvSpPr>
+        <p:spPr>
+          <a:xfrm>
+            <a:off x="713232" y="1536192"/>
+            <a:ext cx="10789920" cy="320040"/>
+          </a:xfrm>
+          <a:prstGeom prst="rect">
+            <a:avLst/>
+          </a:prstGeom>
+          <a:noFill/>
+          <a:ln/>
+        </p:spPr>
+        <p:txBody>
+          <a:bodyPr wrap="square" lIns="0" tIns="0" rIns="0" bIns="0" rtlCol="0" anchor="ctr"/>
+          <a:lstStyle/>
+          <a:p>
+            <a:pPr indent="0" marL="0">
+              <a:buNone/>
+            </a:pPr>
+            <a:r>
+              <a:rPr lang="en-US" sz="1100" dirty="0">
+                <a:solidFill>
+                  <a:srgbClr val="3F3F3F"/>
+                </a:solidFill>
+                <a:latin typeface="Malgun Gothic" pitchFamily="34" charset="0"/>
+                <a:ea typeface="Malgun Gothic" pitchFamily="34" charset="-122"/>
+                <a:cs typeface="Malgun Gothic" pitchFamily="34" charset="-120"/>
+              </a:rPr>
+              <a:t>평가 2점 이하 또는 서술형 "심각" 분류 건을 즉시 감지 → 분야별 전문가 TFT 구성 → SLA(1차 컨택 24~48시간) 내 처리하여 신뢰 회복</a:t>
+            </a:r>
+            <a:endParaRPr lang="en-US" sz="1100" dirty="0"/>
+          </a:p>
+        </p:txBody>
+      </p:sp>
+      <p:sp>
+        <p:nvSpPr>
+          <p:cNvPr id="9" name="Text 6"/>
+          <p:cNvSpPr/>
+          <p:nvPr/>
+        </p:nvSpPr>
+        <p:spPr>
+          <a:xfrm>
+            <a:off x="530352" y="2103120"/>
+            <a:ext cx="7315200" cy="320040"/>
+          </a:xfrm>
+          <a:prstGeom prst="rect">
+            <a:avLst/>
+          </a:prstGeom>
+          <a:noFill/>
+          <a:ln/>
+        </p:spPr>
+        <p:txBody>
+          <a:bodyPr wrap="square" lIns="0" tIns="0" rIns="0" bIns="0" rtlCol="0" anchor="ctr"/>
+          <a:lstStyle/>
+          <a:p>
+            <a:pPr indent="0" marL="0">
+              <a:buNone/>
+            </a:pPr>
+            <a:r>
+              <a:rPr lang="en-US" sz="1400" b="1" dirty="0">
+                <a:solidFill>
+                  <a:srgbClr val="005BAC"/>
+                </a:solidFill>
+                <a:latin typeface="Malgun Gothic" pitchFamily="34" charset="0"/>
+                <a:ea typeface="Malgun Gothic" pitchFamily="34" charset="-122"/>
+                <a:cs typeface="Malgun Gothic" pitchFamily="34" charset="-120"/>
+              </a:rPr>
+              <a:t>접수 · 조치 · 종결 현황</a:t>
+            </a:r>
+            <a:endParaRPr lang="en-US" sz="1400" dirty="0"/>
+          </a:p>
+        </p:txBody>
+      </p:sp>
+      <p:sp>
+        <p:nvSpPr>
+          <p:cNvPr id="10" name="Shape 7"/>
+          <p:cNvSpPr/>
+          <p:nvPr/>
+        </p:nvSpPr>
+        <p:spPr>
+          <a:xfrm>
+            <a:off x="530352" y="2468880"/>
+            <a:ext cx="11100816" cy="3200400"/>
+          </a:xfrm>
+          <a:prstGeom prst="roundRect">
+            <a:avLst>
+              <a:gd name="adj" fmla="val 2286"/>
+            </a:avLst>
+          </a:prstGeom>
+          <a:solidFill>
+            <a:srgbClr val="E6EEF7"/>
           </a:solidFill>
           <a:ln w="9525">
             <a:solidFill>
-              <a:srgbClr val="9E9E9E"/>
+              <a:srgbClr val="005BAC"/>
             </a:solidFill>
             <a:prstDash val="dash"/>
           </a:ln>
@@ -2708,14 +2936,14 @@
       </p:sp>
       <p:sp>
         <p:nvSpPr>
-          <p:cNvPr id="7" name="Text 4"/>
-          <p:cNvSpPr/>
-          <p:nvPr/>
-        </p:nvSpPr>
-        <p:spPr>
-          <a:xfrm>
-            <a:off x="530352" y="1188720"/>
-            <a:ext cx="5394960" cy="2651760"/>
+          <p:cNvPr id="11" name="Text 8"/>
+          <p:cNvSpPr/>
+          <p:nvPr/>
+        </p:nvSpPr>
+        <p:spPr>
+          <a:xfrm>
+            <a:off x="530352" y="2468880"/>
+            <a:ext cx="11100816" cy="3200400"/>
           </a:xfrm>
           <a:prstGeom prst="rect">
             <a:avLst/>
@@ -2731,114 +2959,9 @@
               <a:buNone/>
             </a:pPr>
             <a:r>
-              <a:rPr lang="en-US" sz="1400" dirty="0">
+              <a:rPr lang="en-US" sz="1600" i="1" dirty="0">
                 <a:solidFill>
-                  <a:srgbClr val="9E9E9E"/>
-                </a:solidFill>
-                <a:latin typeface="Malgun Gothic" pitchFamily="34" charset="0"/>
-                <a:ea typeface="Malgun Gothic" pitchFamily="34" charset="-122"/>
-                <a:cs typeface="Malgun Gothic" pitchFamily="34" charset="-120"/>
-              </a:rPr>
-              <a:t>사진 자리 (Placeholder)</a:t>
-            </a:r>
-            <a:endParaRPr lang="en-US" sz="1400" dirty="0"/>
-          </a:p>
-        </p:txBody>
-      </p:sp>
-      <p:sp>
-        <p:nvSpPr>
-          <p:cNvPr id="8" name="Shape 5"/>
-          <p:cNvSpPr/>
-          <p:nvPr/>
-        </p:nvSpPr>
-        <p:spPr>
-          <a:xfrm>
-            <a:off x="6263640" y="1188720"/>
-            <a:ext cx="5394960" cy="2651760"/>
-          </a:xfrm>
-          <a:prstGeom prst="roundRect">
-            <a:avLst>
-              <a:gd name="adj" fmla="val 2069"/>
-            </a:avLst>
-          </a:prstGeom>
-          <a:solidFill>
-            <a:srgbClr val="EFEFEF"/>
-          </a:solidFill>
-          <a:ln w="9525">
-            <a:solidFill>
-              <a:srgbClr val="9E9E9E"/>
-            </a:solidFill>
-            <a:prstDash val="dash"/>
-          </a:ln>
-        </p:spPr>
-      </p:sp>
-      <p:sp>
-        <p:nvSpPr>
-          <p:cNvPr id="9" name="Text 6"/>
-          <p:cNvSpPr/>
-          <p:nvPr/>
-        </p:nvSpPr>
-        <p:spPr>
-          <a:xfrm>
-            <a:off x="6263640" y="1188720"/>
-            <a:ext cx="5394960" cy="2651760"/>
-          </a:xfrm>
-          <a:prstGeom prst="rect">
-            <a:avLst/>
-          </a:prstGeom>
-          <a:noFill/>
-          <a:ln/>
-        </p:spPr>
-        <p:txBody>
-          <a:bodyPr wrap="square" lIns="0" tIns="0" rIns="0" bIns="0" rtlCol="0" anchor="ctr"/>
-          <a:lstStyle/>
-          <a:p>
-            <a:pPr algn="ctr" indent="0" marL="0">
-              <a:buNone/>
-            </a:pPr>
-            <a:r>
-              <a:rPr lang="en-US" sz="1400" dirty="0">
-                <a:solidFill>
-                  <a:srgbClr val="9E9E9E"/>
-                </a:solidFill>
-                <a:latin typeface="Malgun Gothic" pitchFamily="34" charset="0"/>
-                <a:ea typeface="Malgun Gothic" pitchFamily="34" charset="-122"/>
-                <a:cs typeface="Malgun Gothic" pitchFamily="34" charset="-120"/>
-              </a:rPr>
-              <a:t>사진 자리 (Placeholder)</a:t>
-            </a:r>
-            <a:endParaRPr lang="en-US" sz="1400" dirty="0"/>
-          </a:p>
-        </p:txBody>
-      </p:sp>
-      <p:sp>
-        <p:nvSpPr>
-          <p:cNvPr id="10" name="Text 7"/>
-          <p:cNvSpPr/>
-          <p:nvPr/>
-        </p:nvSpPr>
-        <p:spPr>
-          <a:xfrm>
-            <a:off x="530352" y="3977640"/>
-            <a:ext cx="5394960" cy="457200"/>
-          </a:xfrm>
-          <a:prstGeom prst="rect">
-            <a:avLst/>
-          </a:prstGeom>
-          <a:noFill/>
-          <a:ln/>
-        </p:spPr>
-        <p:txBody>
-          <a:bodyPr wrap="square" lIns="0" tIns="0" rIns="0" bIns="0" rtlCol="0" anchor="ctr"/>
-          <a:lstStyle/>
-          <a:p>
-            <a:pPr indent="0" marL="0">
-              <a:buNone/>
-            </a:pPr>
-            <a:r>
-              <a:rPr lang="en-US" sz="1300" i="1" dirty="0">
-                <a:solidFill>
-                  <a:srgbClr val="9E9E9E"/>
+                  <a:srgbClr val="005BAC"/>
                 </a:solidFill>
                 <a:latin typeface="Malgun Gothic" pitchFamily="34" charset="0"/>
                 <a:ea typeface="Malgun Gothic" pitchFamily="34" charset="-122"/>
@@ -2846,91 +2969,13 @@
               </a:rPr>
               <a:t>자료 미제공 – 추후 업데이트</a:t>
             </a:r>
-            <a:endParaRPr lang="en-US" sz="1300" dirty="0"/>
+            <a:endParaRPr lang="en-US" sz="1600" dirty="0"/>
           </a:p>
         </p:txBody>
       </p:sp>
       <p:sp>
         <p:nvSpPr>
-          <p:cNvPr id="11" name="Text 8"/>
-          <p:cNvSpPr/>
-          <p:nvPr/>
-        </p:nvSpPr>
-        <p:spPr>
-          <a:xfrm>
-            <a:off x="6263640" y="3977640"/>
-            <a:ext cx="5394960" cy="457200"/>
-          </a:xfrm>
-          <a:prstGeom prst="rect">
-            <a:avLst/>
-          </a:prstGeom>
-          <a:noFill/>
-          <a:ln/>
-        </p:spPr>
-        <p:txBody>
-          <a:bodyPr wrap="square" lIns="0" tIns="0" rIns="0" bIns="0" rtlCol="0" anchor="ctr"/>
-          <a:lstStyle/>
-          <a:p>
-            <a:pPr indent="0" marL="0">
-              <a:buNone/>
-            </a:pPr>
-            <a:r>
-              <a:rPr lang="en-US" sz="1300" i="1" dirty="0">
-                <a:solidFill>
-                  <a:srgbClr val="9E9E9E"/>
-                </a:solidFill>
-                <a:latin typeface="Malgun Gothic" pitchFamily="34" charset="0"/>
-                <a:ea typeface="Malgun Gothic" pitchFamily="34" charset="-122"/>
-                <a:cs typeface="Malgun Gothic" pitchFamily="34" charset="-120"/>
-              </a:rPr>
-              <a:t>자료 미제공 – 추후 업데이트</a:t>
-            </a:r>
-            <a:endParaRPr lang="en-US" sz="1300" dirty="0"/>
-          </a:p>
-        </p:txBody>
-      </p:sp>
-      <p:sp>
-        <p:nvSpPr>
           <p:cNvPr id="12" name="Text 9"/>
-          <p:cNvSpPr/>
-          <p:nvPr/>
-        </p:nvSpPr>
-        <p:spPr>
-          <a:xfrm>
-            <a:off x="530352" y="4480560"/>
-            <a:ext cx="11100816" cy="365760"/>
-          </a:xfrm>
-          <a:prstGeom prst="rect">
-            <a:avLst/>
-          </a:prstGeom>
-          <a:noFill/>
-          <a:ln/>
-        </p:spPr>
-        <p:txBody>
-          <a:bodyPr wrap="square" lIns="0" tIns="0" rIns="0" bIns="0" rtlCol="0" anchor="ctr"/>
-          <a:lstStyle/>
-          <a:p>
-            <a:pPr indent="0" marL="0">
-              <a:buNone/>
-            </a:pPr>
-            <a:r>
-              <a:rPr lang="en-US" sz="1100" i="1" dirty="0">
-                <a:solidFill>
-                  <a:srgbClr val="9E9E9E"/>
-                </a:solidFill>
-                <a:latin typeface="Malgun Gothic" pitchFamily="34" charset="0"/>
-                <a:ea typeface="Malgun Gothic" pitchFamily="34" charset="-122"/>
-                <a:cs typeface="Malgun Gothic" pitchFamily="34" charset="-120"/>
-              </a:rPr>
-              <a:t>대리점(에이전시) 대상 기술 교육, 서비스 프로세스 안내 등 처리 현황</a:t>
-            </a:r>
-            <a:endParaRPr lang="en-US" sz="1100" dirty="0"/>
-          </a:p>
-        </p:txBody>
-      </p:sp>
-      <p:sp>
-        <p:nvSpPr>
-          <p:cNvPr id="13" name="Text 10"/>
           <p:cNvSpPr/>
           <p:nvPr/>
         </p:nvSpPr>
@@ -2969,7 +3014,7 @@
       </p:sp>
       <p:sp>
         <p:nvSpPr>
-          <p:cNvPr id="14" name="Text 11"/>
+          <p:cNvPr id="13" name="Text 10"/>
           <p:cNvSpPr/>
           <p:nvPr/>
         </p:nvSpPr>
@@ -3130,7 +3175,7 @@
                 <a:ea typeface="Malgun Gothic" pitchFamily="34" charset="-122"/>
                 <a:cs typeface="Malgun Gothic" pitchFamily="34" charset="-120"/>
               </a:rPr>
-              <a:t>직원교육</a:t>
+              <a:t>대리점 교육 등 처리</a:t>
             </a:r>
             <a:endParaRPr lang="en-US" sz="2600" dirty="0"/>
           </a:p>
@@ -3162,57 +3207,18 @@
       </p:pic>
       <p:sp>
         <p:nvSpPr>
-          <p:cNvPr id="6" name="Text 3"/>
-          <p:cNvSpPr/>
-          <p:nvPr/>
-        </p:nvSpPr>
-        <p:spPr>
-          <a:xfrm>
-            <a:off x="530352" y="1051560"/>
-            <a:ext cx="11100816" cy="365760"/>
-          </a:xfrm>
-          <a:prstGeom prst="rect">
-            <a:avLst/>
-          </a:prstGeom>
-          <a:noFill/>
-          <a:ln/>
-        </p:spPr>
-        <p:txBody>
-          <a:bodyPr wrap="square" lIns="0" tIns="0" rIns="0" bIns="0" rtlCol="0" anchor="ctr"/>
-          <a:lstStyle/>
-          <a:p>
-            <a:pPr indent="0" marL="0">
-              <a:buNone/>
-            </a:pPr>
-            <a:r>
-              <a:rPr lang="en-US" sz="1100" i="1" dirty="0">
-                <a:solidFill>
-                  <a:srgbClr val="9E9E9E"/>
-                </a:solidFill>
-                <a:latin typeface="Malgun Gothic" pitchFamily="34" charset="0"/>
-                <a:ea typeface="Malgun Gothic" pitchFamily="34" charset="-122"/>
-                <a:cs typeface="Malgun Gothic" pitchFamily="34" charset="-120"/>
-              </a:rPr>
-              <a:t>Sysmex Technical Academy: 주니어 레벨 빠른 성장 및 Expert Engineer 육성 · Working Group: 4개 분야(Hema/Urine/Coa/Immuno) 전문성 강화</a:t>
-            </a:r>
-            <a:endParaRPr lang="en-US" sz="1100" dirty="0"/>
-          </a:p>
-        </p:txBody>
-      </p:sp>
-      <p:sp>
-        <p:nvSpPr>
-          <p:cNvPr id="7" name="Shape 4"/>
-          <p:cNvSpPr/>
-          <p:nvPr/>
-        </p:nvSpPr>
-        <p:spPr>
-          <a:xfrm>
-            <a:off x="530352" y="1508760"/>
-            <a:ext cx="5394960" cy="2468880"/>
+          <p:cNvPr id="6" name="Shape 3"/>
+          <p:cNvSpPr/>
+          <p:nvPr/>
+        </p:nvSpPr>
+        <p:spPr>
+          <a:xfrm>
+            <a:off x="530352" y="1188720"/>
+            <a:ext cx="5394960" cy="2651760"/>
           </a:xfrm>
           <a:prstGeom prst="roundRect">
             <a:avLst>
-              <a:gd name="adj" fmla="val 2222"/>
+              <a:gd name="adj" fmla="val 2069"/>
             </a:avLst>
           </a:prstGeom>
           <a:solidFill>
@@ -3228,14 +3234,14 @@
       </p:sp>
       <p:sp>
         <p:nvSpPr>
-          <p:cNvPr id="8" name="Text 5"/>
-          <p:cNvSpPr/>
-          <p:nvPr/>
-        </p:nvSpPr>
-        <p:spPr>
-          <a:xfrm>
-            <a:off x="530352" y="1508760"/>
-            <a:ext cx="5394960" cy="2468880"/>
+          <p:cNvPr id="7" name="Text 4"/>
+          <p:cNvSpPr/>
+          <p:nvPr/>
+        </p:nvSpPr>
+        <p:spPr>
+          <a:xfrm>
+            <a:off x="530352" y="1188720"/>
+            <a:ext cx="5394960" cy="2651760"/>
           </a:xfrm>
           <a:prstGeom prst="rect">
             <a:avLst/>
@@ -3267,18 +3273,18 @@
       </p:sp>
       <p:sp>
         <p:nvSpPr>
-          <p:cNvPr id="9" name="Shape 6"/>
-          <p:cNvSpPr/>
-          <p:nvPr/>
-        </p:nvSpPr>
-        <p:spPr>
-          <a:xfrm>
-            <a:off x="6263640" y="1508760"/>
-            <a:ext cx="5394960" cy="2468880"/>
+          <p:cNvPr id="8" name="Shape 5"/>
+          <p:cNvSpPr/>
+          <p:nvPr/>
+        </p:nvSpPr>
+        <p:spPr>
+          <a:xfrm>
+            <a:off x="6263640" y="1188720"/>
+            <a:ext cx="5394960" cy="2651760"/>
           </a:xfrm>
           <a:prstGeom prst="roundRect">
             <a:avLst>
-              <a:gd name="adj" fmla="val 2222"/>
+              <a:gd name="adj" fmla="val 2069"/>
             </a:avLst>
           </a:prstGeom>
           <a:solidFill>
@@ -3294,14 +3300,14 @@
       </p:sp>
       <p:sp>
         <p:nvSpPr>
-          <p:cNvPr id="10" name="Text 7"/>
-          <p:cNvSpPr/>
-          <p:nvPr/>
-        </p:nvSpPr>
-        <p:spPr>
-          <a:xfrm>
-            <a:off x="6263640" y="1508760"/>
-            <a:ext cx="5394960" cy="2468880"/>
+          <p:cNvPr id="9" name="Text 6"/>
+          <p:cNvSpPr/>
+          <p:nvPr/>
+        </p:nvSpPr>
+        <p:spPr>
+          <a:xfrm>
+            <a:off x="6263640" y="1188720"/>
+            <a:ext cx="5394960" cy="2651760"/>
           </a:xfrm>
           <a:prstGeom prst="rect">
             <a:avLst/>
@@ -3333,13 +3339,13 @@
       </p:sp>
       <p:sp>
         <p:nvSpPr>
-          <p:cNvPr id="11" name="Text 8"/>
-          <p:cNvSpPr/>
-          <p:nvPr/>
-        </p:nvSpPr>
-        <p:spPr>
-          <a:xfrm>
-            <a:off x="530352" y="4114800"/>
+          <p:cNvPr id="10" name="Text 7"/>
+          <p:cNvSpPr/>
+          <p:nvPr/>
+        </p:nvSpPr>
+        <p:spPr>
+          <a:xfrm>
+            <a:off x="530352" y="3977640"/>
             <a:ext cx="5394960" cy="457200"/>
           </a:xfrm>
           <a:prstGeom prst="rect">
@@ -3364,7 +3370,7 @@
                 <a:ea typeface="Malgun Gothic" pitchFamily="34" charset="-122"/>
                 <a:cs typeface="Malgun Gothic" pitchFamily="34" charset="-120"/>
               </a:rPr>
-              <a:t>Technical Academy — 자료 미제공 – 추후 업데이트</a:t>
+              <a:t>자료 미제공 – 추후 업데이트</a:t>
             </a:r>
             <a:endParaRPr lang="en-US" sz="1300" dirty="0"/>
           </a:p>
@@ -3372,13 +3378,13 @@
       </p:sp>
       <p:sp>
         <p:nvSpPr>
-          <p:cNvPr id="12" name="Text 9"/>
-          <p:cNvSpPr/>
-          <p:nvPr/>
-        </p:nvSpPr>
-        <p:spPr>
-          <a:xfrm>
-            <a:off x="6263640" y="4114800"/>
+          <p:cNvPr id="11" name="Text 8"/>
+          <p:cNvSpPr/>
+          <p:nvPr/>
+        </p:nvSpPr>
+        <p:spPr>
+          <a:xfrm>
+            <a:off x="6263640" y="3977640"/>
             <a:ext cx="5394960" cy="457200"/>
           </a:xfrm>
           <a:prstGeom prst="rect">
@@ -3403,9 +3409,48 @@
                 <a:ea typeface="Malgun Gothic" pitchFamily="34" charset="-122"/>
                 <a:cs typeface="Malgun Gothic" pitchFamily="34" charset="-120"/>
               </a:rPr>
-              <a:t>Working Group — 자료 미제공 – 추후 업데이트</a:t>
+              <a:t>자료 미제공 – 추후 업데이트</a:t>
             </a:r>
             <a:endParaRPr lang="en-US" sz="1300" dirty="0"/>
+          </a:p>
+        </p:txBody>
+      </p:sp>
+      <p:sp>
+        <p:nvSpPr>
+          <p:cNvPr id="12" name="Text 9"/>
+          <p:cNvSpPr/>
+          <p:nvPr/>
+        </p:nvSpPr>
+        <p:spPr>
+          <a:xfrm>
+            <a:off x="530352" y="4480560"/>
+            <a:ext cx="11100816" cy="365760"/>
+          </a:xfrm>
+          <a:prstGeom prst="rect">
+            <a:avLst/>
+          </a:prstGeom>
+          <a:noFill/>
+          <a:ln/>
+        </p:spPr>
+        <p:txBody>
+          <a:bodyPr wrap="square" lIns="0" tIns="0" rIns="0" bIns="0" rtlCol="0" anchor="ctr"/>
+          <a:lstStyle/>
+          <a:p>
+            <a:pPr indent="0" marL="0">
+              <a:buNone/>
+            </a:pPr>
+            <a:r>
+              <a:rPr lang="en-US" sz="1100" i="1" dirty="0">
+                <a:solidFill>
+                  <a:srgbClr val="9E9E9E"/>
+                </a:solidFill>
+                <a:latin typeface="Malgun Gothic" pitchFamily="34" charset="0"/>
+                <a:ea typeface="Malgun Gothic" pitchFamily="34" charset="-122"/>
+                <a:cs typeface="Malgun Gothic" pitchFamily="34" charset="-120"/>
+              </a:rPr>
+              <a:t>대리점(에이전시) 대상 기술 교육, 서비스 프로세스 안내 등 처리 현황</a:t>
+            </a:r>
+            <a:endParaRPr lang="en-US" sz="1100" dirty="0"/>
           </a:p>
         </p:txBody>
       </p:sp>
@@ -3611,7 +3656,7 @@
                 <a:ea typeface="Malgun Gothic" pitchFamily="34" charset="-122"/>
                 <a:cs typeface="Malgun Gothic" pitchFamily="34" charset="-120"/>
               </a:rPr>
-              <a:t>고객 중심 서비스 하이라이트</a:t>
+              <a:t>직원교육</a:t>
             </a:r>
             <a:endParaRPr lang="en-US" sz="2600" dirty="0"/>
           </a:p>
@@ -3643,36 +3688,14 @@
       </p:pic>
       <p:sp>
         <p:nvSpPr>
-          <p:cNvPr id="6" name="Shape 3"/>
-          <p:cNvSpPr/>
-          <p:nvPr/>
-        </p:nvSpPr>
-        <p:spPr>
-          <a:xfrm>
-            <a:off x="530352" y="1234440"/>
-            <a:ext cx="3566160" cy="2011680"/>
-          </a:xfrm>
-          <a:prstGeom prst="roundRect">
-            <a:avLst>
-              <a:gd name="adj" fmla="val 3636"/>
-            </a:avLst>
-          </a:prstGeom>
-          <a:solidFill>
-            <a:srgbClr val="F5F8FC"/>
-          </a:solidFill>
-          <a:ln/>
-        </p:spPr>
-      </p:sp>
-      <p:sp>
-        <p:nvSpPr>
-          <p:cNvPr id="7" name="Text 4"/>
-          <p:cNvSpPr/>
-          <p:nvPr/>
-        </p:nvSpPr>
-        <p:spPr>
-          <a:xfrm>
-            <a:off x="713232" y="1417320"/>
-            <a:ext cx="3200400" cy="457200"/>
+          <p:cNvPr id="6" name="Text 3"/>
+          <p:cNvSpPr/>
+          <p:nvPr/>
+        </p:nvSpPr>
+        <p:spPr>
+          <a:xfrm>
+            <a:off x="530352" y="1051560"/>
+            <a:ext cx="11100816" cy="365760"/>
           </a:xfrm>
           <a:prstGeom prst="rect">
             <a:avLst/>
@@ -3684,85 +3707,7 @@
           <a:bodyPr wrap="square" lIns="0" tIns="0" rIns="0" bIns="0" rtlCol="0" anchor="ctr"/>
           <a:lstStyle/>
           <a:p>
-            <a:pPr algn="ctr" indent="0" marL="0">
-              <a:buNone/>
-            </a:pPr>
-            <a:r>
-              <a:rPr lang="en-US" sz="1500" b="1" dirty="0">
-                <a:solidFill>
-                  <a:srgbClr val="005BAC"/>
-                </a:solidFill>
-                <a:latin typeface="Malgun Gothic" pitchFamily="34" charset="0"/>
-                <a:ea typeface="Malgun Gothic" pitchFamily="34" charset="-122"/>
-                <a:cs typeface="Malgun Gothic" pitchFamily="34" charset="-120"/>
-              </a:rPr>
-              <a:t>VOC 대응</a:t>
-            </a:r>
-            <a:endParaRPr lang="en-US" sz="1500" dirty="0"/>
-          </a:p>
-        </p:txBody>
-      </p:sp>
-      <p:sp>
-        <p:nvSpPr>
-          <p:cNvPr id="8" name="Text 5"/>
-          <p:cNvSpPr/>
-          <p:nvPr/>
-        </p:nvSpPr>
-        <p:spPr>
-          <a:xfrm>
-            <a:off x="713232" y="1920240"/>
-            <a:ext cx="3200400" cy="365760"/>
-          </a:xfrm>
-          <a:prstGeom prst="rect">
-            <a:avLst/>
-          </a:prstGeom>
-          <a:noFill/>
-          <a:ln/>
-        </p:spPr>
-        <p:txBody>
-          <a:bodyPr wrap="square" lIns="0" tIns="0" rIns="0" bIns="0" rtlCol="0" anchor="ctr"/>
-          <a:lstStyle/>
-          <a:p>
-            <a:pPr algn="ctr" indent="0" marL="0">
-              <a:buNone/>
-            </a:pPr>
-            <a:r>
-              <a:rPr lang="en-US" sz="1100" dirty="0">
-                <a:solidFill>
-                  <a:srgbClr val="3F3F3F"/>
-                </a:solidFill>
-                <a:latin typeface="Malgun Gothic" pitchFamily="34" charset="0"/>
-                <a:ea typeface="Malgun Gothic" pitchFamily="34" charset="-122"/>
-                <a:cs typeface="Malgun Gothic" pitchFamily="34" charset="-120"/>
-              </a:rPr>
-              <a:t>고객 피드백 기반 개선</a:t>
-            </a:r>
-            <a:endParaRPr lang="en-US" sz="1100" dirty="0"/>
-          </a:p>
-        </p:txBody>
-      </p:sp>
-      <p:sp>
-        <p:nvSpPr>
-          <p:cNvPr id="9" name="Text 6"/>
-          <p:cNvSpPr/>
-          <p:nvPr/>
-        </p:nvSpPr>
-        <p:spPr>
-          <a:xfrm>
-            <a:off x="713232" y="2377440"/>
-            <a:ext cx="3200400" cy="731520"/>
-          </a:xfrm>
-          <a:prstGeom prst="rect">
-            <a:avLst/>
-          </a:prstGeom>
-          <a:noFill/>
-          <a:ln/>
-        </p:spPr>
-        <p:txBody>
-          <a:bodyPr wrap="square" lIns="0" tIns="0" rIns="0" bIns="0" rtlCol="0" anchor="ctr"/>
-          <a:lstStyle/>
-          <a:p>
-            <a:pPr algn="ctr" indent="0" marL="0">
+            <a:pPr indent="0" marL="0">
               <a:buNone/>
             </a:pPr>
             <a:r>
@@ -3774,7 +3719,7 @@
                 <a:ea typeface="Malgun Gothic" pitchFamily="34" charset="-122"/>
                 <a:cs typeface="Malgun Gothic" pitchFamily="34" charset="-120"/>
               </a:rPr>
-              <a:t>자료 미제공 – 추후 업데이트</a:t>
+              <a:t>Sysmex Technical Academy: 주니어 레벨 빠른 성장 및 Expert Engineer 육성 · Working Group: 4개 분야(Hema/Urine/Coa/Immuno) 전문성 강화</a:t>
             </a:r>
             <a:endParaRPr lang="en-US" sz="1100" dirty="0"/>
           </a:p>
@@ -3782,36 +3727,41 @@
       </p:sp>
       <p:sp>
         <p:nvSpPr>
-          <p:cNvPr id="10" name="Shape 7"/>
-          <p:cNvSpPr/>
-          <p:nvPr/>
-        </p:nvSpPr>
-        <p:spPr>
-          <a:xfrm>
-            <a:off x="4279392" y="1234440"/>
-            <a:ext cx="3566160" cy="2011680"/>
+          <p:cNvPr id="7" name="Shape 4"/>
+          <p:cNvSpPr/>
+          <p:nvPr/>
+        </p:nvSpPr>
+        <p:spPr>
+          <a:xfrm>
+            <a:off x="530352" y="1508760"/>
+            <a:ext cx="5394960" cy="2468880"/>
           </a:xfrm>
           <a:prstGeom prst="roundRect">
             <a:avLst>
-              <a:gd name="adj" fmla="val 3636"/>
+              <a:gd name="adj" fmla="val 2222"/>
             </a:avLst>
           </a:prstGeom>
           <a:solidFill>
-            <a:srgbClr val="F5F8FC"/>
+            <a:srgbClr val="EFEFEF"/>
           </a:solidFill>
-          <a:ln/>
-        </p:spPr>
-      </p:sp>
-      <p:sp>
-        <p:nvSpPr>
-          <p:cNvPr id="11" name="Text 8"/>
-          <p:cNvSpPr/>
-          <p:nvPr/>
-        </p:nvSpPr>
-        <p:spPr>
-          <a:xfrm>
-            <a:off x="4462272" y="1417320"/>
-            <a:ext cx="3200400" cy="457200"/>
+          <a:ln w="9525">
+            <a:solidFill>
+              <a:srgbClr val="9E9E9E"/>
+            </a:solidFill>
+            <a:prstDash val="dash"/>
+          </a:ln>
+        </p:spPr>
+      </p:sp>
+      <p:sp>
+        <p:nvSpPr>
+          <p:cNvPr id="8" name="Text 5"/>
+          <p:cNvSpPr/>
+          <p:nvPr/>
+        </p:nvSpPr>
+        <p:spPr>
+          <a:xfrm>
+            <a:off x="530352" y="1508760"/>
+            <a:ext cx="5394960" cy="2468880"/>
           </a:xfrm>
           <a:prstGeom prst="rect">
             <a:avLst/>
@@ -3827,30 +3777,57 @@
               <a:buNone/>
             </a:pPr>
             <a:r>
-              <a:rPr lang="en-US" sz="1500" b="1" dirty="0">
+              <a:rPr lang="en-US" sz="1400" dirty="0">
                 <a:solidFill>
-                  <a:srgbClr val="005BAC"/>
+                  <a:srgbClr val="9E9E9E"/>
                 </a:solidFill>
                 <a:latin typeface="Malgun Gothic" pitchFamily="34" charset="0"/>
                 <a:ea typeface="Malgun Gothic" pitchFamily="34" charset="-122"/>
                 <a:cs typeface="Malgun Gothic" pitchFamily="34" charset="-120"/>
               </a:rPr>
-              <a:t>중대 이슈 대응력</a:t>
+              <a:t>사진 자리 (Placeholder)</a:t>
             </a:r>
-            <a:endParaRPr lang="en-US" sz="1500" dirty="0"/>
+            <a:endParaRPr lang="en-US" sz="1400" dirty="0"/>
           </a:p>
         </p:txBody>
       </p:sp>
       <p:sp>
         <p:nvSpPr>
-          <p:cNvPr id="12" name="Text 9"/>
-          <p:cNvSpPr/>
-          <p:nvPr/>
-        </p:nvSpPr>
-        <p:spPr>
-          <a:xfrm>
-            <a:off x="4462272" y="1920240"/>
-            <a:ext cx="3200400" cy="365760"/>
+          <p:cNvPr id="9" name="Shape 6"/>
+          <p:cNvSpPr/>
+          <p:nvPr/>
+        </p:nvSpPr>
+        <p:spPr>
+          <a:xfrm>
+            <a:off x="6263640" y="1508760"/>
+            <a:ext cx="5394960" cy="2468880"/>
+          </a:xfrm>
+          <a:prstGeom prst="roundRect">
+            <a:avLst>
+              <a:gd name="adj" fmla="val 2222"/>
+            </a:avLst>
+          </a:prstGeom>
+          <a:solidFill>
+            <a:srgbClr val="EFEFEF"/>
+          </a:solidFill>
+          <a:ln w="9525">
+            <a:solidFill>
+              <a:srgbClr val="9E9E9E"/>
+            </a:solidFill>
+            <a:prstDash val="dash"/>
+          </a:ln>
+        </p:spPr>
+      </p:sp>
+      <p:sp>
+        <p:nvSpPr>
+          <p:cNvPr id="10" name="Text 7"/>
+          <p:cNvSpPr/>
+          <p:nvPr/>
+        </p:nvSpPr>
+        <p:spPr>
+          <a:xfrm>
+            <a:off x="6263640" y="1508760"/>
+            <a:ext cx="5394960" cy="2468880"/>
           </a:xfrm>
           <a:prstGeom prst="rect">
             <a:avLst/>
@@ -3866,46 +3843,7 @@
               <a:buNone/>
             </a:pPr>
             <a:r>
-              <a:rPr lang="en-US" sz="1100" dirty="0">
-                <a:solidFill>
-                  <a:srgbClr val="3F3F3F"/>
-                </a:solidFill>
-                <a:latin typeface="Malgun Gothic" pitchFamily="34" charset="0"/>
-                <a:ea typeface="Malgun Gothic" pitchFamily="34" charset="-122"/>
-                <a:cs typeface="Malgun Gothic" pitchFamily="34" charset="-120"/>
-              </a:rPr>
-              <a:t>SLA 준수 · 신속 종결</a:t>
-            </a:r>
-            <a:endParaRPr lang="en-US" sz="1100" dirty="0"/>
-          </a:p>
-        </p:txBody>
-      </p:sp>
-      <p:sp>
-        <p:nvSpPr>
-          <p:cNvPr id="13" name="Text 10"/>
-          <p:cNvSpPr/>
-          <p:nvPr/>
-        </p:nvSpPr>
-        <p:spPr>
-          <a:xfrm>
-            <a:off x="4462272" y="2377440"/>
-            <a:ext cx="3200400" cy="731520"/>
-          </a:xfrm>
-          <a:prstGeom prst="rect">
-            <a:avLst/>
-          </a:prstGeom>
-          <a:noFill/>
-          <a:ln/>
-        </p:spPr>
-        <p:txBody>
-          <a:bodyPr wrap="square" lIns="0" tIns="0" rIns="0" bIns="0" rtlCol="0" anchor="ctr"/>
-          <a:lstStyle/>
-          <a:p>
-            <a:pPr algn="ctr" indent="0" marL="0">
-              <a:buNone/>
-            </a:pPr>
-            <a:r>
-              <a:rPr lang="en-US" sz="1100" i="1" dirty="0">
+              <a:rPr lang="en-US" sz="1400" dirty="0">
                 <a:solidFill>
                   <a:srgbClr val="9E9E9E"/>
                 </a:solidFill>
@@ -3913,183 +3851,22 @@
                 <a:ea typeface="Malgun Gothic" pitchFamily="34" charset="-122"/>
                 <a:cs typeface="Malgun Gothic" pitchFamily="34" charset="-120"/>
               </a:rPr>
-              <a:t>자료 미제공 – 추후 업데이트</a:t>
+              <a:t>사진 자리 (Placeholder)</a:t>
             </a:r>
-            <a:endParaRPr lang="en-US" sz="1100" dirty="0"/>
+            <a:endParaRPr lang="en-US" sz="1400" dirty="0"/>
           </a:p>
         </p:txBody>
       </p:sp>
       <p:sp>
         <p:nvSpPr>
-          <p:cNvPr id="14" name="Shape 11"/>
-          <p:cNvSpPr/>
-          <p:nvPr/>
-        </p:nvSpPr>
-        <p:spPr>
-          <a:xfrm>
-            <a:off x="8028432" y="1234440"/>
-            <a:ext cx="3566160" cy="2011680"/>
-          </a:xfrm>
-          <a:prstGeom prst="roundRect">
-            <a:avLst>
-              <a:gd name="adj" fmla="val 3636"/>
-            </a:avLst>
-          </a:prstGeom>
-          <a:solidFill>
-            <a:srgbClr val="F5F8FC"/>
-          </a:solidFill>
-          <a:ln/>
-        </p:spPr>
-      </p:sp>
-      <p:sp>
-        <p:nvSpPr>
-          <p:cNvPr id="15" name="Text 12"/>
-          <p:cNvSpPr/>
-          <p:nvPr/>
-        </p:nvSpPr>
-        <p:spPr>
-          <a:xfrm>
-            <a:off x="8211312" y="1417320"/>
-            <a:ext cx="3200400" cy="457200"/>
-          </a:xfrm>
-          <a:prstGeom prst="rect">
-            <a:avLst/>
-          </a:prstGeom>
-          <a:noFill/>
-          <a:ln/>
-        </p:spPr>
-        <p:txBody>
-          <a:bodyPr wrap="square" lIns="0" tIns="0" rIns="0" bIns="0" rtlCol="0" anchor="ctr"/>
-          <a:lstStyle/>
-          <a:p>
-            <a:pPr algn="ctr" indent="0" marL="0">
-              <a:buNone/>
-            </a:pPr>
-            <a:r>
-              <a:rPr lang="en-US" sz="1500" b="1" dirty="0">
-                <a:solidFill>
-                  <a:srgbClr val="005BAC"/>
-                </a:solidFill>
-                <a:latin typeface="Malgun Gothic" pitchFamily="34" charset="0"/>
-                <a:ea typeface="Malgun Gothic" pitchFamily="34" charset="-122"/>
-                <a:cs typeface="Malgun Gothic" pitchFamily="34" charset="-120"/>
-              </a:rPr>
-              <a:t>대리점/직원 역량</a:t>
-            </a:r>
-            <a:endParaRPr lang="en-US" sz="1500" dirty="0"/>
-          </a:p>
-        </p:txBody>
-      </p:sp>
-      <p:sp>
-        <p:nvSpPr>
-          <p:cNvPr id="16" name="Text 13"/>
-          <p:cNvSpPr/>
-          <p:nvPr/>
-        </p:nvSpPr>
-        <p:spPr>
-          <a:xfrm>
-            <a:off x="8211312" y="1920240"/>
-            <a:ext cx="3200400" cy="365760"/>
-          </a:xfrm>
-          <a:prstGeom prst="rect">
-            <a:avLst/>
-          </a:prstGeom>
-          <a:noFill/>
-          <a:ln/>
-        </p:spPr>
-        <p:txBody>
-          <a:bodyPr wrap="square" lIns="0" tIns="0" rIns="0" bIns="0" rtlCol="0" anchor="ctr"/>
-          <a:lstStyle/>
-          <a:p>
-            <a:pPr algn="ctr" indent="0" marL="0">
-              <a:buNone/>
-            </a:pPr>
-            <a:r>
-              <a:rPr lang="en-US" sz="1100" dirty="0">
-                <a:solidFill>
-                  <a:srgbClr val="3F3F3F"/>
-                </a:solidFill>
-                <a:latin typeface="Malgun Gothic" pitchFamily="34" charset="0"/>
-                <a:ea typeface="Malgun Gothic" pitchFamily="34" charset="-122"/>
-                <a:cs typeface="Malgun Gothic" pitchFamily="34" charset="-120"/>
-              </a:rPr>
-              <a:t>교육 통한 서비스 품질 제고</a:t>
-            </a:r>
-            <a:endParaRPr lang="en-US" sz="1100" dirty="0"/>
-          </a:p>
-        </p:txBody>
-      </p:sp>
-      <p:sp>
-        <p:nvSpPr>
-          <p:cNvPr id="17" name="Text 14"/>
-          <p:cNvSpPr/>
-          <p:nvPr/>
-        </p:nvSpPr>
-        <p:spPr>
-          <a:xfrm>
-            <a:off x="8211312" y="2377440"/>
-            <a:ext cx="3200400" cy="731520"/>
-          </a:xfrm>
-          <a:prstGeom prst="rect">
-            <a:avLst/>
-          </a:prstGeom>
-          <a:noFill/>
-          <a:ln/>
-        </p:spPr>
-        <p:txBody>
-          <a:bodyPr wrap="square" lIns="0" tIns="0" rIns="0" bIns="0" rtlCol="0" anchor="ctr"/>
-          <a:lstStyle/>
-          <a:p>
-            <a:pPr algn="ctr" indent="0" marL="0">
-              <a:buNone/>
-            </a:pPr>
-            <a:r>
-              <a:rPr lang="en-US" sz="1100" i="1" dirty="0">
-                <a:solidFill>
-                  <a:srgbClr val="9E9E9E"/>
-                </a:solidFill>
-                <a:latin typeface="Malgun Gothic" pitchFamily="34" charset="0"/>
-                <a:ea typeface="Malgun Gothic" pitchFamily="34" charset="-122"/>
-                <a:cs typeface="Malgun Gothic" pitchFamily="34" charset="-120"/>
-              </a:rPr>
-              <a:t>자료 미제공 – 추후 업데이트</a:t>
-            </a:r>
-            <a:endParaRPr lang="en-US" sz="1100" dirty="0"/>
-          </a:p>
-        </p:txBody>
-      </p:sp>
-      <p:sp>
-        <p:nvSpPr>
-          <p:cNvPr id="18" name="Shape 15"/>
-          <p:cNvSpPr/>
-          <p:nvPr/>
-        </p:nvSpPr>
-        <p:spPr>
-          <a:xfrm>
-            <a:off x="530352" y="3520440"/>
-            <a:ext cx="11100816" cy="2103120"/>
-          </a:xfrm>
-          <a:prstGeom prst="roundRect">
-            <a:avLst>
-              <a:gd name="adj" fmla="val 3478"/>
-            </a:avLst>
-          </a:prstGeom>
-          <a:solidFill>
-            <a:srgbClr val="E6EEF7"/>
-          </a:solidFill>
-          <a:ln/>
-        </p:spPr>
-      </p:sp>
-      <p:sp>
-        <p:nvSpPr>
-          <p:cNvPr id="19" name="Text 16"/>
-          <p:cNvSpPr/>
-          <p:nvPr/>
-        </p:nvSpPr>
-        <p:spPr>
-          <a:xfrm>
-            <a:off x="777240" y="3657600"/>
-            <a:ext cx="4572000" cy="320040"/>
+          <p:cNvPr id="11" name="Text 8"/>
+          <p:cNvSpPr/>
+          <p:nvPr/>
+        </p:nvSpPr>
+        <p:spPr>
+          <a:xfrm>
+            <a:off x="530352" y="4114800"/>
+            <a:ext cx="5394960" cy="457200"/>
           </a:xfrm>
           <a:prstGeom prst="rect">
             <a:avLst/>
@@ -4105,15 +3882,15 @@
               <a:buNone/>
             </a:pPr>
             <a:r>
-              <a:rPr lang="en-US" sz="1300" b="1" dirty="0">
+              <a:rPr lang="en-US" sz="1300" i="1" dirty="0">
                 <a:solidFill>
-                  <a:srgbClr val="005BAC"/>
+                  <a:srgbClr val="9E9E9E"/>
                 </a:solidFill>
                 <a:latin typeface="Malgun Gothic" pitchFamily="34" charset="0"/>
                 <a:ea typeface="Malgun Gothic" pitchFamily="34" charset="-122"/>
                 <a:cs typeface="Malgun Gothic" pitchFamily="34" charset="-120"/>
               </a:rPr>
-              <a:t>고객 중심 Insight</a:t>
+              <a:t>Technical Academy — 자료 미제공 – 추후 업데이트</a:t>
             </a:r>
             <a:endParaRPr lang="en-US" sz="1300" dirty="0"/>
           </a:p>
@@ -4121,14 +3898,14 @@
       </p:sp>
       <p:sp>
         <p:nvSpPr>
-          <p:cNvPr id="20" name="Text 17"/>
-          <p:cNvSpPr/>
-          <p:nvPr/>
-        </p:nvSpPr>
-        <p:spPr>
-          <a:xfrm>
-            <a:off x="777240" y="4023360"/>
-            <a:ext cx="10607040" cy="1463040"/>
+          <p:cNvPr id="12" name="Text 9"/>
+          <p:cNvSpPr/>
+          <p:nvPr/>
+        </p:nvSpPr>
+        <p:spPr>
+          <a:xfrm>
+            <a:off x="6263640" y="4114800"/>
+            <a:ext cx="5394960" cy="457200"/>
           </a:xfrm>
           <a:prstGeom prst="rect">
             <a:avLst/>
@@ -4144,15 +3921,15 @@
               <a:buNone/>
             </a:pPr>
             <a:r>
-              <a:rPr lang="en-US" sz="1300" dirty="0">
+              <a:rPr lang="en-US" sz="1300" i="1" dirty="0">
                 <a:solidFill>
-                  <a:srgbClr val="3F3F3F"/>
+                  <a:srgbClr val="9E9E9E"/>
                 </a:solidFill>
                 <a:latin typeface="Malgun Gothic" pitchFamily="34" charset="0"/>
                 <a:ea typeface="Malgun Gothic" pitchFamily="34" charset="-122"/>
                 <a:cs typeface="Malgun Gothic" pitchFamily="34" charset="-120"/>
               </a:rPr>
-              <a:t>설치일정 CRM 데이터 분석 결과 (2026년 7월): 강남차병원·강남차여성병원 프로젝트(XR-9000/XR-1000)는 담당 엔지니어(Martin)가 설치 → 평가 지원 → 이전설치까지 4건을 연속 담당해 책임 담당제의 고객 연속성을 보여주는 우수 사례입니다. 설치·이전설치 평균 소요기간은 1.25일로 신속하게 처리되었으나, FS South팀은 7월 설치 실적 0건으로 팀간 업무량 편차 확인이 필요합니다.</a:t>
+              <a:t>Working Group — 자료 미제공 – 추후 업데이트</a:t>
             </a:r>
             <a:endParaRPr lang="en-US" sz="1300" dirty="0"/>
           </a:p>
@@ -4160,7 +3937,7 @@
       </p:sp>
       <p:sp>
         <p:nvSpPr>
-          <p:cNvPr id="21" name="Text 18"/>
+          <p:cNvPr id="13" name="Text 10"/>
           <p:cNvSpPr/>
           <p:nvPr/>
         </p:nvSpPr>
@@ -4199,7 +3976,7 @@
       </p:sp>
       <p:sp>
         <p:nvSpPr>
-          <p:cNvPr id="22" name="Text 19"/>
+          <p:cNvPr id="14" name="Text 11"/>
           <p:cNvSpPr/>
           <p:nvPr/>
         </p:nvSpPr>
@@ -4360,6 +4137,755 @@
                 <a:ea typeface="Malgun Gothic" pitchFamily="34" charset="-122"/>
                 <a:cs typeface="Malgun Gothic" pitchFamily="34" charset="-120"/>
               </a:rPr>
+              <a:t>고객 중심 서비스 하이라이트</a:t>
+            </a:r>
+            <a:endParaRPr lang="en-US" sz="2600" dirty="0"/>
+          </a:p>
+        </p:txBody>
+      </p:sp>
+      <p:pic>
+        <p:nvPicPr>
+          <p:cNvPr id="5" name="Image 0" descr="sysmex_logo_mono_blue.png">    </p:cNvPr>
+          <p:cNvPicPr>
+            <a:picLocks noChangeAspect="1"/>
+          </p:cNvPicPr>
+          <p:nvPr/>
+        </p:nvPicPr>
+        <p:blipFill>
+          <a:blip r:embed="rId1"/>
+          <a:stretch>
+            <a:fillRect/>
+          </a:stretch>
+        </p:blipFill>
+        <p:spPr>
+          <a:xfrm>
+            <a:off x="10652760" y="292608"/>
+            <a:ext cx="1097280" cy="420624"/>
+          </a:xfrm>
+          <a:prstGeom prst="rect">
+            <a:avLst/>
+          </a:prstGeom>
+        </p:spPr>
+      </p:pic>
+      <p:sp>
+        <p:nvSpPr>
+          <p:cNvPr id="6" name="Shape 3"/>
+          <p:cNvSpPr/>
+          <p:nvPr/>
+        </p:nvSpPr>
+        <p:spPr>
+          <a:xfrm>
+            <a:off x="530352" y="1234440"/>
+            <a:ext cx="3566160" cy="2011680"/>
+          </a:xfrm>
+          <a:prstGeom prst="roundRect">
+            <a:avLst>
+              <a:gd name="adj" fmla="val 3636"/>
+            </a:avLst>
+          </a:prstGeom>
+          <a:solidFill>
+            <a:srgbClr val="F5F8FC"/>
+          </a:solidFill>
+          <a:ln/>
+        </p:spPr>
+      </p:sp>
+      <p:sp>
+        <p:nvSpPr>
+          <p:cNvPr id="7" name="Text 4"/>
+          <p:cNvSpPr/>
+          <p:nvPr/>
+        </p:nvSpPr>
+        <p:spPr>
+          <a:xfrm>
+            <a:off x="713232" y="1417320"/>
+            <a:ext cx="3200400" cy="457200"/>
+          </a:xfrm>
+          <a:prstGeom prst="rect">
+            <a:avLst/>
+          </a:prstGeom>
+          <a:noFill/>
+          <a:ln/>
+        </p:spPr>
+        <p:txBody>
+          <a:bodyPr wrap="square" lIns="0" tIns="0" rIns="0" bIns="0" rtlCol="0" anchor="ctr"/>
+          <a:lstStyle/>
+          <a:p>
+            <a:pPr algn="ctr" indent="0" marL="0">
+              <a:buNone/>
+            </a:pPr>
+            <a:r>
+              <a:rPr lang="en-US" sz="1500" b="1" dirty="0">
+                <a:solidFill>
+                  <a:srgbClr val="005BAC"/>
+                </a:solidFill>
+                <a:latin typeface="Malgun Gothic" pitchFamily="34" charset="0"/>
+                <a:ea typeface="Malgun Gothic" pitchFamily="34" charset="-122"/>
+                <a:cs typeface="Malgun Gothic" pitchFamily="34" charset="-120"/>
+              </a:rPr>
+              <a:t>VOC 대응</a:t>
+            </a:r>
+            <a:endParaRPr lang="en-US" sz="1500" dirty="0"/>
+          </a:p>
+        </p:txBody>
+      </p:sp>
+      <p:sp>
+        <p:nvSpPr>
+          <p:cNvPr id="8" name="Text 5"/>
+          <p:cNvSpPr/>
+          <p:nvPr/>
+        </p:nvSpPr>
+        <p:spPr>
+          <a:xfrm>
+            <a:off x="713232" y="1920240"/>
+            <a:ext cx="3200400" cy="365760"/>
+          </a:xfrm>
+          <a:prstGeom prst="rect">
+            <a:avLst/>
+          </a:prstGeom>
+          <a:noFill/>
+          <a:ln/>
+        </p:spPr>
+        <p:txBody>
+          <a:bodyPr wrap="square" lIns="0" tIns="0" rIns="0" bIns="0" rtlCol="0" anchor="ctr"/>
+          <a:lstStyle/>
+          <a:p>
+            <a:pPr algn="ctr" indent="0" marL="0">
+              <a:buNone/>
+            </a:pPr>
+            <a:r>
+              <a:rPr lang="en-US" sz="1100" dirty="0">
+                <a:solidFill>
+                  <a:srgbClr val="3F3F3F"/>
+                </a:solidFill>
+                <a:latin typeface="Malgun Gothic" pitchFamily="34" charset="0"/>
+                <a:ea typeface="Malgun Gothic" pitchFamily="34" charset="-122"/>
+                <a:cs typeface="Malgun Gothic" pitchFamily="34" charset="-120"/>
+              </a:rPr>
+              <a:t>고객 피드백 기반 개선</a:t>
+            </a:r>
+            <a:endParaRPr lang="en-US" sz="1100" dirty="0"/>
+          </a:p>
+        </p:txBody>
+      </p:sp>
+      <p:sp>
+        <p:nvSpPr>
+          <p:cNvPr id="9" name="Text 6"/>
+          <p:cNvSpPr/>
+          <p:nvPr/>
+        </p:nvSpPr>
+        <p:spPr>
+          <a:xfrm>
+            <a:off x="713232" y="2377440"/>
+            <a:ext cx="3200400" cy="731520"/>
+          </a:xfrm>
+          <a:prstGeom prst="rect">
+            <a:avLst/>
+          </a:prstGeom>
+          <a:noFill/>
+          <a:ln/>
+        </p:spPr>
+        <p:txBody>
+          <a:bodyPr wrap="square" lIns="0" tIns="0" rIns="0" bIns="0" rtlCol="0" anchor="ctr"/>
+          <a:lstStyle/>
+          <a:p>
+            <a:pPr algn="ctr" indent="0" marL="0">
+              <a:buNone/>
+            </a:pPr>
+            <a:r>
+              <a:rPr lang="en-US" sz="1100" i="1" dirty="0">
+                <a:solidFill>
+                  <a:srgbClr val="9E9E9E"/>
+                </a:solidFill>
+                <a:latin typeface="Malgun Gothic" pitchFamily="34" charset="0"/>
+                <a:ea typeface="Malgun Gothic" pitchFamily="34" charset="-122"/>
+                <a:cs typeface="Malgun Gothic" pitchFamily="34" charset="-120"/>
+              </a:rPr>
+              <a:t>자료 미제공 – 추후 업데이트</a:t>
+            </a:r>
+            <a:endParaRPr lang="en-US" sz="1100" dirty="0"/>
+          </a:p>
+        </p:txBody>
+      </p:sp>
+      <p:sp>
+        <p:nvSpPr>
+          <p:cNvPr id="10" name="Shape 7"/>
+          <p:cNvSpPr/>
+          <p:nvPr/>
+        </p:nvSpPr>
+        <p:spPr>
+          <a:xfrm>
+            <a:off x="4279392" y="1234440"/>
+            <a:ext cx="3566160" cy="2011680"/>
+          </a:xfrm>
+          <a:prstGeom prst="roundRect">
+            <a:avLst>
+              <a:gd name="adj" fmla="val 3636"/>
+            </a:avLst>
+          </a:prstGeom>
+          <a:solidFill>
+            <a:srgbClr val="F5F8FC"/>
+          </a:solidFill>
+          <a:ln/>
+        </p:spPr>
+      </p:sp>
+      <p:sp>
+        <p:nvSpPr>
+          <p:cNvPr id="11" name="Text 8"/>
+          <p:cNvSpPr/>
+          <p:nvPr/>
+        </p:nvSpPr>
+        <p:spPr>
+          <a:xfrm>
+            <a:off x="4462272" y="1417320"/>
+            <a:ext cx="3200400" cy="457200"/>
+          </a:xfrm>
+          <a:prstGeom prst="rect">
+            <a:avLst/>
+          </a:prstGeom>
+          <a:noFill/>
+          <a:ln/>
+        </p:spPr>
+        <p:txBody>
+          <a:bodyPr wrap="square" lIns="0" tIns="0" rIns="0" bIns="0" rtlCol="0" anchor="ctr"/>
+          <a:lstStyle/>
+          <a:p>
+            <a:pPr algn="ctr" indent="0" marL="0">
+              <a:buNone/>
+            </a:pPr>
+            <a:r>
+              <a:rPr lang="en-US" sz="1500" b="1" dirty="0">
+                <a:solidFill>
+                  <a:srgbClr val="005BAC"/>
+                </a:solidFill>
+                <a:latin typeface="Malgun Gothic" pitchFamily="34" charset="0"/>
+                <a:ea typeface="Malgun Gothic" pitchFamily="34" charset="-122"/>
+                <a:cs typeface="Malgun Gothic" pitchFamily="34" charset="-120"/>
+              </a:rPr>
+              <a:t>중대 이슈 대응력</a:t>
+            </a:r>
+            <a:endParaRPr lang="en-US" sz="1500" dirty="0"/>
+          </a:p>
+        </p:txBody>
+      </p:sp>
+      <p:sp>
+        <p:nvSpPr>
+          <p:cNvPr id="12" name="Text 9"/>
+          <p:cNvSpPr/>
+          <p:nvPr/>
+        </p:nvSpPr>
+        <p:spPr>
+          <a:xfrm>
+            <a:off x="4462272" y="1920240"/>
+            <a:ext cx="3200400" cy="365760"/>
+          </a:xfrm>
+          <a:prstGeom prst="rect">
+            <a:avLst/>
+          </a:prstGeom>
+          <a:noFill/>
+          <a:ln/>
+        </p:spPr>
+        <p:txBody>
+          <a:bodyPr wrap="square" lIns="0" tIns="0" rIns="0" bIns="0" rtlCol="0" anchor="ctr"/>
+          <a:lstStyle/>
+          <a:p>
+            <a:pPr algn="ctr" indent="0" marL="0">
+              <a:buNone/>
+            </a:pPr>
+            <a:r>
+              <a:rPr lang="en-US" sz="1100" dirty="0">
+                <a:solidFill>
+                  <a:srgbClr val="3F3F3F"/>
+                </a:solidFill>
+                <a:latin typeface="Malgun Gothic" pitchFamily="34" charset="0"/>
+                <a:ea typeface="Malgun Gothic" pitchFamily="34" charset="-122"/>
+                <a:cs typeface="Malgun Gothic" pitchFamily="34" charset="-120"/>
+              </a:rPr>
+              <a:t>SLA 준수 · 신속 종결</a:t>
+            </a:r>
+            <a:endParaRPr lang="en-US" sz="1100" dirty="0"/>
+          </a:p>
+        </p:txBody>
+      </p:sp>
+      <p:sp>
+        <p:nvSpPr>
+          <p:cNvPr id="13" name="Text 10"/>
+          <p:cNvSpPr/>
+          <p:nvPr/>
+        </p:nvSpPr>
+        <p:spPr>
+          <a:xfrm>
+            <a:off x="4462272" y="2377440"/>
+            <a:ext cx="3200400" cy="731520"/>
+          </a:xfrm>
+          <a:prstGeom prst="rect">
+            <a:avLst/>
+          </a:prstGeom>
+          <a:noFill/>
+          <a:ln/>
+        </p:spPr>
+        <p:txBody>
+          <a:bodyPr wrap="square" lIns="0" tIns="0" rIns="0" bIns="0" rtlCol="0" anchor="ctr"/>
+          <a:lstStyle/>
+          <a:p>
+            <a:pPr algn="ctr" indent="0" marL="0">
+              <a:buNone/>
+            </a:pPr>
+            <a:r>
+              <a:rPr lang="en-US" sz="1100" i="1" dirty="0">
+                <a:solidFill>
+                  <a:srgbClr val="9E9E9E"/>
+                </a:solidFill>
+                <a:latin typeface="Malgun Gothic" pitchFamily="34" charset="0"/>
+                <a:ea typeface="Malgun Gothic" pitchFamily="34" charset="-122"/>
+                <a:cs typeface="Malgun Gothic" pitchFamily="34" charset="-120"/>
+              </a:rPr>
+              <a:t>자료 미제공 – 추후 업데이트</a:t>
+            </a:r>
+            <a:endParaRPr lang="en-US" sz="1100" dirty="0"/>
+          </a:p>
+        </p:txBody>
+      </p:sp>
+      <p:sp>
+        <p:nvSpPr>
+          <p:cNvPr id="14" name="Shape 11"/>
+          <p:cNvSpPr/>
+          <p:nvPr/>
+        </p:nvSpPr>
+        <p:spPr>
+          <a:xfrm>
+            <a:off x="8028432" y="1234440"/>
+            <a:ext cx="3566160" cy="2011680"/>
+          </a:xfrm>
+          <a:prstGeom prst="roundRect">
+            <a:avLst>
+              <a:gd name="adj" fmla="val 3636"/>
+            </a:avLst>
+          </a:prstGeom>
+          <a:solidFill>
+            <a:srgbClr val="F5F8FC"/>
+          </a:solidFill>
+          <a:ln/>
+        </p:spPr>
+      </p:sp>
+      <p:sp>
+        <p:nvSpPr>
+          <p:cNvPr id="15" name="Text 12"/>
+          <p:cNvSpPr/>
+          <p:nvPr/>
+        </p:nvSpPr>
+        <p:spPr>
+          <a:xfrm>
+            <a:off x="8211312" y="1417320"/>
+            <a:ext cx="3200400" cy="457200"/>
+          </a:xfrm>
+          <a:prstGeom prst="rect">
+            <a:avLst/>
+          </a:prstGeom>
+          <a:noFill/>
+          <a:ln/>
+        </p:spPr>
+        <p:txBody>
+          <a:bodyPr wrap="square" lIns="0" tIns="0" rIns="0" bIns="0" rtlCol="0" anchor="ctr"/>
+          <a:lstStyle/>
+          <a:p>
+            <a:pPr algn="ctr" indent="0" marL="0">
+              <a:buNone/>
+            </a:pPr>
+            <a:r>
+              <a:rPr lang="en-US" sz="1500" b="1" dirty="0">
+                <a:solidFill>
+                  <a:srgbClr val="005BAC"/>
+                </a:solidFill>
+                <a:latin typeface="Malgun Gothic" pitchFamily="34" charset="0"/>
+                <a:ea typeface="Malgun Gothic" pitchFamily="34" charset="-122"/>
+                <a:cs typeface="Malgun Gothic" pitchFamily="34" charset="-120"/>
+              </a:rPr>
+              <a:t>대리점/직원 역량</a:t>
+            </a:r>
+            <a:endParaRPr lang="en-US" sz="1500" dirty="0"/>
+          </a:p>
+        </p:txBody>
+      </p:sp>
+      <p:sp>
+        <p:nvSpPr>
+          <p:cNvPr id="16" name="Text 13"/>
+          <p:cNvSpPr/>
+          <p:nvPr/>
+        </p:nvSpPr>
+        <p:spPr>
+          <a:xfrm>
+            <a:off x="8211312" y="1920240"/>
+            <a:ext cx="3200400" cy="365760"/>
+          </a:xfrm>
+          <a:prstGeom prst="rect">
+            <a:avLst/>
+          </a:prstGeom>
+          <a:noFill/>
+          <a:ln/>
+        </p:spPr>
+        <p:txBody>
+          <a:bodyPr wrap="square" lIns="0" tIns="0" rIns="0" bIns="0" rtlCol="0" anchor="ctr"/>
+          <a:lstStyle/>
+          <a:p>
+            <a:pPr algn="ctr" indent="0" marL="0">
+              <a:buNone/>
+            </a:pPr>
+            <a:r>
+              <a:rPr lang="en-US" sz="1100" dirty="0">
+                <a:solidFill>
+                  <a:srgbClr val="3F3F3F"/>
+                </a:solidFill>
+                <a:latin typeface="Malgun Gothic" pitchFamily="34" charset="0"/>
+                <a:ea typeface="Malgun Gothic" pitchFamily="34" charset="-122"/>
+                <a:cs typeface="Malgun Gothic" pitchFamily="34" charset="-120"/>
+              </a:rPr>
+              <a:t>교육 통한 서비스 품질 제고</a:t>
+            </a:r>
+            <a:endParaRPr lang="en-US" sz="1100" dirty="0"/>
+          </a:p>
+        </p:txBody>
+      </p:sp>
+      <p:sp>
+        <p:nvSpPr>
+          <p:cNvPr id="17" name="Text 14"/>
+          <p:cNvSpPr/>
+          <p:nvPr/>
+        </p:nvSpPr>
+        <p:spPr>
+          <a:xfrm>
+            <a:off x="8211312" y="2377440"/>
+            <a:ext cx="3200400" cy="731520"/>
+          </a:xfrm>
+          <a:prstGeom prst="rect">
+            <a:avLst/>
+          </a:prstGeom>
+          <a:noFill/>
+          <a:ln/>
+        </p:spPr>
+        <p:txBody>
+          <a:bodyPr wrap="square" lIns="0" tIns="0" rIns="0" bIns="0" rtlCol="0" anchor="ctr"/>
+          <a:lstStyle/>
+          <a:p>
+            <a:pPr algn="ctr" indent="0" marL="0">
+              <a:buNone/>
+            </a:pPr>
+            <a:r>
+              <a:rPr lang="en-US" sz="1100" i="1" dirty="0">
+                <a:solidFill>
+                  <a:srgbClr val="9E9E9E"/>
+                </a:solidFill>
+                <a:latin typeface="Malgun Gothic" pitchFamily="34" charset="0"/>
+                <a:ea typeface="Malgun Gothic" pitchFamily="34" charset="-122"/>
+                <a:cs typeface="Malgun Gothic" pitchFamily="34" charset="-120"/>
+              </a:rPr>
+              <a:t>자료 미제공 – 추후 업데이트</a:t>
+            </a:r>
+            <a:endParaRPr lang="en-US" sz="1100" dirty="0"/>
+          </a:p>
+        </p:txBody>
+      </p:sp>
+      <p:sp>
+        <p:nvSpPr>
+          <p:cNvPr id="18" name="Shape 15"/>
+          <p:cNvSpPr/>
+          <p:nvPr/>
+        </p:nvSpPr>
+        <p:spPr>
+          <a:xfrm>
+            <a:off x="530352" y="3520440"/>
+            <a:ext cx="11100816" cy="2103120"/>
+          </a:xfrm>
+          <a:prstGeom prst="roundRect">
+            <a:avLst>
+              <a:gd name="adj" fmla="val 3478"/>
+            </a:avLst>
+          </a:prstGeom>
+          <a:solidFill>
+            <a:srgbClr val="E6EEF7"/>
+          </a:solidFill>
+          <a:ln/>
+        </p:spPr>
+      </p:sp>
+      <p:sp>
+        <p:nvSpPr>
+          <p:cNvPr id="19" name="Text 16"/>
+          <p:cNvSpPr/>
+          <p:nvPr/>
+        </p:nvSpPr>
+        <p:spPr>
+          <a:xfrm>
+            <a:off x="777240" y="3657600"/>
+            <a:ext cx="4572000" cy="320040"/>
+          </a:xfrm>
+          <a:prstGeom prst="rect">
+            <a:avLst/>
+          </a:prstGeom>
+          <a:noFill/>
+          <a:ln/>
+        </p:spPr>
+        <p:txBody>
+          <a:bodyPr wrap="square" lIns="0" tIns="0" rIns="0" bIns="0" rtlCol="0" anchor="ctr"/>
+          <a:lstStyle/>
+          <a:p>
+            <a:pPr indent="0" marL="0">
+              <a:buNone/>
+            </a:pPr>
+            <a:r>
+              <a:rPr lang="en-US" sz="1300" b="1" dirty="0">
+                <a:solidFill>
+                  <a:srgbClr val="005BAC"/>
+                </a:solidFill>
+                <a:latin typeface="Malgun Gothic" pitchFamily="34" charset="0"/>
+                <a:ea typeface="Malgun Gothic" pitchFamily="34" charset="-122"/>
+                <a:cs typeface="Malgun Gothic" pitchFamily="34" charset="-120"/>
+              </a:rPr>
+              <a:t>고객 중심 Insight</a:t>
+            </a:r>
+            <a:endParaRPr lang="en-US" sz="1300" dirty="0"/>
+          </a:p>
+        </p:txBody>
+      </p:sp>
+      <p:sp>
+        <p:nvSpPr>
+          <p:cNvPr id="20" name="Text 17"/>
+          <p:cNvSpPr/>
+          <p:nvPr/>
+        </p:nvSpPr>
+        <p:spPr>
+          <a:xfrm>
+            <a:off x="777240" y="4023360"/>
+            <a:ext cx="10607040" cy="1463040"/>
+          </a:xfrm>
+          <a:prstGeom prst="rect">
+            <a:avLst/>
+          </a:prstGeom>
+          <a:noFill/>
+          <a:ln/>
+        </p:spPr>
+        <p:txBody>
+          <a:bodyPr wrap="square" lIns="0" tIns="0" rIns="0" bIns="0" rtlCol="0" anchor="ctr"/>
+          <a:lstStyle/>
+          <a:p>
+            <a:pPr indent="0" marL="0">
+              <a:buNone/>
+            </a:pPr>
+            <a:r>
+              <a:rPr lang="en-US" sz="1300" dirty="0">
+                <a:solidFill>
+                  <a:srgbClr val="3F3F3F"/>
+                </a:solidFill>
+                <a:latin typeface="Malgun Gothic" pitchFamily="34" charset="0"/>
+                <a:ea typeface="Malgun Gothic" pitchFamily="34" charset="-122"/>
+                <a:cs typeface="Malgun Gothic" pitchFamily="34" charset="-120"/>
+              </a:rPr>
+              <a:t>설치일정 스케쥴러 데이터 분석 결과 (2026년 7월): 강남차병원·강남차여성병원 프로젝트(XR-9000/XR-1000)는 담당 엔지니어(김세진)가 설치 → 평가 지원 → 이전설치까지 4건을 연속 담당해 책임 담당제의 고객 연속성을 보여주는 우수 사례입니다. 설치·이전설치 평균 소요기간은 1.25일로 신속하게 처리되었으나, FS South팀은 7월 설치 실적 0건으로 팀간 업무량 편차 확인이 필요합니다.</a:t>
+            </a:r>
+            <a:endParaRPr lang="en-US" sz="1300" dirty="0"/>
+          </a:p>
+        </p:txBody>
+      </p:sp>
+      <p:sp>
+        <p:nvSpPr>
+          <p:cNvPr id="21" name="Text 18"/>
+          <p:cNvSpPr/>
+          <p:nvPr/>
+        </p:nvSpPr>
+        <p:spPr>
+          <a:xfrm>
+            <a:off x="457200" y="6547104"/>
+            <a:ext cx="9601200" cy="274320"/>
+          </a:xfrm>
+          <a:prstGeom prst="rect">
+            <a:avLst/>
+          </a:prstGeom>
+          <a:noFill/>
+          <a:ln/>
+        </p:spPr>
+        <p:txBody>
+          <a:bodyPr wrap="square" rtlCol="0" anchor="ctr"/>
+          <a:lstStyle/>
+          <a:p>
+            <a:pPr algn="l" indent="0" marL="0">
+              <a:buNone/>
+            </a:pPr>
+            <a:r>
+              <a:rPr lang="en-US" sz="900" dirty="0">
+                <a:solidFill>
+                  <a:srgbClr val="9E9E9E"/>
+                </a:solidFill>
+                <a:latin typeface="Malgun Gothic" pitchFamily="34" charset="0"/>
+                <a:ea typeface="Malgun Gothic" pitchFamily="34" charset="-122"/>
+                <a:cs typeface="Malgun Gothic" pitchFamily="34" charset="-120"/>
+              </a:rPr>
+              <a:t>FS Group │ FSS Team · 2026년 7월 · Confidential</a:t>
+            </a:r>
+            <a:endParaRPr lang="en-US" sz="900" dirty="0"/>
+          </a:p>
+        </p:txBody>
+      </p:sp>
+      <p:sp>
+        <p:nvSpPr>
+          <p:cNvPr id="22" name="Text 19"/>
+          <p:cNvSpPr/>
+          <p:nvPr/>
+        </p:nvSpPr>
+        <p:spPr>
+          <a:xfrm>
+            <a:off x="11247120" y="6547104"/>
+            <a:ext cx="731520" cy="274320"/>
+          </a:xfrm>
+          <a:prstGeom prst="rect">
+            <a:avLst/>
+          </a:prstGeom>
+          <a:noFill/>
+          <a:ln/>
+        </p:spPr>
+        <p:txBody>
+          <a:bodyPr wrap="square" rtlCol="0" anchor="ctr"/>
+          <a:lstStyle/>
+          <a:p>
+            <a:pPr algn="r" indent="0" marL="0">
+              <a:buNone/>
+            </a:pPr>
+            <a:r>
+              <a:rPr lang="en-US" sz="900" dirty="0">
+                <a:solidFill>
+                  <a:srgbClr val="9E9E9E"/>
+                </a:solidFill>
+                <a:latin typeface="Arial" pitchFamily="34" charset="0"/>
+                <a:ea typeface="Arial" pitchFamily="34" charset="-122"/>
+                <a:cs typeface="Arial" pitchFamily="34" charset="-120"/>
+              </a:rPr>
+              <a:t>13</a:t>
+            </a:r>
+            <a:endParaRPr lang="en-US" sz="900" dirty="0"/>
+          </a:p>
+        </p:txBody>
+      </p:sp>
+    </p:spTree>
+  </p:cSld>
+  <p:clrMapOvr>
+    <a:masterClrMapping/>
+  </p:clrMapOvr>
+</p:sld>
+</file>
+
+<file path=ppt/slides/slide14.xml><?xml version="1.0" encoding="utf-8"?>
+<p:sld xmlns:a="http://schemas.openxmlformats.org/drawingml/2006/main" xmlns:r="http://schemas.openxmlformats.org/officeDocument/2006/relationships" xmlns:p="http://schemas.openxmlformats.org/presentationml/2006/main">
+  <p:cSld name="Slide 14">
+    <p:bg>
+      <p:bgPr>
+        <a:solidFill>
+          <a:srgbClr val="FFFFFF"/>
+        </a:solidFill>
+      </p:bgPr>
+    </p:bg>
+    <p:spTree>
+      <p:nvGrpSpPr>
+        <p:cNvPr id="1" name=""/>
+        <p:cNvGrpSpPr/>
+        <p:nvPr/>
+      </p:nvGrpSpPr>
+      <p:grpSpPr>
+        <a:xfrm>
+          <a:off x="0" y="0"/>
+          <a:ext cx="0" cy="0"/>
+          <a:chOff x="0" y="0"/>
+          <a:chExt cx="0" cy="0"/>
+        </a:xfrm>
+      </p:grpSpPr>
+      <p:sp>
+        <p:nvSpPr>
+          <p:cNvPr id="2" name="Shape 0"/>
+          <p:cNvSpPr/>
+          <p:nvPr/>
+        </p:nvSpPr>
+        <p:spPr>
+          <a:xfrm>
+            <a:off x="0" y="0"/>
+            <a:ext cx="10378440" cy="914400"/>
+          </a:xfrm>
+          <a:prstGeom prst="rect">
+            <a:avLst/>
+          </a:prstGeom>
+          <a:solidFill>
+            <a:srgbClr val="005BAC"/>
+          </a:solidFill>
+          <a:ln/>
+        </p:spPr>
+      </p:sp>
+      <p:sp>
+        <p:nvSpPr>
+          <p:cNvPr id="3" name="Text 1"/>
+          <p:cNvSpPr/>
+          <p:nvPr/>
+        </p:nvSpPr>
+        <p:spPr>
+          <a:xfrm>
+            <a:off x="502920" y="164592"/>
+            <a:ext cx="822960" cy="585216"/>
+          </a:xfrm>
+          <a:prstGeom prst="rect">
+            <a:avLst/>
+          </a:prstGeom>
+          <a:noFill/>
+          <a:ln/>
+        </p:spPr>
+        <p:txBody>
+          <a:bodyPr wrap="square" lIns="0" tIns="0" rIns="0" bIns="0" rtlCol="0" anchor="ctr"/>
+          <a:lstStyle/>
+          <a:p>
+            <a:pPr algn="l" indent="0" marL="0">
+              <a:buNone/>
+            </a:pPr>
+            <a:r>
+              <a:rPr lang="en-US" sz="3000" b="1" dirty="0">
+                <a:solidFill>
+                  <a:srgbClr val="00B8EE"/>
+                </a:solidFill>
+                <a:latin typeface="Arial" pitchFamily="34" charset="0"/>
+                <a:ea typeface="Arial" pitchFamily="34" charset="-122"/>
+                <a:cs typeface="Arial" pitchFamily="34" charset="-120"/>
+              </a:rPr>
+              <a:t>14</a:t>
+            </a:r>
+            <a:endParaRPr lang="en-US" sz="3000" dirty="0"/>
+          </a:p>
+        </p:txBody>
+      </p:sp>
+      <p:sp>
+        <p:nvSpPr>
+          <p:cNvPr id="4" name="Text 2"/>
+          <p:cNvSpPr/>
+          <p:nvPr/>
+        </p:nvSpPr>
+        <p:spPr>
+          <a:xfrm>
+            <a:off x="1234440" y="164592"/>
+            <a:ext cx="8595360" cy="585216"/>
+          </a:xfrm>
+          <a:prstGeom prst="rect">
+            <a:avLst/>
+          </a:prstGeom>
+          <a:noFill/>
+          <a:ln/>
+        </p:spPr>
+        <p:txBody>
+          <a:bodyPr wrap="square" lIns="0" tIns="0" rIns="0" bIns="0" rtlCol="0" anchor="ctr"/>
+          <a:lstStyle/>
+          <a:p>
+            <a:pPr algn="l" indent="0" marL="0">
+              <a:buNone/>
+            </a:pPr>
+            <a:r>
+              <a:rPr lang="en-US" sz="2600" b="1" dirty="0">
+                <a:solidFill>
+                  <a:srgbClr val="FFFFFF"/>
+                </a:solidFill>
+                <a:latin typeface="Malgun Gothic" pitchFamily="34" charset="0"/>
+                <a:ea typeface="Malgun Gothic" pitchFamily="34" charset="-122"/>
+                <a:cs typeface="Malgun Gothic" pitchFamily="34" charset="-120"/>
+              </a:rPr>
               <a:t>Next Step</a:t>
             </a:r>
             <a:endParaRPr lang="en-US" sz="2600" dirty="0"/>
@@ -4521,7 +5047,7 @@
                 <a:ea typeface="Malgun Gothic" pitchFamily="34" charset="-122"/>
                 <a:cs typeface="Malgun Gothic" pitchFamily="34" charset="-120"/>
               </a:rPr>
-              <a:t>설치일정 CRM 기준 8월 예정 16건(설치 9 · 평가 5 · 이전설치 2) 사전 리소스 배정 및 일정 조율</a:t>
+              <a:t>설치일정 스케쥴러 기준 8월 예정 16건(설치 9 · 평가 5 · 이전설치 2) 사전 리소스 배정 및 일정 조율</a:t>
             </a:r>
             <a:endParaRPr lang="en-US" sz="1200" dirty="0"/>
           </a:p>
@@ -5010,7 +5536,7 @@
                 <a:ea typeface="Arial" pitchFamily="34" charset="-122"/>
                 <a:cs typeface="Arial" pitchFamily="34" charset="-120"/>
               </a:rPr>
-              <a:t>13</a:t>
+              <a:t>14</a:t>
             </a:r>
             <a:endParaRPr lang="en-US" sz="900" dirty="0"/>
           </a:p>
@@ -5673,6 +6199,143 @@
                 <a:ea typeface="Malgun Gothic" pitchFamily="34" charset="-122"/>
                 <a:cs typeface="Malgun Gothic" pitchFamily="34" charset="-120"/>
               </a:rPr>
+              <a:t>월간 트렌드 비교</a:t>
+            </a:r>
+            <a:endParaRPr lang="en-US" sz="1400" dirty="0"/>
+          </a:p>
+        </p:txBody>
+      </p:sp>
+      <p:sp>
+        <p:nvSpPr>
+          <p:cNvPr id="21" name="Text 18"/>
+          <p:cNvSpPr/>
+          <p:nvPr/>
+        </p:nvSpPr>
+        <p:spPr>
+          <a:xfrm>
+            <a:off x="1207008" y="4553712"/>
+            <a:ext cx="4572000" cy="548640"/>
+          </a:xfrm>
+          <a:prstGeom prst="rect">
+            <a:avLst/>
+          </a:prstGeom>
+          <a:noFill/>
+          <a:ln/>
+        </p:spPr>
+        <p:txBody>
+          <a:bodyPr wrap="square" lIns="0" tIns="0" rIns="0" bIns="0" rtlCol="0" anchor="ctr"/>
+          <a:lstStyle/>
+          <a:p>
+            <a:pPr indent="0" marL="0">
+              <a:buNone/>
+            </a:pPr>
+            <a:r>
+              <a:rPr lang="en-US" sz="1050" i="1" dirty="0">
+                <a:solidFill>
+                  <a:srgbClr val="9E9E9E"/>
+                </a:solidFill>
+                <a:latin typeface="Malgun Gothic" pitchFamily="34" charset="0"/>
+                <a:ea typeface="Malgun Gothic" pitchFamily="34" charset="-122"/>
+                <a:cs typeface="Malgun Gothic" pitchFamily="34" charset="-120"/>
+              </a:rPr>
+              <a:t>조직개편(4월) 전후 방문·수리·PM건수 비교</a:t>
+            </a:r>
+            <a:endParaRPr lang="en-US" sz="1050" dirty="0"/>
+          </a:p>
+        </p:txBody>
+      </p:sp>
+      <p:sp>
+        <p:nvSpPr>
+          <p:cNvPr id="22" name="Shape 19"/>
+          <p:cNvSpPr/>
+          <p:nvPr/>
+        </p:nvSpPr>
+        <p:spPr>
+          <a:xfrm>
+            <a:off x="548640" y="5303520"/>
+            <a:ext cx="457200" cy="457200"/>
+          </a:xfrm>
+          <a:prstGeom prst="ellipse">
+            <a:avLst/>
+          </a:prstGeom>
+          <a:solidFill>
+            <a:srgbClr val="005BAC"/>
+          </a:solidFill>
+          <a:ln/>
+        </p:spPr>
+      </p:sp>
+      <p:sp>
+        <p:nvSpPr>
+          <p:cNvPr id="23" name="Text 20"/>
+          <p:cNvSpPr/>
+          <p:nvPr/>
+        </p:nvSpPr>
+        <p:spPr>
+          <a:xfrm>
+            <a:off x="548640" y="5303520"/>
+            <a:ext cx="457200" cy="457200"/>
+          </a:xfrm>
+          <a:prstGeom prst="rect">
+            <a:avLst/>
+          </a:prstGeom>
+          <a:noFill/>
+          <a:ln/>
+        </p:spPr>
+        <p:txBody>
+          <a:bodyPr wrap="square" lIns="0" tIns="0" rIns="0" bIns="0" rtlCol="0" anchor="ctr"/>
+          <a:lstStyle/>
+          <a:p>
+            <a:pPr algn="ctr" indent="0" marL="0">
+              <a:buNone/>
+            </a:pPr>
+            <a:r>
+              <a:rPr lang="en-US" sz="1600" b="1" dirty="0">
+                <a:solidFill>
+                  <a:srgbClr val="FFFFFF"/>
+                </a:solidFill>
+                <a:latin typeface="Arial" pitchFamily="34" charset="0"/>
+                <a:ea typeface="Arial" pitchFamily="34" charset="-122"/>
+                <a:cs typeface="Arial" pitchFamily="34" charset="-120"/>
+              </a:rPr>
+              <a:t>5</a:t>
+            </a:r>
+            <a:endParaRPr lang="en-US" sz="1600" dirty="0"/>
+          </a:p>
+        </p:txBody>
+      </p:sp>
+      <p:sp>
+        <p:nvSpPr>
+          <p:cNvPr id="24" name="Text 21"/>
+          <p:cNvSpPr/>
+          <p:nvPr/>
+        </p:nvSpPr>
+        <p:spPr>
+          <a:xfrm>
+            <a:off x="1207008" y="5212080"/>
+            <a:ext cx="4572000" cy="347472"/>
+          </a:xfrm>
+          <a:prstGeom prst="rect">
+            <a:avLst/>
+          </a:prstGeom>
+          <a:noFill/>
+          <a:ln/>
+        </p:spPr>
+        <p:txBody>
+          <a:bodyPr wrap="square" lIns="0" tIns="0" rIns="0" bIns="0" rtlCol="0" anchor="ctr"/>
+          <a:lstStyle/>
+          <a:p>
+            <a:pPr indent="0" marL="0">
+              <a:buNone/>
+            </a:pPr>
+            <a:r>
+              <a:rPr lang="en-US" sz="1400" b="1" dirty="0">
+                <a:solidFill>
+                  <a:srgbClr val="3F3F3F"/>
+                </a:solidFill>
+                <a:latin typeface="Malgun Gothic" pitchFamily="34" charset="0"/>
+                <a:ea typeface="Malgun Gothic" pitchFamily="34" charset="-122"/>
+                <a:cs typeface="Malgun Gothic" pitchFamily="34" charset="-120"/>
+              </a:rPr>
               <a:t>주요 고객 및 장애 분석</a:t>
             </a:r>
             <a:endParaRPr lang="en-US" sz="1400" dirty="0"/>
@@ -5681,13 +6344,13 @@
       </p:sp>
       <p:sp>
         <p:nvSpPr>
-          <p:cNvPr id="21" name="Text 18"/>
-          <p:cNvSpPr/>
-          <p:nvPr/>
-        </p:nvSpPr>
-        <p:spPr>
-          <a:xfrm>
-            <a:off x="1207008" y="4553712"/>
+          <p:cNvPr id="25" name="Text 22"/>
+          <p:cNvSpPr/>
+          <p:nvPr/>
+        </p:nvSpPr>
+        <p:spPr>
+          <a:xfrm>
+            <a:off x="1207008" y="5559552"/>
             <a:ext cx="4572000" cy="548640"/>
           </a:xfrm>
           <a:prstGeom prst="rect">
@@ -5720,13 +6383,13 @@
       </p:sp>
       <p:sp>
         <p:nvSpPr>
-          <p:cNvPr id="22" name="Shape 19"/>
-          <p:cNvSpPr/>
-          <p:nvPr/>
-        </p:nvSpPr>
-        <p:spPr>
-          <a:xfrm>
-            <a:off x="548640" y="5303520"/>
+          <p:cNvPr id="26" name="Shape 23"/>
+          <p:cNvSpPr/>
+          <p:nvPr/>
+        </p:nvSpPr>
+        <p:spPr>
+          <a:xfrm>
+            <a:off x="6263640" y="1280160"/>
             <a:ext cx="457200" cy="457200"/>
           </a:xfrm>
           <a:prstGeom prst="ellipse">
@@ -5740,13 +6403,13 @@
       </p:sp>
       <p:sp>
         <p:nvSpPr>
-          <p:cNvPr id="23" name="Text 20"/>
-          <p:cNvSpPr/>
-          <p:nvPr/>
-        </p:nvSpPr>
-        <p:spPr>
-          <a:xfrm>
-            <a:off x="548640" y="5303520"/>
+          <p:cNvPr id="27" name="Text 24"/>
+          <p:cNvSpPr/>
+          <p:nvPr/>
+        </p:nvSpPr>
+        <p:spPr>
+          <a:xfrm>
+            <a:off x="6263640" y="1280160"/>
             <a:ext cx="457200" cy="457200"/>
           </a:xfrm>
           <a:prstGeom prst="rect">
@@ -5771,7 +6434,7 @@
                 <a:ea typeface="Arial" pitchFamily="34" charset="-122"/>
                 <a:cs typeface="Arial" pitchFamily="34" charset="-120"/>
               </a:rPr>
-              <a:t>5</a:t>
+              <a:t>6</a:t>
             </a:r>
             <a:endParaRPr lang="en-US" sz="1600" dirty="0"/>
           </a:p>
@@ -5779,13 +6442,13 @@
       </p:sp>
       <p:sp>
         <p:nvSpPr>
-          <p:cNvPr id="24" name="Text 21"/>
-          <p:cNvSpPr/>
-          <p:nvPr/>
-        </p:nvSpPr>
-        <p:spPr>
-          <a:xfrm>
-            <a:off x="1207008" y="5212080"/>
+          <p:cNvPr id="28" name="Text 25"/>
+          <p:cNvSpPr/>
+          <p:nvPr/>
+        </p:nvSpPr>
+        <p:spPr>
+          <a:xfrm>
+            <a:off x="6922008" y="1188720"/>
             <a:ext cx="4572000" cy="347472"/>
           </a:xfrm>
           <a:prstGeom prst="rect">
@@ -5818,13 +6481,13 @@
       </p:sp>
       <p:sp>
         <p:nvSpPr>
-          <p:cNvPr id="25" name="Text 22"/>
-          <p:cNvSpPr/>
-          <p:nvPr/>
-        </p:nvSpPr>
-        <p:spPr>
-          <a:xfrm>
-            <a:off x="1207008" y="5559552"/>
+          <p:cNvPr id="29" name="Text 26"/>
+          <p:cNvSpPr/>
+          <p:nvPr/>
+        </p:nvSpPr>
+        <p:spPr>
+          <a:xfrm>
+            <a:off x="6922008" y="1536192"/>
             <a:ext cx="4572000" cy="548640"/>
           </a:xfrm>
           <a:prstGeom prst="rect">
@@ -5857,13 +6520,13 @@
       </p:sp>
       <p:sp>
         <p:nvSpPr>
-          <p:cNvPr id="26" name="Shape 23"/>
-          <p:cNvSpPr/>
-          <p:nvPr/>
-        </p:nvSpPr>
-        <p:spPr>
-          <a:xfrm>
-            <a:off x="6263640" y="1280160"/>
+          <p:cNvPr id="30" name="Shape 27"/>
+          <p:cNvSpPr/>
+          <p:nvPr/>
+        </p:nvSpPr>
+        <p:spPr>
+          <a:xfrm>
+            <a:off x="6263640" y="2286000"/>
             <a:ext cx="457200" cy="457200"/>
           </a:xfrm>
           <a:prstGeom prst="ellipse">
@@ -5877,13 +6540,13 @@
       </p:sp>
       <p:sp>
         <p:nvSpPr>
-          <p:cNvPr id="27" name="Text 24"/>
-          <p:cNvSpPr/>
-          <p:nvPr/>
-        </p:nvSpPr>
-        <p:spPr>
-          <a:xfrm>
-            <a:off x="6263640" y="1280160"/>
+          <p:cNvPr id="31" name="Text 28"/>
+          <p:cNvSpPr/>
+          <p:nvPr/>
+        </p:nvSpPr>
+        <p:spPr>
+          <a:xfrm>
+            <a:off x="6263640" y="2286000"/>
             <a:ext cx="457200" cy="457200"/>
           </a:xfrm>
           <a:prstGeom prst="rect">
@@ -5908,7 +6571,7 @@
                 <a:ea typeface="Arial" pitchFamily="34" charset="-122"/>
                 <a:cs typeface="Arial" pitchFamily="34" charset="-120"/>
               </a:rPr>
-              <a:t>6</a:t>
+              <a:t>7</a:t>
             </a:r>
             <a:endParaRPr lang="en-US" sz="1600" dirty="0"/>
           </a:p>
@@ -5916,13 +6579,13 @@
       </p:sp>
       <p:sp>
         <p:nvSpPr>
-          <p:cNvPr id="28" name="Text 25"/>
-          <p:cNvSpPr/>
-          <p:nvPr/>
-        </p:nvSpPr>
-        <p:spPr>
-          <a:xfrm>
-            <a:off x="6922008" y="1188720"/>
+          <p:cNvPr id="32" name="Text 29"/>
+          <p:cNvSpPr/>
+          <p:nvPr/>
+        </p:nvSpPr>
+        <p:spPr>
+          <a:xfrm>
+            <a:off x="6922008" y="2194560"/>
             <a:ext cx="4572000" cy="347472"/>
           </a:xfrm>
           <a:prstGeom prst="rect">
@@ -5955,13 +6618,13 @@
       </p:sp>
       <p:sp>
         <p:nvSpPr>
-          <p:cNvPr id="29" name="Text 26"/>
-          <p:cNvSpPr/>
-          <p:nvPr/>
-        </p:nvSpPr>
-        <p:spPr>
-          <a:xfrm>
-            <a:off x="6922008" y="1536192"/>
+          <p:cNvPr id="33" name="Text 30"/>
+          <p:cNvSpPr/>
+          <p:nvPr/>
+        </p:nvSpPr>
+        <p:spPr>
+          <a:xfrm>
+            <a:off x="6922008" y="2542032"/>
             <a:ext cx="4572000" cy="548640"/>
           </a:xfrm>
           <a:prstGeom prst="rect">
@@ -5994,13 +6657,13 @@
       </p:sp>
       <p:sp>
         <p:nvSpPr>
-          <p:cNvPr id="30" name="Shape 27"/>
-          <p:cNvSpPr/>
-          <p:nvPr/>
-        </p:nvSpPr>
-        <p:spPr>
-          <a:xfrm>
-            <a:off x="6263640" y="2286000"/>
+          <p:cNvPr id="34" name="Shape 31"/>
+          <p:cNvSpPr/>
+          <p:nvPr/>
+        </p:nvSpPr>
+        <p:spPr>
+          <a:xfrm>
+            <a:off x="6263640" y="3291840"/>
             <a:ext cx="457200" cy="457200"/>
           </a:xfrm>
           <a:prstGeom prst="ellipse">
@@ -6014,13 +6677,13 @@
       </p:sp>
       <p:sp>
         <p:nvSpPr>
-          <p:cNvPr id="31" name="Text 28"/>
-          <p:cNvSpPr/>
-          <p:nvPr/>
-        </p:nvSpPr>
-        <p:spPr>
-          <a:xfrm>
-            <a:off x="6263640" y="2286000"/>
+          <p:cNvPr id="35" name="Text 32"/>
+          <p:cNvSpPr/>
+          <p:nvPr/>
+        </p:nvSpPr>
+        <p:spPr>
+          <a:xfrm>
+            <a:off x="6263640" y="3291840"/>
             <a:ext cx="457200" cy="457200"/>
           </a:xfrm>
           <a:prstGeom prst="rect">
@@ -6045,7 +6708,7 @@
                 <a:ea typeface="Arial" pitchFamily="34" charset="-122"/>
                 <a:cs typeface="Arial" pitchFamily="34" charset="-120"/>
               </a:rPr>
-              <a:t>7</a:t>
+              <a:t>8</a:t>
             </a:r>
             <a:endParaRPr lang="en-US" sz="1600" dirty="0"/>
           </a:p>
@@ -6053,13 +6716,13 @@
       </p:sp>
       <p:sp>
         <p:nvSpPr>
-          <p:cNvPr id="32" name="Text 29"/>
-          <p:cNvSpPr/>
-          <p:nvPr/>
-        </p:nvSpPr>
-        <p:spPr>
-          <a:xfrm>
-            <a:off x="6922008" y="2194560"/>
+          <p:cNvPr id="36" name="Text 33"/>
+          <p:cNvSpPr/>
+          <p:nvPr/>
+        </p:nvSpPr>
+        <p:spPr>
+          <a:xfrm>
+            <a:off x="6922008" y="3200400"/>
             <a:ext cx="4572000" cy="347472"/>
           </a:xfrm>
           <a:prstGeom prst="rect">
@@ -6092,13 +6755,13 @@
       </p:sp>
       <p:sp>
         <p:nvSpPr>
-          <p:cNvPr id="33" name="Text 30"/>
-          <p:cNvSpPr/>
-          <p:nvPr/>
-        </p:nvSpPr>
-        <p:spPr>
-          <a:xfrm>
-            <a:off x="6922008" y="2542032"/>
+          <p:cNvPr id="37" name="Text 34"/>
+          <p:cNvSpPr/>
+          <p:nvPr/>
+        </p:nvSpPr>
+        <p:spPr>
+          <a:xfrm>
+            <a:off x="6922008" y="3547872"/>
             <a:ext cx="4572000" cy="548640"/>
           </a:xfrm>
           <a:prstGeom prst="rect">
@@ -6131,13 +6794,13 @@
       </p:sp>
       <p:sp>
         <p:nvSpPr>
-          <p:cNvPr id="34" name="Shape 31"/>
-          <p:cNvSpPr/>
-          <p:nvPr/>
-        </p:nvSpPr>
-        <p:spPr>
-          <a:xfrm>
-            <a:off x="6263640" y="3291840"/>
+          <p:cNvPr id="38" name="Shape 35"/>
+          <p:cNvSpPr/>
+          <p:nvPr/>
+        </p:nvSpPr>
+        <p:spPr>
+          <a:xfrm>
+            <a:off x="6263640" y="4297680"/>
             <a:ext cx="457200" cy="457200"/>
           </a:xfrm>
           <a:prstGeom prst="ellipse">
@@ -6151,13 +6814,13 @@
       </p:sp>
       <p:sp>
         <p:nvSpPr>
-          <p:cNvPr id="35" name="Text 32"/>
-          <p:cNvSpPr/>
-          <p:nvPr/>
-        </p:nvSpPr>
-        <p:spPr>
-          <a:xfrm>
-            <a:off x="6263640" y="3291840"/>
+          <p:cNvPr id="39" name="Text 36"/>
+          <p:cNvSpPr/>
+          <p:nvPr/>
+        </p:nvSpPr>
+        <p:spPr>
+          <a:xfrm>
+            <a:off x="6263640" y="4297680"/>
             <a:ext cx="457200" cy="457200"/>
           </a:xfrm>
           <a:prstGeom prst="rect">
@@ -6182,7 +6845,7 @@
                 <a:ea typeface="Arial" pitchFamily="34" charset="-122"/>
                 <a:cs typeface="Arial" pitchFamily="34" charset="-120"/>
               </a:rPr>
-              <a:t>8</a:t>
+              <a:t>9</a:t>
             </a:r>
             <a:endParaRPr lang="en-US" sz="1600" dirty="0"/>
           </a:p>
@@ -6190,13 +6853,13 @@
       </p:sp>
       <p:sp>
         <p:nvSpPr>
-          <p:cNvPr id="36" name="Text 33"/>
-          <p:cNvSpPr/>
-          <p:nvPr/>
-        </p:nvSpPr>
-        <p:spPr>
-          <a:xfrm>
-            <a:off x="6922008" y="3200400"/>
+          <p:cNvPr id="40" name="Text 37"/>
+          <p:cNvSpPr/>
+          <p:nvPr/>
+        </p:nvSpPr>
+        <p:spPr>
+          <a:xfrm>
+            <a:off x="6922008" y="4206240"/>
             <a:ext cx="4572000" cy="347472"/>
           </a:xfrm>
           <a:prstGeom prst="rect">
@@ -6229,13 +6892,13 @@
       </p:sp>
       <p:sp>
         <p:nvSpPr>
-          <p:cNvPr id="37" name="Text 34"/>
-          <p:cNvSpPr/>
-          <p:nvPr/>
-        </p:nvSpPr>
-        <p:spPr>
-          <a:xfrm>
-            <a:off x="6922008" y="3547872"/>
+          <p:cNvPr id="41" name="Text 38"/>
+          <p:cNvSpPr/>
+          <p:nvPr/>
+        </p:nvSpPr>
+        <p:spPr>
+          <a:xfrm>
+            <a:off x="6922008" y="4553712"/>
             <a:ext cx="4572000" cy="548640"/>
           </a:xfrm>
           <a:prstGeom prst="rect">
@@ -6268,13 +6931,13 @@
       </p:sp>
       <p:sp>
         <p:nvSpPr>
-          <p:cNvPr id="38" name="Shape 35"/>
-          <p:cNvSpPr/>
-          <p:nvPr/>
-        </p:nvSpPr>
-        <p:spPr>
-          <a:xfrm>
-            <a:off x="6263640" y="4297680"/>
+          <p:cNvPr id="42" name="Shape 39"/>
+          <p:cNvSpPr/>
+          <p:nvPr/>
+        </p:nvSpPr>
+        <p:spPr>
+          <a:xfrm>
+            <a:off x="6263640" y="5303520"/>
             <a:ext cx="457200" cy="457200"/>
           </a:xfrm>
           <a:prstGeom prst="ellipse">
@@ -6288,13 +6951,13 @@
       </p:sp>
       <p:sp>
         <p:nvSpPr>
-          <p:cNvPr id="39" name="Text 36"/>
-          <p:cNvSpPr/>
-          <p:nvPr/>
-        </p:nvSpPr>
-        <p:spPr>
-          <a:xfrm>
-            <a:off x="6263640" y="4297680"/>
+          <p:cNvPr id="43" name="Text 40"/>
+          <p:cNvSpPr/>
+          <p:nvPr/>
+        </p:nvSpPr>
+        <p:spPr>
+          <a:xfrm>
+            <a:off x="6263640" y="5303520"/>
             <a:ext cx="457200" cy="457200"/>
           </a:xfrm>
           <a:prstGeom prst="rect">
@@ -6319,7 +6982,7 @@
                 <a:ea typeface="Arial" pitchFamily="34" charset="-122"/>
                 <a:cs typeface="Arial" pitchFamily="34" charset="-120"/>
               </a:rPr>
-              <a:t>9</a:t>
+              <a:t>10</a:t>
             </a:r>
             <a:endParaRPr lang="en-US" sz="1600" dirty="0"/>
           </a:p>
@@ -6327,13 +6990,13 @@
       </p:sp>
       <p:sp>
         <p:nvSpPr>
-          <p:cNvPr id="40" name="Text 37"/>
-          <p:cNvSpPr/>
-          <p:nvPr/>
-        </p:nvSpPr>
-        <p:spPr>
-          <a:xfrm>
-            <a:off x="6922008" y="4206240"/>
+          <p:cNvPr id="44" name="Text 41"/>
+          <p:cNvSpPr/>
+          <p:nvPr/>
+        </p:nvSpPr>
+        <p:spPr>
+          <a:xfrm>
+            <a:off x="6922008" y="5212080"/>
             <a:ext cx="4572000" cy="347472"/>
           </a:xfrm>
           <a:prstGeom prst="rect">
@@ -6366,13 +7029,13 @@
       </p:sp>
       <p:sp>
         <p:nvSpPr>
-          <p:cNvPr id="41" name="Text 38"/>
-          <p:cNvSpPr/>
-          <p:nvPr/>
-        </p:nvSpPr>
-        <p:spPr>
-          <a:xfrm>
-            <a:off x="6922008" y="4553712"/>
+          <p:cNvPr id="45" name="Text 42"/>
+          <p:cNvSpPr/>
+          <p:nvPr/>
+        </p:nvSpPr>
+        <p:spPr>
+          <a:xfrm>
+            <a:off x="6922008" y="5559552"/>
             <a:ext cx="4572000" cy="548640"/>
           </a:xfrm>
           <a:prstGeom prst="rect">
@@ -6405,7 +7068,7 @@
       </p:sp>
       <p:sp>
         <p:nvSpPr>
-          <p:cNvPr id="42" name="Text 39"/>
+          <p:cNvPr id="46" name="Text 43"/>
           <p:cNvSpPr/>
           <p:nvPr/>
         </p:nvSpPr>
@@ -6444,7 +7107,7 @@
       </p:sp>
       <p:sp>
         <p:nvSpPr>
-          <p:cNvPr id="43" name="Text 40"/>
+          <p:cNvPr id="47" name="Text 44"/>
           <p:cNvSpPr/>
           <p:nvPr/>
         </p:nvSpPr>
@@ -13888,6 +14551,5206 @@
                 <a:ea typeface="Malgun Gothic" pitchFamily="34" charset="-122"/>
                 <a:cs typeface="Malgun Gothic" pitchFamily="34" charset="-120"/>
               </a:rPr>
+              <a:t>월간 트렌드 비교 – 조직개편 영향 분석</a:t>
+            </a:r>
+            <a:endParaRPr lang="en-US" sz="2600" dirty="0"/>
+          </a:p>
+        </p:txBody>
+      </p:sp>
+      <p:pic>
+        <p:nvPicPr>
+          <p:cNvPr id="5" name="Image 0" descr="sysmex_logo_mono_blue.png">    </p:cNvPr>
+          <p:cNvPicPr>
+            <a:picLocks noChangeAspect="1"/>
+          </p:cNvPicPr>
+          <p:nvPr/>
+        </p:nvPicPr>
+        <p:blipFill>
+          <a:blip r:embed="rId1"/>
+          <a:stretch>
+            <a:fillRect/>
+          </a:stretch>
+        </p:blipFill>
+        <p:spPr>
+          <a:xfrm>
+            <a:off x="10652760" y="292608"/>
+            <a:ext cx="1097280" cy="420624"/>
+          </a:xfrm>
+          <a:prstGeom prst="rect">
+            <a:avLst/>
+          </a:prstGeom>
+        </p:spPr>
+      </p:pic>
+      <p:sp>
+        <p:nvSpPr>
+          <p:cNvPr id="6" name="Text 3"/>
+          <p:cNvSpPr/>
+          <p:nvPr/>
+        </p:nvSpPr>
+        <p:spPr>
+          <a:xfrm>
+            <a:off x="530352" y="1051560"/>
+            <a:ext cx="11100816" cy="320040"/>
+          </a:xfrm>
+          <a:prstGeom prst="rect">
+            <a:avLst/>
+          </a:prstGeom>
+          <a:noFill/>
+          <a:ln/>
+        </p:spPr>
+        <p:txBody>
+          <a:bodyPr wrap="square" lIns="0" tIns="0" rIns="0" bIns="0" rtlCol="0" anchor="ctr"/>
+          <a:lstStyle/>
+          <a:p>
+            <a:pPr indent="0" marL="0">
+              <a:buNone/>
+            </a:pPr>
+            <a:r>
+              <a:rPr lang="en-US" sz="1100" i="1" dirty="0">
+                <a:solidFill>
+                  <a:srgbClr val="9E9E9E"/>
+                </a:solidFill>
+                <a:latin typeface="Malgun Gothic" pitchFamily="34" charset="0"/>
+                <a:ea typeface="Malgun Gothic" pitchFamily="34" charset="-122"/>
+                <a:cs typeface="Malgun Gothic" pitchFamily="34" charset="-120"/>
+              </a:rPr>
+              <a:t>CRM 서비스 케이스·약속활동 로그, 2026년 1~6월 직접 집계 · 4월 조직개편(기술/학술 분리) 전후 비교</a:t>
+            </a:r>
+            <a:endParaRPr lang="en-US" sz="1100" dirty="0"/>
+          </a:p>
+        </p:txBody>
+      </p:sp>
+      <p:graphicFrame>
+        <p:nvGraphicFramePr>
+          <p:cNvPr id="7" name="Table 0"/>
+          <p:cNvGraphicFramePr>
+            <a:graphicFrameLocks noGrp="1"/>
+          </p:cNvGraphicFramePr>
+          <p:nvPr>
+            <p:extLst>
+              <p:ext uri="{D42A27DB-BD31-4B8C-83A1-F6EECF244321}">
+                <p14:modId xmlns:p14="http://schemas.microsoft.com/office/powerpoint/2010/main" val="1579011935"/>
+              </p:ext>
+            </p:extLst>
+          </p:nvPr>
+        </p:nvGraphicFramePr>
+        <p:xfrm>
+          <a:off x="530352" y="1463040"/>
+          <a:ext cx="11100816" cy="914400"/>
+        </p:xfrm>
+        <a:graphic>
+          <a:graphicData uri="http://schemas.openxmlformats.org/drawingml/2006/table">
+            <a:tbl>
+              <a:tblPr/>
+              <a:tblGrid>
+                <a:gridCol w="1591056"/>
+                <a:gridCol w="1581912"/>
+                <a:gridCol w="1581912"/>
+                <a:gridCol w="1581912"/>
+                <a:gridCol w="1581912"/>
+                <a:gridCol w="1581912"/>
+                <a:gridCol w="1600200"/>
+              </a:tblGrid>
+              <a:tr h="384048">
+                <a:tc>
+                  <a:txBody>
+                    <a:bodyPr/>
+                    <a:lstStyle/>
+                    <a:p>
+                      <a:pPr algn="l" indent="0" marL="0">
+                        <a:buNone/>
+                      </a:pPr>
+                      <a:r>
+                        <a:rPr lang="en-US" sz="1150" b="1" dirty="0">
+                          <a:solidFill>
+                            <a:srgbClr val="FFFFFF"/>
+                          </a:solidFill>
+                          <a:latin typeface="Malgun Gothic" pitchFamily="34" charset="0"/>
+                          <a:ea typeface="Malgun Gothic" pitchFamily="34" charset="-122"/>
+                          <a:cs typeface="Malgun Gothic" pitchFamily="34" charset="-120"/>
+                        </a:rPr>
+                        <a:t>구분</a:t>
+                      </a:r>
+                      <a:endParaRPr lang="en-US" sz="1150" dirty="0">
+                        <a:latin typeface="Malgun Gothic" charset="0"/>
+                        <a:ea typeface="Malgun Gothic" charset="0"/>
+                        <a:cs typeface="Malgun Gothic" charset="0"/>
+                      </a:endParaRPr>
+                    </a:p>
+                  </a:txBody>
+                  <a:tcPr marL="91440" marR="91440" marT="45720" marB="45720" anchor="ctr">
+                    <a:lnL w="9525" cap="flat" cmpd="sng" algn="ctr">
+                      <a:solidFill>
+                        <a:srgbClr val="D9D9D9"/>
+                      </a:solidFill>
+                      <a:prstDash val="solid"/>
+                      <a:round/>
+                      <a:headEnd type="none" w="med" len="med"/>
+                      <a:tailEnd type="none" w="med" len="med"/>
+                    </a:lnL>
+                    <a:lnR w="9525" cap="flat" cmpd="sng" algn="ctr">
+                      <a:solidFill>
+                        <a:srgbClr val="D9D9D9"/>
+                      </a:solidFill>
+                      <a:prstDash val="solid"/>
+                      <a:round/>
+                      <a:headEnd type="none" w="med" len="med"/>
+                      <a:tailEnd type="none" w="med" len="med"/>
+                    </a:lnR>
+                    <a:lnT w="9525" cap="flat" cmpd="sng" algn="ctr">
+                      <a:solidFill>
+                        <a:srgbClr val="D9D9D9"/>
+                      </a:solidFill>
+                      <a:prstDash val="solid"/>
+                      <a:round/>
+                      <a:headEnd type="none" w="med" len="med"/>
+                      <a:tailEnd type="none" w="med" len="med"/>
+                    </a:lnT>
+                    <a:lnB w="9525" cap="flat" cmpd="sng" algn="ctr">
+                      <a:solidFill>
+                        <a:srgbClr val="D9D9D9"/>
+                      </a:solidFill>
+                      <a:prstDash val="solid"/>
+                      <a:round/>
+                      <a:headEnd type="none" w="med" len="med"/>
+                      <a:tailEnd type="none" w="med" len="med"/>
+                    </a:lnB>
+                    <a:solidFill>
+                      <a:srgbClr val="005BAC"/>
+                    </a:solidFill>
+                  </a:tcPr>
+                </a:tc>
+                <a:tc>
+                  <a:txBody>
+                    <a:bodyPr/>
+                    <a:lstStyle/>
+                    <a:p>
+                      <a:pPr algn="ctr" indent="0" marL="0">
+                        <a:buNone/>
+                      </a:pPr>
+                      <a:r>
+                        <a:rPr lang="en-US" sz="1150" b="1" dirty="0">
+                          <a:solidFill>
+                            <a:srgbClr val="FFFFFF"/>
+                          </a:solidFill>
+                          <a:latin typeface="Malgun Gothic" pitchFamily="34" charset="0"/>
+                          <a:ea typeface="Malgun Gothic" pitchFamily="34" charset="-122"/>
+                          <a:cs typeface="Malgun Gothic" pitchFamily="34" charset="-120"/>
+                        </a:rPr>
+                        <a:t>1월</a:t>
+                      </a:r>
+                      <a:endParaRPr lang="en-US" sz="1150" dirty="0">
+                        <a:latin typeface="Malgun Gothic" charset="0"/>
+                        <a:ea typeface="Malgun Gothic" charset="0"/>
+                        <a:cs typeface="Malgun Gothic" charset="0"/>
+                      </a:endParaRPr>
+                    </a:p>
+                  </a:txBody>
+                  <a:tcPr marL="91440" marR="91440" marT="45720" marB="45720" anchor="ctr">
+                    <a:lnL w="9525" cap="flat" cmpd="sng" algn="ctr">
+                      <a:solidFill>
+                        <a:srgbClr val="D9D9D9"/>
+                      </a:solidFill>
+                      <a:prstDash val="solid"/>
+                      <a:round/>
+                      <a:headEnd type="none" w="med" len="med"/>
+                      <a:tailEnd type="none" w="med" len="med"/>
+                    </a:lnL>
+                    <a:lnR w="9525" cap="flat" cmpd="sng" algn="ctr">
+                      <a:solidFill>
+                        <a:srgbClr val="D9D9D9"/>
+                      </a:solidFill>
+                      <a:prstDash val="solid"/>
+                      <a:round/>
+                      <a:headEnd type="none" w="med" len="med"/>
+                      <a:tailEnd type="none" w="med" len="med"/>
+                    </a:lnR>
+                    <a:lnT w="9525" cap="flat" cmpd="sng" algn="ctr">
+                      <a:solidFill>
+                        <a:srgbClr val="D9D9D9"/>
+                      </a:solidFill>
+                      <a:prstDash val="solid"/>
+                      <a:round/>
+                      <a:headEnd type="none" w="med" len="med"/>
+                      <a:tailEnd type="none" w="med" len="med"/>
+                    </a:lnT>
+                    <a:lnB w="9525" cap="flat" cmpd="sng" algn="ctr">
+                      <a:solidFill>
+                        <a:srgbClr val="D9D9D9"/>
+                      </a:solidFill>
+                      <a:prstDash val="solid"/>
+                      <a:round/>
+                      <a:headEnd type="none" w="med" len="med"/>
+                      <a:tailEnd type="none" w="med" len="med"/>
+                    </a:lnB>
+                    <a:solidFill>
+                      <a:srgbClr val="005BAC"/>
+                    </a:solidFill>
+                  </a:tcPr>
+                </a:tc>
+                <a:tc>
+                  <a:txBody>
+                    <a:bodyPr/>
+                    <a:lstStyle/>
+                    <a:p>
+                      <a:pPr algn="ctr" indent="0" marL="0">
+                        <a:buNone/>
+                      </a:pPr>
+                      <a:r>
+                        <a:rPr lang="en-US" sz="1150" b="1" dirty="0">
+                          <a:solidFill>
+                            <a:srgbClr val="FFFFFF"/>
+                          </a:solidFill>
+                          <a:latin typeface="Malgun Gothic" pitchFamily="34" charset="0"/>
+                          <a:ea typeface="Malgun Gothic" pitchFamily="34" charset="-122"/>
+                          <a:cs typeface="Malgun Gothic" pitchFamily="34" charset="-120"/>
+                        </a:rPr>
+                        <a:t>2월</a:t>
+                      </a:r>
+                      <a:endParaRPr lang="en-US" sz="1150" dirty="0">
+                        <a:latin typeface="Malgun Gothic" charset="0"/>
+                        <a:ea typeface="Malgun Gothic" charset="0"/>
+                        <a:cs typeface="Malgun Gothic" charset="0"/>
+                      </a:endParaRPr>
+                    </a:p>
+                  </a:txBody>
+                  <a:tcPr marL="91440" marR="91440" marT="45720" marB="45720" anchor="ctr">
+                    <a:lnL w="9525" cap="flat" cmpd="sng" algn="ctr">
+                      <a:solidFill>
+                        <a:srgbClr val="D9D9D9"/>
+                      </a:solidFill>
+                      <a:prstDash val="solid"/>
+                      <a:round/>
+                      <a:headEnd type="none" w="med" len="med"/>
+                      <a:tailEnd type="none" w="med" len="med"/>
+                    </a:lnL>
+                    <a:lnR w="9525" cap="flat" cmpd="sng" algn="ctr">
+                      <a:solidFill>
+                        <a:srgbClr val="D9D9D9"/>
+                      </a:solidFill>
+                      <a:prstDash val="solid"/>
+                      <a:round/>
+                      <a:headEnd type="none" w="med" len="med"/>
+                      <a:tailEnd type="none" w="med" len="med"/>
+                    </a:lnR>
+                    <a:lnT w="9525" cap="flat" cmpd="sng" algn="ctr">
+                      <a:solidFill>
+                        <a:srgbClr val="D9D9D9"/>
+                      </a:solidFill>
+                      <a:prstDash val="solid"/>
+                      <a:round/>
+                      <a:headEnd type="none" w="med" len="med"/>
+                      <a:tailEnd type="none" w="med" len="med"/>
+                    </a:lnT>
+                    <a:lnB w="9525" cap="flat" cmpd="sng" algn="ctr">
+                      <a:solidFill>
+                        <a:srgbClr val="D9D9D9"/>
+                      </a:solidFill>
+                      <a:prstDash val="solid"/>
+                      <a:round/>
+                      <a:headEnd type="none" w="med" len="med"/>
+                      <a:tailEnd type="none" w="med" len="med"/>
+                    </a:lnB>
+                    <a:solidFill>
+                      <a:srgbClr val="005BAC"/>
+                    </a:solidFill>
+                  </a:tcPr>
+                </a:tc>
+                <a:tc>
+                  <a:txBody>
+                    <a:bodyPr/>
+                    <a:lstStyle/>
+                    <a:p>
+                      <a:pPr algn="ctr" indent="0" marL="0">
+                        <a:buNone/>
+                      </a:pPr>
+                      <a:r>
+                        <a:rPr lang="en-US" sz="1150" b="1" dirty="0">
+                          <a:solidFill>
+                            <a:srgbClr val="FFFFFF"/>
+                          </a:solidFill>
+                          <a:latin typeface="Malgun Gothic" pitchFamily="34" charset="0"/>
+                          <a:ea typeface="Malgun Gothic" pitchFamily="34" charset="-122"/>
+                          <a:cs typeface="Malgun Gothic" pitchFamily="34" charset="-120"/>
+                        </a:rPr>
+                        <a:t>3월</a:t>
+                      </a:r>
+                      <a:endParaRPr lang="en-US" sz="1150" dirty="0">
+                        <a:latin typeface="Malgun Gothic" charset="0"/>
+                        <a:ea typeface="Malgun Gothic" charset="0"/>
+                        <a:cs typeface="Malgun Gothic" charset="0"/>
+                      </a:endParaRPr>
+                    </a:p>
+                  </a:txBody>
+                  <a:tcPr marL="91440" marR="91440" marT="45720" marB="45720" anchor="ctr">
+                    <a:lnL w="9525" cap="flat" cmpd="sng" algn="ctr">
+                      <a:solidFill>
+                        <a:srgbClr val="D9D9D9"/>
+                      </a:solidFill>
+                      <a:prstDash val="solid"/>
+                      <a:round/>
+                      <a:headEnd type="none" w="med" len="med"/>
+                      <a:tailEnd type="none" w="med" len="med"/>
+                    </a:lnL>
+                    <a:lnR w="9525" cap="flat" cmpd="sng" algn="ctr">
+                      <a:solidFill>
+                        <a:srgbClr val="D9D9D9"/>
+                      </a:solidFill>
+                      <a:prstDash val="solid"/>
+                      <a:round/>
+                      <a:headEnd type="none" w="med" len="med"/>
+                      <a:tailEnd type="none" w="med" len="med"/>
+                    </a:lnR>
+                    <a:lnT w="9525" cap="flat" cmpd="sng" algn="ctr">
+                      <a:solidFill>
+                        <a:srgbClr val="D9D9D9"/>
+                      </a:solidFill>
+                      <a:prstDash val="solid"/>
+                      <a:round/>
+                      <a:headEnd type="none" w="med" len="med"/>
+                      <a:tailEnd type="none" w="med" len="med"/>
+                    </a:lnT>
+                    <a:lnB w="9525" cap="flat" cmpd="sng" algn="ctr">
+                      <a:solidFill>
+                        <a:srgbClr val="D9D9D9"/>
+                      </a:solidFill>
+                      <a:prstDash val="solid"/>
+                      <a:round/>
+                      <a:headEnd type="none" w="med" len="med"/>
+                      <a:tailEnd type="none" w="med" len="med"/>
+                    </a:lnB>
+                    <a:solidFill>
+                      <a:srgbClr val="005BAC"/>
+                    </a:solidFill>
+                  </a:tcPr>
+                </a:tc>
+                <a:tc>
+                  <a:txBody>
+                    <a:bodyPr/>
+                    <a:lstStyle/>
+                    <a:p>
+                      <a:pPr algn="ctr" indent="0" marL="0">
+                        <a:buNone/>
+                      </a:pPr>
+                      <a:r>
+                        <a:rPr lang="en-US" sz="1150" b="1" dirty="0">
+                          <a:solidFill>
+                            <a:srgbClr val="FFFFFF"/>
+                          </a:solidFill>
+                          <a:latin typeface="Malgun Gothic" pitchFamily="34" charset="0"/>
+                          <a:ea typeface="Malgun Gothic" pitchFamily="34" charset="-122"/>
+                          <a:cs typeface="Malgun Gothic" pitchFamily="34" charset="-120"/>
+                        </a:rPr>
+                        <a:t>4월</a:t>
+                      </a:r>
+                      <a:endParaRPr lang="en-US" sz="1150" dirty="0">
+                        <a:latin typeface="Malgun Gothic" charset="0"/>
+                        <a:ea typeface="Malgun Gothic" charset="0"/>
+                        <a:cs typeface="Malgun Gothic" charset="0"/>
+                      </a:endParaRPr>
+                    </a:p>
+                  </a:txBody>
+                  <a:tcPr marL="91440" marR="91440" marT="45720" marB="45720" anchor="ctr">
+                    <a:lnL w="9525" cap="flat" cmpd="sng" algn="ctr">
+                      <a:solidFill>
+                        <a:srgbClr val="D9D9D9"/>
+                      </a:solidFill>
+                      <a:prstDash val="solid"/>
+                      <a:round/>
+                      <a:headEnd type="none" w="med" len="med"/>
+                      <a:tailEnd type="none" w="med" len="med"/>
+                    </a:lnL>
+                    <a:lnR w="9525" cap="flat" cmpd="sng" algn="ctr">
+                      <a:solidFill>
+                        <a:srgbClr val="D9D9D9"/>
+                      </a:solidFill>
+                      <a:prstDash val="solid"/>
+                      <a:round/>
+                      <a:headEnd type="none" w="med" len="med"/>
+                      <a:tailEnd type="none" w="med" len="med"/>
+                    </a:lnR>
+                    <a:lnT w="9525" cap="flat" cmpd="sng" algn="ctr">
+                      <a:solidFill>
+                        <a:srgbClr val="D9D9D9"/>
+                      </a:solidFill>
+                      <a:prstDash val="solid"/>
+                      <a:round/>
+                      <a:headEnd type="none" w="med" len="med"/>
+                      <a:tailEnd type="none" w="med" len="med"/>
+                    </a:lnT>
+                    <a:lnB w="9525" cap="flat" cmpd="sng" algn="ctr">
+                      <a:solidFill>
+                        <a:srgbClr val="D9D9D9"/>
+                      </a:solidFill>
+                      <a:prstDash val="solid"/>
+                      <a:round/>
+                      <a:headEnd type="none" w="med" len="med"/>
+                      <a:tailEnd type="none" w="med" len="med"/>
+                    </a:lnB>
+                    <a:solidFill>
+                      <a:srgbClr val="005BAC"/>
+                    </a:solidFill>
+                  </a:tcPr>
+                </a:tc>
+                <a:tc>
+                  <a:txBody>
+                    <a:bodyPr/>
+                    <a:lstStyle/>
+                    <a:p>
+                      <a:pPr algn="ctr" indent="0" marL="0">
+                        <a:buNone/>
+                      </a:pPr>
+                      <a:r>
+                        <a:rPr lang="en-US" sz="1150" b="1" dirty="0">
+                          <a:solidFill>
+                            <a:srgbClr val="FFFFFF"/>
+                          </a:solidFill>
+                          <a:latin typeface="Malgun Gothic" pitchFamily="34" charset="0"/>
+                          <a:ea typeface="Malgun Gothic" pitchFamily="34" charset="-122"/>
+                          <a:cs typeface="Malgun Gothic" pitchFamily="34" charset="-120"/>
+                        </a:rPr>
+                        <a:t>5월</a:t>
+                      </a:r>
+                      <a:endParaRPr lang="en-US" sz="1150" dirty="0">
+                        <a:latin typeface="Malgun Gothic" charset="0"/>
+                        <a:ea typeface="Malgun Gothic" charset="0"/>
+                        <a:cs typeface="Malgun Gothic" charset="0"/>
+                      </a:endParaRPr>
+                    </a:p>
+                  </a:txBody>
+                  <a:tcPr marL="91440" marR="91440" marT="45720" marB="45720" anchor="ctr">
+                    <a:lnL w="9525" cap="flat" cmpd="sng" algn="ctr">
+                      <a:solidFill>
+                        <a:srgbClr val="D9D9D9"/>
+                      </a:solidFill>
+                      <a:prstDash val="solid"/>
+                      <a:round/>
+                      <a:headEnd type="none" w="med" len="med"/>
+                      <a:tailEnd type="none" w="med" len="med"/>
+                    </a:lnL>
+                    <a:lnR w="9525" cap="flat" cmpd="sng" algn="ctr">
+                      <a:solidFill>
+                        <a:srgbClr val="D9D9D9"/>
+                      </a:solidFill>
+                      <a:prstDash val="solid"/>
+                      <a:round/>
+                      <a:headEnd type="none" w="med" len="med"/>
+                      <a:tailEnd type="none" w="med" len="med"/>
+                    </a:lnR>
+                    <a:lnT w="9525" cap="flat" cmpd="sng" algn="ctr">
+                      <a:solidFill>
+                        <a:srgbClr val="D9D9D9"/>
+                      </a:solidFill>
+                      <a:prstDash val="solid"/>
+                      <a:round/>
+                      <a:headEnd type="none" w="med" len="med"/>
+                      <a:tailEnd type="none" w="med" len="med"/>
+                    </a:lnT>
+                    <a:lnB w="9525" cap="flat" cmpd="sng" algn="ctr">
+                      <a:solidFill>
+                        <a:srgbClr val="D9D9D9"/>
+                      </a:solidFill>
+                      <a:prstDash val="solid"/>
+                      <a:round/>
+                      <a:headEnd type="none" w="med" len="med"/>
+                      <a:tailEnd type="none" w="med" len="med"/>
+                    </a:lnB>
+                    <a:solidFill>
+                      <a:srgbClr val="005BAC"/>
+                    </a:solidFill>
+                  </a:tcPr>
+                </a:tc>
+                <a:tc>
+                  <a:txBody>
+                    <a:bodyPr/>
+                    <a:lstStyle/>
+                    <a:p>
+                      <a:pPr algn="ctr" indent="0" marL="0">
+                        <a:buNone/>
+                      </a:pPr>
+                      <a:r>
+                        <a:rPr lang="en-US" sz="1150" b="1" dirty="0">
+                          <a:solidFill>
+                            <a:srgbClr val="FFFFFF"/>
+                          </a:solidFill>
+                          <a:latin typeface="Malgun Gothic" pitchFamily="34" charset="0"/>
+                          <a:ea typeface="Malgun Gothic" pitchFamily="34" charset="-122"/>
+                          <a:cs typeface="Malgun Gothic" pitchFamily="34" charset="-120"/>
+                        </a:rPr>
+                        <a:t>6월</a:t>
+                      </a:r>
+                      <a:endParaRPr lang="en-US" sz="1150" dirty="0">
+                        <a:latin typeface="Malgun Gothic" charset="0"/>
+                        <a:ea typeface="Malgun Gothic" charset="0"/>
+                        <a:cs typeface="Malgun Gothic" charset="0"/>
+                      </a:endParaRPr>
+                    </a:p>
+                  </a:txBody>
+                  <a:tcPr marL="91440" marR="91440" marT="45720" marB="45720" anchor="ctr">
+                    <a:lnL w="9525" cap="flat" cmpd="sng" algn="ctr">
+                      <a:solidFill>
+                        <a:srgbClr val="D9D9D9"/>
+                      </a:solidFill>
+                      <a:prstDash val="solid"/>
+                      <a:round/>
+                      <a:headEnd type="none" w="med" len="med"/>
+                      <a:tailEnd type="none" w="med" len="med"/>
+                    </a:lnL>
+                    <a:lnR w="9525" cap="flat" cmpd="sng" algn="ctr">
+                      <a:solidFill>
+                        <a:srgbClr val="D9D9D9"/>
+                      </a:solidFill>
+                      <a:prstDash val="solid"/>
+                      <a:round/>
+                      <a:headEnd type="none" w="med" len="med"/>
+                      <a:tailEnd type="none" w="med" len="med"/>
+                    </a:lnR>
+                    <a:lnT w="9525" cap="flat" cmpd="sng" algn="ctr">
+                      <a:solidFill>
+                        <a:srgbClr val="D9D9D9"/>
+                      </a:solidFill>
+                      <a:prstDash val="solid"/>
+                      <a:round/>
+                      <a:headEnd type="none" w="med" len="med"/>
+                      <a:tailEnd type="none" w="med" len="med"/>
+                    </a:lnT>
+                    <a:lnB w="9525" cap="flat" cmpd="sng" algn="ctr">
+                      <a:solidFill>
+                        <a:srgbClr val="D9D9D9"/>
+                      </a:solidFill>
+                      <a:prstDash val="solid"/>
+                      <a:round/>
+                      <a:headEnd type="none" w="med" len="med"/>
+                      <a:tailEnd type="none" w="med" len="med"/>
+                    </a:lnB>
+                    <a:solidFill>
+                      <a:srgbClr val="005BAC"/>
+                    </a:solidFill>
+                  </a:tcPr>
+                </a:tc>
+              </a:tr>
+              <a:tr h="384048">
+                <a:tc>
+                  <a:txBody>
+                    <a:bodyPr/>
+                    <a:lstStyle/>
+                    <a:p>
+                      <a:pPr algn="l" indent="0" marL="0">
+                        <a:buNone/>
+                      </a:pPr>
+                      <a:r>
+                        <a:rPr lang="en-US" sz="1150" b="1" dirty="0">
+                          <a:solidFill>
+                            <a:srgbClr val="3F3F3F"/>
+                          </a:solidFill>
+                          <a:latin typeface="Malgun Gothic" pitchFamily="34" charset="0"/>
+                          <a:ea typeface="Malgun Gothic" pitchFamily="34" charset="-122"/>
+                          <a:cs typeface="Malgun Gothic" pitchFamily="34" charset="-120"/>
+                        </a:rPr>
+                        <a:t>방문건수</a:t>
+                      </a:r>
+                      <a:endParaRPr lang="en-US" sz="1150" dirty="0">
+                        <a:latin typeface="Malgun Gothic" charset="0"/>
+                        <a:ea typeface="Malgun Gothic" charset="0"/>
+                        <a:cs typeface="Malgun Gothic" charset="0"/>
+                      </a:endParaRPr>
+                    </a:p>
+                  </a:txBody>
+                  <a:tcPr marL="91440" marR="91440" marT="45720" marB="45720" anchor="ctr">
+                    <a:lnL w="9525" cap="flat" cmpd="sng" algn="ctr">
+                      <a:solidFill>
+                        <a:srgbClr val="D9D9D9"/>
+                      </a:solidFill>
+                      <a:prstDash val="solid"/>
+                      <a:round/>
+                      <a:headEnd type="none" w="med" len="med"/>
+                      <a:tailEnd type="none" w="med" len="med"/>
+                    </a:lnL>
+                    <a:lnR w="9525" cap="flat" cmpd="sng" algn="ctr">
+                      <a:solidFill>
+                        <a:srgbClr val="D9D9D9"/>
+                      </a:solidFill>
+                      <a:prstDash val="solid"/>
+                      <a:round/>
+                      <a:headEnd type="none" w="med" len="med"/>
+                      <a:tailEnd type="none" w="med" len="med"/>
+                    </a:lnR>
+                    <a:lnT w="9525" cap="flat" cmpd="sng" algn="ctr">
+                      <a:solidFill>
+                        <a:srgbClr val="D9D9D9"/>
+                      </a:solidFill>
+                      <a:prstDash val="solid"/>
+                      <a:round/>
+                      <a:headEnd type="none" w="med" len="med"/>
+                      <a:tailEnd type="none" w="med" len="med"/>
+                    </a:lnT>
+                    <a:lnB w="9525" cap="flat" cmpd="sng" algn="ctr">
+                      <a:solidFill>
+                        <a:srgbClr val="D9D9D9"/>
+                      </a:solidFill>
+                      <a:prstDash val="solid"/>
+                      <a:round/>
+                      <a:headEnd type="none" w="med" len="med"/>
+                      <a:tailEnd type="none" w="med" len="med"/>
+                    </a:lnB>
+                    <a:solidFill>
+                      <a:srgbClr val="FFFFFF"/>
+                    </a:solidFill>
+                  </a:tcPr>
+                </a:tc>
+                <a:tc>
+                  <a:txBody>
+                    <a:bodyPr/>
+                    <a:lstStyle/>
+                    <a:p>
+                      <a:pPr algn="ctr" indent="0" marL="0">
+                        <a:buNone/>
+                      </a:pPr>
+                      <a:r>
+                        <a:rPr lang="en-US" sz="1150" dirty="0">
+                          <a:solidFill>
+                            <a:srgbClr val="3F3F3F"/>
+                          </a:solidFill>
+                          <a:latin typeface="Malgun Gothic" pitchFamily="34" charset="0"/>
+                          <a:ea typeface="Malgun Gothic" pitchFamily="34" charset="-122"/>
+                          <a:cs typeface="Malgun Gothic" pitchFamily="34" charset="-120"/>
+                        </a:rPr>
+                        <a:t>1,621</a:t>
+                      </a:r>
+                      <a:endParaRPr lang="en-US" sz="1150" dirty="0">
+                        <a:latin typeface="Malgun Gothic" charset="0"/>
+                        <a:ea typeface="Malgun Gothic" charset="0"/>
+                        <a:cs typeface="Malgun Gothic" charset="0"/>
+                      </a:endParaRPr>
+                    </a:p>
+                  </a:txBody>
+                  <a:tcPr marL="91440" marR="91440" marT="45720" marB="45720" anchor="ctr">
+                    <a:lnL w="9525" cap="flat" cmpd="sng" algn="ctr">
+                      <a:solidFill>
+                        <a:srgbClr val="D9D9D9"/>
+                      </a:solidFill>
+                      <a:prstDash val="solid"/>
+                      <a:round/>
+                      <a:headEnd type="none" w="med" len="med"/>
+                      <a:tailEnd type="none" w="med" len="med"/>
+                    </a:lnL>
+                    <a:lnR w="9525" cap="flat" cmpd="sng" algn="ctr">
+                      <a:solidFill>
+                        <a:srgbClr val="D9D9D9"/>
+                      </a:solidFill>
+                      <a:prstDash val="solid"/>
+                      <a:round/>
+                      <a:headEnd type="none" w="med" len="med"/>
+                      <a:tailEnd type="none" w="med" len="med"/>
+                    </a:lnR>
+                    <a:lnT w="9525" cap="flat" cmpd="sng" algn="ctr">
+                      <a:solidFill>
+                        <a:srgbClr val="D9D9D9"/>
+                      </a:solidFill>
+                      <a:prstDash val="solid"/>
+                      <a:round/>
+                      <a:headEnd type="none" w="med" len="med"/>
+                      <a:tailEnd type="none" w="med" len="med"/>
+                    </a:lnT>
+                    <a:lnB w="9525" cap="flat" cmpd="sng" algn="ctr">
+                      <a:solidFill>
+                        <a:srgbClr val="D9D9D9"/>
+                      </a:solidFill>
+                      <a:prstDash val="solid"/>
+                      <a:round/>
+                      <a:headEnd type="none" w="med" len="med"/>
+                      <a:tailEnd type="none" w="med" len="med"/>
+                    </a:lnB>
+                    <a:solidFill>
+                      <a:srgbClr val="FFFFFF"/>
+                    </a:solidFill>
+                  </a:tcPr>
+                </a:tc>
+                <a:tc>
+                  <a:txBody>
+                    <a:bodyPr/>
+                    <a:lstStyle/>
+                    <a:p>
+                      <a:pPr algn="ctr" indent="0" marL="0">
+                        <a:buNone/>
+                      </a:pPr>
+                      <a:r>
+                        <a:rPr lang="en-US" sz="1150" dirty="0">
+                          <a:solidFill>
+                            <a:srgbClr val="3F3F3F"/>
+                          </a:solidFill>
+                          <a:latin typeface="Malgun Gothic" pitchFamily="34" charset="0"/>
+                          <a:ea typeface="Malgun Gothic" pitchFamily="34" charset="-122"/>
+                          <a:cs typeface="Malgun Gothic" pitchFamily="34" charset="-120"/>
+                        </a:rPr>
+                        <a:t>1,449</a:t>
+                      </a:r>
+                      <a:endParaRPr lang="en-US" sz="1150" dirty="0">
+                        <a:latin typeface="Malgun Gothic" charset="0"/>
+                        <a:ea typeface="Malgun Gothic" charset="0"/>
+                        <a:cs typeface="Malgun Gothic" charset="0"/>
+                      </a:endParaRPr>
+                    </a:p>
+                  </a:txBody>
+                  <a:tcPr marL="91440" marR="91440" marT="45720" marB="45720" anchor="ctr">
+                    <a:lnL w="9525" cap="flat" cmpd="sng" algn="ctr">
+                      <a:solidFill>
+                        <a:srgbClr val="D9D9D9"/>
+                      </a:solidFill>
+                      <a:prstDash val="solid"/>
+                      <a:round/>
+                      <a:headEnd type="none" w="med" len="med"/>
+                      <a:tailEnd type="none" w="med" len="med"/>
+                    </a:lnL>
+                    <a:lnR w="9525" cap="flat" cmpd="sng" algn="ctr">
+                      <a:solidFill>
+                        <a:srgbClr val="D9D9D9"/>
+                      </a:solidFill>
+                      <a:prstDash val="solid"/>
+                      <a:round/>
+                      <a:headEnd type="none" w="med" len="med"/>
+                      <a:tailEnd type="none" w="med" len="med"/>
+                    </a:lnR>
+                    <a:lnT w="9525" cap="flat" cmpd="sng" algn="ctr">
+                      <a:solidFill>
+                        <a:srgbClr val="D9D9D9"/>
+                      </a:solidFill>
+                      <a:prstDash val="solid"/>
+                      <a:round/>
+                      <a:headEnd type="none" w="med" len="med"/>
+                      <a:tailEnd type="none" w="med" len="med"/>
+                    </a:lnT>
+                    <a:lnB w="9525" cap="flat" cmpd="sng" algn="ctr">
+                      <a:solidFill>
+                        <a:srgbClr val="D9D9D9"/>
+                      </a:solidFill>
+                      <a:prstDash val="solid"/>
+                      <a:round/>
+                      <a:headEnd type="none" w="med" len="med"/>
+                      <a:tailEnd type="none" w="med" len="med"/>
+                    </a:lnB>
+                    <a:solidFill>
+                      <a:srgbClr val="FFFFFF"/>
+                    </a:solidFill>
+                  </a:tcPr>
+                </a:tc>
+                <a:tc>
+                  <a:txBody>
+                    <a:bodyPr/>
+                    <a:lstStyle/>
+                    <a:p>
+                      <a:pPr algn="ctr" indent="0" marL="0">
+                        <a:buNone/>
+                      </a:pPr>
+                      <a:r>
+                        <a:rPr lang="en-US" sz="1150" dirty="0">
+                          <a:solidFill>
+                            <a:srgbClr val="3F3F3F"/>
+                          </a:solidFill>
+                          <a:latin typeface="Malgun Gothic" pitchFamily="34" charset="0"/>
+                          <a:ea typeface="Malgun Gothic" pitchFamily="34" charset="-122"/>
+                          <a:cs typeface="Malgun Gothic" pitchFamily="34" charset="-120"/>
+                        </a:rPr>
+                        <a:t>2,201</a:t>
+                      </a:r>
+                      <a:endParaRPr lang="en-US" sz="1150" dirty="0">
+                        <a:latin typeface="Malgun Gothic" charset="0"/>
+                        <a:ea typeface="Malgun Gothic" charset="0"/>
+                        <a:cs typeface="Malgun Gothic" charset="0"/>
+                      </a:endParaRPr>
+                    </a:p>
+                  </a:txBody>
+                  <a:tcPr marL="91440" marR="91440" marT="45720" marB="45720" anchor="ctr">
+                    <a:lnL w="9525" cap="flat" cmpd="sng" algn="ctr">
+                      <a:solidFill>
+                        <a:srgbClr val="D9D9D9"/>
+                      </a:solidFill>
+                      <a:prstDash val="solid"/>
+                      <a:round/>
+                      <a:headEnd type="none" w="med" len="med"/>
+                      <a:tailEnd type="none" w="med" len="med"/>
+                    </a:lnL>
+                    <a:lnR w="9525" cap="flat" cmpd="sng" algn="ctr">
+                      <a:solidFill>
+                        <a:srgbClr val="D9D9D9"/>
+                      </a:solidFill>
+                      <a:prstDash val="solid"/>
+                      <a:round/>
+                      <a:headEnd type="none" w="med" len="med"/>
+                      <a:tailEnd type="none" w="med" len="med"/>
+                    </a:lnR>
+                    <a:lnT w="9525" cap="flat" cmpd="sng" algn="ctr">
+                      <a:solidFill>
+                        <a:srgbClr val="D9D9D9"/>
+                      </a:solidFill>
+                      <a:prstDash val="solid"/>
+                      <a:round/>
+                      <a:headEnd type="none" w="med" len="med"/>
+                      <a:tailEnd type="none" w="med" len="med"/>
+                    </a:lnT>
+                    <a:lnB w="9525" cap="flat" cmpd="sng" algn="ctr">
+                      <a:solidFill>
+                        <a:srgbClr val="D9D9D9"/>
+                      </a:solidFill>
+                      <a:prstDash val="solid"/>
+                      <a:round/>
+                      <a:headEnd type="none" w="med" len="med"/>
+                      <a:tailEnd type="none" w="med" len="med"/>
+                    </a:lnB>
+                    <a:solidFill>
+                      <a:srgbClr val="FFFFFF"/>
+                    </a:solidFill>
+                  </a:tcPr>
+                </a:tc>
+                <a:tc>
+                  <a:txBody>
+                    <a:bodyPr/>
+                    <a:lstStyle/>
+                    <a:p>
+                      <a:pPr algn="ctr" indent="0" marL="0">
+                        <a:buNone/>
+                      </a:pPr>
+                      <a:r>
+                        <a:rPr lang="en-US" sz="1150" dirty="0">
+                          <a:solidFill>
+                            <a:srgbClr val="005BAC"/>
+                          </a:solidFill>
+                          <a:latin typeface="Malgun Gothic" pitchFamily="34" charset="0"/>
+                          <a:ea typeface="Malgun Gothic" pitchFamily="34" charset="-122"/>
+                          <a:cs typeface="Malgun Gothic" pitchFamily="34" charset="-120"/>
+                        </a:rPr>
+                        <a:t>2,109</a:t>
+                      </a:r>
+                      <a:endParaRPr lang="en-US" sz="1150" dirty="0">
+                        <a:latin typeface="Malgun Gothic" charset="0"/>
+                        <a:ea typeface="Malgun Gothic" charset="0"/>
+                        <a:cs typeface="Malgun Gothic" charset="0"/>
+                      </a:endParaRPr>
+                    </a:p>
+                  </a:txBody>
+                  <a:tcPr marL="91440" marR="91440" marT="45720" marB="45720" anchor="ctr">
+                    <a:lnL w="9525" cap="flat" cmpd="sng" algn="ctr">
+                      <a:solidFill>
+                        <a:srgbClr val="D9D9D9"/>
+                      </a:solidFill>
+                      <a:prstDash val="solid"/>
+                      <a:round/>
+                      <a:headEnd type="none" w="med" len="med"/>
+                      <a:tailEnd type="none" w="med" len="med"/>
+                    </a:lnL>
+                    <a:lnR w="9525" cap="flat" cmpd="sng" algn="ctr">
+                      <a:solidFill>
+                        <a:srgbClr val="D9D9D9"/>
+                      </a:solidFill>
+                      <a:prstDash val="solid"/>
+                      <a:round/>
+                      <a:headEnd type="none" w="med" len="med"/>
+                      <a:tailEnd type="none" w="med" len="med"/>
+                    </a:lnR>
+                    <a:lnT w="9525" cap="flat" cmpd="sng" algn="ctr">
+                      <a:solidFill>
+                        <a:srgbClr val="D9D9D9"/>
+                      </a:solidFill>
+                      <a:prstDash val="solid"/>
+                      <a:round/>
+                      <a:headEnd type="none" w="med" len="med"/>
+                      <a:tailEnd type="none" w="med" len="med"/>
+                    </a:lnT>
+                    <a:lnB w="9525" cap="flat" cmpd="sng" algn="ctr">
+                      <a:solidFill>
+                        <a:srgbClr val="D9D9D9"/>
+                      </a:solidFill>
+                      <a:prstDash val="solid"/>
+                      <a:round/>
+                      <a:headEnd type="none" w="med" len="med"/>
+                      <a:tailEnd type="none" w="med" len="med"/>
+                    </a:lnB>
+                    <a:solidFill>
+                      <a:srgbClr val="EAF1F8"/>
+                    </a:solidFill>
+                  </a:tcPr>
+                </a:tc>
+                <a:tc>
+                  <a:txBody>
+                    <a:bodyPr/>
+                    <a:lstStyle/>
+                    <a:p>
+                      <a:pPr algn="ctr" indent="0" marL="0">
+                        <a:buNone/>
+                      </a:pPr>
+                      <a:r>
+                        <a:rPr lang="en-US" sz="1150" dirty="0">
+                          <a:solidFill>
+                            <a:srgbClr val="005BAC"/>
+                          </a:solidFill>
+                          <a:latin typeface="Malgun Gothic" pitchFamily="34" charset="0"/>
+                          <a:ea typeface="Malgun Gothic" pitchFamily="34" charset="-122"/>
+                          <a:cs typeface="Malgun Gothic" pitchFamily="34" charset="-120"/>
+                        </a:rPr>
+                        <a:t>1,744</a:t>
+                      </a:r>
+                      <a:endParaRPr lang="en-US" sz="1150" dirty="0">
+                        <a:latin typeface="Malgun Gothic" charset="0"/>
+                        <a:ea typeface="Malgun Gothic" charset="0"/>
+                        <a:cs typeface="Malgun Gothic" charset="0"/>
+                      </a:endParaRPr>
+                    </a:p>
+                  </a:txBody>
+                  <a:tcPr marL="91440" marR="91440" marT="45720" marB="45720" anchor="ctr">
+                    <a:lnL w="9525" cap="flat" cmpd="sng" algn="ctr">
+                      <a:solidFill>
+                        <a:srgbClr val="D9D9D9"/>
+                      </a:solidFill>
+                      <a:prstDash val="solid"/>
+                      <a:round/>
+                      <a:headEnd type="none" w="med" len="med"/>
+                      <a:tailEnd type="none" w="med" len="med"/>
+                    </a:lnL>
+                    <a:lnR w="9525" cap="flat" cmpd="sng" algn="ctr">
+                      <a:solidFill>
+                        <a:srgbClr val="D9D9D9"/>
+                      </a:solidFill>
+                      <a:prstDash val="solid"/>
+                      <a:round/>
+                      <a:headEnd type="none" w="med" len="med"/>
+                      <a:tailEnd type="none" w="med" len="med"/>
+                    </a:lnR>
+                    <a:lnT w="9525" cap="flat" cmpd="sng" algn="ctr">
+                      <a:solidFill>
+                        <a:srgbClr val="D9D9D9"/>
+                      </a:solidFill>
+                      <a:prstDash val="solid"/>
+                      <a:round/>
+                      <a:headEnd type="none" w="med" len="med"/>
+                      <a:tailEnd type="none" w="med" len="med"/>
+                    </a:lnT>
+                    <a:lnB w="9525" cap="flat" cmpd="sng" algn="ctr">
+                      <a:solidFill>
+                        <a:srgbClr val="D9D9D9"/>
+                      </a:solidFill>
+                      <a:prstDash val="solid"/>
+                      <a:round/>
+                      <a:headEnd type="none" w="med" len="med"/>
+                      <a:tailEnd type="none" w="med" len="med"/>
+                    </a:lnB>
+                    <a:solidFill>
+                      <a:srgbClr val="EAF1F8"/>
+                    </a:solidFill>
+                  </a:tcPr>
+                </a:tc>
+                <a:tc>
+                  <a:txBody>
+                    <a:bodyPr/>
+                    <a:lstStyle/>
+                    <a:p>
+                      <a:pPr algn="ctr" indent="0" marL="0">
+                        <a:buNone/>
+                      </a:pPr>
+                      <a:r>
+                        <a:rPr lang="en-US" sz="1150" dirty="0">
+                          <a:solidFill>
+                            <a:srgbClr val="005BAC"/>
+                          </a:solidFill>
+                          <a:latin typeface="Malgun Gothic" pitchFamily="34" charset="0"/>
+                          <a:ea typeface="Malgun Gothic" pitchFamily="34" charset="-122"/>
+                          <a:cs typeface="Malgun Gothic" pitchFamily="34" charset="-120"/>
+                        </a:rPr>
+                        <a:t>2,425</a:t>
+                      </a:r>
+                      <a:endParaRPr lang="en-US" sz="1150" dirty="0">
+                        <a:latin typeface="Malgun Gothic" charset="0"/>
+                        <a:ea typeface="Malgun Gothic" charset="0"/>
+                        <a:cs typeface="Malgun Gothic" charset="0"/>
+                      </a:endParaRPr>
+                    </a:p>
+                  </a:txBody>
+                  <a:tcPr marL="91440" marR="91440" marT="45720" marB="45720" anchor="ctr">
+                    <a:lnL w="9525" cap="flat" cmpd="sng" algn="ctr">
+                      <a:solidFill>
+                        <a:srgbClr val="D9D9D9"/>
+                      </a:solidFill>
+                      <a:prstDash val="solid"/>
+                      <a:round/>
+                      <a:headEnd type="none" w="med" len="med"/>
+                      <a:tailEnd type="none" w="med" len="med"/>
+                    </a:lnL>
+                    <a:lnR w="9525" cap="flat" cmpd="sng" algn="ctr">
+                      <a:solidFill>
+                        <a:srgbClr val="D9D9D9"/>
+                      </a:solidFill>
+                      <a:prstDash val="solid"/>
+                      <a:round/>
+                      <a:headEnd type="none" w="med" len="med"/>
+                      <a:tailEnd type="none" w="med" len="med"/>
+                    </a:lnR>
+                    <a:lnT w="9525" cap="flat" cmpd="sng" algn="ctr">
+                      <a:solidFill>
+                        <a:srgbClr val="D9D9D9"/>
+                      </a:solidFill>
+                      <a:prstDash val="solid"/>
+                      <a:round/>
+                      <a:headEnd type="none" w="med" len="med"/>
+                      <a:tailEnd type="none" w="med" len="med"/>
+                    </a:lnT>
+                    <a:lnB w="9525" cap="flat" cmpd="sng" algn="ctr">
+                      <a:solidFill>
+                        <a:srgbClr val="D9D9D9"/>
+                      </a:solidFill>
+                      <a:prstDash val="solid"/>
+                      <a:round/>
+                      <a:headEnd type="none" w="med" len="med"/>
+                      <a:tailEnd type="none" w="med" len="med"/>
+                    </a:lnB>
+                    <a:solidFill>
+                      <a:srgbClr val="EAF1F8"/>
+                    </a:solidFill>
+                  </a:tcPr>
+                </a:tc>
+              </a:tr>
+              <a:tr h="384048">
+                <a:tc>
+                  <a:txBody>
+                    <a:bodyPr/>
+                    <a:lstStyle/>
+                    <a:p>
+                      <a:pPr algn="l" indent="0" marL="0">
+                        <a:buNone/>
+                      </a:pPr>
+                      <a:r>
+                        <a:rPr lang="en-US" sz="1150" b="1" dirty="0">
+                          <a:solidFill>
+                            <a:srgbClr val="3F3F3F"/>
+                          </a:solidFill>
+                          <a:latin typeface="Malgun Gothic" pitchFamily="34" charset="0"/>
+                          <a:ea typeface="Malgun Gothic" pitchFamily="34" charset="-122"/>
+                          <a:cs typeface="Malgun Gothic" pitchFamily="34" charset="-120"/>
+                        </a:rPr>
+                        <a:t>수리건수</a:t>
+                      </a:r>
+                      <a:endParaRPr lang="en-US" sz="1150" dirty="0">
+                        <a:latin typeface="Malgun Gothic" charset="0"/>
+                        <a:ea typeface="Malgun Gothic" charset="0"/>
+                        <a:cs typeface="Malgun Gothic" charset="0"/>
+                      </a:endParaRPr>
+                    </a:p>
+                  </a:txBody>
+                  <a:tcPr marL="91440" marR="91440" marT="45720" marB="45720" anchor="ctr">
+                    <a:lnL w="9525" cap="flat" cmpd="sng" algn="ctr">
+                      <a:solidFill>
+                        <a:srgbClr val="D9D9D9"/>
+                      </a:solidFill>
+                      <a:prstDash val="solid"/>
+                      <a:round/>
+                      <a:headEnd type="none" w="med" len="med"/>
+                      <a:tailEnd type="none" w="med" len="med"/>
+                    </a:lnL>
+                    <a:lnR w="9525" cap="flat" cmpd="sng" algn="ctr">
+                      <a:solidFill>
+                        <a:srgbClr val="D9D9D9"/>
+                      </a:solidFill>
+                      <a:prstDash val="solid"/>
+                      <a:round/>
+                      <a:headEnd type="none" w="med" len="med"/>
+                      <a:tailEnd type="none" w="med" len="med"/>
+                    </a:lnR>
+                    <a:lnT w="9525" cap="flat" cmpd="sng" algn="ctr">
+                      <a:solidFill>
+                        <a:srgbClr val="D9D9D9"/>
+                      </a:solidFill>
+                      <a:prstDash val="solid"/>
+                      <a:round/>
+                      <a:headEnd type="none" w="med" len="med"/>
+                      <a:tailEnd type="none" w="med" len="med"/>
+                    </a:lnT>
+                    <a:lnB w="9525" cap="flat" cmpd="sng" algn="ctr">
+                      <a:solidFill>
+                        <a:srgbClr val="D9D9D9"/>
+                      </a:solidFill>
+                      <a:prstDash val="solid"/>
+                      <a:round/>
+                      <a:headEnd type="none" w="med" len="med"/>
+                      <a:tailEnd type="none" w="med" len="med"/>
+                    </a:lnB>
+                    <a:solidFill>
+                      <a:srgbClr val="FFFFFF"/>
+                    </a:solidFill>
+                  </a:tcPr>
+                </a:tc>
+                <a:tc>
+                  <a:txBody>
+                    <a:bodyPr/>
+                    <a:lstStyle/>
+                    <a:p>
+                      <a:pPr algn="ctr" indent="0" marL="0">
+                        <a:buNone/>
+                      </a:pPr>
+                      <a:r>
+                        <a:rPr lang="en-US" sz="1150" dirty="0">
+                          <a:solidFill>
+                            <a:srgbClr val="3F3F3F"/>
+                          </a:solidFill>
+                          <a:latin typeface="Malgun Gothic" pitchFamily="34" charset="0"/>
+                          <a:ea typeface="Malgun Gothic" pitchFamily="34" charset="-122"/>
+                          <a:cs typeface="Malgun Gothic" pitchFamily="34" charset="-120"/>
+                        </a:rPr>
+                        <a:t>566</a:t>
+                      </a:r>
+                      <a:endParaRPr lang="en-US" sz="1150" dirty="0">
+                        <a:latin typeface="Malgun Gothic" charset="0"/>
+                        <a:ea typeface="Malgun Gothic" charset="0"/>
+                        <a:cs typeface="Malgun Gothic" charset="0"/>
+                      </a:endParaRPr>
+                    </a:p>
+                  </a:txBody>
+                  <a:tcPr marL="91440" marR="91440" marT="45720" marB="45720" anchor="ctr">
+                    <a:lnL w="9525" cap="flat" cmpd="sng" algn="ctr">
+                      <a:solidFill>
+                        <a:srgbClr val="D9D9D9"/>
+                      </a:solidFill>
+                      <a:prstDash val="solid"/>
+                      <a:round/>
+                      <a:headEnd type="none" w="med" len="med"/>
+                      <a:tailEnd type="none" w="med" len="med"/>
+                    </a:lnL>
+                    <a:lnR w="9525" cap="flat" cmpd="sng" algn="ctr">
+                      <a:solidFill>
+                        <a:srgbClr val="D9D9D9"/>
+                      </a:solidFill>
+                      <a:prstDash val="solid"/>
+                      <a:round/>
+                      <a:headEnd type="none" w="med" len="med"/>
+                      <a:tailEnd type="none" w="med" len="med"/>
+                    </a:lnR>
+                    <a:lnT w="9525" cap="flat" cmpd="sng" algn="ctr">
+                      <a:solidFill>
+                        <a:srgbClr val="D9D9D9"/>
+                      </a:solidFill>
+                      <a:prstDash val="solid"/>
+                      <a:round/>
+                      <a:headEnd type="none" w="med" len="med"/>
+                      <a:tailEnd type="none" w="med" len="med"/>
+                    </a:lnT>
+                    <a:lnB w="9525" cap="flat" cmpd="sng" algn="ctr">
+                      <a:solidFill>
+                        <a:srgbClr val="D9D9D9"/>
+                      </a:solidFill>
+                      <a:prstDash val="solid"/>
+                      <a:round/>
+                      <a:headEnd type="none" w="med" len="med"/>
+                      <a:tailEnd type="none" w="med" len="med"/>
+                    </a:lnB>
+                    <a:solidFill>
+                      <a:srgbClr val="FFFFFF"/>
+                    </a:solidFill>
+                  </a:tcPr>
+                </a:tc>
+                <a:tc>
+                  <a:txBody>
+                    <a:bodyPr/>
+                    <a:lstStyle/>
+                    <a:p>
+                      <a:pPr algn="ctr" indent="0" marL="0">
+                        <a:buNone/>
+                      </a:pPr>
+                      <a:r>
+                        <a:rPr lang="en-US" sz="1150" dirty="0">
+                          <a:solidFill>
+                            <a:srgbClr val="3F3F3F"/>
+                          </a:solidFill>
+                          <a:latin typeface="Malgun Gothic" pitchFamily="34" charset="0"/>
+                          <a:ea typeface="Malgun Gothic" pitchFamily="34" charset="-122"/>
+                          <a:cs typeface="Malgun Gothic" pitchFamily="34" charset="-120"/>
+                        </a:rPr>
+                        <a:t>473</a:t>
+                      </a:r>
+                      <a:endParaRPr lang="en-US" sz="1150" dirty="0">
+                        <a:latin typeface="Malgun Gothic" charset="0"/>
+                        <a:ea typeface="Malgun Gothic" charset="0"/>
+                        <a:cs typeface="Malgun Gothic" charset="0"/>
+                      </a:endParaRPr>
+                    </a:p>
+                  </a:txBody>
+                  <a:tcPr marL="91440" marR="91440" marT="45720" marB="45720" anchor="ctr">
+                    <a:lnL w="9525" cap="flat" cmpd="sng" algn="ctr">
+                      <a:solidFill>
+                        <a:srgbClr val="D9D9D9"/>
+                      </a:solidFill>
+                      <a:prstDash val="solid"/>
+                      <a:round/>
+                      <a:headEnd type="none" w="med" len="med"/>
+                      <a:tailEnd type="none" w="med" len="med"/>
+                    </a:lnL>
+                    <a:lnR w="9525" cap="flat" cmpd="sng" algn="ctr">
+                      <a:solidFill>
+                        <a:srgbClr val="D9D9D9"/>
+                      </a:solidFill>
+                      <a:prstDash val="solid"/>
+                      <a:round/>
+                      <a:headEnd type="none" w="med" len="med"/>
+                      <a:tailEnd type="none" w="med" len="med"/>
+                    </a:lnR>
+                    <a:lnT w="9525" cap="flat" cmpd="sng" algn="ctr">
+                      <a:solidFill>
+                        <a:srgbClr val="D9D9D9"/>
+                      </a:solidFill>
+                      <a:prstDash val="solid"/>
+                      <a:round/>
+                      <a:headEnd type="none" w="med" len="med"/>
+                      <a:tailEnd type="none" w="med" len="med"/>
+                    </a:lnT>
+                    <a:lnB w="9525" cap="flat" cmpd="sng" algn="ctr">
+                      <a:solidFill>
+                        <a:srgbClr val="D9D9D9"/>
+                      </a:solidFill>
+                      <a:prstDash val="solid"/>
+                      <a:round/>
+                      <a:headEnd type="none" w="med" len="med"/>
+                      <a:tailEnd type="none" w="med" len="med"/>
+                    </a:lnB>
+                    <a:solidFill>
+                      <a:srgbClr val="FFFFFF"/>
+                    </a:solidFill>
+                  </a:tcPr>
+                </a:tc>
+                <a:tc>
+                  <a:txBody>
+                    <a:bodyPr/>
+                    <a:lstStyle/>
+                    <a:p>
+                      <a:pPr algn="ctr" indent="0" marL="0">
+                        <a:buNone/>
+                      </a:pPr>
+                      <a:r>
+                        <a:rPr lang="en-US" sz="1150" dirty="0">
+                          <a:solidFill>
+                            <a:srgbClr val="3F3F3F"/>
+                          </a:solidFill>
+                          <a:latin typeface="Malgun Gothic" pitchFamily="34" charset="0"/>
+                          <a:ea typeface="Malgun Gothic" pitchFamily="34" charset="-122"/>
+                          <a:cs typeface="Malgun Gothic" pitchFamily="34" charset="-120"/>
+                        </a:rPr>
+                        <a:t>514</a:t>
+                      </a:r>
+                      <a:endParaRPr lang="en-US" sz="1150" dirty="0">
+                        <a:latin typeface="Malgun Gothic" charset="0"/>
+                        <a:ea typeface="Malgun Gothic" charset="0"/>
+                        <a:cs typeface="Malgun Gothic" charset="0"/>
+                      </a:endParaRPr>
+                    </a:p>
+                  </a:txBody>
+                  <a:tcPr marL="91440" marR="91440" marT="45720" marB="45720" anchor="ctr">
+                    <a:lnL w="9525" cap="flat" cmpd="sng" algn="ctr">
+                      <a:solidFill>
+                        <a:srgbClr val="D9D9D9"/>
+                      </a:solidFill>
+                      <a:prstDash val="solid"/>
+                      <a:round/>
+                      <a:headEnd type="none" w="med" len="med"/>
+                      <a:tailEnd type="none" w="med" len="med"/>
+                    </a:lnL>
+                    <a:lnR w="9525" cap="flat" cmpd="sng" algn="ctr">
+                      <a:solidFill>
+                        <a:srgbClr val="D9D9D9"/>
+                      </a:solidFill>
+                      <a:prstDash val="solid"/>
+                      <a:round/>
+                      <a:headEnd type="none" w="med" len="med"/>
+                      <a:tailEnd type="none" w="med" len="med"/>
+                    </a:lnR>
+                    <a:lnT w="9525" cap="flat" cmpd="sng" algn="ctr">
+                      <a:solidFill>
+                        <a:srgbClr val="D9D9D9"/>
+                      </a:solidFill>
+                      <a:prstDash val="solid"/>
+                      <a:round/>
+                      <a:headEnd type="none" w="med" len="med"/>
+                      <a:tailEnd type="none" w="med" len="med"/>
+                    </a:lnT>
+                    <a:lnB w="9525" cap="flat" cmpd="sng" algn="ctr">
+                      <a:solidFill>
+                        <a:srgbClr val="D9D9D9"/>
+                      </a:solidFill>
+                      <a:prstDash val="solid"/>
+                      <a:round/>
+                      <a:headEnd type="none" w="med" len="med"/>
+                      <a:tailEnd type="none" w="med" len="med"/>
+                    </a:lnB>
+                    <a:solidFill>
+                      <a:srgbClr val="FFFFFF"/>
+                    </a:solidFill>
+                  </a:tcPr>
+                </a:tc>
+                <a:tc>
+                  <a:txBody>
+                    <a:bodyPr/>
+                    <a:lstStyle/>
+                    <a:p>
+                      <a:pPr algn="ctr" indent="0" marL="0">
+                        <a:buNone/>
+                      </a:pPr>
+                      <a:r>
+                        <a:rPr lang="en-US" sz="1150" dirty="0">
+                          <a:solidFill>
+                            <a:srgbClr val="005BAC"/>
+                          </a:solidFill>
+                          <a:latin typeface="Malgun Gothic" pitchFamily="34" charset="0"/>
+                          <a:ea typeface="Malgun Gothic" pitchFamily="34" charset="-122"/>
+                          <a:cs typeface="Malgun Gothic" pitchFamily="34" charset="-120"/>
+                        </a:rPr>
+                        <a:t>526</a:t>
+                      </a:r>
+                      <a:endParaRPr lang="en-US" sz="1150" dirty="0">
+                        <a:latin typeface="Malgun Gothic" charset="0"/>
+                        <a:ea typeface="Malgun Gothic" charset="0"/>
+                        <a:cs typeface="Malgun Gothic" charset="0"/>
+                      </a:endParaRPr>
+                    </a:p>
+                  </a:txBody>
+                  <a:tcPr marL="91440" marR="91440" marT="45720" marB="45720" anchor="ctr">
+                    <a:lnL w="9525" cap="flat" cmpd="sng" algn="ctr">
+                      <a:solidFill>
+                        <a:srgbClr val="D9D9D9"/>
+                      </a:solidFill>
+                      <a:prstDash val="solid"/>
+                      <a:round/>
+                      <a:headEnd type="none" w="med" len="med"/>
+                      <a:tailEnd type="none" w="med" len="med"/>
+                    </a:lnL>
+                    <a:lnR w="9525" cap="flat" cmpd="sng" algn="ctr">
+                      <a:solidFill>
+                        <a:srgbClr val="D9D9D9"/>
+                      </a:solidFill>
+                      <a:prstDash val="solid"/>
+                      <a:round/>
+                      <a:headEnd type="none" w="med" len="med"/>
+                      <a:tailEnd type="none" w="med" len="med"/>
+                    </a:lnR>
+                    <a:lnT w="9525" cap="flat" cmpd="sng" algn="ctr">
+                      <a:solidFill>
+                        <a:srgbClr val="D9D9D9"/>
+                      </a:solidFill>
+                      <a:prstDash val="solid"/>
+                      <a:round/>
+                      <a:headEnd type="none" w="med" len="med"/>
+                      <a:tailEnd type="none" w="med" len="med"/>
+                    </a:lnT>
+                    <a:lnB w="9525" cap="flat" cmpd="sng" algn="ctr">
+                      <a:solidFill>
+                        <a:srgbClr val="D9D9D9"/>
+                      </a:solidFill>
+                      <a:prstDash val="solid"/>
+                      <a:round/>
+                      <a:headEnd type="none" w="med" len="med"/>
+                      <a:tailEnd type="none" w="med" len="med"/>
+                    </a:lnB>
+                    <a:solidFill>
+                      <a:srgbClr val="EAF1F8"/>
+                    </a:solidFill>
+                  </a:tcPr>
+                </a:tc>
+                <a:tc>
+                  <a:txBody>
+                    <a:bodyPr/>
+                    <a:lstStyle/>
+                    <a:p>
+                      <a:pPr algn="ctr" indent="0" marL="0">
+                        <a:buNone/>
+                      </a:pPr>
+                      <a:r>
+                        <a:rPr lang="en-US" sz="1150" dirty="0">
+                          <a:solidFill>
+                            <a:srgbClr val="005BAC"/>
+                          </a:solidFill>
+                          <a:latin typeface="Malgun Gothic" pitchFamily="34" charset="0"/>
+                          <a:ea typeface="Malgun Gothic" pitchFamily="34" charset="-122"/>
+                          <a:cs typeface="Malgun Gothic" pitchFamily="34" charset="-120"/>
+                        </a:rPr>
+                        <a:t>505</a:t>
+                      </a:r>
+                      <a:endParaRPr lang="en-US" sz="1150" dirty="0">
+                        <a:latin typeface="Malgun Gothic" charset="0"/>
+                        <a:ea typeface="Malgun Gothic" charset="0"/>
+                        <a:cs typeface="Malgun Gothic" charset="0"/>
+                      </a:endParaRPr>
+                    </a:p>
+                  </a:txBody>
+                  <a:tcPr marL="91440" marR="91440" marT="45720" marB="45720" anchor="ctr">
+                    <a:lnL w="9525" cap="flat" cmpd="sng" algn="ctr">
+                      <a:solidFill>
+                        <a:srgbClr val="D9D9D9"/>
+                      </a:solidFill>
+                      <a:prstDash val="solid"/>
+                      <a:round/>
+                      <a:headEnd type="none" w="med" len="med"/>
+                      <a:tailEnd type="none" w="med" len="med"/>
+                    </a:lnL>
+                    <a:lnR w="9525" cap="flat" cmpd="sng" algn="ctr">
+                      <a:solidFill>
+                        <a:srgbClr val="D9D9D9"/>
+                      </a:solidFill>
+                      <a:prstDash val="solid"/>
+                      <a:round/>
+                      <a:headEnd type="none" w="med" len="med"/>
+                      <a:tailEnd type="none" w="med" len="med"/>
+                    </a:lnR>
+                    <a:lnT w="9525" cap="flat" cmpd="sng" algn="ctr">
+                      <a:solidFill>
+                        <a:srgbClr val="D9D9D9"/>
+                      </a:solidFill>
+                      <a:prstDash val="solid"/>
+                      <a:round/>
+                      <a:headEnd type="none" w="med" len="med"/>
+                      <a:tailEnd type="none" w="med" len="med"/>
+                    </a:lnT>
+                    <a:lnB w="9525" cap="flat" cmpd="sng" algn="ctr">
+                      <a:solidFill>
+                        <a:srgbClr val="D9D9D9"/>
+                      </a:solidFill>
+                      <a:prstDash val="solid"/>
+                      <a:round/>
+                      <a:headEnd type="none" w="med" len="med"/>
+                      <a:tailEnd type="none" w="med" len="med"/>
+                    </a:lnB>
+                    <a:solidFill>
+                      <a:srgbClr val="EAF1F8"/>
+                    </a:solidFill>
+                  </a:tcPr>
+                </a:tc>
+                <a:tc>
+                  <a:txBody>
+                    <a:bodyPr/>
+                    <a:lstStyle/>
+                    <a:p>
+                      <a:pPr algn="ctr" indent="0" marL="0">
+                        <a:buNone/>
+                      </a:pPr>
+                      <a:r>
+                        <a:rPr lang="en-US" sz="1150" dirty="0">
+                          <a:solidFill>
+                            <a:srgbClr val="005BAC"/>
+                          </a:solidFill>
+                          <a:latin typeface="Malgun Gothic" pitchFamily="34" charset="0"/>
+                          <a:ea typeface="Malgun Gothic" pitchFamily="34" charset="-122"/>
+                          <a:cs typeface="Malgun Gothic" pitchFamily="34" charset="-120"/>
+                        </a:rPr>
+                        <a:t>665</a:t>
+                      </a:r>
+                      <a:endParaRPr lang="en-US" sz="1150" dirty="0">
+                        <a:latin typeface="Malgun Gothic" charset="0"/>
+                        <a:ea typeface="Malgun Gothic" charset="0"/>
+                        <a:cs typeface="Malgun Gothic" charset="0"/>
+                      </a:endParaRPr>
+                    </a:p>
+                  </a:txBody>
+                  <a:tcPr marL="91440" marR="91440" marT="45720" marB="45720" anchor="ctr">
+                    <a:lnL w="9525" cap="flat" cmpd="sng" algn="ctr">
+                      <a:solidFill>
+                        <a:srgbClr val="D9D9D9"/>
+                      </a:solidFill>
+                      <a:prstDash val="solid"/>
+                      <a:round/>
+                      <a:headEnd type="none" w="med" len="med"/>
+                      <a:tailEnd type="none" w="med" len="med"/>
+                    </a:lnL>
+                    <a:lnR w="9525" cap="flat" cmpd="sng" algn="ctr">
+                      <a:solidFill>
+                        <a:srgbClr val="D9D9D9"/>
+                      </a:solidFill>
+                      <a:prstDash val="solid"/>
+                      <a:round/>
+                      <a:headEnd type="none" w="med" len="med"/>
+                      <a:tailEnd type="none" w="med" len="med"/>
+                    </a:lnR>
+                    <a:lnT w="9525" cap="flat" cmpd="sng" algn="ctr">
+                      <a:solidFill>
+                        <a:srgbClr val="D9D9D9"/>
+                      </a:solidFill>
+                      <a:prstDash val="solid"/>
+                      <a:round/>
+                      <a:headEnd type="none" w="med" len="med"/>
+                      <a:tailEnd type="none" w="med" len="med"/>
+                    </a:lnT>
+                    <a:lnB w="9525" cap="flat" cmpd="sng" algn="ctr">
+                      <a:solidFill>
+                        <a:srgbClr val="D9D9D9"/>
+                      </a:solidFill>
+                      <a:prstDash val="solid"/>
+                      <a:round/>
+                      <a:headEnd type="none" w="med" len="med"/>
+                      <a:tailEnd type="none" w="med" len="med"/>
+                    </a:lnB>
+                    <a:solidFill>
+                      <a:srgbClr val="EAF1F8"/>
+                    </a:solidFill>
+                  </a:tcPr>
+                </a:tc>
+              </a:tr>
+              <a:tr h="384048">
+                <a:tc>
+                  <a:txBody>
+                    <a:bodyPr/>
+                    <a:lstStyle/>
+                    <a:p>
+                      <a:pPr algn="l" indent="0" marL="0">
+                        <a:buNone/>
+                      </a:pPr>
+                      <a:r>
+                        <a:rPr lang="en-US" sz="1150" b="1" dirty="0">
+                          <a:solidFill>
+                            <a:srgbClr val="3F3F3F"/>
+                          </a:solidFill>
+                          <a:latin typeface="Malgun Gothic" pitchFamily="34" charset="0"/>
+                          <a:ea typeface="Malgun Gothic" pitchFamily="34" charset="-122"/>
+                          <a:cs typeface="Malgun Gothic" pitchFamily="34" charset="-120"/>
+                        </a:rPr>
+                        <a:t>PM건수</a:t>
+                      </a:r>
+                      <a:endParaRPr lang="en-US" sz="1150" dirty="0">
+                        <a:latin typeface="Malgun Gothic" charset="0"/>
+                        <a:ea typeface="Malgun Gothic" charset="0"/>
+                        <a:cs typeface="Malgun Gothic" charset="0"/>
+                      </a:endParaRPr>
+                    </a:p>
+                  </a:txBody>
+                  <a:tcPr marL="91440" marR="91440" marT="45720" marB="45720" anchor="ctr">
+                    <a:lnL w="9525" cap="flat" cmpd="sng" algn="ctr">
+                      <a:solidFill>
+                        <a:srgbClr val="D9D9D9"/>
+                      </a:solidFill>
+                      <a:prstDash val="solid"/>
+                      <a:round/>
+                      <a:headEnd type="none" w="med" len="med"/>
+                      <a:tailEnd type="none" w="med" len="med"/>
+                    </a:lnL>
+                    <a:lnR w="9525" cap="flat" cmpd="sng" algn="ctr">
+                      <a:solidFill>
+                        <a:srgbClr val="D9D9D9"/>
+                      </a:solidFill>
+                      <a:prstDash val="solid"/>
+                      <a:round/>
+                      <a:headEnd type="none" w="med" len="med"/>
+                      <a:tailEnd type="none" w="med" len="med"/>
+                    </a:lnR>
+                    <a:lnT w="9525" cap="flat" cmpd="sng" algn="ctr">
+                      <a:solidFill>
+                        <a:srgbClr val="D9D9D9"/>
+                      </a:solidFill>
+                      <a:prstDash val="solid"/>
+                      <a:round/>
+                      <a:headEnd type="none" w="med" len="med"/>
+                      <a:tailEnd type="none" w="med" len="med"/>
+                    </a:lnT>
+                    <a:lnB w="9525" cap="flat" cmpd="sng" algn="ctr">
+                      <a:solidFill>
+                        <a:srgbClr val="D9D9D9"/>
+                      </a:solidFill>
+                      <a:prstDash val="solid"/>
+                      <a:round/>
+                      <a:headEnd type="none" w="med" len="med"/>
+                      <a:tailEnd type="none" w="med" len="med"/>
+                    </a:lnB>
+                    <a:solidFill>
+                      <a:srgbClr val="FFFFFF"/>
+                    </a:solidFill>
+                  </a:tcPr>
+                </a:tc>
+                <a:tc>
+                  <a:txBody>
+                    <a:bodyPr/>
+                    <a:lstStyle/>
+                    <a:p>
+                      <a:pPr algn="ctr" indent="0" marL="0">
+                        <a:buNone/>
+                      </a:pPr>
+                      <a:r>
+                        <a:rPr lang="en-US" sz="1150" dirty="0">
+                          <a:solidFill>
+                            <a:srgbClr val="3F3F3F"/>
+                          </a:solidFill>
+                          <a:latin typeface="Malgun Gothic" pitchFamily="34" charset="0"/>
+                          <a:ea typeface="Malgun Gothic" pitchFamily="34" charset="-122"/>
+                          <a:cs typeface="Malgun Gothic" pitchFamily="34" charset="-120"/>
+                        </a:rPr>
+                        <a:t>504</a:t>
+                      </a:r>
+                      <a:endParaRPr lang="en-US" sz="1150" dirty="0">
+                        <a:latin typeface="Malgun Gothic" charset="0"/>
+                        <a:ea typeface="Malgun Gothic" charset="0"/>
+                        <a:cs typeface="Malgun Gothic" charset="0"/>
+                      </a:endParaRPr>
+                    </a:p>
+                  </a:txBody>
+                  <a:tcPr marL="91440" marR="91440" marT="45720" marB="45720" anchor="ctr">
+                    <a:lnL w="9525" cap="flat" cmpd="sng" algn="ctr">
+                      <a:solidFill>
+                        <a:srgbClr val="D9D9D9"/>
+                      </a:solidFill>
+                      <a:prstDash val="solid"/>
+                      <a:round/>
+                      <a:headEnd type="none" w="med" len="med"/>
+                      <a:tailEnd type="none" w="med" len="med"/>
+                    </a:lnL>
+                    <a:lnR w="9525" cap="flat" cmpd="sng" algn="ctr">
+                      <a:solidFill>
+                        <a:srgbClr val="D9D9D9"/>
+                      </a:solidFill>
+                      <a:prstDash val="solid"/>
+                      <a:round/>
+                      <a:headEnd type="none" w="med" len="med"/>
+                      <a:tailEnd type="none" w="med" len="med"/>
+                    </a:lnR>
+                    <a:lnT w="9525" cap="flat" cmpd="sng" algn="ctr">
+                      <a:solidFill>
+                        <a:srgbClr val="D9D9D9"/>
+                      </a:solidFill>
+                      <a:prstDash val="solid"/>
+                      <a:round/>
+                      <a:headEnd type="none" w="med" len="med"/>
+                      <a:tailEnd type="none" w="med" len="med"/>
+                    </a:lnT>
+                    <a:lnB w="9525" cap="flat" cmpd="sng" algn="ctr">
+                      <a:solidFill>
+                        <a:srgbClr val="D9D9D9"/>
+                      </a:solidFill>
+                      <a:prstDash val="solid"/>
+                      <a:round/>
+                      <a:headEnd type="none" w="med" len="med"/>
+                      <a:tailEnd type="none" w="med" len="med"/>
+                    </a:lnB>
+                    <a:solidFill>
+                      <a:srgbClr val="FFFFFF"/>
+                    </a:solidFill>
+                  </a:tcPr>
+                </a:tc>
+                <a:tc>
+                  <a:txBody>
+                    <a:bodyPr/>
+                    <a:lstStyle/>
+                    <a:p>
+                      <a:pPr algn="ctr" indent="0" marL="0">
+                        <a:buNone/>
+                      </a:pPr>
+                      <a:r>
+                        <a:rPr lang="en-US" sz="1150" dirty="0">
+                          <a:solidFill>
+                            <a:srgbClr val="3F3F3F"/>
+                          </a:solidFill>
+                          <a:latin typeface="Malgun Gothic" pitchFamily="34" charset="0"/>
+                          <a:ea typeface="Malgun Gothic" pitchFamily="34" charset="-122"/>
+                          <a:cs typeface="Malgun Gothic" pitchFamily="34" charset="-120"/>
+                        </a:rPr>
+                        <a:t>539</a:t>
+                      </a:r>
+                      <a:endParaRPr lang="en-US" sz="1150" dirty="0">
+                        <a:latin typeface="Malgun Gothic" charset="0"/>
+                        <a:ea typeface="Malgun Gothic" charset="0"/>
+                        <a:cs typeface="Malgun Gothic" charset="0"/>
+                      </a:endParaRPr>
+                    </a:p>
+                  </a:txBody>
+                  <a:tcPr marL="91440" marR="91440" marT="45720" marB="45720" anchor="ctr">
+                    <a:lnL w="9525" cap="flat" cmpd="sng" algn="ctr">
+                      <a:solidFill>
+                        <a:srgbClr val="D9D9D9"/>
+                      </a:solidFill>
+                      <a:prstDash val="solid"/>
+                      <a:round/>
+                      <a:headEnd type="none" w="med" len="med"/>
+                      <a:tailEnd type="none" w="med" len="med"/>
+                    </a:lnL>
+                    <a:lnR w="9525" cap="flat" cmpd="sng" algn="ctr">
+                      <a:solidFill>
+                        <a:srgbClr val="D9D9D9"/>
+                      </a:solidFill>
+                      <a:prstDash val="solid"/>
+                      <a:round/>
+                      <a:headEnd type="none" w="med" len="med"/>
+                      <a:tailEnd type="none" w="med" len="med"/>
+                    </a:lnR>
+                    <a:lnT w="9525" cap="flat" cmpd="sng" algn="ctr">
+                      <a:solidFill>
+                        <a:srgbClr val="D9D9D9"/>
+                      </a:solidFill>
+                      <a:prstDash val="solid"/>
+                      <a:round/>
+                      <a:headEnd type="none" w="med" len="med"/>
+                      <a:tailEnd type="none" w="med" len="med"/>
+                    </a:lnT>
+                    <a:lnB w="9525" cap="flat" cmpd="sng" algn="ctr">
+                      <a:solidFill>
+                        <a:srgbClr val="D9D9D9"/>
+                      </a:solidFill>
+                      <a:prstDash val="solid"/>
+                      <a:round/>
+                      <a:headEnd type="none" w="med" len="med"/>
+                      <a:tailEnd type="none" w="med" len="med"/>
+                    </a:lnB>
+                    <a:solidFill>
+                      <a:srgbClr val="FFFFFF"/>
+                    </a:solidFill>
+                  </a:tcPr>
+                </a:tc>
+                <a:tc>
+                  <a:txBody>
+                    <a:bodyPr/>
+                    <a:lstStyle/>
+                    <a:p>
+                      <a:pPr algn="ctr" indent="0" marL="0">
+                        <a:buNone/>
+                      </a:pPr>
+                      <a:r>
+                        <a:rPr lang="en-US" sz="1150" dirty="0">
+                          <a:solidFill>
+                            <a:srgbClr val="3F3F3F"/>
+                          </a:solidFill>
+                          <a:latin typeface="Malgun Gothic" pitchFamily="34" charset="0"/>
+                          <a:ea typeface="Malgun Gothic" pitchFamily="34" charset="-122"/>
+                          <a:cs typeface="Malgun Gothic" pitchFamily="34" charset="-120"/>
+                        </a:rPr>
+                        <a:t>649</a:t>
+                      </a:r>
+                      <a:endParaRPr lang="en-US" sz="1150" dirty="0">
+                        <a:latin typeface="Malgun Gothic" charset="0"/>
+                        <a:ea typeface="Malgun Gothic" charset="0"/>
+                        <a:cs typeface="Malgun Gothic" charset="0"/>
+                      </a:endParaRPr>
+                    </a:p>
+                  </a:txBody>
+                  <a:tcPr marL="91440" marR="91440" marT="45720" marB="45720" anchor="ctr">
+                    <a:lnL w="9525" cap="flat" cmpd="sng" algn="ctr">
+                      <a:solidFill>
+                        <a:srgbClr val="D9D9D9"/>
+                      </a:solidFill>
+                      <a:prstDash val="solid"/>
+                      <a:round/>
+                      <a:headEnd type="none" w="med" len="med"/>
+                      <a:tailEnd type="none" w="med" len="med"/>
+                    </a:lnL>
+                    <a:lnR w="9525" cap="flat" cmpd="sng" algn="ctr">
+                      <a:solidFill>
+                        <a:srgbClr val="D9D9D9"/>
+                      </a:solidFill>
+                      <a:prstDash val="solid"/>
+                      <a:round/>
+                      <a:headEnd type="none" w="med" len="med"/>
+                      <a:tailEnd type="none" w="med" len="med"/>
+                    </a:lnR>
+                    <a:lnT w="9525" cap="flat" cmpd="sng" algn="ctr">
+                      <a:solidFill>
+                        <a:srgbClr val="D9D9D9"/>
+                      </a:solidFill>
+                      <a:prstDash val="solid"/>
+                      <a:round/>
+                      <a:headEnd type="none" w="med" len="med"/>
+                      <a:tailEnd type="none" w="med" len="med"/>
+                    </a:lnT>
+                    <a:lnB w="9525" cap="flat" cmpd="sng" algn="ctr">
+                      <a:solidFill>
+                        <a:srgbClr val="D9D9D9"/>
+                      </a:solidFill>
+                      <a:prstDash val="solid"/>
+                      <a:round/>
+                      <a:headEnd type="none" w="med" len="med"/>
+                      <a:tailEnd type="none" w="med" len="med"/>
+                    </a:lnB>
+                    <a:solidFill>
+                      <a:srgbClr val="FFFFFF"/>
+                    </a:solidFill>
+                  </a:tcPr>
+                </a:tc>
+                <a:tc>
+                  <a:txBody>
+                    <a:bodyPr/>
+                    <a:lstStyle/>
+                    <a:p>
+                      <a:pPr algn="ctr" indent="0" marL="0">
+                        <a:buNone/>
+                      </a:pPr>
+                      <a:r>
+                        <a:rPr lang="en-US" sz="1150" dirty="0">
+                          <a:solidFill>
+                            <a:srgbClr val="005BAC"/>
+                          </a:solidFill>
+                          <a:latin typeface="Malgun Gothic" pitchFamily="34" charset="0"/>
+                          <a:ea typeface="Malgun Gothic" pitchFamily="34" charset="-122"/>
+                          <a:cs typeface="Malgun Gothic" pitchFamily="34" charset="-120"/>
+                        </a:rPr>
+                        <a:t>666</a:t>
+                      </a:r>
+                      <a:endParaRPr lang="en-US" sz="1150" dirty="0">
+                        <a:latin typeface="Malgun Gothic" charset="0"/>
+                        <a:ea typeface="Malgun Gothic" charset="0"/>
+                        <a:cs typeface="Malgun Gothic" charset="0"/>
+                      </a:endParaRPr>
+                    </a:p>
+                  </a:txBody>
+                  <a:tcPr marL="91440" marR="91440" marT="45720" marB="45720" anchor="ctr">
+                    <a:lnL w="9525" cap="flat" cmpd="sng" algn="ctr">
+                      <a:solidFill>
+                        <a:srgbClr val="D9D9D9"/>
+                      </a:solidFill>
+                      <a:prstDash val="solid"/>
+                      <a:round/>
+                      <a:headEnd type="none" w="med" len="med"/>
+                      <a:tailEnd type="none" w="med" len="med"/>
+                    </a:lnL>
+                    <a:lnR w="9525" cap="flat" cmpd="sng" algn="ctr">
+                      <a:solidFill>
+                        <a:srgbClr val="D9D9D9"/>
+                      </a:solidFill>
+                      <a:prstDash val="solid"/>
+                      <a:round/>
+                      <a:headEnd type="none" w="med" len="med"/>
+                      <a:tailEnd type="none" w="med" len="med"/>
+                    </a:lnR>
+                    <a:lnT w="9525" cap="flat" cmpd="sng" algn="ctr">
+                      <a:solidFill>
+                        <a:srgbClr val="D9D9D9"/>
+                      </a:solidFill>
+                      <a:prstDash val="solid"/>
+                      <a:round/>
+                      <a:headEnd type="none" w="med" len="med"/>
+                      <a:tailEnd type="none" w="med" len="med"/>
+                    </a:lnT>
+                    <a:lnB w="9525" cap="flat" cmpd="sng" algn="ctr">
+                      <a:solidFill>
+                        <a:srgbClr val="D9D9D9"/>
+                      </a:solidFill>
+                      <a:prstDash val="solid"/>
+                      <a:round/>
+                      <a:headEnd type="none" w="med" len="med"/>
+                      <a:tailEnd type="none" w="med" len="med"/>
+                    </a:lnB>
+                    <a:solidFill>
+                      <a:srgbClr val="EAF1F8"/>
+                    </a:solidFill>
+                  </a:tcPr>
+                </a:tc>
+                <a:tc>
+                  <a:txBody>
+                    <a:bodyPr/>
+                    <a:lstStyle/>
+                    <a:p>
+                      <a:pPr algn="ctr" indent="0" marL="0">
+                        <a:buNone/>
+                      </a:pPr>
+                      <a:r>
+                        <a:rPr lang="en-US" sz="1150" dirty="0">
+                          <a:solidFill>
+                            <a:srgbClr val="005BAC"/>
+                          </a:solidFill>
+                          <a:latin typeface="Malgun Gothic" pitchFamily="34" charset="0"/>
+                          <a:ea typeface="Malgun Gothic" pitchFamily="34" charset="-122"/>
+                          <a:cs typeface="Malgun Gothic" pitchFamily="34" charset="-120"/>
+                        </a:rPr>
+                        <a:t>442</a:t>
+                      </a:r>
+                      <a:endParaRPr lang="en-US" sz="1150" dirty="0">
+                        <a:latin typeface="Malgun Gothic" charset="0"/>
+                        <a:ea typeface="Malgun Gothic" charset="0"/>
+                        <a:cs typeface="Malgun Gothic" charset="0"/>
+                      </a:endParaRPr>
+                    </a:p>
+                  </a:txBody>
+                  <a:tcPr marL="91440" marR="91440" marT="45720" marB="45720" anchor="ctr">
+                    <a:lnL w="9525" cap="flat" cmpd="sng" algn="ctr">
+                      <a:solidFill>
+                        <a:srgbClr val="D9D9D9"/>
+                      </a:solidFill>
+                      <a:prstDash val="solid"/>
+                      <a:round/>
+                      <a:headEnd type="none" w="med" len="med"/>
+                      <a:tailEnd type="none" w="med" len="med"/>
+                    </a:lnL>
+                    <a:lnR w="9525" cap="flat" cmpd="sng" algn="ctr">
+                      <a:solidFill>
+                        <a:srgbClr val="D9D9D9"/>
+                      </a:solidFill>
+                      <a:prstDash val="solid"/>
+                      <a:round/>
+                      <a:headEnd type="none" w="med" len="med"/>
+                      <a:tailEnd type="none" w="med" len="med"/>
+                    </a:lnR>
+                    <a:lnT w="9525" cap="flat" cmpd="sng" algn="ctr">
+                      <a:solidFill>
+                        <a:srgbClr val="D9D9D9"/>
+                      </a:solidFill>
+                      <a:prstDash val="solid"/>
+                      <a:round/>
+                      <a:headEnd type="none" w="med" len="med"/>
+                      <a:tailEnd type="none" w="med" len="med"/>
+                    </a:lnT>
+                    <a:lnB w="9525" cap="flat" cmpd="sng" algn="ctr">
+                      <a:solidFill>
+                        <a:srgbClr val="D9D9D9"/>
+                      </a:solidFill>
+                      <a:prstDash val="solid"/>
+                      <a:round/>
+                      <a:headEnd type="none" w="med" len="med"/>
+                      <a:tailEnd type="none" w="med" len="med"/>
+                    </a:lnB>
+                    <a:solidFill>
+                      <a:srgbClr val="EAF1F8"/>
+                    </a:solidFill>
+                  </a:tcPr>
+                </a:tc>
+                <a:tc>
+                  <a:txBody>
+                    <a:bodyPr/>
+                    <a:lstStyle/>
+                    <a:p>
+                      <a:pPr algn="ctr" indent="0" marL="0">
+                        <a:buNone/>
+                      </a:pPr>
+                      <a:r>
+                        <a:rPr lang="en-US" sz="1150" dirty="0">
+                          <a:solidFill>
+                            <a:srgbClr val="005BAC"/>
+                          </a:solidFill>
+                          <a:latin typeface="Malgun Gothic" pitchFamily="34" charset="0"/>
+                          <a:ea typeface="Malgun Gothic" pitchFamily="34" charset="-122"/>
+                          <a:cs typeface="Malgun Gothic" pitchFamily="34" charset="-120"/>
+                        </a:rPr>
+                        <a:t>904</a:t>
+                      </a:r>
+                      <a:endParaRPr lang="en-US" sz="1150" dirty="0">
+                        <a:latin typeface="Malgun Gothic" charset="0"/>
+                        <a:ea typeface="Malgun Gothic" charset="0"/>
+                        <a:cs typeface="Malgun Gothic" charset="0"/>
+                      </a:endParaRPr>
+                    </a:p>
+                  </a:txBody>
+                  <a:tcPr marL="91440" marR="91440" marT="45720" marB="45720" anchor="ctr">
+                    <a:lnL w="9525" cap="flat" cmpd="sng" algn="ctr">
+                      <a:solidFill>
+                        <a:srgbClr val="D9D9D9"/>
+                      </a:solidFill>
+                      <a:prstDash val="solid"/>
+                      <a:round/>
+                      <a:headEnd type="none" w="med" len="med"/>
+                      <a:tailEnd type="none" w="med" len="med"/>
+                    </a:lnL>
+                    <a:lnR w="9525" cap="flat" cmpd="sng" algn="ctr">
+                      <a:solidFill>
+                        <a:srgbClr val="D9D9D9"/>
+                      </a:solidFill>
+                      <a:prstDash val="solid"/>
+                      <a:round/>
+                      <a:headEnd type="none" w="med" len="med"/>
+                      <a:tailEnd type="none" w="med" len="med"/>
+                    </a:lnR>
+                    <a:lnT w="9525" cap="flat" cmpd="sng" algn="ctr">
+                      <a:solidFill>
+                        <a:srgbClr val="D9D9D9"/>
+                      </a:solidFill>
+                      <a:prstDash val="solid"/>
+                      <a:round/>
+                      <a:headEnd type="none" w="med" len="med"/>
+                      <a:tailEnd type="none" w="med" len="med"/>
+                    </a:lnT>
+                    <a:lnB w="9525" cap="flat" cmpd="sng" algn="ctr">
+                      <a:solidFill>
+                        <a:srgbClr val="D9D9D9"/>
+                      </a:solidFill>
+                      <a:prstDash val="solid"/>
+                      <a:round/>
+                      <a:headEnd type="none" w="med" len="med"/>
+                      <a:tailEnd type="none" w="med" len="med"/>
+                    </a:lnB>
+                    <a:solidFill>
+                      <a:srgbClr val="EAF1F8"/>
+                    </a:solidFill>
+                  </a:tcPr>
+                </a:tc>
+              </a:tr>
+            </a:tbl>
+          </a:graphicData>
+        </a:graphic>
+      </p:graphicFrame>
+      <p:sp>
+        <p:nvSpPr>
+          <p:cNvPr id="8" name="Text 4"/>
+          <p:cNvSpPr/>
+          <p:nvPr/>
+        </p:nvSpPr>
+        <p:spPr>
+          <a:xfrm>
+            <a:off x="530352" y="3063240"/>
+            <a:ext cx="11100816" cy="228600"/>
+          </a:xfrm>
+          <a:prstGeom prst="rect">
+            <a:avLst/>
+          </a:prstGeom>
+          <a:noFill/>
+          <a:ln/>
+        </p:spPr>
+        <p:txBody>
+          <a:bodyPr wrap="square" lIns="0" tIns="0" rIns="0" bIns="0" rtlCol="0" anchor="ctr"/>
+          <a:lstStyle/>
+          <a:p>
+            <a:pPr indent="0" marL="0">
+              <a:buNone/>
+            </a:pPr>
+            <a:r>
+              <a:rPr lang="en-US" sz="900" i="1" dirty="0">
+                <a:solidFill>
+                  <a:srgbClr val="9E9E9E"/>
+                </a:solidFill>
+                <a:latin typeface="Malgun Gothic" pitchFamily="34" charset="0"/>
+                <a:ea typeface="Malgun Gothic" pitchFamily="34" charset="-122"/>
+                <a:cs typeface="Malgun Gothic" pitchFamily="34" charset="-120"/>
+              </a:rPr>
+              <a:t>4월(음영)부터가 조직개편 이후 구간입니다.</a:t>
+            </a:r>
+            <a:endParaRPr lang="en-US" sz="900" dirty="0"/>
+          </a:p>
+        </p:txBody>
+      </p:sp>
+      <p:sp>
+        <p:nvSpPr>
+          <p:cNvPr id="9" name="Text 5"/>
+          <p:cNvSpPr/>
+          <p:nvPr/>
+        </p:nvSpPr>
+        <p:spPr>
+          <a:xfrm>
+            <a:off x="530352" y="3429000"/>
+            <a:ext cx="5486400" cy="320040"/>
+          </a:xfrm>
+          <a:prstGeom prst="rect">
+            <a:avLst/>
+          </a:prstGeom>
+          <a:noFill/>
+          <a:ln/>
+        </p:spPr>
+        <p:txBody>
+          <a:bodyPr wrap="square" lIns="0" tIns="0" rIns="0" bIns="0" rtlCol="0" anchor="ctr"/>
+          <a:lstStyle/>
+          <a:p>
+            <a:pPr indent="0" marL="0">
+              <a:buNone/>
+            </a:pPr>
+            <a:r>
+              <a:rPr lang="en-US" sz="1300" b="1" dirty="0">
+                <a:solidFill>
+                  <a:srgbClr val="005BAC"/>
+                </a:solidFill>
+                <a:latin typeface="Malgun Gothic" pitchFamily="34" charset="0"/>
+                <a:ea typeface="Malgun Gothic" pitchFamily="34" charset="-122"/>
+                <a:cs typeface="Malgun Gothic" pitchFamily="34" charset="-120"/>
+              </a:rPr>
+              <a:t>개편 전(1~3월 평균) vs 개편 후(4~6월 평균)</a:t>
+            </a:r>
+            <a:endParaRPr lang="en-US" sz="1300" dirty="0"/>
+          </a:p>
+        </p:txBody>
+      </p:sp>
+      <p:graphicFrame>
+        <p:nvGraphicFramePr>
+          <p:cNvPr id="13" name="Table 1"/>
+          <p:cNvGraphicFramePr>
+            <a:graphicFrameLocks noGrp="1"/>
+          </p:cNvGraphicFramePr>
+          <p:nvPr>
+            <p:extLst>
+              <p:ext uri="{D42A27DB-BD31-4B8C-83A1-F6EECF244321}">
+                <p14:modId xmlns:p14="http://schemas.microsoft.com/office/powerpoint/2010/main" val="1579011935"/>
+              </p:ext>
+            </p:extLst>
+          </p:nvPr>
+        </p:nvGraphicFramePr>
+        <p:xfrm>
+          <a:off x="530352" y="3794760"/>
+          <a:ext cx="5486400" cy="914400"/>
+        </p:xfrm>
+        <a:graphic>
+          <a:graphicData uri="http://schemas.openxmlformats.org/drawingml/2006/table">
+            <a:tbl>
+              <a:tblPr/>
+              <a:tblGrid>
+                <a:gridCol w="2011680"/>
+                <a:gridCol w="1188720"/>
+                <a:gridCol w="1188720"/>
+                <a:gridCol w="1097280"/>
+              </a:tblGrid>
+              <a:tr h="365760">
+                <a:tc>
+                  <a:txBody>
+                    <a:bodyPr/>
+                    <a:lstStyle/>
+                    <a:p>
+                      <a:pPr algn="l" indent="0" marL="0">
+                        <a:buNone/>
+                      </a:pPr>
+                      <a:r>
+                        <a:rPr lang="en-US" sz="1100" b="1" dirty="0">
+                          <a:solidFill>
+                            <a:srgbClr val="FFFFFF"/>
+                          </a:solidFill>
+                          <a:latin typeface="Malgun Gothic" pitchFamily="34" charset="0"/>
+                          <a:ea typeface="Malgun Gothic" pitchFamily="34" charset="-122"/>
+                          <a:cs typeface="Malgun Gothic" pitchFamily="34" charset="-120"/>
+                        </a:rPr>
+                        <a:t>구분</a:t>
+                      </a:r>
+                      <a:endParaRPr lang="en-US" sz="1100" dirty="0">
+                        <a:latin typeface="Malgun Gothic" charset="0"/>
+                        <a:ea typeface="Malgun Gothic" charset="0"/>
+                        <a:cs typeface="Malgun Gothic" charset="0"/>
+                      </a:endParaRPr>
+                    </a:p>
+                  </a:txBody>
+                  <a:tcPr marL="91440" marR="91440" marT="45720" marB="45720" anchor="ctr">
+                    <a:lnL w="9525" cap="flat" cmpd="sng" algn="ctr">
+                      <a:solidFill>
+                        <a:srgbClr val="D9D9D9"/>
+                      </a:solidFill>
+                      <a:prstDash val="solid"/>
+                      <a:round/>
+                      <a:headEnd type="none" w="med" len="med"/>
+                      <a:tailEnd type="none" w="med" len="med"/>
+                    </a:lnL>
+                    <a:lnR w="9525" cap="flat" cmpd="sng" algn="ctr">
+                      <a:solidFill>
+                        <a:srgbClr val="D9D9D9"/>
+                      </a:solidFill>
+                      <a:prstDash val="solid"/>
+                      <a:round/>
+                      <a:headEnd type="none" w="med" len="med"/>
+                      <a:tailEnd type="none" w="med" len="med"/>
+                    </a:lnR>
+                    <a:lnT w="9525" cap="flat" cmpd="sng" algn="ctr">
+                      <a:solidFill>
+                        <a:srgbClr val="D9D9D9"/>
+                      </a:solidFill>
+                      <a:prstDash val="solid"/>
+                      <a:round/>
+                      <a:headEnd type="none" w="med" len="med"/>
+                      <a:tailEnd type="none" w="med" len="med"/>
+                    </a:lnT>
+                    <a:lnB w="9525" cap="flat" cmpd="sng" algn="ctr">
+                      <a:solidFill>
+                        <a:srgbClr val="D9D9D9"/>
+                      </a:solidFill>
+                      <a:prstDash val="solid"/>
+                      <a:round/>
+                      <a:headEnd type="none" w="med" len="med"/>
+                      <a:tailEnd type="none" w="med" len="med"/>
+                    </a:lnB>
+                    <a:solidFill>
+                      <a:srgbClr val="005BAC"/>
+                    </a:solidFill>
+                  </a:tcPr>
+                </a:tc>
+                <a:tc>
+                  <a:txBody>
+                    <a:bodyPr/>
+                    <a:lstStyle/>
+                    <a:p>
+                      <a:pPr algn="ctr" indent="0" marL="0">
+                        <a:buNone/>
+                      </a:pPr>
+                      <a:r>
+                        <a:rPr lang="en-US" sz="1100" b="1" dirty="0">
+                          <a:solidFill>
+                            <a:srgbClr val="FFFFFF"/>
+                          </a:solidFill>
+                          <a:latin typeface="Malgun Gothic" pitchFamily="34" charset="0"/>
+                          <a:ea typeface="Malgun Gothic" pitchFamily="34" charset="-122"/>
+                          <a:cs typeface="Malgun Gothic" pitchFamily="34" charset="-120"/>
+                        </a:rPr>
+                        <a:t>개편 전</a:t>
+                      </a:r>
+                      <a:endParaRPr lang="en-US" sz="1100" dirty="0">
+                        <a:latin typeface="Malgun Gothic" charset="0"/>
+                        <a:ea typeface="Malgun Gothic" charset="0"/>
+                        <a:cs typeface="Malgun Gothic" charset="0"/>
+                      </a:endParaRPr>
+                    </a:p>
+                  </a:txBody>
+                  <a:tcPr marL="91440" marR="91440" marT="45720" marB="45720" anchor="ctr">
+                    <a:lnL w="9525" cap="flat" cmpd="sng" algn="ctr">
+                      <a:solidFill>
+                        <a:srgbClr val="D9D9D9"/>
+                      </a:solidFill>
+                      <a:prstDash val="solid"/>
+                      <a:round/>
+                      <a:headEnd type="none" w="med" len="med"/>
+                      <a:tailEnd type="none" w="med" len="med"/>
+                    </a:lnL>
+                    <a:lnR w="9525" cap="flat" cmpd="sng" algn="ctr">
+                      <a:solidFill>
+                        <a:srgbClr val="D9D9D9"/>
+                      </a:solidFill>
+                      <a:prstDash val="solid"/>
+                      <a:round/>
+                      <a:headEnd type="none" w="med" len="med"/>
+                      <a:tailEnd type="none" w="med" len="med"/>
+                    </a:lnR>
+                    <a:lnT w="9525" cap="flat" cmpd="sng" algn="ctr">
+                      <a:solidFill>
+                        <a:srgbClr val="D9D9D9"/>
+                      </a:solidFill>
+                      <a:prstDash val="solid"/>
+                      <a:round/>
+                      <a:headEnd type="none" w="med" len="med"/>
+                      <a:tailEnd type="none" w="med" len="med"/>
+                    </a:lnT>
+                    <a:lnB w="9525" cap="flat" cmpd="sng" algn="ctr">
+                      <a:solidFill>
+                        <a:srgbClr val="D9D9D9"/>
+                      </a:solidFill>
+                      <a:prstDash val="solid"/>
+                      <a:round/>
+                      <a:headEnd type="none" w="med" len="med"/>
+                      <a:tailEnd type="none" w="med" len="med"/>
+                    </a:lnB>
+                    <a:solidFill>
+                      <a:srgbClr val="005BAC"/>
+                    </a:solidFill>
+                  </a:tcPr>
+                </a:tc>
+                <a:tc>
+                  <a:txBody>
+                    <a:bodyPr/>
+                    <a:lstStyle/>
+                    <a:p>
+                      <a:pPr algn="ctr" indent="0" marL="0">
+                        <a:buNone/>
+                      </a:pPr>
+                      <a:r>
+                        <a:rPr lang="en-US" sz="1100" b="1" dirty="0">
+                          <a:solidFill>
+                            <a:srgbClr val="FFFFFF"/>
+                          </a:solidFill>
+                          <a:latin typeface="Malgun Gothic" pitchFamily="34" charset="0"/>
+                          <a:ea typeface="Malgun Gothic" pitchFamily="34" charset="-122"/>
+                          <a:cs typeface="Malgun Gothic" pitchFamily="34" charset="-120"/>
+                        </a:rPr>
+                        <a:t>개편 후</a:t>
+                      </a:r>
+                      <a:endParaRPr lang="en-US" sz="1100" dirty="0">
+                        <a:latin typeface="Malgun Gothic" charset="0"/>
+                        <a:ea typeface="Malgun Gothic" charset="0"/>
+                        <a:cs typeface="Malgun Gothic" charset="0"/>
+                      </a:endParaRPr>
+                    </a:p>
+                  </a:txBody>
+                  <a:tcPr marL="91440" marR="91440" marT="45720" marB="45720" anchor="ctr">
+                    <a:lnL w="9525" cap="flat" cmpd="sng" algn="ctr">
+                      <a:solidFill>
+                        <a:srgbClr val="D9D9D9"/>
+                      </a:solidFill>
+                      <a:prstDash val="solid"/>
+                      <a:round/>
+                      <a:headEnd type="none" w="med" len="med"/>
+                      <a:tailEnd type="none" w="med" len="med"/>
+                    </a:lnL>
+                    <a:lnR w="9525" cap="flat" cmpd="sng" algn="ctr">
+                      <a:solidFill>
+                        <a:srgbClr val="D9D9D9"/>
+                      </a:solidFill>
+                      <a:prstDash val="solid"/>
+                      <a:round/>
+                      <a:headEnd type="none" w="med" len="med"/>
+                      <a:tailEnd type="none" w="med" len="med"/>
+                    </a:lnR>
+                    <a:lnT w="9525" cap="flat" cmpd="sng" algn="ctr">
+                      <a:solidFill>
+                        <a:srgbClr val="D9D9D9"/>
+                      </a:solidFill>
+                      <a:prstDash val="solid"/>
+                      <a:round/>
+                      <a:headEnd type="none" w="med" len="med"/>
+                      <a:tailEnd type="none" w="med" len="med"/>
+                    </a:lnT>
+                    <a:lnB w="9525" cap="flat" cmpd="sng" algn="ctr">
+                      <a:solidFill>
+                        <a:srgbClr val="D9D9D9"/>
+                      </a:solidFill>
+                      <a:prstDash val="solid"/>
+                      <a:round/>
+                      <a:headEnd type="none" w="med" len="med"/>
+                      <a:tailEnd type="none" w="med" len="med"/>
+                    </a:lnB>
+                    <a:solidFill>
+                      <a:srgbClr val="005BAC"/>
+                    </a:solidFill>
+                  </a:tcPr>
+                </a:tc>
+                <a:tc>
+                  <a:txBody>
+                    <a:bodyPr/>
+                    <a:lstStyle/>
+                    <a:p>
+                      <a:pPr algn="ctr" indent="0" marL="0">
+                        <a:buNone/>
+                      </a:pPr>
+                      <a:r>
+                        <a:rPr lang="en-US" sz="1100" b="1" dirty="0">
+                          <a:solidFill>
+                            <a:srgbClr val="FFFFFF"/>
+                          </a:solidFill>
+                          <a:latin typeface="Malgun Gothic" pitchFamily="34" charset="0"/>
+                          <a:ea typeface="Malgun Gothic" pitchFamily="34" charset="-122"/>
+                          <a:cs typeface="Malgun Gothic" pitchFamily="34" charset="-120"/>
+                        </a:rPr>
+                        <a:t>증감</a:t>
+                      </a:r>
+                      <a:endParaRPr lang="en-US" sz="1100" dirty="0">
+                        <a:latin typeface="Malgun Gothic" charset="0"/>
+                        <a:ea typeface="Malgun Gothic" charset="0"/>
+                        <a:cs typeface="Malgun Gothic" charset="0"/>
+                      </a:endParaRPr>
+                    </a:p>
+                  </a:txBody>
+                  <a:tcPr marL="91440" marR="91440" marT="45720" marB="45720" anchor="ctr">
+                    <a:lnL w="9525" cap="flat" cmpd="sng" algn="ctr">
+                      <a:solidFill>
+                        <a:srgbClr val="D9D9D9"/>
+                      </a:solidFill>
+                      <a:prstDash val="solid"/>
+                      <a:round/>
+                      <a:headEnd type="none" w="med" len="med"/>
+                      <a:tailEnd type="none" w="med" len="med"/>
+                    </a:lnL>
+                    <a:lnR w="9525" cap="flat" cmpd="sng" algn="ctr">
+                      <a:solidFill>
+                        <a:srgbClr val="D9D9D9"/>
+                      </a:solidFill>
+                      <a:prstDash val="solid"/>
+                      <a:round/>
+                      <a:headEnd type="none" w="med" len="med"/>
+                      <a:tailEnd type="none" w="med" len="med"/>
+                    </a:lnR>
+                    <a:lnT w="9525" cap="flat" cmpd="sng" algn="ctr">
+                      <a:solidFill>
+                        <a:srgbClr val="D9D9D9"/>
+                      </a:solidFill>
+                      <a:prstDash val="solid"/>
+                      <a:round/>
+                      <a:headEnd type="none" w="med" len="med"/>
+                      <a:tailEnd type="none" w="med" len="med"/>
+                    </a:lnT>
+                    <a:lnB w="9525" cap="flat" cmpd="sng" algn="ctr">
+                      <a:solidFill>
+                        <a:srgbClr val="D9D9D9"/>
+                      </a:solidFill>
+                      <a:prstDash val="solid"/>
+                      <a:round/>
+                      <a:headEnd type="none" w="med" len="med"/>
+                      <a:tailEnd type="none" w="med" len="med"/>
+                    </a:lnB>
+                    <a:solidFill>
+                      <a:srgbClr val="005BAC"/>
+                    </a:solidFill>
+                  </a:tcPr>
+                </a:tc>
+              </a:tr>
+              <a:tr h="365760">
+                <a:tc>
+                  <a:txBody>
+                    <a:bodyPr/>
+                    <a:lstStyle/>
+                    <a:p>
+                      <a:pPr algn="l" indent="0" marL="0">
+                        <a:buNone/>
+                      </a:pPr>
+                      <a:r>
+                        <a:rPr lang="en-US" sz="1100" dirty="0">
+                          <a:solidFill>
+                            <a:srgbClr val="3F3F3F"/>
+                          </a:solidFill>
+                          <a:latin typeface="Malgun Gothic" pitchFamily="34" charset="0"/>
+                          <a:ea typeface="Malgun Gothic" pitchFamily="34" charset="-122"/>
+                          <a:cs typeface="Malgun Gothic" pitchFamily="34" charset="-120"/>
+                        </a:rPr>
+                        <a:t>방문건수(월평균)</a:t>
+                      </a:r>
+                      <a:endParaRPr lang="en-US" sz="1100" dirty="0">
+                        <a:latin typeface="Malgun Gothic" charset="0"/>
+                        <a:ea typeface="Malgun Gothic" charset="0"/>
+                        <a:cs typeface="Malgun Gothic" charset="0"/>
+                      </a:endParaRPr>
+                    </a:p>
+                  </a:txBody>
+                  <a:tcPr marL="91440" marR="91440" marT="45720" marB="45720" anchor="ctr">
+                    <a:lnL w="9525" cap="flat" cmpd="sng" algn="ctr">
+                      <a:solidFill>
+                        <a:srgbClr val="D9D9D9"/>
+                      </a:solidFill>
+                      <a:prstDash val="solid"/>
+                      <a:round/>
+                      <a:headEnd type="none" w="med" len="med"/>
+                      <a:tailEnd type="none" w="med" len="med"/>
+                    </a:lnL>
+                    <a:lnR w="9525" cap="flat" cmpd="sng" algn="ctr">
+                      <a:solidFill>
+                        <a:srgbClr val="D9D9D9"/>
+                      </a:solidFill>
+                      <a:prstDash val="solid"/>
+                      <a:round/>
+                      <a:headEnd type="none" w="med" len="med"/>
+                      <a:tailEnd type="none" w="med" len="med"/>
+                    </a:lnR>
+                    <a:lnT w="9525" cap="flat" cmpd="sng" algn="ctr">
+                      <a:solidFill>
+                        <a:srgbClr val="D9D9D9"/>
+                      </a:solidFill>
+                      <a:prstDash val="solid"/>
+                      <a:round/>
+                      <a:headEnd type="none" w="med" len="med"/>
+                      <a:tailEnd type="none" w="med" len="med"/>
+                    </a:lnT>
+                    <a:lnB w="9525" cap="flat" cmpd="sng" algn="ctr">
+                      <a:solidFill>
+                        <a:srgbClr val="D9D9D9"/>
+                      </a:solidFill>
+                      <a:prstDash val="solid"/>
+                      <a:round/>
+                      <a:headEnd type="none" w="med" len="med"/>
+                      <a:tailEnd type="none" w="med" len="med"/>
+                    </a:lnB>
+                    <a:solidFill>
+                      <a:srgbClr val="FFFFFF"/>
+                    </a:solidFill>
+                  </a:tcPr>
+                </a:tc>
+                <a:tc>
+                  <a:txBody>
+                    <a:bodyPr/>
+                    <a:lstStyle/>
+                    <a:p>
+                      <a:pPr algn="ctr" indent="0" marL="0">
+                        <a:buNone/>
+                      </a:pPr>
+                      <a:r>
+                        <a:rPr lang="en-US" sz="1100" dirty="0">
+                          <a:solidFill>
+                            <a:srgbClr val="3F3F3F"/>
+                          </a:solidFill>
+                          <a:latin typeface="Malgun Gothic" pitchFamily="34" charset="0"/>
+                          <a:ea typeface="Malgun Gothic" pitchFamily="34" charset="-122"/>
+                          <a:cs typeface="Malgun Gothic" pitchFamily="34" charset="-120"/>
+                        </a:rPr>
+                        <a:t>1,757</a:t>
+                      </a:r>
+                      <a:endParaRPr lang="en-US" sz="1100" dirty="0">
+                        <a:latin typeface="Malgun Gothic" charset="0"/>
+                        <a:ea typeface="Malgun Gothic" charset="0"/>
+                        <a:cs typeface="Malgun Gothic" charset="0"/>
+                      </a:endParaRPr>
+                    </a:p>
+                  </a:txBody>
+                  <a:tcPr marL="91440" marR="91440" marT="45720" marB="45720" anchor="ctr">
+                    <a:lnL w="9525" cap="flat" cmpd="sng" algn="ctr">
+                      <a:solidFill>
+                        <a:srgbClr val="D9D9D9"/>
+                      </a:solidFill>
+                      <a:prstDash val="solid"/>
+                      <a:round/>
+                      <a:headEnd type="none" w="med" len="med"/>
+                      <a:tailEnd type="none" w="med" len="med"/>
+                    </a:lnL>
+                    <a:lnR w="9525" cap="flat" cmpd="sng" algn="ctr">
+                      <a:solidFill>
+                        <a:srgbClr val="D9D9D9"/>
+                      </a:solidFill>
+                      <a:prstDash val="solid"/>
+                      <a:round/>
+                      <a:headEnd type="none" w="med" len="med"/>
+                      <a:tailEnd type="none" w="med" len="med"/>
+                    </a:lnR>
+                    <a:lnT w="9525" cap="flat" cmpd="sng" algn="ctr">
+                      <a:solidFill>
+                        <a:srgbClr val="D9D9D9"/>
+                      </a:solidFill>
+                      <a:prstDash val="solid"/>
+                      <a:round/>
+                      <a:headEnd type="none" w="med" len="med"/>
+                      <a:tailEnd type="none" w="med" len="med"/>
+                    </a:lnT>
+                    <a:lnB w="9525" cap="flat" cmpd="sng" algn="ctr">
+                      <a:solidFill>
+                        <a:srgbClr val="D9D9D9"/>
+                      </a:solidFill>
+                      <a:prstDash val="solid"/>
+                      <a:round/>
+                      <a:headEnd type="none" w="med" len="med"/>
+                      <a:tailEnd type="none" w="med" len="med"/>
+                    </a:lnB>
+                    <a:solidFill>
+                      <a:srgbClr val="FFFFFF"/>
+                    </a:solidFill>
+                  </a:tcPr>
+                </a:tc>
+                <a:tc>
+                  <a:txBody>
+                    <a:bodyPr/>
+                    <a:lstStyle/>
+                    <a:p>
+                      <a:pPr algn="ctr" indent="0" marL="0">
+                        <a:buNone/>
+                      </a:pPr>
+                      <a:r>
+                        <a:rPr lang="en-US" sz="1100" dirty="0">
+                          <a:solidFill>
+                            <a:srgbClr val="3F3F3F"/>
+                          </a:solidFill>
+                          <a:latin typeface="Malgun Gothic" pitchFamily="34" charset="0"/>
+                          <a:ea typeface="Malgun Gothic" pitchFamily="34" charset="-122"/>
+                          <a:cs typeface="Malgun Gothic" pitchFamily="34" charset="-120"/>
+                        </a:rPr>
+                        <a:t>2,093</a:t>
+                      </a:r>
+                      <a:endParaRPr lang="en-US" sz="1100" dirty="0">
+                        <a:latin typeface="Malgun Gothic" charset="0"/>
+                        <a:ea typeface="Malgun Gothic" charset="0"/>
+                        <a:cs typeface="Malgun Gothic" charset="0"/>
+                      </a:endParaRPr>
+                    </a:p>
+                  </a:txBody>
+                  <a:tcPr marL="91440" marR="91440" marT="45720" marB="45720" anchor="ctr">
+                    <a:lnL w="9525" cap="flat" cmpd="sng" algn="ctr">
+                      <a:solidFill>
+                        <a:srgbClr val="D9D9D9"/>
+                      </a:solidFill>
+                      <a:prstDash val="solid"/>
+                      <a:round/>
+                      <a:headEnd type="none" w="med" len="med"/>
+                      <a:tailEnd type="none" w="med" len="med"/>
+                    </a:lnL>
+                    <a:lnR w="9525" cap="flat" cmpd="sng" algn="ctr">
+                      <a:solidFill>
+                        <a:srgbClr val="D9D9D9"/>
+                      </a:solidFill>
+                      <a:prstDash val="solid"/>
+                      <a:round/>
+                      <a:headEnd type="none" w="med" len="med"/>
+                      <a:tailEnd type="none" w="med" len="med"/>
+                    </a:lnR>
+                    <a:lnT w="9525" cap="flat" cmpd="sng" algn="ctr">
+                      <a:solidFill>
+                        <a:srgbClr val="D9D9D9"/>
+                      </a:solidFill>
+                      <a:prstDash val="solid"/>
+                      <a:round/>
+                      <a:headEnd type="none" w="med" len="med"/>
+                      <a:tailEnd type="none" w="med" len="med"/>
+                    </a:lnT>
+                    <a:lnB w="9525" cap="flat" cmpd="sng" algn="ctr">
+                      <a:solidFill>
+                        <a:srgbClr val="D9D9D9"/>
+                      </a:solidFill>
+                      <a:prstDash val="solid"/>
+                      <a:round/>
+                      <a:headEnd type="none" w="med" len="med"/>
+                      <a:tailEnd type="none" w="med" len="med"/>
+                    </a:lnB>
+                    <a:solidFill>
+                      <a:srgbClr val="FFFFFF"/>
+                    </a:solidFill>
+                  </a:tcPr>
+                </a:tc>
+                <a:tc>
+                  <a:txBody>
+                    <a:bodyPr/>
+                    <a:lstStyle/>
+                    <a:p>
+                      <a:pPr algn="ctr" indent="0" marL="0">
+                        <a:buNone/>
+                      </a:pPr>
+                      <a:r>
+                        <a:rPr lang="en-US" sz="1100" dirty="0">
+                          <a:solidFill>
+                            <a:srgbClr val="3FBA46"/>
+                          </a:solidFill>
+                          <a:latin typeface="Malgun Gothic" pitchFamily="34" charset="0"/>
+                          <a:ea typeface="Malgun Gothic" pitchFamily="34" charset="-122"/>
+                          <a:cs typeface="Malgun Gothic" pitchFamily="34" charset="-120"/>
+                        </a:rPr>
+                        <a:t>+19%</a:t>
+                      </a:r>
+                      <a:endParaRPr lang="en-US" sz="1100" dirty="0">
+                        <a:latin typeface="Malgun Gothic" charset="0"/>
+                        <a:ea typeface="Malgun Gothic" charset="0"/>
+                        <a:cs typeface="Malgun Gothic" charset="0"/>
+                      </a:endParaRPr>
+                    </a:p>
+                  </a:txBody>
+                  <a:tcPr marL="91440" marR="91440" marT="45720" marB="45720" anchor="ctr">
+                    <a:lnL w="9525" cap="flat" cmpd="sng" algn="ctr">
+                      <a:solidFill>
+                        <a:srgbClr val="D9D9D9"/>
+                      </a:solidFill>
+                      <a:prstDash val="solid"/>
+                      <a:round/>
+                      <a:headEnd type="none" w="med" len="med"/>
+                      <a:tailEnd type="none" w="med" len="med"/>
+                    </a:lnL>
+                    <a:lnR w="9525" cap="flat" cmpd="sng" algn="ctr">
+                      <a:solidFill>
+                        <a:srgbClr val="D9D9D9"/>
+                      </a:solidFill>
+                      <a:prstDash val="solid"/>
+                      <a:round/>
+                      <a:headEnd type="none" w="med" len="med"/>
+                      <a:tailEnd type="none" w="med" len="med"/>
+                    </a:lnR>
+                    <a:lnT w="9525" cap="flat" cmpd="sng" algn="ctr">
+                      <a:solidFill>
+                        <a:srgbClr val="D9D9D9"/>
+                      </a:solidFill>
+                      <a:prstDash val="solid"/>
+                      <a:round/>
+                      <a:headEnd type="none" w="med" len="med"/>
+                      <a:tailEnd type="none" w="med" len="med"/>
+                    </a:lnT>
+                    <a:lnB w="9525" cap="flat" cmpd="sng" algn="ctr">
+                      <a:solidFill>
+                        <a:srgbClr val="D9D9D9"/>
+                      </a:solidFill>
+                      <a:prstDash val="solid"/>
+                      <a:round/>
+                      <a:headEnd type="none" w="med" len="med"/>
+                      <a:tailEnd type="none" w="med" len="med"/>
+                    </a:lnB>
+                    <a:solidFill>
+                      <a:srgbClr val="FFFFFF"/>
+                    </a:solidFill>
+                  </a:tcPr>
+                </a:tc>
+              </a:tr>
+              <a:tr h="365760">
+                <a:tc>
+                  <a:txBody>
+                    <a:bodyPr/>
+                    <a:lstStyle/>
+                    <a:p>
+                      <a:pPr algn="l" indent="0" marL="0">
+                        <a:buNone/>
+                      </a:pPr>
+                      <a:r>
+                        <a:rPr lang="en-US" sz="1100" dirty="0">
+                          <a:solidFill>
+                            <a:srgbClr val="3F3F3F"/>
+                          </a:solidFill>
+                          <a:latin typeface="Malgun Gothic" pitchFamily="34" charset="0"/>
+                          <a:ea typeface="Malgun Gothic" pitchFamily="34" charset="-122"/>
+                          <a:cs typeface="Malgun Gothic" pitchFamily="34" charset="-120"/>
+                        </a:rPr>
+                        <a:t>수리건수(월평균)</a:t>
+                      </a:r>
+                      <a:endParaRPr lang="en-US" sz="1100" dirty="0">
+                        <a:latin typeface="Malgun Gothic" charset="0"/>
+                        <a:ea typeface="Malgun Gothic" charset="0"/>
+                        <a:cs typeface="Malgun Gothic" charset="0"/>
+                      </a:endParaRPr>
+                    </a:p>
+                  </a:txBody>
+                  <a:tcPr marL="91440" marR="91440" marT="45720" marB="45720" anchor="ctr">
+                    <a:lnL w="9525" cap="flat" cmpd="sng" algn="ctr">
+                      <a:solidFill>
+                        <a:srgbClr val="D9D9D9"/>
+                      </a:solidFill>
+                      <a:prstDash val="solid"/>
+                      <a:round/>
+                      <a:headEnd type="none" w="med" len="med"/>
+                      <a:tailEnd type="none" w="med" len="med"/>
+                    </a:lnL>
+                    <a:lnR w="9525" cap="flat" cmpd="sng" algn="ctr">
+                      <a:solidFill>
+                        <a:srgbClr val="D9D9D9"/>
+                      </a:solidFill>
+                      <a:prstDash val="solid"/>
+                      <a:round/>
+                      <a:headEnd type="none" w="med" len="med"/>
+                      <a:tailEnd type="none" w="med" len="med"/>
+                    </a:lnR>
+                    <a:lnT w="9525" cap="flat" cmpd="sng" algn="ctr">
+                      <a:solidFill>
+                        <a:srgbClr val="D9D9D9"/>
+                      </a:solidFill>
+                      <a:prstDash val="solid"/>
+                      <a:round/>
+                      <a:headEnd type="none" w="med" len="med"/>
+                      <a:tailEnd type="none" w="med" len="med"/>
+                    </a:lnT>
+                    <a:lnB w="9525" cap="flat" cmpd="sng" algn="ctr">
+                      <a:solidFill>
+                        <a:srgbClr val="D9D9D9"/>
+                      </a:solidFill>
+                      <a:prstDash val="solid"/>
+                      <a:round/>
+                      <a:headEnd type="none" w="med" len="med"/>
+                      <a:tailEnd type="none" w="med" len="med"/>
+                    </a:lnB>
+                    <a:solidFill>
+                      <a:srgbClr val="FFFFFF"/>
+                    </a:solidFill>
+                  </a:tcPr>
+                </a:tc>
+                <a:tc>
+                  <a:txBody>
+                    <a:bodyPr/>
+                    <a:lstStyle/>
+                    <a:p>
+                      <a:pPr algn="ctr" indent="0" marL="0">
+                        <a:buNone/>
+                      </a:pPr>
+                      <a:r>
+                        <a:rPr lang="en-US" sz="1100" dirty="0">
+                          <a:solidFill>
+                            <a:srgbClr val="3F3F3F"/>
+                          </a:solidFill>
+                          <a:latin typeface="Malgun Gothic" pitchFamily="34" charset="0"/>
+                          <a:ea typeface="Malgun Gothic" pitchFamily="34" charset="-122"/>
+                          <a:cs typeface="Malgun Gothic" pitchFamily="34" charset="-120"/>
+                        </a:rPr>
+                        <a:t>518</a:t>
+                      </a:r>
+                      <a:endParaRPr lang="en-US" sz="1100" dirty="0">
+                        <a:latin typeface="Malgun Gothic" charset="0"/>
+                        <a:ea typeface="Malgun Gothic" charset="0"/>
+                        <a:cs typeface="Malgun Gothic" charset="0"/>
+                      </a:endParaRPr>
+                    </a:p>
+                  </a:txBody>
+                  <a:tcPr marL="91440" marR="91440" marT="45720" marB="45720" anchor="ctr">
+                    <a:lnL w="9525" cap="flat" cmpd="sng" algn="ctr">
+                      <a:solidFill>
+                        <a:srgbClr val="D9D9D9"/>
+                      </a:solidFill>
+                      <a:prstDash val="solid"/>
+                      <a:round/>
+                      <a:headEnd type="none" w="med" len="med"/>
+                      <a:tailEnd type="none" w="med" len="med"/>
+                    </a:lnL>
+                    <a:lnR w="9525" cap="flat" cmpd="sng" algn="ctr">
+                      <a:solidFill>
+                        <a:srgbClr val="D9D9D9"/>
+                      </a:solidFill>
+                      <a:prstDash val="solid"/>
+                      <a:round/>
+                      <a:headEnd type="none" w="med" len="med"/>
+                      <a:tailEnd type="none" w="med" len="med"/>
+                    </a:lnR>
+                    <a:lnT w="9525" cap="flat" cmpd="sng" algn="ctr">
+                      <a:solidFill>
+                        <a:srgbClr val="D9D9D9"/>
+                      </a:solidFill>
+                      <a:prstDash val="solid"/>
+                      <a:round/>
+                      <a:headEnd type="none" w="med" len="med"/>
+                      <a:tailEnd type="none" w="med" len="med"/>
+                    </a:lnT>
+                    <a:lnB w="9525" cap="flat" cmpd="sng" algn="ctr">
+                      <a:solidFill>
+                        <a:srgbClr val="D9D9D9"/>
+                      </a:solidFill>
+                      <a:prstDash val="solid"/>
+                      <a:round/>
+                      <a:headEnd type="none" w="med" len="med"/>
+                      <a:tailEnd type="none" w="med" len="med"/>
+                    </a:lnB>
+                    <a:solidFill>
+                      <a:srgbClr val="FFFFFF"/>
+                    </a:solidFill>
+                  </a:tcPr>
+                </a:tc>
+                <a:tc>
+                  <a:txBody>
+                    <a:bodyPr/>
+                    <a:lstStyle/>
+                    <a:p>
+                      <a:pPr algn="ctr" indent="0" marL="0">
+                        <a:buNone/>
+                      </a:pPr>
+                      <a:r>
+                        <a:rPr lang="en-US" sz="1100" dirty="0">
+                          <a:solidFill>
+                            <a:srgbClr val="3F3F3F"/>
+                          </a:solidFill>
+                          <a:latin typeface="Malgun Gothic" pitchFamily="34" charset="0"/>
+                          <a:ea typeface="Malgun Gothic" pitchFamily="34" charset="-122"/>
+                          <a:cs typeface="Malgun Gothic" pitchFamily="34" charset="-120"/>
+                        </a:rPr>
+                        <a:t>565</a:t>
+                      </a:r>
+                      <a:endParaRPr lang="en-US" sz="1100" dirty="0">
+                        <a:latin typeface="Malgun Gothic" charset="0"/>
+                        <a:ea typeface="Malgun Gothic" charset="0"/>
+                        <a:cs typeface="Malgun Gothic" charset="0"/>
+                      </a:endParaRPr>
+                    </a:p>
+                  </a:txBody>
+                  <a:tcPr marL="91440" marR="91440" marT="45720" marB="45720" anchor="ctr">
+                    <a:lnL w="9525" cap="flat" cmpd="sng" algn="ctr">
+                      <a:solidFill>
+                        <a:srgbClr val="D9D9D9"/>
+                      </a:solidFill>
+                      <a:prstDash val="solid"/>
+                      <a:round/>
+                      <a:headEnd type="none" w="med" len="med"/>
+                      <a:tailEnd type="none" w="med" len="med"/>
+                    </a:lnL>
+                    <a:lnR w="9525" cap="flat" cmpd="sng" algn="ctr">
+                      <a:solidFill>
+                        <a:srgbClr val="D9D9D9"/>
+                      </a:solidFill>
+                      <a:prstDash val="solid"/>
+                      <a:round/>
+                      <a:headEnd type="none" w="med" len="med"/>
+                      <a:tailEnd type="none" w="med" len="med"/>
+                    </a:lnR>
+                    <a:lnT w="9525" cap="flat" cmpd="sng" algn="ctr">
+                      <a:solidFill>
+                        <a:srgbClr val="D9D9D9"/>
+                      </a:solidFill>
+                      <a:prstDash val="solid"/>
+                      <a:round/>
+                      <a:headEnd type="none" w="med" len="med"/>
+                      <a:tailEnd type="none" w="med" len="med"/>
+                    </a:lnT>
+                    <a:lnB w="9525" cap="flat" cmpd="sng" algn="ctr">
+                      <a:solidFill>
+                        <a:srgbClr val="D9D9D9"/>
+                      </a:solidFill>
+                      <a:prstDash val="solid"/>
+                      <a:round/>
+                      <a:headEnd type="none" w="med" len="med"/>
+                      <a:tailEnd type="none" w="med" len="med"/>
+                    </a:lnB>
+                    <a:solidFill>
+                      <a:srgbClr val="FFFFFF"/>
+                    </a:solidFill>
+                  </a:tcPr>
+                </a:tc>
+                <a:tc>
+                  <a:txBody>
+                    <a:bodyPr/>
+                    <a:lstStyle/>
+                    <a:p>
+                      <a:pPr algn="ctr" indent="0" marL="0">
+                        <a:buNone/>
+                      </a:pPr>
+                      <a:r>
+                        <a:rPr lang="en-US" sz="1100" dirty="0">
+                          <a:solidFill>
+                            <a:srgbClr val="3FBA46"/>
+                          </a:solidFill>
+                          <a:latin typeface="Malgun Gothic" pitchFamily="34" charset="0"/>
+                          <a:ea typeface="Malgun Gothic" pitchFamily="34" charset="-122"/>
+                          <a:cs typeface="Malgun Gothic" pitchFamily="34" charset="-120"/>
+                        </a:rPr>
+                        <a:t>+9%</a:t>
+                      </a:r>
+                      <a:endParaRPr lang="en-US" sz="1100" dirty="0">
+                        <a:latin typeface="Malgun Gothic" charset="0"/>
+                        <a:ea typeface="Malgun Gothic" charset="0"/>
+                        <a:cs typeface="Malgun Gothic" charset="0"/>
+                      </a:endParaRPr>
+                    </a:p>
+                  </a:txBody>
+                  <a:tcPr marL="91440" marR="91440" marT="45720" marB="45720" anchor="ctr">
+                    <a:lnL w="9525" cap="flat" cmpd="sng" algn="ctr">
+                      <a:solidFill>
+                        <a:srgbClr val="D9D9D9"/>
+                      </a:solidFill>
+                      <a:prstDash val="solid"/>
+                      <a:round/>
+                      <a:headEnd type="none" w="med" len="med"/>
+                      <a:tailEnd type="none" w="med" len="med"/>
+                    </a:lnL>
+                    <a:lnR w="9525" cap="flat" cmpd="sng" algn="ctr">
+                      <a:solidFill>
+                        <a:srgbClr val="D9D9D9"/>
+                      </a:solidFill>
+                      <a:prstDash val="solid"/>
+                      <a:round/>
+                      <a:headEnd type="none" w="med" len="med"/>
+                      <a:tailEnd type="none" w="med" len="med"/>
+                    </a:lnR>
+                    <a:lnT w="9525" cap="flat" cmpd="sng" algn="ctr">
+                      <a:solidFill>
+                        <a:srgbClr val="D9D9D9"/>
+                      </a:solidFill>
+                      <a:prstDash val="solid"/>
+                      <a:round/>
+                      <a:headEnd type="none" w="med" len="med"/>
+                      <a:tailEnd type="none" w="med" len="med"/>
+                    </a:lnT>
+                    <a:lnB w="9525" cap="flat" cmpd="sng" algn="ctr">
+                      <a:solidFill>
+                        <a:srgbClr val="D9D9D9"/>
+                      </a:solidFill>
+                      <a:prstDash val="solid"/>
+                      <a:round/>
+                      <a:headEnd type="none" w="med" len="med"/>
+                      <a:tailEnd type="none" w="med" len="med"/>
+                    </a:lnB>
+                    <a:solidFill>
+                      <a:srgbClr val="FFFFFF"/>
+                    </a:solidFill>
+                  </a:tcPr>
+                </a:tc>
+              </a:tr>
+              <a:tr h="365760">
+                <a:tc>
+                  <a:txBody>
+                    <a:bodyPr/>
+                    <a:lstStyle/>
+                    <a:p>
+                      <a:pPr algn="l" indent="0" marL="0">
+                        <a:buNone/>
+                      </a:pPr>
+                      <a:r>
+                        <a:rPr lang="en-US" sz="1100" dirty="0">
+                          <a:solidFill>
+                            <a:srgbClr val="3F3F3F"/>
+                          </a:solidFill>
+                          <a:latin typeface="Malgun Gothic" pitchFamily="34" charset="0"/>
+                          <a:ea typeface="Malgun Gothic" pitchFamily="34" charset="-122"/>
+                          <a:cs typeface="Malgun Gothic" pitchFamily="34" charset="-120"/>
+                        </a:rPr>
+                        <a:t>PM건수(월평균)</a:t>
+                      </a:r>
+                      <a:endParaRPr lang="en-US" sz="1100" dirty="0">
+                        <a:latin typeface="Malgun Gothic" charset="0"/>
+                        <a:ea typeface="Malgun Gothic" charset="0"/>
+                        <a:cs typeface="Malgun Gothic" charset="0"/>
+                      </a:endParaRPr>
+                    </a:p>
+                  </a:txBody>
+                  <a:tcPr marL="91440" marR="91440" marT="45720" marB="45720" anchor="ctr">
+                    <a:lnL w="9525" cap="flat" cmpd="sng" algn="ctr">
+                      <a:solidFill>
+                        <a:srgbClr val="D9D9D9"/>
+                      </a:solidFill>
+                      <a:prstDash val="solid"/>
+                      <a:round/>
+                      <a:headEnd type="none" w="med" len="med"/>
+                      <a:tailEnd type="none" w="med" len="med"/>
+                    </a:lnL>
+                    <a:lnR w="9525" cap="flat" cmpd="sng" algn="ctr">
+                      <a:solidFill>
+                        <a:srgbClr val="D9D9D9"/>
+                      </a:solidFill>
+                      <a:prstDash val="solid"/>
+                      <a:round/>
+                      <a:headEnd type="none" w="med" len="med"/>
+                      <a:tailEnd type="none" w="med" len="med"/>
+                    </a:lnR>
+                    <a:lnT w="9525" cap="flat" cmpd="sng" algn="ctr">
+                      <a:solidFill>
+                        <a:srgbClr val="D9D9D9"/>
+                      </a:solidFill>
+                      <a:prstDash val="solid"/>
+                      <a:round/>
+                      <a:headEnd type="none" w="med" len="med"/>
+                      <a:tailEnd type="none" w="med" len="med"/>
+                    </a:lnT>
+                    <a:lnB w="9525" cap="flat" cmpd="sng" algn="ctr">
+                      <a:solidFill>
+                        <a:srgbClr val="D9D9D9"/>
+                      </a:solidFill>
+                      <a:prstDash val="solid"/>
+                      <a:round/>
+                      <a:headEnd type="none" w="med" len="med"/>
+                      <a:tailEnd type="none" w="med" len="med"/>
+                    </a:lnB>
+                    <a:solidFill>
+                      <a:srgbClr val="FFFFFF"/>
+                    </a:solidFill>
+                  </a:tcPr>
+                </a:tc>
+                <a:tc>
+                  <a:txBody>
+                    <a:bodyPr/>
+                    <a:lstStyle/>
+                    <a:p>
+                      <a:pPr algn="ctr" indent="0" marL="0">
+                        <a:buNone/>
+                      </a:pPr>
+                      <a:r>
+                        <a:rPr lang="en-US" sz="1100" dirty="0">
+                          <a:solidFill>
+                            <a:srgbClr val="3F3F3F"/>
+                          </a:solidFill>
+                          <a:latin typeface="Malgun Gothic" pitchFamily="34" charset="0"/>
+                          <a:ea typeface="Malgun Gothic" pitchFamily="34" charset="-122"/>
+                          <a:cs typeface="Malgun Gothic" pitchFamily="34" charset="-120"/>
+                        </a:rPr>
+                        <a:t>564</a:t>
+                      </a:r>
+                      <a:endParaRPr lang="en-US" sz="1100" dirty="0">
+                        <a:latin typeface="Malgun Gothic" charset="0"/>
+                        <a:ea typeface="Malgun Gothic" charset="0"/>
+                        <a:cs typeface="Malgun Gothic" charset="0"/>
+                      </a:endParaRPr>
+                    </a:p>
+                  </a:txBody>
+                  <a:tcPr marL="91440" marR="91440" marT="45720" marB="45720" anchor="ctr">
+                    <a:lnL w="9525" cap="flat" cmpd="sng" algn="ctr">
+                      <a:solidFill>
+                        <a:srgbClr val="D9D9D9"/>
+                      </a:solidFill>
+                      <a:prstDash val="solid"/>
+                      <a:round/>
+                      <a:headEnd type="none" w="med" len="med"/>
+                      <a:tailEnd type="none" w="med" len="med"/>
+                    </a:lnL>
+                    <a:lnR w="9525" cap="flat" cmpd="sng" algn="ctr">
+                      <a:solidFill>
+                        <a:srgbClr val="D9D9D9"/>
+                      </a:solidFill>
+                      <a:prstDash val="solid"/>
+                      <a:round/>
+                      <a:headEnd type="none" w="med" len="med"/>
+                      <a:tailEnd type="none" w="med" len="med"/>
+                    </a:lnR>
+                    <a:lnT w="9525" cap="flat" cmpd="sng" algn="ctr">
+                      <a:solidFill>
+                        <a:srgbClr val="D9D9D9"/>
+                      </a:solidFill>
+                      <a:prstDash val="solid"/>
+                      <a:round/>
+                      <a:headEnd type="none" w="med" len="med"/>
+                      <a:tailEnd type="none" w="med" len="med"/>
+                    </a:lnT>
+                    <a:lnB w="9525" cap="flat" cmpd="sng" algn="ctr">
+                      <a:solidFill>
+                        <a:srgbClr val="D9D9D9"/>
+                      </a:solidFill>
+                      <a:prstDash val="solid"/>
+                      <a:round/>
+                      <a:headEnd type="none" w="med" len="med"/>
+                      <a:tailEnd type="none" w="med" len="med"/>
+                    </a:lnB>
+                    <a:solidFill>
+                      <a:srgbClr val="FFFFFF"/>
+                    </a:solidFill>
+                  </a:tcPr>
+                </a:tc>
+                <a:tc>
+                  <a:txBody>
+                    <a:bodyPr/>
+                    <a:lstStyle/>
+                    <a:p>
+                      <a:pPr algn="ctr" indent="0" marL="0">
+                        <a:buNone/>
+                      </a:pPr>
+                      <a:r>
+                        <a:rPr lang="en-US" sz="1100" dirty="0">
+                          <a:solidFill>
+                            <a:srgbClr val="3F3F3F"/>
+                          </a:solidFill>
+                          <a:latin typeface="Malgun Gothic" pitchFamily="34" charset="0"/>
+                          <a:ea typeface="Malgun Gothic" pitchFamily="34" charset="-122"/>
+                          <a:cs typeface="Malgun Gothic" pitchFamily="34" charset="-120"/>
+                        </a:rPr>
+                        <a:t>671</a:t>
+                      </a:r>
+                      <a:endParaRPr lang="en-US" sz="1100" dirty="0">
+                        <a:latin typeface="Malgun Gothic" charset="0"/>
+                        <a:ea typeface="Malgun Gothic" charset="0"/>
+                        <a:cs typeface="Malgun Gothic" charset="0"/>
+                      </a:endParaRPr>
+                    </a:p>
+                  </a:txBody>
+                  <a:tcPr marL="91440" marR="91440" marT="45720" marB="45720" anchor="ctr">
+                    <a:lnL w="9525" cap="flat" cmpd="sng" algn="ctr">
+                      <a:solidFill>
+                        <a:srgbClr val="D9D9D9"/>
+                      </a:solidFill>
+                      <a:prstDash val="solid"/>
+                      <a:round/>
+                      <a:headEnd type="none" w="med" len="med"/>
+                      <a:tailEnd type="none" w="med" len="med"/>
+                    </a:lnL>
+                    <a:lnR w="9525" cap="flat" cmpd="sng" algn="ctr">
+                      <a:solidFill>
+                        <a:srgbClr val="D9D9D9"/>
+                      </a:solidFill>
+                      <a:prstDash val="solid"/>
+                      <a:round/>
+                      <a:headEnd type="none" w="med" len="med"/>
+                      <a:tailEnd type="none" w="med" len="med"/>
+                    </a:lnR>
+                    <a:lnT w="9525" cap="flat" cmpd="sng" algn="ctr">
+                      <a:solidFill>
+                        <a:srgbClr val="D9D9D9"/>
+                      </a:solidFill>
+                      <a:prstDash val="solid"/>
+                      <a:round/>
+                      <a:headEnd type="none" w="med" len="med"/>
+                      <a:tailEnd type="none" w="med" len="med"/>
+                    </a:lnT>
+                    <a:lnB w="9525" cap="flat" cmpd="sng" algn="ctr">
+                      <a:solidFill>
+                        <a:srgbClr val="D9D9D9"/>
+                      </a:solidFill>
+                      <a:prstDash val="solid"/>
+                      <a:round/>
+                      <a:headEnd type="none" w="med" len="med"/>
+                      <a:tailEnd type="none" w="med" len="med"/>
+                    </a:lnB>
+                    <a:solidFill>
+                      <a:srgbClr val="FFFFFF"/>
+                    </a:solidFill>
+                  </a:tcPr>
+                </a:tc>
+                <a:tc>
+                  <a:txBody>
+                    <a:bodyPr/>
+                    <a:lstStyle/>
+                    <a:p>
+                      <a:pPr algn="ctr" indent="0" marL="0">
+                        <a:buNone/>
+                      </a:pPr>
+                      <a:r>
+                        <a:rPr lang="en-US" sz="1100" dirty="0">
+                          <a:solidFill>
+                            <a:srgbClr val="3FBA46"/>
+                          </a:solidFill>
+                          <a:latin typeface="Malgun Gothic" pitchFamily="34" charset="0"/>
+                          <a:ea typeface="Malgun Gothic" pitchFamily="34" charset="-122"/>
+                          <a:cs typeface="Malgun Gothic" pitchFamily="34" charset="-120"/>
+                        </a:rPr>
+                        <a:t>+19%</a:t>
+                      </a:r>
+                      <a:endParaRPr lang="en-US" sz="1100" dirty="0">
+                        <a:latin typeface="Malgun Gothic" charset="0"/>
+                        <a:ea typeface="Malgun Gothic" charset="0"/>
+                        <a:cs typeface="Malgun Gothic" charset="0"/>
+                      </a:endParaRPr>
+                    </a:p>
+                  </a:txBody>
+                  <a:tcPr marL="91440" marR="91440" marT="45720" marB="45720" anchor="ctr">
+                    <a:lnL w="9525" cap="flat" cmpd="sng" algn="ctr">
+                      <a:solidFill>
+                        <a:srgbClr val="D9D9D9"/>
+                      </a:solidFill>
+                      <a:prstDash val="solid"/>
+                      <a:round/>
+                      <a:headEnd type="none" w="med" len="med"/>
+                      <a:tailEnd type="none" w="med" len="med"/>
+                    </a:lnL>
+                    <a:lnR w="9525" cap="flat" cmpd="sng" algn="ctr">
+                      <a:solidFill>
+                        <a:srgbClr val="D9D9D9"/>
+                      </a:solidFill>
+                      <a:prstDash val="solid"/>
+                      <a:round/>
+                      <a:headEnd type="none" w="med" len="med"/>
+                      <a:tailEnd type="none" w="med" len="med"/>
+                    </a:lnR>
+                    <a:lnT w="9525" cap="flat" cmpd="sng" algn="ctr">
+                      <a:solidFill>
+                        <a:srgbClr val="D9D9D9"/>
+                      </a:solidFill>
+                      <a:prstDash val="solid"/>
+                      <a:round/>
+                      <a:headEnd type="none" w="med" len="med"/>
+                      <a:tailEnd type="none" w="med" len="med"/>
+                    </a:lnT>
+                    <a:lnB w="9525" cap="flat" cmpd="sng" algn="ctr">
+                      <a:solidFill>
+                        <a:srgbClr val="D9D9D9"/>
+                      </a:solidFill>
+                      <a:prstDash val="solid"/>
+                      <a:round/>
+                      <a:headEnd type="none" w="med" len="med"/>
+                      <a:tailEnd type="none" w="med" len="med"/>
+                    </a:lnB>
+                    <a:solidFill>
+                      <a:srgbClr val="FFFFFF"/>
+                    </a:solidFill>
+                  </a:tcPr>
+                </a:tc>
+              </a:tr>
+              <a:tr h="365760">
+                <a:tc>
+                  <a:txBody>
+                    <a:bodyPr/>
+                    <a:lstStyle/>
+                    <a:p>
+                      <a:pPr algn="l" indent="0" marL="0">
+                        <a:buNone/>
+                      </a:pPr>
+                      <a:r>
+                        <a:rPr lang="en-US" sz="1100" dirty="0">
+                          <a:solidFill>
+                            <a:srgbClr val="3F3F3F"/>
+                          </a:solidFill>
+                          <a:latin typeface="Malgun Gothic" pitchFamily="34" charset="0"/>
+                          <a:ea typeface="Malgun Gothic" pitchFamily="34" charset="-122"/>
+                          <a:cs typeface="Malgun Gothic" pitchFamily="34" charset="-120"/>
+                        </a:rPr>
+                        <a:t>예방정비 지수</a:t>
+                      </a:r>
+                      <a:endParaRPr lang="en-US" sz="1100" dirty="0">
+                        <a:latin typeface="Malgun Gothic" charset="0"/>
+                        <a:ea typeface="Malgun Gothic" charset="0"/>
+                        <a:cs typeface="Malgun Gothic" charset="0"/>
+                      </a:endParaRPr>
+                    </a:p>
+                  </a:txBody>
+                  <a:tcPr marL="91440" marR="91440" marT="45720" marB="45720" anchor="ctr">
+                    <a:lnL w="9525" cap="flat" cmpd="sng" algn="ctr">
+                      <a:solidFill>
+                        <a:srgbClr val="D9D9D9"/>
+                      </a:solidFill>
+                      <a:prstDash val="solid"/>
+                      <a:round/>
+                      <a:headEnd type="none" w="med" len="med"/>
+                      <a:tailEnd type="none" w="med" len="med"/>
+                    </a:lnL>
+                    <a:lnR w="9525" cap="flat" cmpd="sng" algn="ctr">
+                      <a:solidFill>
+                        <a:srgbClr val="D9D9D9"/>
+                      </a:solidFill>
+                      <a:prstDash val="solid"/>
+                      <a:round/>
+                      <a:headEnd type="none" w="med" len="med"/>
+                      <a:tailEnd type="none" w="med" len="med"/>
+                    </a:lnR>
+                    <a:lnT w="9525" cap="flat" cmpd="sng" algn="ctr">
+                      <a:solidFill>
+                        <a:srgbClr val="D9D9D9"/>
+                      </a:solidFill>
+                      <a:prstDash val="solid"/>
+                      <a:round/>
+                      <a:headEnd type="none" w="med" len="med"/>
+                      <a:tailEnd type="none" w="med" len="med"/>
+                    </a:lnT>
+                    <a:lnB w="9525" cap="flat" cmpd="sng" algn="ctr">
+                      <a:solidFill>
+                        <a:srgbClr val="D9D9D9"/>
+                      </a:solidFill>
+                      <a:prstDash val="solid"/>
+                      <a:round/>
+                      <a:headEnd type="none" w="med" len="med"/>
+                      <a:tailEnd type="none" w="med" len="med"/>
+                    </a:lnB>
+                    <a:solidFill>
+                      <a:srgbClr val="FFFFFF"/>
+                    </a:solidFill>
+                  </a:tcPr>
+                </a:tc>
+                <a:tc>
+                  <a:txBody>
+                    <a:bodyPr/>
+                    <a:lstStyle/>
+                    <a:p>
+                      <a:pPr algn="ctr" indent="0" marL="0">
+                        <a:buNone/>
+                      </a:pPr>
+                      <a:r>
+                        <a:rPr lang="en-US" sz="1100" dirty="0">
+                          <a:solidFill>
+                            <a:srgbClr val="3F3F3F"/>
+                          </a:solidFill>
+                          <a:latin typeface="Malgun Gothic" pitchFamily="34" charset="0"/>
+                          <a:ea typeface="Malgun Gothic" pitchFamily="34" charset="-122"/>
+                          <a:cs typeface="Malgun Gothic" pitchFamily="34" charset="-120"/>
+                        </a:rPr>
+                        <a:t>52.1%</a:t>
+                      </a:r>
+                      <a:endParaRPr lang="en-US" sz="1100" dirty="0">
+                        <a:latin typeface="Malgun Gothic" charset="0"/>
+                        <a:ea typeface="Malgun Gothic" charset="0"/>
+                        <a:cs typeface="Malgun Gothic" charset="0"/>
+                      </a:endParaRPr>
+                    </a:p>
+                  </a:txBody>
+                  <a:tcPr marL="91440" marR="91440" marT="45720" marB="45720" anchor="ctr">
+                    <a:lnL w="9525" cap="flat" cmpd="sng" algn="ctr">
+                      <a:solidFill>
+                        <a:srgbClr val="D9D9D9"/>
+                      </a:solidFill>
+                      <a:prstDash val="solid"/>
+                      <a:round/>
+                      <a:headEnd type="none" w="med" len="med"/>
+                      <a:tailEnd type="none" w="med" len="med"/>
+                    </a:lnL>
+                    <a:lnR w="9525" cap="flat" cmpd="sng" algn="ctr">
+                      <a:solidFill>
+                        <a:srgbClr val="D9D9D9"/>
+                      </a:solidFill>
+                      <a:prstDash val="solid"/>
+                      <a:round/>
+                      <a:headEnd type="none" w="med" len="med"/>
+                      <a:tailEnd type="none" w="med" len="med"/>
+                    </a:lnR>
+                    <a:lnT w="9525" cap="flat" cmpd="sng" algn="ctr">
+                      <a:solidFill>
+                        <a:srgbClr val="D9D9D9"/>
+                      </a:solidFill>
+                      <a:prstDash val="solid"/>
+                      <a:round/>
+                      <a:headEnd type="none" w="med" len="med"/>
+                      <a:tailEnd type="none" w="med" len="med"/>
+                    </a:lnT>
+                    <a:lnB w="9525" cap="flat" cmpd="sng" algn="ctr">
+                      <a:solidFill>
+                        <a:srgbClr val="D9D9D9"/>
+                      </a:solidFill>
+                      <a:prstDash val="solid"/>
+                      <a:round/>
+                      <a:headEnd type="none" w="med" len="med"/>
+                      <a:tailEnd type="none" w="med" len="med"/>
+                    </a:lnB>
+                    <a:solidFill>
+                      <a:srgbClr val="FFFFFF"/>
+                    </a:solidFill>
+                  </a:tcPr>
+                </a:tc>
+                <a:tc>
+                  <a:txBody>
+                    <a:bodyPr/>
+                    <a:lstStyle/>
+                    <a:p>
+                      <a:pPr algn="ctr" indent="0" marL="0">
+                        <a:buNone/>
+                      </a:pPr>
+                      <a:r>
+                        <a:rPr lang="en-US" sz="1100" dirty="0">
+                          <a:solidFill>
+                            <a:srgbClr val="3F3F3F"/>
+                          </a:solidFill>
+                          <a:latin typeface="Malgun Gothic" pitchFamily="34" charset="0"/>
+                          <a:ea typeface="Malgun Gothic" pitchFamily="34" charset="-122"/>
+                          <a:cs typeface="Malgun Gothic" pitchFamily="34" charset="-120"/>
+                        </a:rPr>
+                        <a:t>54.3%</a:t>
+                      </a:r>
+                      <a:endParaRPr lang="en-US" sz="1100" dirty="0">
+                        <a:latin typeface="Malgun Gothic" charset="0"/>
+                        <a:ea typeface="Malgun Gothic" charset="0"/>
+                        <a:cs typeface="Malgun Gothic" charset="0"/>
+                      </a:endParaRPr>
+                    </a:p>
+                  </a:txBody>
+                  <a:tcPr marL="91440" marR="91440" marT="45720" marB="45720" anchor="ctr">
+                    <a:lnL w="9525" cap="flat" cmpd="sng" algn="ctr">
+                      <a:solidFill>
+                        <a:srgbClr val="D9D9D9"/>
+                      </a:solidFill>
+                      <a:prstDash val="solid"/>
+                      <a:round/>
+                      <a:headEnd type="none" w="med" len="med"/>
+                      <a:tailEnd type="none" w="med" len="med"/>
+                    </a:lnL>
+                    <a:lnR w="9525" cap="flat" cmpd="sng" algn="ctr">
+                      <a:solidFill>
+                        <a:srgbClr val="D9D9D9"/>
+                      </a:solidFill>
+                      <a:prstDash val="solid"/>
+                      <a:round/>
+                      <a:headEnd type="none" w="med" len="med"/>
+                      <a:tailEnd type="none" w="med" len="med"/>
+                    </a:lnR>
+                    <a:lnT w="9525" cap="flat" cmpd="sng" algn="ctr">
+                      <a:solidFill>
+                        <a:srgbClr val="D9D9D9"/>
+                      </a:solidFill>
+                      <a:prstDash val="solid"/>
+                      <a:round/>
+                      <a:headEnd type="none" w="med" len="med"/>
+                      <a:tailEnd type="none" w="med" len="med"/>
+                    </a:lnT>
+                    <a:lnB w="9525" cap="flat" cmpd="sng" algn="ctr">
+                      <a:solidFill>
+                        <a:srgbClr val="D9D9D9"/>
+                      </a:solidFill>
+                      <a:prstDash val="solid"/>
+                      <a:round/>
+                      <a:headEnd type="none" w="med" len="med"/>
+                      <a:tailEnd type="none" w="med" len="med"/>
+                    </a:lnB>
+                    <a:solidFill>
+                      <a:srgbClr val="FFFFFF"/>
+                    </a:solidFill>
+                  </a:tcPr>
+                </a:tc>
+                <a:tc>
+                  <a:txBody>
+                    <a:bodyPr/>
+                    <a:lstStyle/>
+                    <a:p>
+                      <a:pPr algn="ctr" indent="0" marL="0">
+                        <a:buNone/>
+                      </a:pPr>
+                      <a:r>
+                        <a:rPr lang="en-US" sz="1100" dirty="0">
+                          <a:solidFill>
+                            <a:srgbClr val="3FBA46"/>
+                          </a:solidFill>
+                          <a:latin typeface="Malgun Gothic" pitchFamily="34" charset="0"/>
+                          <a:ea typeface="Malgun Gothic" pitchFamily="34" charset="-122"/>
+                          <a:cs typeface="Malgun Gothic" pitchFamily="34" charset="-120"/>
+                        </a:rPr>
+                        <a:t>+2.1%p</a:t>
+                      </a:r>
+                      <a:endParaRPr lang="en-US" sz="1100" dirty="0">
+                        <a:latin typeface="Malgun Gothic" charset="0"/>
+                        <a:ea typeface="Malgun Gothic" charset="0"/>
+                        <a:cs typeface="Malgun Gothic" charset="0"/>
+                      </a:endParaRPr>
+                    </a:p>
+                  </a:txBody>
+                  <a:tcPr marL="91440" marR="91440" marT="45720" marB="45720" anchor="ctr">
+                    <a:lnL w="9525" cap="flat" cmpd="sng" algn="ctr">
+                      <a:solidFill>
+                        <a:srgbClr val="D9D9D9"/>
+                      </a:solidFill>
+                      <a:prstDash val="solid"/>
+                      <a:round/>
+                      <a:headEnd type="none" w="med" len="med"/>
+                      <a:tailEnd type="none" w="med" len="med"/>
+                    </a:lnL>
+                    <a:lnR w="9525" cap="flat" cmpd="sng" algn="ctr">
+                      <a:solidFill>
+                        <a:srgbClr val="D9D9D9"/>
+                      </a:solidFill>
+                      <a:prstDash val="solid"/>
+                      <a:round/>
+                      <a:headEnd type="none" w="med" len="med"/>
+                      <a:tailEnd type="none" w="med" len="med"/>
+                    </a:lnR>
+                    <a:lnT w="9525" cap="flat" cmpd="sng" algn="ctr">
+                      <a:solidFill>
+                        <a:srgbClr val="D9D9D9"/>
+                      </a:solidFill>
+                      <a:prstDash val="solid"/>
+                      <a:round/>
+                      <a:headEnd type="none" w="med" len="med"/>
+                      <a:tailEnd type="none" w="med" len="med"/>
+                    </a:lnT>
+                    <a:lnB w="9525" cap="flat" cmpd="sng" algn="ctr">
+                      <a:solidFill>
+                        <a:srgbClr val="D9D9D9"/>
+                      </a:solidFill>
+                      <a:prstDash val="solid"/>
+                      <a:round/>
+                      <a:headEnd type="none" w="med" len="med"/>
+                      <a:tailEnd type="none" w="med" len="med"/>
+                    </a:lnB>
+                    <a:solidFill>
+                      <a:srgbClr val="FFFFFF"/>
+                    </a:solidFill>
+                  </a:tcPr>
+                </a:tc>
+              </a:tr>
+            </a:tbl>
+          </a:graphicData>
+        </a:graphic>
+      </p:graphicFrame>
+      <p:sp>
+        <p:nvSpPr>
+          <p:cNvPr id="11" name="Text 6"/>
+          <p:cNvSpPr/>
+          <p:nvPr/>
+        </p:nvSpPr>
+        <p:spPr>
+          <a:xfrm>
+            <a:off x="6309360" y="3429000"/>
+            <a:ext cx="5486400" cy="320040"/>
+          </a:xfrm>
+          <a:prstGeom prst="rect">
+            <a:avLst/>
+          </a:prstGeom>
+          <a:noFill/>
+          <a:ln/>
+        </p:spPr>
+        <p:txBody>
+          <a:bodyPr wrap="square" lIns="0" tIns="0" rIns="0" bIns="0" rtlCol="0" anchor="ctr"/>
+          <a:lstStyle/>
+          <a:p>
+            <a:pPr indent="0" marL="0">
+              <a:buNone/>
+            </a:pPr>
+            <a:r>
+              <a:rPr lang="en-US" sz="1300" b="1" dirty="0">
+                <a:solidFill>
+                  <a:srgbClr val="005BAC"/>
+                </a:solidFill>
+                <a:latin typeface="Malgun Gothic" pitchFamily="34" charset="0"/>
+                <a:ea typeface="Malgun Gothic" pitchFamily="34" charset="-122"/>
+                <a:cs typeface="Malgun Gothic" pitchFamily="34" charset="-120"/>
+              </a:rPr>
+              <a:t>6월 하이라이트 (전년 동월 대비)</a:t>
+            </a:r>
+            <a:endParaRPr lang="en-US" sz="1300" dirty="0"/>
+          </a:p>
+        </p:txBody>
+      </p:sp>
+      <p:graphicFrame>
+        <p:nvGraphicFramePr>
+          <p:cNvPr id="19" name="Table 2"/>
+          <p:cNvGraphicFramePr>
+            <a:graphicFrameLocks noGrp="1"/>
+          </p:cNvGraphicFramePr>
+          <p:nvPr>
+            <p:extLst>
+              <p:ext uri="{D42A27DB-BD31-4B8C-83A1-F6EECF244321}">
+                <p14:modId xmlns:p14="http://schemas.microsoft.com/office/powerpoint/2010/main" val="1579011935"/>
+              </p:ext>
+            </p:extLst>
+          </p:nvPr>
+        </p:nvGraphicFramePr>
+        <p:xfrm>
+          <a:off x="6309360" y="3794760"/>
+          <a:ext cx="5486400" cy="914400"/>
+        </p:xfrm>
+        <a:graphic>
+          <a:graphicData uri="http://schemas.openxmlformats.org/drawingml/2006/table">
+            <a:tbl>
+              <a:tblPr/>
+              <a:tblGrid>
+                <a:gridCol w="2011680"/>
+                <a:gridCol w="1188720"/>
+                <a:gridCol w="1188720"/>
+                <a:gridCol w="1097280"/>
+              </a:tblGrid>
+              <a:tr h="365760">
+                <a:tc>
+                  <a:txBody>
+                    <a:bodyPr/>
+                    <a:lstStyle/>
+                    <a:p>
+                      <a:pPr algn="l" indent="0" marL="0">
+                        <a:buNone/>
+                      </a:pPr>
+                      <a:r>
+                        <a:rPr lang="en-US" sz="1100" b="1" dirty="0">
+                          <a:solidFill>
+                            <a:srgbClr val="FFFFFF"/>
+                          </a:solidFill>
+                          <a:latin typeface="Malgun Gothic" pitchFamily="34" charset="0"/>
+                          <a:ea typeface="Malgun Gothic" pitchFamily="34" charset="-122"/>
+                          <a:cs typeface="Malgun Gothic" pitchFamily="34" charset="-120"/>
+                        </a:rPr>
+                        <a:t>구분</a:t>
+                      </a:r>
+                      <a:endParaRPr lang="en-US" sz="1100" dirty="0">
+                        <a:latin typeface="Malgun Gothic" charset="0"/>
+                        <a:ea typeface="Malgun Gothic" charset="0"/>
+                        <a:cs typeface="Malgun Gothic" charset="0"/>
+                      </a:endParaRPr>
+                    </a:p>
+                  </a:txBody>
+                  <a:tcPr marL="91440" marR="91440" marT="45720" marB="45720" anchor="ctr">
+                    <a:lnL w="9525" cap="flat" cmpd="sng" algn="ctr">
+                      <a:solidFill>
+                        <a:srgbClr val="D9D9D9"/>
+                      </a:solidFill>
+                      <a:prstDash val="solid"/>
+                      <a:round/>
+                      <a:headEnd type="none" w="med" len="med"/>
+                      <a:tailEnd type="none" w="med" len="med"/>
+                    </a:lnL>
+                    <a:lnR w="9525" cap="flat" cmpd="sng" algn="ctr">
+                      <a:solidFill>
+                        <a:srgbClr val="D9D9D9"/>
+                      </a:solidFill>
+                      <a:prstDash val="solid"/>
+                      <a:round/>
+                      <a:headEnd type="none" w="med" len="med"/>
+                      <a:tailEnd type="none" w="med" len="med"/>
+                    </a:lnR>
+                    <a:lnT w="9525" cap="flat" cmpd="sng" algn="ctr">
+                      <a:solidFill>
+                        <a:srgbClr val="D9D9D9"/>
+                      </a:solidFill>
+                      <a:prstDash val="solid"/>
+                      <a:round/>
+                      <a:headEnd type="none" w="med" len="med"/>
+                      <a:tailEnd type="none" w="med" len="med"/>
+                    </a:lnT>
+                    <a:lnB w="9525" cap="flat" cmpd="sng" algn="ctr">
+                      <a:solidFill>
+                        <a:srgbClr val="D9D9D9"/>
+                      </a:solidFill>
+                      <a:prstDash val="solid"/>
+                      <a:round/>
+                      <a:headEnd type="none" w="med" len="med"/>
+                      <a:tailEnd type="none" w="med" len="med"/>
+                    </a:lnB>
+                    <a:solidFill>
+                      <a:srgbClr val="005BAC"/>
+                    </a:solidFill>
+                  </a:tcPr>
+                </a:tc>
+                <a:tc>
+                  <a:txBody>
+                    <a:bodyPr/>
+                    <a:lstStyle/>
+                    <a:p>
+                      <a:pPr algn="ctr" indent="0" marL="0">
+                        <a:buNone/>
+                      </a:pPr>
+                      <a:r>
+                        <a:rPr lang="en-US" sz="1100" b="1" dirty="0">
+                          <a:solidFill>
+                            <a:srgbClr val="FFFFFF"/>
+                          </a:solidFill>
+                          <a:latin typeface="Malgun Gothic" pitchFamily="34" charset="0"/>
+                          <a:ea typeface="Malgun Gothic" pitchFamily="34" charset="-122"/>
+                          <a:cs typeface="Malgun Gothic" pitchFamily="34" charset="-120"/>
+                        </a:rPr>
+                        <a:t>'25.6월</a:t>
+                      </a:r>
+                      <a:endParaRPr lang="en-US" sz="1100" dirty="0">
+                        <a:latin typeface="Malgun Gothic" charset="0"/>
+                        <a:ea typeface="Malgun Gothic" charset="0"/>
+                        <a:cs typeface="Malgun Gothic" charset="0"/>
+                      </a:endParaRPr>
+                    </a:p>
+                  </a:txBody>
+                  <a:tcPr marL="91440" marR="91440" marT="45720" marB="45720" anchor="ctr">
+                    <a:lnL w="9525" cap="flat" cmpd="sng" algn="ctr">
+                      <a:solidFill>
+                        <a:srgbClr val="D9D9D9"/>
+                      </a:solidFill>
+                      <a:prstDash val="solid"/>
+                      <a:round/>
+                      <a:headEnd type="none" w="med" len="med"/>
+                      <a:tailEnd type="none" w="med" len="med"/>
+                    </a:lnL>
+                    <a:lnR w="9525" cap="flat" cmpd="sng" algn="ctr">
+                      <a:solidFill>
+                        <a:srgbClr val="D9D9D9"/>
+                      </a:solidFill>
+                      <a:prstDash val="solid"/>
+                      <a:round/>
+                      <a:headEnd type="none" w="med" len="med"/>
+                      <a:tailEnd type="none" w="med" len="med"/>
+                    </a:lnR>
+                    <a:lnT w="9525" cap="flat" cmpd="sng" algn="ctr">
+                      <a:solidFill>
+                        <a:srgbClr val="D9D9D9"/>
+                      </a:solidFill>
+                      <a:prstDash val="solid"/>
+                      <a:round/>
+                      <a:headEnd type="none" w="med" len="med"/>
+                      <a:tailEnd type="none" w="med" len="med"/>
+                    </a:lnT>
+                    <a:lnB w="9525" cap="flat" cmpd="sng" algn="ctr">
+                      <a:solidFill>
+                        <a:srgbClr val="D9D9D9"/>
+                      </a:solidFill>
+                      <a:prstDash val="solid"/>
+                      <a:round/>
+                      <a:headEnd type="none" w="med" len="med"/>
+                      <a:tailEnd type="none" w="med" len="med"/>
+                    </a:lnB>
+                    <a:solidFill>
+                      <a:srgbClr val="005BAC"/>
+                    </a:solidFill>
+                  </a:tcPr>
+                </a:tc>
+                <a:tc>
+                  <a:txBody>
+                    <a:bodyPr/>
+                    <a:lstStyle/>
+                    <a:p>
+                      <a:pPr algn="ctr" indent="0" marL="0">
+                        <a:buNone/>
+                      </a:pPr>
+                      <a:r>
+                        <a:rPr lang="en-US" sz="1100" b="1" dirty="0">
+                          <a:solidFill>
+                            <a:srgbClr val="FFFFFF"/>
+                          </a:solidFill>
+                          <a:latin typeface="Malgun Gothic" pitchFamily="34" charset="0"/>
+                          <a:ea typeface="Malgun Gothic" pitchFamily="34" charset="-122"/>
+                          <a:cs typeface="Malgun Gothic" pitchFamily="34" charset="-120"/>
+                        </a:rPr>
+                        <a:t>'26.6월</a:t>
+                      </a:r>
+                      <a:endParaRPr lang="en-US" sz="1100" dirty="0">
+                        <a:latin typeface="Malgun Gothic" charset="0"/>
+                        <a:ea typeface="Malgun Gothic" charset="0"/>
+                        <a:cs typeface="Malgun Gothic" charset="0"/>
+                      </a:endParaRPr>
+                    </a:p>
+                  </a:txBody>
+                  <a:tcPr marL="91440" marR="91440" marT="45720" marB="45720" anchor="ctr">
+                    <a:lnL w="9525" cap="flat" cmpd="sng" algn="ctr">
+                      <a:solidFill>
+                        <a:srgbClr val="D9D9D9"/>
+                      </a:solidFill>
+                      <a:prstDash val="solid"/>
+                      <a:round/>
+                      <a:headEnd type="none" w="med" len="med"/>
+                      <a:tailEnd type="none" w="med" len="med"/>
+                    </a:lnL>
+                    <a:lnR w="9525" cap="flat" cmpd="sng" algn="ctr">
+                      <a:solidFill>
+                        <a:srgbClr val="D9D9D9"/>
+                      </a:solidFill>
+                      <a:prstDash val="solid"/>
+                      <a:round/>
+                      <a:headEnd type="none" w="med" len="med"/>
+                      <a:tailEnd type="none" w="med" len="med"/>
+                    </a:lnR>
+                    <a:lnT w="9525" cap="flat" cmpd="sng" algn="ctr">
+                      <a:solidFill>
+                        <a:srgbClr val="D9D9D9"/>
+                      </a:solidFill>
+                      <a:prstDash val="solid"/>
+                      <a:round/>
+                      <a:headEnd type="none" w="med" len="med"/>
+                      <a:tailEnd type="none" w="med" len="med"/>
+                    </a:lnT>
+                    <a:lnB w="9525" cap="flat" cmpd="sng" algn="ctr">
+                      <a:solidFill>
+                        <a:srgbClr val="D9D9D9"/>
+                      </a:solidFill>
+                      <a:prstDash val="solid"/>
+                      <a:round/>
+                      <a:headEnd type="none" w="med" len="med"/>
+                      <a:tailEnd type="none" w="med" len="med"/>
+                    </a:lnB>
+                    <a:solidFill>
+                      <a:srgbClr val="005BAC"/>
+                    </a:solidFill>
+                  </a:tcPr>
+                </a:tc>
+                <a:tc>
+                  <a:txBody>
+                    <a:bodyPr/>
+                    <a:lstStyle/>
+                    <a:p>
+                      <a:pPr algn="ctr" indent="0" marL="0">
+                        <a:buNone/>
+                      </a:pPr>
+                      <a:r>
+                        <a:rPr lang="en-US" sz="1100" b="1" dirty="0">
+                          <a:solidFill>
+                            <a:srgbClr val="FFFFFF"/>
+                          </a:solidFill>
+                          <a:latin typeface="Malgun Gothic" pitchFamily="34" charset="0"/>
+                          <a:ea typeface="Malgun Gothic" pitchFamily="34" charset="-122"/>
+                          <a:cs typeface="Malgun Gothic" pitchFamily="34" charset="-120"/>
+                        </a:rPr>
+                        <a:t>YoY</a:t>
+                      </a:r>
+                      <a:endParaRPr lang="en-US" sz="1100" dirty="0">
+                        <a:latin typeface="Malgun Gothic" charset="0"/>
+                        <a:ea typeface="Malgun Gothic" charset="0"/>
+                        <a:cs typeface="Malgun Gothic" charset="0"/>
+                      </a:endParaRPr>
+                    </a:p>
+                  </a:txBody>
+                  <a:tcPr marL="91440" marR="91440" marT="45720" marB="45720" anchor="ctr">
+                    <a:lnL w="9525" cap="flat" cmpd="sng" algn="ctr">
+                      <a:solidFill>
+                        <a:srgbClr val="D9D9D9"/>
+                      </a:solidFill>
+                      <a:prstDash val="solid"/>
+                      <a:round/>
+                      <a:headEnd type="none" w="med" len="med"/>
+                      <a:tailEnd type="none" w="med" len="med"/>
+                    </a:lnL>
+                    <a:lnR w="9525" cap="flat" cmpd="sng" algn="ctr">
+                      <a:solidFill>
+                        <a:srgbClr val="D9D9D9"/>
+                      </a:solidFill>
+                      <a:prstDash val="solid"/>
+                      <a:round/>
+                      <a:headEnd type="none" w="med" len="med"/>
+                      <a:tailEnd type="none" w="med" len="med"/>
+                    </a:lnR>
+                    <a:lnT w="9525" cap="flat" cmpd="sng" algn="ctr">
+                      <a:solidFill>
+                        <a:srgbClr val="D9D9D9"/>
+                      </a:solidFill>
+                      <a:prstDash val="solid"/>
+                      <a:round/>
+                      <a:headEnd type="none" w="med" len="med"/>
+                      <a:tailEnd type="none" w="med" len="med"/>
+                    </a:lnT>
+                    <a:lnB w="9525" cap="flat" cmpd="sng" algn="ctr">
+                      <a:solidFill>
+                        <a:srgbClr val="D9D9D9"/>
+                      </a:solidFill>
+                      <a:prstDash val="solid"/>
+                      <a:round/>
+                      <a:headEnd type="none" w="med" len="med"/>
+                      <a:tailEnd type="none" w="med" len="med"/>
+                    </a:lnB>
+                    <a:solidFill>
+                      <a:srgbClr val="005BAC"/>
+                    </a:solidFill>
+                  </a:tcPr>
+                </a:tc>
+              </a:tr>
+              <a:tr h="365760">
+                <a:tc>
+                  <a:txBody>
+                    <a:bodyPr/>
+                    <a:lstStyle/>
+                    <a:p>
+                      <a:pPr algn="l" indent="0" marL="0">
+                        <a:buNone/>
+                      </a:pPr>
+                      <a:r>
+                        <a:rPr lang="en-US" sz="1100" dirty="0">
+                          <a:solidFill>
+                            <a:srgbClr val="3F3F3F"/>
+                          </a:solidFill>
+                          <a:latin typeface="Malgun Gothic" pitchFamily="34" charset="0"/>
+                          <a:ea typeface="Malgun Gothic" pitchFamily="34" charset="-122"/>
+                          <a:cs typeface="Malgun Gothic" pitchFamily="34" charset="-120"/>
+                        </a:rPr>
+                        <a:t>방문건수</a:t>
+                      </a:r>
+                      <a:endParaRPr lang="en-US" sz="1100" dirty="0">
+                        <a:latin typeface="Malgun Gothic" charset="0"/>
+                        <a:ea typeface="Malgun Gothic" charset="0"/>
+                        <a:cs typeface="Malgun Gothic" charset="0"/>
+                      </a:endParaRPr>
+                    </a:p>
+                  </a:txBody>
+                  <a:tcPr marL="91440" marR="91440" marT="45720" marB="45720" anchor="ctr">
+                    <a:lnL w="9525" cap="flat" cmpd="sng" algn="ctr">
+                      <a:solidFill>
+                        <a:srgbClr val="D9D9D9"/>
+                      </a:solidFill>
+                      <a:prstDash val="solid"/>
+                      <a:round/>
+                      <a:headEnd type="none" w="med" len="med"/>
+                      <a:tailEnd type="none" w="med" len="med"/>
+                    </a:lnL>
+                    <a:lnR w="9525" cap="flat" cmpd="sng" algn="ctr">
+                      <a:solidFill>
+                        <a:srgbClr val="D9D9D9"/>
+                      </a:solidFill>
+                      <a:prstDash val="solid"/>
+                      <a:round/>
+                      <a:headEnd type="none" w="med" len="med"/>
+                      <a:tailEnd type="none" w="med" len="med"/>
+                    </a:lnR>
+                    <a:lnT w="9525" cap="flat" cmpd="sng" algn="ctr">
+                      <a:solidFill>
+                        <a:srgbClr val="D9D9D9"/>
+                      </a:solidFill>
+                      <a:prstDash val="solid"/>
+                      <a:round/>
+                      <a:headEnd type="none" w="med" len="med"/>
+                      <a:tailEnd type="none" w="med" len="med"/>
+                    </a:lnT>
+                    <a:lnB w="9525" cap="flat" cmpd="sng" algn="ctr">
+                      <a:solidFill>
+                        <a:srgbClr val="D9D9D9"/>
+                      </a:solidFill>
+                      <a:prstDash val="solid"/>
+                      <a:round/>
+                      <a:headEnd type="none" w="med" len="med"/>
+                      <a:tailEnd type="none" w="med" len="med"/>
+                    </a:lnB>
+                    <a:solidFill>
+                      <a:srgbClr val="FFFFFF"/>
+                    </a:solidFill>
+                  </a:tcPr>
+                </a:tc>
+                <a:tc>
+                  <a:txBody>
+                    <a:bodyPr/>
+                    <a:lstStyle/>
+                    <a:p>
+                      <a:pPr algn="ctr" indent="0" marL="0">
+                        <a:buNone/>
+                      </a:pPr>
+                      <a:r>
+                        <a:rPr lang="en-US" sz="1100" dirty="0">
+                          <a:solidFill>
+                            <a:srgbClr val="3F3F3F"/>
+                          </a:solidFill>
+                          <a:latin typeface="Malgun Gothic" pitchFamily="34" charset="0"/>
+                          <a:ea typeface="Malgun Gothic" pitchFamily="34" charset="-122"/>
+                          <a:cs typeface="Malgun Gothic" pitchFamily="34" charset="-120"/>
+                        </a:rPr>
+                        <a:t>1,438</a:t>
+                      </a:r>
+                      <a:endParaRPr lang="en-US" sz="1100" dirty="0">
+                        <a:latin typeface="Malgun Gothic" charset="0"/>
+                        <a:ea typeface="Malgun Gothic" charset="0"/>
+                        <a:cs typeface="Malgun Gothic" charset="0"/>
+                      </a:endParaRPr>
+                    </a:p>
+                  </a:txBody>
+                  <a:tcPr marL="91440" marR="91440" marT="45720" marB="45720" anchor="ctr">
+                    <a:lnL w="9525" cap="flat" cmpd="sng" algn="ctr">
+                      <a:solidFill>
+                        <a:srgbClr val="D9D9D9"/>
+                      </a:solidFill>
+                      <a:prstDash val="solid"/>
+                      <a:round/>
+                      <a:headEnd type="none" w="med" len="med"/>
+                      <a:tailEnd type="none" w="med" len="med"/>
+                    </a:lnL>
+                    <a:lnR w="9525" cap="flat" cmpd="sng" algn="ctr">
+                      <a:solidFill>
+                        <a:srgbClr val="D9D9D9"/>
+                      </a:solidFill>
+                      <a:prstDash val="solid"/>
+                      <a:round/>
+                      <a:headEnd type="none" w="med" len="med"/>
+                      <a:tailEnd type="none" w="med" len="med"/>
+                    </a:lnR>
+                    <a:lnT w="9525" cap="flat" cmpd="sng" algn="ctr">
+                      <a:solidFill>
+                        <a:srgbClr val="D9D9D9"/>
+                      </a:solidFill>
+                      <a:prstDash val="solid"/>
+                      <a:round/>
+                      <a:headEnd type="none" w="med" len="med"/>
+                      <a:tailEnd type="none" w="med" len="med"/>
+                    </a:lnT>
+                    <a:lnB w="9525" cap="flat" cmpd="sng" algn="ctr">
+                      <a:solidFill>
+                        <a:srgbClr val="D9D9D9"/>
+                      </a:solidFill>
+                      <a:prstDash val="solid"/>
+                      <a:round/>
+                      <a:headEnd type="none" w="med" len="med"/>
+                      <a:tailEnd type="none" w="med" len="med"/>
+                    </a:lnB>
+                    <a:solidFill>
+                      <a:srgbClr val="FFFFFF"/>
+                    </a:solidFill>
+                  </a:tcPr>
+                </a:tc>
+                <a:tc>
+                  <a:txBody>
+                    <a:bodyPr/>
+                    <a:lstStyle/>
+                    <a:p>
+                      <a:pPr algn="ctr" indent="0" marL="0">
+                        <a:buNone/>
+                      </a:pPr>
+                      <a:r>
+                        <a:rPr lang="en-US" sz="1100" dirty="0">
+                          <a:solidFill>
+                            <a:srgbClr val="3F3F3F"/>
+                          </a:solidFill>
+                          <a:latin typeface="Malgun Gothic" pitchFamily="34" charset="0"/>
+                          <a:ea typeface="Malgun Gothic" pitchFamily="34" charset="-122"/>
+                          <a:cs typeface="Malgun Gothic" pitchFamily="34" charset="-120"/>
+                        </a:rPr>
+                        <a:t>2,425</a:t>
+                      </a:r>
+                      <a:endParaRPr lang="en-US" sz="1100" dirty="0">
+                        <a:latin typeface="Malgun Gothic" charset="0"/>
+                        <a:ea typeface="Malgun Gothic" charset="0"/>
+                        <a:cs typeface="Malgun Gothic" charset="0"/>
+                      </a:endParaRPr>
+                    </a:p>
+                  </a:txBody>
+                  <a:tcPr marL="91440" marR="91440" marT="45720" marB="45720" anchor="ctr">
+                    <a:lnL w="9525" cap="flat" cmpd="sng" algn="ctr">
+                      <a:solidFill>
+                        <a:srgbClr val="D9D9D9"/>
+                      </a:solidFill>
+                      <a:prstDash val="solid"/>
+                      <a:round/>
+                      <a:headEnd type="none" w="med" len="med"/>
+                      <a:tailEnd type="none" w="med" len="med"/>
+                    </a:lnL>
+                    <a:lnR w="9525" cap="flat" cmpd="sng" algn="ctr">
+                      <a:solidFill>
+                        <a:srgbClr val="D9D9D9"/>
+                      </a:solidFill>
+                      <a:prstDash val="solid"/>
+                      <a:round/>
+                      <a:headEnd type="none" w="med" len="med"/>
+                      <a:tailEnd type="none" w="med" len="med"/>
+                    </a:lnR>
+                    <a:lnT w="9525" cap="flat" cmpd="sng" algn="ctr">
+                      <a:solidFill>
+                        <a:srgbClr val="D9D9D9"/>
+                      </a:solidFill>
+                      <a:prstDash val="solid"/>
+                      <a:round/>
+                      <a:headEnd type="none" w="med" len="med"/>
+                      <a:tailEnd type="none" w="med" len="med"/>
+                    </a:lnT>
+                    <a:lnB w="9525" cap="flat" cmpd="sng" algn="ctr">
+                      <a:solidFill>
+                        <a:srgbClr val="D9D9D9"/>
+                      </a:solidFill>
+                      <a:prstDash val="solid"/>
+                      <a:round/>
+                      <a:headEnd type="none" w="med" len="med"/>
+                      <a:tailEnd type="none" w="med" len="med"/>
+                    </a:lnB>
+                    <a:solidFill>
+                      <a:srgbClr val="FFFFFF"/>
+                    </a:solidFill>
+                  </a:tcPr>
+                </a:tc>
+                <a:tc>
+                  <a:txBody>
+                    <a:bodyPr/>
+                    <a:lstStyle/>
+                    <a:p>
+                      <a:pPr algn="ctr" indent="0" marL="0">
+                        <a:buNone/>
+                      </a:pPr>
+                      <a:r>
+                        <a:rPr lang="en-US" sz="1100" dirty="0">
+                          <a:solidFill>
+                            <a:srgbClr val="3FBA46"/>
+                          </a:solidFill>
+                          <a:latin typeface="Malgun Gothic" pitchFamily="34" charset="0"/>
+                          <a:ea typeface="Malgun Gothic" pitchFamily="34" charset="-122"/>
+                          <a:cs typeface="Malgun Gothic" pitchFamily="34" charset="-120"/>
+                        </a:rPr>
+                        <a:t>+69%</a:t>
+                      </a:r>
+                      <a:endParaRPr lang="en-US" sz="1100" dirty="0">
+                        <a:latin typeface="Malgun Gothic" charset="0"/>
+                        <a:ea typeface="Malgun Gothic" charset="0"/>
+                        <a:cs typeface="Malgun Gothic" charset="0"/>
+                      </a:endParaRPr>
+                    </a:p>
+                  </a:txBody>
+                  <a:tcPr marL="91440" marR="91440" marT="45720" marB="45720" anchor="ctr">
+                    <a:lnL w="9525" cap="flat" cmpd="sng" algn="ctr">
+                      <a:solidFill>
+                        <a:srgbClr val="D9D9D9"/>
+                      </a:solidFill>
+                      <a:prstDash val="solid"/>
+                      <a:round/>
+                      <a:headEnd type="none" w="med" len="med"/>
+                      <a:tailEnd type="none" w="med" len="med"/>
+                    </a:lnL>
+                    <a:lnR w="9525" cap="flat" cmpd="sng" algn="ctr">
+                      <a:solidFill>
+                        <a:srgbClr val="D9D9D9"/>
+                      </a:solidFill>
+                      <a:prstDash val="solid"/>
+                      <a:round/>
+                      <a:headEnd type="none" w="med" len="med"/>
+                      <a:tailEnd type="none" w="med" len="med"/>
+                    </a:lnR>
+                    <a:lnT w="9525" cap="flat" cmpd="sng" algn="ctr">
+                      <a:solidFill>
+                        <a:srgbClr val="D9D9D9"/>
+                      </a:solidFill>
+                      <a:prstDash val="solid"/>
+                      <a:round/>
+                      <a:headEnd type="none" w="med" len="med"/>
+                      <a:tailEnd type="none" w="med" len="med"/>
+                    </a:lnT>
+                    <a:lnB w="9525" cap="flat" cmpd="sng" algn="ctr">
+                      <a:solidFill>
+                        <a:srgbClr val="D9D9D9"/>
+                      </a:solidFill>
+                      <a:prstDash val="solid"/>
+                      <a:round/>
+                      <a:headEnd type="none" w="med" len="med"/>
+                      <a:tailEnd type="none" w="med" len="med"/>
+                    </a:lnB>
+                    <a:solidFill>
+                      <a:srgbClr val="FFFFFF"/>
+                    </a:solidFill>
+                  </a:tcPr>
+                </a:tc>
+              </a:tr>
+              <a:tr h="365760">
+                <a:tc>
+                  <a:txBody>
+                    <a:bodyPr/>
+                    <a:lstStyle/>
+                    <a:p>
+                      <a:pPr algn="l" indent="0" marL="0">
+                        <a:buNone/>
+                      </a:pPr>
+                      <a:r>
+                        <a:rPr lang="en-US" sz="1100" dirty="0">
+                          <a:solidFill>
+                            <a:srgbClr val="3F3F3F"/>
+                          </a:solidFill>
+                          <a:latin typeface="Malgun Gothic" pitchFamily="34" charset="0"/>
+                          <a:ea typeface="Malgun Gothic" pitchFamily="34" charset="-122"/>
+                          <a:cs typeface="Malgun Gothic" pitchFamily="34" charset="-120"/>
+                        </a:rPr>
+                        <a:t>전체 활동</a:t>
+                      </a:r>
+                      <a:endParaRPr lang="en-US" sz="1100" dirty="0">
+                        <a:latin typeface="Malgun Gothic" charset="0"/>
+                        <a:ea typeface="Malgun Gothic" charset="0"/>
+                        <a:cs typeface="Malgun Gothic" charset="0"/>
+                      </a:endParaRPr>
+                    </a:p>
+                  </a:txBody>
+                  <a:tcPr marL="91440" marR="91440" marT="45720" marB="45720" anchor="ctr">
+                    <a:lnL w="9525" cap="flat" cmpd="sng" algn="ctr">
+                      <a:solidFill>
+                        <a:srgbClr val="D9D9D9"/>
+                      </a:solidFill>
+                      <a:prstDash val="solid"/>
+                      <a:round/>
+                      <a:headEnd type="none" w="med" len="med"/>
+                      <a:tailEnd type="none" w="med" len="med"/>
+                    </a:lnL>
+                    <a:lnR w="9525" cap="flat" cmpd="sng" algn="ctr">
+                      <a:solidFill>
+                        <a:srgbClr val="D9D9D9"/>
+                      </a:solidFill>
+                      <a:prstDash val="solid"/>
+                      <a:round/>
+                      <a:headEnd type="none" w="med" len="med"/>
+                      <a:tailEnd type="none" w="med" len="med"/>
+                    </a:lnR>
+                    <a:lnT w="9525" cap="flat" cmpd="sng" algn="ctr">
+                      <a:solidFill>
+                        <a:srgbClr val="D9D9D9"/>
+                      </a:solidFill>
+                      <a:prstDash val="solid"/>
+                      <a:round/>
+                      <a:headEnd type="none" w="med" len="med"/>
+                      <a:tailEnd type="none" w="med" len="med"/>
+                    </a:lnT>
+                    <a:lnB w="9525" cap="flat" cmpd="sng" algn="ctr">
+                      <a:solidFill>
+                        <a:srgbClr val="D9D9D9"/>
+                      </a:solidFill>
+                      <a:prstDash val="solid"/>
+                      <a:round/>
+                      <a:headEnd type="none" w="med" len="med"/>
+                      <a:tailEnd type="none" w="med" len="med"/>
+                    </a:lnB>
+                    <a:solidFill>
+                      <a:srgbClr val="FFFFFF"/>
+                    </a:solidFill>
+                  </a:tcPr>
+                </a:tc>
+                <a:tc>
+                  <a:txBody>
+                    <a:bodyPr/>
+                    <a:lstStyle/>
+                    <a:p>
+                      <a:pPr algn="ctr" indent="0" marL="0">
+                        <a:buNone/>
+                      </a:pPr>
+                      <a:r>
+                        <a:rPr lang="en-US" sz="1100" dirty="0">
+                          <a:solidFill>
+                            <a:srgbClr val="3F3F3F"/>
+                          </a:solidFill>
+                          <a:latin typeface="Malgun Gothic" pitchFamily="34" charset="0"/>
+                          <a:ea typeface="Malgun Gothic" pitchFamily="34" charset="-122"/>
+                          <a:cs typeface="Malgun Gothic" pitchFamily="34" charset="-120"/>
+                        </a:rPr>
+                        <a:t>1,324</a:t>
+                      </a:r>
+                      <a:endParaRPr lang="en-US" sz="1100" dirty="0">
+                        <a:latin typeface="Malgun Gothic" charset="0"/>
+                        <a:ea typeface="Malgun Gothic" charset="0"/>
+                        <a:cs typeface="Malgun Gothic" charset="0"/>
+                      </a:endParaRPr>
+                    </a:p>
+                  </a:txBody>
+                  <a:tcPr marL="91440" marR="91440" marT="45720" marB="45720" anchor="ctr">
+                    <a:lnL w="9525" cap="flat" cmpd="sng" algn="ctr">
+                      <a:solidFill>
+                        <a:srgbClr val="D9D9D9"/>
+                      </a:solidFill>
+                      <a:prstDash val="solid"/>
+                      <a:round/>
+                      <a:headEnd type="none" w="med" len="med"/>
+                      <a:tailEnd type="none" w="med" len="med"/>
+                    </a:lnL>
+                    <a:lnR w="9525" cap="flat" cmpd="sng" algn="ctr">
+                      <a:solidFill>
+                        <a:srgbClr val="D9D9D9"/>
+                      </a:solidFill>
+                      <a:prstDash val="solid"/>
+                      <a:round/>
+                      <a:headEnd type="none" w="med" len="med"/>
+                      <a:tailEnd type="none" w="med" len="med"/>
+                    </a:lnR>
+                    <a:lnT w="9525" cap="flat" cmpd="sng" algn="ctr">
+                      <a:solidFill>
+                        <a:srgbClr val="D9D9D9"/>
+                      </a:solidFill>
+                      <a:prstDash val="solid"/>
+                      <a:round/>
+                      <a:headEnd type="none" w="med" len="med"/>
+                      <a:tailEnd type="none" w="med" len="med"/>
+                    </a:lnT>
+                    <a:lnB w="9525" cap="flat" cmpd="sng" algn="ctr">
+                      <a:solidFill>
+                        <a:srgbClr val="D9D9D9"/>
+                      </a:solidFill>
+                      <a:prstDash val="solid"/>
+                      <a:round/>
+                      <a:headEnd type="none" w="med" len="med"/>
+                      <a:tailEnd type="none" w="med" len="med"/>
+                    </a:lnB>
+                    <a:solidFill>
+                      <a:srgbClr val="FFFFFF"/>
+                    </a:solidFill>
+                  </a:tcPr>
+                </a:tc>
+                <a:tc>
+                  <a:txBody>
+                    <a:bodyPr/>
+                    <a:lstStyle/>
+                    <a:p>
+                      <a:pPr algn="ctr" indent="0" marL="0">
+                        <a:buNone/>
+                      </a:pPr>
+                      <a:r>
+                        <a:rPr lang="en-US" sz="1100" dirty="0">
+                          <a:solidFill>
+                            <a:srgbClr val="3F3F3F"/>
+                          </a:solidFill>
+                          <a:latin typeface="Malgun Gothic" pitchFamily="34" charset="0"/>
+                          <a:ea typeface="Malgun Gothic" pitchFamily="34" charset="-122"/>
+                          <a:cs typeface="Malgun Gothic" pitchFamily="34" charset="-120"/>
+                        </a:rPr>
+                        <a:t>2,062</a:t>
+                      </a:r>
+                      <a:endParaRPr lang="en-US" sz="1100" dirty="0">
+                        <a:latin typeface="Malgun Gothic" charset="0"/>
+                        <a:ea typeface="Malgun Gothic" charset="0"/>
+                        <a:cs typeface="Malgun Gothic" charset="0"/>
+                      </a:endParaRPr>
+                    </a:p>
+                  </a:txBody>
+                  <a:tcPr marL="91440" marR="91440" marT="45720" marB="45720" anchor="ctr">
+                    <a:lnL w="9525" cap="flat" cmpd="sng" algn="ctr">
+                      <a:solidFill>
+                        <a:srgbClr val="D9D9D9"/>
+                      </a:solidFill>
+                      <a:prstDash val="solid"/>
+                      <a:round/>
+                      <a:headEnd type="none" w="med" len="med"/>
+                      <a:tailEnd type="none" w="med" len="med"/>
+                    </a:lnL>
+                    <a:lnR w="9525" cap="flat" cmpd="sng" algn="ctr">
+                      <a:solidFill>
+                        <a:srgbClr val="D9D9D9"/>
+                      </a:solidFill>
+                      <a:prstDash val="solid"/>
+                      <a:round/>
+                      <a:headEnd type="none" w="med" len="med"/>
+                      <a:tailEnd type="none" w="med" len="med"/>
+                    </a:lnR>
+                    <a:lnT w="9525" cap="flat" cmpd="sng" algn="ctr">
+                      <a:solidFill>
+                        <a:srgbClr val="D9D9D9"/>
+                      </a:solidFill>
+                      <a:prstDash val="solid"/>
+                      <a:round/>
+                      <a:headEnd type="none" w="med" len="med"/>
+                      <a:tailEnd type="none" w="med" len="med"/>
+                    </a:lnT>
+                    <a:lnB w="9525" cap="flat" cmpd="sng" algn="ctr">
+                      <a:solidFill>
+                        <a:srgbClr val="D9D9D9"/>
+                      </a:solidFill>
+                      <a:prstDash val="solid"/>
+                      <a:round/>
+                      <a:headEnd type="none" w="med" len="med"/>
+                      <a:tailEnd type="none" w="med" len="med"/>
+                    </a:lnB>
+                    <a:solidFill>
+                      <a:srgbClr val="FFFFFF"/>
+                    </a:solidFill>
+                  </a:tcPr>
+                </a:tc>
+                <a:tc>
+                  <a:txBody>
+                    <a:bodyPr/>
+                    <a:lstStyle/>
+                    <a:p>
+                      <a:pPr algn="ctr" indent="0" marL="0">
+                        <a:buNone/>
+                      </a:pPr>
+                      <a:r>
+                        <a:rPr lang="en-US" sz="1100" dirty="0">
+                          <a:solidFill>
+                            <a:srgbClr val="3FBA46"/>
+                          </a:solidFill>
+                          <a:latin typeface="Malgun Gothic" pitchFamily="34" charset="0"/>
+                          <a:ea typeface="Malgun Gothic" pitchFamily="34" charset="-122"/>
+                          <a:cs typeface="Malgun Gothic" pitchFamily="34" charset="-120"/>
+                        </a:rPr>
+                        <a:t>+56%</a:t>
+                      </a:r>
+                      <a:endParaRPr lang="en-US" sz="1100" dirty="0">
+                        <a:latin typeface="Malgun Gothic" charset="0"/>
+                        <a:ea typeface="Malgun Gothic" charset="0"/>
+                        <a:cs typeface="Malgun Gothic" charset="0"/>
+                      </a:endParaRPr>
+                    </a:p>
+                  </a:txBody>
+                  <a:tcPr marL="91440" marR="91440" marT="45720" marB="45720" anchor="ctr">
+                    <a:lnL w="9525" cap="flat" cmpd="sng" algn="ctr">
+                      <a:solidFill>
+                        <a:srgbClr val="D9D9D9"/>
+                      </a:solidFill>
+                      <a:prstDash val="solid"/>
+                      <a:round/>
+                      <a:headEnd type="none" w="med" len="med"/>
+                      <a:tailEnd type="none" w="med" len="med"/>
+                    </a:lnL>
+                    <a:lnR w="9525" cap="flat" cmpd="sng" algn="ctr">
+                      <a:solidFill>
+                        <a:srgbClr val="D9D9D9"/>
+                      </a:solidFill>
+                      <a:prstDash val="solid"/>
+                      <a:round/>
+                      <a:headEnd type="none" w="med" len="med"/>
+                      <a:tailEnd type="none" w="med" len="med"/>
+                    </a:lnR>
+                    <a:lnT w="9525" cap="flat" cmpd="sng" algn="ctr">
+                      <a:solidFill>
+                        <a:srgbClr val="D9D9D9"/>
+                      </a:solidFill>
+                      <a:prstDash val="solid"/>
+                      <a:round/>
+                      <a:headEnd type="none" w="med" len="med"/>
+                      <a:tailEnd type="none" w="med" len="med"/>
+                    </a:lnT>
+                    <a:lnB w="9525" cap="flat" cmpd="sng" algn="ctr">
+                      <a:solidFill>
+                        <a:srgbClr val="D9D9D9"/>
+                      </a:solidFill>
+                      <a:prstDash val="solid"/>
+                      <a:round/>
+                      <a:headEnd type="none" w="med" len="med"/>
+                      <a:tailEnd type="none" w="med" len="med"/>
+                    </a:lnB>
+                    <a:solidFill>
+                      <a:srgbClr val="FFFFFF"/>
+                    </a:solidFill>
+                  </a:tcPr>
+                </a:tc>
+              </a:tr>
+              <a:tr h="365760">
+                <a:tc>
+                  <a:txBody>
+                    <a:bodyPr/>
+                    <a:lstStyle/>
+                    <a:p>
+                      <a:pPr algn="l" indent="0" marL="0">
+                        <a:buNone/>
+                      </a:pPr>
+                      <a:r>
+                        <a:rPr lang="en-US" sz="1100" dirty="0">
+                          <a:solidFill>
+                            <a:srgbClr val="3F3F3F"/>
+                          </a:solidFill>
+                          <a:latin typeface="Malgun Gothic" pitchFamily="34" charset="0"/>
+                          <a:ea typeface="Malgun Gothic" pitchFamily="34" charset="-122"/>
+                          <a:cs typeface="Malgun Gothic" pitchFamily="34" charset="-120"/>
+                        </a:rPr>
+                        <a:t>수리건수</a:t>
+                      </a:r>
+                      <a:endParaRPr lang="en-US" sz="1100" dirty="0">
+                        <a:latin typeface="Malgun Gothic" charset="0"/>
+                        <a:ea typeface="Malgun Gothic" charset="0"/>
+                        <a:cs typeface="Malgun Gothic" charset="0"/>
+                      </a:endParaRPr>
+                    </a:p>
+                  </a:txBody>
+                  <a:tcPr marL="91440" marR="91440" marT="45720" marB="45720" anchor="ctr">
+                    <a:lnL w="9525" cap="flat" cmpd="sng" algn="ctr">
+                      <a:solidFill>
+                        <a:srgbClr val="D9D9D9"/>
+                      </a:solidFill>
+                      <a:prstDash val="solid"/>
+                      <a:round/>
+                      <a:headEnd type="none" w="med" len="med"/>
+                      <a:tailEnd type="none" w="med" len="med"/>
+                    </a:lnL>
+                    <a:lnR w="9525" cap="flat" cmpd="sng" algn="ctr">
+                      <a:solidFill>
+                        <a:srgbClr val="D9D9D9"/>
+                      </a:solidFill>
+                      <a:prstDash val="solid"/>
+                      <a:round/>
+                      <a:headEnd type="none" w="med" len="med"/>
+                      <a:tailEnd type="none" w="med" len="med"/>
+                    </a:lnR>
+                    <a:lnT w="9525" cap="flat" cmpd="sng" algn="ctr">
+                      <a:solidFill>
+                        <a:srgbClr val="D9D9D9"/>
+                      </a:solidFill>
+                      <a:prstDash val="solid"/>
+                      <a:round/>
+                      <a:headEnd type="none" w="med" len="med"/>
+                      <a:tailEnd type="none" w="med" len="med"/>
+                    </a:lnT>
+                    <a:lnB w="9525" cap="flat" cmpd="sng" algn="ctr">
+                      <a:solidFill>
+                        <a:srgbClr val="D9D9D9"/>
+                      </a:solidFill>
+                      <a:prstDash val="solid"/>
+                      <a:round/>
+                      <a:headEnd type="none" w="med" len="med"/>
+                      <a:tailEnd type="none" w="med" len="med"/>
+                    </a:lnB>
+                    <a:solidFill>
+                      <a:srgbClr val="FFFFFF"/>
+                    </a:solidFill>
+                  </a:tcPr>
+                </a:tc>
+                <a:tc>
+                  <a:txBody>
+                    <a:bodyPr/>
+                    <a:lstStyle/>
+                    <a:p>
+                      <a:pPr algn="ctr" indent="0" marL="0">
+                        <a:buNone/>
+                      </a:pPr>
+                      <a:r>
+                        <a:rPr lang="en-US" sz="1100" dirty="0">
+                          <a:solidFill>
+                            <a:srgbClr val="3F3F3F"/>
+                          </a:solidFill>
+                          <a:latin typeface="Malgun Gothic" pitchFamily="34" charset="0"/>
+                          <a:ea typeface="Malgun Gothic" pitchFamily="34" charset="-122"/>
+                          <a:cs typeface="Malgun Gothic" pitchFamily="34" charset="-120"/>
+                        </a:rPr>
+                        <a:t>467</a:t>
+                      </a:r>
+                      <a:endParaRPr lang="en-US" sz="1100" dirty="0">
+                        <a:latin typeface="Malgun Gothic" charset="0"/>
+                        <a:ea typeface="Malgun Gothic" charset="0"/>
+                        <a:cs typeface="Malgun Gothic" charset="0"/>
+                      </a:endParaRPr>
+                    </a:p>
+                  </a:txBody>
+                  <a:tcPr marL="91440" marR="91440" marT="45720" marB="45720" anchor="ctr">
+                    <a:lnL w="9525" cap="flat" cmpd="sng" algn="ctr">
+                      <a:solidFill>
+                        <a:srgbClr val="D9D9D9"/>
+                      </a:solidFill>
+                      <a:prstDash val="solid"/>
+                      <a:round/>
+                      <a:headEnd type="none" w="med" len="med"/>
+                      <a:tailEnd type="none" w="med" len="med"/>
+                    </a:lnL>
+                    <a:lnR w="9525" cap="flat" cmpd="sng" algn="ctr">
+                      <a:solidFill>
+                        <a:srgbClr val="D9D9D9"/>
+                      </a:solidFill>
+                      <a:prstDash val="solid"/>
+                      <a:round/>
+                      <a:headEnd type="none" w="med" len="med"/>
+                      <a:tailEnd type="none" w="med" len="med"/>
+                    </a:lnR>
+                    <a:lnT w="9525" cap="flat" cmpd="sng" algn="ctr">
+                      <a:solidFill>
+                        <a:srgbClr val="D9D9D9"/>
+                      </a:solidFill>
+                      <a:prstDash val="solid"/>
+                      <a:round/>
+                      <a:headEnd type="none" w="med" len="med"/>
+                      <a:tailEnd type="none" w="med" len="med"/>
+                    </a:lnT>
+                    <a:lnB w="9525" cap="flat" cmpd="sng" algn="ctr">
+                      <a:solidFill>
+                        <a:srgbClr val="D9D9D9"/>
+                      </a:solidFill>
+                      <a:prstDash val="solid"/>
+                      <a:round/>
+                      <a:headEnd type="none" w="med" len="med"/>
+                      <a:tailEnd type="none" w="med" len="med"/>
+                    </a:lnB>
+                    <a:solidFill>
+                      <a:srgbClr val="FFFFFF"/>
+                    </a:solidFill>
+                  </a:tcPr>
+                </a:tc>
+                <a:tc>
+                  <a:txBody>
+                    <a:bodyPr/>
+                    <a:lstStyle/>
+                    <a:p>
+                      <a:pPr algn="ctr" indent="0" marL="0">
+                        <a:buNone/>
+                      </a:pPr>
+                      <a:r>
+                        <a:rPr lang="en-US" sz="1100" dirty="0">
+                          <a:solidFill>
+                            <a:srgbClr val="3F3F3F"/>
+                          </a:solidFill>
+                          <a:latin typeface="Malgun Gothic" pitchFamily="34" charset="0"/>
+                          <a:ea typeface="Malgun Gothic" pitchFamily="34" charset="-122"/>
+                          <a:cs typeface="Malgun Gothic" pitchFamily="34" charset="-120"/>
+                        </a:rPr>
+                        <a:t>665</a:t>
+                      </a:r>
+                      <a:endParaRPr lang="en-US" sz="1100" dirty="0">
+                        <a:latin typeface="Malgun Gothic" charset="0"/>
+                        <a:ea typeface="Malgun Gothic" charset="0"/>
+                        <a:cs typeface="Malgun Gothic" charset="0"/>
+                      </a:endParaRPr>
+                    </a:p>
+                  </a:txBody>
+                  <a:tcPr marL="91440" marR="91440" marT="45720" marB="45720" anchor="ctr">
+                    <a:lnL w="9525" cap="flat" cmpd="sng" algn="ctr">
+                      <a:solidFill>
+                        <a:srgbClr val="D9D9D9"/>
+                      </a:solidFill>
+                      <a:prstDash val="solid"/>
+                      <a:round/>
+                      <a:headEnd type="none" w="med" len="med"/>
+                      <a:tailEnd type="none" w="med" len="med"/>
+                    </a:lnL>
+                    <a:lnR w="9525" cap="flat" cmpd="sng" algn="ctr">
+                      <a:solidFill>
+                        <a:srgbClr val="D9D9D9"/>
+                      </a:solidFill>
+                      <a:prstDash val="solid"/>
+                      <a:round/>
+                      <a:headEnd type="none" w="med" len="med"/>
+                      <a:tailEnd type="none" w="med" len="med"/>
+                    </a:lnR>
+                    <a:lnT w="9525" cap="flat" cmpd="sng" algn="ctr">
+                      <a:solidFill>
+                        <a:srgbClr val="D9D9D9"/>
+                      </a:solidFill>
+                      <a:prstDash val="solid"/>
+                      <a:round/>
+                      <a:headEnd type="none" w="med" len="med"/>
+                      <a:tailEnd type="none" w="med" len="med"/>
+                    </a:lnT>
+                    <a:lnB w="9525" cap="flat" cmpd="sng" algn="ctr">
+                      <a:solidFill>
+                        <a:srgbClr val="D9D9D9"/>
+                      </a:solidFill>
+                      <a:prstDash val="solid"/>
+                      <a:round/>
+                      <a:headEnd type="none" w="med" len="med"/>
+                      <a:tailEnd type="none" w="med" len="med"/>
+                    </a:lnB>
+                    <a:solidFill>
+                      <a:srgbClr val="FFFFFF"/>
+                    </a:solidFill>
+                  </a:tcPr>
+                </a:tc>
+                <a:tc>
+                  <a:txBody>
+                    <a:bodyPr/>
+                    <a:lstStyle/>
+                    <a:p>
+                      <a:pPr algn="ctr" indent="0" marL="0">
+                        <a:buNone/>
+                      </a:pPr>
+                      <a:r>
+                        <a:rPr lang="en-US" sz="1100" dirty="0">
+                          <a:solidFill>
+                            <a:srgbClr val="3FBA46"/>
+                          </a:solidFill>
+                          <a:latin typeface="Malgun Gothic" pitchFamily="34" charset="0"/>
+                          <a:ea typeface="Malgun Gothic" pitchFamily="34" charset="-122"/>
+                          <a:cs typeface="Malgun Gothic" pitchFamily="34" charset="-120"/>
+                        </a:rPr>
+                        <a:t>+42%</a:t>
+                      </a:r>
+                      <a:endParaRPr lang="en-US" sz="1100" dirty="0">
+                        <a:latin typeface="Malgun Gothic" charset="0"/>
+                        <a:ea typeface="Malgun Gothic" charset="0"/>
+                        <a:cs typeface="Malgun Gothic" charset="0"/>
+                      </a:endParaRPr>
+                    </a:p>
+                  </a:txBody>
+                  <a:tcPr marL="91440" marR="91440" marT="45720" marB="45720" anchor="ctr">
+                    <a:lnL w="9525" cap="flat" cmpd="sng" algn="ctr">
+                      <a:solidFill>
+                        <a:srgbClr val="D9D9D9"/>
+                      </a:solidFill>
+                      <a:prstDash val="solid"/>
+                      <a:round/>
+                      <a:headEnd type="none" w="med" len="med"/>
+                      <a:tailEnd type="none" w="med" len="med"/>
+                    </a:lnL>
+                    <a:lnR w="9525" cap="flat" cmpd="sng" algn="ctr">
+                      <a:solidFill>
+                        <a:srgbClr val="D9D9D9"/>
+                      </a:solidFill>
+                      <a:prstDash val="solid"/>
+                      <a:round/>
+                      <a:headEnd type="none" w="med" len="med"/>
+                      <a:tailEnd type="none" w="med" len="med"/>
+                    </a:lnR>
+                    <a:lnT w="9525" cap="flat" cmpd="sng" algn="ctr">
+                      <a:solidFill>
+                        <a:srgbClr val="D9D9D9"/>
+                      </a:solidFill>
+                      <a:prstDash val="solid"/>
+                      <a:round/>
+                      <a:headEnd type="none" w="med" len="med"/>
+                      <a:tailEnd type="none" w="med" len="med"/>
+                    </a:lnT>
+                    <a:lnB w="9525" cap="flat" cmpd="sng" algn="ctr">
+                      <a:solidFill>
+                        <a:srgbClr val="D9D9D9"/>
+                      </a:solidFill>
+                      <a:prstDash val="solid"/>
+                      <a:round/>
+                      <a:headEnd type="none" w="med" len="med"/>
+                      <a:tailEnd type="none" w="med" len="med"/>
+                    </a:lnB>
+                    <a:solidFill>
+                      <a:srgbClr val="FFFFFF"/>
+                    </a:solidFill>
+                  </a:tcPr>
+                </a:tc>
+              </a:tr>
+              <a:tr h="365760">
+                <a:tc>
+                  <a:txBody>
+                    <a:bodyPr/>
+                    <a:lstStyle/>
+                    <a:p>
+                      <a:pPr algn="l" indent="0" marL="0">
+                        <a:buNone/>
+                      </a:pPr>
+                      <a:r>
+                        <a:rPr lang="en-US" sz="1100" dirty="0">
+                          <a:solidFill>
+                            <a:srgbClr val="3F3F3F"/>
+                          </a:solidFill>
+                          <a:latin typeface="Malgun Gothic" pitchFamily="34" charset="0"/>
+                          <a:ea typeface="Malgun Gothic" pitchFamily="34" charset="-122"/>
+                          <a:cs typeface="Malgun Gothic" pitchFamily="34" charset="-120"/>
+                        </a:rPr>
+                        <a:t>PM건수</a:t>
+                      </a:r>
+                      <a:endParaRPr lang="en-US" sz="1100" dirty="0">
+                        <a:latin typeface="Malgun Gothic" charset="0"/>
+                        <a:ea typeface="Malgun Gothic" charset="0"/>
+                        <a:cs typeface="Malgun Gothic" charset="0"/>
+                      </a:endParaRPr>
+                    </a:p>
+                  </a:txBody>
+                  <a:tcPr marL="91440" marR="91440" marT="45720" marB="45720" anchor="ctr">
+                    <a:lnL w="9525" cap="flat" cmpd="sng" algn="ctr">
+                      <a:solidFill>
+                        <a:srgbClr val="D9D9D9"/>
+                      </a:solidFill>
+                      <a:prstDash val="solid"/>
+                      <a:round/>
+                      <a:headEnd type="none" w="med" len="med"/>
+                      <a:tailEnd type="none" w="med" len="med"/>
+                    </a:lnL>
+                    <a:lnR w="9525" cap="flat" cmpd="sng" algn="ctr">
+                      <a:solidFill>
+                        <a:srgbClr val="D9D9D9"/>
+                      </a:solidFill>
+                      <a:prstDash val="solid"/>
+                      <a:round/>
+                      <a:headEnd type="none" w="med" len="med"/>
+                      <a:tailEnd type="none" w="med" len="med"/>
+                    </a:lnR>
+                    <a:lnT w="9525" cap="flat" cmpd="sng" algn="ctr">
+                      <a:solidFill>
+                        <a:srgbClr val="D9D9D9"/>
+                      </a:solidFill>
+                      <a:prstDash val="solid"/>
+                      <a:round/>
+                      <a:headEnd type="none" w="med" len="med"/>
+                      <a:tailEnd type="none" w="med" len="med"/>
+                    </a:lnT>
+                    <a:lnB w="9525" cap="flat" cmpd="sng" algn="ctr">
+                      <a:solidFill>
+                        <a:srgbClr val="D9D9D9"/>
+                      </a:solidFill>
+                      <a:prstDash val="solid"/>
+                      <a:round/>
+                      <a:headEnd type="none" w="med" len="med"/>
+                      <a:tailEnd type="none" w="med" len="med"/>
+                    </a:lnB>
+                    <a:solidFill>
+                      <a:srgbClr val="FFFFFF"/>
+                    </a:solidFill>
+                  </a:tcPr>
+                </a:tc>
+                <a:tc>
+                  <a:txBody>
+                    <a:bodyPr/>
+                    <a:lstStyle/>
+                    <a:p>
+                      <a:pPr algn="ctr" indent="0" marL="0">
+                        <a:buNone/>
+                      </a:pPr>
+                      <a:r>
+                        <a:rPr lang="en-US" sz="1100" dirty="0">
+                          <a:solidFill>
+                            <a:srgbClr val="3F3F3F"/>
+                          </a:solidFill>
+                          <a:latin typeface="Malgun Gothic" pitchFamily="34" charset="0"/>
+                          <a:ea typeface="Malgun Gothic" pitchFamily="34" charset="-122"/>
+                          <a:cs typeface="Malgun Gothic" pitchFamily="34" charset="-120"/>
+                        </a:rPr>
+                        <a:t>500</a:t>
+                      </a:r>
+                      <a:endParaRPr lang="en-US" sz="1100" dirty="0">
+                        <a:latin typeface="Malgun Gothic" charset="0"/>
+                        <a:ea typeface="Malgun Gothic" charset="0"/>
+                        <a:cs typeface="Malgun Gothic" charset="0"/>
+                      </a:endParaRPr>
+                    </a:p>
+                  </a:txBody>
+                  <a:tcPr marL="91440" marR="91440" marT="45720" marB="45720" anchor="ctr">
+                    <a:lnL w="9525" cap="flat" cmpd="sng" algn="ctr">
+                      <a:solidFill>
+                        <a:srgbClr val="D9D9D9"/>
+                      </a:solidFill>
+                      <a:prstDash val="solid"/>
+                      <a:round/>
+                      <a:headEnd type="none" w="med" len="med"/>
+                      <a:tailEnd type="none" w="med" len="med"/>
+                    </a:lnL>
+                    <a:lnR w="9525" cap="flat" cmpd="sng" algn="ctr">
+                      <a:solidFill>
+                        <a:srgbClr val="D9D9D9"/>
+                      </a:solidFill>
+                      <a:prstDash val="solid"/>
+                      <a:round/>
+                      <a:headEnd type="none" w="med" len="med"/>
+                      <a:tailEnd type="none" w="med" len="med"/>
+                    </a:lnR>
+                    <a:lnT w="9525" cap="flat" cmpd="sng" algn="ctr">
+                      <a:solidFill>
+                        <a:srgbClr val="D9D9D9"/>
+                      </a:solidFill>
+                      <a:prstDash val="solid"/>
+                      <a:round/>
+                      <a:headEnd type="none" w="med" len="med"/>
+                      <a:tailEnd type="none" w="med" len="med"/>
+                    </a:lnT>
+                    <a:lnB w="9525" cap="flat" cmpd="sng" algn="ctr">
+                      <a:solidFill>
+                        <a:srgbClr val="D9D9D9"/>
+                      </a:solidFill>
+                      <a:prstDash val="solid"/>
+                      <a:round/>
+                      <a:headEnd type="none" w="med" len="med"/>
+                      <a:tailEnd type="none" w="med" len="med"/>
+                    </a:lnB>
+                    <a:solidFill>
+                      <a:srgbClr val="FFFFFF"/>
+                    </a:solidFill>
+                  </a:tcPr>
+                </a:tc>
+                <a:tc>
+                  <a:txBody>
+                    <a:bodyPr/>
+                    <a:lstStyle/>
+                    <a:p>
+                      <a:pPr algn="ctr" indent="0" marL="0">
+                        <a:buNone/>
+                      </a:pPr>
+                      <a:r>
+                        <a:rPr lang="en-US" sz="1100" dirty="0">
+                          <a:solidFill>
+                            <a:srgbClr val="3F3F3F"/>
+                          </a:solidFill>
+                          <a:latin typeface="Malgun Gothic" pitchFamily="34" charset="0"/>
+                          <a:ea typeface="Malgun Gothic" pitchFamily="34" charset="-122"/>
+                          <a:cs typeface="Malgun Gothic" pitchFamily="34" charset="-120"/>
+                        </a:rPr>
+                        <a:t>904</a:t>
+                      </a:r>
+                      <a:endParaRPr lang="en-US" sz="1100" dirty="0">
+                        <a:latin typeface="Malgun Gothic" charset="0"/>
+                        <a:ea typeface="Malgun Gothic" charset="0"/>
+                        <a:cs typeface="Malgun Gothic" charset="0"/>
+                      </a:endParaRPr>
+                    </a:p>
+                  </a:txBody>
+                  <a:tcPr marL="91440" marR="91440" marT="45720" marB="45720" anchor="ctr">
+                    <a:lnL w="9525" cap="flat" cmpd="sng" algn="ctr">
+                      <a:solidFill>
+                        <a:srgbClr val="D9D9D9"/>
+                      </a:solidFill>
+                      <a:prstDash val="solid"/>
+                      <a:round/>
+                      <a:headEnd type="none" w="med" len="med"/>
+                      <a:tailEnd type="none" w="med" len="med"/>
+                    </a:lnL>
+                    <a:lnR w="9525" cap="flat" cmpd="sng" algn="ctr">
+                      <a:solidFill>
+                        <a:srgbClr val="D9D9D9"/>
+                      </a:solidFill>
+                      <a:prstDash val="solid"/>
+                      <a:round/>
+                      <a:headEnd type="none" w="med" len="med"/>
+                      <a:tailEnd type="none" w="med" len="med"/>
+                    </a:lnR>
+                    <a:lnT w="9525" cap="flat" cmpd="sng" algn="ctr">
+                      <a:solidFill>
+                        <a:srgbClr val="D9D9D9"/>
+                      </a:solidFill>
+                      <a:prstDash val="solid"/>
+                      <a:round/>
+                      <a:headEnd type="none" w="med" len="med"/>
+                      <a:tailEnd type="none" w="med" len="med"/>
+                    </a:lnT>
+                    <a:lnB w="9525" cap="flat" cmpd="sng" algn="ctr">
+                      <a:solidFill>
+                        <a:srgbClr val="D9D9D9"/>
+                      </a:solidFill>
+                      <a:prstDash val="solid"/>
+                      <a:round/>
+                      <a:headEnd type="none" w="med" len="med"/>
+                      <a:tailEnd type="none" w="med" len="med"/>
+                    </a:lnB>
+                    <a:solidFill>
+                      <a:srgbClr val="FFFFFF"/>
+                    </a:solidFill>
+                  </a:tcPr>
+                </a:tc>
+                <a:tc>
+                  <a:txBody>
+                    <a:bodyPr/>
+                    <a:lstStyle/>
+                    <a:p>
+                      <a:pPr algn="ctr" indent="0" marL="0">
+                        <a:buNone/>
+                      </a:pPr>
+                      <a:r>
+                        <a:rPr lang="en-US" sz="1100" dirty="0">
+                          <a:solidFill>
+                            <a:srgbClr val="3FBA46"/>
+                          </a:solidFill>
+                          <a:latin typeface="Malgun Gothic" pitchFamily="34" charset="0"/>
+                          <a:ea typeface="Malgun Gothic" pitchFamily="34" charset="-122"/>
+                          <a:cs typeface="Malgun Gothic" pitchFamily="34" charset="-120"/>
+                        </a:rPr>
+                        <a:t>+81%</a:t>
+                      </a:r>
+                      <a:endParaRPr lang="en-US" sz="1100" dirty="0">
+                        <a:latin typeface="Malgun Gothic" charset="0"/>
+                        <a:ea typeface="Malgun Gothic" charset="0"/>
+                        <a:cs typeface="Malgun Gothic" charset="0"/>
+                      </a:endParaRPr>
+                    </a:p>
+                  </a:txBody>
+                  <a:tcPr marL="91440" marR="91440" marT="45720" marB="45720" anchor="ctr">
+                    <a:lnL w="9525" cap="flat" cmpd="sng" algn="ctr">
+                      <a:solidFill>
+                        <a:srgbClr val="D9D9D9"/>
+                      </a:solidFill>
+                      <a:prstDash val="solid"/>
+                      <a:round/>
+                      <a:headEnd type="none" w="med" len="med"/>
+                      <a:tailEnd type="none" w="med" len="med"/>
+                    </a:lnL>
+                    <a:lnR w="9525" cap="flat" cmpd="sng" algn="ctr">
+                      <a:solidFill>
+                        <a:srgbClr val="D9D9D9"/>
+                      </a:solidFill>
+                      <a:prstDash val="solid"/>
+                      <a:round/>
+                      <a:headEnd type="none" w="med" len="med"/>
+                      <a:tailEnd type="none" w="med" len="med"/>
+                    </a:lnR>
+                    <a:lnT w="9525" cap="flat" cmpd="sng" algn="ctr">
+                      <a:solidFill>
+                        <a:srgbClr val="D9D9D9"/>
+                      </a:solidFill>
+                      <a:prstDash val="solid"/>
+                      <a:round/>
+                      <a:headEnd type="none" w="med" len="med"/>
+                      <a:tailEnd type="none" w="med" len="med"/>
+                    </a:lnT>
+                    <a:lnB w="9525" cap="flat" cmpd="sng" algn="ctr">
+                      <a:solidFill>
+                        <a:srgbClr val="D9D9D9"/>
+                      </a:solidFill>
+                      <a:prstDash val="solid"/>
+                      <a:round/>
+                      <a:headEnd type="none" w="med" len="med"/>
+                      <a:tailEnd type="none" w="med" len="med"/>
+                    </a:lnB>
+                    <a:solidFill>
+                      <a:srgbClr val="FFFFFF"/>
+                    </a:solidFill>
+                  </a:tcPr>
+                </a:tc>
+              </a:tr>
+            </a:tbl>
+          </a:graphicData>
+        </a:graphic>
+      </p:graphicFrame>
+      <p:sp>
+        <p:nvSpPr>
+          <p:cNvPr id="13" name="Shape 7"/>
+          <p:cNvSpPr/>
+          <p:nvPr/>
+        </p:nvSpPr>
+        <p:spPr>
+          <a:xfrm>
+            <a:off x="530352" y="5760720"/>
+            <a:ext cx="11100816" cy="685800"/>
+          </a:xfrm>
+          <a:prstGeom prst="roundRect">
+            <a:avLst>
+              <a:gd name="adj" fmla="val 8000"/>
+            </a:avLst>
+          </a:prstGeom>
+          <a:solidFill>
+            <a:srgbClr val="E6EEF7"/>
+          </a:solidFill>
+          <a:ln/>
+        </p:spPr>
+      </p:sp>
+      <p:sp>
+        <p:nvSpPr>
+          <p:cNvPr id="14" name="Text 8"/>
+          <p:cNvSpPr/>
+          <p:nvPr/>
+        </p:nvSpPr>
+        <p:spPr>
+          <a:xfrm>
+            <a:off x="731520" y="5852160"/>
+            <a:ext cx="10698480" cy="548640"/>
+          </a:xfrm>
+          <a:prstGeom prst="rect">
+            <a:avLst/>
+          </a:prstGeom>
+          <a:noFill/>
+          <a:ln/>
+        </p:spPr>
+        <p:txBody>
+          <a:bodyPr wrap="square" lIns="0" tIns="0" rIns="0" bIns="0" rtlCol="0" anchor="ctr"/>
+          <a:lstStyle/>
+          <a:p>
+            <a:pPr indent="0" marL="0">
+              <a:buNone/>
+            </a:pPr>
+            <a:r>
+              <a:rPr lang="en-US" sz="1050" dirty="0">
+                <a:solidFill>
+                  <a:srgbClr val="3F3F3F"/>
+                </a:solidFill>
+                <a:latin typeface="Malgun Gothic" pitchFamily="34" charset="0"/>
+                <a:ea typeface="Malgun Gothic" pitchFamily="34" charset="-122"/>
+                <a:cs typeface="Malgun Gothic" pitchFamily="34" charset="-120"/>
+              </a:rPr>
+              <a:t>Insight: 조직개편(4월) 이후 방문·PM건수가 개편 전 대비 각각 19%, 19% 증가했고 예방정비 지수도 소폭 개선(+2.1%p)되어 예방 중심 활동이 늘었습니다. 6월은 PM건수가 전년 동월 대비 +80.8% 급증(전체 활동 최고치)한 반면 수리건수 증가(+42.4%)는 상대적으로 완만해, 예방점검 확대 효과로 해석됩니다.</a:t>
+            </a:r>
+            <a:endParaRPr lang="en-US" sz="1050" dirty="0"/>
+          </a:p>
+        </p:txBody>
+      </p:sp>
+      <p:sp>
+        <p:nvSpPr>
+          <p:cNvPr id="15" name="Text 9"/>
+          <p:cNvSpPr/>
+          <p:nvPr/>
+        </p:nvSpPr>
+        <p:spPr>
+          <a:xfrm>
+            <a:off x="457200" y="6547104"/>
+            <a:ext cx="9601200" cy="274320"/>
+          </a:xfrm>
+          <a:prstGeom prst="rect">
+            <a:avLst/>
+          </a:prstGeom>
+          <a:noFill/>
+          <a:ln/>
+        </p:spPr>
+        <p:txBody>
+          <a:bodyPr wrap="square" rtlCol="0" anchor="ctr"/>
+          <a:lstStyle/>
+          <a:p>
+            <a:pPr algn="l" indent="0" marL="0">
+              <a:buNone/>
+            </a:pPr>
+            <a:r>
+              <a:rPr lang="en-US" sz="900" dirty="0">
+                <a:solidFill>
+                  <a:srgbClr val="9E9E9E"/>
+                </a:solidFill>
+                <a:latin typeface="Malgun Gothic" pitchFamily="34" charset="0"/>
+                <a:ea typeface="Malgun Gothic" pitchFamily="34" charset="-122"/>
+                <a:cs typeface="Malgun Gothic" pitchFamily="34" charset="-120"/>
+              </a:rPr>
+              <a:t>FS Group │ FSS Team · 2026년 7월 · Confidential</a:t>
+            </a:r>
+            <a:endParaRPr lang="en-US" sz="900" dirty="0"/>
+          </a:p>
+        </p:txBody>
+      </p:sp>
+      <p:sp>
+        <p:nvSpPr>
+          <p:cNvPr id="16" name="Text 10"/>
+          <p:cNvSpPr/>
+          <p:nvPr/>
+        </p:nvSpPr>
+        <p:spPr>
+          <a:xfrm>
+            <a:off x="11247120" y="6547104"/>
+            <a:ext cx="731520" cy="274320"/>
+          </a:xfrm>
+          <a:prstGeom prst="rect">
+            <a:avLst/>
+          </a:prstGeom>
+          <a:noFill/>
+          <a:ln/>
+        </p:spPr>
+        <p:txBody>
+          <a:bodyPr wrap="square" rtlCol="0" anchor="ctr"/>
+          <a:lstStyle/>
+          <a:p>
+            <a:pPr algn="r" indent="0" marL="0">
+              <a:buNone/>
+            </a:pPr>
+            <a:r>
+              <a:rPr lang="en-US" sz="900" dirty="0">
+                <a:solidFill>
+                  <a:srgbClr val="9E9E9E"/>
+                </a:solidFill>
+                <a:latin typeface="Arial" pitchFamily="34" charset="0"/>
+                <a:ea typeface="Arial" pitchFamily="34" charset="-122"/>
+                <a:cs typeface="Arial" pitchFamily="34" charset="-120"/>
+              </a:rPr>
+              <a:t>6</a:t>
+            </a:r>
+            <a:endParaRPr lang="en-US" sz="900" dirty="0"/>
+          </a:p>
+        </p:txBody>
+      </p:sp>
+    </p:spTree>
+  </p:cSld>
+  <p:clrMapOvr>
+    <a:masterClrMapping/>
+  </p:clrMapOvr>
+</p:sld>
+</file>
+
+<file path=ppt/slides/slide7.xml><?xml version="1.0" encoding="utf-8"?>
+<p:sld xmlns:a="http://schemas.openxmlformats.org/drawingml/2006/main" xmlns:r="http://schemas.openxmlformats.org/officeDocument/2006/relationships" xmlns:p="http://schemas.openxmlformats.org/presentationml/2006/main">
+  <p:cSld name="Slide 7">
+    <p:bg>
+      <p:bgPr>
+        <a:solidFill>
+          <a:srgbClr val="FFFFFF"/>
+        </a:solidFill>
+      </p:bgPr>
+    </p:bg>
+    <p:spTree>
+      <p:nvGrpSpPr>
+        <p:cNvPr id="1" name=""/>
+        <p:cNvGrpSpPr/>
+        <p:nvPr/>
+      </p:nvGrpSpPr>
+      <p:grpSpPr>
+        <a:xfrm>
+          <a:off x="0" y="0"/>
+          <a:ext cx="0" cy="0"/>
+          <a:chOff x="0" y="0"/>
+          <a:chExt cx="0" cy="0"/>
+        </a:xfrm>
+      </p:grpSpPr>
+      <p:sp>
+        <p:nvSpPr>
+          <p:cNvPr id="2" name="Shape 0"/>
+          <p:cNvSpPr/>
+          <p:nvPr/>
+        </p:nvSpPr>
+        <p:spPr>
+          <a:xfrm>
+            <a:off x="0" y="0"/>
+            <a:ext cx="10378440" cy="914400"/>
+          </a:xfrm>
+          <a:prstGeom prst="rect">
+            <a:avLst/>
+          </a:prstGeom>
+          <a:solidFill>
+            <a:srgbClr val="005BAC"/>
+          </a:solidFill>
+          <a:ln/>
+        </p:spPr>
+      </p:sp>
+      <p:sp>
+        <p:nvSpPr>
+          <p:cNvPr id="3" name="Text 1"/>
+          <p:cNvSpPr/>
+          <p:nvPr/>
+        </p:nvSpPr>
+        <p:spPr>
+          <a:xfrm>
+            <a:off x="502920" y="164592"/>
+            <a:ext cx="822960" cy="585216"/>
+          </a:xfrm>
+          <a:prstGeom prst="rect">
+            <a:avLst/>
+          </a:prstGeom>
+          <a:noFill/>
+          <a:ln/>
+        </p:spPr>
+        <p:txBody>
+          <a:bodyPr wrap="square" lIns="0" tIns="0" rIns="0" bIns="0" rtlCol="0" anchor="ctr"/>
+          <a:lstStyle/>
+          <a:p>
+            <a:pPr algn="l" indent="0" marL="0">
+              <a:buNone/>
+            </a:pPr>
+            <a:r>
+              <a:rPr lang="en-US" sz="3000" b="1" dirty="0">
+                <a:solidFill>
+                  <a:srgbClr val="00B8EE"/>
+                </a:solidFill>
+                <a:latin typeface="Arial" pitchFamily="34" charset="0"/>
+                <a:ea typeface="Arial" pitchFamily="34" charset="-122"/>
+                <a:cs typeface="Arial" pitchFamily="34" charset="-120"/>
+              </a:rPr>
+              <a:t>07</a:t>
+            </a:r>
+            <a:endParaRPr lang="en-US" sz="3000" dirty="0"/>
+          </a:p>
+        </p:txBody>
+      </p:sp>
+      <p:sp>
+        <p:nvSpPr>
+          <p:cNvPr id="4" name="Text 2"/>
+          <p:cNvSpPr/>
+          <p:nvPr/>
+        </p:nvSpPr>
+        <p:spPr>
+          <a:xfrm>
+            <a:off x="1234440" y="164592"/>
+            <a:ext cx="8595360" cy="585216"/>
+          </a:xfrm>
+          <a:prstGeom prst="rect">
+            <a:avLst/>
+          </a:prstGeom>
+          <a:noFill/>
+          <a:ln/>
+        </p:spPr>
+        <p:txBody>
+          <a:bodyPr wrap="square" lIns="0" tIns="0" rIns="0" bIns="0" rtlCol="0" anchor="ctr"/>
+          <a:lstStyle/>
+          <a:p>
+            <a:pPr algn="l" indent="0" marL="0">
+              <a:buNone/>
+            </a:pPr>
+            <a:r>
+              <a:rPr lang="en-US" sz="2600" b="1" dirty="0">
+                <a:solidFill>
+                  <a:srgbClr val="FFFFFF"/>
+                </a:solidFill>
+                <a:latin typeface="Malgun Gothic" pitchFamily="34" charset="0"/>
+                <a:ea typeface="Malgun Gothic" pitchFamily="34" charset="-122"/>
+                <a:cs typeface="Malgun Gothic" pitchFamily="34" charset="-120"/>
+              </a:rPr>
               <a:t>주요 고객 및 장애 분석</a:t>
             </a:r>
             <a:endParaRPr lang="en-US" sz="2600" dirty="0"/>
@@ -13998,7 +19861,7 @@
       </p:sp>
       <p:graphicFrame>
         <p:nvGraphicFramePr>
-          <p:cNvPr id="7" name="Table 0"/>
+          <p:cNvPr id="8" name="Table 0"/>
           <p:cNvGraphicFramePr>
             <a:graphicFrameLocks noGrp="1"/>
           </p:cNvGraphicFramePr>
@@ -15304,7 +21167,7 @@
       </p:sp>
       <p:graphicFrame>
         <p:nvGraphicFramePr>
-          <p:cNvPr id="13" name="Table 1"/>
+          <p:cNvPr id="15" name="Table 1"/>
           <p:cNvGraphicFramePr>
             <a:graphicFrameLocks noGrp="1"/>
           </p:cNvGraphicFramePr>
@@ -18716,7 +24579,7 @@
                 <a:ea typeface="Arial" pitchFamily="34" charset="-122"/>
                 <a:cs typeface="Arial" pitchFamily="34" charset="-120"/>
               </a:rPr>
-              <a:t>6</a:t>
+              <a:t>7</a:t>
             </a:r>
             <a:endParaRPr lang="en-US" sz="900" dirty="0"/>
           </a:p>
@@ -18730,9 +24593,9 @@
 </p:sld>
 </file>
 
-<file path=ppt/slides/slide7.xml><?xml version="1.0" encoding="utf-8"?>
+<file path=ppt/slides/slide8.xml><?xml version="1.0" encoding="utf-8"?>
 <p:sld xmlns:a="http://schemas.openxmlformats.org/drawingml/2006/main" xmlns:r="http://schemas.openxmlformats.org/officeDocument/2006/relationships" xmlns:p="http://schemas.openxmlformats.org/presentationml/2006/main">
-  <p:cSld name="Slide 7">
+  <p:cSld name="Slide 8">
     <p:bg>
       <p:bgPr>
         <a:solidFill>
@@ -18807,7 +24670,7 @@
                 <a:ea typeface="Arial" pitchFamily="34" charset="-122"/>
                 <a:cs typeface="Arial" pitchFamily="34" charset="-120"/>
               </a:rPr>
-              <a:t>07</a:t>
+              <a:t>08</a:t>
             </a:r>
             <a:endParaRPr lang="en-US" sz="3000" dirty="0"/>
           </a:p>
@@ -18917,7 +24780,7 @@
       </p:sp>
       <p:graphicFrame>
         <p:nvGraphicFramePr>
-          <p:cNvPr id="8" name="Table 0"/>
+          <p:cNvPr id="9" name="Table 0"/>
           <p:cNvGraphicFramePr>
             <a:graphicFrameLocks noGrp="1"/>
           </p:cNvGraphicFramePr>
@@ -20881,7 +26744,7 @@
                 <a:ea typeface="Arial" pitchFamily="34" charset="-122"/>
                 <a:cs typeface="Arial" pitchFamily="34" charset="-120"/>
               </a:rPr>
-              <a:t>7</a:t>
+              <a:t>8</a:t>
             </a:r>
             <a:endParaRPr lang="en-US" sz="900" dirty="0"/>
           </a:p>
@@ -20895,9 +26758,9 @@
 </p:sld>
 </file>
 
-<file path=ppt/slides/slide8.xml><?xml version="1.0" encoding="utf-8"?>
+<file path=ppt/slides/slide9.xml><?xml version="1.0" encoding="utf-8"?>
 <p:sld xmlns:a="http://schemas.openxmlformats.org/drawingml/2006/main" xmlns:r="http://schemas.openxmlformats.org/officeDocument/2006/relationships" xmlns:p="http://schemas.openxmlformats.org/presentationml/2006/main">
-  <p:cSld name="Slide 8">
+  <p:cSld name="Slide 9">
     <p:bg>
       <p:bgPr>
         <a:solidFill>
@@ -20972,7 +26835,7 @@
                 <a:ea typeface="Arial" pitchFamily="34" charset="-122"/>
                 <a:cs typeface="Arial" pitchFamily="34" charset="-120"/>
               </a:rPr>
-              <a:t>08</a:t>
+              <a:t>09</a:t>
             </a:r>
             <a:endParaRPr lang="en-US" sz="3000" dirty="0"/>
           </a:p>
@@ -21421,7 +27284,7 @@
       </p:sp>
       <p:graphicFrame>
         <p:nvGraphicFramePr>
-          <p:cNvPr id="9" name="Table 0"/>
+          <p:cNvPr id="10" name="Table 0"/>
           <p:cNvGraphicFramePr>
             <a:graphicFrameLocks noGrp="1"/>
           </p:cNvGraphicFramePr>
@@ -22322,443 +28185,6 @@
       <p:sp>
         <p:nvSpPr>
           <p:cNvPr id="20" name="Text 16"/>
-          <p:cNvSpPr/>
-          <p:nvPr/>
-        </p:nvSpPr>
-        <p:spPr>
-          <a:xfrm>
-            <a:off x="11247120" y="6547104"/>
-            <a:ext cx="731520" cy="274320"/>
-          </a:xfrm>
-          <a:prstGeom prst="rect">
-            <a:avLst/>
-          </a:prstGeom>
-          <a:noFill/>
-          <a:ln/>
-        </p:spPr>
-        <p:txBody>
-          <a:bodyPr wrap="square" rtlCol="0" anchor="ctr"/>
-          <a:lstStyle/>
-          <a:p>
-            <a:pPr algn="r" indent="0" marL="0">
-              <a:buNone/>
-            </a:pPr>
-            <a:r>
-              <a:rPr lang="en-US" sz="900" dirty="0">
-                <a:solidFill>
-                  <a:srgbClr val="9E9E9E"/>
-                </a:solidFill>
-                <a:latin typeface="Arial" pitchFamily="34" charset="0"/>
-                <a:ea typeface="Arial" pitchFamily="34" charset="-122"/>
-                <a:cs typeface="Arial" pitchFamily="34" charset="-120"/>
-              </a:rPr>
-              <a:t>8</a:t>
-            </a:r>
-            <a:endParaRPr lang="en-US" sz="900" dirty="0"/>
-          </a:p>
-        </p:txBody>
-      </p:sp>
-    </p:spTree>
-  </p:cSld>
-  <p:clrMapOvr>
-    <a:masterClrMapping/>
-  </p:clrMapOvr>
-</p:sld>
-</file>
-
-<file path=ppt/slides/slide9.xml><?xml version="1.0" encoding="utf-8"?>
-<p:sld xmlns:a="http://schemas.openxmlformats.org/drawingml/2006/main" xmlns:r="http://schemas.openxmlformats.org/officeDocument/2006/relationships" xmlns:p="http://schemas.openxmlformats.org/presentationml/2006/main">
-  <p:cSld name="Slide 9">
-    <p:bg>
-      <p:bgPr>
-        <a:solidFill>
-          <a:srgbClr val="FFFFFF"/>
-        </a:solidFill>
-      </p:bgPr>
-    </p:bg>
-    <p:spTree>
-      <p:nvGrpSpPr>
-        <p:cNvPr id="1" name=""/>
-        <p:cNvGrpSpPr/>
-        <p:nvPr/>
-      </p:nvGrpSpPr>
-      <p:grpSpPr>
-        <a:xfrm>
-          <a:off x="0" y="0"/>
-          <a:ext cx="0" cy="0"/>
-          <a:chOff x="0" y="0"/>
-          <a:chExt cx="0" cy="0"/>
-        </a:xfrm>
-      </p:grpSpPr>
-      <p:sp>
-        <p:nvSpPr>
-          <p:cNvPr id="2" name="Shape 0"/>
-          <p:cNvSpPr/>
-          <p:nvPr/>
-        </p:nvSpPr>
-        <p:spPr>
-          <a:xfrm>
-            <a:off x="0" y="0"/>
-            <a:ext cx="10378440" cy="914400"/>
-          </a:xfrm>
-          <a:prstGeom prst="rect">
-            <a:avLst/>
-          </a:prstGeom>
-          <a:solidFill>
-            <a:srgbClr val="005BAC"/>
-          </a:solidFill>
-          <a:ln/>
-        </p:spPr>
-      </p:sp>
-      <p:sp>
-        <p:nvSpPr>
-          <p:cNvPr id="3" name="Text 1"/>
-          <p:cNvSpPr/>
-          <p:nvPr/>
-        </p:nvSpPr>
-        <p:spPr>
-          <a:xfrm>
-            <a:off x="502920" y="164592"/>
-            <a:ext cx="822960" cy="585216"/>
-          </a:xfrm>
-          <a:prstGeom prst="rect">
-            <a:avLst/>
-          </a:prstGeom>
-          <a:noFill/>
-          <a:ln/>
-        </p:spPr>
-        <p:txBody>
-          <a:bodyPr wrap="square" lIns="0" tIns="0" rIns="0" bIns="0" rtlCol="0" anchor="ctr"/>
-          <a:lstStyle/>
-          <a:p>
-            <a:pPr algn="l" indent="0" marL="0">
-              <a:buNone/>
-            </a:pPr>
-            <a:r>
-              <a:rPr lang="en-US" sz="3000" b="1" dirty="0">
-                <a:solidFill>
-                  <a:srgbClr val="00B8EE"/>
-                </a:solidFill>
-                <a:latin typeface="Arial" pitchFamily="34" charset="0"/>
-                <a:ea typeface="Arial" pitchFamily="34" charset="-122"/>
-                <a:cs typeface="Arial" pitchFamily="34" charset="-120"/>
-              </a:rPr>
-              <a:t>09</a:t>
-            </a:r>
-            <a:endParaRPr lang="en-US" sz="3000" dirty="0"/>
-          </a:p>
-        </p:txBody>
-      </p:sp>
-      <p:sp>
-        <p:nvSpPr>
-          <p:cNvPr id="4" name="Text 2"/>
-          <p:cNvSpPr/>
-          <p:nvPr/>
-        </p:nvSpPr>
-        <p:spPr>
-          <a:xfrm>
-            <a:off x="1234440" y="164592"/>
-            <a:ext cx="8595360" cy="585216"/>
-          </a:xfrm>
-          <a:prstGeom prst="rect">
-            <a:avLst/>
-          </a:prstGeom>
-          <a:noFill/>
-          <a:ln/>
-        </p:spPr>
-        <p:txBody>
-          <a:bodyPr wrap="square" lIns="0" tIns="0" rIns="0" bIns="0" rtlCol="0" anchor="ctr"/>
-          <a:lstStyle/>
-          <a:p>
-            <a:pPr algn="l" indent="0" marL="0">
-              <a:buNone/>
-            </a:pPr>
-            <a:r>
-              <a:rPr lang="en-US" sz="2600" b="1" dirty="0">
-                <a:solidFill>
-                  <a:srgbClr val="FFFFFF"/>
-                </a:solidFill>
-                <a:latin typeface="Malgun Gothic" pitchFamily="34" charset="0"/>
-                <a:ea typeface="Malgun Gothic" pitchFamily="34" charset="-122"/>
-                <a:cs typeface="Malgun Gothic" pitchFamily="34" charset="-120"/>
-              </a:rPr>
-              <a:t>중대 이슈 처리</a:t>
-            </a:r>
-            <a:endParaRPr lang="en-US" sz="2600" dirty="0"/>
-          </a:p>
-        </p:txBody>
-      </p:sp>
-      <p:pic>
-        <p:nvPicPr>
-          <p:cNvPr id="5" name="Image 0" descr="sysmex_logo_mono_blue.png">    </p:cNvPr>
-          <p:cNvPicPr>
-            <a:picLocks noChangeAspect="1"/>
-          </p:cNvPicPr>
-          <p:nvPr/>
-        </p:nvPicPr>
-        <p:blipFill>
-          <a:blip r:embed="rId1"/>
-          <a:stretch>
-            <a:fillRect/>
-          </a:stretch>
-        </p:blipFill>
-        <p:spPr>
-          <a:xfrm>
-            <a:off x="10652760" y="292608"/>
-            <a:ext cx="1097280" cy="420624"/>
-          </a:xfrm>
-          <a:prstGeom prst="rect">
-            <a:avLst/>
-          </a:prstGeom>
-        </p:spPr>
-      </p:pic>
-      <p:sp>
-        <p:nvSpPr>
-          <p:cNvPr id="6" name="Shape 3"/>
-          <p:cNvSpPr/>
-          <p:nvPr/>
-        </p:nvSpPr>
-        <p:spPr>
-          <a:xfrm>
-            <a:off x="530352" y="1143000"/>
-            <a:ext cx="11100816" cy="777240"/>
-          </a:xfrm>
-          <a:prstGeom prst="roundRect">
-            <a:avLst>
-              <a:gd name="adj" fmla="val 7059"/>
-            </a:avLst>
-          </a:prstGeom>
-          <a:solidFill>
-            <a:srgbClr val="E6EEF7"/>
-          </a:solidFill>
-          <a:ln/>
-        </p:spPr>
-      </p:sp>
-      <p:sp>
-        <p:nvSpPr>
-          <p:cNvPr id="7" name="Text 4"/>
-          <p:cNvSpPr/>
-          <p:nvPr/>
-        </p:nvSpPr>
-        <p:spPr>
-          <a:xfrm>
-            <a:off x="713232" y="1225296"/>
-            <a:ext cx="2926080" cy="320040"/>
-          </a:xfrm>
-          <a:prstGeom prst="rect">
-            <a:avLst/>
-          </a:prstGeom>
-          <a:noFill/>
-          <a:ln/>
-        </p:spPr>
-        <p:txBody>
-          <a:bodyPr wrap="square" lIns="0" tIns="0" rIns="0" bIns="0" rtlCol="0" anchor="ctr"/>
-          <a:lstStyle/>
-          <a:p>
-            <a:pPr indent="0" marL="0">
-              <a:buNone/>
-            </a:pPr>
-            <a:r>
-              <a:rPr lang="en-US" sz="1200" b="1" dirty="0">
-                <a:solidFill>
-                  <a:srgbClr val="005BAC"/>
-                </a:solidFill>
-                <a:latin typeface="Malgun Gothic" pitchFamily="34" charset="0"/>
-                <a:ea typeface="Malgun Gothic" pitchFamily="34" charset="-122"/>
-                <a:cs typeface="Malgun Gothic" pitchFamily="34" charset="-120"/>
-              </a:rPr>
-              <a:t>VOC 레드 플래그 시스템</a:t>
-            </a:r>
-            <a:endParaRPr lang="en-US" sz="1200" dirty="0"/>
-          </a:p>
-        </p:txBody>
-      </p:sp>
-      <p:sp>
-        <p:nvSpPr>
-          <p:cNvPr id="8" name="Text 5"/>
-          <p:cNvSpPr/>
-          <p:nvPr/>
-        </p:nvSpPr>
-        <p:spPr>
-          <a:xfrm>
-            <a:off x="713232" y="1536192"/>
-            <a:ext cx="10789920" cy="320040"/>
-          </a:xfrm>
-          <a:prstGeom prst="rect">
-            <a:avLst/>
-          </a:prstGeom>
-          <a:noFill/>
-          <a:ln/>
-        </p:spPr>
-        <p:txBody>
-          <a:bodyPr wrap="square" lIns="0" tIns="0" rIns="0" bIns="0" rtlCol="0" anchor="ctr"/>
-          <a:lstStyle/>
-          <a:p>
-            <a:pPr indent="0" marL="0">
-              <a:buNone/>
-            </a:pPr>
-            <a:r>
-              <a:rPr lang="en-US" sz="1100" dirty="0">
-                <a:solidFill>
-                  <a:srgbClr val="3F3F3F"/>
-                </a:solidFill>
-                <a:latin typeface="Malgun Gothic" pitchFamily="34" charset="0"/>
-                <a:ea typeface="Malgun Gothic" pitchFamily="34" charset="-122"/>
-                <a:cs typeface="Malgun Gothic" pitchFamily="34" charset="-120"/>
-              </a:rPr>
-              <a:t>평가 2점 이하 또는 서술형 "심각" 분류 건을 즉시 감지 → 분야별 전문가 TFT 구성 → SLA(1차 컨택 24~48시간) 내 처리하여 신뢰 회복</a:t>
-            </a:r>
-            <a:endParaRPr lang="en-US" sz="1100" dirty="0"/>
-          </a:p>
-        </p:txBody>
-      </p:sp>
-      <p:sp>
-        <p:nvSpPr>
-          <p:cNvPr id="9" name="Text 6"/>
-          <p:cNvSpPr/>
-          <p:nvPr/>
-        </p:nvSpPr>
-        <p:spPr>
-          <a:xfrm>
-            <a:off x="530352" y="2103120"/>
-            <a:ext cx="7315200" cy="320040"/>
-          </a:xfrm>
-          <a:prstGeom prst="rect">
-            <a:avLst/>
-          </a:prstGeom>
-          <a:noFill/>
-          <a:ln/>
-        </p:spPr>
-        <p:txBody>
-          <a:bodyPr wrap="square" lIns="0" tIns="0" rIns="0" bIns="0" rtlCol="0" anchor="ctr"/>
-          <a:lstStyle/>
-          <a:p>
-            <a:pPr indent="0" marL="0">
-              <a:buNone/>
-            </a:pPr>
-            <a:r>
-              <a:rPr lang="en-US" sz="1400" b="1" dirty="0">
-                <a:solidFill>
-                  <a:srgbClr val="005BAC"/>
-                </a:solidFill>
-                <a:latin typeface="Malgun Gothic" pitchFamily="34" charset="0"/>
-                <a:ea typeface="Malgun Gothic" pitchFamily="34" charset="-122"/>
-                <a:cs typeface="Malgun Gothic" pitchFamily="34" charset="-120"/>
-              </a:rPr>
-              <a:t>접수 · 조치 · 종결 현황</a:t>
-            </a:r>
-            <a:endParaRPr lang="en-US" sz="1400" dirty="0"/>
-          </a:p>
-        </p:txBody>
-      </p:sp>
-      <p:sp>
-        <p:nvSpPr>
-          <p:cNvPr id="10" name="Shape 7"/>
-          <p:cNvSpPr/>
-          <p:nvPr/>
-        </p:nvSpPr>
-        <p:spPr>
-          <a:xfrm>
-            <a:off x="530352" y="2468880"/>
-            <a:ext cx="11100816" cy="3200400"/>
-          </a:xfrm>
-          <a:prstGeom prst="roundRect">
-            <a:avLst>
-              <a:gd name="adj" fmla="val 2286"/>
-            </a:avLst>
-          </a:prstGeom>
-          <a:solidFill>
-            <a:srgbClr val="E6EEF7"/>
-          </a:solidFill>
-          <a:ln w="9525">
-            <a:solidFill>
-              <a:srgbClr val="005BAC"/>
-            </a:solidFill>
-            <a:prstDash val="dash"/>
-          </a:ln>
-        </p:spPr>
-      </p:sp>
-      <p:sp>
-        <p:nvSpPr>
-          <p:cNvPr id="11" name="Text 8"/>
-          <p:cNvSpPr/>
-          <p:nvPr/>
-        </p:nvSpPr>
-        <p:spPr>
-          <a:xfrm>
-            <a:off x="530352" y="2468880"/>
-            <a:ext cx="11100816" cy="3200400"/>
-          </a:xfrm>
-          <a:prstGeom prst="rect">
-            <a:avLst/>
-          </a:prstGeom>
-          <a:noFill/>
-          <a:ln/>
-        </p:spPr>
-        <p:txBody>
-          <a:bodyPr wrap="square" lIns="0" tIns="0" rIns="0" bIns="0" rtlCol="0" anchor="ctr"/>
-          <a:lstStyle/>
-          <a:p>
-            <a:pPr algn="ctr" indent="0" marL="0">
-              <a:buNone/>
-            </a:pPr>
-            <a:r>
-              <a:rPr lang="en-US" sz="1600" i="1" dirty="0">
-                <a:solidFill>
-                  <a:srgbClr val="005BAC"/>
-                </a:solidFill>
-                <a:latin typeface="Malgun Gothic" pitchFamily="34" charset="0"/>
-                <a:ea typeface="Malgun Gothic" pitchFamily="34" charset="-122"/>
-                <a:cs typeface="Malgun Gothic" pitchFamily="34" charset="-120"/>
-              </a:rPr>
-              <a:t>자료 미제공 – 추후 업데이트</a:t>
-            </a:r>
-            <a:endParaRPr lang="en-US" sz="1600" dirty="0"/>
-          </a:p>
-        </p:txBody>
-      </p:sp>
-      <p:sp>
-        <p:nvSpPr>
-          <p:cNvPr id="12" name="Text 9"/>
-          <p:cNvSpPr/>
-          <p:nvPr/>
-        </p:nvSpPr>
-        <p:spPr>
-          <a:xfrm>
-            <a:off x="457200" y="6547104"/>
-            <a:ext cx="9601200" cy="274320"/>
-          </a:xfrm>
-          <a:prstGeom prst="rect">
-            <a:avLst/>
-          </a:prstGeom>
-          <a:noFill/>
-          <a:ln/>
-        </p:spPr>
-        <p:txBody>
-          <a:bodyPr wrap="square" rtlCol="0" anchor="ctr"/>
-          <a:lstStyle/>
-          <a:p>
-            <a:pPr algn="l" indent="0" marL="0">
-              <a:buNone/>
-            </a:pPr>
-            <a:r>
-              <a:rPr lang="en-US" sz="900" dirty="0">
-                <a:solidFill>
-                  <a:srgbClr val="9E9E9E"/>
-                </a:solidFill>
-                <a:latin typeface="Malgun Gothic" pitchFamily="34" charset="0"/>
-                <a:ea typeface="Malgun Gothic" pitchFamily="34" charset="-122"/>
-                <a:cs typeface="Malgun Gothic" pitchFamily="34" charset="-120"/>
-              </a:rPr>
-              <a:t>FS Group │ FSS Team · 2026년 7월 · Confidential</a:t>
-            </a:r>
-            <a:endParaRPr lang="en-US" sz="900" dirty="0"/>
-          </a:p>
-        </p:txBody>
-      </p:sp>
-      <p:sp>
-        <p:nvSpPr>
-          <p:cNvPr id="13" name="Text 10"/>
           <p:cNvSpPr/>
           <p:nvPr/>
         </p:nvSpPr>

--- a/reports/FSG_월간서비스보고_202607/FSG_월간서비스보고_202607.pptx
+++ b/reports/FSG_월간서비스보고_202607/FSG_월간서비스보고_202607.pptx
@@ -6892,7 +6892,7 @@
                 <a:ea typeface="Malgun Gothic" pitchFamily="34" charset="-122"/>
                 <a:cs typeface="Malgun Gothic" pitchFamily="34" charset="-120"/>
               </a:rPr>
-              <a:t>접수 · 조치 · 종결 현황</a:t>
+              <a:t>이번 기간 주요 처리 사례 — 3팀 협업 대응</a:t>
             </a:r>
             <a:endParaRPr lang="en-US" sz="1400" dirty="0"/>
           </a:p>
@@ -6907,11 +6907,337 @@
         <p:spPr>
           <a:xfrm>
             <a:off x="530352" y="2468880"/>
-            <a:ext cx="11100816" cy="3200400"/>
+            <a:ext cx="11100816" cy="2331720"/>
           </a:xfrm>
           <a:prstGeom prst="roundRect">
             <a:avLst>
-              <a:gd name="adj" fmla="val 2286"/>
+              <a:gd name="adj" fmla="val 2745"/>
+            </a:avLst>
+          </a:prstGeom>
+          <a:solidFill>
+            <a:srgbClr val="F5F8FC"/>
+          </a:solidFill>
+          <a:ln w="12700">
+            <a:solidFill>
+              <a:srgbClr val="E7413E"/>
+            </a:solidFill>
+            <a:prstDash val="solid"/>
+          </a:ln>
+        </p:spPr>
+      </p:sp>
+      <p:sp>
+        <p:nvSpPr>
+          <p:cNvPr id="11" name="Shape 8"/>
+          <p:cNvSpPr/>
+          <p:nvPr/>
+        </p:nvSpPr>
+        <p:spPr>
+          <a:xfrm>
+            <a:off x="713232" y="2615184"/>
+            <a:ext cx="3520440" cy="365760"/>
+          </a:xfrm>
+          <a:prstGeom prst="roundRect">
+            <a:avLst>
+              <a:gd name="adj" fmla="val 50000"/>
+            </a:avLst>
+          </a:prstGeom>
+          <a:solidFill>
+            <a:srgbClr val="E7413E"/>
+          </a:solidFill>
+          <a:ln/>
+        </p:spPr>
+      </p:sp>
+      <p:sp>
+        <p:nvSpPr>
+          <p:cNvPr id="12" name="Text 9"/>
+          <p:cNvSpPr/>
+          <p:nvPr/>
+        </p:nvSpPr>
+        <p:spPr>
+          <a:xfrm>
+            <a:off x="713232" y="2615184"/>
+            <a:ext cx="3520440" cy="365760"/>
+          </a:xfrm>
+          <a:prstGeom prst="rect">
+            <a:avLst/>
+          </a:prstGeom>
+          <a:noFill/>
+          <a:ln/>
+        </p:spPr>
+        <p:txBody>
+          <a:bodyPr wrap="square" lIns="0" tIns="0" rIns="0" bIns="0" rtlCol="0" anchor="ctr"/>
+          <a:lstStyle/>
+          <a:p>
+            <a:pPr algn="ctr" indent="0" marL="0">
+              <a:buNone/>
+            </a:pPr>
+            <a:r>
+              <a:rPr lang="en-US" sz="1050" b="1" dirty="0">
+                <a:solidFill>
+                  <a:srgbClr val="FFFFFF"/>
+                </a:solidFill>
+                <a:latin typeface="Malgun Gothic" pitchFamily="34" charset="0"/>
+                <a:ea typeface="Malgun Gothic" pitchFamily="34" charset="-122"/>
+                <a:cs typeface="Malgun Gothic" pitchFamily="34" charset="-120"/>
+              </a:rPr>
+              <a:t>경북대병원 · XN-9100 Host 연동 장애</a:t>
+            </a:r>
+            <a:endParaRPr lang="en-US" sz="1050" dirty="0"/>
+          </a:p>
+        </p:txBody>
+      </p:sp>
+      <p:sp>
+        <p:nvSpPr>
+          <p:cNvPr id="13" name="Text 10"/>
+          <p:cNvSpPr/>
+          <p:nvPr/>
+        </p:nvSpPr>
+        <p:spPr>
+          <a:xfrm>
+            <a:off x="713232" y="3090672"/>
+            <a:ext cx="10698480" cy="1600200"/>
+          </a:xfrm>
+          <a:prstGeom prst="rect">
+            <a:avLst/>
+          </a:prstGeom>
+          <a:noFill/>
+          <a:ln/>
+        </p:spPr>
+        <p:txBody>
+          <a:bodyPr wrap="square" lIns="0" tIns="0" rIns="0" bIns="0" rtlCol="0" anchor="t"/>
+          <a:lstStyle/>
+          <a:p>
+            <a:pPr indent="0" marL="0">
+              <a:lnSpc>
+                <a:spcPct val="120000"/>
+              </a:lnSpc>
+              <a:buNone/>
+            </a:pPr>
+            <a:r>
+              <a:rPr lang="en-US" sz="1050" b="1" dirty="0">
+                <a:solidFill>
+                  <a:srgbClr val="005BAC"/>
+                </a:solidFill>
+                <a:latin typeface="Malgun Gothic" pitchFamily="34" charset="0"/>
+                <a:ea typeface="Malgun Gothic" pitchFamily="34" charset="-122"/>
+                <a:cs typeface="Malgun Gothic" pitchFamily="34" charset="-120"/>
+              </a:rPr>
+              <a:t>증상: </a:t>
+            </a:r>
+            <a:pPr indent="0" marL="0">
+              <a:lnSpc>
+                <a:spcPct val="120000"/>
+              </a:lnSpc>
+              <a:buNone/>
+            </a:pPr>
+            <a:r>
+              <a:rPr lang="en-US" sz="1050" dirty="0">
+                <a:solidFill>
+                  <a:srgbClr val="3F3F3F"/>
+                </a:solidFill>
+                <a:latin typeface="Malgun Gothic" pitchFamily="34" charset="0"/>
+                <a:ea typeface="Malgun Gothic" pitchFamily="34" charset="-122"/>
+                <a:cs typeface="Malgun Gothic" pitchFamily="34" charset="-120"/>
+              </a:rPr>
+              <a:t>XN-9100 운영 중 Host Timeout 및 Host Data Error가 간헐적으로 발생하여 검사 지연 발생
+</a:t>
+            </a:r>
+            <a:pPr indent="0" marL="0">
+              <a:lnSpc>
+                <a:spcPct val="120000"/>
+              </a:lnSpc>
+              <a:buNone/>
+            </a:pPr>
+            <a:r>
+              <a:rPr lang="en-US" sz="1050" b="1" dirty="0">
+                <a:solidFill>
+                  <a:srgbClr val="005BAC"/>
+                </a:solidFill>
+                <a:latin typeface="Malgun Gothic" pitchFamily="34" charset="0"/>
+                <a:ea typeface="Malgun Gothic" pitchFamily="34" charset="-122"/>
+                <a:cs typeface="Malgun Gothic" pitchFamily="34" charset="-120"/>
+              </a:rPr>
+              <a:t>원인: </a:t>
+            </a:r>
+            <a:pPr indent="0" marL="0">
+              <a:lnSpc>
+                <a:spcPct val="120000"/>
+              </a:lnSpc>
+              <a:buNone/>
+            </a:pPr>
+            <a:r>
+              <a:rPr lang="en-US" sz="1050" dirty="0">
+                <a:solidFill>
+                  <a:srgbClr val="3F3F3F"/>
+                </a:solidFill>
+                <a:latin typeface="Malgun Gothic" pitchFamily="34" charset="0"/>
+                <a:ea typeface="Malgun Gothic" pitchFamily="34" charset="-122"/>
+                <a:cs typeface="Malgun Gothic" pitchFamily="34" charset="-120"/>
+              </a:rPr>
+              <a:t>ACK의 ENQ Delay Time 설정으로 인해 CT와 I/F Host 간 통신 과정에서 신호 순서 오류가 발생한 것으로 판단
+</a:t>
+            </a:r>
+            <a:pPr indent="0" marL="0">
+              <a:lnSpc>
+                <a:spcPct val="120000"/>
+              </a:lnSpc>
+              <a:buNone/>
+            </a:pPr>
+            <a:r>
+              <a:rPr lang="en-US" sz="1050" b="1" dirty="0">
+                <a:solidFill>
+                  <a:srgbClr val="005BAC"/>
+                </a:solidFill>
+                <a:latin typeface="Malgun Gothic" pitchFamily="34" charset="0"/>
+                <a:ea typeface="Malgun Gothic" pitchFamily="34" charset="-122"/>
+                <a:cs typeface="Malgun Gothic" pitchFamily="34" charset="-120"/>
+              </a:rPr>
+              <a:t>협업 대응: </a:t>
+            </a:r>
+            <a:pPr indent="0" marL="0">
+              <a:lnSpc>
+                <a:spcPct val="120000"/>
+              </a:lnSpc>
+              <a:buNone/>
+            </a:pPr>
+            <a:r>
+              <a:rPr lang="en-US" sz="1050" dirty="0">
+                <a:solidFill>
+                  <a:srgbClr val="3F3F3F"/>
+                </a:solidFill>
+                <a:latin typeface="Malgun Gothic" pitchFamily="34" charset="0"/>
+                <a:ea typeface="Malgun Gothic" pitchFamily="34" charset="-122"/>
+                <a:cs typeface="Malgun Gothic" pitchFamily="34" charset="-120"/>
+              </a:rPr>
+              <a:t>FS South(현장 대응) · FSS팀(장비 운영 및 시스템 소프트웨어 처리) · TLA팀(전산 관련 처리) 3개 팀 협업으로 원인 분석 및 조치
+</a:t>
+            </a:r>
+            <a:pPr indent="0" marL="0">
+              <a:lnSpc>
+                <a:spcPct val="120000"/>
+              </a:lnSpc>
+              <a:buNone/>
+            </a:pPr>
+            <a:r>
+              <a:rPr lang="en-US" sz="1050" b="1" dirty="0">
+                <a:solidFill>
+                  <a:srgbClr val="005BAC"/>
+                </a:solidFill>
+                <a:latin typeface="Malgun Gothic" pitchFamily="34" charset="0"/>
+                <a:ea typeface="Malgun Gothic" pitchFamily="34" charset="-122"/>
+                <a:cs typeface="Malgun Gothic" pitchFamily="34" charset="-120"/>
+              </a:rPr>
+              <a:t>결과: </a:t>
+            </a:r>
+            <a:pPr indent="0" marL="0">
+              <a:lnSpc>
+                <a:spcPct val="120000"/>
+              </a:lnSpc>
+              <a:buNone/>
+            </a:pPr>
+            <a:r>
+              <a:rPr lang="en-US" sz="1050" dirty="0">
+                <a:solidFill>
+                  <a:srgbClr val="3F3F3F"/>
+                </a:solidFill>
+                <a:latin typeface="Malgun Gothic" pitchFamily="34" charset="0"/>
+                <a:ea typeface="Malgun Gothic" pitchFamily="34" charset="-122"/>
+                <a:cs typeface="Malgun Gothic" pitchFamily="34" charset="-120"/>
+              </a:rPr>
+              <a:t>ENQ Delay Time(1sec) 설정 제거 후 Host Data Error 재발 없이 안정적으로 운영 중
+</a:t>
+            </a:r>
+            <a:pPr indent="0" marL="0">
+              <a:lnSpc>
+                <a:spcPct val="120000"/>
+              </a:lnSpc>
+              <a:buNone/>
+            </a:pPr>
+            <a:r>
+              <a:rPr lang="en-US" sz="1050" b="1" dirty="0">
+                <a:solidFill>
+                  <a:srgbClr val="005BAC"/>
+                </a:solidFill>
+                <a:latin typeface="Malgun Gothic" pitchFamily="34" charset="0"/>
+                <a:ea typeface="Malgun Gothic" pitchFamily="34" charset="-122"/>
+                <a:cs typeface="Malgun Gothic" pitchFamily="34" charset="-120"/>
+              </a:rPr>
+              <a:t>후속 조치: </a:t>
+            </a:r>
+            <a:pPr indent="0" marL="0">
+              <a:lnSpc>
+                <a:spcPct val="120000"/>
+              </a:lnSpc>
+              <a:buNone/>
+            </a:pPr>
+            <a:r>
+              <a:rPr lang="en-US" sz="1050" dirty="0">
+                <a:solidFill>
+                  <a:srgbClr val="3F3F3F"/>
+                </a:solidFill>
+                <a:latin typeface="Malgun Gothic" pitchFamily="34" charset="0"/>
+                <a:ea typeface="Malgun Gothic" pitchFamily="34" charset="-122"/>
+                <a:cs typeface="Malgun Gothic" pitchFamily="34" charset="-120"/>
+              </a:rPr>
+              <a:t>경북대병원 과장님께 현황 보고 및 CT-90 Version 00-42 업그레이드 진행, 지속 모니터링 예정</a:t>
+            </a:r>
+            <a:endParaRPr lang="en-US" sz="1050" dirty="0"/>
+          </a:p>
+        </p:txBody>
+      </p:sp>
+      <p:sp>
+        <p:nvSpPr>
+          <p:cNvPr id="14" name="Text 11"/>
+          <p:cNvSpPr/>
+          <p:nvPr/>
+        </p:nvSpPr>
+        <p:spPr>
+          <a:xfrm>
+            <a:off x="530352" y="4956048"/>
+            <a:ext cx="7315200" cy="274320"/>
+          </a:xfrm>
+          <a:prstGeom prst="rect">
+            <a:avLst/>
+          </a:prstGeom>
+          <a:noFill/>
+          <a:ln/>
+        </p:spPr>
+        <p:txBody>
+          <a:bodyPr wrap="square" lIns="0" tIns="0" rIns="0" bIns="0" rtlCol="0" anchor="ctr"/>
+          <a:lstStyle/>
+          <a:p>
+            <a:pPr indent="0" marL="0">
+              <a:buNone/>
+            </a:pPr>
+            <a:r>
+              <a:rPr lang="en-US" sz="1200" b="1" dirty="0">
+                <a:solidFill>
+                  <a:srgbClr val="005BAC"/>
+                </a:solidFill>
+                <a:latin typeface="Malgun Gothic" pitchFamily="34" charset="0"/>
+                <a:ea typeface="Malgun Gothic" pitchFamily="34" charset="-122"/>
+                <a:cs typeface="Malgun Gothic" pitchFamily="34" charset="-120"/>
+              </a:rPr>
+              <a:t>그 외 접수 · 조치 · 종결 건수 현황</a:t>
+            </a:r>
+            <a:endParaRPr lang="en-US" sz="1200" dirty="0"/>
+          </a:p>
+        </p:txBody>
+      </p:sp>
+      <p:sp>
+        <p:nvSpPr>
+          <p:cNvPr id="15" name="Shape 12"/>
+          <p:cNvSpPr/>
+          <p:nvPr/>
+        </p:nvSpPr>
+        <p:spPr>
+          <a:xfrm>
+            <a:off x="530352" y="5257800"/>
+            <a:ext cx="11100816" cy="1143000"/>
+          </a:xfrm>
+          <a:prstGeom prst="roundRect">
+            <a:avLst>
+              <a:gd name="adj" fmla="val 6400"/>
             </a:avLst>
           </a:prstGeom>
           <a:solidFill>
@@ -6927,14 +7253,14 @@
       </p:sp>
       <p:sp>
         <p:nvSpPr>
-          <p:cNvPr id="11" name="Text 8"/>
+          <p:cNvPr id="16" name="Text 13"/>
           <p:cNvSpPr/>
           <p:nvPr/>
         </p:nvSpPr>
         <p:spPr>
           <a:xfrm>
-            <a:off x="530352" y="2468880"/>
-            <a:ext cx="11100816" cy="3200400"/>
+            <a:off x="530352" y="5257800"/>
+            <a:ext cx="11100816" cy="1143000"/>
           </a:xfrm>
           <a:prstGeom prst="rect">
             <a:avLst/>
@@ -6966,7 +7292,7 @@
       </p:sp>
       <p:sp>
         <p:nvSpPr>
-          <p:cNvPr id="12" name="Text 9"/>
+          <p:cNvPr id="17" name="Text 14"/>
           <p:cNvSpPr/>
           <p:nvPr/>
         </p:nvSpPr>
@@ -7005,7 +7331,7 @@
       </p:sp>
       <p:sp>
         <p:nvSpPr>
-          <p:cNvPr id="13" name="Text 10"/>
+          <p:cNvPr id="18" name="Text 15"/>
           <p:cNvSpPr/>
           <p:nvPr/>
         </p:nvSpPr>
